--- a/PPT画图.pptx
+++ b/PPT画图.pptx
@@ -7,6 +7,7 @@
   <p:sldIdLst>
     <p:sldId id="257" r:id="rId2"/>
     <p:sldId id="258" r:id="rId3"/>
+    <p:sldId id="259" r:id="rId4"/>
   </p:sldIdLst>
   <p:sldSz cx="12192000" cy="6858000"/>
   <p:notesSz cx="6858000" cy="9144000"/>
@@ -105,6 +106,11 @@
       </a:defRPr>
     </a:lvl9pPr>
   </p:defaultTextStyle>
+  <p:extLst>
+    <p:ext uri="{EFAFB233-063F-42B5-8137-9DF3F51BA10A}">
+      <p15:sldGuideLst xmlns:p15="http://schemas.microsoft.com/office/powerpoint/2012/main"/>
+    </p:ext>
+  </p:extLst>
 </p:presentation>
 </file>
 
@@ -255,7 +261,7 @@
           <a:p>
             <a:fld id="{5D2E9D4A-569D-49DD-9DBB-BF425DFB68D5}" type="datetimeFigureOut">
               <a:rPr lang="zh-CN" altLang="en-US" smtClean="0"/>
-              <a:t>2026/01/14</a:t>
+              <a:t>2026/01/23</a:t>
             </a:fld>
             <a:endParaRPr lang="zh-CN" altLang="en-US"/>
           </a:p>
@@ -453,7 +459,7 @@
           <a:p>
             <a:fld id="{5D2E9D4A-569D-49DD-9DBB-BF425DFB68D5}" type="datetimeFigureOut">
               <a:rPr lang="zh-CN" altLang="en-US" smtClean="0"/>
-              <a:t>2026/01/14</a:t>
+              <a:t>2026/01/23</a:t>
             </a:fld>
             <a:endParaRPr lang="zh-CN" altLang="en-US"/>
           </a:p>
@@ -661,7 +667,7 @@
           <a:p>
             <a:fld id="{5D2E9D4A-569D-49DD-9DBB-BF425DFB68D5}" type="datetimeFigureOut">
               <a:rPr lang="zh-CN" altLang="en-US" smtClean="0"/>
-              <a:t>2026/01/14</a:t>
+              <a:t>2026/01/23</a:t>
             </a:fld>
             <a:endParaRPr lang="zh-CN" altLang="en-US"/>
           </a:p>
@@ -859,7 +865,7 @@
           <a:p>
             <a:fld id="{5D2E9D4A-569D-49DD-9DBB-BF425DFB68D5}" type="datetimeFigureOut">
               <a:rPr lang="zh-CN" altLang="en-US" smtClean="0"/>
-              <a:t>2026/01/14</a:t>
+              <a:t>2026/01/23</a:t>
             </a:fld>
             <a:endParaRPr lang="zh-CN" altLang="en-US"/>
           </a:p>
@@ -1134,7 +1140,7 @@
           <a:p>
             <a:fld id="{5D2E9D4A-569D-49DD-9DBB-BF425DFB68D5}" type="datetimeFigureOut">
               <a:rPr lang="zh-CN" altLang="en-US" smtClean="0"/>
-              <a:t>2026/01/14</a:t>
+              <a:t>2026/01/23</a:t>
             </a:fld>
             <a:endParaRPr lang="zh-CN" altLang="en-US"/>
           </a:p>
@@ -1399,7 +1405,7 @@
           <a:p>
             <a:fld id="{5D2E9D4A-569D-49DD-9DBB-BF425DFB68D5}" type="datetimeFigureOut">
               <a:rPr lang="zh-CN" altLang="en-US" smtClean="0"/>
-              <a:t>2026/01/14</a:t>
+              <a:t>2026/01/23</a:t>
             </a:fld>
             <a:endParaRPr lang="zh-CN" altLang="en-US"/>
           </a:p>
@@ -1811,7 +1817,7 @@
           <a:p>
             <a:fld id="{5D2E9D4A-569D-49DD-9DBB-BF425DFB68D5}" type="datetimeFigureOut">
               <a:rPr lang="zh-CN" altLang="en-US" smtClean="0"/>
-              <a:t>2026/01/14</a:t>
+              <a:t>2026/01/23</a:t>
             </a:fld>
             <a:endParaRPr lang="zh-CN" altLang="en-US"/>
           </a:p>
@@ -1952,7 +1958,7 @@
           <a:p>
             <a:fld id="{5D2E9D4A-569D-49DD-9DBB-BF425DFB68D5}" type="datetimeFigureOut">
               <a:rPr lang="zh-CN" altLang="en-US" smtClean="0"/>
-              <a:t>2026/01/14</a:t>
+              <a:t>2026/01/23</a:t>
             </a:fld>
             <a:endParaRPr lang="zh-CN" altLang="en-US"/>
           </a:p>
@@ -2065,7 +2071,7 @@
           <a:p>
             <a:fld id="{5D2E9D4A-569D-49DD-9DBB-BF425DFB68D5}" type="datetimeFigureOut">
               <a:rPr lang="zh-CN" altLang="en-US" smtClean="0"/>
-              <a:t>2026/01/14</a:t>
+              <a:t>2026/01/23</a:t>
             </a:fld>
             <a:endParaRPr lang="zh-CN" altLang="en-US"/>
           </a:p>
@@ -2376,7 +2382,7 @@
           <a:p>
             <a:fld id="{5D2E9D4A-569D-49DD-9DBB-BF425DFB68D5}" type="datetimeFigureOut">
               <a:rPr lang="zh-CN" altLang="en-US" smtClean="0"/>
-              <a:t>2026/01/14</a:t>
+              <a:t>2026/01/23</a:t>
             </a:fld>
             <a:endParaRPr lang="zh-CN" altLang="en-US"/>
           </a:p>
@@ -2664,7 +2670,7 @@
           <a:p>
             <a:fld id="{5D2E9D4A-569D-49DD-9DBB-BF425DFB68D5}" type="datetimeFigureOut">
               <a:rPr lang="zh-CN" altLang="en-US" smtClean="0"/>
-              <a:t>2026/01/14</a:t>
+              <a:t>2026/01/23</a:t>
             </a:fld>
             <a:endParaRPr lang="zh-CN" altLang="en-US"/>
           </a:p>
@@ -2905,7 +2911,7 @@
           <a:p>
             <a:fld id="{5D2E9D4A-569D-49DD-9DBB-BF425DFB68D5}" type="datetimeFigureOut">
               <a:rPr lang="zh-CN" altLang="en-US" smtClean="0"/>
-              <a:t>2026/01/14</a:t>
+              <a:t>2026/01/23</a:t>
             </a:fld>
             <a:endParaRPr lang="zh-CN" altLang="en-US"/>
           </a:p>
@@ -3429,8 +3435,8 @@
               </a:p>
             </p:txBody>
           </p:sp>
-          <mc:AlternateContent xmlns:mc="http://schemas.openxmlformats.org/markup-compatibility/2006">
-            <mc:Choice xmlns:a14="http://schemas.microsoft.com/office/drawing/2010/main" Requires="a14">
+          <mc:AlternateContent xmlns:mc="http://schemas.openxmlformats.org/markup-compatibility/2006" xmlns:a14="http://schemas.microsoft.com/office/drawing/2010/main">
+            <mc:Choice Requires="a14">
               <p:sp>
                 <p:nvSpPr>
                   <p:cNvPr id="11" name="文本框 10">
@@ -3540,7 +3546,7 @@
                 </p:txBody>
               </p:sp>
             </mc:Choice>
-            <mc:Fallback>
+            <mc:Fallback xmlns="">
               <p:sp>
                 <p:nvSpPr>
                   <p:cNvPr id="11" name="文本框 10">
@@ -3667,8 +3673,8 @@
               </a:p>
             </p:txBody>
           </p:sp>
-          <mc:AlternateContent xmlns:mc="http://schemas.openxmlformats.org/markup-compatibility/2006">
-            <mc:Choice xmlns:a14="http://schemas.microsoft.com/office/drawing/2010/main" Requires="a14">
+          <mc:AlternateContent xmlns:mc="http://schemas.openxmlformats.org/markup-compatibility/2006" xmlns:a14="http://schemas.microsoft.com/office/drawing/2010/main">
+            <mc:Choice Requires="a14">
               <p:sp>
                 <p:nvSpPr>
                   <p:cNvPr id="5" name="文本框 4">
@@ -3760,7 +3766,7 @@
                 </p:txBody>
               </p:sp>
             </mc:Choice>
-            <mc:Fallback>
+            <mc:Fallback xmlns="">
               <p:sp>
                 <p:nvSpPr>
                   <p:cNvPr id="5" name="文本框 4">
@@ -3806,8 +3812,8 @@
             </mc:Fallback>
           </mc:AlternateContent>
         </p:grpSp>
-        <mc:AlternateContent xmlns:mc="http://schemas.openxmlformats.org/markup-compatibility/2006">
-          <mc:Choice xmlns:a14="http://schemas.microsoft.com/office/drawing/2010/main" Requires="a14">
+        <mc:AlternateContent xmlns:mc="http://schemas.openxmlformats.org/markup-compatibility/2006" xmlns:a14="http://schemas.microsoft.com/office/drawing/2010/main">
+          <mc:Choice Requires="a14">
             <p:sp>
               <p:nvSpPr>
                 <p:cNvPr id="13" name="文本框 12">
@@ -3943,7 +3949,7 @@
               </p:txBody>
             </p:sp>
           </mc:Choice>
-          <mc:Fallback>
+          <mc:Fallback xmlns="">
             <p:sp>
               <p:nvSpPr>
                 <p:cNvPr id="13" name="文本框 12">
@@ -4114,8 +4120,8 @@
               </a:p>
             </p:txBody>
           </p:sp>
-          <mc:AlternateContent xmlns:mc="http://schemas.openxmlformats.org/markup-compatibility/2006">
-            <mc:Choice xmlns:a14="http://schemas.microsoft.com/office/drawing/2010/main" Requires="a14">
+          <mc:AlternateContent xmlns:mc="http://schemas.openxmlformats.org/markup-compatibility/2006" xmlns:a14="http://schemas.microsoft.com/office/drawing/2010/main">
+            <mc:Choice Requires="a14">
               <p:sp>
                 <p:nvSpPr>
                   <p:cNvPr id="17" name="文本框 16">
@@ -4283,7 +4289,7 @@
                 </p:txBody>
               </p:sp>
             </mc:Choice>
-            <mc:Fallback>
+            <mc:Fallback xmlns="">
               <p:sp>
                 <p:nvSpPr>
                   <p:cNvPr id="17" name="文本框 16">
@@ -4409,8 +4415,8 @@
               </a:p>
             </p:txBody>
           </p:sp>
-          <mc:AlternateContent xmlns:mc="http://schemas.openxmlformats.org/markup-compatibility/2006">
-            <mc:Choice xmlns:a14="http://schemas.microsoft.com/office/drawing/2010/main" Requires="a14">
+          <mc:AlternateContent xmlns:mc="http://schemas.openxmlformats.org/markup-compatibility/2006" xmlns:a14="http://schemas.microsoft.com/office/drawing/2010/main">
+            <mc:Choice Requires="a14">
               <p:sp>
                 <p:nvSpPr>
                   <p:cNvPr id="23" name="文本框 22">
@@ -4490,7 +4496,7 @@
                 </p:txBody>
               </p:sp>
             </mc:Choice>
-            <mc:Fallback>
+            <mc:Fallback xmlns="">
               <p:sp>
                 <p:nvSpPr>
                   <p:cNvPr id="23" name="文本框 22">
@@ -4707,8 +4713,8 @@
               </a:p>
             </p:txBody>
           </p:sp>
-          <mc:AlternateContent xmlns:mc="http://schemas.openxmlformats.org/markup-compatibility/2006">
-            <mc:Choice xmlns:a14="http://schemas.microsoft.com/office/drawing/2010/main" Requires="a14">
+          <mc:AlternateContent xmlns:mc="http://schemas.openxmlformats.org/markup-compatibility/2006" xmlns:a14="http://schemas.microsoft.com/office/drawing/2010/main">
+            <mc:Choice Requires="a14">
               <p:sp>
                 <p:nvSpPr>
                   <p:cNvPr id="32" name="文本框 31">
@@ -4918,7 +4924,7 @@
                         <m:sSubSup>
                           <m:sSubSupPr>
                             <m:ctrlPr>
-                              <a:rPr lang="en-US" altLang="zh-CN" b="1" i="0" smtClean="0">
+                              <a:rPr lang="en-US" altLang="zh-CN" b="1" i="1" smtClean="0">
                                 <a:solidFill>
                                   <a:schemeClr val="bg1"/>
                                 </a:solidFill>
@@ -4985,7 +4991,7 @@
                 </p:txBody>
               </p:sp>
             </mc:Choice>
-            <mc:Fallback>
+            <mc:Fallback xmlns="">
               <p:sp>
                 <p:nvSpPr>
                   <p:cNvPr id="32" name="文本框 31">
@@ -5076,8 +5082,8 @@
             </a:fontRef>
           </p:style>
         </p:cxnSp>
-        <mc:AlternateContent xmlns:mc="http://schemas.openxmlformats.org/markup-compatibility/2006">
-          <mc:Choice xmlns:a14="http://schemas.microsoft.com/office/drawing/2010/main" Requires="a14">
+        <mc:AlternateContent xmlns:mc="http://schemas.openxmlformats.org/markup-compatibility/2006" xmlns:a14="http://schemas.microsoft.com/office/drawing/2010/main">
+          <mc:Choice Requires="a14">
             <p:sp>
               <p:nvSpPr>
                 <p:cNvPr id="37" name="文本框 36">
@@ -5173,7 +5179,7 @@
               </p:txBody>
             </p:sp>
           </mc:Choice>
-          <mc:Fallback>
+          <mc:Fallback xmlns="">
             <p:sp>
               <p:nvSpPr>
                 <p:cNvPr id="37" name="文本框 36">
@@ -5443,8 +5449,8 @@
               </a:p>
             </p:txBody>
           </p:sp>
-          <mc:AlternateContent xmlns:mc="http://schemas.openxmlformats.org/markup-compatibility/2006">
-            <mc:Choice xmlns:a14="http://schemas.microsoft.com/office/drawing/2010/main" Requires="a14">
+          <mc:AlternateContent xmlns:mc="http://schemas.openxmlformats.org/markup-compatibility/2006" xmlns:a14="http://schemas.microsoft.com/office/drawing/2010/main">
+            <mc:Choice Requires="a14">
               <p:sp>
                 <p:nvSpPr>
                   <p:cNvPr id="11" name="文本框 10">
@@ -5554,7 +5560,7 @@
                 </p:txBody>
               </p:sp>
             </mc:Choice>
-            <mc:Fallback>
+            <mc:Fallback xmlns="">
               <p:sp>
                 <p:nvSpPr>
                   <p:cNvPr id="11" name="文本框 10">
@@ -5681,8 +5687,8 @@
               </a:p>
             </p:txBody>
           </p:sp>
-          <mc:AlternateContent xmlns:mc="http://schemas.openxmlformats.org/markup-compatibility/2006">
-            <mc:Choice xmlns:a14="http://schemas.microsoft.com/office/drawing/2010/main" Requires="a14">
+          <mc:AlternateContent xmlns:mc="http://schemas.openxmlformats.org/markup-compatibility/2006" xmlns:a14="http://schemas.microsoft.com/office/drawing/2010/main">
+            <mc:Choice Requires="a14">
               <p:sp>
                 <p:nvSpPr>
                   <p:cNvPr id="5" name="文本框 4">
@@ -5774,7 +5780,7 @@
                 </p:txBody>
               </p:sp>
             </mc:Choice>
-            <mc:Fallback>
+            <mc:Fallback xmlns="">
               <p:sp>
                 <p:nvSpPr>
                   <p:cNvPr id="5" name="文本框 4">
@@ -5820,8 +5826,8 @@
             </mc:Fallback>
           </mc:AlternateContent>
         </p:grpSp>
-        <mc:AlternateContent xmlns:mc="http://schemas.openxmlformats.org/markup-compatibility/2006">
-          <mc:Choice xmlns:a14="http://schemas.microsoft.com/office/drawing/2010/main" Requires="a14">
+        <mc:AlternateContent xmlns:mc="http://schemas.openxmlformats.org/markup-compatibility/2006" xmlns:a14="http://schemas.microsoft.com/office/drawing/2010/main">
+          <mc:Choice Requires="a14">
             <p:sp>
               <p:nvSpPr>
                 <p:cNvPr id="13" name="文本框 12">
@@ -5957,7 +5963,7 @@
               </p:txBody>
             </p:sp>
           </mc:Choice>
-          <mc:Fallback>
+          <mc:Fallback xmlns="">
             <p:sp>
               <p:nvSpPr>
                 <p:cNvPr id="13" name="文本框 12">
@@ -6128,8 +6134,8 @@
               </a:p>
             </p:txBody>
           </p:sp>
-          <mc:AlternateContent xmlns:mc="http://schemas.openxmlformats.org/markup-compatibility/2006">
-            <mc:Choice xmlns:a14="http://schemas.microsoft.com/office/drawing/2010/main" Requires="a14">
+          <mc:AlternateContent xmlns:mc="http://schemas.openxmlformats.org/markup-compatibility/2006" xmlns:a14="http://schemas.microsoft.com/office/drawing/2010/main">
+            <mc:Choice Requires="a14">
               <p:sp>
                 <p:nvSpPr>
                   <p:cNvPr id="17" name="文本框 16">
@@ -6297,7 +6303,7 @@
                 </p:txBody>
               </p:sp>
             </mc:Choice>
-            <mc:Fallback>
+            <mc:Fallback xmlns="">
               <p:sp>
                 <p:nvSpPr>
                   <p:cNvPr id="17" name="文本框 16">
@@ -6423,8 +6429,8 @@
               </a:p>
             </p:txBody>
           </p:sp>
-          <mc:AlternateContent xmlns:mc="http://schemas.openxmlformats.org/markup-compatibility/2006">
-            <mc:Choice xmlns:a14="http://schemas.microsoft.com/office/drawing/2010/main" Requires="a14">
+          <mc:AlternateContent xmlns:mc="http://schemas.openxmlformats.org/markup-compatibility/2006" xmlns:a14="http://schemas.microsoft.com/office/drawing/2010/main">
+            <mc:Choice Requires="a14">
               <p:sp>
                 <p:nvSpPr>
                   <p:cNvPr id="23" name="文本框 22">
@@ -6504,7 +6510,7 @@
                 </p:txBody>
               </p:sp>
             </mc:Choice>
-            <mc:Fallback>
+            <mc:Fallback xmlns="">
               <p:sp>
                 <p:nvSpPr>
                   <p:cNvPr id="23" name="文本框 22">
@@ -6721,8 +6727,8 @@
               </a:p>
             </p:txBody>
           </p:sp>
-          <mc:AlternateContent xmlns:mc="http://schemas.openxmlformats.org/markup-compatibility/2006">
-            <mc:Choice xmlns:a14="http://schemas.microsoft.com/office/drawing/2010/main" Requires="a14">
+          <mc:AlternateContent xmlns:mc="http://schemas.openxmlformats.org/markup-compatibility/2006" xmlns:a14="http://schemas.microsoft.com/office/drawing/2010/main">
+            <mc:Choice Requires="a14">
               <p:sp>
                 <p:nvSpPr>
                   <p:cNvPr id="32" name="文本框 31">
@@ -6932,7 +6938,7 @@
                         <m:sSubSup>
                           <m:sSubSupPr>
                             <m:ctrlPr>
-                              <a:rPr lang="en-US" altLang="zh-CN" b="1" i="0" smtClean="0">
+                              <a:rPr lang="en-US" altLang="zh-CN" b="1" i="1" smtClean="0">
                                 <a:solidFill>
                                   <a:schemeClr val="bg1"/>
                                 </a:solidFill>
@@ -6999,7 +7005,7 @@
                 </p:txBody>
               </p:sp>
             </mc:Choice>
-            <mc:Fallback>
+            <mc:Fallback xmlns="">
               <p:sp>
                 <p:nvSpPr>
                   <p:cNvPr id="32" name="文本框 31">
@@ -7090,8 +7096,8 @@
             </a:fontRef>
           </p:style>
         </p:cxnSp>
-        <mc:AlternateContent xmlns:mc="http://schemas.openxmlformats.org/markup-compatibility/2006">
-          <mc:Choice xmlns:a14="http://schemas.microsoft.com/office/drawing/2010/main" Requires="a14">
+        <mc:AlternateContent xmlns:mc="http://schemas.openxmlformats.org/markup-compatibility/2006" xmlns:a14="http://schemas.microsoft.com/office/drawing/2010/main">
+          <mc:Choice Requires="a14">
             <p:sp>
               <p:nvSpPr>
                 <p:cNvPr id="37" name="文本框 36">
@@ -7187,7 +7193,7 @@
               </p:txBody>
             </p:sp>
           </mc:Choice>
-          <mc:Fallback>
+          <mc:Fallback xmlns="">
             <p:sp>
               <p:nvSpPr>
                 <p:cNvPr id="37" name="文本框 36">
@@ -7324,6 +7330,3336 @@
     <p:extLst>
       <p:ext uri="{BB962C8B-B14F-4D97-AF65-F5344CB8AC3E}">
         <p14:creationId xmlns:p14="http://schemas.microsoft.com/office/powerpoint/2010/main" val="2290706734"/>
+      </p:ext>
+    </p:extLst>
+  </p:cSld>
+  <p:clrMapOvr>
+    <a:masterClrMapping/>
+  </p:clrMapOvr>
+</p:sld>
+</file>
+
+<file path=ppt/slides/slide3.xml><?xml version="1.0" encoding="utf-8"?>
+<p:sld xmlns:a="http://schemas.openxmlformats.org/drawingml/2006/main" xmlns:r="http://schemas.openxmlformats.org/officeDocument/2006/relationships" xmlns:p="http://schemas.openxmlformats.org/presentationml/2006/main">
+  <p:cSld>
+    <p:spTree>
+      <p:nvGrpSpPr>
+        <p:cNvPr id="1" name=""/>
+        <p:cNvGrpSpPr/>
+        <p:nvPr/>
+      </p:nvGrpSpPr>
+      <p:grpSpPr>
+        <a:xfrm>
+          <a:off x="0" y="0"/>
+          <a:ext cx="0" cy="0"/>
+          <a:chOff x="0" y="0"/>
+          <a:chExt cx="0" cy="0"/>
+        </a:xfrm>
+      </p:grpSpPr>
+      <p:grpSp>
+        <p:nvGrpSpPr>
+          <p:cNvPr id="109" name="组合 108">
+            <a:extLst>
+              <a:ext uri="{FF2B5EF4-FFF2-40B4-BE49-F238E27FC236}">
+                <a16:creationId xmlns:a16="http://schemas.microsoft.com/office/drawing/2014/main" id="{DAE7EFC4-BB32-22CF-B878-68A68FA633AE}"/>
+              </a:ext>
+            </a:extLst>
+          </p:cNvPr>
+          <p:cNvGrpSpPr/>
+          <p:nvPr/>
+        </p:nvGrpSpPr>
+        <p:grpSpPr>
+          <a:xfrm>
+            <a:off x="477142" y="103516"/>
+            <a:ext cx="11237715" cy="6650968"/>
+            <a:chOff x="207525" y="1110575"/>
+            <a:chExt cx="9257489" cy="5413442"/>
+          </a:xfrm>
+        </p:grpSpPr>
+        <p:sp>
+          <p:nvSpPr>
+            <p:cNvPr id="4" name="矩形 3">
+              <a:extLst>
+                <a:ext uri="{FF2B5EF4-FFF2-40B4-BE49-F238E27FC236}">
+                  <a16:creationId xmlns:a16="http://schemas.microsoft.com/office/drawing/2014/main" id="{BE815B88-F159-9327-4D02-A5E43CECC3EE}"/>
+                </a:ext>
+              </a:extLst>
+            </p:cNvPr>
+            <p:cNvSpPr/>
+            <p:nvPr/>
+          </p:nvSpPr>
+          <p:spPr>
+            <a:xfrm>
+              <a:off x="207525" y="1110575"/>
+              <a:ext cx="2856397" cy="5413442"/>
+            </a:xfrm>
+            <a:prstGeom prst="rect">
+              <a:avLst/>
+            </a:prstGeom>
+            <a:noFill/>
+            <a:ln w="19050">
+              <a:solidFill>
+                <a:schemeClr val="tx1"/>
+              </a:solidFill>
+            </a:ln>
+          </p:spPr>
+          <p:style>
+            <a:lnRef idx="2">
+              <a:schemeClr val="accent1">
+                <a:shade val="15000"/>
+              </a:schemeClr>
+            </a:lnRef>
+            <a:fillRef idx="1">
+              <a:schemeClr val="accent1"/>
+            </a:fillRef>
+            <a:effectRef idx="0">
+              <a:schemeClr val="accent1"/>
+            </a:effectRef>
+            <a:fontRef idx="minor">
+              <a:schemeClr val="lt1"/>
+            </a:fontRef>
+          </p:style>
+          <p:txBody>
+            <a:bodyPr rtlCol="0" anchor="ctr"/>
+            <a:lstStyle/>
+            <a:p>
+              <a:pPr algn="ctr"/>
+              <a:endParaRPr lang="zh-CN" altLang="en-US">
+                <a:latin typeface="Times New Roman" panose="02020603050405020304" pitchFamily="18" charset="0"/>
+                <a:ea typeface="宋体" panose="02010600030101010101" pitchFamily="2" charset="-122"/>
+              </a:endParaRPr>
+            </a:p>
+          </p:txBody>
+        </p:sp>
+        <p:grpSp>
+          <p:nvGrpSpPr>
+            <p:cNvPr id="10" name="组合 9">
+              <a:extLst>
+                <a:ext uri="{FF2B5EF4-FFF2-40B4-BE49-F238E27FC236}">
+                  <a16:creationId xmlns:a16="http://schemas.microsoft.com/office/drawing/2014/main" id="{AF823AAC-39F7-DB5C-F04C-7F046E61A97B}"/>
+                </a:ext>
+              </a:extLst>
+            </p:cNvPr>
+            <p:cNvGrpSpPr/>
+            <p:nvPr/>
+          </p:nvGrpSpPr>
+          <p:grpSpPr>
+            <a:xfrm>
+              <a:off x="207525" y="2859122"/>
+              <a:ext cx="1181100" cy="1550432"/>
+              <a:chOff x="253731" y="3345505"/>
+              <a:chExt cx="1181100" cy="1550432"/>
+            </a:xfrm>
+          </p:grpSpPr>
+          <p:pic>
+            <p:nvPicPr>
+              <p:cNvPr id="7" name="图形 6">
+                <a:extLst>
+                  <a:ext uri="{FF2B5EF4-FFF2-40B4-BE49-F238E27FC236}">
+                    <a16:creationId xmlns:a16="http://schemas.microsoft.com/office/drawing/2014/main" id="{DA6B5533-0055-6165-5AF5-6EF0FAEEC02E}"/>
+                  </a:ext>
+                </a:extLst>
+              </p:cNvPr>
+              <p:cNvPicPr>
+                <a:picLocks noChangeAspect="1"/>
+              </p:cNvPicPr>
+              <p:nvPr/>
+            </p:nvPicPr>
+            <p:blipFill>
+              <a:blip r:embed="rId2">
+                <a:extLst>
+                  <a:ext uri="{96DAC541-7B7A-43D3-8B79-37D633B846F1}">
+                    <asvg:svgBlip xmlns:asvg="http://schemas.microsoft.com/office/drawing/2016/SVG/main" r:embed="rId3"/>
+                  </a:ext>
+                </a:extLst>
+              </a:blip>
+              <a:stretch>
+                <a:fillRect/>
+              </a:stretch>
+            </p:blipFill>
+            <p:spPr>
+              <a:xfrm>
+                <a:off x="253731" y="3345505"/>
+                <a:ext cx="1181100" cy="1181100"/>
+              </a:xfrm>
+              <a:prstGeom prst="rect">
+                <a:avLst/>
+              </a:prstGeom>
+            </p:spPr>
+          </p:pic>
+          <p:sp>
+            <p:nvSpPr>
+              <p:cNvPr id="9" name="文本框 8">
+                <a:extLst>
+                  <a:ext uri="{FF2B5EF4-FFF2-40B4-BE49-F238E27FC236}">
+                    <a16:creationId xmlns:a16="http://schemas.microsoft.com/office/drawing/2014/main" id="{17E255EC-BE87-4986-27C1-C19801ECB154}"/>
+                  </a:ext>
+                </a:extLst>
+              </p:cNvPr>
+              <p:cNvSpPr txBox="1"/>
+              <p:nvPr/>
+            </p:nvSpPr>
+            <p:spPr>
+              <a:xfrm>
+                <a:off x="386270" y="4526605"/>
+                <a:ext cx="916022" cy="369332"/>
+              </a:xfrm>
+              <a:prstGeom prst="rect">
+                <a:avLst/>
+              </a:prstGeom>
+              <a:noFill/>
+            </p:spPr>
+            <p:txBody>
+              <a:bodyPr wrap="square" rtlCol="0">
+                <a:spAutoFit/>
+              </a:bodyPr>
+              <a:lstStyle/>
+              <a:p>
+                <a:pPr algn="ctr"/>
+                <a:r>
+                  <a:rPr lang="zh-CN" altLang="en-US" dirty="0">
+                    <a:latin typeface="Times New Roman" panose="02020603050405020304" pitchFamily="18" charset="0"/>
+                    <a:ea typeface="宋体" panose="02010600030101010101" pitchFamily="2" charset="-122"/>
+                  </a:rPr>
+                  <a:t>数据集</a:t>
+                </a:r>
+              </a:p>
+            </p:txBody>
+          </p:sp>
+        </p:grpSp>
+        <p:grpSp>
+          <p:nvGrpSpPr>
+            <p:cNvPr id="15" name="组合 14">
+              <a:extLst>
+                <a:ext uri="{FF2B5EF4-FFF2-40B4-BE49-F238E27FC236}">
+                  <a16:creationId xmlns:a16="http://schemas.microsoft.com/office/drawing/2014/main" id="{4E5CAB59-A72E-A296-9E17-82654A1046FD}"/>
+                </a:ext>
+              </a:extLst>
+            </p:cNvPr>
+            <p:cNvGrpSpPr/>
+            <p:nvPr/>
+          </p:nvGrpSpPr>
+          <p:grpSpPr>
+            <a:xfrm>
+              <a:off x="1446991" y="1746765"/>
+              <a:ext cx="1010866" cy="1340795"/>
+              <a:chOff x="1952828" y="1951206"/>
+              <a:chExt cx="1010866" cy="1340795"/>
+            </a:xfrm>
+          </p:grpSpPr>
+          <p:pic>
+            <p:nvPicPr>
+              <p:cNvPr id="11" name="图形 10">
+                <a:extLst>
+                  <a:ext uri="{FF2B5EF4-FFF2-40B4-BE49-F238E27FC236}">
+                    <a16:creationId xmlns:a16="http://schemas.microsoft.com/office/drawing/2014/main" id="{A8C110EA-7ED7-0E8D-28A7-1FCB9C90CB08}"/>
+                  </a:ext>
+                </a:extLst>
+              </p:cNvPr>
+              <p:cNvPicPr>
+                <a:picLocks noChangeAspect="1"/>
+              </p:cNvPicPr>
+              <p:nvPr/>
+            </p:nvPicPr>
+            <p:blipFill>
+              <a:blip r:embed="rId4">
+                <a:extLst>
+                  <a:ext uri="{96DAC541-7B7A-43D3-8B79-37D633B846F1}">
+                    <asvg:svgBlip xmlns:asvg="http://schemas.microsoft.com/office/drawing/2016/SVG/main" r:embed="rId5"/>
+                  </a:ext>
+                </a:extLst>
+              </a:blip>
+              <a:stretch>
+                <a:fillRect/>
+              </a:stretch>
+            </p:blipFill>
+            <p:spPr>
+              <a:xfrm>
+                <a:off x="1952828" y="1951206"/>
+                <a:ext cx="1010866" cy="1010866"/>
+              </a:xfrm>
+              <a:prstGeom prst="rect">
+                <a:avLst/>
+              </a:prstGeom>
+            </p:spPr>
+          </p:pic>
+          <p:sp>
+            <p:nvSpPr>
+              <p:cNvPr id="13" name="文本框 12">
+                <a:extLst>
+                  <a:ext uri="{FF2B5EF4-FFF2-40B4-BE49-F238E27FC236}">
+                    <a16:creationId xmlns:a16="http://schemas.microsoft.com/office/drawing/2014/main" id="{82F0A2B0-4069-5DDF-1325-97D24DB56E3A}"/>
+                  </a:ext>
+                </a:extLst>
+              </p:cNvPr>
+              <p:cNvSpPr txBox="1"/>
+              <p:nvPr/>
+            </p:nvSpPr>
+            <p:spPr>
+              <a:xfrm>
+                <a:off x="1952829" y="2922669"/>
+                <a:ext cx="1010865" cy="369332"/>
+              </a:xfrm>
+              <a:prstGeom prst="rect">
+                <a:avLst/>
+              </a:prstGeom>
+              <a:noFill/>
+            </p:spPr>
+            <p:txBody>
+              <a:bodyPr wrap="square" rtlCol="0">
+                <a:spAutoFit/>
+              </a:bodyPr>
+              <a:lstStyle/>
+              <a:p>
+                <a:pPr algn="ctr"/>
+                <a:r>
+                  <a:rPr lang="zh-CN" altLang="en-US" dirty="0">
+                    <a:latin typeface="Times New Roman" panose="02020603050405020304" pitchFamily="18" charset="0"/>
+                    <a:ea typeface="宋体" panose="02010600030101010101" pitchFamily="2" charset="-122"/>
+                  </a:rPr>
+                  <a:t>训练集</a:t>
+                </a:r>
+              </a:p>
+            </p:txBody>
+          </p:sp>
+        </p:grpSp>
+        <p:grpSp>
+          <p:nvGrpSpPr>
+            <p:cNvPr id="16" name="组合 15">
+              <a:extLst>
+                <a:ext uri="{FF2B5EF4-FFF2-40B4-BE49-F238E27FC236}">
+                  <a16:creationId xmlns:a16="http://schemas.microsoft.com/office/drawing/2014/main" id="{E82F5BCD-D156-168B-7BF2-377C02E5BECB}"/>
+                </a:ext>
+              </a:extLst>
+            </p:cNvPr>
+            <p:cNvGrpSpPr/>
+            <p:nvPr/>
+          </p:nvGrpSpPr>
+          <p:grpSpPr>
+            <a:xfrm>
+              <a:off x="1042046" y="5084807"/>
+              <a:ext cx="1744495" cy="1379367"/>
+              <a:chOff x="1551939" y="1951206"/>
+              <a:chExt cx="1744495" cy="1379367"/>
+            </a:xfrm>
+          </p:grpSpPr>
+          <p:pic>
+            <p:nvPicPr>
+              <p:cNvPr id="17" name="图形 16">
+                <a:extLst>
+                  <a:ext uri="{FF2B5EF4-FFF2-40B4-BE49-F238E27FC236}">
+                    <a16:creationId xmlns:a16="http://schemas.microsoft.com/office/drawing/2014/main" id="{AAAE8D9B-EDAD-2E79-D706-2E3148F5E69B}"/>
+                  </a:ext>
+                </a:extLst>
+              </p:cNvPr>
+              <p:cNvPicPr>
+                <a:picLocks noChangeAspect="1"/>
+              </p:cNvPicPr>
+              <p:nvPr/>
+            </p:nvPicPr>
+            <p:blipFill>
+              <a:blip r:embed="rId4">
+                <a:extLst>
+                  <a:ext uri="{96DAC541-7B7A-43D3-8B79-37D633B846F1}">
+                    <asvg:svgBlip xmlns:asvg="http://schemas.microsoft.com/office/drawing/2016/SVG/main" r:embed="rId5"/>
+                  </a:ext>
+                </a:extLst>
+              </a:blip>
+              <a:stretch>
+                <a:fillRect/>
+              </a:stretch>
+            </p:blipFill>
+            <p:spPr>
+              <a:xfrm>
+                <a:off x="1952828" y="1951206"/>
+                <a:ext cx="1010866" cy="1010866"/>
+              </a:xfrm>
+              <a:prstGeom prst="rect">
+                <a:avLst/>
+              </a:prstGeom>
+            </p:spPr>
+          </p:pic>
+          <p:sp>
+            <p:nvSpPr>
+              <p:cNvPr id="18" name="文本框 17">
+                <a:extLst>
+                  <a:ext uri="{FF2B5EF4-FFF2-40B4-BE49-F238E27FC236}">
+                    <a16:creationId xmlns:a16="http://schemas.microsoft.com/office/drawing/2014/main" id="{4CEB1D6B-8249-86AC-C948-88281C4B97F6}"/>
+                  </a:ext>
+                </a:extLst>
+              </p:cNvPr>
+              <p:cNvSpPr txBox="1"/>
+              <p:nvPr/>
+            </p:nvSpPr>
+            <p:spPr>
+              <a:xfrm>
+                <a:off x="1551939" y="2961241"/>
+                <a:ext cx="1744495" cy="369332"/>
+              </a:xfrm>
+              <a:prstGeom prst="rect">
+                <a:avLst/>
+              </a:prstGeom>
+              <a:noFill/>
+            </p:spPr>
+            <p:txBody>
+              <a:bodyPr wrap="square" rtlCol="0">
+                <a:spAutoFit/>
+              </a:bodyPr>
+              <a:lstStyle/>
+              <a:p>
+                <a:pPr algn="ctr"/>
+                <a:r>
+                  <a:rPr lang="zh-CN" altLang="en-US" dirty="0">
+                    <a:latin typeface="Times New Roman" panose="02020603050405020304" pitchFamily="18" charset="0"/>
+                    <a:ea typeface="宋体" panose="02010600030101010101" pitchFamily="2" charset="-122"/>
+                  </a:rPr>
+                  <a:t>测试集</a:t>
+                </a:r>
+                <a:r>
+                  <a:rPr lang="en-US" altLang="zh-CN" dirty="0">
+                    <a:latin typeface="Times New Roman" panose="02020603050405020304" pitchFamily="18" charset="0"/>
+                    <a:ea typeface="宋体" panose="02010600030101010101" pitchFamily="2" charset="-122"/>
+                  </a:rPr>
+                  <a:t>&amp;</a:t>
+                </a:r>
+                <a:r>
+                  <a:rPr lang="zh-CN" altLang="en-US" dirty="0">
+                    <a:latin typeface="Times New Roman" panose="02020603050405020304" pitchFamily="18" charset="0"/>
+                    <a:ea typeface="宋体" panose="02010600030101010101" pitchFamily="2" charset="-122"/>
+                  </a:rPr>
+                  <a:t>验证集</a:t>
+                </a:r>
+              </a:p>
+            </p:txBody>
+          </p:sp>
+        </p:grpSp>
+        <p:cxnSp>
+          <p:nvCxnSpPr>
+            <p:cNvPr id="20" name="直接箭头连接符 19">
+              <a:extLst>
+                <a:ext uri="{FF2B5EF4-FFF2-40B4-BE49-F238E27FC236}">
+                  <a16:creationId xmlns:a16="http://schemas.microsoft.com/office/drawing/2014/main" id="{C2474E62-4792-313D-27C1-690412774C18}"/>
+                </a:ext>
+              </a:extLst>
+            </p:cNvPr>
+            <p:cNvCxnSpPr>
+              <a:endCxn id="11" idx="1"/>
+            </p:cNvCxnSpPr>
+            <p:nvPr/>
+          </p:nvCxnSpPr>
+          <p:spPr>
+            <a:xfrm flipV="1">
+              <a:off x="797668" y="2252198"/>
+              <a:ext cx="649323" cy="606924"/>
+            </a:xfrm>
+            <a:prstGeom prst="bentConnector3">
+              <a:avLst>
+                <a:gd name="adj1" fmla="val 1061"/>
+              </a:avLst>
+            </a:prstGeom>
+            <a:ln w="19050">
+              <a:solidFill>
+                <a:schemeClr val="tx1"/>
+              </a:solidFill>
+              <a:tailEnd type="triangle"/>
+            </a:ln>
+          </p:spPr>
+          <p:style>
+            <a:lnRef idx="1">
+              <a:schemeClr val="accent1"/>
+            </a:lnRef>
+            <a:fillRef idx="0">
+              <a:schemeClr val="accent1"/>
+            </a:fillRef>
+            <a:effectRef idx="0">
+              <a:schemeClr val="accent1"/>
+            </a:effectRef>
+            <a:fontRef idx="minor">
+              <a:schemeClr val="tx1"/>
+            </a:fontRef>
+          </p:style>
+        </p:cxnSp>
+        <p:cxnSp>
+          <p:nvCxnSpPr>
+            <p:cNvPr id="23" name="直接箭头连接符 22">
+              <a:extLst>
+                <a:ext uri="{FF2B5EF4-FFF2-40B4-BE49-F238E27FC236}">
+                  <a16:creationId xmlns:a16="http://schemas.microsoft.com/office/drawing/2014/main" id="{877A4D0A-AD67-C405-76F3-5365C78C2968}"/>
+                </a:ext>
+              </a:extLst>
+            </p:cNvPr>
+            <p:cNvCxnSpPr>
+              <a:stCxn id="9" idx="2"/>
+              <a:endCxn id="17" idx="1"/>
+            </p:cNvCxnSpPr>
+            <p:nvPr/>
+          </p:nvCxnSpPr>
+          <p:spPr>
+            <a:xfrm rot="16200000" flipH="1">
+              <a:off x="530162" y="4677467"/>
+              <a:ext cx="1180686" cy="644860"/>
+            </a:xfrm>
+            <a:prstGeom prst="bentConnector2">
+              <a:avLst/>
+            </a:prstGeom>
+            <a:ln w="19050">
+              <a:solidFill>
+                <a:schemeClr val="tx1"/>
+              </a:solidFill>
+              <a:tailEnd type="triangle"/>
+            </a:ln>
+          </p:spPr>
+          <p:style>
+            <a:lnRef idx="1">
+              <a:schemeClr val="accent1"/>
+            </a:lnRef>
+            <a:fillRef idx="0">
+              <a:schemeClr val="accent1"/>
+            </a:fillRef>
+            <a:effectRef idx="0">
+              <a:schemeClr val="accent1"/>
+            </a:effectRef>
+            <a:fontRef idx="minor">
+              <a:schemeClr val="tx1"/>
+            </a:fontRef>
+          </p:style>
+        </p:cxnSp>
+        <p:sp>
+          <p:nvSpPr>
+            <p:cNvPr id="27" name="文本框 26">
+              <a:extLst>
+                <a:ext uri="{FF2B5EF4-FFF2-40B4-BE49-F238E27FC236}">
+                  <a16:creationId xmlns:a16="http://schemas.microsoft.com/office/drawing/2014/main" id="{97FCBC68-70CA-4FCF-880A-CB0E21ED6E73}"/>
+                </a:ext>
+              </a:extLst>
+            </p:cNvPr>
+            <p:cNvSpPr txBox="1"/>
+            <p:nvPr/>
+          </p:nvSpPr>
+          <p:spPr>
+            <a:xfrm>
+              <a:off x="207525" y="1176030"/>
+              <a:ext cx="1669042" cy="369332"/>
+            </a:xfrm>
+            <a:prstGeom prst="rect">
+              <a:avLst/>
+            </a:prstGeom>
+            <a:noFill/>
+          </p:spPr>
+          <p:txBody>
+            <a:bodyPr wrap="square" rtlCol="0">
+              <a:spAutoFit/>
+            </a:bodyPr>
+            <a:lstStyle/>
+            <a:p>
+              <a:pPr algn="ctr"/>
+              <a:r>
+                <a:rPr lang="en-US" altLang="zh-CN" dirty="0">
+                  <a:latin typeface="Times New Roman" panose="02020603050405020304" pitchFamily="18" charset="0"/>
+                  <a:ea typeface="宋体" panose="02010600030101010101" pitchFamily="2" charset="-122"/>
+                </a:rPr>
+                <a:t>1.</a:t>
+              </a:r>
+              <a:r>
+                <a:rPr lang="zh-CN" altLang="en-US" dirty="0">
+                  <a:latin typeface="Times New Roman" panose="02020603050405020304" pitchFamily="18" charset="0"/>
+                  <a:ea typeface="宋体" panose="02010600030101010101" pitchFamily="2" charset="-122"/>
+                </a:rPr>
+                <a:t>数据预处理</a:t>
+              </a:r>
+            </a:p>
+          </p:txBody>
+        </p:sp>
+        <p:grpSp>
+          <p:nvGrpSpPr>
+            <p:cNvPr id="40" name="组合 39">
+              <a:extLst>
+                <a:ext uri="{FF2B5EF4-FFF2-40B4-BE49-F238E27FC236}">
+                  <a16:creationId xmlns:a16="http://schemas.microsoft.com/office/drawing/2014/main" id="{252D36C6-8F43-045A-17AB-DA6875EFC7BC}"/>
+                </a:ext>
+              </a:extLst>
+            </p:cNvPr>
+            <p:cNvGrpSpPr/>
+            <p:nvPr/>
+          </p:nvGrpSpPr>
+          <p:grpSpPr>
+            <a:xfrm>
+              <a:off x="3292520" y="1143301"/>
+              <a:ext cx="3202314" cy="1489953"/>
+              <a:chOff x="3691647" y="1110575"/>
+              <a:chExt cx="3202314" cy="1489953"/>
+            </a:xfrm>
+          </p:grpSpPr>
+          <p:sp>
+            <p:nvSpPr>
+              <p:cNvPr id="26" name="文本框 25">
+                <a:extLst>
+                  <a:ext uri="{FF2B5EF4-FFF2-40B4-BE49-F238E27FC236}">
+                    <a16:creationId xmlns:a16="http://schemas.microsoft.com/office/drawing/2014/main" id="{D2D857E4-F963-AECD-7636-CD26E67BAEF8}"/>
+                  </a:ext>
+                </a:extLst>
+              </p:cNvPr>
+              <p:cNvSpPr txBox="1"/>
+              <p:nvPr/>
+            </p:nvSpPr>
+            <p:spPr>
+              <a:xfrm>
+                <a:off x="4460132" y="1817858"/>
+                <a:ext cx="2191966" cy="369332"/>
+              </a:xfrm>
+              <a:prstGeom prst="rect">
+                <a:avLst/>
+              </a:prstGeom>
+              <a:noFill/>
+            </p:spPr>
+            <p:txBody>
+              <a:bodyPr wrap="square" rtlCol="0">
+                <a:spAutoFit/>
+              </a:bodyPr>
+              <a:lstStyle/>
+              <a:p>
+                <a:pPr algn="ctr"/>
+                <a:r>
+                  <a:rPr lang="zh-CN" altLang="en-US" dirty="0">
+                    <a:latin typeface="Times New Roman" panose="02020603050405020304" pitchFamily="18" charset="0"/>
+                    <a:ea typeface="宋体" panose="02010600030101010101" pitchFamily="2" charset="-122"/>
+                  </a:rPr>
+                  <a:t>损失函数</a:t>
+                </a:r>
+                <a:r>
+                  <a:rPr lang="en-US" altLang="zh-CN" dirty="0">
+                    <a:latin typeface="Times New Roman" panose="02020603050405020304" pitchFamily="18" charset="0"/>
+                    <a:ea typeface="宋体" panose="02010600030101010101" pitchFamily="2" charset="-122"/>
+                  </a:rPr>
+                  <a:t>MMSE</a:t>
+                </a:r>
+                <a:endParaRPr lang="zh-CN" altLang="en-US" dirty="0">
+                  <a:latin typeface="Times New Roman" panose="02020603050405020304" pitchFamily="18" charset="0"/>
+                  <a:ea typeface="宋体" panose="02010600030101010101" pitchFamily="2" charset="-122"/>
+                </a:endParaRPr>
+              </a:p>
+            </p:txBody>
+          </p:sp>
+          <p:grpSp>
+            <p:nvGrpSpPr>
+              <p:cNvPr id="37" name="组合 36">
+                <a:extLst>
+                  <a:ext uri="{FF2B5EF4-FFF2-40B4-BE49-F238E27FC236}">
+                    <a16:creationId xmlns:a16="http://schemas.microsoft.com/office/drawing/2014/main" id="{C80FCB1C-C2E1-ABB8-6061-FCA6B5A6F055}"/>
+                  </a:ext>
+                </a:extLst>
+              </p:cNvPr>
+              <p:cNvGrpSpPr/>
+              <p:nvPr/>
+            </p:nvGrpSpPr>
+            <p:grpSpPr>
+              <a:xfrm>
+                <a:off x="3691647" y="1110575"/>
+                <a:ext cx="3202314" cy="1489953"/>
+                <a:chOff x="3691647" y="1110575"/>
+                <a:chExt cx="3202314" cy="1489953"/>
+              </a:xfrm>
+            </p:grpSpPr>
+            <p:sp>
+              <p:nvSpPr>
+                <p:cNvPr id="24" name="矩形 23">
+                  <a:extLst>
+                    <a:ext uri="{FF2B5EF4-FFF2-40B4-BE49-F238E27FC236}">
+                      <a16:creationId xmlns:a16="http://schemas.microsoft.com/office/drawing/2014/main" id="{5D737D50-B313-7D6D-034C-E7F32CB47B11}"/>
+                    </a:ext>
+                  </a:extLst>
+                </p:cNvPr>
+                <p:cNvSpPr/>
+                <p:nvPr/>
+              </p:nvSpPr>
+              <p:spPr>
+                <a:xfrm>
+                  <a:off x="3839183" y="1110575"/>
+                  <a:ext cx="3054778" cy="1489953"/>
+                </a:xfrm>
+                <a:prstGeom prst="rect">
+                  <a:avLst/>
+                </a:prstGeom>
+                <a:noFill/>
+                <a:ln w="19050">
+                  <a:solidFill>
+                    <a:schemeClr val="tx1"/>
+                  </a:solidFill>
+                </a:ln>
+              </p:spPr>
+              <p:style>
+                <a:lnRef idx="2">
+                  <a:schemeClr val="accent1">
+                    <a:shade val="15000"/>
+                  </a:schemeClr>
+                </a:lnRef>
+                <a:fillRef idx="1">
+                  <a:schemeClr val="accent1"/>
+                </a:fillRef>
+                <a:effectRef idx="0">
+                  <a:schemeClr val="accent1"/>
+                </a:effectRef>
+                <a:fontRef idx="minor">
+                  <a:schemeClr val="lt1"/>
+                </a:fontRef>
+              </p:style>
+              <p:txBody>
+                <a:bodyPr rtlCol="0" anchor="ctr"/>
+                <a:lstStyle/>
+                <a:p>
+                  <a:pPr algn="ctr"/>
+                  <a:endParaRPr lang="zh-CN" altLang="en-US">
+                    <a:latin typeface="Times New Roman" panose="02020603050405020304" pitchFamily="18" charset="0"/>
+                    <a:ea typeface="宋体" panose="02010600030101010101" pitchFamily="2" charset="-122"/>
+                  </a:endParaRPr>
+                </a:p>
+              </p:txBody>
+            </p:sp>
+            <p:sp>
+              <p:nvSpPr>
+                <p:cNvPr id="29" name="文本框 28">
+                  <a:extLst>
+                    <a:ext uri="{FF2B5EF4-FFF2-40B4-BE49-F238E27FC236}">
+                      <a16:creationId xmlns:a16="http://schemas.microsoft.com/office/drawing/2014/main" id="{C5C31074-6261-1CD7-CF57-0F23AF6C309E}"/>
+                    </a:ext>
+                  </a:extLst>
+                </p:cNvPr>
+                <p:cNvSpPr txBox="1"/>
+                <p:nvPr/>
+              </p:nvSpPr>
+              <p:spPr>
+                <a:xfrm>
+                  <a:off x="3691647" y="1158925"/>
+                  <a:ext cx="1536970" cy="369332"/>
+                </a:xfrm>
+                <a:prstGeom prst="rect">
+                  <a:avLst/>
+                </a:prstGeom>
+                <a:noFill/>
+              </p:spPr>
+              <p:txBody>
+                <a:bodyPr wrap="square" rtlCol="0">
+                  <a:spAutoFit/>
+                </a:bodyPr>
+                <a:lstStyle/>
+                <a:p>
+                  <a:pPr algn="ctr"/>
+                  <a:r>
+                    <a:rPr lang="en-US" altLang="zh-CN" dirty="0">
+                      <a:latin typeface="Times New Roman" panose="02020603050405020304" pitchFamily="18" charset="0"/>
+                      <a:ea typeface="宋体" panose="02010600030101010101" pitchFamily="2" charset="-122"/>
+                    </a:rPr>
+                    <a:t>3.</a:t>
+                  </a:r>
+                  <a:r>
+                    <a:rPr lang="zh-CN" altLang="en-US" dirty="0">
+                      <a:latin typeface="Times New Roman" panose="02020603050405020304" pitchFamily="18" charset="0"/>
+                      <a:ea typeface="宋体" panose="02010600030101010101" pitchFamily="2" charset="-122"/>
+                    </a:rPr>
+                    <a:t>损失函数</a:t>
+                  </a:r>
+                </a:p>
+              </p:txBody>
+            </p:sp>
+          </p:grpSp>
+        </p:grpSp>
+        <p:grpSp>
+          <p:nvGrpSpPr>
+            <p:cNvPr id="38" name="组合 37">
+              <a:extLst>
+                <a:ext uri="{FF2B5EF4-FFF2-40B4-BE49-F238E27FC236}">
+                  <a16:creationId xmlns:a16="http://schemas.microsoft.com/office/drawing/2014/main" id="{8AA14FB4-FDFD-CAE4-10B0-6B0ABA5FD5C5}"/>
+                </a:ext>
+              </a:extLst>
+            </p:cNvPr>
+            <p:cNvGrpSpPr/>
+            <p:nvPr/>
+          </p:nvGrpSpPr>
+          <p:grpSpPr>
+            <a:xfrm>
+              <a:off x="7165076" y="1143301"/>
+              <a:ext cx="2299938" cy="1489953"/>
+              <a:chOff x="8424154" y="1462353"/>
+              <a:chExt cx="1964987" cy="1093307"/>
+            </a:xfrm>
+          </p:grpSpPr>
+          <p:sp>
+            <p:nvSpPr>
+              <p:cNvPr id="31" name="文本框 30">
+                <a:extLst>
+                  <a:ext uri="{FF2B5EF4-FFF2-40B4-BE49-F238E27FC236}">
+                    <a16:creationId xmlns:a16="http://schemas.microsoft.com/office/drawing/2014/main" id="{CB16AABA-2E16-F04B-CF7F-4763A5726CDA}"/>
+                  </a:ext>
+                </a:extLst>
+              </p:cNvPr>
+              <p:cNvSpPr txBox="1"/>
+              <p:nvPr/>
+            </p:nvSpPr>
+            <p:spPr>
+              <a:xfrm>
+                <a:off x="8512574" y="2033021"/>
+                <a:ext cx="1876567" cy="271011"/>
+              </a:xfrm>
+              <a:prstGeom prst="rect">
+                <a:avLst/>
+              </a:prstGeom>
+              <a:noFill/>
+            </p:spPr>
+            <p:txBody>
+              <a:bodyPr wrap="square" rtlCol="0">
+                <a:spAutoFit/>
+              </a:bodyPr>
+              <a:lstStyle/>
+              <a:p>
+                <a:pPr algn="ctr"/>
+                <a:r>
+                  <a:rPr lang="zh-CN" altLang="en-US" dirty="0">
+                    <a:latin typeface="Times New Roman" panose="02020603050405020304" pitchFamily="18" charset="0"/>
+                    <a:ea typeface="宋体" panose="02010600030101010101" pitchFamily="2" charset="-122"/>
+                  </a:rPr>
+                  <a:t>优化器</a:t>
+                </a:r>
+                <a:r>
+                  <a:rPr lang="en-US" altLang="zh-CN" dirty="0" err="1">
+                    <a:latin typeface="Times New Roman" panose="02020603050405020304" pitchFamily="18" charset="0"/>
+                    <a:ea typeface="宋体" panose="02010600030101010101" pitchFamily="2" charset="-122"/>
+                  </a:rPr>
+                  <a:t>AdamW</a:t>
+                </a:r>
+                <a:endParaRPr lang="zh-CN" altLang="en-US" dirty="0">
+                  <a:latin typeface="Times New Roman" panose="02020603050405020304" pitchFamily="18" charset="0"/>
+                  <a:ea typeface="宋体" panose="02010600030101010101" pitchFamily="2" charset="-122"/>
+                </a:endParaRPr>
+              </a:p>
+            </p:txBody>
+          </p:sp>
+          <p:grpSp>
+            <p:nvGrpSpPr>
+              <p:cNvPr id="36" name="组合 35">
+                <a:extLst>
+                  <a:ext uri="{FF2B5EF4-FFF2-40B4-BE49-F238E27FC236}">
+                    <a16:creationId xmlns:a16="http://schemas.microsoft.com/office/drawing/2014/main" id="{6E6D8856-41D1-D2FA-274B-EBAC330BD373}"/>
+                  </a:ext>
+                </a:extLst>
+              </p:cNvPr>
+              <p:cNvGrpSpPr/>
+              <p:nvPr/>
+            </p:nvGrpSpPr>
+            <p:grpSpPr>
+              <a:xfrm>
+                <a:off x="8424154" y="1462353"/>
+                <a:ext cx="1964987" cy="1093307"/>
+                <a:chOff x="8618707" y="1507221"/>
+                <a:chExt cx="1964987" cy="1093307"/>
+              </a:xfrm>
+            </p:grpSpPr>
+            <p:sp>
+              <p:nvSpPr>
+                <p:cNvPr id="30" name="矩形 29">
+                  <a:extLst>
+                    <a:ext uri="{FF2B5EF4-FFF2-40B4-BE49-F238E27FC236}">
+                      <a16:creationId xmlns:a16="http://schemas.microsoft.com/office/drawing/2014/main" id="{36EF50B6-8614-6B1D-AA4F-0B8AA43D4065}"/>
+                    </a:ext>
+                  </a:extLst>
+                </p:cNvPr>
+                <p:cNvSpPr/>
+                <p:nvPr/>
+              </p:nvSpPr>
+              <p:spPr>
+                <a:xfrm>
+                  <a:off x="8618707" y="1507221"/>
+                  <a:ext cx="1964987" cy="1093307"/>
+                </a:xfrm>
+                <a:prstGeom prst="rect">
+                  <a:avLst/>
+                </a:prstGeom>
+                <a:noFill/>
+                <a:ln w="19050">
+                  <a:solidFill>
+                    <a:schemeClr val="tx1"/>
+                  </a:solidFill>
+                </a:ln>
+              </p:spPr>
+              <p:style>
+                <a:lnRef idx="2">
+                  <a:schemeClr val="accent1">
+                    <a:shade val="15000"/>
+                  </a:schemeClr>
+                </a:lnRef>
+                <a:fillRef idx="1">
+                  <a:schemeClr val="accent1"/>
+                </a:fillRef>
+                <a:effectRef idx="0">
+                  <a:schemeClr val="accent1"/>
+                </a:effectRef>
+                <a:fontRef idx="minor">
+                  <a:schemeClr val="lt1"/>
+                </a:fontRef>
+              </p:style>
+              <p:txBody>
+                <a:bodyPr rtlCol="0" anchor="ctr"/>
+                <a:lstStyle/>
+                <a:p>
+                  <a:pPr algn="ctr"/>
+                  <a:endParaRPr lang="zh-CN" altLang="en-US" dirty="0">
+                    <a:latin typeface="Times New Roman" panose="02020603050405020304" pitchFamily="18" charset="0"/>
+                    <a:ea typeface="宋体" panose="02010600030101010101" pitchFamily="2" charset="-122"/>
+                  </a:endParaRPr>
+                </a:p>
+              </p:txBody>
+            </p:sp>
+            <p:sp>
+              <p:nvSpPr>
+                <p:cNvPr id="32" name="文本框 31">
+                  <a:extLst>
+                    <a:ext uri="{FF2B5EF4-FFF2-40B4-BE49-F238E27FC236}">
+                      <a16:creationId xmlns:a16="http://schemas.microsoft.com/office/drawing/2014/main" id="{CB0A4F75-3FEC-401D-7873-A0D85F382FC9}"/>
+                    </a:ext>
+                  </a:extLst>
+                </p:cNvPr>
+                <p:cNvSpPr txBox="1"/>
+                <p:nvPr/>
+              </p:nvSpPr>
+              <p:spPr>
+                <a:xfrm>
+                  <a:off x="8673830" y="1555251"/>
+                  <a:ext cx="849549" cy="271011"/>
+                </a:xfrm>
+                <a:prstGeom prst="rect">
+                  <a:avLst/>
+                </a:prstGeom>
+                <a:noFill/>
+              </p:spPr>
+              <p:txBody>
+                <a:bodyPr wrap="square" rtlCol="0">
+                  <a:spAutoFit/>
+                </a:bodyPr>
+                <a:lstStyle/>
+                <a:p>
+                  <a:pPr algn="ctr"/>
+                  <a:r>
+                    <a:rPr lang="en-US" altLang="zh-CN" dirty="0">
+                      <a:latin typeface="Times New Roman" panose="02020603050405020304" pitchFamily="18" charset="0"/>
+                      <a:ea typeface="宋体" panose="02010600030101010101" pitchFamily="2" charset="-122"/>
+                    </a:rPr>
+                    <a:t>4.</a:t>
+                  </a:r>
+                  <a:r>
+                    <a:rPr lang="zh-CN" altLang="en-US" dirty="0">
+                      <a:latin typeface="Times New Roman" panose="02020603050405020304" pitchFamily="18" charset="0"/>
+                      <a:ea typeface="宋体" panose="02010600030101010101" pitchFamily="2" charset="-122"/>
+                    </a:rPr>
+                    <a:t>优化</a:t>
+                  </a:r>
+                </a:p>
+              </p:txBody>
+            </p:sp>
+          </p:grpSp>
+        </p:grpSp>
+        <p:grpSp>
+          <p:nvGrpSpPr>
+            <p:cNvPr id="35" name="组合 34">
+              <a:extLst>
+                <a:ext uri="{FF2B5EF4-FFF2-40B4-BE49-F238E27FC236}">
+                  <a16:creationId xmlns:a16="http://schemas.microsoft.com/office/drawing/2014/main" id="{DEF30DAD-BEC4-8EAD-10A9-14338510D8C5}"/>
+                </a:ext>
+              </a:extLst>
+            </p:cNvPr>
+            <p:cNvGrpSpPr/>
+            <p:nvPr/>
+          </p:nvGrpSpPr>
+          <p:grpSpPr>
+            <a:xfrm>
+              <a:off x="3472774" y="2834651"/>
+              <a:ext cx="5992239" cy="3664895"/>
+              <a:chOff x="3897549" y="2859122"/>
+              <a:chExt cx="5625830" cy="3664895"/>
+            </a:xfrm>
+          </p:grpSpPr>
+          <p:sp>
+            <p:nvSpPr>
+              <p:cNvPr id="33" name="矩形 32">
+                <a:extLst>
+                  <a:ext uri="{FF2B5EF4-FFF2-40B4-BE49-F238E27FC236}">
+                    <a16:creationId xmlns:a16="http://schemas.microsoft.com/office/drawing/2014/main" id="{0B56B3B9-E292-3BD7-4F13-0CA23124BEA3}"/>
+                  </a:ext>
+                </a:extLst>
+              </p:cNvPr>
+              <p:cNvSpPr/>
+              <p:nvPr/>
+            </p:nvSpPr>
+            <p:spPr>
+              <a:xfrm>
+                <a:off x="3897549" y="2859122"/>
+                <a:ext cx="5625830" cy="3664895"/>
+              </a:xfrm>
+              <a:prstGeom prst="rect">
+                <a:avLst/>
+              </a:prstGeom>
+              <a:noFill/>
+              <a:ln w="19050">
+                <a:solidFill>
+                  <a:schemeClr val="tx1"/>
+                </a:solidFill>
+              </a:ln>
+            </p:spPr>
+            <p:style>
+              <a:lnRef idx="2">
+                <a:schemeClr val="accent1">
+                  <a:shade val="15000"/>
+                </a:schemeClr>
+              </a:lnRef>
+              <a:fillRef idx="1">
+                <a:schemeClr val="accent1"/>
+              </a:fillRef>
+              <a:effectRef idx="0">
+                <a:schemeClr val="accent1"/>
+              </a:effectRef>
+              <a:fontRef idx="minor">
+                <a:schemeClr val="lt1"/>
+              </a:fontRef>
+            </p:style>
+            <p:txBody>
+              <a:bodyPr rtlCol="0" anchor="ctr"/>
+              <a:lstStyle/>
+              <a:p>
+                <a:pPr algn="ctr"/>
+                <a:endParaRPr lang="zh-CN" altLang="en-US">
+                  <a:latin typeface="Times New Roman" panose="02020603050405020304" pitchFamily="18" charset="0"/>
+                  <a:ea typeface="宋体" panose="02010600030101010101" pitchFamily="2" charset="-122"/>
+                </a:endParaRPr>
+              </a:p>
+            </p:txBody>
+          </p:sp>
+          <p:sp>
+            <p:nvSpPr>
+              <p:cNvPr id="34" name="文本框 33">
+                <a:extLst>
+                  <a:ext uri="{FF2B5EF4-FFF2-40B4-BE49-F238E27FC236}">
+                    <a16:creationId xmlns:a16="http://schemas.microsoft.com/office/drawing/2014/main" id="{76F9FE90-4986-AD30-B5A7-C36D8C511602}"/>
+                  </a:ext>
+                </a:extLst>
+              </p:cNvPr>
+              <p:cNvSpPr txBox="1"/>
+              <p:nvPr/>
+            </p:nvSpPr>
+            <p:spPr>
+              <a:xfrm>
+                <a:off x="4045087" y="2937753"/>
+                <a:ext cx="2364402" cy="369332"/>
+              </a:xfrm>
+              <a:prstGeom prst="rect">
+                <a:avLst/>
+              </a:prstGeom>
+              <a:noFill/>
+            </p:spPr>
+            <p:txBody>
+              <a:bodyPr wrap="square" rtlCol="0">
+                <a:spAutoFit/>
+              </a:bodyPr>
+              <a:lstStyle/>
+              <a:p>
+                <a:pPr algn="ctr"/>
+                <a:r>
+                  <a:rPr lang="en-US" altLang="zh-CN" dirty="0">
+                    <a:latin typeface="Times New Roman" panose="02020603050405020304" pitchFamily="18" charset="0"/>
+                    <a:ea typeface="宋体" panose="02010600030101010101" pitchFamily="2" charset="-122"/>
+                  </a:rPr>
+                  <a:t>2. </a:t>
+                </a:r>
+                <a:r>
+                  <a:rPr lang="zh-CN" altLang="en-US" dirty="0">
+                    <a:latin typeface="Times New Roman" panose="02020603050405020304" pitchFamily="18" charset="0"/>
+                    <a:ea typeface="宋体" panose="02010600030101010101" pitchFamily="2" charset="-122"/>
+                  </a:rPr>
+                  <a:t>多任务神经网络架构</a:t>
+                </a:r>
+              </a:p>
+            </p:txBody>
+          </p:sp>
+        </p:grpSp>
+        <p:sp>
+          <p:nvSpPr>
+            <p:cNvPr id="39" name="矩形 38">
+              <a:extLst>
+                <a:ext uri="{FF2B5EF4-FFF2-40B4-BE49-F238E27FC236}">
+                  <a16:creationId xmlns:a16="http://schemas.microsoft.com/office/drawing/2014/main" id="{51757C63-CA56-11E4-ECCF-1B28BB3119E9}"/>
+                </a:ext>
+              </a:extLst>
+            </p:cNvPr>
+            <p:cNvSpPr/>
+            <p:nvPr/>
+          </p:nvSpPr>
+          <p:spPr>
+            <a:xfrm>
+              <a:off x="3768282" y="3340537"/>
+              <a:ext cx="5436678" cy="3035295"/>
+            </a:xfrm>
+            <a:prstGeom prst="rect">
+              <a:avLst/>
+            </a:prstGeom>
+            <a:noFill/>
+            <a:ln w="19050">
+              <a:solidFill>
+                <a:schemeClr val="tx1"/>
+              </a:solidFill>
+            </a:ln>
+          </p:spPr>
+          <p:style>
+            <a:lnRef idx="2">
+              <a:schemeClr val="accent1">
+                <a:shade val="15000"/>
+              </a:schemeClr>
+            </a:lnRef>
+            <a:fillRef idx="1">
+              <a:schemeClr val="accent1"/>
+            </a:fillRef>
+            <a:effectRef idx="0">
+              <a:schemeClr val="accent1"/>
+            </a:effectRef>
+            <a:fontRef idx="minor">
+              <a:schemeClr val="lt1"/>
+            </a:fontRef>
+          </p:style>
+          <p:txBody>
+            <a:bodyPr rtlCol="0" anchor="ctr"/>
+            <a:lstStyle/>
+            <a:p>
+              <a:pPr algn="ctr"/>
+              <a:endParaRPr lang="zh-CN" altLang="en-US">
+                <a:latin typeface="Times New Roman" panose="02020603050405020304" pitchFamily="18" charset="0"/>
+                <a:ea typeface="宋体" panose="02010600030101010101" pitchFamily="2" charset="-122"/>
+              </a:endParaRPr>
+            </a:p>
+          </p:txBody>
+        </p:sp>
+        <p:cxnSp>
+          <p:nvCxnSpPr>
+            <p:cNvPr id="43" name="直接箭头连接符 42">
+              <a:extLst>
+                <a:ext uri="{FF2B5EF4-FFF2-40B4-BE49-F238E27FC236}">
+                  <a16:creationId xmlns:a16="http://schemas.microsoft.com/office/drawing/2014/main" id="{5E08EB73-0EBF-3E56-3EF2-874E8B28ED55}"/>
+                </a:ext>
+              </a:extLst>
+            </p:cNvPr>
+            <p:cNvCxnSpPr>
+              <a:cxnSpLocks/>
+              <a:stCxn id="13" idx="2"/>
+            </p:cNvCxnSpPr>
+            <p:nvPr/>
+          </p:nvCxnSpPr>
+          <p:spPr>
+            <a:xfrm rot="16200000" flipH="1">
+              <a:off x="2213398" y="2826586"/>
+              <a:ext cx="1356443" cy="1878389"/>
+            </a:xfrm>
+            <a:prstGeom prst="bentConnector2">
+              <a:avLst/>
+            </a:prstGeom>
+            <a:ln w="19050">
+              <a:solidFill>
+                <a:schemeClr val="tx1"/>
+              </a:solidFill>
+              <a:tailEnd type="triangle"/>
+            </a:ln>
+          </p:spPr>
+          <p:style>
+            <a:lnRef idx="1">
+              <a:schemeClr val="accent1"/>
+            </a:lnRef>
+            <a:fillRef idx="0">
+              <a:schemeClr val="accent1"/>
+            </a:fillRef>
+            <a:effectRef idx="0">
+              <a:schemeClr val="accent1"/>
+            </a:effectRef>
+            <a:fontRef idx="minor">
+              <a:schemeClr val="tx1"/>
+            </a:fontRef>
+          </p:style>
+        </p:cxnSp>
+        <p:grpSp>
+          <p:nvGrpSpPr>
+            <p:cNvPr id="94" name="组合 93">
+              <a:extLst>
+                <a:ext uri="{FF2B5EF4-FFF2-40B4-BE49-F238E27FC236}">
+                  <a16:creationId xmlns:a16="http://schemas.microsoft.com/office/drawing/2014/main" id="{05BC51E5-2035-1623-CD8B-7ED5A11238A0}"/>
+                </a:ext>
+              </a:extLst>
+            </p:cNvPr>
+            <p:cNvGrpSpPr/>
+            <p:nvPr/>
+          </p:nvGrpSpPr>
+          <p:grpSpPr>
+            <a:xfrm>
+              <a:off x="3831981" y="3573970"/>
+              <a:ext cx="817163" cy="2601956"/>
+              <a:chOff x="3805332" y="3533873"/>
+              <a:chExt cx="817163" cy="2016227"/>
+            </a:xfrm>
+          </p:grpSpPr>
+          <p:sp>
+            <p:nvSpPr>
+              <p:cNvPr id="50" name="矩形 49">
+                <a:extLst>
+                  <a:ext uri="{FF2B5EF4-FFF2-40B4-BE49-F238E27FC236}">
+                    <a16:creationId xmlns:a16="http://schemas.microsoft.com/office/drawing/2014/main" id="{5533EB0E-34CB-0000-4100-A9C0964163AD}"/>
+                  </a:ext>
+                </a:extLst>
+              </p:cNvPr>
+              <p:cNvSpPr/>
+              <p:nvPr/>
+            </p:nvSpPr>
+            <p:spPr>
+              <a:xfrm>
+                <a:off x="3829892" y="3533873"/>
+                <a:ext cx="768042" cy="2016227"/>
+              </a:xfrm>
+              <a:prstGeom prst="rect">
+                <a:avLst/>
+              </a:prstGeom>
+              <a:noFill/>
+              <a:ln w="19050">
+                <a:solidFill>
+                  <a:schemeClr val="tx1"/>
+                </a:solidFill>
+              </a:ln>
+            </p:spPr>
+            <p:style>
+              <a:lnRef idx="2">
+                <a:schemeClr val="accent1">
+                  <a:shade val="15000"/>
+                </a:schemeClr>
+              </a:lnRef>
+              <a:fillRef idx="1">
+                <a:schemeClr val="accent1"/>
+              </a:fillRef>
+              <a:effectRef idx="0">
+                <a:schemeClr val="accent1"/>
+              </a:effectRef>
+              <a:fontRef idx="minor">
+                <a:schemeClr val="lt1"/>
+              </a:fontRef>
+            </p:style>
+            <p:txBody>
+              <a:bodyPr rtlCol="0" anchor="ctr"/>
+              <a:lstStyle/>
+              <a:p>
+                <a:pPr algn="ctr"/>
+                <a:endParaRPr lang="zh-CN" altLang="en-US" dirty="0">
+                  <a:solidFill>
+                    <a:schemeClr val="tx1"/>
+                  </a:solidFill>
+                  <a:latin typeface="Times New Roman" panose="02020603050405020304" pitchFamily="18" charset="0"/>
+                  <a:ea typeface="宋体" panose="02010600030101010101" pitchFamily="2" charset="-122"/>
+                </a:endParaRPr>
+              </a:p>
+            </p:txBody>
+          </p:sp>
+          <p:sp>
+            <p:nvSpPr>
+              <p:cNvPr id="51" name="文本框 50">
+                <a:extLst>
+                  <a:ext uri="{FF2B5EF4-FFF2-40B4-BE49-F238E27FC236}">
+                    <a16:creationId xmlns:a16="http://schemas.microsoft.com/office/drawing/2014/main" id="{BE01B920-9475-632E-0610-A90341EC118C}"/>
+                  </a:ext>
+                </a:extLst>
+              </p:cNvPr>
+              <p:cNvSpPr txBox="1"/>
+              <p:nvPr/>
+            </p:nvSpPr>
+            <p:spPr>
+              <a:xfrm>
+                <a:off x="3805332" y="4410709"/>
+                <a:ext cx="817163" cy="321965"/>
+              </a:xfrm>
+              <a:prstGeom prst="rect">
+                <a:avLst/>
+              </a:prstGeom>
+              <a:noFill/>
+            </p:spPr>
+            <p:txBody>
+              <a:bodyPr wrap="square" rtlCol="0" anchor="ctr" anchorCtr="1">
+                <a:spAutoFit/>
+              </a:bodyPr>
+              <a:lstStyle/>
+              <a:p>
+                <a:pPr algn="ctr"/>
+                <a:r>
+                  <a:rPr lang="zh-CN" altLang="en-US" sz="1050" dirty="0">
+                    <a:latin typeface="Times New Roman" panose="02020603050405020304" pitchFamily="18" charset="0"/>
+                    <a:ea typeface="宋体" panose="02010600030101010101" pitchFamily="2" charset="-122"/>
+                  </a:rPr>
+                  <a:t>归一化层</a:t>
+                </a:r>
+                <a:endParaRPr lang="en-US" altLang="zh-CN" sz="1050" dirty="0">
+                  <a:latin typeface="Times New Roman" panose="02020603050405020304" pitchFamily="18" charset="0"/>
+                  <a:ea typeface="宋体" panose="02010600030101010101" pitchFamily="2" charset="-122"/>
+                </a:endParaRPr>
+              </a:p>
+              <a:p>
+                <a:pPr algn="ctr"/>
+                <a:r>
+                  <a:rPr lang="en-US" altLang="zh-CN" sz="1050" dirty="0" err="1">
+                    <a:latin typeface="Times New Roman" panose="02020603050405020304" pitchFamily="18" charset="0"/>
+                    <a:ea typeface="宋体" panose="02010600030101010101" pitchFamily="2" charset="-122"/>
+                  </a:rPr>
+                  <a:t>LayerNorm</a:t>
+                </a:r>
+                <a:endParaRPr lang="zh-CN" altLang="en-US" sz="1050" dirty="0">
+                  <a:latin typeface="Times New Roman" panose="02020603050405020304" pitchFamily="18" charset="0"/>
+                  <a:ea typeface="宋体" panose="02010600030101010101" pitchFamily="2" charset="-122"/>
+                </a:endParaRPr>
+              </a:p>
+            </p:txBody>
+          </p:sp>
+        </p:grpSp>
+        <p:grpSp>
+          <p:nvGrpSpPr>
+            <p:cNvPr id="85" name="组合 84">
+              <a:extLst>
+                <a:ext uri="{FF2B5EF4-FFF2-40B4-BE49-F238E27FC236}">
+                  <a16:creationId xmlns:a16="http://schemas.microsoft.com/office/drawing/2014/main" id="{4719EDE1-F0DE-0573-8811-8A70C06BF588}"/>
+                </a:ext>
+              </a:extLst>
+            </p:cNvPr>
+            <p:cNvGrpSpPr/>
+            <p:nvPr/>
+          </p:nvGrpSpPr>
+          <p:grpSpPr>
+            <a:xfrm>
+              <a:off x="8086283" y="3459248"/>
+              <a:ext cx="1005838" cy="2846017"/>
+              <a:chOff x="9775746" y="2956216"/>
+              <a:chExt cx="1005838" cy="2368430"/>
+            </a:xfrm>
+          </p:grpSpPr>
+          <p:grpSp>
+            <p:nvGrpSpPr>
+              <p:cNvPr id="84" name="组合 83">
+                <a:extLst>
+                  <a:ext uri="{FF2B5EF4-FFF2-40B4-BE49-F238E27FC236}">
+                    <a16:creationId xmlns:a16="http://schemas.microsoft.com/office/drawing/2014/main" id="{98688545-7D7A-1190-8924-EDEF9F0AF8CA}"/>
+                  </a:ext>
+                </a:extLst>
+              </p:cNvPr>
+              <p:cNvGrpSpPr/>
+              <p:nvPr/>
+            </p:nvGrpSpPr>
+            <p:grpSpPr>
+              <a:xfrm>
+                <a:off x="9775746" y="2956216"/>
+                <a:ext cx="1005838" cy="2368430"/>
+                <a:chOff x="9775746" y="2956216"/>
+                <a:chExt cx="1005838" cy="2368430"/>
+              </a:xfrm>
+            </p:grpSpPr>
+            <p:grpSp>
+              <p:nvGrpSpPr>
+                <p:cNvPr id="76" name="组合 75">
+                  <a:extLst>
+                    <a:ext uri="{FF2B5EF4-FFF2-40B4-BE49-F238E27FC236}">
+                      <a16:creationId xmlns:a16="http://schemas.microsoft.com/office/drawing/2014/main" id="{DE1B644C-B85E-8F5A-7CFE-E4B339B071A8}"/>
+                    </a:ext>
+                  </a:extLst>
+                </p:cNvPr>
+                <p:cNvGrpSpPr/>
+                <p:nvPr/>
+              </p:nvGrpSpPr>
+              <p:grpSpPr>
+                <a:xfrm>
+                  <a:off x="9775746" y="2956216"/>
+                  <a:ext cx="1005838" cy="633687"/>
+                  <a:chOff x="9775746" y="2956216"/>
+                  <a:chExt cx="1005838" cy="633687"/>
+                </a:xfrm>
+              </p:grpSpPr>
+              <p:sp>
+                <p:nvSpPr>
+                  <p:cNvPr id="74" name="矩形 73">
+                    <a:extLst>
+                      <a:ext uri="{FF2B5EF4-FFF2-40B4-BE49-F238E27FC236}">
+                        <a16:creationId xmlns:a16="http://schemas.microsoft.com/office/drawing/2014/main" id="{EBDC5CDB-502E-BE8C-E091-59B0362CF213}"/>
+                      </a:ext>
+                    </a:extLst>
+                  </p:cNvPr>
+                  <p:cNvSpPr/>
+                  <p:nvPr/>
+                </p:nvSpPr>
+                <p:spPr>
+                  <a:xfrm>
+                    <a:off x="9775746" y="2956216"/>
+                    <a:ext cx="1005838" cy="283464"/>
+                  </a:xfrm>
+                  <a:prstGeom prst="rect">
+                    <a:avLst/>
+                  </a:prstGeom>
+                  <a:noFill/>
+                  <a:ln w="19050">
+                    <a:solidFill>
+                      <a:schemeClr val="tx1"/>
+                    </a:solidFill>
+                  </a:ln>
+                </p:spPr>
+                <p:style>
+                  <a:lnRef idx="2">
+                    <a:schemeClr val="accent1">
+                      <a:shade val="15000"/>
+                    </a:schemeClr>
+                  </a:lnRef>
+                  <a:fillRef idx="1">
+                    <a:schemeClr val="accent1"/>
+                  </a:fillRef>
+                  <a:effectRef idx="0">
+                    <a:schemeClr val="accent1"/>
+                  </a:effectRef>
+                  <a:fontRef idx="minor">
+                    <a:schemeClr val="lt1"/>
+                  </a:fontRef>
+                </p:style>
+                <p:txBody>
+                  <a:bodyPr rtlCol="0" anchor="ctr"/>
+                  <a:lstStyle/>
+                  <a:p>
+                    <a:pPr algn="ctr"/>
+                    <a:r>
+                      <a:rPr lang="zh-CN" altLang="en-US" sz="1100" dirty="0">
+                        <a:solidFill>
+                          <a:schemeClr val="tx1"/>
+                        </a:solidFill>
+                        <a:latin typeface="Times New Roman" panose="02020603050405020304" pitchFamily="18" charset="0"/>
+                        <a:ea typeface="宋体" panose="02010600030101010101" pitchFamily="2" charset="-122"/>
+                      </a:rPr>
+                      <a:t>任务</a:t>
+                    </a:r>
+                    <a:r>
+                      <a:rPr lang="en-US" altLang="zh-CN" sz="1100" dirty="0">
+                        <a:solidFill>
+                          <a:schemeClr val="tx1"/>
+                        </a:solidFill>
+                        <a:latin typeface="Times New Roman" panose="02020603050405020304" pitchFamily="18" charset="0"/>
+                        <a:ea typeface="宋体" panose="02010600030101010101" pitchFamily="2" charset="-122"/>
+                      </a:rPr>
+                      <a:t>1</a:t>
+                    </a:r>
+                    <a:r>
+                      <a:rPr lang="zh-CN" altLang="en-US" sz="1100" dirty="0">
+                        <a:solidFill>
+                          <a:schemeClr val="tx1"/>
+                        </a:solidFill>
+                        <a:latin typeface="Times New Roman" panose="02020603050405020304" pitchFamily="18" charset="0"/>
+                        <a:ea typeface="宋体" panose="02010600030101010101" pitchFamily="2" charset="-122"/>
+                      </a:rPr>
+                      <a:t>输出头</a:t>
+                    </a:r>
+                  </a:p>
+                </p:txBody>
+              </p:sp>
+              <p:sp>
+                <p:nvSpPr>
+                  <p:cNvPr id="75" name="矩形 74">
+                    <a:extLst>
+                      <a:ext uri="{FF2B5EF4-FFF2-40B4-BE49-F238E27FC236}">
+                        <a16:creationId xmlns:a16="http://schemas.microsoft.com/office/drawing/2014/main" id="{F225BD3A-2D2C-5890-0AF6-83F784083EE3}"/>
+                      </a:ext>
+                    </a:extLst>
+                  </p:cNvPr>
+                  <p:cNvSpPr/>
+                  <p:nvPr/>
+                </p:nvSpPr>
+                <p:spPr>
+                  <a:xfrm>
+                    <a:off x="9775746" y="3239680"/>
+                    <a:ext cx="1005838" cy="350223"/>
+                  </a:xfrm>
+                  <a:prstGeom prst="rect">
+                    <a:avLst/>
+                  </a:prstGeom>
+                  <a:noFill/>
+                  <a:ln w="19050">
+                    <a:solidFill>
+                      <a:schemeClr val="tx1"/>
+                    </a:solidFill>
+                  </a:ln>
+                </p:spPr>
+                <p:style>
+                  <a:lnRef idx="2">
+                    <a:schemeClr val="accent1">
+                      <a:shade val="15000"/>
+                    </a:schemeClr>
+                  </a:lnRef>
+                  <a:fillRef idx="1">
+                    <a:schemeClr val="accent1"/>
+                  </a:fillRef>
+                  <a:effectRef idx="0">
+                    <a:schemeClr val="accent1"/>
+                  </a:effectRef>
+                  <a:fontRef idx="minor">
+                    <a:schemeClr val="lt1"/>
+                  </a:fontRef>
+                </p:style>
+                <p:txBody>
+                  <a:bodyPr rtlCol="0" anchor="ctr"/>
+                  <a:lstStyle/>
+                  <a:p>
+                    <a:pPr algn="ctr"/>
+                    <a:r>
+                      <a:rPr lang="zh-CN" altLang="en-US" sz="1100" dirty="0">
+                        <a:solidFill>
+                          <a:schemeClr val="tx1"/>
+                        </a:solidFill>
+                        <a:latin typeface="Times New Roman" panose="02020603050405020304" pitchFamily="18" charset="0"/>
+                        <a:ea typeface="宋体" panose="02010600030101010101" pitchFamily="2" charset="-122"/>
+                      </a:rPr>
+                      <a:t>线性层</a:t>
+                    </a:r>
+                    <a:endParaRPr lang="en-US" altLang="zh-CN" sz="1100" dirty="0">
+                      <a:solidFill>
+                        <a:schemeClr val="tx1"/>
+                      </a:solidFill>
+                      <a:latin typeface="Times New Roman" panose="02020603050405020304" pitchFamily="18" charset="0"/>
+                      <a:ea typeface="宋体" panose="02010600030101010101" pitchFamily="2" charset="-122"/>
+                    </a:endParaRPr>
+                  </a:p>
+                  <a:p>
+                    <a:pPr algn="ctr"/>
+                    <a:r>
+                      <a:rPr lang="en-US" altLang="zh-CN" sz="1100" dirty="0">
+                        <a:solidFill>
+                          <a:schemeClr val="tx1"/>
+                        </a:solidFill>
+                        <a:latin typeface="Times New Roman" panose="02020603050405020304" pitchFamily="18" charset="0"/>
+                        <a:ea typeface="宋体" panose="02010600030101010101" pitchFamily="2" charset="-122"/>
+                      </a:rPr>
+                      <a:t>FC128</a:t>
+                    </a:r>
+                    <a:endParaRPr lang="zh-CN" altLang="en-US" sz="1100" dirty="0">
+                      <a:solidFill>
+                        <a:schemeClr val="tx1"/>
+                      </a:solidFill>
+                      <a:latin typeface="Times New Roman" panose="02020603050405020304" pitchFamily="18" charset="0"/>
+                      <a:ea typeface="宋体" panose="02010600030101010101" pitchFamily="2" charset="-122"/>
+                    </a:endParaRPr>
+                  </a:p>
+                </p:txBody>
+              </p:sp>
+            </p:grpSp>
+            <p:grpSp>
+              <p:nvGrpSpPr>
+                <p:cNvPr id="77" name="组合 76">
+                  <a:extLst>
+                    <a:ext uri="{FF2B5EF4-FFF2-40B4-BE49-F238E27FC236}">
+                      <a16:creationId xmlns:a16="http://schemas.microsoft.com/office/drawing/2014/main" id="{80A52979-008E-F334-CC64-6E6DD6D54D80}"/>
+                    </a:ext>
+                  </a:extLst>
+                </p:cNvPr>
+                <p:cNvGrpSpPr/>
+                <p:nvPr/>
+              </p:nvGrpSpPr>
+              <p:grpSpPr>
+                <a:xfrm>
+                  <a:off x="9775746" y="3661145"/>
+                  <a:ext cx="1005838" cy="633687"/>
+                  <a:chOff x="9775746" y="2956216"/>
+                  <a:chExt cx="1005838" cy="633687"/>
+                </a:xfrm>
+              </p:grpSpPr>
+              <p:sp>
+                <p:nvSpPr>
+                  <p:cNvPr id="78" name="矩形 77">
+                    <a:extLst>
+                      <a:ext uri="{FF2B5EF4-FFF2-40B4-BE49-F238E27FC236}">
+                        <a16:creationId xmlns:a16="http://schemas.microsoft.com/office/drawing/2014/main" id="{9F2B6779-B0F1-53AE-B214-8022C4C05FBD}"/>
+                      </a:ext>
+                    </a:extLst>
+                  </p:cNvPr>
+                  <p:cNvSpPr/>
+                  <p:nvPr/>
+                </p:nvSpPr>
+                <p:spPr>
+                  <a:xfrm>
+                    <a:off x="9775746" y="2956216"/>
+                    <a:ext cx="1005838" cy="283464"/>
+                  </a:xfrm>
+                  <a:prstGeom prst="rect">
+                    <a:avLst/>
+                  </a:prstGeom>
+                  <a:noFill/>
+                  <a:ln w="19050">
+                    <a:solidFill>
+                      <a:schemeClr val="tx1"/>
+                    </a:solidFill>
+                  </a:ln>
+                </p:spPr>
+                <p:style>
+                  <a:lnRef idx="2">
+                    <a:schemeClr val="accent1">
+                      <a:shade val="15000"/>
+                    </a:schemeClr>
+                  </a:lnRef>
+                  <a:fillRef idx="1">
+                    <a:schemeClr val="accent1"/>
+                  </a:fillRef>
+                  <a:effectRef idx="0">
+                    <a:schemeClr val="accent1"/>
+                  </a:effectRef>
+                  <a:fontRef idx="minor">
+                    <a:schemeClr val="lt1"/>
+                  </a:fontRef>
+                </p:style>
+                <p:txBody>
+                  <a:bodyPr rtlCol="0" anchor="ctr"/>
+                  <a:lstStyle/>
+                  <a:p>
+                    <a:pPr algn="ctr"/>
+                    <a:r>
+                      <a:rPr lang="zh-CN" altLang="en-US" sz="1100" dirty="0">
+                        <a:solidFill>
+                          <a:schemeClr val="tx1"/>
+                        </a:solidFill>
+                        <a:latin typeface="Times New Roman" panose="02020603050405020304" pitchFamily="18" charset="0"/>
+                        <a:ea typeface="宋体" panose="02010600030101010101" pitchFamily="2" charset="-122"/>
+                      </a:rPr>
+                      <a:t>任务</a:t>
+                    </a:r>
+                    <a:r>
+                      <a:rPr lang="en-US" altLang="zh-CN" sz="1100" dirty="0">
+                        <a:solidFill>
+                          <a:schemeClr val="tx1"/>
+                        </a:solidFill>
+                        <a:latin typeface="Times New Roman" panose="02020603050405020304" pitchFamily="18" charset="0"/>
+                        <a:ea typeface="宋体" panose="02010600030101010101" pitchFamily="2" charset="-122"/>
+                      </a:rPr>
+                      <a:t>2</a:t>
+                    </a:r>
+                    <a:r>
+                      <a:rPr lang="zh-CN" altLang="en-US" sz="1100" dirty="0">
+                        <a:solidFill>
+                          <a:schemeClr val="tx1"/>
+                        </a:solidFill>
+                        <a:latin typeface="Times New Roman" panose="02020603050405020304" pitchFamily="18" charset="0"/>
+                        <a:ea typeface="宋体" panose="02010600030101010101" pitchFamily="2" charset="-122"/>
+                      </a:rPr>
+                      <a:t>输出头</a:t>
+                    </a:r>
+                  </a:p>
+                </p:txBody>
+              </p:sp>
+              <p:sp>
+                <p:nvSpPr>
+                  <p:cNvPr id="79" name="矩形 78">
+                    <a:extLst>
+                      <a:ext uri="{FF2B5EF4-FFF2-40B4-BE49-F238E27FC236}">
+                        <a16:creationId xmlns:a16="http://schemas.microsoft.com/office/drawing/2014/main" id="{B6DB6774-AA80-38EA-8D55-C37F28F57A64}"/>
+                      </a:ext>
+                    </a:extLst>
+                  </p:cNvPr>
+                  <p:cNvSpPr/>
+                  <p:nvPr/>
+                </p:nvSpPr>
+                <p:spPr>
+                  <a:xfrm>
+                    <a:off x="9775746" y="3239680"/>
+                    <a:ext cx="1005838" cy="350223"/>
+                  </a:xfrm>
+                  <a:prstGeom prst="rect">
+                    <a:avLst/>
+                  </a:prstGeom>
+                  <a:noFill/>
+                  <a:ln w="19050">
+                    <a:solidFill>
+                      <a:schemeClr val="tx1"/>
+                    </a:solidFill>
+                  </a:ln>
+                </p:spPr>
+                <p:style>
+                  <a:lnRef idx="2">
+                    <a:schemeClr val="accent1">
+                      <a:shade val="15000"/>
+                    </a:schemeClr>
+                  </a:lnRef>
+                  <a:fillRef idx="1">
+                    <a:schemeClr val="accent1"/>
+                  </a:fillRef>
+                  <a:effectRef idx="0">
+                    <a:schemeClr val="accent1"/>
+                  </a:effectRef>
+                  <a:fontRef idx="minor">
+                    <a:schemeClr val="lt1"/>
+                  </a:fontRef>
+                </p:style>
+                <p:txBody>
+                  <a:bodyPr rtlCol="0" anchor="ctr"/>
+                  <a:lstStyle/>
+                  <a:p>
+                    <a:pPr algn="ctr"/>
+                    <a:r>
+                      <a:rPr lang="zh-CN" altLang="en-US" sz="1100" dirty="0">
+                        <a:solidFill>
+                          <a:schemeClr val="tx1"/>
+                        </a:solidFill>
+                        <a:latin typeface="Times New Roman" panose="02020603050405020304" pitchFamily="18" charset="0"/>
+                        <a:ea typeface="宋体" panose="02010600030101010101" pitchFamily="2" charset="-122"/>
+                      </a:rPr>
+                      <a:t>线性层</a:t>
+                    </a:r>
+                    <a:endParaRPr lang="en-US" altLang="zh-CN" sz="1100" dirty="0">
+                      <a:solidFill>
+                        <a:schemeClr val="tx1"/>
+                      </a:solidFill>
+                      <a:latin typeface="Times New Roman" panose="02020603050405020304" pitchFamily="18" charset="0"/>
+                      <a:ea typeface="宋体" panose="02010600030101010101" pitchFamily="2" charset="-122"/>
+                    </a:endParaRPr>
+                  </a:p>
+                  <a:p>
+                    <a:pPr algn="ctr"/>
+                    <a:r>
+                      <a:rPr lang="en-US" altLang="zh-CN" sz="1100" dirty="0">
+                        <a:solidFill>
+                          <a:schemeClr val="tx1"/>
+                        </a:solidFill>
+                        <a:latin typeface="Times New Roman" panose="02020603050405020304" pitchFamily="18" charset="0"/>
+                        <a:ea typeface="宋体" panose="02010600030101010101" pitchFamily="2" charset="-122"/>
+                      </a:rPr>
+                      <a:t>FC128</a:t>
+                    </a:r>
+                    <a:endParaRPr lang="zh-CN" altLang="en-US" sz="1100" dirty="0">
+                      <a:solidFill>
+                        <a:schemeClr val="tx1"/>
+                      </a:solidFill>
+                      <a:latin typeface="Times New Roman" panose="02020603050405020304" pitchFamily="18" charset="0"/>
+                      <a:ea typeface="宋体" panose="02010600030101010101" pitchFamily="2" charset="-122"/>
+                    </a:endParaRPr>
+                  </a:p>
+                </p:txBody>
+              </p:sp>
+            </p:grpSp>
+            <p:grpSp>
+              <p:nvGrpSpPr>
+                <p:cNvPr id="80" name="组合 79">
+                  <a:extLst>
+                    <a:ext uri="{FF2B5EF4-FFF2-40B4-BE49-F238E27FC236}">
+                      <a16:creationId xmlns:a16="http://schemas.microsoft.com/office/drawing/2014/main" id="{7F444A52-521E-2FD4-7D2C-F73224C56F6B}"/>
+                    </a:ext>
+                  </a:extLst>
+                </p:cNvPr>
+                <p:cNvGrpSpPr/>
+                <p:nvPr/>
+              </p:nvGrpSpPr>
+              <p:grpSpPr>
+                <a:xfrm>
+                  <a:off x="9775746" y="4690959"/>
+                  <a:ext cx="1005838" cy="633687"/>
+                  <a:chOff x="9775746" y="2956216"/>
+                  <a:chExt cx="1005838" cy="633687"/>
+                </a:xfrm>
+              </p:grpSpPr>
+              <p:sp>
+                <p:nvSpPr>
+                  <p:cNvPr id="81" name="矩形 80">
+                    <a:extLst>
+                      <a:ext uri="{FF2B5EF4-FFF2-40B4-BE49-F238E27FC236}">
+                        <a16:creationId xmlns:a16="http://schemas.microsoft.com/office/drawing/2014/main" id="{AFC2FAAF-E8BD-3D23-ECA5-2DFD8F7860FA}"/>
+                      </a:ext>
+                    </a:extLst>
+                  </p:cNvPr>
+                  <p:cNvSpPr/>
+                  <p:nvPr/>
+                </p:nvSpPr>
+                <p:spPr>
+                  <a:xfrm>
+                    <a:off x="9775746" y="2956216"/>
+                    <a:ext cx="1005838" cy="283464"/>
+                  </a:xfrm>
+                  <a:prstGeom prst="rect">
+                    <a:avLst/>
+                  </a:prstGeom>
+                  <a:noFill/>
+                  <a:ln w="19050">
+                    <a:solidFill>
+                      <a:schemeClr val="tx1"/>
+                    </a:solidFill>
+                  </a:ln>
+                </p:spPr>
+                <p:style>
+                  <a:lnRef idx="2">
+                    <a:schemeClr val="accent1">
+                      <a:shade val="15000"/>
+                    </a:schemeClr>
+                  </a:lnRef>
+                  <a:fillRef idx="1">
+                    <a:schemeClr val="accent1"/>
+                  </a:fillRef>
+                  <a:effectRef idx="0">
+                    <a:schemeClr val="accent1"/>
+                  </a:effectRef>
+                  <a:fontRef idx="minor">
+                    <a:schemeClr val="lt1"/>
+                  </a:fontRef>
+                </p:style>
+                <p:txBody>
+                  <a:bodyPr rtlCol="0" anchor="ctr"/>
+                  <a:lstStyle/>
+                  <a:p>
+                    <a:pPr algn="ctr"/>
+                    <a:r>
+                      <a:rPr lang="zh-CN" altLang="en-US" sz="1100" dirty="0">
+                        <a:solidFill>
+                          <a:schemeClr val="tx1"/>
+                        </a:solidFill>
+                        <a:latin typeface="Times New Roman" panose="02020603050405020304" pitchFamily="18" charset="0"/>
+                        <a:ea typeface="宋体" panose="02010600030101010101" pitchFamily="2" charset="-122"/>
+                      </a:rPr>
+                      <a:t>任务</a:t>
+                    </a:r>
+                    <a:r>
+                      <a:rPr lang="en-US" altLang="zh-CN" sz="1100" dirty="0">
+                        <a:solidFill>
+                          <a:schemeClr val="tx1"/>
+                        </a:solidFill>
+                        <a:latin typeface="Times New Roman" panose="02020603050405020304" pitchFamily="18" charset="0"/>
+                        <a:ea typeface="宋体" panose="02010600030101010101" pitchFamily="2" charset="-122"/>
+                      </a:rPr>
+                      <a:t>4</a:t>
+                    </a:r>
+                    <a:r>
+                      <a:rPr lang="zh-CN" altLang="en-US" sz="1100" dirty="0">
+                        <a:solidFill>
+                          <a:schemeClr val="tx1"/>
+                        </a:solidFill>
+                        <a:latin typeface="Times New Roman" panose="02020603050405020304" pitchFamily="18" charset="0"/>
+                        <a:ea typeface="宋体" panose="02010600030101010101" pitchFamily="2" charset="-122"/>
+                      </a:rPr>
+                      <a:t>输出头</a:t>
+                    </a:r>
+                  </a:p>
+                </p:txBody>
+              </p:sp>
+              <p:sp>
+                <p:nvSpPr>
+                  <p:cNvPr id="82" name="矩形 81">
+                    <a:extLst>
+                      <a:ext uri="{FF2B5EF4-FFF2-40B4-BE49-F238E27FC236}">
+                        <a16:creationId xmlns:a16="http://schemas.microsoft.com/office/drawing/2014/main" id="{1632100C-0880-F984-9791-E5BB1B757910}"/>
+                      </a:ext>
+                    </a:extLst>
+                  </p:cNvPr>
+                  <p:cNvSpPr/>
+                  <p:nvPr/>
+                </p:nvSpPr>
+                <p:spPr>
+                  <a:xfrm>
+                    <a:off x="9775746" y="3239680"/>
+                    <a:ext cx="1005838" cy="350223"/>
+                  </a:xfrm>
+                  <a:prstGeom prst="rect">
+                    <a:avLst/>
+                  </a:prstGeom>
+                  <a:noFill/>
+                  <a:ln w="19050">
+                    <a:solidFill>
+                      <a:schemeClr val="tx1"/>
+                    </a:solidFill>
+                  </a:ln>
+                </p:spPr>
+                <p:style>
+                  <a:lnRef idx="2">
+                    <a:schemeClr val="accent1">
+                      <a:shade val="15000"/>
+                    </a:schemeClr>
+                  </a:lnRef>
+                  <a:fillRef idx="1">
+                    <a:schemeClr val="accent1"/>
+                  </a:fillRef>
+                  <a:effectRef idx="0">
+                    <a:schemeClr val="accent1"/>
+                  </a:effectRef>
+                  <a:fontRef idx="minor">
+                    <a:schemeClr val="lt1"/>
+                  </a:fontRef>
+                </p:style>
+                <p:txBody>
+                  <a:bodyPr rtlCol="0" anchor="ctr"/>
+                  <a:lstStyle/>
+                  <a:p>
+                    <a:pPr algn="ctr"/>
+                    <a:r>
+                      <a:rPr lang="zh-CN" altLang="en-US" sz="1100" dirty="0">
+                        <a:solidFill>
+                          <a:schemeClr val="tx1"/>
+                        </a:solidFill>
+                        <a:latin typeface="Times New Roman" panose="02020603050405020304" pitchFamily="18" charset="0"/>
+                        <a:ea typeface="宋体" panose="02010600030101010101" pitchFamily="2" charset="-122"/>
+                      </a:rPr>
+                      <a:t>线性层</a:t>
+                    </a:r>
+                    <a:endParaRPr lang="en-US" altLang="zh-CN" sz="1100" dirty="0">
+                      <a:solidFill>
+                        <a:schemeClr val="tx1"/>
+                      </a:solidFill>
+                      <a:latin typeface="Times New Roman" panose="02020603050405020304" pitchFamily="18" charset="0"/>
+                      <a:ea typeface="宋体" panose="02010600030101010101" pitchFamily="2" charset="-122"/>
+                    </a:endParaRPr>
+                  </a:p>
+                  <a:p>
+                    <a:pPr algn="ctr"/>
+                    <a:r>
+                      <a:rPr lang="en-US" altLang="zh-CN" sz="1100" dirty="0">
+                        <a:solidFill>
+                          <a:schemeClr val="tx1"/>
+                        </a:solidFill>
+                        <a:latin typeface="Times New Roman" panose="02020603050405020304" pitchFamily="18" charset="0"/>
+                        <a:ea typeface="宋体" panose="02010600030101010101" pitchFamily="2" charset="-122"/>
+                      </a:rPr>
+                      <a:t>FC128</a:t>
+                    </a:r>
+                    <a:endParaRPr lang="zh-CN" altLang="en-US" sz="1100" dirty="0">
+                      <a:solidFill>
+                        <a:schemeClr val="tx1"/>
+                      </a:solidFill>
+                      <a:latin typeface="Times New Roman" panose="02020603050405020304" pitchFamily="18" charset="0"/>
+                      <a:ea typeface="宋体" panose="02010600030101010101" pitchFamily="2" charset="-122"/>
+                    </a:endParaRPr>
+                  </a:p>
+                </p:txBody>
+              </p:sp>
+            </p:grpSp>
+          </p:grpSp>
+          <p:sp>
+            <p:nvSpPr>
+              <p:cNvPr id="83" name="文本框 82">
+                <a:extLst>
+                  <a:ext uri="{FF2B5EF4-FFF2-40B4-BE49-F238E27FC236}">
+                    <a16:creationId xmlns:a16="http://schemas.microsoft.com/office/drawing/2014/main" id="{F7C1D770-9EB4-FB5C-BC41-82FAF9423935}"/>
+                  </a:ext>
+                </a:extLst>
+              </p:cNvPr>
+              <p:cNvSpPr txBox="1"/>
+              <p:nvPr/>
+            </p:nvSpPr>
+            <p:spPr>
+              <a:xfrm>
+                <a:off x="9775746" y="4297766"/>
+                <a:ext cx="1005838" cy="307355"/>
+              </a:xfrm>
+              <a:prstGeom prst="rect">
+                <a:avLst/>
+              </a:prstGeom>
+              <a:noFill/>
+            </p:spPr>
+            <p:txBody>
+              <a:bodyPr wrap="square" rtlCol="0">
+                <a:spAutoFit/>
+              </a:bodyPr>
+              <a:lstStyle/>
+              <a:p>
+                <a:pPr algn="ctr"/>
+                <a:r>
+                  <a:rPr lang="en-US" altLang="zh-CN" dirty="0">
+                    <a:latin typeface="Times New Roman" panose="02020603050405020304" pitchFamily="18" charset="0"/>
+                    <a:ea typeface="宋体" panose="02010600030101010101" pitchFamily="2" charset="-122"/>
+                  </a:rPr>
+                  <a:t>…</a:t>
+                </a:r>
+                <a:endParaRPr lang="zh-CN" altLang="en-US" dirty="0">
+                  <a:latin typeface="Times New Roman" panose="02020603050405020304" pitchFamily="18" charset="0"/>
+                  <a:ea typeface="宋体" panose="02010600030101010101" pitchFamily="2" charset="-122"/>
+                </a:endParaRPr>
+              </a:p>
+            </p:txBody>
+          </p:sp>
+        </p:grpSp>
+        <p:cxnSp>
+          <p:nvCxnSpPr>
+            <p:cNvPr id="98" name="直接箭头连接符 97">
+              <a:extLst>
+                <a:ext uri="{FF2B5EF4-FFF2-40B4-BE49-F238E27FC236}">
+                  <a16:creationId xmlns:a16="http://schemas.microsoft.com/office/drawing/2014/main" id="{09018DC0-46D8-BB91-6CF2-1F1598175414}"/>
+                </a:ext>
+              </a:extLst>
+            </p:cNvPr>
+            <p:cNvCxnSpPr>
+              <a:cxnSpLocks/>
+              <a:endCxn id="51" idx="1"/>
+            </p:cNvCxnSpPr>
+            <p:nvPr/>
+          </p:nvCxnSpPr>
+          <p:spPr>
+            <a:xfrm flipV="1">
+              <a:off x="1952424" y="4913282"/>
+              <a:ext cx="1879557" cy="171525"/>
+            </a:xfrm>
+            <a:prstGeom prst="bentConnector3">
+              <a:avLst>
+                <a:gd name="adj1" fmla="val -465"/>
+              </a:avLst>
+            </a:prstGeom>
+            <a:ln w="19050">
+              <a:solidFill>
+                <a:schemeClr val="tx1"/>
+              </a:solidFill>
+              <a:tailEnd type="triangle"/>
+            </a:ln>
+          </p:spPr>
+          <p:style>
+            <a:lnRef idx="1">
+              <a:schemeClr val="accent1"/>
+            </a:lnRef>
+            <a:fillRef idx="0">
+              <a:schemeClr val="accent1"/>
+            </a:fillRef>
+            <a:effectRef idx="0">
+              <a:schemeClr val="accent1"/>
+            </a:effectRef>
+            <a:fontRef idx="minor">
+              <a:schemeClr val="tx1"/>
+            </a:fontRef>
+          </p:style>
+        </p:cxnSp>
+        <p:sp>
+          <p:nvSpPr>
+            <p:cNvPr id="56" name="文本框 55">
+              <a:extLst>
+                <a:ext uri="{FF2B5EF4-FFF2-40B4-BE49-F238E27FC236}">
+                  <a16:creationId xmlns:a16="http://schemas.microsoft.com/office/drawing/2014/main" id="{C1ADEF32-EF9A-6F80-D5F8-EACFA93AC6B3}"/>
+                </a:ext>
+              </a:extLst>
+            </p:cNvPr>
+            <p:cNvSpPr txBox="1"/>
+            <p:nvPr/>
+          </p:nvSpPr>
+          <p:spPr>
+            <a:xfrm>
+              <a:off x="5533855" y="3607670"/>
+              <a:ext cx="1596985" cy="253917"/>
+            </a:xfrm>
+            <a:prstGeom prst="rect">
+              <a:avLst/>
+            </a:prstGeom>
+            <a:noFill/>
+          </p:spPr>
+          <p:txBody>
+            <a:bodyPr wrap="square" rtlCol="0" anchor="ctr" anchorCtr="1">
+              <a:spAutoFit/>
+            </a:bodyPr>
+            <a:lstStyle/>
+            <a:p>
+              <a:pPr algn="ctr"/>
+              <a:r>
+                <a:rPr lang="zh-CN" altLang="en-US" sz="1050" dirty="0">
+                  <a:latin typeface="Times New Roman" panose="02020603050405020304" pitchFamily="18" charset="0"/>
+                  <a:ea typeface="宋体" panose="02010600030101010101" pitchFamily="2" charset="-122"/>
+                </a:rPr>
+                <a:t>共享特征提取层</a:t>
+              </a:r>
+            </a:p>
+          </p:txBody>
+        </p:sp>
+        <p:sp>
+          <p:nvSpPr>
+            <p:cNvPr id="55" name="矩形 54">
+              <a:extLst>
+                <a:ext uri="{FF2B5EF4-FFF2-40B4-BE49-F238E27FC236}">
+                  <a16:creationId xmlns:a16="http://schemas.microsoft.com/office/drawing/2014/main" id="{17CBB046-BAB7-ABBD-FFFE-25F4F0248AC9}"/>
+                </a:ext>
+              </a:extLst>
+            </p:cNvPr>
+            <p:cNvSpPr/>
+            <p:nvPr/>
+          </p:nvSpPr>
+          <p:spPr>
+            <a:xfrm>
+              <a:off x="4719874" y="3573971"/>
+              <a:ext cx="3224949" cy="2601956"/>
+            </a:xfrm>
+            <a:prstGeom prst="rect">
+              <a:avLst/>
+            </a:prstGeom>
+            <a:noFill/>
+            <a:ln w="19050">
+              <a:solidFill>
+                <a:schemeClr val="tx1"/>
+              </a:solidFill>
+            </a:ln>
+          </p:spPr>
+          <p:style>
+            <a:lnRef idx="2">
+              <a:schemeClr val="accent1">
+                <a:shade val="15000"/>
+              </a:schemeClr>
+            </a:lnRef>
+            <a:fillRef idx="1">
+              <a:schemeClr val="accent1"/>
+            </a:fillRef>
+            <a:effectRef idx="0">
+              <a:schemeClr val="accent1"/>
+            </a:effectRef>
+            <a:fontRef idx="minor">
+              <a:schemeClr val="lt1"/>
+            </a:fontRef>
+          </p:style>
+          <p:txBody>
+            <a:bodyPr rtlCol="0" anchor="ctr" anchorCtr="1"/>
+            <a:lstStyle/>
+            <a:p>
+              <a:pPr algn="ctr"/>
+              <a:endParaRPr lang="zh-CN" altLang="en-US" dirty="0" err="1">
+                <a:solidFill>
+                  <a:schemeClr val="tx1"/>
+                </a:solidFill>
+                <a:latin typeface="Times New Roman" panose="02020603050405020304" pitchFamily="18" charset="0"/>
+                <a:ea typeface="宋体" panose="02010600030101010101" pitchFamily="2" charset="-122"/>
+              </a:endParaRPr>
+            </a:p>
+          </p:txBody>
+        </p:sp>
+        <p:grpSp>
+          <p:nvGrpSpPr>
+            <p:cNvPr id="107" name="组合 106">
+              <a:extLst>
+                <a:ext uri="{FF2B5EF4-FFF2-40B4-BE49-F238E27FC236}">
+                  <a16:creationId xmlns:a16="http://schemas.microsoft.com/office/drawing/2014/main" id="{200106F4-5ADA-2B4B-1F3C-9A24203566DF}"/>
+                </a:ext>
+              </a:extLst>
+            </p:cNvPr>
+            <p:cNvGrpSpPr/>
+            <p:nvPr/>
+          </p:nvGrpSpPr>
+          <p:grpSpPr>
+            <a:xfrm>
+              <a:off x="4902044" y="3747172"/>
+              <a:ext cx="2949340" cy="2314353"/>
+              <a:chOff x="4902044" y="3678932"/>
+              <a:chExt cx="2949340" cy="2314353"/>
+            </a:xfrm>
+          </p:grpSpPr>
+          <p:grpSp>
+            <p:nvGrpSpPr>
+              <p:cNvPr id="73" name="组合 72">
+                <a:extLst>
+                  <a:ext uri="{FF2B5EF4-FFF2-40B4-BE49-F238E27FC236}">
+                    <a16:creationId xmlns:a16="http://schemas.microsoft.com/office/drawing/2014/main" id="{7CDC2FC7-6873-C453-51E6-3A3ED8F29D84}"/>
+                  </a:ext>
+                </a:extLst>
+              </p:cNvPr>
+              <p:cNvGrpSpPr/>
+              <p:nvPr/>
+            </p:nvGrpSpPr>
+            <p:grpSpPr>
+              <a:xfrm>
+                <a:off x="4902044" y="3939354"/>
+                <a:ext cx="2949340" cy="2053931"/>
+                <a:chOff x="4889118" y="3723382"/>
+                <a:chExt cx="2949340" cy="1669480"/>
+              </a:xfrm>
+            </p:grpSpPr>
+            <p:grpSp>
+              <p:nvGrpSpPr>
+                <p:cNvPr id="62" name="组合 61">
+                  <a:extLst>
+                    <a:ext uri="{FF2B5EF4-FFF2-40B4-BE49-F238E27FC236}">
+                      <a16:creationId xmlns:a16="http://schemas.microsoft.com/office/drawing/2014/main" id="{746CF857-36F2-7EDB-49F6-030F2A76FDCF}"/>
+                    </a:ext>
+                  </a:extLst>
+                </p:cNvPr>
+                <p:cNvGrpSpPr/>
+                <p:nvPr/>
+              </p:nvGrpSpPr>
+              <p:grpSpPr>
+                <a:xfrm>
+                  <a:off x="4889118" y="3723382"/>
+                  <a:ext cx="914274" cy="1669480"/>
+                  <a:chOff x="9710928" y="2308040"/>
+                  <a:chExt cx="920496" cy="1669480"/>
+                </a:xfrm>
+              </p:grpSpPr>
+              <p:sp>
+                <p:nvSpPr>
+                  <p:cNvPr id="58" name="矩形 57">
+                    <a:extLst>
+                      <a:ext uri="{FF2B5EF4-FFF2-40B4-BE49-F238E27FC236}">
+                        <a16:creationId xmlns:a16="http://schemas.microsoft.com/office/drawing/2014/main" id="{2F44776D-E4D9-F9E7-ACF3-BB0F0DD3E8DA}"/>
+                      </a:ext>
+                    </a:extLst>
+                  </p:cNvPr>
+                  <p:cNvSpPr/>
+                  <p:nvPr/>
+                </p:nvSpPr>
+                <p:spPr>
+                  <a:xfrm>
+                    <a:off x="9710928" y="2308040"/>
+                    <a:ext cx="920496" cy="410188"/>
+                  </a:xfrm>
+                  <a:prstGeom prst="rect">
+                    <a:avLst/>
+                  </a:prstGeom>
+                  <a:noFill/>
+                  <a:ln w="19050">
+                    <a:solidFill>
+                      <a:schemeClr val="tx1"/>
+                    </a:solidFill>
+                  </a:ln>
+                </p:spPr>
+                <p:style>
+                  <a:lnRef idx="2">
+                    <a:schemeClr val="accent1">
+                      <a:shade val="15000"/>
+                    </a:schemeClr>
+                  </a:lnRef>
+                  <a:fillRef idx="1">
+                    <a:schemeClr val="accent1"/>
+                  </a:fillRef>
+                  <a:effectRef idx="0">
+                    <a:schemeClr val="accent1"/>
+                  </a:effectRef>
+                  <a:fontRef idx="minor">
+                    <a:schemeClr val="lt1"/>
+                  </a:fontRef>
+                </p:style>
+                <p:txBody>
+                  <a:bodyPr rtlCol="0" anchor="ctr" anchorCtr="0">
+                    <a:normAutofit/>
+                  </a:bodyPr>
+                  <a:lstStyle/>
+                  <a:p>
+                    <a:pPr algn="ctr"/>
+                    <a:r>
+                      <a:rPr lang="zh-CN" altLang="en-US" sz="1100" dirty="0">
+                        <a:solidFill>
+                          <a:schemeClr val="tx1"/>
+                        </a:solidFill>
+                        <a:latin typeface="Times New Roman" panose="02020603050405020304" pitchFamily="18" charset="0"/>
+                        <a:ea typeface="宋体" panose="02010600030101010101" pitchFamily="2" charset="-122"/>
+                      </a:rPr>
+                      <a:t>线性层</a:t>
+                    </a:r>
+                    <a:endParaRPr lang="en-US" altLang="zh-CN" sz="1100" dirty="0">
+                      <a:solidFill>
+                        <a:schemeClr val="tx1"/>
+                      </a:solidFill>
+                      <a:latin typeface="Times New Roman" panose="02020603050405020304" pitchFamily="18" charset="0"/>
+                      <a:ea typeface="宋体" panose="02010600030101010101" pitchFamily="2" charset="-122"/>
+                    </a:endParaRPr>
+                  </a:p>
+                  <a:p>
+                    <a:pPr algn="ctr"/>
+                    <a:r>
+                      <a:rPr lang="en-US" altLang="zh-CN" sz="1100" dirty="0">
+                        <a:solidFill>
+                          <a:schemeClr val="tx1"/>
+                        </a:solidFill>
+                        <a:latin typeface="Times New Roman" panose="02020603050405020304" pitchFamily="18" charset="0"/>
+                        <a:ea typeface="宋体" panose="02010600030101010101" pitchFamily="2" charset="-122"/>
+                      </a:rPr>
+                      <a:t>FC128</a:t>
+                    </a:r>
+                    <a:endParaRPr lang="zh-CN" altLang="en-US" sz="1100" dirty="0" err="1">
+                      <a:solidFill>
+                        <a:schemeClr val="tx1"/>
+                      </a:solidFill>
+                      <a:latin typeface="Times New Roman" panose="02020603050405020304" pitchFamily="18" charset="0"/>
+                      <a:ea typeface="宋体" panose="02010600030101010101" pitchFamily="2" charset="-122"/>
+                    </a:endParaRPr>
+                  </a:p>
+                </p:txBody>
+              </p:sp>
+              <p:sp>
+                <p:nvSpPr>
+                  <p:cNvPr id="59" name="矩形 58">
+                    <a:extLst>
+                      <a:ext uri="{FF2B5EF4-FFF2-40B4-BE49-F238E27FC236}">
+                        <a16:creationId xmlns:a16="http://schemas.microsoft.com/office/drawing/2014/main" id="{026F9296-CA64-E0F7-F34E-F26DDFEEE2FE}"/>
+                      </a:ext>
+                    </a:extLst>
+                  </p:cNvPr>
+                  <p:cNvSpPr/>
+                  <p:nvPr/>
+                </p:nvSpPr>
+                <p:spPr>
+                  <a:xfrm>
+                    <a:off x="9710928" y="2727804"/>
+                    <a:ext cx="920496" cy="410188"/>
+                  </a:xfrm>
+                  <a:prstGeom prst="rect">
+                    <a:avLst/>
+                  </a:prstGeom>
+                  <a:noFill/>
+                  <a:ln w="19050">
+                    <a:solidFill>
+                      <a:schemeClr val="tx1"/>
+                    </a:solidFill>
+                  </a:ln>
+                </p:spPr>
+                <p:style>
+                  <a:lnRef idx="2">
+                    <a:schemeClr val="accent1">
+                      <a:shade val="15000"/>
+                    </a:schemeClr>
+                  </a:lnRef>
+                  <a:fillRef idx="1">
+                    <a:schemeClr val="accent1"/>
+                  </a:fillRef>
+                  <a:effectRef idx="0">
+                    <a:schemeClr val="accent1"/>
+                  </a:effectRef>
+                  <a:fontRef idx="minor">
+                    <a:schemeClr val="lt1"/>
+                  </a:fontRef>
+                </p:style>
+                <p:txBody>
+                  <a:bodyPr rtlCol="0" anchor="ctr" anchorCtr="0">
+                    <a:normAutofit/>
+                  </a:bodyPr>
+                  <a:lstStyle/>
+                  <a:p>
+                    <a:pPr algn="ctr"/>
+                    <a:r>
+                      <a:rPr lang="zh-CN" altLang="en-US" sz="1100" dirty="0">
+                        <a:solidFill>
+                          <a:schemeClr val="tx1"/>
+                        </a:solidFill>
+                        <a:latin typeface="Times New Roman" panose="02020603050405020304" pitchFamily="18" charset="0"/>
+                        <a:ea typeface="宋体" panose="02010600030101010101" pitchFamily="2" charset="-122"/>
+                      </a:rPr>
+                      <a:t>归一化层</a:t>
+                    </a:r>
+                    <a:endParaRPr lang="en-US" altLang="zh-CN" sz="1100" dirty="0">
+                      <a:solidFill>
+                        <a:schemeClr val="tx1"/>
+                      </a:solidFill>
+                      <a:latin typeface="Times New Roman" panose="02020603050405020304" pitchFamily="18" charset="0"/>
+                      <a:ea typeface="宋体" panose="02010600030101010101" pitchFamily="2" charset="-122"/>
+                    </a:endParaRPr>
+                  </a:p>
+                  <a:p>
+                    <a:pPr algn="ctr"/>
+                    <a:r>
+                      <a:rPr lang="en-US" altLang="zh-CN" sz="1100" dirty="0" err="1">
+                        <a:solidFill>
+                          <a:schemeClr val="tx1"/>
+                        </a:solidFill>
+                        <a:latin typeface="Times New Roman" panose="02020603050405020304" pitchFamily="18" charset="0"/>
+                        <a:ea typeface="宋体" panose="02010600030101010101" pitchFamily="2" charset="-122"/>
+                      </a:rPr>
+                      <a:t>LayerNorm</a:t>
+                    </a:r>
+                    <a:endParaRPr lang="zh-CN" altLang="en-US" sz="1100" dirty="0" err="1">
+                      <a:solidFill>
+                        <a:schemeClr val="tx1"/>
+                      </a:solidFill>
+                      <a:latin typeface="Times New Roman" panose="02020603050405020304" pitchFamily="18" charset="0"/>
+                      <a:ea typeface="宋体" panose="02010600030101010101" pitchFamily="2" charset="-122"/>
+                    </a:endParaRPr>
+                  </a:p>
+                </p:txBody>
+              </p:sp>
+              <p:sp>
+                <p:nvSpPr>
+                  <p:cNvPr id="60" name="矩形 59">
+                    <a:extLst>
+                      <a:ext uri="{FF2B5EF4-FFF2-40B4-BE49-F238E27FC236}">
+                        <a16:creationId xmlns:a16="http://schemas.microsoft.com/office/drawing/2014/main" id="{FD89E1A8-D85E-2CBC-3564-BCB1249DCE8A}"/>
+                      </a:ext>
+                    </a:extLst>
+                  </p:cNvPr>
+                  <p:cNvSpPr/>
+                  <p:nvPr/>
+                </p:nvSpPr>
+                <p:spPr>
+                  <a:xfrm>
+                    <a:off x="9710928" y="3147568"/>
+                    <a:ext cx="920496" cy="410188"/>
+                  </a:xfrm>
+                  <a:prstGeom prst="rect">
+                    <a:avLst/>
+                  </a:prstGeom>
+                  <a:noFill/>
+                  <a:ln w="19050">
+                    <a:solidFill>
+                      <a:schemeClr val="tx1"/>
+                    </a:solidFill>
+                  </a:ln>
+                </p:spPr>
+                <p:style>
+                  <a:lnRef idx="2">
+                    <a:schemeClr val="accent1">
+                      <a:shade val="15000"/>
+                    </a:schemeClr>
+                  </a:lnRef>
+                  <a:fillRef idx="1">
+                    <a:schemeClr val="accent1"/>
+                  </a:fillRef>
+                  <a:effectRef idx="0">
+                    <a:schemeClr val="accent1"/>
+                  </a:effectRef>
+                  <a:fontRef idx="minor">
+                    <a:schemeClr val="lt1"/>
+                  </a:fontRef>
+                </p:style>
+                <p:txBody>
+                  <a:bodyPr rtlCol="0" anchor="ctr" anchorCtr="0">
+                    <a:normAutofit/>
+                  </a:bodyPr>
+                  <a:lstStyle/>
+                  <a:p>
+                    <a:pPr algn="ctr"/>
+                    <a:r>
+                      <a:rPr lang="zh-CN" altLang="en-US" sz="1100" dirty="0">
+                        <a:solidFill>
+                          <a:schemeClr val="tx1"/>
+                        </a:solidFill>
+                        <a:latin typeface="Times New Roman" panose="02020603050405020304" pitchFamily="18" charset="0"/>
+                        <a:ea typeface="宋体" panose="02010600030101010101" pitchFamily="2" charset="-122"/>
+                      </a:rPr>
+                      <a:t>非线性激活</a:t>
+                    </a:r>
+                    <a:endParaRPr lang="en-US" altLang="zh-CN" sz="1100" dirty="0">
+                      <a:solidFill>
+                        <a:schemeClr val="tx1"/>
+                      </a:solidFill>
+                      <a:latin typeface="Times New Roman" panose="02020603050405020304" pitchFamily="18" charset="0"/>
+                      <a:ea typeface="宋体" panose="02010600030101010101" pitchFamily="2" charset="-122"/>
+                    </a:endParaRPr>
+                  </a:p>
+                  <a:p>
+                    <a:pPr algn="ctr"/>
+                    <a:r>
+                      <a:rPr lang="en-US" altLang="zh-CN" sz="1100" dirty="0">
+                        <a:solidFill>
+                          <a:schemeClr val="tx1"/>
+                        </a:solidFill>
+                        <a:latin typeface="Times New Roman" panose="02020603050405020304" pitchFamily="18" charset="0"/>
+                        <a:ea typeface="宋体" panose="02010600030101010101" pitchFamily="2" charset="-122"/>
+                      </a:rPr>
+                      <a:t>GELU</a:t>
+                    </a:r>
+                    <a:endParaRPr lang="zh-CN" altLang="en-US" sz="1100" dirty="0" err="1">
+                      <a:solidFill>
+                        <a:schemeClr val="tx1"/>
+                      </a:solidFill>
+                      <a:latin typeface="Times New Roman" panose="02020603050405020304" pitchFamily="18" charset="0"/>
+                      <a:ea typeface="宋体" panose="02010600030101010101" pitchFamily="2" charset="-122"/>
+                    </a:endParaRPr>
+                  </a:p>
+                </p:txBody>
+              </p:sp>
+              <p:sp>
+                <p:nvSpPr>
+                  <p:cNvPr id="61" name="矩形 60">
+                    <a:extLst>
+                      <a:ext uri="{FF2B5EF4-FFF2-40B4-BE49-F238E27FC236}">
+                        <a16:creationId xmlns:a16="http://schemas.microsoft.com/office/drawing/2014/main" id="{AFA50921-B47A-D60C-195D-BE2B8ECC6CFE}"/>
+                      </a:ext>
+                    </a:extLst>
+                  </p:cNvPr>
+                  <p:cNvSpPr/>
+                  <p:nvPr/>
+                </p:nvSpPr>
+                <p:spPr>
+                  <a:xfrm>
+                    <a:off x="9710928" y="3567332"/>
+                    <a:ext cx="920496" cy="410188"/>
+                  </a:xfrm>
+                  <a:prstGeom prst="rect">
+                    <a:avLst/>
+                  </a:prstGeom>
+                  <a:noFill/>
+                  <a:ln w="19050">
+                    <a:solidFill>
+                      <a:schemeClr val="tx1"/>
+                    </a:solidFill>
+                  </a:ln>
+                </p:spPr>
+                <p:style>
+                  <a:lnRef idx="2">
+                    <a:schemeClr val="accent1">
+                      <a:shade val="15000"/>
+                    </a:schemeClr>
+                  </a:lnRef>
+                  <a:fillRef idx="1">
+                    <a:schemeClr val="accent1"/>
+                  </a:fillRef>
+                  <a:effectRef idx="0">
+                    <a:schemeClr val="accent1"/>
+                  </a:effectRef>
+                  <a:fontRef idx="minor">
+                    <a:schemeClr val="lt1"/>
+                  </a:fontRef>
+                </p:style>
+                <p:txBody>
+                  <a:bodyPr rtlCol="0" anchor="ctr" anchorCtr="0">
+                    <a:normAutofit/>
+                  </a:bodyPr>
+                  <a:lstStyle/>
+                  <a:p>
+                    <a:pPr algn="ctr"/>
+                    <a:r>
+                      <a:rPr lang="zh-CN" altLang="en-US" sz="1100" dirty="0">
+                        <a:solidFill>
+                          <a:schemeClr val="tx1"/>
+                        </a:solidFill>
+                        <a:latin typeface="Times New Roman" panose="02020603050405020304" pitchFamily="18" charset="0"/>
+                        <a:ea typeface="宋体" panose="02010600030101010101" pitchFamily="2" charset="-122"/>
+                      </a:rPr>
+                      <a:t>池化层</a:t>
+                    </a:r>
+                    <a:endParaRPr lang="en-US" altLang="zh-CN" sz="1100" dirty="0">
+                      <a:solidFill>
+                        <a:schemeClr val="tx1"/>
+                      </a:solidFill>
+                      <a:latin typeface="Times New Roman" panose="02020603050405020304" pitchFamily="18" charset="0"/>
+                      <a:ea typeface="宋体" panose="02010600030101010101" pitchFamily="2" charset="-122"/>
+                    </a:endParaRPr>
+                  </a:p>
+                  <a:p>
+                    <a:pPr algn="ctr"/>
+                    <a:r>
+                      <a:rPr lang="en-US" altLang="zh-CN" sz="1100" dirty="0">
+                        <a:solidFill>
+                          <a:schemeClr val="tx1"/>
+                        </a:solidFill>
+                        <a:latin typeface="Times New Roman" panose="02020603050405020304" pitchFamily="18" charset="0"/>
+                        <a:ea typeface="宋体" panose="02010600030101010101" pitchFamily="2" charset="-122"/>
+                      </a:rPr>
+                      <a:t>Dropout(0.1)</a:t>
+                    </a:r>
+                    <a:endParaRPr lang="zh-CN" altLang="en-US" sz="1100" dirty="0" err="1">
+                      <a:solidFill>
+                        <a:schemeClr val="tx1"/>
+                      </a:solidFill>
+                      <a:latin typeface="Times New Roman" panose="02020603050405020304" pitchFamily="18" charset="0"/>
+                      <a:ea typeface="宋体" panose="02010600030101010101" pitchFamily="2" charset="-122"/>
+                    </a:endParaRPr>
+                  </a:p>
+                </p:txBody>
+              </p:sp>
+            </p:grpSp>
+            <p:grpSp>
+              <p:nvGrpSpPr>
+                <p:cNvPr id="63" name="组合 62">
+                  <a:extLst>
+                    <a:ext uri="{FF2B5EF4-FFF2-40B4-BE49-F238E27FC236}">
+                      <a16:creationId xmlns:a16="http://schemas.microsoft.com/office/drawing/2014/main" id="{A187E5AA-238B-AA3C-0D68-538660031E8D}"/>
+                    </a:ext>
+                  </a:extLst>
+                </p:cNvPr>
+                <p:cNvGrpSpPr/>
+                <p:nvPr/>
+              </p:nvGrpSpPr>
+              <p:grpSpPr>
+                <a:xfrm>
+                  <a:off x="5906651" y="3723382"/>
+                  <a:ext cx="914274" cy="1669480"/>
+                  <a:chOff x="9710928" y="2308040"/>
+                  <a:chExt cx="920496" cy="1669480"/>
+                </a:xfrm>
+              </p:grpSpPr>
+              <p:sp>
+                <p:nvSpPr>
+                  <p:cNvPr id="64" name="矩形 63">
+                    <a:extLst>
+                      <a:ext uri="{FF2B5EF4-FFF2-40B4-BE49-F238E27FC236}">
+                        <a16:creationId xmlns:a16="http://schemas.microsoft.com/office/drawing/2014/main" id="{ADB1D238-7326-62D0-802F-ACA5F40C5BCD}"/>
+                      </a:ext>
+                    </a:extLst>
+                  </p:cNvPr>
+                  <p:cNvSpPr/>
+                  <p:nvPr/>
+                </p:nvSpPr>
+                <p:spPr>
+                  <a:xfrm>
+                    <a:off x="9710928" y="2308040"/>
+                    <a:ext cx="920496" cy="410188"/>
+                  </a:xfrm>
+                  <a:prstGeom prst="rect">
+                    <a:avLst/>
+                  </a:prstGeom>
+                  <a:noFill/>
+                  <a:ln w="19050">
+                    <a:solidFill>
+                      <a:schemeClr val="tx1"/>
+                    </a:solidFill>
+                  </a:ln>
+                </p:spPr>
+                <p:style>
+                  <a:lnRef idx="2">
+                    <a:schemeClr val="accent1">
+                      <a:shade val="15000"/>
+                    </a:schemeClr>
+                  </a:lnRef>
+                  <a:fillRef idx="1">
+                    <a:schemeClr val="accent1"/>
+                  </a:fillRef>
+                  <a:effectRef idx="0">
+                    <a:schemeClr val="accent1"/>
+                  </a:effectRef>
+                  <a:fontRef idx="minor">
+                    <a:schemeClr val="lt1"/>
+                  </a:fontRef>
+                </p:style>
+                <p:txBody>
+                  <a:bodyPr rtlCol="0" anchor="ctr" anchorCtr="0">
+                    <a:normAutofit/>
+                  </a:bodyPr>
+                  <a:lstStyle/>
+                  <a:p>
+                    <a:pPr algn="ctr"/>
+                    <a:r>
+                      <a:rPr lang="zh-CN" altLang="en-US" sz="1100" dirty="0">
+                        <a:solidFill>
+                          <a:schemeClr val="tx1"/>
+                        </a:solidFill>
+                        <a:latin typeface="Times New Roman" panose="02020603050405020304" pitchFamily="18" charset="0"/>
+                        <a:ea typeface="宋体" panose="02010600030101010101" pitchFamily="2" charset="-122"/>
+                      </a:rPr>
+                      <a:t>线性层</a:t>
+                    </a:r>
+                    <a:endParaRPr lang="en-US" altLang="zh-CN" sz="1100" dirty="0">
+                      <a:solidFill>
+                        <a:schemeClr val="tx1"/>
+                      </a:solidFill>
+                      <a:latin typeface="Times New Roman" panose="02020603050405020304" pitchFamily="18" charset="0"/>
+                      <a:ea typeface="宋体" panose="02010600030101010101" pitchFamily="2" charset="-122"/>
+                    </a:endParaRPr>
+                  </a:p>
+                  <a:p>
+                    <a:pPr algn="ctr"/>
+                    <a:r>
+                      <a:rPr lang="en-US" altLang="zh-CN" sz="1100" dirty="0">
+                        <a:solidFill>
+                          <a:schemeClr val="tx1"/>
+                        </a:solidFill>
+                        <a:latin typeface="Times New Roman" panose="02020603050405020304" pitchFamily="18" charset="0"/>
+                        <a:ea typeface="宋体" panose="02010600030101010101" pitchFamily="2" charset="-122"/>
+                      </a:rPr>
+                      <a:t>FC128</a:t>
+                    </a:r>
+                    <a:endParaRPr lang="zh-CN" altLang="en-US" sz="1100" dirty="0" err="1">
+                      <a:solidFill>
+                        <a:schemeClr val="tx1"/>
+                      </a:solidFill>
+                      <a:latin typeface="Times New Roman" panose="02020603050405020304" pitchFamily="18" charset="0"/>
+                      <a:ea typeface="宋体" panose="02010600030101010101" pitchFamily="2" charset="-122"/>
+                    </a:endParaRPr>
+                  </a:p>
+                </p:txBody>
+              </p:sp>
+              <p:sp>
+                <p:nvSpPr>
+                  <p:cNvPr id="65" name="矩形 64">
+                    <a:extLst>
+                      <a:ext uri="{FF2B5EF4-FFF2-40B4-BE49-F238E27FC236}">
+                        <a16:creationId xmlns:a16="http://schemas.microsoft.com/office/drawing/2014/main" id="{550312D8-71DD-1E3F-3422-C5936E362932}"/>
+                      </a:ext>
+                    </a:extLst>
+                  </p:cNvPr>
+                  <p:cNvSpPr/>
+                  <p:nvPr/>
+                </p:nvSpPr>
+                <p:spPr>
+                  <a:xfrm>
+                    <a:off x="9710928" y="2727804"/>
+                    <a:ext cx="920496" cy="410188"/>
+                  </a:xfrm>
+                  <a:prstGeom prst="rect">
+                    <a:avLst/>
+                  </a:prstGeom>
+                  <a:noFill/>
+                  <a:ln w="19050">
+                    <a:solidFill>
+                      <a:schemeClr val="tx1"/>
+                    </a:solidFill>
+                  </a:ln>
+                </p:spPr>
+                <p:style>
+                  <a:lnRef idx="2">
+                    <a:schemeClr val="accent1">
+                      <a:shade val="15000"/>
+                    </a:schemeClr>
+                  </a:lnRef>
+                  <a:fillRef idx="1">
+                    <a:schemeClr val="accent1"/>
+                  </a:fillRef>
+                  <a:effectRef idx="0">
+                    <a:schemeClr val="accent1"/>
+                  </a:effectRef>
+                  <a:fontRef idx="minor">
+                    <a:schemeClr val="lt1"/>
+                  </a:fontRef>
+                </p:style>
+                <p:txBody>
+                  <a:bodyPr rtlCol="0" anchor="ctr" anchorCtr="0">
+                    <a:normAutofit/>
+                  </a:bodyPr>
+                  <a:lstStyle/>
+                  <a:p>
+                    <a:pPr algn="ctr"/>
+                    <a:r>
+                      <a:rPr lang="zh-CN" altLang="en-US" sz="1100" dirty="0">
+                        <a:solidFill>
+                          <a:schemeClr val="tx1"/>
+                        </a:solidFill>
+                        <a:latin typeface="Times New Roman" panose="02020603050405020304" pitchFamily="18" charset="0"/>
+                        <a:ea typeface="宋体" panose="02010600030101010101" pitchFamily="2" charset="-122"/>
+                      </a:rPr>
+                      <a:t>归一化层</a:t>
+                    </a:r>
+                    <a:endParaRPr lang="en-US" altLang="zh-CN" sz="1100" dirty="0">
+                      <a:solidFill>
+                        <a:schemeClr val="tx1"/>
+                      </a:solidFill>
+                      <a:latin typeface="Times New Roman" panose="02020603050405020304" pitchFamily="18" charset="0"/>
+                      <a:ea typeface="宋体" panose="02010600030101010101" pitchFamily="2" charset="-122"/>
+                    </a:endParaRPr>
+                  </a:p>
+                  <a:p>
+                    <a:pPr algn="ctr"/>
+                    <a:r>
+                      <a:rPr lang="en-US" altLang="zh-CN" sz="1100" dirty="0" err="1">
+                        <a:solidFill>
+                          <a:schemeClr val="tx1"/>
+                        </a:solidFill>
+                        <a:latin typeface="Times New Roman" panose="02020603050405020304" pitchFamily="18" charset="0"/>
+                        <a:ea typeface="宋体" panose="02010600030101010101" pitchFamily="2" charset="-122"/>
+                      </a:rPr>
+                      <a:t>LayerNorm</a:t>
+                    </a:r>
+                    <a:endParaRPr lang="zh-CN" altLang="en-US" sz="1100" dirty="0" err="1">
+                      <a:solidFill>
+                        <a:schemeClr val="tx1"/>
+                      </a:solidFill>
+                      <a:latin typeface="Times New Roman" panose="02020603050405020304" pitchFamily="18" charset="0"/>
+                      <a:ea typeface="宋体" panose="02010600030101010101" pitchFamily="2" charset="-122"/>
+                    </a:endParaRPr>
+                  </a:p>
+                </p:txBody>
+              </p:sp>
+              <p:sp>
+                <p:nvSpPr>
+                  <p:cNvPr id="66" name="矩形 65">
+                    <a:extLst>
+                      <a:ext uri="{FF2B5EF4-FFF2-40B4-BE49-F238E27FC236}">
+                        <a16:creationId xmlns:a16="http://schemas.microsoft.com/office/drawing/2014/main" id="{21CDB939-7927-BDAE-1A38-0F15ADBFB951}"/>
+                      </a:ext>
+                    </a:extLst>
+                  </p:cNvPr>
+                  <p:cNvSpPr/>
+                  <p:nvPr/>
+                </p:nvSpPr>
+                <p:spPr>
+                  <a:xfrm>
+                    <a:off x="9710928" y="3147568"/>
+                    <a:ext cx="920496" cy="410188"/>
+                  </a:xfrm>
+                  <a:prstGeom prst="rect">
+                    <a:avLst/>
+                  </a:prstGeom>
+                  <a:noFill/>
+                  <a:ln w="19050">
+                    <a:solidFill>
+                      <a:schemeClr val="tx1"/>
+                    </a:solidFill>
+                  </a:ln>
+                </p:spPr>
+                <p:style>
+                  <a:lnRef idx="2">
+                    <a:schemeClr val="accent1">
+                      <a:shade val="15000"/>
+                    </a:schemeClr>
+                  </a:lnRef>
+                  <a:fillRef idx="1">
+                    <a:schemeClr val="accent1"/>
+                  </a:fillRef>
+                  <a:effectRef idx="0">
+                    <a:schemeClr val="accent1"/>
+                  </a:effectRef>
+                  <a:fontRef idx="minor">
+                    <a:schemeClr val="lt1"/>
+                  </a:fontRef>
+                </p:style>
+                <p:txBody>
+                  <a:bodyPr rtlCol="0" anchor="ctr" anchorCtr="0">
+                    <a:normAutofit/>
+                  </a:bodyPr>
+                  <a:lstStyle/>
+                  <a:p>
+                    <a:pPr algn="ctr"/>
+                    <a:r>
+                      <a:rPr lang="zh-CN" altLang="en-US" sz="1100" dirty="0">
+                        <a:solidFill>
+                          <a:schemeClr val="tx1"/>
+                        </a:solidFill>
+                        <a:latin typeface="Times New Roman" panose="02020603050405020304" pitchFamily="18" charset="0"/>
+                        <a:ea typeface="宋体" panose="02010600030101010101" pitchFamily="2" charset="-122"/>
+                      </a:rPr>
+                      <a:t>非线性激活</a:t>
+                    </a:r>
+                    <a:endParaRPr lang="en-US" altLang="zh-CN" sz="1100" dirty="0">
+                      <a:solidFill>
+                        <a:schemeClr val="tx1"/>
+                      </a:solidFill>
+                      <a:latin typeface="Times New Roman" panose="02020603050405020304" pitchFamily="18" charset="0"/>
+                      <a:ea typeface="宋体" panose="02010600030101010101" pitchFamily="2" charset="-122"/>
+                    </a:endParaRPr>
+                  </a:p>
+                  <a:p>
+                    <a:pPr algn="ctr"/>
+                    <a:r>
+                      <a:rPr lang="en-US" altLang="zh-CN" sz="1100" dirty="0">
+                        <a:solidFill>
+                          <a:schemeClr val="tx1"/>
+                        </a:solidFill>
+                        <a:latin typeface="Times New Roman" panose="02020603050405020304" pitchFamily="18" charset="0"/>
+                        <a:ea typeface="宋体" panose="02010600030101010101" pitchFamily="2" charset="-122"/>
+                      </a:rPr>
+                      <a:t>GELU</a:t>
+                    </a:r>
+                    <a:endParaRPr lang="zh-CN" altLang="en-US" sz="1100" dirty="0" err="1">
+                      <a:solidFill>
+                        <a:schemeClr val="tx1"/>
+                      </a:solidFill>
+                      <a:latin typeface="Times New Roman" panose="02020603050405020304" pitchFamily="18" charset="0"/>
+                      <a:ea typeface="宋体" panose="02010600030101010101" pitchFamily="2" charset="-122"/>
+                    </a:endParaRPr>
+                  </a:p>
+                </p:txBody>
+              </p:sp>
+              <p:sp>
+                <p:nvSpPr>
+                  <p:cNvPr id="67" name="矩形 66">
+                    <a:extLst>
+                      <a:ext uri="{FF2B5EF4-FFF2-40B4-BE49-F238E27FC236}">
+                        <a16:creationId xmlns:a16="http://schemas.microsoft.com/office/drawing/2014/main" id="{F8C60D7D-610D-7319-6067-E2D6C5A7B247}"/>
+                      </a:ext>
+                    </a:extLst>
+                  </p:cNvPr>
+                  <p:cNvSpPr/>
+                  <p:nvPr/>
+                </p:nvSpPr>
+                <p:spPr>
+                  <a:xfrm>
+                    <a:off x="9710928" y="3567332"/>
+                    <a:ext cx="920496" cy="410188"/>
+                  </a:xfrm>
+                  <a:prstGeom prst="rect">
+                    <a:avLst/>
+                  </a:prstGeom>
+                  <a:noFill/>
+                  <a:ln w="19050">
+                    <a:solidFill>
+                      <a:schemeClr val="tx1"/>
+                    </a:solidFill>
+                  </a:ln>
+                </p:spPr>
+                <p:style>
+                  <a:lnRef idx="2">
+                    <a:schemeClr val="accent1">
+                      <a:shade val="15000"/>
+                    </a:schemeClr>
+                  </a:lnRef>
+                  <a:fillRef idx="1">
+                    <a:schemeClr val="accent1"/>
+                  </a:fillRef>
+                  <a:effectRef idx="0">
+                    <a:schemeClr val="accent1"/>
+                  </a:effectRef>
+                  <a:fontRef idx="minor">
+                    <a:schemeClr val="lt1"/>
+                  </a:fontRef>
+                </p:style>
+                <p:txBody>
+                  <a:bodyPr rtlCol="0" anchor="ctr" anchorCtr="0">
+                    <a:normAutofit/>
+                  </a:bodyPr>
+                  <a:lstStyle/>
+                  <a:p>
+                    <a:pPr algn="ctr"/>
+                    <a:r>
+                      <a:rPr lang="zh-CN" altLang="en-US" sz="1100" dirty="0">
+                        <a:solidFill>
+                          <a:schemeClr val="tx1"/>
+                        </a:solidFill>
+                        <a:latin typeface="Times New Roman" panose="02020603050405020304" pitchFamily="18" charset="0"/>
+                        <a:ea typeface="宋体" panose="02010600030101010101" pitchFamily="2" charset="-122"/>
+                      </a:rPr>
+                      <a:t>池化层</a:t>
+                    </a:r>
+                    <a:endParaRPr lang="en-US" altLang="zh-CN" sz="1100" dirty="0">
+                      <a:solidFill>
+                        <a:schemeClr val="tx1"/>
+                      </a:solidFill>
+                      <a:latin typeface="Times New Roman" panose="02020603050405020304" pitchFamily="18" charset="0"/>
+                      <a:ea typeface="宋体" panose="02010600030101010101" pitchFamily="2" charset="-122"/>
+                    </a:endParaRPr>
+                  </a:p>
+                  <a:p>
+                    <a:pPr algn="ctr"/>
+                    <a:r>
+                      <a:rPr lang="en-US" altLang="zh-CN" sz="1100" dirty="0">
+                        <a:solidFill>
+                          <a:schemeClr val="tx1"/>
+                        </a:solidFill>
+                        <a:latin typeface="Times New Roman" panose="02020603050405020304" pitchFamily="18" charset="0"/>
+                        <a:ea typeface="宋体" panose="02010600030101010101" pitchFamily="2" charset="-122"/>
+                      </a:rPr>
+                      <a:t>Dropout(0.1)</a:t>
+                    </a:r>
+                    <a:endParaRPr lang="zh-CN" altLang="en-US" sz="1100" dirty="0" err="1">
+                      <a:solidFill>
+                        <a:schemeClr val="tx1"/>
+                      </a:solidFill>
+                      <a:latin typeface="Times New Roman" panose="02020603050405020304" pitchFamily="18" charset="0"/>
+                      <a:ea typeface="宋体" panose="02010600030101010101" pitchFamily="2" charset="-122"/>
+                    </a:endParaRPr>
+                  </a:p>
+                </p:txBody>
+              </p:sp>
+            </p:grpSp>
+            <p:grpSp>
+              <p:nvGrpSpPr>
+                <p:cNvPr id="68" name="组合 67">
+                  <a:extLst>
+                    <a:ext uri="{FF2B5EF4-FFF2-40B4-BE49-F238E27FC236}">
+                      <a16:creationId xmlns:a16="http://schemas.microsoft.com/office/drawing/2014/main" id="{F6C8EA70-1AF8-AB5A-9D81-3223BEB36958}"/>
+                    </a:ext>
+                  </a:extLst>
+                </p:cNvPr>
+                <p:cNvGrpSpPr/>
+                <p:nvPr/>
+              </p:nvGrpSpPr>
+              <p:grpSpPr>
+                <a:xfrm>
+                  <a:off x="6924184" y="3723382"/>
+                  <a:ext cx="914274" cy="1669480"/>
+                  <a:chOff x="9710928" y="2308040"/>
+                  <a:chExt cx="920496" cy="1669480"/>
+                </a:xfrm>
+              </p:grpSpPr>
+              <p:sp>
+                <p:nvSpPr>
+                  <p:cNvPr id="69" name="矩形 68">
+                    <a:extLst>
+                      <a:ext uri="{FF2B5EF4-FFF2-40B4-BE49-F238E27FC236}">
+                        <a16:creationId xmlns:a16="http://schemas.microsoft.com/office/drawing/2014/main" id="{3E9686A9-A365-874B-4EDC-6BD7A69DA16A}"/>
+                      </a:ext>
+                    </a:extLst>
+                  </p:cNvPr>
+                  <p:cNvSpPr/>
+                  <p:nvPr/>
+                </p:nvSpPr>
+                <p:spPr>
+                  <a:xfrm>
+                    <a:off x="9710928" y="2308040"/>
+                    <a:ext cx="920496" cy="410188"/>
+                  </a:xfrm>
+                  <a:prstGeom prst="rect">
+                    <a:avLst/>
+                  </a:prstGeom>
+                  <a:noFill/>
+                  <a:ln w="19050">
+                    <a:solidFill>
+                      <a:schemeClr val="tx1"/>
+                    </a:solidFill>
+                  </a:ln>
+                </p:spPr>
+                <p:style>
+                  <a:lnRef idx="2">
+                    <a:schemeClr val="accent1">
+                      <a:shade val="15000"/>
+                    </a:schemeClr>
+                  </a:lnRef>
+                  <a:fillRef idx="1">
+                    <a:schemeClr val="accent1"/>
+                  </a:fillRef>
+                  <a:effectRef idx="0">
+                    <a:schemeClr val="accent1"/>
+                  </a:effectRef>
+                  <a:fontRef idx="minor">
+                    <a:schemeClr val="lt1"/>
+                  </a:fontRef>
+                </p:style>
+                <p:txBody>
+                  <a:bodyPr rtlCol="0" anchor="ctr" anchorCtr="0">
+                    <a:normAutofit/>
+                  </a:bodyPr>
+                  <a:lstStyle/>
+                  <a:p>
+                    <a:pPr algn="ctr"/>
+                    <a:r>
+                      <a:rPr lang="zh-CN" altLang="en-US" sz="1100" dirty="0">
+                        <a:solidFill>
+                          <a:schemeClr val="tx1"/>
+                        </a:solidFill>
+                        <a:latin typeface="Times New Roman" panose="02020603050405020304" pitchFamily="18" charset="0"/>
+                        <a:ea typeface="宋体" panose="02010600030101010101" pitchFamily="2" charset="-122"/>
+                      </a:rPr>
+                      <a:t>线性层</a:t>
+                    </a:r>
+                    <a:endParaRPr lang="en-US" altLang="zh-CN" sz="1100" dirty="0">
+                      <a:solidFill>
+                        <a:schemeClr val="tx1"/>
+                      </a:solidFill>
+                      <a:latin typeface="Times New Roman" panose="02020603050405020304" pitchFamily="18" charset="0"/>
+                      <a:ea typeface="宋体" panose="02010600030101010101" pitchFamily="2" charset="-122"/>
+                    </a:endParaRPr>
+                  </a:p>
+                  <a:p>
+                    <a:pPr algn="ctr"/>
+                    <a:r>
+                      <a:rPr lang="en-US" altLang="zh-CN" sz="1100" dirty="0">
+                        <a:solidFill>
+                          <a:schemeClr val="tx1"/>
+                        </a:solidFill>
+                        <a:latin typeface="Times New Roman" panose="02020603050405020304" pitchFamily="18" charset="0"/>
+                        <a:ea typeface="宋体" panose="02010600030101010101" pitchFamily="2" charset="-122"/>
+                      </a:rPr>
+                      <a:t>FC128</a:t>
+                    </a:r>
+                    <a:endParaRPr lang="zh-CN" altLang="en-US" sz="1100" dirty="0" err="1">
+                      <a:solidFill>
+                        <a:schemeClr val="tx1"/>
+                      </a:solidFill>
+                      <a:latin typeface="Times New Roman" panose="02020603050405020304" pitchFamily="18" charset="0"/>
+                      <a:ea typeface="宋体" panose="02010600030101010101" pitchFamily="2" charset="-122"/>
+                    </a:endParaRPr>
+                  </a:p>
+                </p:txBody>
+              </p:sp>
+              <p:sp>
+                <p:nvSpPr>
+                  <p:cNvPr id="70" name="矩形 69">
+                    <a:extLst>
+                      <a:ext uri="{FF2B5EF4-FFF2-40B4-BE49-F238E27FC236}">
+                        <a16:creationId xmlns:a16="http://schemas.microsoft.com/office/drawing/2014/main" id="{1F043644-1141-6824-B3D4-F050444C4F71}"/>
+                      </a:ext>
+                    </a:extLst>
+                  </p:cNvPr>
+                  <p:cNvSpPr/>
+                  <p:nvPr/>
+                </p:nvSpPr>
+                <p:spPr>
+                  <a:xfrm>
+                    <a:off x="9710928" y="2727804"/>
+                    <a:ext cx="920496" cy="410188"/>
+                  </a:xfrm>
+                  <a:prstGeom prst="rect">
+                    <a:avLst/>
+                  </a:prstGeom>
+                  <a:noFill/>
+                  <a:ln w="19050">
+                    <a:solidFill>
+                      <a:schemeClr val="tx1"/>
+                    </a:solidFill>
+                  </a:ln>
+                </p:spPr>
+                <p:style>
+                  <a:lnRef idx="2">
+                    <a:schemeClr val="accent1">
+                      <a:shade val="15000"/>
+                    </a:schemeClr>
+                  </a:lnRef>
+                  <a:fillRef idx="1">
+                    <a:schemeClr val="accent1"/>
+                  </a:fillRef>
+                  <a:effectRef idx="0">
+                    <a:schemeClr val="accent1"/>
+                  </a:effectRef>
+                  <a:fontRef idx="minor">
+                    <a:schemeClr val="lt1"/>
+                  </a:fontRef>
+                </p:style>
+                <p:txBody>
+                  <a:bodyPr rtlCol="0" anchor="ctr" anchorCtr="0">
+                    <a:normAutofit/>
+                  </a:bodyPr>
+                  <a:lstStyle/>
+                  <a:p>
+                    <a:pPr algn="ctr"/>
+                    <a:r>
+                      <a:rPr lang="zh-CN" altLang="en-US" sz="1100" dirty="0">
+                        <a:solidFill>
+                          <a:schemeClr val="tx1"/>
+                        </a:solidFill>
+                        <a:latin typeface="Times New Roman" panose="02020603050405020304" pitchFamily="18" charset="0"/>
+                        <a:ea typeface="宋体" panose="02010600030101010101" pitchFamily="2" charset="-122"/>
+                      </a:rPr>
+                      <a:t>归一化层</a:t>
+                    </a:r>
+                    <a:endParaRPr lang="en-US" altLang="zh-CN" sz="1100" dirty="0">
+                      <a:solidFill>
+                        <a:schemeClr val="tx1"/>
+                      </a:solidFill>
+                      <a:latin typeface="Times New Roman" panose="02020603050405020304" pitchFamily="18" charset="0"/>
+                      <a:ea typeface="宋体" panose="02010600030101010101" pitchFamily="2" charset="-122"/>
+                    </a:endParaRPr>
+                  </a:p>
+                  <a:p>
+                    <a:pPr algn="ctr"/>
+                    <a:r>
+                      <a:rPr lang="en-US" altLang="zh-CN" sz="1100" dirty="0" err="1">
+                        <a:solidFill>
+                          <a:schemeClr val="tx1"/>
+                        </a:solidFill>
+                        <a:latin typeface="Times New Roman" panose="02020603050405020304" pitchFamily="18" charset="0"/>
+                        <a:ea typeface="宋体" panose="02010600030101010101" pitchFamily="2" charset="-122"/>
+                      </a:rPr>
+                      <a:t>LayerNorm</a:t>
+                    </a:r>
+                    <a:endParaRPr lang="zh-CN" altLang="en-US" sz="1100" dirty="0" err="1">
+                      <a:solidFill>
+                        <a:schemeClr val="tx1"/>
+                      </a:solidFill>
+                      <a:latin typeface="Times New Roman" panose="02020603050405020304" pitchFamily="18" charset="0"/>
+                      <a:ea typeface="宋体" panose="02010600030101010101" pitchFamily="2" charset="-122"/>
+                    </a:endParaRPr>
+                  </a:p>
+                </p:txBody>
+              </p:sp>
+              <p:sp>
+                <p:nvSpPr>
+                  <p:cNvPr id="71" name="矩形 70">
+                    <a:extLst>
+                      <a:ext uri="{FF2B5EF4-FFF2-40B4-BE49-F238E27FC236}">
+                        <a16:creationId xmlns:a16="http://schemas.microsoft.com/office/drawing/2014/main" id="{F1F4BE2A-92B8-3E50-C1C9-8ABFDB412C8E}"/>
+                      </a:ext>
+                    </a:extLst>
+                  </p:cNvPr>
+                  <p:cNvSpPr/>
+                  <p:nvPr/>
+                </p:nvSpPr>
+                <p:spPr>
+                  <a:xfrm>
+                    <a:off x="9710928" y="3147568"/>
+                    <a:ext cx="920496" cy="410188"/>
+                  </a:xfrm>
+                  <a:prstGeom prst="rect">
+                    <a:avLst/>
+                  </a:prstGeom>
+                  <a:noFill/>
+                  <a:ln w="19050">
+                    <a:solidFill>
+                      <a:schemeClr val="tx1"/>
+                    </a:solidFill>
+                  </a:ln>
+                </p:spPr>
+                <p:style>
+                  <a:lnRef idx="2">
+                    <a:schemeClr val="accent1">
+                      <a:shade val="15000"/>
+                    </a:schemeClr>
+                  </a:lnRef>
+                  <a:fillRef idx="1">
+                    <a:schemeClr val="accent1"/>
+                  </a:fillRef>
+                  <a:effectRef idx="0">
+                    <a:schemeClr val="accent1"/>
+                  </a:effectRef>
+                  <a:fontRef idx="minor">
+                    <a:schemeClr val="lt1"/>
+                  </a:fontRef>
+                </p:style>
+                <p:txBody>
+                  <a:bodyPr rtlCol="0" anchor="ctr" anchorCtr="0">
+                    <a:normAutofit/>
+                  </a:bodyPr>
+                  <a:lstStyle/>
+                  <a:p>
+                    <a:pPr algn="ctr"/>
+                    <a:r>
+                      <a:rPr lang="zh-CN" altLang="en-US" sz="1100" dirty="0">
+                        <a:solidFill>
+                          <a:schemeClr val="tx1"/>
+                        </a:solidFill>
+                        <a:latin typeface="Times New Roman" panose="02020603050405020304" pitchFamily="18" charset="0"/>
+                        <a:ea typeface="宋体" panose="02010600030101010101" pitchFamily="2" charset="-122"/>
+                      </a:rPr>
+                      <a:t>非线性激活</a:t>
+                    </a:r>
+                    <a:endParaRPr lang="en-US" altLang="zh-CN" sz="1100" dirty="0">
+                      <a:solidFill>
+                        <a:schemeClr val="tx1"/>
+                      </a:solidFill>
+                      <a:latin typeface="Times New Roman" panose="02020603050405020304" pitchFamily="18" charset="0"/>
+                      <a:ea typeface="宋体" panose="02010600030101010101" pitchFamily="2" charset="-122"/>
+                    </a:endParaRPr>
+                  </a:p>
+                  <a:p>
+                    <a:pPr algn="ctr"/>
+                    <a:r>
+                      <a:rPr lang="en-US" altLang="zh-CN" sz="1100" dirty="0">
+                        <a:solidFill>
+                          <a:schemeClr val="tx1"/>
+                        </a:solidFill>
+                        <a:latin typeface="Times New Roman" panose="02020603050405020304" pitchFamily="18" charset="0"/>
+                        <a:ea typeface="宋体" panose="02010600030101010101" pitchFamily="2" charset="-122"/>
+                      </a:rPr>
+                      <a:t>GELU</a:t>
+                    </a:r>
+                    <a:endParaRPr lang="zh-CN" altLang="en-US" sz="1100" dirty="0" err="1">
+                      <a:solidFill>
+                        <a:schemeClr val="tx1"/>
+                      </a:solidFill>
+                      <a:latin typeface="Times New Roman" panose="02020603050405020304" pitchFamily="18" charset="0"/>
+                      <a:ea typeface="宋体" panose="02010600030101010101" pitchFamily="2" charset="-122"/>
+                    </a:endParaRPr>
+                  </a:p>
+                </p:txBody>
+              </p:sp>
+              <p:sp>
+                <p:nvSpPr>
+                  <p:cNvPr id="72" name="矩形 71">
+                    <a:extLst>
+                      <a:ext uri="{FF2B5EF4-FFF2-40B4-BE49-F238E27FC236}">
+                        <a16:creationId xmlns:a16="http://schemas.microsoft.com/office/drawing/2014/main" id="{6D3556AD-492A-6589-688D-A2AF1F698183}"/>
+                      </a:ext>
+                    </a:extLst>
+                  </p:cNvPr>
+                  <p:cNvSpPr/>
+                  <p:nvPr/>
+                </p:nvSpPr>
+                <p:spPr>
+                  <a:xfrm>
+                    <a:off x="9710928" y="3567332"/>
+                    <a:ext cx="920496" cy="410188"/>
+                  </a:xfrm>
+                  <a:prstGeom prst="rect">
+                    <a:avLst/>
+                  </a:prstGeom>
+                  <a:noFill/>
+                  <a:ln w="19050">
+                    <a:solidFill>
+                      <a:schemeClr val="tx1"/>
+                    </a:solidFill>
+                  </a:ln>
+                </p:spPr>
+                <p:style>
+                  <a:lnRef idx="2">
+                    <a:schemeClr val="accent1">
+                      <a:shade val="15000"/>
+                    </a:schemeClr>
+                  </a:lnRef>
+                  <a:fillRef idx="1">
+                    <a:schemeClr val="accent1"/>
+                  </a:fillRef>
+                  <a:effectRef idx="0">
+                    <a:schemeClr val="accent1"/>
+                  </a:effectRef>
+                  <a:fontRef idx="minor">
+                    <a:schemeClr val="lt1"/>
+                  </a:fontRef>
+                </p:style>
+                <p:txBody>
+                  <a:bodyPr rtlCol="0" anchor="ctr" anchorCtr="0">
+                    <a:normAutofit/>
+                  </a:bodyPr>
+                  <a:lstStyle/>
+                  <a:p>
+                    <a:pPr algn="ctr"/>
+                    <a:r>
+                      <a:rPr lang="zh-CN" altLang="en-US" sz="1100" dirty="0">
+                        <a:solidFill>
+                          <a:schemeClr val="tx1"/>
+                        </a:solidFill>
+                        <a:latin typeface="Times New Roman" panose="02020603050405020304" pitchFamily="18" charset="0"/>
+                        <a:ea typeface="宋体" panose="02010600030101010101" pitchFamily="2" charset="-122"/>
+                      </a:rPr>
+                      <a:t>池化层</a:t>
+                    </a:r>
+                    <a:endParaRPr lang="en-US" altLang="zh-CN" sz="1100" dirty="0">
+                      <a:solidFill>
+                        <a:schemeClr val="tx1"/>
+                      </a:solidFill>
+                      <a:latin typeface="Times New Roman" panose="02020603050405020304" pitchFamily="18" charset="0"/>
+                      <a:ea typeface="宋体" panose="02010600030101010101" pitchFamily="2" charset="-122"/>
+                    </a:endParaRPr>
+                  </a:p>
+                  <a:p>
+                    <a:pPr algn="ctr"/>
+                    <a:r>
+                      <a:rPr lang="en-US" altLang="zh-CN" sz="1100" dirty="0">
+                        <a:solidFill>
+                          <a:schemeClr val="tx1"/>
+                        </a:solidFill>
+                        <a:latin typeface="Times New Roman" panose="02020603050405020304" pitchFamily="18" charset="0"/>
+                        <a:ea typeface="宋体" panose="02010600030101010101" pitchFamily="2" charset="-122"/>
+                      </a:rPr>
+                      <a:t>Dropout(0.1)</a:t>
+                    </a:r>
+                    <a:endParaRPr lang="zh-CN" altLang="en-US" sz="1100" dirty="0" err="1">
+                      <a:solidFill>
+                        <a:schemeClr val="tx1"/>
+                      </a:solidFill>
+                      <a:latin typeface="Times New Roman" panose="02020603050405020304" pitchFamily="18" charset="0"/>
+                      <a:ea typeface="宋体" panose="02010600030101010101" pitchFamily="2" charset="-122"/>
+                    </a:endParaRPr>
+                  </a:p>
+                </p:txBody>
+              </p:sp>
+            </p:grpSp>
+          </p:grpSp>
+          <p:sp>
+            <p:nvSpPr>
+              <p:cNvPr id="101" name="文本框 100">
+                <a:extLst>
+                  <a:ext uri="{FF2B5EF4-FFF2-40B4-BE49-F238E27FC236}">
+                    <a16:creationId xmlns:a16="http://schemas.microsoft.com/office/drawing/2014/main" id="{CAB053F7-E5CE-52DD-5C29-F8DE36A3A333}"/>
+                  </a:ext>
+                </a:extLst>
+              </p:cNvPr>
+              <p:cNvSpPr txBox="1"/>
+              <p:nvPr/>
+            </p:nvSpPr>
+            <p:spPr>
+              <a:xfrm>
+                <a:off x="7129359" y="3678932"/>
+                <a:ext cx="526609" cy="253917"/>
+              </a:xfrm>
+              <a:prstGeom prst="rect">
+                <a:avLst/>
+              </a:prstGeom>
+              <a:noFill/>
+            </p:spPr>
+            <p:txBody>
+              <a:bodyPr wrap="square" rtlCol="0" anchor="ctr" anchorCtr="1">
+                <a:spAutoFit/>
+              </a:bodyPr>
+              <a:lstStyle/>
+              <a:p>
+                <a:pPr algn="ctr"/>
+                <a:r>
+                  <a:rPr lang="en-US" altLang="zh-CN" sz="1050" dirty="0">
+                    <a:latin typeface="Times New Roman" panose="02020603050405020304" pitchFamily="18" charset="0"/>
+                    <a:ea typeface="宋体" panose="02010600030101010101" pitchFamily="2" charset="-122"/>
+                  </a:rPr>
+                  <a:t>(</a:t>
+                </a:r>
+                <a:r>
+                  <a:rPr lang="zh-CN" altLang="en-US" sz="1050" dirty="0">
+                    <a:latin typeface="Times New Roman" panose="02020603050405020304" pitchFamily="18" charset="0"/>
+                    <a:ea typeface="宋体" panose="02010600030101010101" pitchFamily="2" charset="-122"/>
+                  </a:rPr>
+                  <a:t>可选</a:t>
+                </a:r>
+                <a:r>
+                  <a:rPr lang="en-US" altLang="zh-CN" sz="1050" dirty="0">
+                    <a:latin typeface="Times New Roman" panose="02020603050405020304" pitchFamily="18" charset="0"/>
+                    <a:ea typeface="宋体" panose="02010600030101010101" pitchFamily="2" charset="-122"/>
+                  </a:rPr>
+                  <a:t>)</a:t>
+                </a:r>
+                <a:endParaRPr lang="zh-CN" altLang="en-US" sz="1050" dirty="0">
+                  <a:latin typeface="Times New Roman" panose="02020603050405020304" pitchFamily="18" charset="0"/>
+                  <a:ea typeface="宋体" panose="02010600030101010101" pitchFamily="2" charset="-122"/>
+                </a:endParaRPr>
+              </a:p>
+            </p:txBody>
+          </p:sp>
+        </p:grpSp>
+      </p:grpSp>
+    </p:spTree>
+    <p:extLst>
+      <p:ext uri="{BB962C8B-B14F-4D97-AF65-F5344CB8AC3E}">
+        <p14:creationId xmlns:p14="http://schemas.microsoft.com/office/powerpoint/2010/main" val="2972278545"/>
       </p:ext>
     </p:extLst>
   </p:cSld>
@@ -7631,7 +10967,11 @@
       <a:bodyPr rtlCol="0" anchor="ctr"/>
       <a:lstStyle>
         <a:defPPr algn="ctr">
-          <a:defRPr/>
+          <a:defRPr dirty="0" err="1" smtClean="0">
+            <a:solidFill>
+              <a:schemeClr val="tx1"/>
+            </a:solidFill>
+          </a:defRPr>
         </a:defPPr>
       </a:lstStyle>
       <a:style>
@@ -7677,6 +11017,19 @@
         </a:fontRef>
       </a:style>
     </a:lnDef>
+    <a:txDef>
+      <a:spPr>
+        <a:noFill/>
+      </a:spPr>
+      <a:bodyPr wrap="square" rtlCol="0" anchor="ctr" anchorCtr="1">
+        <a:spAutoFit/>
+      </a:bodyPr>
+      <a:lstStyle>
+        <a:defPPr algn="ctr">
+          <a:defRPr sz="1050" dirty="0" smtClean="0"/>
+        </a:defPPr>
+      </a:lstStyle>
+    </a:txDef>
   </a:objectDefaults>
   <a:extraClrSchemeLst/>
   <a:extLst>

--- a/PPT画图.pptx
+++ b/PPT画图.pptx
@@ -4,10 +4,14 @@
   <p:sldMasterIdLst>
     <p:sldMasterId id="2147483648" r:id="rId1"/>
   </p:sldMasterIdLst>
+  <p:notesMasterIdLst>
+    <p:notesMasterId r:id="rId6"/>
+  </p:notesMasterIdLst>
   <p:sldIdLst>
     <p:sldId id="257" r:id="rId2"/>
     <p:sldId id="258" r:id="rId3"/>
     <p:sldId id="259" r:id="rId4"/>
+    <p:sldId id="260" r:id="rId5"/>
   </p:sldIdLst>
   <p:sldSz cx="12192000" cy="6858000"/>
   <p:notesSz cx="6858000" cy="9144000"/>
@@ -112,6 +116,439 @@
     </p:ext>
   </p:extLst>
 </p:presentation>
+</file>
+
+<file path=ppt/notesMasters/notesMaster1.xml><?xml version="1.0" encoding="utf-8"?>
+<p:notesMaster xmlns:a="http://schemas.openxmlformats.org/drawingml/2006/main" xmlns:r="http://schemas.openxmlformats.org/officeDocument/2006/relationships" xmlns:p="http://schemas.openxmlformats.org/presentationml/2006/main">
+  <p:cSld>
+    <p:bg>
+      <p:bgRef idx="1001">
+        <a:schemeClr val="bg1"/>
+      </p:bgRef>
+    </p:bg>
+    <p:spTree>
+      <p:nvGrpSpPr>
+        <p:cNvPr id="1" name=""/>
+        <p:cNvGrpSpPr/>
+        <p:nvPr/>
+      </p:nvGrpSpPr>
+      <p:grpSpPr>
+        <a:xfrm>
+          <a:off x="0" y="0"/>
+          <a:ext cx="0" cy="0"/>
+          <a:chOff x="0" y="0"/>
+          <a:chExt cx="0" cy="0"/>
+        </a:xfrm>
+      </p:grpSpPr>
+      <p:sp>
+        <p:nvSpPr>
+          <p:cNvPr id="2" name="页眉占位符 1"/>
+          <p:cNvSpPr>
+            <a:spLocks noGrp="1"/>
+          </p:cNvSpPr>
+          <p:nvPr>
+            <p:ph type="hdr" sz="quarter"/>
+          </p:nvPr>
+        </p:nvSpPr>
+        <p:spPr>
+          <a:xfrm>
+            <a:off x="0" y="0"/>
+            <a:ext cx="2971800" cy="458788"/>
+          </a:xfrm>
+          <a:prstGeom prst="rect">
+            <a:avLst/>
+          </a:prstGeom>
+        </p:spPr>
+        <p:txBody>
+          <a:bodyPr vert="horz" lIns="91440" tIns="45720" rIns="91440" bIns="45720" rtlCol="0"/>
+          <a:lstStyle>
+            <a:lvl1pPr algn="l">
+              <a:defRPr sz="1200"/>
+            </a:lvl1pPr>
+          </a:lstStyle>
+          <a:p>
+            <a:endParaRPr lang="zh-CN" altLang="en-US"/>
+          </a:p>
+        </p:txBody>
+      </p:sp>
+      <p:sp>
+        <p:nvSpPr>
+          <p:cNvPr id="3" name="日期占位符 2"/>
+          <p:cNvSpPr>
+            <a:spLocks noGrp="1"/>
+          </p:cNvSpPr>
+          <p:nvPr>
+            <p:ph type="dt" idx="1"/>
+          </p:nvPr>
+        </p:nvSpPr>
+        <p:spPr>
+          <a:xfrm>
+            <a:off x="3884613" y="0"/>
+            <a:ext cx="2971800" cy="458788"/>
+          </a:xfrm>
+          <a:prstGeom prst="rect">
+            <a:avLst/>
+          </a:prstGeom>
+        </p:spPr>
+        <p:txBody>
+          <a:bodyPr vert="horz" lIns="91440" tIns="45720" rIns="91440" bIns="45720" rtlCol="0"/>
+          <a:lstStyle>
+            <a:lvl1pPr algn="r">
+              <a:defRPr sz="1200"/>
+            </a:lvl1pPr>
+          </a:lstStyle>
+          <a:p>
+            <a:fld id="{5C1E4601-79B1-425F-B925-3F7BE382BF19}" type="datetimeFigureOut">
+              <a:rPr lang="zh-CN" altLang="en-US" smtClean="0"/>
+              <a:t>2026/01/24</a:t>
+            </a:fld>
+            <a:endParaRPr lang="zh-CN" altLang="en-US"/>
+          </a:p>
+        </p:txBody>
+      </p:sp>
+      <p:sp>
+        <p:nvSpPr>
+          <p:cNvPr id="4" name="幻灯片图像占位符 3"/>
+          <p:cNvSpPr>
+            <a:spLocks noGrp="1" noRot="1" noChangeAspect="1"/>
+          </p:cNvSpPr>
+          <p:nvPr>
+            <p:ph type="sldImg" idx="2"/>
+          </p:nvPr>
+        </p:nvSpPr>
+        <p:spPr>
+          <a:xfrm>
+            <a:off x="685800" y="1143000"/>
+            <a:ext cx="5486400" cy="3086100"/>
+          </a:xfrm>
+          <a:prstGeom prst="rect">
+            <a:avLst/>
+          </a:prstGeom>
+          <a:noFill/>
+          <a:ln w="12700">
+            <a:solidFill>
+              <a:prstClr val="black"/>
+            </a:solidFill>
+          </a:ln>
+        </p:spPr>
+        <p:txBody>
+          <a:bodyPr vert="horz" lIns="91440" tIns="45720" rIns="91440" bIns="45720" rtlCol="0" anchor="ctr"/>
+          <a:lstStyle/>
+          <a:p>
+            <a:endParaRPr lang="zh-CN" altLang="en-US"/>
+          </a:p>
+        </p:txBody>
+      </p:sp>
+      <p:sp>
+        <p:nvSpPr>
+          <p:cNvPr id="5" name="备注占位符 4"/>
+          <p:cNvSpPr>
+            <a:spLocks noGrp="1"/>
+          </p:cNvSpPr>
+          <p:nvPr>
+            <p:ph type="body" sz="quarter" idx="3"/>
+          </p:nvPr>
+        </p:nvSpPr>
+        <p:spPr>
+          <a:xfrm>
+            <a:off x="685800" y="4400550"/>
+            <a:ext cx="5486400" cy="3600450"/>
+          </a:xfrm>
+          <a:prstGeom prst="rect">
+            <a:avLst/>
+          </a:prstGeom>
+        </p:spPr>
+        <p:txBody>
+          <a:bodyPr vert="horz" lIns="91440" tIns="45720" rIns="91440" bIns="45720" rtlCol="0"/>
+          <a:lstStyle/>
+          <a:p>
+            <a:pPr lvl="0"/>
+            <a:r>
+              <a:rPr lang="zh-CN" altLang="en-US"/>
+              <a:t>单击此处编辑母版文本样式</a:t>
+            </a:r>
+          </a:p>
+          <a:p>
+            <a:pPr lvl="1"/>
+            <a:r>
+              <a:rPr lang="zh-CN" altLang="en-US"/>
+              <a:t>二级</a:t>
+            </a:r>
+          </a:p>
+          <a:p>
+            <a:pPr lvl="2"/>
+            <a:r>
+              <a:rPr lang="zh-CN" altLang="en-US"/>
+              <a:t>三级</a:t>
+            </a:r>
+          </a:p>
+          <a:p>
+            <a:pPr lvl="3"/>
+            <a:r>
+              <a:rPr lang="zh-CN" altLang="en-US"/>
+              <a:t>四级</a:t>
+            </a:r>
+          </a:p>
+          <a:p>
+            <a:pPr lvl="4"/>
+            <a:r>
+              <a:rPr lang="zh-CN" altLang="en-US"/>
+              <a:t>五级</a:t>
+            </a:r>
+          </a:p>
+        </p:txBody>
+      </p:sp>
+      <p:sp>
+        <p:nvSpPr>
+          <p:cNvPr id="6" name="页脚占位符 5"/>
+          <p:cNvSpPr>
+            <a:spLocks noGrp="1"/>
+          </p:cNvSpPr>
+          <p:nvPr>
+            <p:ph type="ftr" sz="quarter" idx="4"/>
+          </p:nvPr>
+        </p:nvSpPr>
+        <p:spPr>
+          <a:xfrm>
+            <a:off x="0" y="8685213"/>
+            <a:ext cx="2971800" cy="458787"/>
+          </a:xfrm>
+          <a:prstGeom prst="rect">
+            <a:avLst/>
+          </a:prstGeom>
+        </p:spPr>
+        <p:txBody>
+          <a:bodyPr vert="horz" lIns="91440" tIns="45720" rIns="91440" bIns="45720" rtlCol="0" anchor="b"/>
+          <a:lstStyle>
+            <a:lvl1pPr algn="l">
+              <a:defRPr sz="1200"/>
+            </a:lvl1pPr>
+          </a:lstStyle>
+          <a:p>
+            <a:endParaRPr lang="zh-CN" altLang="en-US"/>
+          </a:p>
+        </p:txBody>
+      </p:sp>
+      <p:sp>
+        <p:nvSpPr>
+          <p:cNvPr id="7" name="灯片编号占位符 6"/>
+          <p:cNvSpPr>
+            <a:spLocks noGrp="1"/>
+          </p:cNvSpPr>
+          <p:nvPr>
+            <p:ph type="sldNum" sz="quarter" idx="5"/>
+          </p:nvPr>
+        </p:nvSpPr>
+        <p:spPr>
+          <a:xfrm>
+            <a:off x="3884613" y="8685213"/>
+            <a:ext cx="2971800" cy="458787"/>
+          </a:xfrm>
+          <a:prstGeom prst="rect">
+            <a:avLst/>
+          </a:prstGeom>
+        </p:spPr>
+        <p:txBody>
+          <a:bodyPr vert="horz" lIns="91440" tIns="45720" rIns="91440" bIns="45720" rtlCol="0" anchor="b"/>
+          <a:lstStyle>
+            <a:lvl1pPr algn="r">
+              <a:defRPr sz="1200"/>
+            </a:lvl1pPr>
+          </a:lstStyle>
+          <a:p>
+            <a:fld id="{FE798381-BA92-42C7-9348-61BD6E356AAF}" type="slidenum">
+              <a:rPr lang="zh-CN" altLang="en-US" smtClean="0"/>
+              <a:t>‹#›</a:t>
+            </a:fld>
+            <a:endParaRPr lang="zh-CN" altLang="en-US"/>
+          </a:p>
+        </p:txBody>
+      </p:sp>
+    </p:spTree>
+    <p:extLst>
+      <p:ext uri="{BB962C8B-B14F-4D97-AF65-F5344CB8AC3E}">
+        <p14:creationId xmlns:p14="http://schemas.microsoft.com/office/powerpoint/2010/main" val="2528488508"/>
+      </p:ext>
+    </p:extLst>
+  </p:cSld>
+  <p:clrMap bg1="lt1" tx1="dk1" bg2="lt2" tx2="dk2" accent1="accent1" accent2="accent2" accent3="accent3" accent4="accent4" accent5="accent5" accent6="accent6" hlink="hlink" folHlink="folHlink"/>
+  <p:notesStyle>
+    <a:lvl1pPr marL="0" algn="l" defTabSz="914400" rtl="0" eaLnBrk="1" latinLnBrk="0" hangingPunct="1">
+      <a:defRPr sz="1200" kern="1200">
+        <a:solidFill>
+          <a:schemeClr val="tx1"/>
+        </a:solidFill>
+        <a:latin typeface="+mn-lt"/>
+        <a:ea typeface="+mn-ea"/>
+        <a:cs typeface="+mn-cs"/>
+      </a:defRPr>
+    </a:lvl1pPr>
+    <a:lvl2pPr marL="457200" algn="l" defTabSz="914400" rtl="0" eaLnBrk="1" latinLnBrk="0" hangingPunct="1">
+      <a:defRPr sz="1200" kern="1200">
+        <a:solidFill>
+          <a:schemeClr val="tx1"/>
+        </a:solidFill>
+        <a:latin typeface="+mn-lt"/>
+        <a:ea typeface="+mn-ea"/>
+        <a:cs typeface="+mn-cs"/>
+      </a:defRPr>
+    </a:lvl2pPr>
+    <a:lvl3pPr marL="914400" algn="l" defTabSz="914400" rtl="0" eaLnBrk="1" latinLnBrk="0" hangingPunct="1">
+      <a:defRPr sz="1200" kern="1200">
+        <a:solidFill>
+          <a:schemeClr val="tx1"/>
+        </a:solidFill>
+        <a:latin typeface="+mn-lt"/>
+        <a:ea typeface="+mn-ea"/>
+        <a:cs typeface="+mn-cs"/>
+      </a:defRPr>
+    </a:lvl3pPr>
+    <a:lvl4pPr marL="1371600" algn="l" defTabSz="914400" rtl="0" eaLnBrk="1" latinLnBrk="0" hangingPunct="1">
+      <a:defRPr sz="1200" kern="1200">
+        <a:solidFill>
+          <a:schemeClr val="tx1"/>
+        </a:solidFill>
+        <a:latin typeface="+mn-lt"/>
+        <a:ea typeface="+mn-ea"/>
+        <a:cs typeface="+mn-cs"/>
+      </a:defRPr>
+    </a:lvl4pPr>
+    <a:lvl5pPr marL="1828800" algn="l" defTabSz="914400" rtl="0" eaLnBrk="1" latinLnBrk="0" hangingPunct="1">
+      <a:defRPr sz="1200" kern="1200">
+        <a:solidFill>
+          <a:schemeClr val="tx1"/>
+        </a:solidFill>
+        <a:latin typeface="+mn-lt"/>
+        <a:ea typeface="+mn-ea"/>
+        <a:cs typeface="+mn-cs"/>
+      </a:defRPr>
+    </a:lvl5pPr>
+    <a:lvl6pPr marL="2286000" algn="l" defTabSz="914400" rtl="0" eaLnBrk="1" latinLnBrk="0" hangingPunct="1">
+      <a:defRPr sz="1200" kern="1200">
+        <a:solidFill>
+          <a:schemeClr val="tx1"/>
+        </a:solidFill>
+        <a:latin typeface="+mn-lt"/>
+        <a:ea typeface="+mn-ea"/>
+        <a:cs typeface="+mn-cs"/>
+      </a:defRPr>
+    </a:lvl6pPr>
+    <a:lvl7pPr marL="2743200" algn="l" defTabSz="914400" rtl="0" eaLnBrk="1" latinLnBrk="0" hangingPunct="1">
+      <a:defRPr sz="1200" kern="1200">
+        <a:solidFill>
+          <a:schemeClr val="tx1"/>
+        </a:solidFill>
+        <a:latin typeface="+mn-lt"/>
+        <a:ea typeface="+mn-ea"/>
+        <a:cs typeface="+mn-cs"/>
+      </a:defRPr>
+    </a:lvl7pPr>
+    <a:lvl8pPr marL="3200400" algn="l" defTabSz="914400" rtl="0" eaLnBrk="1" latinLnBrk="0" hangingPunct="1">
+      <a:defRPr sz="1200" kern="1200">
+        <a:solidFill>
+          <a:schemeClr val="tx1"/>
+        </a:solidFill>
+        <a:latin typeface="+mn-lt"/>
+        <a:ea typeface="+mn-ea"/>
+        <a:cs typeface="+mn-cs"/>
+      </a:defRPr>
+    </a:lvl8pPr>
+    <a:lvl9pPr marL="3657600" algn="l" defTabSz="914400" rtl="0" eaLnBrk="1" latinLnBrk="0" hangingPunct="1">
+      <a:defRPr sz="1200" kern="1200">
+        <a:solidFill>
+          <a:schemeClr val="tx1"/>
+        </a:solidFill>
+        <a:latin typeface="+mn-lt"/>
+        <a:ea typeface="+mn-ea"/>
+        <a:cs typeface="+mn-cs"/>
+      </a:defRPr>
+    </a:lvl9pPr>
+  </p:notesStyle>
+</p:notesMaster>
+</file>
+
+<file path=ppt/notesSlides/notesSlide1.xml><?xml version="1.0" encoding="utf-8"?>
+<p:notes xmlns:a="http://schemas.openxmlformats.org/drawingml/2006/main" xmlns:r="http://schemas.openxmlformats.org/officeDocument/2006/relationships" xmlns:p="http://schemas.openxmlformats.org/presentationml/2006/main">
+  <p:cSld>
+    <p:spTree>
+      <p:nvGrpSpPr>
+        <p:cNvPr id="1" name=""/>
+        <p:cNvGrpSpPr/>
+        <p:nvPr/>
+      </p:nvGrpSpPr>
+      <p:grpSpPr>
+        <a:xfrm>
+          <a:off x="0" y="0"/>
+          <a:ext cx="0" cy="0"/>
+          <a:chOff x="0" y="0"/>
+          <a:chExt cx="0" cy="0"/>
+        </a:xfrm>
+      </p:grpSpPr>
+      <p:sp>
+        <p:nvSpPr>
+          <p:cNvPr id="2" name="幻灯片图像占位符 1"/>
+          <p:cNvSpPr>
+            <a:spLocks noGrp="1" noRot="1" noChangeAspect="1"/>
+          </p:cNvSpPr>
+          <p:nvPr>
+            <p:ph type="sldImg"/>
+          </p:nvPr>
+        </p:nvSpPr>
+        <p:spPr/>
+      </p:sp>
+      <p:sp>
+        <p:nvSpPr>
+          <p:cNvPr id="3" name="备注占位符 2"/>
+          <p:cNvSpPr>
+            <a:spLocks noGrp="1"/>
+          </p:cNvSpPr>
+          <p:nvPr>
+            <p:ph type="body" idx="1"/>
+          </p:nvPr>
+        </p:nvSpPr>
+        <p:spPr/>
+        <p:txBody>
+          <a:bodyPr/>
+          <a:lstStyle/>
+          <a:p>
+            <a:endParaRPr lang="zh-CN" altLang="en-US" dirty="0"/>
+          </a:p>
+        </p:txBody>
+      </p:sp>
+      <p:sp>
+        <p:nvSpPr>
+          <p:cNvPr id="4" name="灯片编号占位符 3"/>
+          <p:cNvSpPr>
+            <a:spLocks noGrp="1"/>
+          </p:cNvSpPr>
+          <p:nvPr>
+            <p:ph type="sldNum" sz="quarter" idx="5"/>
+          </p:nvPr>
+        </p:nvSpPr>
+        <p:spPr/>
+        <p:txBody>
+          <a:bodyPr/>
+          <a:lstStyle/>
+          <a:p>
+            <a:fld id="{FE798381-BA92-42C7-9348-61BD6E356AAF}" type="slidenum">
+              <a:rPr lang="zh-CN" altLang="en-US" smtClean="0"/>
+              <a:t>4</a:t>
+            </a:fld>
+            <a:endParaRPr lang="zh-CN" altLang="en-US"/>
+          </a:p>
+        </p:txBody>
+      </p:sp>
+    </p:spTree>
+    <p:extLst>
+      <p:ext uri="{BB962C8B-B14F-4D97-AF65-F5344CB8AC3E}">
+        <p14:creationId xmlns:p14="http://schemas.microsoft.com/office/powerpoint/2010/main" val="4030108072"/>
+      </p:ext>
+    </p:extLst>
+  </p:cSld>
+  <p:clrMapOvr>
+    <a:masterClrMapping/>
+  </p:clrMapOvr>
+</p:notes>
 </file>
 
 <file path=ppt/slideLayouts/slideLayout1.xml><?xml version="1.0" encoding="utf-8"?>
@@ -261,7 +698,7 @@
           <a:p>
             <a:fld id="{5D2E9D4A-569D-49DD-9DBB-BF425DFB68D5}" type="datetimeFigureOut">
               <a:rPr lang="zh-CN" altLang="en-US" smtClean="0"/>
-              <a:t>2026/01/23</a:t>
+              <a:t>2026/01/24</a:t>
             </a:fld>
             <a:endParaRPr lang="zh-CN" altLang="en-US"/>
           </a:p>
@@ -459,7 +896,7 @@
           <a:p>
             <a:fld id="{5D2E9D4A-569D-49DD-9DBB-BF425DFB68D5}" type="datetimeFigureOut">
               <a:rPr lang="zh-CN" altLang="en-US" smtClean="0"/>
-              <a:t>2026/01/23</a:t>
+              <a:t>2026/01/24</a:t>
             </a:fld>
             <a:endParaRPr lang="zh-CN" altLang="en-US"/>
           </a:p>
@@ -667,7 +1104,7 @@
           <a:p>
             <a:fld id="{5D2E9D4A-569D-49DD-9DBB-BF425DFB68D5}" type="datetimeFigureOut">
               <a:rPr lang="zh-CN" altLang="en-US" smtClean="0"/>
-              <a:t>2026/01/23</a:t>
+              <a:t>2026/01/24</a:t>
             </a:fld>
             <a:endParaRPr lang="zh-CN" altLang="en-US"/>
           </a:p>
@@ -865,7 +1302,7 @@
           <a:p>
             <a:fld id="{5D2E9D4A-569D-49DD-9DBB-BF425DFB68D5}" type="datetimeFigureOut">
               <a:rPr lang="zh-CN" altLang="en-US" smtClean="0"/>
-              <a:t>2026/01/23</a:t>
+              <a:t>2026/01/24</a:t>
             </a:fld>
             <a:endParaRPr lang="zh-CN" altLang="en-US"/>
           </a:p>
@@ -1140,7 +1577,7 @@
           <a:p>
             <a:fld id="{5D2E9D4A-569D-49DD-9DBB-BF425DFB68D5}" type="datetimeFigureOut">
               <a:rPr lang="zh-CN" altLang="en-US" smtClean="0"/>
-              <a:t>2026/01/23</a:t>
+              <a:t>2026/01/24</a:t>
             </a:fld>
             <a:endParaRPr lang="zh-CN" altLang="en-US"/>
           </a:p>
@@ -1405,7 +1842,7 @@
           <a:p>
             <a:fld id="{5D2E9D4A-569D-49DD-9DBB-BF425DFB68D5}" type="datetimeFigureOut">
               <a:rPr lang="zh-CN" altLang="en-US" smtClean="0"/>
-              <a:t>2026/01/23</a:t>
+              <a:t>2026/01/24</a:t>
             </a:fld>
             <a:endParaRPr lang="zh-CN" altLang="en-US"/>
           </a:p>
@@ -1817,7 +2254,7 @@
           <a:p>
             <a:fld id="{5D2E9D4A-569D-49DD-9DBB-BF425DFB68D5}" type="datetimeFigureOut">
               <a:rPr lang="zh-CN" altLang="en-US" smtClean="0"/>
-              <a:t>2026/01/23</a:t>
+              <a:t>2026/01/24</a:t>
             </a:fld>
             <a:endParaRPr lang="zh-CN" altLang="en-US"/>
           </a:p>
@@ -1958,7 +2395,7 @@
           <a:p>
             <a:fld id="{5D2E9D4A-569D-49DD-9DBB-BF425DFB68D5}" type="datetimeFigureOut">
               <a:rPr lang="zh-CN" altLang="en-US" smtClean="0"/>
-              <a:t>2026/01/23</a:t>
+              <a:t>2026/01/24</a:t>
             </a:fld>
             <a:endParaRPr lang="zh-CN" altLang="en-US"/>
           </a:p>
@@ -2071,7 +2508,7 @@
           <a:p>
             <a:fld id="{5D2E9D4A-569D-49DD-9DBB-BF425DFB68D5}" type="datetimeFigureOut">
               <a:rPr lang="zh-CN" altLang="en-US" smtClean="0"/>
-              <a:t>2026/01/23</a:t>
+              <a:t>2026/01/24</a:t>
             </a:fld>
             <a:endParaRPr lang="zh-CN" altLang="en-US"/>
           </a:p>
@@ -2382,7 +2819,7 @@
           <a:p>
             <a:fld id="{5D2E9D4A-569D-49DD-9DBB-BF425DFB68D5}" type="datetimeFigureOut">
               <a:rPr lang="zh-CN" altLang="en-US" smtClean="0"/>
-              <a:t>2026/01/23</a:t>
+              <a:t>2026/01/24</a:t>
             </a:fld>
             <a:endParaRPr lang="zh-CN" altLang="en-US"/>
           </a:p>
@@ -2670,7 +3107,7 @@
           <a:p>
             <a:fld id="{5D2E9D4A-569D-49DD-9DBB-BF425DFB68D5}" type="datetimeFigureOut">
               <a:rPr lang="zh-CN" altLang="en-US" smtClean="0"/>
-              <a:t>2026/01/23</a:t>
+              <a:t>2026/01/24</a:t>
             </a:fld>
             <a:endParaRPr lang="zh-CN" altLang="en-US"/>
           </a:p>
@@ -2911,7 +3348,7 @@
           <a:p>
             <a:fld id="{5D2E9D4A-569D-49DD-9DBB-BF425DFB68D5}" type="datetimeFigureOut">
               <a:rPr lang="zh-CN" altLang="en-US" smtClean="0"/>
-              <a:t>2026/01/23</a:t>
+              <a:t>2026/01/24</a:t>
             </a:fld>
             <a:endParaRPr lang="zh-CN" altLang="en-US"/>
           </a:p>
@@ -10669,6 +11106,1802 @@
 </p:sld>
 </file>
 
+<file path=ppt/slides/slide4.xml><?xml version="1.0" encoding="utf-8"?>
+<p:sld xmlns:a="http://schemas.openxmlformats.org/drawingml/2006/main" xmlns:r="http://schemas.openxmlformats.org/officeDocument/2006/relationships" xmlns:p="http://schemas.openxmlformats.org/presentationml/2006/main">
+  <p:cSld>
+    <p:spTree>
+      <p:nvGrpSpPr>
+        <p:cNvPr id="1" name=""/>
+        <p:cNvGrpSpPr/>
+        <p:nvPr/>
+      </p:nvGrpSpPr>
+      <p:grpSpPr>
+        <a:xfrm>
+          <a:off x="0" y="0"/>
+          <a:ext cx="0" cy="0"/>
+          <a:chOff x="0" y="0"/>
+          <a:chExt cx="0" cy="0"/>
+        </a:xfrm>
+      </p:grpSpPr>
+      <p:grpSp>
+        <p:nvGrpSpPr>
+          <p:cNvPr id="76" name="组合 75">
+            <a:extLst>
+              <a:ext uri="{FF2B5EF4-FFF2-40B4-BE49-F238E27FC236}">
+                <a16:creationId xmlns:a16="http://schemas.microsoft.com/office/drawing/2014/main" id="{231F2443-310D-AB25-CE15-61D155D4F03F}"/>
+              </a:ext>
+            </a:extLst>
+          </p:cNvPr>
+          <p:cNvGrpSpPr/>
+          <p:nvPr/>
+        </p:nvGrpSpPr>
+        <p:grpSpPr>
+          <a:xfrm>
+            <a:off x="233296" y="388961"/>
+            <a:ext cx="11790381" cy="5105060"/>
+            <a:chOff x="233296" y="388960"/>
+            <a:chExt cx="11790381" cy="5595583"/>
+          </a:xfrm>
+        </p:grpSpPr>
+        <p:sp>
+          <p:nvSpPr>
+            <p:cNvPr id="25" name="矩形 24">
+              <a:extLst>
+                <a:ext uri="{FF2B5EF4-FFF2-40B4-BE49-F238E27FC236}">
+                  <a16:creationId xmlns:a16="http://schemas.microsoft.com/office/drawing/2014/main" id="{E953B85B-4540-45DB-9B59-49A52AE7D063}"/>
+                </a:ext>
+              </a:extLst>
+            </p:cNvPr>
+            <p:cNvSpPr/>
+            <p:nvPr/>
+          </p:nvSpPr>
+          <p:spPr>
+            <a:xfrm>
+              <a:off x="233296" y="388960"/>
+              <a:ext cx="11790381" cy="5595583"/>
+            </a:xfrm>
+            <a:prstGeom prst="rect">
+              <a:avLst/>
+            </a:prstGeom>
+            <a:solidFill>
+              <a:schemeClr val="accent3">
+                <a:lumMod val="20000"/>
+                <a:lumOff val="80000"/>
+              </a:schemeClr>
+            </a:solidFill>
+            <a:ln w="19050">
+              <a:solidFill>
+                <a:schemeClr val="tx1"/>
+              </a:solidFill>
+            </a:ln>
+          </p:spPr>
+          <p:style>
+            <a:lnRef idx="2">
+              <a:schemeClr val="accent1">
+                <a:shade val="15000"/>
+              </a:schemeClr>
+            </a:lnRef>
+            <a:fillRef idx="1">
+              <a:schemeClr val="accent1"/>
+            </a:fillRef>
+            <a:effectRef idx="0">
+              <a:schemeClr val="accent1"/>
+            </a:effectRef>
+            <a:fontRef idx="minor">
+              <a:schemeClr val="lt1"/>
+            </a:fontRef>
+          </p:style>
+          <p:txBody>
+            <a:bodyPr rtlCol="0" anchor="ctr"/>
+            <a:lstStyle/>
+            <a:p>
+              <a:pPr algn="ctr"/>
+              <a:endParaRPr lang="zh-CN" altLang="en-US" sz="2800" dirty="0" err="1">
+                <a:solidFill>
+                  <a:schemeClr val="tx1"/>
+                </a:solidFill>
+                <a:latin typeface="Times New Roman" panose="02020603050405020304" pitchFamily="18" charset="0"/>
+                <a:ea typeface="宋体" panose="02010600030101010101" pitchFamily="2" charset="-122"/>
+              </a:endParaRPr>
+            </a:p>
+          </p:txBody>
+        </p:sp>
+        <p:sp>
+          <p:nvSpPr>
+            <p:cNvPr id="2" name="矩形 1">
+              <a:extLst>
+                <a:ext uri="{FF2B5EF4-FFF2-40B4-BE49-F238E27FC236}">
+                  <a16:creationId xmlns:a16="http://schemas.microsoft.com/office/drawing/2014/main" id="{9B828D90-089F-1EF0-22CB-7F3A47C57B8F}"/>
+                </a:ext>
+              </a:extLst>
+            </p:cNvPr>
+            <p:cNvSpPr/>
+            <p:nvPr/>
+          </p:nvSpPr>
+          <p:spPr>
+            <a:xfrm>
+              <a:off x="417549" y="908259"/>
+              <a:ext cx="11421876" cy="608737"/>
+            </a:xfrm>
+            <a:prstGeom prst="rect">
+              <a:avLst/>
+            </a:prstGeom>
+            <a:solidFill>
+              <a:schemeClr val="accent5">
+                <a:lumMod val="20000"/>
+                <a:lumOff val="80000"/>
+              </a:schemeClr>
+            </a:solidFill>
+            <a:ln w="19050">
+              <a:solidFill>
+                <a:schemeClr val="tx1"/>
+              </a:solidFill>
+            </a:ln>
+          </p:spPr>
+          <p:style>
+            <a:lnRef idx="2">
+              <a:schemeClr val="accent1">
+                <a:shade val="15000"/>
+              </a:schemeClr>
+            </a:lnRef>
+            <a:fillRef idx="1">
+              <a:schemeClr val="accent1"/>
+            </a:fillRef>
+            <a:effectRef idx="0">
+              <a:schemeClr val="accent1"/>
+            </a:effectRef>
+            <a:fontRef idx="minor">
+              <a:schemeClr val="lt1"/>
+            </a:fontRef>
+          </p:style>
+          <p:txBody>
+            <a:bodyPr rtlCol="0" anchor="ctr"/>
+            <a:lstStyle/>
+            <a:p>
+              <a:pPr algn="ctr"/>
+              <a:endParaRPr lang="zh-CN" altLang="en-US" sz="2800" dirty="0" err="1">
+                <a:solidFill>
+                  <a:schemeClr val="tx1"/>
+                </a:solidFill>
+                <a:latin typeface="Times New Roman" panose="02020603050405020304" pitchFamily="18" charset="0"/>
+                <a:ea typeface="宋体" panose="02010600030101010101" pitchFamily="2" charset="-122"/>
+              </a:endParaRPr>
+            </a:p>
+          </p:txBody>
+        </p:sp>
+        <mc:AlternateContent xmlns:mc="http://schemas.openxmlformats.org/markup-compatibility/2006">
+          <mc:Choice xmlns:a14="http://schemas.microsoft.com/office/drawing/2010/main" Requires="a14">
+            <p:sp>
+              <p:nvSpPr>
+                <p:cNvPr id="3" name="文本框 2">
+                  <a:extLst>
+                    <a:ext uri="{FF2B5EF4-FFF2-40B4-BE49-F238E27FC236}">
+                      <a16:creationId xmlns:a16="http://schemas.microsoft.com/office/drawing/2014/main" id="{F8F41CDD-8AD1-8E56-9CAF-C966EA5D8630}"/>
+                    </a:ext>
+                  </a:extLst>
+                </p:cNvPr>
+                <p:cNvSpPr txBox="1"/>
+                <p:nvPr/>
+              </p:nvSpPr>
+              <p:spPr>
+                <a:xfrm>
+                  <a:off x="3270459" y="925881"/>
+                  <a:ext cx="5716057" cy="573494"/>
+                </a:xfrm>
+                <a:prstGeom prst="rect">
+                  <a:avLst/>
+                </a:prstGeom>
+                <a:solidFill>
+                  <a:schemeClr val="accent5">
+                    <a:lumMod val="20000"/>
+                    <a:lumOff val="80000"/>
+                  </a:schemeClr>
+                </a:solidFill>
+              </p:spPr>
+              <p:txBody>
+                <a:bodyPr wrap="square" rtlCol="0" anchor="ctr" anchorCtr="1">
+                  <a:spAutoFit/>
+                </a:bodyPr>
+                <a:lstStyle/>
+                <a:p>
+                  <a:pPr algn="ctr"/>
+                  <a:r>
+                    <a:rPr lang="zh-CN" altLang="en-US" sz="1400" dirty="0">
+                      <a:latin typeface="Times New Roman" panose="02020603050405020304" pitchFamily="18" charset="0"/>
+                      <a:ea typeface="宋体" panose="02010600030101010101" pitchFamily="2" charset="-122"/>
+                    </a:rPr>
+                    <a:t>三位混合参数空间分解</a:t>
+                  </a:r>
+                  <a:endParaRPr lang="en-US" altLang="zh-CN" sz="1400" dirty="0">
+                    <a:latin typeface="Times New Roman" panose="02020603050405020304" pitchFamily="18" charset="0"/>
+                    <a:ea typeface="宋体" panose="02010600030101010101" pitchFamily="2" charset="-122"/>
+                  </a:endParaRPr>
+                </a:p>
+                <a:p>
+                  <a:pPr algn="ctr"/>
+                  <a:r>
+                    <a:rPr lang="zh-CN" altLang="en-US" sz="1400" dirty="0">
+                      <a:latin typeface="Times New Roman" panose="02020603050405020304" pitchFamily="18" charset="0"/>
+                      <a:ea typeface="宋体" panose="02010600030101010101" pitchFamily="2" charset="-122"/>
+                    </a:rPr>
+                    <a:t>业务流量特征</a:t>
+                  </a:r>
+                  <a14:m>
+                    <m:oMath xmlns:m="http://schemas.openxmlformats.org/officeDocument/2006/math">
+                      <m:r>
+                        <a:rPr lang="en-US" altLang="zh-CN" sz="1400" b="0" i="1" smtClean="0">
+                          <a:latin typeface="Cambria Math" panose="02040503050406030204" pitchFamily="18" charset="0"/>
+                        </a:rPr>
+                        <m:t>×</m:t>
+                      </m:r>
+                      <m:r>
+                        <a:rPr lang="zh-CN" altLang="en-US" sz="1400" i="1">
+                          <a:latin typeface="Cambria Math" panose="02040503050406030204" pitchFamily="18" charset="0"/>
+                        </a:rPr>
+                        <m:t>协议</m:t>
+                      </m:r>
+                    </m:oMath>
+                  </a14:m>
+                  <a:r>
+                    <a:rPr lang="zh-CN" altLang="en-US" sz="1400" dirty="0">
+                      <a:latin typeface="Times New Roman" panose="02020603050405020304" pitchFamily="18" charset="0"/>
+                      <a:ea typeface="宋体" panose="02010600030101010101" pitchFamily="2" charset="-122"/>
+                    </a:rPr>
+                    <a:t>专属参数</a:t>
+                  </a:r>
+                </a:p>
+              </p:txBody>
+            </p:sp>
+          </mc:Choice>
+          <mc:Fallback>
+            <p:sp>
+              <p:nvSpPr>
+                <p:cNvPr id="3" name="文本框 2">
+                  <a:extLst>
+                    <a:ext uri="{FF2B5EF4-FFF2-40B4-BE49-F238E27FC236}">
+                      <a16:creationId xmlns:a16="http://schemas.microsoft.com/office/drawing/2014/main" id="{F8F41CDD-8AD1-8E56-9CAF-C966EA5D8630}"/>
+                    </a:ext>
+                  </a:extLst>
+                </p:cNvPr>
+                <p:cNvSpPr txBox="1">
+                  <a:spLocks noRot="1" noChangeAspect="1" noMove="1" noResize="1" noEditPoints="1" noAdjustHandles="1" noChangeArrowheads="1" noChangeShapeType="1" noTextEdit="1"/>
+                </p:cNvSpPr>
+                <p:nvPr/>
+              </p:nvSpPr>
+              <p:spPr>
+                <a:xfrm>
+                  <a:off x="3270459" y="925881"/>
+                  <a:ext cx="5716057" cy="573494"/>
+                </a:xfrm>
+                <a:prstGeom prst="rect">
+                  <a:avLst/>
+                </a:prstGeom>
+                <a:blipFill>
+                  <a:blip r:embed="rId3"/>
+                  <a:stretch>
+                    <a:fillRect t="-2326" b="-10465"/>
+                  </a:stretch>
+                </a:blipFill>
+              </p:spPr>
+              <p:txBody>
+                <a:bodyPr/>
+                <a:lstStyle/>
+                <a:p>
+                  <a:r>
+                    <a:rPr lang="zh-CN" altLang="en-US">
+                      <a:noFill/>
+                    </a:rPr>
+                    <a:t> </a:t>
+                  </a:r>
+                </a:p>
+              </p:txBody>
+            </p:sp>
+          </mc:Fallback>
+        </mc:AlternateContent>
+        <p:cxnSp>
+          <p:nvCxnSpPr>
+            <p:cNvPr id="17" name="直接箭头连接符 16">
+              <a:extLst>
+                <a:ext uri="{FF2B5EF4-FFF2-40B4-BE49-F238E27FC236}">
+                  <a16:creationId xmlns:a16="http://schemas.microsoft.com/office/drawing/2014/main" id="{87519377-3840-2610-0994-026C8D3094BB}"/>
+                </a:ext>
+              </a:extLst>
+            </p:cNvPr>
+            <p:cNvCxnSpPr>
+              <a:cxnSpLocks/>
+              <a:stCxn id="2" idx="2"/>
+              <a:endCxn id="9" idx="0"/>
+            </p:cNvCxnSpPr>
+            <p:nvPr/>
+          </p:nvCxnSpPr>
+          <p:spPr>
+            <a:xfrm>
+              <a:off x="6128487" y="1516997"/>
+              <a:ext cx="0" cy="353843"/>
+            </a:xfrm>
+            <a:prstGeom prst="straightConnector1">
+              <a:avLst/>
+            </a:prstGeom>
+            <a:ln w="19050">
+              <a:solidFill>
+                <a:schemeClr val="tx1"/>
+              </a:solidFill>
+              <a:tailEnd type="triangle"/>
+            </a:ln>
+          </p:spPr>
+          <p:style>
+            <a:lnRef idx="1">
+              <a:schemeClr val="accent1"/>
+            </a:lnRef>
+            <a:fillRef idx="0">
+              <a:schemeClr val="accent1"/>
+            </a:fillRef>
+            <a:effectRef idx="0">
+              <a:schemeClr val="accent1"/>
+            </a:effectRef>
+            <a:fontRef idx="minor">
+              <a:schemeClr val="tx1"/>
+            </a:fontRef>
+          </p:style>
+        </p:cxnSp>
+        <p:sp>
+          <p:nvSpPr>
+            <p:cNvPr id="4" name="矩形 3">
+              <a:extLst>
+                <a:ext uri="{FF2B5EF4-FFF2-40B4-BE49-F238E27FC236}">
+                  <a16:creationId xmlns:a16="http://schemas.microsoft.com/office/drawing/2014/main" id="{E2C58D7B-C247-7067-104F-EA18557E6C5F}"/>
+                </a:ext>
+              </a:extLst>
+            </p:cNvPr>
+            <p:cNvSpPr/>
+            <p:nvPr/>
+          </p:nvSpPr>
+          <p:spPr>
+            <a:xfrm>
+              <a:off x="449437" y="1926656"/>
+              <a:ext cx="3266245" cy="477374"/>
+            </a:xfrm>
+            <a:prstGeom prst="rect">
+              <a:avLst/>
+            </a:prstGeom>
+            <a:noFill/>
+            <a:ln w="19050">
+              <a:solidFill>
+                <a:schemeClr val="tx1"/>
+              </a:solidFill>
+            </a:ln>
+          </p:spPr>
+          <p:style>
+            <a:lnRef idx="2">
+              <a:schemeClr val="accent1">
+                <a:shade val="15000"/>
+              </a:schemeClr>
+            </a:lnRef>
+            <a:fillRef idx="1">
+              <a:schemeClr val="accent1"/>
+            </a:fillRef>
+            <a:effectRef idx="0">
+              <a:schemeClr val="accent1"/>
+            </a:effectRef>
+            <a:fontRef idx="minor">
+              <a:schemeClr val="lt1"/>
+            </a:fontRef>
+          </p:style>
+          <p:txBody>
+            <a:bodyPr rtlCol="0" anchor="ctr"/>
+            <a:lstStyle/>
+            <a:p>
+              <a:pPr algn="ctr"/>
+              <a:endParaRPr lang="zh-CN" altLang="en-US" sz="2800" dirty="0" err="1">
+                <a:solidFill>
+                  <a:schemeClr val="tx1"/>
+                </a:solidFill>
+                <a:latin typeface="Times New Roman" panose="02020603050405020304" pitchFamily="18" charset="0"/>
+                <a:ea typeface="宋体" panose="02010600030101010101" pitchFamily="2" charset="-122"/>
+              </a:endParaRPr>
+            </a:p>
+          </p:txBody>
+        </p:sp>
+        <p:sp>
+          <p:nvSpPr>
+            <p:cNvPr id="5" name="文本框 4">
+              <a:extLst>
+                <a:ext uri="{FF2B5EF4-FFF2-40B4-BE49-F238E27FC236}">
+                  <a16:creationId xmlns:a16="http://schemas.microsoft.com/office/drawing/2014/main" id="{06B054EC-B63D-0A2B-DFED-B5F95F457728}"/>
+                </a:ext>
+              </a:extLst>
+            </p:cNvPr>
+            <p:cNvSpPr txBox="1"/>
+            <p:nvPr/>
+          </p:nvSpPr>
+          <p:spPr>
+            <a:xfrm>
+              <a:off x="417549" y="1877235"/>
+              <a:ext cx="3327742" cy="573494"/>
+            </a:xfrm>
+            <a:prstGeom prst="rect">
+              <a:avLst/>
+            </a:prstGeom>
+            <a:solidFill>
+              <a:schemeClr val="accent5">
+                <a:lumMod val="40000"/>
+                <a:lumOff val="60000"/>
+              </a:schemeClr>
+            </a:solidFill>
+            <a:ln w="19050">
+              <a:solidFill>
+                <a:schemeClr val="tx1"/>
+              </a:solidFill>
+            </a:ln>
+          </p:spPr>
+          <p:txBody>
+            <a:bodyPr wrap="square" rtlCol="0" anchor="ctr" anchorCtr="1">
+              <a:spAutoFit/>
+            </a:bodyPr>
+            <a:lstStyle/>
+            <a:p>
+              <a:pPr algn="ctr"/>
+              <a:r>
+                <a:rPr lang="zh-CN" altLang="en-US" sz="1400" dirty="0">
+                  <a:latin typeface="Times New Roman" panose="02020603050405020304" pitchFamily="18" charset="0"/>
+                  <a:ea typeface="宋体" panose="02010600030101010101" pitchFamily="2" charset="-122"/>
+                </a:rPr>
+                <a:t>流量形态</a:t>
+              </a:r>
+              <a:endParaRPr lang="en-US" altLang="zh-CN" sz="1400">
+                <a:latin typeface="Times New Roman" panose="02020603050405020304" pitchFamily="18" charset="0"/>
+                <a:ea typeface="宋体" panose="02010600030101010101" pitchFamily="2" charset="-122"/>
+              </a:endParaRPr>
+            </a:p>
+            <a:p>
+              <a:pPr algn="ctr"/>
+              <a:r>
+                <a:rPr lang="zh-CN" altLang="en-US" sz="1400">
+                  <a:latin typeface="Times New Roman" panose="02020603050405020304" pitchFamily="18" charset="0"/>
+                  <a:ea typeface="宋体" panose="02010600030101010101" pitchFamily="2" charset="-122"/>
+                </a:rPr>
+                <a:t>流量</a:t>
+              </a:r>
+              <a:r>
+                <a:rPr lang="zh-CN" altLang="en-US" sz="1400" dirty="0">
+                  <a:latin typeface="Times New Roman" panose="02020603050405020304" pitchFamily="18" charset="0"/>
+                  <a:ea typeface="宋体" panose="02010600030101010101" pitchFamily="2" charset="-122"/>
+                </a:rPr>
+                <a:t>到达类型：</a:t>
+              </a:r>
+              <a:r>
+                <a:rPr lang="en-US" altLang="zh-CN" sz="1400">
+                  <a:latin typeface="Times New Roman" panose="02020603050405020304" pitchFamily="18" charset="0"/>
+                  <a:ea typeface="宋体" panose="02010600030101010101" pitchFamily="2" charset="-122"/>
+                </a:rPr>
+                <a:t>U/B/P</a:t>
+              </a:r>
+              <a:endParaRPr lang="zh-CN" altLang="en-US" sz="1400" dirty="0">
+                <a:latin typeface="Times New Roman" panose="02020603050405020304" pitchFamily="18" charset="0"/>
+                <a:ea typeface="宋体" panose="02010600030101010101" pitchFamily="2" charset="-122"/>
+              </a:endParaRPr>
+            </a:p>
+          </p:txBody>
+        </p:sp>
+        <p:sp>
+          <p:nvSpPr>
+            <p:cNvPr id="8" name="矩形 7">
+              <a:extLst>
+                <a:ext uri="{FF2B5EF4-FFF2-40B4-BE49-F238E27FC236}">
+                  <a16:creationId xmlns:a16="http://schemas.microsoft.com/office/drawing/2014/main" id="{6437ED65-DEFE-C0F7-74F0-42ED86DCE96B}"/>
+                </a:ext>
+              </a:extLst>
+            </p:cNvPr>
+            <p:cNvSpPr/>
+            <p:nvPr/>
+          </p:nvSpPr>
+          <p:spPr>
+            <a:xfrm>
+              <a:off x="4496504" y="1926655"/>
+              <a:ext cx="3266245" cy="477374"/>
+            </a:xfrm>
+            <a:prstGeom prst="rect">
+              <a:avLst/>
+            </a:prstGeom>
+            <a:solidFill>
+              <a:schemeClr val="accent5">
+                <a:lumMod val="40000"/>
+                <a:lumOff val="60000"/>
+              </a:schemeClr>
+            </a:solidFill>
+            <a:ln w="19050">
+              <a:solidFill>
+                <a:schemeClr val="tx1"/>
+              </a:solidFill>
+            </a:ln>
+          </p:spPr>
+          <p:style>
+            <a:lnRef idx="2">
+              <a:schemeClr val="accent1">
+                <a:shade val="15000"/>
+              </a:schemeClr>
+            </a:lnRef>
+            <a:fillRef idx="1">
+              <a:schemeClr val="accent1"/>
+            </a:fillRef>
+            <a:effectRef idx="0">
+              <a:schemeClr val="accent1"/>
+            </a:effectRef>
+            <a:fontRef idx="minor">
+              <a:schemeClr val="lt1"/>
+            </a:fontRef>
+          </p:style>
+          <p:txBody>
+            <a:bodyPr rtlCol="0" anchor="ctr"/>
+            <a:lstStyle/>
+            <a:p>
+              <a:pPr algn="ctr"/>
+              <a:endParaRPr lang="zh-CN" altLang="en-US" sz="2800" dirty="0" err="1">
+                <a:solidFill>
+                  <a:schemeClr val="tx1"/>
+                </a:solidFill>
+                <a:latin typeface="Times New Roman" panose="02020603050405020304" pitchFamily="18" charset="0"/>
+                <a:ea typeface="宋体" panose="02010600030101010101" pitchFamily="2" charset="-122"/>
+              </a:endParaRPr>
+            </a:p>
+          </p:txBody>
+        </p:sp>
+        <mc:AlternateContent xmlns:mc="http://schemas.openxmlformats.org/markup-compatibility/2006">
+          <mc:Choice xmlns:a14="http://schemas.microsoft.com/office/drawing/2010/main" Requires="a14">
+            <p:sp>
+              <p:nvSpPr>
+                <p:cNvPr id="9" name="文本框 8">
+                  <a:extLst>
+                    <a:ext uri="{FF2B5EF4-FFF2-40B4-BE49-F238E27FC236}">
+                      <a16:creationId xmlns:a16="http://schemas.microsoft.com/office/drawing/2014/main" id="{0EB63583-7A4A-26FF-45B0-BE8215375892}"/>
+                    </a:ext>
+                  </a:extLst>
+                </p:cNvPr>
+                <p:cNvSpPr txBox="1"/>
+                <p:nvPr/>
+              </p:nvSpPr>
+              <p:spPr>
+                <a:xfrm>
+                  <a:off x="4464616" y="1870839"/>
+                  <a:ext cx="3327742" cy="586285"/>
+                </a:xfrm>
+                <a:prstGeom prst="rect">
+                  <a:avLst/>
+                </a:prstGeom>
+                <a:solidFill>
+                  <a:schemeClr val="accent5">
+                    <a:lumMod val="40000"/>
+                    <a:lumOff val="60000"/>
+                  </a:schemeClr>
+                </a:solidFill>
+                <a:ln w="19050">
+                  <a:solidFill>
+                    <a:schemeClr val="tx1"/>
+                  </a:solidFill>
+                </a:ln>
+              </p:spPr>
+              <p:txBody>
+                <a:bodyPr wrap="square" rtlCol="0" anchor="ctr" anchorCtr="1">
+                  <a:spAutoFit/>
+                </a:bodyPr>
+                <a:lstStyle>
+                  <a:defPPr>
+                    <a:defRPr lang="zh-CN"/>
+                  </a:defPPr>
+                  <a:lvl1pPr algn="ctr">
+                    <a:defRPr sz="1200"/>
+                  </a:lvl1pPr>
+                </a:lstStyle>
+                <a:p>
+                  <a:r>
+                    <a:rPr lang="zh-CN" altLang="en-US" sz="1400" dirty="0">
+                      <a:latin typeface="Times New Roman" panose="02020603050405020304" pitchFamily="18" charset="0"/>
+                      <a:ea typeface="宋体" panose="02010600030101010101" pitchFamily="2" charset="-122"/>
+                    </a:rPr>
+                    <a:t>流量强度</a:t>
+                  </a:r>
+                  <a:endParaRPr lang="en-US" altLang="zh-CN" sz="1400" dirty="0">
+                    <a:latin typeface="Times New Roman" panose="02020603050405020304" pitchFamily="18" charset="0"/>
+                    <a:ea typeface="宋体" panose="02010600030101010101" pitchFamily="2" charset="-122"/>
+                  </a:endParaRPr>
+                </a:p>
+                <a:p>
+                  <a:r>
+                    <a:rPr lang="zh-CN" altLang="en-US" sz="1400" dirty="0">
+                      <a:latin typeface="Times New Roman" panose="02020603050405020304" pitchFamily="18" charset="0"/>
+                      <a:ea typeface="宋体" panose="02010600030101010101" pitchFamily="2" charset="-122"/>
+                    </a:rPr>
+                    <a:t>归一化平均到达率</a:t>
+                  </a:r>
+                  <a14:m>
+                    <m:oMath xmlns:m="http://schemas.openxmlformats.org/officeDocument/2006/math">
+                      <m:acc>
+                        <m:accPr>
+                          <m:chr m:val="̂"/>
+                          <m:ctrlPr>
+                            <a:rPr lang="en-US" altLang="zh-CN" sz="1400" smtClean="0"/>
+                          </m:ctrlPr>
+                        </m:accPr>
+                        <m:e>
+                          <m:r>
+                            <a:rPr lang="en-US" altLang="zh-CN" sz="1400" smtClean="0"/>
+                            <m:t>𝜆</m:t>
+                          </m:r>
+                        </m:e>
+                      </m:acc>
+                    </m:oMath>
+                  </a14:m>
+                  <a:endParaRPr lang="zh-CN" altLang="en-US" sz="1400" dirty="0">
+                    <a:latin typeface="Times New Roman" panose="02020603050405020304" pitchFamily="18" charset="0"/>
+                    <a:ea typeface="宋体" panose="02010600030101010101" pitchFamily="2" charset="-122"/>
+                  </a:endParaRPr>
+                </a:p>
+              </p:txBody>
+            </p:sp>
+          </mc:Choice>
+          <mc:Fallback>
+            <p:sp>
+              <p:nvSpPr>
+                <p:cNvPr id="9" name="文本框 8">
+                  <a:extLst>
+                    <a:ext uri="{FF2B5EF4-FFF2-40B4-BE49-F238E27FC236}">
+                      <a16:creationId xmlns:a16="http://schemas.microsoft.com/office/drawing/2014/main" id="{0EB63583-7A4A-26FF-45B0-BE8215375892}"/>
+                    </a:ext>
+                  </a:extLst>
+                </p:cNvPr>
+                <p:cNvSpPr txBox="1">
+                  <a:spLocks noRot="1" noChangeAspect="1" noMove="1" noResize="1" noEditPoints="1" noAdjustHandles="1" noChangeArrowheads="1" noChangeShapeType="1" noTextEdit="1"/>
+                </p:cNvSpPr>
+                <p:nvPr/>
+              </p:nvSpPr>
+              <p:spPr>
+                <a:xfrm>
+                  <a:off x="4464616" y="1870839"/>
+                  <a:ext cx="3327742" cy="586285"/>
+                </a:xfrm>
+                <a:prstGeom prst="rect">
+                  <a:avLst/>
+                </a:prstGeom>
+                <a:blipFill>
+                  <a:blip r:embed="rId4"/>
+                  <a:stretch>
+                    <a:fillRect t="-2222" b="-7778"/>
+                  </a:stretch>
+                </a:blipFill>
+                <a:ln w="19050">
+                  <a:solidFill>
+                    <a:schemeClr val="tx1"/>
+                  </a:solidFill>
+                </a:ln>
+              </p:spPr>
+              <p:txBody>
+                <a:bodyPr/>
+                <a:lstStyle/>
+                <a:p>
+                  <a:r>
+                    <a:rPr lang="zh-CN" altLang="en-US">
+                      <a:noFill/>
+                    </a:rPr>
+                    <a:t> </a:t>
+                  </a:r>
+                </a:p>
+              </p:txBody>
+            </p:sp>
+          </mc:Fallback>
+        </mc:AlternateContent>
+        <p:sp>
+          <p:nvSpPr>
+            <p:cNvPr id="11" name="矩形 10">
+              <a:extLst>
+                <a:ext uri="{FF2B5EF4-FFF2-40B4-BE49-F238E27FC236}">
+                  <a16:creationId xmlns:a16="http://schemas.microsoft.com/office/drawing/2014/main" id="{6FFBAA93-B867-3365-BC10-3400D70B6C90}"/>
+                </a:ext>
+              </a:extLst>
+            </p:cNvPr>
+            <p:cNvSpPr/>
+            <p:nvPr/>
+          </p:nvSpPr>
+          <p:spPr>
+            <a:xfrm>
+              <a:off x="8543570" y="1901225"/>
+              <a:ext cx="3266245" cy="477374"/>
+            </a:xfrm>
+            <a:prstGeom prst="rect">
+              <a:avLst/>
+            </a:prstGeom>
+            <a:solidFill>
+              <a:schemeClr val="accent5">
+                <a:lumMod val="40000"/>
+                <a:lumOff val="60000"/>
+              </a:schemeClr>
+            </a:solidFill>
+            <a:ln w="19050">
+              <a:solidFill>
+                <a:schemeClr val="tx1"/>
+              </a:solidFill>
+            </a:ln>
+          </p:spPr>
+          <p:style>
+            <a:lnRef idx="2">
+              <a:schemeClr val="accent1">
+                <a:shade val="15000"/>
+              </a:schemeClr>
+            </a:lnRef>
+            <a:fillRef idx="1">
+              <a:schemeClr val="accent1"/>
+            </a:fillRef>
+            <a:effectRef idx="0">
+              <a:schemeClr val="accent1"/>
+            </a:effectRef>
+            <a:fontRef idx="minor">
+              <a:schemeClr val="lt1"/>
+            </a:fontRef>
+          </p:style>
+          <p:txBody>
+            <a:bodyPr rtlCol="0" anchor="ctr"/>
+            <a:lstStyle/>
+            <a:p>
+              <a:pPr algn="ctr"/>
+              <a:endParaRPr lang="zh-CN" altLang="en-US" sz="2800" dirty="0" err="1">
+                <a:solidFill>
+                  <a:schemeClr val="tx1"/>
+                </a:solidFill>
+                <a:latin typeface="Times New Roman" panose="02020603050405020304" pitchFamily="18" charset="0"/>
+                <a:ea typeface="宋体" panose="02010600030101010101" pitchFamily="2" charset="-122"/>
+              </a:endParaRPr>
+            </a:p>
+          </p:txBody>
+        </p:sp>
+        <mc:AlternateContent xmlns:mc="http://schemas.openxmlformats.org/markup-compatibility/2006">
+          <mc:Choice xmlns:a14="http://schemas.microsoft.com/office/drawing/2010/main" Requires="a14">
+            <p:sp>
+              <p:nvSpPr>
+                <p:cNvPr id="12" name="文本框 11">
+                  <a:extLst>
+                    <a:ext uri="{FF2B5EF4-FFF2-40B4-BE49-F238E27FC236}">
+                      <a16:creationId xmlns:a16="http://schemas.microsoft.com/office/drawing/2014/main" id="{E9FABF3D-D036-86E5-5433-AFCE9F05BC01}"/>
+                    </a:ext>
+                  </a:extLst>
+                </p:cNvPr>
+                <p:cNvSpPr txBox="1"/>
+                <p:nvPr/>
+              </p:nvSpPr>
+              <p:spPr>
+                <a:xfrm>
+                  <a:off x="8511682" y="1841227"/>
+                  <a:ext cx="3327742" cy="594649"/>
+                </a:xfrm>
+                <a:prstGeom prst="rect">
+                  <a:avLst/>
+                </a:prstGeom>
+                <a:solidFill>
+                  <a:schemeClr val="accent5">
+                    <a:lumMod val="40000"/>
+                    <a:lumOff val="60000"/>
+                  </a:schemeClr>
+                </a:solidFill>
+                <a:ln w="19050">
+                  <a:solidFill>
+                    <a:schemeClr val="tx1"/>
+                  </a:solidFill>
+                </a:ln>
+              </p:spPr>
+              <p:txBody>
+                <a:bodyPr wrap="square" rtlCol="0" anchor="ctr" anchorCtr="1">
+                  <a:spAutoFit/>
+                </a:bodyPr>
+                <a:lstStyle>
+                  <a:defPPr>
+                    <a:defRPr lang="zh-CN"/>
+                  </a:defPPr>
+                  <a:lvl1pPr algn="ctr">
+                    <a:defRPr sz="1200"/>
+                  </a:lvl1pPr>
+                </a:lstStyle>
+                <a:p>
+                  <a:r>
+                    <a:rPr lang="zh-CN" altLang="en-US" sz="1400">
+                      <a:latin typeface="Times New Roman" panose="02020603050405020304" pitchFamily="18" charset="0"/>
+                      <a:ea typeface="宋体" panose="02010600030101010101" pitchFamily="2" charset="-122"/>
+                    </a:rPr>
+                    <a:t>协议参数</a:t>
+                  </a:r>
+                  <a:endParaRPr lang="en-US" altLang="zh-CN" sz="1400" dirty="0">
+                    <a:latin typeface="Times New Roman" panose="02020603050405020304" pitchFamily="18" charset="0"/>
+                    <a:ea typeface="宋体" panose="02010600030101010101" pitchFamily="2" charset="-122"/>
+                  </a:endParaRPr>
+                </a:p>
+                <a:p>
+                  <a:r>
+                    <a:rPr lang="zh-CN" altLang="en-US" sz="1400" dirty="0">
+                      <a:latin typeface="Times New Roman" panose="02020603050405020304" pitchFamily="18" charset="0"/>
+                      <a:ea typeface="宋体" panose="02010600030101010101" pitchFamily="2" charset="-122"/>
+                    </a:rPr>
+                    <a:t>关键参数组合</a:t>
+                  </a:r>
+                  <a14:m>
+                    <m:oMath xmlns:m="http://schemas.openxmlformats.org/officeDocument/2006/math">
+                      <m:sSub>
+                        <m:sSubPr>
+                          <m:ctrlPr>
+                            <a:rPr lang="en-US" altLang="zh-CN" sz="1400"/>
+                          </m:ctrlPr>
+                        </m:sSubPr>
+                        <m:e>
+                          <m:r>
+                            <a:rPr lang="en-US" altLang="zh-CN" sz="1400"/>
+                            <m:t>𝑥</m:t>
+                          </m:r>
+                        </m:e>
+                        <m:sub>
+                          <m:r>
+                            <a:rPr lang="en-US" altLang="zh-CN" sz="1400"/>
+                            <m:t>𝑝𝑟𝑜𝑡𝑜</m:t>
+                          </m:r>
+                        </m:sub>
+                      </m:sSub>
+                    </m:oMath>
+                  </a14:m>
+                  <a:endParaRPr lang="en-US" altLang="zh-CN" sz="1400" dirty="0">
+                    <a:latin typeface="Times New Roman" panose="02020603050405020304" pitchFamily="18" charset="0"/>
+                    <a:ea typeface="宋体" panose="02010600030101010101" pitchFamily="2" charset="-122"/>
+                  </a:endParaRPr>
+                </a:p>
+              </p:txBody>
+            </p:sp>
+          </mc:Choice>
+          <mc:Fallback>
+            <p:sp>
+              <p:nvSpPr>
+                <p:cNvPr id="12" name="文本框 11">
+                  <a:extLst>
+                    <a:ext uri="{FF2B5EF4-FFF2-40B4-BE49-F238E27FC236}">
+                      <a16:creationId xmlns:a16="http://schemas.microsoft.com/office/drawing/2014/main" id="{E9FABF3D-D036-86E5-5433-AFCE9F05BC01}"/>
+                    </a:ext>
+                  </a:extLst>
+                </p:cNvPr>
+                <p:cNvSpPr txBox="1">
+                  <a:spLocks noRot="1" noChangeAspect="1" noMove="1" noResize="1" noEditPoints="1" noAdjustHandles="1" noChangeArrowheads="1" noChangeShapeType="1" noTextEdit="1"/>
+                </p:cNvSpPr>
+                <p:nvPr/>
+              </p:nvSpPr>
+              <p:spPr>
+                <a:xfrm>
+                  <a:off x="8511682" y="1841227"/>
+                  <a:ext cx="3327742" cy="594649"/>
+                </a:xfrm>
+                <a:prstGeom prst="rect">
+                  <a:avLst/>
+                </a:prstGeom>
+                <a:blipFill>
+                  <a:blip r:embed="rId5"/>
+                  <a:stretch>
+                    <a:fillRect t="-1087" b="-3261"/>
+                  </a:stretch>
+                </a:blipFill>
+                <a:ln w="19050">
+                  <a:solidFill>
+                    <a:schemeClr val="tx1"/>
+                  </a:solidFill>
+                </a:ln>
+              </p:spPr>
+              <p:txBody>
+                <a:bodyPr/>
+                <a:lstStyle/>
+                <a:p>
+                  <a:r>
+                    <a:rPr lang="zh-CN" altLang="en-US">
+                      <a:noFill/>
+                    </a:rPr>
+                    <a:t> </a:t>
+                  </a:r>
+                </a:p>
+              </p:txBody>
+            </p:sp>
+          </mc:Fallback>
+        </mc:AlternateContent>
+        <p:sp>
+          <p:nvSpPr>
+            <p:cNvPr id="32" name="矩形 31">
+              <a:extLst>
+                <a:ext uri="{FF2B5EF4-FFF2-40B4-BE49-F238E27FC236}">
+                  <a16:creationId xmlns:a16="http://schemas.microsoft.com/office/drawing/2014/main" id="{2E12D68F-283F-2EB1-265D-800E4645DEE5}"/>
+                </a:ext>
+              </a:extLst>
+            </p:cNvPr>
+            <p:cNvSpPr/>
+            <p:nvPr/>
+          </p:nvSpPr>
+          <p:spPr>
+            <a:xfrm>
+              <a:off x="449437" y="2755568"/>
+              <a:ext cx="3266246" cy="2161210"/>
+            </a:xfrm>
+            <a:prstGeom prst="rect">
+              <a:avLst/>
+            </a:prstGeom>
+            <a:solidFill>
+              <a:srgbClr val="FFC6C6"/>
+            </a:solidFill>
+            <a:ln w="19050">
+              <a:solidFill>
+                <a:schemeClr val="tx1"/>
+              </a:solidFill>
+            </a:ln>
+          </p:spPr>
+          <p:style>
+            <a:lnRef idx="2">
+              <a:schemeClr val="accent1">
+                <a:shade val="15000"/>
+              </a:schemeClr>
+            </a:lnRef>
+            <a:fillRef idx="1">
+              <a:schemeClr val="accent1"/>
+            </a:fillRef>
+            <a:effectRef idx="0">
+              <a:schemeClr val="accent1"/>
+            </a:effectRef>
+            <a:fontRef idx="minor">
+              <a:schemeClr val="lt1"/>
+            </a:fontRef>
+          </p:style>
+          <p:txBody>
+            <a:bodyPr rtlCol="0" anchor="ctr"/>
+            <a:lstStyle/>
+            <a:p>
+              <a:pPr algn="ctr"/>
+              <a:endParaRPr lang="zh-CN" altLang="en-US" sz="2800" dirty="0" err="1">
+                <a:solidFill>
+                  <a:schemeClr val="tx1"/>
+                </a:solidFill>
+                <a:latin typeface="Times New Roman" panose="02020603050405020304" pitchFamily="18" charset="0"/>
+                <a:ea typeface="宋体" panose="02010600030101010101" pitchFamily="2" charset="-122"/>
+              </a:endParaRPr>
+            </a:p>
+          </p:txBody>
+        </p:sp>
+        <p:sp>
+          <p:nvSpPr>
+            <p:cNvPr id="33" name="文本框 32">
+              <a:extLst>
+                <a:ext uri="{FF2B5EF4-FFF2-40B4-BE49-F238E27FC236}">
+                  <a16:creationId xmlns:a16="http://schemas.microsoft.com/office/drawing/2014/main" id="{A327BB64-D3F2-FE09-939B-0C4C8329A64C}"/>
+                </a:ext>
+              </a:extLst>
+            </p:cNvPr>
+            <p:cNvSpPr txBox="1"/>
+            <p:nvPr/>
+          </p:nvSpPr>
+          <p:spPr>
+            <a:xfrm>
+              <a:off x="479750" y="3104708"/>
+              <a:ext cx="3201762" cy="1450602"/>
+            </a:xfrm>
+            <a:prstGeom prst="rect">
+              <a:avLst/>
+            </a:prstGeom>
+            <a:solidFill>
+              <a:srgbClr val="FFC6C6"/>
+            </a:solidFill>
+          </p:spPr>
+          <p:txBody>
+            <a:bodyPr wrap="square" rtlCol="0" anchor="ctr" anchorCtr="1">
+              <a:spAutoFit/>
+            </a:bodyPr>
+            <a:lstStyle/>
+            <a:p>
+              <a:pPr algn="ctr"/>
+              <a:r>
+                <a:rPr lang="zh-CN" altLang="en-US" sz="2000" dirty="0">
+                  <a:latin typeface="Times New Roman" panose="02020603050405020304" pitchFamily="18" charset="0"/>
+                  <a:ea typeface="宋体" panose="02010600030101010101" pitchFamily="2" charset="-122"/>
+                </a:rPr>
+                <a:t>固定离散场景</a:t>
+              </a:r>
+              <a:endParaRPr lang="en-US" altLang="zh-CN" sz="2000" dirty="0">
+                <a:latin typeface="Times New Roman" panose="02020603050405020304" pitchFamily="18" charset="0"/>
+                <a:ea typeface="宋体" panose="02010600030101010101" pitchFamily="2" charset="-122"/>
+              </a:endParaRPr>
+            </a:p>
+            <a:p>
+              <a:pPr algn="ctr"/>
+              <a:endParaRPr lang="en-US" altLang="zh-CN" sz="2000" dirty="0">
+                <a:latin typeface="Times New Roman" panose="02020603050405020304" pitchFamily="18" charset="0"/>
+                <a:ea typeface="宋体" panose="02010600030101010101" pitchFamily="2" charset="-122"/>
+              </a:endParaRPr>
+            </a:p>
+            <a:p>
+              <a:pPr algn="ctr"/>
+              <a:endParaRPr lang="en-US" altLang="zh-CN" sz="2000" dirty="0">
+                <a:latin typeface="Times New Roman" panose="02020603050405020304" pitchFamily="18" charset="0"/>
+                <a:ea typeface="宋体" panose="02010600030101010101" pitchFamily="2" charset="-122"/>
+              </a:endParaRPr>
+            </a:p>
+            <a:p>
+              <a:pPr algn="ctr"/>
+              <a:r>
+                <a:rPr lang="zh-CN" altLang="en-US" sz="2000" dirty="0">
+                  <a:latin typeface="Times New Roman" panose="02020603050405020304" pitchFamily="18" charset="0"/>
+                  <a:ea typeface="宋体" panose="02010600030101010101" pitchFamily="2" charset="-122"/>
+                </a:rPr>
+                <a:t>两阶段保持一致遍历</a:t>
+              </a:r>
+              <a:endParaRPr lang="en-US" altLang="zh-CN" sz="2000" dirty="0">
+                <a:latin typeface="Times New Roman" panose="02020603050405020304" pitchFamily="18" charset="0"/>
+                <a:ea typeface="宋体" panose="02010600030101010101" pitchFamily="2" charset="-122"/>
+              </a:endParaRPr>
+            </a:p>
+          </p:txBody>
+        </p:sp>
+        <p:grpSp>
+          <p:nvGrpSpPr>
+            <p:cNvPr id="41" name="组合 40">
+              <a:extLst>
+                <a:ext uri="{FF2B5EF4-FFF2-40B4-BE49-F238E27FC236}">
+                  <a16:creationId xmlns:a16="http://schemas.microsoft.com/office/drawing/2014/main" id="{4C545FAD-BD84-F350-6262-248D2E7D3D2D}"/>
+                </a:ext>
+              </a:extLst>
+            </p:cNvPr>
+            <p:cNvGrpSpPr/>
+            <p:nvPr/>
+          </p:nvGrpSpPr>
+          <p:grpSpPr>
+            <a:xfrm>
+              <a:off x="4496504" y="2755568"/>
+              <a:ext cx="7342920" cy="989481"/>
+              <a:chOff x="10041208" y="3127023"/>
+              <a:chExt cx="1220992" cy="797619"/>
+            </a:xfrm>
+          </p:grpSpPr>
+          <p:sp>
+            <p:nvSpPr>
+              <p:cNvPr id="37" name="矩形 36">
+                <a:extLst>
+                  <a:ext uri="{FF2B5EF4-FFF2-40B4-BE49-F238E27FC236}">
+                    <a16:creationId xmlns:a16="http://schemas.microsoft.com/office/drawing/2014/main" id="{DA0FAF06-94EE-0621-9DEB-7546AB4A129A}"/>
+                  </a:ext>
+                </a:extLst>
+              </p:cNvPr>
+              <p:cNvSpPr/>
+              <p:nvPr/>
+            </p:nvSpPr>
+            <p:spPr>
+              <a:xfrm>
+                <a:off x="10041208" y="3127023"/>
+                <a:ext cx="1220992" cy="280569"/>
+              </a:xfrm>
+              <a:prstGeom prst="rect">
+                <a:avLst/>
+              </a:prstGeom>
+              <a:solidFill>
+                <a:schemeClr val="accent2">
+                  <a:lumMod val="40000"/>
+                  <a:lumOff val="60000"/>
+                </a:schemeClr>
+              </a:solidFill>
+              <a:ln w="19050">
+                <a:solidFill>
+                  <a:schemeClr val="tx1"/>
+                </a:solidFill>
+              </a:ln>
+            </p:spPr>
+            <p:style>
+              <a:lnRef idx="2">
+                <a:schemeClr val="accent1">
+                  <a:shade val="15000"/>
+                </a:schemeClr>
+              </a:lnRef>
+              <a:fillRef idx="1">
+                <a:schemeClr val="accent1"/>
+              </a:fillRef>
+              <a:effectRef idx="0">
+                <a:schemeClr val="accent1"/>
+              </a:effectRef>
+              <a:fontRef idx="minor">
+                <a:schemeClr val="lt1"/>
+              </a:fontRef>
+            </p:style>
+            <p:txBody>
+              <a:bodyPr rtlCol="0" anchor="ctr"/>
+              <a:lstStyle/>
+              <a:p>
+                <a:pPr algn="ctr"/>
+                <a:r>
+                  <a:rPr lang="zh-CN" altLang="en-US" sz="1600" dirty="0">
+                    <a:solidFill>
+                      <a:schemeClr val="tx1"/>
+                    </a:solidFill>
+                    <a:latin typeface="Times New Roman" panose="02020603050405020304" pitchFamily="18" charset="0"/>
+                    <a:ea typeface="宋体" panose="02010600030101010101" pitchFamily="2" charset="-122"/>
+                  </a:rPr>
+                  <a:t>一阶段采样</a:t>
+                </a:r>
+              </a:p>
+            </p:txBody>
+          </p:sp>
+          <p:sp>
+            <p:nvSpPr>
+              <p:cNvPr id="38" name="矩形 37">
+                <a:extLst>
+                  <a:ext uri="{FF2B5EF4-FFF2-40B4-BE49-F238E27FC236}">
+                    <a16:creationId xmlns:a16="http://schemas.microsoft.com/office/drawing/2014/main" id="{504D3CE2-C8C6-2AA0-1B45-58572AA1BF9F}"/>
+                  </a:ext>
+                </a:extLst>
+              </p:cNvPr>
+              <p:cNvSpPr/>
+              <p:nvPr/>
+            </p:nvSpPr>
+            <p:spPr>
+              <a:xfrm>
+                <a:off x="10041208" y="3407592"/>
+                <a:ext cx="1220992" cy="517050"/>
+              </a:xfrm>
+              <a:prstGeom prst="rect">
+                <a:avLst/>
+              </a:prstGeom>
+              <a:noFill/>
+              <a:ln w="19050">
+                <a:solidFill>
+                  <a:schemeClr val="tx1"/>
+                </a:solidFill>
+              </a:ln>
+            </p:spPr>
+            <p:style>
+              <a:lnRef idx="2">
+                <a:schemeClr val="accent1">
+                  <a:shade val="15000"/>
+                </a:schemeClr>
+              </a:lnRef>
+              <a:fillRef idx="1">
+                <a:schemeClr val="accent1"/>
+              </a:fillRef>
+              <a:effectRef idx="0">
+                <a:schemeClr val="accent1"/>
+              </a:effectRef>
+              <a:fontRef idx="minor">
+                <a:schemeClr val="lt1"/>
+              </a:fontRef>
+            </p:style>
+            <p:txBody>
+              <a:bodyPr rtlCol="0" anchor="ctr"/>
+              <a:lstStyle/>
+              <a:p>
+                <a:pPr algn="ctr"/>
+                <a:r>
+                  <a:rPr lang="zh-CN" altLang="en-US" sz="1600" dirty="0">
+                    <a:solidFill>
+                      <a:schemeClr val="tx1"/>
+                    </a:solidFill>
+                    <a:latin typeface="Times New Roman" panose="02020603050405020304" pitchFamily="18" charset="0"/>
+                    <a:ea typeface="宋体" panose="02010600030101010101" pitchFamily="2" charset="-122"/>
+                  </a:rPr>
+                  <a:t>单一粒度均匀网格采样，快速获取性能曲线轮廓</a:t>
+                </a:r>
+              </a:p>
+            </p:txBody>
+          </p:sp>
+        </p:grpSp>
+        <p:grpSp>
+          <p:nvGrpSpPr>
+            <p:cNvPr id="42" name="组合 41">
+              <a:extLst>
+                <a:ext uri="{FF2B5EF4-FFF2-40B4-BE49-F238E27FC236}">
+                  <a16:creationId xmlns:a16="http://schemas.microsoft.com/office/drawing/2014/main" id="{56580D02-DA21-4574-C9BE-1743765E0A33}"/>
+                </a:ext>
+              </a:extLst>
+            </p:cNvPr>
+            <p:cNvGrpSpPr/>
+            <p:nvPr/>
+          </p:nvGrpSpPr>
+          <p:grpSpPr>
+            <a:xfrm>
+              <a:off x="4496504" y="3964389"/>
+              <a:ext cx="7342920" cy="952389"/>
+              <a:chOff x="10041208" y="3156923"/>
+              <a:chExt cx="1220992" cy="767719"/>
+            </a:xfrm>
+          </p:grpSpPr>
+          <p:sp>
+            <p:nvSpPr>
+              <p:cNvPr id="43" name="矩形 42">
+                <a:extLst>
+                  <a:ext uri="{FF2B5EF4-FFF2-40B4-BE49-F238E27FC236}">
+                    <a16:creationId xmlns:a16="http://schemas.microsoft.com/office/drawing/2014/main" id="{C23FE968-AA31-72BB-0337-A4BB5F01B0CF}"/>
+                  </a:ext>
+                </a:extLst>
+              </p:cNvPr>
+              <p:cNvSpPr/>
+              <p:nvPr/>
+            </p:nvSpPr>
+            <p:spPr>
+              <a:xfrm>
+                <a:off x="10041208" y="3156923"/>
+                <a:ext cx="1220992" cy="250669"/>
+              </a:xfrm>
+              <a:prstGeom prst="rect">
+                <a:avLst/>
+              </a:prstGeom>
+              <a:solidFill>
+                <a:schemeClr val="accent2">
+                  <a:lumMod val="60000"/>
+                  <a:lumOff val="40000"/>
+                </a:schemeClr>
+              </a:solidFill>
+              <a:ln w="19050">
+                <a:solidFill>
+                  <a:schemeClr val="tx1"/>
+                </a:solidFill>
+              </a:ln>
+            </p:spPr>
+            <p:style>
+              <a:lnRef idx="2">
+                <a:schemeClr val="accent1">
+                  <a:shade val="15000"/>
+                </a:schemeClr>
+              </a:lnRef>
+              <a:fillRef idx="1">
+                <a:schemeClr val="accent1"/>
+              </a:fillRef>
+              <a:effectRef idx="0">
+                <a:schemeClr val="accent1"/>
+              </a:effectRef>
+              <a:fontRef idx="minor">
+                <a:schemeClr val="lt1"/>
+              </a:fontRef>
+            </p:style>
+            <p:txBody>
+              <a:bodyPr rtlCol="0" anchor="ctr"/>
+              <a:lstStyle/>
+              <a:p>
+                <a:pPr algn="ctr"/>
+                <a:r>
+                  <a:rPr lang="zh-CN" altLang="en-US" sz="1600" dirty="0">
+                    <a:solidFill>
+                      <a:schemeClr val="tx1"/>
+                    </a:solidFill>
+                    <a:latin typeface="Times New Roman" panose="02020603050405020304" pitchFamily="18" charset="0"/>
+                    <a:ea typeface="宋体" panose="02010600030101010101" pitchFamily="2" charset="-122"/>
+                  </a:rPr>
+                  <a:t>二阶段采样</a:t>
+                </a:r>
+              </a:p>
+            </p:txBody>
+          </p:sp>
+          <p:sp>
+            <p:nvSpPr>
+              <p:cNvPr id="44" name="矩形 43">
+                <a:extLst>
+                  <a:ext uri="{FF2B5EF4-FFF2-40B4-BE49-F238E27FC236}">
+                    <a16:creationId xmlns:a16="http://schemas.microsoft.com/office/drawing/2014/main" id="{2EC0E218-FC4F-8249-4726-54E888AACFA4}"/>
+                  </a:ext>
+                </a:extLst>
+              </p:cNvPr>
+              <p:cNvSpPr/>
+              <p:nvPr/>
+            </p:nvSpPr>
+            <p:spPr>
+              <a:xfrm>
+                <a:off x="10041208" y="3407592"/>
+                <a:ext cx="1220992" cy="517050"/>
+              </a:xfrm>
+              <a:prstGeom prst="rect">
+                <a:avLst/>
+              </a:prstGeom>
+              <a:noFill/>
+              <a:ln w="19050">
+                <a:solidFill>
+                  <a:schemeClr val="tx1"/>
+                </a:solidFill>
+              </a:ln>
+            </p:spPr>
+            <p:style>
+              <a:lnRef idx="2">
+                <a:schemeClr val="accent1">
+                  <a:shade val="15000"/>
+                </a:schemeClr>
+              </a:lnRef>
+              <a:fillRef idx="1">
+                <a:schemeClr val="accent1"/>
+              </a:fillRef>
+              <a:effectRef idx="0">
+                <a:schemeClr val="accent1"/>
+              </a:effectRef>
+              <a:fontRef idx="minor">
+                <a:schemeClr val="lt1"/>
+              </a:fontRef>
+            </p:style>
+            <p:txBody>
+              <a:bodyPr rtlCol="0" anchor="ctr"/>
+              <a:lstStyle/>
+              <a:p>
+                <a:pPr algn="ctr"/>
+                <a:r>
+                  <a:rPr lang="zh-CN" altLang="en-US" sz="1600" dirty="0">
+                    <a:solidFill>
+                      <a:schemeClr val="tx1"/>
+                    </a:solidFill>
+                    <a:latin typeface="Times New Roman" panose="02020603050405020304" pitchFamily="18" charset="0"/>
+                    <a:ea typeface="宋体" panose="02010600030101010101" pitchFamily="2" charset="-122"/>
+                  </a:rPr>
+                  <a:t>关键区间加密采样以增强细粒度变化</a:t>
+                </a:r>
+              </a:p>
+            </p:txBody>
+          </p:sp>
+        </p:grpSp>
+        <p:cxnSp>
+          <p:nvCxnSpPr>
+            <p:cNvPr id="46" name="直接箭头连接符 45">
+              <a:extLst>
+                <a:ext uri="{FF2B5EF4-FFF2-40B4-BE49-F238E27FC236}">
+                  <a16:creationId xmlns:a16="http://schemas.microsoft.com/office/drawing/2014/main" id="{4E2DC232-768F-C0D9-E364-6BB96334A480}"/>
+                </a:ext>
+              </a:extLst>
+            </p:cNvPr>
+            <p:cNvCxnSpPr>
+              <a:stCxn id="38" idx="2"/>
+              <a:endCxn id="43" idx="0"/>
+            </p:cNvCxnSpPr>
+            <p:nvPr/>
+          </p:nvCxnSpPr>
+          <p:spPr>
+            <a:xfrm>
+              <a:off x="8167964" y="3745049"/>
+              <a:ext cx="0" cy="219340"/>
+            </a:xfrm>
+            <a:prstGeom prst="straightConnector1">
+              <a:avLst/>
+            </a:prstGeom>
+            <a:ln w="19050">
+              <a:solidFill>
+                <a:schemeClr val="tx1"/>
+              </a:solidFill>
+              <a:tailEnd type="triangle"/>
+            </a:ln>
+          </p:spPr>
+          <p:style>
+            <a:lnRef idx="1">
+              <a:schemeClr val="accent1"/>
+            </a:lnRef>
+            <a:fillRef idx="0">
+              <a:schemeClr val="accent1"/>
+            </a:fillRef>
+            <a:effectRef idx="0">
+              <a:schemeClr val="accent1"/>
+            </a:effectRef>
+            <a:fontRef idx="minor">
+              <a:schemeClr val="tx1"/>
+            </a:fontRef>
+          </p:style>
+        </p:cxnSp>
+        <p:cxnSp>
+          <p:nvCxnSpPr>
+            <p:cNvPr id="51" name="直接箭头连接符 50">
+              <a:extLst>
+                <a:ext uri="{FF2B5EF4-FFF2-40B4-BE49-F238E27FC236}">
+                  <a16:creationId xmlns:a16="http://schemas.microsoft.com/office/drawing/2014/main" id="{68D26837-1D96-D635-D059-21461F4A0F28}"/>
+                </a:ext>
+              </a:extLst>
+            </p:cNvPr>
+            <p:cNvCxnSpPr>
+              <a:stCxn id="9" idx="2"/>
+            </p:cNvCxnSpPr>
+            <p:nvPr/>
+          </p:nvCxnSpPr>
+          <p:spPr>
+            <a:xfrm>
+              <a:off x="6128487" y="2457125"/>
+              <a:ext cx="0" cy="298443"/>
+            </a:xfrm>
+            <a:prstGeom prst="straightConnector1">
+              <a:avLst/>
+            </a:prstGeom>
+            <a:ln w="19050">
+              <a:solidFill>
+                <a:schemeClr val="tx1"/>
+              </a:solidFill>
+              <a:tailEnd type="triangle"/>
+            </a:ln>
+          </p:spPr>
+          <p:style>
+            <a:lnRef idx="1">
+              <a:schemeClr val="accent1"/>
+            </a:lnRef>
+            <a:fillRef idx="0">
+              <a:schemeClr val="accent1"/>
+            </a:fillRef>
+            <a:effectRef idx="0">
+              <a:schemeClr val="accent1"/>
+            </a:effectRef>
+            <a:fontRef idx="minor">
+              <a:schemeClr val="tx1"/>
+            </a:fontRef>
+          </p:style>
+        </p:cxnSp>
+        <p:cxnSp>
+          <p:nvCxnSpPr>
+            <p:cNvPr id="53" name="直接箭头连接符 52">
+              <a:extLst>
+                <a:ext uri="{FF2B5EF4-FFF2-40B4-BE49-F238E27FC236}">
+                  <a16:creationId xmlns:a16="http://schemas.microsoft.com/office/drawing/2014/main" id="{6E21DAD0-36B5-6E49-F8D4-CF1DA64C7896}"/>
+                </a:ext>
+              </a:extLst>
+            </p:cNvPr>
+            <p:cNvCxnSpPr>
+              <a:stCxn id="12" idx="2"/>
+            </p:cNvCxnSpPr>
+            <p:nvPr/>
+          </p:nvCxnSpPr>
+          <p:spPr>
+            <a:xfrm>
+              <a:off x="10175553" y="2435877"/>
+              <a:ext cx="0" cy="319691"/>
+            </a:xfrm>
+            <a:prstGeom prst="straightConnector1">
+              <a:avLst/>
+            </a:prstGeom>
+            <a:ln w="19050">
+              <a:solidFill>
+                <a:schemeClr val="tx1"/>
+              </a:solidFill>
+              <a:tailEnd type="triangle"/>
+            </a:ln>
+          </p:spPr>
+          <p:style>
+            <a:lnRef idx="1">
+              <a:schemeClr val="accent1"/>
+            </a:lnRef>
+            <a:fillRef idx="0">
+              <a:schemeClr val="accent1"/>
+            </a:fillRef>
+            <a:effectRef idx="0">
+              <a:schemeClr val="accent1"/>
+            </a:effectRef>
+            <a:fontRef idx="minor">
+              <a:schemeClr val="tx1"/>
+            </a:fontRef>
+          </p:style>
+        </p:cxnSp>
+        <p:cxnSp>
+          <p:nvCxnSpPr>
+            <p:cNvPr id="55" name="直接箭头连接符 54">
+              <a:extLst>
+                <a:ext uri="{FF2B5EF4-FFF2-40B4-BE49-F238E27FC236}">
+                  <a16:creationId xmlns:a16="http://schemas.microsoft.com/office/drawing/2014/main" id="{91BEC67A-A277-3A25-D224-0519CCD30529}"/>
+                </a:ext>
+              </a:extLst>
+            </p:cNvPr>
+            <p:cNvCxnSpPr>
+              <a:stCxn id="5" idx="2"/>
+              <a:endCxn id="32" idx="0"/>
+            </p:cNvCxnSpPr>
+            <p:nvPr/>
+          </p:nvCxnSpPr>
+          <p:spPr>
+            <a:xfrm>
+              <a:off x="2081420" y="2450729"/>
+              <a:ext cx="1140" cy="304839"/>
+            </a:xfrm>
+            <a:prstGeom prst="straightConnector1">
+              <a:avLst/>
+            </a:prstGeom>
+            <a:ln w="19050">
+              <a:solidFill>
+                <a:schemeClr val="tx1"/>
+              </a:solidFill>
+              <a:tailEnd type="triangle"/>
+            </a:ln>
+          </p:spPr>
+          <p:style>
+            <a:lnRef idx="1">
+              <a:schemeClr val="accent1"/>
+            </a:lnRef>
+            <a:fillRef idx="0">
+              <a:schemeClr val="accent1"/>
+            </a:fillRef>
+            <a:effectRef idx="0">
+              <a:schemeClr val="accent1"/>
+            </a:effectRef>
+            <a:fontRef idx="minor">
+              <a:schemeClr val="tx1"/>
+            </a:fontRef>
+          </p:style>
+        </p:cxnSp>
+        <p:cxnSp>
+          <p:nvCxnSpPr>
+            <p:cNvPr id="57" name="直接箭头连接符 56">
+              <a:extLst>
+                <a:ext uri="{FF2B5EF4-FFF2-40B4-BE49-F238E27FC236}">
+                  <a16:creationId xmlns:a16="http://schemas.microsoft.com/office/drawing/2014/main" id="{3D6646B4-24EE-1E21-05DB-70054581DA98}"/>
+                </a:ext>
+              </a:extLst>
+            </p:cNvPr>
+            <p:cNvCxnSpPr>
+              <a:stCxn id="5" idx="0"/>
+            </p:cNvCxnSpPr>
+            <p:nvPr/>
+          </p:nvCxnSpPr>
+          <p:spPr>
+            <a:xfrm flipV="1">
+              <a:off x="2081420" y="1516997"/>
+              <a:ext cx="0" cy="360238"/>
+            </a:xfrm>
+            <a:prstGeom prst="straightConnector1">
+              <a:avLst/>
+            </a:prstGeom>
+            <a:ln w="19050">
+              <a:solidFill>
+                <a:schemeClr val="tx1"/>
+              </a:solidFill>
+              <a:headEnd type="triangle"/>
+              <a:tailEnd type="none"/>
+            </a:ln>
+          </p:spPr>
+          <p:style>
+            <a:lnRef idx="1">
+              <a:schemeClr val="accent1"/>
+            </a:lnRef>
+            <a:fillRef idx="0">
+              <a:schemeClr val="accent1"/>
+            </a:fillRef>
+            <a:effectRef idx="0">
+              <a:schemeClr val="accent1"/>
+            </a:effectRef>
+            <a:fontRef idx="minor">
+              <a:schemeClr val="tx1"/>
+            </a:fontRef>
+          </p:style>
+        </p:cxnSp>
+        <p:cxnSp>
+          <p:nvCxnSpPr>
+            <p:cNvPr id="59" name="直接箭头连接符 58">
+              <a:extLst>
+                <a:ext uri="{FF2B5EF4-FFF2-40B4-BE49-F238E27FC236}">
+                  <a16:creationId xmlns:a16="http://schemas.microsoft.com/office/drawing/2014/main" id="{B6A75991-5A28-496B-C80C-DEB0DD0BE7D2}"/>
+                </a:ext>
+              </a:extLst>
+            </p:cNvPr>
+            <p:cNvCxnSpPr>
+              <a:stCxn id="12" idx="0"/>
+            </p:cNvCxnSpPr>
+            <p:nvPr/>
+          </p:nvCxnSpPr>
+          <p:spPr>
+            <a:xfrm flipV="1">
+              <a:off x="10175553" y="1516997"/>
+              <a:ext cx="0" cy="324231"/>
+            </a:xfrm>
+            <a:prstGeom prst="straightConnector1">
+              <a:avLst/>
+            </a:prstGeom>
+            <a:ln w="19050">
+              <a:solidFill>
+                <a:schemeClr val="tx1"/>
+              </a:solidFill>
+              <a:headEnd type="triangle"/>
+              <a:tailEnd type="none"/>
+            </a:ln>
+          </p:spPr>
+          <p:style>
+            <a:lnRef idx="1">
+              <a:schemeClr val="accent1"/>
+            </a:lnRef>
+            <a:fillRef idx="0">
+              <a:schemeClr val="accent1"/>
+            </a:fillRef>
+            <a:effectRef idx="0">
+              <a:schemeClr val="accent1"/>
+            </a:effectRef>
+            <a:fontRef idx="minor">
+              <a:schemeClr val="tx1"/>
+            </a:fontRef>
+          </p:style>
+        </p:cxnSp>
+        <p:sp>
+          <p:nvSpPr>
+            <p:cNvPr id="60" name="文本框 59">
+              <a:extLst>
+                <a:ext uri="{FF2B5EF4-FFF2-40B4-BE49-F238E27FC236}">
+                  <a16:creationId xmlns:a16="http://schemas.microsoft.com/office/drawing/2014/main" id="{A3D0BA87-1E6F-F03B-B6DB-85F400B05927}"/>
+                </a:ext>
+              </a:extLst>
+            </p:cNvPr>
+            <p:cNvSpPr txBox="1"/>
+            <p:nvPr/>
+          </p:nvSpPr>
+          <p:spPr>
+            <a:xfrm>
+              <a:off x="233296" y="399652"/>
+              <a:ext cx="3235451" cy="438555"/>
+            </a:xfrm>
+            <a:prstGeom prst="rect">
+              <a:avLst/>
+            </a:prstGeom>
+            <a:noFill/>
+          </p:spPr>
+          <p:txBody>
+            <a:bodyPr wrap="square" rtlCol="0" anchor="ctr" anchorCtr="1">
+              <a:spAutoFit/>
+            </a:bodyPr>
+            <a:lstStyle/>
+            <a:p>
+              <a:pPr algn="ctr"/>
+              <a:r>
+                <a:rPr lang="zh-CN" altLang="en-US" sz="2000" dirty="0">
+                  <a:latin typeface="Times New Roman" panose="02020603050405020304" pitchFamily="18" charset="0"/>
+                  <a:ea typeface="宋体" panose="02010600030101010101" pitchFamily="2" charset="-122"/>
+                </a:rPr>
+                <a:t>数据集采样策略</a:t>
+              </a:r>
+            </a:p>
+          </p:txBody>
+        </p:sp>
+        <p:sp>
+          <p:nvSpPr>
+            <p:cNvPr id="63" name="矩形 62">
+              <a:extLst>
+                <a:ext uri="{FF2B5EF4-FFF2-40B4-BE49-F238E27FC236}">
+                  <a16:creationId xmlns:a16="http://schemas.microsoft.com/office/drawing/2014/main" id="{44E2B7A6-3B5F-8F3C-1B03-CE8810C8031A}"/>
+                </a:ext>
+              </a:extLst>
+            </p:cNvPr>
+            <p:cNvSpPr/>
+            <p:nvPr/>
+          </p:nvSpPr>
+          <p:spPr>
+            <a:xfrm>
+              <a:off x="449437" y="5315779"/>
+              <a:ext cx="11262813" cy="515444"/>
+            </a:xfrm>
+            <a:prstGeom prst="rect">
+              <a:avLst/>
+            </a:prstGeom>
+            <a:solidFill>
+              <a:srgbClr val="FF7474"/>
+            </a:solidFill>
+            <a:ln w="19050">
+              <a:solidFill>
+                <a:schemeClr val="tx1"/>
+              </a:solidFill>
+            </a:ln>
+          </p:spPr>
+          <p:style>
+            <a:lnRef idx="2">
+              <a:schemeClr val="accent1">
+                <a:shade val="15000"/>
+              </a:schemeClr>
+            </a:lnRef>
+            <a:fillRef idx="1">
+              <a:schemeClr val="accent1"/>
+            </a:fillRef>
+            <a:effectRef idx="0">
+              <a:schemeClr val="accent1"/>
+            </a:effectRef>
+            <a:fontRef idx="minor">
+              <a:schemeClr val="lt1"/>
+            </a:fontRef>
+          </p:style>
+          <p:txBody>
+            <a:bodyPr rtlCol="0" anchor="ctr"/>
+            <a:lstStyle/>
+            <a:p>
+              <a:pPr algn="ctr"/>
+              <a:r>
+                <a:rPr lang="zh-CN" altLang="en-US" sz="1600" dirty="0">
+                  <a:solidFill>
+                    <a:schemeClr val="tx1"/>
+                  </a:solidFill>
+                  <a:latin typeface="Times New Roman" panose="02020603050405020304" pitchFamily="18" charset="0"/>
+                  <a:ea typeface="宋体" panose="02010600030101010101" pitchFamily="2" charset="-122"/>
+                </a:rPr>
+                <a:t>组装特征和标签，形成完整监督学习数据集</a:t>
+              </a:r>
+            </a:p>
+          </p:txBody>
+        </p:sp>
+        <p:cxnSp>
+          <p:nvCxnSpPr>
+            <p:cNvPr id="69" name="直接箭头连接符 68">
+              <a:extLst>
+                <a:ext uri="{FF2B5EF4-FFF2-40B4-BE49-F238E27FC236}">
+                  <a16:creationId xmlns:a16="http://schemas.microsoft.com/office/drawing/2014/main" id="{A44EE741-7B54-8502-DA4D-470076DEACDD}"/>
+                </a:ext>
+              </a:extLst>
+            </p:cNvPr>
+            <p:cNvCxnSpPr>
+              <a:stCxn id="32" idx="2"/>
+            </p:cNvCxnSpPr>
+            <p:nvPr/>
+          </p:nvCxnSpPr>
+          <p:spPr>
+            <a:xfrm flipH="1">
+              <a:off x="2081420" y="4916778"/>
+              <a:ext cx="1141" cy="399001"/>
+            </a:xfrm>
+            <a:prstGeom prst="straightConnector1">
+              <a:avLst/>
+            </a:prstGeom>
+            <a:ln w="19050">
+              <a:solidFill>
+                <a:schemeClr val="tx1"/>
+              </a:solidFill>
+              <a:tailEnd type="triangle"/>
+            </a:ln>
+          </p:spPr>
+          <p:style>
+            <a:lnRef idx="1">
+              <a:schemeClr val="accent1"/>
+            </a:lnRef>
+            <a:fillRef idx="0">
+              <a:schemeClr val="accent1"/>
+            </a:fillRef>
+            <a:effectRef idx="0">
+              <a:schemeClr val="accent1"/>
+            </a:effectRef>
+            <a:fontRef idx="minor">
+              <a:schemeClr val="tx1"/>
+            </a:fontRef>
+          </p:style>
+        </p:cxnSp>
+        <p:cxnSp>
+          <p:nvCxnSpPr>
+            <p:cNvPr id="71" name="直接箭头连接符 70">
+              <a:extLst>
+                <a:ext uri="{FF2B5EF4-FFF2-40B4-BE49-F238E27FC236}">
+                  <a16:creationId xmlns:a16="http://schemas.microsoft.com/office/drawing/2014/main" id="{E8DE245D-917C-C0B4-F454-F6C2A0D04226}"/>
+                </a:ext>
+              </a:extLst>
+            </p:cNvPr>
+            <p:cNvCxnSpPr>
+              <a:cxnSpLocks/>
+              <a:stCxn id="44" idx="2"/>
+            </p:cNvCxnSpPr>
+            <p:nvPr/>
+          </p:nvCxnSpPr>
+          <p:spPr>
+            <a:xfrm>
+              <a:off x="8167964" y="4916778"/>
+              <a:ext cx="0" cy="399001"/>
+            </a:xfrm>
+            <a:prstGeom prst="straightConnector1">
+              <a:avLst/>
+            </a:prstGeom>
+            <a:ln w="19050">
+              <a:solidFill>
+                <a:schemeClr val="tx1"/>
+              </a:solidFill>
+              <a:tailEnd type="triangle"/>
+            </a:ln>
+          </p:spPr>
+          <p:style>
+            <a:lnRef idx="1">
+              <a:schemeClr val="accent1"/>
+            </a:lnRef>
+            <a:fillRef idx="0">
+              <a:schemeClr val="accent1"/>
+            </a:fillRef>
+            <a:effectRef idx="0">
+              <a:schemeClr val="accent1"/>
+            </a:effectRef>
+            <a:fontRef idx="minor">
+              <a:schemeClr val="tx1"/>
+            </a:fontRef>
+          </p:style>
+        </p:cxnSp>
+      </p:grpSp>
+    </p:spTree>
+    <p:extLst>
+      <p:ext uri="{BB962C8B-B14F-4D97-AF65-F5344CB8AC3E}">
+        <p14:creationId xmlns:p14="http://schemas.microsoft.com/office/powerpoint/2010/main" val="107335323"/>
+      </p:ext>
+    </p:extLst>
+  </p:cSld>
+  <p:clrMapOvr>
+    <a:masterClrMapping/>
+  </p:clrMapOvr>
+</p:sld>
+</file>
+
 <file path=ppt/theme/theme1.xml><?xml version="1.0" encoding="utf-8"?>
 <a:theme xmlns:a="http://schemas.openxmlformats.org/drawingml/2006/main" name="Office 主题​​">
   <a:themeElements>
@@ -11038,4 +13271,299 @@
     </a:ext>
   </a:extLst>
 </a:theme>
+</file>
+
+<file path=ppt/theme/theme2.xml><?xml version="1.0" encoding="utf-8"?>
+<a:theme xmlns:a="http://schemas.openxmlformats.org/drawingml/2006/main" name="Office 主题​​">
+  <a:themeElements>
+    <a:clrScheme name="Office">
+      <a:dk1>
+        <a:sysClr val="windowText" lastClr="000000"/>
+      </a:dk1>
+      <a:lt1>
+        <a:sysClr val="window" lastClr="FFFFFF"/>
+      </a:lt1>
+      <a:dk2>
+        <a:srgbClr val="44546A"/>
+      </a:dk2>
+      <a:lt2>
+        <a:srgbClr val="E7E6E6"/>
+      </a:lt2>
+      <a:accent1>
+        <a:srgbClr val="4472C4"/>
+      </a:accent1>
+      <a:accent2>
+        <a:srgbClr val="ED7D31"/>
+      </a:accent2>
+      <a:accent3>
+        <a:srgbClr val="A5A5A5"/>
+      </a:accent3>
+      <a:accent4>
+        <a:srgbClr val="FFC000"/>
+      </a:accent4>
+      <a:accent5>
+        <a:srgbClr val="5B9BD5"/>
+      </a:accent5>
+      <a:accent6>
+        <a:srgbClr val="70AD47"/>
+      </a:accent6>
+      <a:hlink>
+        <a:srgbClr val="0563C1"/>
+      </a:hlink>
+      <a:folHlink>
+        <a:srgbClr val="954F72"/>
+      </a:folHlink>
+    </a:clrScheme>
+    <a:fontScheme name="Office">
+      <a:majorFont>
+        <a:latin typeface="等线 Light" panose="020F0302020204030204"/>
+        <a:ea typeface=""/>
+        <a:cs typeface=""/>
+        <a:font script="Jpan" typeface="游ゴシック Light"/>
+        <a:font script="Hang" typeface="맑은 고딕"/>
+        <a:font script="Hans" typeface="等线 Light"/>
+        <a:font script="Hant" typeface="新細明體"/>
+        <a:font script="Arab" typeface="Times New Roman"/>
+        <a:font script="Hebr" typeface="Times New Roman"/>
+        <a:font script="Thai" typeface="Angsana New"/>
+        <a:font script="Ethi" typeface="Nyala"/>
+        <a:font script="Beng" typeface="Vrinda"/>
+        <a:font script="Gujr" typeface="Shruti"/>
+        <a:font script="Khmr" typeface="MoolBoran"/>
+        <a:font script="Knda" typeface="Tunga"/>
+        <a:font script="Guru" typeface="Raavi"/>
+        <a:font script="Cans" typeface="Euphemia"/>
+        <a:font script="Cher" typeface="Plantagenet Cherokee"/>
+        <a:font script="Yiii" typeface="Microsoft Yi Baiti"/>
+        <a:font script="Tibt" typeface="Microsoft Himalaya"/>
+        <a:font script="Thaa" typeface="MV Boli"/>
+        <a:font script="Deva" typeface="Mangal"/>
+        <a:font script="Telu" typeface="Gautami"/>
+        <a:font script="Taml" typeface="Latha"/>
+        <a:font script="Syrc" typeface="Estrangelo Edessa"/>
+        <a:font script="Orya" typeface="Kalinga"/>
+        <a:font script="Mlym" typeface="Kartika"/>
+        <a:font script="Laoo" typeface="DokChampa"/>
+        <a:font script="Sinh" typeface="Iskoola Pota"/>
+        <a:font script="Mong" typeface="Mongolian Baiti"/>
+        <a:font script="Viet" typeface="Times New Roman"/>
+        <a:font script="Uigh" typeface="Microsoft Uighur"/>
+        <a:font script="Geor" typeface="Sylfaen"/>
+        <a:font script="Armn" typeface="Arial"/>
+        <a:font script="Bugi" typeface="Leelawadee UI"/>
+        <a:font script="Bopo" typeface="Microsoft JhengHei"/>
+        <a:font script="Java" typeface="Javanese Text"/>
+        <a:font script="Lisu" typeface="Segoe UI"/>
+        <a:font script="Mymr" typeface="Myanmar Text"/>
+        <a:font script="Nkoo" typeface="Ebrima"/>
+        <a:font script="Olck" typeface="Nirmala UI"/>
+        <a:font script="Osma" typeface="Ebrima"/>
+        <a:font script="Phag" typeface="Phagspa"/>
+        <a:font script="Syrn" typeface="Estrangelo Edessa"/>
+        <a:font script="Syrj" typeface="Estrangelo Edessa"/>
+        <a:font script="Syre" typeface="Estrangelo Edessa"/>
+        <a:font script="Sora" typeface="Nirmala UI"/>
+        <a:font script="Tale" typeface="Microsoft Tai Le"/>
+        <a:font script="Talu" typeface="Microsoft New Tai Lue"/>
+        <a:font script="Tfng" typeface="Ebrima"/>
+      </a:majorFont>
+      <a:minorFont>
+        <a:latin typeface="等线" panose="020F0502020204030204"/>
+        <a:ea typeface=""/>
+        <a:cs typeface=""/>
+        <a:font script="Jpan" typeface="游ゴシック"/>
+        <a:font script="Hang" typeface="맑은 고딕"/>
+        <a:font script="Hans" typeface="等线"/>
+        <a:font script="Hant" typeface="新細明體"/>
+        <a:font script="Arab" typeface="Arial"/>
+        <a:font script="Hebr" typeface="Arial"/>
+        <a:font script="Thai" typeface="Cordia New"/>
+        <a:font script="Ethi" typeface="Nyala"/>
+        <a:font script="Beng" typeface="Vrinda"/>
+        <a:font script="Gujr" typeface="Shruti"/>
+        <a:font script="Khmr" typeface="DaunPenh"/>
+        <a:font script="Knda" typeface="Tunga"/>
+        <a:font script="Guru" typeface="Raavi"/>
+        <a:font script="Cans" typeface="Euphemia"/>
+        <a:font script="Cher" typeface="Plantagenet Cherokee"/>
+        <a:font script="Yiii" typeface="Microsoft Yi Baiti"/>
+        <a:font script="Tibt" typeface="Microsoft Himalaya"/>
+        <a:font script="Thaa" typeface="MV Boli"/>
+        <a:font script="Deva" typeface="Mangal"/>
+        <a:font script="Telu" typeface="Gautami"/>
+        <a:font script="Taml" typeface="Latha"/>
+        <a:font script="Syrc" typeface="Estrangelo Edessa"/>
+        <a:font script="Orya" typeface="Kalinga"/>
+        <a:font script="Mlym" typeface="Kartika"/>
+        <a:font script="Laoo" typeface="DokChampa"/>
+        <a:font script="Sinh" typeface="Iskoola Pota"/>
+        <a:font script="Mong" typeface="Mongolian Baiti"/>
+        <a:font script="Viet" typeface="Arial"/>
+        <a:font script="Uigh" typeface="Microsoft Uighur"/>
+        <a:font script="Geor" typeface="Sylfaen"/>
+        <a:font script="Armn" typeface="Arial"/>
+        <a:font script="Bugi" typeface="Leelawadee UI"/>
+        <a:font script="Bopo" typeface="Microsoft JhengHei"/>
+        <a:font script="Java" typeface="Javanese Text"/>
+        <a:font script="Lisu" typeface="Segoe UI"/>
+        <a:font script="Mymr" typeface="Myanmar Text"/>
+        <a:font script="Nkoo" typeface="Ebrima"/>
+        <a:font script="Olck" typeface="Nirmala UI"/>
+        <a:font script="Osma" typeface="Ebrima"/>
+        <a:font script="Phag" typeface="Phagspa"/>
+        <a:font script="Syrn" typeface="Estrangelo Edessa"/>
+        <a:font script="Syrj" typeface="Estrangelo Edessa"/>
+        <a:font script="Syre" typeface="Estrangelo Edessa"/>
+        <a:font script="Sora" typeface="Nirmala UI"/>
+        <a:font script="Tale" typeface="Microsoft Tai Le"/>
+        <a:font script="Talu" typeface="Microsoft New Tai Lue"/>
+        <a:font script="Tfng" typeface="Ebrima"/>
+      </a:minorFont>
+    </a:fontScheme>
+    <a:fmtScheme name="Office">
+      <a:fillStyleLst>
+        <a:solidFill>
+          <a:schemeClr val="phClr"/>
+        </a:solidFill>
+        <a:gradFill rotWithShape="1">
+          <a:gsLst>
+            <a:gs pos="0">
+              <a:schemeClr val="phClr">
+                <a:lumMod val="110000"/>
+                <a:satMod val="105000"/>
+                <a:tint val="67000"/>
+              </a:schemeClr>
+            </a:gs>
+            <a:gs pos="50000">
+              <a:schemeClr val="phClr">
+                <a:lumMod val="105000"/>
+                <a:satMod val="103000"/>
+                <a:tint val="73000"/>
+              </a:schemeClr>
+            </a:gs>
+            <a:gs pos="100000">
+              <a:schemeClr val="phClr">
+                <a:lumMod val="105000"/>
+                <a:satMod val="109000"/>
+                <a:tint val="81000"/>
+              </a:schemeClr>
+            </a:gs>
+          </a:gsLst>
+          <a:lin ang="5400000" scaled="0"/>
+        </a:gradFill>
+        <a:gradFill rotWithShape="1">
+          <a:gsLst>
+            <a:gs pos="0">
+              <a:schemeClr val="phClr">
+                <a:satMod val="103000"/>
+                <a:lumMod val="102000"/>
+                <a:tint val="94000"/>
+              </a:schemeClr>
+            </a:gs>
+            <a:gs pos="50000">
+              <a:schemeClr val="phClr">
+                <a:satMod val="110000"/>
+                <a:lumMod val="100000"/>
+                <a:shade val="100000"/>
+              </a:schemeClr>
+            </a:gs>
+            <a:gs pos="100000">
+              <a:schemeClr val="phClr">
+                <a:lumMod val="99000"/>
+                <a:satMod val="120000"/>
+                <a:shade val="78000"/>
+              </a:schemeClr>
+            </a:gs>
+          </a:gsLst>
+          <a:lin ang="5400000" scaled="0"/>
+        </a:gradFill>
+      </a:fillStyleLst>
+      <a:lnStyleLst>
+        <a:ln w="6350" cap="flat" cmpd="sng" algn="ctr">
+          <a:solidFill>
+            <a:schemeClr val="phClr"/>
+          </a:solidFill>
+          <a:prstDash val="solid"/>
+          <a:miter lim="800000"/>
+        </a:ln>
+        <a:ln w="12700" cap="flat" cmpd="sng" algn="ctr">
+          <a:solidFill>
+            <a:schemeClr val="phClr"/>
+          </a:solidFill>
+          <a:prstDash val="solid"/>
+          <a:miter lim="800000"/>
+        </a:ln>
+        <a:ln w="19050" cap="flat" cmpd="sng" algn="ctr">
+          <a:solidFill>
+            <a:schemeClr val="phClr"/>
+          </a:solidFill>
+          <a:prstDash val="solid"/>
+          <a:miter lim="800000"/>
+        </a:ln>
+      </a:lnStyleLst>
+      <a:effectStyleLst>
+        <a:effectStyle>
+          <a:effectLst/>
+        </a:effectStyle>
+        <a:effectStyle>
+          <a:effectLst/>
+        </a:effectStyle>
+        <a:effectStyle>
+          <a:effectLst>
+            <a:outerShdw blurRad="57150" dist="19050" dir="5400000" algn="ctr" rotWithShape="0">
+              <a:srgbClr val="000000">
+                <a:alpha val="63000"/>
+              </a:srgbClr>
+            </a:outerShdw>
+          </a:effectLst>
+        </a:effectStyle>
+      </a:effectStyleLst>
+      <a:bgFillStyleLst>
+        <a:solidFill>
+          <a:schemeClr val="phClr"/>
+        </a:solidFill>
+        <a:solidFill>
+          <a:schemeClr val="phClr">
+            <a:tint val="95000"/>
+            <a:satMod val="170000"/>
+          </a:schemeClr>
+        </a:solidFill>
+        <a:gradFill rotWithShape="1">
+          <a:gsLst>
+            <a:gs pos="0">
+              <a:schemeClr val="phClr">
+                <a:tint val="93000"/>
+                <a:satMod val="150000"/>
+                <a:shade val="98000"/>
+                <a:lumMod val="102000"/>
+              </a:schemeClr>
+            </a:gs>
+            <a:gs pos="50000">
+              <a:schemeClr val="phClr">
+                <a:tint val="98000"/>
+                <a:satMod val="130000"/>
+                <a:shade val="90000"/>
+                <a:lumMod val="103000"/>
+              </a:schemeClr>
+            </a:gs>
+            <a:gs pos="100000">
+              <a:schemeClr val="phClr">
+                <a:shade val="63000"/>
+                <a:satMod val="120000"/>
+              </a:schemeClr>
+            </a:gs>
+          </a:gsLst>
+          <a:lin ang="5400000" scaled="0"/>
+        </a:gradFill>
+      </a:bgFillStyleLst>
+    </a:fmtScheme>
+  </a:themeElements>
+  <a:objectDefaults/>
+  <a:extraClrSchemeLst/>
+  <a:extLst>
+    <a:ext uri="{05A4C25C-085E-4340-85A3-A5531E510DB2}">
+      <thm15:themeFamily xmlns:thm15="http://schemas.microsoft.com/office/thememl/2012/main" name="Office Theme" id="{62F939B6-93AF-4DB8-9C6B-D6C7DFDC589F}" vid="{4A3C46E8-61CC-4603-A589-7422A47A8E4A}"/>
+    </a:ext>
+  </a:extLst>
+</a:theme>
 </file>
--- a/PPT画图.pptx
+++ b/PPT画图.pptx
@@ -200,7 +200,7 @@
           <a:p>
             <a:fld id="{5C1E4601-79B1-425F-B925-3F7BE382BF19}" type="datetimeFigureOut">
               <a:rPr lang="zh-CN" altLang="en-US" smtClean="0"/>
-              <a:t>2026/01/24</a:t>
+              <a:t>2026/01/29</a:t>
             </a:fld>
             <a:endParaRPr lang="zh-CN" altLang="en-US"/>
           </a:p>
@@ -698,7 +698,7 @@
           <a:p>
             <a:fld id="{5D2E9D4A-569D-49DD-9DBB-BF425DFB68D5}" type="datetimeFigureOut">
               <a:rPr lang="zh-CN" altLang="en-US" smtClean="0"/>
-              <a:t>2026/01/24</a:t>
+              <a:t>2026/01/29</a:t>
             </a:fld>
             <a:endParaRPr lang="zh-CN" altLang="en-US"/>
           </a:p>
@@ -896,7 +896,7 @@
           <a:p>
             <a:fld id="{5D2E9D4A-569D-49DD-9DBB-BF425DFB68D5}" type="datetimeFigureOut">
               <a:rPr lang="zh-CN" altLang="en-US" smtClean="0"/>
-              <a:t>2026/01/24</a:t>
+              <a:t>2026/01/29</a:t>
             </a:fld>
             <a:endParaRPr lang="zh-CN" altLang="en-US"/>
           </a:p>
@@ -1104,7 +1104,7 @@
           <a:p>
             <a:fld id="{5D2E9D4A-569D-49DD-9DBB-BF425DFB68D5}" type="datetimeFigureOut">
               <a:rPr lang="zh-CN" altLang="en-US" smtClean="0"/>
-              <a:t>2026/01/24</a:t>
+              <a:t>2026/01/29</a:t>
             </a:fld>
             <a:endParaRPr lang="zh-CN" altLang="en-US"/>
           </a:p>
@@ -1302,7 +1302,7 @@
           <a:p>
             <a:fld id="{5D2E9D4A-569D-49DD-9DBB-BF425DFB68D5}" type="datetimeFigureOut">
               <a:rPr lang="zh-CN" altLang="en-US" smtClean="0"/>
-              <a:t>2026/01/24</a:t>
+              <a:t>2026/01/29</a:t>
             </a:fld>
             <a:endParaRPr lang="zh-CN" altLang="en-US"/>
           </a:p>
@@ -1577,7 +1577,7 @@
           <a:p>
             <a:fld id="{5D2E9D4A-569D-49DD-9DBB-BF425DFB68D5}" type="datetimeFigureOut">
               <a:rPr lang="zh-CN" altLang="en-US" smtClean="0"/>
-              <a:t>2026/01/24</a:t>
+              <a:t>2026/01/29</a:t>
             </a:fld>
             <a:endParaRPr lang="zh-CN" altLang="en-US"/>
           </a:p>
@@ -1842,7 +1842,7 @@
           <a:p>
             <a:fld id="{5D2E9D4A-569D-49DD-9DBB-BF425DFB68D5}" type="datetimeFigureOut">
               <a:rPr lang="zh-CN" altLang="en-US" smtClean="0"/>
-              <a:t>2026/01/24</a:t>
+              <a:t>2026/01/29</a:t>
             </a:fld>
             <a:endParaRPr lang="zh-CN" altLang="en-US"/>
           </a:p>
@@ -2254,7 +2254,7 @@
           <a:p>
             <a:fld id="{5D2E9D4A-569D-49DD-9DBB-BF425DFB68D5}" type="datetimeFigureOut">
               <a:rPr lang="zh-CN" altLang="en-US" smtClean="0"/>
-              <a:t>2026/01/24</a:t>
+              <a:t>2026/01/29</a:t>
             </a:fld>
             <a:endParaRPr lang="zh-CN" altLang="en-US"/>
           </a:p>
@@ -2395,7 +2395,7 @@
           <a:p>
             <a:fld id="{5D2E9D4A-569D-49DD-9DBB-BF425DFB68D5}" type="datetimeFigureOut">
               <a:rPr lang="zh-CN" altLang="en-US" smtClean="0"/>
-              <a:t>2026/01/24</a:t>
+              <a:t>2026/01/29</a:t>
             </a:fld>
             <a:endParaRPr lang="zh-CN" altLang="en-US"/>
           </a:p>
@@ -2508,7 +2508,7 @@
           <a:p>
             <a:fld id="{5D2E9D4A-569D-49DD-9DBB-BF425DFB68D5}" type="datetimeFigureOut">
               <a:rPr lang="zh-CN" altLang="en-US" smtClean="0"/>
-              <a:t>2026/01/24</a:t>
+              <a:t>2026/01/29</a:t>
             </a:fld>
             <a:endParaRPr lang="zh-CN" altLang="en-US"/>
           </a:p>
@@ -2819,7 +2819,7 @@
           <a:p>
             <a:fld id="{5D2E9D4A-569D-49DD-9DBB-BF425DFB68D5}" type="datetimeFigureOut">
               <a:rPr lang="zh-CN" altLang="en-US" smtClean="0"/>
-              <a:t>2026/01/24</a:t>
+              <a:t>2026/01/29</a:t>
             </a:fld>
             <a:endParaRPr lang="zh-CN" altLang="en-US"/>
           </a:p>
@@ -3107,7 +3107,7 @@
           <a:p>
             <a:fld id="{5D2E9D4A-569D-49DD-9DBB-BF425DFB68D5}" type="datetimeFigureOut">
               <a:rPr lang="zh-CN" altLang="en-US" smtClean="0"/>
-              <a:t>2026/01/24</a:t>
+              <a:t>2026/01/29</a:t>
             </a:fld>
             <a:endParaRPr lang="zh-CN" altLang="en-US"/>
           </a:p>
@@ -3348,7 +3348,7 @@
           <a:p>
             <a:fld id="{5D2E9D4A-569D-49DD-9DBB-BF425DFB68D5}" type="datetimeFigureOut">
               <a:rPr lang="zh-CN" altLang="en-US" smtClean="0"/>
-              <a:t>2026/01/24</a:t>
+              <a:t>2026/01/29</a:t>
             </a:fld>
             <a:endParaRPr lang="zh-CN" altLang="en-US"/>
           </a:p>
@@ -5787,10 +5787,10 @@
       </p:grpSpPr>
       <p:grpSp>
         <p:nvGrpSpPr>
-          <p:cNvPr id="49" name="组合 48">
+          <p:cNvPr id="75" name="组合 74">
             <a:extLst>
               <a:ext uri="{FF2B5EF4-FFF2-40B4-BE49-F238E27FC236}">
-                <a16:creationId xmlns:a16="http://schemas.microsoft.com/office/drawing/2014/main" id="{5BE26EA9-7B62-70CA-6AF6-8C186648E98F}"/>
+                <a16:creationId xmlns:a16="http://schemas.microsoft.com/office/drawing/2014/main" id="{FFB5C3E2-469D-875B-435B-DD74815EE9B6}"/>
               </a:ext>
             </a:extLst>
           </p:cNvPr>
@@ -5799,674 +5799,34 @@
         </p:nvGrpSpPr>
         <p:grpSpPr>
           <a:xfrm>
-            <a:off x="443361" y="454622"/>
-            <a:ext cx="3240000" cy="5334853"/>
-            <a:chOff x="3159266" y="181667"/>
-            <a:chExt cx="3240000" cy="5334853"/>
+            <a:off x="281408" y="265292"/>
+            <a:ext cx="11255072" cy="2539288"/>
+            <a:chOff x="304268" y="2787512"/>
+            <a:chExt cx="11255072" cy="2539288"/>
           </a:xfrm>
         </p:grpSpPr>
-        <p:grpSp>
-          <p:nvGrpSpPr>
-            <p:cNvPr id="44" name="组合 43">
+        <p:cxnSp>
+          <p:nvCxnSpPr>
+            <p:cNvPr id="35" name="直接箭头连接符 34">
               <a:extLst>
                 <a:ext uri="{FF2B5EF4-FFF2-40B4-BE49-F238E27FC236}">
-                  <a16:creationId xmlns:a16="http://schemas.microsoft.com/office/drawing/2014/main" id="{92421E56-D7C5-686E-DA57-E0BDB889DD30}"/>
-                </a:ext>
-              </a:extLst>
-            </p:cNvPr>
-            <p:cNvGrpSpPr/>
-            <p:nvPr/>
-          </p:nvGrpSpPr>
-          <p:grpSpPr>
-            <a:xfrm>
-              <a:off x="3159266" y="1238743"/>
-              <a:ext cx="3240000" cy="585181"/>
-              <a:chOff x="3472140" y="1311131"/>
-              <a:chExt cx="3240000" cy="585181"/>
-            </a:xfrm>
-            <a:solidFill>
-              <a:srgbClr val="DCFFE6"/>
-            </a:solidFill>
-          </p:grpSpPr>
-          <p:sp>
-            <p:nvSpPr>
-              <p:cNvPr id="12" name="矩形 11">
-                <a:extLst>
-                  <a:ext uri="{FF2B5EF4-FFF2-40B4-BE49-F238E27FC236}">
-                    <a16:creationId xmlns:a16="http://schemas.microsoft.com/office/drawing/2014/main" id="{6FF3F5A8-8ABC-DD86-6D00-7BB2A840098E}"/>
-                  </a:ext>
-                </a:extLst>
-              </p:cNvPr>
-              <p:cNvSpPr/>
-              <p:nvPr/>
-            </p:nvSpPr>
-            <p:spPr>
-              <a:xfrm>
-                <a:off x="3472140" y="1311131"/>
-                <a:ext cx="3240000" cy="585181"/>
-              </a:xfrm>
-              <a:prstGeom prst="rect">
-                <a:avLst/>
-              </a:prstGeom>
-              <a:grpFill/>
-              <a:ln w="19050">
-                <a:solidFill>
-                  <a:schemeClr val="tx1"/>
-                </a:solidFill>
-              </a:ln>
-            </p:spPr>
-            <p:style>
-              <a:lnRef idx="2">
-                <a:schemeClr val="accent1">
-                  <a:shade val="15000"/>
-                </a:schemeClr>
-              </a:lnRef>
-              <a:fillRef idx="1">
-                <a:schemeClr val="accent1"/>
-              </a:fillRef>
-              <a:effectRef idx="0">
-                <a:schemeClr val="accent1"/>
-              </a:effectRef>
-              <a:fontRef idx="minor">
-                <a:schemeClr val="lt1"/>
-              </a:fontRef>
-            </p:style>
-            <p:txBody>
-              <a:bodyPr rtlCol="0" anchor="ctr"/>
-              <a:lstStyle/>
-              <a:p>
-                <a:pPr algn="ctr"/>
-                <a:endParaRPr lang="zh-CN" altLang="en-US">
-                  <a:solidFill>
-                    <a:schemeClr val="tx1"/>
-                  </a:solidFill>
-                  <a:latin typeface="Times New Roman" panose="02020603050405020304" pitchFamily="18" charset="0"/>
-                  <a:ea typeface="宋体" panose="02010600030101010101" pitchFamily="2" charset="-122"/>
-                </a:endParaRPr>
-              </a:p>
-            </p:txBody>
-          </p:sp>
-          <mc:AlternateContent xmlns:mc="http://schemas.openxmlformats.org/markup-compatibility/2006" xmlns:a14="http://schemas.microsoft.com/office/drawing/2010/main">
-            <mc:Choice Requires="a14">
-              <p:sp>
-                <p:nvSpPr>
-                  <p:cNvPr id="11" name="文本框 10">
-                    <a:extLst>
-                      <a:ext uri="{FF2B5EF4-FFF2-40B4-BE49-F238E27FC236}">
-                        <a16:creationId xmlns:a16="http://schemas.microsoft.com/office/drawing/2014/main" id="{39BEE58F-E797-F7A7-B922-9B68BC435A1F}"/>
-                      </a:ext>
-                    </a:extLst>
-                  </p:cNvPr>
-                  <p:cNvSpPr txBox="1"/>
-                  <p:nvPr/>
-                </p:nvSpPr>
-                <p:spPr>
-                  <a:xfrm>
-                    <a:off x="3644121" y="1419055"/>
-                    <a:ext cx="2896039" cy="369332"/>
-                  </a:xfrm>
-                  <a:prstGeom prst="rect">
-                    <a:avLst/>
-                  </a:prstGeom>
-                  <a:grpFill/>
-                </p:spPr>
-                <p:txBody>
-                  <a:bodyPr wrap="square" rtlCol="0">
-                    <a:spAutoFit/>
-                  </a:bodyPr>
-                  <a:lstStyle/>
-                  <a:p>
-                    <a:pPr algn="ctr"/>
-                    <a:r>
-                      <a:rPr lang="zh-CN" altLang="en-US" dirty="0">
-                        <a:solidFill>
-                          <a:schemeClr val="tx1"/>
-                        </a:solidFill>
-                        <a:latin typeface="Times New Roman" panose="02020603050405020304" pitchFamily="18" charset="0"/>
-                        <a:ea typeface="宋体" panose="02010600030101010101" pitchFamily="2" charset="-122"/>
-                      </a:rPr>
-                      <a:t>仿真器</a:t>
-                    </a:r>
-                    <a:r>
-                      <a:rPr lang="en-US" altLang="zh-CN" dirty="0">
-                        <a:solidFill>
-                          <a:schemeClr val="tx1"/>
-                        </a:solidFill>
-                        <a:latin typeface="Times New Roman" panose="02020603050405020304" pitchFamily="18" charset="0"/>
-                        <a:ea typeface="宋体" panose="02010600030101010101" pitchFamily="2" charset="-122"/>
-                      </a:rPr>
-                      <a:t>/</a:t>
-                    </a:r>
-                    <a:r>
-                      <a:rPr lang="zh-CN" altLang="en-US" dirty="0">
-                        <a:solidFill>
-                          <a:schemeClr val="tx1"/>
-                        </a:solidFill>
-                        <a:latin typeface="Times New Roman" panose="02020603050405020304" pitchFamily="18" charset="0"/>
-                        <a:ea typeface="宋体" panose="02010600030101010101" pitchFamily="2" charset="-122"/>
-                      </a:rPr>
-                      <a:t>代理模型</a:t>
-                    </a:r>
-                    <a:r>
-                      <a:rPr lang="en-US" altLang="zh-CN" i="1" dirty="0">
-                        <a:solidFill>
-                          <a:schemeClr val="tx1"/>
-                        </a:solidFill>
-                        <a:latin typeface="Times New Roman" panose="02020603050405020304" pitchFamily="18" charset="0"/>
-                        <a:ea typeface="宋体" panose="02010600030101010101" pitchFamily="2" charset="-122"/>
-                      </a:rPr>
-                      <a:t>S</a:t>
-                    </a:r>
-                    <a14:m>
-                      <m:oMath xmlns:m="http://schemas.openxmlformats.org/officeDocument/2006/math">
-                        <m:d>
-                          <m:dPr>
-                            <m:ctrlPr>
-                              <a:rPr lang="en-US" altLang="zh-CN" b="0" i="1" smtClean="0">
-                                <a:solidFill>
-                                  <a:schemeClr val="tx1"/>
-                                </a:solidFill>
-                                <a:latin typeface="Cambria Math" panose="02040503050406030204" pitchFamily="18" charset="0"/>
-                                <a:ea typeface="Cambria Math" panose="02040503050406030204" pitchFamily="18" charset="0"/>
-                              </a:rPr>
-                            </m:ctrlPr>
-                          </m:dPr>
-                          <m:e>
-                            <m:r>
-                              <a:rPr lang="en-US" altLang="zh-CN" b="0" i="1" smtClean="0">
-                                <a:solidFill>
-                                  <a:schemeClr val="tx1"/>
-                                </a:solidFill>
-                                <a:latin typeface="Cambria Math" panose="02040503050406030204" pitchFamily="18" charset="0"/>
-                                <a:ea typeface="Cambria Math" panose="02040503050406030204" pitchFamily="18" charset="0"/>
-                              </a:rPr>
-                              <m:t>∙</m:t>
-                            </m:r>
-                          </m:e>
-                        </m:d>
-                      </m:oMath>
-                    </a14:m>
-                    <a:endParaRPr lang="en-US" altLang="zh-CN" dirty="0">
-                      <a:solidFill>
-                        <a:schemeClr val="tx1"/>
-                      </a:solidFill>
-                      <a:latin typeface="Times New Roman" panose="02020603050405020304" pitchFamily="18" charset="0"/>
-                      <a:ea typeface="宋体" panose="02010600030101010101" pitchFamily="2" charset="-122"/>
-                    </a:endParaRPr>
-                  </a:p>
-                </p:txBody>
-              </p:sp>
-            </mc:Choice>
-            <mc:Fallback xmlns="">
-              <p:sp>
-                <p:nvSpPr>
-                  <p:cNvPr id="11" name="文本框 10">
-                    <a:extLst>
-                      <a:ext uri="{FF2B5EF4-FFF2-40B4-BE49-F238E27FC236}">
-                        <a16:creationId xmlns:a16="http://schemas.microsoft.com/office/drawing/2014/main" id="{39BEE58F-E797-F7A7-B922-9B68BC435A1F}"/>
-                      </a:ext>
-                    </a:extLst>
-                  </p:cNvPr>
-                  <p:cNvSpPr txBox="1">
-                    <a:spLocks noRot="1" noChangeAspect="1" noMove="1" noResize="1" noEditPoints="1" noAdjustHandles="1" noChangeArrowheads="1" noChangeShapeType="1" noTextEdit="1"/>
-                  </p:cNvSpPr>
-                  <p:nvPr/>
-                </p:nvSpPr>
-                <p:spPr>
-                  <a:xfrm>
-                    <a:off x="3644121" y="1419055"/>
-                    <a:ext cx="2896039" cy="369332"/>
-                  </a:xfrm>
-                  <a:prstGeom prst="rect">
-                    <a:avLst/>
-                  </a:prstGeom>
-                  <a:blipFill>
-                    <a:blip r:embed="rId2"/>
-                    <a:stretch>
-                      <a:fillRect t="-13333" b="-28333"/>
-                    </a:stretch>
-                  </a:blipFill>
-                </p:spPr>
-                <p:txBody>
-                  <a:bodyPr/>
-                  <a:lstStyle/>
-                  <a:p>
-                    <a:r>
-                      <a:rPr lang="zh-CN" altLang="en-US">
-                        <a:noFill/>
-                      </a:rPr>
-                      <a:t> </a:t>
-                    </a:r>
-                  </a:p>
-                </p:txBody>
-              </p:sp>
-            </mc:Fallback>
-          </mc:AlternateContent>
-        </p:grpSp>
-        <p:grpSp>
-          <p:nvGrpSpPr>
-            <p:cNvPr id="43" name="组合 42">
-              <a:extLst>
-                <a:ext uri="{FF2B5EF4-FFF2-40B4-BE49-F238E27FC236}">
-                  <a16:creationId xmlns:a16="http://schemas.microsoft.com/office/drawing/2014/main" id="{35B6E8F2-40D8-AE3B-09E2-8F8AD9889A81}"/>
-                </a:ext>
-              </a:extLst>
-            </p:cNvPr>
-            <p:cNvGrpSpPr/>
-            <p:nvPr/>
-          </p:nvGrpSpPr>
-          <p:grpSpPr>
-            <a:xfrm>
-              <a:off x="3159266" y="181667"/>
-              <a:ext cx="3240000" cy="466284"/>
-              <a:chOff x="3607636" y="181667"/>
-              <a:chExt cx="3240000" cy="466284"/>
-            </a:xfrm>
-            <a:solidFill>
-              <a:srgbClr val="DCEBFF"/>
-            </a:solidFill>
-          </p:grpSpPr>
-          <p:sp>
-            <p:nvSpPr>
-              <p:cNvPr id="6" name="矩形 5">
-                <a:extLst>
-                  <a:ext uri="{FF2B5EF4-FFF2-40B4-BE49-F238E27FC236}">
-                    <a16:creationId xmlns:a16="http://schemas.microsoft.com/office/drawing/2014/main" id="{1E74DDD8-8834-B94C-34D8-1B636CAFB018}"/>
-                  </a:ext>
-                </a:extLst>
-              </p:cNvPr>
-              <p:cNvSpPr/>
-              <p:nvPr/>
-            </p:nvSpPr>
-            <p:spPr>
-              <a:xfrm>
-                <a:off x="3607636" y="181667"/>
-                <a:ext cx="3240000" cy="466284"/>
-              </a:xfrm>
-              <a:prstGeom prst="rect">
-                <a:avLst/>
-              </a:prstGeom>
-              <a:grpFill/>
-              <a:ln w="19050">
-                <a:solidFill>
-                  <a:schemeClr val="tx1"/>
-                </a:solidFill>
-              </a:ln>
-            </p:spPr>
-            <p:style>
-              <a:lnRef idx="2">
-                <a:schemeClr val="accent1">
-                  <a:shade val="15000"/>
-                </a:schemeClr>
-              </a:lnRef>
-              <a:fillRef idx="1">
-                <a:schemeClr val="accent1"/>
-              </a:fillRef>
-              <a:effectRef idx="0">
-                <a:schemeClr val="accent1"/>
-              </a:effectRef>
-              <a:fontRef idx="minor">
-                <a:schemeClr val="lt1"/>
-              </a:fontRef>
-            </p:style>
-            <p:txBody>
-              <a:bodyPr rtlCol="0" anchor="ctr"/>
-              <a:lstStyle/>
-              <a:p>
-                <a:pPr algn="ctr"/>
-                <a:endParaRPr lang="zh-CN" altLang="en-US">
-                  <a:solidFill>
-                    <a:schemeClr val="tx1"/>
-                  </a:solidFill>
-                  <a:latin typeface="Times New Roman" panose="02020603050405020304" pitchFamily="18" charset="0"/>
-                  <a:ea typeface="宋体" panose="02010600030101010101" pitchFamily="2" charset="-122"/>
-                </a:endParaRPr>
-              </a:p>
-            </p:txBody>
-          </p:sp>
-          <mc:AlternateContent xmlns:mc="http://schemas.openxmlformats.org/markup-compatibility/2006" xmlns:a14="http://schemas.microsoft.com/office/drawing/2010/main">
-            <mc:Choice Requires="a14">
-              <p:sp>
-                <p:nvSpPr>
-                  <p:cNvPr id="5" name="文本框 4">
-                    <a:extLst>
-                      <a:ext uri="{FF2B5EF4-FFF2-40B4-BE49-F238E27FC236}">
-                        <a16:creationId xmlns:a16="http://schemas.microsoft.com/office/drawing/2014/main" id="{D0BAC6B0-88BC-3B29-E0E1-5D57FB4DA486}"/>
-                      </a:ext>
-                    </a:extLst>
-                  </p:cNvPr>
-                  <p:cNvSpPr txBox="1"/>
-                  <p:nvPr/>
-                </p:nvSpPr>
-                <p:spPr>
-                  <a:xfrm>
-                    <a:off x="4195152" y="230143"/>
-                    <a:ext cx="2064969" cy="369332"/>
-                  </a:xfrm>
-                  <a:prstGeom prst="rect">
-                    <a:avLst/>
-                  </a:prstGeom>
-                  <a:grpFill/>
-                </p:spPr>
-                <p:txBody>
-                  <a:bodyPr wrap="square" rtlCol="0">
-                    <a:spAutoFit/>
-                  </a:bodyPr>
-                  <a:lstStyle/>
-                  <a:p>
-                    <a:pPr algn="ctr"/>
-                    <a:r>
-                      <a:rPr lang="zh-CN" altLang="en-US" dirty="0">
-                        <a:solidFill>
-                          <a:schemeClr val="tx1"/>
-                        </a:solidFill>
-                        <a:latin typeface="Times New Roman" panose="02020603050405020304" pitchFamily="18" charset="0"/>
-                        <a:ea typeface="宋体" panose="02010600030101010101" pitchFamily="2" charset="-122"/>
-                      </a:rPr>
-                      <a:t>统一输入向量</a:t>
-                    </a:r>
-                    <a14:m>
-                      <m:oMath xmlns:m="http://schemas.openxmlformats.org/officeDocument/2006/math">
-                        <m:sSub>
-                          <m:sSubPr>
-                            <m:ctrlPr>
-                              <a:rPr lang="en-US" altLang="zh-CN" i="1" smtClean="0">
-                                <a:solidFill>
-                                  <a:schemeClr val="tx1"/>
-                                </a:solidFill>
-                                <a:latin typeface="Cambria Math" panose="02040503050406030204" pitchFamily="18" charset="0"/>
-                              </a:rPr>
-                            </m:ctrlPr>
-                          </m:sSubPr>
-                          <m:e>
-                            <m:r>
-                              <a:rPr lang="en-US" altLang="zh-CN" b="1" i="0" smtClean="0">
-                                <a:solidFill>
-                                  <a:schemeClr val="tx1"/>
-                                </a:solidFill>
-                                <a:latin typeface="Cambria Math" panose="02040503050406030204" pitchFamily="18" charset="0"/>
-                              </a:rPr>
-                              <m:t>𝐗</m:t>
-                            </m:r>
-                          </m:e>
-                          <m:sub>
-                            <m:r>
-                              <m:rPr>
-                                <m:sty m:val="p"/>
-                              </m:rPr>
-                              <a:rPr lang="en-US" altLang="zh-CN" b="0" i="0" smtClean="0">
-                                <a:solidFill>
-                                  <a:schemeClr val="tx1"/>
-                                </a:solidFill>
-                                <a:latin typeface="Cambria Math" panose="02040503050406030204" pitchFamily="18" charset="0"/>
-                              </a:rPr>
-                              <m:t>in</m:t>
-                            </m:r>
-                          </m:sub>
-                        </m:sSub>
-                      </m:oMath>
-                    </a14:m>
-                    <a:endParaRPr lang="en-US" altLang="zh-CN" dirty="0">
-                      <a:solidFill>
-                        <a:schemeClr val="tx1"/>
-                      </a:solidFill>
-                      <a:latin typeface="Times New Roman" panose="02020603050405020304" pitchFamily="18" charset="0"/>
-                      <a:ea typeface="宋体" panose="02010600030101010101" pitchFamily="2" charset="-122"/>
-                    </a:endParaRPr>
-                  </a:p>
-                </p:txBody>
-              </p:sp>
-            </mc:Choice>
-            <mc:Fallback xmlns="">
-              <p:sp>
-                <p:nvSpPr>
-                  <p:cNvPr id="5" name="文本框 4">
-                    <a:extLst>
-                      <a:ext uri="{FF2B5EF4-FFF2-40B4-BE49-F238E27FC236}">
-                        <a16:creationId xmlns:a16="http://schemas.microsoft.com/office/drawing/2014/main" id="{D0BAC6B0-88BC-3B29-E0E1-5D57FB4DA486}"/>
-                      </a:ext>
-                    </a:extLst>
-                  </p:cNvPr>
-                  <p:cNvSpPr txBox="1">
-                    <a:spLocks noRot="1" noChangeAspect="1" noMove="1" noResize="1" noEditPoints="1" noAdjustHandles="1" noChangeArrowheads="1" noChangeShapeType="1" noTextEdit="1"/>
-                  </p:cNvSpPr>
-                  <p:nvPr/>
-                </p:nvSpPr>
-                <p:spPr>
-                  <a:xfrm>
-                    <a:off x="4195152" y="230143"/>
-                    <a:ext cx="2064969" cy="369332"/>
-                  </a:xfrm>
-                  <a:prstGeom prst="rect">
-                    <a:avLst/>
-                  </a:prstGeom>
-                  <a:blipFill>
-                    <a:blip r:embed="rId3"/>
-                    <a:stretch>
-                      <a:fillRect t="-13333" b="-23333"/>
-                    </a:stretch>
-                  </a:blipFill>
-                </p:spPr>
-                <p:txBody>
-                  <a:bodyPr/>
-                  <a:lstStyle/>
-                  <a:p>
-                    <a:r>
-                      <a:rPr lang="zh-CN" altLang="en-US">
-                        <a:noFill/>
-                      </a:rPr>
-                      <a:t> </a:t>
-                    </a:r>
-                  </a:p>
-                </p:txBody>
-              </p:sp>
-            </mc:Fallback>
-          </mc:AlternateContent>
-        </p:grpSp>
-        <mc:AlternateContent xmlns:mc="http://schemas.openxmlformats.org/markup-compatibility/2006" xmlns:a14="http://schemas.microsoft.com/office/drawing/2010/main">
-          <mc:Choice Requires="a14">
-            <p:sp>
-              <p:nvSpPr>
-                <p:cNvPr id="13" name="文本框 12">
-                  <a:extLst>
-                    <a:ext uri="{FF2B5EF4-FFF2-40B4-BE49-F238E27FC236}">
-                      <a16:creationId xmlns:a16="http://schemas.microsoft.com/office/drawing/2014/main" id="{9347E19E-9F33-B6F5-F3C6-824C88E469B9}"/>
-                    </a:ext>
-                  </a:extLst>
-                </p:cNvPr>
-                <p:cNvSpPr txBox="1"/>
-                <p:nvPr/>
-              </p:nvSpPr>
-              <p:spPr>
-                <a:xfrm>
-                  <a:off x="4771839" y="752758"/>
-                  <a:ext cx="1289849" cy="369332"/>
-                </a:xfrm>
-                <a:prstGeom prst="rect">
-                  <a:avLst/>
-                </a:prstGeom>
-                <a:noFill/>
-              </p:spPr>
-              <p:txBody>
-                <a:bodyPr wrap="square" rtlCol="0">
-                  <a:spAutoFit/>
-                </a:bodyPr>
-                <a:lstStyle/>
-                <a:p>
-                  <a:pPr/>
-                  <a14:m>
-                    <m:oMathPara xmlns:m="http://schemas.openxmlformats.org/officeDocument/2006/math">
-                      <m:oMathParaPr>
-                        <m:jc m:val="centerGroup"/>
-                      </m:oMathParaPr>
-                      <m:oMath xmlns:m="http://schemas.openxmlformats.org/officeDocument/2006/math">
-                        <m:r>
-                          <a:rPr lang="en-US" altLang="zh-CN" b="1" i="0" smtClean="0">
-                            <a:solidFill>
-                              <a:schemeClr val="tx1"/>
-                            </a:solidFill>
-                            <a:latin typeface="Cambria Math" panose="02040503050406030204" pitchFamily="18" charset="0"/>
-                          </a:rPr>
-                          <m:t>𝐲</m:t>
-                        </m:r>
-                        <m:r>
-                          <a:rPr lang="en-US" altLang="zh-CN" b="0" i="1" smtClean="0">
-                            <a:solidFill>
-                              <a:schemeClr val="tx1"/>
-                            </a:solidFill>
-                            <a:latin typeface="Cambria Math" panose="02040503050406030204" pitchFamily="18" charset="0"/>
-                          </a:rPr>
-                          <m:t>=</m:t>
-                        </m:r>
-                        <m:r>
-                          <m:rPr>
-                            <m:nor/>
-                          </m:rPr>
-                          <a:rPr lang="en-US" altLang="zh-CN" i="1" dirty="0" smtClean="0">
-                            <a:solidFill>
-                              <a:schemeClr val="tx1"/>
-                            </a:solidFill>
-                            <a:latin typeface="Times New Roman" panose="02020603050405020304" pitchFamily="18" charset="0"/>
-                            <a:ea typeface="宋体" panose="02010600030101010101" pitchFamily="2" charset="-122"/>
-                          </a:rPr>
-                          <m:t>S</m:t>
-                        </m:r>
-                        <m:r>
-                          <a:rPr lang="en-US" altLang="zh-CN" b="0" i="1" smtClean="0">
-                            <a:solidFill>
-                              <a:schemeClr val="tx1"/>
-                            </a:solidFill>
-                            <a:latin typeface="Cambria Math" panose="02040503050406030204" pitchFamily="18" charset="0"/>
-                          </a:rPr>
-                          <m:t>(</m:t>
-                        </m:r>
-                        <m:sSub>
-                          <m:sSubPr>
-                            <m:ctrlPr>
-                              <a:rPr lang="en-US" altLang="zh-CN" i="1" smtClean="0">
-                                <a:solidFill>
-                                  <a:schemeClr val="tx1"/>
-                                </a:solidFill>
-                                <a:latin typeface="Cambria Math" panose="02040503050406030204" pitchFamily="18" charset="0"/>
-                              </a:rPr>
-                            </m:ctrlPr>
-                          </m:sSubPr>
-                          <m:e>
-                            <m:r>
-                              <a:rPr lang="en-US" altLang="zh-CN" b="1" i="0" smtClean="0">
-                                <a:solidFill>
-                                  <a:schemeClr val="tx1"/>
-                                </a:solidFill>
-                                <a:latin typeface="Cambria Math" panose="02040503050406030204" pitchFamily="18" charset="0"/>
-                              </a:rPr>
-                              <m:t>𝐗</m:t>
-                            </m:r>
-                          </m:e>
-                          <m:sub>
-                            <m:r>
-                              <m:rPr>
-                                <m:sty m:val="p"/>
-                              </m:rPr>
-                              <a:rPr lang="en-US" altLang="zh-CN" b="0" i="0" smtClean="0">
-                                <a:solidFill>
-                                  <a:schemeClr val="tx1"/>
-                                </a:solidFill>
-                                <a:latin typeface="Cambria Math" panose="02040503050406030204" pitchFamily="18" charset="0"/>
-                              </a:rPr>
-                              <m:t>in</m:t>
-                            </m:r>
-                          </m:sub>
-                        </m:sSub>
-                        <m:r>
-                          <a:rPr lang="en-US" altLang="zh-CN" b="0" i="1" smtClean="0">
-                            <a:solidFill>
-                              <a:schemeClr val="tx1"/>
-                            </a:solidFill>
-                            <a:latin typeface="Cambria Math" panose="02040503050406030204" pitchFamily="18" charset="0"/>
-                          </a:rPr>
-                          <m:t>)</m:t>
-                        </m:r>
-                      </m:oMath>
-                    </m:oMathPara>
-                  </a14:m>
-                  <a:endParaRPr lang="zh-CN" altLang="en-US" dirty="0">
-                    <a:solidFill>
-                      <a:schemeClr val="tx1"/>
-                    </a:solidFill>
-                    <a:latin typeface="Times New Roman" panose="02020603050405020304" pitchFamily="18" charset="0"/>
-                    <a:ea typeface="宋体" panose="02010600030101010101" pitchFamily="2" charset="-122"/>
-                  </a:endParaRPr>
-                </a:p>
-              </p:txBody>
-            </p:sp>
-          </mc:Choice>
-          <mc:Fallback xmlns="">
-            <p:sp>
-              <p:nvSpPr>
-                <p:cNvPr id="13" name="文本框 12">
-                  <a:extLst>
-                    <a:ext uri="{FF2B5EF4-FFF2-40B4-BE49-F238E27FC236}">
-                      <a16:creationId xmlns:a16="http://schemas.microsoft.com/office/drawing/2014/main" id="{9347E19E-9F33-B6F5-F3C6-824C88E469B9}"/>
-                    </a:ext>
-                  </a:extLst>
-                </p:cNvPr>
-                <p:cNvSpPr txBox="1">
-                  <a:spLocks noRot="1" noChangeAspect="1" noMove="1" noResize="1" noEditPoints="1" noAdjustHandles="1" noChangeArrowheads="1" noChangeShapeType="1" noTextEdit="1"/>
-                </p:cNvSpPr>
-                <p:nvPr/>
-              </p:nvSpPr>
-              <p:spPr>
-                <a:xfrm>
-                  <a:off x="4771839" y="752758"/>
-                  <a:ext cx="1289849" cy="369332"/>
-                </a:xfrm>
-                <a:prstGeom prst="rect">
-                  <a:avLst/>
-                </a:prstGeom>
-                <a:blipFill>
-                  <a:blip r:embed="rId4"/>
-                  <a:stretch>
-                    <a:fillRect b="-14754"/>
-                  </a:stretch>
-                </a:blipFill>
-              </p:spPr>
-              <p:txBody>
-                <a:bodyPr/>
-                <a:lstStyle/>
-                <a:p>
-                  <a:r>
-                    <a:rPr lang="zh-CN" altLang="en-US">
-                      <a:noFill/>
-                    </a:rPr>
-                    <a:t> </a:t>
-                  </a:r>
-                </a:p>
-              </p:txBody>
-            </p:sp>
-          </mc:Fallback>
-        </mc:AlternateContent>
-        <p:cxnSp>
-          <p:nvCxnSpPr>
-            <p:cNvPr id="15" name="直接箭头连接符 14">
-              <a:extLst>
-                <a:ext uri="{FF2B5EF4-FFF2-40B4-BE49-F238E27FC236}">
-                  <a16:creationId xmlns:a16="http://schemas.microsoft.com/office/drawing/2014/main" id="{A88C9D37-8943-9300-AFC3-936F05F31171}"/>
+                  <a16:creationId xmlns:a16="http://schemas.microsoft.com/office/drawing/2014/main" id="{0C3832B5-3D89-C6BC-DF41-1578C692D971}"/>
                 </a:ext>
               </a:extLst>
             </p:cNvPr>
             <p:cNvCxnSpPr>
               <a:cxnSpLocks/>
-              <a:stCxn id="6" idx="2"/>
-              <a:endCxn id="12" idx="0"/>
+              <a:stCxn id="52" idx="2"/>
+              <a:endCxn id="33" idx="3"/>
             </p:cNvCxnSpPr>
             <p:nvPr/>
           </p:nvCxnSpPr>
           <p:spPr>
-            <a:xfrm>
-              <a:off x="4779266" y="647951"/>
-              <a:ext cx="0" cy="590792"/>
+            <a:xfrm rot="5400000">
+              <a:off x="8627976" y="2740316"/>
+              <a:ext cx="674699" cy="2827039"/>
             </a:xfrm>
-            <a:prstGeom prst="straightConnector1">
+            <a:prstGeom prst="bentConnector2">
               <a:avLst/>
             </a:prstGeom>
             <a:ln w="19050">
@@ -6491,12 +5851,140 @@
             </a:fontRef>
           </p:style>
         </p:cxnSp>
+        <mc:AlternateContent xmlns:mc="http://schemas.openxmlformats.org/markup-compatibility/2006">
+          <mc:Choice xmlns:a14="http://schemas.microsoft.com/office/drawing/2010/main" Requires="a14">
+            <p:sp>
+              <p:nvSpPr>
+                <p:cNvPr id="40" name="文本框 39">
+                  <a:extLst>
+                    <a:ext uri="{FF2B5EF4-FFF2-40B4-BE49-F238E27FC236}">
+                      <a16:creationId xmlns:a16="http://schemas.microsoft.com/office/drawing/2014/main" id="{D59FF324-B7C5-7C5D-BA2F-1A461F8CB89B}"/>
+                    </a:ext>
+                  </a:extLst>
+                </p:cNvPr>
+                <p:cNvSpPr txBox="1"/>
+                <p:nvPr/>
+              </p:nvSpPr>
+              <p:spPr>
+                <a:xfrm>
+                  <a:off x="7646841" y="4133048"/>
+                  <a:ext cx="1083949" cy="369332"/>
+                </a:xfrm>
+                <a:prstGeom prst="rect">
+                  <a:avLst/>
+                </a:prstGeom>
+                <a:noFill/>
+              </p:spPr>
+              <p:txBody>
+                <a:bodyPr wrap="square" rtlCol="0">
+                  <a:spAutoFit/>
+                </a:bodyPr>
+                <a:lstStyle/>
+                <a:p>
+                  <a14:m>
+                    <m:oMathPara xmlns:m="http://schemas.openxmlformats.org/officeDocument/2006/math">
+                      <m:oMathParaPr>
+                        <m:jc m:val="centerGroup"/>
+                      </m:oMathParaPr>
+                      <m:oMath xmlns:m="http://schemas.openxmlformats.org/officeDocument/2006/math">
+                        <m:r>
+                          <m:rPr>
+                            <m:sty m:val="p"/>
+                          </m:rPr>
+                          <a:rPr lang="en-US" altLang="zh-CN" i="1" smtClean="0">
+                            <a:solidFill>
+                              <a:schemeClr val="tx1"/>
+                            </a:solidFill>
+                            <a:latin typeface="Cambria Math" panose="02040503050406030204" pitchFamily="18" charset="0"/>
+                          </a:rPr>
+                          <m:t>arg</m:t>
+                        </m:r>
+                        <m:r>
+                          <a:rPr lang="en-US" altLang="zh-CN" i="1" smtClean="0">
+                            <a:solidFill>
+                              <a:schemeClr val="tx1"/>
+                            </a:solidFill>
+                            <a:latin typeface="Cambria Math" panose="02040503050406030204" pitchFamily="18" charset="0"/>
+                          </a:rPr>
+                          <m:t> </m:t>
+                        </m:r>
+                        <m:r>
+                          <m:rPr>
+                            <m:sty m:val="p"/>
+                          </m:rPr>
+                          <a:rPr lang="en-US" altLang="zh-CN" i="1">
+                            <a:solidFill>
+                              <a:schemeClr val="tx1"/>
+                            </a:solidFill>
+                            <a:latin typeface="Cambria Math" panose="02040503050406030204" pitchFamily="18" charset="0"/>
+                          </a:rPr>
+                          <m:t>max</m:t>
+                        </m:r>
+                      </m:oMath>
+                    </m:oMathPara>
+                  </a14:m>
+                  <a:endParaRPr lang="zh-CN" altLang="en-US" dirty="0">
+                    <a:solidFill>
+                      <a:schemeClr val="tx1"/>
+                    </a:solidFill>
+                    <a:latin typeface="Times New Roman" panose="02020603050405020304" pitchFamily="18" charset="0"/>
+                    <a:ea typeface="宋体" panose="02010600030101010101" pitchFamily="2" charset="-122"/>
+                  </a:endParaRPr>
+                </a:p>
+              </p:txBody>
+            </p:sp>
+          </mc:Choice>
+          <mc:Fallback>
+            <p:sp>
+              <p:nvSpPr>
+                <p:cNvPr id="40" name="文本框 39">
+                  <a:extLst>
+                    <a:ext uri="{FF2B5EF4-FFF2-40B4-BE49-F238E27FC236}">
+                      <a16:creationId xmlns:a16="http://schemas.microsoft.com/office/drawing/2014/main" id="{D59FF324-B7C5-7C5D-BA2F-1A461F8CB89B}"/>
+                    </a:ext>
+                  </a:extLst>
+                </p:cNvPr>
+                <p:cNvSpPr txBox="1">
+                  <a:spLocks noRot="1" noChangeAspect="1" noMove="1" noResize="1" noEditPoints="1" noAdjustHandles="1" noChangeArrowheads="1" noChangeShapeType="1" noTextEdit="1"/>
+                </p:cNvSpPr>
+                <p:nvPr/>
+              </p:nvSpPr>
+              <p:spPr>
+                <a:xfrm>
+                  <a:off x="7646841" y="4133048"/>
+                  <a:ext cx="1083949" cy="369332"/>
+                </a:xfrm>
+                <a:prstGeom prst="rect">
+                  <a:avLst/>
+                </a:prstGeom>
+                <a:blipFill>
+                  <a:blip r:embed="rId2"/>
+                  <a:stretch>
+                    <a:fillRect b="-8197"/>
+                  </a:stretch>
+                </a:blipFill>
+              </p:spPr>
+              <p:txBody>
+                <a:bodyPr/>
+                <a:lstStyle/>
+                <a:p>
+                  <a:r>
+                    <a:rPr lang="zh-CN" altLang="en-US">
+                      <a:noFill/>
+                    </a:rPr>
+                    <a:t> </a:t>
+                  </a:r>
+                </a:p>
+              </p:txBody>
+            </p:sp>
+          </mc:Fallback>
+        </mc:AlternateContent>
         <p:grpSp>
           <p:nvGrpSpPr>
-            <p:cNvPr id="45" name="组合 44">
+            <p:cNvPr id="73" name="组合 72">
               <a:extLst>
                 <a:ext uri="{FF2B5EF4-FFF2-40B4-BE49-F238E27FC236}">
-                  <a16:creationId xmlns:a16="http://schemas.microsoft.com/office/drawing/2014/main" id="{438A6AD3-6000-6281-3074-1F486F4E9AC0}"/>
+                  <a16:creationId xmlns:a16="http://schemas.microsoft.com/office/drawing/2014/main" id="{7B31BC74-2E15-16ED-F1AD-BCF7C4907C07}"/>
                 </a:ext>
               </a:extLst>
             </p:cNvPr>
@@ -6505,80 +5993,20 @@
           </p:nvGrpSpPr>
           <p:grpSpPr>
             <a:xfrm>
-              <a:off x="3159266" y="2414716"/>
-              <a:ext cx="3240000" cy="720000"/>
-              <a:chOff x="3159266" y="2440596"/>
-              <a:chExt cx="3240000" cy="720000"/>
+              <a:off x="304268" y="2787512"/>
+              <a:ext cx="11255072" cy="1305973"/>
+              <a:chOff x="304268" y="2787512"/>
+              <a:chExt cx="11255072" cy="1305973"/>
             </a:xfrm>
           </p:grpSpPr>
-          <p:sp>
-            <p:nvSpPr>
-              <p:cNvPr id="18" name="矩形 17">
-                <a:extLst>
-                  <a:ext uri="{FF2B5EF4-FFF2-40B4-BE49-F238E27FC236}">
-                    <a16:creationId xmlns:a16="http://schemas.microsoft.com/office/drawing/2014/main" id="{50404F99-79A8-EDB1-B7F4-6748EE890DF7}"/>
-                  </a:ext>
-                </a:extLst>
-              </p:cNvPr>
-              <p:cNvSpPr/>
-              <p:nvPr/>
-            </p:nvSpPr>
-            <p:spPr>
-              <a:xfrm>
-                <a:off x="3159266" y="2440596"/>
-                <a:ext cx="3240000" cy="720000"/>
-              </a:xfrm>
-              <a:prstGeom prst="rect">
-                <a:avLst/>
-              </a:prstGeom>
-              <a:solidFill>
-                <a:srgbClr val="FFFADC"/>
-              </a:solidFill>
-              <a:ln w="19050">
-                <a:solidFill>
-                  <a:schemeClr val="tx1"/>
-                </a:solidFill>
-              </a:ln>
-            </p:spPr>
-            <p:style>
-              <a:lnRef idx="2">
-                <a:schemeClr val="accent1">
-                  <a:shade val="15000"/>
-                </a:schemeClr>
-              </a:lnRef>
-              <a:fillRef idx="1">
-                <a:schemeClr val="accent1"/>
-              </a:fillRef>
-              <a:effectRef idx="0">
-                <a:schemeClr val="accent1"/>
-              </a:effectRef>
-              <a:fontRef idx="minor">
-                <a:schemeClr val="lt1"/>
-              </a:fontRef>
-            </p:style>
-            <p:txBody>
-              <a:bodyPr rtlCol="0" anchor="ctr"/>
-              <a:lstStyle/>
-              <a:p>
-                <a:pPr algn="ctr"/>
-                <a:endParaRPr lang="zh-CN" altLang="en-US">
-                  <a:solidFill>
-                    <a:schemeClr val="tx1"/>
-                  </a:solidFill>
-                  <a:latin typeface="Times New Roman" panose="02020603050405020304" pitchFamily="18" charset="0"/>
-                  <a:ea typeface="宋体" panose="02010600030101010101" pitchFamily="2" charset="-122"/>
-                </a:endParaRPr>
-              </a:p>
-            </p:txBody>
-          </p:sp>
-          <mc:AlternateContent xmlns:mc="http://schemas.openxmlformats.org/markup-compatibility/2006" xmlns:a14="http://schemas.microsoft.com/office/drawing/2010/main">
-            <mc:Choice Requires="a14">
+          <mc:AlternateContent xmlns:mc="http://schemas.openxmlformats.org/markup-compatibility/2006">
+            <mc:Choice xmlns:a14="http://schemas.microsoft.com/office/drawing/2010/main" Requires="a14">
               <p:sp>
                 <p:nvSpPr>
-                  <p:cNvPr id="17" name="文本框 16">
+                  <p:cNvPr id="13" name="文本框 12">
                     <a:extLst>
                       <a:ext uri="{FF2B5EF4-FFF2-40B4-BE49-F238E27FC236}">
-                        <a16:creationId xmlns:a16="http://schemas.microsoft.com/office/drawing/2014/main" id="{54C54E61-074F-1537-1C27-A623F33BD1D8}"/>
+                        <a16:creationId xmlns:a16="http://schemas.microsoft.com/office/drawing/2014/main" id="{9347E19E-9F33-B6F5-F3C6-824C88E469B9}"/>
                       </a:ext>
                     </a:extLst>
                   </p:cNvPr>
@@ -6587,8 +6015,8 @@
                 </p:nvSpPr>
                 <p:spPr>
                   <a:xfrm>
-                    <a:off x="3346011" y="2477431"/>
-                    <a:ext cx="2866510" cy="646331"/>
+                    <a:off x="2228801" y="2797820"/>
+                    <a:ext cx="1289849" cy="369332"/>
                   </a:xfrm>
                   <a:prstGeom prst="rect">
                     <a:avLst/>
@@ -6601,34 +6029,103 @@
                   </a:bodyPr>
                   <a:lstStyle/>
                   <a:p>
-                    <a:pPr algn="ctr"/>
-                    <a:r>
-                      <a:rPr lang="zh-CN" altLang="en-US" dirty="0">
-                        <a:solidFill>
-                          <a:schemeClr val="tx1"/>
-                        </a:solidFill>
-                        <a:latin typeface="Times New Roman" panose="02020603050405020304" pitchFamily="18" charset="0"/>
-                        <a:ea typeface="宋体" panose="02010600030101010101" pitchFamily="2" charset="-122"/>
-                      </a:rPr>
-                      <a:t>性能指标向量</a:t>
-                    </a:r>
+                    <a:pPr/>
                     <a14:m>
-                      <m:oMath xmlns:m="http://schemas.openxmlformats.org/officeDocument/2006/math">
-                        <m:r>
-                          <m:rPr>
-                            <m:sty m:val="p"/>
-                          </m:rPr>
-                          <a:rPr lang="en-US" altLang="zh-CN" b="0" i="0" smtClean="0">
-                            <a:solidFill>
-                              <a:schemeClr val="tx1"/>
-                            </a:solidFill>
-                            <a:latin typeface="Cambria Math" panose="02040503050406030204" pitchFamily="18" charset="0"/>
-                          </a:rPr>
-                          <m:t>y</m:t>
-                        </m:r>
-                      </m:oMath>
+                      <m:oMathPara xmlns:m="http://schemas.openxmlformats.org/officeDocument/2006/math">
+                        <m:oMathParaPr>
+                          <m:jc m:val="centerGroup"/>
+                        </m:oMathParaPr>
+                        <m:oMath xmlns:m="http://schemas.openxmlformats.org/officeDocument/2006/math">
+                          <m:r>
+                            <a:rPr lang="en-US" altLang="zh-CN" b="1" i="0" smtClean="0">
+                              <a:solidFill>
+                                <a:schemeClr val="tx1"/>
+                              </a:solidFill>
+                              <a:latin typeface="Cambria Math" panose="02040503050406030204" pitchFamily="18" charset="0"/>
+                            </a:rPr>
+                            <m:t>𝐲</m:t>
+                          </m:r>
+                          <m:r>
+                            <a:rPr lang="en-US" altLang="zh-CN" b="0" i="1" smtClean="0">
+                              <a:solidFill>
+                                <a:schemeClr val="tx1"/>
+                              </a:solidFill>
+                              <a:latin typeface="Cambria Math" panose="02040503050406030204" pitchFamily="18" charset="0"/>
+                            </a:rPr>
+                            <m:t>=</m:t>
+                          </m:r>
+                          <m:r>
+                            <m:rPr>
+                              <m:nor/>
+                            </m:rPr>
+                            <a:rPr lang="en-US" altLang="zh-CN" i="1" dirty="0" smtClean="0">
+                              <a:solidFill>
+                                <a:schemeClr val="tx1"/>
+                              </a:solidFill>
+                              <a:latin typeface="Times New Roman" panose="02020603050405020304" pitchFamily="18" charset="0"/>
+                              <a:ea typeface="宋体" panose="02010600030101010101" pitchFamily="2" charset="-122"/>
+                            </a:rPr>
+                            <m:t>S</m:t>
+                          </m:r>
+                          <m:r>
+                            <a:rPr lang="en-US" altLang="zh-CN" b="0" i="1" smtClean="0">
+                              <a:solidFill>
+                                <a:schemeClr val="tx1"/>
+                              </a:solidFill>
+                              <a:latin typeface="Cambria Math" panose="02040503050406030204" pitchFamily="18" charset="0"/>
+                            </a:rPr>
+                            <m:t>(</m:t>
+                          </m:r>
+                          <m:sSub>
+                            <m:sSubPr>
+                              <m:ctrlPr>
+                                <a:rPr lang="en-US" altLang="zh-CN" i="1" smtClean="0">
+                                  <a:solidFill>
+                                    <a:schemeClr val="tx1"/>
+                                  </a:solidFill>
+                                  <a:latin typeface="Cambria Math" panose="02040503050406030204" pitchFamily="18" charset="0"/>
+                                </a:rPr>
+                              </m:ctrlPr>
+                            </m:sSubPr>
+                            <m:e>
+                              <m:r>
+                                <a:rPr lang="en-US" altLang="zh-CN" b="1" i="0" smtClean="0">
+                                  <a:solidFill>
+                                    <a:schemeClr val="tx1"/>
+                                  </a:solidFill>
+                                  <a:latin typeface="Cambria Math" panose="02040503050406030204" pitchFamily="18" charset="0"/>
+                                </a:rPr>
+                                <m:t>𝐗</m:t>
+                              </m:r>
+                            </m:e>
+                            <m:sub>
+                              <m:r>
+                                <m:rPr>
+                                  <m:sty m:val="p"/>
+                                </m:rPr>
+                                <a:rPr lang="en-US" altLang="zh-CN" b="0" i="0" smtClean="0">
+                                  <a:solidFill>
+                                    <a:schemeClr val="tx1"/>
+                                  </a:solidFill>
+                                  <a:latin typeface="Cambria Math" panose="02040503050406030204" pitchFamily="18" charset="0"/>
+                                </a:rPr>
+                                <m:t>in</m:t>
+                              </m:r>
+                            </m:sub>
+                          </m:sSub>
+                          <m:r>
+                            <a:rPr lang="en-US" altLang="zh-CN" b="0" i="1" smtClean="0">
+                              <a:solidFill>
+                                <a:schemeClr val="tx1"/>
+                              </a:solidFill>
+                              <a:latin typeface="Cambria Math" panose="02040503050406030204" pitchFamily="18" charset="0"/>
+                            </a:rPr>
+                            <m:t>)</m:t>
+                          </m:r>
+                        </m:oMath>
+                      </m:oMathPara>
                     </a14:m>
-                    <a:endParaRPr lang="en-US" altLang="zh-CN" dirty="0">
+                    <a:endParaRPr lang="zh-CN" altLang="en-US" dirty="0">
                       <a:solidFill>
                         <a:schemeClr val="tx1"/>
                       </a:solidFill>
@@ -6636,25 +6133,110 @@
                       <a:ea typeface="宋体" panose="02010600030101010101" pitchFamily="2" charset="-122"/>
                     </a:endParaRPr>
                   </a:p>
+                </p:txBody>
+              </p:sp>
+            </mc:Choice>
+            <mc:Fallback>
+              <p:sp>
+                <p:nvSpPr>
+                  <p:cNvPr id="13" name="文本框 12">
+                    <a:extLst>
+                      <a:ext uri="{FF2B5EF4-FFF2-40B4-BE49-F238E27FC236}">
+                        <a16:creationId xmlns:a16="http://schemas.microsoft.com/office/drawing/2014/main" id="{9347E19E-9F33-B6F5-F3C6-824C88E469B9}"/>
+                      </a:ext>
+                    </a:extLst>
+                  </p:cNvPr>
+                  <p:cNvSpPr txBox="1">
+                    <a:spLocks noRot="1" noChangeAspect="1" noMove="1" noResize="1" noEditPoints="1" noAdjustHandles="1" noChangeArrowheads="1" noChangeShapeType="1" noTextEdit="1"/>
+                  </p:cNvSpPr>
+                  <p:nvPr/>
+                </p:nvSpPr>
+                <p:spPr>
+                  <a:xfrm>
+                    <a:off x="2228801" y="2797820"/>
+                    <a:ext cx="1289849" cy="369332"/>
+                  </a:xfrm>
+                  <a:prstGeom prst="rect">
+                    <a:avLst/>
+                  </a:prstGeom>
+                  <a:blipFill>
+                    <a:blip r:embed="rId3"/>
+                    <a:stretch>
+                      <a:fillRect b="-14754"/>
+                    </a:stretch>
+                  </a:blipFill>
+                </p:spPr>
+                <p:txBody>
+                  <a:bodyPr/>
+                  <a:lstStyle/>
                   <a:p>
-                    <a:pPr algn="ctr"/>
                     <a:r>
-                      <a:rPr lang="zh-CN" altLang="en-US" dirty="0">
+                      <a:rPr lang="zh-CN" altLang="en-US">
+                        <a:noFill/>
+                      </a:rPr>
+                      <a:t> </a:t>
+                    </a:r>
+                  </a:p>
+                </p:txBody>
+              </p:sp>
+            </mc:Fallback>
+          </mc:AlternateContent>
+          <mc:AlternateContent xmlns:mc="http://schemas.openxmlformats.org/markup-compatibility/2006">
+            <mc:Choice xmlns:a14="http://schemas.microsoft.com/office/drawing/2010/main" Requires="a14">
+              <p:sp>
+                <p:nvSpPr>
+                  <p:cNvPr id="37" name="文本框 36">
+                    <a:extLst>
+                      <a:ext uri="{FF2B5EF4-FFF2-40B4-BE49-F238E27FC236}">
+                        <a16:creationId xmlns:a16="http://schemas.microsoft.com/office/drawing/2014/main" id="{6DF2FA46-B853-7F4A-1A2D-557B4CD80A70}"/>
+                      </a:ext>
+                    </a:extLst>
+                  </p:cNvPr>
+                  <p:cNvSpPr txBox="1"/>
+                  <p:nvPr/>
+                </p:nvSpPr>
+                <p:spPr>
+                  <a:xfrm>
+                    <a:off x="8471778" y="2787512"/>
+                    <a:ext cx="759226" cy="369332"/>
+                  </a:xfrm>
+                  <a:prstGeom prst="rect">
+                    <a:avLst/>
+                  </a:prstGeom>
+                  <a:noFill/>
+                </p:spPr>
+                <p:txBody>
+                  <a:bodyPr wrap="square">
+                    <a:spAutoFit/>
+                  </a:bodyPr>
+                  <a:lstStyle/>
+                  <a:p>
+                    <a:r>
+                      <a:rPr lang="en-US" altLang="zh-CN" i="1" dirty="0">
                         <a:solidFill>
                           <a:schemeClr val="tx1"/>
                         </a:solidFill>
                         <a:latin typeface="Times New Roman" panose="02020603050405020304" pitchFamily="18" charset="0"/>
                         <a:ea typeface="宋体" panose="02010600030101010101" pitchFamily="2" charset="-122"/>
                       </a:rPr>
-                      <a:t>归一化处理 </a:t>
+                      <a:t>U</a:t>
                     </a:r>
                     <a14:m>
                       <m:oMath xmlns:m="http://schemas.openxmlformats.org/officeDocument/2006/math">
+                        <m:r>
+                          <a:rPr lang="en-US" altLang="zh-CN" b="0" i="1" smtClean="0">
+                            <a:solidFill>
+                              <a:schemeClr val="tx1"/>
+                            </a:solidFill>
+                            <a:latin typeface="Cambria Math" panose="02040503050406030204" pitchFamily="18" charset="0"/>
+                          </a:rPr>
+                          <m:t>(</m:t>
+                        </m:r>
                         <m:acc>
                           <m:accPr>
                             <m:chr m:val="̃"/>
                             <m:ctrlPr>
-                              <a:rPr lang="en-US" altLang="zh-CN" b="1" i="1" smtClean="0">
+                              <a:rPr lang="en-US" altLang="zh-CN" i="1" smtClean="0">
                                 <a:solidFill>
                                   <a:schemeClr val="tx1"/>
                                 </a:solidFill>
@@ -6681,72 +6263,28 @@
                             </a:solidFill>
                             <a:latin typeface="Cambria Math" panose="02040503050406030204" pitchFamily="18" charset="0"/>
                           </a:rPr>
-                          <m:t>=</m:t>
-                        </m:r>
-                      </m:oMath>
-                    </a14:m>
-                    <a:r>
-                      <a:rPr lang="en-US" altLang="zh-CN" dirty="0">
-                        <a:solidFill>
-                          <a:schemeClr val="tx1"/>
-                        </a:solidFill>
-                        <a:latin typeface="Times New Roman" panose="02020603050405020304" pitchFamily="18" charset="0"/>
-                        <a:ea typeface="宋体" panose="02010600030101010101" pitchFamily="2" charset="-122"/>
-                      </a:rPr>
-                      <a:t>norm </a:t>
-                    </a:r>
-                    <a14:m>
-                      <m:oMath xmlns:m="http://schemas.openxmlformats.org/officeDocument/2006/math">
-                        <m:r>
-                          <a:rPr lang="en-US" altLang="zh-CN" b="0" i="1" smtClean="0">
-                            <a:solidFill>
-                              <a:schemeClr val="tx1"/>
-                            </a:solidFill>
-                            <a:latin typeface="Cambria Math" panose="02040503050406030204" pitchFamily="18" charset="0"/>
-                          </a:rPr>
-                          <m:t>(</m:t>
-                        </m:r>
-                        <m:r>
-                          <a:rPr lang="en-US" altLang="zh-CN" b="1" i="0" smtClean="0">
-                            <a:solidFill>
-                              <a:schemeClr val="tx1"/>
-                            </a:solidFill>
-                            <a:latin typeface="Cambria Math" panose="02040503050406030204" pitchFamily="18" charset="0"/>
-                          </a:rPr>
-                          <m:t>𝐲</m:t>
-                        </m:r>
-                        <m:r>
-                          <a:rPr lang="en-US" altLang="zh-CN" b="0" i="1" smtClean="0">
-                            <a:solidFill>
-                              <a:schemeClr val="tx1"/>
-                            </a:solidFill>
-                            <a:latin typeface="Cambria Math" panose="02040503050406030204" pitchFamily="18" charset="0"/>
-                          </a:rPr>
                           <m:t>)</m:t>
                         </m:r>
                       </m:oMath>
                     </a14:m>
-                    <a:r>
-                      <a:rPr lang="en-US" altLang="zh-CN" dirty="0">
-                        <a:solidFill>
-                          <a:schemeClr val="tx1"/>
-                        </a:solidFill>
-                        <a:latin typeface="Times New Roman" panose="02020603050405020304" pitchFamily="18" charset="0"/>
-                        <a:ea typeface="宋体" panose="02010600030101010101" pitchFamily="2" charset="-122"/>
-                      </a:rPr>
-                      <a:t> </a:t>
-                    </a:r>
+                    <a:endParaRPr lang="zh-CN" altLang="en-US" dirty="0">
+                      <a:solidFill>
+                        <a:schemeClr val="tx1"/>
+                      </a:solidFill>
+                      <a:latin typeface="Times New Roman" panose="02020603050405020304" pitchFamily="18" charset="0"/>
+                      <a:ea typeface="宋体" panose="02010600030101010101" pitchFamily="2" charset="-122"/>
+                    </a:endParaRPr>
                   </a:p>
                 </p:txBody>
               </p:sp>
             </mc:Choice>
-            <mc:Fallback xmlns="">
+            <mc:Fallback>
               <p:sp>
                 <p:nvSpPr>
-                  <p:cNvPr id="17" name="文本框 16">
+                  <p:cNvPr id="37" name="文本框 36">
                     <a:extLst>
                       <a:ext uri="{FF2B5EF4-FFF2-40B4-BE49-F238E27FC236}">
-                        <a16:creationId xmlns:a16="http://schemas.microsoft.com/office/drawing/2014/main" id="{54C54E61-074F-1537-1C27-A623F33BD1D8}"/>
+                        <a16:creationId xmlns:a16="http://schemas.microsoft.com/office/drawing/2014/main" id="{6DF2FA46-B853-7F4A-1A2D-557B4CD80A70}"/>
                       </a:ext>
                     </a:extLst>
                   </p:cNvPr>
@@ -6757,16 +6295,16 @@
                 </p:nvSpPr>
                 <p:spPr>
                   <a:xfrm>
-                    <a:off x="3346011" y="2477431"/>
-                    <a:ext cx="2866510" cy="646331"/>
+                    <a:off x="8471778" y="2787512"/>
+                    <a:ext cx="759226" cy="369332"/>
                   </a:xfrm>
                   <a:prstGeom prst="rect">
                     <a:avLst/>
                   </a:prstGeom>
                   <a:blipFill>
-                    <a:blip r:embed="rId5"/>
+                    <a:blip r:embed="rId4"/>
                     <a:stretch>
-                      <a:fillRect t="-7547" b="-15094"/>
+                      <a:fillRect l="-7200" t="-10000" r="-6400" b="-26667"/>
                     </a:stretch>
                   </a:blipFill>
                 </p:spPr>
@@ -6785,762 +6323,286 @@
               </p:sp>
             </mc:Fallback>
           </mc:AlternateContent>
-        </p:grpSp>
-        <p:grpSp>
-          <p:nvGrpSpPr>
-            <p:cNvPr id="46" name="组合 45">
-              <a:extLst>
-                <a:ext uri="{FF2B5EF4-FFF2-40B4-BE49-F238E27FC236}">
-                  <a16:creationId xmlns:a16="http://schemas.microsoft.com/office/drawing/2014/main" id="{77C408C9-45A3-36DC-0B4B-7D04EEC46253}"/>
-                </a:ext>
-              </a:extLst>
-            </p:cNvPr>
-            <p:cNvGrpSpPr/>
-            <p:nvPr/>
-          </p:nvGrpSpPr>
-          <p:grpSpPr>
-            <a:xfrm>
-              <a:off x="3159266" y="3725508"/>
-              <a:ext cx="3240000" cy="468000"/>
-              <a:chOff x="3159266" y="3888527"/>
-              <a:chExt cx="3240000" cy="468000"/>
-            </a:xfrm>
-          </p:grpSpPr>
           <p:sp>
             <p:nvSpPr>
-              <p:cNvPr id="24" name="矩形 23">
+              <p:cNvPr id="38" name="文本框 37">
                 <a:extLst>
                   <a:ext uri="{FF2B5EF4-FFF2-40B4-BE49-F238E27FC236}">
-                    <a16:creationId xmlns:a16="http://schemas.microsoft.com/office/drawing/2014/main" id="{34873F60-3B9F-8DBE-E447-EB67EC56A037}"/>
+                    <a16:creationId xmlns:a16="http://schemas.microsoft.com/office/drawing/2014/main" id="{06FDA3E6-CE51-B14C-6E88-BEF200FFB254}"/>
                   </a:ext>
                 </a:extLst>
               </p:cNvPr>
-              <p:cNvSpPr/>
+              <p:cNvSpPr txBox="1"/>
               <p:nvPr/>
             </p:nvSpPr>
             <p:spPr>
               <a:xfrm>
-                <a:off x="3159266" y="3888527"/>
-                <a:ext cx="3240000" cy="468000"/>
+                <a:off x="5380325" y="2809840"/>
+                <a:ext cx="962840" cy="369332"/>
               </a:xfrm>
               <a:prstGeom prst="rect">
                 <a:avLst/>
               </a:prstGeom>
-              <a:solidFill>
-                <a:srgbClr val="FFEBDC"/>
-              </a:solidFill>
-              <a:ln w="19050">
-                <a:solidFill>
-                  <a:schemeClr val="tx1"/>
-                </a:solidFill>
-              </a:ln>
+              <a:noFill/>
             </p:spPr>
-            <p:style>
-              <a:lnRef idx="2">
-                <a:schemeClr val="accent1">
-                  <a:shade val="15000"/>
-                </a:schemeClr>
-              </a:lnRef>
-              <a:fillRef idx="1">
-                <a:schemeClr val="accent1"/>
-              </a:fillRef>
-              <a:effectRef idx="0">
-                <a:schemeClr val="accent1"/>
-              </a:effectRef>
-              <a:fontRef idx="minor">
-                <a:schemeClr val="lt1"/>
-              </a:fontRef>
-            </p:style>
             <p:txBody>
-              <a:bodyPr rtlCol="0" anchor="ctr"/>
+              <a:bodyPr wrap="square" rtlCol="0">
+                <a:spAutoFit/>
+              </a:bodyPr>
               <a:lstStyle/>
               <a:p>
                 <a:pPr algn="ctr"/>
-                <a:endParaRPr lang="zh-CN" altLang="en-US">
-                  <a:solidFill>
-                    <a:schemeClr val="tx1"/>
-                  </a:solidFill>
-                  <a:latin typeface="Times New Roman" panose="02020603050405020304" pitchFamily="18" charset="0"/>
-                  <a:ea typeface="宋体" panose="02010600030101010101" pitchFamily="2" charset="-122"/>
-                </a:endParaRPr>
+                <a:r>
+                  <a:rPr lang="zh-CN" altLang="en-US" dirty="0">
+                    <a:latin typeface="Times New Roman" panose="02020603050405020304" pitchFamily="18" charset="0"/>
+                    <a:ea typeface="宋体" panose="02010600030101010101" pitchFamily="2" charset="-122"/>
+                  </a:rPr>
+                  <a:t>输出</a:t>
+                </a:r>
               </a:p>
             </p:txBody>
           </p:sp>
-          <mc:AlternateContent xmlns:mc="http://schemas.openxmlformats.org/markup-compatibility/2006" xmlns:a14="http://schemas.microsoft.com/office/drawing/2010/main">
-            <mc:Choice Requires="a14">
+          <p:grpSp>
+            <p:nvGrpSpPr>
+              <p:cNvPr id="8" name="组合 7">
+                <a:extLst>
+                  <a:ext uri="{FF2B5EF4-FFF2-40B4-BE49-F238E27FC236}">
+                    <a16:creationId xmlns:a16="http://schemas.microsoft.com/office/drawing/2014/main" id="{07EBDBCA-C76A-3653-4BCB-032952E94BF5}"/>
+                  </a:ext>
+                </a:extLst>
+              </p:cNvPr>
+              <p:cNvGrpSpPr/>
+              <p:nvPr/>
+            </p:nvGrpSpPr>
+            <p:grpSpPr>
+              <a:xfrm>
+                <a:off x="304268" y="2932394"/>
+                <a:ext cx="2068616" cy="999077"/>
+                <a:chOff x="4489559" y="2221387"/>
+                <a:chExt cx="2068616" cy="999077"/>
+              </a:xfrm>
+            </p:grpSpPr>
+            <p:grpSp>
+              <p:nvGrpSpPr>
+                <p:cNvPr id="43" name="组合 42">
+                  <a:extLst>
+                    <a:ext uri="{FF2B5EF4-FFF2-40B4-BE49-F238E27FC236}">
+                      <a16:creationId xmlns:a16="http://schemas.microsoft.com/office/drawing/2014/main" id="{35B6E8F2-40D8-AE3B-09E2-8F8AD9889A81}"/>
+                    </a:ext>
+                  </a:extLst>
+                </p:cNvPr>
+                <p:cNvGrpSpPr/>
+                <p:nvPr/>
+              </p:nvGrpSpPr>
+              <p:grpSpPr>
+                <a:xfrm>
+                  <a:off x="4679362" y="2221387"/>
+                  <a:ext cx="1689011" cy="466284"/>
+                  <a:chOff x="3607636" y="181667"/>
+                  <a:chExt cx="3240000" cy="466284"/>
+                </a:xfrm>
+                <a:solidFill>
+                  <a:srgbClr val="DCEBFF"/>
+                </a:solidFill>
+              </p:grpSpPr>
               <p:sp>
                 <p:nvSpPr>
-                  <p:cNvPr id="23" name="文本框 22">
+                  <p:cNvPr id="6" name="矩形 5">
                     <a:extLst>
                       <a:ext uri="{FF2B5EF4-FFF2-40B4-BE49-F238E27FC236}">
-                        <a16:creationId xmlns:a16="http://schemas.microsoft.com/office/drawing/2014/main" id="{D46FBEF7-0129-18DC-5701-3EDEF6768E0A}"/>
+                        <a16:creationId xmlns:a16="http://schemas.microsoft.com/office/drawing/2014/main" id="{1E74DDD8-8834-B94C-34D8-1B636CAFB018}"/>
                       </a:ext>
                     </a:extLst>
                   </p:cNvPr>
-                  <p:cNvSpPr txBox="1"/>
+                  <p:cNvSpPr/>
                   <p:nvPr/>
                 </p:nvSpPr>
                 <p:spPr>
                   <a:xfrm>
-                    <a:off x="3346011" y="3937861"/>
-                    <a:ext cx="2866510" cy="369332"/>
+                    <a:off x="3607636" y="181667"/>
+                    <a:ext cx="3240000" cy="466284"/>
                   </a:xfrm>
                   <a:prstGeom prst="rect">
                     <a:avLst/>
                   </a:prstGeom>
-                  <a:noFill/>
+                  <a:grpFill/>
+                  <a:ln w="19050">
+                    <a:solidFill>
+                      <a:schemeClr val="tx1"/>
+                    </a:solidFill>
+                  </a:ln>
                 </p:spPr>
+                <p:style>
+                  <a:lnRef idx="2">
+                    <a:schemeClr val="accent1">
+                      <a:shade val="15000"/>
+                    </a:schemeClr>
+                  </a:lnRef>
+                  <a:fillRef idx="1">
+                    <a:schemeClr val="accent1"/>
+                  </a:fillRef>
+                  <a:effectRef idx="0">
+                    <a:schemeClr val="accent1"/>
+                  </a:effectRef>
+                  <a:fontRef idx="minor">
+                    <a:schemeClr val="lt1"/>
+                  </a:fontRef>
+                </p:style>
                 <p:txBody>
-                  <a:bodyPr wrap="square" rtlCol="0">
-                    <a:spAutoFit/>
-                  </a:bodyPr>
+                  <a:bodyPr rtlCol="0" anchor="ctr"/>
                   <a:lstStyle/>
                   <a:p>
                     <a:pPr algn="ctr"/>
-                    <a:r>
-                      <a:rPr lang="zh-CN" altLang="en-US" dirty="0">
-                        <a:solidFill>
-                          <a:schemeClr val="tx1"/>
-                        </a:solidFill>
-                        <a:latin typeface="Times New Roman" panose="02020603050405020304" pitchFamily="18" charset="0"/>
-                        <a:ea typeface="宋体" panose="02010600030101010101" pitchFamily="2" charset="-122"/>
-                      </a:rPr>
-                      <a:t>综合效用函数</a:t>
-                    </a:r>
-                    <a14:m>
-                      <m:oMath xmlns:m="http://schemas.openxmlformats.org/officeDocument/2006/math">
-                        <m:r>
-                          <m:rPr>
-                            <m:nor/>
-                          </m:rPr>
-                          <a:rPr lang="en-US" altLang="zh-CN" i="1" dirty="0" smtClean="0">
-                            <a:solidFill>
-                              <a:schemeClr val="tx1"/>
-                            </a:solidFill>
-                            <a:latin typeface="Times New Roman" panose="02020603050405020304" pitchFamily="18" charset="0"/>
-                            <a:ea typeface="宋体" panose="02010600030101010101" pitchFamily="2" charset="-122"/>
-                          </a:rPr>
-                          <m:t>U</m:t>
-                        </m:r>
-                        <m:r>
-                          <a:rPr lang="en-US" altLang="zh-CN" b="0" i="1" smtClean="0">
-                            <a:solidFill>
-                              <a:schemeClr val="tx1"/>
-                            </a:solidFill>
-                            <a:latin typeface="Cambria Math" panose="02040503050406030204" pitchFamily="18" charset="0"/>
-                          </a:rPr>
-                          <m:t>(∙)</m:t>
-                        </m:r>
-                      </m:oMath>
-                    </a14:m>
-                    <a:r>
-                      <a:rPr lang="zh-CN" altLang="en-US" dirty="0">
-                        <a:solidFill>
-                          <a:schemeClr val="tx1"/>
-                        </a:solidFill>
-                        <a:latin typeface="Times New Roman" panose="02020603050405020304" pitchFamily="18" charset="0"/>
-                        <a:ea typeface="宋体" panose="02010600030101010101" pitchFamily="2" charset="-122"/>
-                      </a:rPr>
-                      <a:t> </a:t>
-                    </a:r>
-                  </a:p>
-                </p:txBody>
-              </p:sp>
-            </mc:Choice>
-            <mc:Fallback xmlns="">
-              <p:sp>
-                <p:nvSpPr>
-                  <p:cNvPr id="23" name="文本框 22">
-                    <a:extLst>
-                      <a:ext uri="{FF2B5EF4-FFF2-40B4-BE49-F238E27FC236}">
-                        <a16:creationId xmlns:a16="http://schemas.microsoft.com/office/drawing/2014/main" id="{D46FBEF7-0129-18DC-5701-3EDEF6768E0A}"/>
-                      </a:ext>
-                    </a:extLst>
-                  </p:cNvPr>
-                  <p:cNvSpPr txBox="1">
-                    <a:spLocks noRot="1" noChangeAspect="1" noMove="1" noResize="1" noEditPoints="1" noAdjustHandles="1" noChangeArrowheads="1" noChangeShapeType="1" noTextEdit="1"/>
-                  </p:cNvSpPr>
-                  <p:nvPr/>
-                </p:nvSpPr>
-                <p:spPr>
-                  <a:xfrm>
-                    <a:off x="3346011" y="3937861"/>
-                    <a:ext cx="2866510" cy="369332"/>
-                  </a:xfrm>
-                  <a:prstGeom prst="rect">
-                    <a:avLst/>
-                  </a:prstGeom>
-                  <a:blipFill>
-                    <a:blip r:embed="rId6"/>
-                    <a:stretch>
-                      <a:fillRect t="-11475" b="-21311"/>
-                    </a:stretch>
-                  </a:blipFill>
-                </p:spPr>
-                <p:txBody>
-                  <a:bodyPr/>
-                  <a:lstStyle/>
-                  <a:p>
-                    <a:r>
-                      <a:rPr lang="zh-CN" altLang="en-US">
-                        <a:noFill/>
-                      </a:rPr>
-                      <a:t> </a:t>
-                    </a:r>
-                  </a:p>
-                </p:txBody>
-              </p:sp>
-            </mc:Fallback>
-          </mc:AlternateContent>
-        </p:grpSp>
-        <p:cxnSp>
-          <p:nvCxnSpPr>
-            <p:cNvPr id="26" name="直接箭头连接符 25">
-              <a:extLst>
-                <a:ext uri="{FF2B5EF4-FFF2-40B4-BE49-F238E27FC236}">
-                  <a16:creationId xmlns:a16="http://schemas.microsoft.com/office/drawing/2014/main" id="{084FC642-B382-CD16-998E-FC546AB47524}"/>
-                </a:ext>
-              </a:extLst>
-            </p:cNvPr>
-            <p:cNvCxnSpPr>
-              <a:cxnSpLocks/>
-              <a:stCxn id="12" idx="2"/>
-              <a:endCxn id="18" idx="0"/>
-            </p:cNvCxnSpPr>
-            <p:nvPr/>
-          </p:nvCxnSpPr>
-          <p:spPr>
-            <a:xfrm>
-              <a:off x="4779266" y="1823924"/>
-              <a:ext cx="0" cy="590792"/>
-            </a:xfrm>
-            <a:prstGeom prst="straightConnector1">
-              <a:avLst/>
-            </a:prstGeom>
-            <a:ln w="19050">
-              <a:solidFill>
-                <a:schemeClr val="tx1"/>
-              </a:solidFill>
-              <a:tailEnd type="triangle"/>
-            </a:ln>
-          </p:spPr>
-          <p:style>
-            <a:lnRef idx="1">
-              <a:schemeClr val="accent1"/>
-            </a:lnRef>
-            <a:fillRef idx="0">
-              <a:schemeClr val="accent1"/>
-            </a:fillRef>
-            <a:effectRef idx="0">
-              <a:schemeClr val="accent1"/>
-            </a:effectRef>
-            <a:fontRef idx="minor">
-              <a:schemeClr val="tx1"/>
-            </a:fontRef>
-          </p:style>
-        </p:cxnSp>
-        <p:cxnSp>
-          <p:nvCxnSpPr>
-            <p:cNvPr id="29" name="直接箭头连接符 28">
-              <a:extLst>
-                <a:ext uri="{FF2B5EF4-FFF2-40B4-BE49-F238E27FC236}">
-                  <a16:creationId xmlns:a16="http://schemas.microsoft.com/office/drawing/2014/main" id="{A26C3EAC-C021-7ACF-AA79-08B4B2D859FA}"/>
-                </a:ext>
-              </a:extLst>
-            </p:cNvPr>
-            <p:cNvCxnSpPr>
-              <a:stCxn id="18" idx="2"/>
-              <a:endCxn id="24" idx="0"/>
-            </p:cNvCxnSpPr>
-            <p:nvPr/>
-          </p:nvCxnSpPr>
-          <p:spPr>
-            <a:xfrm>
-              <a:off x="4779266" y="3134716"/>
-              <a:ext cx="0" cy="590792"/>
-            </a:xfrm>
-            <a:prstGeom prst="straightConnector1">
-              <a:avLst/>
-            </a:prstGeom>
-            <a:ln w="19050">
-              <a:solidFill>
-                <a:schemeClr val="tx1"/>
-              </a:solidFill>
-              <a:tailEnd type="triangle"/>
-            </a:ln>
-          </p:spPr>
-          <p:style>
-            <a:lnRef idx="1">
-              <a:schemeClr val="accent1"/>
-            </a:lnRef>
-            <a:fillRef idx="0">
-              <a:schemeClr val="accent1"/>
-            </a:fillRef>
-            <a:effectRef idx="0">
-              <a:schemeClr val="accent1"/>
-            </a:effectRef>
-            <a:fontRef idx="minor">
-              <a:schemeClr val="tx1"/>
-            </a:fontRef>
-          </p:style>
-        </p:cxnSp>
-        <p:grpSp>
-          <p:nvGrpSpPr>
-            <p:cNvPr id="47" name="组合 46">
-              <a:extLst>
-                <a:ext uri="{FF2B5EF4-FFF2-40B4-BE49-F238E27FC236}">
-                  <a16:creationId xmlns:a16="http://schemas.microsoft.com/office/drawing/2014/main" id="{A201CC16-C720-5420-96AF-3C326BF9F98E}"/>
-                </a:ext>
-              </a:extLst>
-            </p:cNvPr>
-            <p:cNvGrpSpPr/>
-            <p:nvPr/>
-          </p:nvGrpSpPr>
-          <p:grpSpPr>
-            <a:xfrm>
-              <a:off x="3159266" y="4784302"/>
-              <a:ext cx="3240000" cy="732218"/>
-              <a:chOff x="3159266" y="5077734"/>
-              <a:chExt cx="3240000" cy="732218"/>
-            </a:xfrm>
-          </p:grpSpPr>
-          <p:sp>
-            <p:nvSpPr>
-              <p:cNvPr id="33" name="矩形 32">
-                <a:extLst>
-                  <a:ext uri="{FF2B5EF4-FFF2-40B4-BE49-F238E27FC236}">
-                    <a16:creationId xmlns:a16="http://schemas.microsoft.com/office/drawing/2014/main" id="{B7ADD4A7-EF14-8945-045C-BC38ACEC7E8B}"/>
-                  </a:ext>
-                </a:extLst>
-              </p:cNvPr>
-              <p:cNvSpPr/>
-              <p:nvPr/>
-            </p:nvSpPr>
-            <p:spPr>
-              <a:xfrm>
-                <a:off x="3159266" y="5077734"/>
-                <a:ext cx="3240000" cy="720000"/>
-              </a:xfrm>
-              <a:prstGeom prst="rect">
-                <a:avLst/>
-              </a:prstGeom>
-              <a:solidFill>
-                <a:srgbClr val="4682B4"/>
-              </a:solidFill>
-              <a:ln w="19050">
-                <a:solidFill>
-                  <a:schemeClr val="tx1"/>
-                </a:solidFill>
-              </a:ln>
-            </p:spPr>
-            <p:style>
-              <a:lnRef idx="2">
-                <a:schemeClr val="accent1">
-                  <a:shade val="15000"/>
-                </a:schemeClr>
-              </a:lnRef>
-              <a:fillRef idx="1">
-                <a:schemeClr val="accent1"/>
-              </a:fillRef>
-              <a:effectRef idx="0">
-                <a:schemeClr val="accent1"/>
-              </a:effectRef>
-              <a:fontRef idx="minor">
-                <a:schemeClr val="lt1"/>
-              </a:fontRef>
-            </p:style>
-            <p:txBody>
-              <a:bodyPr rtlCol="0" anchor="ctr"/>
-              <a:lstStyle/>
-              <a:p>
-                <a:pPr algn="ctr"/>
-                <a:endParaRPr lang="zh-CN" altLang="en-US">
-                  <a:solidFill>
-                    <a:schemeClr val="tx1"/>
-                  </a:solidFill>
-                  <a:latin typeface="Times New Roman" panose="02020603050405020304" pitchFamily="18" charset="0"/>
-                  <a:ea typeface="宋体" panose="02010600030101010101" pitchFamily="2" charset="-122"/>
-                </a:endParaRPr>
-              </a:p>
-            </p:txBody>
-          </p:sp>
-          <mc:AlternateContent xmlns:mc="http://schemas.openxmlformats.org/markup-compatibility/2006" xmlns:a14="http://schemas.microsoft.com/office/drawing/2010/main">
-            <mc:Choice Requires="a14">
-              <p:sp>
-                <p:nvSpPr>
-                  <p:cNvPr id="32" name="文本框 31">
-                    <a:extLst>
-                      <a:ext uri="{FF2B5EF4-FFF2-40B4-BE49-F238E27FC236}">
-                        <a16:creationId xmlns:a16="http://schemas.microsoft.com/office/drawing/2014/main" id="{928435EC-927A-FF64-D3E7-230226E80369}"/>
-                      </a:ext>
-                    </a:extLst>
-                  </p:cNvPr>
-                  <p:cNvSpPr txBox="1"/>
-                  <p:nvPr/>
-                </p:nvSpPr>
-                <p:spPr>
-                  <a:xfrm>
-                    <a:off x="3346011" y="5087510"/>
-                    <a:ext cx="2866510" cy="722442"/>
-                  </a:xfrm>
-                  <a:prstGeom prst="rect">
-                    <a:avLst/>
-                  </a:prstGeom>
-                  <a:noFill/>
-                </p:spPr>
-                <p:txBody>
-                  <a:bodyPr wrap="square" rtlCol="0">
-                    <a:spAutoFit/>
-                  </a:bodyPr>
-                  <a:lstStyle/>
-                  <a:p>
-                    <a:pPr algn="ctr"/>
-                    <a:r>
-                      <a:rPr lang="zh-CN" altLang="en-US" dirty="0">
-                        <a:solidFill>
-                          <a:schemeClr val="bg1"/>
-                        </a:solidFill>
-                        <a:latin typeface="Times New Roman" panose="02020603050405020304" pitchFamily="18" charset="0"/>
-                        <a:ea typeface="宋体" panose="02010600030101010101" pitchFamily="2" charset="-122"/>
-                      </a:rPr>
-                      <a:t>最优协议与参数</a:t>
-                    </a:r>
-                    <a14:m>
-                      <m:oMath xmlns:m="http://schemas.openxmlformats.org/officeDocument/2006/math">
-                        <m:sSubSup>
-                          <m:sSubSupPr>
-                            <m:ctrlPr>
-                              <a:rPr lang="en-US" altLang="zh-CN" i="1" smtClean="0">
-                                <a:solidFill>
-                                  <a:schemeClr val="bg1"/>
-                                </a:solidFill>
-                                <a:latin typeface="Cambria Math" panose="02040503050406030204" pitchFamily="18" charset="0"/>
-                              </a:rPr>
-                            </m:ctrlPr>
-                          </m:sSubSupPr>
-                          <m:e>
-                            <m:r>
-                              <a:rPr lang="en-US" altLang="zh-CN" b="1" i="0" smtClean="0">
-                                <a:solidFill>
-                                  <a:schemeClr val="bg1"/>
-                                </a:solidFill>
-                                <a:latin typeface="Cambria Math" panose="02040503050406030204" pitchFamily="18" charset="0"/>
-                              </a:rPr>
-                              <m:t>𝐱</m:t>
-                            </m:r>
-                          </m:e>
-                          <m:sub>
-                            <m:r>
-                              <m:rPr>
-                                <m:sty m:val="p"/>
-                              </m:rPr>
-                              <a:rPr lang="en-US" altLang="zh-CN" b="0" i="0" smtClean="0">
-                                <a:solidFill>
-                                  <a:schemeClr val="bg1"/>
-                                </a:solidFill>
-                                <a:latin typeface="Cambria Math" panose="02040503050406030204" pitchFamily="18" charset="0"/>
-                              </a:rPr>
-                              <m:t>proto</m:t>
-                            </m:r>
-                          </m:sub>
-                          <m:sup>
-                            <m:r>
-                              <a:rPr lang="en-US" altLang="zh-CN" b="0" i="0" smtClean="0">
-                                <a:solidFill>
-                                  <a:schemeClr val="bg1"/>
-                                </a:solidFill>
-                                <a:latin typeface="Cambria Math" panose="02040503050406030204" pitchFamily="18" charset="0"/>
-                              </a:rPr>
-                              <m:t>∗</m:t>
-                            </m:r>
-                          </m:sup>
-                        </m:sSubSup>
-                      </m:oMath>
-                    </a14:m>
-                    <a:endParaRPr lang="en-US" altLang="zh-CN" dirty="0">
+                    <a:endParaRPr lang="zh-CN" altLang="en-US">
                       <a:solidFill>
-                        <a:schemeClr val="bg1"/>
+                        <a:schemeClr val="tx1"/>
                       </a:solidFill>
                       <a:latin typeface="Times New Roman" panose="02020603050405020304" pitchFamily="18" charset="0"/>
                       <a:ea typeface="宋体" panose="02010600030101010101" pitchFamily="2" charset="-122"/>
                     </a:endParaRPr>
                   </a:p>
-                  <a:p>
-                    <a:pPr algn="ctr"/>
-                    <a14:m>
-                      <m:oMath xmlns:m="http://schemas.openxmlformats.org/officeDocument/2006/math">
-                        <m:sSubSup>
-                          <m:sSubSupPr>
-                            <m:ctrlPr>
-                              <a:rPr lang="en-US" altLang="zh-CN" i="1" smtClean="0">
-                                <a:solidFill>
-                                  <a:schemeClr val="bg1"/>
-                                </a:solidFill>
-                                <a:latin typeface="Cambria Math" panose="02040503050406030204" pitchFamily="18" charset="0"/>
-                              </a:rPr>
-                            </m:ctrlPr>
-                          </m:sSubSupPr>
-                          <m:e>
-                            <m:r>
-                              <m:rPr>
-                                <m:sty m:val="p"/>
-                              </m:rPr>
-                              <a:rPr lang="en-US" altLang="zh-CN" b="0" i="0" smtClean="0">
-                                <a:solidFill>
-                                  <a:schemeClr val="bg1"/>
-                                </a:solidFill>
-                                <a:latin typeface="Cambria Math" panose="02040503050406030204" pitchFamily="18" charset="0"/>
-                              </a:rPr>
-                              <m:t>x</m:t>
-                            </m:r>
-                          </m:e>
-                          <m:sub>
-                            <m:r>
-                              <m:rPr>
-                                <m:sty m:val="p"/>
-                              </m:rPr>
-                              <a:rPr lang="en-US" altLang="zh-CN" b="0" i="0" smtClean="0">
-                                <a:solidFill>
-                                  <a:schemeClr val="bg1"/>
-                                </a:solidFill>
-                                <a:latin typeface="Cambria Math" panose="02040503050406030204" pitchFamily="18" charset="0"/>
-                              </a:rPr>
-                              <m:t>proto</m:t>
-                            </m:r>
-                          </m:sub>
-                          <m:sup>
-                            <m:r>
-                              <a:rPr lang="en-US" altLang="zh-CN" b="0" i="0" smtClean="0">
-                                <a:solidFill>
-                                  <a:schemeClr val="bg1"/>
-                                </a:solidFill>
-                                <a:latin typeface="Cambria Math" panose="02040503050406030204" pitchFamily="18" charset="0"/>
-                              </a:rPr>
-                              <m:t>∗</m:t>
-                            </m:r>
-                          </m:sup>
-                        </m:sSubSup>
-                        <m:r>
-                          <a:rPr lang="en-US" altLang="zh-CN" b="0" i="1" smtClean="0">
-                            <a:solidFill>
-                              <a:schemeClr val="bg1"/>
-                            </a:solidFill>
-                            <a:latin typeface="Cambria Math" panose="02040503050406030204" pitchFamily="18" charset="0"/>
-                          </a:rPr>
-                          <m:t>=[</m:t>
-                        </m:r>
-                        <m:sSup>
-                          <m:sSupPr>
-                            <m:ctrlPr>
-                              <a:rPr lang="en-US" altLang="zh-CN" i="1" smtClean="0">
-                                <a:solidFill>
-                                  <a:schemeClr val="bg1"/>
-                                </a:solidFill>
-                                <a:latin typeface="Cambria Math" panose="02040503050406030204" pitchFamily="18" charset="0"/>
-                              </a:rPr>
-                            </m:ctrlPr>
-                          </m:sSupPr>
-                          <m:e>
-                            <m:r>
-                              <a:rPr lang="en-US" altLang="zh-CN" b="0" i="1" smtClean="0">
-                                <a:solidFill>
-                                  <a:schemeClr val="bg1"/>
-                                </a:solidFill>
-                                <a:latin typeface="Cambria Math" panose="02040503050406030204" pitchFamily="18" charset="0"/>
-                              </a:rPr>
-                              <m:t>𝑎</m:t>
-                            </m:r>
-                          </m:e>
-                          <m:sup>
-                            <m:r>
-                              <a:rPr lang="en-US" altLang="zh-CN" b="0" i="1" smtClean="0">
-                                <a:solidFill>
-                                  <a:schemeClr val="bg1"/>
-                                </a:solidFill>
-                                <a:latin typeface="Cambria Math" panose="02040503050406030204" pitchFamily="18" charset="0"/>
-                              </a:rPr>
-                              <m:t>∗</m:t>
-                            </m:r>
-                          </m:sup>
-                        </m:sSup>
-                        <m:r>
-                          <a:rPr lang="en-US" altLang="zh-CN" b="0" i="1" smtClean="0">
-                            <a:solidFill>
-                              <a:schemeClr val="bg1"/>
-                            </a:solidFill>
-                            <a:latin typeface="Cambria Math" panose="02040503050406030204" pitchFamily="18" charset="0"/>
-                          </a:rPr>
-                          <m:t>,</m:t>
-                        </m:r>
-                        <m:sSubSup>
-                          <m:sSubSupPr>
-                            <m:ctrlPr>
-                              <a:rPr lang="en-US" altLang="zh-CN" b="1" i="1" smtClean="0">
-                                <a:solidFill>
-                                  <a:schemeClr val="bg1"/>
-                                </a:solidFill>
-                                <a:latin typeface="Cambria Math" panose="02040503050406030204" pitchFamily="18" charset="0"/>
-                              </a:rPr>
-                            </m:ctrlPr>
-                          </m:sSubSupPr>
-                          <m:e>
-                            <m:r>
-                              <a:rPr lang="en-US" altLang="zh-CN" b="1" i="0" smtClean="0">
-                                <a:solidFill>
-                                  <a:schemeClr val="bg1"/>
-                                </a:solidFill>
-                                <a:latin typeface="Cambria Math" panose="02040503050406030204" pitchFamily="18" charset="0"/>
-                              </a:rPr>
-                              <m:t>𝐱</m:t>
-                            </m:r>
-                          </m:e>
-                          <m:sub>
-                            <m:r>
-                              <a:rPr lang="en-US" altLang="zh-CN" b="1" i="1" smtClean="0">
-                                <a:solidFill>
-                                  <a:schemeClr val="bg1"/>
-                                </a:solidFill>
-                                <a:latin typeface="Cambria Math" panose="02040503050406030204" pitchFamily="18" charset="0"/>
-                              </a:rPr>
-                              <m:t>𝒑</m:t>
-                            </m:r>
-                          </m:sub>
-                          <m:sup>
-                            <m:r>
-                              <a:rPr lang="en-US" altLang="zh-CN" b="1" i="0" smtClean="0">
-                                <a:solidFill>
-                                  <a:schemeClr val="bg1"/>
-                                </a:solidFill>
-                                <a:latin typeface="Cambria Math" panose="02040503050406030204" pitchFamily="18" charset="0"/>
-                              </a:rPr>
-                              <m:t>∗</m:t>
-                            </m:r>
-                          </m:sup>
-                        </m:sSubSup>
-                        <m:r>
-                          <a:rPr lang="en-US" altLang="zh-CN" b="0" i="1" smtClean="0">
-                            <a:solidFill>
-                              <a:schemeClr val="bg1"/>
-                            </a:solidFill>
-                            <a:latin typeface="Cambria Math" panose="02040503050406030204" pitchFamily="18" charset="0"/>
-                          </a:rPr>
-                          <m:t>]</m:t>
-                        </m:r>
-                      </m:oMath>
-                    </a14:m>
-                    <a:r>
-                      <a:rPr lang="en-US" altLang="zh-CN" dirty="0">
-                        <a:solidFill>
-                          <a:schemeClr val="bg1"/>
-                        </a:solidFill>
-                        <a:latin typeface="Times New Roman" panose="02020603050405020304" pitchFamily="18" charset="0"/>
-                        <a:ea typeface="宋体" panose="02010600030101010101" pitchFamily="2" charset="-122"/>
-                      </a:rPr>
-                      <a:t> </a:t>
-                    </a:r>
-                  </a:p>
                 </p:txBody>
               </p:sp>
-            </mc:Choice>
-            <mc:Fallback xmlns="">
-              <p:sp>
-                <p:nvSpPr>
-                  <p:cNvPr id="32" name="文本框 31">
-                    <a:extLst>
-                      <a:ext uri="{FF2B5EF4-FFF2-40B4-BE49-F238E27FC236}">
-                        <a16:creationId xmlns:a16="http://schemas.microsoft.com/office/drawing/2014/main" id="{928435EC-927A-FF64-D3E7-230226E80369}"/>
-                      </a:ext>
-                    </a:extLst>
-                  </p:cNvPr>
-                  <p:cNvSpPr txBox="1">
-                    <a:spLocks noRot="1" noChangeAspect="1" noMove="1" noResize="1" noEditPoints="1" noAdjustHandles="1" noChangeArrowheads="1" noChangeShapeType="1" noTextEdit="1"/>
-                  </p:cNvSpPr>
-                  <p:nvPr/>
-                </p:nvSpPr>
-                <p:spPr>
-                  <a:xfrm>
-                    <a:off x="3346011" y="5087510"/>
-                    <a:ext cx="2866510" cy="722442"/>
-                  </a:xfrm>
-                  <a:prstGeom prst="rect">
-                    <a:avLst/>
-                  </a:prstGeom>
-                  <a:blipFill>
-                    <a:blip r:embed="rId7"/>
-                    <a:stretch>
-                      <a:fillRect t="-6723" b="-840"/>
-                    </a:stretch>
-                  </a:blipFill>
-                </p:spPr>
-                <p:txBody>
-                  <a:bodyPr/>
-                  <a:lstStyle/>
-                  <a:p>
-                    <a:r>
-                      <a:rPr lang="zh-CN" altLang="en-US">
-                        <a:noFill/>
-                      </a:rPr>
-                      <a:t> </a:t>
-                    </a:r>
-                  </a:p>
-                </p:txBody>
-              </p:sp>
-            </mc:Fallback>
-          </mc:AlternateContent>
-        </p:grpSp>
-        <p:cxnSp>
-          <p:nvCxnSpPr>
-            <p:cNvPr id="35" name="直接箭头连接符 34">
-              <a:extLst>
-                <a:ext uri="{FF2B5EF4-FFF2-40B4-BE49-F238E27FC236}">
-                  <a16:creationId xmlns:a16="http://schemas.microsoft.com/office/drawing/2014/main" id="{0C3832B5-3D89-C6BC-DF41-1578C692D971}"/>
-                </a:ext>
-              </a:extLst>
-            </p:cNvPr>
-            <p:cNvCxnSpPr>
-              <a:stCxn id="24" idx="2"/>
-              <a:endCxn id="33" idx="0"/>
-            </p:cNvCxnSpPr>
-            <p:nvPr/>
-          </p:nvCxnSpPr>
-          <p:spPr>
-            <a:xfrm>
-              <a:off x="4779266" y="4193508"/>
-              <a:ext cx="0" cy="590794"/>
-            </a:xfrm>
-            <a:prstGeom prst="straightConnector1">
-              <a:avLst/>
-            </a:prstGeom>
-            <a:ln w="19050">
-              <a:solidFill>
-                <a:schemeClr val="tx1"/>
-              </a:solidFill>
-              <a:tailEnd type="triangle"/>
-            </a:ln>
-          </p:spPr>
-          <p:style>
-            <a:lnRef idx="1">
-              <a:schemeClr val="accent1"/>
-            </a:lnRef>
-            <a:fillRef idx="0">
-              <a:schemeClr val="accent1"/>
-            </a:fillRef>
-            <a:effectRef idx="0">
-              <a:schemeClr val="accent1"/>
-            </a:effectRef>
-            <a:fontRef idx="minor">
-              <a:schemeClr val="tx1"/>
-            </a:fontRef>
-          </p:style>
-        </p:cxnSp>
-        <mc:AlternateContent xmlns:mc="http://schemas.openxmlformats.org/markup-compatibility/2006" xmlns:a14="http://schemas.microsoft.com/office/drawing/2010/main">
-          <mc:Choice Requires="a14">
+              <mc:AlternateContent xmlns:mc="http://schemas.openxmlformats.org/markup-compatibility/2006">
+                <mc:Choice xmlns:a14="http://schemas.microsoft.com/office/drawing/2010/main" Requires="a14">
+                  <p:sp>
+                    <p:nvSpPr>
+                      <p:cNvPr id="5" name="文本框 4">
+                        <a:extLst>
+                          <a:ext uri="{FF2B5EF4-FFF2-40B4-BE49-F238E27FC236}">
+                            <a16:creationId xmlns:a16="http://schemas.microsoft.com/office/drawing/2014/main" id="{D0BAC6B0-88BC-3B29-E0E1-5D57FB4DA486}"/>
+                          </a:ext>
+                        </a:extLst>
+                      </p:cNvPr>
+                      <p:cNvSpPr txBox="1"/>
+                      <p:nvPr/>
+                    </p:nvSpPr>
+                    <p:spPr>
+                      <a:xfrm>
+                        <a:off x="4195150" y="230143"/>
+                        <a:ext cx="2064970" cy="369332"/>
+                      </a:xfrm>
+                      <a:prstGeom prst="rect">
+                        <a:avLst/>
+                      </a:prstGeom>
+                      <a:grpFill/>
+                    </p:spPr>
+                    <p:txBody>
+                      <a:bodyPr wrap="square" rtlCol="0">
+                        <a:spAutoFit/>
+                      </a:bodyPr>
+                      <a:lstStyle/>
+                      <a:p>
+                        <a:pPr algn="ctr"/>
+                        <a14:m>
+                          <m:oMathPara xmlns:m="http://schemas.openxmlformats.org/officeDocument/2006/math">
+                            <m:oMathParaPr>
+                              <m:jc m:val="center"/>
+                            </m:oMathParaPr>
+                            <m:oMath xmlns:m="http://schemas.openxmlformats.org/officeDocument/2006/math">
+                              <m:sSub>
+                                <m:sSubPr>
+                                  <m:ctrlPr>
+                                    <a:rPr lang="en-US" altLang="zh-CN" i="1" smtClean="0">
+                                      <a:solidFill>
+                                        <a:schemeClr val="tx1"/>
+                                      </a:solidFill>
+                                      <a:latin typeface="Cambria Math" panose="02040503050406030204" pitchFamily="18" charset="0"/>
+                                    </a:rPr>
+                                  </m:ctrlPr>
+                                </m:sSubPr>
+                                <m:e>
+                                  <m:r>
+                                    <a:rPr lang="en-US" altLang="zh-CN" b="1" i="0" smtClean="0">
+                                      <a:solidFill>
+                                        <a:schemeClr val="tx1"/>
+                                      </a:solidFill>
+                                      <a:latin typeface="Cambria Math" panose="02040503050406030204" pitchFamily="18" charset="0"/>
+                                    </a:rPr>
+                                    <m:t>𝐗</m:t>
+                                  </m:r>
+                                </m:e>
+                                <m:sub>
+                                  <m:r>
+                                    <m:rPr>
+                                      <m:sty m:val="p"/>
+                                    </m:rPr>
+                                    <a:rPr lang="en-US" altLang="zh-CN" b="0" i="0" smtClean="0">
+                                      <a:solidFill>
+                                        <a:schemeClr val="tx1"/>
+                                      </a:solidFill>
+                                      <a:latin typeface="Cambria Math" panose="02040503050406030204" pitchFamily="18" charset="0"/>
+                                    </a:rPr>
+                                    <m:t>in</m:t>
+                                  </m:r>
+                                </m:sub>
+                              </m:sSub>
+                            </m:oMath>
+                          </m:oMathPara>
+                        </a14:m>
+                        <a:endParaRPr lang="en-US" altLang="zh-CN" dirty="0">
+                          <a:solidFill>
+                            <a:schemeClr val="tx1"/>
+                          </a:solidFill>
+                          <a:latin typeface="Times New Roman" panose="02020603050405020304" pitchFamily="18" charset="0"/>
+                          <a:ea typeface="宋体" panose="02010600030101010101" pitchFamily="2" charset="-122"/>
+                        </a:endParaRPr>
+                      </a:p>
+                    </p:txBody>
+                  </p:sp>
+                </mc:Choice>
+                <mc:Fallback>
+                  <p:sp>
+                    <p:nvSpPr>
+                      <p:cNvPr id="5" name="文本框 4">
+                        <a:extLst>
+                          <a:ext uri="{FF2B5EF4-FFF2-40B4-BE49-F238E27FC236}">
+                            <a16:creationId xmlns:a16="http://schemas.microsoft.com/office/drawing/2014/main" id="{D0BAC6B0-88BC-3B29-E0E1-5D57FB4DA486}"/>
+                          </a:ext>
+                        </a:extLst>
+                      </p:cNvPr>
+                      <p:cNvSpPr txBox="1">
+                        <a:spLocks noRot="1" noChangeAspect="1" noMove="1" noResize="1" noEditPoints="1" noAdjustHandles="1" noChangeArrowheads="1" noChangeShapeType="1" noTextEdit="1"/>
+                      </p:cNvSpPr>
+                      <p:nvPr/>
+                    </p:nvSpPr>
+                    <p:spPr>
+                      <a:xfrm>
+                        <a:off x="4195150" y="230143"/>
+                        <a:ext cx="2064970" cy="369332"/>
+                      </a:xfrm>
+                      <a:prstGeom prst="rect">
+                        <a:avLst/>
+                      </a:prstGeom>
+                      <a:blipFill>
+                        <a:blip r:embed="rId5"/>
+                        <a:stretch>
+                          <a:fillRect/>
+                        </a:stretch>
+                      </a:blipFill>
+                    </p:spPr>
+                    <p:txBody>
+                      <a:bodyPr/>
+                      <a:lstStyle/>
+                      <a:p>
+                        <a:r>
+                          <a:rPr lang="zh-CN" altLang="en-US">
+                            <a:noFill/>
+                          </a:rPr>
+                          <a:t> </a:t>
+                        </a:r>
+                      </a:p>
+                    </p:txBody>
+                  </p:sp>
+                </mc:Fallback>
+              </mc:AlternateContent>
+            </p:grpSp>
             <p:sp>
               <p:nvSpPr>
-                <p:cNvPr id="37" name="文本框 36">
+                <p:cNvPr id="7" name="文本框 6">
                   <a:extLst>
                     <a:ext uri="{FF2B5EF4-FFF2-40B4-BE49-F238E27FC236}">
-                      <a16:creationId xmlns:a16="http://schemas.microsoft.com/office/drawing/2014/main" id="{6DF2FA46-B853-7F4A-1A2D-557B4CD80A70}"/>
+                      <a16:creationId xmlns:a16="http://schemas.microsoft.com/office/drawing/2014/main" id="{538B2A64-0375-6E74-83EC-58C3A8EA571A}"/>
                     </a:ext>
                   </a:extLst>
                 </p:cNvPr>
@@ -7549,8 +6611,8 @@
               </p:nvSpPr>
               <p:spPr>
                 <a:xfrm>
-                  <a:off x="4771839" y="3245242"/>
-                  <a:ext cx="759226" cy="369332"/>
+                  <a:off x="4489559" y="2851132"/>
+                  <a:ext cx="2068616" cy="369332"/>
                 </a:xfrm>
                 <a:prstGeom prst="rect">
                   <a:avLst/>
@@ -7563,63 +6625,1116 @@
                 </a:bodyPr>
                 <a:lstStyle/>
                 <a:p>
+                  <a:pPr algn="ctr"/>
                   <a:r>
-                    <a:rPr lang="en-US" altLang="zh-CN" i="1" dirty="0">
+                    <a:rPr lang="zh-CN" altLang="en-US" dirty="0">
+                      <a:latin typeface="Times New Roman" panose="02020603050405020304" pitchFamily="18" charset="0"/>
+                      <a:ea typeface="宋体" panose="02010600030101010101" pitchFamily="2" charset="-122"/>
+                    </a:rPr>
+                    <a:t>构建</a:t>
+                  </a:r>
+                  <a:r>
+                    <a:rPr lang="zh-CN" altLang="en-US" dirty="0">
                       <a:solidFill>
                         <a:schemeClr val="tx1"/>
                       </a:solidFill>
                       <a:latin typeface="Times New Roman" panose="02020603050405020304" pitchFamily="18" charset="0"/>
                       <a:ea typeface="宋体" panose="02010600030101010101" pitchFamily="2" charset="-122"/>
                     </a:rPr>
-                    <a:t>U</a:t>
+                    <a:t>统一输入向量</a:t>
                   </a:r>
-                  <a14:m>
-                    <m:oMath xmlns:m="http://schemas.openxmlformats.org/officeDocument/2006/math">
-                      <m:r>
-                        <a:rPr lang="en-US" altLang="zh-CN" b="0" i="1" smtClean="0">
+                  <a:endParaRPr lang="zh-CN" altLang="en-US" dirty="0"/>
+                </a:p>
+              </p:txBody>
+            </p:sp>
+          </p:grpSp>
+          <p:grpSp>
+            <p:nvGrpSpPr>
+              <p:cNvPr id="21" name="组合 20">
+                <a:extLst>
+                  <a:ext uri="{FF2B5EF4-FFF2-40B4-BE49-F238E27FC236}">
+                    <a16:creationId xmlns:a16="http://schemas.microsoft.com/office/drawing/2014/main" id="{B77FDD60-B316-7CBE-3C09-4191F5EF8FAD}"/>
+                  </a:ext>
+                </a:extLst>
+              </p:cNvPr>
+              <p:cNvGrpSpPr/>
+              <p:nvPr/>
+            </p:nvGrpSpPr>
+            <p:grpSpPr>
+              <a:xfrm>
+                <a:off x="3234064" y="2932394"/>
+                <a:ext cx="2360992" cy="999077"/>
+                <a:chOff x="6851146" y="3212184"/>
+                <a:chExt cx="2360992" cy="999077"/>
+              </a:xfrm>
+            </p:grpSpPr>
+            <p:grpSp>
+              <p:nvGrpSpPr>
+                <p:cNvPr id="20" name="组合 19">
+                  <a:extLst>
+                    <a:ext uri="{FF2B5EF4-FFF2-40B4-BE49-F238E27FC236}">
+                      <a16:creationId xmlns:a16="http://schemas.microsoft.com/office/drawing/2014/main" id="{1537D228-95D5-BE0B-B38E-ACE8E9BEB81B}"/>
+                    </a:ext>
+                  </a:extLst>
+                </p:cNvPr>
+                <p:cNvGrpSpPr/>
+                <p:nvPr/>
+              </p:nvGrpSpPr>
+              <p:grpSpPr>
+                <a:xfrm>
+                  <a:off x="7187137" y="3212184"/>
+                  <a:ext cx="1689011" cy="466284"/>
+                  <a:chOff x="7040950" y="3212184"/>
+                  <a:chExt cx="1689011" cy="466284"/>
+                </a:xfrm>
+              </p:grpSpPr>
+              <p:sp>
+                <p:nvSpPr>
+                  <p:cNvPr id="16" name="矩形 15">
+                    <a:extLst>
+                      <a:ext uri="{FF2B5EF4-FFF2-40B4-BE49-F238E27FC236}">
+                        <a16:creationId xmlns:a16="http://schemas.microsoft.com/office/drawing/2014/main" id="{86BB859B-4336-4C6C-3184-1C02FD38F768}"/>
+                      </a:ext>
+                    </a:extLst>
+                  </p:cNvPr>
+                  <p:cNvSpPr/>
+                  <p:nvPr/>
+                </p:nvSpPr>
+                <p:spPr>
+                  <a:xfrm>
+                    <a:off x="7040950" y="3212184"/>
+                    <a:ext cx="1689011" cy="466284"/>
+                  </a:xfrm>
+                  <a:prstGeom prst="rect">
+                    <a:avLst/>
+                  </a:prstGeom>
+                  <a:solidFill>
+                    <a:srgbClr val="DCFFE6"/>
+                  </a:solidFill>
+                  <a:ln w="19050">
+                    <a:solidFill>
+                      <a:schemeClr val="tx1"/>
+                    </a:solidFill>
+                  </a:ln>
+                </p:spPr>
+                <p:style>
+                  <a:lnRef idx="2">
+                    <a:schemeClr val="accent1">
+                      <a:shade val="15000"/>
+                    </a:schemeClr>
+                  </a:lnRef>
+                  <a:fillRef idx="1">
+                    <a:schemeClr val="accent1"/>
+                  </a:fillRef>
+                  <a:effectRef idx="0">
+                    <a:schemeClr val="accent1"/>
+                  </a:effectRef>
+                  <a:fontRef idx="minor">
+                    <a:schemeClr val="lt1"/>
+                  </a:fontRef>
+                </p:style>
+                <p:txBody>
+                  <a:bodyPr rtlCol="0" anchor="ctr"/>
+                  <a:lstStyle/>
+                  <a:p>
+                    <a:pPr algn="ctr"/>
+                    <a:endParaRPr lang="zh-CN" altLang="en-US">
+                      <a:solidFill>
+                        <a:schemeClr val="tx1"/>
+                      </a:solidFill>
+                      <a:latin typeface="Times New Roman" panose="02020603050405020304" pitchFamily="18" charset="0"/>
+                      <a:ea typeface="宋体" panose="02010600030101010101" pitchFamily="2" charset="-122"/>
+                    </a:endParaRPr>
+                  </a:p>
+                </p:txBody>
+              </p:sp>
+              <mc:AlternateContent xmlns:mc="http://schemas.openxmlformats.org/markup-compatibility/2006">
+                <mc:Choice xmlns:a14="http://schemas.microsoft.com/office/drawing/2010/main" Requires="a14">
+                  <p:sp>
+                    <p:nvSpPr>
+                      <p:cNvPr id="19" name="文本框 18">
+                        <a:extLst>
+                          <a:ext uri="{FF2B5EF4-FFF2-40B4-BE49-F238E27FC236}">
+                            <a16:creationId xmlns:a16="http://schemas.microsoft.com/office/drawing/2014/main" id="{BA961639-0D9C-C90A-B55E-F0B0C026AC75}"/>
+                          </a:ext>
+                        </a:extLst>
+                      </p:cNvPr>
+                      <p:cNvSpPr txBox="1"/>
+                      <p:nvPr/>
+                    </p:nvSpPr>
+                    <p:spPr>
+                      <a:xfrm>
+                        <a:off x="7347221" y="3260660"/>
+                        <a:ext cx="1076468" cy="369332"/>
+                      </a:xfrm>
+                      <a:prstGeom prst="rect">
+                        <a:avLst/>
+                      </a:prstGeom>
+                      <a:noFill/>
+                    </p:spPr>
+                    <p:txBody>
+                      <a:bodyPr wrap="square" rtlCol="0">
+                        <a:spAutoFit/>
+                      </a:bodyPr>
+                      <a:lstStyle/>
+                      <a:p>
+                        <a:pPr algn="ctr"/>
+                        <a14:m>
+                          <m:oMathPara xmlns:m="http://schemas.openxmlformats.org/officeDocument/2006/math">
+                            <m:oMathParaPr>
+                              <m:jc m:val="center"/>
+                            </m:oMathParaPr>
+                            <m:oMath xmlns:m="http://schemas.openxmlformats.org/officeDocument/2006/math">
+                              <m:r>
+                                <m:rPr>
+                                  <m:nor/>
+                                </m:rPr>
+                                <a:rPr lang="en-US" altLang="zh-CN" i="1" dirty="0">
+                                  <a:latin typeface="Times New Roman" panose="02020603050405020304" pitchFamily="18" charset="0"/>
+                                  <a:ea typeface="宋体" panose="02010600030101010101" pitchFamily="2" charset="-122"/>
+                                </a:rPr>
+                                <m:t>S</m:t>
+                              </m:r>
+                              <m:d>
+                                <m:dPr>
+                                  <m:ctrlPr>
+                                    <a:rPr lang="en-US" altLang="zh-CN" i="1">
+                                      <a:latin typeface="Cambria Math" panose="02040503050406030204" pitchFamily="18" charset="0"/>
+                                      <a:ea typeface="Cambria Math" panose="02040503050406030204" pitchFamily="18" charset="0"/>
+                                    </a:rPr>
+                                  </m:ctrlPr>
+                                </m:dPr>
+                                <m:e>
+                                  <m:r>
+                                    <a:rPr lang="en-US" altLang="zh-CN" i="1">
+                                      <a:latin typeface="Cambria Math" panose="02040503050406030204" pitchFamily="18" charset="0"/>
+                                      <a:ea typeface="Cambria Math" panose="02040503050406030204" pitchFamily="18" charset="0"/>
+                                    </a:rPr>
+                                    <m:t>∙</m:t>
+                                  </m:r>
+                                </m:e>
+                              </m:d>
+                            </m:oMath>
+                          </m:oMathPara>
+                        </a14:m>
+                        <a:endParaRPr lang="en-US" altLang="zh-CN" dirty="0">
                           <a:solidFill>
                             <a:schemeClr val="tx1"/>
                           </a:solidFill>
-                          <a:latin typeface="Cambria Math" panose="02040503050406030204" pitchFamily="18" charset="0"/>
-                        </a:rPr>
-                        <m:t>(</m:t>
-                      </m:r>
-                      <m:acc>
-                        <m:accPr>
-                          <m:chr m:val="̃"/>
-                          <m:ctrlPr>
-                            <a:rPr lang="en-US" altLang="zh-CN" i="1" smtClean="0">
-                              <a:solidFill>
-                                <a:schemeClr val="tx1"/>
-                              </a:solidFill>
-                              <a:latin typeface="Cambria Math" panose="02040503050406030204" pitchFamily="18" charset="0"/>
-                            </a:rPr>
-                          </m:ctrlPr>
-                        </m:accPr>
-                        <m:e>
-                          <m:r>
-                            <a:rPr lang="en-US" altLang="zh-CN" b="1" i="0" smtClean="0">
-                              <a:solidFill>
-                                <a:schemeClr val="tx1"/>
-                              </a:solidFill>
-                              <a:latin typeface="Cambria Math" panose="02040503050406030204" pitchFamily="18" charset="0"/>
-                            </a:rPr>
-                            <m:t>𝐲</m:t>
-                          </m:r>
-                        </m:e>
-                      </m:acc>
-                      <m:r>
-                        <a:rPr lang="en-US" altLang="zh-CN" b="0" i="1" smtClean="0">
+                          <a:latin typeface="Times New Roman" panose="02020603050405020304" pitchFamily="18" charset="0"/>
+                          <a:ea typeface="宋体" panose="02010600030101010101" pitchFamily="2" charset="-122"/>
+                        </a:endParaRPr>
+                      </a:p>
+                    </p:txBody>
+                  </p:sp>
+                </mc:Choice>
+                <mc:Fallback>
+                  <p:sp>
+                    <p:nvSpPr>
+                      <p:cNvPr id="19" name="文本框 18">
+                        <a:extLst>
+                          <a:ext uri="{FF2B5EF4-FFF2-40B4-BE49-F238E27FC236}">
+                            <a16:creationId xmlns:a16="http://schemas.microsoft.com/office/drawing/2014/main" id="{BA961639-0D9C-C90A-B55E-F0B0C026AC75}"/>
+                          </a:ext>
+                        </a:extLst>
+                      </p:cNvPr>
+                      <p:cNvSpPr txBox="1">
+                        <a:spLocks noRot="1" noChangeAspect="1" noMove="1" noResize="1" noEditPoints="1" noAdjustHandles="1" noChangeArrowheads="1" noChangeShapeType="1" noTextEdit="1"/>
+                      </p:cNvSpPr>
+                      <p:nvPr/>
+                    </p:nvSpPr>
+                    <p:spPr>
+                      <a:xfrm>
+                        <a:off x="7347221" y="3260660"/>
+                        <a:ext cx="1076468" cy="369332"/>
+                      </a:xfrm>
+                      <a:prstGeom prst="rect">
+                        <a:avLst/>
+                      </a:prstGeom>
+                      <a:blipFill>
+                        <a:blip r:embed="rId6"/>
+                        <a:stretch>
+                          <a:fillRect/>
+                        </a:stretch>
+                      </a:blipFill>
+                    </p:spPr>
+                    <p:txBody>
+                      <a:bodyPr/>
+                      <a:lstStyle/>
+                      <a:p>
+                        <a:r>
+                          <a:rPr lang="zh-CN" altLang="en-US">
+                            <a:noFill/>
+                          </a:rPr>
+                          <a:t> </a:t>
+                        </a:r>
+                      </a:p>
+                    </p:txBody>
+                  </p:sp>
+                </mc:Fallback>
+              </mc:AlternateContent>
+            </p:grpSp>
+            <p:sp>
+              <p:nvSpPr>
+                <p:cNvPr id="14" name="文本框 13">
+                  <a:extLst>
+                    <a:ext uri="{FF2B5EF4-FFF2-40B4-BE49-F238E27FC236}">
+                      <a16:creationId xmlns:a16="http://schemas.microsoft.com/office/drawing/2014/main" id="{05BCCF3A-D07F-C0D8-8E37-F9578A15CF4F}"/>
+                    </a:ext>
+                  </a:extLst>
+                </p:cNvPr>
+                <p:cNvSpPr txBox="1"/>
+                <p:nvPr/>
+              </p:nvSpPr>
+              <p:spPr>
+                <a:xfrm>
+                  <a:off x="6851146" y="3841929"/>
+                  <a:ext cx="2360992" cy="369332"/>
+                </a:xfrm>
+                <a:prstGeom prst="rect">
+                  <a:avLst/>
+                </a:prstGeom>
+                <a:noFill/>
+              </p:spPr>
+              <p:txBody>
+                <a:bodyPr wrap="square">
+                  <a:spAutoFit/>
+                </a:bodyPr>
+                <a:lstStyle/>
+                <a:p>
+                  <a:pPr algn="ctr"/>
+                  <a:r>
+                    <a:rPr lang="zh-CN" altLang="en-US" dirty="0">
+                      <a:latin typeface="Times New Roman" panose="02020603050405020304" pitchFamily="18" charset="0"/>
+                      <a:ea typeface="宋体" panose="02010600030101010101" pitchFamily="2" charset="-122"/>
+                    </a:rPr>
+                    <a:t>构建仿真器</a:t>
+                  </a:r>
+                  <a:r>
+                    <a:rPr lang="en-US" altLang="zh-CN" dirty="0">
+                      <a:latin typeface="Times New Roman" panose="02020603050405020304" pitchFamily="18" charset="0"/>
+                      <a:ea typeface="宋体" panose="02010600030101010101" pitchFamily="2" charset="-122"/>
+                    </a:rPr>
+                    <a:t>/</a:t>
+                  </a:r>
+                  <a:r>
+                    <a:rPr lang="zh-CN" altLang="en-US" dirty="0">
+                      <a:latin typeface="Times New Roman" panose="02020603050405020304" pitchFamily="18" charset="0"/>
+                      <a:ea typeface="宋体" panose="02010600030101010101" pitchFamily="2" charset="-122"/>
+                    </a:rPr>
+                    <a:t>代理模型</a:t>
+                  </a:r>
+                  <a:endParaRPr lang="zh-CN" altLang="en-US" dirty="0"/>
+                </a:p>
+              </p:txBody>
+            </p:sp>
+          </p:grpSp>
+          <p:cxnSp>
+            <p:nvCxnSpPr>
+              <p:cNvPr id="25" name="直接箭头连接符 24">
+                <a:extLst>
+                  <a:ext uri="{FF2B5EF4-FFF2-40B4-BE49-F238E27FC236}">
+                    <a16:creationId xmlns:a16="http://schemas.microsoft.com/office/drawing/2014/main" id="{9F7B95EB-D121-D79F-DF3F-902B098938E6}"/>
+                  </a:ext>
+                </a:extLst>
+              </p:cNvPr>
+              <p:cNvCxnSpPr>
+                <a:stCxn id="6" idx="3"/>
+                <a:endCxn id="16" idx="1"/>
+              </p:cNvCxnSpPr>
+              <p:nvPr/>
+            </p:nvCxnSpPr>
+            <p:spPr>
+              <a:xfrm>
+                <a:off x="2183082" y="3165536"/>
+                <a:ext cx="1386973" cy="0"/>
+              </a:xfrm>
+              <a:prstGeom prst="straightConnector1">
+                <a:avLst/>
+              </a:prstGeom>
+              <a:ln w="19050">
+                <a:solidFill>
+                  <a:schemeClr val="tx1"/>
+                </a:solidFill>
+                <a:tailEnd type="triangle"/>
+              </a:ln>
+            </p:spPr>
+            <p:style>
+              <a:lnRef idx="1">
+                <a:schemeClr val="accent1"/>
+              </a:lnRef>
+              <a:fillRef idx="0">
+                <a:schemeClr val="accent1"/>
+              </a:fillRef>
+              <a:effectRef idx="0">
+                <a:schemeClr val="accent1"/>
+              </a:effectRef>
+              <a:fontRef idx="minor">
+                <a:schemeClr val="tx1"/>
+              </a:fontRef>
+            </p:style>
+          </p:cxnSp>
+          <p:grpSp>
+            <p:nvGrpSpPr>
+              <p:cNvPr id="63" name="组合 62">
+                <a:extLst>
+                  <a:ext uri="{FF2B5EF4-FFF2-40B4-BE49-F238E27FC236}">
+                    <a16:creationId xmlns:a16="http://schemas.microsoft.com/office/drawing/2014/main" id="{7DF1E761-F1B7-B91F-CDE6-A0CF5F261FFD}"/>
+                  </a:ext>
+                </a:extLst>
+              </p:cNvPr>
+              <p:cNvGrpSpPr/>
+              <p:nvPr/>
+            </p:nvGrpSpPr>
+            <p:grpSpPr>
+              <a:xfrm>
+                <a:off x="6136196" y="2932394"/>
+                <a:ext cx="2360992" cy="1161091"/>
+                <a:chOff x="6426171" y="5318912"/>
+                <a:chExt cx="2360992" cy="1161091"/>
+              </a:xfrm>
+            </p:grpSpPr>
+            <p:grpSp>
+              <p:nvGrpSpPr>
+                <p:cNvPr id="42" name="组合 41">
+                  <a:extLst>
+                    <a:ext uri="{FF2B5EF4-FFF2-40B4-BE49-F238E27FC236}">
+                      <a16:creationId xmlns:a16="http://schemas.microsoft.com/office/drawing/2014/main" id="{F39DF3CC-9234-C04F-5D1B-85EE7B0C11F1}"/>
+                    </a:ext>
+                  </a:extLst>
+                </p:cNvPr>
+                <p:cNvGrpSpPr/>
+                <p:nvPr/>
+              </p:nvGrpSpPr>
+              <p:grpSpPr>
+                <a:xfrm>
+                  <a:off x="6634935" y="5318912"/>
+                  <a:ext cx="1943465" cy="466284"/>
+                  <a:chOff x="6716842" y="5318912"/>
+                  <a:chExt cx="1943465" cy="466284"/>
+                </a:xfrm>
+              </p:grpSpPr>
+              <p:sp>
+                <p:nvSpPr>
+                  <p:cNvPr id="34" name="矩形 33">
+                    <a:extLst>
+                      <a:ext uri="{FF2B5EF4-FFF2-40B4-BE49-F238E27FC236}">
+                        <a16:creationId xmlns:a16="http://schemas.microsoft.com/office/drawing/2014/main" id="{8FACE45B-5BCB-B19B-56F9-306A419FEE89}"/>
+                      </a:ext>
+                    </a:extLst>
+                  </p:cNvPr>
+                  <p:cNvSpPr/>
+                  <p:nvPr/>
+                </p:nvSpPr>
+                <p:spPr>
+                  <a:xfrm>
+                    <a:off x="6716842" y="5318912"/>
+                    <a:ext cx="1943465" cy="466284"/>
+                  </a:xfrm>
+                  <a:prstGeom prst="rect">
+                    <a:avLst/>
+                  </a:prstGeom>
+                  <a:solidFill>
+                    <a:srgbClr val="FFFADC"/>
+                  </a:solidFill>
+                  <a:ln w="19050">
+                    <a:solidFill>
+                      <a:schemeClr val="tx1"/>
+                    </a:solidFill>
+                  </a:ln>
+                </p:spPr>
+                <p:style>
+                  <a:lnRef idx="2">
+                    <a:schemeClr val="accent1">
+                      <a:shade val="15000"/>
+                    </a:schemeClr>
+                  </a:lnRef>
+                  <a:fillRef idx="1">
+                    <a:schemeClr val="accent1"/>
+                  </a:fillRef>
+                  <a:effectRef idx="0">
+                    <a:schemeClr val="accent1"/>
+                  </a:effectRef>
+                  <a:fontRef idx="minor">
+                    <a:schemeClr val="lt1"/>
+                  </a:fontRef>
+                </p:style>
+                <p:txBody>
+                  <a:bodyPr rtlCol="0" anchor="ctr"/>
+                  <a:lstStyle/>
+                  <a:p>
+                    <a:pPr algn="ctr"/>
+                    <a:endParaRPr lang="zh-CN" altLang="en-US">
+                      <a:solidFill>
+                        <a:schemeClr val="tx1"/>
+                      </a:solidFill>
+                      <a:latin typeface="Times New Roman" panose="02020603050405020304" pitchFamily="18" charset="0"/>
+                      <a:ea typeface="宋体" panose="02010600030101010101" pitchFamily="2" charset="-122"/>
+                    </a:endParaRPr>
+                  </a:p>
+                </p:txBody>
+              </p:sp>
+              <mc:AlternateContent xmlns:mc="http://schemas.openxmlformats.org/markup-compatibility/2006">
+                <mc:Choice xmlns:a14="http://schemas.microsoft.com/office/drawing/2010/main" Requires="a14">
+                  <p:sp>
+                    <p:nvSpPr>
+                      <p:cNvPr id="36" name="文本框 35">
+                        <a:extLst>
+                          <a:ext uri="{FF2B5EF4-FFF2-40B4-BE49-F238E27FC236}">
+                            <a16:creationId xmlns:a16="http://schemas.microsoft.com/office/drawing/2014/main" id="{81485C5B-40F4-AB5A-CE78-1E4CDA94A837}"/>
+                          </a:ext>
+                        </a:extLst>
+                      </p:cNvPr>
+                      <p:cNvSpPr txBox="1"/>
+                      <p:nvPr/>
+                    </p:nvSpPr>
+                    <p:spPr>
+                      <a:xfrm>
+                        <a:off x="6816450" y="5367388"/>
+                        <a:ext cx="1744248" cy="369332"/>
+                      </a:xfrm>
+                      <a:prstGeom prst="rect">
+                        <a:avLst/>
+                      </a:prstGeom>
+                      <a:noFill/>
+                    </p:spPr>
+                    <p:txBody>
+                      <a:bodyPr wrap="square" rtlCol="0">
+                        <a:spAutoFit/>
+                      </a:bodyPr>
+                      <a:lstStyle/>
+                      <a:p>
+                        <a:pPr algn="ctr"/>
+                        <a14:m>
+                          <m:oMath xmlns:m="http://schemas.openxmlformats.org/officeDocument/2006/math">
+                            <m:r>
+                              <m:rPr>
+                                <m:sty m:val="p"/>
+                              </m:rPr>
+                              <a:rPr lang="en-US" altLang="zh-CN" smtClean="0">
+                                <a:latin typeface="Cambria Math" panose="02040503050406030204" pitchFamily="18" charset="0"/>
+                              </a:rPr>
+                              <m:t>y</m:t>
+                            </m:r>
+                            <m:r>
+                              <a:rPr lang="zh-CN" altLang="en-US" i="1">
+                                <a:latin typeface="Cambria Math" panose="02040503050406030204" pitchFamily="18" charset="0"/>
+                              </a:rPr>
+                              <m:t>、</m:t>
+                            </m:r>
+                            <m:acc>
+                              <m:accPr>
+                                <m:chr m:val="̃"/>
+                                <m:ctrlPr>
+                                  <a:rPr lang="en-US" altLang="zh-CN" b="1" i="1">
+                                    <a:latin typeface="Cambria Math" panose="02040503050406030204" pitchFamily="18" charset="0"/>
+                                  </a:rPr>
+                                </m:ctrlPr>
+                              </m:accPr>
+                              <m:e>
+                                <m:r>
+                                  <a:rPr lang="en-US" altLang="zh-CN" b="1">
+                                    <a:latin typeface="Cambria Math" panose="02040503050406030204" pitchFamily="18" charset="0"/>
+                                  </a:rPr>
+                                  <m:t>𝐲</m:t>
+                                </m:r>
+                              </m:e>
+                            </m:acc>
+                            <m:r>
+                              <a:rPr lang="en-US" altLang="zh-CN" i="1">
+                                <a:latin typeface="Cambria Math" panose="02040503050406030204" pitchFamily="18" charset="0"/>
+                              </a:rPr>
+                              <m:t>=</m:t>
+                            </m:r>
+                          </m:oMath>
+                        </a14:m>
+                        <a:r>
+                          <a:rPr lang="en-US" altLang="zh-CN" dirty="0">
+                            <a:latin typeface="Times New Roman" panose="02020603050405020304" pitchFamily="18" charset="0"/>
+                            <a:ea typeface="宋体" panose="02010600030101010101" pitchFamily="2" charset="-122"/>
+                          </a:rPr>
+                          <a:t>norm </a:t>
+                        </a:r>
+                        <a14:m>
+                          <m:oMath xmlns:m="http://schemas.openxmlformats.org/officeDocument/2006/math">
+                            <m:r>
+                              <a:rPr lang="en-US" altLang="zh-CN" i="1">
+                                <a:latin typeface="Cambria Math" panose="02040503050406030204" pitchFamily="18" charset="0"/>
+                              </a:rPr>
+                              <m:t>(</m:t>
+                            </m:r>
+                            <m:r>
+                              <m:rPr>
+                                <m:sty m:val="p"/>
+                              </m:rPr>
+                              <a:rPr lang="en-US" altLang="zh-CN" b="0" i="1">
+                                <a:latin typeface="Cambria Math" panose="02040503050406030204" pitchFamily="18" charset="0"/>
+                              </a:rPr>
+                              <m:t>y</m:t>
+                            </m:r>
+                            <m:r>
+                              <a:rPr lang="en-US" altLang="zh-CN" i="1">
+                                <a:latin typeface="Cambria Math" panose="02040503050406030204" pitchFamily="18" charset="0"/>
+                              </a:rPr>
+                              <m:t>)</m:t>
+                            </m:r>
+                          </m:oMath>
+                        </a14:m>
+                        <a:r>
+                          <a:rPr lang="en-US" altLang="zh-CN" dirty="0">
+                            <a:latin typeface="Times New Roman" panose="02020603050405020304" pitchFamily="18" charset="0"/>
+                            <a:ea typeface="宋体" panose="02010600030101010101" pitchFamily="2" charset="-122"/>
+                          </a:rPr>
+                          <a:t> </a:t>
+                        </a:r>
+                        <a:endParaRPr lang="en-US" altLang="zh-CN" dirty="0">
                           <a:solidFill>
                             <a:schemeClr val="tx1"/>
                           </a:solidFill>
-                          <a:latin typeface="Cambria Math" panose="02040503050406030204" pitchFamily="18" charset="0"/>
-                        </a:rPr>
-                        <m:t>)</m:t>
-                      </m:r>
-                    </m:oMath>
-                  </a14:m>
-                  <a:endParaRPr lang="zh-CN" altLang="en-US" dirty="0">
+                          <a:latin typeface="Times New Roman" panose="02020603050405020304" pitchFamily="18" charset="0"/>
+                          <a:ea typeface="宋体" panose="02010600030101010101" pitchFamily="2" charset="-122"/>
+                        </a:endParaRPr>
+                      </a:p>
+                    </p:txBody>
+                  </p:sp>
+                </mc:Choice>
+                <mc:Fallback>
+                  <p:sp>
+                    <p:nvSpPr>
+                      <p:cNvPr id="36" name="文本框 35">
+                        <a:extLst>
+                          <a:ext uri="{FF2B5EF4-FFF2-40B4-BE49-F238E27FC236}">
+                            <a16:creationId xmlns:a16="http://schemas.microsoft.com/office/drawing/2014/main" id="{81485C5B-40F4-AB5A-CE78-1E4CDA94A837}"/>
+                          </a:ext>
+                        </a:extLst>
+                      </p:cNvPr>
+                      <p:cNvSpPr txBox="1">
+                        <a:spLocks noRot="1" noChangeAspect="1" noMove="1" noResize="1" noEditPoints="1" noAdjustHandles="1" noChangeArrowheads="1" noChangeShapeType="1" noTextEdit="1"/>
+                      </p:cNvSpPr>
+                      <p:nvPr/>
+                    </p:nvSpPr>
+                    <p:spPr>
+                      <a:xfrm>
+                        <a:off x="6816450" y="5367388"/>
+                        <a:ext cx="1744248" cy="369332"/>
+                      </a:xfrm>
+                      <a:prstGeom prst="rect">
+                        <a:avLst/>
+                      </a:prstGeom>
+                      <a:blipFill>
+                        <a:blip r:embed="rId7"/>
+                        <a:stretch>
+                          <a:fillRect t="-8197" r="-1045" b="-24590"/>
+                        </a:stretch>
+                      </a:blipFill>
+                    </p:spPr>
+                    <p:txBody>
+                      <a:bodyPr/>
+                      <a:lstStyle/>
+                      <a:p>
+                        <a:r>
+                          <a:rPr lang="zh-CN" altLang="en-US">
+                            <a:noFill/>
+                          </a:rPr>
+                          <a:t> </a:t>
+                        </a:r>
+                      </a:p>
+                    </p:txBody>
+                  </p:sp>
+                </mc:Fallback>
+              </mc:AlternateContent>
+            </p:grpSp>
+            <p:sp>
+              <p:nvSpPr>
+                <p:cNvPr id="31" name="文本框 30">
+                  <a:extLst>
+                    <a:ext uri="{FF2B5EF4-FFF2-40B4-BE49-F238E27FC236}">
+                      <a16:creationId xmlns:a16="http://schemas.microsoft.com/office/drawing/2014/main" id="{8E1A169C-AA49-AB5C-C60E-B11F7E6B3A82}"/>
+                    </a:ext>
+                  </a:extLst>
+                </p:cNvPr>
+                <p:cNvSpPr txBox="1"/>
+                <p:nvPr/>
+              </p:nvSpPr>
+              <p:spPr>
+                <a:xfrm>
+                  <a:off x="6426171" y="5833672"/>
+                  <a:ext cx="2360992" cy="646331"/>
+                </a:xfrm>
+                <a:prstGeom prst="rect">
+                  <a:avLst/>
+                </a:prstGeom>
+                <a:noFill/>
+              </p:spPr>
+              <p:txBody>
+                <a:bodyPr wrap="square">
+                  <a:spAutoFit/>
+                </a:bodyPr>
+                <a:lstStyle/>
+                <a:p>
+                  <a:pPr algn="ctr"/>
+                  <a:r>
+                    <a:rPr lang="zh-CN" altLang="en-US" dirty="0">
+                      <a:latin typeface="Times New Roman" panose="02020603050405020304" pitchFamily="18" charset="0"/>
+                      <a:ea typeface="宋体" panose="02010600030101010101" pitchFamily="2" charset="-122"/>
+                    </a:rPr>
+                    <a:t>设计性能指标</a:t>
+                  </a:r>
+                  <a:endParaRPr lang="en-US" altLang="zh-CN" dirty="0">
+                    <a:latin typeface="Times New Roman" panose="02020603050405020304" pitchFamily="18" charset="0"/>
+                    <a:ea typeface="宋体" panose="02010600030101010101" pitchFamily="2" charset="-122"/>
+                  </a:endParaRPr>
+                </a:p>
+                <a:p>
+                  <a:pPr algn="ctr"/>
+                  <a:r>
+                    <a:rPr lang="zh-CN" altLang="en-US" dirty="0">
+                      <a:latin typeface="Times New Roman" panose="02020603050405020304" pitchFamily="18" charset="0"/>
+                      <a:ea typeface="宋体" panose="02010600030101010101" pitchFamily="2" charset="-122"/>
+                    </a:rPr>
+                    <a:t>以及指标归一化 </a:t>
+                  </a:r>
+                  <a:endParaRPr lang="zh-CN" altLang="en-US" dirty="0"/>
+                </a:p>
+              </p:txBody>
+            </p:sp>
+          </p:grpSp>
+          <p:cxnSp>
+            <p:nvCxnSpPr>
+              <p:cNvPr id="41" name="直接箭头连接符 40">
+                <a:extLst>
+                  <a:ext uri="{FF2B5EF4-FFF2-40B4-BE49-F238E27FC236}">
+                    <a16:creationId xmlns:a16="http://schemas.microsoft.com/office/drawing/2014/main" id="{837C8036-66EB-1792-A2BD-1DAECC2B42F4}"/>
+                  </a:ext>
+                </a:extLst>
+              </p:cNvPr>
+              <p:cNvCxnSpPr>
+                <a:stCxn id="16" idx="3"/>
+                <a:endCxn id="34" idx="1"/>
+              </p:cNvCxnSpPr>
+              <p:nvPr/>
+            </p:nvCxnSpPr>
+            <p:spPr>
+              <a:xfrm>
+                <a:off x="5259066" y="3165536"/>
+                <a:ext cx="1085894" cy="0"/>
+              </a:xfrm>
+              <a:prstGeom prst="straightConnector1">
+                <a:avLst/>
+              </a:prstGeom>
+              <a:ln w="19050">
+                <a:solidFill>
+                  <a:schemeClr val="tx1"/>
+                </a:solidFill>
+                <a:tailEnd type="triangle"/>
+              </a:ln>
+            </p:spPr>
+            <p:style>
+              <a:lnRef idx="1">
+                <a:schemeClr val="accent1"/>
+              </a:lnRef>
+              <a:fillRef idx="0">
+                <a:schemeClr val="accent1"/>
+              </a:fillRef>
+              <a:effectRef idx="0">
+                <a:schemeClr val="accent1"/>
+              </a:effectRef>
+              <a:fontRef idx="minor">
+                <a:schemeClr val="tx1"/>
+              </a:fontRef>
+            </p:style>
+          </p:cxnSp>
+          <p:grpSp>
+            <p:nvGrpSpPr>
+              <p:cNvPr id="64" name="组合 63">
+                <a:extLst>
+                  <a:ext uri="{FF2B5EF4-FFF2-40B4-BE49-F238E27FC236}">
+                    <a16:creationId xmlns:a16="http://schemas.microsoft.com/office/drawing/2014/main" id="{4525309C-85C7-1D7D-2F28-284293E95212}"/>
+                  </a:ext>
+                </a:extLst>
+              </p:cNvPr>
+              <p:cNvGrpSpPr/>
+              <p:nvPr/>
+            </p:nvGrpSpPr>
+            <p:grpSpPr>
+              <a:xfrm>
+                <a:off x="9198348" y="2932394"/>
+                <a:ext cx="2360992" cy="884092"/>
+                <a:chOff x="9198348" y="5318912"/>
+                <a:chExt cx="2360992" cy="884092"/>
+              </a:xfrm>
+            </p:grpSpPr>
+            <p:grpSp>
+              <p:nvGrpSpPr>
+                <p:cNvPr id="62" name="组合 61">
+                  <a:extLst>
+                    <a:ext uri="{FF2B5EF4-FFF2-40B4-BE49-F238E27FC236}">
+                      <a16:creationId xmlns:a16="http://schemas.microsoft.com/office/drawing/2014/main" id="{2ACD958B-6682-F33E-0880-4D437DE9CDA2}"/>
+                    </a:ext>
+                  </a:extLst>
+                </p:cNvPr>
+                <p:cNvGrpSpPr/>
+                <p:nvPr/>
+              </p:nvGrpSpPr>
+              <p:grpSpPr>
+                <a:xfrm>
+                  <a:off x="9407112" y="5318912"/>
+                  <a:ext cx="1943465" cy="466284"/>
+                  <a:chOff x="9407112" y="5318912"/>
+                  <a:chExt cx="1943465" cy="466284"/>
+                </a:xfrm>
+              </p:grpSpPr>
+              <p:sp>
+                <p:nvSpPr>
+                  <p:cNvPr id="50" name="矩形 49">
+                    <a:extLst>
+                      <a:ext uri="{FF2B5EF4-FFF2-40B4-BE49-F238E27FC236}">
+                        <a16:creationId xmlns:a16="http://schemas.microsoft.com/office/drawing/2014/main" id="{E4F6C566-F3CC-DC9C-334B-6A3F8F29D2DD}"/>
+                      </a:ext>
+                    </a:extLst>
+                  </p:cNvPr>
+                  <p:cNvSpPr/>
+                  <p:nvPr/>
+                </p:nvSpPr>
+                <p:spPr>
+                  <a:xfrm>
+                    <a:off x="9407112" y="5318912"/>
+                    <a:ext cx="1943465" cy="466284"/>
+                  </a:xfrm>
+                  <a:prstGeom prst="rect">
+                    <a:avLst/>
+                  </a:prstGeom>
+                  <a:solidFill>
+                    <a:srgbClr val="FFEBDC"/>
+                  </a:solidFill>
+                  <a:ln w="19050">
+                    <a:solidFill>
+                      <a:schemeClr val="tx1"/>
+                    </a:solidFill>
+                  </a:ln>
+                </p:spPr>
+                <p:style>
+                  <a:lnRef idx="2">
+                    <a:schemeClr val="accent1">
+                      <a:shade val="15000"/>
+                    </a:schemeClr>
+                  </a:lnRef>
+                  <a:fillRef idx="1">
+                    <a:schemeClr val="accent1"/>
+                  </a:fillRef>
+                  <a:effectRef idx="0">
+                    <a:schemeClr val="accent1"/>
+                  </a:effectRef>
+                  <a:fontRef idx="minor">
+                    <a:schemeClr val="lt1"/>
+                  </a:fontRef>
+                </p:style>
+                <p:txBody>
+                  <a:bodyPr rtlCol="0" anchor="ctr"/>
+                  <a:lstStyle/>
+                  <a:p>
+                    <a:pPr algn="ctr"/>
+                    <a:endParaRPr lang="zh-CN" altLang="en-US">
+                      <a:solidFill>
+                        <a:schemeClr val="tx1"/>
+                      </a:solidFill>
+                      <a:latin typeface="Times New Roman" panose="02020603050405020304" pitchFamily="18" charset="0"/>
+                      <a:ea typeface="宋体" panose="02010600030101010101" pitchFamily="2" charset="-122"/>
+                    </a:endParaRPr>
+                  </a:p>
+                </p:txBody>
+              </p:sp>
+              <mc:AlternateContent xmlns:mc="http://schemas.openxmlformats.org/markup-compatibility/2006">
+                <mc:Choice xmlns:a14="http://schemas.microsoft.com/office/drawing/2010/main" Requires="a14">
+                  <p:sp>
+                    <p:nvSpPr>
+                      <p:cNvPr id="51" name="文本框 50">
+                        <a:extLst>
+                          <a:ext uri="{FF2B5EF4-FFF2-40B4-BE49-F238E27FC236}">
+                            <a16:creationId xmlns:a16="http://schemas.microsoft.com/office/drawing/2014/main" id="{E52100FB-1639-5362-6C95-3E61B3F0770E}"/>
+                          </a:ext>
+                        </a:extLst>
+                      </p:cNvPr>
+                      <p:cNvSpPr txBox="1"/>
+                      <p:nvPr/>
+                    </p:nvSpPr>
+                    <p:spPr>
+                      <a:xfrm>
+                        <a:off x="9815598" y="5367388"/>
+                        <a:ext cx="1126492" cy="369332"/>
+                      </a:xfrm>
+                      <a:prstGeom prst="rect">
+                        <a:avLst/>
+                      </a:prstGeom>
+                      <a:noFill/>
+                    </p:spPr>
+                    <p:txBody>
+                      <a:bodyPr wrap="square" rtlCol="0">
+                        <a:spAutoFit/>
+                      </a:bodyPr>
+                      <a:lstStyle/>
+                      <a:p>
+                        <a:pPr algn="ctr"/>
+                        <a14:m>
+                          <m:oMathPara xmlns:m="http://schemas.openxmlformats.org/officeDocument/2006/math">
+                            <m:oMathParaPr>
+                              <m:jc m:val="center"/>
+                            </m:oMathParaPr>
+                            <m:oMath xmlns:m="http://schemas.openxmlformats.org/officeDocument/2006/math">
+                              <m:r>
+                                <m:rPr>
+                                  <m:nor/>
+                                </m:rPr>
+                                <a:rPr lang="en-US" altLang="zh-CN" i="1" dirty="0">
+                                  <a:latin typeface="Times New Roman" panose="02020603050405020304" pitchFamily="18" charset="0"/>
+                                  <a:ea typeface="宋体" panose="02010600030101010101" pitchFamily="2" charset="-122"/>
+                                </a:rPr>
+                                <m:t>U</m:t>
+                              </m:r>
+                              <m:r>
+                                <a:rPr lang="en-US" altLang="zh-CN" i="1">
+                                  <a:latin typeface="Cambria Math" panose="02040503050406030204" pitchFamily="18" charset="0"/>
+                                </a:rPr>
+                                <m:t>(∙)</m:t>
+                              </m:r>
+                            </m:oMath>
+                          </m:oMathPara>
+                        </a14:m>
+                        <a:endParaRPr lang="en-US" altLang="zh-CN" dirty="0">
+                          <a:solidFill>
+                            <a:schemeClr val="tx1"/>
+                          </a:solidFill>
+                          <a:latin typeface="Times New Roman" panose="02020603050405020304" pitchFamily="18" charset="0"/>
+                          <a:ea typeface="宋体" panose="02010600030101010101" pitchFamily="2" charset="-122"/>
+                        </a:endParaRPr>
+                      </a:p>
+                    </p:txBody>
+                  </p:sp>
+                </mc:Choice>
+                <mc:Fallback>
+                  <p:sp>
+                    <p:nvSpPr>
+                      <p:cNvPr id="51" name="文本框 50">
+                        <a:extLst>
+                          <a:ext uri="{FF2B5EF4-FFF2-40B4-BE49-F238E27FC236}">
+                            <a16:creationId xmlns:a16="http://schemas.microsoft.com/office/drawing/2014/main" id="{E52100FB-1639-5362-6C95-3E61B3F0770E}"/>
+                          </a:ext>
+                        </a:extLst>
+                      </p:cNvPr>
+                      <p:cNvSpPr txBox="1">
+                        <a:spLocks noRot="1" noChangeAspect="1" noMove="1" noResize="1" noEditPoints="1" noAdjustHandles="1" noChangeArrowheads="1" noChangeShapeType="1" noTextEdit="1"/>
+                      </p:cNvSpPr>
+                      <p:nvPr/>
+                    </p:nvSpPr>
+                    <p:spPr>
+                      <a:xfrm>
+                        <a:off x="9815598" y="5367388"/>
+                        <a:ext cx="1126492" cy="369332"/>
+                      </a:xfrm>
+                      <a:prstGeom prst="rect">
+                        <a:avLst/>
+                      </a:prstGeom>
+                      <a:blipFill>
+                        <a:blip r:embed="rId8"/>
+                        <a:stretch>
+                          <a:fillRect b="-14754"/>
+                        </a:stretch>
+                      </a:blipFill>
+                    </p:spPr>
+                    <p:txBody>
+                      <a:bodyPr/>
+                      <a:lstStyle/>
+                      <a:p>
+                        <a:r>
+                          <a:rPr lang="zh-CN" altLang="en-US">
+                            <a:noFill/>
+                          </a:rPr>
+                          <a:t> </a:t>
+                        </a:r>
+                      </a:p>
+                    </p:txBody>
+                  </p:sp>
+                </mc:Fallback>
+              </mc:AlternateContent>
+            </p:grpSp>
+            <p:sp>
+              <p:nvSpPr>
+                <p:cNvPr id="52" name="文本框 51">
+                  <a:extLst>
+                    <a:ext uri="{FF2B5EF4-FFF2-40B4-BE49-F238E27FC236}">
+                      <a16:creationId xmlns:a16="http://schemas.microsoft.com/office/drawing/2014/main" id="{4DD6E9A0-006B-82F9-F2A1-9AA50E31B200}"/>
+                    </a:ext>
+                  </a:extLst>
+                </p:cNvPr>
+                <p:cNvSpPr txBox="1"/>
+                <p:nvPr/>
+              </p:nvSpPr>
+              <p:spPr>
+                <a:xfrm>
+                  <a:off x="9198348" y="5833672"/>
+                  <a:ext cx="2360992" cy="369332"/>
+                </a:xfrm>
+                <a:prstGeom prst="rect">
+                  <a:avLst/>
+                </a:prstGeom>
+                <a:noFill/>
+              </p:spPr>
+              <p:txBody>
+                <a:bodyPr wrap="square">
+                  <a:spAutoFit/>
+                </a:bodyPr>
+                <a:lstStyle/>
+                <a:p>
+                  <a:pPr algn="ctr"/>
+                  <a:r>
+                    <a:rPr lang="zh-CN" altLang="en-US" dirty="0">
+                      <a:latin typeface="Times New Roman" panose="02020603050405020304" pitchFamily="18" charset="0"/>
+                      <a:ea typeface="宋体" panose="02010600030101010101" pitchFamily="2" charset="-122"/>
+                    </a:rPr>
+                    <a:t>设计综合效用函数</a:t>
+                  </a:r>
+                  <a:endParaRPr lang="zh-CN" altLang="en-US" dirty="0"/>
+                </a:p>
+              </p:txBody>
+            </p:sp>
+          </p:grpSp>
+          <p:cxnSp>
+            <p:nvCxnSpPr>
+              <p:cNvPr id="61" name="直接箭头连接符 60">
+                <a:extLst>
+                  <a:ext uri="{FF2B5EF4-FFF2-40B4-BE49-F238E27FC236}">
+                    <a16:creationId xmlns:a16="http://schemas.microsoft.com/office/drawing/2014/main" id="{06916E8A-7E3A-DE7E-B0FC-755B12CBB6DE}"/>
+                  </a:ext>
+                </a:extLst>
+              </p:cNvPr>
+              <p:cNvCxnSpPr>
+                <a:stCxn id="34" idx="3"/>
+                <a:endCxn id="50" idx="1"/>
+              </p:cNvCxnSpPr>
+              <p:nvPr/>
+            </p:nvCxnSpPr>
+            <p:spPr>
+              <a:xfrm>
+                <a:off x="8288425" y="3165536"/>
+                <a:ext cx="1118687" cy="0"/>
+              </a:xfrm>
+              <a:prstGeom prst="straightConnector1">
+                <a:avLst/>
+              </a:prstGeom>
+              <a:ln w="19050">
+                <a:solidFill>
+                  <a:schemeClr val="tx1"/>
+                </a:solidFill>
+                <a:tailEnd type="triangle"/>
+              </a:ln>
+            </p:spPr>
+            <p:style>
+              <a:lnRef idx="1">
+                <a:schemeClr val="accent1"/>
+              </a:lnRef>
+              <a:fillRef idx="0">
+                <a:schemeClr val="accent1"/>
+              </a:fillRef>
+              <a:effectRef idx="0">
+                <a:schemeClr val="accent1"/>
+              </a:effectRef>
+              <a:fontRef idx="minor">
+                <a:schemeClr val="tx1"/>
+              </a:fontRef>
+            </p:style>
+          </p:cxnSp>
+        </p:grpSp>
+        <p:grpSp>
+          <p:nvGrpSpPr>
+            <p:cNvPr id="74" name="组合 73">
+              <a:extLst>
+                <a:ext uri="{FF2B5EF4-FFF2-40B4-BE49-F238E27FC236}">
+                  <a16:creationId xmlns:a16="http://schemas.microsoft.com/office/drawing/2014/main" id="{B3BE2BE5-C467-31EE-07C1-61D5A7478806}"/>
+                </a:ext>
+              </a:extLst>
+            </p:cNvPr>
+            <p:cNvGrpSpPr/>
+            <p:nvPr/>
+          </p:nvGrpSpPr>
+          <p:grpSpPr>
+            <a:xfrm>
+              <a:off x="4031668" y="4131185"/>
+              <a:ext cx="3800273" cy="1195615"/>
+              <a:chOff x="3821866" y="4557905"/>
+              <a:chExt cx="3800273" cy="1195615"/>
+            </a:xfrm>
+          </p:grpSpPr>
+          <p:grpSp>
+            <p:nvGrpSpPr>
+              <p:cNvPr id="47" name="组合 46">
+                <a:extLst>
+                  <a:ext uri="{FF2B5EF4-FFF2-40B4-BE49-F238E27FC236}">
+                    <a16:creationId xmlns:a16="http://schemas.microsoft.com/office/drawing/2014/main" id="{A201CC16-C720-5420-96AF-3C326BF9F98E}"/>
+                  </a:ext>
+                </a:extLst>
+              </p:cNvPr>
+              <p:cNvGrpSpPr/>
+              <p:nvPr/>
+            </p:nvGrpSpPr>
+            <p:grpSpPr>
+              <a:xfrm>
+                <a:off x="4102003" y="4557905"/>
+                <a:ext cx="3240000" cy="720000"/>
+                <a:chOff x="3159266" y="5077734"/>
+                <a:chExt cx="3240000" cy="720000"/>
+              </a:xfrm>
+            </p:grpSpPr>
+            <p:sp>
+              <p:nvSpPr>
+                <p:cNvPr id="33" name="矩形 32">
+                  <a:extLst>
+                    <a:ext uri="{FF2B5EF4-FFF2-40B4-BE49-F238E27FC236}">
+                      <a16:creationId xmlns:a16="http://schemas.microsoft.com/office/drawing/2014/main" id="{B7ADD4A7-EF14-8945-045C-BC38ACEC7E8B}"/>
+                    </a:ext>
+                  </a:extLst>
+                </p:cNvPr>
+                <p:cNvSpPr/>
+                <p:nvPr/>
+              </p:nvSpPr>
+              <p:spPr>
+                <a:xfrm>
+                  <a:off x="3159266" y="5077734"/>
+                  <a:ext cx="3240000" cy="720000"/>
+                </a:xfrm>
+                <a:prstGeom prst="rect">
+                  <a:avLst/>
+                </a:prstGeom>
+                <a:solidFill>
+                  <a:srgbClr val="4682B4"/>
+                </a:solidFill>
+                <a:ln w="19050">
+                  <a:solidFill>
+                    <a:schemeClr val="tx1"/>
+                  </a:solidFill>
+                </a:ln>
+              </p:spPr>
+              <p:style>
+                <a:lnRef idx="2">
+                  <a:schemeClr val="accent1">
+                    <a:shade val="15000"/>
+                  </a:schemeClr>
+                </a:lnRef>
+                <a:fillRef idx="1">
+                  <a:schemeClr val="accent1"/>
+                </a:fillRef>
+                <a:effectRef idx="0">
+                  <a:schemeClr val="accent1"/>
+                </a:effectRef>
+                <a:fontRef idx="minor">
+                  <a:schemeClr val="lt1"/>
+                </a:fontRef>
+              </p:style>
+              <p:txBody>
+                <a:bodyPr rtlCol="0" anchor="ctr"/>
+                <a:lstStyle/>
+                <a:p>
+                  <a:pPr algn="ctr"/>
+                  <a:endParaRPr lang="zh-CN" altLang="en-US">
                     <a:solidFill>
                       <a:schemeClr val="tx1"/>
                     </a:solidFill>
@@ -7629,139 +7744,497 @@
                 </a:p>
               </p:txBody>
             </p:sp>
-          </mc:Choice>
-          <mc:Fallback xmlns="">
-            <p:sp>
-              <p:nvSpPr>
-                <p:cNvPr id="37" name="文本框 36">
-                  <a:extLst>
-                    <a:ext uri="{FF2B5EF4-FFF2-40B4-BE49-F238E27FC236}">
-                      <a16:creationId xmlns:a16="http://schemas.microsoft.com/office/drawing/2014/main" id="{6DF2FA46-B853-7F4A-1A2D-557B4CD80A70}"/>
-                    </a:ext>
-                  </a:extLst>
-                </p:cNvPr>
-                <p:cNvSpPr txBox="1">
-                  <a:spLocks noRot="1" noChangeAspect="1" noMove="1" noResize="1" noEditPoints="1" noAdjustHandles="1" noChangeArrowheads="1" noChangeShapeType="1" noTextEdit="1"/>
-                </p:cNvSpPr>
-                <p:nvPr/>
-              </p:nvSpPr>
-              <p:spPr>
-                <a:xfrm>
-                  <a:off x="4771839" y="3245242"/>
-                  <a:ext cx="759226" cy="369332"/>
-                </a:xfrm>
-                <a:prstGeom prst="rect">
-                  <a:avLst/>
-                </a:prstGeom>
-                <a:blipFill>
-                  <a:blip r:embed="rId8"/>
-                  <a:stretch>
-                    <a:fillRect l="-6400" t="-8197" r="-7200" b="-24590"/>
-                  </a:stretch>
-                </a:blipFill>
-              </p:spPr>
-              <p:txBody>
-                <a:bodyPr/>
-                <a:lstStyle/>
-                <a:p>
-                  <a:r>
-                    <a:rPr lang="zh-CN" altLang="en-US">
-                      <a:noFill/>
-                    </a:rPr>
-                    <a:t> </a:t>
-                  </a:r>
-                </a:p>
-              </p:txBody>
-            </p:sp>
-          </mc:Fallback>
-        </mc:AlternateContent>
-        <p:sp>
-          <p:nvSpPr>
-            <p:cNvPr id="38" name="文本框 37">
-              <a:extLst>
-                <a:ext uri="{FF2B5EF4-FFF2-40B4-BE49-F238E27FC236}">
-                  <a16:creationId xmlns:a16="http://schemas.microsoft.com/office/drawing/2014/main" id="{06FDA3E6-CE51-B14C-6E88-BEF200FFB254}"/>
-                </a:ext>
-              </a:extLst>
-            </p:cNvPr>
-            <p:cNvSpPr txBox="1"/>
-            <p:nvPr/>
-          </p:nvSpPr>
-          <p:spPr>
-            <a:xfrm>
-              <a:off x="4771839" y="1940577"/>
-              <a:ext cx="962840" cy="369332"/>
-            </a:xfrm>
-            <a:prstGeom prst="rect">
-              <a:avLst/>
-            </a:prstGeom>
-            <a:noFill/>
-          </p:spPr>
-          <p:txBody>
-            <a:bodyPr wrap="square" rtlCol="0">
-              <a:spAutoFit/>
-            </a:bodyPr>
-            <a:lstStyle/>
-            <a:p>
-              <a:r>
-                <a:rPr lang="zh-CN" altLang="en-US" dirty="0">
-                  <a:latin typeface="Times New Roman" panose="02020603050405020304" pitchFamily="18" charset="0"/>
-                  <a:ea typeface="宋体" panose="02010600030101010101" pitchFamily="2" charset="-122"/>
-                </a:rPr>
-                <a:t>输出</a:t>
-              </a:r>
-            </a:p>
-          </p:txBody>
-        </p:sp>
-        <p:sp>
-          <p:nvSpPr>
-            <p:cNvPr id="40" name="文本框 39">
-              <a:extLst>
-                <a:ext uri="{FF2B5EF4-FFF2-40B4-BE49-F238E27FC236}">
-                  <a16:creationId xmlns:a16="http://schemas.microsoft.com/office/drawing/2014/main" id="{D59FF324-B7C5-7C5D-BA2F-1A461F8CB89B}"/>
-                </a:ext>
-              </a:extLst>
-            </p:cNvPr>
-            <p:cNvSpPr txBox="1"/>
-            <p:nvPr/>
-          </p:nvSpPr>
-          <p:spPr>
-            <a:xfrm>
-              <a:off x="4771839" y="4298317"/>
-              <a:ext cx="1083949" cy="369332"/>
-            </a:xfrm>
-            <a:prstGeom prst="rect">
-              <a:avLst/>
-            </a:prstGeom>
-            <a:noFill/>
-          </p:spPr>
-          <p:txBody>
-            <a:bodyPr wrap="square" rtlCol="0">
-              <a:spAutoFit/>
-            </a:bodyPr>
-            <a:lstStyle/>
-            <a:p>
-              <a:r>
-                <a:rPr lang="en-US" altLang="zh-CN" dirty="0" err="1">
-                  <a:latin typeface="Times New Roman" panose="02020603050405020304" pitchFamily="18" charset="0"/>
-                  <a:ea typeface="宋体" panose="02010600030101010101" pitchFamily="2" charset="-122"/>
-                </a:rPr>
-                <a:t>arg</a:t>
-              </a:r>
-              <a:r>
-                <a:rPr lang="en-US" altLang="zh-CN" dirty="0">
-                  <a:latin typeface="Times New Roman" panose="02020603050405020304" pitchFamily="18" charset="0"/>
-                  <a:ea typeface="宋体" panose="02010600030101010101" pitchFamily="2" charset="-122"/>
-                </a:rPr>
-                <a:t> max</a:t>
-              </a:r>
-              <a:endParaRPr lang="zh-CN" altLang="en-US" dirty="0">
-                <a:latin typeface="Times New Roman" panose="02020603050405020304" pitchFamily="18" charset="0"/>
-                <a:ea typeface="宋体" panose="02010600030101010101" pitchFamily="2" charset="-122"/>
-              </a:endParaRPr>
-            </a:p>
-          </p:txBody>
-        </p:sp>
+            <mc:AlternateContent xmlns:mc="http://schemas.openxmlformats.org/markup-compatibility/2006">
+              <mc:Choice xmlns:a14="http://schemas.microsoft.com/office/drawing/2010/main" Requires="a14">
+                <p:sp>
+                  <p:nvSpPr>
+                    <p:cNvPr id="32" name="文本框 31">
+                      <a:extLst>
+                        <a:ext uri="{FF2B5EF4-FFF2-40B4-BE49-F238E27FC236}">
+                          <a16:creationId xmlns:a16="http://schemas.microsoft.com/office/drawing/2014/main" id="{928435EC-927A-FF64-D3E7-230226E80369}"/>
+                        </a:ext>
+                      </a:extLst>
+                    </p:cNvPr>
+                    <p:cNvSpPr txBox="1"/>
+                    <p:nvPr/>
+                  </p:nvSpPr>
+                  <p:spPr>
+                    <a:xfrm>
+                      <a:off x="3346011" y="5087510"/>
+                      <a:ext cx="2866510" cy="701089"/>
+                    </a:xfrm>
+                    <a:prstGeom prst="rect">
+                      <a:avLst/>
+                    </a:prstGeom>
+                    <a:noFill/>
+                  </p:spPr>
+                  <p:txBody>
+                    <a:bodyPr wrap="square" rtlCol="0">
+                      <a:spAutoFit/>
+                    </a:bodyPr>
+                    <a:lstStyle/>
+                    <a:p>
+                      <a:pPr algn="ctr"/>
+                      <a14:m>
+                        <m:oMathPara xmlns:m="http://schemas.openxmlformats.org/officeDocument/2006/math">
+                          <m:oMathParaPr>
+                            <m:jc m:val="centerGroup"/>
+                          </m:oMathParaPr>
+                          <m:oMath xmlns:m="http://schemas.openxmlformats.org/officeDocument/2006/math">
+                            <m:sSubSup>
+                              <m:sSubSupPr>
+                                <m:ctrlPr>
+                                  <a:rPr lang="en-US" altLang="zh-CN" i="1" smtClean="0">
+                                    <a:solidFill>
+                                      <a:schemeClr val="bg1"/>
+                                    </a:solidFill>
+                                    <a:latin typeface="Cambria Math" panose="02040503050406030204" pitchFamily="18" charset="0"/>
+                                  </a:rPr>
+                                </m:ctrlPr>
+                              </m:sSubSupPr>
+                              <m:e>
+                                <m:r>
+                                  <m:rPr>
+                                    <m:sty m:val="p"/>
+                                  </m:rPr>
+                                  <a:rPr lang="en-US" altLang="zh-CN" i="1">
+                                    <a:solidFill>
+                                      <a:schemeClr val="bg1"/>
+                                    </a:solidFill>
+                                    <a:latin typeface="Cambria Math" panose="02040503050406030204" pitchFamily="18" charset="0"/>
+                                  </a:rPr>
+                                  <m:t>x</m:t>
+                                </m:r>
+                              </m:e>
+                              <m:sub>
+                                <m:r>
+                                  <m:rPr>
+                                    <m:sty m:val="p"/>
+                                  </m:rPr>
+                                  <a:rPr lang="en-US" altLang="zh-CN" i="1">
+                                    <a:solidFill>
+                                      <a:schemeClr val="bg1"/>
+                                    </a:solidFill>
+                                    <a:latin typeface="Cambria Math" panose="02040503050406030204" pitchFamily="18" charset="0"/>
+                                  </a:rPr>
+                                  <m:t>proto</m:t>
+                                </m:r>
+                              </m:sub>
+                              <m:sup>
+                                <m:r>
+                                  <a:rPr lang="en-US" altLang="zh-CN" i="1">
+                                    <a:solidFill>
+                                      <a:schemeClr val="bg1"/>
+                                    </a:solidFill>
+                                    <a:latin typeface="Cambria Math" panose="02040503050406030204" pitchFamily="18" charset="0"/>
+                                  </a:rPr>
+                                  <m:t>∗</m:t>
+                                </m:r>
+                              </m:sup>
+                            </m:sSubSup>
+                            <m:r>
+                              <a:rPr lang="en-US" altLang="zh-CN" i="1">
+                                <a:solidFill>
+                                  <a:schemeClr val="bg1"/>
+                                </a:solidFill>
+                                <a:latin typeface="Cambria Math" panose="02040503050406030204" pitchFamily="18" charset="0"/>
+                              </a:rPr>
+                              <m:t>=</m:t>
+                            </m:r>
+                            <m:func>
+                              <m:funcPr>
+                                <m:ctrlPr>
+                                  <a:rPr lang="en-US" altLang="zh-CN" i="1">
+                                    <a:solidFill>
+                                      <a:schemeClr val="bg1"/>
+                                    </a:solidFill>
+                                    <a:latin typeface="Cambria Math" panose="02040503050406030204" pitchFamily="18" charset="0"/>
+                                  </a:rPr>
+                                </m:ctrlPr>
+                              </m:funcPr>
+                              <m:fName>
+                                <m:r>
+                                  <m:rPr>
+                                    <m:sty m:val="p"/>
+                                  </m:rPr>
+                                  <a:rPr lang="en-US" altLang="zh-CN" i="1">
+                                    <a:solidFill>
+                                      <a:schemeClr val="bg1"/>
+                                    </a:solidFill>
+                                    <a:latin typeface="Cambria Math" panose="02040503050406030204" pitchFamily="18" charset="0"/>
+                                  </a:rPr>
+                                  <m:t>arg</m:t>
+                                </m:r>
+                                <m:r>
+                                  <a:rPr lang="en-US" altLang="zh-CN" b="0" i="1" smtClean="0">
+                                    <a:solidFill>
+                                      <a:schemeClr val="bg1"/>
+                                    </a:solidFill>
+                                    <a:latin typeface="Cambria Math" panose="02040503050406030204" pitchFamily="18" charset="0"/>
+                                  </a:rPr>
+                                  <m:t> </m:t>
+                                </m:r>
+                                <m:r>
+                                  <m:rPr>
+                                    <m:sty m:val="p"/>
+                                  </m:rPr>
+                                  <a:rPr lang="en-US" altLang="zh-CN" i="1">
+                                    <a:solidFill>
+                                      <a:schemeClr val="bg1"/>
+                                    </a:solidFill>
+                                    <a:latin typeface="Cambria Math" panose="02040503050406030204" pitchFamily="18" charset="0"/>
+                                  </a:rPr>
+                                  <m:t>max</m:t>
+                                </m:r>
+                              </m:fName>
+                              <m:e>
+                                <m:r>
+                                  <m:rPr>
+                                    <m:nor/>
+                                  </m:rPr>
+                                  <a:rPr lang="en-US" altLang="zh-CN" i="1" dirty="0">
+                                    <a:solidFill>
+                                      <a:schemeClr val="bg1"/>
+                                    </a:solidFill>
+                                    <a:latin typeface="Cambria Math" panose="02040503050406030204" pitchFamily="18" charset="0"/>
+                                  </a:rPr>
+                                  <m:t>U</m:t>
+                                </m:r>
+                                <m:r>
+                                  <a:rPr lang="en-US" altLang="zh-CN" i="1">
+                                    <a:solidFill>
+                                      <a:schemeClr val="bg1"/>
+                                    </a:solidFill>
+                                    <a:latin typeface="Cambria Math" panose="02040503050406030204" pitchFamily="18" charset="0"/>
+                                  </a:rPr>
+                                  <m:t>(</m:t>
+                                </m:r>
+                                <m:acc>
+                                  <m:accPr>
+                                    <m:chr m:val="̃"/>
+                                    <m:ctrlPr>
+                                      <a:rPr lang="en-US" altLang="zh-CN" i="1">
+                                        <a:solidFill>
+                                          <a:schemeClr val="bg1"/>
+                                        </a:solidFill>
+                                        <a:latin typeface="Cambria Math" panose="02040503050406030204" pitchFamily="18" charset="0"/>
+                                      </a:rPr>
+                                    </m:ctrlPr>
+                                  </m:accPr>
+                                  <m:e>
+                                    <m:r>
+                                      <a:rPr lang="en-US" altLang="zh-CN" i="1">
+                                        <a:solidFill>
+                                          <a:schemeClr val="bg1"/>
+                                        </a:solidFill>
+                                        <a:latin typeface="Cambria Math" panose="02040503050406030204" pitchFamily="18" charset="0"/>
+                                      </a:rPr>
+                                      <m:t>𝐲</m:t>
+                                    </m:r>
+                                  </m:e>
+                                </m:acc>
+                                <m:r>
+                                  <a:rPr lang="en-US" altLang="zh-CN" i="1">
+                                    <a:solidFill>
+                                      <a:schemeClr val="bg1"/>
+                                    </a:solidFill>
+                                    <a:latin typeface="Cambria Math" panose="02040503050406030204" pitchFamily="18" charset="0"/>
+                                  </a:rPr>
+                                  <m:t>)</m:t>
+                                </m:r>
+                                <m:r>
+                                  <m:rPr>
+                                    <m:nor/>
+                                  </m:rPr>
+                                  <a:rPr lang="zh-CN" altLang="en-US" i="1" dirty="0">
+                                    <a:solidFill>
+                                      <a:schemeClr val="bg1"/>
+                                    </a:solidFill>
+                                    <a:latin typeface="Cambria Math" panose="02040503050406030204" pitchFamily="18" charset="0"/>
+                                  </a:rPr>
+                                  <m:t> </m:t>
+                                </m:r>
+                              </m:e>
+                            </m:func>
+                          </m:oMath>
+                        </m:oMathPara>
+                      </a14:m>
+                      <a:endParaRPr lang="en-US" altLang="zh-CN" i="1" dirty="0">
+                        <a:solidFill>
+                          <a:schemeClr val="bg1"/>
+                        </a:solidFill>
+                        <a:latin typeface="Cambria Math" panose="02040503050406030204" pitchFamily="18" charset="0"/>
+                      </a:endParaRPr>
+                    </a:p>
+                    <a:p>
+                      <a:pPr algn="ctr"/>
+                      <a14:m>
+                        <m:oMath xmlns:m="http://schemas.openxmlformats.org/officeDocument/2006/math">
+                          <m:sSubSup>
+                            <m:sSubSupPr>
+                              <m:ctrlPr>
+                                <a:rPr lang="en-US" altLang="zh-CN" i="1" smtClean="0">
+                                  <a:solidFill>
+                                    <a:schemeClr val="bg1"/>
+                                  </a:solidFill>
+                                  <a:latin typeface="Cambria Math" panose="02040503050406030204" pitchFamily="18" charset="0"/>
+                                </a:rPr>
+                              </m:ctrlPr>
+                            </m:sSubSupPr>
+                            <m:e>
+                              <m:r>
+                                <m:rPr>
+                                  <m:sty m:val="p"/>
+                                </m:rPr>
+                                <a:rPr lang="en-US" altLang="zh-CN" b="0" i="0" smtClean="0">
+                                  <a:solidFill>
+                                    <a:schemeClr val="bg1"/>
+                                  </a:solidFill>
+                                  <a:latin typeface="Cambria Math" panose="02040503050406030204" pitchFamily="18" charset="0"/>
+                                </a:rPr>
+                                <m:t>x</m:t>
+                              </m:r>
+                            </m:e>
+                            <m:sub>
+                              <m:r>
+                                <m:rPr>
+                                  <m:sty m:val="p"/>
+                                </m:rPr>
+                                <a:rPr lang="en-US" altLang="zh-CN" b="0" i="0" smtClean="0">
+                                  <a:solidFill>
+                                    <a:schemeClr val="bg1"/>
+                                  </a:solidFill>
+                                  <a:latin typeface="Cambria Math" panose="02040503050406030204" pitchFamily="18" charset="0"/>
+                                </a:rPr>
+                                <m:t>proto</m:t>
+                              </m:r>
+                            </m:sub>
+                            <m:sup>
+                              <m:r>
+                                <a:rPr lang="en-US" altLang="zh-CN" b="0" i="0" smtClean="0">
+                                  <a:solidFill>
+                                    <a:schemeClr val="bg1"/>
+                                  </a:solidFill>
+                                  <a:latin typeface="Cambria Math" panose="02040503050406030204" pitchFamily="18" charset="0"/>
+                                </a:rPr>
+                                <m:t>∗</m:t>
+                              </m:r>
+                            </m:sup>
+                          </m:sSubSup>
+                          <m:r>
+                            <a:rPr lang="en-US" altLang="zh-CN" b="0" i="1" smtClean="0">
+                              <a:solidFill>
+                                <a:schemeClr val="bg1"/>
+                              </a:solidFill>
+                              <a:latin typeface="Cambria Math" panose="02040503050406030204" pitchFamily="18" charset="0"/>
+                            </a:rPr>
+                            <m:t>=[</m:t>
+                          </m:r>
+                          <m:sSup>
+                            <m:sSupPr>
+                              <m:ctrlPr>
+                                <a:rPr lang="en-US" altLang="zh-CN" i="1" smtClean="0">
+                                  <a:solidFill>
+                                    <a:schemeClr val="bg1"/>
+                                  </a:solidFill>
+                                  <a:latin typeface="Cambria Math" panose="02040503050406030204" pitchFamily="18" charset="0"/>
+                                </a:rPr>
+                              </m:ctrlPr>
+                            </m:sSupPr>
+                            <m:e>
+                              <m:r>
+                                <a:rPr lang="en-US" altLang="zh-CN" b="0" i="1" smtClean="0">
+                                  <a:solidFill>
+                                    <a:schemeClr val="bg1"/>
+                                  </a:solidFill>
+                                  <a:latin typeface="Cambria Math" panose="02040503050406030204" pitchFamily="18" charset="0"/>
+                                </a:rPr>
+                                <m:t>𝑎</m:t>
+                              </m:r>
+                            </m:e>
+                            <m:sup>
+                              <m:r>
+                                <a:rPr lang="en-US" altLang="zh-CN" b="0" i="1" smtClean="0">
+                                  <a:solidFill>
+                                    <a:schemeClr val="bg1"/>
+                                  </a:solidFill>
+                                  <a:latin typeface="Cambria Math" panose="02040503050406030204" pitchFamily="18" charset="0"/>
+                                </a:rPr>
+                                <m:t>∗</m:t>
+                              </m:r>
+                            </m:sup>
+                          </m:sSup>
+                          <m:r>
+                            <a:rPr lang="en-US" altLang="zh-CN" b="0" i="1" smtClean="0">
+                              <a:solidFill>
+                                <a:schemeClr val="bg1"/>
+                              </a:solidFill>
+                              <a:latin typeface="Cambria Math" panose="02040503050406030204" pitchFamily="18" charset="0"/>
+                            </a:rPr>
+                            <m:t>,</m:t>
+                          </m:r>
+                          <m:sSubSup>
+                            <m:sSubSupPr>
+                              <m:ctrlPr>
+                                <a:rPr lang="en-US" altLang="zh-CN" b="1" i="1" smtClean="0">
+                                  <a:solidFill>
+                                    <a:schemeClr val="bg1"/>
+                                  </a:solidFill>
+                                  <a:latin typeface="Cambria Math" panose="02040503050406030204" pitchFamily="18" charset="0"/>
+                                </a:rPr>
+                              </m:ctrlPr>
+                            </m:sSubSupPr>
+                            <m:e>
+                              <m:r>
+                                <a:rPr lang="en-US" altLang="zh-CN" b="1" i="0" smtClean="0">
+                                  <a:solidFill>
+                                    <a:schemeClr val="bg1"/>
+                                  </a:solidFill>
+                                  <a:latin typeface="Cambria Math" panose="02040503050406030204" pitchFamily="18" charset="0"/>
+                                </a:rPr>
+                                <m:t>𝐱</m:t>
+                              </m:r>
+                            </m:e>
+                            <m:sub>
+                              <m:r>
+                                <a:rPr lang="en-US" altLang="zh-CN" b="1" i="1" smtClean="0">
+                                  <a:solidFill>
+                                    <a:schemeClr val="bg1"/>
+                                  </a:solidFill>
+                                  <a:latin typeface="Cambria Math" panose="02040503050406030204" pitchFamily="18" charset="0"/>
+                                </a:rPr>
+                                <m:t>𝒑</m:t>
+                              </m:r>
+                            </m:sub>
+                            <m:sup>
+                              <m:r>
+                                <a:rPr lang="en-US" altLang="zh-CN" b="1" i="0" smtClean="0">
+                                  <a:solidFill>
+                                    <a:schemeClr val="bg1"/>
+                                  </a:solidFill>
+                                  <a:latin typeface="Cambria Math" panose="02040503050406030204" pitchFamily="18" charset="0"/>
+                                </a:rPr>
+                                <m:t>∗</m:t>
+                              </m:r>
+                            </m:sup>
+                          </m:sSubSup>
+                          <m:r>
+                            <a:rPr lang="en-US" altLang="zh-CN" b="0" i="1" smtClean="0">
+                              <a:solidFill>
+                                <a:schemeClr val="bg1"/>
+                              </a:solidFill>
+                              <a:latin typeface="Cambria Math" panose="02040503050406030204" pitchFamily="18" charset="0"/>
+                            </a:rPr>
+                            <m:t>]</m:t>
+                          </m:r>
+                        </m:oMath>
+                      </a14:m>
+                      <a:r>
+                        <a:rPr lang="en-US" altLang="zh-CN" dirty="0">
+                          <a:solidFill>
+                            <a:schemeClr val="bg1"/>
+                          </a:solidFill>
+                          <a:latin typeface="Times New Roman" panose="02020603050405020304" pitchFamily="18" charset="0"/>
+                          <a:ea typeface="宋体" panose="02010600030101010101" pitchFamily="2" charset="-122"/>
+                        </a:rPr>
+                        <a:t> </a:t>
+                      </a:r>
+                    </a:p>
+                  </p:txBody>
+                </p:sp>
+              </mc:Choice>
+              <mc:Fallback>
+                <p:sp>
+                  <p:nvSpPr>
+                    <p:cNvPr id="32" name="文本框 31">
+                      <a:extLst>
+                        <a:ext uri="{FF2B5EF4-FFF2-40B4-BE49-F238E27FC236}">
+                          <a16:creationId xmlns:a16="http://schemas.microsoft.com/office/drawing/2014/main" id="{928435EC-927A-FF64-D3E7-230226E80369}"/>
+                        </a:ext>
+                      </a:extLst>
+                    </p:cNvPr>
+                    <p:cNvSpPr txBox="1">
+                      <a:spLocks noRot="1" noChangeAspect="1" noMove="1" noResize="1" noEditPoints="1" noAdjustHandles="1" noChangeArrowheads="1" noChangeShapeType="1" noTextEdit="1"/>
+                    </p:cNvSpPr>
+                    <p:nvPr/>
+                  </p:nvSpPr>
+                  <p:spPr>
+                    <a:xfrm>
+                      <a:off x="3346011" y="5087510"/>
+                      <a:ext cx="2866510" cy="701089"/>
+                    </a:xfrm>
+                    <a:prstGeom prst="rect">
+                      <a:avLst/>
+                    </a:prstGeom>
+                    <a:blipFill>
+                      <a:blip r:embed="rId9"/>
+                      <a:stretch>
+                        <a:fillRect b="-4348"/>
+                      </a:stretch>
+                    </a:blipFill>
+                  </p:spPr>
+                  <p:txBody>
+                    <a:bodyPr/>
+                    <a:lstStyle/>
+                    <a:p>
+                      <a:r>
+                        <a:rPr lang="zh-CN" altLang="en-US">
+                          <a:noFill/>
+                        </a:rPr>
+                        <a:t> </a:t>
+                      </a:r>
+                    </a:p>
+                  </p:txBody>
+                </p:sp>
+              </mc:Fallback>
+            </mc:AlternateContent>
+          </p:grpSp>
+          <p:sp>
+            <p:nvSpPr>
+              <p:cNvPr id="72" name="文本框 71">
+                <a:extLst>
+                  <a:ext uri="{FF2B5EF4-FFF2-40B4-BE49-F238E27FC236}">
+                    <a16:creationId xmlns:a16="http://schemas.microsoft.com/office/drawing/2014/main" id="{FAAC7C90-C68E-7779-BF95-D080DDAEBFE8}"/>
+                  </a:ext>
+                </a:extLst>
+              </p:cNvPr>
+              <p:cNvSpPr txBox="1"/>
+              <p:nvPr/>
+            </p:nvSpPr>
+            <p:spPr>
+              <a:xfrm>
+                <a:off x="3821866" y="5384188"/>
+                <a:ext cx="3800273" cy="369332"/>
+              </a:xfrm>
+              <a:prstGeom prst="rect">
+                <a:avLst/>
+              </a:prstGeom>
+              <a:noFill/>
+            </p:spPr>
+            <p:txBody>
+              <a:bodyPr wrap="square">
+                <a:spAutoFit/>
+              </a:bodyPr>
+              <a:lstStyle>
+                <a:defPPr>
+                  <a:defRPr lang="zh-CN"/>
+                </a:defPPr>
+                <a:lvl1pPr algn="ctr">
+                  <a:defRPr>
+                    <a:latin typeface="Times New Roman" panose="02020603050405020304" pitchFamily="18" charset="0"/>
+                    <a:ea typeface="宋体" panose="02010600030101010101" pitchFamily="2" charset="-122"/>
+                  </a:defRPr>
+                </a:lvl1pPr>
+              </a:lstStyle>
+              <a:p>
+                <a:r>
+                  <a:rPr lang="zh-CN" altLang="en-US" dirty="0"/>
+                  <a:t>选取最优协议与最优协议参数</a:t>
+                </a:r>
+              </a:p>
+            </p:txBody>
+          </p:sp>
+        </p:grpSp>
       </p:grpSp>
     </p:spTree>
     <p:extLst>
@@ -11269,8 +11742,8 @@
             </a:p>
           </p:txBody>
         </p:sp>
-        <mc:AlternateContent xmlns:mc="http://schemas.openxmlformats.org/markup-compatibility/2006">
-          <mc:Choice xmlns:a14="http://schemas.microsoft.com/office/drawing/2010/main" Requires="a14">
+        <mc:AlternateContent xmlns:mc="http://schemas.openxmlformats.org/markup-compatibility/2006" xmlns:a14="http://schemas.microsoft.com/office/drawing/2010/main">
+          <mc:Choice Requires="a14">
             <p:sp>
               <p:nvSpPr>
                 <p:cNvPr id="3" name="文本框 2">
@@ -11353,7 +11826,7 @@
               </p:txBody>
             </p:sp>
           </mc:Choice>
-          <mc:Fallback>
+          <mc:Fallback xmlns="">
             <p:sp>
               <p:nvSpPr>
                 <p:cNvPr id="3" name="文本框 2">
@@ -11646,8 +12119,8 @@
             </a:p>
           </p:txBody>
         </p:sp>
-        <mc:AlternateContent xmlns:mc="http://schemas.openxmlformats.org/markup-compatibility/2006">
-          <mc:Choice xmlns:a14="http://schemas.microsoft.com/office/drawing/2010/main" Requires="a14">
+        <mc:AlternateContent xmlns:mc="http://schemas.openxmlformats.org/markup-compatibility/2006" xmlns:a14="http://schemas.microsoft.com/office/drawing/2010/main">
+          <mc:Choice Requires="a14">
             <p:sp>
               <p:nvSpPr>
                 <p:cNvPr id="9" name="文本框 8">
@@ -11719,12 +12192,16 @@
                         <m:accPr>
                           <m:chr m:val="̂"/>
                           <m:ctrlPr>
-                            <a:rPr lang="en-US" altLang="zh-CN" sz="1400" smtClean="0"/>
+                            <a:rPr lang="en-US" altLang="zh-CN" sz="1400" i="1" smtClean="0">
+                              <a:latin typeface="Cambria Math" panose="02040503050406030204" pitchFamily="18" charset="0"/>
+                            </a:rPr>
                           </m:ctrlPr>
                         </m:accPr>
                         <m:e>
                           <m:r>
-                            <a:rPr lang="en-US" altLang="zh-CN" sz="1400" smtClean="0"/>
+                            <a:rPr lang="en-US" altLang="zh-CN" sz="1400" smtClean="0">
+                              <a:latin typeface="Cambria Math" panose="02040503050406030204" pitchFamily="18" charset="0"/>
+                            </a:rPr>
                             <m:t>𝜆</m:t>
                           </m:r>
                         </m:e>
@@ -11739,7 +12216,7 @@
               </p:txBody>
             </p:sp>
           </mc:Choice>
-          <mc:Fallback>
+          <mc:Fallback xmlns="">
             <p:sp>
               <p:nvSpPr>
                 <p:cNvPr id="9" name="文本框 8">
@@ -11852,8 +12329,8 @@
             </a:p>
           </p:txBody>
         </p:sp>
-        <mc:AlternateContent xmlns:mc="http://schemas.openxmlformats.org/markup-compatibility/2006">
-          <mc:Choice xmlns:a14="http://schemas.microsoft.com/office/drawing/2010/main" Requires="a14">
+        <mc:AlternateContent xmlns:mc="http://schemas.openxmlformats.org/markup-compatibility/2006" xmlns:a14="http://schemas.microsoft.com/office/drawing/2010/main">
+          <mc:Choice Requires="a14">
             <p:sp>
               <p:nvSpPr>
                 <p:cNvPr id="12" name="文本框 11">
@@ -11924,18 +12401,24 @@
                       <m:sSub>
                         <m:sSubPr>
                           <m:ctrlPr>
-                            <a:rPr lang="en-US" altLang="zh-CN" sz="1400"/>
+                            <a:rPr lang="en-US" altLang="zh-CN" sz="1400" i="1">
+                              <a:latin typeface="Cambria Math" panose="02040503050406030204" pitchFamily="18" charset="0"/>
+                            </a:rPr>
                           </m:ctrlPr>
                         </m:sSubPr>
                         <m:e>
                           <m:r>
-                            <a:rPr lang="en-US" altLang="zh-CN" sz="1400"/>
+                            <a:rPr lang="en-US" altLang="zh-CN" sz="1400">
+                              <a:latin typeface="Cambria Math" panose="02040503050406030204" pitchFamily="18" charset="0"/>
+                            </a:rPr>
                             <m:t>𝑥</m:t>
                           </m:r>
                         </m:e>
                         <m:sub>
                           <m:r>
-                            <a:rPr lang="en-US" altLang="zh-CN" sz="1400"/>
+                            <a:rPr lang="en-US" altLang="zh-CN" sz="1400">
+                              <a:latin typeface="Cambria Math" panose="02040503050406030204" pitchFamily="18" charset="0"/>
+                            </a:rPr>
                             <m:t>𝑝𝑟𝑜𝑡𝑜</m:t>
                           </m:r>
                         </m:sub>
@@ -11950,7 +12433,7 @@
               </p:txBody>
             </p:sp>
           </mc:Choice>
-          <mc:Fallback>
+          <mc:Fallback xmlns="">
             <p:sp>
               <p:nvSpPr>
                 <p:cNvPr id="12" name="文本框 11">

--- a/PPT画图.pptx
+++ b/PPT画图.pptx
@@ -200,7 +200,7 @@
           <a:p>
             <a:fld id="{5C1E4601-79B1-425F-B925-3F7BE382BF19}" type="datetimeFigureOut">
               <a:rPr lang="zh-CN" altLang="en-US" smtClean="0"/>
-              <a:t>2026/01/29</a:t>
+              <a:t>2026/02/05</a:t>
             </a:fld>
             <a:endParaRPr lang="zh-CN" altLang="en-US"/>
           </a:p>
@@ -698,7 +698,7 @@
           <a:p>
             <a:fld id="{5D2E9D4A-569D-49DD-9DBB-BF425DFB68D5}" type="datetimeFigureOut">
               <a:rPr lang="zh-CN" altLang="en-US" smtClean="0"/>
-              <a:t>2026/01/29</a:t>
+              <a:t>2026/02/05</a:t>
             </a:fld>
             <a:endParaRPr lang="zh-CN" altLang="en-US"/>
           </a:p>
@@ -896,7 +896,7 @@
           <a:p>
             <a:fld id="{5D2E9D4A-569D-49DD-9DBB-BF425DFB68D5}" type="datetimeFigureOut">
               <a:rPr lang="zh-CN" altLang="en-US" smtClean="0"/>
-              <a:t>2026/01/29</a:t>
+              <a:t>2026/02/05</a:t>
             </a:fld>
             <a:endParaRPr lang="zh-CN" altLang="en-US"/>
           </a:p>
@@ -1104,7 +1104,7 @@
           <a:p>
             <a:fld id="{5D2E9D4A-569D-49DD-9DBB-BF425DFB68D5}" type="datetimeFigureOut">
               <a:rPr lang="zh-CN" altLang="en-US" smtClean="0"/>
-              <a:t>2026/01/29</a:t>
+              <a:t>2026/02/05</a:t>
             </a:fld>
             <a:endParaRPr lang="zh-CN" altLang="en-US"/>
           </a:p>
@@ -1302,7 +1302,7 @@
           <a:p>
             <a:fld id="{5D2E9D4A-569D-49DD-9DBB-BF425DFB68D5}" type="datetimeFigureOut">
               <a:rPr lang="zh-CN" altLang="en-US" smtClean="0"/>
-              <a:t>2026/01/29</a:t>
+              <a:t>2026/02/05</a:t>
             </a:fld>
             <a:endParaRPr lang="zh-CN" altLang="en-US"/>
           </a:p>
@@ -1577,7 +1577,7 @@
           <a:p>
             <a:fld id="{5D2E9D4A-569D-49DD-9DBB-BF425DFB68D5}" type="datetimeFigureOut">
               <a:rPr lang="zh-CN" altLang="en-US" smtClean="0"/>
-              <a:t>2026/01/29</a:t>
+              <a:t>2026/02/05</a:t>
             </a:fld>
             <a:endParaRPr lang="zh-CN" altLang="en-US"/>
           </a:p>
@@ -1842,7 +1842,7 @@
           <a:p>
             <a:fld id="{5D2E9D4A-569D-49DD-9DBB-BF425DFB68D5}" type="datetimeFigureOut">
               <a:rPr lang="zh-CN" altLang="en-US" smtClean="0"/>
-              <a:t>2026/01/29</a:t>
+              <a:t>2026/02/05</a:t>
             </a:fld>
             <a:endParaRPr lang="zh-CN" altLang="en-US"/>
           </a:p>
@@ -2254,7 +2254,7 @@
           <a:p>
             <a:fld id="{5D2E9D4A-569D-49DD-9DBB-BF425DFB68D5}" type="datetimeFigureOut">
               <a:rPr lang="zh-CN" altLang="en-US" smtClean="0"/>
-              <a:t>2026/01/29</a:t>
+              <a:t>2026/02/05</a:t>
             </a:fld>
             <a:endParaRPr lang="zh-CN" altLang="en-US"/>
           </a:p>
@@ -2395,7 +2395,7 @@
           <a:p>
             <a:fld id="{5D2E9D4A-569D-49DD-9DBB-BF425DFB68D5}" type="datetimeFigureOut">
               <a:rPr lang="zh-CN" altLang="en-US" smtClean="0"/>
-              <a:t>2026/01/29</a:t>
+              <a:t>2026/02/05</a:t>
             </a:fld>
             <a:endParaRPr lang="zh-CN" altLang="en-US"/>
           </a:p>
@@ -2508,7 +2508,7 @@
           <a:p>
             <a:fld id="{5D2E9D4A-569D-49DD-9DBB-BF425DFB68D5}" type="datetimeFigureOut">
               <a:rPr lang="zh-CN" altLang="en-US" smtClean="0"/>
-              <a:t>2026/01/29</a:t>
+              <a:t>2026/02/05</a:t>
             </a:fld>
             <a:endParaRPr lang="zh-CN" altLang="en-US"/>
           </a:p>
@@ -2819,7 +2819,7 @@
           <a:p>
             <a:fld id="{5D2E9D4A-569D-49DD-9DBB-BF425DFB68D5}" type="datetimeFigureOut">
               <a:rPr lang="zh-CN" altLang="en-US" smtClean="0"/>
-              <a:t>2026/01/29</a:t>
+              <a:t>2026/02/05</a:t>
             </a:fld>
             <a:endParaRPr lang="zh-CN" altLang="en-US"/>
           </a:p>
@@ -3107,7 +3107,7 @@
           <a:p>
             <a:fld id="{5D2E9D4A-569D-49DD-9DBB-BF425DFB68D5}" type="datetimeFigureOut">
               <a:rPr lang="zh-CN" altLang="en-US" smtClean="0"/>
-              <a:t>2026/01/29</a:t>
+              <a:t>2026/02/05</a:t>
             </a:fld>
             <a:endParaRPr lang="zh-CN" altLang="en-US"/>
           </a:p>
@@ -3348,7 +3348,7 @@
           <a:p>
             <a:fld id="{5D2E9D4A-569D-49DD-9DBB-BF425DFB68D5}" type="datetimeFigureOut">
               <a:rPr lang="zh-CN" altLang="en-US" smtClean="0"/>
-              <a:t>2026/01/29</a:t>
+              <a:t>2026/02/05</a:t>
             </a:fld>
             <a:endParaRPr lang="zh-CN" altLang="en-US"/>
           </a:p>
@@ -5851,8 +5851,8 @@
             </a:fontRef>
           </p:style>
         </p:cxnSp>
-        <mc:AlternateContent xmlns:mc="http://schemas.openxmlformats.org/markup-compatibility/2006">
-          <mc:Choice xmlns:a14="http://schemas.microsoft.com/office/drawing/2010/main" Requires="a14">
+        <mc:AlternateContent xmlns:mc="http://schemas.openxmlformats.org/markup-compatibility/2006" xmlns:a14="http://schemas.microsoft.com/office/drawing/2010/main">
+          <mc:Choice Requires="a14">
             <p:sp>
               <p:nvSpPr>
                 <p:cNvPr id="40" name="文本框 39">
@@ -5881,6 +5881,7 @@
                 </a:bodyPr>
                 <a:lstStyle/>
                 <a:p>
+                  <a:pPr/>
                   <a14:m>
                     <m:oMathPara xmlns:m="http://schemas.openxmlformats.org/officeDocument/2006/math">
                       <m:oMathParaPr>
@@ -5934,7 +5935,7 @@
               </p:txBody>
             </p:sp>
           </mc:Choice>
-          <mc:Fallback>
+          <mc:Fallback xmlns="">
             <p:sp>
               <p:nvSpPr>
                 <p:cNvPr id="40" name="文本框 39">
@@ -5999,8 +6000,8 @@
               <a:chExt cx="11255072" cy="1305973"/>
             </a:xfrm>
           </p:grpSpPr>
-          <mc:AlternateContent xmlns:mc="http://schemas.openxmlformats.org/markup-compatibility/2006">
-            <mc:Choice xmlns:a14="http://schemas.microsoft.com/office/drawing/2010/main" Requires="a14">
+          <mc:AlternateContent xmlns:mc="http://schemas.openxmlformats.org/markup-compatibility/2006" xmlns:a14="http://schemas.microsoft.com/office/drawing/2010/main">
+            <mc:Choice Requires="a14">
               <p:sp>
                 <p:nvSpPr>
                   <p:cNvPr id="13" name="文本框 12">
@@ -6136,7 +6137,7 @@
                 </p:txBody>
               </p:sp>
             </mc:Choice>
-            <mc:Fallback>
+            <mc:Fallback xmlns="">
               <p:sp>
                 <p:nvSpPr>
                   <p:cNvPr id="13" name="文本框 12">
@@ -6181,8 +6182,8 @@
               </p:sp>
             </mc:Fallback>
           </mc:AlternateContent>
-          <mc:AlternateContent xmlns:mc="http://schemas.openxmlformats.org/markup-compatibility/2006">
-            <mc:Choice xmlns:a14="http://schemas.microsoft.com/office/drawing/2010/main" Requires="a14">
+          <mc:AlternateContent xmlns:mc="http://schemas.openxmlformats.org/markup-compatibility/2006" xmlns:a14="http://schemas.microsoft.com/office/drawing/2010/main">
+            <mc:Choice Requires="a14">
               <p:sp>
                 <p:nvSpPr>
                   <p:cNvPr id="37" name="文本框 36">
@@ -6278,7 +6279,7 @@
                 </p:txBody>
               </p:sp>
             </mc:Choice>
-            <mc:Fallback>
+            <mc:Fallback xmlns="">
               <p:sp>
                 <p:nvSpPr>
                   <p:cNvPr id="37" name="文本框 36">
@@ -6463,8 +6464,8 @@
                   </a:p>
                 </p:txBody>
               </p:sp>
-              <mc:AlternateContent xmlns:mc="http://schemas.openxmlformats.org/markup-compatibility/2006">
-                <mc:Choice xmlns:a14="http://schemas.microsoft.com/office/drawing/2010/main" Requires="a14">
+              <mc:AlternateContent xmlns:mc="http://schemas.openxmlformats.org/markup-compatibility/2006" xmlns:a14="http://schemas.microsoft.com/office/drawing/2010/main">
+                <mc:Choice Requires="a14">
                   <p:sp>
                     <p:nvSpPr>
                       <p:cNvPr id="5" name="文本框 4">
@@ -6551,7 +6552,7 @@
                     </p:txBody>
                   </p:sp>
                 </mc:Choice>
-                <mc:Fallback>
+                <mc:Fallback xmlns="">
                   <p:sp>
                     <p:nvSpPr>
                       <p:cNvPr id="5" name="文本框 4">
@@ -6748,8 +6749,8 @@
                   </a:p>
                 </p:txBody>
               </p:sp>
-              <mc:AlternateContent xmlns:mc="http://schemas.openxmlformats.org/markup-compatibility/2006">
-                <mc:Choice xmlns:a14="http://schemas.microsoft.com/office/drawing/2010/main" Requires="a14">
+              <mc:AlternateContent xmlns:mc="http://schemas.openxmlformats.org/markup-compatibility/2006" xmlns:a14="http://schemas.microsoft.com/office/drawing/2010/main">
+                <mc:Choice Requires="a14">
                   <p:sp>
                     <p:nvSpPr>
                       <p:cNvPr id="19" name="文本框 18">
@@ -6828,7 +6829,7 @@
                     </p:txBody>
                   </p:sp>
                 </mc:Choice>
-                <mc:Fallback>
+                <mc:Fallback xmlns="">
                   <p:sp>
                     <p:nvSpPr>
                       <p:cNvPr id="19" name="文本框 18">
@@ -7074,8 +7075,8 @@
                   </a:p>
                 </p:txBody>
               </p:sp>
-              <mc:AlternateContent xmlns:mc="http://schemas.openxmlformats.org/markup-compatibility/2006">
-                <mc:Choice xmlns:a14="http://schemas.microsoft.com/office/drawing/2010/main" Requires="a14">
+              <mc:AlternateContent xmlns:mc="http://schemas.openxmlformats.org/markup-compatibility/2006" xmlns:a14="http://schemas.microsoft.com/office/drawing/2010/main">
+                <mc:Choice Requires="a14">
                   <p:sp>
                     <p:nvSpPr>
                       <p:cNvPr id="36" name="文本框 35">
@@ -7198,7 +7199,7 @@
                     </p:txBody>
                   </p:sp>
                 </mc:Choice>
-                <mc:Fallback>
+                <mc:Fallback xmlns="">
                   <p:sp>
                     <p:nvSpPr>
                       <p:cNvPr id="36" name="文本框 35">
@@ -7444,8 +7445,8 @@
                   </a:p>
                 </p:txBody>
               </p:sp>
-              <mc:AlternateContent xmlns:mc="http://schemas.openxmlformats.org/markup-compatibility/2006">
-                <mc:Choice xmlns:a14="http://schemas.microsoft.com/office/drawing/2010/main" Requires="a14">
+              <mc:AlternateContent xmlns:mc="http://schemas.openxmlformats.org/markup-compatibility/2006" xmlns:a14="http://schemas.microsoft.com/office/drawing/2010/main">
+                <mc:Choice Requires="a14">
                   <p:sp>
                     <p:nvSpPr>
                       <p:cNvPr id="51" name="文本框 50">
@@ -7511,7 +7512,7 @@
                     </p:txBody>
                   </p:sp>
                 </mc:Choice>
-                <mc:Fallback>
+                <mc:Fallback xmlns="">
                   <p:sp>
                     <p:nvSpPr>
                       <p:cNvPr id="51" name="文本框 50">
@@ -7744,8 +7745,8 @@
                 </a:p>
               </p:txBody>
             </p:sp>
-            <mc:AlternateContent xmlns:mc="http://schemas.openxmlformats.org/markup-compatibility/2006">
-              <mc:Choice xmlns:a14="http://schemas.microsoft.com/office/drawing/2010/main" Requires="a14">
+            <mc:AlternateContent xmlns:mc="http://schemas.openxmlformats.org/markup-compatibility/2006" xmlns:a14="http://schemas.microsoft.com/office/drawing/2010/main">
+              <mc:Choice Requires="a14">
                 <p:sp>
                   <p:nvSpPr>
                     <p:cNvPr id="32" name="文本框 31">
@@ -8143,7 +8144,7 @@
                   </p:txBody>
                 </p:sp>
               </mc:Choice>
-              <mc:Fallback>
+              <mc:Fallback xmlns="">
                 <p:sp>
                   <p:nvSpPr>
                     <p:cNvPr id="32" name="文本框 31">
@@ -8266,12 +8267,72 @@
           <a:chExt cx="0" cy="0"/>
         </a:xfrm>
       </p:grpSpPr>
+      <p:sp>
+        <p:nvSpPr>
+          <p:cNvPr id="4" name="矩形 3">
+            <a:extLst>
+              <a:ext uri="{FF2B5EF4-FFF2-40B4-BE49-F238E27FC236}">
+                <a16:creationId xmlns:a16="http://schemas.microsoft.com/office/drawing/2014/main" id="{BE815B88-F159-9327-4D02-A5E43CECC3EE}"/>
+              </a:ext>
+            </a:extLst>
+          </p:cNvPr>
+          <p:cNvSpPr/>
+          <p:nvPr/>
+        </p:nvSpPr>
+        <p:spPr>
+          <a:xfrm>
+            <a:off x="477142" y="103516"/>
+            <a:ext cx="2975605" cy="6650968"/>
+          </a:xfrm>
+          <a:prstGeom prst="rect">
+            <a:avLst/>
+          </a:prstGeom>
+          <a:solidFill>
+            <a:schemeClr val="accent6">
+              <a:lumMod val="20000"/>
+              <a:lumOff val="80000"/>
+            </a:schemeClr>
+          </a:solidFill>
+          <a:ln w="19050">
+            <a:solidFill>
+              <a:schemeClr val="tx1"/>
+            </a:solidFill>
+          </a:ln>
+        </p:spPr>
+        <p:style>
+          <a:lnRef idx="2">
+            <a:schemeClr val="accent1">
+              <a:shade val="15000"/>
+            </a:schemeClr>
+          </a:lnRef>
+          <a:fillRef idx="1">
+            <a:schemeClr val="accent1"/>
+          </a:fillRef>
+          <a:effectRef idx="0">
+            <a:schemeClr val="accent1"/>
+          </a:effectRef>
+          <a:fontRef idx="minor">
+            <a:schemeClr val="lt1"/>
+          </a:fontRef>
+        </p:style>
+        <p:txBody>
+          <a:bodyPr rtlCol="0" anchor="ctr"/>
+          <a:lstStyle/>
+          <a:p>
+            <a:pPr algn="ctr"/>
+            <a:endParaRPr lang="zh-CN" altLang="en-US" dirty="0">
+              <a:latin typeface="Times New Roman" panose="02020603050405020304" pitchFamily="18" charset="0"/>
+              <a:ea typeface="宋体" panose="02010600030101010101" pitchFamily="2" charset="-122"/>
+            </a:endParaRPr>
+          </a:p>
+        </p:txBody>
+      </p:sp>
       <p:grpSp>
         <p:nvGrpSpPr>
-          <p:cNvPr id="109" name="组合 108">
+          <p:cNvPr id="10" name="组合 9">
             <a:extLst>
               <a:ext uri="{FF2B5EF4-FFF2-40B4-BE49-F238E27FC236}">
-                <a16:creationId xmlns:a16="http://schemas.microsoft.com/office/drawing/2014/main" id="{DAE7EFC4-BB32-22CF-B878-68A68FA633AE}"/>
+                <a16:creationId xmlns:a16="http://schemas.microsoft.com/office/drawing/2014/main" id="{AF823AAC-39F7-DB5C-F04C-7F046E61A97B}"/>
               </a:ext>
             </a:extLst>
           </p:cNvPr>
@@ -8280,18 +8341,771 @@
         </p:nvGrpSpPr>
         <p:grpSpPr>
           <a:xfrm>
-            <a:off x="477142" y="103516"/>
-            <a:ext cx="11237715" cy="6650968"/>
-            <a:chOff x="207525" y="1110575"/>
-            <a:chExt cx="9257489" cy="5413442"/>
+            <a:off x="477142" y="2251785"/>
+            <a:ext cx="1433744" cy="1904865"/>
+            <a:chOff x="253731" y="3345505"/>
+            <a:chExt cx="1181100" cy="1550432"/>
+          </a:xfrm>
+        </p:grpSpPr>
+        <p:pic>
+          <p:nvPicPr>
+            <p:cNvPr id="7" name="图形 6">
+              <a:extLst>
+                <a:ext uri="{FF2B5EF4-FFF2-40B4-BE49-F238E27FC236}">
+                  <a16:creationId xmlns:a16="http://schemas.microsoft.com/office/drawing/2014/main" id="{DA6B5533-0055-6165-5AF5-6EF0FAEEC02E}"/>
+                </a:ext>
+              </a:extLst>
+            </p:cNvPr>
+            <p:cNvPicPr>
+              <a:picLocks noChangeAspect="1"/>
+            </p:cNvPicPr>
+            <p:nvPr/>
+          </p:nvPicPr>
+          <p:blipFill>
+            <a:blip r:embed="rId2">
+              <a:extLst>
+                <a:ext uri="{96DAC541-7B7A-43D3-8B79-37D633B846F1}">
+                  <asvg:svgBlip xmlns:asvg="http://schemas.microsoft.com/office/drawing/2016/SVG/main" r:embed="rId3"/>
+                </a:ext>
+              </a:extLst>
+            </a:blip>
+            <a:stretch>
+              <a:fillRect/>
+            </a:stretch>
+          </p:blipFill>
+          <p:spPr>
+            <a:xfrm>
+              <a:off x="253731" y="3345505"/>
+              <a:ext cx="1181100" cy="1181100"/>
+            </a:xfrm>
+            <a:prstGeom prst="rect">
+              <a:avLst/>
+            </a:prstGeom>
+          </p:spPr>
+        </p:pic>
+        <p:sp>
+          <p:nvSpPr>
+            <p:cNvPr id="9" name="文本框 8">
+              <a:extLst>
+                <a:ext uri="{FF2B5EF4-FFF2-40B4-BE49-F238E27FC236}">
+                  <a16:creationId xmlns:a16="http://schemas.microsoft.com/office/drawing/2014/main" id="{17E255EC-BE87-4986-27C1-C19801ECB154}"/>
+                </a:ext>
+              </a:extLst>
+            </p:cNvPr>
+            <p:cNvSpPr txBox="1"/>
+            <p:nvPr/>
+          </p:nvSpPr>
+          <p:spPr>
+            <a:xfrm>
+              <a:off x="386270" y="4526605"/>
+              <a:ext cx="916022" cy="369332"/>
+            </a:xfrm>
+            <a:prstGeom prst="rect">
+              <a:avLst/>
+            </a:prstGeom>
+            <a:noFill/>
+          </p:spPr>
+          <p:txBody>
+            <a:bodyPr wrap="square" rtlCol="0">
+              <a:spAutoFit/>
+            </a:bodyPr>
+            <a:lstStyle/>
+            <a:p>
+              <a:pPr algn="ctr"/>
+              <a:r>
+                <a:rPr lang="zh-CN" altLang="en-US" dirty="0">
+                  <a:latin typeface="Times New Roman" panose="02020603050405020304" pitchFamily="18" charset="0"/>
+                  <a:ea typeface="宋体" panose="02010600030101010101" pitchFamily="2" charset="-122"/>
+                </a:rPr>
+                <a:t>数据集</a:t>
+              </a:r>
+            </a:p>
+          </p:txBody>
+        </p:sp>
+      </p:grpSp>
+      <p:grpSp>
+        <p:nvGrpSpPr>
+          <p:cNvPr id="15" name="组合 14">
+            <a:extLst>
+              <a:ext uri="{FF2B5EF4-FFF2-40B4-BE49-F238E27FC236}">
+                <a16:creationId xmlns:a16="http://schemas.microsoft.com/office/drawing/2014/main" id="{4E5CAB59-A72E-A296-9E17-82654A1046FD}"/>
+              </a:ext>
+            </a:extLst>
+          </p:cNvPr>
+          <p:cNvGrpSpPr/>
+          <p:nvPr/>
+        </p:nvGrpSpPr>
+        <p:grpSpPr>
+          <a:xfrm>
+            <a:off x="1981736" y="885141"/>
+            <a:ext cx="1227096" cy="1647304"/>
+            <a:chOff x="1952828" y="1951206"/>
+            <a:chExt cx="1010866" cy="1340795"/>
+          </a:xfrm>
+        </p:grpSpPr>
+        <p:pic>
+          <p:nvPicPr>
+            <p:cNvPr id="11" name="图形 10">
+              <a:extLst>
+                <a:ext uri="{FF2B5EF4-FFF2-40B4-BE49-F238E27FC236}">
+                  <a16:creationId xmlns:a16="http://schemas.microsoft.com/office/drawing/2014/main" id="{A8C110EA-7ED7-0E8D-28A7-1FCB9C90CB08}"/>
+                </a:ext>
+              </a:extLst>
+            </p:cNvPr>
+            <p:cNvPicPr>
+              <a:picLocks noChangeAspect="1"/>
+            </p:cNvPicPr>
+            <p:nvPr/>
+          </p:nvPicPr>
+          <p:blipFill>
+            <a:blip r:embed="rId4">
+              <a:extLst>
+                <a:ext uri="{96DAC541-7B7A-43D3-8B79-37D633B846F1}">
+                  <asvg:svgBlip xmlns:asvg="http://schemas.microsoft.com/office/drawing/2016/SVG/main" r:embed="rId5"/>
+                </a:ext>
+              </a:extLst>
+            </a:blip>
+            <a:stretch>
+              <a:fillRect/>
+            </a:stretch>
+          </p:blipFill>
+          <p:spPr>
+            <a:xfrm>
+              <a:off x="1952828" y="1951206"/>
+              <a:ext cx="1010866" cy="1010866"/>
+            </a:xfrm>
+            <a:prstGeom prst="rect">
+              <a:avLst/>
+            </a:prstGeom>
+          </p:spPr>
+        </p:pic>
+        <p:sp>
+          <p:nvSpPr>
+            <p:cNvPr id="13" name="文本框 12">
+              <a:extLst>
+                <a:ext uri="{FF2B5EF4-FFF2-40B4-BE49-F238E27FC236}">
+                  <a16:creationId xmlns:a16="http://schemas.microsoft.com/office/drawing/2014/main" id="{82F0A2B0-4069-5DDF-1325-97D24DB56E3A}"/>
+                </a:ext>
+              </a:extLst>
+            </p:cNvPr>
+            <p:cNvSpPr txBox="1"/>
+            <p:nvPr/>
+          </p:nvSpPr>
+          <p:spPr>
+            <a:xfrm>
+              <a:off x="1952829" y="2922669"/>
+              <a:ext cx="1010865" cy="369332"/>
+            </a:xfrm>
+            <a:prstGeom prst="rect">
+              <a:avLst/>
+            </a:prstGeom>
+            <a:noFill/>
+          </p:spPr>
+          <p:txBody>
+            <a:bodyPr wrap="square" rtlCol="0">
+              <a:spAutoFit/>
+            </a:bodyPr>
+            <a:lstStyle/>
+            <a:p>
+              <a:pPr algn="ctr"/>
+              <a:r>
+                <a:rPr lang="zh-CN" altLang="en-US" dirty="0">
+                  <a:latin typeface="Times New Roman" panose="02020603050405020304" pitchFamily="18" charset="0"/>
+                  <a:ea typeface="宋体" panose="02010600030101010101" pitchFamily="2" charset="-122"/>
+                </a:rPr>
+                <a:t>训练集</a:t>
+              </a:r>
+            </a:p>
+          </p:txBody>
+        </p:sp>
+      </p:grpSp>
+      <p:grpSp>
+        <p:nvGrpSpPr>
+          <p:cNvPr id="16" name="组合 15">
+            <a:extLst>
+              <a:ext uri="{FF2B5EF4-FFF2-40B4-BE49-F238E27FC236}">
+                <a16:creationId xmlns:a16="http://schemas.microsoft.com/office/drawing/2014/main" id="{E82F5BCD-D156-168B-7BF2-377C02E5BECB}"/>
+              </a:ext>
+            </a:extLst>
+          </p:cNvPr>
+          <p:cNvGrpSpPr/>
+          <p:nvPr/>
+        </p:nvGrpSpPr>
+        <p:grpSpPr>
+          <a:xfrm>
+            <a:off x="1490171" y="4986267"/>
+            <a:ext cx="2117652" cy="1694694"/>
+            <a:chOff x="1551939" y="1951206"/>
+            <a:chExt cx="1744495" cy="1379367"/>
+          </a:xfrm>
+        </p:grpSpPr>
+        <p:pic>
+          <p:nvPicPr>
+            <p:cNvPr id="17" name="图形 16">
+              <a:extLst>
+                <a:ext uri="{FF2B5EF4-FFF2-40B4-BE49-F238E27FC236}">
+                  <a16:creationId xmlns:a16="http://schemas.microsoft.com/office/drawing/2014/main" id="{AAAE8D9B-EDAD-2E79-D706-2E3148F5E69B}"/>
+                </a:ext>
+              </a:extLst>
+            </p:cNvPr>
+            <p:cNvPicPr>
+              <a:picLocks noChangeAspect="1"/>
+            </p:cNvPicPr>
+            <p:nvPr/>
+          </p:nvPicPr>
+          <p:blipFill>
+            <a:blip r:embed="rId4">
+              <a:extLst>
+                <a:ext uri="{96DAC541-7B7A-43D3-8B79-37D633B846F1}">
+                  <asvg:svgBlip xmlns:asvg="http://schemas.microsoft.com/office/drawing/2016/SVG/main" r:embed="rId5"/>
+                </a:ext>
+              </a:extLst>
+            </a:blip>
+            <a:stretch>
+              <a:fillRect/>
+            </a:stretch>
+          </p:blipFill>
+          <p:spPr>
+            <a:xfrm>
+              <a:off x="1952828" y="1951206"/>
+              <a:ext cx="1010866" cy="1010866"/>
+            </a:xfrm>
+            <a:prstGeom prst="rect">
+              <a:avLst/>
+            </a:prstGeom>
+          </p:spPr>
+        </p:pic>
+        <p:sp>
+          <p:nvSpPr>
+            <p:cNvPr id="18" name="文本框 17">
+              <a:extLst>
+                <a:ext uri="{FF2B5EF4-FFF2-40B4-BE49-F238E27FC236}">
+                  <a16:creationId xmlns:a16="http://schemas.microsoft.com/office/drawing/2014/main" id="{4CEB1D6B-8249-86AC-C948-88281C4B97F6}"/>
+                </a:ext>
+              </a:extLst>
+            </p:cNvPr>
+            <p:cNvSpPr txBox="1"/>
+            <p:nvPr/>
+          </p:nvSpPr>
+          <p:spPr>
+            <a:xfrm>
+              <a:off x="1551939" y="2961241"/>
+              <a:ext cx="1744495" cy="369332"/>
+            </a:xfrm>
+            <a:prstGeom prst="rect">
+              <a:avLst/>
+            </a:prstGeom>
+            <a:noFill/>
+          </p:spPr>
+          <p:txBody>
+            <a:bodyPr wrap="square" rtlCol="0">
+              <a:spAutoFit/>
+            </a:bodyPr>
+            <a:lstStyle/>
+            <a:p>
+              <a:pPr algn="ctr"/>
+              <a:r>
+                <a:rPr lang="zh-CN" altLang="en-US" dirty="0">
+                  <a:latin typeface="Times New Roman" panose="02020603050405020304" pitchFamily="18" charset="0"/>
+                  <a:ea typeface="宋体" panose="02010600030101010101" pitchFamily="2" charset="-122"/>
+                </a:rPr>
+                <a:t>测试集</a:t>
+              </a:r>
+              <a:r>
+                <a:rPr lang="en-US" altLang="zh-CN" dirty="0">
+                  <a:latin typeface="Times New Roman" panose="02020603050405020304" pitchFamily="18" charset="0"/>
+                  <a:ea typeface="宋体" panose="02010600030101010101" pitchFamily="2" charset="-122"/>
+                </a:rPr>
+                <a:t>&amp;</a:t>
+              </a:r>
+              <a:r>
+                <a:rPr lang="zh-CN" altLang="en-US" dirty="0">
+                  <a:latin typeface="Times New Roman" panose="02020603050405020304" pitchFamily="18" charset="0"/>
+                  <a:ea typeface="宋体" panose="02010600030101010101" pitchFamily="2" charset="-122"/>
+                </a:rPr>
+                <a:t>验证集</a:t>
+              </a:r>
+            </a:p>
+          </p:txBody>
+        </p:sp>
+      </p:grpSp>
+      <p:cxnSp>
+        <p:nvCxnSpPr>
+          <p:cNvPr id="20" name="直接箭头连接符 19">
+            <a:extLst>
+              <a:ext uri="{FF2B5EF4-FFF2-40B4-BE49-F238E27FC236}">
+                <a16:creationId xmlns:a16="http://schemas.microsoft.com/office/drawing/2014/main" id="{C2474E62-4792-313D-27C1-690412774C18}"/>
+              </a:ext>
+            </a:extLst>
+          </p:cNvPr>
+          <p:cNvCxnSpPr>
+            <a:endCxn id="11" idx="1"/>
+          </p:cNvCxnSpPr>
+          <p:nvPr/>
+        </p:nvCxnSpPr>
+        <p:spPr>
+          <a:xfrm flipV="1">
+            <a:off x="1193520" y="1506117"/>
+            <a:ext cx="788217" cy="745668"/>
+          </a:xfrm>
+          <a:prstGeom prst="bentConnector3">
+            <a:avLst>
+              <a:gd name="adj1" fmla="val 1061"/>
+            </a:avLst>
+          </a:prstGeom>
+          <a:ln w="19050">
+            <a:solidFill>
+              <a:schemeClr val="tx1"/>
+            </a:solidFill>
+            <a:tailEnd type="triangle"/>
+          </a:ln>
+        </p:spPr>
+        <p:style>
+          <a:lnRef idx="1">
+            <a:schemeClr val="accent1"/>
+          </a:lnRef>
+          <a:fillRef idx="0">
+            <a:schemeClr val="accent1"/>
+          </a:fillRef>
+          <a:effectRef idx="0">
+            <a:schemeClr val="accent1"/>
+          </a:effectRef>
+          <a:fontRef idx="minor">
+            <a:schemeClr val="tx1"/>
+          </a:fontRef>
+        </p:style>
+      </p:cxnSp>
+      <p:cxnSp>
+        <p:nvCxnSpPr>
+          <p:cNvPr id="23" name="直接箭头连接符 22">
+            <a:extLst>
+              <a:ext uri="{FF2B5EF4-FFF2-40B4-BE49-F238E27FC236}">
+                <a16:creationId xmlns:a16="http://schemas.microsoft.com/office/drawing/2014/main" id="{877A4D0A-AD67-C405-76F3-5365C78C2968}"/>
+              </a:ext>
+            </a:extLst>
+          </p:cNvPr>
+          <p:cNvCxnSpPr>
+            <a:stCxn id="9" idx="2"/>
+            <a:endCxn id="17" idx="1"/>
+          </p:cNvCxnSpPr>
+          <p:nvPr/>
+        </p:nvCxnSpPr>
+        <p:spPr>
+          <a:xfrm rot="16200000" flipH="1">
+            <a:off x="860116" y="4490547"/>
+            <a:ext cx="1450594" cy="782799"/>
+          </a:xfrm>
+          <a:prstGeom prst="bentConnector2">
+            <a:avLst/>
+          </a:prstGeom>
+          <a:ln w="19050">
+            <a:solidFill>
+              <a:schemeClr val="tx1"/>
+            </a:solidFill>
+            <a:tailEnd type="triangle"/>
+          </a:ln>
+        </p:spPr>
+        <p:style>
+          <a:lnRef idx="1">
+            <a:schemeClr val="accent1"/>
+          </a:lnRef>
+          <a:fillRef idx="0">
+            <a:schemeClr val="accent1"/>
+          </a:fillRef>
+          <a:effectRef idx="0">
+            <a:schemeClr val="accent1"/>
+          </a:effectRef>
+          <a:fontRef idx="minor">
+            <a:schemeClr val="tx1"/>
+          </a:fontRef>
+        </p:style>
+      </p:cxnSp>
+      <p:sp>
+        <p:nvSpPr>
+          <p:cNvPr id="27" name="文本框 26">
+            <a:extLst>
+              <a:ext uri="{FF2B5EF4-FFF2-40B4-BE49-F238E27FC236}">
+                <a16:creationId xmlns:a16="http://schemas.microsoft.com/office/drawing/2014/main" id="{97FCBC68-70CA-4FCF-880A-CB0E21ED6E73}"/>
+              </a:ext>
+            </a:extLst>
+          </p:cNvPr>
+          <p:cNvSpPr txBox="1"/>
+          <p:nvPr/>
+        </p:nvSpPr>
+        <p:spPr>
+          <a:xfrm>
+            <a:off x="477143" y="183934"/>
+            <a:ext cx="2003730" cy="400110"/>
+          </a:xfrm>
+          <a:prstGeom prst="rect">
+            <a:avLst/>
+          </a:prstGeom>
+          <a:noFill/>
+        </p:spPr>
+        <p:txBody>
+          <a:bodyPr wrap="square" rtlCol="0">
+            <a:spAutoFit/>
+          </a:bodyPr>
+          <a:lstStyle/>
+          <a:p>
+            <a:r>
+              <a:rPr lang="en-US" altLang="zh-CN" dirty="0">
+                <a:latin typeface="Times New Roman" panose="02020603050405020304" pitchFamily="18" charset="0"/>
+                <a:ea typeface="宋体" panose="02010600030101010101" pitchFamily="2" charset="-122"/>
+              </a:rPr>
+              <a:t>1.</a:t>
+            </a:r>
+            <a:r>
+              <a:rPr lang="zh-CN" altLang="en-US" sz="2000" dirty="0">
+                <a:latin typeface="Times New Roman" panose="02020603050405020304" pitchFamily="18" charset="0"/>
+                <a:ea typeface="宋体" panose="02010600030101010101" pitchFamily="2" charset="-122"/>
+              </a:rPr>
+              <a:t>数据预处理</a:t>
+            </a:r>
+            <a:endParaRPr lang="zh-CN" altLang="en-US" dirty="0">
+              <a:latin typeface="Times New Roman" panose="02020603050405020304" pitchFamily="18" charset="0"/>
+              <a:ea typeface="宋体" panose="02010600030101010101" pitchFamily="2" charset="-122"/>
+            </a:endParaRPr>
+          </a:p>
+        </p:txBody>
+      </p:sp>
+      <p:sp>
+        <p:nvSpPr>
+          <p:cNvPr id="24" name="矩形 23">
+            <a:extLst>
+              <a:ext uri="{FF2B5EF4-FFF2-40B4-BE49-F238E27FC236}">
+                <a16:creationId xmlns:a16="http://schemas.microsoft.com/office/drawing/2014/main" id="{5D737D50-B313-7D6D-034C-E7F32CB47B11}"/>
+              </a:ext>
+            </a:extLst>
+          </p:cNvPr>
+          <p:cNvSpPr/>
+          <p:nvPr/>
+        </p:nvSpPr>
+        <p:spPr>
+          <a:xfrm>
+            <a:off x="4401129" y="143723"/>
+            <a:ext cx="3708211" cy="1830560"/>
+          </a:xfrm>
+          <a:prstGeom prst="rect">
+            <a:avLst/>
+          </a:prstGeom>
+          <a:solidFill>
+            <a:schemeClr val="tx2">
+              <a:lumMod val="20000"/>
+              <a:lumOff val="80000"/>
+            </a:schemeClr>
+          </a:solidFill>
+          <a:ln w="19050">
+            <a:solidFill>
+              <a:schemeClr val="tx1"/>
+            </a:solidFill>
+          </a:ln>
+        </p:spPr>
+        <p:style>
+          <a:lnRef idx="2">
+            <a:schemeClr val="accent1">
+              <a:shade val="15000"/>
+            </a:schemeClr>
+          </a:lnRef>
+          <a:fillRef idx="1">
+            <a:schemeClr val="accent1"/>
+          </a:fillRef>
+          <a:effectRef idx="0">
+            <a:schemeClr val="accent1"/>
+          </a:effectRef>
+          <a:fontRef idx="minor">
+            <a:schemeClr val="lt1"/>
+          </a:fontRef>
+        </p:style>
+        <p:txBody>
+          <a:bodyPr rtlCol="0" anchor="ctr"/>
+          <a:lstStyle/>
+          <a:p>
+            <a:pPr algn="ctr"/>
+            <a:endParaRPr lang="zh-CN" altLang="en-US">
+              <a:latin typeface="Times New Roman" panose="02020603050405020304" pitchFamily="18" charset="0"/>
+              <a:ea typeface="宋体" panose="02010600030101010101" pitchFamily="2" charset="-122"/>
+            </a:endParaRPr>
+          </a:p>
+        </p:txBody>
+      </p:sp>
+      <p:sp>
+        <p:nvSpPr>
+          <p:cNvPr id="29" name="文本框 28">
+            <a:extLst>
+              <a:ext uri="{FF2B5EF4-FFF2-40B4-BE49-F238E27FC236}">
+                <a16:creationId xmlns:a16="http://schemas.microsoft.com/office/drawing/2014/main" id="{C5C31074-6261-1CD7-CF57-0F23AF6C309E}"/>
+              </a:ext>
+            </a:extLst>
+          </p:cNvPr>
+          <p:cNvSpPr txBox="1"/>
+          <p:nvPr/>
+        </p:nvSpPr>
+        <p:spPr>
+          <a:xfrm>
+            <a:off x="4401129" y="203126"/>
+            <a:ext cx="1553578" cy="400110"/>
+          </a:xfrm>
+          <a:prstGeom prst="rect">
+            <a:avLst/>
+          </a:prstGeom>
+          <a:noFill/>
+        </p:spPr>
+        <p:txBody>
+          <a:bodyPr wrap="square" rtlCol="0">
+            <a:spAutoFit/>
+          </a:bodyPr>
+          <a:lstStyle/>
+          <a:p>
+            <a:r>
+              <a:rPr lang="en-US" altLang="zh-CN" sz="2000" dirty="0">
+                <a:latin typeface="Times New Roman" panose="02020603050405020304" pitchFamily="18" charset="0"/>
+                <a:ea typeface="宋体" panose="02010600030101010101" pitchFamily="2" charset="-122"/>
+              </a:rPr>
+              <a:t>3.</a:t>
+            </a:r>
+            <a:r>
+              <a:rPr lang="zh-CN" altLang="en-US" sz="2000" dirty="0">
+                <a:latin typeface="Times New Roman" panose="02020603050405020304" pitchFamily="18" charset="0"/>
+                <a:ea typeface="宋体" panose="02010600030101010101" pitchFamily="2" charset="-122"/>
+              </a:rPr>
+              <a:t>损失函数</a:t>
+            </a:r>
+          </a:p>
+        </p:txBody>
+      </p:sp>
+      <p:sp>
+        <p:nvSpPr>
+          <p:cNvPr id="26" name="文本框 25">
+            <a:extLst>
+              <a:ext uri="{FF2B5EF4-FFF2-40B4-BE49-F238E27FC236}">
+                <a16:creationId xmlns:a16="http://schemas.microsoft.com/office/drawing/2014/main" id="{D2D857E4-F963-AECD-7636-CD26E67BAEF8}"/>
+              </a:ext>
+            </a:extLst>
+          </p:cNvPr>
+          <p:cNvSpPr txBox="1"/>
+          <p:nvPr/>
+        </p:nvSpPr>
+        <p:spPr>
+          <a:xfrm>
+            <a:off x="5067100" y="840849"/>
+            <a:ext cx="2660839" cy="453762"/>
+          </a:xfrm>
+          <a:prstGeom prst="rect">
+            <a:avLst/>
+          </a:prstGeom>
+          <a:noFill/>
+        </p:spPr>
+        <p:txBody>
+          <a:bodyPr wrap="square" rtlCol="0">
+            <a:spAutoFit/>
+          </a:bodyPr>
+          <a:lstStyle/>
+          <a:p>
+            <a:pPr algn="ctr"/>
+            <a:r>
+              <a:rPr lang="zh-CN" altLang="en-US" dirty="0">
+                <a:latin typeface="Times New Roman" panose="02020603050405020304" pitchFamily="18" charset="0"/>
+                <a:ea typeface="宋体" panose="02010600030101010101" pitchFamily="2" charset="-122"/>
+              </a:rPr>
+              <a:t>损失函数</a:t>
+            </a:r>
+            <a:r>
+              <a:rPr lang="en-US" altLang="zh-CN" dirty="0">
+                <a:latin typeface="Times New Roman" panose="02020603050405020304" pitchFamily="18" charset="0"/>
+                <a:ea typeface="宋体" panose="02010600030101010101" pitchFamily="2" charset="-122"/>
+              </a:rPr>
+              <a:t>MMSE</a:t>
+            </a:r>
+            <a:endParaRPr lang="zh-CN" altLang="en-US" dirty="0">
+              <a:latin typeface="Times New Roman" panose="02020603050405020304" pitchFamily="18" charset="0"/>
+              <a:ea typeface="宋体" panose="02010600030101010101" pitchFamily="2" charset="-122"/>
+            </a:endParaRPr>
+          </a:p>
+        </p:txBody>
+      </p:sp>
+      <p:sp>
+        <p:nvSpPr>
+          <p:cNvPr id="31" name="文本框 30">
+            <a:extLst>
+              <a:ext uri="{FF2B5EF4-FFF2-40B4-BE49-F238E27FC236}">
+                <a16:creationId xmlns:a16="http://schemas.microsoft.com/office/drawing/2014/main" id="{CB16AABA-2E16-F04B-CF7F-4763A5726CDA}"/>
+              </a:ext>
+            </a:extLst>
+          </p:cNvPr>
+          <p:cNvSpPr txBox="1"/>
+          <p:nvPr/>
+        </p:nvSpPr>
+        <p:spPr>
+          <a:xfrm>
+            <a:off x="8985763" y="851408"/>
+            <a:ext cx="2666277" cy="453763"/>
+          </a:xfrm>
+          <a:prstGeom prst="rect">
+            <a:avLst/>
+          </a:prstGeom>
+          <a:noFill/>
+        </p:spPr>
+        <p:txBody>
+          <a:bodyPr wrap="square" rtlCol="0">
+            <a:spAutoFit/>
+          </a:bodyPr>
+          <a:lstStyle/>
+          <a:p>
+            <a:pPr algn="ctr"/>
+            <a:r>
+              <a:rPr lang="zh-CN" altLang="en-US" dirty="0">
+                <a:latin typeface="Times New Roman" panose="02020603050405020304" pitchFamily="18" charset="0"/>
+                <a:ea typeface="宋体" panose="02010600030101010101" pitchFamily="2" charset="-122"/>
+              </a:rPr>
+              <a:t>优化器</a:t>
+            </a:r>
+            <a:r>
+              <a:rPr lang="en-US" altLang="zh-CN" dirty="0" err="1">
+                <a:latin typeface="Times New Roman" panose="02020603050405020304" pitchFamily="18" charset="0"/>
+                <a:ea typeface="宋体" panose="02010600030101010101" pitchFamily="2" charset="-122"/>
+              </a:rPr>
+              <a:t>AdamW</a:t>
+            </a:r>
+            <a:endParaRPr lang="zh-CN" altLang="en-US" dirty="0">
+              <a:latin typeface="Times New Roman" panose="02020603050405020304" pitchFamily="18" charset="0"/>
+              <a:ea typeface="宋体" panose="02010600030101010101" pitchFamily="2" charset="-122"/>
+            </a:endParaRPr>
+          </a:p>
+        </p:txBody>
+      </p:sp>
+      <p:sp>
+        <p:nvSpPr>
+          <p:cNvPr id="30" name="矩形 29">
+            <a:extLst>
+              <a:ext uri="{FF2B5EF4-FFF2-40B4-BE49-F238E27FC236}">
+                <a16:creationId xmlns:a16="http://schemas.microsoft.com/office/drawing/2014/main" id="{36EF50B6-8614-6B1D-AA4F-0B8AA43D4065}"/>
+              </a:ext>
+            </a:extLst>
+          </p:cNvPr>
+          <p:cNvSpPr/>
+          <p:nvPr/>
+        </p:nvSpPr>
+        <p:spPr>
+          <a:xfrm>
+            <a:off x="8922950" y="143723"/>
+            <a:ext cx="2791907" cy="1830560"/>
+          </a:xfrm>
+          <a:prstGeom prst="rect">
+            <a:avLst/>
+          </a:prstGeom>
+          <a:solidFill>
+            <a:schemeClr val="accent1">
+              <a:lumMod val="20000"/>
+              <a:lumOff val="80000"/>
+            </a:schemeClr>
+          </a:solidFill>
+          <a:ln w="19050">
+            <a:solidFill>
+              <a:schemeClr val="tx1"/>
+            </a:solidFill>
+          </a:ln>
+        </p:spPr>
+        <p:style>
+          <a:lnRef idx="2">
+            <a:schemeClr val="accent1">
+              <a:shade val="15000"/>
+            </a:schemeClr>
+          </a:lnRef>
+          <a:fillRef idx="1">
+            <a:schemeClr val="accent1"/>
+          </a:fillRef>
+          <a:effectRef idx="0">
+            <a:schemeClr val="accent1"/>
+          </a:effectRef>
+          <a:fontRef idx="minor">
+            <a:schemeClr val="lt1"/>
+          </a:fontRef>
+        </p:style>
+        <p:txBody>
+          <a:bodyPr rtlCol="0" anchor="ctr"/>
+          <a:lstStyle/>
+          <a:p>
+            <a:pPr algn="ctr"/>
+            <a:endParaRPr lang="zh-CN" altLang="en-US" dirty="0">
+              <a:latin typeface="Times New Roman" panose="02020603050405020304" pitchFamily="18" charset="0"/>
+              <a:ea typeface="宋体" panose="02010600030101010101" pitchFamily="2" charset="-122"/>
+            </a:endParaRPr>
+          </a:p>
+        </p:txBody>
+      </p:sp>
+      <p:sp>
+        <p:nvSpPr>
+          <p:cNvPr id="32" name="文本框 31">
+            <a:extLst>
+              <a:ext uri="{FF2B5EF4-FFF2-40B4-BE49-F238E27FC236}">
+                <a16:creationId xmlns:a16="http://schemas.microsoft.com/office/drawing/2014/main" id="{CB0A4F75-3FEC-401D-7873-A0D85F382FC9}"/>
+              </a:ext>
+            </a:extLst>
+          </p:cNvPr>
+          <p:cNvSpPr txBox="1"/>
+          <p:nvPr/>
+        </p:nvSpPr>
+        <p:spPr>
+          <a:xfrm>
+            <a:off x="9001270" y="224141"/>
+            <a:ext cx="1207062" cy="453763"/>
+          </a:xfrm>
+          <a:prstGeom prst="rect">
+            <a:avLst/>
+          </a:prstGeom>
+          <a:noFill/>
+        </p:spPr>
+        <p:txBody>
+          <a:bodyPr wrap="square" rtlCol="0">
+            <a:spAutoFit/>
+          </a:bodyPr>
+          <a:lstStyle/>
+          <a:p>
+            <a:pPr algn="ctr"/>
+            <a:r>
+              <a:rPr lang="en-US" altLang="zh-CN" dirty="0">
+                <a:latin typeface="Times New Roman" panose="02020603050405020304" pitchFamily="18" charset="0"/>
+                <a:ea typeface="宋体" panose="02010600030101010101" pitchFamily="2" charset="-122"/>
+              </a:rPr>
+              <a:t>4.</a:t>
+            </a:r>
+            <a:r>
+              <a:rPr lang="zh-CN" altLang="en-US" dirty="0">
+                <a:latin typeface="Times New Roman" panose="02020603050405020304" pitchFamily="18" charset="0"/>
+                <a:ea typeface="宋体" panose="02010600030101010101" pitchFamily="2" charset="-122"/>
+              </a:rPr>
+              <a:t>优化</a:t>
+            </a:r>
+          </a:p>
+        </p:txBody>
+      </p:sp>
+      <p:grpSp>
+        <p:nvGrpSpPr>
+          <p:cNvPr id="35" name="组合 34">
+            <a:extLst>
+              <a:ext uri="{FF2B5EF4-FFF2-40B4-BE49-F238E27FC236}">
+                <a16:creationId xmlns:a16="http://schemas.microsoft.com/office/drawing/2014/main" id="{DEF30DAD-BEC4-8EAD-10A9-14338510D8C5}"/>
+              </a:ext>
+            </a:extLst>
+          </p:cNvPr>
+          <p:cNvGrpSpPr/>
+          <p:nvPr/>
+        </p:nvGrpSpPr>
+        <p:grpSpPr>
+          <a:xfrm>
+            <a:off x="4440845" y="2221720"/>
+            <a:ext cx="7274011" cy="4502699"/>
+            <a:chOff x="3897549" y="2859122"/>
+            <a:chExt cx="5625830" cy="3664895"/>
           </a:xfrm>
         </p:grpSpPr>
         <p:sp>
           <p:nvSpPr>
-            <p:cNvPr id="4" name="矩形 3">
+            <p:cNvPr id="33" name="矩形 32">
               <a:extLst>
                 <a:ext uri="{FF2B5EF4-FFF2-40B4-BE49-F238E27FC236}">
-                  <a16:creationId xmlns:a16="http://schemas.microsoft.com/office/drawing/2014/main" id="{BE815B88-F159-9327-4D02-A5E43CECC3EE}"/>
+                  <a16:creationId xmlns:a16="http://schemas.microsoft.com/office/drawing/2014/main" id="{0B56B3B9-E292-3BD7-4F13-0CA23124BEA3}"/>
                 </a:ext>
               </a:extLst>
             </p:cNvPr>
@@ -8300,13 +9114,18 @@
           </p:nvSpPr>
           <p:spPr>
             <a:xfrm>
-              <a:off x="207525" y="1110575"/>
-              <a:ext cx="2856397" cy="5413442"/>
+              <a:off x="3897549" y="2859122"/>
+              <a:ext cx="5625830" cy="3664895"/>
             </a:xfrm>
             <a:prstGeom prst="rect">
               <a:avLst/>
             </a:prstGeom>
-            <a:noFill/>
+            <a:solidFill>
+              <a:schemeClr val="accent5">
+                <a:lumMod val="60000"/>
+                <a:lumOff val="40000"/>
+              </a:schemeClr>
+            </a:solidFill>
             <a:ln w="19050">
               <a:solidFill>
                 <a:schemeClr val="tx1"/>
@@ -8341,405 +9160,12 @@
             </a:p>
           </p:txBody>
         </p:sp>
-        <p:grpSp>
-          <p:nvGrpSpPr>
-            <p:cNvPr id="10" name="组合 9">
+        <p:sp>
+          <p:nvSpPr>
+            <p:cNvPr id="34" name="文本框 33">
               <a:extLst>
                 <a:ext uri="{FF2B5EF4-FFF2-40B4-BE49-F238E27FC236}">
-                  <a16:creationId xmlns:a16="http://schemas.microsoft.com/office/drawing/2014/main" id="{AF823AAC-39F7-DB5C-F04C-7F046E61A97B}"/>
-                </a:ext>
-              </a:extLst>
-            </p:cNvPr>
-            <p:cNvGrpSpPr/>
-            <p:nvPr/>
-          </p:nvGrpSpPr>
-          <p:grpSpPr>
-            <a:xfrm>
-              <a:off x="207525" y="2859122"/>
-              <a:ext cx="1181100" cy="1550432"/>
-              <a:chOff x="253731" y="3345505"/>
-              <a:chExt cx="1181100" cy="1550432"/>
-            </a:xfrm>
-          </p:grpSpPr>
-          <p:pic>
-            <p:nvPicPr>
-              <p:cNvPr id="7" name="图形 6">
-                <a:extLst>
-                  <a:ext uri="{FF2B5EF4-FFF2-40B4-BE49-F238E27FC236}">
-                    <a16:creationId xmlns:a16="http://schemas.microsoft.com/office/drawing/2014/main" id="{DA6B5533-0055-6165-5AF5-6EF0FAEEC02E}"/>
-                  </a:ext>
-                </a:extLst>
-              </p:cNvPr>
-              <p:cNvPicPr>
-                <a:picLocks noChangeAspect="1"/>
-              </p:cNvPicPr>
-              <p:nvPr/>
-            </p:nvPicPr>
-            <p:blipFill>
-              <a:blip r:embed="rId2">
-                <a:extLst>
-                  <a:ext uri="{96DAC541-7B7A-43D3-8B79-37D633B846F1}">
-                    <asvg:svgBlip xmlns:asvg="http://schemas.microsoft.com/office/drawing/2016/SVG/main" r:embed="rId3"/>
-                  </a:ext>
-                </a:extLst>
-              </a:blip>
-              <a:stretch>
-                <a:fillRect/>
-              </a:stretch>
-            </p:blipFill>
-            <p:spPr>
-              <a:xfrm>
-                <a:off x="253731" y="3345505"/>
-                <a:ext cx="1181100" cy="1181100"/>
-              </a:xfrm>
-              <a:prstGeom prst="rect">
-                <a:avLst/>
-              </a:prstGeom>
-            </p:spPr>
-          </p:pic>
-          <p:sp>
-            <p:nvSpPr>
-              <p:cNvPr id="9" name="文本框 8">
-                <a:extLst>
-                  <a:ext uri="{FF2B5EF4-FFF2-40B4-BE49-F238E27FC236}">
-                    <a16:creationId xmlns:a16="http://schemas.microsoft.com/office/drawing/2014/main" id="{17E255EC-BE87-4986-27C1-C19801ECB154}"/>
-                  </a:ext>
-                </a:extLst>
-              </p:cNvPr>
-              <p:cNvSpPr txBox="1"/>
-              <p:nvPr/>
-            </p:nvSpPr>
-            <p:spPr>
-              <a:xfrm>
-                <a:off x="386270" y="4526605"/>
-                <a:ext cx="916022" cy="369332"/>
-              </a:xfrm>
-              <a:prstGeom prst="rect">
-                <a:avLst/>
-              </a:prstGeom>
-              <a:noFill/>
-            </p:spPr>
-            <p:txBody>
-              <a:bodyPr wrap="square" rtlCol="0">
-                <a:spAutoFit/>
-              </a:bodyPr>
-              <a:lstStyle/>
-              <a:p>
-                <a:pPr algn="ctr"/>
-                <a:r>
-                  <a:rPr lang="zh-CN" altLang="en-US" dirty="0">
-                    <a:latin typeface="Times New Roman" panose="02020603050405020304" pitchFamily="18" charset="0"/>
-                    <a:ea typeface="宋体" panose="02010600030101010101" pitchFamily="2" charset="-122"/>
-                  </a:rPr>
-                  <a:t>数据集</a:t>
-                </a:r>
-              </a:p>
-            </p:txBody>
-          </p:sp>
-        </p:grpSp>
-        <p:grpSp>
-          <p:nvGrpSpPr>
-            <p:cNvPr id="15" name="组合 14">
-              <a:extLst>
-                <a:ext uri="{FF2B5EF4-FFF2-40B4-BE49-F238E27FC236}">
-                  <a16:creationId xmlns:a16="http://schemas.microsoft.com/office/drawing/2014/main" id="{4E5CAB59-A72E-A296-9E17-82654A1046FD}"/>
-                </a:ext>
-              </a:extLst>
-            </p:cNvPr>
-            <p:cNvGrpSpPr/>
-            <p:nvPr/>
-          </p:nvGrpSpPr>
-          <p:grpSpPr>
-            <a:xfrm>
-              <a:off x="1446991" y="1746765"/>
-              <a:ext cx="1010866" cy="1340795"/>
-              <a:chOff x="1952828" y="1951206"/>
-              <a:chExt cx="1010866" cy="1340795"/>
-            </a:xfrm>
-          </p:grpSpPr>
-          <p:pic>
-            <p:nvPicPr>
-              <p:cNvPr id="11" name="图形 10">
-                <a:extLst>
-                  <a:ext uri="{FF2B5EF4-FFF2-40B4-BE49-F238E27FC236}">
-                    <a16:creationId xmlns:a16="http://schemas.microsoft.com/office/drawing/2014/main" id="{A8C110EA-7ED7-0E8D-28A7-1FCB9C90CB08}"/>
-                  </a:ext>
-                </a:extLst>
-              </p:cNvPr>
-              <p:cNvPicPr>
-                <a:picLocks noChangeAspect="1"/>
-              </p:cNvPicPr>
-              <p:nvPr/>
-            </p:nvPicPr>
-            <p:blipFill>
-              <a:blip r:embed="rId4">
-                <a:extLst>
-                  <a:ext uri="{96DAC541-7B7A-43D3-8B79-37D633B846F1}">
-                    <asvg:svgBlip xmlns:asvg="http://schemas.microsoft.com/office/drawing/2016/SVG/main" r:embed="rId5"/>
-                  </a:ext>
-                </a:extLst>
-              </a:blip>
-              <a:stretch>
-                <a:fillRect/>
-              </a:stretch>
-            </p:blipFill>
-            <p:spPr>
-              <a:xfrm>
-                <a:off x="1952828" y="1951206"/>
-                <a:ext cx="1010866" cy="1010866"/>
-              </a:xfrm>
-              <a:prstGeom prst="rect">
-                <a:avLst/>
-              </a:prstGeom>
-            </p:spPr>
-          </p:pic>
-          <p:sp>
-            <p:nvSpPr>
-              <p:cNvPr id="13" name="文本框 12">
-                <a:extLst>
-                  <a:ext uri="{FF2B5EF4-FFF2-40B4-BE49-F238E27FC236}">
-                    <a16:creationId xmlns:a16="http://schemas.microsoft.com/office/drawing/2014/main" id="{82F0A2B0-4069-5DDF-1325-97D24DB56E3A}"/>
-                  </a:ext>
-                </a:extLst>
-              </p:cNvPr>
-              <p:cNvSpPr txBox="1"/>
-              <p:nvPr/>
-            </p:nvSpPr>
-            <p:spPr>
-              <a:xfrm>
-                <a:off x="1952829" y="2922669"/>
-                <a:ext cx="1010865" cy="369332"/>
-              </a:xfrm>
-              <a:prstGeom prst="rect">
-                <a:avLst/>
-              </a:prstGeom>
-              <a:noFill/>
-            </p:spPr>
-            <p:txBody>
-              <a:bodyPr wrap="square" rtlCol="0">
-                <a:spAutoFit/>
-              </a:bodyPr>
-              <a:lstStyle/>
-              <a:p>
-                <a:pPr algn="ctr"/>
-                <a:r>
-                  <a:rPr lang="zh-CN" altLang="en-US" dirty="0">
-                    <a:latin typeface="Times New Roman" panose="02020603050405020304" pitchFamily="18" charset="0"/>
-                    <a:ea typeface="宋体" panose="02010600030101010101" pitchFamily="2" charset="-122"/>
-                  </a:rPr>
-                  <a:t>训练集</a:t>
-                </a:r>
-              </a:p>
-            </p:txBody>
-          </p:sp>
-        </p:grpSp>
-        <p:grpSp>
-          <p:nvGrpSpPr>
-            <p:cNvPr id="16" name="组合 15">
-              <a:extLst>
-                <a:ext uri="{FF2B5EF4-FFF2-40B4-BE49-F238E27FC236}">
-                  <a16:creationId xmlns:a16="http://schemas.microsoft.com/office/drawing/2014/main" id="{E82F5BCD-D156-168B-7BF2-377C02E5BECB}"/>
-                </a:ext>
-              </a:extLst>
-            </p:cNvPr>
-            <p:cNvGrpSpPr/>
-            <p:nvPr/>
-          </p:nvGrpSpPr>
-          <p:grpSpPr>
-            <a:xfrm>
-              <a:off x="1042046" y="5084807"/>
-              <a:ext cx="1744495" cy="1379367"/>
-              <a:chOff x="1551939" y="1951206"/>
-              <a:chExt cx="1744495" cy="1379367"/>
-            </a:xfrm>
-          </p:grpSpPr>
-          <p:pic>
-            <p:nvPicPr>
-              <p:cNvPr id="17" name="图形 16">
-                <a:extLst>
-                  <a:ext uri="{FF2B5EF4-FFF2-40B4-BE49-F238E27FC236}">
-                    <a16:creationId xmlns:a16="http://schemas.microsoft.com/office/drawing/2014/main" id="{AAAE8D9B-EDAD-2E79-D706-2E3148F5E69B}"/>
-                  </a:ext>
-                </a:extLst>
-              </p:cNvPr>
-              <p:cNvPicPr>
-                <a:picLocks noChangeAspect="1"/>
-              </p:cNvPicPr>
-              <p:nvPr/>
-            </p:nvPicPr>
-            <p:blipFill>
-              <a:blip r:embed="rId4">
-                <a:extLst>
-                  <a:ext uri="{96DAC541-7B7A-43D3-8B79-37D633B846F1}">
-                    <asvg:svgBlip xmlns:asvg="http://schemas.microsoft.com/office/drawing/2016/SVG/main" r:embed="rId5"/>
-                  </a:ext>
-                </a:extLst>
-              </a:blip>
-              <a:stretch>
-                <a:fillRect/>
-              </a:stretch>
-            </p:blipFill>
-            <p:spPr>
-              <a:xfrm>
-                <a:off x="1952828" y="1951206"/>
-                <a:ext cx="1010866" cy="1010866"/>
-              </a:xfrm>
-              <a:prstGeom prst="rect">
-                <a:avLst/>
-              </a:prstGeom>
-            </p:spPr>
-          </p:pic>
-          <p:sp>
-            <p:nvSpPr>
-              <p:cNvPr id="18" name="文本框 17">
-                <a:extLst>
-                  <a:ext uri="{FF2B5EF4-FFF2-40B4-BE49-F238E27FC236}">
-                    <a16:creationId xmlns:a16="http://schemas.microsoft.com/office/drawing/2014/main" id="{4CEB1D6B-8249-86AC-C948-88281C4B97F6}"/>
-                  </a:ext>
-                </a:extLst>
-              </p:cNvPr>
-              <p:cNvSpPr txBox="1"/>
-              <p:nvPr/>
-            </p:nvSpPr>
-            <p:spPr>
-              <a:xfrm>
-                <a:off x="1551939" y="2961241"/>
-                <a:ext cx="1744495" cy="369332"/>
-              </a:xfrm>
-              <a:prstGeom prst="rect">
-                <a:avLst/>
-              </a:prstGeom>
-              <a:noFill/>
-            </p:spPr>
-            <p:txBody>
-              <a:bodyPr wrap="square" rtlCol="0">
-                <a:spAutoFit/>
-              </a:bodyPr>
-              <a:lstStyle/>
-              <a:p>
-                <a:pPr algn="ctr"/>
-                <a:r>
-                  <a:rPr lang="zh-CN" altLang="en-US" dirty="0">
-                    <a:latin typeface="Times New Roman" panose="02020603050405020304" pitchFamily="18" charset="0"/>
-                    <a:ea typeface="宋体" panose="02010600030101010101" pitchFamily="2" charset="-122"/>
-                  </a:rPr>
-                  <a:t>测试集</a:t>
-                </a:r>
-                <a:r>
-                  <a:rPr lang="en-US" altLang="zh-CN" dirty="0">
-                    <a:latin typeface="Times New Roman" panose="02020603050405020304" pitchFamily="18" charset="0"/>
-                    <a:ea typeface="宋体" panose="02010600030101010101" pitchFamily="2" charset="-122"/>
-                  </a:rPr>
-                  <a:t>&amp;</a:t>
-                </a:r>
-                <a:r>
-                  <a:rPr lang="zh-CN" altLang="en-US" dirty="0">
-                    <a:latin typeface="Times New Roman" panose="02020603050405020304" pitchFamily="18" charset="0"/>
-                    <a:ea typeface="宋体" panose="02010600030101010101" pitchFamily="2" charset="-122"/>
-                  </a:rPr>
-                  <a:t>验证集</a:t>
-                </a:r>
-              </a:p>
-            </p:txBody>
-          </p:sp>
-        </p:grpSp>
-        <p:cxnSp>
-          <p:nvCxnSpPr>
-            <p:cNvPr id="20" name="直接箭头连接符 19">
-              <a:extLst>
-                <a:ext uri="{FF2B5EF4-FFF2-40B4-BE49-F238E27FC236}">
-                  <a16:creationId xmlns:a16="http://schemas.microsoft.com/office/drawing/2014/main" id="{C2474E62-4792-313D-27C1-690412774C18}"/>
-                </a:ext>
-              </a:extLst>
-            </p:cNvPr>
-            <p:cNvCxnSpPr>
-              <a:endCxn id="11" idx="1"/>
-            </p:cNvCxnSpPr>
-            <p:nvPr/>
-          </p:nvCxnSpPr>
-          <p:spPr>
-            <a:xfrm flipV="1">
-              <a:off x="797668" y="2252198"/>
-              <a:ext cx="649323" cy="606924"/>
-            </a:xfrm>
-            <a:prstGeom prst="bentConnector3">
-              <a:avLst>
-                <a:gd name="adj1" fmla="val 1061"/>
-              </a:avLst>
-            </a:prstGeom>
-            <a:ln w="19050">
-              <a:solidFill>
-                <a:schemeClr val="tx1"/>
-              </a:solidFill>
-              <a:tailEnd type="triangle"/>
-            </a:ln>
-          </p:spPr>
-          <p:style>
-            <a:lnRef idx="1">
-              <a:schemeClr val="accent1"/>
-            </a:lnRef>
-            <a:fillRef idx="0">
-              <a:schemeClr val="accent1"/>
-            </a:fillRef>
-            <a:effectRef idx="0">
-              <a:schemeClr val="accent1"/>
-            </a:effectRef>
-            <a:fontRef idx="minor">
-              <a:schemeClr val="tx1"/>
-            </a:fontRef>
-          </p:style>
-        </p:cxnSp>
-        <p:cxnSp>
-          <p:nvCxnSpPr>
-            <p:cNvPr id="23" name="直接箭头连接符 22">
-              <a:extLst>
-                <a:ext uri="{FF2B5EF4-FFF2-40B4-BE49-F238E27FC236}">
-                  <a16:creationId xmlns:a16="http://schemas.microsoft.com/office/drawing/2014/main" id="{877A4D0A-AD67-C405-76F3-5365C78C2968}"/>
-                </a:ext>
-              </a:extLst>
-            </p:cNvPr>
-            <p:cNvCxnSpPr>
-              <a:stCxn id="9" idx="2"/>
-              <a:endCxn id="17" idx="1"/>
-            </p:cNvCxnSpPr>
-            <p:nvPr/>
-          </p:nvCxnSpPr>
-          <p:spPr>
-            <a:xfrm rot="16200000" flipH="1">
-              <a:off x="530162" y="4677467"/>
-              <a:ext cx="1180686" cy="644860"/>
-            </a:xfrm>
-            <a:prstGeom prst="bentConnector2">
-              <a:avLst/>
-            </a:prstGeom>
-            <a:ln w="19050">
-              <a:solidFill>
-                <a:schemeClr val="tx1"/>
-              </a:solidFill>
-              <a:tailEnd type="triangle"/>
-            </a:ln>
-          </p:spPr>
-          <p:style>
-            <a:lnRef idx="1">
-              <a:schemeClr val="accent1"/>
-            </a:lnRef>
-            <a:fillRef idx="0">
-              <a:schemeClr val="accent1"/>
-            </a:fillRef>
-            <a:effectRef idx="0">
-              <a:schemeClr val="accent1"/>
-            </a:effectRef>
-            <a:fontRef idx="minor">
-              <a:schemeClr val="tx1"/>
-            </a:fontRef>
-          </p:style>
-        </p:cxnSp>
-        <p:sp>
-          <p:nvSpPr>
-            <p:cNvPr id="27" name="文本框 26">
-              <a:extLst>
-                <a:ext uri="{FF2B5EF4-FFF2-40B4-BE49-F238E27FC236}">
-                  <a16:creationId xmlns:a16="http://schemas.microsoft.com/office/drawing/2014/main" id="{97FCBC68-70CA-4FCF-880A-CB0E21ED6E73}"/>
+                  <a16:creationId xmlns:a16="http://schemas.microsoft.com/office/drawing/2014/main" id="{76F9FE90-4986-AD30-B5A7-C36D8C511602}"/>
                 </a:ext>
               </a:extLst>
             </p:cNvPr>
@@ -8748,8 +9174,8 @@
           </p:nvSpPr>
           <p:spPr>
             <a:xfrm>
-              <a:off x="207525" y="1176030"/>
-              <a:ext cx="1669042" cy="369332"/>
+              <a:off x="4045087" y="2937753"/>
+              <a:ext cx="2364402" cy="369332"/>
             </a:xfrm>
             <a:prstGeom prst="rect">
               <a:avLst/>
@@ -8768,24 +9194,281 @@
                   <a:latin typeface="Times New Roman" panose="02020603050405020304" pitchFamily="18" charset="0"/>
                   <a:ea typeface="宋体" panose="02010600030101010101" pitchFamily="2" charset="-122"/>
                 </a:rPr>
-                <a:t>1.</a:t>
+                <a:t>2. </a:t>
               </a:r>
               <a:r>
                 <a:rPr lang="zh-CN" altLang="en-US" dirty="0">
                   <a:latin typeface="Times New Roman" panose="02020603050405020304" pitchFamily="18" charset="0"/>
                   <a:ea typeface="宋体" panose="02010600030101010101" pitchFamily="2" charset="-122"/>
                 </a:rPr>
-                <a:t>数据预处理</a:t>
+                <a:t>多任务神经网络架构</a:t>
               </a:r>
             </a:p>
           </p:txBody>
         </p:sp>
+      </p:grpSp>
+      <p:sp>
+        <p:nvSpPr>
+          <p:cNvPr id="39" name="矩形 38">
+            <a:extLst>
+              <a:ext uri="{FF2B5EF4-FFF2-40B4-BE49-F238E27FC236}">
+                <a16:creationId xmlns:a16="http://schemas.microsoft.com/office/drawing/2014/main" id="{51757C63-CA56-11E4-ECCF-1B28BB3119E9}"/>
+              </a:ext>
+            </a:extLst>
+          </p:cNvPr>
+          <p:cNvSpPr/>
+          <p:nvPr/>
+        </p:nvSpPr>
+        <p:spPr>
+          <a:xfrm>
+            <a:off x="4799564" y="2843253"/>
+            <a:ext cx="6599612" cy="3729171"/>
+          </a:xfrm>
+          <a:prstGeom prst="rect">
+            <a:avLst/>
+          </a:prstGeom>
+          <a:noFill/>
+          <a:ln w="19050">
+            <a:solidFill>
+              <a:schemeClr val="tx1"/>
+            </a:solidFill>
+          </a:ln>
+        </p:spPr>
+        <p:style>
+          <a:lnRef idx="2">
+            <a:schemeClr val="accent1">
+              <a:shade val="15000"/>
+            </a:schemeClr>
+          </a:lnRef>
+          <a:fillRef idx="1">
+            <a:schemeClr val="accent1"/>
+          </a:fillRef>
+          <a:effectRef idx="0">
+            <a:schemeClr val="accent1"/>
+          </a:effectRef>
+          <a:fontRef idx="minor">
+            <a:schemeClr val="lt1"/>
+          </a:fontRef>
+        </p:style>
+        <p:txBody>
+          <a:bodyPr rtlCol="0" anchor="ctr"/>
+          <a:lstStyle/>
+          <a:p>
+            <a:pPr algn="ctr"/>
+            <a:endParaRPr lang="zh-CN" altLang="en-US">
+              <a:latin typeface="Times New Roman" panose="02020603050405020304" pitchFamily="18" charset="0"/>
+              <a:ea typeface="宋体" panose="02010600030101010101" pitchFamily="2" charset="-122"/>
+            </a:endParaRPr>
+          </a:p>
+        </p:txBody>
+      </p:sp>
+      <p:cxnSp>
+        <p:nvCxnSpPr>
+          <p:cNvPr id="43" name="直接箭头连接符 42">
+            <a:extLst>
+              <a:ext uri="{FF2B5EF4-FFF2-40B4-BE49-F238E27FC236}">
+                <a16:creationId xmlns:a16="http://schemas.microsoft.com/office/drawing/2014/main" id="{5E08EB73-0EBF-3E56-3EF2-874E8B28ED55}"/>
+              </a:ext>
+            </a:extLst>
+          </p:cNvPr>
+          <p:cNvCxnSpPr>
+            <a:cxnSpLocks/>
+            <a:stCxn id="13" idx="2"/>
+          </p:cNvCxnSpPr>
+          <p:nvPr/>
+        </p:nvCxnSpPr>
+        <p:spPr>
+          <a:xfrm rot="16200000" flipH="1">
+            <a:off x="2902114" y="2225615"/>
+            <a:ext cx="1666529" cy="2280186"/>
+          </a:xfrm>
+          <a:prstGeom prst="bentConnector2">
+            <a:avLst/>
+          </a:prstGeom>
+          <a:ln w="19050">
+            <a:solidFill>
+              <a:schemeClr val="tx1"/>
+            </a:solidFill>
+            <a:tailEnd type="triangle"/>
+          </a:ln>
+        </p:spPr>
+        <p:style>
+          <a:lnRef idx="1">
+            <a:schemeClr val="accent1"/>
+          </a:lnRef>
+          <a:fillRef idx="0">
+            <a:schemeClr val="accent1"/>
+          </a:fillRef>
+          <a:effectRef idx="0">
+            <a:schemeClr val="accent1"/>
+          </a:effectRef>
+          <a:fontRef idx="minor">
+            <a:schemeClr val="tx1"/>
+          </a:fontRef>
+        </p:style>
+      </p:cxnSp>
+      <p:grpSp>
+        <p:nvGrpSpPr>
+          <p:cNvPr id="94" name="组合 93">
+            <a:extLst>
+              <a:ext uri="{FF2B5EF4-FFF2-40B4-BE49-F238E27FC236}">
+                <a16:creationId xmlns:a16="http://schemas.microsoft.com/office/drawing/2014/main" id="{05BC51E5-2035-1623-CD8B-7ED5A11238A0}"/>
+              </a:ext>
+            </a:extLst>
+          </p:cNvPr>
+          <p:cNvGrpSpPr/>
+          <p:nvPr/>
+        </p:nvGrpSpPr>
+        <p:grpSpPr>
+          <a:xfrm>
+            <a:off x="4876888" y="3130049"/>
+            <a:ext cx="991959" cy="3196769"/>
+            <a:chOff x="3805332" y="3533873"/>
+            <a:chExt cx="817163" cy="2016227"/>
+          </a:xfrm>
+        </p:grpSpPr>
+        <p:sp>
+          <p:nvSpPr>
+            <p:cNvPr id="50" name="矩形 49">
+              <a:extLst>
+                <a:ext uri="{FF2B5EF4-FFF2-40B4-BE49-F238E27FC236}">
+                  <a16:creationId xmlns:a16="http://schemas.microsoft.com/office/drawing/2014/main" id="{5533EB0E-34CB-0000-4100-A9C0964163AD}"/>
+                </a:ext>
+              </a:extLst>
+            </p:cNvPr>
+            <p:cNvSpPr/>
+            <p:nvPr/>
+          </p:nvSpPr>
+          <p:spPr>
+            <a:xfrm>
+              <a:off x="3829892" y="3533873"/>
+              <a:ext cx="768042" cy="2016227"/>
+            </a:xfrm>
+            <a:prstGeom prst="rect">
+              <a:avLst/>
+            </a:prstGeom>
+            <a:noFill/>
+            <a:ln w="19050">
+              <a:solidFill>
+                <a:schemeClr val="tx1"/>
+              </a:solidFill>
+            </a:ln>
+          </p:spPr>
+          <p:style>
+            <a:lnRef idx="2">
+              <a:schemeClr val="accent1">
+                <a:shade val="15000"/>
+              </a:schemeClr>
+            </a:lnRef>
+            <a:fillRef idx="1">
+              <a:schemeClr val="accent1"/>
+            </a:fillRef>
+            <a:effectRef idx="0">
+              <a:schemeClr val="accent1"/>
+            </a:effectRef>
+            <a:fontRef idx="minor">
+              <a:schemeClr val="lt1"/>
+            </a:fontRef>
+          </p:style>
+          <p:txBody>
+            <a:bodyPr rtlCol="0" anchor="ctr"/>
+            <a:lstStyle/>
+            <a:p>
+              <a:pPr algn="ctr"/>
+              <a:endParaRPr lang="zh-CN" altLang="en-US" dirty="0">
+                <a:solidFill>
+                  <a:schemeClr val="tx1"/>
+                </a:solidFill>
+                <a:latin typeface="Times New Roman" panose="02020603050405020304" pitchFamily="18" charset="0"/>
+                <a:ea typeface="宋体" panose="02010600030101010101" pitchFamily="2" charset="-122"/>
+              </a:endParaRPr>
+            </a:p>
+          </p:txBody>
+        </p:sp>
+        <p:sp>
+          <p:nvSpPr>
+            <p:cNvPr id="51" name="文本框 50">
+              <a:extLst>
+                <a:ext uri="{FF2B5EF4-FFF2-40B4-BE49-F238E27FC236}">
+                  <a16:creationId xmlns:a16="http://schemas.microsoft.com/office/drawing/2014/main" id="{BE01B920-9475-632E-0610-A90341EC118C}"/>
+                </a:ext>
+              </a:extLst>
+            </p:cNvPr>
+            <p:cNvSpPr txBox="1"/>
+            <p:nvPr/>
+          </p:nvSpPr>
+          <p:spPr>
+            <a:xfrm>
+              <a:off x="3805332" y="4410709"/>
+              <a:ext cx="817163" cy="321965"/>
+            </a:xfrm>
+            <a:prstGeom prst="rect">
+              <a:avLst/>
+            </a:prstGeom>
+            <a:noFill/>
+          </p:spPr>
+          <p:txBody>
+            <a:bodyPr wrap="square" rtlCol="0" anchor="ctr" anchorCtr="1">
+              <a:spAutoFit/>
+            </a:bodyPr>
+            <a:lstStyle/>
+            <a:p>
+              <a:pPr algn="ctr"/>
+              <a:r>
+                <a:rPr lang="zh-CN" altLang="en-US" sz="1050" dirty="0">
+                  <a:latin typeface="Times New Roman" panose="02020603050405020304" pitchFamily="18" charset="0"/>
+                  <a:ea typeface="宋体" panose="02010600030101010101" pitchFamily="2" charset="-122"/>
+                </a:rPr>
+                <a:t>归一化层</a:t>
+              </a:r>
+              <a:endParaRPr lang="en-US" altLang="zh-CN" sz="1050" dirty="0">
+                <a:latin typeface="Times New Roman" panose="02020603050405020304" pitchFamily="18" charset="0"/>
+                <a:ea typeface="宋体" panose="02010600030101010101" pitchFamily="2" charset="-122"/>
+              </a:endParaRPr>
+            </a:p>
+            <a:p>
+              <a:pPr algn="ctr"/>
+              <a:r>
+                <a:rPr lang="en-US" altLang="zh-CN" sz="1050" dirty="0" err="1">
+                  <a:latin typeface="Times New Roman" panose="02020603050405020304" pitchFamily="18" charset="0"/>
+                  <a:ea typeface="宋体" panose="02010600030101010101" pitchFamily="2" charset="-122"/>
+                </a:rPr>
+                <a:t>LayerNorm</a:t>
+              </a:r>
+              <a:endParaRPr lang="zh-CN" altLang="en-US" sz="1050" dirty="0">
+                <a:latin typeface="Times New Roman" panose="02020603050405020304" pitchFamily="18" charset="0"/>
+                <a:ea typeface="宋体" panose="02010600030101010101" pitchFamily="2" charset="-122"/>
+              </a:endParaRPr>
+            </a:p>
+          </p:txBody>
+        </p:sp>
+      </p:grpSp>
+      <p:grpSp>
+        <p:nvGrpSpPr>
+          <p:cNvPr id="85" name="组合 84">
+            <a:extLst>
+              <a:ext uri="{FF2B5EF4-FFF2-40B4-BE49-F238E27FC236}">
+                <a16:creationId xmlns:a16="http://schemas.microsoft.com/office/drawing/2014/main" id="{4719EDE1-F0DE-0573-8811-8A70C06BF588}"/>
+              </a:ext>
+            </a:extLst>
+          </p:cNvPr>
+          <p:cNvGrpSpPr/>
+          <p:nvPr/>
+        </p:nvGrpSpPr>
+        <p:grpSpPr>
+          <a:xfrm>
+            <a:off x="10041208" y="2989101"/>
+            <a:ext cx="1220992" cy="3496623"/>
+            <a:chOff x="9775746" y="2956216"/>
+            <a:chExt cx="1005838" cy="2368430"/>
+          </a:xfrm>
+        </p:grpSpPr>
         <p:grpSp>
           <p:nvGrpSpPr>
-            <p:cNvPr id="40" name="组合 39">
+            <p:cNvPr id="84" name="组合 83">
               <a:extLst>
                 <a:ext uri="{FF2B5EF4-FFF2-40B4-BE49-F238E27FC236}">
-                  <a16:creationId xmlns:a16="http://schemas.microsoft.com/office/drawing/2014/main" id="{252D36C6-8F43-045A-17AB-DA6875EFC7BC}"/>
+                  <a16:creationId xmlns:a16="http://schemas.microsoft.com/office/drawing/2014/main" id="{98688545-7D7A-1190-8924-EDEF9F0AF8CA}"/>
                 </a:ext>
               </a:extLst>
             </p:cNvPr>
@@ -8794,68 +9477,18 @@
           </p:nvGrpSpPr>
           <p:grpSpPr>
             <a:xfrm>
-              <a:off x="3292520" y="1143301"/>
-              <a:ext cx="3202314" cy="1489953"/>
-              <a:chOff x="3691647" y="1110575"/>
-              <a:chExt cx="3202314" cy="1489953"/>
+              <a:off x="9775746" y="2956216"/>
+              <a:ext cx="1005838" cy="2368430"/>
+              <a:chOff x="9775746" y="2956216"/>
+              <a:chExt cx="1005838" cy="2368430"/>
             </a:xfrm>
           </p:grpSpPr>
-          <p:sp>
-            <p:nvSpPr>
-              <p:cNvPr id="26" name="文本框 25">
+          <p:grpSp>
+            <p:nvGrpSpPr>
+              <p:cNvPr id="76" name="组合 75">
                 <a:extLst>
                   <a:ext uri="{FF2B5EF4-FFF2-40B4-BE49-F238E27FC236}">
-                    <a16:creationId xmlns:a16="http://schemas.microsoft.com/office/drawing/2014/main" id="{D2D857E4-F963-AECD-7636-CD26E67BAEF8}"/>
-                  </a:ext>
-                </a:extLst>
-              </p:cNvPr>
-              <p:cNvSpPr txBox="1"/>
-              <p:nvPr/>
-            </p:nvSpPr>
-            <p:spPr>
-              <a:xfrm>
-                <a:off x="4460132" y="1817858"/>
-                <a:ext cx="2191966" cy="369332"/>
-              </a:xfrm>
-              <a:prstGeom prst="rect">
-                <a:avLst/>
-              </a:prstGeom>
-              <a:noFill/>
-            </p:spPr>
-            <p:txBody>
-              <a:bodyPr wrap="square" rtlCol="0">
-                <a:spAutoFit/>
-              </a:bodyPr>
-              <a:lstStyle/>
-              <a:p>
-                <a:pPr algn="ctr"/>
-                <a:r>
-                  <a:rPr lang="zh-CN" altLang="en-US" dirty="0">
-                    <a:latin typeface="Times New Roman" panose="02020603050405020304" pitchFamily="18" charset="0"/>
-                    <a:ea typeface="宋体" panose="02010600030101010101" pitchFamily="2" charset="-122"/>
-                  </a:rPr>
-                  <a:t>损失函数</a:t>
-                </a:r>
-                <a:r>
-                  <a:rPr lang="en-US" altLang="zh-CN" dirty="0">
-                    <a:latin typeface="Times New Roman" panose="02020603050405020304" pitchFamily="18" charset="0"/>
-                    <a:ea typeface="宋体" panose="02010600030101010101" pitchFamily="2" charset="-122"/>
-                  </a:rPr>
-                  <a:t>MMSE</a:t>
-                </a:r>
-                <a:endParaRPr lang="zh-CN" altLang="en-US" dirty="0">
-                  <a:latin typeface="Times New Roman" panose="02020603050405020304" pitchFamily="18" charset="0"/>
-                  <a:ea typeface="宋体" panose="02010600030101010101" pitchFamily="2" charset="-122"/>
-                </a:endParaRPr>
-              </a:p>
-            </p:txBody>
-          </p:sp>
-          <p:grpSp>
-            <p:nvGrpSpPr>
-              <p:cNvPr id="37" name="组合 36">
-                <a:extLst>
-                  <a:ext uri="{FF2B5EF4-FFF2-40B4-BE49-F238E27FC236}">
-                    <a16:creationId xmlns:a16="http://schemas.microsoft.com/office/drawing/2014/main" id="{C80FCB1C-C2E1-ABB8-6061-FCA6B5A6F055}"/>
+                    <a16:creationId xmlns:a16="http://schemas.microsoft.com/office/drawing/2014/main" id="{DE1B644C-B85E-8F5A-7CFE-E4B339B071A8}"/>
                   </a:ext>
                 </a:extLst>
               </p:cNvPr>
@@ -8864,18 +9497,18 @@
             </p:nvGrpSpPr>
             <p:grpSpPr>
               <a:xfrm>
-                <a:off x="3691647" y="1110575"/>
-                <a:ext cx="3202314" cy="1489953"/>
-                <a:chOff x="3691647" y="1110575"/>
-                <a:chExt cx="3202314" cy="1489953"/>
+                <a:off x="9775746" y="2956216"/>
+                <a:ext cx="1005838" cy="633687"/>
+                <a:chOff x="9775746" y="2956216"/>
+                <a:chExt cx="1005838" cy="633687"/>
               </a:xfrm>
             </p:grpSpPr>
             <p:sp>
               <p:nvSpPr>
-                <p:cNvPr id="24" name="矩形 23">
+                <p:cNvPr id="74" name="矩形 73">
                   <a:extLst>
                     <a:ext uri="{FF2B5EF4-FFF2-40B4-BE49-F238E27FC236}">
-                      <a16:creationId xmlns:a16="http://schemas.microsoft.com/office/drawing/2014/main" id="{5D737D50-B313-7D6D-034C-E7F32CB47B11}"/>
+                      <a16:creationId xmlns:a16="http://schemas.microsoft.com/office/drawing/2014/main" id="{EBDC5CDB-502E-BE8C-E091-59B0362CF213}"/>
                     </a:ext>
                   </a:extLst>
                 </p:cNvPr>
@@ -8884,8 +9517,8 @@
               </p:nvSpPr>
               <p:spPr>
                 <a:xfrm>
-                  <a:off x="3839183" y="1110575"/>
-                  <a:ext cx="3054778" cy="1489953"/>
+                  <a:off x="9775746" y="2956216"/>
+                  <a:ext cx="1005838" cy="283464"/>
                 </a:xfrm>
                 <a:prstGeom prst="rect">
                   <a:avLst/>
@@ -8918,157 +9551,45 @@
                 <a:lstStyle/>
                 <a:p>
                   <a:pPr algn="ctr"/>
-                  <a:endParaRPr lang="zh-CN" altLang="en-US">
-                    <a:latin typeface="Times New Roman" panose="02020603050405020304" pitchFamily="18" charset="0"/>
-                    <a:ea typeface="宋体" panose="02010600030101010101" pitchFamily="2" charset="-122"/>
-                  </a:endParaRPr>
+                  <a:r>
+                    <a:rPr lang="zh-CN" altLang="en-US" sz="1100" dirty="0">
+                      <a:solidFill>
+                        <a:schemeClr val="tx1"/>
+                      </a:solidFill>
+                      <a:latin typeface="Times New Roman" panose="02020603050405020304" pitchFamily="18" charset="0"/>
+                      <a:ea typeface="宋体" panose="02010600030101010101" pitchFamily="2" charset="-122"/>
+                    </a:rPr>
+                    <a:t>任务</a:t>
+                  </a:r>
+                  <a:r>
+                    <a:rPr lang="en-US" altLang="zh-CN" sz="1100" dirty="0">
+                      <a:solidFill>
+                        <a:schemeClr val="tx1"/>
+                      </a:solidFill>
+                      <a:latin typeface="Times New Roman" panose="02020603050405020304" pitchFamily="18" charset="0"/>
+                      <a:ea typeface="宋体" panose="02010600030101010101" pitchFamily="2" charset="-122"/>
+                    </a:rPr>
+                    <a:t>1</a:t>
+                  </a:r>
+                  <a:r>
+                    <a:rPr lang="zh-CN" altLang="en-US" sz="1100" dirty="0">
+                      <a:solidFill>
+                        <a:schemeClr val="tx1"/>
+                      </a:solidFill>
+                      <a:latin typeface="Times New Roman" panose="02020603050405020304" pitchFamily="18" charset="0"/>
+                      <a:ea typeface="宋体" panose="02010600030101010101" pitchFamily="2" charset="-122"/>
+                    </a:rPr>
+                    <a:t>输出头</a:t>
+                  </a:r>
                 </a:p>
               </p:txBody>
             </p:sp>
             <p:sp>
               <p:nvSpPr>
-                <p:cNvPr id="29" name="文本框 28">
+                <p:cNvPr id="75" name="矩形 74">
                   <a:extLst>
                     <a:ext uri="{FF2B5EF4-FFF2-40B4-BE49-F238E27FC236}">
-                      <a16:creationId xmlns:a16="http://schemas.microsoft.com/office/drawing/2014/main" id="{C5C31074-6261-1CD7-CF57-0F23AF6C309E}"/>
-                    </a:ext>
-                  </a:extLst>
-                </p:cNvPr>
-                <p:cNvSpPr txBox="1"/>
-                <p:nvPr/>
-              </p:nvSpPr>
-              <p:spPr>
-                <a:xfrm>
-                  <a:off x="3691647" y="1158925"/>
-                  <a:ext cx="1536970" cy="369332"/>
-                </a:xfrm>
-                <a:prstGeom prst="rect">
-                  <a:avLst/>
-                </a:prstGeom>
-                <a:noFill/>
-              </p:spPr>
-              <p:txBody>
-                <a:bodyPr wrap="square" rtlCol="0">
-                  <a:spAutoFit/>
-                </a:bodyPr>
-                <a:lstStyle/>
-                <a:p>
-                  <a:pPr algn="ctr"/>
-                  <a:r>
-                    <a:rPr lang="en-US" altLang="zh-CN" dirty="0">
-                      <a:latin typeface="Times New Roman" panose="02020603050405020304" pitchFamily="18" charset="0"/>
-                      <a:ea typeface="宋体" panose="02010600030101010101" pitchFamily="2" charset="-122"/>
-                    </a:rPr>
-                    <a:t>3.</a:t>
-                  </a:r>
-                  <a:r>
-                    <a:rPr lang="zh-CN" altLang="en-US" dirty="0">
-                      <a:latin typeface="Times New Roman" panose="02020603050405020304" pitchFamily="18" charset="0"/>
-                      <a:ea typeface="宋体" panose="02010600030101010101" pitchFamily="2" charset="-122"/>
-                    </a:rPr>
-                    <a:t>损失函数</a:t>
-                  </a:r>
-                </a:p>
-              </p:txBody>
-            </p:sp>
-          </p:grpSp>
-        </p:grpSp>
-        <p:grpSp>
-          <p:nvGrpSpPr>
-            <p:cNvPr id="38" name="组合 37">
-              <a:extLst>
-                <a:ext uri="{FF2B5EF4-FFF2-40B4-BE49-F238E27FC236}">
-                  <a16:creationId xmlns:a16="http://schemas.microsoft.com/office/drawing/2014/main" id="{8AA14FB4-FDFD-CAE4-10B0-6B0ABA5FD5C5}"/>
-                </a:ext>
-              </a:extLst>
-            </p:cNvPr>
-            <p:cNvGrpSpPr/>
-            <p:nvPr/>
-          </p:nvGrpSpPr>
-          <p:grpSpPr>
-            <a:xfrm>
-              <a:off x="7165076" y="1143301"/>
-              <a:ext cx="2299938" cy="1489953"/>
-              <a:chOff x="8424154" y="1462353"/>
-              <a:chExt cx="1964987" cy="1093307"/>
-            </a:xfrm>
-          </p:grpSpPr>
-          <p:sp>
-            <p:nvSpPr>
-              <p:cNvPr id="31" name="文本框 30">
-                <a:extLst>
-                  <a:ext uri="{FF2B5EF4-FFF2-40B4-BE49-F238E27FC236}">
-                    <a16:creationId xmlns:a16="http://schemas.microsoft.com/office/drawing/2014/main" id="{CB16AABA-2E16-F04B-CF7F-4763A5726CDA}"/>
-                  </a:ext>
-                </a:extLst>
-              </p:cNvPr>
-              <p:cNvSpPr txBox="1"/>
-              <p:nvPr/>
-            </p:nvSpPr>
-            <p:spPr>
-              <a:xfrm>
-                <a:off x="8512574" y="2033021"/>
-                <a:ext cx="1876567" cy="271011"/>
-              </a:xfrm>
-              <a:prstGeom prst="rect">
-                <a:avLst/>
-              </a:prstGeom>
-              <a:noFill/>
-            </p:spPr>
-            <p:txBody>
-              <a:bodyPr wrap="square" rtlCol="0">
-                <a:spAutoFit/>
-              </a:bodyPr>
-              <a:lstStyle/>
-              <a:p>
-                <a:pPr algn="ctr"/>
-                <a:r>
-                  <a:rPr lang="zh-CN" altLang="en-US" dirty="0">
-                    <a:latin typeface="Times New Roman" panose="02020603050405020304" pitchFamily="18" charset="0"/>
-                    <a:ea typeface="宋体" panose="02010600030101010101" pitchFamily="2" charset="-122"/>
-                  </a:rPr>
-                  <a:t>优化器</a:t>
-                </a:r>
-                <a:r>
-                  <a:rPr lang="en-US" altLang="zh-CN" dirty="0" err="1">
-                    <a:latin typeface="Times New Roman" panose="02020603050405020304" pitchFamily="18" charset="0"/>
-                    <a:ea typeface="宋体" panose="02010600030101010101" pitchFamily="2" charset="-122"/>
-                  </a:rPr>
-                  <a:t>AdamW</a:t>
-                </a:r>
-                <a:endParaRPr lang="zh-CN" altLang="en-US" dirty="0">
-                  <a:latin typeface="Times New Roman" panose="02020603050405020304" pitchFamily="18" charset="0"/>
-                  <a:ea typeface="宋体" panose="02010600030101010101" pitchFamily="2" charset="-122"/>
-                </a:endParaRPr>
-              </a:p>
-            </p:txBody>
-          </p:sp>
-          <p:grpSp>
-            <p:nvGrpSpPr>
-              <p:cNvPr id="36" name="组合 35">
-                <a:extLst>
-                  <a:ext uri="{FF2B5EF4-FFF2-40B4-BE49-F238E27FC236}">
-                    <a16:creationId xmlns:a16="http://schemas.microsoft.com/office/drawing/2014/main" id="{6E6D8856-41D1-D2FA-274B-EBAC330BD373}"/>
-                  </a:ext>
-                </a:extLst>
-              </p:cNvPr>
-              <p:cNvGrpSpPr/>
-              <p:nvPr/>
-            </p:nvGrpSpPr>
-            <p:grpSpPr>
-              <a:xfrm>
-                <a:off x="8424154" y="1462353"/>
-                <a:ext cx="1964987" cy="1093307"/>
-                <a:chOff x="8618707" y="1507221"/>
-                <a:chExt cx="1964987" cy="1093307"/>
-              </a:xfrm>
-            </p:grpSpPr>
-            <p:sp>
-              <p:nvSpPr>
-                <p:cNvPr id="30" name="矩形 29">
-                  <a:extLst>
-                    <a:ext uri="{FF2B5EF4-FFF2-40B4-BE49-F238E27FC236}">
-                      <a16:creationId xmlns:a16="http://schemas.microsoft.com/office/drawing/2014/main" id="{36EF50B6-8614-6B1D-AA4F-0B8AA43D4065}"/>
+                      <a16:creationId xmlns:a16="http://schemas.microsoft.com/office/drawing/2014/main" id="{F225BD3A-2D2C-5890-0AF6-83F784083EE3}"/>
                     </a:ext>
                   </a:extLst>
                 </p:cNvPr>
@@ -9077,8 +9598,8 @@
               </p:nvSpPr>
               <p:spPr>
                 <a:xfrm>
-                  <a:off x="8618707" y="1507221"/>
-                  <a:ext cx="1964987" cy="1093307"/>
+                  <a:off x="9775746" y="3239680"/>
+                  <a:ext cx="1005838" cy="350223"/>
                 </a:xfrm>
                 <a:prstGeom prst="rect">
                   <a:avLst/>
@@ -9111,7 +9632,760 @@
                 <a:lstStyle/>
                 <a:p>
                   <a:pPr algn="ctr"/>
-                  <a:endParaRPr lang="zh-CN" altLang="en-US" dirty="0">
+                  <a:r>
+                    <a:rPr lang="zh-CN" altLang="en-US" sz="1100" dirty="0">
+                      <a:solidFill>
+                        <a:schemeClr val="tx1"/>
+                      </a:solidFill>
+                      <a:latin typeface="Times New Roman" panose="02020603050405020304" pitchFamily="18" charset="0"/>
+                      <a:ea typeface="宋体" panose="02010600030101010101" pitchFamily="2" charset="-122"/>
+                    </a:rPr>
+                    <a:t>线性层</a:t>
+                  </a:r>
+                  <a:endParaRPr lang="en-US" altLang="zh-CN" sz="1100" dirty="0">
+                    <a:solidFill>
+                      <a:schemeClr val="tx1"/>
+                    </a:solidFill>
+                    <a:latin typeface="Times New Roman" panose="02020603050405020304" pitchFamily="18" charset="0"/>
+                    <a:ea typeface="宋体" panose="02010600030101010101" pitchFamily="2" charset="-122"/>
+                  </a:endParaRPr>
+                </a:p>
+                <a:p>
+                  <a:pPr algn="ctr"/>
+                  <a:r>
+                    <a:rPr lang="en-US" altLang="zh-CN" sz="1100" dirty="0">
+                      <a:solidFill>
+                        <a:schemeClr val="tx1"/>
+                      </a:solidFill>
+                      <a:latin typeface="Times New Roman" panose="02020603050405020304" pitchFamily="18" charset="0"/>
+                      <a:ea typeface="宋体" panose="02010600030101010101" pitchFamily="2" charset="-122"/>
+                    </a:rPr>
+                    <a:t>FC128</a:t>
+                  </a:r>
+                  <a:endParaRPr lang="zh-CN" altLang="en-US" sz="1100" dirty="0">
+                    <a:solidFill>
+                      <a:schemeClr val="tx1"/>
+                    </a:solidFill>
+                    <a:latin typeface="Times New Roman" panose="02020603050405020304" pitchFamily="18" charset="0"/>
+                    <a:ea typeface="宋体" panose="02010600030101010101" pitchFamily="2" charset="-122"/>
+                  </a:endParaRPr>
+                </a:p>
+              </p:txBody>
+            </p:sp>
+          </p:grpSp>
+          <p:grpSp>
+            <p:nvGrpSpPr>
+              <p:cNvPr id="77" name="组合 76">
+                <a:extLst>
+                  <a:ext uri="{FF2B5EF4-FFF2-40B4-BE49-F238E27FC236}">
+                    <a16:creationId xmlns:a16="http://schemas.microsoft.com/office/drawing/2014/main" id="{80A52979-008E-F334-CC64-6E6DD6D54D80}"/>
+                  </a:ext>
+                </a:extLst>
+              </p:cNvPr>
+              <p:cNvGrpSpPr/>
+              <p:nvPr/>
+            </p:nvGrpSpPr>
+            <p:grpSpPr>
+              <a:xfrm>
+                <a:off x="9775746" y="3661145"/>
+                <a:ext cx="1005838" cy="633687"/>
+                <a:chOff x="9775746" y="2956216"/>
+                <a:chExt cx="1005838" cy="633687"/>
+              </a:xfrm>
+            </p:grpSpPr>
+            <p:sp>
+              <p:nvSpPr>
+                <p:cNvPr id="78" name="矩形 77">
+                  <a:extLst>
+                    <a:ext uri="{FF2B5EF4-FFF2-40B4-BE49-F238E27FC236}">
+                      <a16:creationId xmlns:a16="http://schemas.microsoft.com/office/drawing/2014/main" id="{9F2B6779-B0F1-53AE-B214-8022C4C05FBD}"/>
+                    </a:ext>
+                  </a:extLst>
+                </p:cNvPr>
+                <p:cNvSpPr/>
+                <p:nvPr/>
+              </p:nvSpPr>
+              <p:spPr>
+                <a:xfrm>
+                  <a:off x="9775746" y="2956216"/>
+                  <a:ext cx="1005838" cy="283464"/>
+                </a:xfrm>
+                <a:prstGeom prst="rect">
+                  <a:avLst/>
+                </a:prstGeom>
+                <a:noFill/>
+                <a:ln w="19050">
+                  <a:solidFill>
+                    <a:schemeClr val="tx1"/>
+                  </a:solidFill>
+                </a:ln>
+              </p:spPr>
+              <p:style>
+                <a:lnRef idx="2">
+                  <a:schemeClr val="accent1">
+                    <a:shade val="15000"/>
+                  </a:schemeClr>
+                </a:lnRef>
+                <a:fillRef idx="1">
+                  <a:schemeClr val="accent1"/>
+                </a:fillRef>
+                <a:effectRef idx="0">
+                  <a:schemeClr val="accent1"/>
+                </a:effectRef>
+                <a:fontRef idx="minor">
+                  <a:schemeClr val="lt1"/>
+                </a:fontRef>
+              </p:style>
+              <p:txBody>
+                <a:bodyPr rtlCol="0" anchor="ctr"/>
+                <a:lstStyle/>
+                <a:p>
+                  <a:pPr algn="ctr"/>
+                  <a:r>
+                    <a:rPr lang="zh-CN" altLang="en-US" sz="1100" dirty="0">
+                      <a:solidFill>
+                        <a:schemeClr val="tx1"/>
+                      </a:solidFill>
+                      <a:latin typeface="Times New Roman" panose="02020603050405020304" pitchFamily="18" charset="0"/>
+                      <a:ea typeface="宋体" panose="02010600030101010101" pitchFamily="2" charset="-122"/>
+                    </a:rPr>
+                    <a:t>任务</a:t>
+                  </a:r>
+                  <a:r>
+                    <a:rPr lang="en-US" altLang="zh-CN" sz="1100" dirty="0">
+                      <a:solidFill>
+                        <a:schemeClr val="tx1"/>
+                      </a:solidFill>
+                      <a:latin typeface="Times New Roman" panose="02020603050405020304" pitchFamily="18" charset="0"/>
+                      <a:ea typeface="宋体" panose="02010600030101010101" pitchFamily="2" charset="-122"/>
+                    </a:rPr>
+                    <a:t>2</a:t>
+                  </a:r>
+                  <a:r>
+                    <a:rPr lang="zh-CN" altLang="en-US" sz="1100" dirty="0">
+                      <a:solidFill>
+                        <a:schemeClr val="tx1"/>
+                      </a:solidFill>
+                      <a:latin typeface="Times New Roman" panose="02020603050405020304" pitchFamily="18" charset="0"/>
+                      <a:ea typeface="宋体" panose="02010600030101010101" pitchFamily="2" charset="-122"/>
+                    </a:rPr>
+                    <a:t>输出头</a:t>
+                  </a:r>
+                </a:p>
+              </p:txBody>
+            </p:sp>
+            <p:sp>
+              <p:nvSpPr>
+                <p:cNvPr id="79" name="矩形 78">
+                  <a:extLst>
+                    <a:ext uri="{FF2B5EF4-FFF2-40B4-BE49-F238E27FC236}">
+                      <a16:creationId xmlns:a16="http://schemas.microsoft.com/office/drawing/2014/main" id="{B6DB6774-AA80-38EA-8D55-C37F28F57A64}"/>
+                    </a:ext>
+                  </a:extLst>
+                </p:cNvPr>
+                <p:cNvSpPr/>
+                <p:nvPr/>
+              </p:nvSpPr>
+              <p:spPr>
+                <a:xfrm>
+                  <a:off x="9775746" y="3239680"/>
+                  <a:ext cx="1005838" cy="350223"/>
+                </a:xfrm>
+                <a:prstGeom prst="rect">
+                  <a:avLst/>
+                </a:prstGeom>
+                <a:noFill/>
+                <a:ln w="19050">
+                  <a:solidFill>
+                    <a:schemeClr val="tx1"/>
+                  </a:solidFill>
+                </a:ln>
+              </p:spPr>
+              <p:style>
+                <a:lnRef idx="2">
+                  <a:schemeClr val="accent1">
+                    <a:shade val="15000"/>
+                  </a:schemeClr>
+                </a:lnRef>
+                <a:fillRef idx="1">
+                  <a:schemeClr val="accent1"/>
+                </a:fillRef>
+                <a:effectRef idx="0">
+                  <a:schemeClr val="accent1"/>
+                </a:effectRef>
+                <a:fontRef idx="minor">
+                  <a:schemeClr val="lt1"/>
+                </a:fontRef>
+              </p:style>
+              <p:txBody>
+                <a:bodyPr rtlCol="0" anchor="ctr"/>
+                <a:lstStyle/>
+                <a:p>
+                  <a:pPr algn="ctr"/>
+                  <a:r>
+                    <a:rPr lang="zh-CN" altLang="en-US" sz="1100" dirty="0">
+                      <a:solidFill>
+                        <a:schemeClr val="tx1"/>
+                      </a:solidFill>
+                      <a:latin typeface="Times New Roman" panose="02020603050405020304" pitchFamily="18" charset="0"/>
+                      <a:ea typeface="宋体" panose="02010600030101010101" pitchFamily="2" charset="-122"/>
+                    </a:rPr>
+                    <a:t>线性层</a:t>
+                  </a:r>
+                  <a:endParaRPr lang="en-US" altLang="zh-CN" sz="1100" dirty="0">
+                    <a:solidFill>
+                      <a:schemeClr val="tx1"/>
+                    </a:solidFill>
+                    <a:latin typeface="Times New Roman" panose="02020603050405020304" pitchFamily="18" charset="0"/>
+                    <a:ea typeface="宋体" panose="02010600030101010101" pitchFamily="2" charset="-122"/>
+                  </a:endParaRPr>
+                </a:p>
+                <a:p>
+                  <a:pPr algn="ctr"/>
+                  <a:r>
+                    <a:rPr lang="en-US" altLang="zh-CN" sz="1100" dirty="0">
+                      <a:solidFill>
+                        <a:schemeClr val="tx1"/>
+                      </a:solidFill>
+                      <a:latin typeface="Times New Roman" panose="02020603050405020304" pitchFamily="18" charset="0"/>
+                      <a:ea typeface="宋体" panose="02010600030101010101" pitchFamily="2" charset="-122"/>
+                    </a:rPr>
+                    <a:t>FC128</a:t>
+                  </a:r>
+                  <a:endParaRPr lang="zh-CN" altLang="en-US" sz="1100" dirty="0">
+                    <a:solidFill>
+                      <a:schemeClr val="tx1"/>
+                    </a:solidFill>
+                    <a:latin typeface="Times New Roman" panose="02020603050405020304" pitchFamily="18" charset="0"/>
+                    <a:ea typeface="宋体" panose="02010600030101010101" pitchFamily="2" charset="-122"/>
+                  </a:endParaRPr>
+                </a:p>
+              </p:txBody>
+            </p:sp>
+          </p:grpSp>
+          <p:grpSp>
+            <p:nvGrpSpPr>
+              <p:cNvPr id="80" name="组合 79">
+                <a:extLst>
+                  <a:ext uri="{FF2B5EF4-FFF2-40B4-BE49-F238E27FC236}">
+                    <a16:creationId xmlns:a16="http://schemas.microsoft.com/office/drawing/2014/main" id="{7F444A52-521E-2FD4-7D2C-F73224C56F6B}"/>
+                  </a:ext>
+                </a:extLst>
+              </p:cNvPr>
+              <p:cNvGrpSpPr/>
+              <p:nvPr/>
+            </p:nvGrpSpPr>
+            <p:grpSpPr>
+              <a:xfrm>
+                <a:off x="9775746" y="4690959"/>
+                <a:ext cx="1005838" cy="633687"/>
+                <a:chOff x="9775746" y="2956216"/>
+                <a:chExt cx="1005838" cy="633687"/>
+              </a:xfrm>
+            </p:grpSpPr>
+            <p:sp>
+              <p:nvSpPr>
+                <p:cNvPr id="81" name="矩形 80">
+                  <a:extLst>
+                    <a:ext uri="{FF2B5EF4-FFF2-40B4-BE49-F238E27FC236}">
+                      <a16:creationId xmlns:a16="http://schemas.microsoft.com/office/drawing/2014/main" id="{AFC2FAAF-E8BD-3D23-ECA5-2DFD8F7860FA}"/>
+                    </a:ext>
+                  </a:extLst>
+                </p:cNvPr>
+                <p:cNvSpPr/>
+                <p:nvPr/>
+              </p:nvSpPr>
+              <p:spPr>
+                <a:xfrm>
+                  <a:off x="9775746" y="2956216"/>
+                  <a:ext cx="1005838" cy="283464"/>
+                </a:xfrm>
+                <a:prstGeom prst="rect">
+                  <a:avLst/>
+                </a:prstGeom>
+                <a:noFill/>
+                <a:ln w="19050">
+                  <a:solidFill>
+                    <a:schemeClr val="tx1"/>
+                  </a:solidFill>
+                </a:ln>
+              </p:spPr>
+              <p:style>
+                <a:lnRef idx="2">
+                  <a:schemeClr val="accent1">
+                    <a:shade val="15000"/>
+                  </a:schemeClr>
+                </a:lnRef>
+                <a:fillRef idx="1">
+                  <a:schemeClr val="accent1"/>
+                </a:fillRef>
+                <a:effectRef idx="0">
+                  <a:schemeClr val="accent1"/>
+                </a:effectRef>
+                <a:fontRef idx="minor">
+                  <a:schemeClr val="lt1"/>
+                </a:fontRef>
+              </p:style>
+              <p:txBody>
+                <a:bodyPr rtlCol="0" anchor="ctr"/>
+                <a:lstStyle/>
+                <a:p>
+                  <a:pPr algn="ctr"/>
+                  <a:r>
+                    <a:rPr lang="zh-CN" altLang="en-US" sz="1100" dirty="0">
+                      <a:solidFill>
+                        <a:schemeClr val="tx1"/>
+                      </a:solidFill>
+                      <a:latin typeface="Times New Roman" panose="02020603050405020304" pitchFamily="18" charset="0"/>
+                      <a:ea typeface="宋体" panose="02010600030101010101" pitchFamily="2" charset="-122"/>
+                    </a:rPr>
+                    <a:t>任务</a:t>
+                  </a:r>
+                  <a:r>
+                    <a:rPr lang="en-US" altLang="zh-CN" sz="1100" dirty="0">
+                      <a:solidFill>
+                        <a:schemeClr val="tx1"/>
+                      </a:solidFill>
+                      <a:latin typeface="Times New Roman" panose="02020603050405020304" pitchFamily="18" charset="0"/>
+                      <a:ea typeface="宋体" panose="02010600030101010101" pitchFamily="2" charset="-122"/>
+                    </a:rPr>
+                    <a:t>4</a:t>
+                  </a:r>
+                  <a:r>
+                    <a:rPr lang="zh-CN" altLang="en-US" sz="1100" dirty="0">
+                      <a:solidFill>
+                        <a:schemeClr val="tx1"/>
+                      </a:solidFill>
+                      <a:latin typeface="Times New Roman" panose="02020603050405020304" pitchFamily="18" charset="0"/>
+                      <a:ea typeface="宋体" panose="02010600030101010101" pitchFamily="2" charset="-122"/>
+                    </a:rPr>
+                    <a:t>输出头</a:t>
+                  </a:r>
+                </a:p>
+              </p:txBody>
+            </p:sp>
+            <p:sp>
+              <p:nvSpPr>
+                <p:cNvPr id="82" name="矩形 81">
+                  <a:extLst>
+                    <a:ext uri="{FF2B5EF4-FFF2-40B4-BE49-F238E27FC236}">
+                      <a16:creationId xmlns:a16="http://schemas.microsoft.com/office/drawing/2014/main" id="{1632100C-0880-F984-9791-E5BB1B757910}"/>
+                    </a:ext>
+                  </a:extLst>
+                </p:cNvPr>
+                <p:cNvSpPr/>
+                <p:nvPr/>
+              </p:nvSpPr>
+              <p:spPr>
+                <a:xfrm>
+                  <a:off x="9775746" y="3239680"/>
+                  <a:ext cx="1005838" cy="350223"/>
+                </a:xfrm>
+                <a:prstGeom prst="rect">
+                  <a:avLst/>
+                </a:prstGeom>
+                <a:noFill/>
+                <a:ln w="19050">
+                  <a:solidFill>
+                    <a:schemeClr val="tx1"/>
+                  </a:solidFill>
+                </a:ln>
+              </p:spPr>
+              <p:style>
+                <a:lnRef idx="2">
+                  <a:schemeClr val="accent1">
+                    <a:shade val="15000"/>
+                  </a:schemeClr>
+                </a:lnRef>
+                <a:fillRef idx="1">
+                  <a:schemeClr val="accent1"/>
+                </a:fillRef>
+                <a:effectRef idx="0">
+                  <a:schemeClr val="accent1"/>
+                </a:effectRef>
+                <a:fontRef idx="minor">
+                  <a:schemeClr val="lt1"/>
+                </a:fontRef>
+              </p:style>
+              <p:txBody>
+                <a:bodyPr rtlCol="0" anchor="ctr"/>
+                <a:lstStyle/>
+                <a:p>
+                  <a:pPr algn="ctr"/>
+                  <a:r>
+                    <a:rPr lang="zh-CN" altLang="en-US" sz="1100" dirty="0">
+                      <a:solidFill>
+                        <a:schemeClr val="tx1"/>
+                      </a:solidFill>
+                      <a:latin typeface="Times New Roman" panose="02020603050405020304" pitchFamily="18" charset="0"/>
+                      <a:ea typeface="宋体" panose="02010600030101010101" pitchFamily="2" charset="-122"/>
+                    </a:rPr>
+                    <a:t>线性层</a:t>
+                  </a:r>
+                  <a:endParaRPr lang="en-US" altLang="zh-CN" sz="1100" dirty="0">
+                    <a:solidFill>
+                      <a:schemeClr val="tx1"/>
+                    </a:solidFill>
+                    <a:latin typeface="Times New Roman" panose="02020603050405020304" pitchFamily="18" charset="0"/>
+                    <a:ea typeface="宋体" panose="02010600030101010101" pitchFamily="2" charset="-122"/>
+                  </a:endParaRPr>
+                </a:p>
+                <a:p>
+                  <a:pPr algn="ctr"/>
+                  <a:r>
+                    <a:rPr lang="en-US" altLang="zh-CN" sz="1100" dirty="0">
+                      <a:solidFill>
+                        <a:schemeClr val="tx1"/>
+                      </a:solidFill>
+                      <a:latin typeface="Times New Roman" panose="02020603050405020304" pitchFamily="18" charset="0"/>
+                      <a:ea typeface="宋体" panose="02010600030101010101" pitchFamily="2" charset="-122"/>
+                    </a:rPr>
+                    <a:t>FC128</a:t>
+                  </a:r>
+                  <a:endParaRPr lang="zh-CN" altLang="en-US" sz="1100" dirty="0">
+                    <a:solidFill>
+                      <a:schemeClr val="tx1"/>
+                    </a:solidFill>
+                    <a:latin typeface="Times New Roman" panose="02020603050405020304" pitchFamily="18" charset="0"/>
+                    <a:ea typeface="宋体" panose="02010600030101010101" pitchFamily="2" charset="-122"/>
+                  </a:endParaRPr>
+                </a:p>
+              </p:txBody>
+            </p:sp>
+          </p:grpSp>
+        </p:grpSp>
+        <p:sp>
+          <p:nvSpPr>
+            <p:cNvPr id="83" name="文本框 82">
+              <a:extLst>
+                <a:ext uri="{FF2B5EF4-FFF2-40B4-BE49-F238E27FC236}">
+                  <a16:creationId xmlns:a16="http://schemas.microsoft.com/office/drawing/2014/main" id="{F7C1D770-9EB4-FB5C-BC41-82FAF9423935}"/>
+                </a:ext>
+              </a:extLst>
+            </p:cNvPr>
+            <p:cNvSpPr txBox="1"/>
+            <p:nvPr/>
+          </p:nvSpPr>
+          <p:spPr>
+            <a:xfrm>
+              <a:off x="9775746" y="4297766"/>
+              <a:ext cx="1005838" cy="307355"/>
+            </a:xfrm>
+            <a:prstGeom prst="rect">
+              <a:avLst/>
+            </a:prstGeom>
+            <a:noFill/>
+          </p:spPr>
+          <p:txBody>
+            <a:bodyPr wrap="square" rtlCol="0">
+              <a:spAutoFit/>
+            </a:bodyPr>
+            <a:lstStyle/>
+            <a:p>
+              <a:pPr algn="ctr"/>
+              <a:r>
+                <a:rPr lang="en-US" altLang="zh-CN" dirty="0">
+                  <a:latin typeface="Times New Roman" panose="02020603050405020304" pitchFamily="18" charset="0"/>
+                  <a:ea typeface="宋体" panose="02010600030101010101" pitchFamily="2" charset="-122"/>
+                </a:rPr>
+                <a:t>…</a:t>
+              </a:r>
+              <a:endParaRPr lang="zh-CN" altLang="en-US" dirty="0">
+                <a:latin typeface="Times New Roman" panose="02020603050405020304" pitchFamily="18" charset="0"/>
+                <a:ea typeface="宋体" panose="02010600030101010101" pitchFamily="2" charset="-122"/>
+              </a:endParaRPr>
+            </a:p>
+          </p:txBody>
+        </p:sp>
+      </p:grpSp>
+      <p:cxnSp>
+        <p:nvCxnSpPr>
+          <p:cNvPr id="98" name="直接箭头连接符 97">
+            <a:extLst>
+              <a:ext uri="{FF2B5EF4-FFF2-40B4-BE49-F238E27FC236}">
+                <a16:creationId xmlns:a16="http://schemas.microsoft.com/office/drawing/2014/main" id="{09018DC0-46D8-BB91-6CF2-1F1598175414}"/>
+              </a:ext>
+            </a:extLst>
+          </p:cNvPr>
+          <p:cNvCxnSpPr>
+            <a:cxnSpLocks/>
+            <a:endCxn id="51" idx="1"/>
+          </p:cNvCxnSpPr>
+          <p:nvPr/>
+        </p:nvCxnSpPr>
+        <p:spPr>
+          <a:xfrm flipV="1">
+            <a:off x="2595284" y="4775531"/>
+            <a:ext cx="2281604" cy="210736"/>
+          </a:xfrm>
+          <a:prstGeom prst="bentConnector3">
+            <a:avLst>
+              <a:gd name="adj1" fmla="val -465"/>
+            </a:avLst>
+          </a:prstGeom>
+          <a:ln w="19050">
+            <a:solidFill>
+              <a:schemeClr val="tx1"/>
+            </a:solidFill>
+            <a:tailEnd type="triangle"/>
+          </a:ln>
+        </p:spPr>
+        <p:style>
+          <a:lnRef idx="1">
+            <a:schemeClr val="accent1"/>
+          </a:lnRef>
+          <a:fillRef idx="0">
+            <a:schemeClr val="accent1"/>
+          </a:fillRef>
+          <a:effectRef idx="0">
+            <a:schemeClr val="accent1"/>
+          </a:effectRef>
+          <a:fontRef idx="minor">
+            <a:schemeClr val="tx1"/>
+          </a:fontRef>
+        </p:style>
+      </p:cxnSp>
+      <p:sp>
+        <p:nvSpPr>
+          <p:cNvPr id="56" name="文本框 55">
+            <a:extLst>
+              <a:ext uri="{FF2B5EF4-FFF2-40B4-BE49-F238E27FC236}">
+                <a16:creationId xmlns:a16="http://schemas.microsoft.com/office/drawing/2014/main" id="{C1ADEF32-EF9A-6F80-D5F8-EACFA93AC6B3}"/>
+              </a:ext>
+            </a:extLst>
+          </p:cNvPr>
+          <p:cNvSpPr txBox="1"/>
+          <p:nvPr/>
+        </p:nvSpPr>
+        <p:spPr>
+          <a:xfrm>
+            <a:off x="6942802" y="3171453"/>
+            <a:ext cx="1938589" cy="311963"/>
+          </a:xfrm>
+          <a:prstGeom prst="rect">
+            <a:avLst/>
+          </a:prstGeom>
+          <a:noFill/>
+        </p:spPr>
+        <p:txBody>
+          <a:bodyPr wrap="square" rtlCol="0" anchor="ctr" anchorCtr="1">
+            <a:spAutoFit/>
+          </a:bodyPr>
+          <a:lstStyle/>
+          <a:p>
+            <a:pPr algn="ctr"/>
+            <a:r>
+              <a:rPr lang="zh-CN" altLang="en-US" sz="1050" dirty="0">
+                <a:latin typeface="Times New Roman" panose="02020603050405020304" pitchFamily="18" charset="0"/>
+                <a:ea typeface="宋体" panose="02010600030101010101" pitchFamily="2" charset="-122"/>
+              </a:rPr>
+              <a:t>共享特征提取层</a:t>
+            </a:r>
+          </a:p>
+        </p:txBody>
+      </p:sp>
+      <p:sp>
+        <p:nvSpPr>
+          <p:cNvPr id="55" name="矩形 54">
+            <a:extLst>
+              <a:ext uri="{FF2B5EF4-FFF2-40B4-BE49-F238E27FC236}">
+                <a16:creationId xmlns:a16="http://schemas.microsoft.com/office/drawing/2014/main" id="{17CBB046-BAB7-ABBD-FFFE-25F4F0248AC9}"/>
+              </a:ext>
+            </a:extLst>
+          </p:cNvPr>
+          <p:cNvSpPr/>
+          <p:nvPr/>
+        </p:nvSpPr>
+        <p:spPr>
+          <a:xfrm>
+            <a:off x="5954706" y="3130050"/>
+            <a:ext cx="3914783" cy="3196769"/>
+          </a:xfrm>
+          <a:prstGeom prst="rect">
+            <a:avLst/>
+          </a:prstGeom>
+          <a:noFill/>
+          <a:ln w="19050">
+            <a:solidFill>
+              <a:schemeClr val="tx1"/>
+            </a:solidFill>
+          </a:ln>
+        </p:spPr>
+        <p:style>
+          <a:lnRef idx="2">
+            <a:schemeClr val="accent1">
+              <a:shade val="15000"/>
+            </a:schemeClr>
+          </a:lnRef>
+          <a:fillRef idx="1">
+            <a:schemeClr val="accent1"/>
+          </a:fillRef>
+          <a:effectRef idx="0">
+            <a:schemeClr val="accent1"/>
+          </a:effectRef>
+          <a:fontRef idx="minor">
+            <a:schemeClr val="lt1"/>
+          </a:fontRef>
+        </p:style>
+        <p:txBody>
+          <a:bodyPr rtlCol="0" anchor="ctr" anchorCtr="1"/>
+          <a:lstStyle/>
+          <a:p>
+            <a:pPr algn="ctr"/>
+            <a:endParaRPr lang="zh-CN" altLang="en-US" dirty="0" err="1">
+              <a:solidFill>
+                <a:schemeClr val="tx1"/>
+              </a:solidFill>
+              <a:latin typeface="Times New Roman" panose="02020603050405020304" pitchFamily="18" charset="0"/>
+              <a:ea typeface="宋体" panose="02010600030101010101" pitchFamily="2" charset="-122"/>
+            </a:endParaRPr>
+          </a:p>
+        </p:txBody>
+      </p:sp>
+      <p:grpSp>
+        <p:nvGrpSpPr>
+          <p:cNvPr id="107" name="组合 106">
+            <a:extLst>
+              <a:ext uri="{FF2B5EF4-FFF2-40B4-BE49-F238E27FC236}">
+                <a16:creationId xmlns:a16="http://schemas.microsoft.com/office/drawing/2014/main" id="{200106F4-5ADA-2B4B-1F3C-9A24203566DF}"/>
+              </a:ext>
+            </a:extLst>
+          </p:cNvPr>
+          <p:cNvGrpSpPr/>
+          <p:nvPr/>
+        </p:nvGrpSpPr>
+        <p:grpSpPr>
+          <a:xfrm>
+            <a:off x="6175844" y="3342845"/>
+            <a:ext cx="3580219" cy="2843420"/>
+            <a:chOff x="4902044" y="3678932"/>
+            <a:chExt cx="2949340" cy="2314353"/>
+          </a:xfrm>
+        </p:grpSpPr>
+        <p:grpSp>
+          <p:nvGrpSpPr>
+            <p:cNvPr id="73" name="组合 72">
+              <a:extLst>
+                <a:ext uri="{FF2B5EF4-FFF2-40B4-BE49-F238E27FC236}">
+                  <a16:creationId xmlns:a16="http://schemas.microsoft.com/office/drawing/2014/main" id="{7CDC2FC7-6873-C453-51E6-3A3ED8F29D84}"/>
+                </a:ext>
+              </a:extLst>
+            </p:cNvPr>
+            <p:cNvGrpSpPr/>
+            <p:nvPr/>
+          </p:nvGrpSpPr>
+          <p:grpSpPr>
+            <a:xfrm>
+              <a:off x="4902044" y="3939354"/>
+              <a:ext cx="2949340" cy="2053931"/>
+              <a:chOff x="4889118" y="3723382"/>
+              <a:chExt cx="2949340" cy="1669480"/>
+            </a:xfrm>
+          </p:grpSpPr>
+          <p:grpSp>
+            <p:nvGrpSpPr>
+              <p:cNvPr id="62" name="组合 61">
+                <a:extLst>
+                  <a:ext uri="{FF2B5EF4-FFF2-40B4-BE49-F238E27FC236}">
+                    <a16:creationId xmlns:a16="http://schemas.microsoft.com/office/drawing/2014/main" id="{746CF857-36F2-7EDB-49F6-030F2A76FDCF}"/>
+                  </a:ext>
+                </a:extLst>
+              </p:cNvPr>
+              <p:cNvGrpSpPr/>
+              <p:nvPr/>
+            </p:nvGrpSpPr>
+            <p:grpSpPr>
+              <a:xfrm>
+                <a:off x="4889118" y="3723382"/>
+                <a:ext cx="914274" cy="1669480"/>
+                <a:chOff x="9710928" y="2308040"/>
+                <a:chExt cx="920496" cy="1669480"/>
+              </a:xfrm>
+            </p:grpSpPr>
+            <p:sp>
+              <p:nvSpPr>
+                <p:cNvPr id="58" name="矩形 57">
+                  <a:extLst>
+                    <a:ext uri="{FF2B5EF4-FFF2-40B4-BE49-F238E27FC236}">
+                      <a16:creationId xmlns:a16="http://schemas.microsoft.com/office/drawing/2014/main" id="{2F44776D-E4D9-F9E7-ACF3-BB0F0DD3E8DA}"/>
+                    </a:ext>
+                  </a:extLst>
+                </p:cNvPr>
+                <p:cNvSpPr/>
+                <p:nvPr/>
+              </p:nvSpPr>
+              <p:spPr>
+                <a:xfrm>
+                  <a:off x="9710928" y="2308040"/>
+                  <a:ext cx="920496" cy="410188"/>
+                </a:xfrm>
+                <a:prstGeom prst="rect">
+                  <a:avLst/>
+                </a:prstGeom>
+                <a:noFill/>
+                <a:ln w="19050">
+                  <a:solidFill>
+                    <a:schemeClr val="tx1"/>
+                  </a:solidFill>
+                </a:ln>
+              </p:spPr>
+              <p:style>
+                <a:lnRef idx="2">
+                  <a:schemeClr val="accent1">
+                    <a:shade val="15000"/>
+                  </a:schemeClr>
+                </a:lnRef>
+                <a:fillRef idx="1">
+                  <a:schemeClr val="accent1"/>
+                </a:fillRef>
+                <a:effectRef idx="0">
+                  <a:schemeClr val="accent1"/>
+                </a:effectRef>
+                <a:fontRef idx="minor">
+                  <a:schemeClr val="lt1"/>
+                </a:fontRef>
+              </p:style>
+              <p:txBody>
+                <a:bodyPr rtlCol="0" anchor="ctr" anchorCtr="0">
+                  <a:normAutofit/>
+                </a:bodyPr>
+                <a:lstStyle/>
+                <a:p>
+                  <a:pPr algn="ctr"/>
+                  <a:r>
+                    <a:rPr lang="zh-CN" altLang="en-US" sz="1100" dirty="0">
+                      <a:solidFill>
+                        <a:schemeClr val="tx1"/>
+                      </a:solidFill>
+                      <a:latin typeface="Times New Roman" panose="02020603050405020304" pitchFamily="18" charset="0"/>
+                      <a:ea typeface="宋体" panose="02010600030101010101" pitchFamily="2" charset="-122"/>
+                    </a:rPr>
+                    <a:t>线性层</a:t>
+                  </a:r>
+                  <a:endParaRPr lang="en-US" altLang="zh-CN" sz="1100" dirty="0">
+                    <a:solidFill>
+                      <a:schemeClr val="tx1"/>
+                    </a:solidFill>
+                    <a:latin typeface="Times New Roman" panose="02020603050405020304" pitchFamily="18" charset="0"/>
+                    <a:ea typeface="宋体" panose="02010600030101010101" pitchFamily="2" charset="-122"/>
+                  </a:endParaRPr>
+                </a:p>
+                <a:p>
+                  <a:pPr algn="ctr"/>
+                  <a:r>
+                    <a:rPr lang="en-US" altLang="zh-CN" sz="1100" dirty="0">
+                      <a:solidFill>
+                        <a:schemeClr val="tx1"/>
+                      </a:solidFill>
+                      <a:latin typeface="Times New Roman" panose="02020603050405020304" pitchFamily="18" charset="0"/>
+                      <a:ea typeface="宋体" panose="02010600030101010101" pitchFamily="2" charset="-122"/>
+                    </a:rPr>
+                    <a:t>FC128</a:t>
+                  </a:r>
+                  <a:endParaRPr lang="zh-CN" altLang="en-US" sz="1100" dirty="0" err="1">
+                    <a:solidFill>
+                      <a:schemeClr val="tx1"/>
+                    </a:solidFill>
                     <a:latin typeface="Times New Roman" panose="02020603050405020304" pitchFamily="18" charset="0"/>
                     <a:ea typeface="宋体" panose="02010600030101010101" pitchFamily="2" charset="-122"/>
                   </a:endParaRPr>
@@ -9120,436 +10394,281 @@
             </p:sp>
             <p:sp>
               <p:nvSpPr>
-                <p:cNvPr id="32" name="文本框 31">
+                <p:cNvPr id="59" name="矩形 58">
                   <a:extLst>
                     <a:ext uri="{FF2B5EF4-FFF2-40B4-BE49-F238E27FC236}">
-                      <a16:creationId xmlns:a16="http://schemas.microsoft.com/office/drawing/2014/main" id="{CB0A4F75-3FEC-401D-7873-A0D85F382FC9}"/>
+                      <a16:creationId xmlns:a16="http://schemas.microsoft.com/office/drawing/2014/main" id="{026F9296-CA64-E0F7-F34E-F26DDFEEE2FE}"/>
                     </a:ext>
                   </a:extLst>
                 </p:cNvPr>
-                <p:cNvSpPr txBox="1"/>
+                <p:cNvSpPr/>
                 <p:nvPr/>
               </p:nvSpPr>
               <p:spPr>
                 <a:xfrm>
-                  <a:off x="8673830" y="1555251"/>
-                  <a:ext cx="849549" cy="271011"/>
+                  <a:off x="9710928" y="2727804"/>
+                  <a:ext cx="920496" cy="410188"/>
                 </a:xfrm>
                 <a:prstGeom prst="rect">
                   <a:avLst/>
                 </a:prstGeom>
                 <a:noFill/>
+                <a:ln w="19050">
+                  <a:solidFill>
+                    <a:schemeClr val="tx1"/>
+                  </a:solidFill>
+                </a:ln>
               </p:spPr>
+              <p:style>
+                <a:lnRef idx="2">
+                  <a:schemeClr val="accent1">
+                    <a:shade val="15000"/>
+                  </a:schemeClr>
+                </a:lnRef>
+                <a:fillRef idx="1">
+                  <a:schemeClr val="accent1"/>
+                </a:fillRef>
+                <a:effectRef idx="0">
+                  <a:schemeClr val="accent1"/>
+                </a:effectRef>
+                <a:fontRef idx="minor">
+                  <a:schemeClr val="lt1"/>
+                </a:fontRef>
+              </p:style>
               <p:txBody>
-                <a:bodyPr wrap="square" rtlCol="0">
-                  <a:spAutoFit/>
+                <a:bodyPr rtlCol="0" anchor="ctr" anchorCtr="0">
+                  <a:normAutofit/>
                 </a:bodyPr>
                 <a:lstStyle/>
                 <a:p>
                   <a:pPr algn="ctr"/>
                   <a:r>
-                    <a:rPr lang="en-US" altLang="zh-CN" dirty="0">
+                    <a:rPr lang="zh-CN" altLang="en-US" sz="1100" dirty="0">
+                      <a:solidFill>
+                        <a:schemeClr val="tx1"/>
+                      </a:solidFill>
                       <a:latin typeface="Times New Roman" panose="02020603050405020304" pitchFamily="18" charset="0"/>
                       <a:ea typeface="宋体" panose="02010600030101010101" pitchFamily="2" charset="-122"/>
                     </a:rPr>
-                    <a:t>4.</a:t>
+                    <a:t>归一化层</a:t>
                   </a:r>
+                  <a:endParaRPr lang="en-US" altLang="zh-CN" sz="1100" dirty="0">
+                    <a:solidFill>
+                      <a:schemeClr val="tx1"/>
+                    </a:solidFill>
+                    <a:latin typeface="Times New Roman" panose="02020603050405020304" pitchFamily="18" charset="0"/>
+                    <a:ea typeface="宋体" panose="02010600030101010101" pitchFamily="2" charset="-122"/>
+                  </a:endParaRPr>
+                </a:p>
+                <a:p>
+                  <a:pPr algn="ctr"/>
                   <a:r>
-                    <a:rPr lang="zh-CN" altLang="en-US" dirty="0">
+                    <a:rPr lang="en-US" altLang="zh-CN" sz="1100" dirty="0" err="1">
+                      <a:solidFill>
+                        <a:schemeClr val="tx1"/>
+                      </a:solidFill>
                       <a:latin typeface="Times New Roman" panose="02020603050405020304" pitchFamily="18" charset="0"/>
                       <a:ea typeface="宋体" panose="02010600030101010101" pitchFamily="2" charset="-122"/>
                     </a:rPr>
-                    <a:t>优化</a:t>
+                    <a:t>LayerNorm</a:t>
                   </a:r>
+                  <a:endParaRPr lang="zh-CN" altLang="en-US" sz="1100" dirty="0" err="1">
+                    <a:solidFill>
+                      <a:schemeClr val="tx1"/>
+                    </a:solidFill>
+                    <a:latin typeface="Times New Roman" panose="02020603050405020304" pitchFamily="18" charset="0"/>
+                    <a:ea typeface="宋体" panose="02010600030101010101" pitchFamily="2" charset="-122"/>
+                  </a:endParaRPr>
+                </a:p>
+              </p:txBody>
+            </p:sp>
+            <p:sp>
+              <p:nvSpPr>
+                <p:cNvPr id="60" name="矩形 59">
+                  <a:extLst>
+                    <a:ext uri="{FF2B5EF4-FFF2-40B4-BE49-F238E27FC236}">
+                      <a16:creationId xmlns:a16="http://schemas.microsoft.com/office/drawing/2014/main" id="{FD89E1A8-D85E-2CBC-3564-BCB1249DCE8A}"/>
+                    </a:ext>
+                  </a:extLst>
+                </p:cNvPr>
+                <p:cNvSpPr/>
+                <p:nvPr/>
+              </p:nvSpPr>
+              <p:spPr>
+                <a:xfrm>
+                  <a:off x="9710928" y="3147568"/>
+                  <a:ext cx="920496" cy="410188"/>
+                </a:xfrm>
+                <a:prstGeom prst="rect">
+                  <a:avLst/>
+                </a:prstGeom>
+                <a:noFill/>
+                <a:ln w="19050">
+                  <a:solidFill>
+                    <a:schemeClr val="tx1"/>
+                  </a:solidFill>
+                </a:ln>
+              </p:spPr>
+              <p:style>
+                <a:lnRef idx="2">
+                  <a:schemeClr val="accent1">
+                    <a:shade val="15000"/>
+                  </a:schemeClr>
+                </a:lnRef>
+                <a:fillRef idx="1">
+                  <a:schemeClr val="accent1"/>
+                </a:fillRef>
+                <a:effectRef idx="0">
+                  <a:schemeClr val="accent1"/>
+                </a:effectRef>
+                <a:fontRef idx="minor">
+                  <a:schemeClr val="lt1"/>
+                </a:fontRef>
+              </p:style>
+              <p:txBody>
+                <a:bodyPr rtlCol="0" anchor="ctr" anchorCtr="0">
+                  <a:normAutofit/>
+                </a:bodyPr>
+                <a:lstStyle/>
+                <a:p>
+                  <a:pPr algn="ctr"/>
+                  <a:r>
+                    <a:rPr lang="zh-CN" altLang="en-US" sz="1100" dirty="0">
+                      <a:solidFill>
+                        <a:schemeClr val="tx1"/>
+                      </a:solidFill>
+                      <a:latin typeface="Times New Roman" panose="02020603050405020304" pitchFamily="18" charset="0"/>
+                      <a:ea typeface="宋体" panose="02010600030101010101" pitchFamily="2" charset="-122"/>
+                    </a:rPr>
+                    <a:t>非线性激活</a:t>
+                  </a:r>
+                  <a:endParaRPr lang="en-US" altLang="zh-CN" sz="1100" dirty="0">
+                    <a:solidFill>
+                      <a:schemeClr val="tx1"/>
+                    </a:solidFill>
+                    <a:latin typeface="Times New Roman" panose="02020603050405020304" pitchFamily="18" charset="0"/>
+                    <a:ea typeface="宋体" panose="02010600030101010101" pitchFamily="2" charset="-122"/>
+                  </a:endParaRPr>
+                </a:p>
+                <a:p>
+                  <a:pPr algn="ctr"/>
+                  <a:r>
+                    <a:rPr lang="en-US" altLang="zh-CN" sz="1100" dirty="0">
+                      <a:solidFill>
+                        <a:schemeClr val="tx1"/>
+                      </a:solidFill>
+                      <a:latin typeface="Times New Roman" panose="02020603050405020304" pitchFamily="18" charset="0"/>
+                      <a:ea typeface="宋体" panose="02010600030101010101" pitchFamily="2" charset="-122"/>
+                    </a:rPr>
+                    <a:t>GELU</a:t>
+                  </a:r>
+                  <a:endParaRPr lang="zh-CN" altLang="en-US" sz="1100" dirty="0" err="1">
+                    <a:solidFill>
+                      <a:schemeClr val="tx1"/>
+                    </a:solidFill>
+                    <a:latin typeface="Times New Roman" panose="02020603050405020304" pitchFamily="18" charset="0"/>
+                    <a:ea typeface="宋体" panose="02010600030101010101" pitchFamily="2" charset="-122"/>
+                  </a:endParaRPr>
+                </a:p>
+              </p:txBody>
+            </p:sp>
+            <p:sp>
+              <p:nvSpPr>
+                <p:cNvPr id="61" name="矩形 60">
+                  <a:extLst>
+                    <a:ext uri="{FF2B5EF4-FFF2-40B4-BE49-F238E27FC236}">
+                      <a16:creationId xmlns:a16="http://schemas.microsoft.com/office/drawing/2014/main" id="{AFA50921-B47A-D60C-195D-BE2B8ECC6CFE}"/>
+                    </a:ext>
+                  </a:extLst>
+                </p:cNvPr>
+                <p:cNvSpPr/>
+                <p:nvPr/>
+              </p:nvSpPr>
+              <p:spPr>
+                <a:xfrm>
+                  <a:off x="9710928" y="3567332"/>
+                  <a:ext cx="920496" cy="410188"/>
+                </a:xfrm>
+                <a:prstGeom prst="rect">
+                  <a:avLst/>
+                </a:prstGeom>
+                <a:noFill/>
+                <a:ln w="19050">
+                  <a:solidFill>
+                    <a:schemeClr val="tx1"/>
+                  </a:solidFill>
+                </a:ln>
+              </p:spPr>
+              <p:style>
+                <a:lnRef idx="2">
+                  <a:schemeClr val="accent1">
+                    <a:shade val="15000"/>
+                  </a:schemeClr>
+                </a:lnRef>
+                <a:fillRef idx="1">
+                  <a:schemeClr val="accent1"/>
+                </a:fillRef>
+                <a:effectRef idx="0">
+                  <a:schemeClr val="accent1"/>
+                </a:effectRef>
+                <a:fontRef idx="minor">
+                  <a:schemeClr val="lt1"/>
+                </a:fontRef>
+              </p:style>
+              <p:txBody>
+                <a:bodyPr rtlCol="0" anchor="ctr" anchorCtr="0">
+                  <a:normAutofit/>
+                </a:bodyPr>
+                <a:lstStyle/>
+                <a:p>
+                  <a:pPr algn="ctr"/>
+                  <a:r>
+                    <a:rPr lang="zh-CN" altLang="en-US" sz="1100" dirty="0">
+                      <a:solidFill>
+                        <a:schemeClr val="tx1"/>
+                      </a:solidFill>
+                      <a:latin typeface="Times New Roman" panose="02020603050405020304" pitchFamily="18" charset="0"/>
+                      <a:ea typeface="宋体" panose="02010600030101010101" pitchFamily="2" charset="-122"/>
+                    </a:rPr>
+                    <a:t>池化层</a:t>
+                  </a:r>
+                  <a:endParaRPr lang="en-US" altLang="zh-CN" sz="1100" dirty="0">
+                    <a:solidFill>
+                      <a:schemeClr val="tx1"/>
+                    </a:solidFill>
+                    <a:latin typeface="Times New Roman" panose="02020603050405020304" pitchFamily="18" charset="0"/>
+                    <a:ea typeface="宋体" panose="02010600030101010101" pitchFamily="2" charset="-122"/>
+                  </a:endParaRPr>
+                </a:p>
+                <a:p>
+                  <a:pPr algn="ctr"/>
+                  <a:r>
+                    <a:rPr lang="en-US" altLang="zh-CN" sz="1100" dirty="0">
+                      <a:solidFill>
+                        <a:schemeClr val="tx1"/>
+                      </a:solidFill>
+                      <a:latin typeface="Times New Roman" panose="02020603050405020304" pitchFamily="18" charset="0"/>
+                      <a:ea typeface="宋体" panose="02010600030101010101" pitchFamily="2" charset="-122"/>
+                    </a:rPr>
+                    <a:t>Dropout(0.1)</a:t>
+                  </a:r>
+                  <a:endParaRPr lang="zh-CN" altLang="en-US" sz="1100" dirty="0" err="1">
+                    <a:solidFill>
+                      <a:schemeClr val="tx1"/>
+                    </a:solidFill>
+                    <a:latin typeface="Times New Roman" panose="02020603050405020304" pitchFamily="18" charset="0"/>
+                    <a:ea typeface="宋体" panose="02010600030101010101" pitchFamily="2" charset="-122"/>
+                  </a:endParaRPr>
                 </a:p>
               </p:txBody>
             </p:sp>
           </p:grpSp>
-        </p:grpSp>
-        <p:grpSp>
-          <p:nvGrpSpPr>
-            <p:cNvPr id="35" name="组合 34">
-              <a:extLst>
-                <a:ext uri="{FF2B5EF4-FFF2-40B4-BE49-F238E27FC236}">
-                  <a16:creationId xmlns:a16="http://schemas.microsoft.com/office/drawing/2014/main" id="{DEF30DAD-BEC4-8EAD-10A9-14338510D8C5}"/>
-                </a:ext>
-              </a:extLst>
-            </p:cNvPr>
-            <p:cNvGrpSpPr/>
-            <p:nvPr/>
-          </p:nvGrpSpPr>
-          <p:grpSpPr>
-            <a:xfrm>
-              <a:off x="3472774" y="2834651"/>
-              <a:ext cx="5992239" cy="3664895"/>
-              <a:chOff x="3897549" y="2859122"/>
-              <a:chExt cx="5625830" cy="3664895"/>
-            </a:xfrm>
-          </p:grpSpPr>
-          <p:sp>
-            <p:nvSpPr>
-              <p:cNvPr id="33" name="矩形 32">
+          <p:grpSp>
+            <p:nvGrpSpPr>
+              <p:cNvPr id="63" name="组合 62">
                 <a:extLst>
                   <a:ext uri="{FF2B5EF4-FFF2-40B4-BE49-F238E27FC236}">
-                    <a16:creationId xmlns:a16="http://schemas.microsoft.com/office/drawing/2014/main" id="{0B56B3B9-E292-3BD7-4F13-0CA23124BEA3}"/>
-                  </a:ext>
-                </a:extLst>
-              </p:cNvPr>
-              <p:cNvSpPr/>
-              <p:nvPr/>
-            </p:nvSpPr>
-            <p:spPr>
-              <a:xfrm>
-                <a:off x="3897549" y="2859122"/>
-                <a:ext cx="5625830" cy="3664895"/>
-              </a:xfrm>
-              <a:prstGeom prst="rect">
-                <a:avLst/>
-              </a:prstGeom>
-              <a:noFill/>
-              <a:ln w="19050">
-                <a:solidFill>
-                  <a:schemeClr val="tx1"/>
-                </a:solidFill>
-              </a:ln>
-            </p:spPr>
-            <p:style>
-              <a:lnRef idx="2">
-                <a:schemeClr val="accent1">
-                  <a:shade val="15000"/>
-                </a:schemeClr>
-              </a:lnRef>
-              <a:fillRef idx="1">
-                <a:schemeClr val="accent1"/>
-              </a:fillRef>
-              <a:effectRef idx="0">
-                <a:schemeClr val="accent1"/>
-              </a:effectRef>
-              <a:fontRef idx="minor">
-                <a:schemeClr val="lt1"/>
-              </a:fontRef>
-            </p:style>
-            <p:txBody>
-              <a:bodyPr rtlCol="0" anchor="ctr"/>
-              <a:lstStyle/>
-              <a:p>
-                <a:pPr algn="ctr"/>
-                <a:endParaRPr lang="zh-CN" altLang="en-US">
-                  <a:latin typeface="Times New Roman" panose="02020603050405020304" pitchFamily="18" charset="0"/>
-                  <a:ea typeface="宋体" panose="02010600030101010101" pitchFamily="2" charset="-122"/>
-                </a:endParaRPr>
-              </a:p>
-            </p:txBody>
-          </p:sp>
-          <p:sp>
-            <p:nvSpPr>
-              <p:cNvPr id="34" name="文本框 33">
-                <a:extLst>
-                  <a:ext uri="{FF2B5EF4-FFF2-40B4-BE49-F238E27FC236}">
-                    <a16:creationId xmlns:a16="http://schemas.microsoft.com/office/drawing/2014/main" id="{76F9FE90-4986-AD30-B5A7-C36D8C511602}"/>
-                  </a:ext>
-                </a:extLst>
-              </p:cNvPr>
-              <p:cNvSpPr txBox="1"/>
-              <p:nvPr/>
-            </p:nvSpPr>
-            <p:spPr>
-              <a:xfrm>
-                <a:off x="4045087" y="2937753"/>
-                <a:ext cx="2364402" cy="369332"/>
-              </a:xfrm>
-              <a:prstGeom prst="rect">
-                <a:avLst/>
-              </a:prstGeom>
-              <a:noFill/>
-            </p:spPr>
-            <p:txBody>
-              <a:bodyPr wrap="square" rtlCol="0">
-                <a:spAutoFit/>
-              </a:bodyPr>
-              <a:lstStyle/>
-              <a:p>
-                <a:pPr algn="ctr"/>
-                <a:r>
-                  <a:rPr lang="en-US" altLang="zh-CN" dirty="0">
-                    <a:latin typeface="Times New Roman" panose="02020603050405020304" pitchFamily="18" charset="0"/>
-                    <a:ea typeface="宋体" panose="02010600030101010101" pitchFamily="2" charset="-122"/>
-                  </a:rPr>
-                  <a:t>2. </a:t>
-                </a:r>
-                <a:r>
-                  <a:rPr lang="zh-CN" altLang="en-US" dirty="0">
-                    <a:latin typeface="Times New Roman" panose="02020603050405020304" pitchFamily="18" charset="0"/>
-                    <a:ea typeface="宋体" panose="02010600030101010101" pitchFamily="2" charset="-122"/>
-                  </a:rPr>
-                  <a:t>多任务神经网络架构</a:t>
-                </a:r>
-              </a:p>
-            </p:txBody>
-          </p:sp>
-        </p:grpSp>
-        <p:sp>
-          <p:nvSpPr>
-            <p:cNvPr id="39" name="矩形 38">
-              <a:extLst>
-                <a:ext uri="{FF2B5EF4-FFF2-40B4-BE49-F238E27FC236}">
-                  <a16:creationId xmlns:a16="http://schemas.microsoft.com/office/drawing/2014/main" id="{51757C63-CA56-11E4-ECCF-1B28BB3119E9}"/>
-                </a:ext>
-              </a:extLst>
-            </p:cNvPr>
-            <p:cNvSpPr/>
-            <p:nvPr/>
-          </p:nvSpPr>
-          <p:spPr>
-            <a:xfrm>
-              <a:off x="3768282" y="3340537"/>
-              <a:ext cx="5436678" cy="3035295"/>
-            </a:xfrm>
-            <a:prstGeom prst="rect">
-              <a:avLst/>
-            </a:prstGeom>
-            <a:noFill/>
-            <a:ln w="19050">
-              <a:solidFill>
-                <a:schemeClr val="tx1"/>
-              </a:solidFill>
-            </a:ln>
-          </p:spPr>
-          <p:style>
-            <a:lnRef idx="2">
-              <a:schemeClr val="accent1">
-                <a:shade val="15000"/>
-              </a:schemeClr>
-            </a:lnRef>
-            <a:fillRef idx="1">
-              <a:schemeClr val="accent1"/>
-            </a:fillRef>
-            <a:effectRef idx="0">
-              <a:schemeClr val="accent1"/>
-            </a:effectRef>
-            <a:fontRef idx="minor">
-              <a:schemeClr val="lt1"/>
-            </a:fontRef>
-          </p:style>
-          <p:txBody>
-            <a:bodyPr rtlCol="0" anchor="ctr"/>
-            <a:lstStyle/>
-            <a:p>
-              <a:pPr algn="ctr"/>
-              <a:endParaRPr lang="zh-CN" altLang="en-US">
-                <a:latin typeface="Times New Roman" panose="02020603050405020304" pitchFamily="18" charset="0"/>
-                <a:ea typeface="宋体" panose="02010600030101010101" pitchFamily="2" charset="-122"/>
-              </a:endParaRPr>
-            </a:p>
-          </p:txBody>
-        </p:sp>
-        <p:cxnSp>
-          <p:nvCxnSpPr>
-            <p:cNvPr id="43" name="直接箭头连接符 42">
-              <a:extLst>
-                <a:ext uri="{FF2B5EF4-FFF2-40B4-BE49-F238E27FC236}">
-                  <a16:creationId xmlns:a16="http://schemas.microsoft.com/office/drawing/2014/main" id="{5E08EB73-0EBF-3E56-3EF2-874E8B28ED55}"/>
-                </a:ext>
-              </a:extLst>
-            </p:cNvPr>
-            <p:cNvCxnSpPr>
-              <a:cxnSpLocks/>
-              <a:stCxn id="13" idx="2"/>
-            </p:cNvCxnSpPr>
-            <p:nvPr/>
-          </p:nvCxnSpPr>
-          <p:spPr>
-            <a:xfrm rot="16200000" flipH="1">
-              <a:off x="2213398" y="2826586"/>
-              <a:ext cx="1356443" cy="1878389"/>
-            </a:xfrm>
-            <a:prstGeom prst="bentConnector2">
-              <a:avLst/>
-            </a:prstGeom>
-            <a:ln w="19050">
-              <a:solidFill>
-                <a:schemeClr val="tx1"/>
-              </a:solidFill>
-              <a:tailEnd type="triangle"/>
-            </a:ln>
-          </p:spPr>
-          <p:style>
-            <a:lnRef idx="1">
-              <a:schemeClr val="accent1"/>
-            </a:lnRef>
-            <a:fillRef idx="0">
-              <a:schemeClr val="accent1"/>
-            </a:fillRef>
-            <a:effectRef idx="0">
-              <a:schemeClr val="accent1"/>
-            </a:effectRef>
-            <a:fontRef idx="minor">
-              <a:schemeClr val="tx1"/>
-            </a:fontRef>
-          </p:style>
-        </p:cxnSp>
-        <p:grpSp>
-          <p:nvGrpSpPr>
-            <p:cNvPr id="94" name="组合 93">
-              <a:extLst>
-                <a:ext uri="{FF2B5EF4-FFF2-40B4-BE49-F238E27FC236}">
-                  <a16:creationId xmlns:a16="http://schemas.microsoft.com/office/drawing/2014/main" id="{05BC51E5-2035-1623-CD8B-7ED5A11238A0}"/>
-                </a:ext>
-              </a:extLst>
-            </p:cNvPr>
-            <p:cNvGrpSpPr/>
-            <p:nvPr/>
-          </p:nvGrpSpPr>
-          <p:grpSpPr>
-            <a:xfrm>
-              <a:off x="3831981" y="3573970"/>
-              <a:ext cx="817163" cy="2601956"/>
-              <a:chOff x="3805332" y="3533873"/>
-              <a:chExt cx="817163" cy="2016227"/>
-            </a:xfrm>
-          </p:grpSpPr>
-          <p:sp>
-            <p:nvSpPr>
-              <p:cNvPr id="50" name="矩形 49">
-                <a:extLst>
-                  <a:ext uri="{FF2B5EF4-FFF2-40B4-BE49-F238E27FC236}">
-                    <a16:creationId xmlns:a16="http://schemas.microsoft.com/office/drawing/2014/main" id="{5533EB0E-34CB-0000-4100-A9C0964163AD}"/>
-                  </a:ext>
-                </a:extLst>
-              </p:cNvPr>
-              <p:cNvSpPr/>
-              <p:nvPr/>
-            </p:nvSpPr>
-            <p:spPr>
-              <a:xfrm>
-                <a:off x="3829892" y="3533873"/>
-                <a:ext cx="768042" cy="2016227"/>
-              </a:xfrm>
-              <a:prstGeom prst="rect">
-                <a:avLst/>
-              </a:prstGeom>
-              <a:noFill/>
-              <a:ln w="19050">
-                <a:solidFill>
-                  <a:schemeClr val="tx1"/>
-                </a:solidFill>
-              </a:ln>
-            </p:spPr>
-            <p:style>
-              <a:lnRef idx="2">
-                <a:schemeClr val="accent1">
-                  <a:shade val="15000"/>
-                </a:schemeClr>
-              </a:lnRef>
-              <a:fillRef idx="1">
-                <a:schemeClr val="accent1"/>
-              </a:fillRef>
-              <a:effectRef idx="0">
-                <a:schemeClr val="accent1"/>
-              </a:effectRef>
-              <a:fontRef idx="minor">
-                <a:schemeClr val="lt1"/>
-              </a:fontRef>
-            </p:style>
-            <p:txBody>
-              <a:bodyPr rtlCol="0" anchor="ctr"/>
-              <a:lstStyle/>
-              <a:p>
-                <a:pPr algn="ctr"/>
-                <a:endParaRPr lang="zh-CN" altLang="en-US" dirty="0">
-                  <a:solidFill>
-                    <a:schemeClr val="tx1"/>
-                  </a:solidFill>
-                  <a:latin typeface="Times New Roman" panose="02020603050405020304" pitchFamily="18" charset="0"/>
-                  <a:ea typeface="宋体" panose="02010600030101010101" pitchFamily="2" charset="-122"/>
-                </a:endParaRPr>
-              </a:p>
-            </p:txBody>
-          </p:sp>
-          <p:sp>
-            <p:nvSpPr>
-              <p:cNvPr id="51" name="文本框 50">
-                <a:extLst>
-                  <a:ext uri="{FF2B5EF4-FFF2-40B4-BE49-F238E27FC236}">
-                    <a16:creationId xmlns:a16="http://schemas.microsoft.com/office/drawing/2014/main" id="{BE01B920-9475-632E-0610-A90341EC118C}"/>
-                  </a:ext>
-                </a:extLst>
-              </p:cNvPr>
-              <p:cNvSpPr txBox="1"/>
-              <p:nvPr/>
-            </p:nvSpPr>
-            <p:spPr>
-              <a:xfrm>
-                <a:off x="3805332" y="4410709"/>
-                <a:ext cx="817163" cy="321965"/>
-              </a:xfrm>
-              <a:prstGeom prst="rect">
-                <a:avLst/>
-              </a:prstGeom>
-              <a:noFill/>
-            </p:spPr>
-            <p:txBody>
-              <a:bodyPr wrap="square" rtlCol="0" anchor="ctr" anchorCtr="1">
-                <a:spAutoFit/>
-              </a:bodyPr>
-              <a:lstStyle/>
-              <a:p>
-                <a:pPr algn="ctr"/>
-                <a:r>
-                  <a:rPr lang="zh-CN" altLang="en-US" sz="1050" dirty="0">
-                    <a:latin typeface="Times New Roman" panose="02020603050405020304" pitchFamily="18" charset="0"/>
-                    <a:ea typeface="宋体" panose="02010600030101010101" pitchFamily="2" charset="-122"/>
-                  </a:rPr>
-                  <a:t>归一化层</a:t>
-                </a:r>
-                <a:endParaRPr lang="en-US" altLang="zh-CN" sz="1050" dirty="0">
-                  <a:latin typeface="Times New Roman" panose="02020603050405020304" pitchFamily="18" charset="0"/>
-                  <a:ea typeface="宋体" panose="02010600030101010101" pitchFamily="2" charset="-122"/>
-                </a:endParaRPr>
-              </a:p>
-              <a:p>
-                <a:pPr algn="ctr"/>
-                <a:r>
-                  <a:rPr lang="en-US" altLang="zh-CN" sz="1050" dirty="0" err="1">
-                    <a:latin typeface="Times New Roman" panose="02020603050405020304" pitchFamily="18" charset="0"/>
-                    <a:ea typeface="宋体" panose="02010600030101010101" pitchFamily="2" charset="-122"/>
-                  </a:rPr>
-                  <a:t>LayerNorm</a:t>
-                </a:r>
-                <a:endParaRPr lang="zh-CN" altLang="en-US" sz="1050" dirty="0">
-                  <a:latin typeface="Times New Roman" panose="02020603050405020304" pitchFamily="18" charset="0"/>
-                  <a:ea typeface="宋体" panose="02010600030101010101" pitchFamily="2" charset="-122"/>
-                </a:endParaRPr>
-              </a:p>
-            </p:txBody>
-          </p:sp>
-        </p:grpSp>
-        <p:grpSp>
-          <p:nvGrpSpPr>
-            <p:cNvPr id="85" name="组合 84">
-              <a:extLst>
-                <a:ext uri="{FF2B5EF4-FFF2-40B4-BE49-F238E27FC236}">
-                  <a16:creationId xmlns:a16="http://schemas.microsoft.com/office/drawing/2014/main" id="{4719EDE1-F0DE-0573-8811-8A70C06BF588}"/>
-                </a:ext>
-              </a:extLst>
-            </p:cNvPr>
-            <p:cNvGrpSpPr/>
-            <p:nvPr/>
-          </p:nvGrpSpPr>
-          <p:grpSpPr>
-            <a:xfrm>
-              <a:off x="8086283" y="3459248"/>
-              <a:ext cx="1005838" cy="2846017"/>
-              <a:chOff x="9775746" y="2956216"/>
-              <a:chExt cx="1005838" cy="2368430"/>
-            </a:xfrm>
-          </p:grpSpPr>
-          <p:grpSp>
-            <p:nvGrpSpPr>
-              <p:cNvPr id="84" name="组合 83">
-                <a:extLst>
-                  <a:ext uri="{FF2B5EF4-FFF2-40B4-BE49-F238E27FC236}">
-                    <a16:creationId xmlns:a16="http://schemas.microsoft.com/office/drawing/2014/main" id="{98688545-7D7A-1190-8924-EDEF9F0AF8CA}"/>
+                    <a16:creationId xmlns:a16="http://schemas.microsoft.com/office/drawing/2014/main" id="{A187E5AA-238B-AA3C-0D68-538660031E8D}"/>
                   </a:ext>
                 </a:extLst>
               </p:cNvPr>
@@ -9558,680 +10677,761 @@
             </p:nvGrpSpPr>
             <p:grpSpPr>
               <a:xfrm>
-                <a:off x="9775746" y="2956216"/>
-                <a:ext cx="1005838" cy="2368430"/>
-                <a:chOff x="9775746" y="2956216"/>
-                <a:chExt cx="1005838" cy="2368430"/>
+                <a:off x="5906651" y="3723382"/>
+                <a:ext cx="914274" cy="1669480"/>
+                <a:chOff x="9710928" y="2308040"/>
+                <a:chExt cx="920496" cy="1669480"/>
               </a:xfrm>
             </p:grpSpPr>
-            <p:grpSp>
-              <p:nvGrpSpPr>
-                <p:cNvPr id="76" name="组合 75">
+            <p:sp>
+              <p:nvSpPr>
+                <p:cNvPr id="64" name="矩形 63">
                   <a:extLst>
                     <a:ext uri="{FF2B5EF4-FFF2-40B4-BE49-F238E27FC236}">
-                      <a16:creationId xmlns:a16="http://schemas.microsoft.com/office/drawing/2014/main" id="{DE1B644C-B85E-8F5A-7CFE-E4B339B071A8}"/>
+                      <a16:creationId xmlns:a16="http://schemas.microsoft.com/office/drawing/2014/main" id="{ADB1D238-7326-62D0-802F-ACA5F40C5BCD}"/>
                     </a:ext>
                   </a:extLst>
                 </p:cNvPr>
-                <p:cNvGrpSpPr/>
+                <p:cNvSpPr/>
                 <p:nvPr/>
-              </p:nvGrpSpPr>
-              <p:grpSpPr>
+              </p:nvSpPr>
+              <p:spPr>
                 <a:xfrm>
-                  <a:off x="9775746" y="2956216"/>
-                  <a:ext cx="1005838" cy="633687"/>
-                  <a:chOff x="9775746" y="2956216"/>
-                  <a:chExt cx="1005838" cy="633687"/>
+                  <a:off x="9710928" y="2308040"/>
+                  <a:ext cx="920496" cy="410188"/>
                 </a:xfrm>
-              </p:grpSpPr>
-              <p:sp>
-                <p:nvSpPr>
-                  <p:cNvPr id="74" name="矩形 73">
-                    <a:extLst>
-                      <a:ext uri="{FF2B5EF4-FFF2-40B4-BE49-F238E27FC236}">
-                        <a16:creationId xmlns:a16="http://schemas.microsoft.com/office/drawing/2014/main" id="{EBDC5CDB-502E-BE8C-E091-59B0362CF213}"/>
-                      </a:ext>
-                    </a:extLst>
-                  </p:cNvPr>
-                  <p:cNvSpPr/>
-                  <p:nvPr/>
-                </p:nvSpPr>
-                <p:spPr>
-                  <a:xfrm>
-                    <a:off x="9775746" y="2956216"/>
-                    <a:ext cx="1005838" cy="283464"/>
-                  </a:xfrm>
-                  <a:prstGeom prst="rect">
-                    <a:avLst/>
-                  </a:prstGeom>
-                  <a:noFill/>
-                  <a:ln w="19050">
-                    <a:solidFill>
-                      <a:schemeClr val="tx1"/>
-                    </a:solidFill>
-                  </a:ln>
-                </p:spPr>
-                <p:style>
-                  <a:lnRef idx="2">
-                    <a:schemeClr val="accent1">
-                      <a:shade val="15000"/>
-                    </a:schemeClr>
-                  </a:lnRef>
-                  <a:fillRef idx="1">
-                    <a:schemeClr val="accent1"/>
-                  </a:fillRef>
-                  <a:effectRef idx="0">
-                    <a:schemeClr val="accent1"/>
-                  </a:effectRef>
-                  <a:fontRef idx="minor">
-                    <a:schemeClr val="lt1"/>
-                  </a:fontRef>
-                </p:style>
-                <p:txBody>
-                  <a:bodyPr rtlCol="0" anchor="ctr"/>
-                  <a:lstStyle/>
-                  <a:p>
-                    <a:pPr algn="ctr"/>
-                    <a:r>
-                      <a:rPr lang="zh-CN" altLang="en-US" sz="1100" dirty="0">
-                        <a:solidFill>
-                          <a:schemeClr val="tx1"/>
-                        </a:solidFill>
-                        <a:latin typeface="Times New Roman" panose="02020603050405020304" pitchFamily="18" charset="0"/>
-                        <a:ea typeface="宋体" panose="02010600030101010101" pitchFamily="2" charset="-122"/>
-                      </a:rPr>
-                      <a:t>任务</a:t>
-                    </a:r>
-                    <a:r>
-                      <a:rPr lang="en-US" altLang="zh-CN" sz="1100" dirty="0">
-                        <a:solidFill>
-                          <a:schemeClr val="tx1"/>
-                        </a:solidFill>
-                        <a:latin typeface="Times New Roman" panose="02020603050405020304" pitchFamily="18" charset="0"/>
-                        <a:ea typeface="宋体" panose="02010600030101010101" pitchFamily="2" charset="-122"/>
-                      </a:rPr>
-                      <a:t>1</a:t>
-                    </a:r>
-                    <a:r>
-                      <a:rPr lang="zh-CN" altLang="en-US" sz="1100" dirty="0">
-                        <a:solidFill>
-                          <a:schemeClr val="tx1"/>
-                        </a:solidFill>
-                        <a:latin typeface="Times New Roman" panose="02020603050405020304" pitchFamily="18" charset="0"/>
-                        <a:ea typeface="宋体" panose="02010600030101010101" pitchFamily="2" charset="-122"/>
-                      </a:rPr>
-                      <a:t>输出头</a:t>
-                    </a:r>
-                  </a:p>
-                </p:txBody>
-              </p:sp>
-              <p:sp>
-                <p:nvSpPr>
-                  <p:cNvPr id="75" name="矩形 74">
-                    <a:extLst>
-                      <a:ext uri="{FF2B5EF4-FFF2-40B4-BE49-F238E27FC236}">
-                        <a16:creationId xmlns:a16="http://schemas.microsoft.com/office/drawing/2014/main" id="{F225BD3A-2D2C-5890-0AF6-83F784083EE3}"/>
-                      </a:ext>
-                    </a:extLst>
-                  </p:cNvPr>
-                  <p:cNvSpPr/>
-                  <p:nvPr/>
-                </p:nvSpPr>
-                <p:spPr>
-                  <a:xfrm>
-                    <a:off x="9775746" y="3239680"/>
-                    <a:ext cx="1005838" cy="350223"/>
-                  </a:xfrm>
-                  <a:prstGeom prst="rect">
-                    <a:avLst/>
-                  </a:prstGeom>
-                  <a:noFill/>
-                  <a:ln w="19050">
-                    <a:solidFill>
-                      <a:schemeClr val="tx1"/>
-                    </a:solidFill>
-                  </a:ln>
-                </p:spPr>
-                <p:style>
-                  <a:lnRef idx="2">
-                    <a:schemeClr val="accent1">
-                      <a:shade val="15000"/>
-                    </a:schemeClr>
-                  </a:lnRef>
-                  <a:fillRef idx="1">
-                    <a:schemeClr val="accent1"/>
-                  </a:fillRef>
-                  <a:effectRef idx="0">
-                    <a:schemeClr val="accent1"/>
-                  </a:effectRef>
-                  <a:fontRef idx="minor">
-                    <a:schemeClr val="lt1"/>
-                  </a:fontRef>
-                </p:style>
-                <p:txBody>
-                  <a:bodyPr rtlCol="0" anchor="ctr"/>
-                  <a:lstStyle/>
-                  <a:p>
-                    <a:pPr algn="ctr"/>
-                    <a:r>
-                      <a:rPr lang="zh-CN" altLang="en-US" sz="1100" dirty="0">
-                        <a:solidFill>
-                          <a:schemeClr val="tx1"/>
-                        </a:solidFill>
-                        <a:latin typeface="Times New Roman" panose="02020603050405020304" pitchFamily="18" charset="0"/>
-                        <a:ea typeface="宋体" panose="02010600030101010101" pitchFamily="2" charset="-122"/>
-                      </a:rPr>
-                      <a:t>线性层</a:t>
-                    </a:r>
-                    <a:endParaRPr lang="en-US" altLang="zh-CN" sz="1100" dirty="0">
+                <a:prstGeom prst="rect">
+                  <a:avLst/>
+                </a:prstGeom>
+                <a:noFill/>
+                <a:ln w="19050">
+                  <a:solidFill>
+                    <a:schemeClr val="tx1"/>
+                  </a:solidFill>
+                </a:ln>
+              </p:spPr>
+              <p:style>
+                <a:lnRef idx="2">
+                  <a:schemeClr val="accent1">
+                    <a:shade val="15000"/>
+                  </a:schemeClr>
+                </a:lnRef>
+                <a:fillRef idx="1">
+                  <a:schemeClr val="accent1"/>
+                </a:fillRef>
+                <a:effectRef idx="0">
+                  <a:schemeClr val="accent1"/>
+                </a:effectRef>
+                <a:fontRef idx="minor">
+                  <a:schemeClr val="lt1"/>
+                </a:fontRef>
+              </p:style>
+              <p:txBody>
+                <a:bodyPr rtlCol="0" anchor="ctr" anchorCtr="0">
+                  <a:normAutofit/>
+                </a:bodyPr>
+                <a:lstStyle/>
+                <a:p>
+                  <a:pPr algn="ctr"/>
+                  <a:r>
+                    <a:rPr lang="zh-CN" altLang="en-US" sz="1100" dirty="0">
                       <a:solidFill>
                         <a:schemeClr val="tx1"/>
                       </a:solidFill>
                       <a:latin typeface="Times New Roman" panose="02020603050405020304" pitchFamily="18" charset="0"/>
                       <a:ea typeface="宋体" panose="02010600030101010101" pitchFamily="2" charset="-122"/>
-                    </a:endParaRPr>
-                  </a:p>
-                  <a:p>
-                    <a:pPr algn="ctr"/>
-                    <a:r>
-                      <a:rPr lang="en-US" altLang="zh-CN" sz="1100" dirty="0">
-                        <a:solidFill>
-                          <a:schemeClr val="tx1"/>
-                        </a:solidFill>
-                        <a:latin typeface="Times New Roman" panose="02020603050405020304" pitchFamily="18" charset="0"/>
-                        <a:ea typeface="宋体" panose="02010600030101010101" pitchFamily="2" charset="-122"/>
-                      </a:rPr>
-                      <a:t>FC128</a:t>
-                    </a:r>
-                    <a:endParaRPr lang="zh-CN" altLang="en-US" sz="1100" dirty="0">
+                    </a:rPr>
+                    <a:t>线性层</a:t>
+                  </a:r>
+                  <a:endParaRPr lang="en-US" altLang="zh-CN" sz="1100" dirty="0">
+                    <a:solidFill>
+                      <a:schemeClr val="tx1"/>
+                    </a:solidFill>
+                    <a:latin typeface="Times New Roman" panose="02020603050405020304" pitchFamily="18" charset="0"/>
+                    <a:ea typeface="宋体" panose="02010600030101010101" pitchFamily="2" charset="-122"/>
+                  </a:endParaRPr>
+                </a:p>
+                <a:p>
+                  <a:pPr algn="ctr"/>
+                  <a:r>
+                    <a:rPr lang="en-US" altLang="zh-CN" sz="1100" dirty="0">
                       <a:solidFill>
                         <a:schemeClr val="tx1"/>
                       </a:solidFill>
                       <a:latin typeface="Times New Roman" panose="02020603050405020304" pitchFamily="18" charset="0"/>
                       <a:ea typeface="宋体" panose="02010600030101010101" pitchFamily="2" charset="-122"/>
-                    </a:endParaRPr>
-                  </a:p>
-                </p:txBody>
-              </p:sp>
-            </p:grpSp>
-            <p:grpSp>
-              <p:nvGrpSpPr>
-                <p:cNvPr id="77" name="组合 76">
+                    </a:rPr>
+                    <a:t>FC128</a:t>
+                  </a:r>
+                  <a:endParaRPr lang="zh-CN" altLang="en-US" sz="1100" dirty="0" err="1">
+                    <a:solidFill>
+                      <a:schemeClr val="tx1"/>
+                    </a:solidFill>
+                    <a:latin typeface="Times New Roman" panose="02020603050405020304" pitchFamily="18" charset="0"/>
+                    <a:ea typeface="宋体" panose="02010600030101010101" pitchFamily="2" charset="-122"/>
+                  </a:endParaRPr>
+                </a:p>
+              </p:txBody>
+            </p:sp>
+            <p:sp>
+              <p:nvSpPr>
+                <p:cNvPr id="65" name="矩形 64">
                   <a:extLst>
                     <a:ext uri="{FF2B5EF4-FFF2-40B4-BE49-F238E27FC236}">
-                      <a16:creationId xmlns:a16="http://schemas.microsoft.com/office/drawing/2014/main" id="{80A52979-008E-F334-CC64-6E6DD6D54D80}"/>
+                      <a16:creationId xmlns:a16="http://schemas.microsoft.com/office/drawing/2014/main" id="{550312D8-71DD-1E3F-3422-C5936E362932}"/>
                     </a:ext>
                   </a:extLst>
                 </p:cNvPr>
-                <p:cNvGrpSpPr/>
+                <p:cNvSpPr/>
                 <p:nvPr/>
-              </p:nvGrpSpPr>
-              <p:grpSpPr>
+              </p:nvSpPr>
+              <p:spPr>
                 <a:xfrm>
-                  <a:off x="9775746" y="3661145"/>
-                  <a:ext cx="1005838" cy="633687"/>
-                  <a:chOff x="9775746" y="2956216"/>
-                  <a:chExt cx="1005838" cy="633687"/>
+                  <a:off x="9710928" y="2727804"/>
+                  <a:ext cx="920496" cy="410188"/>
                 </a:xfrm>
-              </p:grpSpPr>
-              <p:sp>
-                <p:nvSpPr>
-                  <p:cNvPr id="78" name="矩形 77">
-                    <a:extLst>
-                      <a:ext uri="{FF2B5EF4-FFF2-40B4-BE49-F238E27FC236}">
-                        <a16:creationId xmlns:a16="http://schemas.microsoft.com/office/drawing/2014/main" id="{9F2B6779-B0F1-53AE-B214-8022C4C05FBD}"/>
-                      </a:ext>
-                    </a:extLst>
-                  </p:cNvPr>
-                  <p:cNvSpPr/>
-                  <p:nvPr/>
-                </p:nvSpPr>
-                <p:spPr>
-                  <a:xfrm>
-                    <a:off x="9775746" y="2956216"/>
-                    <a:ext cx="1005838" cy="283464"/>
-                  </a:xfrm>
-                  <a:prstGeom prst="rect">
-                    <a:avLst/>
-                  </a:prstGeom>
-                  <a:noFill/>
-                  <a:ln w="19050">
-                    <a:solidFill>
-                      <a:schemeClr val="tx1"/>
-                    </a:solidFill>
-                  </a:ln>
-                </p:spPr>
-                <p:style>
-                  <a:lnRef idx="2">
-                    <a:schemeClr val="accent1">
-                      <a:shade val="15000"/>
-                    </a:schemeClr>
-                  </a:lnRef>
-                  <a:fillRef idx="1">
-                    <a:schemeClr val="accent1"/>
-                  </a:fillRef>
-                  <a:effectRef idx="0">
-                    <a:schemeClr val="accent1"/>
-                  </a:effectRef>
-                  <a:fontRef idx="minor">
-                    <a:schemeClr val="lt1"/>
-                  </a:fontRef>
-                </p:style>
-                <p:txBody>
-                  <a:bodyPr rtlCol="0" anchor="ctr"/>
-                  <a:lstStyle/>
-                  <a:p>
-                    <a:pPr algn="ctr"/>
-                    <a:r>
-                      <a:rPr lang="zh-CN" altLang="en-US" sz="1100" dirty="0">
-                        <a:solidFill>
-                          <a:schemeClr val="tx1"/>
-                        </a:solidFill>
-                        <a:latin typeface="Times New Roman" panose="02020603050405020304" pitchFamily="18" charset="0"/>
-                        <a:ea typeface="宋体" panose="02010600030101010101" pitchFamily="2" charset="-122"/>
-                      </a:rPr>
-                      <a:t>任务</a:t>
-                    </a:r>
-                    <a:r>
-                      <a:rPr lang="en-US" altLang="zh-CN" sz="1100" dirty="0">
-                        <a:solidFill>
-                          <a:schemeClr val="tx1"/>
-                        </a:solidFill>
-                        <a:latin typeface="Times New Roman" panose="02020603050405020304" pitchFamily="18" charset="0"/>
-                        <a:ea typeface="宋体" panose="02010600030101010101" pitchFamily="2" charset="-122"/>
-                      </a:rPr>
-                      <a:t>2</a:t>
-                    </a:r>
-                    <a:r>
-                      <a:rPr lang="zh-CN" altLang="en-US" sz="1100" dirty="0">
-                        <a:solidFill>
-                          <a:schemeClr val="tx1"/>
-                        </a:solidFill>
-                        <a:latin typeface="Times New Roman" panose="02020603050405020304" pitchFamily="18" charset="0"/>
-                        <a:ea typeface="宋体" panose="02010600030101010101" pitchFamily="2" charset="-122"/>
-                      </a:rPr>
-                      <a:t>输出头</a:t>
-                    </a:r>
-                  </a:p>
-                </p:txBody>
-              </p:sp>
-              <p:sp>
-                <p:nvSpPr>
-                  <p:cNvPr id="79" name="矩形 78">
-                    <a:extLst>
-                      <a:ext uri="{FF2B5EF4-FFF2-40B4-BE49-F238E27FC236}">
-                        <a16:creationId xmlns:a16="http://schemas.microsoft.com/office/drawing/2014/main" id="{B6DB6774-AA80-38EA-8D55-C37F28F57A64}"/>
-                      </a:ext>
-                    </a:extLst>
-                  </p:cNvPr>
-                  <p:cNvSpPr/>
-                  <p:nvPr/>
-                </p:nvSpPr>
-                <p:spPr>
-                  <a:xfrm>
-                    <a:off x="9775746" y="3239680"/>
-                    <a:ext cx="1005838" cy="350223"/>
-                  </a:xfrm>
-                  <a:prstGeom prst="rect">
-                    <a:avLst/>
-                  </a:prstGeom>
-                  <a:noFill/>
-                  <a:ln w="19050">
-                    <a:solidFill>
-                      <a:schemeClr val="tx1"/>
-                    </a:solidFill>
-                  </a:ln>
-                </p:spPr>
-                <p:style>
-                  <a:lnRef idx="2">
-                    <a:schemeClr val="accent1">
-                      <a:shade val="15000"/>
-                    </a:schemeClr>
-                  </a:lnRef>
-                  <a:fillRef idx="1">
-                    <a:schemeClr val="accent1"/>
-                  </a:fillRef>
-                  <a:effectRef idx="0">
-                    <a:schemeClr val="accent1"/>
-                  </a:effectRef>
-                  <a:fontRef idx="minor">
-                    <a:schemeClr val="lt1"/>
-                  </a:fontRef>
-                </p:style>
-                <p:txBody>
-                  <a:bodyPr rtlCol="0" anchor="ctr"/>
-                  <a:lstStyle/>
-                  <a:p>
-                    <a:pPr algn="ctr"/>
-                    <a:r>
-                      <a:rPr lang="zh-CN" altLang="en-US" sz="1100" dirty="0">
-                        <a:solidFill>
-                          <a:schemeClr val="tx1"/>
-                        </a:solidFill>
-                        <a:latin typeface="Times New Roman" panose="02020603050405020304" pitchFamily="18" charset="0"/>
-                        <a:ea typeface="宋体" panose="02010600030101010101" pitchFamily="2" charset="-122"/>
-                      </a:rPr>
-                      <a:t>线性层</a:t>
-                    </a:r>
-                    <a:endParaRPr lang="en-US" altLang="zh-CN" sz="1100" dirty="0">
+                <a:prstGeom prst="rect">
+                  <a:avLst/>
+                </a:prstGeom>
+                <a:noFill/>
+                <a:ln w="19050">
+                  <a:solidFill>
+                    <a:schemeClr val="tx1"/>
+                  </a:solidFill>
+                </a:ln>
+              </p:spPr>
+              <p:style>
+                <a:lnRef idx="2">
+                  <a:schemeClr val="accent1">
+                    <a:shade val="15000"/>
+                  </a:schemeClr>
+                </a:lnRef>
+                <a:fillRef idx="1">
+                  <a:schemeClr val="accent1"/>
+                </a:fillRef>
+                <a:effectRef idx="0">
+                  <a:schemeClr val="accent1"/>
+                </a:effectRef>
+                <a:fontRef idx="minor">
+                  <a:schemeClr val="lt1"/>
+                </a:fontRef>
+              </p:style>
+              <p:txBody>
+                <a:bodyPr rtlCol="0" anchor="ctr" anchorCtr="0">
+                  <a:normAutofit/>
+                </a:bodyPr>
+                <a:lstStyle/>
+                <a:p>
+                  <a:pPr algn="ctr"/>
+                  <a:r>
+                    <a:rPr lang="zh-CN" altLang="en-US" sz="1100" dirty="0">
                       <a:solidFill>
                         <a:schemeClr val="tx1"/>
                       </a:solidFill>
                       <a:latin typeface="Times New Roman" panose="02020603050405020304" pitchFamily="18" charset="0"/>
                       <a:ea typeface="宋体" panose="02010600030101010101" pitchFamily="2" charset="-122"/>
-                    </a:endParaRPr>
-                  </a:p>
-                  <a:p>
-                    <a:pPr algn="ctr"/>
-                    <a:r>
-                      <a:rPr lang="en-US" altLang="zh-CN" sz="1100" dirty="0">
-                        <a:solidFill>
-                          <a:schemeClr val="tx1"/>
-                        </a:solidFill>
-                        <a:latin typeface="Times New Roman" panose="02020603050405020304" pitchFamily="18" charset="0"/>
-                        <a:ea typeface="宋体" panose="02010600030101010101" pitchFamily="2" charset="-122"/>
-                      </a:rPr>
-                      <a:t>FC128</a:t>
-                    </a:r>
-                    <a:endParaRPr lang="zh-CN" altLang="en-US" sz="1100" dirty="0">
+                    </a:rPr>
+                    <a:t>归一化层</a:t>
+                  </a:r>
+                  <a:endParaRPr lang="en-US" altLang="zh-CN" sz="1100" dirty="0">
+                    <a:solidFill>
+                      <a:schemeClr val="tx1"/>
+                    </a:solidFill>
+                    <a:latin typeface="Times New Roman" panose="02020603050405020304" pitchFamily="18" charset="0"/>
+                    <a:ea typeface="宋体" panose="02010600030101010101" pitchFamily="2" charset="-122"/>
+                  </a:endParaRPr>
+                </a:p>
+                <a:p>
+                  <a:pPr algn="ctr"/>
+                  <a:r>
+                    <a:rPr lang="en-US" altLang="zh-CN" sz="1100" dirty="0" err="1">
                       <a:solidFill>
                         <a:schemeClr val="tx1"/>
                       </a:solidFill>
                       <a:latin typeface="Times New Roman" panose="02020603050405020304" pitchFamily="18" charset="0"/>
                       <a:ea typeface="宋体" panose="02010600030101010101" pitchFamily="2" charset="-122"/>
-                    </a:endParaRPr>
-                  </a:p>
-                </p:txBody>
-              </p:sp>
-            </p:grpSp>
-            <p:grpSp>
-              <p:nvGrpSpPr>
-                <p:cNvPr id="80" name="组合 79">
+                    </a:rPr>
+                    <a:t>LayerNorm</a:t>
+                  </a:r>
+                  <a:endParaRPr lang="zh-CN" altLang="en-US" sz="1100" dirty="0" err="1">
+                    <a:solidFill>
+                      <a:schemeClr val="tx1"/>
+                    </a:solidFill>
+                    <a:latin typeface="Times New Roman" panose="02020603050405020304" pitchFamily="18" charset="0"/>
+                    <a:ea typeface="宋体" panose="02010600030101010101" pitchFamily="2" charset="-122"/>
+                  </a:endParaRPr>
+                </a:p>
+              </p:txBody>
+            </p:sp>
+            <p:sp>
+              <p:nvSpPr>
+                <p:cNvPr id="66" name="矩形 65">
                   <a:extLst>
                     <a:ext uri="{FF2B5EF4-FFF2-40B4-BE49-F238E27FC236}">
-                      <a16:creationId xmlns:a16="http://schemas.microsoft.com/office/drawing/2014/main" id="{7F444A52-521E-2FD4-7D2C-F73224C56F6B}"/>
+                      <a16:creationId xmlns:a16="http://schemas.microsoft.com/office/drawing/2014/main" id="{21CDB939-7927-BDAE-1A38-0F15ADBFB951}"/>
                     </a:ext>
                   </a:extLst>
                 </p:cNvPr>
-                <p:cNvGrpSpPr/>
+                <p:cNvSpPr/>
                 <p:nvPr/>
-              </p:nvGrpSpPr>
-              <p:grpSpPr>
+              </p:nvSpPr>
+              <p:spPr>
                 <a:xfrm>
-                  <a:off x="9775746" y="4690959"/>
-                  <a:ext cx="1005838" cy="633687"/>
-                  <a:chOff x="9775746" y="2956216"/>
-                  <a:chExt cx="1005838" cy="633687"/>
+                  <a:off x="9710928" y="3147568"/>
+                  <a:ext cx="920496" cy="410188"/>
                 </a:xfrm>
-              </p:grpSpPr>
-              <p:sp>
-                <p:nvSpPr>
-                  <p:cNvPr id="81" name="矩形 80">
-                    <a:extLst>
-                      <a:ext uri="{FF2B5EF4-FFF2-40B4-BE49-F238E27FC236}">
-                        <a16:creationId xmlns:a16="http://schemas.microsoft.com/office/drawing/2014/main" id="{AFC2FAAF-E8BD-3D23-ECA5-2DFD8F7860FA}"/>
-                      </a:ext>
-                    </a:extLst>
-                  </p:cNvPr>
-                  <p:cNvSpPr/>
-                  <p:nvPr/>
-                </p:nvSpPr>
-                <p:spPr>
-                  <a:xfrm>
-                    <a:off x="9775746" y="2956216"/>
-                    <a:ext cx="1005838" cy="283464"/>
-                  </a:xfrm>
-                  <a:prstGeom prst="rect">
-                    <a:avLst/>
-                  </a:prstGeom>
-                  <a:noFill/>
-                  <a:ln w="19050">
-                    <a:solidFill>
-                      <a:schemeClr val="tx1"/>
-                    </a:solidFill>
-                  </a:ln>
-                </p:spPr>
-                <p:style>
-                  <a:lnRef idx="2">
-                    <a:schemeClr val="accent1">
-                      <a:shade val="15000"/>
-                    </a:schemeClr>
-                  </a:lnRef>
-                  <a:fillRef idx="1">
-                    <a:schemeClr val="accent1"/>
-                  </a:fillRef>
-                  <a:effectRef idx="0">
-                    <a:schemeClr val="accent1"/>
-                  </a:effectRef>
-                  <a:fontRef idx="minor">
-                    <a:schemeClr val="lt1"/>
-                  </a:fontRef>
-                </p:style>
-                <p:txBody>
-                  <a:bodyPr rtlCol="0" anchor="ctr"/>
-                  <a:lstStyle/>
-                  <a:p>
-                    <a:pPr algn="ctr"/>
-                    <a:r>
-                      <a:rPr lang="zh-CN" altLang="en-US" sz="1100" dirty="0">
-                        <a:solidFill>
-                          <a:schemeClr val="tx1"/>
-                        </a:solidFill>
-                        <a:latin typeface="Times New Roman" panose="02020603050405020304" pitchFamily="18" charset="0"/>
-                        <a:ea typeface="宋体" panose="02010600030101010101" pitchFamily="2" charset="-122"/>
-                      </a:rPr>
-                      <a:t>任务</a:t>
-                    </a:r>
-                    <a:r>
-                      <a:rPr lang="en-US" altLang="zh-CN" sz="1100" dirty="0">
-                        <a:solidFill>
-                          <a:schemeClr val="tx1"/>
-                        </a:solidFill>
-                        <a:latin typeface="Times New Roman" panose="02020603050405020304" pitchFamily="18" charset="0"/>
-                        <a:ea typeface="宋体" panose="02010600030101010101" pitchFamily="2" charset="-122"/>
-                      </a:rPr>
-                      <a:t>4</a:t>
-                    </a:r>
-                    <a:r>
-                      <a:rPr lang="zh-CN" altLang="en-US" sz="1100" dirty="0">
-                        <a:solidFill>
-                          <a:schemeClr val="tx1"/>
-                        </a:solidFill>
-                        <a:latin typeface="Times New Roman" panose="02020603050405020304" pitchFamily="18" charset="0"/>
-                        <a:ea typeface="宋体" panose="02010600030101010101" pitchFamily="2" charset="-122"/>
-                      </a:rPr>
-                      <a:t>输出头</a:t>
-                    </a:r>
-                  </a:p>
-                </p:txBody>
-              </p:sp>
-              <p:sp>
-                <p:nvSpPr>
-                  <p:cNvPr id="82" name="矩形 81">
-                    <a:extLst>
-                      <a:ext uri="{FF2B5EF4-FFF2-40B4-BE49-F238E27FC236}">
-                        <a16:creationId xmlns:a16="http://schemas.microsoft.com/office/drawing/2014/main" id="{1632100C-0880-F984-9791-E5BB1B757910}"/>
-                      </a:ext>
-                    </a:extLst>
-                  </p:cNvPr>
-                  <p:cNvSpPr/>
-                  <p:nvPr/>
-                </p:nvSpPr>
-                <p:spPr>
-                  <a:xfrm>
-                    <a:off x="9775746" y="3239680"/>
-                    <a:ext cx="1005838" cy="350223"/>
-                  </a:xfrm>
-                  <a:prstGeom prst="rect">
-                    <a:avLst/>
-                  </a:prstGeom>
-                  <a:noFill/>
-                  <a:ln w="19050">
-                    <a:solidFill>
-                      <a:schemeClr val="tx1"/>
-                    </a:solidFill>
-                  </a:ln>
-                </p:spPr>
-                <p:style>
-                  <a:lnRef idx="2">
-                    <a:schemeClr val="accent1">
-                      <a:shade val="15000"/>
-                    </a:schemeClr>
-                  </a:lnRef>
-                  <a:fillRef idx="1">
-                    <a:schemeClr val="accent1"/>
-                  </a:fillRef>
-                  <a:effectRef idx="0">
-                    <a:schemeClr val="accent1"/>
-                  </a:effectRef>
-                  <a:fontRef idx="minor">
-                    <a:schemeClr val="lt1"/>
-                  </a:fontRef>
-                </p:style>
-                <p:txBody>
-                  <a:bodyPr rtlCol="0" anchor="ctr"/>
-                  <a:lstStyle/>
-                  <a:p>
-                    <a:pPr algn="ctr"/>
-                    <a:r>
-                      <a:rPr lang="zh-CN" altLang="en-US" sz="1100" dirty="0">
-                        <a:solidFill>
-                          <a:schemeClr val="tx1"/>
-                        </a:solidFill>
-                        <a:latin typeface="Times New Roman" panose="02020603050405020304" pitchFamily="18" charset="0"/>
-                        <a:ea typeface="宋体" panose="02010600030101010101" pitchFamily="2" charset="-122"/>
-                      </a:rPr>
-                      <a:t>线性层</a:t>
-                    </a:r>
-                    <a:endParaRPr lang="en-US" altLang="zh-CN" sz="1100" dirty="0">
+                <a:prstGeom prst="rect">
+                  <a:avLst/>
+                </a:prstGeom>
+                <a:noFill/>
+                <a:ln w="19050">
+                  <a:solidFill>
+                    <a:schemeClr val="tx1"/>
+                  </a:solidFill>
+                </a:ln>
+              </p:spPr>
+              <p:style>
+                <a:lnRef idx="2">
+                  <a:schemeClr val="accent1">
+                    <a:shade val="15000"/>
+                  </a:schemeClr>
+                </a:lnRef>
+                <a:fillRef idx="1">
+                  <a:schemeClr val="accent1"/>
+                </a:fillRef>
+                <a:effectRef idx="0">
+                  <a:schemeClr val="accent1"/>
+                </a:effectRef>
+                <a:fontRef idx="minor">
+                  <a:schemeClr val="lt1"/>
+                </a:fontRef>
+              </p:style>
+              <p:txBody>
+                <a:bodyPr rtlCol="0" anchor="ctr" anchorCtr="0">
+                  <a:normAutofit/>
+                </a:bodyPr>
+                <a:lstStyle/>
+                <a:p>
+                  <a:pPr algn="ctr"/>
+                  <a:r>
+                    <a:rPr lang="zh-CN" altLang="en-US" sz="1100" dirty="0">
                       <a:solidFill>
                         <a:schemeClr val="tx1"/>
                       </a:solidFill>
                       <a:latin typeface="Times New Roman" panose="02020603050405020304" pitchFamily="18" charset="0"/>
                       <a:ea typeface="宋体" panose="02010600030101010101" pitchFamily="2" charset="-122"/>
-                    </a:endParaRPr>
-                  </a:p>
-                  <a:p>
-                    <a:pPr algn="ctr"/>
-                    <a:r>
-                      <a:rPr lang="en-US" altLang="zh-CN" sz="1100" dirty="0">
-                        <a:solidFill>
-                          <a:schemeClr val="tx1"/>
-                        </a:solidFill>
-                        <a:latin typeface="Times New Roman" panose="02020603050405020304" pitchFamily="18" charset="0"/>
-                        <a:ea typeface="宋体" panose="02010600030101010101" pitchFamily="2" charset="-122"/>
-                      </a:rPr>
-                      <a:t>FC128</a:t>
-                    </a:r>
-                    <a:endParaRPr lang="zh-CN" altLang="en-US" sz="1100" dirty="0">
+                    </a:rPr>
+                    <a:t>非线性激活</a:t>
+                  </a:r>
+                  <a:endParaRPr lang="en-US" altLang="zh-CN" sz="1100" dirty="0">
+                    <a:solidFill>
+                      <a:schemeClr val="tx1"/>
+                    </a:solidFill>
+                    <a:latin typeface="Times New Roman" panose="02020603050405020304" pitchFamily="18" charset="0"/>
+                    <a:ea typeface="宋体" panose="02010600030101010101" pitchFamily="2" charset="-122"/>
+                  </a:endParaRPr>
+                </a:p>
+                <a:p>
+                  <a:pPr algn="ctr"/>
+                  <a:r>
+                    <a:rPr lang="en-US" altLang="zh-CN" sz="1100" dirty="0">
                       <a:solidFill>
                         <a:schemeClr val="tx1"/>
                       </a:solidFill>
                       <a:latin typeface="Times New Roman" panose="02020603050405020304" pitchFamily="18" charset="0"/>
                       <a:ea typeface="宋体" panose="02010600030101010101" pitchFamily="2" charset="-122"/>
-                    </a:endParaRPr>
-                  </a:p>
-                </p:txBody>
-              </p:sp>
-            </p:grpSp>
+                    </a:rPr>
+                    <a:t>GELU</a:t>
+                  </a:r>
+                  <a:endParaRPr lang="zh-CN" altLang="en-US" sz="1100" dirty="0" err="1">
+                    <a:solidFill>
+                      <a:schemeClr val="tx1"/>
+                    </a:solidFill>
+                    <a:latin typeface="Times New Roman" panose="02020603050405020304" pitchFamily="18" charset="0"/>
+                    <a:ea typeface="宋体" panose="02010600030101010101" pitchFamily="2" charset="-122"/>
+                  </a:endParaRPr>
+                </a:p>
+              </p:txBody>
+            </p:sp>
+            <p:sp>
+              <p:nvSpPr>
+                <p:cNvPr id="67" name="矩形 66">
+                  <a:extLst>
+                    <a:ext uri="{FF2B5EF4-FFF2-40B4-BE49-F238E27FC236}">
+                      <a16:creationId xmlns:a16="http://schemas.microsoft.com/office/drawing/2014/main" id="{F8C60D7D-610D-7319-6067-E2D6C5A7B247}"/>
+                    </a:ext>
+                  </a:extLst>
+                </p:cNvPr>
+                <p:cNvSpPr/>
+                <p:nvPr/>
+              </p:nvSpPr>
+              <p:spPr>
+                <a:xfrm>
+                  <a:off x="9710928" y="3567332"/>
+                  <a:ext cx="920496" cy="410188"/>
+                </a:xfrm>
+                <a:prstGeom prst="rect">
+                  <a:avLst/>
+                </a:prstGeom>
+                <a:noFill/>
+                <a:ln w="19050">
+                  <a:solidFill>
+                    <a:schemeClr val="tx1"/>
+                  </a:solidFill>
+                </a:ln>
+              </p:spPr>
+              <p:style>
+                <a:lnRef idx="2">
+                  <a:schemeClr val="accent1">
+                    <a:shade val="15000"/>
+                  </a:schemeClr>
+                </a:lnRef>
+                <a:fillRef idx="1">
+                  <a:schemeClr val="accent1"/>
+                </a:fillRef>
+                <a:effectRef idx="0">
+                  <a:schemeClr val="accent1"/>
+                </a:effectRef>
+                <a:fontRef idx="minor">
+                  <a:schemeClr val="lt1"/>
+                </a:fontRef>
+              </p:style>
+              <p:txBody>
+                <a:bodyPr rtlCol="0" anchor="ctr" anchorCtr="0">
+                  <a:normAutofit/>
+                </a:bodyPr>
+                <a:lstStyle/>
+                <a:p>
+                  <a:pPr algn="ctr"/>
+                  <a:r>
+                    <a:rPr lang="zh-CN" altLang="en-US" sz="1100" dirty="0">
+                      <a:solidFill>
+                        <a:schemeClr val="tx1"/>
+                      </a:solidFill>
+                      <a:latin typeface="Times New Roman" panose="02020603050405020304" pitchFamily="18" charset="0"/>
+                      <a:ea typeface="宋体" panose="02010600030101010101" pitchFamily="2" charset="-122"/>
+                    </a:rPr>
+                    <a:t>池化层</a:t>
+                  </a:r>
+                  <a:endParaRPr lang="en-US" altLang="zh-CN" sz="1100" dirty="0">
+                    <a:solidFill>
+                      <a:schemeClr val="tx1"/>
+                    </a:solidFill>
+                    <a:latin typeface="Times New Roman" panose="02020603050405020304" pitchFamily="18" charset="0"/>
+                    <a:ea typeface="宋体" panose="02010600030101010101" pitchFamily="2" charset="-122"/>
+                  </a:endParaRPr>
+                </a:p>
+                <a:p>
+                  <a:pPr algn="ctr"/>
+                  <a:r>
+                    <a:rPr lang="en-US" altLang="zh-CN" sz="1100" dirty="0">
+                      <a:solidFill>
+                        <a:schemeClr val="tx1"/>
+                      </a:solidFill>
+                      <a:latin typeface="Times New Roman" panose="02020603050405020304" pitchFamily="18" charset="0"/>
+                      <a:ea typeface="宋体" panose="02010600030101010101" pitchFamily="2" charset="-122"/>
+                    </a:rPr>
+                    <a:t>Dropout(0.1)</a:t>
+                  </a:r>
+                  <a:endParaRPr lang="zh-CN" altLang="en-US" sz="1100" dirty="0" err="1">
+                    <a:solidFill>
+                      <a:schemeClr val="tx1"/>
+                    </a:solidFill>
+                    <a:latin typeface="Times New Roman" panose="02020603050405020304" pitchFamily="18" charset="0"/>
+                    <a:ea typeface="宋体" panose="02010600030101010101" pitchFamily="2" charset="-122"/>
+                  </a:endParaRPr>
+                </a:p>
+              </p:txBody>
+            </p:sp>
           </p:grpSp>
-          <p:sp>
-            <p:nvSpPr>
-              <p:cNvPr id="83" name="文本框 82">
+          <p:grpSp>
+            <p:nvGrpSpPr>
+              <p:cNvPr id="68" name="组合 67">
                 <a:extLst>
                   <a:ext uri="{FF2B5EF4-FFF2-40B4-BE49-F238E27FC236}">
-                    <a16:creationId xmlns:a16="http://schemas.microsoft.com/office/drawing/2014/main" id="{F7C1D770-9EB4-FB5C-BC41-82FAF9423935}"/>
+                    <a16:creationId xmlns:a16="http://schemas.microsoft.com/office/drawing/2014/main" id="{F6C8EA70-1AF8-AB5A-9D81-3223BEB36958}"/>
                   </a:ext>
                 </a:extLst>
               </p:cNvPr>
-              <p:cNvSpPr txBox="1"/>
+              <p:cNvGrpSpPr/>
               <p:nvPr/>
-            </p:nvSpPr>
-            <p:spPr>
+            </p:nvGrpSpPr>
+            <p:grpSpPr>
               <a:xfrm>
-                <a:off x="9775746" y="4297766"/>
-                <a:ext cx="1005838" cy="307355"/>
+                <a:off x="6924184" y="3723382"/>
+                <a:ext cx="914274" cy="1669480"/>
+                <a:chOff x="9710928" y="2308040"/>
+                <a:chExt cx="920496" cy="1669480"/>
               </a:xfrm>
-              <a:prstGeom prst="rect">
-                <a:avLst/>
-              </a:prstGeom>
-              <a:noFill/>
-            </p:spPr>
-            <p:txBody>
-              <a:bodyPr wrap="square" rtlCol="0">
-                <a:spAutoFit/>
-              </a:bodyPr>
-              <a:lstStyle/>
-              <a:p>
-                <a:pPr algn="ctr"/>
-                <a:r>
-                  <a:rPr lang="en-US" altLang="zh-CN" dirty="0">
+            </p:grpSpPr>
+            <p:sp>
+              <p:nvSpPr>
+                <p:cNvPr id="69" name="矩形 68">
+                  <a:extLst>
+                    <a:ext uri="{FF2B5EF4-FFF2-40B4-BE49-F238E27FC236}">
+                      <a16:creationId xmlns:a16="http://schemas.microsoft.com/office/drawing/2014/main" id="{3E9686A9-A365-874B-4EDC-6BD7A69DA16A}"/>
+                    </a:ext>
+                  </a:extLst>
+                </p:cNvPr>
+                <p:cNvSpPr/>
+                <p:nvPr/>
+              </p:nvSpPr>
+              <p:spPr>
+                <a:xfrm>
+                  <a:off x="9710928" y="2308040"/>
+                  <a:ext cx="920496" cy="410188"/>
+                </a:xfrm>
+                <a:prstGeom prst="rect">
+                  <a:avLst/>
+                </a:prstGeom>
+                <a:noFill/>
+                <a:ln w="19050">
+                  <a:solidFill>
+                    <a:schemeClr val="tx1"/>
+                  </a:solidFill>
+                </a:ln>
+              </p:spPr>
+              <p:style>
+                <a:lnRef idx="2">
+                  <a:schemeClr val="accent1">
+                    <a:shade val="15000"/>
+                  </a:schemeClr>
+                </a:lnRef>
+                <a:fillRef idx="1">
+                  <a:schemeClr val="accent1"/>
+                </a:fillRef>
+                <a:effectRef idx="0">
+                  <a:schemeClr val="accent1"/>
+                </a:effectRef>
+                <a:fontRef idx="minor">
+                  <a:schemeClr val="lt1"/>
+                </a:fontRef>
+              </p:style>
+              <p:txBody>
+                <a:bodyPr rtlCol="0" anchor="ctr" anchorCtr="0">
+                  <a:normAutofit/>
+                </a:bodyPr>
+                <a:lstStyle/>
+                <a:p>
+                  <a:pPr algn="ctr"/>
+                  <a:r>
+                    <a:rPr lang="zh-CN" altLang="en-US" sz="1100" dirty="0">
+                      <a:solidFill>
+                        <a:schemeClr val="tx1"/>
+                      </a:solidFill>
+                      <a:latin typeface="Times New Roman" panose="02020603050405020304" pitchFamily="18" charset="0"/>
+                      <a:ea typeface="宋体" panose="02010600030101010101" pitchFamily="2" charset="-122"/>
+                    </a:rPr>
+                    <a:t>线性层</a:t>
+                  </a:r>
+                  <a:endParaRPr lang="en-US" altLang="zh-CN" sz="1100" dirty="0">
+                    <a:solidFill>
+                      <a:schemeClr val="tx1"/>
+                    </a:solidFill>
                     <a:latin typeface="Times New Roman" panose="02020603050405020304" pitchFamily="18" charset="0"/>
                     <a:ea typeface="宋体" panose="02010600030101010101" pitchFamily="2" charset="-122"/>
-                  </a:rPr>
-                  <a:t>…</a:t>
-                </a:r>
-                <a:endParaRPr lang="zh-CN" altLang="en-US" dirty="0">
-                  <a:latin typeface="Times New Roman" panose="02020603050405020304" pitchFamily="18" charset="0"/>
-                  <a:ea typeface="宋体" panose="02010600030101010101" pitchFamily="2" charset="-122"/>
-                </a:endParaRPr>
-              </a:p>
-            </p:txBody>
-          </p:sp>
+                  </a:endParaRPr>
+                </a:p>
+                <a:p>
+                  <a:pPr algn="ctr"/>
+                  <a:r>
+                    <a:rPr lang="en-US" altLang="zh-CN" sz="1100" dirty="0">
+                      <a:solidFill>
+                        <a:schemeClr val="tx1"/>
+                      </a:solidFill>
+                      <a:latin typeface="Times New Roman" panose="02020603050405020304" pitchFamily="18" charset="0"/>
+                      <a:ea typeface="宋体" panose="02010600030101010101" pitchFamily="2" charset="-122"/>
+                    </a:rPr>
+                    <a:t>FC128</a:t>
+                  </a:r>
+                  <a:endParaRPr lang="zh-CN" altLang="en-US" sz="1100" dirty="0" err="1">
+                    <a:solidFill>
+                      <a:schemeClr val="tx1"/>
+                    </a:solidFill>
+                    <a:latin typeface="Times New Roman" panose="02020603050405020304" pitchFamily="18" charset="0"/>
+                    <a:ea typeface="宋体" panose="02010600030101010101" pitchFamily="2" charset="-122"/>
+                  </a:endParaRPr>
+                </a:p>
+              </p:txBody>
+            </p:sp>
+            <p:sp>
+              <p:nvSpPr>
+                <p:cNvPr id="70" name="矩形 69">
+                  <a:extLst>
+                    <a:ext uri="{FF2B5EF4-FFF2-40B4-BE49-F238E27FC236}">
+                      <a16:creationId xmlns:a16="http://schemas.microsoft.com/office/drawing/2014/main" id="{1F043644-1141-6824-B3D4-F050444C4F71}"/>
+                    </a:ext>
+                  </a:extLst>
+                </p:cNvPr>
+                <p:cNvSpPr/>
+                <p:nvPr/>
+              </p:nvSpPr>
+              <p:spPr>
+                <a:xfrm>
+                  <a:off x="9710928" y="2727804"/>
+                  <a:ext cx="920496" cy="410188"/>
+                </a:xfrm>
+                <a:prstGeom prst="rect">
+                  <a:avLst/>
+                </a:prstGeom>
+                <a:noFill/>
+                <a:ln w="19050">
+                  <a:solidFill>
+                    <a:schemeClr val="tx1"/>
+                  </a:solidFill>
+                </a:ln>
+              </p:spPr>
+              <p:style>
+                <a:lnRef idx="2">
+                  <a:schemeClr val="accent1">
+                    <a:shade val="15000"/>
+                  </a:schemeClr>
+                </a:lnRef>
+                <a:fillRef idx="1">
+                  <a:schemeClr val="accent1"/>
+                </a:fillRef>
+                <a:effectRef idx="0">
+                  <a:schemeClr val="accent1"/>
+                </a:effectRef>
+                <a:fontRef idx="minor">
+                  <a:schemeClr val="lt1"/>
+                </a:fontRef>
+              </p:style>
+              <p:txBody>
+                <a:bodyPr rtlCol="0" anchor="ctr" anchorCtr="0">
+                  <a:normAutofit/>
+                </a:bodyPr>
+                <a:lstStyle/>
+                <a:p>
+                  <a:pPr algn="ctr"/>
+                  <a:r>
+                    <a:rPr lang="zh-CN" altLang="en-US" sz="1100" dirty="0">
+                      <a:solidFill>
+                        <a:schemeClr val="tx1"/>
+                      </a:solidFill>
+                      <a:latin typeface="Times New Roman" panose="02020603050405020304" pitchFamily="18" charset="0"/>
+                      <a:ea typeface="宋体" panose="02010600030101010101" pitchFamily="2" charset="-122"/>
+                    </a:rPr>
+                    <a:t>归一化层</a:t>
+                  </a:r>
+                  <a:endParaRPr lang="en-US" altLang="zh-CN" sz="1100" dirty="0">
+                    <a:solidFill>
+                      <a:schemeClr val="tx1"/>
+                    </a:solidFill>
+                    <a:latin typeface="Times New Roman" panose="02020603050405020304" pitchFamily="18" charset="0"/>
+                    <a:ea typeface="宋体" panose="02010600030101010101" pitchFamily="2" charset="-122"/>
+                  </a:endParaRPr>
+                </a:p>
+                <a:p>
+                  <a:pPr algn="ctr"/>
+                  <a:r>
+                    <a:rPr lang="en-US" altLang="zh-CN" sz="1100" dirty="0" err="1">
+                      <a:solidFill>
+                        <a:schemeClr val="tx1"/>
+                      </a:solidFill>
+                      <a:latin typeface="Times New Roman" panose="02020603050405020304" pitchFamily="18" charset="0"/>
+                      <a:ea typeface="宋体" panose="02010600030101010101" pitchFamily="2" charset="-122"/>
+                    </a:rPr>
+                    <a:t>LayerNorm</a:t>
+                  </a:r>
+                  <a:endParaRPr lang="zh-CN" altLang="en-US" sz="1100" dirty="0" err="1">
+                    <a:solidFill>
+                      <a:schemeClr val="tx1"/>
+                    </a:solidFill>
+                    <a:latin typeface="Times New Roman" panose="02020603050405020304" pitchFamily="18" charset="0"/>
+                    <a:ea typeface="宋体" panose="02010600030101010101" pitchFamily="2" charset="-122"/>
+                  </a:endParaRPr>
+                </a:p>
+              </p:txBody>
+            </p:sp>
+            <p:sp>
+              <p:nvSpPr>
+                <p:cNvPr id="71" name="矩形 70">
+                  <a:extLst>
+                    <a:ext uri="{FF2B5EF4-FFF2-40B4-BE49-F238E27FC236}">
+                      <a16:creationId xmlns:a16="http://schemas.microsoft.com/office/drawing/2014/main" id="{F1F4BE2A-92B8-3E50-C1C9-8ABFDB412C8E}"/>
+                    </a:ext>
+                  </a:extLst>
+                </p:cNvPr>
+                <p:cNvSpPr/>
+                <p:nvPr/>
+              </p:nvSpPr>
+              <p:spPr>
+                <a:xfrm>
+                  <a:off x="9710928" y="3147568"/>
+                  <a:ext cx="920496" cy="410188"/>
+                </a:xfrm>
+                <a:prstGeom prst="rect">
+                  <a:avLst/>
+                </a:prstGeom>
+                <a:noFill/>
+                <a:ln w="19050">
+                  <a:solidFill>
+                    <a:schemeClr val="tx1"/>
+                  </a:solidFill>
+                </a:ln>
+              </p:spPr>
+              <p:style>
+                <a:lnRef idx="2">
+                  <a:schemeClr val="accent1">
+                    <a:shade val="15000"/>
+                  </a:schemeClr>
+                </a:lnRef>
+                <a:fillRef idx="1">
+                  <a:schemeClr val="accent1"/>
+                </a:fillRef>
+                <a:effectRef idx="0">
+                  <a:schemeClr val="accent1"/>
+                </a:effectRef>
+                <a:fontRef idx="minor">
+                  <a:schemeClr val="lt1"/>
+                </a:fontRef>
+              </p:style>
+              <p:txBody>
+                <a:bodyPr rtlCol="0" anchor="ctr" anchorCtr="0">
+                  <a:normAutofit/>
+                </a:bodyPr>
+                <a:lstStyle/>
+                <a:p>
+                  <a:pPr algn="ctr"/>
+                  <a:r>
+                    <a:rPr lang="zh-CN" altLang="en-US" sz="1100" dirty="0">
+                      <a:solidFill>
+                        <a:schemeClr val="tx1"/>
+                      </a:solidFill>
+                      <a:latin typeface="Times New Roman" panose="02020603050405020304" pitchFamily="18" charset="0"/>
+                      <a:ea typeface="宋体" panose="02010600030101010101" pitchFamily="2" charset="-122"/>
+                    </a:rPr>
+                    <a:t>非线性激活</a:t>
+                  </a:r>
+                  <a:endParaRPr lang="en-US" altLang="zh-CN" sz="1100" dirty="0">
+                    <a:solidFill>
+                      <a:schemeClr val="tx1"/>
+                    </a:solidFill>
+                    <a:latin typeface="Times New Roman" panose="02020603050405020304" pitchFamily="18" charset="0"/>
+                    <a:ea typeface="宋体" panose="02010600030101010101" pitchFamily="2" charset="-122"/>
+                  </a:endParaRPr>
+                </a:p>
+                <a:p>
+                  <a:pPr algn="ctr"/>
+                  <a:r>
+                    <a:rPr lang="en-US" altLang="zh-CN" sz="1100" dirty="0">
+                      <a:solidFill>
+                        <a:schemeClr val="tx1"/>
+                      </a:solidFill>
+                      <a:latin typeface="Times New Roman" panose="02020603050405020304" pitchFamily="18" charset="0"/>
+                      <a:ea typeface="宋体" panose="02010600030101010101" pitchFamily="2" charset="-122"/>
+                    </a:rPr>
+                    <a:t>GELU</a:t>
+                  </a:r>
+                  <a:endParaRPr lang="zh-CN" altLang="en-US" sz="1100" dirty="0" err="1">
+                    <a:solidFill>
+                      <a:schemeClr val="tx1"/>
+                    </a:solidFill>
+                    <a:latin typeface="Times New Roman" panose="02020603050405020304" pitchFamily="18" charset="0"/>
+                    <a:ea typeface="宋体" panose="02010600030101010101" pitchFamily="2" charset="-122"/>
+                  </a:endParaRPr>
+                </a:p>
+              </p:txBody>
+            </p:sp>
+            <p:sp>
+              <p:nvSpPr>
+                <p:cNvPr id="72" name="矩形 71">
+                  <a:extLst>
+                    <a:ext uri="{FF2B5EF4-FFF2-40B4-BE49-F238E27FC236}">
+                      <a16:creationId xmlns:a16="http://schemas.microsoft.com/office/drawing/2014/main" id="{6D3556AD-492A-6589-688D-A2AF1F698183}"/>
+                    </a:ext>
+                  </a:extLst>
+                </p:cNvPr>
+                <p:cNvSpPr/>
+                <p:nvPr/>
+              </p:nvSpPr>
+              <p:spPr>
+                <a:xfrm>
+                  <a:off x="9710928" y="3567332"/>
+                  <a:ext cx="920496" cy="410188"/>
+                </a:xfrm>
+                <a:prstGeom prst="rect">
+                  <a:avLst/>
+                </a:prstGeom>
+                <a:noFill/>
+                <a:ln w="19050">
+                  <a:solidFill>
+                    <a:schemeClr val="tx1"/>
+                  </a:solidFill>
+                </a:ln>
+              </p:spPr>
+              <p:style>
+                <a:lnRef idx="2">
+                  <a:schemeClr val="accent1">
+                    <a:shade val="15000"/>
+                  </a:schemeClr>
+                </a:lnRef>
+                <a:fillRef idx="1">
+                  <a:schemeClr val="accent1"/>
+                </a:fillRef>
+                <a:effectRef idx="0">
+                  <a:schemeClr val="accent1"/>
+                </a:effectRef>
+                <a:fontRef idx="minor">
+                  <a:schemeClr val="lt1"/>
+                </a:fontRef>
+              </p:style>
+              <p:txBody>
+                <a:bodyPr rtlCol="0" anchor="ctr" anchorCtr="0">
+                  <a:normAutofit/>
+                </a:bodyPr>
+                <a:lstStyle/>
+                <a:p>
+                  <a:pPr algn="ctr"/>
+                  <a:r>
+                    <a:rPr lang="zh-CN" altLang="en-US" sz="1100" dirty="0">
+                      <a:solidFill>
+                        <a:schemeClr val="tx1"/>
+                      </a:solidFill>
+                      <a:latin typeface="Times New Roman" panose="02020603050405020304" pitchFamily="18" charset="0"/>
+                      <a:ea typeface="宋体" panose="02010600030101010101" pitchFamily="2" charset="-122"/>
+                    </a:rPr>
+                    <a:t>池化层</a:t>
+                  </a:r>
+                  <a:endParaRPr lang="en-US" altLang="zh-CN" sz="1100" dirty="0">
+                    <a:solidFill>
+                      <a:schemeClr val="tx1"/>
+                    </a:solidFill>
+                    <a:latin typeface="Times New Roman" panose="02020603050405020304" pitchFamily="18" charset="0"/>
+                    <a:ea typeface="宋体" panose="02010600030101010101" pitchFamily="2" charset="-122"/>
+                  </a:endParaRPr>
+                </a:p>
+                <a:p>
+                  <a:pPr algn="ctr"/>
+                  <a:r>
+                    <a:rPr lang="en-US" altLang="zh-CN" sz="1100" dirty="0">
+                      <a:solidFill>
+                        <a:schemeClr val="tx1"/>
+                      </a:solidFill>
+                      <a:latin typeface="Times New Roman" panose="02020603050405020304" pitchFamily="18" charset="0"/>
+                      <a:ea typeface="宋体" panose="02010600030101010101" pitchFamily="2" charset="-122"/>
+                    </a:rPr>
+                    <a:t>Dropout(0.1)</a:t>
+                  </a:r>
+                  <a:endParaRPr lang="zh-CN" altLang="en-US" sz="1100" dirty="0" err="1">
+                    <a:solidFill>
+                      <a:schemeClr val="tx1"/>
+                    </a:solidFill>
+                    <a:latin typeface="Times New Roman" panose="02020603050405020304" pitchFamily="18" charset="0"/>
+                    <a:ea typeface="宋体" panose="02010600030101010101" pitchFamily="2" charset="-122"/>
+                  </a:endParaRPr>
+                </a:p>
+              </p:txBody>
+            </p:sp>
+          </p:grpSp>
         </p:grpSp>
-        <p:cxnSp>
-          <p:nvCxnSpPr>
-            <p:cNvPr id="98" name="直接箭头连接符 97">
+        <p:sp>
+          <p:nvSpPr>
+            <p:cNvPr id="101" name="文本框 100">
               <a:extLst>
                 <a:ext uri="{FF2B5EF4-FFF2-40B4-BE49-F238E27FC236}">
-                  <a16:creationId xmlns:a16="http://schemas.microsoft.com/office/drawing/2014/main" id="{09018DC0-46D8-BB91-6CF2-1F1598175414}"/>
-                </a:ext>
-              </a:extLst>
-            </p:cNvPr>
-            <p:cNvCxnSpPr>
-              <a:cxnSpLocks/>
-              <a:endCxn id="51" idx="1"/>
-            </p:cNvCxnSpPr>
-            <p:nvPr/>
-          </p:nvCxnSpPr>
-          <p:spPr>
-            <a:xfrm flipV="1">
-              <a:off x="1952424" y="4913282"/>
-              <a:ext cx="1879557" cy="171525"/>
-            </a:xfrm>
-            <a:prstGeom prst="bentConnector3">
-              <a:avLst>
-                <a:gd name="adj1" fmla="val -465"/>
-              </a:avLst>
-            </a:prstGeom>
-            <a:ln w="19050">
-              <a:solidFill>
-                <a:schemeClr val="tx1"/>
-              </a:solidFill>
-              <a:tailEnd type="triangle"/>
-            </a:ln>
-          </p:spPr>
-          <p:style>
-            <a:lnRef idx="1">
-              <a:schemeClr val="accent1"/>
-            </a:lnRef>
-            <a:fillRef idx="0">
-              <a:schemeClr val="accent1"/>
-            </a:fillRef>
-            <a:effectRef idx="0">
-              <a:schemeClr val="accent1"/>
-            </a:effectRef>
-            <a:fontRef idx="minor">
-              <a:schemeClr val="tx1"/>
-            </a:fontRef>
-          </p:style>
-        </p:cxnSp>
-        <p:sp>
-          <p:nvSpPr>
-            <p:cNvPr id="56" name="文本框 55">
-              <a:extLst>
-                <a:ext uri="{FF2B5EF4-FFF2-40B4-BE49-F238E27FC236}">
-                  <a16:creationId xmlns:a16="http://schemas.microsoft.com/office/drawing/2014/main" id="{C1ADEF32-EF9A-6F80-D5F8-EACFA93AC6B3}"/>
+                  <a16:creationId xmlns:a16="http://schemas.microsoft.com/office/drawing/2014/main" id="{CAB053F7-E5CE-52DD-5C29-F8DE36A3A333}"/>
                 </a:ext>
               </a:extLst>
             </p:cNvPr>
@@ -10240,8 +11440,8 @@
           </p:nvSpPr>
           <p:spPr>
             <a:xfrm>
-              <a:off x="5533855" y="3607670"/>
-              <a:ext cx="1596985" cy="253917"/>
+              <a:off x="7129359" y="3678932"/>
+              <a:ext cx="526609" cy="253917"/>
             </a:xfrm>
             <a:prstGeom prst="rect">
               <a:avLst/>
@@ -10256,1315 +11456,33 @@
             <a:p>
               <a:pPr algn="ctr"/>
               <a:r>
+                <a:rPr lang="en-US" altLang="zh-CN" sz="1050" dirty="0">
+                  <a:latin typeface="Times New Roman" panose="02020603050405020304" pitchFamily="18" charset="0"/>
+                  <a:ea typeface="宋体" panose="02010600030101010101" pitchFamily="2" charset="-122"/>
+                </a:rPr>
+                <a:t>(</a:t>
+              </a:r>
+              <a:r>
                 <a:rPr lang="zh-CN" altLang="en-US" sz="1050" dirty="0">
                   <a:latin typeface="Times New Roman" panose="02020603050405020304" pitchFamily="18" charset="0"/>
                   <a:ea typeface="宋体" panose="02010600030101010101" pitchFamily="2" charset="-122"/>
                 </a:rPr>
-                <a:t>共享特征提取层</a:t>
+                <a:t>可选</a:t>
               </a:r>
-            </a:p>
-          </p:txBody>
-        </p:sp>
-        <p:sp>
-          <p:nvSpPr>
-            <p:cNvPr id="55" name="矩形 54">
-              <a:extLst>
-                <a:ext uri="{FF2B5EF4-FFF2-40B4-BE49-F238E27FC236}">
-                  <a16:creationId xmlns:a16="http://schemas.microsoft.com/office/drawing/2014/main" id="{17CBB046-BAB7-ABBD-FFFE-25F4F0248AC9}"/>
-                </a:ext>
-              </a:extLst>
-            </p:cNvPr>
-            <p:cNvSpPr/>
-            <p:nvPr/>
-          </p:nvSpPr>
-          <p:spPr>
-            <a:xfrm>
-              <a:off x="4719874" y="3573971"/>
-              <a:ext cx="3224949" cy="2601956"/>
-            </a:xfrm>
-            <a:prstGeom prst="rect">
-              <a:avLst/>
-            </a:prstGeom>
-            <a:noFill/>
-            <a:ln w="19050">
-              <a:solidFill>
-                <a:schemeClr val="tx1"/>
-              </a:solidFill>
-            </a:ln>
-          </p:spPr>
-          <p:style>
-            <a:lnRef idx="2">
-              <a:schemeClr val="accent1">
-                <a:shade val="15000"/>
-              </a:schemeClr>
-            </a:lnRef>
-            <a:fillRef idx="1">
-              <a:schemeClr val="accent1"/>
-            </a:fillRef>
-            <a:effectRef idx="0">
-              <a:schemeClr val="accent1"/>
-            </a:effectRef>
-            <a:fontRef idx="minor">
-              <a:schemeClr val="lt1"/>
-            </a:fontRef>
-          </p:style>
-          <p:txBody>
-            <a:bodyPr rtlCol="0" anchor="ctr" anchorCtr="1"/>
-            <a:lstStyle/>
-            <a:p>
-              <a:pPr algn="ctr"/>
-              <a:endParaRPr lang="zh-CN" altLang="en-US" dirty="0" err="1">
-                <a:solidFill>
-                  <a:schemeClr val="tx1"/>
-                </a:solidFill>
+              <a:r>
+                <a:rPr lang="en-US" altLang="zh-CN" sz="1050" dirty="0">
+                  <a:latin typeface="Times New Roman" panose="02020603050405020304" pitchFamily="18" charset="0"/>
+                  <a:ea typeface="宋体" panose="02010600030101010101" pitchFamily="2" charset="-122"/>
+                </a:rPr>
+                <a:t>)</a:t>
+              </a:r>
+              <a:endParaRPr lang="zh-CN" altLang="en-US" sz="1050" dirty="0">
                 <a:latin typeface="Times New Roman" panose="02020603050405020304" pitchFamily="18" charset="0"/>
                 <a:ea typeface="宋体" panose="02010600030101010101" pitchFamily="2" charset="-122"/>
               </a:endParaRPr>
             </a:p>
           </p:txBody>
         </p:sp>
-        <p:grpSp>
-          <p:nvGrpSpPr>
-            <p:cNvPr id="107" name="组合 106">
-              <a:extLst>
-                <a:ext uri="{FF2B5EF4-FFF2-40B4-BE49-F238E27FC236}">
-                  <a16:creationId xmlns:a16="http://schemas.microsoft.com/office/drawing/2014/main" id="{200106F4-5ADA-2B4B-1F3C-9A24203566DF}"/>
-                </a:ext>
-              </a:extLst>
-            </p:cNvPr>
-            <p:cNvGrpSpPr/>
-            <p:nvPr/>
-          </p:nvGrpSpPr>
-          <p:grpSpPr>
-            <a:xfrm>
-              <a:off x="4902044" y="3747172"/>
-              <a:ext cx="2949340" cy="2314353"/>
-              <a:chOff x="4902044" y="3678932"/>
-              <a:chExt cx="2949340" cy="2314353"/>
-            </a:xfrm>
-          </p:grpSpPr>
-          <p:grpSp>
-            <p:nvGrpSpPr>
-              <p:cNvPr id="73" name="组合 72">
-                <a:extLst>
-                  <a:ext uri="{FF2B5EF4-FFF2-40B4-BE49-F238E27FC236}">
-                    <a16:creationId xmlns:a16="http://schemas.microsoft.com/office/drawing/2014/main" id="{7CDC2FC7-6873-C453-51E6-3A3ED8F29D84}"/>
-                  </a:ext>
-                </a:extLst>
-              </p:cNvPr>
-              <p:cNvGrpSpPr/>
-              <p:nvPr/>
-            </p:nvGrpSpPr>
-            <p:grpSpPr>
-              <a:xfrm>
-                <a:off x="4902044" y="3939354"/>
-                <a:ext cx="2949340" cy="2053931"/>
-                <a:chOff x="4889118" y="3723382"/>
-                <a:chExt cx="2949340" cy="1669480"/>
-              </a:xfrm>
-            </p:grpSpPr>
-            <p:grpSp>
-              <p:nvGrpSpPr>
-                <p:cNvPr id="62" name="组合 61">
-                  <a:extLst>
-                    <a:ext uri="{FF2B5EF4-FFF2-40B4-BE49-F238E27FC236}">
-                      <a16:creationId xmlns:a16="http://schemas.microsoft.com/office/drawing/2014/main" id="{746CF857-36F2-7EDB-49F6-030F2A76FDCF}"/>
-                    </a:ext>
-                  </a:extLst>
-                </p:cNvPr>
-                <p:cNvGrpSpPr/>
-                <p:nvPr/>
-              </p:nvGrpSpPr>
-              <p:grpSpPr>
-                <a:xfrm>
-                  <a:off x="4889118" y="3723382"/>
-                  <a:ext cx="914274" cy="1669480"/>
-                  <a:chOff x="9710928" y="2308040"/>
-                  <a:chExt cx="920496" cy="1669480"/>
-                </a:xfrm>
-              </p:grpSpPr>
-              <p:sp>
-                <p:nvSpPr>
-                  <p:cNvPr id="58" name="矩形 57">
-                    <a:extLst>
-                      <a:ext uri="{FF2B5EF4-FFF2-40B4-BE49-F238E27FC236}">
-                        <a16:creationId xmlns:a16="http://schemas.microsoft.com/office/drawing/2014/main" id="{2F44776D-E4D9-F9E7-ACF3-BB0F0DD3E8DA}"/>
-                      </a:ext>
-                    </a:extLst>
-                  </p:cNvPr>
-                  <p:cNvSpPr/>
-                  <p:nvPr/>
-                </p:nvSpPr>
-                <p:spPr>
-                  <a:xfrm>
-                    <a:off x="9710928" y="2308040"/>
-                    <a:ext cx="920496" cy="410188"/>
-                  </a:xfrm>
-                  <a:prstGeom prst="rect">
-                    <a:avLst/>
-                  </a:prstGeom>
-                  <a:noFill/>
-                  <a:ln w="19050">
-                    <a:solidFill>
-                      <a:schemeClr val="tx1"/>
-                    </a:solidFill>
-                  </a:ln>
-                </p:spPr>
-                <p:style>
-                  <a:lnRef idx="2">
-                    <a:schemeClr val="accent1">
-                      <a:shade val="15000"/>
-                    </a:schemeClr>
-                  </a:lnRef>
-                  <a:fillRef idx="1">
-                    <a:schemeClr val="accent1"/>
-                  </a:fillRef>
-                  <a:effectRef idx="0">
-                    <a:schemeClr val="accent1"/>
-                  </a:effectRef>
-                  <a:fontRef idx="minor">
-                    <a:schemeClr val="lt1"/>
-                  </a:fontRef>
-                </p:style>
-                <p:txBody>
-                  <a:bodyPr rtlCol="0" anchor="ctr" anchorCtr="0">
-                    <a:normAutofit/>
-                  </a:bodyPr>
-                  <a:lstStyle/>
-                  <a:p>
-                    <a:pPr algn="ctr"/>
-                    <a:r>
-                      <a:rPr lang="zh-CN" altLang="en-US" sz="1100" dirty="0">
-                        <a:solidFill>
-                          <a:schemeClr val="tx1"/>
-                        </a:solidFill>
-                        <a:latin typeface="Times New Roman" panose="02020603050405020304" pitchFamily="18" charset="0"/>
-                        <a:ea typeface="宋体" panose="02010600030101010101" pitchFamily="2" charset="-122"/>
-                      </a:rPr>
-                      <a:t>线性层</a:t>
-                    </a:r>
-                    <a:endParaRPr lang="en-US" altLang="zh-CN" sz="1100" dirty="0">
-                      <a:solidFill>
-                        <a:schemeClr val="tx1"/>
-                      </a:solidFill>
-                      <a:latin typeface="Times New Roman" panose="02020603050405020304" pitchFamily="18" charset="0"/>
-                      <a:ea typeface="宋体" panose="02010600030101010101" pitchFamily="2" charset="-122"/>
-                    </a:endParaRPr>
-                  </a:p>
-                  <a:p>
-                    <a:pPr algn="ctr"/>
-                    <a:r>
-                      <a:rPr lang="en-US" altLang="zh-CN" sz="1100" dirty="0">
-                        <a:solidFill>
-                          <a:schemeClr val="tx1"/>
-                        </a:solidFill>
-                        <a:latin typeface="Times New Roman" panose="02020603050405020304" pitchFamily="18" charset="0"/>
-                        <a:ea typeface="宋体" panose="02010600030101010101" pitchFamily="2" charset="-122"/>
-                      </a:rPr>
-                      <a:t>FC128</a:t>
-                    </a:r>
-                    <a:endParaRPr lang="zh-CN" altLang="en-US" sz="1100" dirty="0" err="1">
-                      <a:solidFill>
-                        <a:schemeClr val="tx1"/>
-                      </a:solidFill>
-                      <a:latin typeface="Times New Roman" panose="02020603050405020304" pitchFamily="18" charset="0"/>
-                      <a:ea typeface="宋体" panose="02010600030101010101" pitchFamily="2" charset="-122"/>
-                    </a:endParaRPr>
-                  </a:p>
-                </p:txBody>
-              </p:sp>
-              <p:sp>
-                <p:nvSpPr>
-                  <p:cNvPr id="59" name="矩形 58">
-                    <a:extLst>
-                      <a:ext uri="{FF2B5EF4-FFF2-40B4-BE49-F238E27FC236}">
-                        <a16:creationId xmlns:a16="http://schemas.microsoft.com/office/drawing/2014/main" id="{026F9296-CA64-E0F7-F34E-F26DDFEEE2FE}"/>
-                      </a:ext>
-                    </a:extLst>
-                  </p:cNvPr>
-                  <p:cNvSpPr/>
-                  <p:nvPr/>
-                </p:nvSpPr>
-                <p:spPr>
-                  <a:xfrm>
-                    <a:off x="9710928" y="2727804"/>
-                    <a:ext cx="920496" cy="410188"/>
-                  </a:xfrm>
-                  <a:prstGeom prst="rect">
-                    <a:avLst/>
-                  </a:prstGeom>
-                  <a:noFill/>
-                  <a:ln w="19050">
-                    <a:solidFill>
-                      <a:schemeClr val="tx1"/>
-                    </a:solidFill>
-                  </a:ln>
-                </p:spPr>
-                <p:style>
-                  <a:lnRef idx="2">
-                    <a:schemeClr val="accent1">
-                      <a:shade val="15000"/>
-                    </a:schemeClr>
-                  </a:lnRef>
-                  <a:fillRef idx="1">
-                    <a:schemeClr val="accent1"/>
-                  </a:fillRef>
-                  <a:effectRef idx="0">
-                    <a:schemeClr val="accent1"/>
-                  </a:effectRef>
-                  <a:fontRef idx="minor">
-                    <a:schemeClr val="lt1"/>
-                  </a:fontRef>
-                </p:style>
-                <p:txBody>
-                  <a:bodyPr rtlCol="0" anchor="ctr" anchorCtr="0">
-                    <a:normAutofit/>
-                  </a:bodyPr>
-                  <a:lstStyle/>
-                  <a:p>
-                    <a:pPr algn="ctr"/>
-                    <a:r>
-                      <a:rPr lang="zh-CN" altLang="en-US" sz="1100" dirty="0">
-                        <a:solidFill>
-                          <a:schemeClr val="tx1"/>
-                        </a:solidFill>
-                        <a:latin typeface="Times New Roman" panose="02020603050405020304" pitchFamily="18" charset="0"/>
-                        <a:ea typeface="宋体" panose="02010600030101010101" pitchFamily="2" charset="-122"/>
-                      </a:rPr>
-                      <a:t>归一化层</a:t>
-                    </a:r>
-                    <a:endParaRPr lang="en-US" altLang="zh-CN" sz="1100" dirty="0">
-                      <a:solidFill>
-                        <a:schemeClr val="tx1"/>
-                      </a:solidFill>
-                      <a:latin typeface="Times New Roman" panose="02020603050405020304" pitchFamily="18" charset="0"/>
-                      <a:ea typeface="宋体" panose="02010600030101010101" pitchFamily="2" charset="-122"/>
-                    </a:endParaRPr>
-                  </a:p>
-                  <a:p>
-                    <a:pPr algn="ctr"/>
-                    <a:r>
-                      <a:rPr lang="en-US" altLang="zh-CN" sz="1100" dirty="0" err="1">
-                        <a:solidFill>
-                          <a:schemeClr val="tx1"/>
-                        </a:solidFill>
-                        <a:latin typeface="Times New Roman" panose="02020603050405020304" pitchFamily="18" charset="0"/>
-                        <a:ea typeface="宋体" panose="02010600030101010101" pitchFamily="2" charset="-122"/>
-                      </a:rPr>
-                      <a:t>LayerNorm</a:t>
-                    </a:r>
-                    <a:endParaRPr lang="zh-CN" altLang="en-US" sz="1100" dirty="0" err="1">
-                      <a:solidFill>
-                        <a:schemeClr val="tx1"/>
-                      </a:solidFill>
-                      <a:latin typeface="Times New Roman" panose="02020603050405020304" pitchFamily="18" charset="0"/>
-                      <a:ea typeface="宋体" panose="02010600030101010101" pitchFamily="2" charset="-122"/>
-                    </a:endParaRPr>
-                  </a:p>
-                </p:txBody>
-              </p:sp>
-              <p:sp>
-                <p:nvSpPr>
-                  <p:cNvPr id="60" name="矩形 59">
-                    <a:extLst>
-                      <a:ext uri="{FF2B5EF4-FFF2-40B4-BE49-F238E27FC236}">
-                        <a16:creationId xmlns:a16="http://schemas.microsoft.com/office/drawing/2014/main" id="{FD89E1A8-D85E-2CBC-3564-BCB1249DCE8A}"/>
-                      </a:ext>
-                    </a:extLst>
-                  </p:cNvPr>
-                  <p:cNvSpPr/>
-                  <p:nvPr/>
-                </p:nvSpPr>
-                <p:spPr>
-                  <a:xfrm>
-                    <a:off x="9710928" y="3147568"/>
-                    <a:ext cx="920496" cy="410188"/>
-                  </a:xfrm>
-                  <a:prstGeom prst="rect">
-                    <a:avLst/>
-                  </a:prstGeom>
-                  <a:noFill/>
-                  <a:ln w="19050">
-                    <a:solidFill>
-                      <a:schemeClr val="tx1"/>
-                    </a:solidFill>
-                  </a:ln>
-                </p:spPr>
-                <p:style>
-                  <a:lnRef idx="2">
-                    <a:schemeClr val="accent1">
-                      <a:shade val="15000"/>
-                    </a:schemeClr>
-                  </a:lnRef>
-                  <a:fillRef idx="1">
-                    <a:schemeClr val="accent1"/>
-                  </a:fillRef>
-                  <a:effectRef idx="0">
-                    <a:schemeClr val="accent1"/>
-                  </a:effectRef>
-                  <a:fontRef idx="minor">
-                    <a:schemeClr val="lt1"/>
-                  </a:fontRef>
-                </p:style>
-                <p:txBody>
-                  <a:bodyPr rtlCol="0" anchor="ctr" anchorCtr="0">
-                    <a:normAutofit/>
-                  </a:bodyPr>
-                  <a:lstStyle/>
-                  <a:p>
-                    <a:pPr algn="ctr"/>
-                    <a:r>
-                      <a:rPr lang="zh-CN" altLang="en-US" sz="1100" dirty="0">
-                        <a:solidFill>
-                          <a:schemeClr val="tx1"/>
-                        </a:solidFill>
-                        <a:latin typeface="Times New Roman" panose="02020603050405020304" pitchFamily="18" charset="0"/>
-                        <a:ea typeface="宋体" panose="02010600030101010101" pitchFamily="2" charset="-122"/>
-                      </a:rPr>
-                      <a:t>非线性激活</a:t>
-                    </a:r>
-                    <a:endParaRPr lang="en-US" altLang="zh-CN" sz="1100" dirty="0">
-                      <a:solidFill>
-                        <a:schemeClr val="tx1"/>
-                      </a:solidFill>
-                      <a:latin typeface="Times New Roman" panose="02020603050405020304" pitchFamily="18" charset="0"/>
-                      <a:ea typeface="宋体" panose="02010600030101010101" pitchFamily="2" charset="-122"/>
-                    </a:endParaRPr>
-                  </a:p>
-                  <a:p>
-                    <a:pPr algn="ctr"/>
-                    <a:r>
-                      <a:rPr lang="en-US" altLang="zh-CN" sz="1100" dirty="0">
-                        <a:solidFill>
-                          <a:schemeClr val="tx1"/>
-                        </a:solidFill>
-                        <a:latin typeface="Times New Roman" panose="02020603050405020304" pitchFamily="18" charset="0"/>
-                        <a:ea typeface="宋体" panose="02010600030101010101" pitchFamily="2" charset="-122"/>
-                      </a:rPr>
-                      <a:t>GELU</a:t>
-                    </a:r>
-                    <a:endParaRPr lang="zh-CN" altLang="en-US" sz="1100" dirty="0" err="1">
-                      <a:solidFill>
-                        <a:schemeClr val="tx1"/>
-                      </a:solidFill>
-                      <a:latin typeface="Times New Roman" panose="02020603050405020304" pitchFamily="18" charset="0"/>
-                      <a:ea typeface="宋体" panose="02010600030101010101" pitchFamily="2" charset="-122"/>
-                    </a:endParaRPr>
-                  </a:p>
-                </p:txBody>
-              </p:sp>
-              <p:sp>
-                <p:nvSpPr>
-                  <p:cNvPr id="61" name="矩形 60">
-                    <a:extLst>
-                      <a:ext uri="{FF2B5EF4-FFF2-40B4-BE49-F238E27FC236}">
-                        <a16:creationId xmlns:a16="http://schemas.microsoft.com/office/drawing/2014/main" id="{AFA50921-B47A-D60C-195D-BE2B8ECC6CFE}"/>
-                      </a:ext>
-                    </a:extLst>
-                  </p:cNvPr>
-                  <p:cNvSpPr/>
-                  <p:nvPr/>
-                </p:nvSpPr>
-                <p:spPr>
-                  <a:xfrm>
-                    <a:off x="9710928" y="3567332"/>
-                    <a:ext cx="920496" cy="410188"/>
-                  </a:xfrm>
-                  <a:prstGeom prst="rect">
-                    <a:avLst/>
-                  </a:prstGeom>
-                  <a:noFill/>
-                  <a:ln w="19050">
-                    <a:solidFill>
-                      <a:schemeClr val="tx1"/>
-                    </a:solidFill>
-                  </a:ln>
-                </p:spPr>
-                <p:style>
-                  <a:lnRef idx="2">
-                    <a:schemeClr val="accent1">
-                      <a:shade val="15000"/>
-                    </a:schemeClr>
-                  </a:lnRef>
-                  <a:fillRef idx="1">
-                    <a:schemeClr val="accent1"/>
-                  </a:fillRef>
-                  <a:effectRef idx="0">
-                    <a:schemeClr val="accent1"/>
-                  </a:effectRef>
-                  <a:fontRef idx="minor">
-                    <a:schemeClr val="lt1"/>
-                  </a:fontRef>
-                </p:style>
-                <p:txBody>
-                  <a:bodyPr rtlCol="0" anchor="ctr" anchorCtr="0">
-                    <a:normAutofit/>
-                  </a:bodyPr>
-                  <a:lstStyle/>
-                  <a:p>
-                    <a:pPr algn="ctr"/>
-                    <a:r>
-                      <a:rPr lang="zh-CN" altLang="en-US" sz="1100" dirty="0">
-                        <a:solidFill>
-                          <a:schemeClr val="tx1"/>
-                        </a:solidFill>
-                        <a:latin typeface="Times New Roman" panose="02020603050405020304" pitchFamily="18" charset="0"/>
-                        <a:ea typeface="宋体" panose="02010600030101010101" pitchFamily="2" charset="-122"/>
-                      </a:rPr>
-                      <a:t>池化层</a:t>
-                    </a:r>
-                    <a:endParaRPr lang="en-US" altLang="zh-CN" sz="1100" dirty="0">
-                      <a:solidFill>
-                        <a:schemeClr val="tx1"/>
-                      </a:solidFill>
-                      <a:latin typeface="Times New Roman" panose="02020603050405020304" pitchFamily="18" charset="0"/>
-                      <a:ea typeface="宋体" panose="02010600030101010101" pitchFamily="2" charset="-122"/>
-                    </a:endParaRPr>
-                  </a:p>
-                  <a:p>
-                    <a:pPr algn="ctr"/>
-                    <a:r>
-                      <a:rPr lang="en-US" altLang="zh-CN" sz="1100" dirty="0">
-                        <a:solidFill>
-                          <a:schemeClr val="tx1"/>
-                        </a:solidFill>
-                        <a:latin typeface="Times New Roman" panose="02020603050405020304" pitchFamily="18" charset="0"/>
-                        <a:ea typeface="宋体" panose="02010600030101010101" pitchFamily="2" charset="-122"/>
-                      </a:rPr>
-                      <a:t>Dropout(0.1)</a:t>
-                    </a:r>
-                    <a:endParaRPr lang="zh-CN" altLang="en-US" sz="1100" dirty="0" err="1">
-                      <a:solidFill>
-                        <a:schemeClr val="tx1"/>
-                      </a:solidFill>
-                      <a:latin typeface="Times New Roman" panose="02020603050405020304" pitchFamily="18" charset="0"/>
-                      <a:ea typeface="宋体" panose="02010600030101010101" pitchFamily="2" charset="-122"/>
-                    </a:endParaRPr>
-                  </a:p>
-                </p:txBody>
-              </p:sp>
-            </p:grpSp>
-            <p:grpSp>
-              <p:nvGrpSpPr>
-                <p:cNvPr id="63" name="组合 62">
-                  <a:extLst>
-                    <a:ext uri="{FF2B5EF4-FFF2-40B4-BE49-F238E27FC236}">
-                      <a16:creationId xmlns:a16="http://schemas.microsoft.com/office/drawing/2014/main" id="{A187E5AA-238B-AA3C-0D68-538660031E8D}"/>
-                    </a:ext>
-                  </a:extLst>
-                </p:cNvPr>
-                <p:cNvGrpSpPr/>
-                <p:nvPr/>
-              </p:nvGrpSpPr>
-              <p:grpSpPr>
-                <a:xfrm>
-                  <a:off x="5906651" y="3723382"/>
-                  <a:ext cx="914274" cy="1669480"/>
-                  <a:chOff x="9710928" y="2308040"/>
-                  <a:chExt cx="920496" cy="1669480"/>
-                </a:xfrm>
-              </p:grpSpPr>
-              <p:sp>
-                <p:nvSpPr>
-                  <p:cNvPr id="64" name="矩形 63">
-                    <a:extLst>
-                      <a:ext uri="{FF2B5EF4-FFF2-40B4-BE49-F238E27FC236}">
-                        <a16:creationId xmlns:a16="http://schemas.microsoft.com/office/drawing/2014/main" id="{ADB1D238-7326-62D0-802F-ACA5F40C5BCD}"/>
-                      </a:ext>
-                    </a:extLst>
-                  </p:cNvPr>
-                  <p:cNvSpPr/>
-                  <p:nvPr/>
-                </p:nvSpPr>
-                <p:spPr>
-                  <a:xfrm>
-                    <a:off x="9710928" y="2308040"/>
-                    <a:ext cx="920496" cy="410188"/>
-                  </a:xfrm>
-                  <a:prstGeom prst="rect">
-                    <a:avLst/>
-                  </a:prstGeom>
-                  <a:noFill/>
-                  <a:ln w="19050">
-                    <a:solidFill>
-                      <a:schemeClr val="tx1"/>
-                    </a:solidFill>
-                  </a:ln>
-                </p:spPr>
-                <p:style>
-                  <a:lnRef idx="2">
-                    <a:schemeClr val="accent1">
-                      <a:shade val="15000"/>
-                    </a:schemeClr>
-                  </a:lnRef>
-                  <a:fillRef idx="1">
-                    <a:schemeClr val="accent1"/>
-                  </a:fillRef>
-                  <a:effectRef idx="0">
-                    <a:schemeClr val="accent1"/>
-                  </a:effectRef>
-                  <a:fontRef idx="minor">
-                    <a:schemeClr val="lt1"/>
-                  </a:fontRef>
-                </p:style>
-                <p:txBody>
-                  <a:bodyPr rtlCol="0" anchor="ctr" anchorCtr="0">
-                    <a:normAutofit/>
-                  </a:bodyPr>
-                  <a:lstStyle/>
-                  <a:p>
-                    <a:pPr algn="ctr"/>
-                    <a:r>
-                      <a:rPr lang="zh-CN" altLang="en-US" sz="1100" dirty="0">
-                        <a:solidFill>
-                          <a:schemeClr val="tx1"/>
-                        </a:solidFill>
-                        <a:latin typeface="Times New Roman" panose="02020603050405020304" pitchFamily="18" charset="0"/>
-                        <a:ea typeface="宋体" panose="02010600030101010101" pitchFamily="2" charset="-122"/>
-                      </a:rPr>
-                      <a:t>线性层</a:t>
-                    </a:r>
-                    <a:endParaRPr lang="en-US" altLang="zh-CN" sz="1100" dirty="0">
-                      <a:solidFill>
-                        <a:schemeClr val="tx1"/>
-                      </a:solidFill>
-                      <a:latin typeface="Times New Roman" panose="02020603050405020304" pitchFamily="18" charset="0"/>
-                      <a:ea typeface="宋体" panose="02010600030101010101" pitchFamily="2" charset="-122"/>
-                    </a:endParaRPr>
-                  </a:p>
-                  <a:p>
-                    <a:pPr algn="ctr"/>
-                    <a:r>
-                      <a:rPr lang="en-US" altLang="zh-CN" sz="1100" dirty="0">
-                        <a:solidFill>
-                          <a:schemeClr val="tx1"/>
-                        </a:solidFill>
-                        <a:latin typeface="Times New Roman" panose="02020603050405020304" pitchFamily="18" charset="0"/>
-                        <a:ea typeface="宋体" panose="02010600030101010101" pitchFamily="2" charset="-122"/>
-                      </a:rPr>
-                      <a:t>FC128</a:t>
-                    </a:r>
-                    <a:endParaRPr lang="zh-CN" altLang="en-US" sz="1100" dirty="0" err="1">
-                      <a:solidFill>
-                        <a:schemeClr val="tx1"/>
-                      </a:solidFill>
-                      <a:latin typeface="Times New Roman" panose="02020603050405020304" pitchFamily="18" charset="0"/>
-                      <a:ea typeface="宋体" panose="02010600030101010101" pitchFamily="2" charset="-122"/>
-                    </a:endParaRPr>
-                  </a:p>
-                </p:txBody>
-              </p:sp>
-              <p:sp>
-                <p:nvSpPr>
-                  <p:cNvPr id="65" name="矩形 64">
-                    <a:extLst>
-                      <a:ext uri="{FF2B5EF4-FFF2-40B4-BE49-F238E27FC236}">
-                        <a16:creationId xmlns:a16="http://schemas.microsoft.com/office/drawing/2014/main" id="{550312D8-71DD-1E3F-3422-C5936E362932}"/>
-                      </a:ext>
-                    </a:extLst>
-                  </p:cNvPr>
-                  <p:cNvSpPr/>
-                  <p:nvPr/>
-                </p:nvSpPr>
-                <p:spPr>
-                  <a:xfrm>
-                    <a:off x="9710928" y="2727804"/>
-                    <a:ext cx="920496" cy="410188"/>
-                  </a:xfrm>
-                  <a:prstGeom prst="rect">
-                    <a:avLst/>
-                  </a:prstGeom>
-                  <a:noFill/>
-                  <a:ln w="19050">
-                    <a:solidFill>
-                      <a:schemeClr val="tx1"/>
-                    </a:solidFill>
-                  </a:ln>
-                </p:spPr>
-                <p:style>
-                  <a:lnRef idx="2">
-                    <a:schemeClr val="accent1">
-                      <a:shade val="15000"/>
-                    </a:schemeClr>
-                  </a:lnRef>
-                  <a:fillRef idx="1">
-                    <a:schemeClr val="accent1"/>
-                  </a:fillRef>
-                  <a:effectRef idx="0">
-                    <a:schemeClr val="accent1"/>
-                  </a:effectRef>
-                  <a:fontRef idx="minor">
-                    <a:schemeClr val="lt1"/>
-                  </a:fontRef>
-                </p:style>
-                <p:txBody>
-                  <a:bodyPr rtlCol="0" anchor="ctr" anchorCtr="0">
-                    <a:normAutofit/>
-                  </a:bodyPr>
-                  <a:lstStyle/>
-                  <a:p>
-                    <a:pPr algn="ctr"/>
-                    <a:r>
-                      <a:rPr lang="zh-CN" altLang="en-US" sz="1100" dirty="0">
-                        <a:solidFill>
-                          <a:schemeClr val="tx1"/>
-                        </a:solidFill>
-                        <a:latin typeface="Times New Roman" panose="02020603050405020304" pitchFamily="18" charset="0"/>
-                        <a:ea typeface="宋体" panose="02010600030101010101" pitchFamily="2" charset="-122"/>
-                      </a:rPr>
-                      <a:t>归一化层</a:t>
-                    </a:r>
-                    <a:endParaRPr lang="en-US" altLang="zh-CN" sz="1100" dirty="0">
-                      <a:solidFill>
-                        <a:schemeClr val="tx1"/>
-                      </a:solidFill>
-                      <a:latin typeface="Times New Roman" panose="02020603050405020304" pitchFamily="18" charset="0"/>
-                      <a:ea typeface="宋体" panose="02010600030101010101" pitchFamily="2" charset="-122"/>
-                    </a:endParaRPr>
-                  </a:p>
-                  <a:p>
-                    <a:pPr algn="ctr"/>
-                    <a:r>
-                      <a:rPr lang="en-US" altLang="zh-CN" sz="1100" dirty="0" err="1">
-                        <a:solidFill>
-                          <a:schemeClr val="tx1"/>
-                        </a:solidFill>
-                        <a:latin typeface="Times New Roman" panose="02020603050405020304" pitchFamily="18" charset="0"/>
-                        <a:ea typeface="宋体" panose="02010600030101010101" pitchFamily="2" charset="-122"/>
-                      </a:rPr>
-                      <a:t>LayerNorm</a:t>
-                    </a:r>
-                    <a:endParaRPr lang="zh-CN" altLang="en-US" sz="1100" dirty="0" err="1">
-                      <a:solidFill>
-                        <a:schemeClr val="tx1"/>
-                      </a:solidFill>
-                      <a:latin typeface="Times New Roman" panose="02020603050405020304" pitchFamily="18" charset="0"/>
-                      <a:ea typeface="宋体" panose="02010600030101010101" pitchFamily="2" charset="-122"/>
-                    </a:endParaRPr>
-                  </a:p>
-                </p:txBody>
-              </p:sp>
-              <p:sp>
-                <p:nvSpPr>
-                  <p:cNvPr id="66" name="矩形 65">
-                    <a:extLst>
-                      <a:ext uri="{FF2B5EF4-FFF2-40B4-BE49-F238E27FC236}">
-                        <a16:creationId xmlns:a16="http://schemas.microsoft.com/office/drawing/2014/main" id="{21CDB939-7927-BDAE-1A38-0F15ADBFB951}"/>
-                      </a:ext>
-                    </a:extLst>
-                  </p:cNvPr>
-                  <p:cNvSpPr/>
-                  <p:nvPr/>
-                </p:nvSpPr>
-                <p:spPr>
-                  <a:xfrm>
-                    <a:off x="9710928" y="3147568"/>
-                    <a:ext cx="920496" cy="410188"/>
-                  </a:xfrm>
-                  <a:prstGeom prst="rect">
-                    <a:avLst/>
-                  </a:prstGeom>
-                  <a:noFill/>
-                  <a:ln w="19050">
-                    <a:solidFill>
-                      <a:schemeClr val="tx1"/>
-                    </a:solidFill>
-                  </a:ln>
-                </p:spPr>
-                <p:style>
-                  <a:lnRef idx="2">
-                    <a:schemeClr val="accent1">
-                      <a:shade val="15000"/>
-                    </a:schemeClr>
-                  </a:lnRef>
-                  <a:fillRef idx="1">
-                    <a:schemeClr val="accent1"/>
-                  </a:fillRef>
-                  <a:effectRef idx="0">
-                    <a:schemeClr val="accent1"/>
-                  </a:effectRef>
-                  <a:fontRef idx="minor">
-                    <a:schemeClr val="lt1"/>
-                  </a:fontRef>
-                </p:style>
-                <p:txBody>
-                  <a:bodyPr rtlCol="0" anchor="ctr" anchorCtr="0">
-                    <a:normAutofit/>
-                  </a:bodyPr>
-                  <a:lstStyle/>
-                  <a:p>
-                    <a:pPr algn="ctr"/>
-                    <a:r>
-                      <a:rPr lang="zh-CN" altLang="en-US" sz="1100" dirty="0">
-                        <a:solidFill>
-                          <a:schemeClr val="tx1"/>
-                        </a:solidFill>
-                        <a:latin typeface="Times New Roman" panose="02020603050405020304" pitchFamily="18" charset="0"/>
-                        <a:ea typeface="宋体" panose="02010600030101010101" pitchFamily="2" charset="-122"/>
-                      </a:rPr>
-                      <a:t>非线性激活</a:t>
-                    </a:r>
-                    <a:endParaRPr lang="en-US" altLang="zh-CN" sz="1100" dirty="0">
-                      <a:solidFill>
-                        <a:schemeClr val="tx1"/>
-                      </a:solidFill>
-                      <a:latin typeface="Times New Roman" panose="02020603050405020304" pitchFamily="18" charset="0"/>
-                      <a:ea typeface="宋体" panose="02010600030101010101" pitchFamily="2" charset="-122"/>
-                    </a:endParaRPr>
-                  </a:p>
-                  <a:p>
-                    <a:pPr algn="ctr"/>
-                    <a:r>
-                      <a:rPr lang="en-US" altLang="zh-CN" sz="1100" dirty="0">
-                        <a:solidFill>
-                          <a:schemeClr val="tx1"/>
-                        </a:solidFill>
-                        <a:latin typeface="Times New Roman" panose="02020603050405020304" pitchFamily="18" charset="0"/>
-                        <a:ea typeface="宋体" panose="02010600030101010101" pitchFamily="2" charset="-122"/>
-                      </a:rPr>
-                      <a:t>GELU</a:t>
-                    </a:r>
-                    <a:endParaRPr lang="zh-CN" altLang="en-US" sz="1100" dirty="0" err="1">
-                      <a:solidFill>
-                        <a:schemeClr val="tx1"/>
-                      </a:solidFill>
-                      <a:latin typeface="Times New Roman" panose="02020603050405020304" pitchFamily="18" charset="0"/>
-                      <a:ea typeface="宋体" panose="02010600030101010101" pitchFamily="2" charset="-122"/>
-                    </a:endParaRPr>
-                  </a:p>
-                </p:txBody>
-              </p:sp>
-              <p:sp>
-                <p:nvSpPr>
-                  <p:cNvPr id="67" name="矩形 66">
-                    <a:extLst>
-                      <a:ext uri="{FF2B5EF4-FFF2-40B4-BE49-F238E27FC236}">
-                        <a16:creationId xmlns:a16="http://schemas.microsoft.com/office/drawing/2014/main" id="{F8C60D7D-610D-7319-6067-E2D6C5A7B247}"/>
-                      </a:ext>
-                    </a:extLst>
-                  </p:cNvPr>
-                  <p:cNvSpPr/>
-                  <p:nvPr/>
-                </p:nvSpPr>
-                <p:spPr>
-                  <a:xfrm>
-                    <a:off x="9710928" y="3567332"/>
-                    <a:ext cx="920496" cy="410188"/>
-                  </a:xfrm>
-                  <a:prstGeom prst="rect">
-                    <a:avLst/>
-                  </a:prstGeom>
-                  <a:noFill/>
-                  <a:ln w="19050">
-                    <a:solidFill>
-                      <a:schemeClr val="tx1"/>
-                    </a:solidFill>
-                  </a:ln>
-                </p:spPr>
-                <p:style>
-                  <a:lnRef idx="2">
-                    <a:schemeClr val="accent1">
-                      <a:shade val="15000"/>
-                    </a:schemeClr>
-                  </a:lnRef>
-                  <a:fillRef idx="1">
-                    <a:schemeClr val="accent1"/>
-                  </a:fillRef>
-                  <a:effectRef idx="0">
-                    <a:schemeClr val="accent1"/>
-                  </a:effectRef>
-                  <a:fontRef idx="minor">
-                    <a:schemeClr val="lt1"/>
-                  </a:fontRef>
-                </p:style>
-                <p:txBody>
-                  <a:bodyPr rtlCol="0" anchor="ctr" anchorCtr="0">
-                    <a:normAutofit/>
-                  </a:bodyPr>
-                  <a:lstStyle/>
-                  <a:p>
-                    <a:pPr algn="ctr"/>
-                    <a:r>
-                      <a:rPr lang="zh-CN" altLang="en-US" sz="1100" dirty="0">
-                        <a:solidFill>
-                          <a:schemeClr val="tx1"/>
-                        </a:solidFill>
-                        <a:latin typeface="Times New Roman" panose="02020603050405020304" pitchFamily="18" charset="0"/>
-                        <a:ea typeface="宋体" panose="02010600030101010101" pitchFamily="2" charset="-122"/>
-                      </a:rPr>
-                      <a:t>池化层</a:t>
-                    </a:r>
-                    <a:endParaRPr lang="en-US" altLang="zh-CN" sz="1100" dirty="0">
-                      <a:solidFill>
-                        <a:schemeClr val="tx1"/>
-                      </a:solidFill>
-                      <a:latin typeface="Times New Roman" panose="02020603050405020304" pitchFamily="18" charset="0"/>
-                      <a:ea typeface="宋体" panose="02010600030101010101" pitchFamily="2" charset="-122"/>
-                    </a:endParaRPr>
-                  </a:p>
-                  <a:p>
-                    <a:pPr algn="ctr"/>
-                    <a:r>
-                      <a:rPr lang="en-US" altLang="zh-CN" sz="1100" dirty="0">
-                        <a:solidFill>
-                          <a:schemeClr val="tx1"/>
-                        </a:solidFill>
-                        <a:latin typeface="Times New Roman" panose="02020603050405020304" pitchFamily="18" charset="0"/>
-                        <a:ea typeface="宋体" panose="02010600030101010101" pitchFamily="2" charset="-122"/>
-                      </a:rPr>
-                      <a:t>Dropout(0.1)</a:t>
-                    </a:r>
-                    <a:endParaRPr lang="zh-CN" altLang="en-US" sz="1100" dirty="0" err="1">
-                      <a:solidFill>
-                        <a:schemeClr val="tx1"/>
-                      </a:solidFill>
-                      <a:latin typeface="Times New Roman" panose="02020603050405020304" pitchFamily="18" charset="0"/>
-                      <a:ea typeface="宋体" panose="02010600030101010101" pitchFamily="2" charset="-122"/>
-                    </a:endParaRPr>
-                  </a:p>
-                </p:txBody>
-              </p:sp>
-            </p:grpSp>
-            <p:grpSp>
-              <p:nvGrpSpPr>
-                <p:cNvPr id="68" name="组合 67">
-                  <a:extLst>
-                    <a:ext uri="{FF2B5EF4-FFF2-40B4-BE49-F238E27FC236}">
-                      <a16:creationId xmlns:a16="http://schemas.microsoft.com/office/drawing/2014/main" id="{F6C8EA70-1AF8-AB5A-9D81-3223BEB36958}"/>
-                    </a:ext>
-                  </a:extLst>
-                </p:cNvPr>
-                <p:cNvGrpSpPr/>
-                <p:nvPr/>
-              </p:nvGrpSpPr>
-              <p:grpSpPr>
-                <a:xfrm>
-                  <a:off x="6924184" y="3723382"/>
-                  <a:ext cx="914274" cy="1669480"/>
-                  <a:chOff x="9710928" y="2308040"/>
-                  <a:chExt cx="920496" cy="1669480"/>
-                </a:xfrm>
-              </p:grpSpPr>
-              <p:sp>
-                <p:nvSpPr>
-                  <p:cNvPr id="69" name="矩形 68">
-                    <a:extLst>
-                      <a:ext uri="{FF2B5EF4-FFF2-40B4-BE49-F238E27FC236}">
-                        <a16:creationId xmlns:a16="http://schemas.microsoft.com/office/drawing/2014/main" id="{3E9686A9-A365-874B-4EDC-6BD7A69DA16A}"/>
-                      </a:ext>
-                    </a:extLst>
-                  </p:cNvPr>
-                  <p:cNvSpPr/>
-                  <p:nvPr/>
-                </p:nvSpPr>
-                <p:spPr>
-                  <a:xfrm>
-                    <a:off x="9710928" y="2308040"/>
-                    <a:ext cx="920496" cy="410188"/>
-                  </a:xfrm>
-                  <a:prstGeom prst="rect">
-                    <a:avLst/>
-                  </a:prstGeom>
-                  <a:noFill/>
-                  <a:ln w="19050">
-                    <a:solidFill>
-                      <a:schemeClr val="tx1"/>
-                    </a:solidFill>
-                  </a:ln>
-                </p:spPr>
-                <p:style>
-                  <a:lnRef idx="2">
-                    <a:schemeClr val="accent1">
-                      <a:shade val="15000"/>
-                    </a:schemeClr>
-                  </a:lnRef>
-                  <a:fillRef idx="1">
-                    <a:schemeClr val="accent1"/>
-                  </a:fillRef>
-                  <a:effectRef idx="0">
-                    <a:schemeClr val="accent1"/>
-                  </a:effectRef>
-                  <a:fontRef idx="minor">
-                    <a:schemeClr val="lt1"/>
-                  </a:fontRef>
-                </p:style>
-                <p:txBody>
-                  <a:bodyPr rtlCol="0" anchor="ctr" anchorCtr="0">
-                    <a:normAutofit/>
-                  </a:bodyPr>
-                  <a:lstStyle/>
-                  <a:p>
-                    <a:pPr algn="ctr"/>
-                    <a:r>
-                      <a:rPr lang="zh-CN" altLang="en-US" sz="1100" dirty="0">
-                        <a:solidFill>
-                          <a:schemeClr val="tx1"/>
-                        </a:solidFill>
-                        <a:latin typeface="Times New Roman" panose="02020603050405020304" pitchFamily="18" charset="0"/>
-                        <a:ea typeface="宋体" panose="02010600030101010101" pitchFamily="2" charset="-122"/>
-                      </a:rPr>
-                      <a:t>线性层</a:t>
-                    </a:r>
-                    <a:endParaRPr lang="en-US" altLang="zh-CN" sz="1100" dirty="0">
-                      <a:solidFill>
-                        <a:schemeClr val="tx1"/>
-                      </a:solidFill>
-                      <a:latin typeface="Times New Roman" panose="02020603050405020304" pitchFamily="18" charset="0"/>
-                      <a:ea typeface="宋体" panose="02010600030101010101" pitchFamily="2" charset="-122"/>
-                    </a:endParaRPr>
-                  </a:p>
-                  <a:p>
-                    <a:pPr algn="ctr"/>
-                    <a:r>
-                      <a:rPr lang="en-US" altLang="zh-CN" sz="1100" dirty="0">
-                        <a:solidFill>
-                          <a:schemeClr val="tx1"/>
-                        </a:solidFill>
-                        <a:latin typeface="Times New Roman" panose="02020603050405020304" pitchFamily="18" charset="0"/>
-                        <a:ea typeface="宋体" panose="02010600030101010101" pitchFamily="2" charset="-122"/>
-                      </a:rPr>
-                      <a:t>FC128</a:t>
-                    </a:r>
-                    <a:endParaRPr lang="zh-CN" altLang="en-US" sz="1100" dirty="0" err="1">
-                      <a:solidFill>
-                        <a:schemeClr val="tx1"/>
-                      </a:solidFill>
-                      <a:latin typeface="Times New Roman" panose="02020603050405020304" pitchFamily="18" charset="0"/>
-                      <a:ea typeface="宋体" panose="02010600030101010101" pitchFamily="2" charset="-122"/>
-                    </a:endParaRPr>
-                  </a:p>
-                </p:txBody>
-              </p:sp>
-              <p:sp>
-                <p:nvSpPr>
-                  <p:cNvPr id="70" name="矩形 69">
-                    <a:extLst>
-                      <a:ext uri="{FF2B5EF4-FFF2-40B4-BE49-F238E27FC236}">
-                        <a16:creationId xmlns:a16="http://schemas.microsoft.com/office/drawing/2014/main" id="{1F043644-1141-6824-B3D4-F050444C4F71}"/>
-                      </a:ext>
-                    </a:extLst>
-                  </p:cNvPr>
-                  <p:cNvSpPr/>
-                  <p:nvPr/>
-                </p:nvSpPr>
-                <p:spPr>
-                  <a:xfrm>
-                    <a:off x="9710928" y="2727804"/>
-                    <a:ext cx="920496" cy="410188"/>
-                  </a:xfrm>
-                  <a:prstGeom prst="rect">
-                    <a:avLst/>
-                  </a:prstGeom>
-                  <a:noFill/>
-                  <a:ln w="19050">
-                    <a:solidFill>
-                      <a:schemeClr val="tx1"/>
-                    </a:solidFill>
-                  </a:ln>
-                </p:spPr>
-                <p:style>
-                  <a:lnRef idx="2">
-                    <a:schemeClr val="accent1">
-                      <a:shade val="15000"/>
-                    </a:schemeClr>
-                  </a:lnRef>
-                  <a:fillRef idx="1">
-                    <a:schemeClr val="accent1"/>
-                  </a:fillRef>
-                  <a:effectRef idx="0">
-                    <a:schemeClr val="accent1"/>
-                  </a:effectRef>
-                  <a:fontRef idx="minor">
-                    <a:schemeClr val="lt1"/>
-                  </a:fontRef>
-                </p:style>
-                <p:txBody>
-                  <a:bodyPr rtlCol="0" anchor="ctr" anchorCtr="0">
-                    <a:normAutofit/>
-                  </a:bodyPr>
-                  <a:lstStyle/>
-                  <a:p>
-                    <a:pPr algn="ctr"/>
-                    <a:r>
-                      <a:rPr lang="zh-CN" altLang="en-US" sz="1100" dirty="0">
-                        <a:solidFill>
-                          <a:schemeClr val="tx1"/>
-                        </a:solidFill>
-                        <a:latin typeface="Times New Roman" panose="02020603050405020304" pitchFamily="18" charset="0"/>
-                        <a:ea typeface="宋体" panose="02010600030101010101" pitchFamily="2" charset="-122"/>
-                      </a:rPr>
-                      <a:t>归一化层</a:t>
-                    </a:r>
-                    <a:endParaRPr lang="en-US" altLang="zh-CN" sz="1100" dirty="0">
-                      <a:solidFill>
-                        <a:schemeClr val="tx1"/>
-                      </a:solidFill>
-                      <a:latin typeface="Times New Roman" panose="02020603050405020304" pitchFamily="18" charset="0"/>
-                      <a:ea typeface="宋体" panose="02010600030101010101" pitchFamily="2" charset="-122"/>
-                    </a:endParaRPr>
-                  </a:p>
-                  <a:p>
-                    <a:pPr algn="ctr"/>
-                    <a:r>
-                      <a:rPr lang="en-US" altLang="zh-CN" sz="1100" dirty="0" err="1">
-                        <a:solidFill>
-                          <a:schemeClr val="tx1"/>
-                        </a:solidFill>
-                        <a:latin typeface="Times New Roman" panose="02020603050405020304" pitchFamily="18" charset="0"/>
-                        <a:ea typeface="宋体" panose="02010600030101010101" pitchFamily="2" charset="-122"/>
-                      </a:rPr>
-                      <a:t>LayerNorm</a:t>
-                    </a:r>
-                    <a:endParaRPr lang="zh-CN" altLang="en-US" sz="1100" dirty="0" err="1">
-                      <a:solidFill>
-                        <a:schemeClr val="tx1"/>
-                      </a:solidFill>
-                      <a:latin typeface="Times New Roman" panose="02020603050405020304" pitchFamily="18" charset="0"/>
-                      <a:ea typeface="宋体" panose="02010600030101010101" pitchFamily="2" charset="-122"/>
-                    </a:endParaRPr>
-                  </a:p>
-                </p:txBody>
-              </p:sp>
-              <p:sp>
-                <p:nvSpPr>
-                  <p:cNvPr id="71" name="矩形 70">
-                    <a:extLst>
-                      <a:ext uri="{FF2B5EF4-FFF2-40B4-BE49-F238E27FC236}">
-                        <a16:creationId xmlns:a16="http://schemas.microsoft.com/office/drawing/2014/main" id="{F1F4BE2A-92B8-3E50-C1C9-8ABFDB412C8E}"/>
-                      </a:ext>
-                    </a:extLst>
-                  </p:cNvPr>
-                  <p:cNvSpPr/>
-                  <p:nvPr/>
-                </p:nvSpPr>
-                <p:spPr>
-                  <a:xfrm>
-                    <a:off x="9710928" y="3147568"/>
-                    <a:ext cx="920496" cy="410188"/>
-                  </a:xfrm>
-                  <a:prstGeom prst="rect">
-                    <a:avLst/>
-                  </a:prstGeom>
-                  <a:noFill/>
-                  <a:ln w="19050">
-                    <a:solidFill>
-                      <a:schemeClr val="tx1"/>
-                    </a:solidFill>
-                  </a:ln>
-                </p:spPr>
-                <p:style>
-                  <a:lnRef idx="2">
-                    <a:schemeClr val="accent1">
-                      <a:shade val="15000"/>
-                    </a:schemeClr>
-                  </a:lnRef>
-                  <a:fillRef idx="1">
-                    <a:schemeClr val="accent1"/>
-                  </a:fillRef>
-                  <a:effectRef idx="0">
-                    <a:schemeClr val="accent1"/>
-                  </a:effectRef>
-                  <a:fontRef idx="minor">
-                    <a:schemeClr val="lt1"/>
-                  </a:fontRef>
-                </p:style>
-                <p:txBody>
-                  <a:bodyPr rtlCol="0" anchor="ctr" anchorCtr="0">
-                    <a:normAutofit/>
-                  </a:bodyPr>
-                  <a:lstStyle/>
-                  <a:p>
-                    <a:pPr algn="ctr"/>
-                    <a:r>
-                      <a:rPr lang="zh-CN" altLang="en-US" sz="1100" dirty="0">
-                        <a:solidFill>
-                          <a:schemeClr val="tx1"/>
-                        </a:solidFill>
-                        <a:latin typeface="Times New Roman" panose="02020603050405020304" pitchFamily="18" charset="0"/>
-                        <a:ea typeface="宋体" panose="02010600030101010101" pitchFamily="2" charset="-122"/>
-                      </a:rPr>
-                      <a:t>非线性激活</a:t>
-                    </a:r>
-                    <a:endParaRPr lang="en-US" altLang="zh-CN" sz="1100" dirty="0">
-                      <a:solidFill>
-                        <a:schemeClr val="tx1"/>
-                      </a:solidFill>
-                      <a:latin typeface="Times New Roman" panose="02020603050405020304" pitchFamily="18" charset="0"/>
-                      <a:ea typeface="宋体" panose="02010600030101010101" pitchFamily="2" charset="-122"/>
-                    </a:endParaRPr>
-                  </a:p>
-                  <a:p>
-                    <a:pPr algn="ctr"/>
-                    <a:r>
-                      <a:rPr lang="en-US" altLang="zh-CN" sz="1100" dirty="0">
-                        <a:solidFill>
-                          <a:schemeClr val="tx1"/>
-                        </a:solidFill>
-                        <a:latin typeface="Times New Roman" panose="02020603050405020304" pitchFamily="18" charset="0"/>
-                        <a:ea typeface="宋体" panose="02010600030101010101" pitchFamily="2" charset="-122"/>
-                      </a:rPr>
-                      <a:t>GELU</a:t>
-                    </a:r>
-                    <a:endParaRPr lang="zh-CN" altLang="en-US" sz="1100" dirty="0" err="1">
-                      <a:solidFill>
-                        <a:schemeClr val="tx1"/>
-                      </a:solidFill>
-                      <a:latin typeface="Times New Roman" panose="02020603050405020304" pitchFamily="18" charset="0"/>
-                      <a:ea typeface="宋体" panose="02010600030101010101" pitchFamily="2" charset="-122"/>
-                    </a:endParaRPr>
-                  </a:p>
-                </p:txBody>
-              </p:sp>
-              <p:sp>
-                <p:nvSpPr>
-                  <p:cNvPr id="72" name="矩形 71">
-                    <a:extLst>
-                      <a:ext uri="{FF2B5EF4-FFF2-40B4-BE49-F238E27FC236}">
-                        <a16:creationId xmlns:a16="http://schemas.microsoft.com/office/drawing/2014/main" id="{6D3556AD-492A-6589-688D-A2AF1F698183}"/>
-                      </a:ext>
-                    </a:extLst>
-                  </p:cNvPr>
-                  <p:cNvSpPr/>
-                  <p:nvPr/>
-                </p:nvSpPr>
-                <p:spPr>
-                  <a:xfrm>
-                    <a:off x="9710928" y="3567332"/>
-                    <a:ext cx="920496" cy="410188"/>
-                  </a:xfrm>
-                  <a:prstGeom prst="rect">
-                    <a:avLst/>
-                  </a:prstGeom>
-                  <a:noFill/>
-                  <a:ln w="19050">
-                    <a:solidFill>
-                      <a:schemeClr val="tx1"/>
-                    </a:solidFill>
-                  </a:ln>
-                </p:spPr>
-                <p:style>
-                  <a:lnRef idx="2">
-                    <a:schemeClr val="accent1">
-                      <a:shade val="15000"/>
-                    </a:schemeClr>
-                  </a:lnRef>
-                  <a:fillRef idx="1">
-                    <a:schemeClr val="accent1"/>
-                  </a:fillRef>
-                  <a:effectRef idx="0">
-                    <a:schemeClr val="accent1"/>
-                  </a:effectRef>
-                  <a:fontRef idx="minor">
-                    <a:schemeClr val="lt1"/>
-                  </a:fontRef>
-                </p:style>
-                <p:txBody>
-                  <a:bodyPr rtlCol="0" anchor="ctr" anchorCtr="0">
-                    <a:normAutofit/>
-                  </a:bodyPr>
-                  <a:lstStyle/>
-                  <a:p>
-                    <a:pPr algn="ctr"/>
-                    <a:r>
-                      <a:rPr lang="zh-CN" altLang="en-US" sz="1100" dirty="0">
-                        <a:solidFill>
-                          <a:schemeClr val="tx1"/>
-                        </a:solidFill>
-                        <a:latin typeface="Times New Roman" panose="02020603050405020304" pitchFamily="18" charset="0"/>
-                        <a:ea typeface="宋体" panose="02010600030101010101" pitchFamily="2" charset="-122"/>
-                      </a:rPr>
-                      <a:t>池化层</a:t>
-                    </a:r>
-                    <a:endParaRPr lang="en-US" altLang="zh-CN" sz="1100" dirty="0">
-                      <a:solidFill>
-                        <a:schemeClr val="tx1"/>
-                      </a:solidFill>
-                      <a:latin typeface="Times New Roman" panose="02020603050405020304" pitchFamily="18" charset="0"/>
-                      <a:ea typeface="宋体" panose="02010600030101010101" pitchFamily="2" charset="-122"/>
-                    </a:endParaRPr>
-                  </a:p>
-                  <a:p>
-                    <a:pPr algn="ctr"/>
-                    <a:r>
-                      <a:rPr lang="en-US" altLang="zh-CN" sz="1100" dirty="0">
-                        <a:solidFill>
-                          <a:schemeClr val="tx1"/>
-                        </a:solidFill>
-                        <a:latin typeface="Times New Roman" panose="02020603050405020304" pitchFamily="18" charset="0"/>
-                        <a:ea typeface="宋体" panose="02010600030101010101" pitchFamily="2" charset="-122"/>
-                      </a:rPr>
-                      <a:t>Dropout(0.1)</a:t>
-                    </a:r>
-                    <a:endParaRPr lang="zh-CN" altLang="en-US" sz="1100" dirty="0" err="1">
-                      <a:solidFill>
-                        <a:schemeClr val="tx1"/>
-                      </a:solidFill>
-                      <a:latin typeface="Times New Roman" panose="02020603050405020304" pitchFamily="18" charset="0"/>
-                      <a:ea typeface="宋体" panose="02010600030101010101" pitchFamily="2" charset="-122"/>
-                    </a:endParaRPr>
-                  </a:p>
-                </p:txBody>
-              </p:sp>
-            </p:grpSp>
-          </p:grpSp>
-          <p:sp>
-            <p:nvSpPr>
-              <p:cNvPr id="101" name="文本框 100">
-                <a:extLst>
-                  <a:ext uri="{FF2B5EF4-FFF2-40B4-BE49-F238E27FC236}">
-                    <a16:creationId xmlns:a16="http://schemas.microsoft.com/office/drawing/2014/main" id="{CAB053F7-E5CE-52DD-5C29-F8DE36A3A333}"/>
-                  </a:ext>
-                </a:extLst>
-              </p:cNvPr>
-              <p:cNvSpPr txBox="1"/>
-              <p:nvPr/>
-            </p:nvSpPr>
-            <p:spPr>
-              <a:xfrm>
-                <a:off x="7129359" y="3678932"/>
-                <a:ext cx="526609" cy="253917"/>
-              </a:xfrm>
-              <a:prstGeom prst="rect">
-                <a:avLst/>
-              </a:prstGeom>
-              <a:noFill/>
-            </p:spPr>
-            <p:txBody>
-              <a:bodyPr wrap="square" rtlCol="0" anchor="ctr" anchorCtr="1">
-                <a:spAutoFit/>
-              </a:bodyPr>
-              <a:lstStyle/>
-              <a:p>
-                <a:pPr algn="ctr"/>
-                <a:r>
-                  <a:rPr lang="en-US" altLang="zh-CN" sz="1050" dirty="0">
-                    <a:latin typeface="Times New Roman" panose="02020603050405020304" pitchFamily="18" charset="0"/>
-                    <a:ea typeface="宋体" panose="02010600030101010101" pitchFamily="2" charset="-122"/>
-                  </a:rPr>
-                  <a:t>(</a:t>
-                </a:r>
-                <a:r>
-                  <a:rPr lang="zh-CN" altLang="en-US" sz="1050" dirty="0">
-                    <a:latin typeface="Times New Roman" panose="02020603050405020304" pitchFamily="18" charset="0"/>
-                    <a:ea typeface="宋体" panose="02010600030101010101" pitchFamily="2" charset="-122"/>
-                  </a:rPr>
-                  <a:t>可选</a:t>
-                </a:r>
-                <a:r>
-                  <a:rPr lang="en-US" altLang="zh-CN" sz="1050" dirty="0">
-                    <a:latin typeface="Times New Roman" panose="02020603050405020304" pitchFamily="18" charset="0"/>
-                    <a:ea typeface="宋体" panose="02010600030101010101" pitchFamily="2" charset="-122"/>
-                  </a:rPr>
-                  <a:t>)</a:t>
-                </a:r>
-                <a:endParaRPr lang="zh-CN" altLang="en-US" sz="1050" dirty="0">
-                  <a:latin typeface="Times New Roman" panose="02020603050405020304" pitchFamily="18" charset="0"/>
-                  <a:ea typeface="宋体" panose="02010600030101010101" pitchFamily="2" charset="-122"/>
-                </a:endParaRPr>
-              </a:p>
-            </p:txBody>
-          </p:sp>
-        </p:grpSp>
       </p:grpSp>
     </p:spTree>
     <p:extLst>

--- a/PPT画图.pptx
+++ b/PPT画图.pptx
@@ -5,13 +5,18 @@
     <p:sldMasterId id="2147483648" r:id="rId1"/>
   </p:sldMasterIdLst>
   <p:notesMasterIdLst>
-    <p:notesMasterId r:id="rId6"/>
+    <p:notesMasterId r:id="rId11"/>
   </p:notesMasterIdLst>
   <p:sldIdLst>
     <p:sldId id="257" r:id="rId2"/>
     <p:sldId id="258" r:id="rId3"/>
     <p:sldId id="259" r:id="rId4"/>
     <p:sldId id="260" r:id="rId5"/>
+    <p:sldId id="263" r:id="rId6"/>
+    <p:sldId id="264" r:id="rId7"/>
+    <p:sldId id="265" r:id="rId8"/>
+    <p:sldId id="266" r:id="rId9"/>
+    <p:sldId id="267" r:id="rId10"/>
   </p:sldIdLst>
   <p:sldSz cx="12192000" cy="6858000"/>
   <p:notesSz cx="6858000" cy="9144000"/>
@@ -200,7 +205,7 @@
           <a:p>
             <a:fld id="{5C1E4601-79B1-425F-B925-3F7BE382BF19}" type="datetimeFigureOut">
               <a:rPr lang="zh-CN" altLang="en-US" smtClean="0"/>
-              <a:t>2026/02/05</a:t>
+              <a:t>2026/03/02</a:t>
             </a:fld>
             <a:endParaRPr lang="zh-CN" altLang="en-US"/>
           </a:p>
@@ -698,7 +703,7 @@
           <a:p>
             <a:fld id="{5D2E9D4A-569D-49DD-9DBB-BF425DFB68D5}" type="datetimeFigureOut">
               <a:rPr lang="zh-CN" altLang="en-US" smtClean="0"/>
-              <a:t>2026/02/05</a:t>
+              <a:t>2026/03/02</a:t>
             </a:fld>
             <a:endParaRPr lang="zh-CN" altLang="en-US"/>
           </a:p>
@@ -896,7 +901,7 @@
           <a:p>
             <a:fld id="{5D2E9D4A-569D-49DD-9DBB-BF425DFB68D5}" type="datetimeFigureOut">
               <a:rPr lang="zh-CN" altLang="en-US" smtClean="0"/>
-              <a:t>2026/02/05</a:t>
+              <a:t>2026/03/02</a:t>
             </a:fld>
             <a:endParaRPr lang="zh-CN" altLang="en-US"/>
           </a:p>
@@ -1104,7 +1109,7 @@
           <a:p>
             <a:fld id="{5D2E9D4A-569D-49DD-9DBB-BF425DFB68D5}" type="datetimeFigureOut">
               <a:rPr lang="zh-CN" altLang="en-US" smtClean="0"/>
-              <a:t>2026/02/05</a:t>
+              <a:t>2026/03/02</a:t>
             </a:fld>
             <a:endParaRPr lang="zh-CN" altLang="en-US"/>
           </a:p>
@@ -1302,7 +1307,7 @@
           <a:p>
             <a:fld id="{5D2E9D4A-569D-49DD-9DBB-BF425DFB68D5}" type="datetimeFigureOut">
               <a:rPr lang="zh-CN" altLang="en-US" smtClean="0"/>
-              <a:t>2026/02/05</a:t>
+              <a:t>2026/03/02</a:t>
             </a:fld>
             <a:endParaRPr lang="zh-CN" altLang="en-US"/>
           </a:p>
@@ -1577,7 +1582,7 @@
           <a:p>
             <a:fld id="{5D2E9D4A-569D-49DD-9DBB-BF425DFB68D5}" type="datetimeFigureOut">
               <a:rPr lang="zh-CN" altLang="en-US" smtClean="0"/>
-              <a:t>2026/02/05</a:t>
+              <a:t>2026/03/02</a:t>
             </a:fld>
             <a:endParaRPr lang="zh-CN" altLang="en-US"/>
           </a:p>
@@ -1842,7 +1847,7 @@
           <a:p>
             <a:fld id="{5D2E9D4A-569D-49DD-9DBB-BF425DFB68D5}" type="datetimeFigureOut">
               <a:rPr lang="zh-CN" altLang="en-US" smtClean="0"/>
-              <a:t>2026/02/05</a:t>
+              <a:t>2026/03/02</a:t>
             </a:fld>
             <a:endParaRPr lang="zh-CN" altLang="en-US"/>
           </a:p>
@@ -2254,7 +2259,7 @@
           <a:p>
             <a:fld id="{5D2E9D4A-569D-49DD-9DBB-BF425DFB68D5}" type="datetimeFigureOut">
               <a:rPr lang="zh-CN" altLang="en-US" smtClean="0"/>
-              <a:t>2026/02/05</a:t>
+              <a:t>2026/03/02</a:t>
             </a:fld>
             <a:endParaRPr lang="zh-CN" altLang="en-US"/>
           </a:p>
@@ -2395,7 +2400,7 @@
           <a:p>
             <a:fld id="{5D2E9D4A-569D-49DD-9DBB-BF425DFB68D5}" type="datetimeFigureOut">
               <a:rPr lang="zh-CN" altLang="en-US" smtClean="0"/>
-              <a:t>2026/02/05</a:t>
+              <a:t>2026/03/02</a:t>
             </a:fld>
             <a:endParaRPr lang="zh-CN" altLang="en-US"/>
           </a:p>
@@ -2508,7 +2513,7 @@
           <a:p>
             <a:fld id="{5D2E9D4A-569D-49DD-9DBB-BF425DFB68D5}" type="datetimeFigureOut">
               <a:rPr lang="zh-CN" altLang="en-US" smtClean="0"/>
-              <a:t>2026/02/05</a:t>
+              <a:t>2026/03/02</a:t>
             </a:fld>
             <a:endParaRPr lang="zh-CN" altLang="en-US"/>
           </a:p>
@@ -2819,7 +2824,7 @@
           <a:p>
             <a:fld id="{5D2E9D4A-569D-49DD-9DBB-BF425DFB68D5}" type="datetimeFigureOut">
               <a:rPr lang="zh-CN" altLang="en-US" smtClean="0"/>
-              <a:t>2026/02/05</a:t>
+              <a:t>2026/03/02</a:t>
             </a:fld>
             <a:endParaRPr lang="zh-CN" altLang="en-US"/>
           </a:p>
@@ -3107,7 +3112,7 @@
           <a:p>
             <a:fld id="{5D2E9D4A-569D-49DD-9DBB-BF425DFB68D5}" type="datetimeFigureOut">
               <a:rPr lang="zh-CN" altLang="en-US" smtClean="0"/>
-              <a:t>2026/02/05</a:t>
+              <a:t>2026/03/02</a:t>
             </a:fld>
             <a:endParaRPr lang="zh-CN" altLang="en-US"/>
           </a:p>
@@ -3348,7 +3353,7 @@
           <a:p>
             <a:fld id="{5D2E9D4A-569D-49DD-9DBB-BF425DFB68D5}" type="datetimeFigureOut">
               <a:rPr lang="zh-CN" altLang="en-US" smtClean="0"/>
-              <a:t>2026/02/05</a:t>
+              <a:t>2026/03/02</a:t>
             </a:fld>
             <a:endParaRPr lang="zh-CN" altLang="en-US"/>
           </a:p>
@@ -11660,8 +11665,8 @@
             </a:p>
           </p:txBody>
         </p:sp>
-        <mc:AlternateContent xmlns:mc="http://schemas.openxmlformats.org/markup-compatibility/2006" xmlns:a14="http://schemas.microsoft.com/office/drawing/2010/main">
-          <mc:Choice Requires="a14">
+        <mc:AlternateContent xmlns:mc="http://schemas.openxmlformats.org/markup-compatibility/2006">
+          <mc:Choice xmlns:a14="http://schemas.microsoft.com/office/drawing/2010/main" Requires="a14">
             <p:sp>
               <p:nvSpPr>
                 <p:cNvPr id="3" name="文本框 2">
@@ -11701,7 +11706,7 @@
                       <a:latin typeface="Times New Roman" panose="02020603050405020304" pitchFamily="18" charset="0"/>
                       <a:ea typeface="宋体" panose="02010600030101010101" pitchFamily="2" charset="-122"/>
                     </a:rPr>
-                    <a:t>三位混合参数空间分解</a:t>
+                    <a:t>三维混合参数空间分解</a:t>
                   </a:r>
                   <a:endParaRPr lang="en-US" altLang="zh-CN" sz="1400" dirty="0">
                     <a:latin typeface="Times New Roman" panose="02020603050405020304" pitchFamily="18" charset="0"/>
@@ -11744,7 +11749,7 @@
               </p:txBody>
             </p:sp>
           </mc:Choice>
-          <mc:Fallback xmlns="">
+          <mc:Fallback>
             <p:sp>
               <p:nvSpPr>
                 <p:cNvPr id="3" name="文本框 2">
@@ -13303,6 +13308,8660 @@
 </p:sld>
 </file>
 
+<file path=ppt/slides/slide5.xml><?xml version="1.0" encoding="utf-8"?>
+<p:sld xmlns:a="http://schemas.openxmlformats.org/drawingml/2006/main" xmlns:r="http://schemas.openxmlformats.org/officeDocument/2006/relationships" xmlns:p="http://schemas.openxmlformats.org/presentationml/2006/main">
+  <p:cSld>
+    <p:spTree>
+      <p:nvGrpSpPr>
+        <p:cNvPr id="1" name=""/>
+        <p:cNvGrpSpPr/>
+        <p:nvPr/>
+      </p:nvGrpSpPr>
+      <p:grpSpPr>
+        <a:xfrm>
+          <a:off x="0" y="0"/>
+          <a:ext cx="0" cy="0"/>
+          <a:chOff x="0" y="0"/>
+          <a:chExt cx="0" cy="0"/>
+        </a:xfrm>
+      </p:grpSpPr>
+      <p:grpSp>
+        <p:nvGrpSpPr>
+          <p:cNvPr id="8" name="组合 7">
+            <a:extLst>
+              <a:ext uri="{FF2B5EF4-FFF2-40B4-BE49-F238E27FC236}">
+                <a16:creationId xmlns:a16="http://schemas.microsoft.com/office/drawing/2014/main" id="{EF176E4A-D12B-6F57-670C-9D04B3712B49}"/>
+              </a:ext>
+            </a:extLst>
+          </p:cNvPr>
+          <p:cNvGrpSpPr/>
+          <p:nvPr/>
+        </p:nvGrpSpPr>
+        <p:grpSpPr>
+          <a:xfrm>
+            <a:off x="1290015" y="941692"/>
+            <a:ext cx="9939960" cy="4840842"/>
+            <a:chOff x="1102290" y="1189973"/>
+            <a:chExt cx="9939960" cy="4840842"/>
+          </a:xfrm>
+        </p:grpSpPr>
+        <p:grpSp>
+          <p:nvGrpSpPr>
+            <p:cNvPr id="53" name="组合 52">
+              <a:extLst>
+                <a:ext uri="{FF2B5EF4-FFF2-40B4-BE49-F238E27FC236}">
+                  <a16:creationId xmlns:a16="http://schemas.microsoft.com/office/drawing/2014/main" id="{4CE5A9EA-CE06-C7A5-9A2D-CB5BC38B3E56}"/>
+                </a:ext>
+              </a:extLst>
+            </p:cNvPr>
+            <p:cNvGrpSpPr/>
+            <p:nvPr/>
+          </p:nvGrpSpPr>
+          <p:grpSpPr>
+            <a:xfrm>
+              <a:off x="1102290" y="1189973"/>
+              <a:ext cx="4452586" cy="4288931"/>
+              <a:chOff x="1102290" y="1189973"/>
+              <a:chExt cx="4452586" cy="4288931"/>
+            </a:xfrm>
+          </p:grpSpPr>
+          <p:sp>
+            <p:nvSpPr>
+              <p:cNvPr id="2" name="矩形 1">
+                <a:extLst>
+                  <a:ext uri="{FF2B5EF4-FFF2-40B4-BE49-F238E27FC236}">
+                    <a16:creationId xmlns:a16="http://schemas.microsoft.com/office/drawing/2014/main" id="{081984B5-1984-313B-9424-3CAF9731773A}"/>
+                  </a:ext>
+                </a:extLst>
+              </p:cNvPr>
+              <p:cNvSpPr/>
+              <p:nvPr/>
+            </p:nvSpPr>
+            <p:spPr>
+              <a:xfrm>
+                <a:off x="1102290" y="1189973"/>
+                <a:ext cx="1052187" cy="688931"/>
+              </a:xfrm>
+              <a:prstGeom prst="rect">
+                <a:avLst/>
+              </a:prstGeom>
+              <a:noFill/>
+              <a:ln w="15875">
+                <a:solidFill>
+                  <a:schemeClr val="tx1"/>
+                </a:solidFill>
+              </a:ln>
+            </p:spPr>
+            <p:style>
+              <a:lnRef idx="2">
+                <a:schemeClr val="accent1">
+                  <a:shade val="50000"/>
+                </a:schemeClr>
+              </a:lnRef>
+              <a:fillRef idx="1">
+                <a:schemeClr val="accent1"/>
+              </a:fillRef>
+              <a:effectRef idx="0">
+                <a:schemeClr val="accent1"/>
+              </a:effectRef>
+              <a:fontRef idx="minor">
+                <a:schemeClr val="lt1"/>
+              </a:fontRef>
+            </p:style>
+            <p:txBody>
+              <a:bodyPr rtlCol="0" anchor="ctr"/>
+              <a:lstStyle/>
+              <a:p>
+                <a:pPr algn="ctr"/>
+                <a:r>
+                  <a:rPr lang="zh-CN" altLang="en-US" dirty="0">
+                    <a:solidFill>
+                      <a:schemeClr val="tx1"/>
+                    </a:solidFill>
+                    <a:latin typeface="Times New Roman" panose="02020603050405020304" pitchFamily="18" charset="0"/>
+                    <a:ea typeface="宋体" panose="02010600030101010101" pitchFamily="2" charset="-122"/>
+                  </a:rPr>
+                  <a:t>终端</a:t>
+                </a:r>
+              </a:p>
+            </p:txBody>
+          </p:sp>
+          <p:sp>
+            <p:nvSpPr>
+              <p:cNvPr id="3" name="矩形 2">
+                <a:extLst>
+                  <a:ext uri="{FF2B5EF4-FFF2-40B4-BE49-F238E27FC236}">
+                    <a16:creationId xmlns:a16="http://schemas.microsoft.com/office/drawing/2014/main" id="{09D08743-8186-2B7D-A8DD-F2E852763B3A}"/>
+                  </a:ext>
+                </a:extLst>
+              </p:cNvPr>
+              <p:cNvSpPr/>
+              <p:nvPr/>
+            </p:nvSpPr>
+            <p:spPr>
+              <a:xfrm>
+                <a:off x="4502689" y="1189973"/>
+                <a:ext cx="1052187" cy="688931"/>
+              </a:xfrm>
+              <a:prstGeom prst="rect">
+                <a:avLst/>
+              </a:prstGeom>
+              <a:noFill/>
+              <a:ln w="15875">
+                <a:solidFill>
+                  <a:schemeClr val="tx1"/>
+                </a:solidFill>
+              </a:ln>
+            </p:spPr>
+            <p:style>
+              <a:lnRef idx="2">
+                <a:schemeClr val="accent1">
+                  <a:shade val="50000"/>
+                </a:schemeClr>
+              </a:lnRef>
+              <a:fillRef idx="1">
+                <a:schemeClr val="accent1"/>
+              </a:fillRef>
+              <a:effectRef idx="0">
+                <a:schemeClr val="accent1"/>
+              </a:effectRef>
+              <a:fontRef idx="minor">
+                <a:schemeClr val="lt1"/>
+              </a:fontRef>
+            </p:style>
+            <p:txBody>
+              <a:bodyPr rtlCol="0" anchor="ctr"/>
+              <a:lstStyle/>
+              <a:p>
+                <a:pPr algn="ctr"/>
+                <a:r>
+                  <a:rPr lang="zh-CN" altLang="en-US" dirty="0">
+                    <a:solidFill>
+                      <a:schemeClr val="tx1"/>
+                    </a:solidFill>
+                    <a:latin typeface="Times New Roman" panose="02020603050405020304" pitchFamily="18" charset="0"/>
+                    <a:ea typeface="宋体" panose="02010600030101010101" pitchFamily="2" charset="-122"/>
+                  </a:rPr>
+                  <a:t>基站</a:t>
+                </a:r>
+              </a:p>
+            </p:txBody>
+          </p:sp>
+          <p:cxnSp>
+            <p:nvCxnSpPr>
+              <p:cNvPr id="5" name="直接箭头连接符 4">
+                <a:extLst>
+                  <a:ext uri="{FF2B5EF4-FFF2-40B4-BE49-F238E27FC236}">
+                    <a16:creationId xmlns:a16="http://schemas.microsoft.com/office/drawing/2014/main" id="{17136C98-1C3B-1865-27D4-F67328B5A397}"/>
+                  </a:ext>
+                </a:extLst>
+              </p:cNvPr>
+              <p:cNvCxnSpPr>
+                <a:stCxn id="2" idx="2"/>
+              </p:cNvCxnSpPr>
+              <p:nvPr/>
+            </p:nvCxnSpPr>
+            <p:spPr>
+              <a:xfrm flipH="1">
+                <a:off x="1628383" y="1878904"/>
+                <a:ext cx="1" cy="3600000"/>
+              </a:xfrm>
+              <a:prstGeom prst="straightConnector1">
+                <a:avLst/>
+              </a:prstGeom>
+              <a:ln w="15875">
+                <a:solidFill>
+                  <a:schemeClr val="tx1"/>
+                </a:solidFill>
+                <a:tailEnd type="none"/>
+              </a:ln>
+            </p:spPr>
+            <p:style>
+              <a:lnRef idx="1">
+                <a:schemeClr val="accent1"/>
+              </a:lnRef>
+              <a:fillRef idx="0">
+                <a:schemeClr val="accent1"/>
+              </a:fillRef>
+              <a:effectRef idx="0">
+                <a:schemeClr val="accent1"/>
+              </a:effectRef>
+              <a:fontRef idx="minor">
+                <a:schemeClr val="tx1"/>
+              </a:fontRef>
+            </p:style>
+          </p:cxnSp>
+          <p:cxnSp>
+            <p:nvCxnSpPr>
+              <p:cNvPr id="9" name="直接箭头连接符 8">
+                <a:extLst>
+                  <a:ext uri="{FF2B5EF4-FFF2-40B4-BE49-F238E27FC236}">
+                    <a16:creationId xmlns:a16="http://schemas.microsoft.com/office/drawing/2014/main" id="{DC57C7FE-5E56-309A-8219-10C41B83C94B}"/>
+                  </a:ext>
+                </a:extLst>
+              </p:cNvPr>
+              <p:cNvCxnSpPr>
+                <a:stCxn id="3" idx="2"/>
+              </p:cNvCxnSpPr>
+              <p:nvPr/>
+            </p:nvCxnSpPr>
+            <p:spPr>
+              <a:xfrm>
+                <a:off x="5028783" y="1878904"/>
+                <a:ext cx="35490" cy="3600000"/>
+              </a:xfrm>
+              <a:prstGeom prst="straightConnector1">
+                <a:avLst/>
+              </a:prstGeom>
+              <a:ln w="15875">
+                <a:solidFill>
+                  <a:schemeClr val="tx1"/>
+                </a:solidFill>
+                <a:tailEnd type="none"/>
+              </a:ln>
+            </p:spPr>
+            <p:style>
+              <a:lnRef idx="1">
+                <a:schemeClr val="accent1"/>
+              </a:lnRef>
+              <a:fillRef idx="0">
+                <a:schemeClr val="accent1"/>
+              </a:fillRef>
+              <a:effectRef idx="0">
+                <a:schemeClr val="accent1"/>
+              </a:effectRef>
+              <a:fontRef idx="minor">
+                <a:schemeClr val="tx1"/>
+              </a:fontRef>
+            </p:style>
+          </p:cxnSp>
+          <p:cxnSp>
+            <p:nvCxnSpPr>
+              <p:cNvPr id="14" name="直接箭头连接符 13">
+                <a:extLst>
+                  <a:ext uri="{FF2B5EF4-FFF2-40B4-BE49-F238E27FC236}">
+                    <a16:creationId xmlns:a16="http://schemas.microsoft.com/office/drawing/2014/main" id="{0BC37A36-AC0D-1737-F772-D5E608986AE9}"/>
+                  </a:ext>
+                </a:extLst>
+              </p:cNvPr>
+              <p:cNvCxnSpPr>
+                <a:cxnSpLocks/>
+              </p:cNvCxnSpPr>
+              <p:nvPr/>
+            </p:nvCxnSpPr>
+            <p:spPr>
+              <a:xfrm>
+                <a:off x="1628383" y="2499360"/>
+                <a:ext cx="3400399" cy="0"/>
+              </a:xfrm>
+              <a:prstGeom prst="straightConnector1">
+                <a:avLst/>
+              </a:prstGeom>
+              <a:ln w="15875">
+                <a:solidFill>
+                  <a:schemeClr val="tx1"/>
+                </a:solidFill>
+                <a:tailEnd type="triangle"/>
+              </a:ln>
+            </p:spPr>
+            <p:style>
+              <a:lnRef idx="1">
+                <a:schemeClr val="accent1"/>
+              </a:lnRef>
+              <a:fillRef idx="0">
+                <a:schemeClr val="accent1"/>
+              </a:fillRef>
+              <a:effectRef idx="0">
+                <a:schemeClr val="accent1"/>
+              </a:effectRef>
+              <a:fontRef idx="minor">
+                <a:schemeClr val="tx1"/>
+              </a:fontRef>
+            </p:style>
+          </p:cxnSp>
+          <p:cxnSp>
+            <p:nvCxnSpPr>
+              <p:cNvPr id="15" name="直接箭头连接符 14">
+                <a:extLst>
+                  <a:ext uri="{FF2B5EF4-FFF2-40B4-BE49-F238E27FC236}">
+                    <a16:creationId xmlns:a16="http://schemas.microsoft.com/office/drawing/2014/main" id="{E22D7F04-9410-9648-A668-BBB878CA769D}"/>
+                  </a:ext>
+                </a:extLst>
+              </p:cNvPr>
+              <p:cNvCxnSpPr>
+                <a:cxnSpLocks/>
+              </p:cNvCxnSpPr>
+              <p:nvPr/>
+            </p:nvCxnSpPr>
+            <p:spPr>
+              <a:xfrm>
+                <a:off x="1628382" y="4236720"/>
+                <a:ext cx="3435891" cy="0"/>
+              </a:xfrm>
+              <a:prstGeom prst="straightConnector1">
+                <a:avLst/>
+              </a:prstGeom>
+              <a:ln w="15875">
+                <a:solidFill>
+                  <a:schemeClr val="tx1"/>
+                </a:solidFill>
+                <a:tailEnd type="triangle"/>
+              </a:ln>
+            </p:spPr>
+            <p:style>
+              <a:lnRef idx="1">
+                <a:schemeClr val="accent1"/>
+              </a:lnRef>
+              <a:fillRef idx="0">
+                <a:schemeClr val="accent1"/>
+              </a:fillRef>
+              <a:effectRef idx="0">
+                <a:schemeClr val="accent1"/>
+              </a:effectRef>
+              <a:fontRef idx="minor">
+                <a:schemeClr val="tx1"/>
+              </a:fontRef>
+            </p:style>
+          </p:cxnSp>
+          <p:cxnSp>
+            <p:nvCxnSpPr>
+              <p:cNvPr id="17" name="直接箭头连接符 16">
+                <a:extLst>
+                  <a:ext uri="{FF2B5EF4-FFF2-40B4-BE49-F238E27FC236}">
+                    <a16:creationId xmlns:a16="http://schemas.microsoft.com/office/drawing/2014/main" id="{DA21A69A-EBA6-0CDF-C318-60BC2F1FB540}"/>
+                  </a:ext>
+                </a:extLst>
+              </p:cNvPr>
+              <p:cNvCxnSpPr>
+                <a:cxnSpLocks/>
+              </p:cNvCxnSpPr>
+              <p:nvPr/>
+            </p:nvCxnSpPr>
+            <p:spPr>
+              <a:xfrm flipH="1">
+                <a:off x="1628382" y="3322320"/>
+                <a:ext cx="3418146" cy="0"/>
+              </a:xfrm>
+              <a:prstGeom prst="straightConnector1">
+                <a:avLst/>
+              </a:prstGeom>
+              <a:ln w="15875">
+                <a:solidFill>
+                  <a:schemeClr val="tx1"/>
+                </a:solidFill>
+                <a:tailEnd type="triangle"/>
+              </a:ln>
+            </p:spPr>
+            <p:style>
+              <a:lnRef idx="1">
+                <a:schemeClr val="accent1"/>
+              </a:lnRef>
+              <a:fillRef idx="0">
+                <a:schemeClr val="accent1"/>
+              </a:fillRef>
+              <a:effectRef idx="0">
+                <a:schemeClr val="accent1"/>
+              </a:effectRef>
+              <a:fontRef idx="minor">
+                <a:schemeClr val="tx1"/>
+              </a:fontRef>
+            </p:style>
+          </p:cxnSp>
+          <p:cxnSp>
+            <p:nvCxnSpPr>
+              <p:cNvPr id="18" name="直接箭头连接符 17">
+                <a:extLst>
+                  <a:ext uri="{FF2B5EF4-FFF2-40B4-BE49-F238E27FC236}">
+                    <a16:creationId xmlns:a16="http://schemas.microsoft.com/office/drawing/2014/main" id="{71154223-CD89-A27C-7652-475411DBBB72}"/>
+                  </a:ext>
+                </a:extLst>
+              </p:cNvPr>
+              <p:cNvCxnSpPr>
+                <a:cxnSpLocks/>
+              </p:cNvCxnSpPr>
+              <p:nvPr/>
+            </p:nvCxnSpPr>
+            <p:spPr>
+              <a:xfrm flipH="1">
+                <a:off x="1610635" y="5120640"/>
+                <a:ext cx="3453638" cy="0"/>
+              </a:xfrm>
+              <a:prstGeom prst="straightConnector1">
+                <a:avLst/>
+              </a:prstGeom>
+              <a:ln w="15875">
+                <a:solidFill>
+                  <a:schemeClr val="tx1"/>
+                </a:solidFill>
+                <a:tailEnd type="triangle"/>
+              </a:ln>
+            </p:spPr>
+            <p:style>
+              <a:lnRef idx="1">
+                <a:schemeClr val="accent1"/>
+              </a:lnRef>
+              <a:fillRef idx="0">
+                <a:schemeClr val="accent1"/>
+              </a:fillRef>
+              <a:effectRef idx="0">
+                <a:schemeClr val="accent1"/>
+              </a:effectRef>
+              <a:fontRef idx="minor">
+                <a:schemeClr val="tx1"/>
+              </a:fontRef>
+            </p:style>
+          </p:cxnSp>
+          <p:sp>
+            <p:nvSpPr>
+              <p:cNvPr id="19" name="文本框 18">
+                <a:extLst>
+                  <a:ext uri="{FF2B5EF4-FFF2-40B4-BE49-F238E27FC236}">
+                    <a16:creationId xmlns:a16="http://schemas.microsoft.com/office/drawing/2014/main" id="{D976A72B-6B39-A0FC-EC75-C1BD6134B09A}"/>
+                  </a:ext>
+                </a:extLst>
+              </p:cNvPr>
+              <p:cNvSpPr txBox="1"/>
+              <p:nvPr/>
+            </p:nvSpPr>
+            <p:spPr>
+              <a:xfrm>
+                <a:off x="2283148" y="2127943"/>
+                <a:ext cx="2117941" cy="369332"/>
+              </a:xfrm>
+              <a:prstGeom prst="rect">
+                <a:avLst/>
+              </a:prstGeom>
+              <a:noFill/>
+              <a:ln w="15875">
+                <a:noFill/>
+              </a:ln>
+            </p:spPr>
+            <p:txBody>
+              <a:bodyPr wrap="square" rtlCol="0" anchor="ctr" anchorCtr="1">
+                <a:spAutoFit/>
+              </a:bodyPr>
+              <a:lstStyle/>
+              <a:p>
+                <a:r>
+                  <a:rPr lang="en-US" altLang="zh-CN" dirty="0">
+                    <a:latin typeface="Times New Roman" panose="02020603050405020304" pitchFamily="18" charset="0"/>
+                    <a:ea typeface="宋体" panose="02010600030101010101" pitchFamily="2" charset="-122"/>
+                  </a:rPr>
+                  <a:t>Msg1</a:t>
+                </a:r>
+                <a:r>
+                  <a:rPr lang="zh-CN" altLang="en-US" dirty="0">
+                    <a:latin typeface="Times New Roman" panose="02020603050405020304" pitchFamily="18" charset="0"/>
+                    <a:ea typeface="宋体" panose="02010600030101010101" pitchFamily="2" charset="-122"/>
+                  </a:rPr>
+                  <a:t>：前导序列</a:t>
+                </a:r>
+              </a:p>
+            </p:txBody>
+          </p:sp>
+          <p:sp>
+            <p:nvSpPr>
+              <p:cNvPr id="21" name="文本框 20">
+                <a:extLst>
+                  <a:ext uri="{FF2B5EF4-FFF2-40B4-BE49-F238E27FC236}">
+                    <a16:creationId xmlns:a16="http://schemas.microsoft.com/office/drawing/2014/main" id="{A779A4C8-BF8F-36E5-7807-FD323DF7D762}"/>
+                  </a:ext>
+                </a:extLst>
+              </p:cNvPr>
+              <p:cNvSpPr txBox="1"/>
+              <p:nvPr/>
+            </p:nvSpPr>
+            <p:spPr>
+              <a:xfrm>
+                <a:off x="1909558" y="3003094"/>
+                <a:ext cx="2865120" cy="369332"/>
+              </a:xfrm>
+              <a:prstGeom prst="rect">
+                <a:avLst/>
+              </a:prstGeom>
+              <a:noFill/>
+              <a:ln w="15875">
+                <a:noFill/>
+              </a:ln>
+            </p:spPr>
+            <p:txBody>
+              <a:bodyPr wrap="square" rtlCol="0" anchor="ctr" anchorCtr="1">
+                <a:spAutoFit/>
+              </a:bodyPr>
+              <a:lstStyle/>
+              <a:p>
+                <a:r>
+                  <a:rPr lang="en-US" altLang="zh-CN" dirty="0">
+                    <a:latin typeface="Times New Roman" panose="02020603050405020304" pitchFamily="18" charset="0"/>
+                    <a:ea typeface="宋体" panose="02010600030101010101" pitchFamily="2" charset="-122"/>
+                  </a:rPr>
+                  <a:t>Msg2</a:t>
+                </a:r>
+                <a:r>
+                  <a:rPr lang="zh-CN" altLang="en-US" dirty="0">
+                    <a:latin typeface="Times New Roman" panose="02020603050405020304" pitchFamily="18" charset="0"/>
+                    <a:ea typeface="宋体" panose="02010600030101010101" pitchFamily="2" charset="-122"/>
+                  </a:rPr>
+                  <a:t>：随机接入响应报文</a:t>
+                </a:r>
+              </a:p>
+            </p:txBody>
+          </p:sp>
+          <p:sp>
+            <p:nvSpPr>
+              <p:cNvPr id="22" name="文本框 21">
+                <a:extLst>
+                  <a:ext uri="{FF2B5EF4-FFF2-40B4-BE49-F238E27FC236}">
+                    <a16:creationId xmlns:a16="http://schemas.microsoft.com/office/drawing/2014/main" id="{FDB78DD2-FDAB-24EE-A485-45CCA9CB0890}"/>
+                  </a:ext>
+                </a:extLst>
+              </p:cNvPr>
+              <p:cNvSpPr txBox="1"/>
+              <p:nvPr/>
+            </p:nvSpPr>
+            <p:spPr>
+              <a:xfrm>
+                <a:off x="1675843" y="3878245"/>
+                <a:ext cx="3332550" cy="369332"/>
+              </a:xfrm>
+              <a:prstGeom prst="rect">
+                <a:avLst/>
+              </a:prstGeom>
+              <a:noFill/>
+              <a:ln w="15875">
+                <a:noFill/>
+              </a:ln>
+            </p:spPr>
+            <p:txBody>
+              <a:bodyPr wrap="square" rtlCol="0" anchor="ctr" anchorCtr="1">
+                <a:spAutoFit/>
+              </a:bodyPr>
+              <a:lstStyle/>
+              <a:p>
+                <a:r>
+                  <a:rPr lang="en-US" altLang="zh-CN" dirty="0">
+                    <a:latin typeface="Times New Roman" panose="02020603050405020304" pitchFamily="18" charset="0"/>
+                    <a:ea typeface="宋体" panose="02010600030101010101" pitchFamily="2" charset="-122"/>
+                  </a:rPr>
+                  <a:t>Msg3</a:t>
+                </a:r>
+                <a:r>
+                  <a:rPr lang="zh-CN" altLang="en-US" dirty="0">
+                    <a:latin typeface="Times New Roman" panose="02020603050405020304" pitchFamily="18" charset="0"/>
+                    <a:ea typeface="宋体" panose="02010600030101010101" pitchFamily="2" charset="-122"/>
+                  </a:rPr>
+                  <a:t>：短数据报文</a:t>
+                </a:r>
+              </a:p>
+            </p:txBody>
+          </p:sp>
+          <p:sp>
+            <p:nvSpPr>
+              <p:cNvPr id="23" name="文本框 22">
+                <a:extLst>
+                  <a:ext uri="{FF2B5EF4-FFF2-40B4-BE49-F238E27FC236}">
+                    <a16:creationId xmlns:a16="http://schemas.microsoft.com/office/drawing/2014/main" id="{83960ED7-47B6-ED66-C559-176F06B5535D}"/>
+                  </a:ext>
+                </a:extLst>
+              </p:cNvPr>
+              <p:cNvSpPr txBox="1"/>
+              <p:nvPr/>
+            </p:nvSpPr>
+            <p:spPr>
+              <a:xfrm>
+                <a:off x="1962846" y="4753395"/>
+                <a:ext cx="2758544" cy="369332"/>
+              </a:xfrm>
+              <a:prstGeom prst="rect">
+                <a:avLst/>
+              </a:prstGeom>
+              <a:noFill/>
+              <a:ln w="15875">
+                <a:noFill/>
+              </a:ln>
+            </p:spPr>
+            <p:txBody>
+              <a:bodyPr wrap="square" rtlCol="0" anchor="ctr" anchorCtr="1">
+                <a:spAutoFit/>
+              </a:bodyPr>
+              <a:lstStyle/>
+              <a:p>
+                <a:r>
+                  <a:rPr lang="en-US" altLang="zh-CN" dirty="0">
+                    <a:latin typeface="Times New Roman" panose="02020603050405020304" pitchFamily="18" charset="0"/>
+                    <a:ea typeface="宋体" panose="02010600030101010101" pitchFamily="2" charset="-122"/>
+                  </a:rPr>
+                  <a:t>Msg4</a:t>
+                </a:r>
+                <a:r>
+                  <a:rPr lang="zh-CN" altLang="en-US" dirty="0">
+                    <a:latin typeface="Times New Roman" panose="02020603050405020304" pitchFamily="18" charset="0"/>
+                    <a:ea typeface="宋体" panose="02010600030101010101" pitchFamily="2" charset="-122"/>
+                  </a:rPr>
+                  <a:t>：确认答复报文</a:t>
+                </a:r>
+              </a:p>
+            </p:txBody>
+          </p:sp>
+        </p:grpSp>
+        <p:sp>
+          <p:nvSpPr>
+            <p:cNvPr id="34" name="矩形 33">
+              <a:extLst>
+                <a:ext uri="{FF2B5EF4-FFF2-40B4-BE49-F238E27FC236}">
+                  <a16:creationId xmlns:a16="http://schemas.microsoft.com/office/drawing/2014/main" id="{30406AED-C2E2-C582-C3D0-D383BF1C0C46}"/>
+                </a:ext>
+              </a:extLst>
+            </p:cNvPr>
+            <p:cNvSpPr/>
+            <p:nvPr/>
+          </p:nvSpPr>
+          <p:spPr>
+            <a:xfrm>
+              <a:off x="6589664" y="1189973"/>
+              <a:ext cx="1052187" cy="688931"/>
+            </a:xfrm>
+            <a:prstGeom prst="rect">
+              <a:avLst/>
+            </a:prstGeom>
+            <a:noFill/>
+            <a:ln w="15875">
+              <a:solidFill>
+                <a:schemeClr val="tx1"/>
+              </a:solidFill>
+            </a:ln>
+          </p:spPr>
+          <p:style>
+            <a:lnRef idx="2">
+              <a:schemeClr val="accent1">
+                <a:shade val="50000"/>
+              </a:schemeClr>
+            </a:lnRef>
+            <a:fillRef idx="1">
+              <a:schemeClr val="accent1"/>
+            </a:fillRef>
+            <a:effectRef idx="0">
+              <a:schemeClr val="accent1"/>
+            </a:effectRef>
+            <a:fontRef idx="minor">
+              <a:schemeClr val="lt1"/>
+            </a:fontRef>
+          </p:style>
+          <p:txBody>
+            <a:bodyPr rtlCol="0" anchor="ctr"/>
+            <a:lstStyle/>
+            <a:p>
+              <a:pPr algn="ctr"/>
+              <a:r>
+                <a:rPr lang="zh-CN" altLang="en-US" dirty="0">
+                  <a:solidFill>
+                    <a:schemeClr val="tx1"/>
+                  </a:solidFill>
+                  <a:latin typeface="Times New Roman" panose="02020603050405020304" pitchFamily="18" charset="0"/>
+                  <a:ea typeface="宋体" panose="02010600030101010101" pitchFamily="2" charset="-122"/>
+                </a:rPr>
+                <a:t>终端</a:t>
+              </a:r>
+            </a:p>
+          </p:txBody>
+        </p:sp>
+        <p:sp>
+          <p:nvSpPr>
+            <p:cNvPr id="35" name="矩形 34">
+              <a:extLst>
+                <a:ext uri="{FF2B5EF4-FFF2-40B4-BE49-F238E27FC236}">
+                  <a16:creationId xmlns:a16="http://schemas.microsoft.com/office/drawing/2014/main" id="{D7F0F3AE-4AB1-4194-64AF-079573F6F6F8}"/>
+                </a:ext>
+              </a:extLst>
+            </p:cNvPr>
+            <p:cNvSpPr/>
+            <p:nvPr/>
+          </p:nvSpPr>
+          <p:spPr>
+            <a:xfrm>
+              <a:off x="9990063" y="1189973"/>
+              <a:ext cx="1052187" cy="688931"/>
+            </a:xfrm>
+            <a:prstGeom prst="rect">
+              <a:avLst/>
+            </a:prstGeom>
+            <a:noFill/>
+            <a:ln w="15875">
+              <a:solidFill>
+                <a:schemeClr val="tx1"/>
+              </a:solidFill>
+            </a:ln>
+          </p:spPr>
+          <p:style>
+            <a:lnRef idx="2">
+              <a:schemeClr val="accent1">
+                <a:shade val="50000"/>
+              </a:schemeClr>
+            </a:lnRef>
+            <a:fillRef idx="1">
+              <a:schemeClr val="accent1"/>
+            </a:fillRef>
+            <a:effectRef idx="0">
+              <a:schemeClr val="accent1"/>
+            </a:effectRef>
+            <a:fontRef idx="minor">
+              <a:schemeClr val="lt1"/>
+            </a:fontRef>
+          </p:style>
+          <p:txBody>
+            <a:bodyPr rtlCol="0" anchor="ctr"/>
+            <a:lstStyle/>
+            <a:p>
+              <a:pPr algn="ctr"/>
+              <a:r>
+                <a:rPr lang="zh-CN" altLang="en-US" dirty="0">
+                  <a:solidFill>
+                    <a:schemeClr val="tx1"/>
+                  </a:solidFill>
+                  <a:latin typeface="Times New Roman" panose="02020603050405020304" pitchFamily="18" charset="0"/>
+                  <a:ea typeface="宋体" panose="02010600030101010101" pitchFamily="2" charset="-122"/>
+                </a:rPr>
+                <a:t>基站</a:t>
+              </a:r>
+            </a:p>
+          </p:txBody>
+        </p:sp>
+        <p:cxnSp>
+          <p:nvCxnSpPr>
+            <p:cNvPr id="36" name="直接箭头连接符 35">
+              <a:extLst>
+                <a:ext uri="{FF2B5EF4-FFF2-40B4-BE49-F238E27FC236}">
+                  <a16:creationId xmlns:a16="http://schemas.microsoft.com/office/drawing/2014/main" id="{C526CF12-E7BF-F813-B90B-E8F59E7AB6D6}"/>
+                </a:ext>
+              </a:extLst>
+            </p:cNvPr>
+            <p:cNvCxnSpPr>
+              <a:stCxn id="34" idx="2"/>
+            </p:cNvCxnSpPr>
+            <p:nvPr/>
+          </p:nvCxnSpPr>
+          <p:spPr>
+            <a:xfrm flipH="1">
+              <a:off x="7115757" y="1878904"/>
+              <a:ext cx="1" cy="3600000"/>
+            </a:xfrm>
+            <a:prstGeom prst="straightConnector1">
+              <a:avLst/>
+            </a:prstGeom>
+            <a:ln w="15875">
+              <a:solidFill>
+                <a:schemeClr val="tx1"/>
+              </a:solidFill>
+              <a:tailEnd type="none"/>
+            </a:ln>
+          </p:spPr>
+          <p:style>
+            <a:lnRef idx="1">
+              <a:schemeClr val="accent1"/>
+            </a:lnRef>
+            <a:fillRef idx="0">
+              <a:schemeClr val="accent1"/>
+            </a:fillRef>
+            <a:effectRef idx="0">
+              <a:schemeClr val="accent1"/>
+            </a:effectRef>
+            <a:fontRef idx="minor">
+              <a:schemeClr val="tx1"/>
+            </a:fontRef>
+          </p:style>
+        </p:cxnSp>
+        <p:cxnSp>
+          <p:nvCxnSpPr>
+            <p:cNvPr id="37" name="直接箭头连接符 36">
+              <a:extLst>
+                <a:ext uri="{FF2B5EF4-FFF2-40B4-BE49-F238E27FC236}">
+                  <a16:creationId xmlns:a16="http://schemas.microsoft.com/office/drawing/2014/main" id="{52D0BE3B-F41D-313D-9D54-CCDFB8DA3F64}"/>
+                </a:ext>
+              </a:extLst>
+            </p:cNvPr>
+            <p:cNvCxnSpPr>
+              <a:stCxn id="35" idx="2"/>
+            </p:cNvCxnSpPr>
+            <p:nvPr/>
+          </p:nvCxnSpPr>
+          <p:spPr>
+            <a:xfrm>
+              <a:off x="10516157" y="1878904"/>
+              <a:ext cx="35490" cy="3600000"/>
+            </a:xfrm>
+            <a:prstGeom prst="straightConnector1">
+              <a:avLst/>
+            </a:prstGeom>
+            <a:ln w="15875">
+              <a:solidFill>
+                <a:schemeClr val="tx1"/>
+              </a:solidFill>
+              <a:tailEnd type="none"/>
+            </a:ln>
+          </p:spPr>
+          <p:style>
+            <a:lnRef idx="1">
+              <a:schemeClr val="accent1"/>
+            </a:lnRef>
+            <a:fillRef idx="0">
+              <a:schemeClr val="accent1"/>
+            </a:fillRef>
+            <a:effectRef idx="0">
+              <a:schemeClr val="accent1"/>
+            </a:effectRef>
+            <a:fontRef idx="minor">
+              <a:schemeClr val="tx1"/>
+            </a:fontRef>
+          </p:style>
+        </p:cxnSp>
+        <p:grpSp>
+          <p:nvGrpSpPr>
+            <p:cNvPr id="40" name="组合 39">
+              <a:extLst>
+                <a:ext uri="{FF2B5EF4-FFF2-40B4-BE49-F238E27FC236}">
+                  <a16:creationId xmlns:a16="http://schemas.microsoft.com/office/drawing/2014/main" id="{2BB71B87-58CB-7FCC-FFE8-E4594220A992}"/>
+                </a:ext>
+              </a:extLst>
+            </p:cNvPr>
+            <p:cNvGrpSpPr/>
+            <p:nvPr/>
+          </p:nvGrpSpPr>
+          <p:grpSpPr>
+            <a:xfrm>
+              <a:off x="7115756" y="3322320"/>
+              <a:ext cx="3418146" cy="822960"/>
+              <a:chOff x="7115756" y="3259756"/>
+              <a:chExt cx="3418146" cy="822960"/>
+            </a:xfrm>
+          </p:grpSpPr>
+          <p:cxnSp>
+            <p:nvCxnSpPr>
+              <p:cNvPr id="38" name="直接箭头连接符 37">
+                <a:extLst>
+                  <a:ext uri="{FF2B5EF4-FFF2-40B4-BE49-F238E27FC236}">
+                    <a16:creationId xmlns:a16="http://schemas.microsoft.com/office/drawing/2014/main" id="{B8D48B1D-848D-DDEA-FF2F-47AE8B708800}"/>
+                  </a:ext>
+                </a:extLst>
+              </p:cNvPr>
+              <p:cNvCxnSpPr>
+                <a:cxnSpLocks/>
+              </p:cNvCxnSpPr>
+              <p:nvPr/>
+            </p:nvCxnSpPr>
+            <p:spPr>
+              <a:xfrm>
+                <a:off x="7115757" y="3259756"/>
+                <a:ext cx="3400399" cy="0"/>
+              </a:xfrm>
+              <a:prstGeom prst="straightConnector1">
+                <a:avLst/>
+              </a:prstGeom>
+              <a:ln w="15875">
+                <a:solidFill>
+                  <a:schemeClr val="tx1"/>
+                </a:solidFill>
+                <a:tailEnd type="triangle"/>
+              </a:ln>
+            </p:spPr>
+            <p:style>
+              <a:lnRef idx="1">
+                <a:schemeClr val="accent1"/>
+              </a:lnRef>
+              <a:fillRef idx="0">
+                <a:schemeClr val="accent1"/>
+              </a:fillRef>
+              <a:effectRef idx="0">
+                <a:schemeClr val="accent1"/>
+              </a:effectRef>
+              <a:fontRef idx="minor">
+                <a:schemeClr val="tx1"/>
+              </a:fontRef>
+            </p:style>
+          </p:cxnSp>
+          <p:cxnSp>
+            <p:nvCxnSpPr>
+              <p:cNvPr id="39" name="直接箭头连接符 38">
+                <a:extLst>
+                  <a:ext uri="{FF2B5EF4-FFF2-40B4-BE49-F238E27FC236}">
+                    <a16:creationId xmlns:a16="http://schemas.microsoft.com/office/drawing/2014/main" id="{500809F9-3854-7828-2FAF-EC79576B32CE}"/>
+                  </a:ext>
+                </a:extLst>
+              </p:cNvPr>
+              <p:cNvCxnSpPr>
+                <a:cxnSpLocks/>
+              </p:cNvCxnSpPr>
+              <p:nvPr/>
+            </p:nvCxnSpPr>
+            <p:spPr>
+              <a:xfrm flipH="1">
+                <a:off x="7115756" y="4082716"/>
+                <a:ext cx="3418146" cy="0"/>
+              </a:xfrm>
+              <a:prstGeom prst="straightConnector1">
+                <a:avLst/>
+              </a:prstGeom>
+              <a:ln w="15875">
+                <a:solidFill>
+                  <a:schemeClr val="tx1"/>
+                </a:solidFill>
+                <a:tailEnd type="triangle"/>
+              </a:ln>
+            </p:spPr>
+            <p:style>
+              <a:lnRef idx="1">
+                <a:schemeClr val="accent1"/>
+              </a:lnRef>
+              <a:fillRef idx="0">
+                <a:schemeClr val="accent1"/>
+              </a:fillRef>
+              <a:effectRef idx="0">
+                <a:schemeClr val="accent1"/>
+              </a:effectRef>
+              <a:fontRef idx="minor">
+                <a:schemeClr val="tx1"/>
+              </a:fontRef>
+            </p:style>
+          </p:cxnSp>
+        </p:grpSp>
+        <p:cxnSp>
+          <p:nvCxnSpPr>
+            <p:cNvPr id="42" name="直接箭头连接符 41">
+              <a:extLst>
+                <a:ext uri="{FF2B5EF4-FFF2-40B4-BE49-F238E27FC236}">
+                  <a16:creationId xmlns:a16="http://schemas.microsoft.com/office/drawing/2014/main" id="{676B5DFB-2CEC-15A3-470C-3FBD12ECC444}"/>
+                </a:ext>
+              </a:extLst>
+            </p:cNvPr>
+            <p:cNvCxnSpPr/>
+            <p:nvPr/>
+          </p:nvCxnSpPr>
+          <p:spPr>
+            <a:xfrm>
+              <a:off x="5046528" y="2497275"/>
+              <a:ext cx="2069228" cy="825045"/>
+            </a:xfrm>
+            <a:prstGeom prst="straightConnector1">
+              <a:avLst/>
+            </a:prstGeom>
+            <a:ln w="15875">
+              <a:solidFill>
+                <a:schemeClr val="tx1"/>
+              </a:solidFill>
+              <a:tailEnd type="triangle"/>
+            </a:ln>
+          </p:spPr>
+          <p:style>
+            <a:lnRef idx="1">
+              <a:schemeClr val="accent1"/>
+            </a:lnRef>
+            <a:fillRef idx="0">
+              <a:schemeClr val="accent1"/>
+            </a:fillRef>
+            <a:effectRef idx="0">
+              <a:schemeClr val="accent1"/>
+            </a:effectRef>
+            <a:fontRef idx="minor">
+              <a:schemeClr val="tx1"/>
+            </a:fontRef>
+          </p:style>
+        </p:cxnSp>
+        <p:cxnSp>
+          <p:nvCxnSpPr>
+            <p:cNvPr id="44" name="直接箭头连接符 43">
+              <a:extLst>
+                <a:ext uri="{FF2B5EF4-FFF2-40B4-BE49-F238E27FC236}">
+                  <a16:creationId xmlns:a16="http://schemas.microsoft.com/office/drawing/2014/main" id="{3B77ADF2-4FD4-9F6B-A30C-31B7CB85DD97}"/>
+                </a:ext>
+              </a:extLst>
+            </p:cNvPr>
+            <p:cNvCxnSpPr/>
+            <p:nvPr/>
+          </p:nvCxnSpPr>
+          <p:spPr>
+            <a:xfrm flipV="1">
+              <a:off x="5046528" y="3322320"/>
+              <a:ext cx="2069228" cy="925257"/>
+            </a:xfrm>
+            <a:prstGeom prst="straightConnector1">
+              <a:avLst/>
+            </a:prstGeom>
+            <a:ln w="15875">
+              <a:solidFill>
+                <a:schemeClr val="tx1"/>
+              </a:solidFill>
+              <a:tailEnd type="triangle"/>
+            </a:ln>
+          </p:spPr>
+          <p:style>
+            <a:lnRef idx="1">
+              <a:schemeClr val="accent1"/>
+            </a:lnRef>
+            <a:fillRef idx="0">
+              <a:schemeClr val="accent1"/>
+            </a:fillRef>
+            <a:effectRef idx="0">
+              <a:schemeClr val="accent1"/>
+            </a:effectRef>
+            <a:fontRef idx="minor">
+              <a:schemeClr val="tx1"/>
+            </a:fontRef>
+          </p:style>
+        </p:cxnSp>
+        <p:cxnSp>
+          <p:nvCxnSpPr>
+            <p:cNvPr id="46" name="直接箭头连接符 45">
+              <a:extLst>
+                <a:ext uri="{FF2B5EF4-FFF2-40B4-BE49-F238E27FC236}">
+                  <a16:creationId xmlns:a16="http://schemas.microsoft.com/office/drawing/2014/main" id="{918B934F-A2A7-769D-2002-AC17404034C9}"/>
+                </a:ext>
+              </a:extLst>
+            </p:cNvPr>
+            <p:cNvCxnSpPr/>
+            <p:nvPr/>
+          </p:nvCxnSpPr>
+          <p:spPr>
+            <a:xfrm>
+              <a:off x="5046528" y="3322320"/>
+              <a:ext cx="2069228" cy="822960"/>
+            </a:xfrm>
+            <a:prstGeom prst="straightConnector1">
+              <a:avLst/>
+            </a:prstGeom>
+            <a:ln w="15875">
+              <a:solidFill>
+                <a:schemeClr val="tx1"/>
+              </a:solidFill>
+              <a:tailEnd type="triangle"/>
+            </a:ln>
+          </p:spPr>
+          <p:style>
+            <a:lnRef idx="1">
+              <a:schemeClr val="accent1"/>
+            </a:lnRef>
+            <a:fillRef idx="0">
+              <a:schemeClr val="accent1"/>
+            </a:fillRef>
+            <a:effectRef idx="0">
+              <a:schemeClr val="accent1"/>
+            </a:effectRef>
+            <a:fontRef idx="minor">
+              <a:schemeClr val="tx1"/>
+            </a:fontRef>
+          </p:style>
+        </p:cxnSp>
+        <p:cxnSp>
+          <p:nvCxnSpPr>
+            <p:cNvPr id="48" name="直接箭头连接符 47">
+              <a:extLst>
+                <a:ext uri="{FF2B5EF4-FFF2-40B4-BE49-F238E27FC236}">
+                  <a16:creationId xmlns:a16="http://schemas.microsoft.com/office/drawing/2014/main" id="{5A9FB945-9663-C504-847E-DF6163E87053}"/>
+                </a:ext>
+              </a:extLst>
+            </p:cNvPr>
+            <p:cNvCxnSpPr/>
+            <p:nvPr/>
+          </p:nvCxnSpPr>
+          <p:spPr>
+            <a:xfrm flipV="1">
+              <a:off x="5046528" y="4145280"/>
+              <a:ext cx="2069228" cy="975360"/>
+            </a:xfrm>
+            <a:prstGeom prst="straightConnector1">
+              <a:avLst/>
+            </a:prstGeom>
+            <a:ln w="15875">
+              <a:solidFill>
+                <a:schemeClr val="tx1"/>
+              </a:solidFill>
+              <a:tailEnd type="triangle"/>
+            </a:ln>
+          </p:spPr>
+          <p:style>
+            <a:lnRef idx="1">
+              <a:schemeClr val="accent1"/>
+            </a:lnRef>
+            <a:fillRef idx="0">
+              <a:schemeClr val="accent1"/>
+            </a:fillRef>
+            <a:effectRef idx="0">
+              <a:schemeClr val="accent1"/>
+            </a:effectRef>
+            <a:fontRef idx="minor">
+              <a:schemeClr val="tx1"/>
+            </a:fontRef>
+          </p:style>
+        </p:cxnSp>
+        <p:sp>
+          <p:nvSpPr>
+            <p:cNvPr id="51" name="文本框 50">
+              <a:extLst>
+                <a:ext uri="{FF2B5EF4-FFF2-40B4-BE49-F238E27FC236}">
+                  <a16:creationId xmlns:a16="http://schemas.microsoft.com/office/drawing/2014/main" id="{DC6877E1-730E-0966-A10A-6A66ADD73C7A}"/>
+                </a:ext>
+              </a:extLst>
+            </p:cNvPr>
+            <p:cNvSpPr txBox="1"/>
+            <p:nvPr/>
+          </p:nvSpPr>
+          <p:spPr>
+            <a:xfrm>
+              <a:off x="7423509" y="2929047"/>
+              <a:ext cx="2865120" cy="369332"/>
+            </a:xfrm>
+            <a:prstGeom prst="rect">
+              <a:avLst/>
+            </a:prstGeom>
+            <a:noFill/>
+            <a:ln w="15875">
+              <a:noFill/>
+            </a:ln>
+          </p:spPr>
+          <p:txBody>
+            <a:bodyPr wrap="square" rtlCol="0" anchor="ctr" anchorCtr="1">
+              <a:spAutoFit/>
+            </a:bodyPr>
+            <a:lstStyle/>
+            <a:p>
+              <a:r>
+                <a:rPr lang="en-US" altLang="zh-CN" dirty="0" err="1">
+                  <a:latin typeface="Times New Roman" panose="02020603050405020304" pitchFamily="18" charset="0"/>
+                  <a:ea typeface="宋体" panose="02010600030101010101" pitchFamily="2" charset="-122"/>
+                </a:rPr>
+                <a:t>MsgA</a:t>
+              </a:r>
+              <a:r>
+                <a:rPr lang="zh-CN" altLang="en-US" dirty="0">
+                  <a:latin typeface="Times New Roman" panose="02020603050405020304" pitchFamily="18" charset="0"/>
+                  <a:ea typeface="宋体" panose="02010600030101010101" pitchFamily="2" charset="-122"/>
+                </a:rPr>
+                <a:t>：前导</a:t>
+              </a:r>
+              <a:r>
+                <a:rPr lang="en-US" altLang="zh-CN" dirty="0">
+                  <a:latin typeface="Times New Roman" panose="02020603050405020304" pitchFamily="18" charset="0"/>
+                  <a:ea typeface="宋体" panose="02010600030101010101" pitchFamily="2" charset="-122"/>
+                </a:rPr>
+                <a:t>+</a:t>
+              </a:r>
+              <a:r>
+                <a:rPr lang="zh-CN" altLang="en-US" dirty="0">
+                  <a:latin typeface="Times New Roman" panose="02020603050405020304" pitchFamily="18" charset="0"/>
+                  <a:ea typeface="宋体" panose="02010600030101010101" pitchFamily="2" charset="-122"/>
+                </a:rPr>
+                <a:t>短数据报文</a:t>
+              </a:r>
+            </a:p>
+          </p:txBody>
+        </p:sp>
+        <p:sp>
+          <p:nvSpPr>
+            <p:cNvPr id="52" name="文本框 51">
+              <a:extLst>
+                <a:ext uri="{FF2B5EF4-FFF2-40B4-BE49-F238E27FC236}">
+                  <a16:creationId xmlns:a16="http://schemas.microsoft.com/office/drawing/2014/main" id="{DEF0FDD2-18EA-6FFA-BD4F-8A06790EAD81}"/>
+                </a:ext>
+              </a:extLst>
+            </p:cNvPr>
+            <p:cNvSpPr txBox="1"/>
+            <p:nvPr/>
+          </p:nvSpPr>
+          <p:spPr>
+            <a:xfrm>
+              <a:off x="7412277" y="3764838"/>
+              <a:ext cx="2865120" cy="369332"/>
+            </a:xfrm>
+            <a:prstGeom prst="rect">
+              <a:avLst/>
+            </a:prstGeom>
+            <a:noFill/>
+            <a:ln w="15875">
+              <a:noFill/>
+            </a:ln>
+          </p:spPr>
+          <p:txBody>
+            <a:bodyPr wrap="square" rtlCol="0" anchor="ctr" anchorCtr="1">
+              <a:spAutoFit/>
+            </a:bodyPr>
+            <a:lstStyle/>
+            <a:p>
+              <a:r>
+                <a:rPr lang="en-US" altLang="zh-CN" dirty="0" err="1">
+                  <a:latin typeface="Times New Roman" panose="02020603050405020304" pitchFamily="18" charset="0"/>
+                  <a:ea typeface="宋体" panose="02010600030101010101" pitchFamily="2" charset="-122"/>
+                </a:rPr>
+                <a:t>MsgB</a:t>
+              </a:r>
+              <a:r>
+                <a:rPr lang="zh-CN" altLang="en-US" dirty="0">
+                  <a:latin typeface="Times New Roman" panose="02020603050405020304" pitchFamily="18" charset="0"/>
+                  <a:ea typeface="宋体" panose="02010600030101010101" pitchFamily="2" charset="-122"/>
+                </a:rPr>
+                <a:t>：竞争冲突解决</a:t>
+              </a:r>
+            </a:p>
+          </p:txBody>
+        </p:sp>
+        <p:sp>
+          <p:nvSpPr>
+            <p:cNvPr id="6" name="文本框 5">
+              <a:extLst>
+                <a:ext uri="{FF2B5EF4-FFF2-40B4-BE49-F238E27FC236}">
+                  <a16:creationId xmlns:a16="http://schemas.microsoft.com/office/drawing/2014/main" id="{19C69D56-0317-FF97-A7C0-2B1DAA67B956}"/>
+                </a:ext>
+              </a:extLst>
+            </p:cNvPr>
+            <p:cNvSpPr txBox="1"/>
+            <p:nvPr/>
+          </p:nvSpPr>
+          <p:spPr>
+            <a:xfrm>
+              <a:off x="1638850" y="5661483"/>
+              <a:ext cx="3397208" cy="369332"/>
+            </a:xfrm>
+            <a:prstGeom prst="rect">
+              <a:avLst/>
+            </a:prstGeom>
+            <a:noFill/>
+          </p:spPr>
+          <p:txBody>
+            <a:bodyPr wrap="square" rtlCol="0" anchor="ctr" anchorCtr="1">
+              <a:spAutoFit/>
+            </a:bodyPr>
+            <a:lstStyle/>
+            <a:p>
+              <a:r>
+                <a:rPr lang="zh-CN" altLang="en-US" dirty="0">
+                  <a:latin typeface="Times New Roman" panose="02020603050405020304" pitchFamily="18" charset="0"/>
+                  <a:ea typeface="宋体" panose="02010600030101010101" pitchFamily="2" charset="-122"/>
+                </a:rPr>
+                <a:t>四步</a:t>
+              </a:r>
+              <a:r>
+                <a:rPr lang="en-US" altLang="zh-CN" dirty="0">
+                  <a:latin typeface="Times New Roman" panose="02020603050405020304" pitchFamily="18" charset="0"/>
+                  <a:ea typeface="宋体" panose="02010600030101010101" pitchFamily="2" charset="-122"/>
+                </a:rPr>
+                <a:t>SDT </a:t>
+              </a:r>
+              <a:r>
+                <a:rPr lang="zh-CN" altLang="en-US" dirty="0">
+                  <a:latin typeface="Times New Roman" panose="02020603050405020304" pitchFamily="18" charset="0"/>
+                  <a:ea typeface="宋体" panose="02010600030101010101" pitchFamily="2" charset="-122"/>
+                </a:rPr>
+                <a:t>随机接入过程</a:t>
+              </a:r>
+            </a:p>
+          </p:txBody>
+        </p:sp>
+        <p:sp>
+          <p:nvSpPr>
+            <p:cNvPr id="7" name="文本框 6">
+              <a:extLst>
+                <a:ext uri="{FF2B5EF4-FFF2-40B4-BE49-F238E27FC236}">
+                  <a16:creationId xmlns:a16="http://schemas.microsoft.com/office/drawing/2014/main" id="{AF68249D-F6DA-AD52-8630-4846FDC11604}"/>
+                </a:ext>
+              </a:extLst>
+            </p:cNvPr>
+            <p:cNvSpPr txBox="1"/>
+            <p:nvPr/>
+          </p:nvSpPr>
+          <p:spPr>
+            <a:xfrm>
+              <a:off x="7315201" y="5661483"/>
+              <a:ext cx="3397208" cy="369332"/>
+            </a:xfrm>
+            <a:prstGeom prst="rect">
+              <a:avLst/>
+            </a:prstGeom>
+            <a:noFill/>
+          </p:spPr>
+          <p:txBody>
+            <a:bodyPr wrap="square" rtlCol="0" anchor="ctr" anchorCtr="1">
+              <a:spAutoFit/>
+            </a:bodyPr>
+            <a:lstStyle/>
+            <a:p>
+              <a:r>
+                <a:rPr lang="zh-CN" altLang="en-US" dirty="0">
+                  <a:latin typeface="Times New Roman" panose="02020603050405020304" pitchFamily="18" charset="0"/>
+                  <a:ea typeface="宋体" panose="02010600030101010101" pitchFamily="2" charset="-122"/>
+                </a:rPr>
+                <a:t>两步</a:t>
+              </a:r>
+              <a:r>
+                <a:rPr lang="en-US" altLang="zh-CN" dirty="0">
+                  <a:latin typeface="Times New Roman" panose="02020603050405020304" pitchFamily="18" charset="0"/>
+                  <a:ea typeface="宋体" panose="02010600030101010101" pitchFamily="2" charset="-122"/>
+                </a:rPr>
+                <a:t>SDT </a:t>
+              </a:r>
+              <a:r>
+                <a:rPr lang="zh-CN" altLang="en-US" dirty="0">
+                  <a:latin typeface="Times New Roman" panose="02020603050405020304" pitchFamily="18" charset="0"/>
+                  <a:ea typeface="宋体" panose="02010600030101010101" pitchFamily="2" charset="-122"/>
+                </a:rPr>
+                <a:t>随机接入过程</a:t>
+              </a:r>
+            </a:p>
+          </p:txBody>
+        </p:sp>
+      </p:grpSp>
+    </p:spTree>
+    <p:extLst>
+      <p:ext uri="{BB962C8B-B14F-4D97-AF65-F5344CB8AC3E}">
+        <p14:creationId xmlns:p14="http://schemas.microsoft.com/office/powerpoint/2010/main" val="2162077299"/>
+      </p:ext>
+    </p:extLst>
+  </p:cSld>
+  <p:clrMapOvr>
+    <a:masterClrMapping/>
+  </p:clrMapOvr>
+</p:sld>
+</file>
+
+<file path=ppt/slides/slide6.xml><?xml version="1.0" encoding="utf-8"?>
+<p:sld xmlns:a="http://schemas.openxmlformats.org/drawingml/2006/main" xmlns:r="http://schemas.openxmlformats.org/officeDocument/2006/relationships" xmlns:p="http://schemas.openxmlformats.org/presentationml/2006/main">
+  <p:cSld>
+    <p:spTree>
+      <p:nvGrpSpPr>
+        <p:cNvPr id="1" name="">
+          <a:extLst>
+            <a:ext uri="{FF2B5EF4-FFF2-40B4-BE49-F238E27FC236}">
+              <a16:creationId xmlns:a16="http://schemas.microsoft.com/office/drawing/2014/main" id="{D249859F-6178-533D-299B-B75483FBDA11}"/>
+            </a:ext>
+          </a:extLst>
+        </p:cNvPr>
+        <p:cNvGrpSpPr/>
+        <p:nvPr/>
+      </p:nvGrpSpPr>
+      <p:grpSpPr>
+        <a:xfrm>
+          <a:off x="0" y="0"/>
+          <a:ext cx="0" cy="0"/>
+          <a:chOff x="0" y="0"/>
+          <a:chExt cx="0" cy="0"/>
+        </a:xfrm>
+      </p:grpSpPr>
+      <p:sp>
+        <p:nvSpPr>
+          <p:cNvPr id="41" name="矩形 40">
+            <a:extLst>
+              <a:ext uri="{FF2B5EF4-FFF2-40B4-BE49-F238E27FC236}">
+                <a16:creationId xmlns:a16="http://schemas.microsoft.com/office/drawing/2014/main" id="{4A2B3DEF-EB71-23D0-083F-332AF888E105}"/>
+              </a:ext>
+            </a:extLst>
+          </p:cNvPr>
+          <p:cNvSpPr/>
+          <p:nvPr/>
+        </p:nvSpPr>
+        <p:spPr>
+          <a:xfrm>
+            <a:off x="7296209" y="5813404"/>
+            <a:ext cx="3443160" cy="349971"/>
+          </a:xfrm>
+          <a:prstGeom prst="rect">
+            <a:avLst/>
+          </a:prstGeom>
+          <a:solidFill>
+            <a:srgbClr val="8FAADC"/>
+          </a:solidFill>
+          <a:ln w="19050">
+            <a:noFill/>
+          </a:ln>
+        </p:spPr>
+        <p:style>
+          <a:lnRef idx="2">
+            <a:schemeClr val="accent1">
+              <a:shade val="15000"/>
+            </a:schemeClr>
+          </a:lnRef>
+          <a:fillRef idx="1">
+            <a:schemeClr val="accent1"/>
+          </a:fillRef>
+          <a:effectRef idx="0">
+            <a:schemeClr val="accent1"/>
+          </a:effectRef>
+          <a:fontRef idx="minor">
+            <a:schemeClr val="lt1"/>
+          </a:fontRef>
+        </p:style>
+        <p:txBody>
+          <a:bodyPr rtlCol="0" anchor="ctr"/>
+          <a:lstStyle/>
+          <a:p>
+            <a:pPr algn="ctr"/>
+            <a:endParaRPr lang="zh-CN" altLang="en-US" dirty="0" err="1">
+              <a:ln>
+                <a:solidFill>
+                  <a:sysClr val="windowText" lastClr="000000"/>
+                </a:solidFill>
+              </a:ln>
+              <a:solidFill>
+                <a:sysClr val="windowText" lastClr="000000"/>
+              </a:solidFill>
+            </a:endParaRPr>
+          </a:p>
+        </p:txBody>
+      </p:sp>
+      <p:sp>
+        <p:nvSpPr>
+          <p:cNvPr id="32" name="矩形 31">
+            <a:extLst>
+              <a:ext uri="{FF2B5EF4-FFF2-40B4-BE49-F238E27FC236}">
+                <a16:creationId xmlns:a16="http://schemas.microsoft.com/office/drawing/2014/main" id="{7A84CBC0-A99D-8C47-0BA8-FE8AF38F968A}"/>
+              </a:ext>
+            </a:extLst>
+          </p:cNvPr>
+          <p:cNvSpPr/>
+          <p:nvPr/>
+        </p:nvSpPr>
+        <p:spPr>
+          <a:xfrm>
+            <a:off x="1826574" y="5813404"/>
+            <a:ext cx="3425421" cy="349971"/>
+          </a:xfrm>
+          <a:prstGeom prst="rect">
+            <a:avLst/>
+          </a:prstGeom>
+          <a:solidFill>
+            <a:schemeClr val="accent1">
+              <a:lumMod val="60000"/>
+              <a:lumOff val="40000"/>
+            </a:schemeClr>
+          </a:solidFill>
+          <a:ln w="19050">
+            <a:noFill/>
+          </a:ln>
+        </p:spPr>
+        <p:style>
+          <a:lnRef idx="2">
+            <a:schemeClr val="accent1">
+              <a:shade val="15000"/>
+            </a:schemeClr>
+          </a:lnRef>
+          <a:fillRef idx="1">
+            <a:schemeClr val="accent1"/>
+          </a:fillRef>
+          <a:effectRef idx="0">
+            <a:schemeClr val="accent1"/>
+          </a:effectRef>
+          <a:fontRef idx="minor">
+            <a:schemeClr val="lt1"/>
+          </a:fontRef>
+        </p:style>
+        <p:txBody>
+          <a:bodyPr rtlCol="0" anchor="ctr"/>
+          <a:lstStyle/>
+          <a:p>
+            <a:pPr algn="ctr"/>
+            <a:endParaRPr lang="zh-CN" altLang="en-US" dirty="0" err="1">
+              <a:ln>
+                <a:solidFill>
+                  <a:sysClr val="windowText" lastClr="000000"/>
+                </a:solidFill>
+              </a:ln>
+              <a:solidFill>
+                <a:sysClr val="windowText" lastClr="000000"/>
+              </a:solidFill>
+            </a:endParaRPr>
+          </a:p>
+        </p:txBody>
+      </p:sp>
+      <p:sp>
+        <p:nvSpPr>
+          <p:cNvPr id="2" name="矩形 1">
+            <a:extLst>
+              <a:ext uri="{FF2B5EF4-FFF2-40B4-BE49-F238E27FC236}">
+                <a16:creationId xmlns:a16="http://schemas.microsoft.com/office/drawing/2014/main" id="{A4B7971F-652A-C655-F8D5-FC09DC9A97E6}"/>
+              </a:ext>
+            </a:extLst>
+          </p:cNvPr>
+          <p:cNvSpPr/>
+          <p:nvPr/>
+        </p:nvSpPr>
+        <p:spPr>
+          <a:xfrm>
+            <a:off x="1290015" y="941692"/>
+            <a:ext cx="1052187" cy="688931"/>
+          </a:xfrm>
+          <a:prstGeom prst="rect">
+            <a:avLst/>
+          </a:prstGeom>
+          <a:noFill/>
+          <a:ln w="15875">
+            <a:solidFill>
+              <a:schemeClr val="tx1"/>
+            </a:solidFill>
+          </a:ln>
+        </p:spPr>
+        <p:style>
+          <a:lnRef idx="2">
+            <a:schemeClr val="accent1">
+              <a:shade val="50000"/>
+            </a:schemeClr>
+          </a:lnRef>
+          <a:fillRef idx="1">
+            <a:schemeClr val="accent1"/>
+          </a:fillRef>
+          <a:effectRef idx="0">
+            <a:schemeClr val="accent1"/>
+          </a:effectRef>
+          <a:fontRef idx="minor">
+            <a:schemeClr val="lt1"/>
+          </a:fontRef>
+        </p:style>
+        <p:txBody>
+          <a:bodyPr rtlCol="0" anchor="ctr"/>
+          <a:lstStyle/>
+          <a:p>
+            <a:pPr algn="ctr"/>
+            <a:r>
+              <a:rPr lang="zh-CN" altLang="en-US" dirty="0">
+                <a:solidFill>
+                  <a:schemeClr val="tx1"/>
+                </a:solidFill>
+                <a:latin typeface="Times New Roman" panose="02020603050405020304" pitchFamily="18" charset="0"/>
+                <a:ea typeface="宋体" panose="02010600030101010101" pitchFamily="2" charset="-122"/>
+              </a:rPr>
+              <a:t>终端</a:t>
+            </a:r>
+          </a:p>
+        </p:txBody>
+      </p:sp>
+      <p:sp>
+        <p:nvSpPr>
+          <p:cNvPr id="3" name="矩形 2">
+            <a:extLst>
+              <a:ext uri="{FF2B5EF4-FFF2-40B4-BE49-F238E27FC236}">
+                <a16:creationId xmlns:a16="http://schemas.microsoft.com/office/drawing/2014/main" id="{CDEF26C0-07B0-DF5B-3595-7C92A4082440}"/>
+              </a:ext>
+            </a:extLst>
+          </p:cNvPr>
+          <p:cNvSpPr/>
+          <p:nvPr/>
+        </p:nvSpPr>
+        <p:spPr>
+          <a:xfrm>
+            <a:off x="4690414" y="941692"/>
+            <a:ext cx="1052187" cy="688931"/>
+          </a:xfrm>
+          <a:prstGeom prst="rect">
+            <a:avLst/>
+          </a:prstGeom>
+          <a:noFill/>
+          <a:ln w="15875">
+            <a:solidFill>
+              <a:schemeClr val="tx1"/>
+            </a:solidFill>
+          </a:ln>
+        </p:spPr>
+        <p:style>
+          <a:lnRef idx="2">
+            <a:schemeClr val="accent1">
+              <a:shade val="50000"/>
+            </a:schemeClr>
+          </a:lnRef>
+          <a:fillRef idx="1">
+            <a:schemeClr val="accent1"/>
+          </a:fillRef>
+          <a:effectRef idx="0">
+            <a:schemeClr val="accent1"/>
+          </a:effectRef>
+          <a:fontRef idx="minor">
+            <a:schemeClr val="lt1"/>
+          </a:fontRef>
+        </p:style>
+        <p:txBody>
+          <a:bodyPr rtlCol="0" anchor="ctr"/>
+          <a:lstStyle/>
+          <a:p>
+            <a:pPr algn="ctr"/>
+            <a:r>
+              <a:rPr lang="zh-CN" altLang="en-US" dirty="0">
+                <a:solidFill>
+                  <a:schemeClr val="tx1"/>
+                </a:solidFill>
+                <a:latin typeface="Times New Roman" panose="02020603050405020304" pitchFamily="18" charset="0"/>
+                <a:ea typeface="宋体" panose="02010600030101010101" pitchFamily="2" charset="-122"/>
+              </a:rPr>
+              <a:t>基站</a:t>
+            </a:r>
+          </a:p>
+        </p:txBody>
+      </p:sp>
+      <p:cxnSp>
+        <p:nvCxnSpPr>
+          <p:cNvPr id="5" name="直接箭头连接符 4">
+            <a:extLst>
+              <a:ext uri="{FF2B5EF4-FFF2-40B4-BE49-F238E27FC236}">
+                <a16:creationId xmlns:a16="http://schemas.microsoft.com/office/drawing/2014/main" id="{1C1894A8-D492-AB16-22B2-C8A6D28DC1C0}"/>
+              </a:ext>
+            </a:extLst>
+          </p:cNvPr>
+          <p:cNvCxnSpPr>
+            <a:cxnSpLocks/>
+            <a:stCxn id="2" idx="2"/>
+          </p:cNvCxnSpPr>
+          <p:nvPr/>
+        </p:nvCxnSpPr>
+        <p:spPr>
+          <a:xfrm>
+            <a:off x="1816109" y="1630623"/>
+            <a:ext cx="0" cy="4798550"/>
+          </a:xfrm>
+          <a:prstGeom prst="straightConnector1">
+            <a:avLst/>
+          </a:prstGeom>
+          <a:ln w="15875">
+            <a:solidFill>
+              <a:schemeClr val="tx1"/>
+            </a:solidFill>
+            <a:tailEnd type="none"/>
+          </a:ln>
+        </p:spPr>
+        <p:style>
+          <a:lnRef idx="1">
+            <a:schemeClr val="accent1"/>
+          </a:lnRef>
+          <a:fillRef idx="0">
+            <a:schemeClr val="accent1"/>
+          </a:fillRef>
+          <a:effectRef idx="0">
+            <a:schemeClr val="accent1"/>
+          </a:effectRef>
+          <a:fontRef idx="minor">
+            <a:schemeClr val="tx1"/>
+          </a:fontRef>
+        </p:style>
+      </p:cxnSp>
+      <p:cxnSp>
+        <p:nvCxnSpPr>
+          <p:cNvPr id="9" name="直接箭头连接符 8">
+            <a:extLst>
+              <a:ext uri="{FF2B5EF4-FFF2-40B4-BE49-F238E27FC236}">
+                <a16:creationId xmlns:a16="http://schemas.microsoft.com/office/drawing/2014/main" id="{FAEE0EA5-481D-1439-DE8A-23F0FC3B8122}"/>
+              </a:ext>
+            </a:extLst>
+          </p:cNvPr>
+          <p:cNvCxnSpPr>
+            <a:cxnSpLocks/>
+            <a:stCxn id="3" idx="2"/>
+          </p:cNvCxnSpPr>
+          <p:nvPr/>
+        </p:nvCxnSpPr>
+        <p:spPr>
+          <a:xfrm>
+            <a:off x="5216508" y="1630623"/>
+            <a:ext cx="35488" cy="4667231"/>
+          </a:xfrm>
+          <a:prstGeom prst="straightConnector1">
+            <a:avLst/>
+          </a:prstGeom>
+          <a:ln w="15875">
+            <a:solidFill>
+              <a:schemeClr val="tx1"/>
+            </a:solidFill>
+            <a:tailEnd type="none"/>
+          </a:ln>
+        </p:spPr>
+        <p:style>
+          <a:lnRef idx="1">
+            <a:schemeClr val="accent1"/>
+          </a:lnRef>
+          <a:fillRef idx="0">
+            <a:schemeClr val="accent1"/>
+          </a:fillRef>
+          <a:effectRef idx="0">
+            <a:schemeClr val="accent1"/>
+          </a:effectRef>
+          <a:fontRef idx="minor">
+            <a:schemeClr val="tx1"/>
+          </a:fontRef>
+        </p:style>
+      </p:cxnSp>
+      <p:cxnSp>
+        <p:nvCxnSpPr>
+          <p:cNvPr id="14" name="直接箭头连接符 13">
+            <a:extLst>
+              <a:ext uri="{FF2B5EF4-FFF2-40B4-BE49-F238E27FC236}">
+                <a16:creationId xmlns:a16="http://schemas.microsoft.com/office/drawing/2014/main" id="{2F89E014-69AB-228E-668D-552BDD3DD61F}"/>
+              </a:ext>
+            </a:extLst>
+          </p:cNvPr>
+          <p:cNvCxnSpPr>
+            <a:cxnSpLocks/>
+          </p:cNvCxnSpPr>
+          <p:nvPr/>
+        </p:nvCxnSpPr>
+        <p:spPr>
+          <a:xfrm>
+            <a:off x="1816108" y="2251079"/>
+            <a:ext cx="3400399" cy="0"/>
+          </a:xfrm>
+          <a:prstGeom prst="straightConnector1">
+            <a:avLst/>
+          </a:prstGeom>
+          <a:ln w="15875">
+            <a:solidFill>
+              <a:schemeClr val="tx1"/>
+            </a:solidFill>
+            <a:tailEnd type="triangle"/>
+          </a:ln>
+        </p:spPr>
+        <p:style>
+          <a:lnRef idx="1">
+            <a:schemeClr val="accent1"/>
+          </a:lnRef>
+          <a:fillRef idx="0">
+            <a:schemeClr val="accent1"/>
+          </a:fillRef>
+          <a:effectRef idx="0">
+            <a:schemeClr val="accent1"/>
+          </a:effectRef>
+          <a:fontRef idx="minor">
+            <a:schemeClr val="tx1"/>
+          </a:fontRef>
+        </p:style>
+      </p:cxnSp>
+      <p:cxnSp>
+        <p:nvCxnSpPr>
+          <p:cNvPr id="15" name="直接箭头连接符 14">
+            <a:extLst>
+              <a:ext uri="{FF2B5EF4-FFF2-40B4-BE49-F238E27FC236}">
+                <a16:creationId xmlns:a16="http://schemas.microsoft.com/office/drawing/2014/main" id="{752B8BCE-DF56-837D-DE63-4AE7B7AD0A21}"/>
+              </a:ext>
+            </a:extLst>
+          </p:cNvPr>
+          <p:cNvCxnSpPr>
+            <a:cxnSpLocks/>
+          </p:cNvCxnSpPr>
+          <p:nvPr/>
+        </p:nvCxnSpPr>
+        <p:spPr>
+          <a:xfrm>
+            <a:off x="1816107" y="3988439"/>
+            <a:ext cx="3435891" cy="0"/>
+          </a:xfrm>
+          <a:prstGeom prst="straightConnector1">
+            <a:avLst/>
+          </a:prstGeom>
+          <a:ln w="15875">
+            <a:solidFill>
+              <a:schemeClr val="tx1"/>
+            </a:solidFill>
+            <a:tailEnd type="triangle"/>
+          </a:ln>
+        </p:spPr>
+        <p:style>
+          <a:lnRef idx="1">
+            <a:schemeClr val="accent1"/>
+          </a:lnRef>
+          <a:fillRef idx="0">
+            <a:schemeClr val="accent1"/>
+          </a:fillRef>
+          <a:effectRef idx="0">
+            <a:schemeClr val="accent1"/>
+          </a:effectRef>
+          <a:fontRef idx="minor">
+            <a:schemeClr val="tx1"/>
+          </a:fontRef>
+        </p:style>
+      </p:cxnSp>
+      <p:cxnSp>
+        <p:nvCxnSpPr>
+          <p:cNvPr id="17" name="直接箭头连接符 16">
+            <a:extLst>
+              <a:ext uri="{FF2B5EF4-FFF2-40B4-BE49-F238E27FC236}">
+                <a16:creationId xmlns:a16="http://schemas.microsoft.com/office/drawing/2014/main" id="{B7347650-AFA1-B05C-9864-3F85AB625E5C}"/>
+              </a:ext>
+            </a:extLst>
+          </p:cNvPr>
+          <p:cNvCxnSpPr>
+            <a:cxnSpLocks/>
+          </p:cNvCxnSpPr>
+          <p:nvPr/>
+        </p:nvCxnSpPr>
+        <p:spPr>
+          <a:xfrm flipH="1">
+            <a:off x="1816107" y="3074039"/>
+            <a:ext cx="3418146" cy="0"/>
+          </a:xfrm>
+          <a:prstGeom prst="straightConnector1">
+            <a:avLst/>
+          </a:prstGeom>
+          <a:ln w="15875">
+            <a:solidFill>
+              <a:schemeClr val="tx1"/>
+            </a:solidFill>
+            <a:tailEnd type="triangle"/>
+          </a:ln>
+        </p:spPr>
+        <p:style>
+          <a:lnRef idx="1">
+            <a:schemeClr val="accent1"/>
+          </a:lnRef>
+          <a:fillRef idx="0">
+            <a:schemeClr val="accent1"/>
+          </a:fillRef>
+          <a:effectRef idx="0">
+            <a:schemeClr val="accent1"/>
+          </a:effectRef>
+          <a:fontRef idx="minor">
+            <a:schemeClr val="tx1"/>
+          </a:fontRef>
+        </p:style>
+      </p:cxnSp>
+      <p:cxnSp>
+        <p:nvCxnSpPr>
+          <p:cNvPr id="18" name="直接箭头连接符 17">
+            <a:extLst>
+              <a:ext uri="{FF2B5EF4-FFF2-40B4-BE49-F238E27FC236}">
+                <a16:creationId xmlns:a16="http://schemas.microsoft.com/office/drawing/2014/main" id="{55C6C4D2-41E6-8608-B9C7-4FE593349EA6}"/>
+              </a:ext>
+            </a:extLst>
+          </p:cNvPr>
+          <p:cNvCxnSpPr>
+            <a:cxnSpLocks/>
+          </p:cNvCxnSpPr>
+          <p:nvPr/>
+        </p:nvCxnSpPr>
+        <p:spPr>
+          <a:xfrm flipH="1">
+            <a:off x="1798360" y="4872359"/>
+            <a:ext cx="3453638" cy="0"/>
+          </a:xfrm>
+          <a:prstGeom prst="straightConnector1">
+            <a:avLst/>
+          </a:prstGeom>
+          <a:ln w="15875">
+            <a:solidFill>
+              <a:schemeClr val="tx1"/>
+            </a:solidFill>
+            <a:tailEnd type="triangle"/>
+          </a:ln>
+        </p:spPr>
+        <p:style>
+          <a:lnRef idx="1">
+            <a:schemeClr val="accent1"/>
+          </a:lnRef>
+          <a:fillRef idx="0">
+            <a:schemeClr val="accent1"/>
+          </a:fillRef>
+          <a:effectRef idx="0">
+            <a:schemeClr val="accent1"/>
+          </a:effectRef>
+          <a:fontRef idx="minor">
+            <a:schemeClr val="tx1"/>
+          </a:fontRef>
+        </p:style>
+      </p:cxnSp>
+      <p:sp>
+        <p:nvSpPr>
+          <p:cNvPr id="19" name="文本框 18">
+            <a:extLst>
+              <a:ext uri="{FF2B5EF4-FFF2-40B4-BE49-F238E27FC236}">
+                <a16:creationId xmlns:a16="http://schemas.microsoft.com/office/drawing/2014/main" id="{F28844BE-7774-EE10-F861-3B12C09C2C46}"/>
+              </a:ext>
+            </a:extLst>
+          </p:cNvPr>
+          <p:cNvSpPr txBox="1"/>
+          <p:nvPr/>
+        </p:nvSpPr>
+        <p:spPr>
+          <a:xfrm>
+            <a:off x="2470873" y="1879662"/>
+            <a:ext cx="2117941" cy="369332"/>
+          </a:xfrm>
+          <a:prstGeom prst="rect">
+            <a:avLst/>
+          </a:prstGeom>
+          <a:noFill/>
+          <a:ln w="15875">
+            <a:noFill/>
+          </a:ln>
+        </p:spPr>
+        <p:txBody>
+          <a:bodyPr wrap="square" rtlCol="0" anchor="ctr" anchorCtr="1">
+            <a:spAutoFit/>
+          </a:bodyPr>
+          <a:lstStyle/>
+          <a:p>
+            <a:r>
+              <a:rPr lang="en-US" altLang="zh-CN" dirty="0">
+                <a:latin typeface="Times New Roman" panose="02020603050405020304" pitchFamily="18" charset="0"/>
+                <a:ea typeface="宋体" panose="02010600030101010101" pitchFamily="2" charset="-122"/>
+              </a:rPr>
+              <a:t>Msg1</a:t>
+            </a:r>
+            <a:r>
+              <a:rPr lang="zh-CN" altLang="en-US" dirty="0">
+                <a:latin typeface="Times New Roman" panose="02020603050405020304" pitchFamily="18" charset="0"/>
+                <a:ea typeface="宋体" panose="02010600030101010101" pitchFamily="2" charset="-122"/>
+              </a:rPr>
+              <a:t>：前导序列</a:t>
+            </a:r>
+          </a:p>
+        </p:txBody>
+      </p:sp>
+      <p:sp>
+        <p:nvSpPr>
+          <p:cNvPr id="21" name="文本框 20">
+            <a:extLst>
+              <a:ext uri="{FF2B5EF4-FFF2-40B4-BE49-F238E27FC236}">
+                <a16:creationId xmlns:a16="http://schemas.microsoft.com/office/drawing/2014/main" id="{C34B35A8-9CBA-0F36-C224-B29EC4987B9E}"/>
+              </a:ext>
+            </a:extLst>
+          </p:cNvPr>
+          <p:cNvSpPr txBox="1"/>
+          <p:nvPr/>
+        </p:nvSpPr>
+        <p:spPr>
+          <a:xfrm>
+            <a:off x="2097283" y="2754813"/>
+            <a:ext cx="2865120" cy="369332"/>
+          </a:xfrm>
+          <a:prstGeom prst="rect">
+            <a:avLst/>
+          </a:prstGeom>
+          <a:noFill/>
+          <a:ln w="15875">
+            <a:noFill/>
+          </a:ln>
+        </p:spPr>
+        <p:txBody>
+          <a:bodyPr wrap="square" rtlCol="0" anchor="ctr" anchorCtr="1">
+            <a:spAutoFit/>
+          </a:bodyPr>
+          <a:lstStyle/>
+          <a:p>
+            <a:r>
+              <a:rPr lang="en-US" altLang="zh-CN" dirty="0">
+                <a:latin typeface="Times New Roman" panose="02020603050405020304" pitchFamily="18" charset="0"/>
+                <a:ea typeface="宋体" panose="02010600030101010101" pitchFamily="2" charset="-122"/>
+              </a:rPr>
+              <a:t>Msg2</a:t>
+            </a:r>
+            <a:r>
+              <a:rPr lang="zh-CN" altLang="en-US" dirty="0">
+                <a:latin typeface="Times New Roman" panose="02020603050405020304" pitchFamily="18" charset="0"/>
+                <a:ea typeface="宋体" panose="02010600030101010101" pitchFamily="2" charset="-122"/>
+              </a:rPr>
+              <a:t>：随机接入响应报文</a:t>
+            </a:r>
+          </a:p>
+        </p:txBody>
+      </p:sp>
+      <p:sp>
+        <p:nvSpPr>
+          <p:cNvPr id="22" name="文本框 21">
+            <a:extLst>
+              <a:ext uri="{FF2B5EF4-FFF2-40B4-BE49-F238E27FC236}">
+                <a16:creationId xmlns:a16="http://schemas.microsoft.com/office/drawing/2014/main" id="{A84B147D-7D90-1388-C7CB-39049FFCDEAC}"/>
+              </a:ext>
+            </a:extLst>
+          </p:cNvPr>
+          <p:cNvSpPr txBox="1"/>
+          <p:nvPr/>
+        </p:nvSpPr>
+        <p:spPr>
+          <a:xfrm>
+            <a:off x="1863568" y="3629964"/>
+            <a:ext cx="3332550" cy="369332"/>
+          </a:xfrm>
+          <a:prstGeom prst="rect">
+            <a:avLst/>
+          </a:prstGeom>
+          <a:noFill/>
+          <a:ln w="15875">
+            <a:noFill/>
+          </a:ln>
+        </p:spPr>
+        <p:txBody>
+          <a:bodyPr wrap="square" rtlCol="0" anchor="ctr" anchorCtr="1">
+            <a:spAutoFit/>
+          </a:bodyPr>
+          <a:lstStyle/>
+          <a:p>
+            <a:r>
+              <a:rPr lang="en-US" altLang="zh-CN" dirty="0">
+                <a:latin typeface="Times New Roman" panose="02020603050405020304" pitchFamily="18" charset="0"/>
+                <a:ea typeface="宋体" panose="02010600030101010101" pitchFamily="2" charset="-122"/>
+              </a:rPr>
+              <a:t>Msg3</a:t>
+            </a:r>
+            <a:r>
+              <a:rPr lang="zh-CN" altLang="en-US" dirty="0">
+                <a:latin typeface="Times New Roman" panose="02020603050405020304" pitchFamily="18" charset="0"/>
+                <a:ea typeface="宋体" panose="02010600030101010101" pitchFamily="2" charset="-122"/>
+              </a:rPr>
+              <a:t>：</a:t>
+            </a:r>
+            <a:r>
+              <a:rPr lang="en-US" altLang="zh-CN" dirty="0">
+                <a:latin typeface="Times New Roman" panose="02020603050405020304" pitchFamily="18" charset="0"/>
+                <a:ea typeface="宋体" panose="02010600030101010101" pitchFamily="2" charset="-122"/>
+              </a:rPr>
+              <a:t>RRC</a:t>
+            </a:r>
+            <a:r>
+              <a:rPr lang="zh-CN" altLang="en-US" dirty="0">
+                <a:latin typeface="Times New Roman" panose="02020603050405020304" pitchFamily="18" charset="0"/>
+                <a:ea typeface="宋体" panose="02010600030101010101" pitchFamily="2" charset="-122"/>
+              </a:rPr>
+              <a:t>连接建立请求</a:t>
+            </a:r>
+          </a:p>
+        </p:txBody>
+      </p:sp>
+      <p:sp>
+        <p:nvSpPr>
+          <p:cNvPr id="23" name="文本框 22">
+            <a:extLst>
+              <a:ext uri="{FF2B5EF4-FFF2-40B4-BE49-F238E27FC236}">
+                <a16:creationId xmlns:a16="http://schemas.microsoft.com/office/drawing/2014/main" id="{026A8E1E-C418-656E-0B64-41497EEC8B48}"/>
+              </a:ext>
+            </a:extLst>
+          </p:cNvPr>
+          <p:cNvSpPr txBox="1"/>
+          <p:nvPr/>
+        </p:nvSpPr>
+        <p:spPr>
+          <a:xfrm>
+            <a:off x="2070214" y="4505114"/>
+            <a:ext cx="2838901" cy="369332"/>
+          </a:xfrm>
+          <a:prstGeom prst="rect">
+            <a:avLst/>
+          </a:prstGeom>
+          <a:noFill/>
+          <a:ln w="15875">
+            <a:noFill/>
+          </a:ln>
+        </p:spPr>
+        <p:txBody>
+          <a:bodyPr wrap="square" rtlCol="0" anchor="ctr" anchorCtr="1">
+            <a:spAutoFit/>
+          </a:bodyPr>
+          <a:lstStyle/>
+          <a:p>
+            <a:r>
+              <a:rPr lang="en-US" altLang="zh-CN" dirty="0">
+                <a:latin typeface="Times New Roman" panose="02020603050405020304" pitchFamily="18" charset="0"/>
+                <a:ea typeface="宋体" panose="02010600030101010101" pitchFamily="2" charset="-122"/>
+              </a:rPr>
+              <a:t>Msg4</a:t>
+            </a:r>
+            <a:r>
+              <a:rPr lang="zh-CN" altLang="en-US" dirty="0">
+                <a:latin typeface="Times New Roman" panose="02020603050405020304" pitchFamily="18" charset="0"/>
+                <a:ea typeface="宋体" panose="02010600030101010101" pitchFamily="2" charset="-122"/>
+              </a:rPr>
+              <a:t>：连接建立确认报文</a:t>
+            </a:r>
+          </a:p>
+        </p:txBody>
+      </p:sp>
+      <p:sp>
+        <p:nvSpPr>
+          <p:cNvPr id="34" name="矩形 33">
+            <a:extLst>
+              <a:ext uri="{FF2B5EF4-FFF2-40B4-BE49-F238E27FC236}">
+                <a16:creationId xmlns:a16="http://schemas.microsoft.com/office/drawing/2014/main" id="{829AF4EE-351B-F3F2-4195-5F2691A1598B}"/>
+              </a:ext>
+            </a:extLst>
+          </p:cNvPr>
+          <p:cNvSpPr/>
+          <p:nvPr/>
+        </p:nvSpPr>
+        <p:spPr>
+          <a:xfrm>
+            <a:off x="6777389" y="941692"/>
+            <a:ext cx="1052187" cy="688931"/>
+          </a:xfrm>
+          <a:prstGeom prst="rect">
+            <a:avLst/>
+          </a:prstGeom>
+          <a:noFill/>
+          <a:ln w="15875">
+            <a:solidFill>
+              <a:schemeClr val="tx1"/>
+            </a:solidFill>
+          </a:ln>
+        </p:spPr>
+        <p:style>
+          <a:lnRef idx="2">
+            <a:schemeClr val="accent1">
+              <a:shade val="50000"/>
+            </a:schemeClr>
+          </a:lnRef>
+          <a:fillRef idx="1">
+            <a:schemeClr val="accent1"/>
+          </a:fillRef>
+          <a:effectRef idx="0">
+            <a:schemeClr val="accent1"/>
+          </a:effectRef>
+          <a:fontRef idx="minor">
+            <a:schemeClr val="lt1"/>
+          </a:fontRef>
+        </p:style>
+        <p:txBody>
+          <a:bodyPr rtlCol="0" anchor="ctr"/>
+          <a:lstStyle/>
+          <a:p>
+            <a:pPr algn="ctr"/>
+            <a:r>
+              <a:rPr lang="zh-CN" altLang="en-US" dirty="0">
+                <a:solidFill>
+                  <a:schemeClr val="tx1"/>
+                </a:solidFill>
+                <a:latin typeface="Times New Roman" panose="02020603050405020304" pitchFamily="18" charset="0"/>
+                <a:ea typeface="宋体" panose="02010600030101010101" pitchFamily="2" charset="-122"/>
+              </a:rPr>
+              <a:t>终端</a:t>
+            </a:r>
+          </a:p>
+        </p:txBody>
+      </p:sp>
+      <p:sp>
+        <p:nvSpPr>
+          <p:cNvPr id="35" name="矩形 34">
+            <a:extLst>
+              <a:ext uri="{FF2B5EF4-FFF2-40B4-BE49-F238E27FC236}">
+                <a16:creationId xmlns:a16="http://schemas.microsoft.com/office/drawing/2014/main" id="{E2612D05-5FBE-CFF4-21CE-C2C4A92CE81F}"/>
+              </a:ext>
+            </a:extLst>
+          </p:cNvPr>
+          <p:cNvSpPr/>
+          <p:nvPr/>
+        </p:nvSpPr>
+        <p:spPr>
+          <a:xfrm>
+            <a:off x="10177788" y="941692"/>
+            <a:ext cx="1052187" cy="688931"/>
+          </a:xfrm>
+          <a:prstGeom prst="rect">
+            <a:avLst/>
+          </a:prstGeom>
+          <a:noFill/>
+          <a:ln w="15875">
+            <a:solidFill>
+              <a:schemeClr val="tx1"/>
+            </a:solidFill>
+          </a:ln>
+        </p:spPr>
+        <p:style>
+          <a:lnRef idx="2">
+            <a:schemeClr val="accent1">
+              <a:shade val="50000"/>
+            </a:schemeClr>
+          </a:lnRef>
+          <a:fillRef idx="1">
+            <a:schemeClr val="accent1"/>
+          </a:fillRef>
+          <a:effectRef idx="0">
+            <a:schemeClr val="accent1"/>
+          </a:effectRef>
+          <a:fontRef idx="minor">
+            <a:schemeClr val="lt1"/>
+          </a:fontRef>
+        </p:style>
+        <p:txBody>
+          <a:bodyPr rtlCol="0" anchor="ctr"/>
+          <a:lstStyle/>
+          <a:p>
+            <a:pPr algn="ctr"/>
+            <a:r>
+              <a:rPr lang="zh-CN" altLang="en-US" dirty="0">
+                <a:solidFill>
+                  <a:schemeClr val="tx1"/>
+                </a:solidFill>
+                <a:latin typeface="Times New Roman" panose="02020603050405020304" pitchFamily="18" charset="0"/>
+                <a:ea typeface="宋体" panose="02010600030101010101" pitchFamily="2" charset="-122"/>
+              </a:rPr>
+              <a:t>基站</a:t>
+            </a:r>
+          </a:p>
+        </p:txBody>
+      </p:sp>
+      <p:cxnSp>
+        <p:nvCxnSpPr>
+          <p:cNvPr id="36" name="直接箭头连接符 35">
+            <a:extLst>
+              <a:ext uri="{FF2B5EF4-FFF2-40B4-BE49-F238E27FC236}">
+                <a16:creationId xmlns:a16="http://schemas.microsoft.com/office/drawing/2014/main" id="{0C439D50-6161-A35E-F7F9-99AFF7FE4F13}"/>
+              </a:ext>
+            </a:extLst>
+          </p:cNvPr>
+          <p:cNvCxnSpPr>
+            <a:cxnSpLocks/>
+            <a:stCxn id="34" idx="2"/>
+          </p:cNvCxnSpPr>
+          <p:nvPr/>
+        </p:nvCxnSpPr>
+        <p:spPr>
+          <a:xfrm>
+            <a:off x="7303483" y="1630623"/>
+            <a:ext cx="0" cy="4667231"/>
+          </a:xfrm>
+          <a:prstGeom prst="straightConnector1">
+            <a:avLst/>
+          </a:prstGeom>
+          <a:ln w="15875">
+            <a:solidFill>
+              <a:schemeClr val="tx1"/>
+            </a:solidFill>
+            <a:tailEnd type="none"/>
+          </a:ln>
+        </p:spPr>
+        <p:style>
+          <a:lnRef idx="1">
+            <a:schemeClr val="accent1"/>
+          </a:lnRef>
+          <a:fillRef idx="0">
+            <a:schemeClr val="accent1"/>
+          </a:fillRef>
+          <a:effectRef idx="0">
+            <a:schemeClr val="accent1"/>
+          </a:effectRef>
+          <a:fontRef idx="minor">
+            <a:schemeClr val="tx1"/>
+          </a:fontRef>
+        </p:style>
+      </p:cxnSp>
+      <p:cxnSp>
+        <p:nvCxnSpPr>
+          <p:cNvPr id="37" name="直接箭头连接符 36">
+            <a:extLst>
+              <a:ext uri="{FF2B5EF4-FFF2-40B4-BE49-F238E27FC236}">
+                <a16:creationId xmlns:a16="http://schemas.microsoft.com/office/drawing/2014/main" id="{13C86F65-4E7B-ED7D-0593-0C3DF66E42FD}"/>
+              </a:ext>
+            </a:extLst>
+          </p:cNvPr>
+          <p:cNvCxnSpPr>
+            <a:cxnSpLocks/>
+            <a:stCxn id="35" idx="2"/>
+          </p:cNvCxnSpPr>
+          <p:nvPr/>
+        </p:nvCxnSpPr>
+        <p:spPr>
+          <a:xfrm>
+            <a:off x="10703882" y="1630623"/>
+            <a:ext cx="35487" cy="4667231"/>
+          </a:xfrm>
+          <a:prstGeom prst="straightConnector1">
+            <a:avLst/>
+          </a:prstGeom>
+          <a:ln w="15875">
+            <a:solidFill>
+              <a:schemeClr val="tx1"/>
+            </a:solidFill>
+            <a:tailEnd type="none"/>
+          </a:ln>
+        </p:spPr>
+        <p:style>
+          <a:lnRef idx="1">
+            <a:schemeClr val="accent1"/>
+          </a:lnRef>
+          <a:fillRef idx="0">
+            <a:schemeClr val="accent1"/>
+          </a:fillRef>
+          <a:effectRef idx="0">
+            <a:schemeClr val="accent1"/>
+          </a:effectRef>
+          <a:fontRef idx="minor">
+            <a:schemeClr val="tx1"/>
+          </a:fontRef>
+        </p:style>
+      </p:cxnSp>
+      <p:grpSp>
+        <p:nvGrpSpPr>
+          <p:cNvPr id="40" name="组合 39">
+            <a:extLst>
+              <a:ext uri="{FF2B5EF4-FFF2-40B4-BE49-F238E27FC236}">
+                <a16:creationId xmlns:a16="http://schemas.microsoft.com/office/drawing/2014/main" id="{4C582F2B-C174-C010-841D-BD40D20BEAB8}"/>
+              </a:ext>
+            </a:extLst>
+          </p:cNvPr>
+          <p:cNvGrpSpPr/>
+          <p:nvPr/>
+        </p:nvGrpSpPr>
+        <p:grpSpPr>
+          <a:xfrm>
+            <a:off x="7303481" y="3074039"/>
+            <a:ext cx="3418146" cy="822960"/>
+            <a:chOff x="7115756" y="3259756"/>
+            <a:chExt cx="3418146" cy="822960"/>
+          </a:xfrm>
+        </p:grpSpPr>
+        <p:cxnSp>
+          <p:nvCxnSpPr>
+            <p:cNvPr id="38" name="直接箭头连接符 37">
+              <a:extLst>
+                <a:ext uri="{FF2B5EF4-FFF2-40B4-BE49-F238E27FC236}">
+                  <a16:creationId xmlns:a16="http://schemas.microsoft.com/office/drawing/2014/main" id="{93F94F4C-C5DE-3B0C-77B4-76C032B1A4C1}"/>
+                </a:ext>
+              </a:extLst>
+            </p:cNvPr>
+            <p:cNvCxnSpPr>
+              <a:cxnSpLocks/>
+            </p:cNvCxnSpPr>
+            <p:nvPr/>
+          </p:nvCxnSpPr>
+          <p:spPr>
+            <a:xfrm>
+              <a:off x="7115757" y="3259756"/>
+              <a:ext cx="3400399" cy="0"/>
+            </a:xfrm>
+            <a:prstGeom prst="straightConnector1">
+              <a:avLst/>
+            </a:prstGeom>
+            <a:ln w="15875">
+              <a:solidFill>
+                <a:schemeClr val="tx1"/>
+              </a:solidFill>
+              <a:tailEnd type="triangle"/>
+            </a:ln>
+          </p:spPr>
+          <p:style>
+            <a:lnRef idx="1">
+              <a:schemeClr val="accent1"/>
+            </a:lnRef>
+            <a:fillRef idx="0">
+              <a:schemeClr val="accent1"/>
+            </a:fillRef>
+            <a:effectRef idx="0">
+              <a:schemeClr val="accent1"/>
+            </a:effectRef>
+            <a:fontRef idx="minor">
+              <a:schemeClr val="tx1"/>
+            </a:fontRef>
+          </p:style>
+        </p:cxnSp>
+        <p:cxnSp>
+          <p:nvCxnSpPr>
+            <p:cNvPr id="39" name="直接箭头连接符 38">
+              <a:extLst>
+                <a:ext uri="{FF2B5EF4-FFF2-40B4-BE49-F238E27FC236}">
+                  <a16:creationId xmlns:a16="http://schemas.microsoft.com/office/drawing/2014/main" id="{C8097FC3-3559-7B94-29A3-DBC958F6E839}"/>
+                </a:ext>
+              </a:extLst>
+            </p:cNvPr>
+            <p:cNvCxnSpPr>
+              <a:cxnSpLocks/>
+            </p:cNvCxnSpPr>
+            <p:nvPr/>
+          </p:nvCxnSpPr>
+          <p:spPr>
+            <a:xfrm flipH="1">
+              <a:off x="7115756" y="4082716"/>
+              <a:ext cx="3418146" cy="0"/>
+            </a:xfrm>
+            <a:prstGeom prst="straightConnector1">
+              <a:avLst/>
+            </a:prstGeom>
+            <a:ln w="15875">
+              <a:solidFill>
+                <a:schemeClr val="tx1"/>
+              </a:solidFill>
+              <a:tailEnd type="triangle"/>
+            </a:ln>
+          </p:spPr>
+          <p:style>
+            <a:lnRef idx="1">
+              <a:schemeClr val="accent1"/>
+            </a:lnRef>
+            <a:fillRef idx="0">
+              <a:schemeClr val="accent1"/>
+            </a:fillRef>
+            <a:effectRef idx="0">
+              <a:schemeClr val="accent1"/>
+            </a:effectRef>
+            <a:fontRef idx="minor">
+              <a:schemeClr val="tx1"/>
+            </a:fontRef>
+          </p:style>
+        </p:cxnSp>
+      </p:grpSp>
+      <p:cxnSp>
+        <p:nvCxnSpPr>
+          <p:cNvPr id="42" name="直接箭头连接符 41">
+            <a:extLst>
+              <a:ext uri="{FF2B5EF4-FFF2-40B4-BE49-F238E27FC236}">
+                <a16:creationId xmlns:a16="http://schemas.microsoft.com/office/drawing/2014/main" id="{35A7CD79-F57F-87ED-CAD0-17D0E2D66B04}"/>
+              </a:ext>
+            </a:extLst>
+          </p:cNvPr>
+          <p:cNvCxnSpPr/>
+          <p:nvPr/>
+        </p:nvCxnSpPr>
+        <p:spPr>
+          <a:xfrm>
+            <a:off x="5234253" y="2248994"/>
+            <a:ext cx="2069228" cy="825045"/>
+          </a:xfrm>
+          <a:prstGeom prst="straightConnector1">
+            <a:avLst/>
+          </a:prstGeom>
+          <a:ln w="15875">
+            <a:solidFill>
+              <a:schemeClr val="tx1"/>
+            </a:solidFill>
+            <a:tailEnd type="triangle"/>
+          </a:ln>
+        </p:spPr>
+        <p:style>
+          <a:lnRef idx="1">
+            <a:schemeClr val="accent1"/>
+          </a:lnRef>
+          <a:fillRef idx="0">
+            <a:schemeClr val="accent1"/>
+          </a:fillRef>
+          <a:effectRef idx="0">
+            <a:schemeClr val="accent1"/>
+          </a:effectRef>
+          <a:fontRef idx="minor">
+            <a:schemeClr val="tx1"/>
+          </a:fontRef>
+        </p:style>
+      </p:cxnSp>
+      <p:cxnSp>
+        <p:nvCxnSpPr>
+          <p:cNvPr id="44" name="直接箭头连接符 43">
+            <a:extLst>
+              <a:ext uri="{FF2B5EF4-FFF2-40B4-BE49-F238E27FC236}">
+                <a16:creationId xmlns:a16="http://schemas.microsoft.com/office/drawing/2014/main" id="{262FC27C-060E-F93F-0398-E1279714ECC3}"/>
+              </a:ext>
+            </a:extLst>
+          </p:cNvPr>
+          <p:cNvCxnSpPr/>
+          <p:nvPr/>
+        </p:nvCxnSpPr>
+        <p:spPr>
+          <a:xfrm flipV="1">
+            <a:off x="5234253" y="3074039"/>
+            <a:ext cx="2069228" cy="925257"/>
+          </a:xfrm>
+          <a:prstGeom prst="straightConnector1">
+            <a:avLst/>
+          </a:prstGeom>
+          <a:ln w="15875">
+            <a:solidFill>
+              <a:schemeClr val="tx1"/>
+            </a:solidFill>
+            <a:tailEnd type="triangle"/>
+          </a:ln>
+        </p:spPr>
+        <p:style>
+          <a:lnRef idx="1">
+            <a:schemeClr val="accent1"/>
+          </a:lnRef>
+          <a:fillRef idx="0">
+            <a:schemeClr val="accent1"/>
+          </a:fillRef>
+          <a:effectRef idx="0">
+            <a:schemeClr val="accent1"/>
+          </a:effectRef>
+          <a:fontRef idx="minor">
+            <a:schemeClr val="tx1"/>
+          </a:fontRef>
+        </p:style>
+      </p:cxnSp>
+      <p:cxnSp>
+        <p:nvCxnSpPr>
+          <p:cNvPr id="46" name="直接箭头连接符 45">
+            <a:extLst>
+              <a:ext uri="{FF2B5EF4-FFF2-40B4-BE49-F238E27FC236}">
+                <a16:creationId xmlns:a16="http://schemas.microsoft.com/office/drawing/2014/main" id="{5C6F7124-DF9A-70D1-1BBA-BDCC6C9FF90A}"/>
+              </a:ext>
+            </a:extLst>
+          </p:cNvPr>
+          <p:cNvCxnSpPr/>
+          <p:nvPr/>
+        </p:nvCxnSpPr>
+        <p:spPr>
+          <a:xfrm>
+            <a:off x="5234253" y="3074039"/>
+            <a:ext cx="2069228" cy="822960"/>
+          </a:xfrm>
+          <a:prstGeom prst="straightConnector1">
+            <a:avLst/>
+          </a:prstGeom>
+          <a:ln w="15875">
+            <a:solidFill>
+              <a:schemeClr val="tx1"/>
+            </a:solidFill>
+            <a:tailEnd type="triangle"/>
+          </a:ln>
+        </p:spPr>
+        <p:style>
+          <a:lnRef idx="1">
+            <a:schemeClr val="accent1"/>
+          </a:lnRef>
+          <a:fillRef idx="0">
+            <a:schemeClr val="accent1"/>
+          </a:fillRef>
+          <a:effectRef idx="0">
+            <a:schemeClr val="accent1"/>
+          </a:effectRef>
+          <a:fontRef idx="minor">
+            <a:schemeClr val="tx1"/>
+          </a:fontRef>
+        </p:style>
+      </p:cxnSp>
+      <p:cxnSp>
+        <p:nvCxnSpPr>
+          <p:cNvPr id="48" name="直接箭头连接符 47">
+            <a:extLst>
+              <a:ext uri="{FF2B5EF4-FFF2-40B4-BE49-F238E27FC236}">
+                <a16:creationId xmlns:a16="http://schemas.microsoft.com/office/drawing/2014/main" id="{68F4A4BD-FFBC-8C12-93B2-F9B5936F5C63}"/>
+              </a:ext>
+            </a:extLst>
+          </p:cNvPr>
+          <p:cNvCxnSpPr/>
+          <p:nvPr/>
+        </p:nvCxnSpPr>
+        <p:spPr>
+          <a:xfrm flipV="1">
+            <a:off x="5234253" y="3896999"/>
+            <a:ext cx="2069228" cy="975360"/>
+          </a:xfrm>
+          <a:prstGeom prst="straightConnector1">
+            <a:avLst/>
+          </a:prstGeom>
+          <a:ln w="15875">
+            <a:solidFill>
+              <a:schemeClr val="tx1"/>
+            </a:solidFill>
+            <a:tailEnd type="triangle"/>
+          </a:ln>
+        </p:spPr>
+        <p:style>
+          <a:lnRef idx="1">
+            <a:schemeClr val="accent1"/>
+          </a:lnRef>
+          <a:fillRef idx="0">
+            <a:schemeClr val="accent1"/>
+          </a:fillRef>
+          <a:effectRef idx="0">
+            <a:schemeClr val="accent1"/>
+          </a:effectRef>
+          <a:fontRef idx="minor">
+            <a:schemeClr val="tx1"/>
+          </a:fontRef>
+        </p:style>
+      </p:cxnSp>
+      <p:sp>
+        <p:nvSpPr>
+          <p:cNvPr id="51" name="文本框 50">
+            <a:extLst>
+              <a:ext uri="{FF2B5EF4-FFF2-40B4-BE49-F238E27FC236}">
+                <a16:creationId xmlns:a16="http://schemas.microsoft.com/office/drawing/2014/main" id="{E16BC4D7-151E-A15A-C833-448DEEC510CA}"/>
+              </a:ext>
+            </a:extLst>
+          </p:cNvPr>
+          <p:cNvSpPr txBox="1"/>
+          <p:nvPr/>
+        </p:nvSpPr>
+        <p:spPr>
+          <a:xfrm>
+            <a:off x="7611234" y="2680766"/>
+            <a:ext cx="2865120" cy="369332"/>
+          </a:xfrm>
+          <a:prstGeom prst="rect">
+            <a:avLst/>
+          </a:prstGeom>
+          <a:noFill/>
+          <a:ln w="15875">
+            <a:noFill/>
+          </a:ln>
+        </p:spPr>
+        <p:txBody>
+          <a:bodyPr wrap="square" rtlCol="0" anchor="ctr" anchorCtr="1">
+            <a:spAutoFit/>
+          </a:bodyPr>
+          <a:lstStyle/>
+          <a:p>
+            <a:r>
+              <a:rPr lang="en-US" altLang="zh-CN" dirty="0" err="1">
+                <a:latin typeface="Times New Roman" panose="02020603050405020304" pitchFamily="18" charset="0"/>
+                <a:ea typeface="宋体" panose="02010600030101010101" pitchFamily="2" charset="-122"/>
+              </a:rPr>
+              <a:t>MsgA</a:t>
+            </a:r>
+            <a:r>
+              <a:rPr lang="zh-CN" altLang="en-US" dirty="0">
+                <a:latin typeface="Times New Roman" panose="02020603050405020304" pitchFamily="18" charset="0"/>
+                <a:ea typeface="宋体" panose="02010600030101010101" pitchFamily="2" charset="-122"/>
+              </a:rPr>
+              <a:t>：前导</a:t>
+            </a:r>
+            <a:r>
+              <a:rPr lang="en-US" altLang="zh-CN" dirty="0">
+                <a:latin typeface="Times New Roman" panose="02020603050405020304" pitchFamily="18" charset="0"/>
+                <a:ea typeface="宋体" panose="02010600030101010101" pitchFamily="2" charset="-122"/>
+              </a:rPr>
+              <a:t>+</a:t>
+            </a:r>
+            <a:r>
+              <a:rPr lang="zh-CN" altLang="en-US" dirty="0">
+                <a:latin typeface="Times New Roman" panose="02020603050405020304" pitchFamily="18" charset="0"/>
+                <a:ea typeface="宋体" panose="02010600030101010101" pitchFamily="2" charset="-122"/>
+              </a:rPr>
+              <a:t>短数据报文</a:t>
+            </a:r>
+          </a:p>
+        </p:txBody>
+      </p:sp>
+      <p:sp>
+        <p:nvSpPr>
+          <p:cNvPr id="52" name="文本框 51">
+            <a:extLst>
+              <a:ext uri="{FF2B5EF4-FFF2-40B4-BE49-F238E27FC236}">
+                <a16:creationId xmlns:a16="http://schemas.microsoft.com/office/drawing/2014/main" id="{B39E997E-5C1B-6192-410E-3690C92B6CDE}"/>
+              </a:ext>
+            </a:extLst>
+          </p:cNvPr>
+          <p:cNvSpPr txBox="1"/>
+          <p:nvPr/>
+        </p:nvSpPr>
+        <p:spPr>
+          <a:xfrm>
+            <a:off x="7600002" y="3516557"/>
+            <a:ext cx="2865120" cy="369332"/>
+          </a:xfrm>
+          <a:prstGeom prst="rect">
+            <a:avLst/>
+          </a:prstGeom>
+          <a:noFill/>
+          <a:ln w="15875">
+            <a:noFill/>
+          </a:ln>
+        </p:spPr>
+        <p:txBody>
+          <a:bodyPr wrap="square" rtlCol="0" anchor="ctr" anchorCtr="1">
+            <a:spAutoFit/>
+          </a:bodyPr>
+          <a:lstStyle/>
+          <a:p>
+            <a:r>
+              <a:rPr lang="en-US" altLang="zh-CN" dirty="0" err="1">
+                <a:latin typeface="Times New Roman" panose="02020603050405020304" pitchFamily="18" charset="0"/>
+                <a:ea typeface="宋体" panose="02010600030101010101" pitchFamily="2" charset="-122"/>
+              </a:rPr>
+              <a:t>MsgB</a:t>
+            </a:r>
+            <a:r>
+              <a:rPr lang="zh-CN" altLang="en-US" dirty="0">
+                <a:latin typeface="Times New Roman" panose="02020603050405020304" pitchFamily="18" charset="0"/>
+                <a:ea typeface="宋体" panose="02010600030101010101" pitchFamily="2" charset="-122"/>
+              </a:rPr>
+              <a:t>：竞争冲突解决</a:t>
+            </a:r>
+          </a:p>
+        </p:txBody>
+      </p:sp>
+      <p:sp>
+        <p:nvSpPr>
+          <p:cNvPr id="6" name="文本框 5">
+            <a:extLst>
+              <a:ext uri="{FF2B5EF4-FFF2-40B4-BE49-F238E27FC236}">
+                <a16:creationId xmlns:a16="http://schemas.microsoft.com/office/drawing/2014/main" id="{7CE2ACBC-B37A-7D95-4F04-AAD625130923}"/>
+              </a:ext>
+            </a:extLst>
+          </p:cNvPr>
+          <p:cNvSpPr txBox="1"/>
+          <p:nvPr/>
+        </p:nvSpPr>
+        <p:spPr>
+          <a:xfrm>
+            <a:off x="1791060" y="6409495"/>
+            <a:ext cx="3397208" cy="369332"/>
+          </a:xfrm>
+          <a:prstGeom prst="rect">
+            <a:avLst/>
+          </a:prstGeom>
+          <a:noFill/>
+        </p:spPr>
+        <p:txBody>
+          <a:bodyPr wrap="square" rtlCol="0" anchor="ctr" anchorCtr="1">
+            <a:spAutoFit/>
+          </a:bodyPr>
+          <a:lstStyle/>
+          <a:p>
+            <a:r>
+              <a:rPr lang="zh-CN" altLang="en-US" dirty="0">
+                <a:latin typeface="Times New Roman" panose="02020603050405020304" pitchFamily="18" charset="0"/>
+                <a:ea typeface="宋体" panose="02010600030101010101" pitchFamily="2" charset="-122"/>
+              </a:rPr>
+              <a:t>基于连接的四步随机接入过程</a:t>
+            </a:r>
+          </a:p>
+        </p:txBody>
+      </p:sp>
+      <p:sp>
+        <p:nvSpPr>
+          <p:cNvPr id="7" name="文本框 6">
+            <a:extLst>
+              <a:ext uri="{FF2B5EF4-FFF2-40B4-BE49-F238E27FC236}">
+                <a16:creationId xmlns:a16="http://schemas.microsoft.com/office/drawing/2014/main" id="{C2380420-A00F-04D3-1141-FEC319DD3F20}"/>
+              </a:ext>
+            </a:extLst>
+          </p:cNvPr>
+          <p:cNvSpPr txBox="1"/>
+          <p:nvPr/>
+        </p:nvSpPr>
+        <p:spPr>
+          <a:xfrm>
+            <a:off x="7354101" y="6409495"/>
+            <a:ext cx="3397208" cy="369332"/>
+          </a:xfrm>
+          <a:prstGeom prst="rect">
+            <a:avLst/>
+          </a:prstGeom>
+          <a:noFill/>
+        </p:spPr>
+        <p:txBody>
+          <a:bodyPr wrap="square" rtlCol="0" anchor="ctr" anchorCtr="1">
+            <a:spAutoFit/>
+          </a:bodyPr>
+          <a:lstStyle/>
+          <a:p>
+            <a:r>
+              <a:rPr lang="zh-CN" altLang="en-US" dirty="0">
+                <a:latin typeface="Times New Roman" panose="02020603050405020304" pitchFamily="18" charset="0"/>
+                <a:ea typeface="宋体" panose="02010600030101010101" pitchFamily="2" charset="-122"/>
+              </a:rPr>
+              <a:t>基于连接的两步随机接入过程</a:t>
+            </a:r>
+          </a:p>
+        </p:txBody>
+      </p:sp>
+      <p:cxnSp>
+        <p:nvCxnSpPr>
+          <p:cNvPr id="27" name="直接箭头连接符 26">
+            <a:extLst>
+              <a:ext uri="{FF2B5EF4-FFF2-40B4-BE49-F238E27FC236}">
+                <a16:creationId xmlns:a16="http://schemas.microsoft.com/office/drawing/2014/main" id="{CBF68B67-68B3-37E9-5790-3CA8669FB760}"/>
+              </a:ext>
+            </a:extLst>
+          </p:cNvPr>
+          <p:cNvCxnSpPr>
+            <a:cxnSpLocks/>
+          </p:cNvCxnSpPr>
+          <p:nvPr/>
+        </p:nvCxnSpPr>
+        <p:spPr>
+          <a:xfrm>
+            <a:off x="1816108" y="5492815"/>
+            <a:ext cx="3400399" cy="0"/>
+          </a:xfrm>
+          <a:prstGeom prst="straightConnector1">
+            <a:avLst/>
+          </a:prstGeom>
+          <a:ln w="15875">
+            <a:solidFill>
+              <a:schemeClr val="tx1"/>
+            </a:solidFill>
+            <a:tailEnd type="triangle"/>
+          </a:ln>
+        </p:spPr>
+        <p:style>
+          <a:lnRef idx="1">
+            <a:schemeClr val="accent1"/>
+          </a:lnRef>
+          <a:fillRef idx="0">
+            <a:schemeClr val="accent1"/>
+          </a:fillRef>
+          <a:effectRef idx="0">
+            <a:schemeClr val="accent1"/>
+          </a:effectRef>
+          <a:fontRef idx="minor">
+            <a:schemeClr val="tx1"/>
+          </a:fontRef>
+        </p:style>
+      </p:cxnSp>
+      <p:sp>
+        <p:nvSpPr>
+          <p:cNvPr id="28" name="文本框 27">
+            <a:extLst>
+              <a:ext uri="{FF2B5EF4-FFF2-40B4-BE49-F238E27FC236}">
+                <a16:creationId xmlns:a16="http://schemas.microsoft.com/office/drawing/2014/main" id="{1180FA24-F9B2-165F-7573-E14F602C7C19}"/>
+              </a:ext>
+            </a:extLst>
+          </p:cNvPr>
+          <p:cNvSpPr txBox="1"/>
+          <p:nvPr/>
+        </p:nvSpPr>
+        <p:spPr>
+          <a:xfrm>
+            <a:off x="2470873" y="5121398"/>
+            <a:ext cx="2117941" cy="369332"/>
+          </a:xfrm>
+          <a:prstGeom prst="rect">
+            <a:avLst/>
+          </a:prstGeom>
+          <a:noFill/>
+          <a:ln w="15875">
+            <a:noFill/>
+          </a:ln>
+        </p:spPr>
+        <p:txBody>
+          <a:bodyPr wrap="square" rtlCol="0" anchor="ctr" anchorCtr="1">
+            <a:spAutoFit/>
+          </a:bodyPr>
+          <a:lstStyle/>
+          <a:p>
+            <a:r>
+              <a:rPr lang="en-US" altLang="zh-CN" dirty="0">
+                <a:latin typeface="Times New Roman" panose="02020603050405020304" pitchFamily="18" charset="0"/>
+                <a:ea typeface="宋体" panose="02010600030101010101" pitchFamily="2" charset="-122"/>
+              </a:rPr>
+              <a:t>RRC</a:t>
+            </a:r>
+            <a:r>
+              <a:rPr lang="zh-CN" altLang="en-US" dirty="0">
+                <a:latin typeface="Times New Roman" panose="02020603050405020304" pitchFamily="18" charset="0"/>
+                <a:ea typeface="宋体" panose="02010600030101010101" pitchFamily="2" charset="-122"/>
+              </a:rPr>
+              <a:t>连接建立完成</a:t>
+            </a:r>
+          </a:p>
+        </p:txBody>
+      </p:sp>
+      <p:cxnSp>
+        <p:nvCxnSpPr>
+          <p:cNvPr id="29" name="直接箭头连接符 28">
+            <a:extLst>
+              <a:ext uri="{FF2B5EF4-FFF2-40B4-BE49-F238E27FC236}">
+                <a16:creationId xmlns:a16="http://schemas.microsoft.com/office/drawing/2014/main" id="{EA2A586E-3DD3-1145-DEDC-462B983541A3}"/>
+              </a:ext>
+            </a:extLst>
+          </p:cNvPr>
+          <p:cNvCxnSpPr>
+            <a:cxnSpLocks/>
+          </p:cNvCxnSpPr>
+          <p:nvPr/>
+        </p:nvCxnSpPr>
+        <p:spPr>
+          <a:xfrm>
+            <a:off x="7303481" y="5492815"/>
+            <a:ext cx="3435888" cy="0"/>
+          </a:xfrm>
+          <a:prstGeom prst="straightConnector1">
+            <a:avLst/>
+          </a:prstGeom>
+          <a:ln w="15875">
+            <a:solidFill>
+              <a:schemeClr val="tx1"/>
+            </a:solidFill>
+            <a:tailEnd type="triangle"/>
+          </a:ln>
+        </p:spPr>
+        <p:style>
+          <a:lnRef idx="1">
+            <a:schemeClr val="accent1"/>
+          </a:lnRef>
+          <a:fillRef idx="0">
+            <a:schemeClr val="accent1"/>
+          </a:fillRef>
+          <a:effectRef idx="0">
+            <a:schemeClr val="accent1"/>
+          </a:effectRef>
+          <a:fontRef idx="minor">
+            <a:schemeClr val="tx1"/>
+          </a:fontRef>
+        </p:style>
+      </p:cxnSp>
+      <p:sp>
+        <p:nvSpPr>
+          <p:cNvPr id="30" name="文本框 29">
+            <a:extLst>
+              <a:ext uri="{FF2B5EF4-FFF2-40B4-BE49-F238E27FC236}">
+                <a16:creationId xmlns:a16="http://schemas.microsoft.com/office/drawing/2014/main" id="{59925927-8055-1F7B-5551-0E6CD774160B}"/>
+              </a:ext>
+            </a:extLst>
+          </p:cNvPr>
+          <p:cNvSpPr txBox="1"/>
+          <p:nvPr/>
+        </p:nvSpPr>
+        <p:spPr>
+          <a:xfrm>
+            <a:off x="7993735" y="5121398"/>
+            <a:ext cx="2117941" cy="369332"/>
+          </a:xfrm>
+          <a:prstGeom prst="rect">
+            <a:avLst/>
+          </a:prstGeom>
+          <a:noFill/>
+          <a:ln w="15875">
+            <a:noFill/>
+          </a:ln>
+        </p:spPr>
+        <p:txBody>
+          <a:bodyPr wrap="square" rtlCol="0" anchor="ctr" anchorCtr="1">
+            <a:spAutoFit/>
+          </a:bodyPr>
+          <a:lstStyle/>
+          <a:p>
+            <a:r>
+              <a:rPr lang="en-US" altLang="zh-CN" dirty="0">
+                <a:latin typeface="Times New Roman" panose="02020603050405020304" pitchFamily="18" charset="0"/>
+                <a:ea typeface="宋体" panose="02010600030101010101" pitchFamily="2" charset="-122"/>
+              </a:rPr>
+              <a:t>RRC</a:t>
+            </a:r>
+            <a:r>
+              <a:rPr lang="zh-CN" altLang="en-US" dirty="0">
+                <a:latin typeface="Times New Roman" panose="02020603050405020304" pitchFamily="18" charset="0"/>
+                <a:ea typeface="宋体" panose="02010600030101010101" pitchFamily="2" charset="-122"/>
+              </a:rPr>
+              <a:t>连接建立完成</a:t>
+            </a:r>
+          </a:p>
+        </p:txBody>
+      </p:sp>
+      <p:sp>
+        <p:nvSpPr>
+          <p:cNvPr id="33" name="文本框 32">
+            <a:extLst>
+              <a:ext uri="{FF2B5EF4-FFF2-40B4-BE49-F238E27FC236}">
+                <a16:creationId xmlns:a16="http://schemas.microsoft.com/office/drawing/2014/main" id="{1A0B4FB4-E0F9-4DD4-C143-75D7691077E9}"/>
+              </a:ext>
+            </a:extLst>
+          </p:cNvPr>
+          <p:cNvSpPr txBox="1"/>
+          <p:nvPr/>
+        </p:nvSpPr>
+        <p:spPr>
+          <a:xfrm>
+            <a:off x="2470873" y="5804490"/>
+            <a:ext cx="2117941" cy="369332"/>
+          </a:xfrm>
+          <a:prstGeom prst="rect">
+            <a:avLst/>
+          </a:prstGeom>
+          <a:noFill/>
+          <a:ln w="15875">
+            <a:noFill/>
+          </a:ln>
+        </p:spPr>
+        <p:txBody>
+          <a:bodyPr wrap="square" rtlCol="0" anchor="ctr" anchorCtr="1">
+            <a:spAutoFit/>
+          </a:bodyPr>
+          <a:lstStyle/>
+          <a:p>
+            <a:r>
+              <a:rPr lang="zh-CN" altLang="en-US" dirty="0">
+                <a:latin typeface="Times New Roman" panose="02020603050405020304" pitchFamily="18" charset="0"/>
+                <a:ea typeface="宋体" panose="02010600030101010101" pitchFamily="2" charset="-122"/>
+              </a:rPr>
+              <a:t>数据传输</a:t>
+            </a:r>
+          </a:p>
+        </p:txBody>
+      </p:sp>
+      <p:sp>
+        <p:nvSpPr>
+          <p:cNvPr id="43" name="文本框 42">
+            <a:extLst>
+              <a:ext uri="{FF2B5EF4-FFF2-40B4-BE49-F238E27FC236}">
+                <a16:creationId xmlns:a16="http://schemas.microsoft.com/office/drawing/2014/main" id="{D5134876-5619-2A0F-BBF2-AFE6C70CB963}"/>
+              </a:ext>
+            </a:extLst>
+          </p:cNvPr>
+          <p:cNvSpPr txBox="1"/>
+          <p:nvPr/>
+        </p:nvSpPr>
+        <p:spPr>
+          <a:xfrm>
+            <a:off x="7940507" y="5804490"/>
+            <a:ext cx="2139998" cy="369332"/>
+          </a:xfrm>
+          <a:prstGeom prst="rect">
+            <a:avLst/>
+          </a:prstGeom>
+          <a:noFill/>
+          <a:ln w="15875">
+            <a:noFill/>
+          </a:ln>
+        </p:spPr>
+        <p:txBody>
+          <a:bodyPr wrap="square" rtlCol="0" anchor="ctr" anchorCtr="1">
+            <a:spAutoFit/>
+          </a:bodyPr>
+          <a:lstStyle/>
+          <a:p>
+            <a:r>
+              <a:rPr lang="zh-CN" altLang="en-US" dirty="0">
+                <a:latin typeface="Times New Roman" panose="02020603050405020304" pitchFamily="18" charset="0"/>
+                <a:ea typeface="宋体" panose="02010600030101010101" pitchFamily="2" charset="-122"/>
+              </a:rPr>
+              <a:t>数据传输</a:t>
+            </a:r>
+          </a:p>
+        </p:txBody>
+      </p:sp>
+    </p:spTree>
+    <p:extLst>
+      <p:ext uri="{BB962C8B-B14F-4D97-AF65-F5344CB8AC3E}">
+        <p14:creationId xmlns:p14="http://schemas.microsoft.com/office/powerpoint/2010/main" val="3894209843"/>
+      </p:ext>
+    </p:extLst>
+  </p:cSld>
+  <p:clrMapOvr>
+    <a:masterClrMapping/>
+  </p:clrMapOvr>
+</p:sld>
+</file>
+
+<file path=ppt/slides/slide7.xml><?xml version="1.0" encoding="utf-8"?>
+<p:sld xmlns:a="http://schemas.openxmlformats.org/drawingml/2006/main" xmlns:r="http://schemas.openxmlformats.org/officeDocument/2006/relationships" xmlns:p="http://schemas.openxmlformats.org/presentationml/2006/main">
+  <p:cSld>
+    <p:spTree>
+      <p:nvGrpSpPr>
+        <p:cNvPr id="1" name=""/>
+        <p:cNvGrpSpPr/>
+        <p:nvPr/>
+      </p:nvGrpSpPr>
+      <p:grpSpPr>
+        <a:xfrm>
+          <a:off x="0" y="0"/>
+          <a:ext cx="0" cy="0"/>
+          <a:chOff x="0" y="0"/>
+          <a:chExt cx="0" cy="0"/>
+        </a:xfrm>
+      </p:grpSpPr>
+      <p:grpSp>
+        <p:nvGrpSpPr>
+          <p:cNvPr id="218" name="组合 217">
+            <a:extLst>
+              <a:ext uri="{FF2B5EF4-FFF2-40B4-BE49-F238E27FC236}">
+                <a16:creationId xmlns:a16="http://schemas.microsoft.com/office/drawing/2014/main" id="{A95C7B50-75E7-51DF-90E0-FA18AFA0CF50}"/>
+              </a:ext>
+            </a:extLst>
+          </p:cNvPr>
+          <p:cNvGrpSpPr/>
+          <p:nvPr/>
+        </p:nvGrpSpPr>
+        <p:grpSpPr>
+          <a:xfrm>
+            <a:off x="575311" y="283113"/>
+            <a:ext cx="11041378" cy="6507166"/>
+            <a:chOff x="655320" y="283113"/>
+            <a:chExt cx="11041378" cy="6507166"/>
+          </a:xfrm>
+        </p:grpSpPr>
+        <p:grpSp>
+          <p:nvGrpSpPr>
+            <p:cNvPr id="96" name="组合 95">
+              <a:extLst>
+                <a:ext uri="{FF2B5EF4-FFF2-40B4-BE49-F238E27FC236}">
+                  <a16:creationId xmlns:a16="http://schemas.microsoft.com/office/drawing/2014/main" id="{70FC21AD-66C9-8082-E91B-A82CC788FB91}"/>
+                </a:ext>
+              </a:extLst>
+            </p:cNvPr>
+            <p:cNvGrpSpPr/>
+            <p:nvPr/>
+          </p:nvGrpSpPr>
+          <p:grpSpPr>
+            <a:xfrm>
+              <a:off x="655320" y="283113"/>
+              <a:ext cx="3320230" cy="1088543"/>
+              <a:chOff x="889026" y="2307271"/>
+              <a:chExt cx="2413214" cy="986391"/>
+            </a:xfrm>
+          </p:grpSpPr>
+          <p:sp>
+            <p:nvSpPr>
+              <p:cNvPr id="2" name="矩形 1">
+                <a:extLst>
+                  <a:ext uri="{FF2B5EF4-FFF2-40B4-BE49-F238E27FC236}">
+                    <a16:creationId xmlns:a16="http://schemas.microsoft.com/office/drawing/2014/main" id="{11339D1B-3C73-529F-5BEB-6C2B1EF0DAA5}"/>
+                  </a:ext>
+                </a:extLst>
+              </p:cNvPr>
+              <p:cNvSpPr/>
+              <p:nvPr/>
+            </p:nvSpPr>
+            <p:spPr>
+              <a:xfrm>
+                <a:off x="1037621" y="2307271"/>
+                <a:ext cx="2185478" cy="986391"/>
+              </a:xfrm>
+              <a:prstGeom prst="rect">
+                <a:avLst/>
+              </a:prstGeom>
+              <a:noFill/>
+              <a:ln w="19050">
+                <a:solidFill>
+                  <a:schemeClr val="tx1"/>
+                </a:solidFill>
+              </a:ln>
+            </p:spPr>
+            <p:style>
+              <a:lnRef idx="2">
+                <a:schemeClr val="accent1">
+                  <a:shade val="15000"/>
+                </a:schemeClr>
+              </a:lnRef>
+              <a:fillRef idx="1">
+                <a:schemeClr val="accent1"/>
+              </a:fillRef>
+              <a:effectRef idx="0">
+                <a:schemeClr val="accent1"/>
+              </a:effectRef>
+              <a:fontRef idx="minor">
+                <a:schemeClr val="lt1"/>
+              </a:fontRef>
+            </p:style>
+            <p:txBody>
+              <a:bodyPr rtlCol="0" anchor="ctr"/>
+              <a:lstStyle/>
+              <a:p>
+                <a:pPr algn="ctr"/>
+                <a:endParaRPr lang="zh-CN" altLang="en-US" dirty="0" err="1">
+                  <a:solidFill>
+                    <a:schemeClr val="tx1"/>
+                  </a:solidFill>
+                  <a:latin typeface="Times New Roman" panose="02020603050405020304" pitchFamily="18" charset="0"/>
+                  <a:ea typeface="宋体" panose="02010600030101010101" pitchFamily="2" charset="-122"/>
+                </a:endParaRPr>
+              </a:p>
+            </p:txBody>
+          </p:sp>
+          <mc:AlternateContent xmlns:mc="http://schemas.openxmlformats.org/markup-compatibility/2006">
+            <mc:Choice xmlns:a14="http://schemas.microsoft.com/office/drawing/2010/main" Requires="a14">
+              <p:sp>
+                <p:nvSpPr>
+                  <p:cNvPr id="3" name="文本框 2">
+                    <a:extLst>
+                      <a:ext uri="{FF2B5EF4-FFF2-40B4-BE49-F238E27FC236}">
+                        <a16:creationId xmlns:a16="http://schemas.microsoft.com/office/drawing/2014/main" id="{3C28E2EE-28FF-44B4-7C4A-09596371771C}"/>
+                      </a:ext>
+                    </a:extLst>
+                  </p:cNvPr>
+                  <p:cNvSpPr txBox="1"/>
+                  <p:nvPr/>
+                </p:nvSpPr>
+                <p:spPr>
+                  <a:xfrm>
+                    <a:off x="889026" y="2463355"/>
+                    <a:ext cx="2413214" cy="728393"/>
+                  </a:xfrm>
+                  <a:prstGeom prst="rect">
+                    <a:avLst/>
+                  </a:prstGeom>
+                  <a:noFill/>
+                </p:spPr>
+                <p:txBody>
+                  <a:bodyPr wrap="square" rtlCol="0" anchor="ctr" anchorCtr="1">
+                    <a:spAutoFit/>
+                  </a:bodyPr>
+                  <a:lstStyle/>
+                  <a:p>
+                    <a:pPr algn="ctr"/>
+                    <a:r>
+                      <a:rPr lang="zh-CN" altLang="en-US" dirty="0">
+                        <a:latin typeface="Times New Roman" panose="02020603050405020304" pitchFamily="18" charset="0"/>
+                        <a:ea typeface="宋体" panose="02010600030101010101" pitchFamily="2" charset="-122"/>
+                      </a:rPr>
+                      <a:t>初始化竞争窗口</a:t>
+                    </a:r>
+                    <a14:m>
+                      <m:oMath xmlns:m="http://schemas.openxmlformats.org/officeDocument/2006/math">
+                        <m:r>
+                          <a:rPr lang="en-US" altLang="zh-CN" i="1" dirty="0" smtClean="0">
+                            <a:latin typeface="Cambria Math" panose="02040503050406030204" pitchFamily="18" charset="0"/>
+                            <a:ea typeface="宋体" panose="02010600030101010101" pitchFamily="2" charset="-122"/>
+                          </a:rPr>
+                          <m:t>𝐶𝑊</m:t>
+                        </m:r>
+                        <m:r>
+                          <a:rPr lang="en-US" altLang="zh-CN" b="0" i="1" dirty="0" smtClean="0">
+                            <a:latin typeface="Cambria Math" panose="02040503050406030204" pitchFamily="18" charset="0"/>
+                            <a:ea typeface="宋体" panose="02010600030101010101" pitchFamily="2" charset="-122"/>
+                          </a:rPr>
+                          <m:t>=</m:t>
+                        </m:r>
+                        <m:r>
+                          <a:rPr lang="en-US" altLang="zh-CN" b="0" i="1" dirty="0" smtClean="0">
+                            <a:latin typeface="Cambria Math" panose="02040503050406030204" pitchFamily="18" charset="0"/>
+                            <a:ea typeface="宋体" panose="02010600030101010101" pitchFamily="2" charset="-122"/>
+                          </a:rPr>
+                          <m:t>𝐶</m:t>
+                        </m:r>
+                        <m:sSub>
+                          <m:sSubPr>
+                            <m:ctrlPr>
+                              <a:rPr lang="en-US" altLang="zh-CN" b="0" i="1" dirty="0" smtClean="0">
+                                <a:latin typeface="Cambria Math" panose="02040503050406030204" pitchFamily="18" charset="0"/>
+                                <a:ea typeface="宋体" panose="02010600030101010101" pitchFamily="2" charset="-122"/>
+                              </a:rPr>
+                            </m:ctrlPr>
+                          </m:sSubPr>
+                          <m:e>
+                            <m:r>
+                              <a:rPr lang="en-US" altLang="zh-CN" b="0" i="1" dirty="0" smtClean="0">
+                                <a:latin typeface="Cambria Math" panose="02040503050406030204" pitchFamily="18" charset="0"/>
+                                <a:ea typeface="宋体" panose="02010600030101010101" pitchFamily="2" charset="-122"/>
+                              </a:rPr>
+                              <m:t>𝑊</m:t>
+                            </m:r>
+                          </m:e>
+                          <m:sub>
+                            <m:r>
+                              <a:rPr lang="en-US" altLang="zh-CN" b="0" i="1" dirty="0" smtClean="0">
+                                <a:latin typeface="Cambria Math" panose="02040503050406030204" pitchFamily="18" charset="0"/>
+                                <a:ea typeface="宋体" panose="02010600030101010101" pitchFamily="2" charset="-122"/>
+                              </a:rPr>
+                              <m:t>𝑚𝑖𝑛</m:t>
+                            </m:r>
+                          </m:sub>
+                        </m:sSub>
+                      </m:oMath>
+                    </a14:m>
+                    <a:endParaRPr lang="en-US" altLang="zh-CN" dirty="0">
+                      <a:latin typeface="Times New Roman" panose="02020603050405020304" pitchFamily="18" charset="0"/>
+                      <a:ea typeface="宋体" panose="02010600030101010101" pitchFamily="2" charset="-122"/>
+                    </a:endParaRPr>
+                  </a:p>
+                  <a:p>
+                    <a:pPr algn="ctr"/>
+                    <a:r>
+                      <a:rPr lang="zh-CN" altLang="en-US" dirty="0">
+                        <a:latin typeface="Times New Roman" panose="02020603050405020304" pitchFamily="18" charset="0"/>
+                        <a:ea typeface="宋体" panose="02010600030101010101" pitchFamily="2" charset="-122"/>
+                      </a:rPr>
+                      <a:t>生成随机数</a:t>
+                    </a:r>
+                    <a14:m>
+                      <m:oMath xmlns:m="http://schemas.openxmlformats.org/officeDocument/2006/math">
+                        <m:r>
+                          <a:rPr lang="en-US" altLang="zh-CN" i="1" dirty="0" smtClean="0">
+                            <a:latin typeface="Cambria Math" panose="02040503050406030204" pitchFamily="18" charset="0"/>
+                            <a:ea typeface="宋体" panose="02010600030101010101" pitchFamily="2" charset="-122"/>
+                          </a:rPr>
+                          <m:t>𝑁</m:t>
+                        </m:r>
+                      </m:oMath>
+                    </a14:m>
+                    <a:r>
+                      <a:rPr lang="en-US" altLang="zh-CN" dirty="0">
+                        <a:latin typeface="Times New Roman" panose="02020603050405020304" pitchFamily="18" charset="0"/>
+                        <a:ea typeface="宋体" panose="02010600030101010101" pitchFamily="2" charset="-122"/>
+                      </a:rPr>
+                      <a:t>:</a:t>
+                    </a:r>
+                    <a14:m>
+                      <m:oMath xmlns:m="http://schemas.openxmlformats.org/officeDocument/2006/math">
+                        <m:r>
+                          <a:rPr lang="en-US" altLang="zh-CN" i="1" dirty="0">
+                            <a:latin typeface="Cambria Math" panose="02040503050406030204" pitchFamily="18" charset="0"/>
+                            <a:ea typeface="宋体" panose="02010600030101010101" pitchFamily="2" charset="-122"/>
+                          </a:rPr>
+                          <m:t>𝑁</m:t>
+                        </m:r>
+                        <m:r>
+                          <a:rPr lang="en-US" altLang="zh-CN" i="1" dirty="0">
+                            <a:latin typeface="Cambria Math" panose="02040503050406030204" pitchFamily="18" charset="0"/>
+                            <a:ea typeface="宋体" panose="02010600030101010101" pitchFamily="2" charset="-122"/>
+                          </a:rPr>
+                          <m:t>∈ [0, </m:t>
+                        </m:r>
+                        <m:r>
+                          <a:rPr lang="en-US" altLang="zh-CN" i="1" dirty="0">
+                            <a:latin typeface="Cambria Math" panose="02040503050406030204" pitchFamily="18" charset="0"/>
+                            <a:ea typeface="宋体" panose="02010600030101010101" pitchFamily="2" charset="-122"/>
+                          </a:rPr>
+                          <m:t>𝐶𝑊</m:t>
+                        </m:r>
+                        <m:r>
+                          <a:rPr lang="en-US" altLang="zh-CN" i="1" dirty="0">
+                            <a:latin typeface="Cambria Math" panose="02040503050406030204" pitchFamily="18" charset="0"/>
+                            <a:ea typeface="宋体" panose="02010600030101010101" pitchFamily="2" charset="-122"/>
+                          </a:rPr>
+                          <m:t>]</m:t>
+                        </m:r>
+                      </m:oMath>
+                    </a14:m>
+                    <a:endParaRPr lang="en-US" altLang="zh-CN" dirty="0">
+                      <a:latin typeface="Times New Roman" panose="02020603050405020304" pitchFamily="18" charset="0"/>
+                      <a:ea typeface="宋体" panose="02010600030101010101" pitchFamily="2" charset="-122"/>
+                    </a:endParaRPr>
+                  </a:p>
+                </p:txBody>
+              </p:sp>
+            </mc:Choice>
+            <mc:Fallback>
+              <p:sp>
+                <p:nvSpPr>
+                  <p:cNvPr id="3" name="文本框 2">
+                    <a:extLst>
+                      <a:ext uri="{FF2B5EF4-FFF2-40B4-BE49-F238E27FC236}">
+                        <a16:creationId xmlns:a16="http://schemas.microsoft.com/office/drawing/2014/main" id="{3C28E2EE-28FF-44B4-7C4A-09596371771C}"/>
+                      </a:ext>
+                    </a:extLst>
+                  </p:cNvPr>
+                  <p:cNvSpPr txBox="1">
+                    <a:spLocks noRot="1" noChangeAspect="1" noMove="1" noResize="1" noEditPoints="1" noAdjustHandles="1" noChangeArrowheads="1" noChangeShapeType="1" noTextEdit="1"/>
+                  </p:cNvSpPr>
+                  <p:nvPr/>
+                </p:nvSpPr>
+                <p:spPr>
+                  <a:xfrm>
+                    <a:off x="889026" y="2463355"/>
+                    <a:ext cx="2413214" cy="728393"/>
+                  </a:xfrm>
+                  <a:prstGeom prst="rect">
+                    <a:avLst/>
+                  </a:prstGeom>
+                  <a:blipFill>
+                    <a:blip r:embed="rId2"/>
+                    <a:stretch>
+                      <a:fillRect b="-2273"/>
+                    </a:stretch>
+                  </a:blipFill>
+                </p:spPr>
+                <p:txBody>
+                  <a:bodyPr/>
+                  <a:lstStyle/>
+                  <a:p>
+                    <a:r>
+                      <a:rPr lang="zh-CN" altLang="en-US">
+                        <a:noFill/>
+                      </a:rPr>
+                      <a:t> </a:t>
+                    </a:r>
+                  </a:p>
+                </p:txBody>
+              </p:sp>
+            </mc:Fallback>
+          </mc:AlternateContent>
+        </p:grpSp>
+        <p:cxnSp>
+          <p:nvCxnSpPr>
+            <p:cNvPr id="17" name="直接箭头连接符 16">
+              <a:extLst>
+                <a:ext uri="{FF2B5EF4-FFF2-40B4-BE49-F238E27FC236}">
+                  <a16:creationId xmlns:a16="http://schemas.microsoft.com/office/drawing/2014/main" id="{F4BC76EE-D638-3D3C-9B19-EE30CE24575E}"/>
+                </a:ext>
+              </a:extLst>
+            </p:cNvPr>
+            <p:cNvCxnSpPr>
+              <a:cxnSpLocks/>
+              <a:stCxn id="2" idx="3"/>
+              <a:endCxn id="107" idx="1"/>
+            </p:cNvCxnSpPr>
+            <p:nvPr/>
+          </p:nvCxnSpPr>
+          <p:spPr>
+            <a:xfrm>
+              <a:off x="3866664" y="827385"/>
+              <a:ext cx="393227" cy="41"/>
+            </a:xfrm>
+            <a:prstGeom prst="straightConnector1">
+              <a:avLst/>
+            </a:prstGeom>
+            <a:ln w="19050">
+              <a:solidFill>
+                <a:schemeClr val="tx1"/>
+              </a:solidFill>
+              <a:tailEnd type="triangle"/>
+            </a:ln>
+          </p:spPr>
+          <p:style>
+            <a:lnRef idx="1">
+              <a:schemeClr val="accent1"/>
+            </a:lnRef>
+            <a:fillRef idx="0">
+              <a:schemeClr val="accent1"/>
+            </a:fillRef>
+            <a:effectRef idx="0">
+              <a:schemeClr val="accent1"/>
+            </a:effectRef>
+            <a:fontRef idx="minor">
+              <a:schemeClr val="tx1"/>
+            </a:fontRef>
+          </p:style>
+        </p:cxnSp>
+        <p:grpSp>
+          <p:nvGrpSpPr>
+            <p:cNvPr id="8" name="组合 7">
+              <a:extLst>
+                <a:ext uri="{FF2B5EF4-FFF2-40B4-BE49-F238E27FC236}">
+                  <a16:creationId xmlns:a16="http://schemas.microsoft.com/office/drawing/2014/main" id="{104C9BB0-BCFD-6ACE-1E6D-5CBC48698FDC}"/>
+                </a:ext>
+              </a:extLst>
+            </p:cNvPr>
+            <p:cNvGrpSpPr/>
+            <p:nvPr/>
+          </p:nvGrpSpPr>
+          <p:grpSpPr>
+            <a:xfrm>
+              <a:off x="8005876" y="1575365"/>
+              <a:ext cx="2470522" cy="690539"/>
+              <a:chOff x="1271081" y="1407269"/>
+              <a:chExt cx="1900556" cy="778214"/>
+            </a:xfrm>
+          </p:grpSpPr>
+          <p:sp>
+            <p:nvSpPr>
+              <p:cNvPr id="9" name="矩形 8">
+                <a:extLst>
+                  <a:ext uri="{FF2B5EF4-FFF2-40B4-BE49-F238E27FC236}">
+                    <a16:creationId xmlns:a16="http://schemas.microsoft.com/office/drawing/2014/main" id="{50DF8695-7FF0-E790-0616-C1876B489F98}"/>
+                  </a:ext>
+                </a:extLst>
+              </p:cNvPr>
+              <p:cNvSpPr/>
+              <p:nvPr/>
+            </p:nvSpPr>
+            <p:spPr>
+              <a:xfrm>
+                <a:off x="1271081" y="1407269"/>
+                <a:ext cx="1893651" cy="778214"/>
+              </a:xfrm>
+              <a:prstGeom prst="rect">
+                <a:avLst/>
+              </a:prstGeom>
+              <a:noFill/>
+              <a:ln w="19050">
+                <a:solidFill>
+                  <a:schemeClr val="tx1"/>
+                </a:solidFill>
+              </a:ln>
+            </p:spPr>
+            <p:style>
+              <a:lnRef idx="2">
+                <a:schemeClr val="accent1">
+                  <a:shade val="15000"/>
+                </a:schemeClr>
+              </a:lnRef>
+              <a:fillRef idx="1">
+                <a:schemeClr val="accent1"/>
+              </a:fillRef>
+              <a:effectRef idx="0">
+                <a:schemeClr val="accent1"/>
+              </a:effectRef>
+              <a:fontRef idx="minor">
+                <a:schemeClr val="lt1"/>
+              </a:fontRef>
+            </p:style>
+            <p:txBody>
+              <a:bodyPr rtlCol="0" anchor="ctr"/>
+              <a:lstStyle/>
+              <a:p>
+                <a:pPr algn="ctr"/>
+                <a:endParaRPr lang="zh-CN" altLang="en-US" dirty="0" err="1">
+                  <a:solidFill>
+                    <a:schemeClr val="tx1"/>
+                  </a:solidFill>
+                  <a:latin typeface="Times New Roman" panose="02020603050405020304" pitchFamily="18" charset="0"/>
+                  <a:ea typeface="宋体" panose="02010600030101010101" pitchFamily="2" charset="-122"/>
+                </a:endParaRPr>
+              </a:p>
+            </p:txBody>
+          </p:sp>
+          <mc:AlternateContent xmlns:mc="http://schemas.openxmlformats.org/markup-compatibility/2006">
+            <mc:Choice xmlns:a14="http://schemas.microsoft.com/office/drawing/2010/main" Requires="a14">
+              <p:sp>
+                <p:nvSpPr>
+                  <p:cNvPr id="10" name="文本框 9">
+                    <a:extLst>
+                      <a:ext uri="{FF2B5EF4-FFF2-40B4-BE49-F238E27FC236}">
+                        <a16:creationId xmlns:a16="http://schemas.microsoft.com/office/drawing/2014/main" id="{6D9731EB-1D08-F1B0-5EF7-7E3983DACE05}"/>
+                      </a:ext>
+                    </a:extLst>
+                  </p:cNvPr>
+                  <p:cNvSpPr txBox="1"/>
+                  <p:nvPr/>
+                </p:nvSpPr>
+                <p:spPr>
+                  <a:xfrm>
+                    <a:off x="1277986" y="1611708"/>
+                    <a:ext cx="1893651" cy="369332"/>
+                  </a:xfrm>
+                  <a:prstGeom prst="rect">
+                    <a:avLst/>
+                  </a:prstGeom>
+                  <a:noFill/>
+                </p:spPr>
+                <p:txBody>
+                  <a:bodyPr wrap="square" rtlCol="0" anchor="ctr" anchorCtr="1">
+                    <a:spAutoFit/>
+                  </a:bodyPr>
+                  <a:lstStyle/>
+                  <a:p>
+                    <a:pPr algn="ctr"/>
+                    <a:r>
+                      <a:rPr lang="zh-CN" altLang="en-US" dirty="0">
+                        <a:ea typeface="宋体" panose="02010600030101010101" pitchFamily="2" charset="-122"/>
+                      </a:rPr>
+                      <a:t>随机数</a:t>
+                    </a:r>
+                    <a14:m>
+                      <m:oMath xmlns:m="http://schemas.openxmlformats.org/officeDocument/2006/math">
+                        <m:r>
+                          <a:rPr lang="en-US" altLang="zh-CN" i="1" dirty="0" smtClean="0">
+                            <a:latin typeface="Cambria Math" panose="02040503050406030204" pitchFamily="18" charset="0"/>
+                            <a:ea typeface="宋体" panose="02010600030101010101" pitchFamily="2" charset="-122"/>
+                          </a:rPr>
+                          <m:t>𝑁</m:t>
+                        </m:r>
+                      </m:oMath>
+                    </a14:m>
+                    <a:r>
+                      <a:rPr lang="zh-CN" altLang="en-US" dirty="0">
+                        <a:latin typeface="Times New Roman" panose="02020603050405020304" pitchFamily="18" charset="0"/>
+                        <a:ea typeface="宋体" panose="02010600030101010101" pitchFamily="2" charset="-122"/>
+                      </a:rPr>
+                      <a:t>保持</a:t>
+                    </a:r>
+                  </a:p>
+                </p:txBody>
+              </p:sp>
+            </mc:Choice>
+            <mc:Fallback>
+              <p:sp>
+                <p:nvSpPr>
+                  <p:cNvPr id="10" name="文本框 9">
+                    <a:extLst>
+                      <a:ext uri="{FF2B5EF4-FFF2-40B4-BE49-F238E27FC236}">
+                        <a16:creationId xmlns:a16="http://schemas.microsoft.com/office/drawing/2014/main" id="{6D9731EB-1D08-F1B0-5EF7-7E3983DACE05}"/>
+                      </a:ext>
+                    </a:extLst>
+                  </p:cNvPr>
+                  <p:cNvSpPr txBox="1">
+                    <a:spLocks noRot="1" noChangeAspect="1" noMove="1" noResize="1" noEditPoints="1" noAdjustHandles="1" noChangeArrowheads="1" noChangeShapeType="1" noTextEdit="1"/>
+                  </p:cNvSpPr>
+                  <p:nvPr/>
+                </p:nvSpPr>
+                <p:spPr>
+                  <a:xfrm>
+                    <a:off x="1277986" y="1611708"/>
+                    <a:ext cx="1893651" cy="369332"/>
+                  </a:xfrm>
+                  <a:prstGeom prst="rect">
+                    <a:avLst/>
+                  </a:prstGeom>
+                  <a:blipFill>
+                    <a:blip r:embed="rId3"/>
+                    <a:stretch>
+                      <a:fillRect t="-18519" b="-31481"/>
+                    </a:stretch>
+                  </a:blipFill>
+                </p:spPr>
+                <p:txBody>
+                  <a:bodyPr/>
+                  <a:lstStyle/>
+                  <a:p>
+                    <a:r>
+                      <a:rPr lang="zh-CN" altLang="en-US">
+                        <a:noFill/>
+                      </a:rPr>
+                      <a:t> </a:t>
+                    </a:r>
+                  </a:p>
+                </p:txBody>
+              </p:sp>
+            </mc:Fallback>
+          </mc:AlternateContent>
+        </p:grpSp>
+        <p:cxnSp>
+          <p:nvCxnSpPr>
+            <p:cNvPr id="14" name="直接箭头连接符 13">
+              <a:extLst>
+                <a:ext uri="{FF2B5EF4-FFF2-40B4-BE49-F238E27FC236}">
+                  <a16:creationId xmlns:a16="http://schemas.microsoft.com/office/drawing/2014/main" id="{5F139A33-A66D-9793-8D9A-115F2F295C70}"/>
+                </a:ext>
+              </a:extLst>
+            </p:cNvPr>
+            <p:cNvCxnSpPr>
+              <a:cxnSpLocks/>
+              <a:stCxn id="107" idx="2"/>
+              <a:endCxn id="148" idx="0"/>
+            </p:cNvCxnSpPr>
+            <p:nvPr/>
+          </p:nvCxnSpPr>
+          <p:spPr>
+            <a:xfrm flipH="1">
+              <a:off x="5795195" y="1371697"/>
+              <a:ext cx="1" cy="203667"/>
+            </a:xfrm>
+            <a:prstGeom prst="straightConnector1">
+              <a:avLst/>
+            </a:prstGeom>
+            <a:ln w="19050">
+              <a:solidFill>
+                <a:schemeClr val="tx1"/>
+              </a:solidFill>
+              <a:tailEnd type="triangle"/>
+            </a:ln>
+          </p:spPr>
+          <p:style>
+            <a:lnRef idx="1">
+              <a:schemeClr val="accent1"/>
+            </a:lnRef>
+            <a:fillRef idx="0">
+              <a:schemeClr val="accent1"/>
+            </a:fillRef>
+            <a:effectRef idx="0">
+              <a:schemeClr val="accent1"/>
+            </a:effectRef>
+            <a:fontRef idx="minor">
+              <a:schemeClr val="tx1"/>
+            </a:fontRef>
+          </p:style>
+        </p:cxnSp>
+        <p:cxnSp>
+          <p:nvCxnSpPr>
+            <p:cNvPr id="30" name="直接箭头连接符 29">
+              <a:extLst>
+                <a:ext uri="{FF2B5EF4-FFF2-40B4-BE49-F238E27FC236}">
+                  <a16:creationId xmlns:a16="http://schemas.microsoft.com/office/drawing/2014/main" id="{668789DC-78DB-E6B5-339A-50559D807B14}"/>
+                </a:ext>
+              </a:extLst>
+            </p:cNvPr>
+            <p:cNvCxnSpPr>
+              <a:cxnSpLocks/>
+              <a:stCxn id="107" idx="3"/>
+              <a:endCxn id="9" idx="0"/>
+            </p:cNvCxnSpPr>
+            <p:nvPr/>
+          </p:nvCxnSpPr>
+          <p:spPr>
+            <a:xfrm>
+              <a:off x="7330500" y="827426"/>
+              <a:ext cx="1906149" cy="747939"/>
+            </a:xfrm>
+            <a:prstGeom prst="bentConnector2">
+              <a:avLst/>
+            </a:prstGeom>
+            <a:ln w="19050">
+              <a:solidFill>
+                <a:schemeClr val="tx1"/>
+              </a:solidFill>
+              <a:tailEnd type="triangle"/>
+            </a:ln>
+          </p:spPr>
+          <p:style>
+            <a:lnRef idx="1">
+              <a:schemeClr val="accent1"/>
+            </a:lnRef>
+            <a:fillRef idx="0">
+              <a:schemeClr val="accent1"/>
+            </a:fillRef>
+            <a:effectRef idx="0">
+              <a:schemeClr val="accent1"/>
+            </a:effectRef>
+            <a:fontRef idx="minor">
+              <a:schemeClr val="tx1"/>
+            </a:fontRef>
+          </p:style>
+        </p:cxnSp>
+        <p:cxnSp>
+          <p:nvCxnSpPr>
+            <p:cNvPr id="33" name="直接箭头连接符 32">
+              <a:extLst>
+                <a:ext uri="{FF2B5EF4-FFF2-40B4-BE49-F238E27FC236}">
+                  <a16:creationId xmlns:a16="http://schemas.microsoft.com/office/drawing/2014/main" id="{E54D4EF5-22F8-015A-9454-E5E6365F4050}"/>
+                </a:ext>
+              </a:extLst>
+            </p:cNvPr>
+            <p:cNvCxnSpPr>
+              <a:cxnSpLocks/>
+              <a:stCxn id="9" idx="3"/>
+              <a:endCxn id="107" idx="0"/>
+            </p:cNvCxnSpPr>
+            <p:nvPr/>
+          </p:nvCxnSpPr>
+          <p:spPr>
+            <a:xfrm flipH="1" flipV="1">
+              <a:off x="5795196" y="283154"/>
+              <a:ext cx="4672226" cy="1637481"/>
+            </a:xfrm>
+            <a:prstGeom prst="bentConnector4">
+              <a:avLst>
+                <a:gd name="adj1" fmla="val -30988"/>
+                <a:gd name="adj2" fmla="val 113960"/>
+              </a:avLst>
+            </a:prstGeom>
+            <a:ln w="19050">
+              <a:solidFill>
+                <a:schemeClr val="tx1"/>
+              </a:solidFill>
+              <a:tailEnd type="triangle"/>
+            </a:ln>
+          </p:spPr>
+          <p:style>
+            <a:lnRef idx="1">
+              <a:schemeClr val="accent1"/>
+            </a:lnRef>
+            <a:fillRef idx="0">
+              <a:schemeClr val="accent1"/>
+            </a:fillRef>
+            <a:effectRef idx="0">
+              <a:schemeClr val="accent1"/>
+            </a:effectRef>
+            <a:fontRef idx="minor">
+              <a:schemeClr val="tx1"/>
+            </a:fontRef>
+          </p:style>
+        </p:cxnSp>
+        <p:grpSp>
+          <p:nvGrpSpPr>
+            <p:cNvPr id="58" name="组合 57">
+              <a:extLst>
+                <a:ext uri="{FF2B5EF4-FFF2-40B4-BE49-F238E27FC236}">
+                  <a16:creationId xmlns:a16="http://schemas.microsoft.com/office/drawing/2014/main" id="{48188DF4-E787-E568-BCE9-1916F6269672}"/>
+                </a:ext>
+              </a:extLst>
+            </p:cNvPr>
+            <p:cNvGrpSpPr/>
+            <p:nvPr/>
+          </p:nvGrpSpPr>
+          <p:grpSpPr>
+            <a:xfrm>
+              <a:off x="4372642" y="3736611"/>
+              <a:ext cx="2845108" cy="492439"/>
+              <a:chOff x="1118682" y="1407268"/>
+              <a:chExt cx="2188723" cy="778213"/>
+            </a:xfrm>
+          </p:grpSpPr>
+          <p:sp>
+            <p:nvSpPr>
+              <p:cNvPr id="59" name="矩形 58">
+                <a:extLst>
+                  <a:ext uri="{FF2B5EF4-FFF2-40B4-BE49-F238E27FC236}">
+                    <a16:creationId xmlns:a16="http://schemas.microsoft.com/office/drawing/2014/main" id="{76372893-1E17-1D23-4F3D-5C7750259369}"/>
+                  </a:ext>
+                </a:extLst>
+              </p:cNvPr>
+              <p:cNvSpPr/>
+              <p:nvPr/>
+            </p:nvSpPr>
+            <p:spPr>
+              <a:xfrm>
+                <a:off x="1121927" y="1407268"/>
+                <a:ext cx="2185478" cy="778213"/>
+              </a:xfrm>
+              <a:prstGeom prst="rect">
+                <a:avLst/>
+              </a:prstGeom>
+              <a:noFill/>
+              <a:ln w="19050">
+                <a:solidFill>
+                  <a:schemeClr val="tx1"/>
+                </a:solidFill>
+              </a:ln>
+            </p:spPr>
+            <p:style>
+              <a:lnRef idx="2">
+                <a:schemeClr val="accent1">
+                  <a:shade val="15000"/>
+                </a:schemeClr>
+              </a:lnRef>
+              <a:fillRef idx="1">
+                <a:schemeClr val="accent1"/>
+              </a:fillRef>
+              <a:effectRef idx="0">
+                <a:schemeClr val="accent1"/>
+              </a:effectRef>
+              <a:fontRef idx="minor">
+                <a:schemeClr val="lt1"/>
+              </a:fontRef>
+            </p:style>
+            <p:txBody>
+              <a:bodyPr rtlCol="0" anchor="ctr"/>
+              <a:lstStyle/>
+              <a:p>
+                <a:pPr algn="ctr"/>
+                <a:endParaRPr lang="zh-CN" altLang="en-US" dirty="0" err="1">
+                  <a:solidFill>
+                    <a:schemeClr val="tx1"/>
+                  </a:solidFill>
+                  <a:latin typeface="Times New Roman" panose="02020603050405020304" pitchFamily="18" charset="0"/>
+                  <a:ea typeface="宋体" panose="02010600030101010101" pitchFamily="2" charset="-122"/>
+                </a:endParaRPr>
+              </a:p>
+            </p:txBody>
+          </p:sp>
+          <p:sp>
+            <p:nvSpPr>
+              <p:cNvPr id="60" name="文本框 59">
+                <a:extLst>
+                  <a:ext uri="{FF2B5EF4-FFF2-40B4-BE49-F238E27FC236}">
+                    <a16:creationId xmlns:a16="http://schemas.microsoft.com/office/drawing/2014/main" id="{C7730E32-5870-741F-A9F2-1EA01F4FF09A}"/>
+                  </a:ext>
+                </a:extLst>
+              </p:cNvPr>
+              <p:cNvSpPr txBox="1"/>
+              <p:nvPr/>
+            </p:nvSpPr>
+            <p:spPr>
+              <a:xfrm>
+                <a:off x="1118682" y="1537419"/>
+                <a:ext cx="2188721" cy="517907"/>
+              </a:xfrm>
+              <a:prstGeom prst="rect">
+                <a:avLst/>
+              </a:prstGeom>
+              <a:noFill/>
+            </p:spPr>
+            <p:txBody>
+              <a:bodyPr wrap="square" rtlCol="0" anchor="ctr" anchorCtr="1">
+                <a:spAutoFit/>
+              </a:bodyPr>
+              <a:lstStyle/>
+              <a:p>
+                <a:pPr algn="ctr"/>
+                <a:r>
+                  <a:rPr lang="zh-CN" altLang="en-US" dirty="0">
+                    <a:latin typeface="Times New Roman" panose="02020603050405020304" pitchFamily="18" charset="0"/>
+                    <a:ea typeface="宋体" panose="02010600030101010101" pitchFamily="2" charset="-122"/>
+                  </a:rPr>
+                  <a:t>数据传输</a:t>
+                </a:r>
+                <a:endParaRPr lang="en-US" altLang="zh-CN" dirty="0">
+                  <a:latin typeface="Times New Roman" panose="02020603050405020304" pitchFamily="18" charset="0"/>
+                  <a:ea typeface="宋体" panose="02010600030101010101" pitchFamily="2" charset="-122"/>
+                </a:endParaRPr>
+              </a:p>
+            </p:txBody>
+          </p:sp>
+        </p:grpSp>
+        <p:cxnSp>
+          <p:nvCxnSpPr>
+            <p:cNvPr id="62" name="直接箭头连接符 61">
+              <a:extLst>
+                <a:ext uri="{FF2B5EF4-FFF2-40B4-BE49-F238E27FC236}">
+                  <a16:creationId xmlns:a16="http://schemas.microsoft.com/office/drawing/2014/main" id="{C2EE79CC-FD9C-0628-8A98-17D90987ACFD}"/>
+                </a:ext>
+              </a:extLst>
+            </p:cNvPr>
+            <p:cNvCxnSpPr>
+              <a:cxnSpLocks/>
+              <a:stCxn id="138" idx="2"/>
+              <a:endCxn id="59" idx="0"/>
+            </p:cNvCxnSpPr>
+            <p:nvPr/>
+          </p:nvCxnSpPr>
+          <p:spPr>
+            <a:xfrm>
+              <a:off x="5795196" y="3494854"/>
+              <a:ext cx="2109" cy="241757"/>
+            </a:xfrm>
+            <a:prstGeom prst="straightConnector1">
+              <a:avLst/>
+            </a:prstGeom>
+            <a:ln w="19050">
+              <a:solidFill>
+                <a:schemeClr val="tx1"/>
+              </a:solidFill>
+              <a:tailEnd type="triangle"/>
+            </a:ln>
+          </p:spPr>
+          <p:style>
+            <a:lnRef idx="1">
+              <a:schemeClr val="accent1"/>
+            </a:lnRef>
+            <a:fillRef idx="0">
+              <a:schemeClr val="accent1"/>
+            </a:fillRef>
+            <a:effectRef idx="0">
+              <a:schemeClr val="accent1"/>
+            </a:effectRef>
+            <a:fontRef idx="minor">
+              <a:schemeClr val="tx1"/>
+            </a:fontRef>
+          </p:style>
+        </p:cxnSp>
+        <p:grpSp>
+          <p:nvGrpSpPr>
+            <p:cNvPr id="84" name="组合 83">
+              <a:extLst>
+                <a:ext uri="{FF2B5EF4-FFF2-40B4-BE49-F238E27FC236}">
+                  <a16:creationId xmlns:a16="http://schemas.microsoft.com/office/drawing/2014/main" id="{2B51E7D3-46F8-43EF-42AC-E82393F7B6C3}"/>
+                </a:ext>
+              </a:extLst>
+            </p:cNvPr>
+            <p:cNvGrpSpPr/>
+            <p:nvPr/>
+          </p:nvGrpSpPr>
+          <p:grpSpPr>
+            <a:xfrm>
+              <a:off x="7891027" y="5589950"/>
+              <a:ext cx="3805671" cy="1200329"/>
+              <a:chOff x="7466795" y="4151153"/>
+              <a:chExt cx="2804577" cy="1352731"/>
+            </a:xfrm>
+          </p:grpSpPr>
+          <p:sp>
+            <p:nvSpPr>
+              <p:cNvPr id="82" name="矩形 81">
+                <a:extLst>
+                  <a:ext uri="{FF2B5EF4-FFF2-40B4-BE49-F238E27FC236}">
+                    <a16:creationId xmlns:a16="http://schemas.microsoft.com/office/drawing/2014/main" id="{CF2727FE-FA1F-D0D3-CC3D-946F6E0803A2}"/>
+                  </a:ext>
+                </a:extLst>
+              </p:cNvPr>
+              <p:cNvSpPr/>
+              <p:nvPr/>
+            </p:nvSpPr>
+            <p:spPr>
+              <a:xfrm>
+                <a:off x="7555149" y="4174373"/>
+                <a:ext cx="2716223" cy="1306291"/>
+              </a:xfrm>
+              <a:prstGeom prst="rect">
+                <a:avLst/>
+              </a:prstGeom>
+              <a:noFill/>
+              <a:ln w="19050">
+                <a:solidFill>
+                  <a:schemeClr val="tx1"/>
+                </a:solidFill>
+              </a:ln>
+            </p:spPr>
+            <p:style>
+              <a:lnRef idx="2">
+                <a:schemeClr val="accent1">
+                  <a:shade val="15000"/>
+                </a:schemeClr>
+              </a:lnRef>
+              <a:fillRef idx="1">
+                <a:schemeClr val="accent1"/>
+              </a:fillRef>
+              <a:effectRef idx="0">
+                <a:schemeClr val="accent1"/>
+              </a:effectRef>
+              <a:fontRef idx="minor">
+                <a:schemeClr val="lt1"/>
+              </a:fontRef>
+            </p:style>
+            <p:txBody>
+              <a:bodyPr rtlCol="0" anchor="ctr"/>
+              <a:lstStyle/>
+              <a:p>
+                <a:pPr algn="ctr"/>
+                <a:endParaRPr lang="zh-CN" altLang="en-US" dirty="0" err="1">
+                  <a:solidFill>
+                    <a:schemeClr val="tx1"/>
+                  </a:solidFill>
+                  <a:latin typeface="Times New Roman" panose="02020603050405020304" pitchFamily="18" charset="0"/>
+                  <a:ea typeface="宋体" panose="02010600030101010101" pitchFamily="2" charset="-122"/>
+                </a:endParaRPr>
+              </a:p>
+            </p:txBody>
+          </p:sp>
+          <mc:AlternateContent xmlns:mc="http://schemas.openxmlformats.org/markup-compatibility/2006">
+            <mc:Choice xmlns:a14="http://schemas.microsoft.com/office/drawing/2010/main" Requires="a14">
+              <p:sp>
+                <p:nvSpPr>
+                  <p:cNvPr id="83" name="文本框 82">
+                    <a:extLst>
+                      <a:ext uri="{FF2B5EF4-FFF2-40B4-BE49-F238E27FC236}">
+                        <a16:creationId xmlns:a16="http://schemas.microsoft.com/office/drawing/2014/main" id="{4EDBF2F0-6ADF-02D9-7154-244748AB621B}"/>
+                      </a:ext>
+                    </a:extLst>
+                  </p:cNvPr>
+                  <p:cNvSpPr txBox="1"/>
+                  <p:nvPr/>
+                </p:nvSpPr>
+                <p:spPr>
+                  <a:xfrm>
+                    <a:off x="7466795" y="4151153"/>
+                    <a:ext cx="2804577" cy="1352731"/>
+                  </a:xfrm>
+                  <a:prstGeom prst="rect">
+                    <a:avLst/>
+                  </a:prstGeom>
+                  <a:noFill/>
+                </p:spPr>
+                <p:txBody>
+                  <a:bodyPr wrap="square" rtlCol="0" anchor="ctr" anchorCtr="1">
+                    <a:spAutoFit/>
+                  </a:bodyPr>
+                  <a:lstStyle/>
+                  <a:p>
+                    <a:pPr algn="ctr"/>
+                    <a:r>
+                      <a:rPr lang="zh-CN" altLang="en-US" dirty="0">
+                        <a:latin typeface="Times New Roman" panose="02020603050405020304" pitchFamily="18" charset="0"/>
+                        <a:ea typeface="宋体" panose="02010600030101010101" pitchFamily="2" charset="-122"/>
+                      </a:rPr>
+                      <a:t>调整窗口：</a:t>
+                    </a:r>
+                    <a:endParaRPr lang="en-US" altLang="zh-CN" dirty="0">
+                      <a:latin typeface="Times New Roman" panose="02020603050405020304" pitchFamily="18" charset="0"/>
+                      <a:ea typeface="宋体" panose="02010600030101010101" pitchFamily="2" charset="-122"/>
+                    </a:endParaRPr>
+                  </a:p>
+                  <a:p>
+                    <a:pPr algn="ctr"/>
+                    <a14:m>
+                      <m:oMathPara xmlns:m="http://schemas.openxmlformats.org/officeDocument/2006/math">
+                        <m:oMathParaPr>
+                          <m:jc m:val="centerGroup"/>
+                        </m:oMathParaPr>
+                        <m:oMath xmlns:m="http://schemas.openxmlformats.org/officeDocument/2006/math">
+                          <m:r>
+                            <a:rPr lang="en-US" altLang="zh-CN" i="1" dirty="0" smtClean="0">
+                              <a:latin typeface="Cambria Math" panose="02040503050406030204" pitchFamily="18" charset="0"/>
+                              <a:ea typeface="宋体" panose="02010600030101010101" pitchFamily="2" charset="-122"/>
+                            </a:rPr>
+                            <m:t>𝐶</m:t>
+                          </m:r>
+                          <m:sSub>
+                            <m:sSubPr>
+                              <m:ctrlPr>
+                                <a:rPr lang="en-US" altLang="zh-CN" i="1" dirty="0" smtClean="0">
+                                  <a:latin typeface="Cambria Math" panose="02040503050406030204" pitchFamily="18" charset="0"/>
+                                  <a:ea typeface="宋体" panose="02010600030101010101" pitchFamily="2" charset="-122"/>
+                                </a:rPr>
+                              </m:ctrlPr>
+                            </m:sSubPr>
+                            <m:e>
+                              <m:r>
+                                <a:rPr lang="en-US" altLang="zh-CN" i="1" dirty="0" smtClean="0">
+                                  <a:latin typeface="Cambria Math" panose="02040503050406030204" pitchFamily="18" charset="0"/>
+                                  <a:ea typeface="宋体" panose="02010600030101010101" pitchFamily="2" charset="-122"/>
+                                </a:rPr>
+                                <m:t>𝑊</m:t>
+                              </m:r>
+                            </m:e>
+                            <m:sub>
+                              <m:r>
+                                <a:rPr lang="en-US" altLang="zh-CN" b="0" i="1" dirty="0" smtClean="0">
+                                  <a:latin typeface="Cambria Math" panose="02040503050406030204" pitchFamily="18" charset="0"/>
+                                  <a:ea typeface="宋体" panose="02010600030101010101" pitchFamily="2" charset="-122"/>
+                                </a:rPr>
+                                <m:t>𝑛𝑒𝑤</m:t>
+                              </m:r>
+                            </m:sub>
+                          </m:sSub>
+                          <m:r>
+                            <a:rPr lang="en-US" altLang="zh-CN" b="0" i="1" dirty="0" smtClean="0">
+                              <a:latin typeface="Cambria Math" panose="02040503050406030204" pitchFamily="18" charset="0"/>
+                              <a:ea typeface="宋体" panose="02010600030101010101" pitchFamily="2" charset="-122"/>
+                            </a:rPr>
+                            <m:t>=</m:t>
+                          </m:r>
+                          <m:r>
+                            <m:rPr>
+                              <m:sty m:val="p"/>
+                            </m:rPr>
+                            <a:rPr lang="en-US" altLang="zh-CN" b="0" i="0" dirty="0" smtClean="0">
+                              <a:latin typeface="Cambria Math" panose="02040503050406030204" pitchFamily="18" charset="0"/>
+                              <a:ea typeface="宋体" panose="02010600030101010101" pitchFamily="2" charset="-122"/>
+                            </a:rPr>
+                            <m:t>min</m:t>
+                          </m:r>
+                          <m:r>
+                            <a:rPr lang="en-US" altLang="zh-CN" b="0" i="1" dirty="0" smtClean="0">
+                              <a:latin typeface="Cambria Math" panose="02040503050406030204" pitchFamily="18" charset="0"/>
+                              <a:ea typeface="宋体" panose="02010600030101010101" pitchFamily="2" charset="-122"/>
+                            </a:rPr>
+                            <m:t>⁡(2</m:t>
+                          </m:r>
+                          <m:r>
+                            <a:rPr lang="en-US" altLang="zh-CN" b="0" i="1" dirty="0" smtClean="0">
+                              <a:latin typeface="Cambria Math" panose="02040503050406030204" pitchFamily="18" charset="0"/>
+                              <a:ea typeface="宋体" panose="02010600030101010101" pitchFamily="2" charset="-122"/>
+                            </a:rPr>
+                            <m:t>𝐶</m:t>
+                          </m:r>
+                          <m:sSub>
+                            <m:sSubPr>
+                              <m:ctrlPr>
+                                <a:rPr lang="en-US" altLang="zh-CN" b="0" i="1" dirty="0" smtClean="0">
+                                  <a:latin typeface="Cambria Math" panose="02040503050406030204" pitchFamily="18" charset="0"/>
+                                  <a:ea typeface="宋体" panose="02010600030101010101" pitchFamily="2" charset="-122"/>
+                                </a:rPr>
+                              </m:ctrlPr>
+                            </m:sSubPr>
+                            <m:e>
+                              <m:r>
+                                <a:rPr lang="en-US" altLang="zh-CN" b="0" i="1" dirty="0" smtClean="0">
+                                  <a:latin typeface="Cambria Math" panose="02040503050406030204" pitchFamily="18" charset="0"/>
+                                  <a:ea typeface="宋体" panose="02010600030101010101" pitchFamily="2" charset="-122"/>
+                                </a:rPr>
+                                <m:t>𝑊</m:t>
+                              </m:r>
+                            </m:e>
+                            <m:sub>
+                              <m:r>
+                                <a:rPr lang="en-US" altLang="zh-CN" i="1" dirty="0">
+                                  <a:latin typeface="Cambria Math" panose="02040503050406030204" pitchFamily="18" charset="0"/>
+                                  <a:ea typeface="宋体" panose="02010600030101010101" pitchFamily="2" charset="-122"/>
+                                </a:rPr>
+                                <m:t>𝑜𝑙𝑑</m:t>
+                              </m:r>
+                            </m:sub>
+                          </m:sSub>
+                          <m:r>
+                            <a:rPr lang="en-US" altLang="zh-CN" b="0" i="1" dirty="0" smtClean="0">
+                              <a:latin typeface="Cambria Math" panose="02040503050406030204" pitchFamily="18" charset="0"/>
+                              <a:ea typeface="宋体" panose="02010600030101010101" pitchFamily="2" charset="-122"/>
+                            </a:rPr>
+                            <m:t>+1,</m:t>
+                          </m:r>
+                          <m:r>
+                            <a:rPr lang="en-US" altLang="zh-CN" b="0" i="1" dirty="0" smtClean="0">
+                              <a:latin typeface="Cambria Math" panose="02040503050406030204" pitchFamily="18" charset="0"/>
+                              <a:ea typeface="宋体" panose="02010600030101010101" pitchFamily="2" charset="-122"/>
+                            </a:rPr>
+                            <m:t>𝐶</m:t>
+                          </m:r>
+                          <m:sSub>
+                            <m:sSubPr>
+                              <m:ctrlPr>
+                                <a:rPr lang="en-US" altLang="zh-CN" b="0" i="1" dirty="0" smtClean="0">
+                                  <a:latin typeface="Cambria Math" panose="02040503050406030204" pitchFamily="18" charset="0"/>
+                                  <a:ea typeface="宋体" panose="02010600030101010101" pitchFamily="2" charset="-122"/>
+                                </a:rPr>
+                              </m:ctrlPr>
+                            </m:sSubPr>
+                            <m:e>
+                              <m:r>
+                                <a:rPr lang="en-US" altLang="zh-CN" b="0" i="1" dirty="0" smtClean="0">
+                                  <a:latin typeface="Cambria Math" panose="02040503050406030204" pitchFamily="18" charset="0"/>
+                                  <a:ea typeface="宋体" panose="02010600030101010101" pitchFamily="2" charset="-122"/>
+                                </a:rPr>
+                                <m:t>𝑊</m:t>
+                              </m:r>
+                            </m:e>
+                            <m:sub>
+                              <m:r>
+                                <a:rPr lang="en-US" altLang="zh-CN" b="0" i="1" dirty="0" smtClean="0">
+                                  <a:latin typeface="Cambria Math" panose="02040503050406030204" pitchFamily="18" charset="0"/>
+                                  <a:ea typeface="宋体" panose="02010600030101010101" pitchFamily="2" charset="-122"/>
+                                </a:rPr>
+                                <m:t>𝑚𝑎𝑥</m:t>
+                              </m:r>
+                            </m:sub>
+                          </m:sSub>
+                          <m:r>
+                            <a:rPr lang="en-US" altLang="zh-CN" b="0" i="1" dirty="0" smtClean="0">
+                              <a:latin typeface="Cambria Math" panose="02040503050406030204" pitchFamily="18" charset="0"/>
+                              <a:ea typeface="宋体" panose="02010600030101010101" pitchFamily="2" charset="-122"/>
+                            </a:rPr>
+                            <m:t>)</m:t>
+                          </m:r>
+                        </m:oMath>
+                      </m:oMathPara>
+                    </a14:m>
+                    <a:endParaRPr lang="en-US" altLang="zh-CN" dirty="0">
+                      <a:latin typeface="Times New Roman" panose="02020603050405020304" pitchFamily="18" charset="0"/>
+                      <a:ea typeface="宋体" panose="02010600030101010101" pitchFamily="2" charset="-122"/>
+                    </a:endParaRPr>
+                  </a:p>
+                  <a:p>
+                    <a:pPr algn="ctr"/>
+                    <a:r>
+                      <a:rPr lang="zh-CN" altLang="en-US" dirty="0">
+                        <a:latin typeface="Times New Roman" panose="02020603050405020304" pitchFamily="18" charset="0"/>
+                        <a:ea typeface="宋体" panose="02010600030101010101" pitchFamily="2" charset="-122"/>
+                      </a:rPr>
+                      <a:t>生成随机数</a:t>
+                    </a:r>
+                    <a:r>
+                      <a:rPr lang="en-US" altLang="zh-CN" dirty="0">
+                        <a:latin typeface="Times New Roman" panose="02020603050405020304" pitchFamily="18" charset="0"/>
+                        <a:ea typeface="宋体" panose="02010600030101010101" pitchFamily="2" charset="-122"/>
+                      </a:rPr>
+                      <a:t>N:</a:t>
+                    </a:r>
+                  </a:p>
+                  <a:p>
+                    <a:pPr algn="ctr"/>
+                    <a14:m>
+                      <m:oMathPara xmlns:m="http://schemas.openxmlformats.org/officeDocument/2006/math">
+                        <m:oMathParaPr>
+                          <m:jc m:val="centerGroup"/>
+                        </m:oMathParaPr>
+                        <m:oMath xmlns:m="http://schemas.openxmlformats.org/officeDocument/2006/math">
+                          <m:r>
+                            <a:rPr lang="en-US" altLang="zh-CN" i="1" dirty="0" smtClean="0">
+                              <a:latin typeface="Cambria Math" panose="02040503050406030204" pitchFamily="18" charset="0"/>
+                              <a:ea typeface="宋体" panose="02010600030101010101" pitchFamily="2" charset="-122"/>
+                            </a:rPr>
+                            <m:t>𝑁</m:t>
+                          </m:r>
+                          <m:r>
+                            <a:rPr lang="en-US" altLang="zh-CN" i="1" dirty="0" smtClean="0">
+                              <a:latin typeface="Cambria Math" panose="02040503050406030204" pitchFamily="18" charset="0"/>
+                              <a:ea typeface="宋体" panose="02010600030101010101" pitchFamily="2" charset="-122"/>
+                            </a:rPr>
+                            <m:t>∈ [0,</m:t>
+                          </m:r>
+                          <m:r>
+                            <a:rPr lang="en-US" altLang="zh-CN" i="1" dirty="0">
+                              <a:latin typeface="Cambria Math" panose="02040503050406030204" pitchFamily="18" charset="0"/>
+                              <a:ea typeface="宋体" panose="02010600030101010101" pitchFamily="2" charset="-122"/>
+                            </a:rPr>
+                            <m:t> </m:t>
+                          </m:r>
+                          <m:r>
+                            <a:rPr lang="en-US" altLang="zh-CN" i="1" dirty="0">
+                              <a:latin typeface="Cambria Math" panose="02040503050406030204" pitchFamily="18" charset="0"/>
+                              <a:ea typeface="宋体" panose="02010600030101010101" pitchFamily="2" charset="-122"/>
+                            </a:rPr>
+                            <m:t>𝐶</m:t>
+                          </m:r>
+                          <m:sSub>
+                            <m:sSubPr>
+                              <m:ctrlPr>
+                                <a:rPr lang="en-US" altLang="zh-CN" i="1" dirty="0">
+                                  <a:latin typeface="Cambria Math" panose="02040503050406030204" pitchFamily="18" charset="0"/>
+                                  <a:ea typeface="宋体" panose="02010600030101010101" pitchFamily="2" charset="-122"/>
+                                </a:rPr>
+                              </m:ctrlPr>
+                            </m:sSubPr>
+                            <m:e>
+                              <m:r>
+                                <a:rPr lang="en-US" altLang="zh-CN" i="1" dirty="0">
+                                  <a:latin typeface="Cambria Math" panose="02040503050406030204" pitchFamily="18" charset="0"/>
+                                  <a:ea typeface="宋体" panose="02010600030101010101" pitchFamily="2" charset="-122"/>
+                                </a:rPr>
+                                <m:t>𝑊</m:t>
+                              </m:r>
+                            </m:e>
+                            <m:sub>
+                              <m:r>
+                                <a:rPr lang="en-US" altLang="zh-CN" i="1" dirty="0">
+                                  <a:latin typeface="Cambria Math" panose="02040503050406030204" pitchFamily="18" charset="0"/>
+                                  <a:ea typeface="宋体" panose="02010600030101010101" pitchFamily="2" charset="-122"/>
+                                </a:rPr>
+                                <m:t>𝑛𝑒𝑤</m:t>
+                              </m:r>
+                            </m:sub>
+                          </m:sSub>
+                          <m:r>
+                            <a:rPr lang="en-US" altLang="zh-CN" i="1" dirty="0" smtClean="0">
+                              <a:latin typeface="Cambria Math" panose="02040503050406030204" pitchFamily="18" charset="0"/>
+                              <a:ea typeface="宋体" panose="02010600030101010101" pitchFamily="2" charset="-122"/>
+                            </a:rPr>
+                            <m:t>]</m:t>
+                          </m:r>
+                        </m:oMath>
+                      </m:oMathPara>
+                    </a14:m>
+                    <a:endParaRPr lang="en-US" altLang="zh-CN" dirty="0">
+                      <a:latin typeface="Times New Roman" panose="02020603050405020304" pitchFamily="18" charset="0"/>
+                      <a:ea typeface="宋体" panose="02010600030101010101" pitchFamily="2" charset="-122"/>
+                    </a:endParaRPr>
+                  </a:p>
+                </p:txBody>
+              </p:sp>
+            </mc:Choice>
+            <mc:Fallback>
+              <p:sp>
+                <p:nvSpPr>
+                  <p:cNvPr id="83" name="文本框 82">
+                    <a:extLst>
+                      <a:ext uri="{FF2B5EF4-FFF2-40B4-BE49-F238E27FC236}">
+                        <a16:creationId xmlns:a16="http://schemas.microsoft.com/office/drawing/2014/main" id="{4EDBF2F0-6ADF-02D9-7154-244748AB621B}"/>
+                      </a:ext>
+                    </a:extLst>
+                  </p:cNvPr>
+                  <p:cNvSpPr txBox="1">
+                    <a:spLocks noRot="1" noChangeAspect="1" noMove="1" noResize="1" noEditPoints="1" noAdjustHandles="1" noChangeArrowheads="1" noChangeShapeType="1" noTextEdit="1"/>
+                  </p:cNvSpPr>
+                  <p:nvPr/>
+                </p:nvSpPr>
+                <p:spPr>
+                  <a:xfrm>
+                    <a:off x="7466795" y="4151153"/>
+                    <a:ext cx="2804577" cy="1352731"/>
+                  </a:xfrm>
+                  <a:prstGeom prst="rect">
+                    <a:avLst/>
+                  </a:prstGeom>
+                  <a:blipFill>
+                    <a:blip r:embed="rId4"/>
+                    <a:stretch>
+                      <a:fillRect t="-3553" b="-5076"/>
+                    </a:stretch>
+                  </a:blipFill>
+                </p:spPr>
+                <p:txBody>
+                  <a:bodyPr/>
+                  <a:lstStyle/>
+                  <a:p>
+                    <a:r>
+                      <a:rPr lang="zh-CN" altLang="en-US">
+                        <a:noFill/>
+                      </a:rPr>
+                      <a:t> </a:t>
+                    </a:r>
+                  </a:p>
+                </p:txBody>
+              </p:sp>
+            </mc:Fallback>
+          </mc:AlternateContent>
+        </p:grpSp>
+        <p:sp>
+          <p:nvSpPr>
+            <p:cNvPr id="87" name="文本框 86">
+              <a:extLst>
+                <a:ext uri="{FF2B5EF4-FFF2-40B4-BE49-F238E27FC236}">
+                  <a16:creationId xmlns:a16="http://schemas.microsoft.com/office/drawing/2014/main" id="{E56AF2DA-0137-2FF5-E175-62BB2CCE2AEF}"/>
+                </a:ext>
+              </a:extLst>
+            </p:cNvPr>
+            <p:cNvSpPr txBox="1"/>
+            <p:nvPr/>
+          </p:nvSpPr>
+          <p:spPr>
+            <a:xfrm>
+              <a:off x="5795194" y="5370656"/>
+              <a:ext cx="463648" cy="327722"/>
+            </a:xfrm>
+            <a:prstGeom prst="rect">
+              <a:avLst/>
+            </a:prstGeom>
+            <a:noFill/>
+          </p:spPr>
+          <p:txBody>
+            <a:bodyPr wrap="square" rtlCol="0" anchor="ctr" anchorCtr="1">
+              <a:spAutoFit/>
+            </a:bodyPr>
+            <a:lstStyle/>
+            <a:p>
+              <a:pPr algn="ctr"/>
+              <a:r>
+                <a:rPr lang="zh-CN" altLang="en-US" dirty="0">
+                  <a:latin typeface="Times New Roman" panose="02020603050405020304" pitchFamily="18" charset="0"/>
+                  <a:ea typeface="宋体" panose="02010600030101010101" pitchFamily="2" charset="-122"/>
+                </a:rPr>
+                <a:t>是</a:t>
+              </a:r>
+            </a:p>
+          </p:txBody>
+        </p:sp>
+        <p:sp>
+          <p:nvSpPr>
+            <p:cNvPr id="88" name="文本框 87">
+              <a:extLst>
+                <a:ext uri="{FF2B5EF4-FFF2-40B4-BE49-F238E27FC236}">
+                  <a16:creationId xmlns:a16="http://schemas.microsoft.com/office/drawing/2014/main" id="{1D975BDE-7641-ECBD-833C-55C75FA704CB}"/>
+                </a:ext>
+              </a:extLst>
+            </p:cNvPr>
+            <p:cNvSpPr txBox="1"/>
+            <p:nvPr/>
+          </p:nvSpPr>
+          <p:spPr>
+            <a:xfrm>
+              <a:off x="7213534" y="4614813"/>
+              <a:ext cx="463648" cy="327722"/>
+            </a:xfrm>
+            <a:prstGeom prst="rect">
+              <a:avLst/>
+            </a:prstGeom>
+            <a:noFill/>
+          </p:spPr>
+          <p:txBody>
+            <a:bodyPr wrap="square" rtlCol="0" anchor="ctr" anchorCtr="1">
+              <a:spAutoFit/>
+            </a:bodyPr>
+            <a:lstStyle/>
+            <a:p>
+              <a:pPr algn="ctr"/>
+              <a:r>
+                <a:rPr lang="zh-CN" altLang="en-US" dirty="0">
+                  <a:latin typeface="Times New Roman" panose="02020603050405020304" pitchFamily="18" charset="0"/>
+                  <a:ea typeface="宋体" panose="02010600030101010101" pitchFamily="2" charset="-122"/>
+                </a:rPr>
+                <a:t>否</a:t>
+              </a:r>
+            </a:p>
+          </p:txBody>
+        </p:sp>
+        <p:cxnSp>
+          <p:nvCxnSpPr>
+            <p:cNvPr id="90" name="直接箭头连接符 89">
+              <a:extLst>
+                <a:ext uri="{FF2B5EF4-FFF2-40B4-BE49-F238E27FC236}">
+                  <a16:creationId xmlns:a16="http://schemas.microsoft.com/office/drawing/2014/main" id="{89C5B583-D8BC-B16B-99CB-DAF8D1D1CC46}"/>
+                </a:ext>
+              </a:extLst>
+            </p:cNvPr>
+            <p:cNvCxnSpPr>
+              <a:cxnSpLocks/>
+              <a:stCxn id="83" idx="3"/>
+              <a:endCxn id="107" idx="0"/>
+            </p:cNvCxnSpPr>
+            <p:nvPr/>
+          </p:nvCxnSpPr>
+          <p:spPr>
+            <a:xfrm flipH="1" flipV="1">
+              <a:off x="5795196" y="283154"/>
+              <a:ext cx="5901502" cy="5906961"/>
+            </a:xfrm>
+            <a:prstGeom prst="bentConnector4">
+              <a:avLst>
+                <a:gd name="adj1" fmla="val -3874"/>
+                <a:gd name="adj2" fmla="val 103870"/>
+              </a:avLst>
+            </a:prstGeom>
+            <a:ln w="28575">
+              <a:solidFill>
+                <a:schemeClr val="tx1"/>
+              </a:solidFill>
+              <a:tailEnd type="triangle"/>
+            </a:ln>
+          </p:spPr>
+          <p:style>
+            <a:lnRef idx="1">
+              <a:schemeClr val="accent1"/>
+            </a:lnRef>
+            <a:fillRef idx="0">
+              <a:schemeClr val="accent1"/>
+            </a:fillRef>
+            <a:effectRef idx="0">
+              <a:schemeClr val="accent1"/>
+            </a:effectRef>
+            <a:fontRef idx="minor">
+              <a:schemeClr val="tx1"/>
+            </a:fontRef>
+          </p:style>
+        </p:cxnSp>
+        <p:grpSp>
+          <p:nvGrpSpPr>
+            <p:cNvPr id="114" name="组合 113">
+              <a:extLst>
+                <a:ext uri="{FF2B5EF4-FFF2-40B4-BE49-F238E27FC236}">
+                  <a16:creationId xmlns:a16="http://schemas.microsoft.com/office/drawing/2014/main" id="{AF300D9C-0884-E56B-19BE-6843D70C8C15}"/>
+                </a:ext>
+              </a:extLst>
+            </p:cNvPr>
+            <p:cNvGrpSpPr/>
+            <p:nvPr/>
+          </p:nvGrpSpPr>
+          <p:grpSpPr>
+            <a:xfrm>
+              <a:off x="4259891" y="283154"/>
+              <a:ext cx="3070609" cy="1088543"/>
+              <a:chOff x="3482339" y="283154"/>
+              <a:chExt cx="2362199" cy="1226751"/>
+            </a:xfrm>
+          </p:grpSpPr>
+          <p:sp>
+            <p:nvSpPr>
+              <p:cNvPr id="12" name="文本框 11">
+                <a:extLst>
+                  <a:ext uri="{FF2B5EF4-FFF2-40B4-BE49-F238E27FC236}">
+                    <a16:creationId xmlns:a16="http://schemas.microsoft.com/office/drawing/2014/main" id="{291D4D9A-7140-DC53-AF53-11A38DE92E5C}"/>
+                  </a:ext>
+                </a:extLst>
+              </p:cNvPr>
+              <p:cNvSpPr txBox="1"/>
+              <p:nvPr/>
+            </p:nvSpPr>
+            <p:spPr>
+              <a:xfrm>
+                <a:off x="3737010" y="532145"/>
+                <a:ext cx="1893651" cy="646331"/>
+              </a:xfrm>
+              <a:prstGeom prst="rect">
+                <a:avLst/>
+              </a:prstGeom>
+              <a:noFill/>
+            </p:spPr>
+            <p:txBody>
+              <a:bodyPr wrap="square" rtlCol="0" anchor="ctr" anchorCtr="1">
+                <a:spAutoFit/>
+              </a:bodyPr>
+              <a:lstStyle/>
+              <a:p>
+                <a:pPr algn="ctr"/>
+                <a:r>
+                  <a:rPr lang="zh-CN" altLang="en-US" dirty="0">
+                    <a:latin typeface="Times New Roman" panose="02020603050405020304" pitchFamily="18" charset="0"/>
+                    <a:ea typeface="宋体" panose="02010600030101010101" pitchFamily="2" charset="-122"/>
+                  </a:rPr>
+                  <a:t>信道检测</a:t>
+                </a:r>
+                <a:r>
+                  <a:rPr lang="en-US" altLang="zh-CN" dirty="0">
+                    <a:latin typeface="Times New Roman" panose="02020603050405020304" pitchFamily="18" charset="0"/>
+                    <a:ea typeface="宋体" panose="02010600030101010101" pitchFamily="2" charset="-122"/>
+                  </a:rPr>
+                  <a:t>CCA</a:t>
+                </a:r>
+              </a:p>
+              <a:p>
+                <a:pPr algn="ctr"/>
+                <a:r>
+                  <a:rPr lang="zh-CN" altLang="en-US" dirty="0">
+                    <a:latin typeface="Times New Roman" panose="02020603050405020304" pitchFamily="18" charset="0"/>
+                    <a:ea typeface="宋体" panose="02010600030101010101" pitchFamily="2" charset="-122"/>
+                  </a:rPr>
+                  <a:t>信道是否空闲？</a:t>
+                </a:r>
+              </a:p>
+            </p:txBody>
+          </p:sp>
+          <p:sp>
+            <p:nvSpPr>
+              <p:cNvPr id="107" name="流程图: 决策 106">
+                <a:extLst>
+                  <a:ext uri="{FF2B5EF4-FFF2-40B4-BE49-F238E27FC236}">
+                    <a16:creationId xmlns:a16="http://schemas.microsoft.com/office/drawing/2014/main" id="{C1EE22BA-8A63-38B0-13F4-288805170A7C}"/>
+                  </a:ext>
+                </a:extLst>
+              </p:cNvPr>
+              <p:cNvSpPr/>
+              <p:nvPr/>
+            </p:nvSpPr>
+            <p:spPr>
+              <a:xfrm>
+                <a:off x="3482339" y="283154"/>
+                <a:ext cx="2362199" cy="1226751"/>
+              </a:xfrm>
+              <a:prstGeom prst="flowChartDecision">
+                <a:avLst/>
+              </a:prstGeom>
+              <a:noFill/>
+              <a:ln w="19050">
+                <a:solidFill>
+                  <a:schemeClr val="tx1"/>
+                </a:solidFill>
+              </a:ln>
+            </p:spPr>
+            <p:style>
+              <a:lnRef idx="2">
+                <a:schemeClr val="accent1">
+                  <a:shade val="15000"/>
+                </a:schemeClr>
+              </a:lnRef>
+              <a:fillRef idx="1">
+                <a:schemeClr val="accent1"/>
+              </a:fillRef>
+              <a:effectRef idx="0">
+                <a:schemeClr val="accent1"/>
+              </a:effectRef>
+              <a:fontRef idx="minor">
+                <a:schemeClr val="lt1"/>
+              </a:fontRef>
+            </p:style>
+            <p:txBody>
+              <a:bodyPr rtlCol="0" anchor="ctr"/>
+              <a:lstStyle/>
+              <a:p>
+                <a:pPr algn="ctr"/>
+                <a:endParaRPr lang="zh-CN" altLang="en-US" dirty="0" err="1">
+                  <a:solidFill>
+                    <a:schemeClr val="tx1"/>
+                  </a:solidFill>
+                </a:endParaRPr>
+              </a:p>
+            </p:txBody>
+          </p:sp>
+        </p:grpSp>
+        <p:grpSp>
+          <p:nvGrpSpPr>
+            <p:cNvPr id="136" name="组合 135">
+              <a:extLst>
+                <a:ext uri="{FF2B5EF4-FFF2-40B4-BE49-F238E27FC236}">
+                  <a16:creationId xmlns:a16="http://schemas.microsoft.com/office/drawing/2014/main" id="{0D619366-FB41-1A0F-92C4-3518BD9729BE}"/>
+                </a:ext>
+              </a:extLst>
+            </p:cNvPr>
+            <p:cNvGrpSpPr/>
+            <p:nvPr/>
+          </p:nvGrpSpPr>
+          <p:grpSpPr>
+            <a:xfrm>
+              <a:off x="4259891" y="2479464"/>
+              <a:ext cx="3070609" cy="1015390"/>
+              <a:chOff x="3482339" y="283155"/>
+              <a:chExt cx="2362199" cy="1144310"/>
+            </a:xfrm>
+          </p:grpSpPr>
+          <mc:AlternateContent xmlns:mc="http://schemas.openxmlformats.org/markup-compatibility/2006">
+            <mc:Choice xmlns:a14="http://schemas.microsoft.com/office/drawing/2010/main" Requires="a14">
+              <p:sp>
+                <p:nvSpPr>
+                  <p:cNvPr id="137" name="文本框 136">
+                    <a:extLst>
+                      <a:ext uri="{FF2B5EF4-FFF2-40B4-BE49-F238E27FC236}">
+                        <a16:creationId xmlns:a16="http://schemas.microsoft.com/office/drawing/2014/main" id="{22286C28-1E9E-92F1-B3CA-484CB3D3C9A1}"/>
+                      </a:ext>
+                    </a:extLst>
+                  </p:cNvPr>
+                  <p:cNvSpPr txBox="1"/>
+                  <p:nvPr/>
+                </p:nvSpPr>
+                <p:spPr>
+                  <a:xfrm>
+                    <a:off x="3716613" y="670644"/>
+                    <a:ext cx="1893651" cy="369332"/>
+                  </a:xfrm>
+                  <a:prstGeom prst="rect">
+                    <a:avLst/>
+                  </a:prstGeom>
+                  <a:noFill/>
+                </p:spPr>
+                <p:txBody>
+                  <a:bodyPr wrap="square" rtlCol="0" anchor="ctr" anchorCtr="1">
+                    <a:spAutoFit/>
+                  </a:bodyPr>
+                  <a:lstStyle/>
+                  <a:p>
+                    <a:pPr algn="ctr"/>
+                    <a14:m>
+                      <m:oMath xmlns:m="http://schemas.openxmlformats.org/officeDocument/2006/math">
+                        <m:r>
+                          <a:rPr lang="en-US" altLang="zh-CN" i="1" dirty="0" smtClean="0">
+                            <a:latin typeface="Cambria Math" panose="02040503050406030204" pitchFamily="18" charset="0"/>
+                            <a:ea typeface="宋体" panose="02010600030101010101" pitchFamily="2" charset="-122"/>
+                          </a:rPr>
+                          <m:t>𝑁</m:t>
+                        </m:r>
+                        <m:r>
+                          <a:rPr lang="en-US" altLang="zh-CN" i="1" dirty="0" smtClean="0">
+                            <a:latin typeface="Cambria Math" panose="02040503050406030204" pitchFamily="18" charset="0"/>
+                            <a:ea typeface="宋体" panose="02010600030101010101" pitchFamily="2" charset="-122"/>
+                          </a:rPr>
+                          <m:t>=0</m:t>
+                        </m:r>
+                      </m:oMath>
+                    </a14:m>
+                    <a:r>
+                      <a:rPr lang="zh-CN" altLang="en-US" dirty="0">
+                        <a:latin typeface="Times New Roman" panose="02020603050405020304" pitchFamily="18" charset="0"/>
+                        <a:ea typeface="宋体" panose="02010600030101010101" pitchFamily="2" charset="-122"/>
+                      </a:rPr>
+                      <a:t>？</a:t>
+                    </a:r>
+                  </a:p>
+                </p:txBody>
+              </p:sp>
+            </mc:Choice>
+            <mc:Fallback>
+              <p:sp>
+                <p:nvSpPr>
+                  <p:cNvPr id="137" name="文本框 136">
+                    <a:extLst>
+                      <a:ext uri="{FF2B5EF4-FFF2-40B4-BE49-F238E27FC236}">
+                        <a16:creationId xmlns:a16="http://schemas.microsoft.com/office/drawing/2014/main" id="{22286C28-1E9E-92F1-B3CA-484CB3D3C9A1}"/>
+                      </a:ext>
+                    </a:extLst>
+                  </p:cNvPr>
+                  <p:cNvSpPr txBox="1">
+                    <a:spLocks noRot="1" noChangeAspect="1" noMove="1" noResize="1" noEditPoints="1" noAdjustHandles="1" noChangeArrowheads="1" noChangeShapeType="1" noTextEdit="1"/>
+                  </p:cNvSpPr>
+                  <p:nvPr/>
+                </p:nvSpPr>
+                <p:spPr>
+                  <a:xfrm>
+                    <a:off x="3716613" y="670644"/>
+                    <a:ext cx="1893651" cy="369332"/>
+                  </a:xfrm>
+                  <a:prstGeom prst="rect">
+                    <a:avLst/>
+                  </a:prstGeom>
+                  <a:blipFill>
+                    <a:blip r:embed="rId5"/>
+                    <a:stretch>
+                      <a:fillRect t="-18519" b="-31481"/>
+                    </a:stretch>
+                  </a:blipFill>
+                </p:spPr>
+                <p:txBody>
+                  <a:bodyPr/>
+                  <a:lstStyle/>
+                  <a:p>
+                    <a:r>
+                      <a:rPr lang="zh-CN" altLang="en-US">
+                        <a:noFill/>
+                      </a:rPr>
+                      <a:t> </a:t>
+                    </a:r>
+                  </a:p>
+                </p:txBody>
+              </p:sp>
+            </mc:Fallback>
+          </mc:AlternateContent>
+          <p:sp>
+            <p:nvSpPr>
+              <p:cNvPr id="138" name="流程图: 决策 137">
+                <a:extLst>
+                  <a:ext uri="{FF2B5EF4-FFF2-40B4-BE49-F238E27FC236}">
+                    <a16:creationId xmlns:a16="http://schemas.microsoft.com/office/drawing/2014/main" id="{5699C3B1-C901-1ABD-1DF2-84A9FD263E4C}"/>
+                  </a:ext>
+                </a:extLst>
+              </p:cNvPr>
+              <p:cNvSpPr/>
+              <p:nvPr/>
+            </p:nvSpPr>
+            <p:spPr>
+              <a:xfrm>
+                <a:off x="3482339" y="283155"/>
+                <a:ext cx="2362199" cy="1144310"/>
+              </a:xfrm>
+              <a:prstGeom prst="flowChartDecision">
+                <a:avLst/>
+              </a:prstGeom>
+              <a:noFill/>
+              <a:ln w="19050">
+                <a:solidFill>
+                  <a:schemeClr val="tx1"/>
+                </a:solidFill>
+              </a:ln>
+            </p:spPr>
+            <p:style>
+              <a:lnRef idx="2">
+                <a:schemeClr val="accent1">
+                  <a:shade val="15000"/>
+                </a:schemeClr>
+              </a:lnRef>
+              <a:fillRef idx="1">
+                <a:schemeClr val="accent1"/>
+              </a:fillRef>
+              <a:effectRef idx="0">
+                <a:schemeClr val="accent1"/>
+              </a:effectRef>
+              <a:fontRef idx="minor">
+                <a:schemeClr val="lt1"/>
+              </a:fontRef>
+            </p:style>
+            <p:txBody>
+              <a:bodyPr rtlCol="0" anchor="ctr"/>
+              <a:lstStyle/>
+              <a:p>
+                <a:pPr algn="ctr"/>
+                <a:endParaRPr lang="zh-CN" altLang="en-US" dirty="0" err="1">
+                  <a:solidFill>
+                    <a:schemeClr val="tx1"/>
+                  </a:solidFill>
+                </a:endParaRPr>
+              </a:p>
+            </p:txBody>
+          </p:sp>
+        </p:grpSp>
+        <p:grpSp>
+          <p:nvGrpSpPr>
+            <p:cNvPr id="143" name="组合 142">
+              <a:extLst>
+                <a:ext uri="{FF2B5EF4-FFF2-40B4-BE49-F238E27FC236}">
+                  <a16:creationId xmlns:a16="http://schemas.microsoft.com/office/drawing/2014/main" id="{A6D93B86-E45E-EE69-19B2-730C55D26571}"/>
+                </a:ext>
+              </a:extLst>
+            </p:cNvPr>
+            <p:cNvGrpSpPr/>
+            <p:nvPr/>
+          </p:nvGrpSpPr>
+          <p:grpSpPr>
+            <a:xfrm>
+              <a:off x="4259891" y="4416714"/>
+              <a:ext cx="3070609" cy="1015390"/>
+              <a:chOff x="3482339" y="283155"/>
+              <a:chExt cx="2362199" cy="1144310"/>
+            </a:xfrm>
+          </p:grpSpPr>
+          <p:sp>
+            <p:nvSpPr>
+              <p:cNvPr id="144" name="文本框 143">
+                <a:extLst>
+                  <a:ext uri="{FF2B5EF4-FFF2-40B4-BE49-F238E27FC236}">
+                    <a16:creationId xmlns:a16="http://schemas.microsoft.com/office/drawing/2014/main" id="{7518033F-BF6B-E207-24C5-8BDCC1A12D11}"/>
+                  </a:ext>
+                </a:extLst>
+              </p:cNvPr>
+              <p:cNvSpPr txBox="1"/>
+              <p:nvPr/>
+            </p:nvSpPr>
+            <p:spPr>
+              <a:xfrm>
+                <a:off x="3716613" y="670644"/>
+                <a:ext cx="1893651" cy="369332"/>
+              </a:xfrm>
+              <a:prstGeom prst="rect">
+                <a:avLst/>
+              </a:prstGeom>
+              <a:noFill/>
+            </p:spPr>
+            <p:txBody>
+              <a:bodyPr wrap="square" rtlCol="0" anchor="ctr" anchorCtr="1">
+                <a:spAutoFit/>
+              </a:bodyPr>
+              <a:lstStyle/>
+              <a:p>
+                <a:pPr algn="ctr"/>
+                <a:r>
+                  <a:rPr lang="zh-CN" altLang="en-US" dirty="0">
+                    <a:latin typeface="Times New Roman" panose="02020603050405020304" pitchFamily="18" charset="0"/>
+                    <a:ea typeface="宋体" panose="02010600030101010101" pitchFamily="2" charset="-122"/>
+                  </a:rPr>
+                  <a:t>是否接收到</a:t>
+                </a:r>
+                <a:r>
+                  <a:rPr lang="en-US" altLang="zh-CN" dirty="0">
+                    <a:latin typeface="Times New Roman" panose="02020603050405020304" pitchFamily="18" charset="0"/>
+                    <a:ea typeface="宋体" panose="02010600030101010101" pitchFamily="2" charset="-122"/>
+                  </a:rPr>
+                  <a:t>ACK</a:t>
+                </a:r>
+                <a:r>
+                  <a:rPr lang="zh-CN" altLang="en-US" dirty="0">
+                    <a:latin typeface="Times New Roman" panose="02020603050405020304" pitchFamily="18" charset="0"/>
+                    <a:ea typeface="宋体" panose="02010600030101010101" pitchFamily="2" charset="-122"/>
+                  </a:rPr>
+                  <a:t>？</a:t>
+                </a:r>
+              </a:p>
+            </p:txBody>
+          </p:sp>
+          <p:sp>
+            <p:nvSpPr>
+              <p:cNvPr id="145" name="流程图: 决策 144">
+                <a:extLst>
+                  <a:ext uri="{FF2B5EF4-FFF2-40B4-BE49-F238E27FC236}">
+                    <a16:creationId xmlns:a16="http://schemas.microsoft.com/office/drawing/2014/main" id="{A6E2F20E-4DA2-AF16-219F-F27A8C5A46F5}"/>
+                  </a:ext>
+                </a:extLst>
+              </p:cNvPr>
+              <p:cNvSpPr/>
+              <p:nvPr/>
+            </p:nvSpPr>
+            <p:spPr>
+              <a:xfrm>
+                <a:off x="3482339" y="283155"/>
+                <a:ext cx="2362199" cy="1144310"/>
+              </a:xfrm>
+              <a:prstGeom prst="flowChartDecision">
+                <a:avLst/>
+              </a:prstGeom>
+              <a:noFill/>
+              <a:ln w="19050">
+                <a:solidFill>
+                  <a:schemeClr val="tx1"/>
+                </a:solidFill>
+              </a:ln>
+            </p:spPr>
+            <p:style>
+              <a:lnRef idx="2">
+                <a:schemeClr val="accent1">
+                  <a:shade val="15000"/>
+                </a:schemeClr>
+              </a:lnRef>
+              <a:fillRef idx="1">
+                <a:schemeClr val="accent1"/>
+              </a:fillRef>
+              <a:effectRef idx="0">
+                <a:schemeClr val="accent1"/>
+              </a:effectRef>
+              <a:fontRef idx="minor">
+                <a:schemeClr val="lt1"/>
+              </a:fontRef>
+            </p:style>
+            <p:txBody>
+              <a:bodyPr rtlCol="0" anchor="ctr"/>
+              <a:lstStyle/>
+              <a:p>
+                <a:pPr algn="ctr"/>
+                <a:endParaRPr lang="zh-CN" altLang="en-US" dirty="0" err="1">
+                  <a:solidFill>
+                    <a:schemeClr val="tx1"/>
+                  </a:solidFill>
+                </a:endParaRPr>
+              </a:p>
+            </p:txBody>
+          </p:sp>
+        </p:grpSp>
+        <p:grpSp>
+          <p:nvGrpSpPr>
+            <p:cNvPr id="213" name="组合 212">
+              <a:extLst>
+                <a:ext uri="{FF2B5EF4-FFF2-40B4-BE49-F238E27FC236}">
+                  <a16:creationId xmlns:a16="http://schemas.microsoft.com/office/drawing/2014/main" id="{15C6B8F9-2F7D-67A0-CBC2-D051E00B7B54}"/>
+                </a:ext>
+              </a:extLst>
+            </p:cNvPr>
+            <p:cNvGrpSpPr/>
+            <p:nvPr/>
+          </p:nvGrpSpPr>
+          <p:grpSpPr>
+            <a:xfrm>
+              <a:off x="4564422" y="1575364"/>
+              <a:ext cx="2461546" cy="690538"/>
+              <a:chOff x="4564422" y="1575364"/>
+              <a:chExt cx="2461546" cy="690538"/>
+            </a:xfrm>
+          </p:grpSpPr>
+          <p:sp>
+            <p:nvSpPr>
+              <p:cNvPr id="148" name="矩形 147">
+                <a:extLst>
+                  <a:ext uri="{FF2B5EF4-FFF2-40B4-BE49-F238E27FC236}">
+                    <a16:creationId xmlns:a16="http://schemas.microsoft.com/office/drawing/2014/main" id="{5C2E3FE1-814F-09F1-8D46-A3C36BB6192F}"/>
+                  </a:ext>
+                </a:extLst>
+              </p:cNvPr>
+              <p:cNvSpPr/>
+              <p:nvPr/>
+            </p:nvSpPr>
+            <p:spPr>
+              <a:xfrm>
+                <a:off x="4564422" y="1575364"/>
+                <a:ext cx="2461546" cy="690538"/>
+              </a:xfrm>
+              <a:prstGeom prst="rect">
+                <a:avLst/>
+              </a:prstGeom>
+              <a:noFill/>
+              <a:ln w="19050">
+                <a:solidFill>
+                  <a:schemeClr val="tx1"/>
+                </a:solidFill>
+              </a:ln>
+            </p:spPr>
+            <p:style>
+              <a:lnRef idx="2">
+                <a:schemeClr val="accent1">
+                  <a:shade val="15000"/>
+                </a:schemeClr>
+              </a:lnRef>
+              <a:fillRef idx="1">
+                <a:schemeClr val="accent1"/>
+              </a:fillRef>
+              <a:effectRef idx="0">
+                <a:schemeClr val="accent1"/>
+              </a:effectRef>
+              <a:fontRef idx="minor">
+                <a:schemeClr val="lt1"/>
+              </a:fontRef>
+            </p:style>
+            <p:txBody>
+              <a:bodyPr rtlCol="0" anchor="ctr"/>
+              <a:lstStyle/>
+              <a:p>
+                <a:pPr algn="ctr"/>
+                <a:endParaRPr lang="zh-CN" altLang="en-US" dirty="0" err="1">
+                  <a:solidFill>
+                    <a:schemeClr val="tx1"/>
+                  </a:solidFill>
+                  <a:latin typeface="Times New Roman" panose="02020603050405020304" pitchFamily="18" charset="0"/>
+                  <a:ea typeface="宋体" panose="02010600030101010101" pitchFamily="2" charset="-122"/>
+                </a:endParaRPr>
+              </a:p>
+            </p:txBody>
+          </p:sp>
+          <mc:AlternateContent xmlns:mc="http://schemas.openxmlformats.org/markup-compatibility/2006">
+            <mc:Choice xmlns:a14="http://schemas.microsoft.com/office/drawing/2010/main" Requires="a14">
+              <p:sp>
+                <p:nvSpPr>
+                  <p:cNvPr id="149" name="文本框 148">
+                    <a:extLst>
+                      <a:ext uri="{FF2B5EF4-FFF2-40B4-BE49-F238E27FC236}">
+                        <a16:creationId xmlns:a16="http://schemas.microsoft.com/office/drawing/2014/main" id="{4CD8618B-2C2F-387F-50CC-0E38C6D7A2BF}"/>
+                      </a:ext>
+                    </a:extLst>
+                  </p:cNvPr>
+                  <p:cNvSpPr txBox="1"/>
+                  <p:nvPr/>
+                </p:nvSpPr>
+                <p:spPr>
+                  <a:xfrm>
+                    <a:off x="4727239" y="1756771"/>
+                    <a:ext cx="2135911" cy="327722"/>
+                  </a:xfrm>
+                  <a:prstGeom prst="rect">
+                    <a:avLst/>
+                  </a:prstGeom>
+                  <a:noFill/>
+                </p:spPr>
+                <p:txBody>
+                  <a:bodyPr wrap="square" rtlCol="0" anchor="ctr" anchorCtr="1">
+                    <a:spAutoFit/>
+                  </a:bodyPr>
+                  <a:lstStyle/>
+                  <a:p>
+                    <a:pPr algn="ctr"/>
+                    <a14:m>
+                      <m:oMath xmlns:m="http://schemas.openxmlformats.org/officeDocument/2006/math">
+                        <m:r>
+                          <a:rPr lang="zh-CN" altLang="en-US" i="1" dirty="0">
+                            <a:latin typeface="Cambria Math" panose="02040503050406030204" pitchFamily="18" charset="0"/>
+                            <a:ea typeface="宋体" panose="02010600030101010101" pitchFamily="2" charset="-122"/>
+                          </a:rPr>
+                          <m:t>随机数</m:t>
+                        </m:r>
+                        <m:r>
+                          <a:rPr lang="en-US" altLang="zh-CN" i="1" dirty="0" smtClean="0">
+                            <a:latin typeface="Cambria Math" panose="02040503050406030204" pitchFamily="18" charset="0"/>
+                            <a:ea typeface="宋体" panose="02010600030101010101" pitchFamily="2" charset="-122"/>
+                          </a:rPr>
+                          <m:t>𝑁</m:t>
+                        </m:r>
+                      </m:oMath>
+                    </a14:m>
+                    <a:r>
+                      <a:rPr lang="zh-CN" altLang="en-US" dirty="0">
+                        <a:latin typeface="Times New Roman" panose="02020603050405020304" pitchFamily="18" charset="0"/>
+                        <a:ea typeface="宋体" panose="02010600030101010101" pitchFamily="2" charset="-122"/>
+                      </a:rPr>
+                      <a:t>减一</a:t>
+                    </a:r>
+                  </a:p>
+                </p:txBody>
+              </p:sp>
+            </mc:Choice>
+            <mc:Fallback>
+              <p:sp>
+                <p:nvSpPr>
+                  <p:cNvPr id="149" name="文本框 148">
+                    <a:extLst>
+                      <a:ext uri="{FF2B5EF4-FFF2-40B4-BE49-F238E27FC236}">
+                        <a16:creationId xmlns:a16="http://schemas.microsoft.com/office/drawing/2014/main" id="{4CD8618B-2C2F-387F-50CC-0E38C6D7A2BF}"/>
+                      </a:ext>
+                    </a:extLst>
+                  </p:cNvPr>
+                  <p:cNvSpPr txBox="1">
+                    <a:spLocks noRot="1" noChangeAspect="1" noMove="1" noResize="1" noEditPoints="1" noAdjustHandles="1" noChangeArrowheads="1" noChangeShapeType="1" noTextEdit="1"/>
+                  </p:cNvSpPr>
+                  <p:nvPr/>
+                </p:nvSpPr>
+                <p:spPr>
+                  <a:xfrm>
+                    <a:off x="4727239" y="1756771"/>
+                    <a:ext cx="2135911" cy="327722"/>
+                  </a:xfrm>
+                  <a:prstGeom prst="rect">
+                    <a:avLst/>
+                  </a:prstGeom>
+                  <a:blipFill>
+                    <a:blip r:embed="rId6"/>
+                    <a:stretch>
+                      <a:fillRect t="-18519" b="-31481"/>
+                    </a:stretch>
+                  </a:blipFill>
+                </p:spPr>
+                <p:txBody>
+                  <a:bodyPr/>
+                  <a:lstStyle/>
+                  <a:p>
+                    <a:r>
+                      <a:rPr lang="zh-CN" altLang="en-US">
+                        <a:noFill/>
+                      </a:rPr>
+                      <a:t> </a:t>
+                    </a:r>
+                  </a:p>
+                </p:txBody>
+              </p:sp>
+            </mc:Fallback>
+          </mc:AlternateContent>
+        </p:grpSp>
+        <p:cxnSp>
+          <p:nvCxnSpPr>
+            <p:cNvPr id="152" name="直接箭头连接符 151">
+              <a:extLst>
+                <a:ext uri="{FF2B5EF4-FFF2-40B4-BE49-F238E27FC236}">
+                  <a16:creationId xmlns:a16="http://schemas.microsoft.com/office/drawing/2014/main" id="{1DE760E3-80F4-0734-A0BC-9F6C1C1D68AA}"/>
+                </a:ext>
+              </a:extLst>
+            </p:cNvPr>
+            <p:cNvCxnSpPr>
+              <a:stCxn id="148" idx="2"/>
+              <a:endCxn id="138" idx="0"/>
+            </p:cNvCxnSpPr>
+            <p:nvPr/>
+          </p:nvCxnSpPr>
+          <p:spPr>
+            <a:xfrm>
+              <a:off x="5795196" y="2265902"/>
+              <a:ext cx="0" cy="213562"/>
+            </a:xfrm>
+            <a:prstGeom prst="straightConnector1">
+              <a:avLst/>
+            </a:prstGeom>
+            <a:ln w="19050">
+              <a:solidFill>
+                <a:schemeClr val="tx1"/>
+              </a:solidFill>
+              <a:tailEnd type="triangle"/>
+            </a:ln>
+          </p:spPr>
+          <p:style>
+            <a:lnRef idx="1">
+              <a:schemeClr val="accent1"/>
+            </a:lnRef>
+            <a:fillRef idx="0">
+              <a:schemeClr val="accent1"/>
+            </a:fillRef>
+            <a:effectRef idx="0">
+              <a:schemeClr val="accent1"/>
+            </a:effectRef>
+            <a:fontRef idx="minor">
+              <a:schemeClr val="tx1"/>
+            </a:fontRef>
+          </p:style>
+        </p:cxnSp>
+        <p:cxnSp>
+          <p:nvCxnSpPr>
+            <p:cNvPr id="154" name="直接箭头连接符 153">
+              <a:extLst>
+                <a:ext uri="{FF2B5EF4-FFF2-40B4-BE49-F238E27FC236}">
+                  <a16:creationId xmlns:a16="http://schemas.microsoft.com/office/drawing/2014/main" id="{FE4E6AED-1301-7DA5-4B38-A6561A77AA5E}"/>
+                </a:ext>
+              </a:extLst>
+            </p:cNvPr>
+            <p:cNvCxnSpPr>
+              <a:cxnSpLocks/>
+              <a:stCxn id="138" idx="3"/>
+              <a:endCxn id="107" idx="0"/>
+            </p:cNvCxnSpPr>
+            <p:nvPr/>
+          </p:nvCxnSpPr>
+          <p:spPr>
+            <a:xfrm flipH="1" flipV="1">
+              <a:off x="5795196" y="283154"/>
+              <a:ext cx="1535304" cy="2704005"/>
+            </a:xfrm>
+            <a:prstGeom prst="bentConnector4">
+              <a:avLst>
+                <a:gd name="adj1" fmla="val -299281"/>
+                <a:gd name="adj2" fmla="val 108454"/>
+              </a:avLst>
+            </a:prstGeom>
+            <a:ln w="19050">
+              <a:solidFill>
+                <a:schemeClr val="tx1"/>
+              </a:solidFill>
+              <a:tailEnd type="triangle"/>
+            </a:ln>
+          </p:spPr>
+          <p:style>
+            <a:lnRef idx="1">
+              <a:schemeClr val="accent1"/>
+            </a:lnRef>
+            <a:fillRef idx="0">
+              <a:schemeClr val="accent1"/>
+            </a:fillRef>
+            <a:effectRef idx="0">
+              <a:schemeClr val="accent1"/>
+            </a:effectRef>
+            <a:fontRef idx="minor">
+              <a:schemeClr val="tx1"/>
+            </a:fontRef>
+          </p:style>
+        </p:cxnSp>
+        <p:cxnSp>
+          <p:nvCxnSpPr>
+            <p:cNvPr id="172" name="直接箭头连接符 171">
+              <a:extLst>
+                <a:ext uri="{FF2B5EF4-FFF2-40B4-BE49-F238E27FC236}">
+                  <a16:creationId xmlns:a16="http://schemas.microsoft.com/office/drawing/2014/main" id="{66257E67-5CF8-8B36-658C-7B2DCA817D0C}"/>
+                </a:ext>
+              </a:extLst>
+            </p:cNvPr>
+            <p:cNvCxnSpPr>
+              <a:cxnSpLocks/>
+              <a:stCxn id="145" idx="2"/>
+              <a:endCxn id="208" idx="0"/>
+            </p:cNvCxnSpPr>
+            <p:nvPr/>
+          </p:nvCxnSpPr>
+          <p:spPr>
+            <a:xfrm flipH="1">
+              <a:off x="5790950" y="5432104"/>
+              <a:ext cx="4246" cy="355102"/>
+            </a:xfrm>
+            <a:prstGeom prst="straightConnector1">
+              <a:avLst/>
+            </a:prstGeom>
+            <a:ln w="19050">
+              <a:solidFill>
+                <a:schemeClr val="tx1"/>
+              </a:solidFill>
+              <a:tailEnd type="triangle"/>
+            </a:ln>
+          </p:spPr>
+          <p:style>
+            <a:lnRef idx="1">
+              <a:schemeClr val="accent1"/>
+            </a:lnRef>
+            <a:fillRef idx="0">
+              <a:schemeClr val="accent1"/>
+            </a:fillRef>
+            <a:effectRef idx="0">
+              <a:schemeClr val="accent1"/>
+            </a:effectRef>
+            <a:fontRef idx="minor">
+              <a:schemeClr val="tx1"/>
+            </a:fontRef>
+          </p:style>
+        </p:cxnSp>
+        <p:cxnSp>
+          <p:nvCxnSpPr>
+            <p:cNvPr id="174" name="直接箭头连接符 173">
+              <a:extLst>
+                <a:ext uri="{FF2B5EF4-FFF2-40B4-BE49-F238E27FC236}">
+                  <a16:creationId xmlns:a16="http://schemas.microsoft.com/office/drawing/2014/main" id="{EA425204-CD49-FAD0-8A03-5182B225D575}"/>
+                </a:ext>
+              </a:extLst>
+            </p:cNvPr>
+            <p:cNvCxnSpPr>
+              <a:cxnSpLocks/>
+              <a:stCxn id="145" idx="3"/>
+              <a:endCxn id="82" idx="0"/>
+            </p:cNvCxnSpPr>
+            <p:nvPr/>
+          </p:nvCxnSpPr>
+          <p:spPr>
+            <a:xfrm>
+              <a:off x="7330500" y="4924409"/>
+              <a:ext cx="2523309" cy="686145"/>
+            </a:xfrm>
+            <a:prstGeom prst="bentConnector2">
+              <a:avLst/>
+            </a:prstGeom>
+            <a:ln w="19050">
+              <a:solidFill>
+                <a:schemeClr val="tx1"/>
+              </a:solidFill>
+              <a:tailEnd type="triangle"/>
+            </a:ln>
+          </p:spPr>
+          <p:style>
+            <a:lnRef idx="1">
+              <a:schemeClr val="accent1"/>
+            </a:lnRef>
+            <a:fillRef idx="0">
+              <a:schemeClr val="accent1"/>
+            </a:fillRef>
+            <a:effectRef idx="0">
+              <a:schemeClr val="accent1"/>
+            </a:effectRef>
+            <a:fontRef idx="minor">
+              <a:schemeClr val="tx1"/>
+            </a:fontRef>
+          </p:style>
+        </p:cxnSp>
+        <p:cxnSp>
+          <p:nvCxnSpPr>
+            <p:cNvPr id="184" name="直接箭头连接符 183">
+              <a:extLst>
+                <a:ext uri="{FF2B5EF4-FFF2-40B4-BE49-F238E27FC236}">
+                  <a16:creationId xmlns:a16="http://schemas.microsoft.com/office/drawing/2014/main" id="{AFF29800-BAA3-2D68-74BB-2E34D3ADBCFE}"/>
+                </a:ext>
+              </a:extLst>
+            </p:cNvPr>
+            <p:cNvCxnSpPr>
+              <a:stCxn id="59" idx="2"/>
+              <a:endCxn id="145" idx="0"/>
+            </p:cNvCxnSpPr>
+            <p:nvPr/>
+          </p:nvCxnSpPr>
+          <p:spPr>
+            <a:xfrm flipH="1">
+              <a:off x="5795196" y="4229049"/>
+              <a:ext cx="2109" cy="187665"/>
+            </a:xfrm>
+            <a:prstGeom prst="straightConnector1">
+              <a:avLst/>
+            </a:prstGeom>
+            <a:ln w="19050">
+              <a:solidFill>
+                <a:schemeClr val="tx1"/>
+              </a:solidFill>
+              <a:tailEnd type="triangle"/>
+            </a:ln>
+          </p:spPr>
+          <p:style>
+            <a:lnRef idx="1">
+              <a:schemeClr val="accent1"/>
+            </a:lnRef>
+            <a:fillRef idx="0">
+              <a:schemeClr val="accent1"/>
+            </a:fillRef>
+            <a:effectRef idx="0">
+              <a:schemeClr val="accent1"/>
+            </a:effectRef>
+            <a:fontRef idx="minor">
+              <a:schemeClr val="tx1"/>
+            </a:fontRef>
+          </p:style>
+        </p:cxnSp>
+        <p:sp>
+          <p:nvSpPr>
+            <p:cNvPr id="187" name="文本框 186">
+              <a:extLst>
+                <a:ext uri="{FF2B5EF4-FFF2-40B4-BE49-F238E27FC236}">
+                  <a16:creationId xmlns:a16="http://schemas.microsoft.com/office/drawing/2014/main" id="{F238CA07-EE20-B274-9CCC-2487E0A8882C}"/>
+                </a:ext>
+              </a:extLst>
+            </p:cNvPr>
+            <p:cNvSpPr txBox="1"/>
+            <p:nvPr/>
+          </p:nvSpPr>
+          <p:spPr>
+            <a:xfrm>
+              <a:off x="7213534" y="2659437"/>
+              <a:ext cx="463648" cy="327722"/>
+            </a:xfrm>
+            <a:prstGeom prst="rect">
+              <a:avLst/>
+            </a:prstGeom>
+            <a:noFill/>
+          </p:spPr>
+          <p:txBody>
+            <a:bodyPr wrap="square" rtlCol="0" anchor="ctr" anchorCtr="1">
+              <a:spAutoFit/>
+            </a:bodyPr>
+            <a:lstStyle/>
+            <a:p>
+              <a:pPr algn="ctr"/>
+              <a:r>
+                <a:rPr lang="zh-CN" altLang="en-US" dirty="0">
+                  <a:latin typeface="Times New Roman" panose="02020603050405020304" pitchFamily="18" charset="0"/>
+                  <a:ea typeface="宋体" panose="02010600030101010101" pitchFamily="2" charset="-122"/>
+                </a:rPr>
+                <a:t>否</a:t>
+              </a:r>
+            </a:p>
+          </p:txBody>
+        </p:sp>
+        <p:sp>
+          <p:nvSpPr>
+            <p:cNvPr id="188" name="文本框 187">
+              <a:extLst>
+                <a:ext uri="{FF2B5EF4-FFF2-40B4-BE49-F238E27FC236}">
+                  <a16:creationId xmlns:a16="http://schemas.microsoft.com/office/drawing/2014/main" id="{D643235A-30B3-4A36-647B-B4932738206A}"/>
+                </a:ext>
+              </a:extLst>
+            </p:cNvPr>
+            <p:cNvSpPr txBox="1"/>
+            <p:nvPr/>
+          </p:nvSpPr>
+          <p:spPr>
+            <a:xfrm>
+              <a:off x="5795194" y="3413981"/>
+              <a:ext cx="463648" cy="327722"/>
+            </a:xfrm>
+            <a:prstGeom prst="rect">
+              <a:avLst/>
+            </a:prstGeom>
+            <a:noFill/>
+          </p:spPr>
+          <p:txBody>
+            <a:bodyPr wrap="square" rtlCol="0" anchor="ctr" anchorCtr="1">
+              <a:spAutoFit/>
+            </a:bodyPr>
+            <a:lstStyle/>
+            <a:p>
+              <a:pPr algn="ctr"/>
+              <a:r>
+                <a:rPr lang="zh-CN" altLang="en-US" dirty="0">
+                  <a:latin typeface="Times New Roman" panose="02020603050405020304" pitchFamily="18" charset="0"/>
+                  <a:ea typeface="宋体" panose="02010600030101010101" pitchFamily="2" charset="-122"/>
+                </a:rPr>
+                <a:t>是</a:t>
+              </a:r>
+            </a:p>
+          </p:txBody>
+        </p:sp>
+        <p:sp>
+          <p:nvSpPr>
+            <p:cNvPr id="189" name="文本框 188">
+              <a:extLst>
+                <a:ext uri="{FF2B5EF4-FFF2-40B4-BE49-F238E27FC236}">
+                  <a16:creationId xmlns:a16="http://schemas.microsoft.com/office/drawing/2014/main" id="{F9D7C336-2B36-037D-A56E-BF8B32180ADB}"/>
+                </a:ext>
+              </a:extLst>
+            </p:cNvPr>
+            <p:cNvSpPr txBox="1"/>
+            <p:nvPr/>
+          </p:nvSpPr>
+          <p:spPr>
+            <a:xfrm>
+              <a:off x="5795194" y="1298948"/>
+              <a:ext cx="463648" cy="327722"/>
+            </a:xfrm>
+            <a:prstGeom prst="rect">
+              <a:avLst/>
+            </a:prstGeom>
+            <a:noFill/>
+          </p:spPr>
+          <p:txBody>
+            <a:bodyPr wrap="square" rtlCol="0" anchor="ctr" anchorCtr="1">
+              <a:spAutoFit/>
+            </a:bodyPr>
+            <a:lstStyle/>
+            <a:p>
+              <a:pPr algn="ctr"/>
+              <a:r>
+                <a:rPr lang="zh-CN" altLang="en-US" dirty="0">
+                  <a:latin typeface="Times New Roman" panose="02020603050405020304" pitchFamily="18" charset="0"/>
+                  <a:ea typeface="宋体" panose="02010600030101010101" pitchFamily="2" charset="-122"/>
+                </a:rPr>
+                <a:t>是</a:t>
+              </a:r>
+            </a:p>
+          </p:txBody>
+        </p:sp>
+        <p:sp>
+          <p:nvSpPr>
+            <p:cNvPr id="190" name="文本框 189">
+              <a:extLst>
+                <a:ext uri="{FF2B5EF4-FFF2-40B4-BE49-F238E27FC236}">
+                  <a16:creationId xmlns:a16="http://schemas.microsoft.com/office/drawing/2014/main" id="{A55EC7A4-F28D-42CC-AB9D-E4B77238E520}"/>
+                </a:ext>
+              </a:extLst>
+            </p:cNvPr>
+            <p:cNvSpPr txBox="1"/>
+            <p:nvPr/>
+          </p:nvSpPr>
+          <p:spPr>
+            <a:xfrm>
+              <a:off x="7213534" y="496217"/>
+              <a:ext cx="463648" cy="327722"/>
+            </a:xfrm>
+            <a:prstGeom prst="rect">
+              <a:avLst/>
+            </a:prstGeom>
+            <a:noFill/>
+          </p:spPr>
+          <p:txBody>
+            <a:bodyPr wrap="square" rtlCol="0" anchor="ctr" anchorCtr="1">
+              <a:spAutoFit/>
+            </a:bodyPr>
+            <a:lstStyle/>
+            <a:p>
+              <a:pPr algn="ctr"/>
+              <a:r>
+                <a:rPr lang="zh-CN" altLang="en-US" dirty="0">
+                  <a:latin typeface="Times New Roman" panose="02020603050405020304" pitchFamily="18" charset="0"/>
+                  <a:ea typeface="宋体" panose="02010600030101010101" pitchFamily="2" charset="-122"/>
+                </a:rPr>
+                <a:t>否</a:t>
+              </a:r>
+            </a:p>
+          </p:txBody>
+        </p:sp>
+        <p:grpSp>
+          <p:nvGrpSpPr>
+            <p:cNvPr id="210" name="组合 209">
+              <a:extLst>
+                <a:ext uri="{FF2B5EF4-FFF2-40B4-BE49-F238E27FC236}">
+                  <a16:creationId xmlns:a16="http://schemas.microsoft.com/office/drawing/2014/main" id="{387F3B54-D71B-482B-AC3A-A74F3E1E4F3C}"/>
+                </a:ext>
+              </a:extLst>
+            </p:cNvPr>
+            <p:cNvGrpSpPr/>
+            <p:nvPr/>
+          </p:nvGrpSpPr>
+          <p:grpSpPr>
+            <a:xfrm>
+              <a:off x="4370505" y="5787206"/>
+              <a:ext cx="2840890" cy="787681"/>
+              <a:chOff x="2846505" y="5787206"/>
+              <a:chExt cx="2840890" cy="787681"/>
+            </a:xfrm>
+          </p:grpSpPr>
+          <p:sp>
+            <p:nvSpPr>
+              <p:cNvPr id="208" name="流程图: 终止 207">
+                <a:extLst>
+                  <a:ext uri="{FF2B5EF4-FFF2-40B4-BE49-F238E27FC236}">
+                    <a16:creationId xmlns:a16="http://schemas.microsoft.com/office/drawing/2014/main" id="{54E9F143-8E2C-997A-7871-9A067D7C36FA}"/>
+                  </a:ext>
+                </a:extLst>
+              </p:cNvPr>
+              <p:cNvSpPr/>
+              <p:nvPr/>
+            </p:nvSpPr>
+            <p:spPr>
+              <a:xfrm>
+                <a:off x="3076398" y="5787206"/>
+                <a:ext cx="2381104" cy="787681"/>
+              </a:xfrm>
+              <a:prstGeom prst="flowChartTerminator">
+                <a:avLst/>
+              </a:prstGeom>
+              <a:solidFill>
+                <a:srgbClr val="DCEBFF"/>
+              </a:solidFill>
+              <a:ln w="19050">
+                <a:solidFill>
+                  <a:schemeClr val="tx1"/>
+                </a:solidFill>
+              </a:ln>
+            </p:spPr>
+            <p:style>
+              <a:lnRef idx="2">
+                <a:schemeClr val="accent1">
+                  <a:shade val="15000"/>
+                </a:schemeClr>
+              </a:lnRef>
+              <a:fillRef idx="1">
+                <a:schemeClr val="accent1"/>
+              </a:fillRef>
+              <a:effectRef idx="0">
+                <a:schemeClr val="accent1"/>
+              </a:effectRef>
+              <a:fontRef idx="minor">
+                <a:schemeClr val="lt1"/>
+              </a:fontRef>
+            </p:style>
+            <p:txBody>
+              <a:bodyPr rtlCol="0" anchor="ctr"/>
+              <a:lstStyle/>
+              <a:p>
+                <a:pPr algn="ctr"/>
+                <a:endParaRPr lang="zh-CN" altLang="en-US" dirty="0" err="1">
+                  <a:solidFill>
+                    <a:schemeClr val="tx1"/>
+                  </a:solidFill>
+                </a:endParaRPr>
+              </a:p>
+            </p:txBody>
+          </p:sp>
+          <p:sp>
+            <p:nvSpPr>
+              <p:cNvPr id="78" name="文本框 77">
+                <a:extLst>
+                  <a:ext uri="{FF2B5EF4-FFF2-40B4-BE49-F238E27FC236}">
+                    <a16:creationId xmlns:a16="http://schemas.microsoft.com/office/drawing/2014/main" id="{2F3754FC-C540-2C55-E949-1F089EF2695F}"/>
+                  </a:ext>
+                </a:extLst>
+              </p:cNvPr>
+              <p:cNvSpPr txBox="1"/>
+              <p:nvPr/>
+            </p:nvSpPr>
+            <p:spPr>
+              <a:xfrm>
+                <a:off x="2846505" y="6069931"/>
+                <a:ext cx="2840890" cy="222231"/>
+              </a:xfrm>
+              <a:prstGeom prst="rect">
+                <a:avLst/>
+              </a:prstGeom>
+              <a:noFill/>
+            </p:spPr>
+            <p:txBody>
+              <a:bodyPr wrap="square" rtlCol="0" anchor="ctr" anchorCtr="1">
+                <a:spAutoFit/>
+              </a:bodyPr>
+              <a:lstStyle/>
+              <a:p>
+                <a:pPr algn="ctr"/>
+                <a:r>
+                  <a:rPr lang="zh-CN" altLang="en-US" dirty="0">
+                    <a:latin typeface="Times New Roman" panose="02020603050405020304" pitchFamily="18" charset="0"/>
+                    <a:ea typeface="宋体" panose="02010600030101010101" pitchFamily="2" charset="-122"/>
+                  </a:rPr>
+                  <a:t>传输结束</a:t>
+                </a:r>
+                <a:endParaRPr lang="en-US" altLang="zh-CN" dirty="0">
+                  <a:latin typeface="Times New Roman" panose="02020603050405020304" pitchFamily="18" charset="0"/>
+                  <a:ea typeface="宋体" panose="02010600030101010101" pitchFamily="2" charset="-122"/>
+                </a:endParaRPr>
+              </a:p>
+            </p:txBody>
+          </p:sp>
+        </p:grpSp>
+        <p:grpSp>
+          <p:nvGrpSpPr>
+            <p:cNvPr id="216" name="组合 215">
+              <a:extLst>
+                <a:ext uri="{FF2B5EF4-FFF2-40B4-BE49-F238E27FC236}">
+                  <a16:creationId xmlns:a16="http://schemas.microsoft.com/office/drawing/2014/main" id="{871A0380-BCA4-97A2-B70C-6C5281139252}"/>
+                </a:ext>
+              </a:extLst>
+            </p:cNvPr>
+            <p:cNvGrpSpPr/>
+            <p:nvPr/>
+          </p:nvGrpSpPr>
+          <p:grpSpPr>
+            <a:xfrm>
+              <a:off x="934784" y="3038881"/>
+              <a:ext cx="2837501" cy="995670"/>
+              <a:chOff x="859765" y="2290034"/>
+              <a:chExt cx="2837501" cy="995670"/>
+            </a:xfrm>
+          </p:grpSpPr>
+          <p:sp>
+            <p:nvSpPr>
+              <p:cNvPr id="211" name="流程图: 准备 210">
+                <a:extLst>
+                  <a:ext uri="{FF2B5EF4-FFF2-40B4-BE49-F238E27FC236}">
+                    <a16:creationId xmlns:a16="http://schemas.microsoft.com/office/drawing/2014/main" id="{DCD0C7F8-7689-8C03-CC93-30457941711F}"/>
+                  </a:ext>
+                </a:extLst>
+              </p:cNvPr>
+              <p:cNvSpPr/>
+              <p:nvPr/>
+            </p:nvSpPr>
+            <p:spPr>
+              <a:xfrm>
+                <a:off x="859765" y="2290034"/>
+                <a:ext cx="2837501" cy="995670"/>
+              </a:xfrm>
+              <a:prstGeom prst="flowChartPreparation">
+                <a:avLst/>
+              </a:prstGeom>
+              <a:solidFill>
+                <a:schemeClr val="accent6">
+                  <a:lumMod val="20000"/>
+                  <a:lumOff val="80000"/>
+                </a:schemeClr>
+              </a:solidFill>
+              <a:ln w="19050">
+                <a:solidFill>
+                  <a:schemeClr val="tx1"/>
+                </a:solidFill>
+              </a:ln>
+            </p:spPr>
+            <p:style>
+              <a:lnRef idx="2">
+                <a:schemeClr val="accent1">
+                  <a:shade val="15000"/>
+                </a:schemeClr>
+              </a:lnRef>
+              <a:fillRef idx="1">
+                <a:schemeClr val="accent1"/>
+              </a:fillRef>
+              <a:effectRef idx="0">
+                <a:schemeClr val="accent1"/>
+              </a:effectRef>
+              <a:fontRef idx="minor">
+                <a:schemeClr val="lt1"/>
+              </a:fontRef>
+            </p:style>
+            <p:txBody>
+              <a:bodyPr rtlCol="0" anchor="ctr"/>
+              <a:lstStyle/>
+              <a:p>
+                <a:pPr algn="ctr"/>
+                <a:endParaRPr lang="zh-CN" altLang="en-US" dirty="0" err="1">
+                  <a:solidFill>
+                    <a:schemeClr val="tx1"/>
+                  </a:solidFill>
+                </a:endParaRPr>
+              </a:p>
+            </p:txBody>
+          </p:sp>
+          <mc:AlternateContent xmlns:mc="http://schemas.openxmlformats.org/markup-compatibility/2006">
+            <mc:Choice xmlns:a14="http://schemas.microsoft.com/office/drawing/2010/main" Requires="a14">
+              <p:sp>
+                <p:nvSpPr>
+                  <p:cNvPr id="212" name="文本框 211">
+                    <a:extLst>
+                      <a:ext uri="{FF2B5EF4-FFF2-40B4-BE49-F238E27FC236}">
+                        <a16:creationId xmlns:a16="http://schemas.microsoft.com/office/drawing/2014/main" id="{F3C3F635-4962-6F51-0772-54F35730F63E}"/>
+                      </a:ext>
+                    </a:extLst>
+                  </p:cNvPr>
+                  <p:cNvSpPr txBox="1"/>
+                  <p:nvPr/>
+                </p:nvSpPr>
+                <p:spPr>
+                  <a:xfrm>
+                    <a:off x="859765" y="2464704"/>
+                    <a:ext cx="2837501" cy="646331"/>
+                  </a:xfrm>
+                  <a:prstGeom prst="rect">
+                    <a:avLst/>
+                  </a:prstGeom>
+                  <a:noFill/>
+                </p:spPr>
+                <p:txBody>
+                  <a:bodyPr wrap="square" rtlCol="0" anchor="ctr" anchorCtr="1">
+                    <a:spAutoFit/>
+                  </a:bodyPr>
+                  <a:lstStyle/>
+                  <a:p>
+                    <a:pPr algn="ctr"/>
+                    <a:r>
+                      <a:rPr lang="zh-CN" altLang="en-US" dirty="0">
+                        <a:latin typeface="Times New Roman" panose="02020603050405020304" pitchFamily="18" charset="0"/>
+                        <a:ea typeface="宋体" panose="02010600030101010101" pitchFamily="2" charset="-122"/>
+                      </a:rPr>
+                      <a:t>确定优先级和</a:t>
+                    </a:r>
+                    <a:r>
+                      <a:rPr lang="en-US" altLang="zh-CN" dirty="0">
+                        <a:latin typeface="Times New Roman" panose="02020603050405020304" pitchFamily="18" charset="0"/>
+                        <a:ea typeface="宋体" panose="02010600030101010101" pitchFamily="2" charset="-122"/>
+                      </a:rPr>
+                      <a:t>LBT</a:t>
+                    </a:r>
+                    <a:r>
+                      <a:rPr lang="zh-CN" altLang="en-US" dirty="0">
+                        <a:latin typeface="Times New Roman" panose="02020603050405020304" pitchFamily="18" charset="0"/>
+                        <a:ea typeface="宋体" panose="02010600030101010101" pitchFamily="2" charset="-122"/>
+                      </a:rPr>
+                      <a:t>参数</a:t>
+                    </a:r>
+                    <a:r>
+                      <a:rPr lang="en-US" altLang="zh-CN" dirty="0">
+                        <a:latin typeface="Times New Roman" panose="02020603050405020304" pitchFamily="18" charset="0"/>
+                        <a:ea typeface="宋体" panose="02010600030101010101" pitchFamily="2" charset="-122"/>
+                      </a:rPr>
+                      <a:t>(</a:t>
+                    </a:r>
+                    <a14:m>
+                      <m:oMath xmlns:m="http://schemas.openxmlformats.org/officeDocument/2006/math">
+                        <m:r>
+                          <a:rPr lang="en-US" altLang="zh-CN" i="1" dirty="0">
+                            <a:latin typeface="Cambria Math" panose="02040503050406030204" pitchFamily="18" charset="0"/>
+                            <a:ea typeface="宋体" panose="02010600030101010101" pitchFamily="2" charset="-122"/>
+                          </a:rPr>
+                          <m:t>𝐶</m:t>
+                        </m:r>
+                        <m:sSub>
+                          <m:sSubPr>
+                            <m:ctrlPr>
+                              <a:rPr lang="en-US" altLang="zh-CN" i="1" dirty="0">
+                                <a:latin typeface="Cambria Math" panose="02040503050406030204" pitchFamily="18" charset="0"/>
+                                <a:ea typeface="宋体" panose="02010600030101010101" pitchFamily="2" charset="-122"/>
+                              </a:rPr>
+                            </m:ctrlPr>
+                          </m:sSubPr>
+                          <m:e>
+                            <m:r>
+                              <a:rPr lang="en-US" altLang="zh-CN" i="1" dirty="0">
+                                <a:latin typeface="Cambria Math" panose="02040503050406030204" pitchFamily="18" charset="0"/>
+                                <a:ea typeface="宋体" panose="02010600030101010101" pitchFamily="2" charset="-122"/>
+                              </a:rPr>
+                              <m:t>𝑊</m:t>
+                            </m:r>
+                          </m:e>
+                          <m:sub>
+                            <m:r>
+                              <a:rPr lang="en-US" altLang="zh-CN" i="1" dirty="0">
+                                <a:latin typeface="Cambria Math" panose="02040503050406030204" pitchFamily="18" charset="0"/>
+                                <a:ea typeface="宋体" panose="02010600030101010101" pitchFamily="2" charset="-122"/>
+                              </a:rPr>
+                              <m:t>𝑚𝑖𝑛</m:t>
+                            </m:r>
+                          </m:sub>
+                        </m:sSub>
+                        <m:r>
+                          <a:rPr lang="zh-CN" altLang="en-US" i="1" dirty="0" smtClean="0">
+                            <a:latin typeface="Cambria Math" panose="02040503050406030204" pitchFamily="18" charset="0"/>
+                            <a:ea typeface="宋体" panose="02010600030101010101" pitchFamily="2" charset="-122"/>
+                          </a:rPr>
+                          <m:t>、</m:t>
+                        </m:r>
+                        <m:r>
+                          <a:rPr lang="en-US" altLang="zh-CN" i="1" dirty="0">
+                            <a:latin typeface="Cambria Math" panose="02040503050406030204" pitchFamily="18" charset="0"/>
+                            <a:ea typeface="宋体" panose="02010600030101010101" pitchFamily="2" charset="-122"/>
+                          </a:rPr>
+                          <m:t>𝐶</m:t>
+                        </m:r>
+                        <m:sSub>
+                          <m:sSubPr>
+                            <m:ctrlPr>
+                              <a:rPr lang="en-US" altLang="zh-CN" i="1" dirty="0">
+                                <a:latin typeface="Cambria Math" panose="02040503050406030204" pitchFamily="18" charset="0"/>
+                                <a:ea typeface="宋体" panose="02010600030101010101" pitchFamily="2" charset="-122"/>
+                              </a:rPr>
+                            </m:ctrlPr>
+                          </m:sSubPr>
+                          <m:e>
+                            <m:r>
+                              <a:rPr lang="en-US" altLang="zh-CN" i="1" dirty="0">
+                                <a:latin typeface="Cambria Math" panose="02040503050406030204" pitchFamily="18" charset="0"/>
+                                <a:ea typeface="宋体" panose="02010600030101010101" pitchFamily="2" charset="-122"/>
+                              </a:rPr>
+                              <m:t>𝑊</m:t>
+                            </m:r>
+                          </m:e>
+                          <m:sub>
+                            <m:r>
+                              <a:rPr lang="en-US" altLang="zh-CN" i="1" dirty="0">
+                                <a:latin typeface="Cambria Math" panose="02040503050406030204" pitchFamily="18" charset="0"/>
+                                <a:ea typeface="宋体" panose="02010600030101010101" pitchFamily="2" charset="-122"/>
+                              </a:rPr>
+                              <m:t>𝑚𝑎𝑥</m:t>
+                            </m:r>
+                          </m:sub>
+                        </m:sSub>
+                        <m:r>
+                          <a:rPr lang="zh-CN" altLang="en-US" i="1" dirty="0" smtClean="0">
+                            <a:latin typeface="Cambria Math" panose="02040503050406030204" pitchFamily="18" charset="0"/>
+                            <a:ea typeface="宋体" panose="02010600030101010101" pitchFamily="2" charset="-122"/>
+                          </a:rPr>
+                          <m:t>等</m:t>
+                        </m:r>
+                      </m:oMath>
+                    </a14:m>
+                    <a:r>
+                      <a:rPr lang="en-US" altLang="zh-CN" dirty="0">
+                        <a:latin typeface="Times New Roman" panose="02020603050405020304" pitchFamily="18" charset="0"/>
+                        <a:ea typeface="宋体" panose="02010600030101010101" pitchFamily="2" charset="-122"/>
+                      </a:rPr>
+                      <a:t>)</a:t>
+                    </a:r>
+                    <a:endParaRPr lang="zh-CN" altLang="en-US" dirty="0">
+                      <a:latin typeface="Times New Roman" panose="02020603050405020304" pitchFamily="18" charset="0"/>
+                      <a:ea typeface="宋体" panose="02010600030101010101" pitchFamily="2" charset="-122"/>
+                    </a:endParaRPr>
+                  </a:p>
+                </p:txBody>
+              </p:sp>
+            </mc:Choice>
+            <mc:Fallback>
+              <p:sp>
+                <p:nvSpPr>
+                  <p:cNvPr id="212" name="文本框 211">
+                    <a:extLst>
+                      <a:ext uri="{FF2B5EF4-FFF2-40B4-BE49-F238E27FC236}">
+                        <a16:creationId xmlns:a16="http://schemas.microsoft.com/office/drawing/2014/main" id="{F3C3F635-4962-6F51-0772-54F35730F63E}"/>
+                      </a:ext>
+                    </a:extLst>
+                  </p:cNvPr>
+                  <p:cNvSpPr txBox="1">
+                    <a:spLocks noRot="1" noChangeAspect="1" noMove="1" noResize="1" noEditPoints="1" noAdjustHandles="1" noChangeArrowheads="1" noChangeShapeType="1" noTextEdit="1"/>
+                  </p:cNvSpPr>
+                  <p:nvPr/>
+                </p:nvSpPr>
+                <p:spPr>
+                  <a:xfrm>
+                    <a:off x="859765" y="2464704"/>
+                    <a:ext cx="2837501" cy="646331"/>
+                  </a:xfrm>
+                  <a:prstGeom prst="rect">
+                    <a:avLst/>
+                  </a:prstGeom>
+                  <a:blipFill>
+                    <a:blip r:embed="rId7"/>
+                    <a:stretch>
+                      <a:fillRect t="-6604" b="-15094"/>
+                    </a:stretch>
+                  </a:blipFill>
+                </p:spPr>
+                <p:txBody>
+                  <a:bodyPr/>
+                  <a:lstStyle/>
+                  <a:p>
+                    <a:r>
+                      <a:rPr lang="zh-CN" altLang="en-US">
+                        <a:noFill/>
+                      </a:rPr>
+                      <a:t> </a:t>
+                    </a:r>
+                  </a:p>
+                </p:txBody>
+              </p:sp>
+            </mc:Fallback>
+          </mc:AlternateContent>
+        </p:grpSp>
+        <p:cxnSp>
+          <p:nvCxnSpPr>
+            <p:cNvPr id="215" name="直接箭头连接符 214">
+              <a:extLst>
+                <a:ext uri="{FF2B5EF4-FFF2-40B4-BE49-F238E27FC236}">
+                  <a16:creationId xmlns:a16="http://schemas.microsoft.com/office/drawing/2014/main" id="{6776D8BC-D26D-269A-D6BF-7D6030CA5693}"/>
+                </a:ext>
+              </a:extLst>
+            </p:cNvPr>
+            <p:cNvCxnSpPr>
+              <a:stCxn id="211" idx="0"/>
+              <a:endCxn id="2" idx="2"/>
+            </p:cNvCxnSpPr>
+            <p:nvPr/>
+          </p:nvCxnSpPr>
+          <p:spPr>
+            <a:xfrm flipV="1">
+              <a:off x="2353535" y="1371656"/>
+              <a:ext cx="9680" cy="1667225"/>
+            </a:xfrm>
+            <a:prstGeom prst="straightConnector1">
+              <a:avLst/>
+            </a:prstGeom>
+            <a:ln w="19050">
+              <a:solidFill>
+                <a:schemeClr val="tx1"/>
+              </a:solidFill>
+              <a:tailEnd type="triangle"/>
+            </a:ln>
+          </p:spPr>
+          <p:style>
+            <a:lnRef idx="1">
+              <a:schemeClr val="accent1"/>
+            </a:lnRef>
+            <a:fillRef idx="0">
+              <a:schemeClr val="accent1"/>
+            </a:fillRef>
+            <a:effectRef idx="0">
+              <a:schemeClr val="accent1"/>
+            </a:effectRef>
+            <a:fontRef idx="minor">
+              <a:schemeClr val="tx1"/>
+            </a:fontRef>
+          </p:style>
+        </p:cxnSp>
+      </p:grpSp>
+    </p:spTree>
+    <p:extLst>
+      <p:ext uri="{BB962C8B-B14F-4D97-AF65-F5344CB8AC3E}">
+        <p14:creationId xmlns:p14="http://schemas.microsoft.com/office/powerpoint/2010/main" val="2760818324"/>
+      </p:ext>
+    </p:extLst>
+  </p:cSld>
+  <p:clrMapOvr>
+    <a:masterClrMapping/>
+  </p:clrMapOvr>
+</p:sld>
+</file>
+
+<file path=ppt/slides/slide8.xml><?xml version="1.0" encoding="utf-8"?>
+<p:sld xmlns:a="http://schemas.openxmlformats.org/drawingml/2006/main" xmlns:r="http://schemas.openxmlformats.org/officeDocument/2006/relationships" xmlns:p="http://schemas.openxmlformats.org/presentationml/2006/main">
+  <p:cSld>
+    <p:spTree>
+      <p:nvGrpSpPr>
+        <p:cNvPr id="1" name=""/>
+        <p:cNvGrpSpPr/>
+        <p:nvPr/>
+      </p:nvGrpSpPr>
+      <p:grpSpPr>
+        <a:xfrm>
+          <a:off x="0" y="0"/>
+          <a:ext cx="0" cy="0"/>
+          <a:chOff x="0" y="0"/>
+          <a:chExt cx="0" cy="0"/>
+        </a:xfrm>
+      </p:grpSpPr>
+      <p:sp>
+        <p:nvSpPr>
+          <p:cNvPr id="4" name="矩形 3">
+            <a:extLst>
+              <a:ext uri="{FF2B5EF4-FFF2-40B4-BE49-F238E27FC236}">
+                <a16:creationId xmlns:a16="http://schemas.microsoft.com/office/drawing/2014/main" id="{49466CFA-C8F0-14EF-535C-39367FC37735}"/>
+              </a:ext>
+            </a:extLst>
+          </p:cNvPr>
+          <p:cNvSpPr/>
+          <p:nvPr/>
+        </p:nvSpPr>
+        <p:spPr>
+          <a:xfrm>
+            <a:off x="3282229" y="1428761"/>
+            <a:ext cx="963930" cy="369331"/>
+          </a:xfrm>
+          <a:prstGeom prst="rect">
+            <a:avLst/>
+          </a:prstGeom>
+          <a:solidFill>
+            <a:schemeClr val="accent5">
+              <a:lumMod val="20000"/>
+              <a:lumOff val="80000"/>
+            </a:schemeClr>
+          </a:solidFill>
+          <a:ln w="19050">
+            <a:noFill/>
+          </a:ln>
+        </p:spPr>
+        <p:style>
+          <a:lnRef idx="2">
+            <a:schemeClr val="accent1">
+              <a:shade val="15000"/>
+            </a:schemeClr>
+          </a:lnRef>
+          <a:fillRef idx="1">
+            <a:schemeClr val="accent1"/>
+          </a:fillRef>
+          <a:effectRef idx="0">
+            <a:schemeClr val="accent1"/>
+          </a:effectRef>
+          <a:fontRef idx="minor">
+            <a:schemeClr val="lt1"/>
+          </a:fontRef>
+        </p:style>
+        <p:txBody>
+          <a:bodyPr rtlCol="0" anchor="ctr"/>
+          <a:lstStyle/>
+          <a:p>
+            <a:pPr algn="ctr"/>
+            <a:r>
+              <a:rPr lang="en-US" altLang="zh-CN" dirty="0">
+                <a:solidFill>
+                  <a:schemeClr val="tx1"/>
+                </a:solidFill>
+                <a:latin typeface="Times New Roman" panose="02020603050405020304" pitchFamily="18" charset="0"/>
+                <a:ea typeface="宋体" panose="02010600030101010101" pitchFamily="2" charset="-122"/>
+              </a:rPr>
+              <a:t>packet1</a:t>
+            </a:r>
+            <a:endParaRPr lang="zh-CN" altLang="en-US" dirty="0" err="1">
+              <a:solidFill>
+                <a:schemeClr val="tx1"/>
+              </a:solidFill>
+              <a:latin typeface="Times New Roman" panose="02020603050405020304" pitchFamily="18" charset="0"/>
+              <a:ea typeface="宋体" panose="02010600030101010101" pitchFamily="2" charset="-122"/>
+            </a:endParaRPr>
+          </a:p>
+        </p:txBody>
+      </p:sp>
+      <p:sp>
+        <p:nvSpPr>
+          <p:cNvPr id="8" name="矩形 7">
+            <a:extLst>
+              <a:ext uri="{FF2B5EF4-FFF2-40B4-BE49-F238E27FC236}">
+                <a16:creationId xmlns:a16="http://schemas.microsoft.com/office/drawing/2014/main" id="{812CD0FA-E786-7CF2-0277-D35B077B29DB}"/>
+              </a:ext>
+            </a:extLst>
+          </p:cNvPr>
+          <p:cNvSpPr/>
+          <p:nvPr/>
+        </p:nvSpPr>
+        <p:spPr>
+          <a:xfrm>
+            <a:off x="9050569" y="1428761"/>
+            <a:ext cx="963930" cy="369332"/>
+          </a:xfrm>
+          <a:prstGeom prst="rect">
+            <a:avLst/>
+          </a:prstGeom>
+          <a:solidFill>
+            <a:schemeClr val="accent5">
+              <a:lumMod val="20000"/>
+              <a:lumOff val="80000"/>
+            </a:schemeClr>
+          </a:solidFill>
+          <a:ln w="19050">
+            <a:noFill/>
+          </a:ln>
+        </p:spPr>
+        <p:style>
+          <a:lnRef idx="2">
+            <a:schemeClr val="accent1">
+              <a:shade val="15000"/>
+            </a:schemeClr>
+          </a:lnRef>
+          <a:fillRef idx="1">
+            <a:schemeClr val="accent1"/>
+          </a:fillRef>
+          <a:effectRef idx="0">
+            <a:schemeClr val="accent1"/>
+          </a:effectRef>
+          <a:fontRef idx="minor">
+            <a:schemeClr val="lt1"/>
+          </a:fontRef>
+        </p:style>
+        <p:txBody>
+          <a:bodyPr rtlCol="0" anchor="ctr"/>
+          <a:lstStyle/>
+          <a:p>
+            <a:pPr algn="ctr"/>
+            <a:r>
+              <a:rPr lang="en-US" altLang="zh-CN" dirty="0">
+                <a:solidFill>
+                  <a:schemeClr val="tx1"/>
+                </a:solidFill>
+                <a:latin typeface="Times New Roman" panose="02020603050405020304" pitchFamily="18" charset="0"/>
+                <a:ea typeface="宋体" panose="02010600030101010101" pitchFamily="2" charset="-122"/>
+              </a:rPr>
+              <a:t>packet3</a:t>
+            </a:r>
+            <a:endParaRPr lang="zh-CN" altLang="en-US" dirty="0">
+              <a:solidFill>
+                <a:schemeClr val="tx1"/>
+              </a:solidFill>
+              <a:latin typeface="Times New Roman" panose="02020603050405020304" pitchFamily="18" charset="0"/>
+              <a:ea typeface="宋体" panose="02010600030101010101" pitchFamily="2" charset="-122"/>
+            </a:endParaRPr>
+          </a:p>
+        </p:txBody>
+      </p:sp>
+      <p:sp>
+        <p:nvSpPr>
+          <p:cNvPr id="9" name="矩形 8">
+            <a:extLst>
+              <a:ext uri="{FF2B5EF4-FFF2-40B4-BE49-F238E27FC236}">
+                <a16:creationId xmlns:a16="http://schemas.microsoft.com/office/drawing/2014/main" id="{5A8E55AE-C4C5-61C9-D3D2-C645CE43C251}"/>
+              </a:ext>
+            </a:extLst>
+          </p:cNvPr>
+          <p:cNvSpPr/>
+          <p:nvPr/>
+        </p:nvSpPr>
+        <p:spPr>
+          <a:xfrm>
+            <a:off x="5620299" y="1428761"/>
+            <a:ext cx="963930" cy="369332"/>
+          </a:xfrm>
+          <a:prstGeom prst="rect">
+            <a:avLst/>
+          </a:prstGeom>
+          <a:solidFill>
+            <a:schemeClr val="accent5">
+              <a:lumMod val="20000"/>
+              <a:lumOff val="80000"/>
+            </a:schemeClr>
+          </a:solidFill>
+          <a:ln w="19050">
+            <a:noFill/>
+          </a:ln>
+        </p:spPr>
+        <p:style>
+          <a:lnRef idx="2">
+            <a:schemeClr val="accent1">
+              <a:shade val="15000"/>
+            </a:schemeClr>
+          </a:lnRef>
+          <a:fillRef idx="1">
+            <a:schemeClr val="accent1"/>
+          </a:fillRef>
+          <a:effectRef idx="0">
+            <a:schemeClr val="accent1"/>
+          </a:effectRef>
+          <a:fontRef idx="minor">
+            <a:schemeClr val="lt1"/>
+          </a:fontRef>
+        </p:style>
+        <p:txBody>
+          <a:bodyPr rtlCol="0" anchor="ctr"/>
+          <a:lstStyle/>
+          <a:p>
+            <a:pPr algn="ctr"/>
+            <a:r>
+              <a:rPr lang="en-US" altLang="zh-CN" dirty="0">
+                <a:solidFill>
+                  <a:schemeClr val="tx1"/>
+                </a:solidFill>
+                <a:latin typeface="Times New Roman" panose="02020603050405020304" pitchFamily="18" charset="0"/>
+                <a:ea typeface="宋体" panose="02010600030101010101" pitchFamily="2" charset="-122"/>
+              </a:rPr>
+              <a:t>packet2</a:t>
+            </a:r>
+            <a:endParaRPr lang="zh-CN" altLang="en-US" dirty="0" err="1">
+              <a:solidFill>
+                <a:schemeClr val="tx1"/>
+              </a:solidFill>
+              <a:latin typeface="Times New Roman" panose="02020603050405020304" pitchFamily="18" charset="0"/>
+              <a:ea typeface="宋体" panose="02010600030101010101" pitchFamily="2" charset="-122"/>
+            </a:endParaRPr>
+          </a:p>
+        </p:txBody>
+      </p:sp>
+      <p:sp>
+        <p:nvSpPr>
+          <p:cNvPr id="29" name="矩形 28">
+            <a:extLst>
+              <a:ext uri="{FF2B5EF4-FFF2-40B4-BE49-F238E27FC236}">
+                <a16:creationId xmlns:a16="http://schemas.microsoft.com/office/drawing/2014/main" id="{C888AF54-3DC3-C8B7-225D-48555EC6400D}"/>
+              </a:ext>
+            </a:extLst>
+          </p:cNvPr>
+          <p:cNvSpPr/>
+          <p:nvPr/>
+        </p:nvSpPr>
+        <p:spPr>
+          <a:xfrm>
+            <a:off x="3282229" y="3071497"/>
+            <a:ext cx="963930" cy="369331"/>
+          </a:xfrm>
+          <a:prstGeom prst="rect">
+            <a:avLst/>
+          </a:prstGeom>
+          <a:solidFill>
+            <a:srgbClr val="FFC6C6"/>
+          </a:solidFill>
+          <a:ln w="19050">
+            <a:noFill/>
+          </a:ln>
+        </p:spPr>
+        <p:style>
+          <a:lnRef idx="2">
+            <a:schemeClr val="accent1">
+              <a:shade val="15000"/>
+            </a:schemeClr>
+          </a:lnRef>
+          <a:fillRef idx="1">
+            <a:schemeClr val="accent1"/>
+          </a:fillRef>
+          <a:effectRef idx="0">
+            <a:schemeClr val="accent1"/>
+          </a:effectRef>
+          <a:fontRef idx="minor">
+            <a:schemeClr val="lt1"/>
+          </a:fontRef>
+        </p:style>
+        <p:txBody>
+          <a:bodyPr rtlCol="0" anchor="ctr"/>
+          <a:lstStyle/>
+          <a:p>
+            <a:pPr algn="ctr"/>
+            <a:r>
+              <a:rPr lang="en-US" altLang="zh-CN" dirty="0">
+                <a:solidFill>
+                  <a:schemeClr val="tx1"/>
+                </a:solidFill>
+                <a:latin typeface="Times New Roman" panose="02020603050405020304" pitchFamily="18" charset="0"/>
+                <a:ea typeface="宋体" panose="02010600030101010101" pitchFamily="2" charset="-122"/>
+              </a:rPr>
+              <a:t>packet1</a:t>
+            </a:r>
+            <a:endParaRPr lang="zh-CN" altLang="en-US" dirty="0" err="1">
+              <a:solidFill>
+                <a:schemeClr val="tx1"/>
+              </a:solidFill>
+              <a:latin typeface="Times New Roman" panose="02020603050405020304" pitchFamily="18" charset="0"/>
+              <a:ea typeface="宋体" panose="02010600030101010101" pitchFamily="2" charset="-122"/>
+            </a:endParaRPr>
+          </a:p>
+        </p:txBody>
+      </p:sp>
+      <p:sp>
+        <p:nvSpPr>
+          <p:cNvPr id="30" name="矩形 29">
+            <a:extLst>
+              <a:ext uri="{FF2B5EF4-FFF2-40B4-BE49-F238E27FC236}">
+                <a16:creationId xmlns:a16="http://schemas.microsoft.com/office/drawing/2014/main" id="{01678FF6-DC44-2523-C8BE-04F13D7F490E}"/>
+              </a:ext>
+            </a:extLst>
+          </p:cNvPr>
+          <p:cNvSpPr/>
+          <p:nvPr/>
+        </p:nvSpPr>
+        <p:spPr>
+          <a:xfrm>
+            <a:off x="5246388" y="3071496"/>
+            <a:ext cx="963930" cy="369332"/>
+          </a:xfrm>
+          <a:prstGeom prst="rect">
+            <a:avLst/>
+          </a:prstGeom>
+          <a:solidFill>
+            <a:srgbClr val="FFC6C6"/>
+          </a:solidFill>
+          <a:ln w="19050">
+            <a:noFill/>
+          </a:ln>
+        </p:spPr>
+        <p:style>
+          <a:lnRef idx="2">
+            <a:schemeClr val="accent1">
+              <a:shade val="15000"/>
+            </a:schemeClr>
+          </a:lnRef>
+          <a:fillRef idx="1">
+            <a:schemeClr val="accent1"/>
+          </a:fillRef>
+          <a:effectRef idx="0">
+            <a:schemeClr val="accent1"/>
+          </a:effectRef>
+          <a:fontRef idx="minor">
+            <a:schemeClr val="lt1"/>
+          </a:fontRef>
+        </p:style>
+        <p:txBody>
+          <a:bodyPr rtlCol="0" anchor="ctr"/>
+          <a:lstStyle/>
+          <a:p>
+            <a:pPr algn="ctr"/>
+            <a:r>
+              <a:rPr lang="en-US" altLang="zh-CN" dirty="0">
+                <a:solidFill>
+                  <a:schemeClr val="tx1"/>
+                </a:solidFill>
+                <a:latin typeface="Times New Roman" panose="02020603050405020304" pitchFamily="18" charset="0"/>
+                <a:ea typeface="宋体" panose="02010600030101010101" pitchFamily="2" charset="-122"/>
+              </a:rPr>
+              <a:t>packet3</a:t>
+            </a:r>
+            <a:endParaRPr lang="zh-CN" altLang="en-US" dirty="0">
+              <a:solidFill>
+                <a:schemeClr val="tx1"/>
+              </a:solidFill>
+              <a:latin typeface="Times New Roman" panose="02020603050405020304" pitchFamily="18" charset="0"/>
+              <a:ea typeface="宋体" panose="02010600030101010101" pitchFamily="2" charset="-122"/>
+            </a:endParaRPr>
+          </a:p>
+        </p:txBody>
+      </p:sp>
+      <p:sp>
+        <p:nvSpPr>
+          <p:cNvPr id="31" name="矩形 30">
+            <a:extLst>
+              <a:ext uri="{FF2B5EF4-FFF2-40B4-BE49-F238E27FC236}">
+                <a16:creationId xmlns:a16="http://schemas.microsoft.com/office/drawing/2014/main" id="{69C1602D-85E9-B769-0C8D-ACF08845CBE5}"/>
+              </a:ext>
+            </a:extLst>
+          </p:cNvPr>
+          <p:cNvSpPr/>
+          <p:nvPr/>
+        </p:nvSpPr>
+        <p:spPr>
+          <a:xfrm>
+            <a:off x="4267356" y="3071496"/>
+            <a:ext cx="963930" cy="369332"/>
+          </a:xfrm>
+          <a:prstGeom prst="rect">
+            <a:avLst/>
+          </a:prstGeom>
+          <a:solidFill>
+            <a:srgbClr val="FFC6C6"/>
+          </a:solidFill>
+          <a:ln w="19050">
+            <a:noFill/>
+          </a:ln>
+        </p:spPr>
+        <p:style>
+          <a:lnRef idx="2">
+            <a:schemeClr val="accent1">
+              <a:shade val="15000"/>
+            </a:schemeClr>
+          </a:lnRef>
+          <a:fillRef idx="1">
+            <a:schemeClr val="accent1"/>
+          </a:fillRef>
+          <a:effectRef idx="0">
+            <a:schemeClr val="accent1"/>
+          </a:effectRef>
+          <a:fontRef idx="minor">
+            <a:schemeClr val="lt1"/>
+          </a:fontRef>
+        </p:style>
+        <p:txBody>
+          <a:bodyPr rtlCol="0" anchor="ctr"/>
+          <a:lstStyle/>
+          <a:p>
+            <a:pPr algn="ctr"/>
+            <a:r>
+              <a:rPr lang="en-US" altLang="zh-CN" dirty="0">
+                <a:solidFill>
+                  <a:schemeClr val="tx1"/>
+                </a:solidFill>
+                <a:latin typeface="Times New Roman" panose="02020603050405020304" pitchFamily="18" charset="0"/>
+                <a:ea typeface="宋体" panose="02010600030101010101" pitchFamily="2" charset="-122"/>
+              </a:rPr>
+              <a:t>packet2</a:t>
+            </a:r>
+            <a:endParaRPr lang="zh-CN" altLang="en-US" dirty="0" err="1">
+              <a:solidFill>
+                <a:schemeClr val="tx1"/>
+              </a:solidFill>
+              <a:latin typeface="Times New Roman" panose="02020603050405020304" pitchFamily="18" charset="0"/>
+              <a:ea typeface="宋体" panose="02010600030101010101" pitchFamily="2" charset="-122"/>
+            </a:endParaRPr>
+          </a:p>
+        </p:txBody>
+      </p:sp>
+      <p:cxnSp>
+        <p:nvCxnSpPr>
+          <p:cNvPr id="3" name="直接箭头连接符 2">
+            <a:extLst>
+              <a:ext uri="{FF2B5EF4-FFF2-40B4-BE49-F238E27FC236}">
+                <a16:creationId xmlns:a16="http://schemas.microsoft.com/office/drawing/2014/main" id="{ED76A790-3312-AF98-E625-A11D0003B861}"/>
+              </a:ext>
+            </a:extLst>
+          </p:cNvPr>
+          <p:cNvCxnSpPr>
+            <a:cxnSpLocks/>
+          </p:cNvCxnSpPr>
+          <p:nvPr/>
+        </p:nvCxnSpPr>
+        <p:spPr>
+          <a:xfrm>
+            <a:off x="2455459" y="1798093"/>
+            <a:ext cx="8275320" cy="0"/>
+          </a:xfrm>
+          <a:prstGeom prst="straightConnector1">
+            <a:avLst/>
+          </a:prstGeom>
+          <a:ln w="19050">
+            <a:solidFill>
+              <a:schemeClr val="tx1"/>
+            </a:solidFill>
+            <a:tailEnd type="triangle"/>
+          </a:ln>
+        </p:spPr>
+        <p:style>
+          <a:lnRef idx="1">
+            <a:schemeClr val="accent1"/>
+          </a:lnRef>
+          <a:fillRef idx="0">
+            <a:schemeClr val="accent1"/>
+          </a:fillRef>
+          <a:effectRef idx="0">
+            <a:schemeClr val="accent1"/>
+          </a:effectRef>
+          <a:fontRef idx="minor">
+            <a:schemeClr val="tx1"/>
+          </a:fontRef>
+        </p:style>
+      </p:cxnSp>
+      <p:sp>
+        <p:nvSpPr>
+          <p:cNvPr id="14" name="文本框 13">
+            <a:extLst>
+              <a:ext uri="{FF2B5EF4-FFF2-40B4-BE49-F238E27FC236}">
+                <a16:creationId xmlns:a16="http://schemas.microsoft.com/office/drawing/2014/main" id="{0C2CCB4A-48C5-346A-3A25-1E4CE39F7F58}"/>
+              </a:ext>
+            </a:extLst>
+          </p:cNvPr>
+          <p:cNvSpPr txBox="1"/>
+          <p:nvPr/>
+        </p:nvSpPr>
+        <p:spPr>
+          <a:xfrm>
+            <a:off x="9930679" y="1798093"/>
+            <a:ext cx="800100" cy="369332"/>
+          </a:xfrm>
+          <a:prstGeom prst="rect">
+            <a:avLst/>
+          </a:prstGeom>
+          <a:noFill/>
+        </p:spPr>
+        <p:txBody>
+          <a:bodyPr wrap="square" rtlCol="0" anchor="ctr" anchorCtr="1">
+            <a:spAutoFit/>
+          </a:bodyPr>
+          <a:lstStyle/>
+          <a:p>
+            <a:pPr algn="ctr"/>
+            <a:r>
+              <a:rPr lang="zh-CN" altLang="en-US" dirty="0">
+                <a:latin typeface="Times New Roman" panose="02020603050405020304" pitchFamily="18" charset="0"/>
+                <a:ea typeface="宋体" panose="02010600030101010101" pitchFamily="2" charset="-122"/>
+              </a:rPr>
+              <a:t>时间</a:t>
+            </a:r>
+          </a:p>
+        </p:txBody>
+      </p:sp>
+      <p:sp>
+        <p:nvSpPr>
+          <p:cNvPr id="15" name="文本框 14">
+            <a:extLst>
+              <a:ext uri="{FF2B5EF4-FFF2-40B4-BE49-F238E27FC236}">
+                <a16:creationId xmlns:a16="http://schemas.microsoft.com/office/drawing/2014/main" id="{2C87FDF5-BC8E-E9DC-5FC1-59659EE8396E}"/>
+              </a:ext>
+            </a:extLst>
+          </p:cNvPr>
+          <p:cNvSpPr txBox="1"/>
+          <p:nvPr/>
+        </p:nvSpPr>
+        <p:spPr>
+          <a:xfrm>
+            <a:off x="481494" y="2134221"/>
+            <a:ext cx="2369820" cy="369332"/>
+          </a:xfrm>
+          <a:prstGeom prst="rect">
+            <a:avLst/>
+          </a:prstGeom>
+          <a:solidFill>
+            <a:srgbClr val="FFC6C6"/>
+          </a:solidFill>
+        </p:spPr>
+        <p:txBody>
+          <a:bodyPr wrap="square" rtlCol="0" anchor="ctr" anchorCtr="1">
+            <a:spAutoFit/>
+          </a:bodyPr>
+          <a:lstStyle/>
+          <a:p>
+            <a:pPr algn="ctr"/>
+            <a:r>
+              <a:rPr lang="zh-CN" altLang="en-US" dirty="0">
+                <a:latin typeface="Times New Roman" panose="02020603050405020304" pitchFamily="18" charset="0"/>
+                <a:ea typeface="宋体" panose="02010600030101010101" pitchFamily="2" charset="-122"/>
+              </a:rPr>
+              <a:t>应用连续传输机制后</a:t>
+            </a:r>
+          </a:p>
+        </p:txBody>
+      </p:sp>
+      <p:cxnSp>
+        <p:nvCxnSpPr>
+          <p:cNvPr id="21" name="直接箭头连接符 20">
+            <a:extLst>
+              <a:ext uri="{FF2B5EF4-FFF2-40B4-BE49-F238E27FC236}">
+                <a16:creationId xmlns:a16="http://schemas.microsoft.com/office/drawing/2014/main" id="{BA4EBEDC-B16F-2CA6-69D5-646114E78692}"/>
+              </a:ext>
+            </a:extLst>
+          </p:cNvPr>
+          <p:cNvCxnSpPr>
+            <a:cxnSpLocks/>
+          </p:cNvCxnSpPr>
+          <p:nvPr/>
+        </p:nvCxnSpPr>
+        <p:spPr>
+          <a:xfrm>
+            <a:off x="2455459" y="3442227"/>
+            <a:ext cx="8275320" cy="0"/>
+          </a:xfrm>
+          <a:prstGeom prst="straightConnector1">
+            <a:avLst/>
+          </a:prstGeom>
+          <a:ln w="19050">
+            <a:solidFill>
+              <a:schemeClr val="tx1"/>
+            </a:solidFill>
+            <a:tailEnd type="triangle"/>
+          </a:ln>
+        </p:spPr>
+        <p:style>
+          <a:lnRef idx="1">
+            <a:schemeClr val="accent1"/>
+          </a:lnRef>
+          <a:fillRef idx="0">
+            <a:schemeClr val="accent1"/>
+          </a:fillRef>
+          <a:effectRef idx="0">
+            <a:schemeClr val="accent1"/>
+          </a:effectRef>
+          <a:fontRef idx="minor">
+            <a:schemeClr val="tx1"/>
+          </a:fontRef>
+        </p:style>
+      </p:cxnSp>
+      <p:sp>
+        <p:nvSpPr>
+          <p:cNvPr id="25" name="文本框 24">
+            <a:extLst>
+              <a:ext uri="{FF2B5EF4-FFF2-40B4-BE49-F238E27FC236}">
+                <a16:creationId xmlns:a16="http://schemas.microsoft.com/office/drawing/2014/main" id="{B26EB5C3-F79F-D9FB-18DB-F0D7BC4A494B}"/>
+              </a:ext>
+            </a:extLst>
+          </p:cNvPr>
+          <p:cNvSpPr txBox="1"/>
+          <p:nvPr/>
+        </p:nvSpPr>
+        <p:spPr>
+          <a:xfrm>
+            <a:off x="9930679" y="3442227"/>
+            <a:ext cx="800100" cy="369332"/>
+          </a:xfrm>
+          <a:prstGeom prst="rect">
+            <a:avLst/>
+          </a:prstGeom>
+          <a:noFill/>
+        </p:spPr>
+        <p:txBody>
+          <a:bodyPr wrap="square" rtlCol="0" anchor="ctr" anchorCtr="1">
+            <a:spAutoFit/>
+          </a:bodyPr>
+          <a:lstStyle/>
+          <a:p>
+            <a:pPr algn="ctr"/>
+            <a:r>
+              <a:rPr lang="zh-CN" altLang="en-US" dirty="0">
+                <a:latin typeface="Times New Roman" panose="02020603050405020304" pitchFamily="18" charset="0"/>
+                <a:ea typeface="宋体" panose="02010600030101010101" pitchFamily="2" charset="-122"/>
+              </a:rPr>
+              <a:t>时间</a:t>
+            </a:r>
+          </a:p>
+        </p:txBody>
+      </p:sp>
+      <p:cxnSp>
+        <p:nvCxnSpPr>
+          <p:cNvPr id="34" name="直接箭头连接符 33">
+            <a:extLst>
+              <a:ext uri="{FF2B5EF4-FFF2-40B4-BE49-F238E27FC236}">
+                <a16:creationId xmlns:a16="http://schemas.microsoft.com/office/drawing/2014/main" id="{CE672089-5FDA-2292-DCD3-78EF11C55FEE}"/>
+              </a:ext>
+            </a:extLst>
+          </p:cNvPr>
+          <p:cNvCxnSpPr>
+            <a:cxnSpLocks/>
+            <a:stCxn id="75" idx="0"/>
+            <a:endCxn id="4" idx="0"/>
+          </p:cNvCxnSpPr>
+          <p:nvPr/>
+        </p:nvCxnSpPr>
+        <p:spPr>
+          <a:xfrm rot="16200000" flipH="1">
+            <a:off x="3167489" y="832056"/>
+            <a:ext cx="207568" cy="985842"/>
+          </a:xfrm>
+          <a:prstGeom prst="curvedConnector3">
+            <a:avLst>
+              <a:gd name="adj1" fmla="val -91778"/>
+            </a:avLst>
+          </a:prstGeom>
+          <a:ln w="19050">
+            <a:solidFill>
+              <a:schemeClr val="tx1"/>
+            </a:solidFill>
+            <a:tailEnd type="stealth" w="lg" len="lg"/>
+          </a:ln>
+        </p:spPr>
+        <p:style>
+          <a:lnRef idx="1">
+            <a:schemeClr val="accent1"/>
+          </a:lnRef>
+          <a:fillRef idx="0">
+            <a:schemeClr val="accent1"/>
+          </a:fillRef>
+          <a:effectRef idx="0">
+            <a:schemeClr val="accent1"/>
+          </a:effectRef>
+          <a:fontRef idx="minor">
+            <a:schemeClr val="tx1"/>
+          </a:fontRef>
+        </p:style>
+      </p:cxnSp>
+      <p:cxnSp>
+        <p:nvCxnSpPr>
+          <p:cNvPr id="36" name="直接箭头连接符 33">
+            <a:extLst>
+              <a:ext uri="{FF2B5EF4-FFF2-40B4-BE49-F238E27FC236}">
+                <a16:creationId xmlns:a16="http://schemas.microsoft.com/office/drawing/2014/main" id="{FB263111-7A71-DE6A-067B-F77A1F858C19}"/>
+              </a:ext>
+            </a:extLst>
+          </p:cNvPr>
+          <p:cNvCxnSpPr>
+            <a:cxnSpLocks/>
+            <a:stCxn id="72" idx="0"/>
+            <a:endCxn id="8" idx="0"/>
+          </p:cNvCxnSpPr>
+          <p:nvPr/>
+        </p:nvCxnSpPr>
+        <p:spPr>
+          <a:xfrm rot="16200000" flipH="1">
+            <a:off x="5728766" y="-2375007"/>
+            <a:ext cx="207568" cy="7399968"/>
+          </a:xfrm>
+          <a:prstGeom prst="curvedConnector3">
+            <a:avLst>
+              <a:gd name="adj1" fmla="val -260648"/>
+            </a:avLst>
+          </a:prstGeom>
+          <a:ln w="19050">
+            <a:solidFill>
+              <a:schemeClr val="tx1"/>
+            </a:solidFill>
+            <a:tailEnd type="stealth" w="lg" len="lg"/>
+          </a:ln>
+        </p:spPr>
+        <p:style>
+          <a:lnRef idx="1">
+            <a:schemeClr val="accent1"/>
+          </a:lnRef>
+          <a:fillRef idx="0">
+            <a:schemeClr val="accent1"/>
+          </a:fillRef>
+          <a:effectRef idx="0">
+            <a:schemeClr val="accent1"/>
+          </a:effectRef>
+          <a:fontRef idx="minor">
+            <a:schemeClr val="tx1"/>
+          </a:fontRef>
+        </p:style>
+      </p:cxnSp>
+      <p:cxnSp>
+        <p:nvCxnSpPr>
+          <p:cNvPr id="39" name="直接箭头连接符 38">
+            <a:extLst>
+              <a:ext uri="{FF2B5EF4-FFF2-40B4-BE49-F238E27FC236}">
+                <a16:creationId xmlns:a16="http://schemas.microsoft.com/office/drawing/2014/main" id="{7A7DAEB8-D8E9-CBB5-FF48-F3556E0A05A8}"/>
+              </a:ext>
+            </a:extLst>
+          </p:cNvPr>
+          <p:cNvCxnSpPr>
+            <a:cxnSpLocks/>
+            <a:stCxn id="74" idx="0"/>
+            <a:endCxn id="9" idx="0"/>
+          </p:cNvCxnSpPr>
+          <p:nvPr/>
+        </p:nvCxnSpPr>
+        <p:spPr>
+          <a:xfrm rot="16200000" flipH="1">
+            <a:off x="4175077" y="-498425"/>
+            <a:ext cx="207568" cy="3646805"/>
+          </a:xfrm>
+          <a:prstGeom prst="curvedConnector3">
+            <a:avLst>
+              <a:gd name="adj1" fmla="val -183556"/>
+            </a:avLst>
+          </a:prstGeom>
+          <a:ln w="19050">
+            <a:solidFill>
+              <a:schemeClr val="tx1"/>
+            </a:solidFill>
+            <a:tailEnd type="stealth" w="lg" len="lg"/>
+          </a:ln>
+        </p:spPr>
+        <p:style>
+          <a:lnRef idx="1">
+            <a:schemeClr val="accent1"/>
+          </a:lnRef>
+          <a:fillRef idx="0">
+            <a:schemeClr val="accent1"/>
+          </a:fillRef>
+          <a:effectRef idx="0">
+            <a:schemeClr val="accent1"/>
+          </a:effectRef>
+          <a:fontRef idx="minor">
+            <a:schemeClr val="tx1"/>
+          </a:fontRef>
+        </p:style>
+      </p:cxnSp>
+      <p:cxnSp>
+        <p:nvCxnSpPr>
+          <p:cNvPr id="51" name="直接箭头连接符 50">
+            <a:extLst>
+              <a:ext uri="{FF2B5EF4-FFF2-40B4-BE49-F238E27FC236}">
+                <a16:creationId xmlns:a16="http://schemas.microsoft.com/office/drawing/2014/main" id="{4BD7258C-D88C-C9B9-0964-4B58173C6A24}"/>
+              </a:ext>
+            </a:extLst>
+          </p:cNvPr>
+          <p:cNvCxnSpPr>
+            <a:cxnSpLocks/>
+            <a:stCxn id="92" idx="0"/>
+            <a:endCxn id="29" idx="0"/>
+          </p:cNvCxnSpPr>
+          <p:nvPr/>
+        </p:nvCxnSpPr>
+        <p:spPr>
+          <a:xfrm rot="16200000" flipH="1">
+            <a:off x="3178181" y="2485484"/>
+            <a:ext cx="186184" cy="985842"/>
+          </a:xfrm>
+          <a:prstGeom prst="curvedConnector3">
+            <a:avLst>
+              <a:gd name="adj1" fmla="val -114596"/>
+            </a:avLst>
+          </a:prstGeom>
+          <a:ln w="19050">
+            <a:solidFill>
+              <a:schemeClr val="tx1"/>
+            </a:solidFill>
+            <a:tailEnd type="stealth" w="lg" len="lg"/>
+          </a:ln>
+        </p:spPr>
+        <p:style>
+          <a:lnRef idx="1">
+            <a:schemeClr val="accent1"/>
+          </a:lnRef>
+          <a:fillRef idx="0">
+            <a:schemeClr val="accent1"/>
+          </a:fillRef>
+          <a:effectRef idx="0">
+            <a:schemeClr val="accent1"/>
+          </a:effectRef>
+          <a:fontRef idx="minor">
+            <a:schemeClr val="tx1"/>
+          </a:fontRef>
+        </p:style>
+      </p:cxnSp>
+      <p:cxnSp>
+        <p:nvCxnSpPr>
+          <p:cNvPr id="53" name="直接箭头连接符 52">
+            <a:extLst>
+              <a:ext uri="{FF2B5EF4-FFF2-40B4-BE49-F238E27FC236}">
+                <a16:creationId xmlns:a16="http://schemas.microsoft.com/office/drawing/2014/main" id="{89A5406E-B98A-E04B-0D00-33DDF24A9075}"/>
+              </a:ext>
+            </a:extLst>
+          </p:cNvPr>
+          <p:cNvCxnSpPr>
+            <a:cxnSpLocks/>
+            <a:stCxn id="91" idx="0"/>
+            <a:endCxn id="31" idx="0"/>
+          </p:cNvCxnSpPr>
+          <p:nvPr/>
+        </p:nvCxnSpPr>
+        <p:spPr>
+          <a:xfrm rot="16200000" flipH="1">
+            <a:off x="3509298" y="1831473"/>
+            <a:ext cx="186183" cy="2293862"/>
+          </a:xfrm>
+          <a:prstGeom prst="curvedConnector3">
+            <a:avLst>
+              <a:gd name="adj1" fmla="val -159617"/>
+            </a:avLst>
+          </a:prstGeom>
+          <a:ln w="19050">
+            <a:solidFill>
+              <a:schemeClr val="tx1"/>
+            </a:solidFill>
+            <a:tailEnd type="stealth" w="lg" len="lg"/>
+          </a:ln>
+        </p:spPr>
+        <p:style>
+          <a:lnRef idx="1">
+            <a:schemeClr val="accent1"/>
+          </a:lnRef>
+          <a:fillRef idx="0">
+            <a:schemeClr val="accent1"/>
+          </a:fillRef>
+          <a:effectRef idx="0">
+            <a:schemeClr val="accent1"/>
+          </a:effectRef>
+          <a:fontRef idx="minor">
+            <a:schemeClr val="tx1"/>
+          </a:fontRef>
+        </p:style>
+      </p:cxnSp>
+      <p:cxnSp>
+        <p:nvCxnSpPr>
+          <p:cNvPr id="55" name="直接箭头连接符 54">
+            <a:extLst>
+              <a:ext uri="{FF2B5EF4-FFF2-40B4-BE49-F238E27FC236}">
+                <a16:creationId xmlns:a16="http://schemas.microsoft.com/office/drawing/2014/main" id="{1694DDB6-DF38-74CB-9C4D-BEB0368322E7}"/>
+              </a:ext>
+            </a:extLst>
+          </p:cNvPr>
+          <p:cNvCxnSpPr>
+            <a:cxnSpLocks/>
+            <a:stCxn id="90" idx="0"/>
+            <a:endCxn id="30" idx="0"/>
+          </p:cNvCxnSpPr>
+          <p:nvPr/>
+        </p:nvCxnSpPr>
+        <p:spPr>
+          <a:xfrm rot="16200000" flipH="1">
+            <a:off x="3837367" y="1180511"/>
+            <a:ext cx="186183" cy="3595787"/>
+          </a:xfrm>
+          <a:prstGeom prst="curvedConnector3">
+            <a:avLst>
+              <a:gd name="adj1" fmla="val -196451"/>
+            </a:avLst>
+          </a:prstGeom>
+          <a:ln w="19050">
+            <a:solidFill>
+              <a:schemeClr val="tx1"/>
+            </a:solidFill>
+            <a:tailEnd type="stealth" w="lg" len="lg"/>
+          </a:ln>
+        </p:spPr>
+        <p:style>
+          <a:lnRef idx="1">
+            <a:schemeClr val="accent1"/>
+          </a:lnRef>
+          <a:fillRef idx="0">
+            <a:schemeClr val="accent1"/>
+          </a:fillRef>
+          <a:effectRef idx="0">
+            <a:schemeClr val="accent1"/>
+          </a:effectRef>
+          <a:fontRef idx="minor">
+            <a:schemeClr val="tx1"/>
+          </a:fontRef>
+        </p:style>
+      </p:cxnSp>
+      <p:sp>
+        <p:nvSpPr>
+          <p:cNvPr id="60" name="文本框 59">
+            <a:extLst>
+              <a:ext uri="{FF2B5EF4-FFF2-40B4-BE49-F238E27FC236}">
+                <a16:creationId xmlns:a16="http://schemas.microsoft.com/office/drawing/2014/main" id="{59BAAD1A-60A9-A365-52EE-2C9255BF2A01}"/>
+              </a:ext>
+            </a:extLst>
+          </p:cNvPr>
+          <p:cNvSpPr txBox="1"/>
+          <p:nvPr/>
+        </p:nvSpPr>
+        <p:spPr>
+          <a:xfrm>
+            <a:off x="481494" y="424989"/>
+            <a:ext cx="2369820" cy="369332"/>
+          </a:xfrm>
+          <a:prstGeom prst="rect">
+            <a:avLst/>
+          </a:prstGeom>
+          <a:solidFill>
+            <a:srgbClr val="DEEBF7"/>
+          </a:solidFill>
+        </p:spPr>
+        <p:txBody>
+          <a:bodyPr wrap="square" rtlCol="0" anchor="ctr" anchorCtr="1">
+            <a:spAutoFit/>
+          </a:bodyPr>
+          <a:lstStyle/>
+          <a:p>
+            <a:pPr algn="ctr"/>
+            <a:r>
+              <a:rPr lang="zh-CN" altLang="en-US" dirty="0">
+                <a:latin typeface="Times New Roman" panose="02020603050405020304" pitchFamily="18" charset="0"/>
+                <a:ea typeface="宋体" panose="02010600030101010101" pitchFamily="2" charset="-122"/>
+              </a:rPr>
+              <a:t>传统随机接入机制</a:t>
+            </a:r>
+          </a:p>
+        </p:txBody>
+      </p:sp>
+      <p:grpSp>
+        <p:nvGrpSpPr>
+          <p:cNvPr id="84" name="组合 83">
+            <a:extLst>
+              <a:ext uri="{FF2B5EF4-FFF2-40B4-BE49-F238E27FC236}">
+                <a16:creationId xmlns:a16="http://schemas.microsoft.com/office/drawing/2014/main" id="{35C8D724-4DDC-8C2D-49DA-29588656C354}"/>
+              </a:ext>
+            </a:extLst>
+          </p:cNvPr>
+          <p:cNvGrpSpPr/>
+          <p:nvPr/>
+        </p:nvGrpSpPr>
+        <p:grpSpPr>
+          <a:xfrm>
+            <a:off x="256032" y="1144096"/>
+            <a:ext cx="2718816" cy="579120"/>
+            <a:chOff x="256032" y="4328160"/>
+            <a:chExt cx="2718816" cy="579120"/>
+          </a:xfrm>
+        </p:grpSpPr>
+        <p:grpSp>
+          <p:nvGrpSpPr>
+            <p:cNvPr id="76" name="组合 75">
+              <a:extLst>
+                <a:ext uri="{FF2B5EF4-FFF2-40B4-BE49-F238E27FC236}">
+                  <a16:creationId xmlns:a16="http://schemas.microsoft.com/office/drawing/2014/main" id="{0953BE78-5B73-B76C-06F7-A9C8FDEFA1BB}"/>
+                </a:ext>
+              </a:extLst>
+            </p:cNvPr>
+            <p:cNvGrpSpPr/>
+            <p:nvPr/>
+          </p:nvGrpSpPr>
+          <p:grpSpPr>
+            <a:xfrm>
+              <a:off x="2004550" y="4405257"/>
+              <a:ext cx="901818" cy="421582"/>
+              <a:chOff x="2627376" y="4370725"/>
+              <a:chExt cx="901818" cy="421582"/>
+            </a:xfrm>
+          </p:grpSpPr>
+          <p:sp>
+            <p:nvSpPr>
+              <p:cNvPr id="72" name="矩形 71">
+                <a:extLst>
+                  <a:ext uri="{FF2B5EF4-FFF2-40B4-BE49-F238E27FC236}">
+                    <a16:creationId xmlns:a16="http://schemas.microsoft.com/office/drawing/2014/main" id="{6BB7F5FE-E83B-C7CA-17F3-A454C86CC732}"/>
+                  </a:ext>
+                </a:extLst>
+              </p:cNvPr>
+              <p:cNvSpPr/>
+              <p:nvPr/>
+            </p:nvSpPr>
+            <p:spPr>
+              <a:xfrm>
+                <a:off x="2627376" y="4370725"/>
+                <a:ext cx="256032" cy="421582"/>
+              </a:xfrm>
+              <a:prstGeom prst="rect">
+                <a:avLst/>
+              </a:prstGeom>
+              <a:solidFill>
+                <a:srgbClr val="DEEBF7"/>
+              </a:solidFill>
+              <a:ln w="19050">
+                <a:solidFill>
+                  <a:schemeClr val="tx1"/>
+                </a:solidFill>
+              </a:ln>
+            </p:spPr>
+            <p:style>
+              <a:lnRef idx="2">
+                <a:schemeClr val="accent1">
+                  <a:shade val="15000"/>
+                </a:schemeClr>
+              </a:lnRef>
+              <a:fillRef idx="1">
+                <a:schemeClr val="accent1"/>
+              </a:fillRef>
+              <a:effectRef idx="0">
+                <a:schemeClr val="accent1"/>
+              </a:effectRef>
+              <a:fontRef idx="minor">
+                <a:schemeClr val="lt1"/>
+              </a:fontRef>
+            </p:style>
+            <p:txBody>
+              <a:bodyPr rtlCol="0" anchor="ctr"/>
+              <a:lstStyle/>
+              <a:p>
+                <a:pPr algn="ctr"/>
+                <a:endParaRPr lang="zh-CN" altLang="en-US" dirty="0" err="1">
+                  <a:solidFill>
+                    <a:schemeClr val="tx1"/>
+                  </a:solidFill>
+                </a:endParaRPr>
+              </a:p>
+            </p:txBody>
+          </p:sp>
+          <p:sp>
+            <p:nvSpPr>
+              <p:cNvPr id="74" name="矩形 73">
+                <a:extLst>
+                  <a:ext uri="{FF2B5EF4-FFF2-40B4-BE49-F238E27FC236}">
+                    <a16:creationId xmlns:a16="http://schemas.microsoft.com/office/drawing/2014/main" id="{018F82A5-958C-9CEA-EC30-845013297CBD}"/>
+                  </a:ext>
+                </a:extLst>
+              </p:cNvPr>
+              <p:cNvSpPr/>
+              <p:nvPr/>
+            </p:nvSpPr>
+            <p:spPr>
+              <a:xfrm>
+                <a:off x="2950269" y="4370725"/>
+                <a:ext cx="256032" cy="421582"/>
+              </a:xfrm>
+              <a:prstGeom prst="rect">
+                <a:avLst/>
+              </a:prstGeom>
+              <a:solidFill>
+                <a:srgbClr val="DEEBF7"/>
+              </a:solidFill>
+              <a:ln w="19050">
+                <a:solidFill>
+                  <a:schemeClr val="tx1"/>
+                </a:solidFill>
+              </a:ln>
+            </p:spPr>
+            <p:style>
+              <a:lnRef idx="2">
+                <a:schemeClr val="accent1">
+                  <a:shade val="15000"/>
+                </a:schemeClr>
+              </a:lnRef>
+              <a:fillRef idx="1">
+                <a:schemeClr val="accent1"/>
+              </a:fillRef>
+              <a:effectRef idx="0">
+                <a:schemeClr val="accent1"/>
+              </a:effectRef>
+              <a:fontRef idx="minor">
+                <a:schemeClr val="lt1"/>
+              </a:fontRef>
+            </p:style>
+            <p:txBody>
+              <a:bodyPr rtlCol="0" anchor="ctr"/>
+              <a:lstStyle/>
+              <a:p>
+                <a:pPr algn="ctr"/>
+                <a:endParaRPr lang="zh-CN" altLang="en-US" dirty="0" err="1">
+                  <a:solidFill>
+                    <a:schemeClr val="tx1"/>
+                  </a:solidFill>
+                </a:endParaRPr>
+              </a:p>
+            </p:txBody>
+          </p:sp>
+          <p:sp>
+            <p:nvSpPr>
+              <p:cNvPr id="75" name="矩形 74">
+                <a:extLst>
+                  <a:ext uri="{FF2B5EF4-FFF2-40B4-BE49-F238E27FC236}">
+                    <a16:creationId xmlns:a16="http://schemas.microsoft.com/office/drawing/2014/main" id="{9978708F-72D2-C894-BDC5-EB50909F0B3B}"/>
+                  </a:ext>
+                </a:extLst>
+              </p:cNvPr>
+              <p:cNvSpPr/>
+              <p:nvPr/>
+            </p:nvSpPr>
+            <p:spPr>
+              <a:xfrm>
+                <a:off x="3273162" y="4370725"/>
+                <a:ext cx="256032" cy="421582"/>
+              </a:xfrm>
+              <a:prstGeom prst="rect">
+                <a:avLst/>
+              </a:prstGeom>
+              <a:solidFill>
+                <a:srgbClr val="DEEBF7"/>
+              </a:solidFill>
+              <a:ln w="19050">
+                <a:solidFill>
+                  <a:schemeClr val="tx1"/>
+                </a:solidFill>
+              </a:ln>
+            </p:spPr>
+            <p:style>
+              <a:lnRef idx="2">
+                <a:schemeClr val="accent1">
+                  <a:shade val="15000"/>
+                </a:schemeClr>
+              </a:lnRef>
+              <a:fillRef idx="1">
+                <a:schemeClr val="accent1"/>
+              </a:fillRef>
+              <a:effectRef idx="0">
+                <a:schemeClr val="accent1"/>
+              </a:effectRef>
+              <a:fontRef idx="minor">
+                <a:schemeClr val="lt1"/>
+              </a:fontRef>
+            </p:style>
+            <p:txBody>
+              <a:bodyPr rtlCol="0" anchor="ctr"/>
+              <a:lstStyle/>
+              <a:p>
+                <a:pPr algn="ctr"/>
+                <a:endParaRPr lang="zh-CN" altLang="en-US" dirty="0" err="1">
+                  <a:solidFill>
+                    <a:schemeClr val="tx1"/>
+                  </a:solidFill>
+                </a:endParaRPr>
+              </a:p>
+            </p:txBody>
+          </p:sp>
+        </p:grpSp>
+        <p:cxnSp>
+          <p:nvCxnSpPr>
+            <p:cNvPr id="80" name="直接连接符 79">
+              <a:extLst>
+                <a:ext uri="{FF2B5EF4-FFF2-40B4-BE49-F238E27FC236}">
+                  <a16:creationId xmlns:a16="http://schemas.microsoft.com/office/drawing/2014/main" id="{79A8ACC0-1C86-2AC0-A131-C177277C9C30}"/>
+                </a:ext>
+              </a:extLst>
+            </p:cNvPr>
+            <p:cNvCxnSpPr/>
+            <p:nvPr/>
+          </p:nvCxnSpPr>
+          <p:spPr>
+            <a:xfrm>
+              <a:off x="256032" y="4328160"/>
+              <a:ext cx="2718816" cy="0"/>
+            </a:xfrm>
+            <a:prstGeom prst="line">
+              <a:avLst/>
+            </a:prstGeom>
+            <a:ln w="19050">
+              <a:solidFill>
+                <a:schemeClr val="tx1"/>
+              </a:solidFill>
+              <a:tailEnd type="none"/>
+            </a:ln>
+          </p:spPr>
+          <p:style>
+            <a:lnRef idx="1">
+              <a:schemeClr val="accent1"/>
+            </a:lnRef>
+            <a:fillRef idx="0">
+              <a:schemeClr val="accent1"/>
+            </a:fillRef>
+            <a:effectRef idx="0">
+              <a:schemeClr val="accent1"/>
+            </a:effectRef>
+            <a:fontRef idx="minor">
+              <a:schemeClr val="tx1"/>
+            </a:fontRef>
+          </p:style>
+        </p:cxnSp>
+        <p:cxnSp>
+          <p:nvCxnSpPr>
+            <p:cNvPr id="81" name="直接连接符 80">
+              <a:extLst>
+                <a:ext uri="{FF2B5EF4-FFF2-40B4-BE49-F238E27FC236}">
+                  <a16:creationId xmlns:a16="http://schemas.microsoft.com/office/drawing/2014/main" id="{7E2232ED-6E26-3BC5-E597-578AF5CD04ED}"/>
+                </a:ext>
+              </a:extLst>
+            </p:cNvPr>
+            <p:cNvCxnSpPr/>
+            <p:nvPr/>
+          </p:nvCxnSpPr>
+          <p:spPr>
+            <a:xfrm>
+              <a:off x="256032" y="4907280"/>
+              <a:ext cx="2718816" cy="0"/>
+            </a:xfrm>
+            <a:prstGeom prst="line">
+              <a:avLst/>
+            </a:prstGeom>
+            <a:ln w="19050">
+              <a:solidFill>
+                <a:schemeClr val="tx1"/>
+              </a:solidFill>
+              <a:tailEnd type="none"/>
+            </a:ln>
+          </p:spPr>
+          <p:style>
+            <a:lnRef idx="1">
+              <a:schemeClr val="accent1"/>
+            </a:lnRef>
+            <a:fillRef idx="0">
+              <a:schemeClr val="accent1"/>
+            </a:fillRef>
+            <a:effectRef idx="0">
+              <a:schemeClr val="accent1"/>
+            </a:effectRef>
+            <a:fontRef idx="minor">
+              <a:schemeClr val="tx1"/>
+            </a:fontRef>
+          </p:style>
+        </p:cxnSp>
+        <p:sp>
+          <p:nvSpPr>
+            <p:cNvPr id="83" name="文本框 82">
+              <a:extLst>
+                <a:ext uri="{FF2B5EF4-FFF2-40B4-BE49-F238E27FC236}">
+                  <a16:creationId xmlns:a16="http://schemas.microsoft.com/office/drawing/2014/main" id="{F28A62B2-D4F4-ED8B-BE2F-123E3DDECDEA}"/>
+                </a:ext>
+              </a:extLst>
+            </p:cNvPr>
+            <p:cNvSpPr txBox="1"/>
+            <p:nvPr/>
+          </p:nvSpPr>
+          <p:spPr>
+            <a:xfrm>
+              <a:off x="287838" y="4433059"/>
+              <a:ext cx="1139952" cy="369323"/>
+            </a:xfrm>
+            <a:prstGeom prst="rect">
+              <a:avLst/>
+            </a:prstGeom>
+            <a:noFill/>
+          </p:spPr>
+          <p:txBody>
+            <a:bodyPr wrap="square">
+              <a:spAutoFit/>
+            </a:bodyPr>
+            <a:lstStyle/>
+            <a:p>
+              <a:r>
+                <a:rPr lang="zh-CN" altLang="en-US" b="0" cap="none" spc="0" dirty="0">
+                  <a:ln>
+                    <a:noFill/>
+                  </a:ln>
+                  <a:solidFill>
+                    <a:schemeClr val="tx1"/>
+                  </a:solidFill>
+                  <a:effectLst/>
+                  <a:latin typeface="宋体" panose="02010600030101010101" pitchFamily="2" charset="-122"/>
+                  <a:ea typeface="宋体" panose="02010600030101010101" pitchFamily="2" charset="-122"/>
+                </a:rPr>
+                <a:t>数据队列</a:t>
+              </a:r>
+            </a:p>
+          </p:txBody>
+        </p:sp>
+      </p:grpSp>
+      <p:grpSp>
+        <p:nvGrpSpPr>
+          <p:cNvPr id="85" name="组合 84">
+            <a:extLst>
+              <a:ext uri="{FF2B5EF4-FFF2-40B4-BE49-F238E27FC236}">
+                <a16:creationId xmlns:a16="http://schemas.microsoft.com/office/drawing/2014/main" id="{0D2A7A03-EFFB-BE7B-B607-A0DEA7DAB629}"/>
+              </a:ext>
+            </a:extLst>
+          </p:cNvPr>
+          <p:cNvGrpSpPr/>
+          <p:nvPr/>
+        </p:nvGrpSpPr>
+        <p:grpSpPr>
+          <a:xfrm>
+            <a:off x="256032" y="2808216"/>
+            <a:ext cx="2718816" cy="579120"/>
+            <a:chOff x="256032" y="4328160"/>
+            <a:chExt cx="2718816" cy="579120"/>
+          </a:xfrm>
+        </p:grpSpPr>
+        <p:grpSp>
+          <p:nvGrpSpPr>
+            <p:cNvPr id="86" name="组合 85">
+              <a:extLst>
+                <a:ext uri="{FF2B5EF4-FFF2-40B4-BE49-F238E27FC236}">
+                  <a16:creationId xmlns:a16="http://schemas.microsoft.com/office/drawing/2014/main" id="{2E62753C-D3CD-32F6-A61A-4E1DBAA87C14}"/>
+                </a:ext>
+              </a:extLst>
+            </p:cNvPr>
+            <p:cNvGrpSpPr/>
+            <p:nvPr/>
+          </p:nvGrpSpPr>
+          <p:grpSpPr>
+            <a:xfrm>
+              <a:off x="2004550" y="4405257"/>
+              <a:ext cx="901818" cy="421582"/>
+              <a:chOff x="2627376" y="4370725"/>
+              <a:chExt cx="901818" cy="421582"/>
+            </a:xfrm>
+          </p:grpSpPr>
+          <p:sp>
+            <p:nvSpPr>
+              <p:cNvPr id="90" name="矩形 89">
+                <a:extLst>
+                  <a:ext uri="{FF2B5EF4-FFF2-40B4-BE49-F238E27FC236}">
+                    <a16:creationId xmlns:a16="http://schemas.microsoft.com/office/drawing/2014/main" id="{A9600834-8E62-BC5B-C3B9-31534167BE2D}"/>
+                  </a:ext>
+                </a:extLst>
+              </p:cNvPr>
+              <p:cNvSpPr/>
+              <p:nvPr/>
+            </p:nvSpPr>
+            <p:spPr>
+              <a:xfrm>
+                <a:off x="2627376" y="4370725"/>
+                <a:ext cx="256032" cy="421582"/>
+              </a:xfrm>
+              <a:prstGeom prst="rect">
+                <a:avLst/>
+              </a:prstGeom>
+              <a:solidFill>
+                <a:srgbClr val="FFC6C6"/>
+              </a:solidFill>
+              <a:ln w="19050">
+                <a:solidFill>
+                  <a:schemeClr val="tx1"/>
+                </a:solidFill>
+              </a:ln>
+            </p:spPr>
+            <p:style>
+              <a:lnRef idx="2">
+                <a:schemeClr val="accent1">
+                  <a:shade val="15000"/>
+                </a:schemeClr>
+              </a:lnRef>
+              <a:fillRef idx="1">
+                <a:schemeClr val="accent1"/>
+              </a:fillRef>
+              <a:effectRef idx="0">
+                <a:schemeClr val="accent1"/>
+              </a:effectRef>
+              <a:fontRef idx="minor">
+                <a:schemeClr val="lt1"/>
+              </a:fontRef>
+            </p:style>
+            <p:txBody>
+              <a:bodyPr rtlCol="0" anchor="ctr"/>
+              <a:lstStyle/>
+              <a:p>
+                <a:pPr algn="ctr"/>
+                <a:endParaRPr lang="zh-CN" altLang="en-US" dirty="0" err="1">
+                  <a:solidFill>
+                    <a:schemeClr val="tx1"/>
+                  </a:solidFill>
+                </a:endParaRPr>
+              </a:p>
+            </p:txBody>
+          </p:sp>
+          <p:sp>
+            <p:nvSpPr>
+              <p:cNvPr id="91" name="矩形 90">
+                <a:extLst>
+                  <a:ext uri="{FF2B5EF4-FFF2-40B4-BE49-F238E27FC236}">
+                    <a16:creationId xmlns:a16="http://schemas.microsoft.com/office/drawing/2014/main" id="{FEE0903C-4565-4D44-FF86-91E07963B9F3}"/>
+                  </a:ext>
+                </a:extLst>
+              </p:cNvPr>
+              <p:cNvSpPr/>
+              <p:nvPr/>
+            </p:nvSpPr>
+            <p:spPr>
+              <a:xfrm>
+                <a:off x="2950269" y="4370725"/>
+                <a:ext cx="256032" cy="421582"/>
+              </a:xfrm>
+              <a:prstGeom prst="rect">
+                <a:avLst/>
+              </a:prstGeom>
+              <a:solidFill>
+                <a:srgbClr val="FFC6C6"/>
+              </a:solidFill>
+              <a:ln w="19050">
+                <a:solidFill>
+                  <a:schemeClr val="tx1"/>
+                </a:solidFill>
+              </a:ln>
+            </p:spPr>
+            <p:style>
+              <a:lnRef idx="2">
+                <a:schemeClr val="accent1">
+                  <a:shade val="15000"/>
+                </a:schemeClr>
+              </a:lnRef>
+              <a:fillRef idx="1">
+                <a:schemeClr val="accent1"/>
+              </a:fillRef>
+              <a:effectRef idx="0">
+                <a:schemeClr val="accent1"/>
+              </a:effectRef>
+              <a:fontRef idx="minor">
+                <a:schemeClr val="lt1"/>
+              </a:fontRef>
+            </p:style>
+            <p:txBody>
+              <a:bodyPr rtlCol="0" anchor="ctr"/>
+              <a:lstStyle/>
+              <a:p>
+                <a:pPr algn="ctr"/>
+                <a:endParaRPr lang="zh-CN" altLang="en-US" dirty="0" err="1">
+                  <a:solidFill>
+                    <a:schemeClr val="tx1"/>
+                  </a:solidFill>
+                </a:endParaRPr>
+              </a:p>
+            </p:txBody>
+          </p:sp>
+          <p:sp>
+            <p:nvSpPr>
+              <p:cNvPr id="92" name="矩形 91">
+                <a:extLst>
+                  <a:ext uri="{FF2B5EF4-FFF2-40B4-BE49-F238E27FC236}">
+                    <a16:creationId xmlns:a16="http://schemas.microsoft.com/office/drawing/2014/main" id="{2A544E07-0065-B670-88D7-F141B4256B65}"/>
+                  </a:ext>
+                </a:extLst>
+              </p:cNvPr>
+              <p:cNvSpPr/>
+              <p:nvPr/>
+            </p:nvSpPr>
+            <p:spPr>
+              <a:xfrm>
+                <a:off x="3273162" y="4370725"/>
+                <a:ext cx="256032" cy="421582"/>
+              </a:xfrm>
+              <a:prstGeom prst="rect">
+                <a:avLst/>
+              </a:prstGeom>
+              <a:solidFill>
+                <a:srgbClr val="FFC6C6"/>
+              </a:solidFill>
+              <a:ln w="19050">
+                <a:solidFill>
+                  <a:schemeClr val="tx1"/>
+                </a:solidFill>
+              </a:ln>
+            </p:spPr>
+            <p:style>
+              <a:lnRef idx="2">
+                <a:schemeClr val="accent1">
+                  <a:shade val="15000"/>
+                </a:schemeClr>
+              </a:lnRef>
+              <a:fillRef idx="1">
+                <a:schemeClr val="accent1"/>
+              </a:fillRef>
+              <a:effectRef idx="0">
+                <a:schemeClr val="accent1"/>
+              </a:effectRef>
+              <a:fontRef idx="minor">
+                <a:schemeClr val="lt1"/>
+              </a:fontRef>
+            </p:style>
+            <p:txBody>
+              <a:bodyPr rtlCol="0" anchor="ctr"/>
+              <a:lstStyle/>
+              <a:p>
+                <a:pPr algn="ctr"/>
+                <a:endParaRPr lang="zh-CN" altLang="en-US" dirty="0" err="1">
+                  <a:solidFill>
+                    <a:schemeClr val="tx1"/>
+                  </a:solidFill>
+                </a:endParaRPr>
+              </a:p>
+            </p:txBody>
+          </p:sp>
+        </p:grpSp>
+        <p:cxnSp>
+          <p:nvCxnSpPr>
+            <p:cNvPr id="87" name="直接连接符 86">
+              <a:extLst>
+                <a:ext uri="{FF2B5EF4-FFF2-40B4-BE49-F238E27FC236}">
+                  <a16:creationId xmlns:a16="http://schemas.microsoft.com/office/drawing/2014/main" id="{A4619430-A3D7-D8E7-2FD4-2A10536FE621}"/>
+                </a:ext>
+              </a:extLst>
+            </p:cNvPr>
+            <p:cNvCxnSpPr/>
+            <p:nvPr/>
+          </p:nvCxnSpPr>
+          <p:spPr>
+            <a:xfrm>
+              <a:off x="256032" y="4328160"/>
+              <a:ext cx="2718816" cy="0"/>
+            </a:xfrm>
+            <a:prstGeom prst="line">
+              <a:avLst/>
+            </a:prstGeom>
+            <a:ln w="19050">
+              <a:solidFill>
+                <a:schemeClr val="tx1"/>
+              </a:solidFill>
+              <a:tailEnd type="none"/>
+            </a:ln>
+          </p:spPr>
+          <p:style>
+            <a:lnRef idx="1">
+              <a:schemeClr val="accent1"/>
+            </a:lnRef>
+            <a:fillRef idx="0">
+              <a:schemeClr val="accent1"/>
+            </a:fillRef>
+            <a:effectRef idx="0">
+              <a:schemeClr val="accent1"/>
+            </a:effectRef>
+            <a:fontRef idx="minor">
+              <a:schemeClr val="tx1"/>
+            </a:fontRef>
+          </p:style>
+        </p:cxnSp>
+        <p:cxnSp>
+          <p:nvCxnSpPr>
+            <p:cNvPr id="88" name="直接连接符 87">
+              <a:extLst>
+                <a:ext uri="{FF2B5EF4-FFF2-40B4-BE49-F238E27FC236}">
+                  <a16:creationId xmlns:a16="http://schemas.microsoft.com/office/drawing/2014/main" id="{A4264FAF-E462-BA65-A4E9-CAB6E9E22911}"/>
+                </a:ext>
+              </a:extLst>
+            </p:cNvPr>
+            <p:cNvCxnSpPr/>
+            <p:nvPr/>
+          </p:nvCxnSpPr>
+          <p:spPr>
+            <a:xfrm>
+              <a:off x="256032" y="4907280"/>
+              <a:ext cx="2718816" cy="0"/>
+            </a:xfrm>
+            <a:prstGeom prst="line">
+              <a:avLst/>
+            </a:prstGeom>
+            <a:ln w="19050">
+              <a:solidFill>
+                <a:schemeClr val="tx1"/>
+              </a:solidFill>
+              <a:tailEnd type="none"/>
+            </a:ln>
+          </p:spPr>
+          <p:style>
+            <a:lnRef idx="1">
+              <a:schemeClr val="accent1"/>
+            </a:lnRef>
+            <a:fillRef idx="0">
+              <a:schemeClr val="accent1"/>
+            </a:fillRef>
+            <a:effectRef idx="0">
+              <a:schemeClr val="accent1"/>
+            </a:effectRef>
+            <a:fontRef idx="minor">
+              <a:schemeClr val="tx1"/>
+            </a:fontRef>
+          </p:style>
+        </p:cxnSp>
+        <p:sp>
+          <p:nvSpPr>
+            <p:cNvPr id="89" name="文本框 88">
+              <a:extLst>
+                <a:ext uri="{FF2B5EF4-FFF2-40B4-BE49-F238E27FC236}">
+                  <a16:creationId xmlns:a16="http://schemas.microsoft.com/office/drawing/2014/main" id="{DAE27B3B-2C18-C340-F9C5-03212E8913D9}"/>
+                </a:ext>
+              </a:extLst>
+            </p:cNvPr>
+            <p:cNvSpPr txBox="1"/>
+            <p:nvPr/>
+          </p:nvSpPr>
+          <p:spPr>
+            <a:xfrm>
+              <a:off x="287838" y="4433059"/>
+              <a:ext cx="1139952" cy="369323"/>
+            </a:xfrm>
+            <a:prstGeom prst="rect">
+              <a:avLst/>
+            </a:prstGeom>
+            <a:noFill/>
+          </p:spPr>
+          <p:txBody>
+            <a:bodyPr wrap="square">
+              <a:spAutoFit/>
+            </a:bodyPr>
+            <a:lstStyle/>
+            <a:p>
+              <a:r>
+                <a:rPr lang="zh-CN" altLang="en-US" b="0" cap="none" spc="0" dirty="0">
+                  <a:ln>
+                    <a:noFill/>
+                  </a:ln>
+                  <a:solidFill>
+                    <a:schemeClr val="tx1"/>
+                  </a:solidFill>
+                  <a:effectLst/>
+                  <a:latin typeface="宋体" panose="02010600030101010101" pitchFamily="2" charset="-122"/>
+                  <a:ea typeface="宋体" panose="02010600030101010101" pitchFamily="2" charset="-122"/>
+                </a:rPr>
+                <a:t>数据队列</a:t>
+              </a:r>
+            </a:p>
+          </p:txBody>
+        </p:sp>
+      </p:grpSp>
+    </p:spTree>
+    <p:extLst>
+      <p:ext uri="{BB962C8B-B14F-4D97-AF65-F5344CB8AC3E}">
+        <p14:creationId xmlns:p14="http://schemas.microsoft.com/office/powerpoint/2010/main" val="3498004881"/>
+      </p:ext>
+    </p:extLst>
+  </p:cSld>
+  <p:clrMapOvr>
+    <a:masterClrMapping/>
+  </p:clrMapOvr>
+</p:sld>
+</file>
+
+<file path=ppt/slides/slide9.xml><?xml version="1.0" encoding="utf-8"?>
+<p:sld xmlns:a="http://schemas.openxmlformats.org/drawingml/2006/main" xmlns:r="http://schemas.openxmlformats.org/officeDocument/2006/relationships" xmlns:p="http://schemas.openxmlformats.org/presentationml/2006/main">
+  <p:cSld>
+    <p:spTree>
+      <p:nvGrpSpPr>
+        <p:cNvPr id="1" name=""/>
+        <p:cNvGrpSpPr/>
+        <p:nvPr/>
+      </p:nvGrpSpPr>
+      <p:grpSpPr>
+        <a:xfrm>
+          <a:off x="0" y="0"/>
+          <a:ext cx="0" cy="0"/>
+          <a:chOff x="0" y="0"/>
+          <a:chExt cx="0" cy="0"/>
+        </a:xfrm>
+      </p:grpSpPr>
+      <p:grpSp>
+        <p:nvGrpSpPr>
+          <p:cNvPr id="49" name="组合 48">
+            <a:extLst>
+              <a:ext uri="{FF2B5EF4-FFF2-40B4-BE49-F238E27FC236}">
+                <a16:creationId xmlns:a16="http://schemas.microsoft.com/office/drawing/2014/main" id="{295580BB-FA09-0541-0B1F-A43538702F17}"/>
+              </a:ext>
+            </a:extLst>
+          </p:cNvPr>
+          <p:cNvGrpSpPr/>
+          <p:nvPr/>
+        </p:nvGrpSpPr>
+        <p:grpSpPr>
+          <a:xfrm>
+            <a:off x="342900" y="899160"/>
+            <a:ext cx="8168640" cy="4716780"/>
+            <a:chOff x="2011680" y="784860"/>
+            <a:chExt cx="8168640" cy="4716780"/>
+          </a:xfrm>
+        </p:grpSpPr>
+        <p:sp>
+          <p:nvSpPr>
+            <p:cNvPr id="2" name="椭圆 1">
+              <a:extLst>
+                <a:ext uri="{FF2B5EF4-FFF2-40B4-BE49-F238E27FC236}">
+                  <a16:creationId xmlns:a16="http://schemas.microsoft.com/office/drawing/2014/main" id="{C7DF21F8-C37C-B11F-F577-44A9505A6E34}"/>
+                </a:ext>
+              </a:extLst>
+            </p:cNvPr>
+            <p:cNvSpPr/>
+            <p:nvPr/>
+          </p:nvSpPr>
+          <p:spPr>
+            <a:xfrm>
+              <a:off x="2011680" y="784860"/>
+              <a:ext cx="8168640" cy="4716780"/>
+            </a:xfrm>
+            <a:prstGeom prst="ellipse">
+              <a:avLst/>
+            </a:prstGeom>
+            <a:solidFill>
+              <a:schemeClr val="accent2">
+                <a:lumMod val="20000"/>
+                <a:lumOff val="80000"/>
+              </a:schemeClr>
+            </a:solidFill>
+            <a:ln w="19050">
+              <a:noFill/>
+            </a:ln>
+          </p:spPr>
+          <p:style>
+            <a:lnRef idx="2">
+              <a:schemeClr val="accent1">
+                <a:shade val="15000"/>
+              </a:schemeClr>
+            </a:lnRef>
+            <a:fillRef idx="1">
+              <a:schemeClr val="accent1"/>
+            </a:fillRef>
+            <a:effectRef idx="0">
+              <a:schemeClr val="accent1"/>
+            </a:effectRef>
+            <a:fontRef idx="minor">
+              <a:schemeClr val="lt1"/>
+            </a:fontRef>
+          </p:style>
+          <p:txBody>
+            <a:bodyPr rtlCol="0" anchor="ctr"/>
+            <a:lstStyle/>
+            <a:p>
+              <a:pPr algn="ctr"/>
+              <a:endParaRPr lang="zh-CN" altLang="en-US" dirty="0" err="1">
+                <a:solidFill>
+                  <a:schemeClr val="tx1"/>
+                </a:solidFill>
+              </a:endParaRPr>
+            </a:p>
+          </p:txBody>
+        </p:sp>
+        <p:pic>
+          <p:nvPicPr>
+            <p:cNvPr id="5" name="图形 4">
+              <a:extLst>
+                <a:ext uri="{FF2B5EF4-FFF2-40B4-BE49-F238E27FC236}">
+                  <a16:creationId xmlns:a16="http://schemas.microsoft.com/office/drawing/2014/main" id="{0A01C38D-0FAE-007B-E39C-7E698541EF38}"/>
+                </a:ext>
+              </a:extLst>
+            </p:cNvPr>
+            <p:cNvPicPr>
+              <a:picLocks noChangeAspect="1"/>
+            </p:cNvPicPr>
+            <p:nvPr/>
+          </p:nvPicPr>
+          <p:blipFill>
+            <a:blip r:embed="rId2">
+              <a:extLst>
+                <a:ext uri="{96DAC541-7B7A-43D3-8B79-37D633B846F1}">
+                  <asvg:svgBlip xmlns:asvg="http://schemas.microsoft.com/office/drawing/2016/SVG/main" r:embed="rId3"/>
+                </a:ext>
+              </a:extLst>
+            </a:blip>
+            <a:stretch>
+              <a:fillRect/>
+            </a:stretch>
+          </p:blipFill>
+          <p:spPr>
+            <a:xfrm>
+              <a:off x="5353050" y="2400300"/>
+              <a:ext cx="1485900" cy="1485900"/>
+            </a:xfrm>
+            <a:prstGeom prst="rect">
+              <a:avLst/>
+            </a:prstGeom>
+          </p:spPr>
+        </p:pic>
+        <p:pic>
+          <p:nvPicPr>
+            <p:cNvPr id="13" name="图形 12">
+              <a:extLst>
+                <a:ext uri="{FF2B5EF4-FFF2-40B4-BE49-F238E27FC236}">
+                  <a16:creationId xmlns:a16="http://schemas.microsoft.com/office/drawing/2014/main" id="{27F2FAE9-BD32-1E8F-296A-0A1251D26720}"/>
+                </a:ext>
+              </a:extLst>
+            </p:cNvPr>
+            <p:cNvPicPr>
+              <a:picLocks noChangeAspect="1"/>
+            </p:cNvPicPr>
+            <p:nvPr/>
+          </p:nvPicPr>
+          <p:blipFill>
+            <a:blip r:embed="rId4">
+              <a:extLst>
+                <a:ext uri="{96DAC541-7B7A-43D3-8B79-37D633B846F1}">
+                  <asvg:svgBlip xmlns:asvg="http://schemas.microsoft.com/office/drawing/2016/SVG/main" r:embed="rId5"/>
+                </a:ext>
+              </a:extLst>
+            </a:blip>
+            <a:stretch>
+              <a:fillRect/>
+            </a:stretch>
+          </p:blipFill>
+          <p:spPr>
+            <a:xfrm>
+              <a:off x="3954780" y="4135755"/>
+              <a:ext cx="662940" cy="662940"/>
+            </a:xfrm>
+            <a:prstGeom prst="rect">
+              <a:avLst/>
+            </a:prstGeom>
+          </p:spPr>
+        </p:pic>
+        <p:pic>
+          <p:nvPicPr>
+            <p:cNvPr id="15" name="图形 14">
+              <a:extLst>
+                <a:ext uri="{FF2B5EF4-FFF2-40B4-BE49-F238E27FC236}">
+                  <a16:creationId xmlns:a16="http://schemas.microsoft.com/office/drawing/2014/main" id="{C84C07CE-A758-686B-4BC5-DCCEAE54859B}"/>
+                </a:ext>
+              </a:extLst>
+            </p:cNvPr>
+            <p:cNvPicPr>
+              <a:picLocks noChangeAspect="1"/>
+            </p:cNvPicPr>
+            <p:nvPr/>
+          </p:nvPicPr>
+          <p:blipFill>
+            <a:blip r:embed="rId4">
+              <a:extLst>
+                <a:ext uri="{96DAC541-7B7A-43D3-8B79-37D633B846F1}">
+                  <asvg:svgBlip xmlns:asvg="http://schemas.microsoft.com/office/drawing/2016/SVG/main" r:embed="rId5"/>
+                </a:ext>
+              </a:extLst>
+            </a:blip>
+            <a:stretch>
+              <a:fillRect/>
+            </a:stretch>
+          </p:blipFill>
+          <p:spPr>
+            <a:xfrm>
+              <a:off x="7242812" y="4467225"/>
+              <a:ext cx="662940" cy="662940"/>
+            </a:xfrm>
+            <a:prstGeom prst="rect">
+              <a:avLst/>
+            </a:prstGeom>
+          </p:spPr>
+        </p:pic>
+        <p:pic>
+          <p:nvPicPr>
+            <p:cNvPr id="16" name="图形 15">
+              <a:extLst>
+                <a:ext uri="{FF2B5EF4-FFF2-40B4-BE49-F238E27FC236}">
+                  <a16:creationId xmlns:a16="http://schemas.microsoft.com/office/drawing/2014/main" id="{B4B05233-1992-179B-AB8C-647C9DE00ACF}"/>
+                </a:ext>
+              </a:extLst>
+            </p:cNvPr>
+            <p:cNvPicPr>
+              <a:picLocks noChangeAspect="1"/>
+            </p:cNvPicPr>
+            <p:nvPr/>
+          </p:nvPicPr>
+          <p:blipFill>
+            <a:blip r:embed="rId4">
+              <a:extLst>
+                <a:ext uri="{96DAC541-7B7A-43D3-8B79-37D633B846F1}">
+                  <asvg:svgBlip xmlns:asvg="http://schemas.microsoft.com/office/drawing/2016/SVG/main" r:embed="rId5"/>
+                </a:ext>
+              </a:extLst>
+            </a:blip>
+            <a:stretch>
+              <a:fillRect/>
+            </a:stretch>
+          </p:blipFill>
+          <p:spPr>
+            <a:xfrm>
+              <a:off x="7793355" y="1472563"/>
+              <a:ext cx="662940" cy="662940"/>
+            </a:xfrm>
+            <a:prstGeom prst="rect">
+              <a:avLst/>
+            </a:prstGeom>
+          </p:spPr>
+        </p:pic>
+        <p:pic>
+          <p:nvPicPr>
+            <p:cNvPr id="17" name="图形 16">
+              <a:extLst>
+                <a:ext uri="{FF2B5EF4-FFF2-40B4-BE49-F238E27FC236}">
+                  <a16:creationId xmlns:a16="http://schemas.microsoft.com/office/drawing/2014/main" id="{66EF0545-420C-A521-EEB8-BAB0884411F6}"/>
+                </a:ext>
+              </a:extLst>
+            </p:cNvPr>
+            <p:cNvPicPr>
+              <a:picLocks noChangeAspect="1"/>
+            </p:cNvPicPr>
+            <p:nvPr/>
+          </p:nvPicPr>
+          <p:blipFill>
+            <a:blip r:embed="rId4">
+              <a:extLst>
+                <a:ext uri="{96DAC541-7B7A-43D3-8B79-37D633B846F1}">
+                  <asvg:svgBlip xmlns:asvg="http://schemas.microsoft.com/office/drawing/2016/SVG/main" r:embed="rId5"/>
+                </a:ext>
+              </a:extLst>
+            </a:blip>
+            <a:stretch>
+              <a:fillRect/>
+            </a:stretch>
+          </p:blipFill>
+          <p:spPr>
+            <a:xfrm>
+              <a:off x="4057651" y="1432560"/>
+              <a:ext cx="662940" cy="662940"/>
+            </a:xfrm>
+            <a:prstGeom prst="rect">
+              <a:avLst/>
+            </a:prstGeom>
+          </p:spPr>
+        </p:pic>
+        <p:pic>
+          <p:nvPicPr>
+            <p:cNvPr id="18" name="图形 17">
+              <a:extLst>
+                <a:ext uri="{FF2B5EF4-FFF2-40B4-BE49-F238E27FC236}">
+                  <a16:creationId xmlns:a16="http://schemas.microsoft.com/office/drawing/2014/main" id="{CBE3F83D-71C6-1C10-7116-8D27D47E9975}"/>
+                </a:ext>
+              </a:extLst>
+            </p:cNvPr>
+            <p:cNvPicPr>
+              <a:picLocks noChangeAspect="1"/>
+            </p:cNvPicPr>
+            <p:nvPr/>
+          </p:nvPicPr>
+          <p:blipFill>
+            <a:blip r:embed="rId4">
+              <a:extLst>
+                <a:ext uri="{96DAC541-7B7A-43D3-8B79-37D633B846F1}">
+                  <asvg:svgBlip xmlns:asvg="http://schemas.microsoft.com/office/drawing/2016/SVG/main" r:embed="rId5"/>
+                </a:ext>
+              </a:extLst>
+            </a:blip>
+            <a:stretch>
+              <a:fillRect/>
+            </a:stretch>
+          </p:blipFill>
+          <p:spPr>
+            <a:xfrm>
+              <a:off x="8124825" y="3421380"/>
+              <a:ext cx="662940" cy="662940"/>
+            </a:xfrm>
+            <a:prstGeom prst="rect">
+              <a:avLst/>
+            </a:prstGeom>
+          </p:spPr>
+        </p:pic>
+        <p:pic>
+          <p:nvPicPr>
+            <p:cNvPr id="19" name="图形 18">
+              <a:extLst>
+                <a:ext uri="{FF2B5EF4-FFF2-40B4-BE49-F238E27FC236}">
+                  <a16:creationId xmlns:a16="http://schemas.microsoft.com/office/drawing/2014/main" id="{CF595702-B2B8-3C8C-031D-07869FD2032C}"/>
+                </a:ext>
+              </a:extLst>
+            </p:cNvPr>
+            <p:cNvPicPr>
+              <a:picLocks noChangeAspect="1"/>
+            </p:cNvPicPr>
+            <p:nvPr/>
+          </p:nvPicPr>
+          <p:blipFill>
+            <a:blip r:embed="rId4">
+              <a:extLst>
+                <a:ext uri="{96DAC541-7B7A-43D3-8B79-37D633B846F1}">
+                  <asvg:svgBlip xmlns:asvg="http://schemas.microsoft.com/office/drawing/2016/SVG/main" r:embed="rId5"/>
+                </a:ext>
+              </a:extLst>
+            </a:blip>
+            <a:stretch>
+              <a:fillRect/>
+            </a:stretch>
+          </p:blipFill>
+          <p:spPr>
+            <a:xfrm>
+              <a:off x="3177540" y="2967990"/>
+              <a:ext cx="662940" cy="662940"/>
+            </a:xfrm>
+            <a:prstGeom prst="rect">
+              <a:avLst/>
+            </a:prstGeom>
+          </p:spPr>
+        </p:pic>
+        <p:cxnSp>
+          <p:nvCxnSpPr>
+            <p:cNvPr id="23" name="连接符: 肘形 22">
+              <a:extLst>
+                <a:ext uri="{FF2B5EF4-FFF2-40B4-BE49-F238E27FC236}">
+                  <a16:creationId xmlns:a16="http://schemas.microsoft.com/office/drawing/2014/main" id="{18482E6C-6C91-DA86-AB92-E254A4FF4101}"/>
+                </a:ext>
+              </a:extLst>
+            </p:cNvPr>
+            <p:cNvCxnSpPr>
+              <a:cxnSpLocks/>
+              <a:stCxn id="17" idx="3"/>
+            </p:cNvCxnSpPr>
+            <p:nvPr/>
+          </p:nvCxnSpPr>
+          <p:spPr>
+            <a:xfrm>
+              <a:off x="4720591" y="1764030"/>
+              <a:ext cx="742949" cy="790575"/>
+            </a:xfrm>
+            <a:prstGeom prst="curvedConnector2">
+              <a:avLst/>
+            </a:prstGeom>
+            <a:ln w="38100">
+              <a:solidFill>
+                <a:schemeClr val="tx1"/>
+              </a:solidFill>
+              <a:tailEnd type="triangle"/>
+            </a:ln>
+          </p:spPr>
+          <p:style>
+            <a:lnRef idx="1">
+              <a:schemeClr val="accent1"/>
+            </a:lnRef>
+            <a:fillRef idx="0">
+              <a:schemeClr val="accent1"/>
+            </a:fillRef>
+            <a:effectRef idx="0">
+              <a:schemeClr val="accent1"/>
+            </a:effectRef>
+            <a:fontRef idx="minor">
+              <a:schemeClr val="tx1"/>
+            </a:fontRef>
+          </p:style>
+        </p:cxnSp>
+        <p:cxnSp>
+          <p:nvCxnSpPr>
+            <p:cNvPr id="25" name="连接符: 肘形 22">
+              <a:extLst>
+                <a:ext uri="{FF2B5EF4-FFF2-40B4-BE49-F238E27FC236}">
+                  <a16:creationId xmlns:a16="http://schemas.microsoft.com/office/drawing/2014/main" id="{EE6E7069-84F1-2AA7-0C4D-222593D06B1D}"/>
+                </a:ext>
+              </a:extLst>
+            </p:cNvPr>
+            <p:cNvCxnSpPr>
+              <a:cxnSpLocks/>
+            </p:cNvCxnSpPr>
+            <p:nvPr/>
+          </p:nvCxnSpPr>
+          <p:spPr>
+            <a:xfrm flipV="1">
+              <a:off x="3909060" y="2802255"/>
+              <a:ext cx="1554480" cy="619125"/>
+            </a:xfrm>
+            <a:prstGeom prst="curvedConnector3">
+              <a:avLst>
+                <a:gd name="adj1" fmla="val 50000"/>
+              </a:avLst>
+            </a:prstGeom>
+            <a:ln w="38100">
+              <a:solidFill>
+                <a:schemeClr val="tx1"/>
+              </a:solidFill>
+              <a:tailEnd type="triangle"/>
+            </a:ln>
+          </p:spPr>
+          <p:style>
+            <a:lnRef idx="1">
+              <a:schemeClr val="accent1"/>
+            </a:lnRef>
+            <a:fillRef idx="0">
+              <a:schemeClr val="accent1"/>
+            </a:fillRef>
+            <a:effectRef idx="0">
+              <a:schemeClr val="accent1"/>
+            </a:effectRef>
+            <a:fontRef idx="minor">
+              <a:schemeClr val="tx1"/>
+            </a:fontRef>
+          </p:style>
+        </p:cxnSp>
+        <p:cxnSp>
+          <p:nvCxnSpPr>
+            <p:cNvPr id="28" name="连接符: 肘形 22">
+              <a:extLst>
+                <a:ext uri="{FF2B5EF4-FFF2-40B4-BE49-F238E27FC236}">
+                  <a16:creationId xmlns:a16="http://schemas.microsoft.com/office/drawing/2014/main" id="{E9240BDF-0652-C88B-B4D2-8BF0EA7EA1CC}"/>
+                </a:ext>
+              </a:extLst>
+            </p:cNvPr>
+            <p:cNvCxnSpPr>
+              <a:cxnSpLocks/>
+              <a:stCxn id="16" idx="1"/>
+            </p:cNvCxnSpPr>
+            <p:nvPr/>
+          </p:nvCxnSpPr>
+          <p:spPr>
+            <a:xfrm rot="10800000" flipV="1">
+              <a:off x="6728461" y="1804032"/>
+              <a:ext cx="1064894" cy="596267"/>
+            </a:xfrm>
+            <a:prstGeom prst="curvedConnector3">
+              <a:avLst>
+                <a:gd name="adj1" fmla="val 50000"/>
+              </a:avLst>
+            </a:prstGeom>
+            <a:ln w="38100">
+              <a:solidFill>
+                <a:schemeClr val="tx1"/>
+              </a:solidFill>
+              <a:tailEnd type="triangle"/>
+            </a:ln>
+          </p:spPr>
+          <p:style>
+            <a:lnRef idx="1">
+              <a:schemeClr val="accent1"/>
+            </a:lnRef>
+            <a:fillRef idx="0">
+              <a:schemeClr val="accent1"/>
+            </a:fillRef>
+            <a:effectRef idx="0">
+              <a:schemeClr val="accent1"/>
+            </a:effectRef>
+            <a:fontRef idx="minor">
+              <a:schemeClr val="tx1"/>
+            </a:fontRef>
+          </p:style>
+        </p:cxnSp>
+        <p:cxnSp>
+          <p:nvCxnSpPr>
+            <p:cNvPr id="32" name="连接符: 肘形 22">
+              <a:extLst>
+                <a:ext uri="{FF2B5EF4-FFF2-40B4-BE49-F238E27FC236}">
+                  <a16:creationId xmlns:a16="http://schemas.microsoft.com/office/drawing/2014/main" id="{2BCD9B67-4691-22EF-6B4E-A162BC9BA6D3}"/>
+                </a:ext>
+              </a:extLst>
+            </p:cNvPr>
+            <p:cNvCxnSpPr>
+              <a:cxnSpLocks/>
+              <a:stCxn id="18" idx="0"/>
+            </p:cNvCxnSpPr>
+            <p:nvPr/>
+          </p:nvCxnSpPr>
+          <p:spPr>
+            <a:xfrm rot="16200000" flipV="1">
+              <a:off x="7258050" y="2223135"/>
+              <a:ext cx="689610" cy="1706880"/>
+            </a:xfrm>
+            <a:prstGeom prst="curvedConnector2">
+              <a:avLst/>
+            </a:prstGeom>
+            <a:ln w="38100">
+              <a:solidFill>
+                <a:schemeClr val="tx1"/>
+              </a:solidFill>
+              <a:tailEnd type="triangle"/>
+            </a:ln>
+          </p:spPr>
+          <p:style>
+            <a:lnRef idx="1">
+              <a:schemeClr val="accent1"/>
+            </a:lnRef>
+            <a:fillRef idx="0">
+              <a:schemeClr val="accent1"/>
+            </a:fillRef>
+            <a:effectRef idx="0">
+              <a:schemeClr val="accent1"/>
+            </a:effectRef>
+            <a:fontRef idx="minor">
+              <a:schemeClr val="tx1"/>
+            </a:fontRef>
+          </p:style>
+        </p:cxnSp>
+        <p:cxnSp>
+          <p:nvCxnSpPr>
+            <p:cNvPr id="37" name="连接符: 肘形 22">
+              <a:extLst>
+                <a:ext uri="{FF2B5EF4-FFF2-40B4-BE49-F238E27FC236}">
+                  <a16:creationId xmlns:a16="http://schemas.microsoft.com/office/drawing/2014/main" id="{BF8CE10C-35B7-3113-FFFC-489B67EF4382}"/>
+                </a:ext>
+              </a:extLst>
+            </p:cNvPr>
+            <p:cNvCxnSpPr>
+              <a:cxnSpLocks/>
+            </p:cNvCxnSpPr>
+            <p:nvPr/>
+          </p:nvCxnSpPr>
+          <p:spPr>
+            <a:xfrm rot="16200000" flipV="1">
+              <a:off x="6553200" y="3270884"/>
+              <a:ext cx="1335406" cy="763905"/>
+            </a:xfrm>
+            <a:prstGeom prst="curvedConnector3">
+              <a:avLst>
+                <a:gd name="adj1" fmla="val 50000"/>
+              </a:avLst>
+            </a:prstGeom>
+            <a:ln w="38100">
+              <a:solidFill>
+                <a:schemeClr val="tx1"/>
+              </a:solidFill>
+              <a:tailEnd type="triangle"/>
+            </a:ln>
+          </p:spPr>
+          <p:style>
+            <a:lnRef idx="1">
+              <a:schemeClr val="accent1"/>
+            </a:lnRef>
+            <a:fillRef idx="0">
+              <a:schemeClr val="accent1"/>
+            </a:fillRef>
+            <a:effectRef idx="0">
+              <a:schemeClr val="accent1"/>
+            </a:effectRef>
+            <a:fontRef idx="minor">
+              <a:schemeClr val="tx1"/>
+            </a:fontRef>
+          </p:style>
+        </p:cxnSp>
+        <p:cxnSp>
+          <p:nvCxnSpPr>
+            <p:cNvPr id="46" name="连接符: 肘形 22">
+              <a:extLst>
+                <a:ext uri="{FF2B5EF4-FFF2-40B4-BE49-F238E27FC236}">
+                  <a16:creationId xmlns:a16="http://schemas.microsoft.com/office/drawing/2014/main" id="{36B05C30-9AFE-5136-2616-A1E703027DF0}"/>
+                </a:ext>
+              </a:extLst>
+            </p:cNvPr>
+            <p:cNvCxnSpPr>
+              <a:cxnSpLocks/>
+            </p:cNvCxnSpPr>
+            <p:nvPr/>
+          </p:nvCxnSpPr>
+          <p:spPr>
+            <a:xfrm rot="5400000" flipH="1" flipV="1">
+              <a:off x="4471510" y="3120866"/>
+              <a:ext cx="993458" cy="990601"/>
+            </a:xfrm>
+            <a:prstGeom prst="curvedConnector3">
+              <a:avLst>
+                <a:gd name="adj1" fmla="val 50000"/>
+              </a:avLst>
+            </a:prstGeom>
+            <a:ln w="38100">
+              <a:solidFill>
+                <a:schemeClr val="tx1"/>
+              </a:solidFill>
+              <a:tailEnd type="triangle"/>
+            </a:ln>
+          </p:spPr>
+          <p:style>
+            <a:lnRef idx="1">
+              <a:schemeClr val="accent1"/>
+            </a:lnRef>
+            <a:fillRef idx="0">
+              <a:schemeClr val="accent1"/>
+            </a:fillRef>
+            <a:effectRef idx="0">
+              <a:schemeClr val="accent1"/>
+            </a:effectRef>
+            <a:fontRef idx="minor">
+              <a:schemeClr val="tx1"/>
+            </a:fontRef>
+          </p:style>
+        </p:cxnSp>
+      </p:grpSp>
+      <p:grpSp>
+        <p:nvGrpSpPr>
+          <p:cNvPr id="68" name="组合 67">
+            <a:extLst>
+              <a:ext uri="{FF2B5EF4-FFF2-40B4-BE49-F238E27FC236}">
+                <a16:creationId xmlns:a16="http://schemas.microsoft.com/office/drawing/2014/main" id="{CC0D61C1-80ED-CF68-A7AD-EC165307E640}"/>
+              </a:ext>
+            </a:extLst>
+          </p:cNvPr>
+          <p:cNvGrpSpPr/>
+          <p:nvPr/>
+        </p:nvGrpSpPr>
+        <p:grpSpPr>
+          <a:xfrm>
+            <a:off x="8839200" y="2777490"/>
+            <a:ext cx="2381251" cy="2838450"/>
+            <a:chOff x="8081010" y="3780471"/>
+            <a:chExt cx="2453640" cy="2838450"/>
+          </a:xfrm>
+        </p:grpSpPr>
+        <p:sp>
+          <p:nvSpPr>
+            <p:cNvPr id="66" name="矩形 65">
+              <a:extLst>
+                <a:ext uri="{FF2B5EF4-FFF2-40B4-BE49-F238E27FC236}">
+                  <a16:creationId xmlns:a16="http://schemas.microsoft.com/office/drawing/2014/main" id="{551B0086-0777-963A-D74F-74FDE4503FFA}"/>
+                </a:ext>
+              </a:extLst>
+            </p:cNvPr>
+            <p:cNvSpPr/>
+            <p:nvPr/>
+          </p:nvSpPr>
+          <p:spPr>
+            <a:xfrm>
+              <a:off x="8081010" y="3780471"/>
+              <a:ext cx="2453640" cy="2838450"/>
+            </a:xfrm>
+            <a:prstGeom prst="rect">
+              <a:avLst/>
+            </a:prstGeom>
+            <a:solidFill>
+              <a:schemeClr val="accent5">
+                <a:lumMod val="20000"/>
+                <a:lumOff val="80000"/>
+              </a:schemeClr>
+            </a:solidFill>
+            <a:ln w="19050">
+              <a:noFill/>
+            </a:ln>
+          </p:spPr>
+          <p:style>
+            <a:lnRef idx="2">
+              <a:schemeClr val="accent1">
+                <a:shade val="15000"/>
+              </a:schemeClr>
+            </a:lnRef>
+            <a:fillRef idx="1">
+              <a:schemeClr val="accent1"/>
+            </a:fillRef>
+            <a:effectRef idx="0">
+              <a:schemeClr val="accent1"/>
+            </a:effectRef>
+            <a:fontRef idx="minor">
+              <a:schemeClr val="lt1"/>
+            </a:fontRef>
+          </p:style>
+          <p:txBody>
+            <a:bodyPr rtlCol="0" anchor="ctr"/>
+            <a:lstStyle/>
+            <a:p>
+              <a:pPr algn="ctr"/>
+              <a:endParaRPr lang="zh-CN" altLang="en-US" dirty="0" err="1">
+                <a:solidFill>
+                  <a:schemeClr val="tx1"/>
+                </a:solidFill>
+              </a:endParaRPr>
+            </a:p>
+          </p:txBody>
+        </p:sp>
+        <p:grpSp>
+          <p:nvGrpSpPr>
+            <p:cNvPr id="67" name="组合 66">
+              <a:extLst>
+                <a:ext uri="{FF2B5EF4-FFF2-40B4-BE49-F238E27FC236}">
+                  <a16:creationId xmlns:a16="http://schemas.microsoft.com/office/drawing/2014/main" id="{31668729-D6DA-7E7A-CBE7-F21325980BFF}"/>
+                </a:ext>
+              </a:extLst>
+            </p:cNvPr>
+            <p:cNvGrpSpPr/>
+            <p:nvPr/>
+          </p:nvGrpSpPr>
+          <p:grpSpPr>
+            <a:xfrm>
+              <a:off x="8271510" y="4012435"/>
+              <a:ext cx="2072641" cy="2374523"/>
+              <a:chOff x="9258299" y="3128010"/>
+              <a:chExt cx="2072641" cy="2374523"/>
+            </a:xfrm>
+          </p:grpSpPr>
+          <p:grpSp>
+            <p:nvGrpSpPr>
+              <p:cNvPr id="64" name="组合 63">
+                <a:extLst>
+                  <a:ext uri="{FF2B5EF4-FFF2-40B4-BE49-F238E27FC236}">
+                    <a16:creationId xmlns:a16="http://schemas.microsoft.com/office/drawing/2014/main" id="{4B474968-0E19-448E-8BB5-59E6CE71FCEB}"/>
+                  </a:ext>
+                </a:extLst>
+              </p:cNvPr>
+              <p:cNvGrpSpPr/>
+              <p:nvPr/>
+            </p:nvGrpSpPr>
+            <p:grpSpPr>
+              <a:xfrm>
+                <a:off x="9258299" y="3851345"/>
+                <a:ext cx="2072641" cy="781050"/>
+                <a:chOff x="9258299" y="3767136"/>
+                <a:chExt cx="2072641" cy="781050"/>
+              </a:xfrm>
+            </p:grpSpPr>
+            <p:pic>
+              <p:nvPicPr>
+                <p:cNvPr id="48" name="图形 47">
+                  <a:extLst>
+                    <a:ext uri="{FF2B5EF4-FFF2-40B4-BE49-F238E27FC236}">
+                      <a16:creationId xmlns:a16="http://schemas.microsoft.com/office/drawing/2014/main" id="{D3C72EE0-CE0A-2F4B-2F4F-806531E5022B}"/>
+                    </a:ext>
+                  </a:extLst>
+                </p:cNvPr>
+                <p:cNvPicPr>
+                  <a:picLocks noChangeAspect="1"/>
+                </p:cNvPicPr>
+                <p:nvPr/>
+              </p:nvPicPr>
+              <p:blipFill>
+                <a:blip r:embed="rId2">
+                  <a:extLst>
+                    <a:ext uri="{96DAC541-7B7A-43D3-8B79-37D633B846F1}">
+                      <asvg:svgBlip xmlns:asvg="http://schemas.microsoft.com/office/drawing/2016/SVG/main" r:embed="rId3"/>
+                    </a:ext>
+                  </a:extLst>
+                </a:blip>
+                <a:stretch>
+                  <a:fillRect/>
+                </a:stretch>
+              </p:blipFill>
+              <p:spPr>
+                <a:xfrm>
+                  <a:off x="9258299" y="3767136"/>
+                  <a:ext cx="781050" cy="781050"/>
+                </a:xfrm>
+                <a:prstGeom prst="rect">
+                  <a:avLst/>
+                </a:prstGeom>
+              </p:spPr>
+            </p:pic>
+            <p:sp>
+              <p:nvSpPr>
+                <p:cNvPr id="50" name="文本框 49">
+                  <a:extLst>
+                    <a:ext uri="{FF2B5EF4-FFF2-40B4-BE49-F238E27FC236}">
+                      <a16:creationId xmlns:a16="http://schemas.microsoft.com/office/drawing/2014/main" id="{8BF5B677-6CF4-2ED8-9773-4DF5AC5EBC71}"/>
+                    </a:ext>
+                  </a:extLst>
+                </p:cNvPr>
+                <p:cNvSpPr txBox="1"/>
+                <p:nvPr/>
+              </p:nvSpPr>
+              <p:spPr>
+                <a:xfrm>
+                  <a:off x="10195560" y="3972995"/>
+                  <a:ext cx="1135380" cy="369332"/>
+                </a:xfrm>
+                <a:prstGeom prst="rect">
+                  <a:avLst/>
+                </a:prstGeom>
+                <a:noFill/>
+              </p:spPr>
+              <p:txBody>
+                <a:bodyPr wrap="square" rtlCol="0" anchor="ctr" anchorCtr="1">
+                  <a:spAutoFit/>
+                </a:bodyPr>
+                <a:lstStyle/>
+                <a:p>
+                  <a:pPr algn="ctr"/>
+                  <a:r>
+                    <a:rPr lang="zh-CN" altLang="en-US" dirty="0">
+                      <a:latin typeface="宋体" panose="02010600030101010101" pitchFamily="2" charset="-122"/>
+                      <a:ea typeface="宋体" panose="02010600030101010101" pitchFamily="2" charset="-122"/>
+                    </a:rPr>
+                    <a:t>基站</a:t>
+                  </a:r>
+                </a:p>
+              </p:txBody>
+            </p:sp>
+          </p:grpSp>
+          <p:grpSp>
+            <p:nvGrpSpPr>
+              <p:cNvPr id="65" name="组合 64">
+                <a:extLst>
+                  <a:ext uri="{FF2B5EF4-FFF2-40B4-BE49-F238E27FC236}">
+                    <a16:creationId xmlns:a16="http://schemas.microsoft.com/office/drawing/2014/main" id="{EA912B24-633E-56FA-4D8C-558E9EE2108E}"/>
+                  </a:ext>
+                </a:extLst>
+              </p:cNvPr>
+              <p:cNvGrpSpPr/>
+              <p:nvPr/>
+            </p:nvGrpSpPr>
+            <p:grpSpPr>
+              <a:xfrm>
+                <a:off x="9390756" y="4986397"/>
+                <a:ext cx="1940184" cy="516136"/>
+                <a:chOff x="9390756" y="4986397"/>
+                <a:chExt cx="1940184" cy="516136"/>
+              </a:xfrm>
+            </p:grpSpPr>
+            <p:sp>
+              <p:nvSpPr>
+                <p:cNvPr id="52" name="文本框 51">
+                  <a:extLst>
+                    <a:ext uri="{FF2B5EF4-FFF2-40B4-BE49-F238E27FC236}">
+                      <a16:creationId xmlns:a16="http://schemas.microsoft.com/office/drawing/2014/main" id="{69214415-525E-9F29-C38A-E89EA28D467B}"/>
+                    </a:ext>
+                  </a:extLst>
+                </p:cNvPr>
+                <p:cNvSpPr txBox="1"/>
+                <p:nvPr/>
+              </p:nvSpPr>
+              <p:spPr>
+                <a:xfrm>
+                  <a:off x="10195560" y="5059799"/>
+                  <a:ext cx="1135380" cy="369332"/>
+                </a:xfrm>
+                <a:prstGeom prst="rect">
+                  <a:avLst/>
+                </a:prstGeom>
+                <a:noFill/>
+              </p:spPr>
+              <p:txBody>
+                <a:bodyPr wrap="square" rtlCol="0" anchor="ctr" anchorCtr="1">
+                  <a:spAutoFit/>
+                </a:bodyPr>
+                <a:lstStyle/>
+                <a:p>
+                  <a:pPr algn="ctr"/>
+                  <a:r>
+                    <a:rPr lang="zh-CN" altLang="en-US" dirty="0">
+                      <a:latin typeface="宋体" panose="02010600030101010101" pitchFamily="2" charset="-122"/>
+                      <a:ea typeface="宋体" panose="02010600030101010101" pitchFamily="2" charset="-122"/>
+                    </a:rPr>
+                    <a:t>节点</a:t>
+                  </a:r>
+                </a:p>
+              </p:txBody>
+            </p:sp>
+            <p:pic>
+              <p:nvPicPr>
+                <p:cNvPr id="54" name="图形 53">
+                  <a:extLst>
+                    <a:ext uri="{FF2B5EF4-FFF2-40B4-BE49-F238E27FC236}">
+                      <a16:creationId xmlns:a16="http://schemas.microsoft.com/office/drawing/2014/main" id="{3B965793-E0FF-D3D9-234F-913FF30E944E}"/>
+                    </a:ext>
+                  </a:extLst>
+                </p:cNvPr>
+                <p:cNvPicPr>
+                  <a:picLocks noChangeAspect="1"/>
+                </p:cNvPicPr>
+                <p:nvPr/>
+              </p:nvPicPr>
+              <p:blipFill>
+                <a:blip r:embed="rId4">
+                  <a:extLst>
+                    <a:ext uri="{96DAC541-7B7A-43D3-8B79-37D633B846F1}">
+                      <asvg:svgBlip xmlns:asvg="http://schemas.microsoft.com/office/drawing/2016/SVG/main" r:embed="rId5"/>
+                    </a:ext>
+                  </a:extLst>
+                </a:blip>
+                <a:stretch>
+                  <a:fillRect/>
+                </a:stretch>
+              </p:blipFill>
+              <p:spPr>
+                <a:xfrm>
+                  <a:off x="9390756" y="4986397"/>
+                  <a:ext cx="516136" cy="516136"/>
+                </a:xfrm>
+                <a:prstGeom prst="rect">
+                  <a:avLst/>
+                </a:prstGeom>
+              </p:spPr>
+            </p:pic>
+          </p:grpSp>
+          <p:grpSp>
+            <p:nvGrpSpPr>
+              <p:cNvPr id="63" name="组合 62">
+                <a:extLst>
+                  <a:ext uri="{FF2B5EF4-FFF2-40B4-BE49-F238E27FC236}">
+                    <a16:creationId xmlns:a16="http://schemas.microsoft.com/office/drawing/2014/main" id="{2BB8EC3A-5C90-5475-07CF-F4089101005C}"/>
+                  </a:ext>
+                </a:extLst>
+              </p:cNvPr>
+              <p:cNvGrpSpPr/>
+              <p:nvPr/>
+            </p:nvGrpSpPr>
+            <p:grpSpPr>
+              <a:xfrm>
+                <a:off x="9258299" y="3128010"/>
+                <a:ext cx="2072641" cy="369332"/>
+                <a:chOff x="9258299" y="3128010"/>
+                <a:chExt cx="2072641" cy="369332"/>
+              </a:xfrm>
+            </p:grpSpPr>
+            <p:cxnSp>
+              <p:nvCxnSpPr>
+                <p:cNvPr id="57" name="连接符: 肘形 22">
+                  <a:extLst>
+                    <a:ext uri="{FF2B5EF4-FFF2-40B4-BE49-F238E27FC236}">
+                      <a16:creationId xmlns:a16="http://schemas.microsoft.com/office/drawing/2014/main" id="{4B4DC991-F1CB-0238-B6E3-C862F2F3FD2F}"/>
+                    </a:ext>
+                  </a:extLst>
+                </p:cNvPr>
+                <p:cNvCxnSpPr>
+                  <a:cxnSpLocks/>
+                </p:cNvCxnSpPr>
+                <p:nvPr/>
+              </p:nvCxnSpPr>
+              <p:spPr>
+                <a:xfrm>
+                  <a:off x="9258299" y="3312676"/>
+                  <a:ext cx="716281" cy="0"/>
+                </a:xfrm>
+                <a:prstGeom prst="straightConnector1">
+                  <a:avLst/>
+                </a:prstGeom>
+                <a:ln w="38100">
+                  <a:solidFill>
+                    <a:schemeClr val="tx1"/>
+                  </a:solidFill>
+                  <a:tailEnd type="triangle"/>
+                </a:ln>
+              </p:spPr>
+              <p:style>
+                <a:lnRef idx="1">
+                  <a:schemeClr val="accent1"/>
+                </a:lnRef>
+                <a:fillRef idx="0">
+                  <a:schemeClr val="accent1"/>
+                </a:fillRef>
+                <a:effectRef idx="0">
+                  <a:schemeClr val="accent1"/>
+                </a:effectRef>
+                <a:fontRef idx="minor">
+                  <a:schemeClr val="tx1"/>
+                </a:fontRef>
+              </p:style>
+            </p:cxnSp>
+            <p:sp>
+              <p:nvSpPr>
+                <p:cNvPr id="62" name="文本框 61">
+                  <a:extLst>
+                    <a:ext uri="{FF2B5EF4-FFF2-40B4-BE49-F238E27FC236}">
+                      <a16:creationId xmlns:a16="http://schemas.microsoft.com/office/drawing/2014/main" id="{733F6827-3840-8F12-C81D-5E20C0A60A8D}"/>
+                    </a:ext>
+                  </a:extLst>
+                </p:cNvPr>
+                <p:cNvSpPr txBox="1"/>
+                <p:nvPr/>
+              </p:nvSpPr>
+              <p:spPr>
+                <a:xfrm>
+                  <a:off x="10195560" y="3128010"/>
+                  <a:ext cx="1135380" cy="369332"/>
+                </a:xfrm>
+                <a:prstGeom prst="rect">
+                  <a:avLst/>
+                </a:prstGeom>
+                <a:noFill/>
+              </p:spPr>
+              <p:txBody>
+                <a:bodyPr wrap="square" rtlCol="0" anchor="ctr" anchorCtr="1">
+                  <a:spAutoFit/>
+                </a:bodyPr>
+                <a:lstStyle/>
+                <a:p>
+                  <a:pPr algn="ctr"/>
+                  <a:r>
+                    <a:rPr lang="zh-CN" altLang="en-US" dirty="0">
+                      <a:latin typeface="宋体" panose="02010600030101010101" pitchFamily="2" charset="-122"/>
+                      <a:ea typeface="宋体" panose="02010600030101010101" pitchFamily="2" charset="-122"/>
+                    </a:rPr>
+                    <a:t>通信链路</a:t>
+                  </a:r>
+                </a:p>
+              </p:txBody>
+            </p:sp>
+          </p:grpSp>
+        </p:grpSp>
+      </p:grpSp>
+    </p:spTree>
+    <p:extLst>
+      <p:ext uri="{BB962C8B-B14F-4D97-AF65-F5344CB8AC3E}">
+        <p14:creationId xmlns:p14="http://schemas.microsoft.com/office/powerpoint/2010/main" val="185415318"/>
+      </p:ext>
+    </p:extLst>
+  </p:cSld>
+  <p:clrMapOvr>
+    <a:masterClrMapping/>
+  </p:clrMapOvr>
+</p:sld>
+</file>
+
 <file path=ppt/theme/theme1.xml><?xml version="1.0" encoding="utf-8"?>
 <a:theme xmlns:a="http://schemas.openxmlformats.org/drawingml/2006/main" name="Office 主题​​">
   <a:themeElements>
@@ -13660,7 +22319,10 @@
       </a:bodyPr>
       <a:lstStyle>
         <a:defPPr algn="ctr">
-          <a:defRPr sz="1050" dirty="0" smtClean="0"/>
+          <a:defRPr dirty="0" smtClean="0">
+            <a:latin typeface="宋体" panose="02010600030101010101" pitchFamily="2" charset="-122"/>
+            <a:ea typeface="宋体" panose="02010600030101010101" pitchFamily="2" charset="-122"/>
+          </a:defRPr>
         </a:defPPr>
       </a:lstStyle>
     </a:txDef>

--- a/PPT画图.pptx
+++ b/PPT画图.pptx
@@ -208,7 +208,7 @@
           <a:p>
             <a:fld id="{5C1E4601-79B1-425F-B925-3F7BE382BF19}" type="datetimeFigureOut">
               <a:rPr lang="zh-CN" altLang="en-US" smtClean="0"/>
-              <a:t>2026/03/11</a:t>
+              <a:t>2026/03/16</a:t>
             </a:fld>
             <a:endParaRPr lang="zh-CN" altLang="en-US"/>
           </a:p>
@@ -898,7 +898,7 @@
           <a:p>
             <a:fld id="{5D2E9D4A-569D-49DD-9DBB-BF425DFB68D5}" type="datetimeFigureOut">
               <a:rPr lang="zh-CN" altLang="en-US" smtClean="0"/>
-              <a:t>2026/03/11</a:t>
+              <a:t>2026/03/16</a:t>
             </a:fld>
             <a:endParaRPr lang="zh-CN" altLang="en-US"/>
           </a:p>
@@ -1096,7 +1096,7 @@
           <a:p>
             <a:fld id="{5D2E9D4A-569D-49DD-9DBB-BF425DFB68D5}" type="datetimeFigureOut">
               <a:rPr lang="zh-CN" altLang="en-US" smtClean="0"/>
-              <a:t>2026/03/11</a:t>
+              <a:t>2026/03/16</a:t>
             </a:fld>
             <a:endParaRPr lang="zh-CN" altLang="en-US"/>
           </a:p>
@@ -1304,7 +1304,7 @@
           <a:p>
             <a:fld id="{5D2E9D4A-569D-49DD-9DBB-BF425DFB68D5}" type="datetimeFigureOut">
               <a:rPr lang="zh-CN" altLang="en-US" smtClean="0"/>
-              <a:t>2026/03/11</a:t>
+              <a:t>2026/03/16</a:t>
             </a:fld>
             <a:endParaRPr lang="zh-CN" altLang="en-US"/>
           </a:p>
@@ -1502,7 +1502,7 @@
           <a:p>
             <a:fld id="{5D2E9D4A-569D-49DD-9DBB-BF425DFB68D5}" type="datetimeFigureOut">
               <a:rPr lang="zh-CN" altLang="en-US" smtClean="0"/>
-              <a:t>2026/03/11</a:t>
+              <a:t>2026/03/16</a:t>
             </a:fld>
             <a:endParaRPr lang="zh-CN" altLang="en-US"/>
           </a:p>
@@ -1777,7 +1777,7 @@
           <a:p>
             <a:fld id="{5D2E9D4A-569D-49DD-9DBB-BF425DFB68D5}" type="datetimeFigureOut">
               <a:rPr lang="zh-CN" altLang="en-US" smtClean="0"/>
-              <a:t>2026/03/11</a:t>
+              <a:t>2026/03/16</a:t>
             </a:fld>
             <a:endParaRPr lang="zh-CN" altLang="en-US"/>
           </a:p>
@@ -2042,7 +2042,7 @@
           <a:p>
             <a:fld id="{5D2E9D4A-569D-49DD-9DBB-BF425DFB68D5}" type="datetimeFigureOut">
               <a:rPr lang="zh-CN" altLang="en-US" smtClean="0"/>
-              <a:t>2026/03/11</a:t>
+              <a:t>2026/03/16</a:t>
             </a:fld>
             <a:endParaRPr lang="zh-CN" altLang="en-US"/>
           </a:p>
@@ -2454,7 +2454,7 @@
           <a:p>
             <a:fld id="{5D2E9D4A-569D-49DD-9DBB-BF425DFB68D5}" type="datetimeFigureOut">
               <a:rPr lang="zh-CN" altLang="en-US" smtClean="0"/>
-              <a:t>2026/03/11</a:t>
+              <a:t>2026/03/16</a:t>
             </a:fld>
             <a:endParaRPr lang="zh-CN" altLang="en-US"/>
           </a:p>
@@ -2595,7 +2595,7 @@
           <a:p>
             <a:fld id="{5D2E9D4A-569D-49DD-9DBB-BF425DFB68D5}" type="datetimeFigureOut">
               <a:rPr lang="zh-CN" altLang="en-US" smtClean="0"/>
-              <a:t>2026/03/11</a:t>
+              <a:t>2026/03/16</a:t>
             </a:fld>
             <a:endParaRPr lang="zh-CN" altLang="en-US"/>
           </a:p>
@@ -2708,7 +2708,7 @@
           <a:p>
             <a:fld id="{5D2E9D4A-569D-49DD-9DBB-BF425DFB68D5}" type="datetimeFigureOut">
               <a:rPr lang="zh-CN" altLang="en-US" smtClean="0"/>
-              <a:t>2026/03/11</a:t>
+              <a:t>2026/03/16</a:t>
             </a:fld>
             <a:endParaRPr lang="zh-CN" altLang="en-US"/>
           </a:p>
@@ -3019,7 +3019,7 @@
           <a:p>
             <a:fld id="{5D2E9D4A-569D-49DD-9DBB-BF425DFB68D5}" type="datetimeFigureOut">
               <a:rPr lang="zh-CN" altLang="en-US" smtClean="0"/>
-              <a:t>2026/03/11</a:t>
+              <a:t>2026/03/16</a:t>
             </a:fld>
             <a:endParaRPr lang="zh-CN" altLang="en-US"/>
           </a:p>
@@ -3307,7 +3307,7 @@
           <a:p>
             <a:fld id="{5D2E9D4A-569D-49DD-9DBB-BF425DFB68D5}" type="datetimeFigureOut">
               <a:rPr lang="zh-CN" altLang="en-US" smtClean="0"/>
-              <a:t>2026/03/11</a:t>
+              <a:t>2026/03/16</a:t>
             </a:fld>
             <a:endParaRPr lang="zh-CN" altLang="en-US"/>
           </a:p>
@@ -3548,7 +3548,7 @@
           <a:p>
             <a:fld id="{5D2E9D4A-569D-49DD-9DBB-BF425DFB68D5}" type="datetimeFigureOut">
               <a:rPr lang="zh-CN" altLang="en-US" smtClean="0"/>
-              <a:t>2026/03/11</a:t>
+              <a:t>2026/03/16</a:t>
             </a:fld>
             <a:endParaRPr lang="zh-CN" altLang="en-US"/>
           </a:p>
@@ -8656,6 +8656,50 @@
           </p:grpSp>
         </p:grpSp>
       </p:grpSp>
+      <p:pic>
+        <p:nvPicPr>
+          <p:cNvPr id="4" name="图形 3" descr="信号塔">
+            <a:extLst>
+              <a:ext uri="{FF2B5EF4-FFF2-40B4-BE49-F238E27FC236}">
+                <a16:creationId xmlns:a16="http://schemas.microsoft.com/office/drawing/2014/main" id="{A9A12CD3-0D4E-E04E-4ED4-BBD1513E4C62}"/>
+              </a:ext>
+            </a:extLst>
+          </p:cNvPr>
+          <p:cNvPicPr>
+            <a:picLocks noChangeAspect="1"/>
+          </p:cNvPicPr>
+          <p:nvPr/>
+        </p:nvPicPr>
+        <p:blipFill>
+          <a:blip r:embed="rId6">
+            <a:extLst>
+              <a:ext uri="{96DAC541-7B7A-43D3-8B79-37D633B846F1}">
+                <asvg:svgBlip xmlns:asvg="http://schemas.microsoft.com/office/drawing/2016/SVG/main" r:embed="rId7"/>
+              </a:ext>
+            </a:extLst>
+          </a:blip>
+          <a:stretch>
+            <a:fillRect/>
+          </a:stretch>
+        </p:blipFill>
+        <p:spPr>
+          <a:xfrm>
+            <a:off x="8798241" y="620913"/>
+            <a:ext cx="2009775" cy="2009775"/>
+          </a:xfrm>
+          <a:prstGeom prst="rect">
+            <a:avLst/>
+          </a:prstGeom>
+          <a:scene3d>
+            <a:camera prst="orthographicFront"/>
+            <a:lightRig rig="balanced" dir="t"/>
+          </a:scene3d>
+          <a:sp3d prstMaterial="plastic">
+            <a:bevelT prst="relaxedInset"/>
+            <a:bevelB prst="relaxedInset"/>
+          </a:sp3d>
+        </p:spPr>
+      </p:pic>
     </p:spTree>
     <p:extLst>
       <p:ext uri="{BB962C8B-B14F-4D97-AF65-F5344CB8AC3E}">
@@ -31734,767 +31778,248 @@
           <a:chExt cx="0" cy="0"/>
         </a:xfrm>
       </p:grpSpPr>
-      <p:grpSp>
-        <p:nvGrpSpPr>
-          <p:cNvPr id="218" name="组合 217">
+      <p:sp>
+        <p:nvSpPr>
+          <p:cNvPr id="107" name="流程图: 决策 106">
             <a:extLst>
               <a:ext uri="{FF2B5EF4-FFF2-40B4-BE49-F238E27FC236}">
-                <a16:creationId xmlns:a16="http://schemas.microsoft.com/office/drawing/2014/main" id="{A95C7B50-75E7-51DF-90E0-FA18AFA0CF50}"/>
+                <a16:creationId xmlns:a16="http://schemas.microsoft.com/office/drawing/2014/main" id="{C1EE22BA-8A63-38B0-13F4-288805170A7C}"/>
               </a:ext>
             </a:extLst>
           </p:cNvPr>
-          <p:cNvGrpSpPr/>
+          <p:cNvSpPr/>
           <p:nvPr/>
-        </p:nvGrpSpPr>
-        <p:grpSpPr>
+        </p:nvSpPr>
+        <p:spPr>
           <a:xfrm>
-            <a:off x="575311" y="283113"/>
-            <a:ext cx="11041378" cy="6507166"/>
-            <a:chOff x="655320" y="283113"/>
-            <a:chExt cx="11041378" cy="6507166"/>
+            <a:off x="3927520" y="450795"/>
+            <a:ext cx="3070609" cy="1088543"/>
           </a:xfrm>
-        </p:grpSpPr>
-        <p:grpSp>
-          <p:nvGrpSpPr>
-            <p:cNvPr id="96" name="组合 95">
-              <a:extLst>
-                <a:ext uri="{FF2B5EF4-FFF2-40B4-BE49-F238E27FC236}">
-                  <a16:creationId xmlns:a16="http://schemas.microsoft.com/office/drawing/2014/main" id="{70FC21AD-66C9-8082-E91B-A82CC788FB91}"/>
-                </a:ext>
-              </a:extLst>
-            </p:cNvPr>
-            <p:cNvGrpSpPr/>
-            <p:nvPr/>
-          </p:nvGrpSpPr>
-          <p:grpSpPr>
-            <a:xfrm>
-              <a:off x="655320" y="283113"/>
-              <a:ext cx="3320230" cy="1088543"/>
-              <a:chOff x="889026" y="2307271"/>
-              <a:chExt cx="2413214" cy="986391"/>
-            </a:xfrm>
-          </p:grpSpPr>
-          <p:sp>
-            <p:nvSpPr>
-              <p:cNvPr id="2" name="矩形 1">
-                <a:extLst>
-                  <a:ext uri="{FF2B5EF4-FFF2-40B4-BE49-F238E27FC236}">
-                    <a16:creationId xmlns:a16="http://schemas.microsoft.com/office/drawing/2014/main" id="{11339D1B-3C73-529F-5BEB-6C2B1EF0DAA5}"/>
-                  </a:ext>
-                </a:extLst>
-              </p:cNvPr>
-              <p:cNvSpPr/>
-              <p:nvPr/>
-            </p:nvSpPr>
-            <p:spPr>
-              <a:xfrm>
-                <a:off x="1037621" y="2307271"/>
-                <a:ext cx="2185478" cy="986391"/>
-              </a:xfrm>
-              <a:prstGeom prst="rect">
-                <a:avLst/>
-              </a:prstGeom>
-              <a:noFill/>
-              <a:ln w="19050">
-                <a:solidFill>
-                  <a:schemeClr val="tx1"/>
-                </a:solidFill>
-              </a:ln>
-            </p:spPr>
-            <p:style>
-              <a:lnRef idx="2">
-                <a:schemeClr val="accent1">
-                  <a:shade val="15000"/>
-                </a:schemeClr>
-              </a:lnRef>
-              <a:fillRef idx="1">
-                <a:schemeClr val="accent1"/>
-              </a:fillRef>
-              <a:effectRef idx="0">
-                <a:schemeClr val="accent1"/>
-              </a:effectRef>
-              <a:fontRef idx="minor">
-                <a:schemeClr val="lt1"/>
-              </a:fontRef>
-            </p:style>
-            <p:txBody>
-              <a:bodyPr rtlCol="0" anchor="ctr"/>
-              <a:lstStyle/>
-              <a:p>
-                <a:pPr algn="ctr"/>
-                <a:endParaRPr lang="zh-CN" altLang="en-US" dirty="0" err="1">
-                  <a:solidFill>
-                    <a:schemeClr val="tx1"/>
-                  </a:solidFill>
-                  <a:latin typeface="Times New Roman" panose="02020603050405020304" pitchFamily="18" charset="0"/>
-                  <a:ea typeface="宋体" panose="02010600030101010101" pitchFamily="2" charset="-122"/>
-                </a:endParaRPr>
-              </a:p>
-            </p:txBody>
-          </p:sp>
-          <mc:AlternateContent xmlns:mc="http://schemas.openxmlformats.org/markup-compatibility/2006" xmlns:a14="http://schemas.microsoft.com/office/drawing/2010/main">
-            <mc:Choice Requires="a14">
-              <p:sp>
-                <p:nvSpPr>
-                  <p:cNvPr id="3" name="文本框 2">
-                    <a:extLst>
-                      <a:ext uri="{FF2B5EF4-FFF2-40B4-BE49-F238E27FC236}">
-                        <a16:creationId xmlns:a16="http://schemas.microsoft.com/office/drawing/2014/main" id="{3C28E2EE-28FF-44B4-7C4A-09596371771C}"/>
-                      </a:ext>
-                    </a:extLst>
-                  </p:cNvPr>
-                  <p:cNvSpPr txBox="1"/>
-                  <p:nvPr/>
-                </p:nvSpPr>
-                <p:spPr>
-                  <a:xfrm>
-                    <a:off x="889026" y="2463355"/>
-                    <a:ext cx="2413214" cy="728393"/>
-                  </a:xfrm>
-                  <a:prstGeom prst="rect">
-                    <a:avLst/>
-                  </a:prstGeom>
-                  <a:noFill/>
-                </p:spPr>
-                <p:txBody>
-                  <a:bodyPr wrap="square" rtlCol="0" anchor="ctr" anchorCtr="1">
-                    <a:spAutoFit/>
-                  </a:bodyPr>
-                  <a:lstStyle/>
-                  <a:p>
-                    <a:pPr algn="ctr"/>
-                    <a:r>
-                      <a:rPr lang="zh-CN" altLang="en-US" dirty="0">
-                        <a:latin typeface="Times New Roman" panose="02020603050405020304" pitchFamily="18" charset="0"/>
-                        <a:ea typeface="宋体" panose="02010600030101010101" pitchFamily="2" charset="-122"/>
-                      </a:rPr>
-                      <a:t>初始化竞争窗口</a:t>
-                    </a:r>
-                    <a14:m>
-                      <m:oMath xmlns:m="http://schemas.openxmlformats.org/officeDocument/2006/math">
-                        <m:r>
-                          <a:rPr lang="en-US" altLang="zh-CN" i="1" dirty="0" smtClean="0">
-                            <a:latin typeface="Cambria Math" panose="02040503050406030204" pitchFamily="18" charset="0"/>
-                            <a:ea typeface="宋体" panose="02010600030101010101" pitchFamily="2" charset="-122"/>
-                          </a:rPr>
-                          <m:t>𝐶𝑊</m:t>
-                        </m:r>
-                        <m:r>
-                          <a:rPr lang="en-US" altLang="zh-CN" b="0" i="1" dirty="0" smtClean="0">
-                            <a:latin typeface="Cambria Math" panose="02040503050406030204" pitchFamily="18" charset="0"/>
-                            <a:ea typeface="宋体" panose="02010600030101010101" pitchFamily="2" charset="-122"/>
-                          </a:rPr>
-                          <m:t>=</m:t>
-                        </m:r>
-                        <m:r>
-                          <a:rPr lang="en-US" altLang="zh-CN" b="0" i="1" dirty="0" smtClean="0">
-                            <a:latin typeface="Cambria Math" panose="02040503050406030204" pitchFamily="18" charset="0"/>
-                            <a:ea typeface="宋体" panose="02010600030101010101" pitchFamily="2" charset="-122"/>
-                          </a:rPr>
-                          <m:t>𝐶</m:t>
-                        </m:r>
-                        <m:sSub>
-                          <m:sSubPr>
-                            <m:ctrlPr>
-                              <a:rPr lang="en-US" altLang="zh-CN" b="0" i="1" dirty="0" smtClean="0">
-                                <a:latin typeface="Cambria Math" panose="02040503050406030204" pitchFamily="18" charset="0"/>
-                                <a:ea typeface="宋体" panose="02010600030101010101" pitchFamily="2" charset="-122"/>
-                              </a:rPr>
-                            </m:ctrlPr>
-                          </m:sSubPr>
-                          <m:e>
-                            <m:r>
-                              <a:rPr lang="en-US" altLang="zh-CN" b="0" i="1" dirty="0" smtClean="0">
-                                <a:latin typeface="Cambria Math" panose="02040503050406030204" pitchFamily="18" charset="0"/>
-                                <a:ea typeface="宋体" panose="02010600030101010101" pitchFamily="2" charset="-122"/>
-                              </a:rPr>
-                              <m:t>𝑊</m:t>
-                            </m:r>
-                          </m:e>
-                          <m:sub>
-                            <m:r>
-                              <a:rPr lang="en-US" altLang="zh-CN" b="0" i="1" dirty="0" smtClean="0">
-                                <a:latin typeface="Cambria Math" panose="02040503050406030204" pitchFamily="18" charset="0"/>
-                                <a:ea typeface="宋体" panose="02010600030101010101" pitchFamily="2" charset="-122"/>
-                              </a:rPr>
-                              <m:t>𝑚𝑖𝑛</m:t>
-                            </m:r>
-                          </m:sub>
-                        </m:sSub>
-                      </m:oMath>
-                    </a14:m>
-                    <a:endParaRPr lang="en-US" altLang="zh-CN" dirty="0">
-                      <a:latin typeface="Times New Roman" panose="02020603050405020304" pitchFamily="18" charset="0"/>
-                      <a:ea typeface="宋体" panose="02010600030101010101" pitchFamily="2" charset="-122"/>
-                    </a:endParaRPr>
-                  </a:p>
-                  <a:p>
-                    <a:pPr algn="ctr"/>
-                    <a:r>
-                      <a:rPr lang="zh-CN" altLang="en-US" dirty="0">
-                        <a:latin typeface="Times New Roman" panose="02020603050405020304" pitchFamily="18" charset="0"/>
-                        <a:ea typeface="宋体" panose="02010600030101010101" pitchFamily="2" charset="-122"/>
-                      </a:rPr>
-                      <a:t>生成随机数</a:t>
-                    </a:r>
-                    <a14:m>
-                      <m:oMath xmlns:m="http://schemas.openxmlformats.org/officeDocument/2006/math">
-                        <m:r>
-                          <a:rPr lang="en-US" altLang="zh-CN" i="1" dirty="0" smtClean="0">
-                            <a:latin typeface="Cambria Math" panose="02040503050406030204" pitchFamily="18" charset="0"/>
-                            <a:ea typeface="宋体" panose="02010600030101010101" pitchFamily="2" charset="-122"/>
-                          </a:rPr>
-                          <m:t>𝑁</m:t>
-                        </m:r>
-                      </m:oMath>
-                    </a14:m>
-                    <a:r>
-                      <a:rPr lang="en-US" altLang="zh-CN" dirty="0">
-                        <a:latin typeface="Times New Roman" panose="02020603050405020304" pitchFamily="18" charset="0"/>
-                        <a:ea typeface="宋体" panose="02010600030101010101" pitchFamily="2" charset="-122"/>
-                      </a:rPr>
-                      <a:t>:</a:t>
-                    </a:r>
-                    <a14:m>
-                      <m:oMath xmlns:m="http://schemas.openxmlformats.org/officeDocument/2006/math">
-                        <m:r>
-                          <a:rPr lang="en-US" altLang="zh-CN" i="1" dirty="0">
-                            <a:latin typeface="Cambria Math" panose="02040503050406030204" pitchFamily="18" charset="0"/>
-                            <a:ea typeface="宋体" panose="02010600030101010101" pitchFamily="2" charset="-122"/>
-                          </a:rPr>
-                          <m:t>𝑁</m:t>
-                        </m:r>
-                        <m:r>
-                          <a:rPr lang="en-US" altLang="zh-CN" i="1" dirty="0">
-                            <a:latin typeface="Cambria Math" panose="02040503050406030204" pitchFamily="18" charset="0"/>
-                            <a:ea typeface="宋体" panose="02010600030101010101" pitchFamily="2" charset="-122"/>
-                          </a:rPr>
-                          <m:t>∈ [0, </m:t>
-                        </m:r>
-                        <m:r>
-                          <a:rPr lang="en-US" altLang="zh-CN" i="1" dirty="0">
-                            <a:latin typeface="Cambria Math" panose="02040503050406030204" pitchFamily="18" charset="0"/>
-                            <a:ea typeface="宋体" panose="02010600030101010101" pitchFamily="2" charset="-122"/>
-                          </a:rPr>
-                          <m:t>𝐶𝑊</m:t>
-                        </m:r>
-                        <m:r>
-                          <a:rPr lang="en-US" altLang="zh-CN" i="1" dirty="0">
-                            <a:latin typeface="Cambria Math" panose="02040503050406030204" pitchFamily="18" charset="0"/>
-                            <a:ea typeface="宋体" panose="02010600030101010101" pitchFamily="2" charset="-122"/>
-                          </a:rPr>
-                          <m:t>]</m:t>
-                        </m:r>
-                      </m:oMath>
-                    </a14:m>
-                    <a:endParaRPr lang="en-US" altLang="zh-CN" dirty="0">
-                      <a:latin typeface="Times New Roman" panose="02020603050405020304" pitchFamily="18" charset="0"/>
-                      <a:ea typeface="宋体" panose="02010600030101010101" pitchFamily="2" charset="-122"/>
-                    </a:endParaRPr>
-                  </a:p>
-                </p:txBody>
-              </p:sp>
-            </mc:Choice>
-            <mc:Fallback xmlns="">
-              <p:sp>
-                <p:nvSpPr>
-                  <p:cNvPr id="3" name="文本框 2">
-                    <a:extLst>
-                      <a:ext uri="{FF2B5EF4-FFF2-40B4-BE49-F238E27FC236}">
-                        <a16:creationId xmlns:a16="http://schemas.microsoft.com/office/drawing/2014/main" id="{3C28E2EE-28FF-44B4-7C4A-09596371771C}"/>
-                      </a:ext>
-                    </a:extLst>
-                  </p:cNvPr>
-                  <p:cNvSpPr txBox="1">
-                    <a:spLocks noRot="1" noChangeAspect="1" noMove="1" noResize="1" noEditPoints="1" noAdjustHandles="1" noChangeArrowheads="1" noChangeShapeType="1" noTextEdit="1"/>
-                  </p:cNvSpPr>
-                  <p:nvPr/>
-                </p:nvSpPr>
-                <p:spPr>
-                  <a:xfrm>
-                    <a:off x="889026" y="2463355"/>
-                    <a:ext cx="2413214" cy="728393"/>
-                  </a:xfrm>
-                  <a:prstGeom prst="rect">
-                    <a:avLst/>
-                  </a:prstGeom>
-                  <a:blipFill>
-                    <a:blip r:embed="rId2"/>
-                    <a:stretch>
-                      <a:fillRect b="-2273"/>
-                    </a:stretch>
-                  </a:blipFill>
-                </p:spPr>
-                <p:txBody>
-                  <a:bodyPr/>
-                  <a:lstStyle/>
-                  <a:p>
-                    <a:r>
-                      <a:rPr lang="zh-CN" altLang="en-US">
-                        <a:noFill/>
-                      </a:rPr>
-                      <a:t> </a:t>
-                    </a:r>
-                  </a:p>
-                </p:txBody>
-              </p:sp>
-            </mc:Fallback>
-          </mc:AlternateContent>
-        </p:grpSp>
-        <p:cxnSp>
-          <p:nvCxnSpPr>
-            <p:cNvPr id="17" name="直接箭头连接符 16">
-              <a:extLst>
-                <a:ext uri="{FF2B5EF4-FFF2-40B4-BE49-F238E27FC236}">
-                  <a16:creationId xmlns:a16="http://schemas.microsoft.com/office/drawing/2014/main" id="{F4BC76EE-D638-3D3C-9B19-EE30CE24575E}"/>
-                </a:ext>
-              </a:extLst>
-            </p:cNvPr>
-            <p:cNvCxnSpPr>
-              <a:cxnSpLocks/>
-              <a:stCxn id="2" idx="3"/>
-              <a:endCxn id="107" idx="1"/>
-            </p:cNvCxnSpPr>
-            <p:nvPr/>
-          </p:nvCxnSpPr>
-          <p:spPr>
-            <a:xfrm>
-              <a:off x="3866664" y="827385"/>
-              <a:ext cx="393227" cy="41"/>
-            </a:xfrm>
-            <a:prstGeom prst="straightConnector1">
-              <a:avLst/>
-            </a:prstGeom>
-            <a:ln w="19050">
+          <a:prstGeom prst="flowChartDecision">
+            <a:avLst/>
+          </a:prstGeom>
+          <a:solidFill>
+            <a:srgbClr val="DCEBFF"/>
+          </a:solidFill>
+          <a:ln w="19050">
+            <a:solidFill>
+              <a:schemeClr val="tx1"/>
+            </a:solidFill>
+          </a:ln>
+        </p:spPr>
+        <p:style>
+          <a:lnRef idx="2">
+            <a:schemeClr val="accent1">
+              <a:shade val="15000"/>
+            </a:schemeClr>
+          </a:lnRef>
+          <a:fillRef idx="1">
+            <a:schemeClr val="accent1"/>
+          </a:fillRef>
+          <a:effectRef idx="0">
+            <a:schemeClr val="accent1"/>
+          </a:effectRef>
+          <a:fontRef idx="minor">
+            <a:schemeClr val="lt1"/>
+          </a:fontRef>
+        </p:style>
+        <p:txBody>
+          <a:bodyPr rtlCol="0" anchor="ctr"/>
+          <a:lstStyle/>
+          <a:p>
+            <a:pPr algn="ctr"/>
+            <a:endParaRPr lang="zh-CN" altLang="en-US" dirty="0" err="1">
               <a:solidFill>
                 <a:schemeClr val="tx1"/>
               </a:solidFill>
-              <a:tailEnd type="triangle"/>
-            </a:ln>
-          </p:spPr>
-          <p:style>
-            <a:lnRef idx="1">
-              <a:schemeClr val="accent1"/>
-            </a:lnRef>
-            <a:fillRef idx="0">
-              <a:schemeClr val="accent1"/>
-            </a:fillRef>
-            <a:effectRef idx="0">
-              <a:schemeClr val="accent1"/>
-            </a:effectRef>
-            <a:fontRef idx="minor">
+            </a:endParaRPr>
+          </a:p>
+        </p:txBody>
+      </p:sp>
+      <p:sp>
+        <p:nvSpPr>
+          <p:cNvPr id="138" name="流程图: 决策 137">
+            <a:extLst>
+              <a:ext uri="{FF2B5EF4-FFF2-40B4-BE49-F238E27FC236}">
+                <a16:creationId xmlns:a16="http://schemas.microsoft.com/office/drawing/2014/main" id="{5699C3B1-C901-1ABD-1DF2-84A9FD263E4C}"/>
+              </a:ext>
+            </a:extLst>
+          </p:cNvPr>
+          <p:cNvSpPr/>
+          <p:nvPr/>
+        </p:nvSpPr>
+        <p:spPr>
+          <a:xfrm>
+            <a:off x="4394868" y="2756173"/>
+            <a:ext cx="2135912" cy="787681"/>
+          </a:xfrm>
+          <a:prstGeom prst="flowChartDecision">
+            <a:avLst/>
+          </a:prstGeom>
+          <a:solidFill>
+            <a:srgbClr val="DCEBFF"/>
+          </a:solidFill>
+          <a:ln w="19050">
+            <a:solidFill>
               <a:schemeClr val="tx1"/>
-            </a:fontRef>
-          </p:style>
-        </p:cxnSp>
-        <p:grpSp>
-          <p:nvGrpSpPr>
-            <p:cNvPr id="8" name="组合 7">
-              <a:extLst>
-                <a:ext uri="{FF2B5EF4-FFF2-40B4-BE49-F238E27FC236}">
-                  <a16:creationId xmlns:a16="http://schemas.microsoft.com/office/drawing/2014/main" id="{104C9BB0-BCFD-6ACE-1E6D-5CBC48698FDC}"/>
-                </a:ext>
-              </a:extLst>
-            </p:cNvPr>
-            <p:cNvGrpSpPr/>
-            <p:nvPr/>
-          </p:nvGrpSpPr>
-          <p:grpSpPr>
-            <a:xfrm>
-              <a:off x="8005876" y="1575365"/>
-              <a:ext cx="2470522" cy="690539"/>
-              <a:chOff x="1271081" y="1407269"/>
-              <a:chExt cx="1900556" cy="778214"/>
-            </a:xfrm>
-          </p:grpSpPr>
-          <p:sp>
-            <p:nvSpPr>
-              <p:cNvPr id="9" name="矩形 8">
-                <a:extLst>
-                  <a:ext uri="{FF2B5EF4-FFF2-40B4-BE49-F238E27FC236}">
-                    <a16:creationId xmlns:a16="http://schemas.microsoft.com/office/drawing/2014/main" id="{50DF8695-7FF0-E790-0616-C1876B489F98}"/>
-                  </a:ext>
-                </a:extLst>
-              </p:cNvPr>
-              <p:cNvSpPr/>
-              <p:nvPr/>
-            </p:nvSpPr>
-            <p:spPr>
-              <a:xfrm>
-                <a:off x="1271081" y="1407269"/>
-                <a:ext cx="1893651" cy="778214"/>
-              </a:xfrm>
-              <a:prstGeom prst="rect">
-                <a:avLst/>
-              </a:prstGeom>
-              <a:noFill/>
-              <a:ln w="19050">
-                <a:solidFill>
-                  <a:schemeClr val="tx1"/>
-                </a:solidFill>
-              </a:ln>
-            </p:spPr>
-            <p:style>
-              <a:lnRef idx="2">
-                <a:schemeClr val="accent1">
-                  <a:shade val="15000"/>
-                </a:schemeClr>
-              </a:lnRef>
-              <a:fillRef idx="1">
-                <a:schemeClr val="accent1"/>
-              </a:fillRef>
-              <a:effectRef idx="0">
-                <a:schemeClr val="accent1"/>
-              </a:effectRef>
-              <a:fontRef idx="minor">
-                <a:schemeClr val="lt1"/>
-              </a:fontRef>
-            </p:style>
-            <p:txBody>
-              <a:bodyPr rtlCol="0" anchor="ctr"/>
-              <a:lstStyle/>
-              <a:p>
-                <a:pPr algn="ctr"/>
-                <a:endParaRPr lang="zh-CN" altLang="en-US" dirty="0" err="1">
-                  <a:solidFill>
-                    <a:schemeClr val="tx1"/>
-                  </a:solidFill>
-                  <a:latin typeface="Times New Roman" panose="02020603050405020304" pitchFamily="18" charset="0"/>
-                  <a:ea typeface="宋体" panose="02010600030101010101" pitchFamily="2" charset="-122"/>
-                </a:endParaRPr>
-              </a:p>
-            </p:txBody>
-          </p:sp>
-          <mc:AlternateContent xmlns:mc="http://schemas.openxmlformats.org/markup-compatibility/2006" xmlns:a14="http://schemas.microsoft.com/office/drawing/2010/main">
-            <mc:Choice Requires="a14">
-              <p:sp>
-                <p:nvSpPr>
-                  <p:cNvPr id="10" name="文本框 9">
-                    <a:extLst>
-                      <a:ext uri="{FF2B5EF4-FFF2-40B4-BE49-F238E27FC236}">
-                        <a16:creationId xmlns:a16="http://schemas.microsoft.com/office/drawing/2014/main" id="{6D9731EB-1D08-F1B0-5EF7-7E3983DACE05}"/>
-                      </a:ext>
-                    </a:extLst>
-                  </p:cNvPr>
-                  <p:cNvSpPr txBox="1"/>
-                  <p:nvPr/>
-                </p:nvSpPr>
-                <p:spPr>
-                  <a:xfrm>
-                    <a:off x="1277986" y="1611708"/>
-                    <a:ext cx="1893651" cy="369332"/>
-                  </a:xfrm>
-                  <a:prstGeom prst="rect">
-                    <a:avLst/>
-                  </a:prstGeom>
-                  <a:noFill/>
-                </p:spPr>
-                <p:txBody>
-                  <a:bodyPr wrap="square" rtlCol="0" anchor="ctr" anchorCtr="1">
-                    <a:spAutoFit/>
-                  </a:bodyPr>
-                  <a:lstStyle/>
-                  <a:p>
-                    <a:pPr algn="ctr"/>
-                    <a:r>
-                      <a:rPr lang="zh-CN" altLang="en-US" dirty="0">
-                        <a:ea typeface="宋体" panose="02010600030101010101" pitchFamily="2" charset="-122"/>
-                      </a:rPr>
-                      <a:t>随机数</a:t>
-                    </a:r>
-                    <a14:m>
-                      <m:oMath xmlns:m="http://schemas.openxmlformats.org/officeDocument/2006/math">
-                        <m:r>
-                          <a:rPr lang="en-US" altLang="zh-CN" i="1" dirty="0" smtClean="0">
-                            <a:latin typeface="Cambria Math" panose="02040503050406030204" pitchFamily="18" charset="0"/>
-                            <a:ea typeface="宋体" panose="02010600030101010101" pitchFamily="2" charset="-122"/>
-                          </a:rPr>
-                          <m:t>𝑁</m:t>
-                        </m:r>
-                      </m:oMath>
-                    </a14:m>
-                    <a:r>
-                      <a:rPr lang="zh-CN" altLang="en-US" dirty="0">
-                        <a:latin typeface="Times New Roman" panose="02020603050405020304" pitchFamily="18" charset="0"/>
-                        <a:ea typeface="宋体" panose="02010600030101010101" pitchFamily="2" charset="-122"/>
-                      </a:rPr>
-                      <a:t>保持</a:t>
-                    </a:r>
-                  </a:p>
-                </p:txBody>
-              </p:sp>
-            </mc:Choice>
-            <mc:Fallback xmlns="">
-              <p:sp>
-                <p:nvSpPr>
-                  <p:cNvPr id="10" name="文本框 9">
-                    <a:extLst>
-                      <a:ext uri="{FF2B5EF4-FFF2-40B4-BE49-F238E27FC236}">
-                        <a16:creationId xmlns:a16="http://schemas.microsoft.com/office/drawing/2014/main" id="{6D9731EB-1D08-F1B0-5EF7-7E3983DACE05}"/>
-                      </a:ext>
-                    </a:extLst>
-                  </p:cNvPr>
-                  <p:cNvSpPr txBox="1">
-                    <a:spLocks noRot="1" noChangeAspect="1" noMove="1" noResize="1" noEditPoints="1" noAdjustHandles="1" noChangeArrowheads="1" noChangeShapeType="1" noTextEdit="1"/>
-                  </p:cNvSpPr>
-                  <p:nvPr/>
-                </p:nvSpPr>
-                <p:spPr>
-                  <a:xfrm>
-                    <a:off x="1277986" y="1611708"/>
-                    <a:ext cx="1893651" cy="369332"/>
-                  </a:xfrm>
-                  <a:prstGeom prst="rect">
-                    <a:avLst/>
-                  </a:prstGeom>
-                  <a:blipFill>
-                    <a:blip r:embed="rId3"/>
-                    <a:stretch>
-                      <a:fillRect t="-18519" b="-31481"/>
-                    </a:stretch>
-                  </a:blipFill>
-                </p:spPr>
-                <p:txBody>
-                  <a:bodyPr/>
-                  <a:lstStyle/>
-                  <a:p>
-                    <a:r>
-                      <a:rPr lang="zh-CN" altLang="en-US">
-                        <a:noFill/>
-                      </a:rPr>
-                      <a:t> </a:t>
-                    </a:r>
-                  </a:p>
-                </p:txBody>
-              </p:sp>
-            </mc:Fallback>
-          </mc:AlternateContent>
-        </p:grpSp>
-        <p:cxnSp>
-          <p:nvCxnSpPr>
-            <p:cNvPr id="14" name="直接箭头连接符 13">
-              <a:extLst>
-                <a:ext uri="{FF2B5EF4-FFF2-40B4-BE49-F238E27FC236}">
-                  <a16:creationId xmlns:a16="http://schemas.microsoft.com/office/drawing/2014/main" id="{5F139A33-A66D-9793-8D9A-115F2F295C70}"/>
-                </a:ext>
-              </a:extLst>
-            </p:cNvPr>
-            <p:cNvCxnSpPr>
-              <a:cxnSpLocks/>
-              <a:stCxn id="107" idx="2"/>
-              <a:endCxn id="148" idx="0"/>
-            </p:cNvCxnSpPr>
-            <p:nvPr/>
-          </p:nvCxnSpPr>
-          <p:spPr>
-            <a:xfrm flipH="1">
-              <a:off x="5795195" y="1371697"/>
-              <a:ext cx="1" cy="203667"/>
-            </a:xfrm>
-            <a:prstGeom prst="straightConnector1">
-              <a:avLst/>
-            </a:prstGeom>
-            <a:ln w="19050">
+            </a:solidFill>
+          </a:ln>
+        </p:spPr>
+        <p:style>
+          <a:lnRef idx="2">
+            <a:schemeClr val="accent1">
+              <a:shade val="15000"/>
+            </a:schemeClr>
+          </a:lnRef>
+          <a:fillRef idx="1">
+            <a:schemeClr val="accent1"/>
+          </a:fillRef>
+          <a:effectRef idx="0">
+            <a:schemeClr val="accent1"/>
+          </a:effectRef>
+          <a:fontRef idx="minor">
+            <a:schemeClr val="lt1"/>
+          </a:fontRef>
+        </p:style>
+        <p:txBody>
+          <a:bodyPr rtlCol="0" anchor="ctr"/>
+          <a:lstStyle/>
+          <a:p>
+            <a:pPr algn="ctr"/>
+            <a:endParaRPr lang="zh-CN" altLang="en-US" dirty="0" err="1">
               <a:solidFill>
                 <a:schemeClr val="tx1"/>
               </a:solidFill>
-              <a:tailEnd type="triangle"/>
-            </a:ln>
-          </p:spPr>
-          <p:style>
-            <a:lnRef idx="1">
-              <a:schemeClr val="accent1"/>
-            </a:lnRef>
-            <a:fillRef idx="0">
-              <a:schemeClr val="accent1"/>
-            </a:fillRef>
-            <a:effectRef idx="0">
-              <a:schemeClr val="accent1"/>
-            </a:effectRef>
-            <a:fontRef idx="minor">
+            </a:endParaRPr>
+          </a:p>
+        </p:txBody>
+      </p:sp>
+      <p:sp>
+        <p:nvSpPr>
+          <p:cNvPr id="145" name="流程图: 决策 144">
+            <a:extLst>
+              <a:ext uri="{FF2B5EF4-FFF2-40B4-BE49-F238E27FC236}">
+                <a16:creationId xmlns:a16="http://schemas.microsoft.com/office/drawing/2014/main" id="{A6E2F20E-4DA2-AF16-219F-F27A8C5A46F5}"/>
+              </a:ext>
+            </a:extLst>
+          </p:cNvPr>
+          <p:cNvSpPr/>
+          <p:nvPr/>
+        </p:nvSpPr>
+        <p:spPr>
+          <a:xfrm>
+            <a:off x="3927520" y="4584355"/>
+            <a:ext cx="3070609" cy="1015390"/>
+          </a:xfrm>
+          <a:prstGeom prst="flowChartDecision">
+            <a:avLst/>
+          </a:prstGeom>
+          <a:solidFill>
+            <a:srgbClr val="DCEBFF"/>
+          </a:solidFill>
+          <a:ln w="19050">
+            <a:solidFill>
               <a:schemeClr val="tx1"/>
-            </a:fontRef>
-          </p:style>
-        </p:cxnSp>
-        <p:cxnSp>
-          <p:nvCxnSpPr>
-            <p:cNvPr id="30" name="直接箭头连接符 29">
-              <a:extLst>
-                <a:ext uri="{FF2B5EF4-FFF2-40B4-BE49-F238E27FC236}">
-                  <a16:creationId xmlns:a16="http://schemas.microsoft.com/office/drawing/2014/main" id="{668789DC-78DB-E6B5-339A-50559D807B14}"/>
-                </a:ext>
-              </a:extLst>
-            </p:cNvPr>
-            <p:cNvCxnSpPr>
-              <a:cxnSpLocks/>
-              <a:stCxn id="107" idx="3"/>
-              <a:endCxn id="9" idx="0"/>
-            </p:cNvCxnSpPr>
-            <p:nvPr/>
-          </p:nvCxnSpPr>
-          <p:spPr>
-            <a:xfrm>
-              <a:off x="7330500" y="827426"/>
-              <a:ext cx="1906149" cy="747939"/>
-            </a:xfrm>
-            <a:prstGeom prst="bentConnector2">
-              <a:avLst/>
-            </a:prstGeom>
-            <a:ln w="19050">
+            </a:solidFill>
+          </a:ln>
+        </p:spPr>
+        <p:style>
+          <a:lnRef idx="2">
+            <a:schemeClr val="accent1">
+              <a:shade val="15000"/>
+            </a:schemeClr>
+          </a:lnRef>
+          <a:fillRef idx="1">
+            <a:schemeClr val="accent1"/>
+          </a:fillRef>
+          <a:effectRef idx="0">
+            <a:schemeClr val="accent1"/>
+          </a:effectRef>
+          <a:fontRef idx="minor">
+            <a:schemeClr val="lt1"/>
+          </a:fontRef>
+        </p:style>
+        <p:txBody>
+          <a:bodyPr rtlCol="0" anchor="ctr"/>
+          <a:lstStyle/>
+          <a:p>
+            <a:pPr algn="ctr"/>
+            <a:endParaRPr lang="zh-CN" altLang="en-US" dirty="0" err="1">
               <a:solidFill>
                 <a:schemeClr val="tx1"/>
               </a:solidFill>
-              <a:tailEnd type="triangle"/>
-            </a:ln>
-          </p:spPr>
-          <p:style>
-            <a:lnRef idx="1">
-              <a:schemeClr val="accent1"/>
-            </a:lnRef>
-            <a:fillRef idx="0">
-              <a:schemeClr val="accent1"/>
-            </a:fillRef>
-            <a:effectRef idx="0">
-              <a:schemeClr val="accent1"/>
-            </a:effectRef>
-            <a:fontRef idx="minor">
+            </a:endParaRPr>
+          </a:p>
+        </p:txBody>
+      </p:sp>
+      <p:sp>
+        <p:nvSpPr>
+          <p:cNvPr id="2" name="矩形 1">
+            <a:extLst>
+              <a:ext uri="{FF2B5EF4-FFF2-40B4-BE49-F238E27FC236}">
+                <a16:creationId xmlns:a16="http://schemas.microsoft.com/office/drawing/2014/main" id="{11339D1B-3C73-529F-5BEB-6C2B1EF0DAA5}"/>
+              </a:ext>
+            </a:extLst>
+          </p:cNvPr>
+          <p:cNvSpPr/>
+          <p:nvPr/>
+        </p:nvSpPr>
+        <p:spPr>
+          <a:xfrm>
+            <a:off x="527394" y="450753"/>
+            <a:ext cx="3006899" cy="1088542"/>
+          </a:xfrm>
+          <a:prstGeom prst="rect">
+            <a:avLst/>
+          </a:prstGeom>
+          <a:solidFill>
+            <a:srgbClr val="EDEDED"/>
+          </a:solidFill>
+          <a:ln w="19050">
+            <a:solidFill>
               <a:schemeClr val="tx1"/>
-            </a:fontRef>
-          </p:style>
-        </p:cxnSp>
-        <p:cxnSp>
-          <p:nvCxnSpPr>
-            <p:cNvPr id="33" name="直接箭头连接符 32">
-              <a:extLst>
-                <a:ext uri="{FF2B5EF4-FFF2-40B4-BE49-F238E27FC236}">
-                  <a16:creationId xmlns:a16="http://schemas.microsoft.com/office/drawing/2014/main" id="{E54D4EF5-22F8-015A-9454-E5E6365F4050}"/>
-                </a:ext>
-              </a:extLst>
-            </p:cNvPr>
-            <p:cNvCxnSpPr>
-              <a:cxnSpLocks/>
-              <a:stCxn id="9" idx="3"/>
-              <a:endCxn id="107" idx="0"/>
-            </p:cNvCxnSpPr>
-            <p:nvPr/>
-          </p:nvCxnSpPr>
-          <p:spPr>
-            <a:xfrm flipH="1" flipV="1">
-              <a:off x="5795196" y="283154"/>
-              <a:ext cx="4672226" cy="1637481"/>
-            </a:xfrm>
-            <a:prstGeom prst="bentConnector4">
-              <a:avLst>
-                <a:gd name="adj1" fmla="val -30988"/>
-                <a:gd name="adj2" fmla="val 113960"/>
-              </a:avLst>
-            </a:prstGeom>
-            <a:ln w="19050">
+            </a:solidFill>
+          </a:ln>
+        </p:spPr>
+        <p:style>
+          <a:lnRef idx="2">
+            <a:schemeClr val="accent1">
+              <a:shade val="15000"/>
+            </a:schemeClr>
+          </a:lnRef>
+          <a:fillRef idx="1">
+            <a:schemeClr val="accent1"/>
+          </a:fillRef>
+          <a:effectRef idx="0">
+            <a:schemeClr val="accent1"/>
+          </a:effectRef>
+          <a:fontRef idx="minor">
+            <a:schemeClr val="lt1"/>
+          </a:fontRef>
+        </p:style>
+        <p:txBody>
+          <a:bodyPr rtlCol="0" anchor="ctr"/>
+          <a:lstStyle/>
+          <a:p>
+            <a:pPr algn="ctr"/>
+            <a:endParaRPr lang="zh-CN" altLang="en-US" dirty="0" err="1">
               <a:solidFill>
                 <a:schemeClr val="tx1"/>
               </a:solidFill>
-              <a:tailEnd type="triangle"/>
-            </a:ln>
-          </p:spPr>
-          <p:style>
-            <a:lnRef idx="1">
-              <a:schemeClr val="accent1"/>
-            </a:lnRef>
-            <a:fillRef idx="0">
-              <a:schemeClr val="accent1"/>
-            </a:fillRef>
-            <a:effectRef idx="0">
-              <a:schemeClr val="accent1"/>
-            </a:effectRef>
-            <a:fontRef idx="minor">
-              <a:schemeClr val="tx1"/>
-            </a:fontRef>
-          </p:style>
-        </p:cxnSp>
-        <p:grpSp>
-          <p:nvGrpSpPr>
-            <p:cNvPr id="58" name="组合 57">
-              <a:extLst>
-                <a:ext uri="{FF2B5EF4-FFF2-40B4-BE49-F238E27FC236}">
-                  <a16:creationId xmlns:a16="http://schemas.microsoft.com/office/drawing/2014/main" id="{48188DF4-E787-E568-BCE9-1916F6269672}"/>
-                </a:ext>
-              </a:extLst>
-            </p:cNvPr>
-            <p:cNvGrpSpPr/>
-            <p:nvPr/>
-          </p:nvGrpSpPr>
-          <p:grpSpPr>
-            <a:xfrm>
-              <a:off x="4372642" y="3736611"/>
-              <a:ext cx="2845108" cy="492439"/>
-              <a:chOff x="1118682" y="1407268"/>
-              <a:chExt cx="2188723" cy="778213"/>
-            </a:xfrm>
-          </p:grpSpPr>
+              <a:latin typeface="Times New Roman" panose="02020603050405020304" pitchFamily="18" charset="0"/>
+              <a:ea typeface="宋体" panose="02010600030101010101" pitchFamily="2" charset="-122"/>
+            </a:endParaRPr>
+          </a:p>
+        </p:txBody>
+      </p:sp>
+      <mc:AlternateContent xmlns:mc="http://schemas.openxmlformats.org/markup-compatibility/2006">
+        <mc:Choice xmlns:a14="http://schemas.microsoft.com/office/drawing/2010/main" Requires="a14">
           <p:sp>
             <p:nvSpPr>
-              <p:cNvPr id="59" name="矩形 58">
+              <p:cNvPr id="3" name="文本框 2">
                 <a:extLst>
                   <a:ext uri="{FF2B5EF4-FFF2-40B4-BE49-F238E27FC236}">
-                    <a16:creationId xmlns:a16="http://schemas.microsoft.com/office/drawing/2014/main" id="{76372893-1E17-1D23-4F3D-5C7750259369}"/>
-                  </a:ext>
-                </a:extLst>
-              </p:cNvPr>
-              <p:cNvSpPr/>
-              <p:nvPr/>
-            </p:nvSpPr>
-            <p:spPr>
-              <a:xfrm>
-                <a:off x="1121927" y="1407268"/>
-                <a:ext cx="2185478" cy="778213"/>
-              </a:xfrm>
-              <a:prstGeom prst="rect">
-                <a:avLst/>
-              </a:prstGeom>
-              <a:noFill/>
-              <a:ln w="19050">
-                <a:solidFill>
-                  <a:schemeClr val="tx1"/>
-                </a:solidFill>
-              </a:ln>
-            </p:spPr>
-            <p:style>
-              <a:lnRef idx="2">
-                <a:schemeClr val="accent1">
-                  <a:shade val="15000"/>
-                </a:schemeClr>
-              </a:lnRef>
-              <a:fillRef idx="1">
-                <a:schemeClr val="accent1"/>
-              </a:fillRef>
-              <a:effectRef idx="0">
-                <a:schemeClr val="accent1"/>
-              </a:effectRef>
-              <a:fontRef idx="minor">
-                <a:schemeClr val="lt1"/>
-              </a:fontRef>
-            </p:style>
-            <p:txBody>
-              <a:bodyPr rtlCol="0" anchor="ctr"/>
-              <a:lstStyle/>
-              <a:p>
-                <a:pPr algn="ctr"/>
-                <a:endParaRPr lang="zh-CN" altLang="en-US" dirty="0" err="1">
-                  <a:solidFill>
-                    <a:schemeClr val="tx1"/>
-                  </a:solidFill>
-                  <a:latin typeface="Times New Roman" panose="02020603050405020304" pitchFamily="18" charset="0"/>
-                  <a:ea typeface="宋体" panose="02010600030101010101" pitchFamily="2" charset="-122"/>
-                </a:endParaRPr>
-              </a:p>
-            </p:txBody>
-          </p:sp>
-          <p:sp>
-            <p:nvSpPr>
-              <p:cNvPr id="60" name="文本框 59">
-                <a:extLst>
-                  <a:ext uri="{FF2B5EF4-FFF2-40B4-BE49-F238E27FC236}">
-                    <a16:creationId xmlns:a16="http://schemas.microsoft.com/office/drawing/2014/main" id="{C7730E32-5870-741F-A9F2-1EA01F4FF09A}"/>
+                    <a16:creationId xmlns:a16="http://schemas.microsoft.com/office/drawing/2014/main" id="{3C28E2EE-28FF-44B4-7C4A-09596371771C}"/>
                   </a:ext>
                 </a:extLst>
               </p:cNvPr>
@@ -32503,8 +32028,8 @@
             </p:nvSpPr>
             <p:spPr>
               <a:xfrm>
-                <a:off x="1118682" y="1537419"/>
-                <a:ext cx="2188721" cy="517907"/>
+                <a:off x="322949" y="701747"/>
+                <a:ext cx="3320230" cy="646331"/>
               </a:xfrm>
               <a:prstGeom prst="rect">
                 <a:avLst/>
@@ -32523,8 +32048,107 @@
                     <a:latin typeface="Times New Roman" panose="02020603050405020304" pitchFamily="18" charset="0"/>
                     <a:ea typeface="宋体" panose="02010600030101010101" pitchFamily="2" charset="-122"/>
                   </a:rPr>
-                  <a:t>数据传输</a:t>
+                  <a:t>初始化竞争窗口</a:t>
                 </a:r>
+                <a14:m>
+                  <m:oMath xmlns:m="http://schemas.openxmlformats.org/officeDocument/2006/math">
+                    <m:r>
+                      <a:rPr lang="en-US" altLang="zh-CN" i="1" dirty="0" smtClean="0">
+                        <a:latin typeface="Cambria Math" panose="02040503050406030204" pitchFamily="18" charset="0"/>
+                        <a:ea typeface="宋体" panose="02010600030101010101" pitchFamily="2" charset="-122"/>
+                      </a:rPr>
+                      <m:t>𝐶𝑊</m:t>
+                    </m:r>
+                    <m:r>
+                      <a:rPr lang="en-US" altLang="zh-CN" b="0" i="1" dirty="0" smtClean="0">
+                        <a:latin typeface="Cambria Math" panose="02040503050406030204" pitchFamily="18" charset="0"/>
+                        <a:ea typeface="宋体" panose="02010600030101010101" pitchFamily="2" charset="-122"/>
+                      </a:rPr>
+                      <m:t>=</m:t>
+                    </m:r>
+                    <m:r>
+                      <a:rPr lang="en-US" altLang="zh-CN" b="0" i="1" dirty="0" smtClean="0">
+                        <a:latin typeface="Cambria Math" panose="02040503050406030204" pitchFamily="18" charset="0"/>
+                        <a:ea typeface="宋体" panose="02010600030101010101" pitchFamily="2" charset="-122"/>
+                      </a:rPr>
+                      <m:t>𝐶</m:t>
+                    </m:r>
+                    <m:sSub>
+                      <m:sSubPr>
+                        <m:ctrlPr>
+                          <a:rPr lang="en-US" altLang="zh-CN" b="0" i="1" dirty="0" smtClean="0">
+                            <a:latin typeface="Cambria Math" panose="02040503050406030204" pitchFamily="18" charset="0"/>
+                            <a:ea typeface="宋体" panose="02010600030101010101" pitchFamily="2" charset="-122"/>
+                          </a:rPr>
+                        </m:ctrlPr>
+                      </m:sSubPr>
+                      <m:e>
+                        <m:r>
+                          <a:rPr lang="en-US" altLang="zh-CN" b="0" i="1" dirty="0" smtClean="0">
+                            <a:latin typeface="Cambria Math" panose="02040503050406030204" pitchFamily="18" charset="0"/>
+                            <a:ea typeface="宋体" panose="02010600030101010101" pitchFamily="2" charset="-122"/>
+                          </a:rPr>
+                          <m:t>𝑊</m:t>
+                        </m:r>
+                      </m:e>
+                      <m:sub>
+                        <m:r>
+                          <a:rPr lang="en-US" altLang="zh-CN" b="0" i="1" dirty="0" smtClean="0">
+                            <a:latin typeface="Cambria Math" panose="02040503050406030204" pitchFamily="18" charset="0"/>
+                            <a:ea typeface="宋体" panose="02010600030101010101" pitchFamily="2" charset="-122"/>
+                          </a:rPr>
+                          <m:t>𝑚𝑖𝑛</m:t>
+                        </m:r>
+                      </m:sub>
+                    </m:sSub>
+                  </m:oMath>
+                </a14:m>
+                <a:endParaRPr lang="en-US" altLang="zh-CN" dirty="0">
+                  <a:latin typeface="Times New Roman" panose="02020603050405020304" pitchFamily="18" charset="0"/>
+                  <a:ea typeface="宋体" panose="02010600030101010101" pitchFamily="2" charset="-122"/>
+                </a:endParaRPr>
+              </a:p>
+              <a:p>
+                <a:pPr algn="ctr"/>
+                <a:r>
+                  <a:rPr lang="zh-CN" altLang="en-US" dirty="0">
+                    <a:latin typeface="Times New Roman" panose="02020603050405020304" pitchFamily="18" charset="0"/>
+                    <a:ea typeface="宋体" panose="02010600030101010101" pitchFamily="2" charset="-122"/>
+                  </a:rPr>
+                  <a:t>生成随机数 </a:t>
+                </a:r>
+                <a14:m>
+                  <m:oMath xmlns:m="http://schemas.openxmlformats.org/officeDocument/2006/math">
+                    <m:r>
+                      <a:rPr lang="en-US" altLang="zh-CN" i="1" dirty="0">
+                        <a:latin typeface="Cambria Math" panose="02040503050406030204" pitchFamily="18" charset="0"/>
+                        <a:ea typeface="宋体" panose="02010600030101010101" pitchFamily="2" charset="-122"/>
+                      </a:rPr>
+                      <m:t>𝑁</m:t>
+                    </m:r>
+                    <m:r>
+                      <a:rPr lang="en-US" altLang="zh-CN" i="1" dirty="0">
+                        <a:latin typeface="Cambria Math" panose="02040503050406030204" pitchFamily="18" charset="0"/>
+                        <a:ea typeface="宋体" panose="02010600030101010101" pitchFamily="2" charset="-122"/>
+                      </a:rPr>
+                      <m:t>∈ [0, </m:t>
+                    </m:r>
+                    <m:r>
+                      <a:rPr lang="en-US" altLang="zh-CN" i="1" dirty="0">
+                        <a:latin typeface="Cambria Math" panose="02040503050406030204" pitchFamily="18" charset="0"/>
+                        <a:ea typeface="宋体" panose="02010600030101010101" pitchFamily="2" charset="-122"/>
+                      </a:rPr>
+                      <m:t>𝐶𝑊</m:t>
+                    </m:r>
+                    <m:r>
+                      <a:rPr lang="en-US" altLang="zh-CN" i="1" dirty="0">
+                        <a:latin typeface="Cambria Math" panose="02040503050406030204" pitchFamily="18" charset="0"/>
+                        <a:ea typeface="宋体" panose="02010600030101010101" pitchFamily="2" charset="-122"/>
+                      </a:rPr>
+                      <m:t>]</m:t>
+                    </m:r>
+                  </m:oMath>
+                </a14:m>
                 <a:endParaRPr lang="en-US" altLang="zh-CN" dirty="0">
                   <a:latin typeface="Times New Roman" panose="02020603050405020304" pitchFamily="18" charset="0"/>
                   <a:ea typeface="宋体" panose="02010600030101010101" pitchFamily="2" charset="-122"/>
@@ -32532,624 +32156,166 @@
               </a:p>
             </p:txBody>
           </p:sp>
-        </p:grpSp>
-        <p:cxnSp>
-          <p:nvCxnSpPr>
-            <p:cNvPr id="62" name="直接箭头连接符 61">
-              <a:extLst>
-                <a:ext uri="{FF2B5EF4-FFF2-40B4-BE49-F238E27FC236}">
-                  <a16:creationId xmlns:a16="http://schemas.microsoft.com/office/drawing/2014/main" id="{C2EE79CC-FD9C-0628-8A98-17D90987ACFD}"/>
-                </a:ext>
-              </a:extLst>
-            </p:cNvPr>
-            <p:cNvCxnSpPr>
-              <a:cxnSpLocks/>
-              <a:stCxn id="138" idx="2"/>
-              <a:endCxn id="59" idx="0"/>
-            </p:cNvCxnSpPr>
-            <p:nvPr/>
-          </p:nvCxnSpPr>
-          <p:spPr>
-            <a:xfrm>
-              <a:off x="5795196" y="3494854"/>
-              <a:ext cx="2109" cy="241757"/>
-            </a:xfrm>
-            <a:prstGeom prst="straightConnector1">
-              <a:avLst/>
-            </a:prstGeom>
-            <a:ln w="19050">
-              <a:solidFill>
-                <a:schemeClr val="tx1"/>
-              </a:solidFill>
-              <a:tailEnd type="triangle"/>
-            </a:ln>
-          </p:spPr>
-          <p:style>
-            <a:lnRef idx="1">
-              <a:schemeClr val="accent1"/>
-            </a:lnRef>
-            <a:fillRef idx="0">
-              <a:schemeClr val="accent1"/>
-            </a:fillRef>
-            <a:effectRef idx="0">
-              <a:schemeClr val="accent1"/>
-            </a:effectRef>
-            <a:fontRef idx="minor">
-              <a:schemeClr val="tx1"/>
-            </a:fontRef>
-          </p:style>
-        </p:cxnSp>
-        <p:grpSp>
-          <p:nvGrpSpPr>
-            <p:cNvPr id="84" name="组合 83">
-              <a:extLst>
-                <a:ext uri="{FF2B5EF4-FFF2-40B4-BE49-F238E27FC236}">
-                  <a16:creationId xmlns:a16="http://schemas.microsoft.com/office/drawing/2014/main" id="{2B51E7D3-46F8-43EF-42AC-E82393F7B6C3}"/>
-                </a:ext>
-              </a:extLst>
-            </p:cNvPr>
-            <p:cNvGrpSpPr/>
-            <p:nvPr/>
-          </p:nvGrpSpPr>
-          <p:grpSpPr>
-            <a:xfrm>
-              <a:off x="7891027" y="5589950"/>
-              <a:ext cx="3805671" cy="1200329"/>
-              <a:chOff x="7466795" y="4151153"/>
-              <a:chExt cx="2804577" cy="1352731"/>
-            </a:xfrm>
-          </p:grpSpPr>
+        </mc:Choice>
+        <mc:Fallback>
           <p:sp>
             <p:nvSpPr>
-              <p:cNvPr id="82" name="矩形 81">
+              <p:cNvPr id="3" name="文本框 2">
                 <a:extLst>
                   <a:ext uri="{FF2B5EF4-FFF2-40B4-BE49-F238E27FC236}">
-                    <a16:creationId xmlns:a16="http://schemas.microsoft.com/office/drawing/2014/main" id="{CF2727FE-FA1F-D0D3-CC3D-946F6E0803A2}"/>
+                    <a16:creationId xmlns:a16="http://schemas.microsoft.com/office/drawing/2014/main" id="{3C28E2EE-28FF-44B4-7C4A-09596371771C}"/>
                   </a:ext>
                 </a:extLst>
               </p:cNvPr>
-              <p:cNvSpPr/>
+              <p:cNvSpPr txBox="1">
+                <a:spLocks noRot="1" noChangeAspect="1" noMove="1" noResize="1" noEditPoints="1" noAdjustHandles="1" noChangeArrowheads="1" noChangeShapeType="1" noTextEdit="1"/>
+              </p:cNvSpPr>
               <p:nvPr/>
             </p:nvSpPr>
             <p:spPr>
               <a:xfrm>
-                <a:off x="7555149" y="4174373"/>
-                <a:ext cx="2716223" cy="1306291"/>
+                <a:off x="322949" y="701747"/>
+                <a:ext cx="3320230" cy="646331"/>
               </a:xfrm>
               <a:prstGeom prst="rect">
                 <a:avLst/>
               </a:prstGeom>
-              <a:noFill/>
-              <a:ln w="19050">
-                <a:solidFill>
-                  <a:schemeClr val="tx1"/>
-                </a:solidFill>
-              </a:ln>
+              <a:blipFill>
+                <a:blip r:embed="rId2"/>
+                <a:stretch>
+                  <a:fillRect t="-6604" b="-13208"/>
+                </a:stretch>
+              </a:blipFill>
             </p:spPr>
-            <p:style>
-              <a:lnRef idx="2">
-                <a:schemeClr val="accent1">
-                  <a:shade val="15000"/>
-                </a:schemeClr>
-              </a:lnRef>
-              <a:fillRef idx="1">
-                <a:schemeClr val="accent1"/>
-              </a:fillRef>
-              <a:effectRef idx="0">
-                <a:schemeClr val="accent1"/>
-              </a:effectRef>
-              <a:fontRef idx="minor">
-                <a:schemeClr val="lt1"/>
-              </a:fontRef>
-            </p:style>
             <p:txBody>
-              <a:bodyPr rtlCol="0" anchor="ctr"/>
+              <a:bodyPr/>
               <a:lstStyle/>
               <a:p>
-                <a:pPr algn="ctr"/>
-                <a:endParaRPr lang="zh-CN" altLang="en-US" dirty="0" err="1">
-                  <a:solidFill>
-                    <a:schemeClr val="tx1"/>
-                  </a:solidFill>
-                  <a:latin typeface="Times New Roman" panose="02020603050405020304" pitchFamily="18" charset="0"/>
-                  <a:ea typeface="宋体" panose="02010600030101010101" pitchFamily="2" charset="-122"/>
-                </a:endParaRPr>
+                <a:r>
+                  <a:rPr lang="zh-CN" altLang="en-US">
+                    <a:noFill/>
+                  </a:rPr>
+                  <a:t> </a:t>
+                </a:r>
               </a:p>
             </p:txBody>
           </p:sp>
-          <mc:AlternateContent xmlns:mc="http://schemas.openxmlformats.org/markup-compatibility/2006" xmlns:a14="http://schemas.microsoft.com/office/drawing/2010/main">
-            <mc:Choice Requires="a14">
-              <p:sp>
-                <p:nvSpPr>
-                  <p:cNvPr id="83" name="文本框 82">
-                    <a:extLst>
-                      <a:ext uri="{FF2B5EF4-FFF2-40B4-BE49-F238E27FC236}">
-                        <a16:creationId xmlns:a16="http://schemas.microsoft.com/office/drawing/2014/main" id="{4EDBF2F0-6ADF-02D9-7154-244748AB621B}"/>
-                      </a:ext>
-                    </a:extLst>
-                  </p:cNvPr>
-                  <p:cNvSpPr txBox="1"/>
-                  <p:nvPr/>
-                </p:nvSpPr>
-                <p:spPr>
-                  <a:xfrm>
-                    <a:off x="7466795" y="4151153"/>
-                    <a:ext cx="2804577" cy="1352731"/>
-                  </a:xfrm>
-                  <a:prstGeom prst="rect">
-                    <a:avLst/>
-                  </a:prstGeom>
-                  <a:noFill/>
-                </p:spPr>
-                <p:txBody>
-                  <a:bodyPr wrap="square" rtlCol="0" anchor="ctr" anchorCtr="1">
-                    <a:spAutoFit/>
-                  </a:bodyPr>
-                  <a:lstStyle/>
-                  <a:p>
-                    <a:pPr algn="ctr"/>
-                    <a:r>
-                      <a:rPr lang="zh-CN" altLang="en-US" dirty="0">
-                        <a:latin typeface="Times New Roman" panose="02020603050405020304" pitchFamily="18" charset="0"/>
-                        <a:ea typeface="宋体" panose="02010600030101010101" pitchFamily="2" charset="-122"/>
-                      </a:rPr>
-                      <a:t>调整窗口：</a:t>
-                    </a:r>
-                    <a:endParaRPr lang="en-US" altLang="zh-CN" dirty="0">
-                      <a:latin typeface="Times New Roman" panose="02020603050405020304" pitchFamily="18" charset="0"/>
-                      <a:ea typeface="宋体" panose="02010600030101010101" pitchFamily="2" charset="-122"/>
-                    </a:endParaRPr>
-                  </a:p>
-                  <a:p>
-                    <a:pPr algn="ctr"/>
-                    <a14:m>
-                      <m:oMathPara xmlns:m="http://schemas.openxmlformats.org/officeDocument/2006/math">
-                        <m:oMathParaPr>
-                          <m:jc m:val="centerGroup"/>
-                        </m:oMathParaPr>
-                        <m:oMath xmlns:m="http://schemas.openxmlformats.org/officeDocument/2006/math">
-                          <m:r>
-                            <a:rPr lang="en-US" altLang="zh-CN" i="1" dirty="0" smtClean="0">
-                              <a:latin typeface="Cambria Math" panose="02040503050406030204" pitchFamily="18" charset="0"/>
-                              <a:ea typeface="宋体" panose="02010600030101010101" pitchFamily="2" charset="-122"/>
-                            </a:rPr>
-                            <m:t>𝐶</m:t>
-                          </m:r>
-                          <m:sSub>
-                            <m:sSubPr>
-                              <m:ctrlPr>
-                                <a:rPr lang="en-US" altLang="zh-CN" i="1" dirty="0" smtClean="0">
-                                  <a:latin typeface="Cambria Math" panose="02040503050406030204" pitchFamily="18" charset="0"/>
-                                  <a:ea typeface="宋体" panose="02010600030101010101" pitchFamily="2" charset="-122"/>
-                                </a:rPr>
-                              </m:ctrlPr>
-                            </m:sSubPr>
-                            <m:e>
-                              <m:r>
-                                <a:rPr lang="en-US" altLang="zh-CN" i="1" dirty="0" smtClean="0">
-                                  <a:latin typeface="Cambria Math" panose="02040503050406030204" pitchFamily="18" charset="0"/>
-                                  <a:ea typeface="宋体" panose="02010600030101010101" pitchFamily="2" charset="-122"/>
-                                </a:rPr>
-                                <m:t>𝑊</m:t>
-                              </m:r>
-                            </m:e>
-                            <m:sub>
-                              <m:r>
-                                <a:rPr lang="en-US" altLang="zh-CN" b="0" i="1" dirty="0" smtClean="0">
-                                  <a:latin typeface="Cambria Math" panose="02040503050406030204" pitchFamily="18" charset="0"/>
-                                  <a:ea typeface="宋体" panose="02010600030101010101" pitchFamily="2" charset="-122"/>
-                                </a:rPr>
-                                <m:t>𝑛𝑒𝑤</m:t>
-                              </m:r>
-                            </m:sub>
-                          </m:sSub>
-                          <m:r>
-                            <a:rPr lang="en-US" altLang="zh-CN" b="0" i="1" dirty="0" smtClean="0">
-                              <a:latin typeface="Cambria Math" panose="02040503050406030204" pitchFamily="18" charset="0"/>
-                              <a:ea typeface="宋体" panose="02010600030101010101" pitchFamily="2" charset="-122"/>
-                            </a:rPr>
-                            <m:t>=</m:t>
-                          </m:r>
-                          <m:r>
-                            <m:rPr>
-                              <m:sty m:val="p"/>
-                            </m:rPr>
-                            <a:rPr lang="en-US" altLang="zh-CN" b="0" i="0" dirty="0" smtClean="0">
-                              <a:latin typeface="Cambria Math" panose="02040503050406030204" pitchFamily="18" charset="0"/>
-                              <a:ea typeface="宋体" panose="02010600030101010101" pitchFamily="2" charset="-122"/>
-                            </a:rPr>
-                            <m:t>min</m:t>
-                          </m:r>
-                          <m:r>
-                            <a:rPr lang="en-US" altLang="zh-CN" b="0" i="1" dirty="0" smtClean="0">
-                              <a:latin typeface="Cambria Math" panose="02040503050406030204" pitchFamily="18" charset="0"/>
-                              <a:ea typeface="宋体" panose="02010600030101010101" pitchFamily="2" charset="-122"/>
-                            </a:rPr>
-                            <m:t>⁡(2</m:t>
-                          </m:r>
-                          <m:r>
-                            <a:rPr lang="en-US" altLang="zh-CN" b="0" i="1" dirty="0" smtClean="0">
-                              <a:latin typeface="Cambria Math" panose="02040503050406030204" pitchFamily="18" charset="0"/>
-                              <a:ea typeface="宋体" panose="02010600030101010101" pitchFamily="2" charset="-122"/>
-                            </a:rPr>
-                            <m:t>𝐶</m:t>
-                          </m:r>
-                          <m:sSub>
-                            <m:sSubPr>
-                              <m:ctrlPr>
-                                <a:rPr lang="en-US" altLang="zh-CN" b="0" i="1" dirty="0" smtClean="0">
-                                  <a:latin typeface="Cambria Math" panose="02040503050406030204" pitchFamily="18" charset="0"/>
-                                  <a:ea typeface="宋体" panose="02010600030101010101" pitchFamily="2" charset="-122"/>
-                                </a:rPr>
-                              </m:ctrlPr>
-                            </m:sSubPr>
-                            <m:e>
-                              <m:r>
-                                <a:rPr lang="en-US" altLang="zh-CN" b="0" i="1" dirty="0" smtClean="0">
-                                  <a:latin typeface="Cambria Math" panose="02040503050406030204" pitchFamily="18" charset="0"/>
-                                  <a:ea typeface="宋体" panose="02010600030101010101" pitchFamily="2" charset="-122"/>
-                                </a:rPr>
-                                <m:t>𝑊</m:t>
-                              </m:r>
-                            </m:e>
-                            <m:sub>
-                              <m:r>
-                                <a:rPr lang="en-US" altLang="zh-CN" i="1" dirty="0">
-                                  <a:latin typeface="Cambria Math" panose="02040503050406030204" pitchFamily="18" charset="0"/>
-                                  <a:ea typeface="宋体" panose="02010600030101010101" pitchFamily="2" charset="-122"/>
-                                </a:rPr>
-                                <m:t>𝑜𝑙𝑑</m:t>
-                              </m:r>
-                            </m:sub>
-                          </m:sSub>
-                          <m:r>
-                            <a:rPr lang="en-US" altLang="zh-CN" b="0" i="1" dirty="0" smtClean="0">
-                              <a:latin typeface="Cambria Math" panose="02040503050406030204" pitchFamily="18" charset="0"/>
-                              <a:ea typeface="宋体" panose="02010600030101010101" pitchFamily="2" charset="-122"/>
-                            </a:rPr>
-                            <m:t>+1,</m:t>
-                          </m:r>
-                          <m:r>
-                            <a:rPr lang="en-US" altLang="zh-CN" b="0" i="1" dirty="0" smtClean="0">
-                              <a:latin typeface="Cambria Math" panose="02040503050406030204" pitchFamily="18" charset="0"/>
-                              <a:ea typeface="宋体" panose="02010600030101010101" pitchFamily="2" charset="-122"/>
-                            </a:rPr>
-                            <m:t>𝐶</m:t>
-                          </m:r>
-                          <m:sSub>
-                            <m:sSubPr>
-                              <m:ctrlPr>
-                                <a:rPr lang="en-US" altLang="zh-CN" b="0" i="1" dirty="0" smtClean="0">
-                                  <a:latin typeface="Cambria Math" panose="02040503050406030204" pitchFamily="18" charset="0"/>
-                                  <a:ea typeface="宋体" panose="02010600030101010101" pitchFamily="2" charset="-122"/>
-                                </a:rPr>
-                              </m:ctrlPr>
-                            </m:sSubPr>
-                            <m:e>
-                              <m:r>
-                                <a:rPr lang="en-US" altLang="zh-CN" b="0" i="1" dirty="0" smtClean="0">
-                                  <a:latin typeface="Cambria Math" panose="02040503050406030204" pitchFamily="18" charset="0"/>
-                                  <a:ea typeface="宋体" panose="02010600030101010101" pitchFamily="2" charset="-122"/>
-                                </a:rPr>
-                                <m:t>𝑊</m:t>
-                              </m:r>
-                            </m:e>
-                            <m:sub>
-                              <m:r>
-                                <a:rPr lang="en-US" altLang="zh-CN" b="0" i="1" dirty="0" smtClean="0">
-                                  <a:latin typeface="Cambria Math" panose="02040503050406030204" pitchFamily="18" charset="0"/>
-                                  <a:ea typeface="宋体" panose="02010600030101010101" pitchFamily="2" charset="-122"/>
-                                </a:rPr>
-                                <m:t>𝑚𝑎𝑥</m:t>
-                              </m:r>
-                            </m:sub>
-                          </m:sSub>
-                          <m:r>
-                            <a:rPr lang="en-US" altLang="zh-CN" b="0" i="1" dirty="0" smtClean="0">
-                              <a:latin typeface="Cambria Math" panose="02040503050406030204" pitchFamily="18" charset="0"/>
-                              <a:ea typeface="宋体" panose="02010600030101010101" pitchFamily="2" charset="-122"/>
-                            </a:rPr>
-                            <m:t>)</m:t>
-                          </m:r>
-                        </m:oMath>
-                      </m:oMathPara>
-                    </a14:m>
-                    <a:endParaRPr lang="en-US" altLang="zh-CN" dirty="0">
-                      <a:latin typeface="Times New Roman" panose="02020603050405020304" pitchFamily="18" charset="0"/>
-                      <a:ea typeface="宋体" panose="02010600030101010101" pitchFamily="2" charset="-122"/>
-                    </a:endParaRPr>
-                  </a:p>
-                  <a:p>
-                    <a:pPr algn="ctr"/>
-                    <a:r>
-                      <a:rPr lang="zh-CN" altLang="en-US" dirty="0">
-                        <a:latin typeface="Times New Roman" panose="02020603050405020304" pitchFamily="18" charset="0"/>
-                        <a:ea typeface="宋体" panose="02010600030101010101" pitchFamily="2" charset="-122"/>
-                      </a:rPr>
-                      <a:t>生成随机数</a:t>
-                    </a:r>
-                    <a:r>
-                      <a:rPr lang="en-US" altLang="zh-CN" dirty="0">
-                        <a:latin typeface="Times New Roman" panose="02020603050405020304" pitchFamily="18" charset="0"/>
-                        <a:ea typeface="宋体" panose="02010600030101010101" pitchFamily="2" charset="-122"/>
-                      </a:rPr>
-                      <a:t>N:</a:t>
-                    </a:r>
-                  </a:p>
-                  <a:p>
-                    <a:pPr algn="ctr"/>
-                    <a14:m>
-                      <m:oMathPara xmlns:m="http://schemas.openxmlformats.org/officeDocument/2006/math">
-                        <m:oMathParaPr>
-                          <m:jc m:val="centerGroup"/>
-                        </m:oMathParaPr>
-                        <m:oMath xmlns:m="http://schemas.openxmlformats.org/officeDocument/2006/math">
-                          <m:r>
-                            <a:rPr lang="en-US" altLang="zh-CN" i="1" dirty="0" smtClean="0">
-                              <a:latin typeface="Cambria Math" panose="02040503050406030204" pitchFamily="18" charset="0"/>
-                              <a:ea typeface="宋体" panose="02010600030101010101" pitchFamily="2" charset="-122"/>
-                            </a:rPr>
-                            <m:t>𝑁</m:t>
-                          </m:r>
-                          <m:r>
-                            <a:rPr lang="en-US" altLang="zh-CN" i="1" dirty="0" smtClean="0">
-                              <a:latin typeface="Cambria Math" panose="02040503050406030204" pitchFamily="18" charset="0"/>
-                              <a:ea typeface="宋体" panose="02010600030101010101" pitchFamily="2" charset="-122"/>
-                            </a:rPr>
-                            <m:t>∈ [0, </m:t>
-                          </m:r>
-                          <m:r>
-                            <a:rPr lang="en-US" altLang="zh-CN" i="1" dirty="0">
-                              <a:latin typeface="Cambria Math" panose="02040503050406030204" pitchFamily="18" charset="0"/>
-                              <a:ea typeface="宋体" panose="02010600030101010101" pitchFamily="2" charset="-122"/>
-                            </a:rPr>
-                            <m:t>𝐶</m:t>
-                          </m:r>
-                          <m:sSub>
-                            <m:sSubPr>
-                              <m:ctrlPr>
-                                <a:rPr lang="en-US" altLang="zh-CN" i="1" dirty="0">
-                                  <a:latin typeface="Cambria Math" panose="02040503050406030204" pitchFamily="18" charset="0"/>
-                                  <a:ea typeface="宋体" panose="02010600030101010101" pitchFamily="2" charset="-122"/>
-                                </a:rPr>
-                              </m:ctrlPr>
-                            </m:sSubPr>
-                            <m:e>
-                              <m:r>
-                                <a:rPr lang="en-US" altLang="zh-CN" i="1" dirty="0">
-                                  <a:latin typeface="Cambria Math" panose="02040503050406030204" pitchFamily="18" charset="0"/>
-                                  <a:ea typeface="宋体" panose="02010600030101010101" pitchFamily="2" charset="-122"/>
-                                </a:rPr>
-                                <m:t>𝑊</m:t>
-                              </m:r>
-                            </m:e>
-                            <m:sub>
-                              <m:r>
-                                <a:rPr lang="en-US" altLang="zh-CN" i="1" dirty="0">
-                                  <a:latin typeface="Cambria Math" panose="02040503050406030204" pitchFamily="18" charset="0"/>
-                                  <a:ea typeface="宋体" panose="02010600030101010101" pitchFamily="2" charset="-122"/>
-                                </a:rPr>
-                                <m:t>𝑛𝑒𝑤</m:t>
-                              </m:r>
-                            </m:sub>
-                          </m:sSub>
-                          <m:r>
-                            <a:rPr lang="en-US" altLang="zh-CN" i="1" dirty="0" smtClean="0">
-                              <a:latin typeface="Cambria Math" panose="02040503050406030204" pitchFamily="18" charset="0"/>
-                              <a:ea typeface="宋体" panose="02010600030101010101" pitchFamily="2" charset="-122"/>
-                            </a:rPr>
-                            <m:t>]</m:t>
-                          </m:r>
-                        </m:oMath>
-                      </m:oMathPara>
-                    </a14:m>
-                    <a:endParaRPr lang="en-US" altLang="zh-CN" dirty="0">
-                      <a:latin typeface="Times New Roman" panose="02020603050405020304" pitchFamily="18" charset="0"/>
-                      <a:ea typeface="宋体" panose="02010600030101010101" pitchFamily="2" charset="-122"/>
-                    </a:endParaRPr>
-                  </a:p>
-                </p:txBody>
-              </p:sp>
-            </mc:Choice>
-            <mc:Fallback xmlns="">
-              <p:sp>
-                <p:nvSpPr>
-                  <p:cNvPr id="83" name="文本框 82">
-                    <a:extLst>
-                      <a:ext uri="{FF2B5EF4-FFF2-40B4-BE49-F238E27FC236}">
-                        <a16:creationId xmlns:a16="http://schemas.microsoft.com/office/drawing/2014/main" id="{4EDBF2F0-6ADF-02D9-7154-244748AB621B}"/>
-                      </a:ext>
-                    </a:extLst>
-                  </p:cNvPr>
-                  <p:cNvSpPr txBox="1">
-                    <a:spLocks noRot="1" noChangeAspect="1" noMove="1" noResize="1" noEditPoints="1" noAdjustHandles="1" noChangeArrowheads="1" noChangeShapeType="1" noTextEdit="1"/>
-                  </p:cNvSpPr>
-                  <p:nvPr/>
-                </p:nvSpPr>
-                <p:spPr>
-                  <a:xfrm>
-                    <a:off x="7466795" y="4151153"/>
-                    <a:ext cx="2804577" cy="1352731"/>
-                  </a:xfrm>
-                  <a:prstGeom prst="rect">
-                    <a:avLst/>
-                  </a:prstGeom>
-                  <a:blipFill>
-                    <a:blip r:embed="rId4"/>
-                    <a:stretch>
-                      <a:fillRect t="-3553" b="-5076"/>
-                    </a:stretch>
-                  </a:blipFill>
-                </p:spPr>
-                <p:txBody>
-                  <a:bodyPr/>
-                  <a:lstStyle/>
-                  <a:p>
-                    <a:r>
-                      <a:rPr lang="zh-CN" altLang="en-US">
-                        <a:noFill/>
-                      </a:rPr>
-                      <a:t> </a:t>
-                    </a:r>
-                  </a:p>
-                </p:txBody>
-              </p:sp>
-            </mc:Fallback>
-          </mc:AlternateContent>
-        </p:grpSp>
-        <p:sp>
-          <p:nvSpPr>
-            <p:cNvPr id="87" name="文本框 86">
-              <a:extLst>
-                <a:ext uri="{FF2B5EF4-FFF2-40B4-BE49-F238E27FC236}">
-                  <a16:creationId xmlns:a16="http://schemas.microsoft.com/office/drawing/2014/main" id="{E56AF2DA-0137-2FF5-E175-62BB2CCE2AEF}"/>
-                </a:ext>
-              </a:extLst>
-            </p:cNvPr>
-            <p:cNvSpPr txBox="1"/>
-            <p:nvPr/>
-          </p:nvSpPr>
-          <p:spPr>
-            <a:xfrm>
-              <a:off x="5795194" y="5370656"/>
-              <a:ext cx="463648" cy="327722"/>
-            </a:xfrm>
-            <a:prstGeom prst="rect">
-              <a:avLst/>
-            </a:prstGeom>
-            <a:noFill/>
-          </p:spPr>
-          <p:txBody>
-            <a:bodyPr wrap="square" rtlCol="0" anchor="ctr" anchorCtr="1">
-              <a:spAutoFit/>
-            </a:bodyPr>
-            <a:lstStyle/>
-            <a:p>
-              <a:pPr algn="ctr"/>
-              <a:r>
-                <a:rPr lang="zh-CN" altLang="en-US" dirty="0">
-                  <a:latin typeface="Times New Roman" panose="02020603050405020304" pitchFamily="18" charset="0"/>
-                  <a:ea typeface="宋体" panose="02010600030101010101" pitchFamily="2" charset="-122"/>
-                </a:rPr>
-                <a:t>是</a:t>
-              </a:r>
-            </a:p>
-          </p:txBody>
-        </p:sp>
-        <p:sp>
-          <p:nvSpPr>
-            <p:cNvPr id="88" name="文本框 87">
-              <a:extLst>
-                <a:ext uri="{FF2B5EF4-FFF2-40B4-BE49-F238E27FC236}">
-                  <a16:creationId xmlns:a16="http://schemas.microsoft.com/office/drawing/2014/main" id="{1D975BDE-7641-ECBD-833C-55C75FA704CB}"/>
-                </a:ext>
-              </a:extLst>
-            </p:cNvPr>
-            <p:cNvSpPr txBox="1"/>
-            <p:nvPr/>
-          </p:nvSpPr>
-          <p:spPr>
-            <a:xfrm>
-              <a:off x="7213534" y="4614813"/>
-              <a:ext cx="463648" cy="327722"/>
-            </a:xfrm>
-            <a:prstGeom prst="rect">
-              <a:avLst/>
-            </a:prstGeom>
-            <a:noFill/>
-          </p:spPr>
-          <p:txBody>
-            <a:bodyPr wrap="square" rtlCol="0" anchor="ctr" anchorCtr="1">
-              <a:spAutoFit/>
-            </a:bodyPr>
-            <a:lstStyle/>
-            <a:p>
-              <a:pPr algn="ctr"/>
-              <a:r>
-                <a:rPr lang="zh-CN" altLang="en-US" dirty="0">
-                  <a:latin typeface="Times New Roman" panose="02020603050405020304" pitchFamily="18" charset="0"/>
-                  <a:ea typeface="宋体" panose="02010600030101010101" pitchFamily="2" charset="-122"/>
-                </a:rPr>
-                <a:t>否</a:t>
-              </a:r>
-            </a:p>
-          </p:txBody>
-        </p:sp>
-        <p:cxnSp>
-          <p:nvCxnSpPr>
-            <p:cNvPr id="90" name="直接箭头连接符 89">
-              <a:extLst>
-                <a:ext uri="{FF2B5EF4-FFF2-40B4-BE49-F238E27FC236}">
-                  <a16:creationId xmlns:a16="http://schemas.microsoft.com/office/drawing/2014/main" id="{89C5B583-D8BC-B16B-99CB-DAF8D1D1CC46}"/>
-                </a:ext>
-              </a:extLst>
-            </p:cNvPr>
-            <p:cNvCxnSpPr>
-              <a:cxnSpLocks/>
-              <a:stCxn id="83" idx="3"/>
-              <a:endCxn id="107" idx="0"/>
-            </p:cNvCxnSpPr>
-            <p:nvPr/>
-          </p:nvCxnSpPr>
-          <p:spPr>
-            <a:xfrm flipH="1" flipV="1">
-              <a:off x="5795196" y="283154"/>
-              <a:ext cx="5901502" cy="5906961"/>
-            </a:xfrm>
-            <a:prstGeom prst="bentConnector4">
-              <a:avLst>
-                <a:gd name="adj1" fmla="val -3874"/>
-                <a:gd name="adj2" fmla="val 103870"/>
-              </a:avLst>
-            </a:prstGeom>
-            <a:ln w="28575">
+        </mc:Fallback>
+      </mc:AlternateContent>
+      <p:cxnSp>
+        <p:nvCxnSpPr>
+          <p:cNvPr id="17" name="直接箭头连接符 16">
+            <a:extLst>
+              <a:ext uri="{FF2B5EF4-FFF2-40B4-BE49-F238E27FC236}">
+                <a16:creationId xmlns:a16="http://schemas.microsoft.com/office/drawing/2014/main" id="{F4BC76EE-D638-3D3C-9B19-EE30CE24575E}"/>
+              </a:ext>
+            </a:extLst>
+          </p:cNvPr>
+          <p:cNvCxnSpPr>
+            <a:cxnSpLocks/>
+            <a:stCxn id="2" idx="3"/>
+            <a:endCxn id="107" idx="1"/>
+          </p:cNvCxnSpPr>
+          <p:nvPr/>
+        </p:nvCxnSpPr>
+        <p:spPr>
+          <a:xfrm>
+            <a:off x="3534293" y="995026"/>
+            <a:ext cx="393227" cy="41"/>
+          </a:xfrm>
+          <a:prstGeom prst="straightConnector1">
+            <a:avLst/>
+          </a:prstGeom>
+          <a:ln w="19050">
+            <a:solidFill>
+              <a:schemeClr val="tx1"/>
+            </a:solidFill>
+            <a:tailEnd type="triangle"/>
+          </a:ln>
+        </p:spPr>
+        <p:style>
+          <a:lnRef idx="1">
+            <a:schemeClr val="accent1"/>
+          </a:lnRef>
+          <a:fillRef idx="0">
+            <a:schemeClr val="accent1"/>
+          </a:fillRef>
+          <a:effectRef idx="0">
+            <a:schemeClr val="accent1"/>
+          </a:effectRef>
+          <a:fontRef idx="minor">
+            <a:schemeClr val="tx1"/>
+          </a:fontRef>
+        </p:style>
+      </p:cxnSp>
+      <p:sp>
+        <p:nvSpPr>
+          <p:cNvPr id="9" name="矩形 8">
+            <a:extLst>
+              <a:ext uri="{FF2B5EF4-FFF2-40B4-BE49-F238E27FC236}">
+                <a16:creationId xmlns:a16="http://schemas.microsoft.com/office/drawing/2014/main" id="{50DF8695-7FF0-E790-0616-C1876B489F98}"/>
+              </a:ext>
+            </a:extLst>
+          </p:cNvPr>
+          <p:cNvSpPr/>
+          <p:nvPr/>
+        </p:nvSpPr>
+        <p:spPr>
+          <a:xfrm>
+            <a:off x="8365172" y="646310"/>
+            <a:ext cx="2461546" cy="690539"/>
+          </a:xfrm>
+          <a:prstGeom prst="rect">
+            <a:avLst/>
+          </a:prstGeom>
+          <a:solidFill>
+            <a:srgbClr val="ECFDF5"/>
+          </a:solidFill>
+          <a:ln w="19050">
+            <a:solidFill>
+              <a:schemeClr val="tx1"/>
+            </a:solidFill>
+          </a:ln>
+        </p:spPr>
+        <p:style>
+          <a:lnRef idx="2">
+            <a:schemeClr val="accent1">
+              <a:shade val="15000"/>
+            </a:schemeClr>
+          </a:lnRef>
+          <a:fillRef idx="1">
+            <a:schemeClr val="accent1"/>
+          </a:fillRef>
+          <a:effectRef idx="0">
+            <a:schemeClr val="accent1"/>
+          </a:effectRef>
+          <a:fontRef idx="minor">
+            <a:schemeClr val="lt1"/>
+          </a:fontRef>
+        </p:style>
+        <p:txBody>
+          <a:bodyPr rtlCol="0" anchor="ctr"/>
+          <a:lstStyle/>
+          <a:p>
+            <a:pPr algn="ctr"/>
+            <a:endParaRPr lang="zh-CN" altLang="en-US" dirty="0" err="1">
               <a:solidFill>
                 <a:schemeClr val="tx1"/>
               </a:solidFill>
-              <a:tailEnd type="triangle"/>
-            </a:ln>
-          </p:spPr>
-          <p:style>
-            <a:lnRef idx="1">
-              <a:schemeClr val="accent1"/>
-            </a:lnRef>
-            <a:fillRef idx="0">
-              <a:schemeClr val="accent1"/>
-            </a:fillRef>
-            <a:effectRef idx="0">
-              <a:schemeClr val="accent1"/>
-            </a:effectRef>
-            <a:fontRef idx="minor">
-              <a:schemeClr val="tx1"/>
-            </a:fontRef>
-          </p:style>
-        </p:cxnSp>
-        <p:grpSp>
-          <p:nvGrpSpPr>
-            <p:cNvPr id="114" name="组合 113">
-              <a:extLst>
-                <a:ext uri="{FF2B5EF4-FFF2-40B4-BE49-F238E27FC236}">
-                  <a16:creationId xmlns:a16="http://schemas.microsoft.com/office/drawing/2014/main" id="{AF300D9C-0884-E56B-19BE-6843D70C8C15}"/>
-                </a:ext>
-              </a:extLst>
-            </p:cNvPr>
-            <p:cNvGrpSpPr/>
-            <p:nvPr/>
-          </p:nvGrpSpPr>
-          <p:grpSpPr>
-            <a:xfrm>
-              <a:off x="4259891" y="283154"/>
-              <a:ext cx="3070609" cy="1088543"/>
-              <a:chOff x="3482339" y="283154"/>
-              <a:chExt cx="2362199" cy="1226751"/>
-            </a:xfrm>
-          </p:grpSpPr>
+              <a:latin typeface="Times New Roman" panose="02020603050405020304" pitchFamily="18" charset="0"/>
+              <a:ea typeface="宋体" panose="02010600030101010101" pitchFamily="2" charset="-122"/>
+            </a:endParaRPr>
+          </a:p>
+        </p:txBody>
+      </p:sp>
+      <mc:AlternateContent xmlns:mc="http://schemas.openxmlformats.org/markup-compatibility/2006">
+        <mc:Choice xmlns:a14="http://schemas.microsoft.com/office/drawing/2010/main" Requires="a14">
           <p:sp>
             <p:nvSpPr>
-              <p:cNvPr id="12" name="文本框 11">
+              <p:cNvPr id="10" name="文本框 9">
                 <a:extLst>
                   <a:ext uri="{FF2B5EF4-FFF2-40B4-BE49-F238E27FC236}">
-                    <a16:creationId xmlns:a16="http://schemas.microsoft.com/office/drawing/2014/main" id="{291D4D9A-7140-DC53-AF53-11A38DE92E5C}"/>
+                    <a16:creationId xmlns:a16="http://schemas.microsoft.com/office/drawing/2014/main" id="{6D9731EB-1D08-F1B0-5EF7-7E3983DACE05}"/>
                   </a:ext>
                 </a:extLst>
               </p:cNvPr>
@@ -33158,8 +32324,411 @@
             </p:nvSpPr>
             <p:spPr>
               <a:xfrm>
-                <a:off x="3737010" y="532145"/>
-                <a:ext cx="1893651" cy="646331"/>
+                <a:off x="8404334" y="806912"/>
+                <a:ext cx="2391652" cy="369332"/>
+              </a:xfrm>
+              <a:prstGeom prst="rect">
+                <a:avLst/>
+              </a:prstGeom>
+              <a:noFill/>
+            </p:spPr>
+            <p:txBody>
+              <a:bodyPr wrap="square" rtlCol="0" anchor="ctr" anchorCtr="1">
+                <a:spAutoFit/>
+              </a:bodyPr>
+              <a:lstStyle/>
+              <a:p>
+                <a:pPr algn="ctr"/>
+                <a:r>
+                  <a:rPr lang="zh-CN" altLang="en-US" dirty="0">
+                    <a:ea typeface="宋体" panose="02010600030101010101" pitchFamily="2" charset="-122"/>
+                  </a:rPr>
+                  <a:t>随机数</a:t>
+                </a:r>
+                <a14:m>
+                  <m:oMath xmlns:m="http://schemas.openxmlformats.org/officeDocument/2006/math">
+                    <m:r>
+                      <a:rPr lang="en-US" altLang="zh-CN" i="1" dirty="0" smtClean="0">
+                        <a:latin typeface="Cambria Math" panose="02040503050406030204" pitchFamily="18" charset="0"/>
+                        <a:ea typeface="宋体" panose="02010600030101010101" pitchFamily="2" charset="-122"/>
+                      </a:rPr>
+                      <m:t>𝑁</m:t>
+                    </m:r>
+                  </m:oMath>
+                </a14:m>
+                <a:r>
+                  <a:rPr lang="zh-CN" altLang="en-US" dirty="0">
+                    <a:latin typeface="Times New Roman" panose="02020603050405020304" pitchFamily="18" charset="0"/>
+                    <a:ea typeface="宋体" panose="02010600030101010101" pitchFamily="2" charset="-122"/>
+                  </a:rPr>
+                  <a:t>保持</a:t>
+                </a:r>
+              </a:p>
+            </p:txBody>
+          </p:sp>
+        </mc:Choice>
+        <mc:Fallback>
+          <p:sp>
+            <p:nvSpPr>
+              <p:cNvPr id="10" name="文本框 9">
+                <a:extLst>
+                  <a:ext uri="{FF2B5EF4-FFF2-40B4-BE49-F238E27FC236}">
+                    <a16:creationId xmlns:a16="http://schemas.microsoft.com/office/drawing/2014/main" id="{6D9731EB-1D08-F1B0-5EF7-7E3983DACE05}"/>
+                  </a:ext>
+                </a:extLst>
+              </p:cNvPr>
+              <p:cNvSpPr txBox="1">
+                <a:spLocks noRot="1" noChangeAspect="1" noMove="1" noResize="1" noEditPoints="1" noAdjustHandles="1" noChangeArrowheads="1" noChangeShapeType="1" noTextEdit="1"/>
+              </p:cNvSpPr>
+              <p:nvPr/>
+            </p:nvSpPr>
+            <p:spPr>
+              <a:xfrm>
+                <a:off x="8404334" y="806912"/>
+                <a:ext cx="2391652" cy="369332"/>
+              </a:xfrm>
+              <a:prstGeom prst="rect">
+                <a:avLst/>
+              </a:prstGeom>
+              <a:blipFill>
+                <a:blip r:embed="rId3"/>
+                <a:stretch>
+                  <a:fillRect t="-11475" b="-22951"/>
+                </a:stretch>
+              </a:blipFill>
+            </p:spPr>
+            <p:txBody>
+              <a:bodyPr/>
+              <a:lstStyle/>
+              <a:p>
+                <a:r>
+                  <a:rPr lang="zh-CN" altLang="en-US">
+                    <a:noFill/>
+                  </a:rPr>
+                  <a:t> </a:t>
+                </a:r>
+              </a:p>
+            </p:txBody>
+          </p:sp>
+        </mc:Fallback>
+      </mc:AlternateContent>
+      <p:cxnSp>
+        <p:nvCxnSpPr>
+          <p:cNvPr id="14" name="直接箭头连接符 13">
+            <a:extLst>
+              <a:ext uri="{FF2B5EF4-FFF2-40B4-BE49-F238E27FC236}">
+                <a16:creationId xmlns:a16="http://schemas.microsoft.com/office/drawing/2014/main" id="{5F139A33-A66D-9793-8D9A-115F2F295C70}"/>
+              </a:ext>
+            </a:extLst>
+          </p:cNvPr>
+          <p:cNvCxnSpPr>
+            <a:cxnSpLocks/>
+            <a:stCxn id="107" idx="2"/>
+            <a:endCxn id="148" idx="0"/>
+          </p:cNvCxnSpPr>
+          <p:nvPr/>
+        </p:nvCxnSpPr>
+        <p:spPr>
+          <a:xfrm flipH="1">
+            <a:off x="5462824" y="1539338"/>
+            <a:ext cx="1" cy="272247"/>
+          </a:xfrm>
+          <a:prstGeom prst="straightConnector1">
+            <a:avLst/>
+          </a:prstGeom>
+          <a:ln w="19050">
+            <a:solidFill>
+              <a:schemeClr val="tx1"/>
+            </a:solidFill>
+            <a:tailEnd type="triangle"/>
+          </a:ln>
+        </p:spPr>
+        <p:style>
+          <a:lnRef idx="1">
+            <a:schemeClr val="accent1"/>
+          </a:lnRef>
+          <a:fillRef idx="0">
+            <a:schemeClr val="accent1"/>
+          </a:fillRef>
+          <a:effectRef idx="0">
+            <a:schemeClr val="accent1"/>
+          </a:effectRef>
+          <a:fontRef idx="minor">
+            <a:schemeClr val="tx1"/>
+          </a:fontRef>
+        </p:style>
+      </p:cxnSp>
+      <p:cxnSp>
+        <p:nvCxnSpPr>
+          <p:cNvPr id="30" name="直接箭头连接符 29">
+            <a:extLst>
+              <a:ext uri="{FF2B5EF4-FFF2-40B4-BE49-F238E27FC236}">
+                <a16:creationId xmlns:a16="http://schemas.microsoft.com/office/drawing/2014/main" id="{668789DC-78DB-E6B5-339A-50559D807B14}"/>
+              </a:ext>
+            </a:extLst>
+          </p:cNvPr>
+          <p:cNvCxnSpPr>
+            <a:cxnSpLocks/>
+            <a:stCxn id="107" idx="3"/>
+            <a:endCxn id="9" idx="1"/>
+          </p:cNvCxnSpPr>
+          <p:nvPr/>
+        </p:nvCxnSpPr>
+        <p:spPr>
+          <a:xfrm flipV="1">
+            <a:off x="6998129" y="991580"/>
+            <a:ext cx="1367043" cy="3487"/>
+          </a:xfrm>
+          <a:prstGeom prst="straightConnector1">
+            <a:avLst/>
+          </a:prstGeom>
+          <a:ln w="22225">
+            <a:solidFill>
+              <a:schemeClr val="tx1"/>
+            </a:solidFill>
+            <a:tailEnd type="triangle"/>
+          </a:ln>
+        </p:spPr>
+        <p:style>
+          <a:lnRef idx="1">
+            <a:schemeClr val="accent1"/>
+          </a:lnRef>
+          <a:fillRef idx="0">
+            <a:schemeClr val="accent1"/>
+          </a:fillRef>
+          <a:effectRef idx="0">
+            <a:schemeClr val="accent1"/>
+          </a:effectRef>
+          <a:fontRef idx="minor">
+            <a:schemeClr val="tx1"/>
+          </a:fontRef>
+        </p:style>
+      </p:cxnSp>
+      <p:sp>
+        <p:nvSpPr>
+          <p:cNvPr id="59" name="矩形 58">
+            <a:extLst>
+              <a:ext uri="{FF2B5EF4-FFF2-40B4-BE49-F238E27FC236}">
+                <a16:creationId xmlns:a16="http://schemas.microsoft.com/office/drawing/2014/main" id="{76372893-1E17-1D23-4F3D-5C7750259369}"/>
+              </a:ext>
+            </a:extLst>
+          </p:cNvPr>
+          <p:cNvSpPr/>
+          <p:nvPr/>
+        </p:nvSpPr>
+        <p:spPr>
+          <a:xfrm>
+            <a:off x="4044489" y="3904252"/>
+            <a:ext cx="2840890" cy="492439"/>
+          </a:xfrm>
+          <a:prstGeom prst="rect">
+            <a:avLst/>
+          </a:prstGeom>
+          <a:noFill/>
+          <a:ln w="19050">
+            <a:solidFill>
+              <a:schemeClr val="tx1"/>
+            </a:solidFill>
+          </a:ln>
+        </p:spPr>
+        <p:style>
+          <a:lnRef idx="2">
+            <a:schemeClr val="accent1">
+              <a:shade val="15000"/>
+            </a:schemeClr>
+          </a:lnRef>
+          <a:fillRef idx="1">
+            <a:schemeClr val="accent1"/>
+          </a:fillRef>
+          <a:effectRef idx="0">
+            <a:schemeClr val="accent1"/>
+          </a:effectRef>
+          <a:fontRef idx="minor">
+            <a:schemeClr val="lt1"/>
+          </a:fontRef>
+        </p:style>
+        <p:txBody>
+          <a:bodyPr rtlCol="0" anchor="ctr"/>
+          <a:lstStyle/>
+          <a:p>
+            <a:pPr algn="ctr"/>
+            <a:endParaRPr lang="zh-CN" altLang="en-US" dirty="0" err="1">
+              <a:solidFill>
+                <a:schemeClr val="tx1"/>
+              </a:solidFill>
+              <a:latin typeface="Times New Roman" panose="02020603050405020304" pitchFamily="18" charset="0"/>
+              <a:ea typeface="宋体" panose="02010600030101010101" pitchFamily="2" charset="-122"/>
+            </a:endParaRPr>
+          </a:p>
+        </p:txBody>
+      </p:sp>
+      <p:sp>
+        <p:nvSpPr>
+          <p:cNvPr id="60" name="文本框 59">
+            <a:extLst>
+              <a:ext uri="{FF2B5EF4-FFF2-40B4-BE49-F238E27FC236}">
+                <a16:creationId xmlns:a16="http://schemas.microsoft.com/office/drawing/2014/main" id="{C7730E32-5870-741F-A9F2-1EA01F4FF09A}"/>
+              </a:ext>
+            </a:extLst>
+          </p:cNvPr>
+          <p:cNvSpPr txBox="1"/>
+          <p:nvPr/>
+        </p:nvSpPr>
+        <p:spPr>
+          <a:xfrm>
+            <a:off x="4040271" y="3986609"/>
+            <a:ext cx="2845105" cy="327722"/>
+          </a:xfrm>
+          <a:prstGeom prst="rect">
+            <a:avLst/>
+          </a:prstGeom>
+          <a:noFill/>
+        </p:spPr>
+        <p:txBody>
+          <a:bodyPr wrap="square" rtlCol="0" anchor="ctr" anchorCtr="1">
+            <a:spAutoFit/>
+          </a:bodyPr>
+          <a:lstStyle/>
+          <a:p>
+            <a:pPr algn="ctr"/>
+            <a:r>
+              <a:rPr lang="zh-CN" altLang="en-US" dirty="0">
+                <a:latin typeface="Times New Roman" panose="02020603050405020304" pitchFamily="18" charset="0"/>
+                <a:ea typeface="宋体" panose="02010600030101010101" pitchFamily="2" charset="-122"/>
+              </a:rPr>
+              <a:t>数据传输</a:t>
+            </a:r>
+            <a:endParaRPr lang="en-US" altLang="zh-CN" dirty="0">
+              <a:latin typeface="Times New Roman" panose="02020603050405020304" pitchFamily="18" charset="0"/>
+              <a:ea typeface="宋体" panose="02010600030101010101" pitchFamily="2" charset="-122"/>
+            </a:endParaRPr>
+          </a:p>
+        </p:txBody>
+      </p:sp>
+      <p:cxnSp>
+        <p:nvCxnSpPr>
+          <p:cNvPr id="62" name="直接箭头连接符 61">
+            <a:extLst>
+              <a:ext uri="{FF2B5EF4-FFF2-40B4-BE49-F238E27FC236}">
+                <a16:creationId xmlns:a16="http://schemas.microsoft.com/office/drawing/2014/main" id="{C2EE79CC-FD9C-0628-8A98-17D90987ACFD}"/>
+              </a:ext>
+            </a:extLst>
+          </p:cNvPr>
+          <p:cNvCxnSpPr>
+            <a:cxnSpLocks/>
+            <a:stCxn id="138" idx="2"/>
+            <a:endCxn id="59" idx="0"/>
+          </p:cNvCxnSpPr>
+          <p:nvPr/>
+        </p:nvCxnSpPr>
+        <p:spPr>
+          <a:xfrm>
+            <a:off x="5462824" y="3543854"/>
+            <a:ext cx="2110" cy="360398"/>
+          </a:xfrm>
+          <a:prstGeom prst="straightConnector1">
+            <a:avLst/>
+          </a:prstGeom>
+          <a:ln w="19050">
+            <a:solidFill>
+              <a:schemeClr val="tx1"/>
+            </a:solidFill>
+            <a:tailEnd type="triangle"/>
+          </a:ln>
+        </p:spPr>
+        <p:style>
+          <a:lnRef idx="1">
+            <a:schemeClr val="accent1"/>
+          </a:lnRef>
+          <a:fillRef idx="0">
+            <a:schemeClr val="accent1"/>
+          </a:fillRef>
+          <a:effectRef idx="0">
+            <a:schemeClr val="accent1"/>
+          </a:effectRef>
+          <a:fontRef idx="minor">
+            <a:schemeClr val="tx1"/>
+          </a:fontRef>
+        </p:style>
+      </p:cxnSp>
+      <p:sp>
+        <p:nvSpPr>
+          <p:cNvPr id="82" name="矩形 81">
+            <a:extLst>
+              <a:ext uri="{FF2B5EF4-FFF2-40B4-BE49-F238E27FC236}">
+                <a16:creationId xmlns:a16="http://schemas.microsoft.com/office/drawing/2014/main" id="{CF2727FE-FA1F-D0D3-CC3D-946F6E0803A2}"/>
+              </a:ext>
+            </a:extLst>
+          </p:cNvPr>
+          <p:cNvSpPr/>
+          <p:nvPr/>
+        </p:nvSpPr>
+        <p:spPr>
+          <a:xfrm>
+            <a:off x="7757271" y="4511126"/>
+            <a:ext cx="3685779" cy="1314365"/>
+          </a:xfrm>
+          <a:prstGeom prst="rect">
+            <a:avLst/>
+          </a:prstGeom>
+          <a:solidFill>
+            <a:srgbClr val="ECFDF5"/>
+          </a:solidFill>
+          <a:ln w="19050">
+            <a:solidFill>
+              <a:schemeClr val="tx1"/>
+            </a:solidFill>
+          </a:ln>
+        </p:spPr>
+        <p:style>
+          <a:lnRef idx="2">
+            <a:schemeClr val="accent1">
+              <a:shade val="15000"/>
+            </a:schemeClr>
+          </a:lnRef>
+          <a:fillRef idx="1">
+            <a:schemeClr val="accent1"/>
+          </a:fillRef>
+          <a:effectRef idx="0">
+            <a:schemeClr val="accent1"/>
+          </a:effectRef>
+          <a:fontRef idx="minor">
+            <a:schemeClr val="lt1"/>
+          </a:fontRef>
+        </p:style>
+        <p:txBody>
+          <a:bodyPr rtlCol="0" anchor="ctr"/>
+          <a:lstStyle/>
+          <a:p>
+            <a:pPr algn="ctr"/>
+            <a:endParaRPr lang="zh-CN" altLang="en-US" dirty="0" err="1">
+              <a:solidFill>
+                <a:schemeClr val="tx1"/>
+              </a:solidFill>
+              <a:latin typeface="Times New Roman" panose="02020603050405020304" pitchFamily="18" charset="0"/>
+              <a:ea typeface="宋体" panose="02010600030101010101" pitchFamily="2" charset="-122"/>
+            </a:endParaRPr>
+          </a:p>
+        </p:txBody>
+      </p:sp>
+      <mc:AlternateContent xmlns:mc="http://schemas.openxmlformats.org/markup-compatibility/2006">
+        <mc:Choice xmlns:a14="http://schemas.microsoft.com/office/drawing/2010/main" Requires="a14">
+          <p:sp>
+            <p:nvSpPr>
+              <p:cNvPr id="83" name="文本框 82">
+                <a:extLst>
+                  <a:ext uri="{FF2B5EF4-FFF2-40B4-BE49-F238E27FC236}">
+                    <a16:creationId xmlns:a16="http://schemas.microsoft.com/office/drawing/2014/main" id="{4EDBF2F0-6ADF-02D9-7154-244748AB621B}"/>
+                  </a:ext>
+                </a:extLst>
+              </p:cNvPr>
+              <p:cNvSpPr txBox="1"/>
+              <p:nvPr/>
+            </p:nvSpPr>
+            <p:spPr>
+              <a:xfrm>
+                <a:off x="7761553" y="4568144"/>
+                <a:ext cx="3681497" cy="1200329"/>
               </a:xfrm>
               <a:prstGeom prst="rect">
                 <a:avLst/>
@@ -33178,15 +32747,171 @@
                     <a:latin typeface="Times New Roman" panose="02020603050405020304" pitchFamily="18" charset="0"/>
                     <a:ea typeface="宋体" panose="02010600030101010101" pitchFamily="2" charset="-122"/>
                   </a:rPr>
-                  <a:t>信道检测</a:t>
+                  <a:t>调整窗口：</a:t>
                 </a:r>
-                <a:r>
-                  <a:rPr lang="en-US" altLang="zh-CN" dirty="0">
-                    <a:latin typeface="Times New Roman" panose="02020603050405020304" pitchFamily="18" charset="0"/>
-                    <a:ea typeface="宋体" panose="02010600030101010101" pitchFamily="2" charset="-122"/>
-                  </a:rPr>
-                  <a:t>CCA</a:t>
-                </a:r>
+                <a:endParaRPr lang="en-US" altLang="zh-CN" dirty="0">
+                  <a:latin typeface="Times New Roman" panose="02020603050405020304" pitchFamily="18" charset="0"/>
+                  <a:ea typeface="宋体" panose="02010600030101010101" pitchFamily="2" charset="-122"/>
+                </a:endParaRPr>
+              </a:p>
+              <a:p>
+                <a:pPr algn="ctr"/>
+                <a14:m>
+                  <m:oMathPara xmlns:m="http://schemas.openxmlformats.org/officeDocument/2006/math">
+                    <m:oMathParaPr>
+                      <m:jc m:val="centerGroup"/>
+                    </m:oMathParaPr>
+                    <m:oMath xmlns:m="http://schemas.openxmlformats.org/officeDocument/2006/math">
+                      <m:r>
+                        <a:rPr lang="en-US" altLang="zh-CN" i="1" dirty="0" smtClean="0">
+                          <a:latin typeface="Cambria Math" panose="02040503050406030204" pitchFamily="18" charset="0"/>
+                          <a:ea typeface="宋体" panose="02010600030101010101" pitchFamily="2" charset="-122"/>
+                        </a:rPr>
+                        <m:t>𝐶</m:t>
+                      </m:r>
+                      <m:sSub>
+                        <m:sSubPr>
+                          <m:ctrlPr>
+                            <a:rPr lang="en-US" altLang="zh-CN" i="1" dirty="0" smtClean="0">
+                              <a:latin typeface="Cambria Math" panose="02040503050406030204" pitchFamily="18" charset="0"/>
+                              <a:ea typeface="宋体" panose="02010600030101010101" pitchFamily="2" charset="-122"/>
+                            </a:rPr>
+                          </m:ctrlPr>
+                        </m:sSubPr>
+                        <m:e>
+                          <m:r>
+                            <a:rPr lang="en-US" altLang="zh-CN" i="1" dirty="0" smtClean="0">
+                              <a:latin typeface="Cambria Math" panose="02040503050406030204" pitchFamily="18" charset="0"/>
+                              <a:ea typeface="宋体" panose="02010600030101010101" pitchFamily="2" charset="-122"/>
+                            </a:rPr>
+                            <m:t>𝑊</m:t>
+                          </m:r>
+                        </m:e>
+                        <m:sub>
+                          <m:r>
+                            <a:rPr lang="en-US" altLang="zh-CN" b="0" i="1" dirty="0" smtClean="0">
+                              <a:latin typeface="Cambria Math" panose="02040503050406030204" pitchFamily="18" charset="0"/>
+                              <a:ea typeface="宋体" panose="02010600030101010101" pitchFamily="2" charset="-122"/>
+                            </a:rPr>
+                            <m:t>𝑛𝑒𝑤</m:t>
+                          </m:r>
+                        </m:sub>
+                      </m:sSub>
+                      <m:r>
+                        <a:rPr lang="en-US" altLang="zh-CN" b="0" i="1" dirty="0" smtClean="0">
+                          <a:latin typeface="Cambria Math" panose="02040503050406030204" pitchFamily="18" charset="0"/>
+                          <a:ea typeface="宋体" panose="02010600030101010101" pitchFamily="2" charset="-122"/>
+                        </a:rPr>
+                        <m:t>=</m:t>
+                      </m:r>
+                      <m:r>
+                        <m:rPr>
+                          <m:sty m:val="p"/>
+                        </m:rPr>
+                        <a:rPr lang="en-US" altLang="zh-CN" b="0" i="0" dirty="0" smtClean="0">
+                          <a:latin typeface="Cambria Math" panose="02040503050406030204" pitchFamily="18" charset="0"/>
+                          <a:ea typeface="宋体" panose="02010600030101010101" pitchFamily="2" charset="-122"/>
+                        </a:rPr>
+                        <m:t>min</m:t>
+                      </m:r>
+                      <m:r>
+                        <a:rPr lang="en-US" altLang="zh-CN" b="0" i="1" dirty="0" smtClean="0">
+                          <a:latin typeface="Cambria Math" panose="02040503050406030204" pitchFamily="18" charset="0"/>
+                          <a:ea typeface="宋体" panose="02010600030101010101" pitchFamily="2" charset="-122"/>
+                        </a:rPr>
+                        <m:t>⁡(2</m:t>
+                      </m:r>
+                      <m:r>
+                        <a:rPr lang="en-US" altLang="zh-CN" b="0" i="1" dirty="0" smtClean="0">
+                          <a:latin typeface="Cambria Math" panose="02040503050406030204" pitchFamily="18" charset="0"/>
+                          <a:ea typeface="宋体" panose="02010600030101010101" pitchFamily="2" charset="-122"/>
+                        </a:rPr>
+                        <m:t>𝐶</m:t>
+                      </m:r>
+                      <m:sSub>
+                        <m:sSubPr>
+                          <m:ctrlPr>
+                            <a:rPr lang="en-US" altLang="zh-CN" b="0" i="1" dirty="0" smtClean="0">
+                              <a:latin typeface="Cambria Math" panose="02040503050406030204" pitchFamily="18" charset="0"/>
+                              <a:ea typeface="宋体" panose="02010600030101010101" pitchFamily="2" charset="-122"/>
+                            </a:rPr>
+                          </m:ctrlPr>
+                        </m:sSubPr>
+                        <m:e>
+                          <m:r>
+                            <a:rPr lang="en-US" altLang="zh-CN" b="0" i="1" dirty="0" smtClean="0">
+                              <a:latin typeface="Cambria Math" panose="02040503050406030204" pitchFamily="18" charset="0"/>
+                              <a:ea typeface="宋体" panose="02010600030101010101" pitchFamily="2" charset="-122"/>
+                            </a:rPr>
+                            <m:t>𝑊</m:t>
+                          </m:r>
+                        </m:e>
+                        <m:sub>
+                          <m:r>
+                            <a:rPr lang="en-US" altLang="zh-CN" i="1" dirty="0">
+                              <a:latin typeface="Cambria Math" panose="02040503050406030204" pitchFamily="18" charset="0"/>
+                              <a:ea typeface="宋体" panose="02010600030101010101" pitchFamily="2" charset="-122"/>
+                            </a:rPr>
+                            <m:t>𝑜𝑙𝑑</m:t>
+                          </m:r>
+                        </m:sub>
+                      </m:sSub>
+                      <m:r>
+                        <a:rPr lang="en-US" altLang="zh-CN" b="0" i="1" dirty="0" smtClean="0">
+                          <a:latin typeface="Cambria Math" panose="02040503050406030204" pitchFamily="18" charset="0"/>
+                          <a:ea typeface="宋体" panose="02010600030101010101" pitchFamily="2" charset="-122"/>
+                        </a:rPr>
+                        <m:t>+1,</m:t>
+                      </m:r>
+                      <m:r>
+                        <a:rPr lang="en-US" altLang="zh-CN" b="0" i="1" dirty="0" smtClean="0">
+                          <a:latin typeface="Cambria Math" panose="02040503050406030204" pitchFamily="18" charset="0"/>
+                          <a:ea typeface="宋体" panose="02010600030101010101" pitchFamily="2" charset="-122"/>
+                        </a:rPr>
+                        <m:t>𝐶</m:t>
+                      </m:r>
+                      <m:sSub>
+                        <m:sSubPr>
+                          <m:ctrlPr>
+                            <a:rPr lang="en-US" altLang="zh-CN" b="0" i="1" dirty="0" smtClean="0">
+                              <a:latin typeface="Cambria Math" panose="02040503050406030204" pitchFamily="18" charset="0"/>
+                              <a:ea typeface="宋体" panose="02010600030101010101" pitchFamily="2" charset="-122"/>
+                            </a:rPr>
+                          </m:ctrlPr>
+                        </m:sSubPr>
+                        <m:e>
+                          <m:r>
+                            <a:rPr lang="en-US" altLang="zh-CN" b="0" i="1" dirty="0" smtClean="0">
+                              <a:latin typeface="Cambria Math" panose="02040503050406030204" pitchFamily="18" charset="0"/>
+                              <a:ea typeface="宋体" panose="02010600030101010101" pitchFamily="2" charset="-122"/>
+                            </a:rPr>
+                            <m:t>𝑊</m:t>
+                          </m:r>
+                        </m:e>
+                        <m:sub>
+                          <m:r>
+                            <a:rPr lang="en-US" altLang="zh-CN" b="0" i="1" dirty="0" smtClean="0">
+                              <a:latin typeface="Cambria Math" panose="02040503050406030204" pitchFamily="18" charset="0"/>
+                              <a:ea typeface="宋体" panose="02010600030101010101" pitchFamily="2" charset="-122"/>
+                            </a:rPr>
+                            <m:t>𝑚𝑎𝑥</m:t>
+                          </m:r>
+                        </m:sub>
+                      </m:sSub>
+                      <m:r>
+                        <a:rPr lang="en-US" altLang="zh-CN" b="0" i="1" dirty="0" smtClean="0">
+                          <a:latin typeface="Cambria Math" panose="02040503050406030204" pitchFamily="18" charset="0"/>
+                          <a:ea typeface="宋体" panose="02010600030101010101" pitchFamily="2" charset="-122"/>
+                        </a:rPr>
+                        <m:t>)</m:t>
+                      </m:r>
+                    </m:oMath>
+                  </m:oMathPara>
+                </a14:m>
+                <a:endParaRPr lang="en-US" altLang="zh-CN" dirty="0">
+                  <a:latin typeface="Times New Roman" panose="02020603050405020304" pitchFamily="18" charset="0"/>
+                  <a:ea typeface="宋体" panose="02010600030101010101" pitchFamily="2" charset="-122"/>
+                </a:endParaRPr>
               </a:p>
               <a:p>
                 <a:pPr algn="ctr"/>
@@ -33195,276 +32920,327 @@
                     <a:latin typeface="Times New Roman" panose="02020603050405020304" pitchFamily="18" charset="0"/>
                     <a:ea typeface="宋体" panose="02010600030101010101" pitchFamily="2" charset="-122"/>
                   </a:rPr>
-                  <a:t>信道是否空闲？</a:t>
+                  <a:t>生成随机数</a:t>
+                </a:r>
+                <a:r>
+                  <a:rPr lang="en-US" altLang="zh-CN" dirty="0">
+                    <a:latin typeface="Times New Roman" panose="02020603050405020304" pitchFamily="18" charset="0"/>
+                    <a:ea typeface="宋体" panose="02010600030101010101" pitchFamily="2" charset="-122"/>
+                  </a:rPr>
+                  <a:t>N:</a:t>
+                </a:r>
+              </a:p>
+              <a:p>
+                <a:pPr algn="ctr"/>
+                <a14:m>
+                  <m:oMathPara xmlns:m="http://schemas.openxmlformats.org/officeDocument/2006/math">
+                    <m:oMathParaPr>
+                      <m:jc m:val="centerGroup"/>
+                    </m:oMathParaPr>
+                    <m:oMath xmlns:m="http://schemas.openxmlformats.org/officeDocument/2006/math">
+                      <m:r>
+                        <a:rPr lang="en-US" altLang="zh-CN" i="1" dirty="0" smtClean="0">
+                          <a:latin typeface="Cambria Math" panose="02040503050406030204" pitchFamily="18" charset="0"/>
+                          <a:ea typeface="宋体" panose="02010600030101010101" pitchFamily="2" charset="-122"/>
+                        </a:rPr>
+                        <m:t>𝑁</m:t>
+                      </m:r>
+                      <m:r>
+                        <a:rPr lang="en-US" altLang="zh-CN" i="1" dirty="0" smtClean="0">
+                          <a:latin typeface="Cambria Math" panose="02040503050406030204" pitchFamily="18" charset="0"/>
+                          <a:ea typeface="宋体" panose="02010600030101010101" pitchFamily="2" charset="-122"/>
+                        </a:rPr>
+                        <m:t>∈ [0, </m:t>
+                      </m:r>
+                      <m:r>
+                        <a:rPr lang="en-US" altLang="zh-CN" i="1" dirty="0">
+                          <a:latin typeface="Cambria Math" panose="02040503050406030204" pitchFamily="18" charset="0"/>
+                          <a:ea typeface="宋体" panose="02010600030101010101" pitchFamily="2" charset="-122"/>
+                        </a:rPr>
+                        <m:t>𝐶</m:t>
+                      </m:r>
+                      <m:sSub>
+                        <m:sSubPr>
+                          <m:ctrlPr>
+                            <a:rPr lang="en-US" altLang="zh-CN" i="1" dirty="0">
+                              <a:latin typeface="Cambria Math" panose="02040503050406030204" pitchFamily="18" charset="0"/>
+                              <a:ea typeface="宋体" panose="02010600030101010101" pitchFamily="2" charset="-122"/>
+                            </a:rPr>
+                          </m:ctrlPr>
+                        </m:sSubPr>
+                        <m:e>
+                          <m:r>
+                            <a:rPr lang="en-US" altLang="zh-CN" i="1" dirty="0">
+                              <a:latin typeface="Cambria Math" panose="02040503050406030204" pitchFamily="18" charset="0"/>
+                              <a:ea typeface="宋体" panose="02010600030101010101" pitchFamily="2" charset="-122"/>
+                            </a:rPr>
+                            <m:t>𝑊</m:t>
+                          </m:r>
+                        </m:e>
+                        <m:sub>
+                          <m:r>
+                            <a:rPr lang="en-US" altLang="zh-CN" i="1" dirty="0">
+                              <a:latin typeface="Cambria Math" panose="02040503050406030204" pitchFamily="18" charset="0"/>
+                              <a:ea typeface="宋体" panose="02010600030101010101" pitchFamily="2" charset="-122"/>
+                            </a:rPr>
+                            <m:t>𝑛𝑒𝑤</m:t>
+                          </m:r>
+                        </m:sub>
+                      </m:sSub>
+                      <m:r>
+                        <a:rPr lang="en-US" altLang="zh-CN" i="1" dirty="0" smtClean="0">
+                          <a:latin typeface="Cambria Math" panose="02040503050406030204" pitchFamily="18" charset="0"/>
+                          <a:ea typeface="宋体" panose="02010600030101010101" pitchFamily="2" charset="-122"/>
+                        </a:rPr>
+                        <m:t>]</m:t>
+                      </m:r>
+                    </m:oMath>
+                  </m:oMathPara>
+                </a14:m>
+                <a:endParaRPr lang="en-US" altLang="zh-CN" dirty="0">
+                  <a:latin typeface="Times New Roman" panose="02020603050405020304" pitchFamily="18" charset="0"/>
+                  <a:ea typeface="宋体" panose="02010600030101010101" pitchFamily="2" charset="-122"/>
+                </a:endParaRPr>
+              </a:p>
+            </p:txBody>
+          </p:sp>
+        </mc:Choice>
+        <mc:Fallback>
+          <p:sp>
+            <p:nvSpPr>
+              <p:cNvPr id="83" name="文本框 82">
+                <a:extLst>
+                  <a:ext uri="{FF2B5EF4-FFF2-40B4-BE49-F238E27FC236}">
+                    <a16:creationId xmlns:a16="http://schemas.microsoft.com/office/drawing/2014/main" id="{4EDBF2F0-6ADF-02D9-7154-244748AB621B}"/>
+                  </a:ext>
+                </a:extLst>
+              </p:cNvPr>
+              <p:cNvSpPr txBox="1">
+                <a:spLocks noRot="1" noChangeAspect="1" noMove="1" noResize="1" noEditPoints="1" noAdjustHandles="1" noChangeArrowheads="1" noChangeShapeType="1" noTextEdit="1"/>
+              </p:cNvSpPr>
+              <p:nvPr/>
+            </p:nvSpPr>
+            <p:spPr>
+              <a:xfrm>
+                <a:off x="7761553" y="4568144"/>
+                <a:ext cx="3681497" cy="1200329"/>
+              </a:xfrm>
+              <a:prstGeom prst="rect">
+                <a:avLst/>
+              </a:prstGeom>
+              <a:blipFill>
+                <a:blip r:embed="rId4"/>
+                <a:stretch>
+                  <a:fillRect t="-3046" b="-5076"/>
+                </a:stretch>
+              </a:blipFill>
+            </p:spPr>
+            <p:txBody>
+              <a:bodyPr/>
+              <a:lstStyle/>
+              <a:p>
+                <a:r>
+                  <a:rPr lang="zh-CN" altLang="en-US">
+                    <a:noFill/>
+                  </a:rPr>
+                  <a:t> </a:t>
                 </a:r>
               </a:p>
             </p:txBody>
           </p:sp>
+        </mc:Fallback>
+      </mc:AlternateContent>
+      <p:sp>
+        <p:nvSpPr>
+          <p:cNvPr id="87" name="文本框 86">
+            <a:extLst>
+              <a:ext uri="{FF2B5EF4-FFF2-40B4-BE49-F238E27FC236}">
+                <a16:creationId xmlns:a16="http://schemas.microsoft.com/office/drawing/2014/main" id="{E56AF2DA-0137-2FF5-E175-62BB2CCE2AEF}"/>
+              </a:ext>
+            </a:extLst>
+          </p:cNvPr>
+          <p:cNvSpPr txBox="1"/>
+          <p:nvPr/>
+        </p:nvSpPr>
+        <p:spPr>
+          <a:xfrm>
+            <a:off x="5462823" y="5538297"/>
+            <a:ext cx="463648" cy="327722"/>
+          </a:xfrm>
+          <a:prstGeom prst="rect">
+            <a:avLst/>
+          </a:prstGeom>
+          <a:noFill/>
+        </p:spPr>
+        <p:txBody>
+          <a:bodyPr wrap="square" rtlCol="0" anchor="ctr" anchorCtr="1">
+            <a:spAutoFit/>
+          </a:bodyPr>
+          <a:lstStyle/>
+          <a:p>
+            <a:pPr algn="ctr"/>
+            <a:r>
+              <a:rPr lang="zh-CN" altLang="en-US" dirty="0">
+                <a:latin typeface="Times New Roman" panose="02020603050405020304" pitchFamily="18" charset="0"/>
+                <a:ea typeface="宋体" panose="02010600030101010101" pitchFamily="2" charset="-122"/>
+              </a:rPr>
+              <a:t>是</a:t>
+            </a:r>
+          </a:p>
+        </p:txBody>
+      </p:sp>
+      <p:sp>
+        <p:nvSpPr>
+          <p:cNvPr id="88" name="文本框 87">
+            <a:extLst>
+              <a:ext uri="{FF2B5EF4-FFF2-40B4-BE49-F238E27FC236}">
+                <a16:creationId xmlns:a16="http://schemas.microsoft.com/office/drawing/2014/main" id="{1D975BDE-7641-ECBD-833C-55C75FA704CB}"/>
+              </a:ext>
+            </a:extLst>
+          </p:cNvPr>
+          <p:cNvSpPr txBox="1"/>
+          <p:nvPr/>
+        </p:nvSpPr>
+        <p:spPr>
+          <a:xfrm>
+            <a:off x="6881163" y="4782454"/>
+            <a:ext cx="463648" cy="327722"/>
+          </a:xfrm>
+          <a:prstGeom prst="rect">
+            <a:avLst/>
+          </a:prstGeom>
+          <a:noFill/>
+        </p:spPr>
+        <p:txBody>
+          <a:bodyPr wrap="square" rtlCol="0" anchor="ctr" anchorCtr="1">
+            <a:spAutoFit/>
+          </a:bodyPr>
+          <a:lstStyle/>
+          <a:p>
+            <a:pPr algn="ctr"/>
+            <a:r>
+              <a:rPr lang="zh-CN" altLang="en-US" dirty="0">
+                <a:latin typeface="Times New Roman" panose="02020603050405020304" pitchFamily="18" charset="0"/>
+                <a:ea typeface="宋体" panose="02010600030101010101" pitchFamily="2" charset="-122"/>
+              </a:rPr>
+              <a:t>否</a:t>
+            </a:r>
+          </a:p>
+        </p:txBody>
+      </p:sp>
+      <p:cxnSp>
+        <p:nvCxnSpPr>
+          <p:cNvPr id="90" name="直接箭头连接符 89">
+            <a:extLst>
+              <a:ext uri="{FF2B5EF4-FFF2-40B4-BE49-F238E27FC236}">
+                <a16:creationId xmlns:a16="http://schemas.microsoft.com/office/drawing/2014/main" id="{89C5B583-D8BC-B16B-99CB-DAF8D1D1CC46}"/>
+              </a:ext>
+            </a:extLst>
+          </p:cNvPr>
+          <p:cNvCxnSpPr>
+            <a:cxnSpLocks/>
+            <a:stCxn id="82" idx="3"/>
+            <a:endCxn id="107" idx="0"/>
+          </p:cNvCxnSpPr>
+          <p:nvPr/>
+        </p:nvCxnSpPr>
+        <p:spPr>
+          <a:xfrm flipH="1" flipV="1">
+            <a:off x="5462825" y="450795"/>
+            <a:ext cx="5980225" cy="4717514"/>
+          </a:xfrm>
+          <a:prstGeom prst="bentConnector4">
+            <a:avLst>
+              <a:gd name="adj1" fmla="val -7263"/>
+              <a:gd name="adj2" fmla="val 106300"/>
+            </a:avLst>
+          </a:prstGeom>
+          <a:ln w="28575">
+            <a:solidFill>
+              <a:schemeClr val="tx1"/>
+            </a:solidFill>
+            <a:tailEnd type="triangle"/>
+          </a:ln>
+        </p:spPr>
+        <p:style>
+          <a:lnRef idx="1">
+            <a:schemeClr val="accent1"/>
+          </a:lnRef>
+          <a:fillRef idx="0">
+            <a:schemeClr val="accent1"/>
+          </a:fillRef>
+          <a:effectRef idx="0">
+            <a:schemeClr val="accent1"/>
+          </a:effectRef>
+          <a:fontRef idx="minor">
+            <a:schemeClr val="tx1"/>
+          </a:fontRef>
+        </p:style>
+      </p:cxnSp>
+      <p:sp>
+        <p:nvSpPr>
+          <p:cNvPr id="12" name="文本框 11">
+            <a:extLst>
+              <a:ext uri="{FF2B5EF4-FFF2-40B4-BE49-F238E27FC236}">
+                <a16:creationId xmlns:a16="http://schemas.microsoft.com/office/drawing/2014/main" id="{291D4D9A-7140-DC53-AF53-11A38DE92E5C}"/>
+              </a:ext>
+            </a:extLst>
+          </p:cNvPr>
+          <p:cNvSpPr txBox="1"/>
+          <p:nvPr/>
+        </p:nvSpPr>
+        <p:spPr>
+          <a:xfrm>
+            <a:off x="4258565" y="671734"/>
+            <a:ext cx="2461546" cy="573514"/>
+          </a:xfrm>
+          <a:prstGeom prst="rect">
+            <a:avLst/>
+          </a:prstGeom>
+          <a:noFill/>
+        </p:spPr>
+        <p:txBody>
+          <a:bodyPr wrap="square" rtlCol="0" anchor="ctr" anchorCtr="1">
+            <a:spAutoFit/>
+          </a:bodyPr>
+          <a:lstStyle/>
+          <a:p>
+            <a:pPr algn="ctr"/>
+            <a:r>
+              <a:rPr lang="zh-CN" altLang="en-US" dirty="0">
+                <a:latin typeface="Times New Roman" panose="02020603050405020304" pitchFamily="18" charset="0"/>
+                <a:ea typeface="宋体" panose="02010600030101010101" pitchFamily="2" charset="-122"/>
+              </a:rPr>
+              <a:t>信道检测</a:t>
+            </a:r>
+            <a:r>
+              <a:rPr lang="en-US" altLang="zh-CN" dirty="0">
+                <a:latin typeface="Times New Roman" panose="02020603050405020304" pitchFamily="18" charset="0"/>
+                <a:ea typeface="宋体" panose="02010600030101010101" pitchFamily="2" charset="-122"/>
+              </a:rPr>
+              <a:t>CCA</a:t>
+            </a:r>
+          </a:p>
+          <a:p>
+            <a:pPr algn="ctr"/>
+            <a:r>
+              <a:rPr lang="zh-CN" altLang="en-US" dirty="0">
+                <a:latin typeface="Times New Roman" panose="02020603050405020304" pitchFamily="18" charset="0"/>
+                <a:ea typeface="宋体" panose="02010600030101010101" pitchFamily="2" charset="-122"/>
+              </a:rPr>
+              <a:t>信道是否空闲？</a:t>
+            </a:r>
+          </a:p>
+        </p:txBody>
+      </p:sp>
+      <mc:AlternateContent xmlns:mc="http://schemas.openxmlformats.org/markup-compatibility/2006">
+        <mc:Choice xmlns:a14="http://schemas.microsoft.com/office/drawing/2010/main" Requires="a14">
           <p:sp>
             <p:nvSpPr>
-              <p:cNvPr id="107" name="流程图: 决策 106">
+              <p:cNvPr id="137" name="文本框 136">
                 <a:extLst>
                   <a:ext uri="{FF2B5EF4-FFF2-40B4-BE49-F238E27FC236}">
-                    <a16:creationId xmlns:a16="http://schemas.microsoft.com/office/drawing/2014/main" id="{C1EE22BA-8A63-38B0-13F4-288805170A7C}"/>
-                  </a:ext>
-                </a:extLst>
-              </p:cNvPr>
-              <p:cNvSpPr/>
-              <p:nvPr/>
-            </p:nvSpPr>
-            <p:spPr>
-              <a:xfrm>
-                <a:off x="3482339" y="283154"/>
-                <a:ext cx="2362199" cy="1226751"/>
-              </a:xfrm>
-              <a:prstGeom prst="flowChartDecision">
-                <a:avLst/>
-              </a:prstGeom>
-              <a:noFill/>
-              <a:ln w="19050">
-                <a:solidFill>
-                  <a:schemeClr val="tx1"/>
-                </a:solidFill>
-              </a:ln>
-            </p:spPr>
-            <p:style>
-              <a:lnRef idx="2">
-                <a:schemeClr val="accent1">
-                  <a:shade val="15000"/>
-                </a:schemeClr>
-              </a:lnRef>
-              <a:fillRef idx="1">
-                <a:schemeClr val="accent1"/>
-              </a:fillRef>
-              <a:effectRef idx="0">
-                <a:schemeClr val="accent1"/>
-              </a:effectRef>
-              <a:fontRef idx="minor">
-                <a:schemeClr val="lt1"/>
-              </a:fontRef>
-            </p:style>
-            <p:txBody>
-              <a:bodyPr rtlCol="0" anchor="ctr"/>
-              <a:lstStyle/>
-              <a:p>
-                <a:pPr algn="ctr"/>
-                <a:endParaRPr lang="zh-CN" altLang="en-US" dirty="0" err="1">
-                  <a:solidFill>
-                    <a:schemeClr val="tx1"/>
-                  </a:solidFill>
-                </a:endParaRPr>
-              </a:p>
-            </p:txBody>
-          </p:sp>
-        </p:grpSp>
-        <p:grpSp>
-          <p:nvGrpSpPr>
-            <p:cNvPr id="136" name="组合 135">
-              <a:extLst>
-                <a:ext uri="{FF2B5EF4-FFF2-40B4-BE49-F238E27FC236}">
-                  <a16:creationId xmlns:a16="http://schemas.microsoft.com/office/drawing/2014/main" id="{0D619366-FB41-1A0F-92C4-3518BD9729BE}"/>
-                </a:ext>
-              </a:extLst>
-            </p:cNvPr>
-            <p:cNvGrpSpPr/>
-            <p:nvPr/>
-          </p:nvGrpSpPr>
-          <p:grpSpPr>
-            <a:xfrm>
-              <a:off x="4259891" y="2479464"/>
-              <a:ext cx="3070609" cy="1015390"/>
-              <a:chOff x="3482339" y="283155"/>
-              <a:chExt cx="2362199" cy="1144310"/>
-            </a:xfrm>
-          </p:grpSpPr>
-          <mc:AlternateContent xmlns:mc="http://schemas.openxmlformats.org/markup-compatibility/2006" xmlns:a14="http://schemas.microsoft.com/office/drawing/2010/main">
-            <mc:Choice Requires="a14">
-              <p:sp>
-                <p:nvSpPr>
-                  <p:cNvPr id="137" name="文本框 136">
-                    <a:extLst>
-                      <a:ext uri="{FF2B5EF4-FFF2-40B4-BE49-F238E27FC236}">
-                        <a16:creationId xmlns:a16="http://schemas.microsoft.com/office/drawing/2014/main" id="{22286C28-1E9E-92F1-B3CA-484CB3D3C9A1}"/>
-                      </a:ext>
-                    </a:extLst>
-                  </p:cNvPr>
-                  <p:cNvSpPr txBox="1"/>
-                  <p:nvPr/>
-                </p:nvSpPr>
-                <p:spPr>
-                  <a:xfrm>
-                    <a:off x="3716613" y="670644"/>
-                    <a:ext cx="1893651" cy="369332"/>
-                  </a:xfrm>
-                  <a:prstGeom prst="rect">
-                    <a:avLst/>
-                  </a:prstGeom>
-                  <a:noFill/>
-                </p:spPr>
-                <p:txBody>
-                  <a:bodyPr wrap="square" rtlCol="0" anchor="ctr" anchorCtr="1">
-                    <a:spAutoFit/>
-                  </a:bodyPr>
-                  <a:lstStyle/>
-                  <a:p>
-                    <a:pPr algn="ctr"/>
-                    <a14:m>
-                      <m:oMath xmlns:m="http://schemas.openxmlformats.org/officeDocument/2006/math">
-                        <m:r>
-                          <a:rPr lang="en-US" altLang="zh-CN" i="1" dirty="0" smtClean="0">
-                            <a:latin typeface="Cambria Math" panose="02040503050406030204" pitchFamily="18" charset="0"/>
-                            <a:ea typeface="宋体" panose="02010600030101010101" pitchFamily="2" charset="-122"/>
-                          </a:rPr>
-                          <m:t>𝑁</m:t>
-                        </m:r>
-                        <m:r>
-                          <a:rPr lang="en-US" altLang="zh-CN" i="1" dirty="0" smtClean="0">
-                            <a:latin typeface="Cambria Math" panose="02040503050406030204" pitchFamily="18" charset="0"/>
-                            <a:ea typeface="宋体" panose="02010600030101010101" pitchFamily="2" charset="-122"/>
-                          </a:rPr>
-                          <m:t>=0</m:t>
-                        </m:r>
-                      </m:oMath>
-                    </a14:m>
-                    <a:r>
-                      <a:rPr lang="zh-CN" altLang="en-US" dirty="0">
-                        <a:latin typeface="Times New Roman" panose="02020603050405020304" pitchFamily="18" charset="0"/>
-                        <a:ea typeface="宋体" panose="02010600030101010101" pitchFamily="2" charset="-122"/>
-                      </a:rPr>
-                      <a:t>？</a:t>
-                    </a:r>
-                  </a:p>
-                </p:txBody>
-              </p:sp>
-            </mc:Choice>
-            <mc:Fallback xmlns="">
-              <p:sp>
-                <p:nvSpPr>
-                  <p:cNvPr id="137" name="文本框 136">
-                    <a:extLst>
-                      <a:ext uri="{FF2B5EF4-FFF2-40B4-BE49-F238E27FC236}">
-                        <a16:creationId xmlns:a16="http://schemas.microsoft.com/office/drawing/2014/main" id="{22286C28-1E9E-92F1-B3CA-484CB3D3C9A1}"/>
-                      </a:ext>
-                    </a:extLst>
-                  </p:cNvPr>
-                  <p:cNvSpPr txBox="1">
-                    <a:spLocks noRot="1" noChangeAspect="1" noMove="1" noResize="1" noEditPoints="1" noAdjustHandles="1" noChangeArrowheads="1" noChangeShapeType="1" noTextEdit="1"/>
-                  </p:cNvSpPr>
-                  <p:nvPr/>
-                </p:nvSpPr>
-                <p:spPr>
-                  <a:xfrm>
-                    <a:off x="3716613" y="670644"/>
-                    <a:ext cx="1893651" cy="369332"/>
-                  </a:xfrm>
-                  <a:prstGeom prst="rect">
-                    <a:avLst/>
-                  </a:prstGeom>
-                  <a:blipFill>
-                    <a:blip r:embed="rId5"/>
-                    <a:stretch>
-                      <a:fillRect t="-18519" b="-31481"/>
-                    </a:stretch>
-                  </a:blipFill>
-                </p:spPr>
-                <p:txBody>
-                  <a:bodyPr/>
-                  <a:lstStyle/>
-                  <a:p>
-                    <a:r>
-                      <a:rPr lang="zh-CN" altLang="en-US">
-                        <a:noFill/>
-                      </a:rPr>
-                      <a:t> </a:t>
-                    </a:r>
-                  </a:p>
-                </p:txBody>
-              </p:sp>
-            </mc:Fallback>
-          </mc:AlternateContent>
-          <p:sp>
-            <p:nvSpPr>
-              <p:cNvPr id="138" name="流程图: 决策 137">
-                <a:extLst>
-                  <a:ext uri="{FF2B5EF4-FFF2-40B4-BE49-F238E27FC236}">
-                    <a16:creationId xmlns:a16="http://schemas.microsoft.com/office/drawing/2014/main" id="{5699C3B1-C901-1ABD-1DF2-84A9FD263E4C}"/>
-                  </a:ext>
-                </a:extLst>
-              </p:cNvPr>
-              <p:cNvSpPr/>
-              <p:nvPr/>
-            </p:nvSpPr>
-            <p:spPr>
-              <a:xfrm>
-                <a:off x="3482339" y="283155"/>
-                <a:ext cx="2362199" cy="1144310"/>
-              </a:xfrm>
-              <a:prstGeom prst="flowChartDecision">
-                <a:avLst/>
-              </a:prstGeom>
-              <a:noFill/>
-              <a:ln w="19050">
-                <a:solidFill>
-                  <a:schemeClr val="tx1"/>
-                </a:solidFill>
-              </a:ln>
-            </p:spPr>
-            <p:style>
-              <a:lnRef idx="2">
-                <a:schemeClr val="accent1">
-                  <a:shade val="15000"/>
-                </a:schemeClr>
-              </a:lnRef>
-              <a:fillRef idx="1">
-                <a:schemeClr val="accent1"/>
-              </a:fillRef>
-              <a:effectRef idx="0">
-                <a:schemeClr val="accent1"/>
-              </a:effectRef>
-              <a:fontRef idx="minor">
-                <a:schemeClr val="lt1"/>
-              </a:fontRef>
-            </p:style>
-            <p:txBody>
-              <a:bodyPr rtlCol="0" anchor="ctr"/>
-              <a:lstStyle/>
-              <a:p>
-                <a:pPr algn="ctr"/>
-                <a:endParaRPr lang="zh-CN" altLang="en-US" dirty="0" err="1">
-                  <a:solidFill>
-                    <a:schemeClr val="tx1"/>
-                  </a:solidFill>
-                </a:endParaRPr>
-              </a:p>
-            </p:txBody>
-          </p:sp>
-        </p:grpSp>
-        <p:grpSp>
-          <p:nvGrpSpPr>
-            <p:cNvPr id="143" name="组合 142">
-              <a:extLst>
-                <a:ext uri="{FF2B5EF4-FFF2-40B4-BE49-F238E27FC236}">
-                  <a16:creationId xmlns:a16="http://schemas.microsoft.com/office/drawing/2014/main" id="{A6D93B86-E45E-EE69-19B2-730C55D26571}"/>
-                </a:ext>
-              </a:extLst>
-            </p:cNvPr>
-            <p:cNvGrpSpPr/>
-            <p:nvPr/>
-          </p:nvGrpSpPr>
-          <p:grpSpPr>
-            <a:xfrm>
-              <a:off x="4259891" y="4416714"/>
-              <a:ext cx="3070609" cy="1015390"/>
-              <a:chOff x="3482339" y="283155"/>
-              <a:chExt cx="2362199" cy="1144310"/>
-            </a:xfrm>
-          </p:grpSpPr>
-          <p:sp>
-            <p:nvSpPr>
-              <p:cNvPr id="144" name="文本框 143">
-                <a:extLst>
-                  <a:ext uri="{FF2B5EF4-FFF2-40B4-BE49-F238E27FC236}">
-                    <a16:creationId xmlns:a16="http://schemas.microsoft.com/office/drawing/2014/main" id="{7518033F-BF6B-E207-24C5-8BDCC1A12D11}"/>
+                    <a16:creationId xmlns:a16="http://schemas.microsoft.com/office/drawing/2014/main" id="{22286C28-1E9E-92F1-B3CA-484CB3D3C9A1}"/>
                   </a:ext>
                 </a:extLst>
               </p:cNvPr>
@@ -33473,8 +33249,949 @@
             </p:nvSpPr>
             <p:spPr>
               <a:xfrm>
-                <a:off x="3716613" y="670644"/>
-                <a:ext cx="1893651" cy="369332"/>
+                <a:off x="4738553" y="2970134"/>
+                <a:ext cx="1545036" cy="369332"/>
+              </a:xfrm>
+              <a:prstGeom prst="rect">
+                <a:avLst/>
+              </a:prstGeom>
+              <a:noFill/>
+            </p:spPr>
+            <p:txBody>
+              <a:bodyPr wrap="square" rtlCol="0" anchor="ctr" anchorCtr="1">
+                <a:spAutoFit/>
+              </a:bodyPr>
+              <a:lstStyle/>
+              <a:p>
+                <a:pPr algn="ctr"/>
+                <a14:m>
+                  <m:oMath xmlns:m="http://schemas.openxmlformats.org/officeDocument/2006/math">
+                    <m:r>
+                      <a:rPr lang="en-US" altLang="zh-CN" i="1" dirty="0" smtClean="0">
+                        <a:latin typeface="Cambria Math" panose="02040503050406030204" pitchFamily="18" charset="0"/>
+                        <a:ea typeface="宋体" panose="02010600030101010101" pitchFamily="2" charset="-122"/>
+                      </a:rPr>
+                      <m:t>𝑁</m:t>
+                    </m:r>
+                    <m:r>
+                      <a:rPr lang="en-US" altLang="zh-CN" i="1" dirty="0" smtClean="0">
+                        <a:latin typeface="Cambria Math" panose="02040503050406030204" pitchFamily="18" charset="0"/>
+                        <a:ea typeface="宋体" panose="02010600030101010101" pitchFamily="2" charset="-122"/>
+                      </a:rPr>
+                      <m:t>=0</m:t>
+                    </m:r>
+                  </m:oMath>
+                </a14:m>
+                <a:r>
+                  <a:rPr lang="zh-CN" altLang="en-US" dirty="0">
+                    <a:latin typeface="Times New Roman" panose="02020603050405020304" pitchFamily="18" charset="0"/>
+                    <a:ea typeface="宋体" panose="02010600030101010101" pitchFamily="2" charset="-122"/>
+                  </a:rPr>
+                  <a:t>？</a:t>
+                </a:r>
+              </a:p>
+            </p:txBody>
+          </p:sp>
+        </mc:Choice>
+        <mc:Fallback>
+          <p:sp>
+            <p:nvSpPr>
+              <p:cNvPr id="137" name="文本框 136">
+                <a:extLst>
+                  <a:ext uri="{FF2B5EF4-FFF2-40B4-BE49-F238E27FC236}">
+                    <a16:creationId xmlns:a16="http://schemas.microsoft.com/office/drawing/2014/main" id="{22286C28-1E9E-92F1-B3CA-484CB3D3C9A1}"/>
+                  </a:ext>
+                </a:extLst>
+              </p:cNvPr>
+              <p:cNvSpPr txBox="1">
+                <a:spLocks noRot="1" noChangeAspect="1" noMove="1" noResize="1" noEditPoints="1" noAdjustHandles="1" noChangeArrowheads="1" noChangeShapeType="1" noTextEdit="1"/>
+              </p:cNvSpPr>
+              <p:nvPr/>
+            </p:nvSpPr>
+            <p:spPr>
+              <a:xfrm>
+                <a:off x="4738553" y="2970134"/>
+                <a:ext cx="1545036" cy="369332"/>
+              </a:xfrm>
+              <a:prstGeom prst="rect">
+                <a:avLst/>
+              </a:prstGeom>
+              <a:blipFill>
+                <a:blip r:embed="rId5"/>
+                <a:stretch>
+                  <a:fillRect t="-11475" b="-22951"/>
+                </a:stretch>
+              </a:blipFill>
+            </p:spPr>
+            <p:txBody>
+              <a:bodyPr/>
+              <a:lstStyle/>
+              <a:p>
+                <a:r>
+                  <a:rPr lang="zh-CN" altLang="en-US">
+                    <a:noFill/>
+                  </a:rPr>
+                  <a:t> </a:t>
+                </a:r>
+              </a:p>
+            </p:txBody>
+          </p:sp>
+        </mc:Fallback>
+      </mc:AlternateContent>
+      <p:sp>
+        <p:nvSpPr>
+          <p:cNvPr id="144" name="文本框 143">
+            <a:extLst>
+              <a:ext uri="{FF2B5EF4-FFF2-40B4-BE49-F238E27FC236}">
+                <a16:creationId xmlns:a16="http://schemas.microsoft.com/office/drawing/2014/main" id="{7518033F-BF6B-E207-24C5-8BDCC1A12D11}"/>
+              </a:ext>
+            </a:extLst>
+          </p:cNvPr>
+          <p:cNvSpPr txBox="1"/>
+          <p:nvPr/>
+        </p:nvSpPr>
+        <p:spPr>
+          <a:xfrm>
+            <a:off x="4232051" y="4928189"/>
+            <a:ext cx="2461546" cy="327722"/>
+          </a:xfrm>
+          <a:prstGeom prst="rect">
+            <a:avLst/>
+          </a:prstGeom>
+          <a:noFill/>
+        </p:spPr>
+        <p:txBody>
+          <a:bodyPr wrap="square" rtlCol="0" anchor="ctr" anchorCtr="1">
+            <a:spAutoFit/>
+          </a:bodyPr>
+          <a:lstStyle/>
+          <a:p>
+            <a:pPr algn="ctr"/>
+            <a:r>
+              <a:rPr lang="zh-CN" altLang="en-US" dirty="0">
+                <a:latin typeface="Times New Roman" panose="02020603050405020304" pitchFamily="18" charset="0"/>
+                <a:ea typeface="宋体" panose="02010600030101010101" pitchFamily="2" charset="-122"/>
+              </a:rPr>
+              <a:t>是否接收到</a:t>
+            </a:r>
+            <a:r>
+              <a:rPr lang="en-US" altLang="zh-CN" dirty="0">
+                <a:latin typeface="Times New Roman" panose="02020603050405020304" pitchFamily="18" charset="0"/>
+                <a:ea typeface="宋体" panose="02010600030101010101" pitchFamily="2" charset="-122"/>
+              </a:rPr>
+              <a:t>ACK</a:t>
+            </a:r>
+            <a:r>
+              <a:rPr lang="zh-CN" altLang="en-US" dirty="0">
+                <a:latin typeface="Times New Roman" panose="02020603050405020304" pitchFamily="18" charset="0"/>
+                <a:ea typeface="宋体" panose="02010600030101010101" pitchFamily="2" charset="-122"/>
+              </a:rPr>
+              <a:t>？</a:t>
+            </a:r>
+          </a:p>
+        </p:txBody>
+      </p:sp>
+      <p:grpSp>
+        <p:nvGrpSpPr>
+          <p:cNvPr id="69" name="组合 68">
+            <a:extLst>
+              <a:ext uri="{FF2B5EF4-FFF2-40B4-BE49-F238E27FC236}">
+                <a16:creationId xmlns:a16="http://schemas.microsoft.com/office/drawing/2014/main" id="{90E7A618-E0BD-CD94-624A-F5A90A8428B6}"/>
+              </a:ext>
+            </a:extLst>
+          </p:cNvPr>
+          <p:cNvGrpSpPr/>
+          <p:nvPr/>
+        </p:nvGrpSpPr>
+        <p:grpSpPr>
+          <a:xfrm>
+            <a:off x="4232051" y="1811585"/>
+            <a:ext cx="2461546" cy="690538"/>
+            <a:chOff x="4334019" y="1575364"/>
+            <a:chExt cx="2461546" cy="690538"/>
+          </a:xfrm>
+          <a:solidFill>
+            <a:srgbClr val="ECFDF5"/>
+          </a:solidFill>
+        </p:grpSpPr>
+        <p:sp>
+          <p:nvSpPr>
+            <p:cNvPr id="148" name="矩形 147">
+              <a:extLst>
+                <a:ext uri="{FF2B5EF4-FFF2-40B4-BE49-F238E27FC236}">
+                  <a16:creationId xmlns:a16="http://schemas.microsoft.com/office/drawing/2014/main" id="{5C2E3FE1-814F-09F1-8D46-A3C36BB6192F}"/>
+                </a:ext>
+              </a:extLst>
+            </p:cNvPr>
+            <p:cNvSpPr/>
+            <p:nvPr/>
+          </p:nvSpPr>
+          <p:spPr>
+            <a:xfrm>
+              <a:off x="4334019" y="1575364"/>
+              <a:ext cx="2461546" cy="690538"/>
+            </a:xfrm>
+            <a:prstGeom prst="rect">
+              <a:avLst/>
+            </a:prstGeom>
+            <a:grpFill/>
+            <a:ln w="19050">
+              <a:solidFill>
+                <a:schemeClr val="tx1"/>
+              </a:solidFill>
+            </a:ln>
+          </p:spPr>
+          <p:style>
+            <a:lnRef idx="2">
+              <a:schemeClr val="accent1">
+                <a:shade val="15000"/>
+              </a:schemeClr>
+            </a:lnRef>
+            <a:fillRef idx="1">
+              <a:schemeClr val="accent1"/>
+            </a:fillRef>
+            <a:effectRef idx="0">
+              <a:schemeClr val="accent1"/>
+            </a:effectRef>
+            <a:fontRef idx="minor">
+              <a:schemeClr val="lt1"/>
+            </a:fontRef>
+          </p:style>
+          <p:txBody>
+            <a:bodyPr rtlCol="0" anchor="ctr"/>
+            <a:lstStyle/>
+            <a:p>
+              <a:pPr algn="ctr"/>
+              <a:endParaRPr lang="zh-CN" altLang="en-US" dirty="0" err="1">
+                <a:solidFill>
+                  <a:schemeClr val="tx1"/>
+                </a:solidFill>
+                <a:latin typeface="Times New Roman" panose="02020603050405020304" pitchFamily="18" charset="0"/>
+                <a:ea typeface="宋体" panose="02010600030101010101" pitchFamily="2" charset="-122"/>
+              </a:endParaRPr>
+            </a:p>
+          </p:txBody>
+        </p:sp>
+        <mc:AlternateContent xmlns:mc="http://schemas.openxmlformats.org/markup-compatibility/2006">
+          <mc:Choice xmlns:a14="http://schemas.microsoft.com/office/drawing/2010/main" Requires="a14">
+            <p:sp>
+              <p:nvSpPr>
+                <p:cNvPr id="149" name="文本框 148">
+                  <a:extLst>
+                    <a:ext uri="{FF2B5EF4-FFF2-40B4-BE49-F238E27FC236}">
+                      <a16:creationId xmlns:a16="http://schemas.microsoft.com/office/drawing/2014/main" id="{4CD8618B-2C2F-387F-50CC-0E38C6D7A2BF}"/>
+                    </a:ext>
+                  </a:extLst>
+                </p:cNvPr>
+                <p:cNvSpPr txBox="1"/>
+                <p:nvPr/>
+              </p:nvSpPr>
+              <p:spPr>
+                <a:xfrm>
+                  <a:off x="4496837" y="1756771"/>
+                  <a:ext cx="2135911" cy="327722"/>
+                </a:xfrm>
+                <a:prstGeom prst="rect">
+                  <a:avLst/>
+                </a:prstGeom>
+                <a:grpFill/>
+              </p:spPr>
+              <p:txBody>
+                <a:bodyPr wrap="square" rtlCol="0" anchor="ctr" anchorCtr="1">
+                  <a:spAutoFit/>
+                </a:bodyPr>
+                <a:lstStyle/>
+                <a:p>
+                  <a:pPr algn="ctr"/>
+                  <a14:m>
+                    <m:oMath xmlns:m="http://schemas.openxmlformats.org/officeDocument/2006/math">
+                      <m:r>
+                        <a:rPr lang="zh-CN" altLang="en-US" i="1" dirty="0">
+                          <a:latin typeface="Cambria Math" panose="02040503050406030204" pitchFamily="18" charset="0"/>
+                          <a:ea typeface="宋体" panose="02010600030101010101" pitchFamily="2" charset="-122"/>
+                        </a:rPr>
+                        <m:t>随机数</m:t>
+                      </m:r>
+                      <m:r>
+                        <a:rPr lang="en-US" altLang="zh-CN" i="1" dirty="0" smtClean="0">
+                          <a:latin typeface="Cambria Math" panose="02040503050406030204" pitchFamily="18" charset="0"/>
+                          <a:ea typeface="宋体" panose="02010600030101010101" pitchFamily="2" charset="-122"/>
+                        </a:rPr>
+                        <m:t>𝑁</m:t>
+                      </m:r>
+                    </m:oMath>
+                  </a14:m>
+                  <a:r>
+                    <a:rPr lang="zh-CN" altLang="en-US" dirty="0">
+                      <a:latin typeface="Times New Roman" panose="02020603050405020304" pitchFamily="18" charset="0"/>
+                      <a:ea typeface="宋体" panose="02010600030101010101" pitchFamily="2" charset="-122"/>
+                    </a:rPr>
+                    <a:t>减一</a:t>
+                  </a:r>
+                </a:p>
+              </p:txBody>
+            </p:sp>
+          </mc:Choice>
+          <mc:Fallback>
+            <p:sp>
+              <p:nvSpPr>
+                <p:cNvPr id="149" name="文本框 148">
+                  <a:extLst>
+                    <a:ext uri="{FF2B5EF4-FFF2-40B4-BE49-F238E27FC236}">
+                      <a16:creationId xmlns:a16="http://schemas.microsoft.com/office/drawing/2014/main" id="{4CD8618B-2C2F-387F-50CC-0E38C6D7A2BF}"/>
+                    </a:ext>
+                  </a:extLst>
+                </p:cNvPr>
+                <p:cNvSpPr txBox="1">
+                  <a:spLocks noRot="1" noChangeAspect="1" noMove="1" noResize="1" noEditPoints="1" noAdjustHandles="1" noChangeArrowheads="1" noChangeShapeType="1" noTextEdit="1"/>
+                </p:cNvSpPr>
+                <p:nvPr/>
+              </p:nvSpPr>
+              <p:spPr>
+                <a:xfrm>
+                  <a:off x="4496837" y="1756771"/>
+                  <a:ext cx="2135911" cy="327722"/>
+                </a:xfrm>
+                <a:prstGeom prst="rect">
+                  <a:avLst/>
+                </a:prstGeom>
+                <a:blipFill>
+                  <a:blip r:embed="rId6"/>
+                  <a:stretch>
+                    <a:fillRect t="-20370" b="-31481"/>
+                  </a:stretch>
+                </a:blipFill>
+              </p:spPr>
+              <p:txBody>
+                <a:bodyPr/>
+                <a:lstStyle/>
+                <a:p>
+                  <a:r>
+                    <a:rPr lang="zh-CN" altLang="en-US">
+                      <a:noFill/>
+                    </a:rPr>
+                    <a:t> </a:t>
+                  </a:r>
+                </a:p>
+              </p:txBody>
+            </p:sp>
+          </mc:Fallback>
+        </mc:AlternateContent>
+      </p:grpSp>
+      <p:cxnSp>
+        <p:nvCxnSpPr>
+          <p:cNvPr id="152" name="直接箭头连接符 151">
+            <a:extLst>
+              <a:ext uri="{FF2B5EF4-FFF2-40B4-BE49-F238E27FC236}">
+                <a16:creationId xmlns:a16="http://schemas.microsoft.com/office/drawing/2014/main" id="{1DE760E3-80F4-0734-A0BC-9F6C1C1D68AA}"/>
+              </a:ext>
+            </a:extLst>
+          </p:cNvPr>
+          <p:cNvCxnSpPr>
+            <a:cxnSpLocks/>
+            <a:stCxn id="148" idx="2"/>
+            <a:endCxn id="138" idx="0"/>
+          </p:cNvCxnSpPr>
+          <p:nvPr/>
+        </p:nvCxnSpPr>
+        <p:spPr>
+          <a:xfrm>
+            <a:off x="5462824" y="2502123"/>
+            <a:ext cx="0" cy="254050"/>
+          </a:xfrm>
+          <a:prstGeom prst="straightConnector1">
+            <a:avLst/>
+          </a:prstGeom>
+          <a:ln w="19050">
+            <a:solidFill>
+              <a:schemeClr val="tx1"/>
+            </a:solidFill>
+            <a:tailEnd type="triangle"/>
+          </a:ln>
+        </p:spPr>
+        <p:style>
+          <a:lnRef idx="1">
+            <a:schemeClr val="accent1"/>
+          </a:lnRef>
+          <a:fillRef idx="0">
+            <a:schemeClr val="accent1"/>
+          </a:fillRef>
+          <a:effectRef idx="0">
+            <a:schemeClr val="accent1"/>
+          </a:effectRef>
+          <a:fontRef idx="minor">
+            <a:schemeClr val="tx1"/>
+          </a:fontRef>
+        </p:style>
+      </p:cxnSp>
+      <p:cxnSp>
+        <p:nvCxnSpPr>
+          <p:cNvPr id="172" name="直接箭头连接符 171">
+            <a:extLst>
+              <a:ext uri="{FF2B5EF4-FFF2-40B4-BE49-F238E27FC236}">
+                <a16:creationId xmlns:a16="http://schemas.microsoft.com/office/drawing/2014/main" id="{66257E67-5CF8-8B36-658C-7B2DCA817D0C}"/>
+              </a:ext>
+            </a:extLst>
+          </p:cNvPr>
+          <p:cNvCxnSpPr>
+            <a:cxnSpLocks/>
+            <a:stCxn id="145" idx="2"/>
+            <a:endCxn id="208" idx="0"/>
+          </p:cNvCxnSpPr>
+          <p:nvPr/>
+        </p:nvCxnSpPr>
+        <p:spPr>
+          <a:xfrm flipH="1">
+            <a:off x="5458579" y="5599745"/>
+            <a:ext cx="4246" cy="355102"/>
+          </a:xfrm>
+          <a:prstGeom prst="straightConnector1">
+            <a:avLst/>
+          </a:prstGeom>
+          <a:ln w="19050">
+            <a:solidFill>
+              <a:schemeClr val="tx1"/>
+            </a:solidFill>
+            <a:tailEnd type="triangle"/>
+          </a:ln>
+        </p:spPr>
+        <p:style>
+          <a:lnRef idx="1">
+            <a:schemeClr val="accent1"/>
+          </a:lnRef>
+          <a:fillRef idx="0">
+            <a:schemeClr val="accent1"/>
+          </a:fillRef>
+          <a:effectRef idx="0">
+            <a:schemeClr val="accent1"/>
+          </a:effectRef>
+          <a:fontRef idx="minor">
+            <a:schemeClr val="tx1"/>
+          </a:fontRef>
+        </p:style>
+      </p:cxnSp>
+      <p:cxnSp>
+        <p:nvCxnSpPr>
+          <p:cNvPr id="174" name="直接箭头连接符 173">
+            <a:extLst>
+              <a:ext uri="{FF2B5EF4-FFF2-40B4-BE49-F238E27FC236}">
+                <a16:creationId xmlns:a16="http://schemas.microsoft.com/office/drawing/2014/main" id="{EA425204-CD49-FAD0-8A03-5182B225D575}"/>
+              </a:ext>
+            </a:extLst>
+          </p:cNvPr>
+          <p:cNvCxnSpPr>
+            <a:cxnSpLocks/>
+            <a:stCxn id="145" idx="3"/>
+          </p:cNvCxnSpPr>
+          <p:nvPr/>
+        </p:nvCxnSpPr>
+        <p:spPr>
+          <a:xfrm flipV="1">
+            <a:off x="6998129" y="5090686"/>
+            <a:ext cx="759141" cy="1364"/>
+          </a:xfrm>
+          <a:prstGeom prst="bentConnector3">
+            <a:avLst>
+              <a:gd name="adj1" fmla="val 50000"/>
+            </a:avLst>
+          </a:prstGeom>
+          <a:ln w="19050">
+            <a:solidFill>
+              <a:schemeClr val="tx1"/>
+            </a:solidFill>
+            <a:tailEnd type="triangle"/>
+          </a:ln>
+        </p:spPr>
+        <p:style>
+          <a:lnRef idx="1">
+            <a:schemeClr val="accent1"/>
+          </a:lnRef>
+          <a:fillRef idx="0">
+            <a:schemeClr val="accent1"/>
+          </a:fillRef>
+          <a:effectRef idx="0">
+            <a:schemeClr val="accent1"/>
+          </a:effectRef>
+          <a:fontRef idx="minor">
+            <a:schemeClr val="tx1"/>
+          </a:fontRef>
+        </p:style>
+      </p:cxnSp>
+      <p:cxnSp>
+        <p:nvCxnSpPr>
+          <p:cNvPr id="184" name="直接箭头连接符 183">
+            <a:extLst>
+              <a:ext uri="{FF2B5EF4-FFF2-40B4-BE49-F238E27FC236}">
+                <a16:creationId xmlns:a16="http://schemas.microsoft.com/office/drawing/2014/main" id="{AFF29800-BAA3-2D68-74BB-2E34D3ADBCFE}"/>
+              </a:ext>
+            </a:extLst>
+          </p:cNvPr>
+          <p:cNvCxnSpPr>
+            <a:stCxn id="59" idx="2"/>
+            <a:endCxn id="145" idx="0"/>
+          </p:cNvCxnSpPr>
+          <p:nvPr/>
+        </p:nvCxnSpPr>
+        <p:spPr>
+          <a:xfrm flipH="1">
+            <a:off x="5462825" y="4396690"/>
+            <a:ext cx="2109" cy="187665"/>
+          </a:xfrm>
+          <a:prstGeom prst="straightConnector1">
+            <a:avLst/>
+          </a:prstGeom>
+          <a:ln w="19050">
+            <a:solidFill>
+              <a:schemeClr val="tx1"/>
+            </a:solidFill>
+            <a:tailEnd type="triangle"/>
+          </a:ln>
+        </p:spPr>
+        <p:style>
+          <a:lnRef idx="1">
+            <a:schemeClr val="accent1"/>
+          </a:lnRef>
+          <a:fillRef idx="0">
+            <a:schemeClr val="accent1"/>
+          </a:fillRef>
+          <a:effectRef idx="0">
+            <a:schemeClr val="accent1"/>
+          </a:effectRef>
+          <a:fontRef idx="minor">
+            <a:schemeClr val="tx1"/>
+          </a:fontRef>
+        </p:style>
+      </p:cxnSp>
+      <p:sp>
+        <p:nvSpPr>
+          <p:cNvPr id="187" name="文本框 186">
+            <a:extLst>
+              <a:ext uri="{FF2B5EF4-FFF2-40B4-BE49-F238E27FC236}">
+                <a16:creationId xmlns:a16="http://schemas.microsoft.com/office/drawing/2014/main" id="{F238CA07-EE20-B274-9CCC-2487E0A8882C}"/>
+              </a:ext>
+            </a:extLst>
+          </p:cNvPr>
+          <p:cNvSpPr txBox="1"/>
+          <p:nvPr/>
+        </p:nvSpPr>
+        <p:spPr>
+          <a:xfrm>
+            <a:off x="6881163" y="2827078"/>
+            <a:ext cx="463648" cy="327722"/>
+          </a:xfrm>
+          <a:prstGeom prst="rect">
+            <a:avLst/>
+          </a:prstGeom>
+          <a:noFill/>
+        </p:spPr>
+        <p:txBody>
+          <a:bodyPr wrap="square" rtlCol="0" anchor="ctr" anchorCtr="1">
+            <a:spAutoFit/>
+          </a:bodyPr>
+          <a:lstStyle/>
+          <a:p>
+            <a:pPr algn="ctr"/>
+            <a:r>
+              <a:rPr lang="zh-CN" altLang="en-US" dirty="0">
+                <a:latin typeface="Times New Roman" panose="02020603050405020304" pitchFamily="18" charset="0"/>
+                <a:ea typeface="宋体" panose="02010600030101010101" pitchFamily="2" charset="-122"/>
+              </a:rPr>
+              <a:t>否</a:t>
+            </a:r>
+          </a:p>
+        </p:txBody>
+      </p:sp>
+      <p:sp>
+        <p:nvSpPr>
+          <p:cNvPr id="188" name="文本框 187">
+            <a:extLst>
+              <a:ext uri="{FF2B5EF4-FFF2-40B4-BE49-F238E27FC236}">
+                <a16:creationId xmlns:a16="http://schemas.microsoft.com/office/drawing/2014/main" id="{D643235A-30B3-4A36-647B-B4932738206A}"/>
+              </a:ext>
+            </a:extLst>
+          </p:cNvPr>
+          <p:cNvSpPr txBox="1"/>
+          <p:nvPr/>
+        </p:nvSpPr>
+        <p:spPr>
+          <a:xfrm>
+            <a:off x="5462823" y="3581622"/>
+            <a:ext cx="463648" cy="327722"/>
+          </a:xfrm>
+          <a:prstGeom prst="rect">
+            <a:avLst/>
+          </a:prstGeom>
+          <a:noFill/>
+        </p:spPr>
+        <p:txBody>
+          <a:bodyPr wrap="square" rtlCol="0" anchor="ctr" anchorCtr="1">
+            <a:spAutoFit/>
+          </a:bodyPr>
+          <a:lstStyle/>
+          <a:p>
+            <a:pPr algn="ctr"/>
+            <a:r>
+              <a:rPr lang="zh-CN" altLang="en-US" dirty="0">
+                <a:latin typeface="Times New Roman" panose="02020603050405020304" pitchFamily="18" charset="0"/>
+                <a:ea typeface="宋体" panose="02010600030101010101" pitchFamily="2" charset="-122"/>
+              </a:rPr>
+              <a:t>是</a:t>
+            </a:r>
+          </a:p>
+        </p:txBody>
+      </p:sp>
+      <p:sp>
+        <p:nvSpPr>
+          <p:cNvPr id="189" name="文本框 188">
+            <a:extLst>
+              <a:ext uri="{FF2B5EF4-FFF2-40B4-BE49-F238E27FC236}">
+                <a16:creationId xmlns:a16="http://schemas.microsoft.com/office/drawing/2014/main" id="{F9D7C336-2B36-037D-A56E-BF8B32180ADB}"/>
+              </a:ext>
+            </a:extLst>
+          </p:cNvPr>
+          <p:cNvSpPr txBox="1"/>
+          <p:nvPr/>
+        </p:nvSpPr>
+        <p:spPr>
+          <a:xfrm>
+            <a:off x="5462823" y="1466589"/>
+            <a:ext cx="463648" cy="327722"/>
+          </a:xfrm>
+          <a:prstGeom prst="rect">
+            <a:avLst/>
+          </a:prstGeom>
+          <a:noFill/>
+        </p:spPr>
+        <p:txBody>
+          <a:bodyPr wrap="square" rtlCol="0" anchor="ctr" anchorCtr="1">
+            <a:spAutoFit/>
+          </a:bodyPr>
+          <a:lstStyle/>
+          <a:p>
+            <a:pPr algn="ctr"/>
+            <a:r>
+              <a:rPr lang="zh-CN" altLang="en-US" dirty="0">
+                <a:latin typeface="Times New Roman" panose="02020603050405020304" pitchFamily="18" charset="0"/>
+                <a:ea typeface="宋体" panose="02010600030101010101" pitchFamily="2" charset="-122"/>
+              </a:rPr>
+              <a:t>是</a:t>
+            </a:r>
+          </a:p>
+        </p:txBody>
+      </p:sp>
+      <p:sp>
+        <p:nvSpPr>
+          <p:cNvPr id="190" name="文本框 189">
+            <a:extLst>
+              <a:ext uri="{FF2B5EF4-FFF2-40B4-BE49-F238E27FC236}">
+                <a16:creationId xmlns:a16="http://schemas.microsoft.com/office/drawing/2014/main" id="{A55EC7A4-F28D-42CC-AB9D-E4B77238E520}"/>
+              </a:ext>
+            </a:extLst>
+          </p:cNvPr>
+          <p:cNvSpPr txBox="1"/>
+          <p:nvPr/>
+        </p:nvSpPr>
+        <p:spPr>
+          <a:xfrm>
+            <a:off x="6881163" y="663858"/>
+            <a:ext cx="463648" cy="327722"/>
+          </a:xfrm>
+          <a:prstGeom prst="rect">
+            <a:avLst/>
+          </a:prstGeom>
+          <a:noFill/>
+        </p:spPr>
+        <p:txBody>
+          <a:bodyPr wrap="square" rtlCol="0" anchor="ctr" anchorCtr="1">
+            <a:spAutoFit/>
+          </a:bodyPr>
+          <a:lstStyle/>
+          <a:p>
+            <a:pPr algn="ctr"/>
+            <a:r>
+              <a:rPr lang="zh-CN" altLang="en-US" dirty="0">
+                <a:latin typeface="Times New Roman" panose="02020603050405020304" pitchFamily="18" charset="0"/>
+                <a:ea typeface="宋体" panose="02010600030101010101" pitchFamily="2" charset="-122"/>
+              </a:rPr>
+              <a:t>否</a:t>
+            </a:r>
+          </a:p>
+        </p:txBody>
+      </p:sp>
+      <p:sp>
+        <p:nvSpPr>
+          <p:cNvPr id="208" name="流程图: 终止 207">
+            <a:extLst>
+              <a:ext uri="{FF2B5EF4-FFF2-40B4-BE49-F238E27FC236}">
+                <a16:creationId xmlns:a16="http://schemas.microsoft.com/office/drawing/2014/main" id="{54E9F143-8E2C-997A-7871-9A067D7C36FA}"/>
+              </a:ext>
+            </a:extLst>
+          </p:cNvPr>
+          <p:cNvSpPr/>
+          <p:nvPr/>
+        </p:nvSpPr>
+        <p:spPr>
+          <a:xfrm>
+            <a:off x="4268027" y="5954847"/>
+            <a:ext cx="2381104" cy="787681"/>
+          </a:xfrm>
+          <a:prstGeom prst="flowChartTerminator">
+            <a:avLst/>
+          </a:prstGeom>
+          <a:solidFill>
+            <a:schemeClr val="accent3">
+              <a:lumMod val="20000"/>
+              <a:lumOff val="80000"/>
+            </a:schemeClr>
+          </a:solidFill>
+          <a:ln w="19050">
+            <a:solidFill>
+              <a:schemeClr val="tx1"/>
+            </a:solidFill>
+          </a:ln>
+        </p:spPr>
+        <p:style>
+          <a:lnRef idx="2">
+            <a:schemeClr val="accent1">
+              <a:shade val="15000"/>
+            </a:schemeClr>
+          </a:lnRef>
+          <a:fillRef idx="1">
+            <a:schemeClr val="accent1"/>
+          </a:fillRef>
+          <a:effectRef idx="0">
+            <a:schemeClr val="accent1"/>
+          </a:effectRef>
+          <a:fontRef idx="minor">
+            <a:schemeClr val="lt1"/>
+          </a:fontRef>
+        </p:style>
+        <p:txBody>
+          <a:bodyPr rtlCol="0" anchor="ctr"/>
+          <a:lstStyle/>
+          <a:p>
+            <a:pPr algn="ctr"/>
+            <a:endParaRPr lang="zh-CN" altLang="en-US" dirty="0" err="1">
+              <a:solidFill>
+                <a:schemeClr val="tx1"/>
+              </a:solidFill>
+            </a:endParaRPr>
+          </a:p>
+        </p:txBody>
+      </p:sp>
+      <p:sp>
+        <p:nvSpPr>
+          <p:cNvPr id="78" name="文本框 77">
+            <a:extLst>
+              <a:ext uri="{FF2B5EF4-FFF2-40B4-BE49-F238E27FC236}">
+                <a16:creationId xmlns:a16="http://schemas.microsoft.com/office/drawing/2014/main" id="{2F3754FC-C540-2C55-E949-1F089EF2695F}"/>
+              </a:ext>
+            </a:extLst>
+          </p:cNvPr>
+          <p:cNvSpPr txBox="1"/>
+          <p:nvPr/>
+        </p:nvSpPr>
+        <p:spPr>
+          <a:xfrm>
+            <a:off x="4038134" y="6237572"/>
+            <a:ext cx="2840890" cy="222231"/>
+          </a:xfrm>
+          <a:prstGeom prst="rect">
+            <a:avLst/>
+          </a:prstGeom>
+          <a:noFill/>
+        </p:spPr>
+        <p:txBody>
+          <a:bodyPr wrap="square" rtlCol="0" anchor="ctr" anchorCtr="1">
+            <a:spAutoFit/>
+          </a:bodyPr>
+          <a:lstStyle/>
+          <a:p>
+            <a:pPr algn="ctr"/>
+            <a:r>
+              <a:rPr lang="zh-CN" altLang="en-US" dirty="0">
+                <a:latin typeface="Times New Roman" panose="02020603050405020304" pitchFamily="18" charset="0"/>
+                <a:ea typeface="宋体" panose="02010600030101010101" pitchFamily="2" charset="-122"/>
+              </a:rPr>
+              <a:t>传输结束</a:t>
+            </a:r>
+            <a:endParaRPr lang="en-US" altLang="zh-CN" dirty="0">
+              <a:latin typeface="Times New Roman" panose="02020603050405020304" pitchFamily="18" charset="0"/>
+              <a:ea typeface="宋体" panose="02010600030101010101" pitchFamily="2" charset="-122"/>
+            </a:endParaRPr>
+          </a:p>
+        </p:txBody>
+      </p:sp>
+      <p:cxnSp>
+        <p:nvCxnSpPr>
+          <p:cNvPr id="215" name="直接箭头连接符 214">
+            <a:extLst>
+              <a:ext uri="{FF2B5EF4-FFF2-40B4-BE49-F238E27FC236}">
+                <a16:creationId xmlns:a16="http://schemas.microsoft.com/office/drawing/2014/main" id="{6776D8BC-D26D-269A-D6BF-7D6030CA5693}"/>
+              </a:ext>
+            </a:extLst>
+          </p:cNvPr>
+          <p:cNvCxnSpPr>
+            <a:cxnSpLocks/>
+            <a:stCxn id="22" idx="0"/>
+            <a:endCxn id="2" idx="2"/>
+          </p:cNvCxnSpPr>
+          <p:nvPr/>
+        </p:nvCxnSpPr>
+        <p:spPr>
+          <a:xfrm flipV="1">
+            <a:off x="2030844" y="1539297"/>
+            <a:ext cx="0" cy="1418505"/>
+          </a:xfrm>
+          <a:prstGeom prst="straightConnector1">
+            <a:avLst/>
+          </a:prstGeom>
+          <a:ln w="19050">
+            <a:solidFill>
+              <a:schemeClr val="tx1"/>
+            </a:solidFill>
+            <a:tailEnd type="triangle"/>
+          </a:ln>
+        </p:spPr>
+        <p:style>
+          <a:lnRef idx="1">
+            <a:schemeClr val="accent1"/>
+          </a:lnRef>
+          <a:fillRef idx="0">
+            <a:schemeClr val="accent1"/>
+          </a:fillRef>
+          <a:effectRef idx="0">
+            <a:schemeClr val="accent1"/>
+          </a:effectRef>
+          <a:fontRef idx="minor">
+            <a:schemeClr val="tx1"/>
+          </a:fontRef>
+        </p:style>
+      </p:cxnSp>
+      <p:cxnSp>
+        <p:nvCxnSpPr>
+          <p:cNvPr id="20" name="直接连接符 19">
+            <a:extLst>
+              <a:ext uri="{FF2B5EF4-FFF2-40B4-BE49-F238E27FC236}">
+                <a16:creationId xmlns:a16="http://schemas.microsoft.com/office/drawing/2014/main" id="{30ECA69D-1ADB-D004-83CD-0AB0821D9326}"/>
+              </a:ext>
+            </a:extLst>
+          </p:cNvPr>
+          <p:cNvCxnSpPr>
+            <a:cxnSpLocks/>
+            <a:stCxn id="9" idx="3"/>
+          </p:cNvCxnSpPr>
+          <p:nvPr/>
+        </p:nvCxnSpPr>
+        <p:spPr>
+          <a:xfrm>
+            <a:off x="10826718" y="991580"/>
+            <a:ext cx="1042334" cy="0"/>
+          </a:xfrm>
+          <a:prstGeom prst="line">
+            <a:avLst/>
+          </a:prstGeom>
+          <a:ln w="22225">
+            <a:solidFill>
+              <a:schemeClr val="tx1"/>
+            </a:solidFill>
+            <a:tailEnd type="none"/>
+          </a:ln>
+        </p:spPr>
+        <p:style>
+          <a:lnRef idx="1">
+            <a:schemeClr val="accent1"/>
+          </a:lnRef>
+          <a:fillRef idx="0">
+            <a:schemeClr val="accent1"/>
+          </a:fillRef>
+          <a:effectRef idx="0">
+            <a:schemeClr val="accent1"/>
+          </a:effectRef>
+          <a:fontRef idx="minor">
+            <a:schemeClr val="tx1"/>
+          </a:fontRef>
+        </p:style>
+      </p:cxnSp>
+      <p:sp>
+        <p:nvSpPr>
+          <p:cNvPr id="22" name="流程图: 终止 21">
+            <a:extLst>
+              <a:ext uri="{FF2B5EF4-FFF2-40B4-BE49-F238E27FC236}">
+                <a16:creationId xmlns:a16="http://schemas.microsoft.com/office/drawing/2014/main" id="{7CF13436-AD08-D1C6-167F-AF3BF9710B61}"/>
+              </a:ext>
+            </a:extLst>
+          </p:cNvPr>
+          <p:cNvSpPr/>
+          <p:nvPr/>
+        </p:nvSpPr>
+        <p:spPr>
+          <a:xfrm>
+            <a:off x="527394" y="2957802"/>
+            <a:ext cx="3006899" cy="787681"/>
+          </a:xfrm>
+          <a:prstGeom prst="flowChartTerminator">
+            <a:avLst/>
+          </a:prstGeom>
+          <a:solidFill>
+            <a:schemeClr val="accent3">
+              <a:lumMod val="20000"/>
+              <a:lumOff val="80000"/>
+            </a:schemeClr>
+          </a:solidFill>
+          <a:ln w="19050">
+            <a:solidFill>
+              <a:schemeClr val="tx1"/>
+            </a:solidFill>
+          </a:ln>
+        </p:spPr>
+        <p:style>
+          <a:lnRef idx="2">
+            <a:schemeClr val="accent1">
+              <a:shade val="15000"/>
+            </a:schemeClr>
+          </a:lnRef>
+          <a:fillRef idx="1">
+            <a:schemeClr val="accent1"/>
+          </a:fillRef>
+          <a:effectRef idx="0">
+            <a:schemeClr val="accent1"/>
+          </a:effectRef>
+          <a:fontRef idx="minor">
+            <a:schemeClr val="lt1"/>
+          </a:fontRef>
+        </p:style>
+        <p:txBody>
+          <a:bodyPr rtlCol="0" anchor="ctr"/>
+          <a:lstStyle/>
+          <a:p>
+            <a:pPr algn="ctr"/>
+            <a:endParaRPr lang="zh-CN" altLang="en-US" dirty="0" err="1">
+              <a:solidFill>
+                <a:schemeClr val="tx1"/>
+              </a:solidFill>
+            </a:endParaRPr>
+          </a:p>
+        </p:txBody>
+      </p:sp>
+      <mc:AlternateContent xmlns:mc="http://schemas.openxmlformats.org/markup-compatibility/2006">
+        <mc:Choice xmlns:a14="http://schemas.microsoft.com/office/drawing/2010/main" Requires="a14">
+          <p:sp>
+            <p:nvSpPr>
+              <p:cNvPr id="23" name="文本框 22">
+                <a:extLst>
+                  <a:ext uri="{FF2B5EF4-FFF2-40B4-BE49-F238E27FC236}">
+                    <a16:creationId xmlns:a16="http://schemas.microsoft.com/office/drawing/2014/main" id="{427D1599-0021-4CCD-F79B-F21DF6CAD45F}"/>
+                  </a:ext>
+                </a:extLst>
+              </p:cNvPr>
+              <p:cNvSpPr txBox="1"/>
+              <p:nvPr/>
+            </p:nvSpPr>
+            <p:spPr>
+              <a:xfrm>
+                <a:off x="562619" y="3028477"/>
+                <a:ext cx="2840890" cy="646331"/>
               </a:xfrm>
               <a:prstGeom prst="rect">
                 <a:avLst/>
@@ -33493,1110 +34210,222 @@
                     <a:latin typeface="Times New Roman" panose="02020603050405020304" pitchFamily="18" charset="0"/>
                     <a:ea typeface="宋体" panose="02010600030101010101" pitchFamily="2" charset="-122"/>
                   </a:rPr>
-                  <a:t>是否接收到</a:t>
+                  <a:t>确定优先级和 </a:t>
                 </a:r>
                 <a:r>
                   <a:rPr lang="en-US" altLang="zh-CN" dirty="0">
                     <a:latin typeface="Times New Roman" panose="02020603050405020304" pitchFamily="18" charset="0"/>
                     <a:ea typeface="宋体" panose="02010600030101010101" pitchFamily="2" charset="-122"/>
                   </a:rPr>
-                  <a:t>ACK</a:t>
+                  <a:t>LBT </a:t>
                 </a:r>
                 <a:r>
                   <a:rPr lang="zh-CN" altLang="en-US" dirty="0">
                     <a:latin typeface="Times New Roman" panose="02020603050405020304" pitchFamily="18" charset="0"/>
                     <a:ea typeface="宋体" panose="02010600030101010101" pitchFamily="2" charset="-122"/>
                   </a:rPr>
-                  <a:t>？</a:t>
+                  <a:t>参数</a:t>
                 </a:r>
-              </a:p>
-            </p:txBody>
-          </p:sp>
-          <p:sp>
-            <p:nvSpPr>
-              <p:cNvPr id="145" name="流程图: 决策 144">
-                <a:extLst>
-                  <a:ext uri="{FF2B5EF4-FFF2-40B4-BE49-F238E27FC236}">
-                    <a16:creationId xmlns:a16="http://schemas.microsoft.com/office/drawing/2014/main" id="{A6E2F20E-4DA2-AF16-219F-F27A8C5A46F5}"/>
-                  </a:ext>
-                </a:extLst>
-              </p:cNvPr>
-              <p:cNvSpPr/>
-              <p:nvPr/>
-            </p:nvSpPr>
-            <p:spPr>
-              <a:xfrm>
-                <a:off x="3482339" y="283155"/>
-                <a:ext cx="2362199" cy="1144310"/>
-              </a:xfrm>
-              <a:prstGeom prst="flowChartDecision">
-                <a:avLst/>
-              </a:prstGeom>
-              <a:noFill/>
-              <a:ln w="19050">
-                <a:solidFill>
-                  <a:schemeClr val="tx1"/>
-                </a:solidFill>
-              </a:ln>
-            </p:spPr>
-            <p:style>
-              <a:lnRef idx="2">
-                <a:schemeClr val="accent1">
-                  <a:shade val="15000"/>
-                </a:schemeClr>
-              </a:lnRef>
-              <a:fillRef idx="1">
-                <a:schemeClr val="accent1"/>
-              </a:fillRef>
-              <a:effectRef idx="0">
-                <a:schemeClr val="accent1"/>
-              </a:effectRef>
-              <a:fontRef idx="minor">
-                <a:schemeClr val="lt1"/>
-              </a:fontRef>
-            </p:style>
-            <p:txBody>
-              <a:bodyPr rtlCol="0" anchor="ctr"/>
-              <a:lstStyle/>
-              <a:p>
-                <a:pPr algn="ctr"/>
-                <a:endParaRPr lang="zh-CN" altLang="en-US" dirty="0" err="1">
-                  <a:solidFill>
-                    <a:schemeClr val="tx1"/>
-                  </a:solidFill>
-                </a:endParaRPr>
-              </a:p>
-            </p:txBody>
-          </p:sp>
-        </p:grpSp>
-        <p:grpSp>
-          <p:nvGrpSpPr>
-            <p:cNvPr id="213" name="组合 212">
-              <a:extLst>
-                <a:ext uri="{FF2B5EF4-FFF2-40B4-BE49-F238E27FC236}">
-                  <a16:creationId xmlns:a16="http://schemas.microsoft.com/office/drawing/2014/main" id="{15C6B8F9-2F7D-67A0-CBC2-D051E00B7B54}"/>
-                </a:ext>
-              </a:extLst>
-            </p:cNvPr>
-            <p:cNvGrpSpPr/>
-            <p:nvPr/>
-          </p:nvGrpSpPr>
-          <p:grpSpPr>
-            <a:xfrm>
-              <a:off x="4564422" y="1575364"/>
-              <a:ext cx="2461546" cy="690538"/>
-              <a:chOff x="4564422" y="1575364"/>
-              <a:chExt cx="2461546" cy="690538"/>
-            </a:xfrm>
-          </p:grpSpPr>
-          <p:sp>
-            <p:nvSpPr>
-              <p:cNvPr id="148" name="矩形 147">
-                <a:extLst>
-                  <a:ext uri="{FF2B5EF4-FFF2-40B4-BE49-F238E27FC236}">
-                    <a16:creationId xmlns:a16="http://schemas.microsoft.com/office/drawing/2014/main" id="{5C2E3FE1-814F-09F1-8D46-A3C36BB6192F}"/>
-                  </a:ext>
-                </a:extLst>
-              </p:cNvPr>
-              <p:cNvSpPr/>
-              <p:nvPr/>
-            </p:nvSpPr>
-            <p:spPr>
-              <a:xfrm>
-                <a:off x="4564422" y="1575364"/>
-                <a:ext cx="2461546" cy="690538"/>
-              </a:xfrm>
-              <a:prstGeom prst="rect">
-                <a:avLst/>
-              </a:prstGeom>
-              <a:noFill/>
-              <a:ln w="19050">
-                <a:solidFill>
-                  <a:schemeClr val="tx1"/>
-                </a:solidFill>
-              </a:ln>
-            </p:spPr>
-            <p:style>
-              <a:lnRef idx="2">
-                <a:schemeClr val="accent1">
-                  <a:shade val="15000"/>
-                </a:schemeClr>
-              </a:lnRef>
-              <a:fillRef idx="1">
-                <a:schemeClr val="accent1"/>
-              </a:fillRef>
-              <a:effectRef idx="0">
-                <a:schemeClr val="accent1"/>
-              </a:effectRef>
-              <a:fontRef idx="minor">
-                <a:schemeClr val="lt1"/>
-              </a:fontRef>
-            </p:style>
-            <p:txBody>
-              <a:bodyPr rtlCol="0" anchor="ctr"/>
-              <a:lstStyle/>
-              <a:p>
-                <a:pPr algn="ctr"/>
-                <a:endParaRPr lang="zh-CN" altLang="en-US" dirty="0" err="1">
-                  <a:solidFill>
-                    <a:schemeClr val="tx1"/>
-                  </a:solidFill>
+                <a:r>
+                  <a:rPr lang="en-US" altLang="zh-CN" dirty="0">
+                    <a:latin typeface="Times New Roman" panose="02020603050405020304" pitchFamily="18" charset="0"/>
+                    <a:ea typeface="宋体" panose="02010600030101010101" pitchFamily="2" charset="-122"/>
+                  </a:rPr>
+                  <a:t>(</a:t>
+                </a:r>
+                <a14:m>
+                  <m:oMath xmlns:m="http://schemas.openxmlformats.org/officeDocument/2006/math">
+                    <m:r>
+                      <a:rPr lang="en-US" altLang="zh-CN" i="1" dirty="0">
+                        <a:latin typeface="Cambria Math" panose="02040503050406030204" pitchFamily="18" charset="0"/>
+                        <a:ea typeface="宋体" panose="02010600030101010101" pitchFamily="2" charset="-122"/>
+                      </a:rPr>
+                      <m:t>𝐶</m:t>
+                    </m:r>
+                    <m:sSub>
+                      <m:sSubPr>
+                        <m:ctrlPr>
+                          <a:rPr lang="en-US" altLang="zh-CN" i="1" dirty="0">
+                            <a:latin typeface="Cambria Math" panose="02040503050406030204" pitchFamily="18" charset="0"/>
+                            <a:ea typeface="宋体" panose="02010600030101010101" pitchFamily="2" charset="-122"/>
+                          </a:rPr>
+                        </m:ctrlPr>
+                      </m:sSubPr>
+                      <m:e>
+                        <m:r>
+                          <a:rPr lang="en-US" altLang="zh-CN" i="1" dirty="0">
+                            <a:latin typeface="Cambria Math" panose="02040503050406030204" pitchFamily="18" charset="0"/>
+                            <a:ea typeface="宋体" panose="02010600030101010101" pitchFamily="2" charset="-122"/>
+                          </a:rPr>
+                          <m:t>𝑊</m:t>
+                        </m:r>
+                      </m:e>
+                      <m:sub>
+                        <m:r>
+                          <a:rPr lang="en-US" altLang="zh-CN" i="1" dirty="0">
+                            <a:latin typeface="Cambria Math" panose="02040503050406030204" pitchFamily="18" charset="0"/>
+                            <a:ea typeface="宋体" panose="02010600030101010101" pitchFamily="2" charset="-122"/>
+                          </a:rPr>
+                          <m:t>𝑚𝑖𝑛</m:t>
+                        </m:r>
+                      </m:sub>
+                    </m:sSub>
+                    <m:r>
+                      <a:rPr lang="zh-CN" altLang="en-US" i="1" dirty="0">
+                        <a:latin typeface="Cambria Math" panose="02040503050406030204" pitchFamily="18" charset="0"/>
+                        <a:ea typeface="宋体" panose="02010600030101010101" pitchFamily="2" charset="-122"/>
+                      </a:rPr>
+                      <m:t>、</m:t>
+                    </m:r>
+                    <m:r>
+                      <a:rPr lang="en-US" altLang="zh-CN" i="1" dirty="0">
+                        <a:latin typeface="Cambria Math" panose="02040503050406030204" pitchFamily="18" charset="0"/>
+                        <a:ea typeface="宋体" panose="02010600030101010101" pitchFamily="2" charset="-122"/>
+                      </a:rPr>
+                      <m:t>𝐶</m:t>
+                    </m:r>
+                    <m:sSub>
+                      <m:sSubPr>
+                        <m:ctrlPr>
+                          <a:rPr lang="en-US" altLang="zh-CN" i="1" dirty="0">
+                            <a:latin typeface="Cambria Math" panose="02040503050406030204" pitchFamily="18" charset="0"/>
+                            <a:ea typeface="宋体" panose="02010600030101010101" pitchFamily="2" charset="-122"/>
+                          </a:rPr>
+                        </m:ctrlPr>
+                      </m:sSubPr>
+                      <m:e>
+                        <m:r>
+                          <a:rPr lang="en-US" altLang="zh-CN" i="1" dirty="0">
+                            <a:latin typeface="Cambria Math" panose="02040503050406030204" pitchFamily="18" charset="0"/>
+                            <a:ea typeface="宋体" panose="02010600030101010101" pitchFamily="2" charset="-122"/>
+                          </a:rPr>
+                          <m:t>𝑊</m:t>
+                        </m:r>
+                      </m:e>
+                      <m:sub>
+                        <m:r>
+                          <a:rPr lang="en-US" altLang="zh-CN" i="1" dirty="0">
+                            <a:latin typeface="Cambria Math" panose="02040503050406030204" pitchFamily="18" charset="0"/>
+                            <a:ea typeface="宋体" panose="02010600030101010101" pitchFamily="2" charset="-122"/>
+                          </a:rPr>
+                          <m:t>𝑚𝑎𝑥</m:t>
+                        </m:r>
+                      </m:sub>
+                    </m:sSub>
+                    <m:r>
+                      <a:rPr lang="zh-CN" altLang="en-US" i="1" dirty="0">
+                        <a:latin typeface="Cambria Math" panose="02040503050406030204" pitchFamily="18" charset="0"/>
+                        <a:ea typeface="宋体" panose="02010600030101010101" pitchFamily="2" charset="-122"/>
+                      </a:rPr>
+                      <m:t>等</m:t>
+                    </m:r>
+                  </m:oMath>
+                </a14:m>
+                <a:r>
+                  <a:rPr lang="en-US" altLang="zh-CN" dirty="0">
+                    <a:latin typeface="Times New Roman" panose="02020603050405020304" pitchFamily="18" charset="0"/>
+                    <a:ea typeface="宋体" panose="02010600030101010101" pitchFamily="2" charset="-122"/>
+                  </a:rPr>
+                  <a:t>)</a:t>
+                </a:r>
+                <a:endParaRPr lang="zh-CN" altLang="en-US" dirty="0">
                   <a:latin typeface="Times New Roman" panose="02020603050405020304" pitchFamily="18" charset="0"/>
                   <a:ea typeface="宋体" panose="02010600030101010101" pitchFamily="2" charset="-122"/>
                 </a:endParaRPr>
               </a:p>
             </p:txBody>
           </p:sp>
-          <mc:AlternateContent xmlns:mc="http://schemas.openxmlformats.org/markup-compatibility/2006" xmlns:a14="http://schemas.microsoft.com/office/drawing/2010/main">
-            <mc:Choice Requires="a14">
-              <p:sp>
-                <p:nvSpPr>
-                  <p:cNvPr id="149" name="文本框 148">
-                    <a:extLst>
-                      <a:ext uri="{FF2B5EF4-FFF2-40B4-BE49-F238E27FC236}">
-                        <a16:creationId xmlns:a16="http://schemas.microsoft.com/office/drawing/2014/main" id="{4CD8618B-2C2F-387F-50CC-0E38C6D7A2BF}"/>
-                      </a:ext>
-                    </a:extLst>
-                  </p:cNvPr>
-                  <p:cNvSpPr txBox="1"/>
-                  <p:nvPr/>
-                </p:nvSpPr>
-                <p:spPr>
-                  <a:xfrm>
-                    <a:off x="4727239" y="1756771"/>
-                    <a:ext cx="2135911" cy="327722"/>
-                  </a:xfrm>
-                  <a:prstGeom prst="rect">
-                    <a:avLst/>
-                  </a:prstGeom>
-                  <a:noFill/>
-                </p:spPr>
-                <p:txBody>
-                  <a:bodyPr wrap="square" rtlCol="0" anchor="ctr" anchorCtr="1">
-                    <a:spAutoFit/>
-                  </a:bodyPr>
-                  <a:lstStyle/>
-                  <a:p>
-                    <a:pPr algn="ctr"/>
-                    <a14:m>
-                      <m:oMath xmlns:m="http://schemas.openxmlformats.org/officeDocument/2006/math">
-                        <m:r>
-                          <a:rPr lang="zh-CN" altLang="en-US" i="1" dirty="0">
-                            <a:latin typeface="Cambria Math" panose="02040503050406030204" pitchFamily="18" charset="0"/>
-                            <a:ea typeface="宋体" panose="02010600030101010101" pitchFamily="2" charset="-122"/>
-                          </a:rPr>
-                          <m:t>随机数</m:t>
-                        </m:r>
-                        <m:r>
-                          <a:rPr lang="en-US" altLang="zh-CN" i="1" dirty="0" smtClean="0">
-                            <a:latin typeface="Cambria Math" panose="02040503050406030204" pitchFamily="18" charset="0"/>
-                            <a:ea typeface="宋体" panose="02010600030101010101" pitchFamily="2" charset="-122"/>
-                          </a:rPr>
-                          <m:t>𝑁</m:t>
-                        </m:r>
-                      </m:oMath>
-                    </a14:m>
-                    <a:r>
-                      <a:rPr lang="zh-CN" altLang="en-US" dirty="0">
-                        <a:latin typeface="Times New Roman" panose="02020603050405020304" pitchFamily="18" charset="0"/>
-                        <a:ea typeface="宋体" panose="02010600030101010101" pitchFamily="2" charset="-122"/>
-                      </a:rPr>
-                      <a:t>减一</a:t>
-                    </a:r>
-                  </a:p>
-                </p:txBody>
-              </p:sp>
-            </mc:Choice>
-            <mc:Fallback xmlns="">
-              <p:sp>
-                <p:nvSpPr>
-                  <p:cNvPr id="149" name="文本框 148">
-                    <a:extLst>
-                      <a:ext uri="{FF2B5EF4-FFF2-40B4-BE49-F238E27FC236}">
-                        <a16:creationId xmlns:a16="http://schemas.microsoft.com/office/drawing/2014/main" id="{4CD8618B-2C2F-387F-50CC-0E38C6D7A2BF}"/>
-                      </a:ext>
-                    </a:extLst>
-                  </p:cNvPr>
-                  <p:cNvSpPr txBox="1">
-                    <a:spLocks noRot="1" noChangeAspect="1" noMove="1" noResize="1" noEditPoints="1" noAdjustHandles="1" noChangeArrowheads="1" noChangeShapeType="1" noTextEdit="1"/>
-                  </p:cNvSpPr>
-                  <p:nvPr/>
-                </p:nvSpPr>
-                <p:spPr>
-                  <a:xfrm>
-                    <a:off x="4727239" y="1756771"/>
-                    <a:ext cx="2135911" cy="327722"/>
-                  </a:xfrm>
-                  <a:prstGeom prst="rect">
-                    <a:avLst/>
-                  </a:prstGeom>
-                  <a:blipFill>
-                    <a:blip r:embed="rId6"/>
-                    <a:stretch>
-                      <a:fillRect t="-18519" b="-31481"/>
-                    </a:stretch>
-                  </a:blipFill>
-                </p:spPr>
-                <p:txBody>
-                  <a:bodyPr/>
-                  <a:lstStyle/>
-                  <a:p>
-                    <a:r>
-                      <a:rPr lang="zh-CN" altLang="en-US">
-                        <a:noFill/>
-                      </a:rPr>
-                      <a:t> </a:t>
-                    </a:r>
-                  </a:p>
-                </p:txBody>
-              </p:sp>
-            </mc:Fallback>
-          </mc:AlternateContent>
-        </p:grpSp>
-        <p:cxnSp>
-          <p:nvCxnSpPr>
-            <p:cNvPr id="152" name="直接箭头连接符 151">
-              <a:extLst>
-                <a:ext uri="{FF2B5EF4-FFF2-40B4-BE49-F238E27FC236}">
-                  <a16:creationId xmlns:a16="http://schemas.microsoft.com/office/drawing/2014/main" id="{1DE760E3-80F4-0734-A0BC-9F6C1C1D68AA}"/>
-                </a:ext>
-              </a:extLst>
-            </p:cNvPr>
-            <p:cNvCxnSpPr>
-              <a:stCxn id="148" idx="2"/>
-              <a:endCxn id="138" idx="0"/>
-            </p:cNvCxnSpPr>
-            <p:nvPr/>
-          </p:nvCxnSpPr>
-          <p:spPr>
-            <a:xfrm>
-              <a:off x="5795196" y="2265902"/>
-              <a:ext cx="0" cy="213562"/>
-            </a:xfrm>
-            <a:prstGeom prst="straightConnector1">
-              <a:avLst/>
-            </a:prstGeom>
-            <a:ln w="19050">
-              <a:solidFill>
-                <a:schemeClr val="tx1"/>
-              </a:solidFill>
-              <a:tailEnd type="triangle"/>
-            </a:ln>
-          </p:spPr>
-          <p:style>
-            <a:lnRef idx="1">
-              <a:schemeClr val="accent1"/>
-            </a:lnRef>
-            <a:fillRef idx="0">
-              <a:schemeClr val="accent1"/>
-            </a:fillRef>
-            <a:effectRef idx="0">
-              <a:schemeClr val="accent1"/>
-            </a:effectRef>
-            <a:fontRef idx="minor">
-              <a:schemeClr val="tx1"/>
-            </a:fontRef>
-          </p:style>
-        </p:cxnSp>
-        <p:cxnSp>
-          <p:nvCxnSpPr>
-            <p:cNvPr id="154" name="直接箭头连接符 153">
-              <a:extLst>
-                <a:ext uri="{FF2B5EF4-FFF2-40B4-BE49-F238E27FC236}">
-                  <a16:creationId xmlns:a16="http://schemas.microsoft.com/office/drawing/2014/main" id="{FE4E6AED-1301-7DA5-4B38-A6561A77AA5E}"/>
-                </a:ext>
-              </a:extLst>
-            </p:cNvPr>
-            <p:cNvCxnSpPr>
-              <a:cxnSpLocks/>
-              <a:stCxn id="138" idx="3"/>
-              <a:endCxn id="107" idx="0"/>
-            </p:cNvCxnSpPr>
-            <p:nvPr/>
-          </p:nvCxnSpPr>
-          <p:spPr>
-            <a:xfrm flipH="1" flipV="1">
-              <a:off x="5795196" y="283154"/>
-              <a:ext cx="1535304" cy="2704005"/>
-            </a:xfrm>
-            <a:prstGeom prst="bentConnector4">
-              <a:avLst>
-                <a:gd name="adj1" fmla="val -299281"/>
-                <a:gd name="adj2" fmla="val 108454"/>
-              </a:avLst>
-            </a:prstGeom>
-            <a:ln w="19050">
-              <a:solidFill>
-                <a:schemeClr val="tx1"/>
-              </a:solidFill>
-              <a:tailEnd type="triangle"/>
-            </a:ln>
-          </p:spPr>
-          <p:style>
-            <a:lnRef idx="1">
-              <a:schemeClr val="accent1"/>
-            </a:lnRef>
-            <a:fillRef idx="0">
-              <a:schemeClr val="accent1"/>
-            </a:fillRef>
-            <a:effectRef idx="0">
-              <a:schemeClr val="accent1"/>
-            </a:effectRef>
-            <a:fontRef idx="minor">
-              <a:schemeClr val="tx1"/>
-            </a:fontRef>
-          </p:style>
-        </p:cxnSp>
-        <p:cxnSp>
-          <p:nvCxnSpPr>
-            <p:cNvPr id="172" name="直接箭头连接符 171">
-              <a:extLst>
-                <a:ext uri="{FF2B5EF4-FFF2-40B4-BE49-F238E27FC236}">
-                  <a16:creationId xmlns:a16="http://schemas.microsoft.com/office/drawing/2014/main" id="{66257E67-5CF8-8B36-658C-7B2DCA817D0C}"/>
-                </a:ext>
-              </a:extLst>
-            </p:cNvPr>
-            <p:cNvCxnSpPr>
-              <a:cxnSpLocks/>
-              <a:stCxn id="145" idx="2"/>
-              <a:endCxn id="208" idx="0"/>
-            </p:cNvCxnSpPr>
-            <p:nvPr/>
-          </p:nvCxnSpPr>
-          <p:spPr>
-            <a:xfrm flipH="1">
-              <a:off x="5790950" y="5432104"/>
-              <a:ext cx="4246" cy="355102"/>
-            </a:xfrm>
-            <a:prstGeom prst="straightConnector1">
-              <a:avLst/>
-            </a:prstGeom>
-            <a:ln w="19050">
-              <a:solidFill>
-                <a:schemeClr val="tx1"/>
-              </a:solidFill>
-              <a:tailEnd type="triangle"/>
-            </a:ln>
-          </p:spPr>
-          <p:style>
-            <a:lnRef idx="1">
-              <a:schemeClr val="accent1"/>
-            </a:lnRef>
-            <a:fillRef idx="0">
-              <a:schemeClr val="accent1"/>
-            </a:fillRef>
-            <a:effectRef idx="0">
-              <a:schemeClr val="accent1"/>
-            </a:effectRef>
-            <a:fontRef idx="minor">
-              <a:schemeClr val="tx1"/>
-            </a:fontRef>
-          </p:style>
-        </p:cxnSp>
-        <p:cxnSp>
-          <p:nvCxnSpPr>
-            <p:cNvPr id="174" name="直接箭头连接符 173">
-              <a:extLst>
-                <a:ext uri="{FF2B5EF4-FFF2-40B4-BE49-F238E27FC236}">
-                  <a16:creationId xmlns:a16="http://schemas.microsoft.com/office/drawing/2014/main" id="{EA425204-CD49-FAD0-8A03-5182B225D575}"/>
-                </a:ext>
-              </a:extLst>
-            </p:cNvPr>
-            <p:cNvCxnSpPr>
-              <a:cxnSpLocks/>
-              <a:stCxn id="145" idx="3"/>
-              <a:endCxn id="82" idx="0"/>
-            </p:cNvCxnSpPr>
-            <p:nvPr/>
-          </p:nvCxnSpPr>
-          <p:spPr>
-            <a:xfrm>
-              <a:off x="7330500" y="4924409"/>
-              <a:ext cx="2523309" cy="686145"/>
-            </a:xfrm>
-            <a:prstGeom prst="bentConnector2">
-              <a:avLst/>
-            </a:prstGeom>
-            <a:ln w="19050">
-              <a:solidFill>
-                <a:schemeClr val="tx1"/>
-              </a:solidFill>
-              <a:tailEnd type="triangle"/>
-            </a:ln>
-          </p:spPr>
-          <p:style>
-            <a:lnRef idx="1">
-              <a:schemeClr val="accent1"/>
-            </a:lnRef>
-            <a:fillRef idx="0">
-              <a:schemeClr val="accent1"/>
-            </a:fillRef>
-            <a:effectRef idx="0">
-              <a:schemeClr val="accent1"/>
-            </a:effectRef>
-            <a:fontRef idx="minor">
-              <a:schemeClr val="tx1"/>
-            </a:fontRef>
-          </p:style>
-        </p:cxnSp>
-        <p:cxnSp>
-          <p:nvCxnSpPr>
-            <p:cNvPr id="184" name="直接箭头连接符 183">
-              <a:extLst>
-                <a:ext uri="{FF2B5EF4-FFF2-40B4-BE49-F238E27FC236}">
-                  <a16:creationId xmlns:a16="http://schemas.microsoft.com/office/drawing/2014/main" id="{AFF29800-BAA3-2D68-74BB-2E34D3ADBCFE}"/>
-                </a:ext>
-              </a:extLst>
-            </p:cNvPr>
-            <p:cNvCxnSpPr>
-              <a:stCxn id="59" idx="2"/>
-              <a:endCxn id="145" idx="0"/>
-            </p:cNvCxnSpPr>
-            <p:nvPr/>
-          </p:nvCxnSpPr>
-          <p:spPr>
-            <a:xfrm flipH="1">
-              <a:off x="5795196" y="4229049"/>
-              <a:ext cx="2109" cy="187665"/>
-            </a:xfrm>
-            <a:prstGeom prst="straightConnector1">
-              <a:avLst/>
-            </a:prstGeom>
-            <a:ln w="19050">
-              <a:solidFill>
-                <a:schemeClr val="tx1"/>
-              </a:solidFill>
-              <a:tailEnd type="triangle"/>
-            </a:ln>
-          </p:spPr>
-          <p:style>
-            <a:lnRef idx="1">
-              <a:schemeClr val="accent1"/>
-            </a:lnRef>
-            <a:fillRef idx="0">
-              <a:schemeClr val="accent1"/>
-            </a:fillRef>
-            <a:effectRef idx="0">
-              <a:schemeClr val="accent1"/>
-            </a:effectRef>
-            <a:fontRef idx="minor">
-              <a:schemeClr val="tx1"/>
-            </a:fontRef>
-          </p:style>
-        </p:cxnSp>
-        <p:sp>
-          <p:nvSpPr>
-            <p:cNvPr id="187" name="文本框 186">
-              <a:extLst>
-                <a:ext uri="{FF2B5EF4-FFF2-40B4-BE49-F238E27FC236}">
-                  <a16:creationId xmlns:a16="http://schemas.microsoft.com/office/drawing/2014/main" id="{F238CA07-EE20-B274-9CCC-2487E0A8882C}"/>
-                </a:ext>
-              </a:extLst>
-            </p:cNvPr>
-            <p:cNvSpPr txBox="1"/>
-            <p:nvPr/>
-          </p:nvSpPr>
-          <p:spPr>
-            <a:xfrm>
-              <a:off x="7213534" y="2659437"/>
-              <a:ext cx="463648" cy="327722"/>
-            </a:xfrm>
-            <a:prstGeom prst="rect">
-              <a:avLst/>
-            </a:prstGeom>
-            <a:noFill/>
-          </p:spPr>
-          <p:txBody>
-            <a:bodyPr wrap="square" rtlCol="0" anchor="ctr" anchorCtr="1">
-              <a:spAutoFit/>
-            </a:bodyPr>
-            <a:lstStyle/>
-            <a:p>
-              <a:pPr algn="ctr"/>
-              <a:r>
-                <a:rPr lang="zh-CN" altLang="en-US" dirty="0">
-                  <a:latin typeface="Times New Roman" panose="02020603050405020304" pitchFamily="18" charset="0"/>
-                  <a:ea typeface="宋体" panose="02010600030101010101" pitchFamily="2" charset="-122"/>
-                </a:rPr>
-                <a:t>否</a:t>
-              </a:r>
-            </a:p>
-          </p:txBody>
-        </p:sp>
-        <p:sp>
-          <p:nvSpPr>
-            <p:cNvPr id="188" name="文本框 187">
-              <a:extLst>
-                <a:ext uri="{FF2B5EF4-FFF2-40B4-BE49-F238E27FC236}">
-                  <a16:creationId xmlns:a16="http://schemas.microsoft.com/office/drawing/2014/main" id="{D643235A-30B3-4A36-647B-B4932738206A}"/>
-                </a:ext>
-              </a:extLst>
-            </p:cNvPr>
-            <p:cNvSpPr txBox="1"/>
-            <p:nvPr/>
-          </p:nvSpPr>
-          <p:spPr>
-            <a:xfrm>
-              <a:off x="5795194" y="3413981"/>
-              <a:ext cx="463648" cy="327722"/>
-            </a:xfrm>
-            <a:prstGeom prst="rect">
-              <a:avLst/>
-            </a:prstGeom>
-            <a:noFill/>
-          </p:spPr>
-          <p:txBody>
-            <a:bodyPr wrap="square" rtlCol="0" anchor="ctr" anchorCtr="1">
-              <a:spAutoFit/>
-            </a:bodyPr>
-            <a:lstStyle/>
-            <a:p>
-              <a:pPr algn="ctr"/>
-              <a:r>
-                <a:rPr lang="zh-CN" altLang="en-US" dirty="0">
-                  <a:latin typeface="Times New Roman" panose="02020603050405020304" pitchFamily="18" charset="0"/>
-                  <a:ea typeface="宋体" panose="02010600030101010101" pitchFamily="2" charset="-122"/>
-                </a:rPr>
-                <a:t>是</a:t>
-              </a:r>
-            </a:p>
-          </p:txBody>
-        </p:sp>
-        <p:sp>
-          <p:nvSpPr>
-            <p:cNvPr id="189" name="文本框 188">
-              <a:extLst>
-                <a:ext uri="{FF2B5EF4-FFF2-40B4-BE49-F238E27FC236}">
-                  <a16:creationId xmlns:a16="http://schemas.microsoft.com/office/drawing/2014/main" id="{F9D7C336-2B36-037D-A56E-BF8B32180ADB}"/>
-                </a:ext>
-              </a:extLst>
-            </p:cNvPr>
-            <p:cNvSpPr txBox="1"/>
-            <p:nvPr/>
-          </p:nvSpPr>
-          <p:spPr>
-            <a:xfrm>
-              <a:off x="5795194" y="1298948"/>
-              <a:ext cx="463648" cy="327722"/>
-            </a:xfrm>
-            <a:prstGeom prst="rect">
-              <a:avLst/>
-            </a:prstGeom>
-            <a:noFill/>
-          </p:spPr>
-          <p:txBody>
-            <a:bodyPr wrap="square" rtlCol="0" anchor="ctr" anchorCtr="1">
-              <a:spAutoFit/>
-            </a:bodyPr>
-            <a:lstStyle/>
-            <a:p>
-              <a:pPr algn="ctr"/>
-              <a:r>
-                <a:rPr lang="zh-CN" altLang="en-US" dirty="0">
-                  <a:latin typeface="Times New Roman" panose="02020603050405020304" pitchFamily="18" charset="0"/>
-                  <a:ea typeface="宋体" panose="02010600030101010101" pitchFamily="2" charset="-122"/>
-                </a:rPr>
-                <a:t>是</a:t>
-              </a:r>
-            </a:p>
-          </p:txBody>
-        </p:sp>
-        <p:sp>
-          <p:nvSpPr>
-            <p:cNvPr id="190" name="文本框 189">
-              <a:extLst>
-                <a:ext uri="{FF2B5EF4-FFF2-40B4-BE49-F238E27FC236}">
-                  <a16:creationId xmlns:a16="http://schemas.microsoft.com/office/drawing/2014/main" id="{A55EC7A4-F28D-42CC-AB9D-E4B77238E520}"/>
-                </a:ext>
-              </a:extLst>
-            </p:cNvPr>
-            <p:cNvSpPr txBox="1"/>
-            <p:nvPr/>
-          </p:nvSpPr>
-          <p:spPr>
-            <a:xfrm>
-              <a:off x="7213534" y="496217"/>
-              <a:ext cx="463648" cy="327722"/>
-            </a:xfrm>
-            <a:prstGeom prst="rect">
-              <a:avLst/>
-            </a:prstGeom>
-            <a:noFill/>
-          </p:spPr>
-          <p:txBody>
-            <a:bodyPr wrap="square" rtlCol="0" anchor="ctr" anchorCtr="1">
-              <a:spAutoFit/>
-            </a:bodyPr>
-            <a:lstStyle/>
-            <a:p>
-              <a:pPr algn="ctr"/>
-              <a:r>
-                <a:rPr lang="zh-CN" altLang="en-US" dirty="0">
-                  <a:latin typeface="Times New Roman" panose="02020603050405020304" pitchFamily="18" charset="0"/>
-                  <a:ea typeface="宋体" panose="02010600030101010101" pitchFamily="2" charset="-122"/>
-                </a:rPr>
-                <a:t>否</a:t>
-              </a:r>
-            </a:p>
-          </p:txBody>
-        </p:sp>
-        <p:grpSp>
-          <p:nvGrpSpPr>
-            <p:cNvPr id="210" name="组合 209">
-              <a:extLst>
-                <a:ext uri="{FF2B5EF4-FFF2-40B4-BE49-F238E27FC236}">
-                  <a16:creationId xmlns:a16="http://schemas.microsoft.com/office/drawing/2014/main" id="{387F3B54-D71B-482B-AC3A-A74F3E1E4F3C}"/>
-                </a:ext>
-              </a:extLst>
-            </p:cNvPr>
-            <p:cNvGrpSpPr/>
-            <p:nvPr/>
-          </p:nvGrpSpPr>
-          <p:grpSpPr>
-            <a:xfrm>
-              <a:off x="4370505" y="5787206"/>
-              <a:ext cx="2840890" cy="787681"/>
-              <a:chOff x="2846505" y="5787206"/>
-              <a:chExt cx="2840890" cy="787681"/>
-            </a:xfrm>
-          </p:grpSpPr>
+        </mc:Choice>
+        <mc:Fallback>
           <p:sp>
             <p:nvSpPr>
-              <p:cNvPr id="208" name="流程图: 终止 207">
+              <p:cNvPr id="23" name="文本框 22">
                 <a:extLst>
                   <a:ext uri="{FF2B5EF4-FFF2-40B4-BE49-F238E27FC236}">
-                    <a16:creationId xmlns:a16="http://schemas.microsoft.com/office/drawing/2014/main" id="{54E9F143-8E2C-997A-7871-9A067D7C36FA}"/>
+                    <a16:creationId xmlns:a16="http://schemas.microsoft.com/office/drawing/2014/main" id="{427D1599-0021-4CCD-F79B-F21DF6CAD45F}"/>
                   </a:ext>
                 </a:extLst>
               </p:cNvPr>
-              <p:cNvSpPr/>
+              <p:cNvSpPr txBox="1">
+                <a:spLocks noRot="1" noChangeAspect="1" noMove="1" noResize="1" noEditPoints="1" noAdjustHandles="1" noChangeArrowheads="1" noChangeShapeType="1" noTextEdit="1"/>
+              </p:cNvSpPr>
               <p:nvPr/>
             </p:nvSpPr>
             <p:spPr>
               <a:xfrm>
-                <a:off x="3076398" y="5787206"/>
-                <a:ext cx="2381104" cy="787681"/>
-              </a:xfrm>
-              <a:prstGeom prst="flowChartTerminator">
-                <a:avLst/>
-              </a:prstGeom>
-              <a:solidFill>
-                <a:srgbClr val="DCEBFF"/>
-              </a:solidFill>
-              <a:ln w="19050">
-                <a:solidFill>
-                  <a:schemeClr val="tx1"/>
-                </a:solidFill>
-              </a:ln>
-            </p:spPr>
-            <p:style>
-              <a:lnRef idx="2">
-                <a:schemeClr val="accent1">
-                  <a:shade val="15000"/>
-                </a:schemeClr>
-              </a:lnRef>
-              <a:fillRef idx="1">
-                <a:schemeClr val="accent1"/>
-              </a:fillRef>
-              <a:effectRef idx="0">
-                <a:schemeClr val="accent1"/>
-              </a:effectRef>
-              <a:fontRef idx="minor">
-                <a:schemeClr val="lt1"/>
-              </a:fontRef>
-            </p:style>
-            <p:txBody>
-              <a:bodyPr rtlCol="0" anchor="ctr"/>
-              <a:lstStyle/>
-              <a:p>
-                <a:pPr algn="ctr"/>
-                <a:endParaRPr lang="zh-CN" altLang="en-US" dirty="0" err="1">
-                  <a:solidFill>
-                    <a:schemeClr val="tx1"/>
-                  </a:solidFill>
-                </a:endParaRPr>
-              </a:p>
-            </p:txBody>
-          </p:sp>
-          <p:sp>
-            <p:nvSpPr>
-              <p:cNvPr id="78" name="文本框 77">
-                <a:extLst>
-                  <a:ext uri="{FF2B5EF4-FFF2-40B4-BE49-F238E27FC236}">
-                    <a16:creationId xmlns:a16="http://schemas.microsoft.com/office/drawing/2014/main" id="{2F3754FC-C540-2C55-E949-1F089EF2695F}"/>
-                  </a:ext>
-                </a:extLst>
-              </p:cNvPr>
-              <p:cNvSpPr txBox="1"/>
-              <p:nvPr/>
-            </p:nvSpPr>
-            <p:spPr>
-              <a:xfrm>
-                <a:off x="2846505" y="6069931"/>
-                <a:ext cx="2840890" cy="222231"/>
+                <a:off x="562619" y="3028477"/>
+                <a:ext cx="2840890" cy="646331"/>
               </a:xfrm>
               <a:prstGeom prst="rect">
                 <a:avLst/>
               </a:prstGeom>
-              <a:noFill/>
+              <a:blipFill>
+                <a:blip r:embed="rId7"/>
+                <a:stretch>
+                  <a:fillRect t="-6604" b="-14151"/>
+                </a:stretch>
+              </a:blipFill>
             </p:spPr>
             <p:txBody>
-              <a:bodyPr wrap="square" rtlCol="0" anchor="ctr" anchorCtr="1">
-                <a:spAutoFit/>
-              </a:bodyPr>
+              <a:bodyPr/>
               <a:lstStyle/>
               <a:p>
-                <a:pPr algn="ctr"/>
                 <a:r>
-                  <a:rPr lang="zh-CN" altLang="en-US" dirty="0">
-                    <a:latin typeface="Times New Roman" panose="02020603050405020304" pitchFamily="18" charset="0"/>
-                    <a:ea typeface="宋体" panose="02010600030101010101" pitchFamily="2" charset="-122"/>
+                  <a:rPr lang="zh-CN" altLang="en-US">
+                    <a:noFill/>
                   </a:rPr>
-                  <a:t>传输结束</a:t>
+                  <a:t> </a:t>
                 </a:r>
-                <a:endParaRPr lang="en-US" altLang="zh-CN" dirty="0">
-                  <a:latin typeface="Times New Roman" panose="02020603050405020304" pitchFamily="18" charset="0"/>
-                  <a:ea typeface="宋体" panose="02010600030101010101" pitchFamily="2" charset="-122"/>
-                </a:endParaRPr>
               </a:p>
             </p:txBody>
           </p:sp>
-        </p:grpSp>
-        <p:grpSp>
-          <p:nvGrpSpPr>
-            <p:cNvPr id="216" name="组合 215">
-              <a:extLst>
-                <a:ext uri="{FF2B5EF4-FFF2-40B4-BE49-F238E27FC236}">
-                  <a16:creationId xmlns:a16="http://schemas.microsoft.com/office/drawing/2014/main" id="{871A0380-BCA4-97A2-B70C-6C5281139252}"/>
-                </a:ext>
-              </a:extLst>
-            </p:cNvPr>
-            <p:cNvGrpSpPr/>
-            <p:nvPr/>
-          </p:nvGrpSpPr>
-          <p:grpSpPr>
-            <a:xfrm>
-              <a:off x="934784" y="3038881"/>
-              <a:ext cx="2837501" cy="995670"/>
-              <a:chOff x="859765" y="2290034"/>
-              <a:chExt cx="2837501" cy="995670"/>
-            </a:xfrm>
-          </p:grpSpPr>
-          <p:sp>
-            <p:nvSpPr>
-              <p:cNvPr id="211" name="流程图: 准备 210">
-                <a:extLst>
-                  <a:ext uri="{FF2B5EF4-FFF2-40B4-BE49-F238E27FC236}">
-                    <a16:creationId xmlns:a16="http://schemas.microsoft.com/office/drawing/2014/main" id="{DCD0C7F8-7689-8C03-CC93-30457941711F}"/>
-                  </a:ext>
-                </a:extLst>
-              </p:cNvPr>
-              <p:cNvSpPr/>
-              <p:nvPr/>
-            </p:nvSpPr>
-            <p:spPr>
-              <a:xfrm>
-                <a:off x="859765" y="2290034"/>
-                <a:ext cx="2837501" cy="995670"/>
-              </a:xfrm>
-              <a:prstGeom prst="flowChartPreparation">
-                <a:avLst/>
-              </a:prstGeom>
-              <a:solidFill>
-                <a:schemeClr val="accent6">
-                  <a:lumMod val="20000"/>
-                  <a:lumOff val="80000"/>
-                </a:schemeClr>
-              </a:solidFill>
-              <a:ln w="19050">
-                <a:solidFill>
-                  <a:schemeClr val="tx1"/>
-                </a:solidFill>
-              </a:ln>
-            </p:spPr>
-            <p:style>
-              <a:lnRef idx="2">
-                <a:schemeClr val="accent1">
-                  <a:shade val="15000"/>
-                </a:schemeClr>
-              </a:lnRef>
-              <a:fillRef idx="1">
-                <a:schemeClr val="accent1"/>
-              </a:fillRef>
-              <a:effectRef idx="0">
-                <a:schemeClr val="accent1"/>
-              </a:effectRef>
-              <a:fontRef idx="minor">
-                <a:schemeClr val="lt1"/>
-              </a:fontRef>
-            </p:style>
-            <p:txBody>
-              <a:bodyPr rtlCol="0" anchor="ctr"/>
-              <a:lstStyle/>
-              <a:p>
-                <a:pPr algn="ctr"/>
-                <a:endParaRPr lang="zh-CN" altLang="en-US" dirty="0" err="1">
-                  <a:solidFill>
-                    <a:schemeClr val="tx1"/>
-                  </a:solidFill>
-                </a:endParaRPr>
-              </a:p>
-            </p:txBody>
-          </p:sp>
-          <mc:AlternateContent xmlns:mc="http://schemas.openxmlformats.org/markup-compatibility/2006" xmlns:a14="http://schemas.microsoft.com/office/drawing/2010/main">
-            <mc:Choice Requires="a14">
-              <p:sp>
-                <p:nvSpPr>
-                  <p:cNvPr id="212" name="文本框 211">
-                    <a:extLst>
-                      <a:ext uri="{FF2B5EF4-FFF2-40B4-BE49-F238E27FC236}">
-                        <a16:creationId xmlns:a16="http://schemas.microsoft.com/office/drawing/2014/main" id="{F3C3F635-4962-6F51-0772-54F35730F63E}"/>
-                      </a:ext>
-                    </a:extLst>
-                  </p:cNvPr>
-                  <p:cNvSpPr txBox="1"/>
-                  <p:nvPr/>
-                </p:nvSpPr>
-                <p:spPr>
-                  <a:xfrm>
-                    <a:off x="859765" y="2464704"/>
-                    <a:ext cx="2837501" cy="646331"/>
-                  </a:xfrm>
-                  <a:prstGeom prst="rect">
-                    <a:avLst/>
-                  </a:prstGeom>
-                  <a:noFill/>
-                </p:spPr>
-                <p:txBody>
-                  <a:bodyPr wrap="square" rtlCol="0" anchor="ctr" anchorCtr="1">
-                    <a:spAutoFit/>
-                  </a:bodyPr>
-                  <a:lstStyle/>
-                  <a:p>
-                    <a:pPr algn="ctr"/>
-                    <a:r>
-                      <a:rPr lang="zh-CN" altLang="en-US" dirty="0">
-                        <a:latin typeface="Times New Roman" panose="02020603050405020304" pitchFamily="18" charset="0"/>
-                        <a:ea typeface="宋体" panose="02010600030101010101" pitchFamily="2" charset="-122"/>
-                      </a:rPr>
-                      <a:t>确定优先级和</a:t>
-                    </a:r>
-                    <a:r>
-                      <a:rPr lang="en-US" altLang="zh-CN" dirty="0">
-                        <a:latin typeface="Times New Roman" panose="02020603050405020304" pitchFamily="18" charset="0"/>
-                        <a:ea typeface="宋体" panose="02010600030101010101" pitchFamily="2" charset="-122"/>
-                      </a:rPr>
-                      <a:t>LBT</a:t>
-                    </a:r>
-                    <a:r>
-                      <a:rPr lang="zh-CN" altLang="en-US" dirty="0">
-                        <a:latin typeface="Times New Roman" panose="02020603050405020304" pitchFamily="18" charset="0"/>
-                        <a:ea typeface="宋体" panose="02010600030101010101" pitchFamily="2" charset="-122"/>
-                      </a:rPr>
-                      <a:t>参数</a:t>
-                    </a:r>
-                    <a:r>
-                      <a:rPr lang="en-US" altLang="zh-CN" dirty="0">
-                        <a:latin typeface="Times New Roman" panose="02020603050405020304" pitchFamily="18" charset="0"/>
-                        <a:ea typeface="宋体" panose="02010600030101010101" pitchFamily="2" charset="-122"/>
-                      </a:rPr>
-                      <a:t>(</a:t>
-                    </a:r>
-                    <a14:m>
-                      <m:oMath xmlns:m="http://schemas.openxmlformats.org/officeDocument/2006/math">
-                        <m:r>
-                          <a:rPr lang="en-US" altLang="zh-CN" i="1" dirty="0">
-                            <a:latin typeface="Cambria Math" panose="02040503050406030204" pitchFamily="18" charset="0"/>
-                            <a:ea typeface="宋体" panose="02010600030101010101" pitchFamily="2" charset="-122"/>
-                          </a:rPr>
-                          <m:t>𝐶</m:t>
-                        </m:r>
-                        <m:sSub>
-                          <m:sSubPr>
-                            <m:ctrlPr>
-                              <a:rPr lang="en-US" altLang="zh-CN" i="1" dirty="0">
-                                <a:latin typeface="Cambria Math" panose="02040503050406030204" pitchFamily="18" charset="0"/>
-                                <a:ea typeface="宋体" panose="02010600030101010101" pitchFamily="2" charset="-122"/>
-                              </a:rPr>
-                            </m:ctrlPr>
-                          </m:sSubPr>
-                          <m:e>
-                            <m:r>
-                              <a:rPr lang="en-US" altLang="zh-CN" i="1" dirty="0">
-                                <a:latin typeface="Cambria Math" panose="02040503050406030204" pitchFamily="18" charset="0"/>
-                                <a:ea typeface="宋体" panose="02010600030101010101" pitchFamily="2" charset="-122"/>
-                              </a:rPr>
-                              <m:t>𝑊</m:t>
-                            </m:r>
-                          </m:e>
-                          <m:sub>
-                            <m:r>
-                              <a:rPr lang="en-US" altLang="zh-CN" i="1" dirty="0">
-                                <a:latin typeface="Cambria Math" panose="02040503050406030204" pitchFamily="18" charset="0"/>
-                                <a:ea typeface="宋体" panose="02010600030101010101" pitchFamily="2" charset="-122"/>
-                              </a:rPr>
-                              <m:t>𝑚𝑖𝑛</m:t>
-                            </m:r>
-                          </m:sub>
-                        </m:sSub>
-                        <m:r>
-                          <a:rPr lang="zh-CN" altLang="en-US" i="1" dirty="0" smtClean="0">
-                            <a:latin typeface="Cambria Math" panose="02040503050406030204" pitchFamily="18" charset="0"/>
-                            <a:ea typeface="宋体" panose="02010600030101010101" pitchFamily="2" charset="-122"/>
-                          </a:rPr>
-                          <m:t>、</m:t>
-                        </m:r>
-                        <m:r>
-                          <a:rPr lang="en-US" altLang="zh-CN" i="1" dirty="0">
-                            <a:latin typeface="Cambria Math" panose="02040503050406030204" pitchFamily="18" charset="0"/>
-                            <a:ea typeface="宋体" panose="02010600030101010101" pitchFamily="2" charset="-122"/>
-                          </a:rPr>
-                          <m:t>𝐶</m:t>
-                        </m:r>
-                        <m:sSub>
-                          <m:sSubPr>
-                            <m:ctrlPr>
-                              <a:rPr lang="en-US" altLang="zh-CN" i="1" dirty="0">
-                                <a:latin typeface="Cambria Math" panose="02040503050406030204" pitchFamily="18" charset="0"/>
-                                <a:ea typeface="宋体" panose="02010600030101010101" pitchFamily="2" charset="-122"/>
-                              </a:rPr>
-                            </m:ctrlPr>
-                          </m:sSubPr>
-                          <m:e>
-                            <m:r>
-                              <a:rPr lang="en-US" altLang="zh-CN" i="1" dirty="0">
-                                <a:latin typeface="Cambria Math" panose="02040503050406030204" pitchFamily="18" charset="0"/>
-                                <a:ea typeface="宋体" panose="02010600030101010101" pitchFamily="2" charset="-122"/>
-                              </a:rPr>
-                              <m:t>𝑊</m:t>
-                            </m:r>
-                          </m:e>
-                          <m:sub>
-                            <m:r>
-                              <a:rPr lang="en-US" altLang="zh-CN" i="1" dirty="0">
-                                <a:latin typeface="Cambria Math" panose="02040503050406030204" pitchFamily="18" charset="0"/>
-                                <a:ea typeface="宋体" panose="02010600030101010101" pitchFamily="2" charset="-122"/>
-                              </a:rPr>
-                              <m:t>𝑚𝑎𝑥</m:t>
-                            </m:r>
-                          </m:sub>
-                        </m:sSub>
-                        <m:r>
-                          <a:rPr lang="zh-CN" altLang="en-US" i="1" dirty="0" smtClean="0">
-                            <a:latin typeface="Cambria Math" panose="02040503050406030204" pitchFamily="18" charset="0"/>
-                            <a:ea typeface="宋体" panose="02010600030101010101" pitchFamily="2" charset="-122"/>
-                          </a:rPr>
-                          <m:t>等</m:t>
-                        </m:r>
-                      </m:oMath>
-                    </a14:m>
-                    <a:r>
-                      <a:rPr lang="en-US" altLang="zh-CN" dirty="0">
-                        <a:latin typeface="Times New Roman" panose="02020603050405020304" pitchFamily="18" charset="0"/>
-                        <a:ea typeface="宋体" panose="02010600030101010101" pitchFamily="2" charset="-122"/>
-                      </a:rPr>
-                      <a:t>)</a:t>
-                    </a:r>
-                    <a:endParaRPr lang="zh-CN" altLang="en-US" dirty="0">
-                      <a:latin typeface="Times New Roman" panose="02020603050405020304" pitchFamily="18" charset="0"/>
-                      <a:ea typeface="宋体" panose="02010600030101010101" pitchFamily="2" charset="-122"/>
-                    </a:endParaRPr>
-                  </a:p>
-                </p:txBody>
-              </p:sp>
-            </mc:Choice>
-            <mc:Fallback xmlns="">
-              <p:sp>
-                <p:nvSpPr>
-                  <p:cNvPr id="212" name="文本框 211">
-                    <a:extLst>
-                      <a:ext uri="{FF2B5EF4-FFF2-40B4-BE49-F238E27FC236}">
-                        <a16:creationId xmlns:a16="http://schemas.microsoft.com/office/drawing/2014/main" id="{F3C3F635-4962-6F51-0772-54F35730F63E}"/>
-                      </a:ext>
-                    </a:extLst>
-                  </p:cNvPr>
-                  <p:cNvSpPr txBox="1">
-                    <a:spLocks noRot="1" noChangeAspect="1" noMove="1" noResize="1" noEditPoints="1" noAdjustHandles="1" noChangeArrowheads="1" noChangeShapeType="1" noTextEdit="1"/>
-                  </p:cNvSpPr>
-                  <p:nvPr/>
-                </p:nvSpPr>
-                <p:spPr>
-                  <a:xfrm>
-                    <a:off x="859765" y="2464704"/>
-                    <a:ext cx="2837501" cy="646331"/>
-                  </a:xfrm>
-                  <a:prstGeom prst="rect">
-                    <a:avLst/>
-                  </a:prstGeom>
-                  <a:blipFill>
-                    <a:blip r:embed="rId7"/>
-                    <a:stretch>
-                      <a:fillRect t="-6604" b="-15094"/>
-                    </a:stretch>
-                  </a:blipFill>
-                </p:spPr>
-                <p:txBody>
-                  <a:bodyPr/>
-                  <a:lstStyle/>
-                  <a:p>
-                    <a:r>
-                      <a:rPr lang="zh-CN" altLang="en-US">
-                        <a:noFill/>
-                      </a:rPr>
-                      <a:t> </a:t>
-                    </a:r>
-                  </a:p>
-                </p:txBody>
-              </p:sp>
-            </mc:Fallback>
-          </mc:AlternateContent>
-        </p:grpSp>
-        <p:cxnSp>
-          <p:nvCxnSpPr>
-            <p:cNvPr id="215" name="直接箭头连接符 214">
-              <a:extLst>
-                <a:ext uri="{FF2B5EF4-FFF2-40B4-BE49-F238E27FC236}">
-                  <a16:creationId xmlns:a16="http://schemas.microsoft.com/office/drawing/2014/main" id="{6776D8BC-D26D-269A-D6BF-7D6030CA5693}"/>
-                </a:ext>
-              </a:extLst>
-            </p:cNvPr>
-            <p:cNvCxnSpPr>
-              <a:stCxn id="211" idx="0"/>
-              <a:endCxn id="2" idx="2"/>
-            </p:cNvCxnSpPr>
-            <p:nvPr/>
-          </p:nvCxnSpPr>
-          <p:spPr>
-            <a:xfrm flipV="1">
-              <a:off x="2353535" y="1371656"/>
-              <a:ext cx="9680" cy="1667225"/>
-            </a:xfrm>
-            <a:prstGeom prst="straightConnector1">
-              <a:avLst/>
-            </a:prstGeom>
-            <a:ln w="19050">
-              <a:solidFill>
-                <a:schemeClr val="tx1"/>
-              </a:solidFill>
-              <a:tailEnd type="triangle"/>
-            </a:ln>
-          </p:spPr>
-          <p:style>
-            <a:lnRef idx="1">
-              <a:schemeClr val="accent1"/>
-            </a:lnRef>
-            <a:fillRef idx="0">
-              <a:schemeClr val="accent1"/>
-            </a:fillRef>
-            <a:effectRef idx="0">
-              <a:schemeClr val="accent1"/>
-            </a:effectRef>
-            <a:fontRef idx="minor">
+        </mc:Fallback>
+      </mc:AlternateContent>
+      <p:cxnSp>
+        <p:nvCxnSpPr>
+          <p:cNvPr id="63" name="直接连接符 62">
+            <a:extLst>
+              <a:ext uri="{FF2B5EF4-FFF2-40B4-BE49-F238E27FC236}">
+                <a16:creationId xmlns:a16="http://schemas.microsoft.com/office/drawing/2014/main" id="{E54FC1CE-A9F7-00EF-5631-5DBCBE356A26}"/>
+              </a:ext>
+            </a:extLst>
+          </p:cNvPr>
+          <p:cNvCxnSpPr>
+            <a:cxnSpLocks/>
+            <a:stCxn id="138" idx="3"/>
+          </p:cNvCxnSpPr>
+          <p:nvPr/>
+        </p:nvCxnSpPr>
+        <p:spPr>
+          <a:xfrm>
+            <a:off x="6530780" y="3150014"/>
+            <a:ext cx="5338272" cy="0"/>
+          </a:xfrm>
+          <a:prstGeom prst="line">
+            <a:avLst/>
+          </a:prstGeom>
+          <a:ln w="22225">
+            <a:solidFill>
               <a:schemeClr val="tx1"/>
-            </a:fontRef>
-          </p:style>
-        </p:cxnSp>
-      </p:grpSp>
+            </a:solidFill>
+            <a:tailEnd type="none"/>
+          </a:ln>
+        </p:spPr>
+        <p:style>
+          <a:lnRef idx="1">
+            <a:schemeClr val="accent1"/>
+          </a:lnRef>
+          <a:fillRef idx="0">
+            <a:schemeClr val="accent1"/>
+          </a:fillRef>
+          <a:effectRef idx="0">
+            <a:schemeClr val="accent1"/>
+          </a:effectRef>
+          <a:fontRef idx="minor">
+            <a:schemeClr val="tx1"/>
+          </a:fontRef>
+        </p:style>
+      </p:cxnSp>
     </p:spTree>
     <p:extLst>
       <p:ext uri="{BB962C8B-B14F-4D97-AF65-F5344CB8AC3E}">

--- a/PPT画图.pptx
+++ b/PPT画图.pptx
@@ -5,7 +5,7 @@
     <p:sldMasterId id="2147483648" r:id="rId1"/>
   </p:sldMasterIdLst>
   <p:notesMasterIdLst>
-    <p:notesMasterId r:id="rId14"/>
+    <p:notesMasterId r:id="rId15"/>
   </p:notesMasterIdLst>
   <p:sldIdLst>
     <p:sldId id="257" r:id="rId2"/>
@@ -20,6 +20,7 @@
     <p:sldId id="266" r:id="rId11"/>
     <p:sldId id="267" r:id="rId12"/>
     <p:sldId id="270" r:id="rId13"/>
+    <p:sldId id="271" r:id="rId14"/>
   </p:sldIdLst>
   <p:sldSz cx="12192000" cy="6858000"/>
   <p:notesSz cx="6858000" cy="9144000"/>
@@ -208,7 +209,7 @@
           <a:p>
             <a:fld id="{5C1E4601-79B1-425F-B925-3F7BE382BF19}" type="datetimeFigureOut">
               <a:rPr lang="zh-CN" altLang="en-US" smtClean="0"/>
-              <a:t>2026/03/16</a:t>
+              <a:t>2026/03/20</a:t>
             </a:fld>
             <a:endParaRPr lang="zh-CN" altLang="en-US"/>
           </a:p>
@@ -898,7 +899,7 @@
           <a:p>
             <a:fld id="{5D2E9D4A-569D-49DD-9DBB-BF425DFB68D5}" type="datetimeFigureOut">
               <a:rPr lang="zh-CN" altLang="en-US" smtClean="0"/>
-              <a:t>2026/03/16</a:t>
+              <a:t>2026/03/20</a:t>
             </a:fld>
             <a:endParaRPr lang="zh-CN" altLang="en-US"/>
           </a:p>
@@ -1096,7 +1097,7 @@
           <a:p>
             <a:fld id="{5D2E9D4A-569D-49DD-9DBB-BF425DFB68D5}" type="datetimeFigureOut">
               <a:rPr lang="zh-CN" altLang="en-US" smtClean="0"/>
-              <a:t>2026/03/16</a:t>
+              <a:t>2026/03/20</a:t>
             </a:fld>
             <a:endParaRPr lang="zh-CN" altLang="en-US"/>
           </a:p>
@@ -1304,7 +1305,7 @@
           <a:p>
             <a:fld id="{5D2E9D4A-569D-49DD-9DBB-BF425DFB68D5}" type="datetimeFigureOut">
               <a:rPr lang="zh-CN" altLang="en-US" smtClean="0"/>
-              <a:t>2026/03/16</a:t>
+              <a:t>2026/03/20</a:t>
             </a:fld>
             <a:endParaRPr lang="zh-CN" altLang="en-US"/>
           </a:p>
@@ -1502,7 +1503,7 @@
           <a:p>
             <a:fld id="{5D2E9D4A-569D-49DD-9DBB-BF425DFB68D5}" type="datetimeFigureOut">
               <a:rPr lang="zh-CN" altLang="en-US" smtClean="0"/>
-              <a:t>2026/03/16</a:t>
+              <a:t>2026/03/20</a:t>
             </a:fld>
             <a:endParaRPr lang="zh-CN" altLang="en-US"/>
           </a:p>
@@ -1777,7 +1778,7 @@
           <a:p>
             <a:fld id="{5D2E9D4A-569D-49DD-9DBB-BF425DFB68D5}" type="datetimeFigureOut">
               <a:rPr lang="zh-CN" altLang="en-US" smtClean="0"/>
-              <a:t>2026/03/16</a:t>
+              <a:t>2026/03/20</a:t>
             </a:fld>
             <a:endParaRPr lang="zh-CN" altLang="en-US"/>
           </a:p>
@@ -2042,7 +2043,7 @@
           <a:p>
             <a:fld id="{5D2E9D4A-569D-49DD-9DBB-BF425DFB68D5}" type="datetimeFigureOut">
               <a:rPr lang="zh-CN" altLang="en-US" smtClean="0"/>
-              <a:t>2026/03/16</a:t>
+              <a:t>2026/03/20</a:t>
             </a:fld>
             <a:endParaRPr lang="zh-CN" altLang="en-US"/>
           </a:p>
@@ -2454,7 +2455,7 @@
           <a:p>
             <a:fld id="{5D2E9D4A-569D-49DD-9DBB-BF425DFB68D5}" type="datetimeFigureOut">
               <a:rPr lang="zh-CN" altLang="en-US" smtClean="0"/>
-              <a:t>2026/03/16</a:t>
+              <a:t>2026/03/20</a:t>
             </a:fld>
             <a:endParaRPr lang="zh-CN" altLang="en-US"/>
           </a:p>
@@ -2595,7 +2596,7 @@
           <a:p>
             <a:fld id="{5D2E9D4A-569D-49DD-9DBB-BF425DFB68D5}" type="datetimeFigureOut">
               <a:rPr lang="zh-CN" altLang="en-US" smtClean="0"/>
-              <a:t>2026/03/16</a:t>
+              <a:t>2026/03/20</a:t>
             </a:fld>
             <a:endParaRPr lang="zh-CN" altLang="en-US"/>
           </a:p>
@@ -2708,7 +2709,7 @@
           <a:p>
             <a:fld id="{5D2E9D4A-569D-49DD-9DBB-BF425DFB68D5}" type="datetimeFigureOut">
               <a:rPr lang="zh-CN" altLang="en-US" smtClean="0"/>
-              <a:t>2026/03/16</a:t>
+              <a:t>2026/03/20</a:t>
             </a:fld>
             <a:endParaRPr lang="zh-CN" altLang="en-US"/>
           </a:p>
@@ -3019,7 +3020,7 @@
           <a:p>
             <a:fld id="{5D2E9D4A-569D-49DD-9DBB-BF425DFB68D5}" type="datetimeFigureOut">
               <a:rPr lang="zh-CN" altLang="en-US" smtClean="0"/>
-              <a:t>2026/03/16</a:t>
+              <a:t>2026/03/20</a:t>
             </a:fld>
             <a:endParaRPr lang="zh-CN" altLang="en-US"/>
           </a:p>
@@ -3307,7 +3308,7 @@
           <a:p>
             <a:fld id="{5D2E9D4A-569D-49DD-9DBB-BF425DFB68D5}" type="datetimeFigureOut">
               <a:rPr lang="zh-CN" altLang="en-US" smtClean="0"/>
-              <a:t>2026/03/16</a:t>
+              <a:t>2026/03/20</a:t>
             </a:fld>
             <a:endParaRPr lang="zh-CN" altLang="en-US"/>
           </a:p>
@@ -3548,7 +3549,7 @@
           <a:p>
             <a:fld id="{5D2E9D4A-569D-49DD-9DBB-BF425DFB68D5}" type="datetimeFigureOut">
               <a:rPr lang="zh-CN" altLang="en-US" smtClean="0"/>
-              <a:t>2026/03/16</a:t>
+              <a:t>2026/03/20</a:t>
             </a:fld>
             <a:endParaRPr lang="zh-CN" altLang="en-US"/>
           </a:p>
@@ -13282,6 +13283,1599 @@
     <p:extLst>
       <p:ext uri="{BB962C8B-B14F-4D97-AF65-F5344CB8AC3E}">
         <p14:creationId xmlns:p14="http://schemas.microsoft.com/office/powerpoint/2010/main" val="1176374743"/>
+      </p:ext>
+    </p:extLst>
+  </p:cSld>
+  <p:clrMapOvr>
+    <a:masterClrMapping/>
+  </p:clrMapOvr>
+</p:sld>
+</file>
+
+<file path=ppt/slides/slide13.xml><?xml version="1.0" encoding="utf-8"?>
+<p:sld xmlns:a="http://schemas.openxmlformats.org/drawingml/2006/main" xmlns:r="http://schemas.openxmlformats.org/officeDocument/2006/relationships" xmlns:p="http://schemas.openxmlformats.org/presentationml/2006/main">
+  <p:cSld>
+    <p:spTree>
+      <p:nvGrpSpPr>
+        <p:cNvPr id="1" name=""/>
+        <p:cNvGrpSpPr/>
+        <p:nvPr/>
+      </p:nvGrpSpPr>
+      <p:grpSpPr>
+        <a:xfrm>
+          <a:off x="0" y="0"/>
+          <a:ext cx="0" cy="0"/>
+          <a:chOff x="0" y="0"/>
+          <a:chExt cx="0" cy="0"/>
+        </a:xfrm>
+      </p:grpSpPr>
+      <p:sp>
+        <p:nvSpPr>
+          <p:cNvPr id="2" name="矩形 1">
+            <a:extLst>
+              <a:ext uri="{FF2B5EF4-FFF2-40B4-BE49-F238E27FC236}">
+                <a16:creationId xmlns:a16="http://schemas.microsoft.com/office/drawing/2014/main" id="{FAF74B55-9CAD-1606-ED15-3676731F4BE4}"/>
+              </a:ext>
+            </a:extLst>
+          </p:cNvPr>
+          <p:cNvSpPr/>
+          <p:nvPr/>
+        </p:nvSpPr>
+        <p:spPr>
+          <a:xfrm>
+            <a:off x="564337" y="941692"/>
+            <a:ext cx="1052187" cy="688931"/>
+          </a:xfrm>
+          <a:prstGeom prst="rect">
+            <a:avLst/>
+          </a:prstGeom>
+          <a:noFill/>
+          <a:ln w="15875">
+            <a:solidFill>
+              <a:schemeClr val="tx1"/>
+            </a:solidFill>
+          </a:ln>
+        </p:spPr>
+        <p:style>
+          <a:lnRef idx="2">
+            <a:schemeClr val="accent1">
+              <a:shade val="50000"/>
+            </a:schemeClr>
+          </a:lnRef>
+          <a:fillRef idx="1">
+            <a:schemeClr val="accent1"/>
+          </a:fillRef>
+          <a:effectRef idx="0">
+            <a:schemeClr val="accent1"/>
+          </a:effectRef>
+          <a:fontRef idx="minor">
+            <a:schemeClr val="lt1"/>
+          </a:fontRef>
+        </p:style>
+        <p:txBody>
+          <a:bodyPr rtlCol="0" anchor="ctr"/>
+          <a:lstStyle/>
+          <a:p>
+            <a:pPr algn="ctr"/>
+            <a:r>
+              <a:rPr lang="zh-CN" altLang="en-US" dirty="0">
+                <a:solidFill>
+                  <a:schemeClr val="tx1"/>
+                </a:solidFill>
+                <a:latin typeface="Times New Roman" panose="02020603050405020304" pitchFamily="18" charset="0"/>
+                <a:ea typeface="宋体" panose="02010600030101010101" pitchFamily="2" charset="-122"/>
+              </a:rPr>
+              <a:t>终端</a:t>
+            </a:r>
+          </a:p>
+        </p:txBody>
+      </p:sp>
+      <p:sp>
+        <p:nvSpPr>
+          <p:cNvPr id="3" name="矩形 2">
+            <a:extLst>
+              <a:ext uri="{FF2B5EF4-FFF2-40B4-BE49-F238E27FC236}">
+                <a16:creationId xmlns:a16="http://schemas.microsoft.com/office/drawing/2014/main" id="{37880E56-439D-3623-734F-166D14B9A507}"/>
+              </a:ext>
+            </a:extLst>
+          </p:cNvPr>
+          <p:cNvSpPr/>
+          <p:nvPr/>
+        </p:nvSpPr>
+        <p:spPr>
+          <a:xfrm>
+            <a:off x="3964736" y="941692"/>
+            <a:ext cx="1052187" cy="688931"/>
+          </a:xfrm>
+          <a:prstGeom prst="rect">
+            <a:avLst/>
+          </a:prstGeom>
+          <a:noFill/>
+          <a:ln w="15875">
+            <a:solidFill>
+              <a:schemeClr val="tx1"/>
+            </a:solidFill>
+          </a:ln>
+        </p:spPr>
+        <p:style>
+          <a:lnRef idx="2">
+            <a:schemeClr val="accent1">
+              <a:shade val="50000"/>
+            </a:schemeClr>
+          </a:lnRef>
+          <a:fillRef idx="1">
+            <a:schemeClr val="accent1"/>
+          </a:fillRef>
+          <a:effectRef idx="0">
+            <a:schemeClr val="accent1"/>
+          </a:effectRef>
+          <a:fontRef idx="minor">
+            <a:schemeClr val="lt1"/>
+          </a:fontRef>
+        </p:style>
+        <p:txBody>
+          <a:bodyPr rtlCol="0" anchor="ctr"/>
+          <a:lstStyle/>
+          <a:p>
+            <a:pPr algn="ctr"/>
+            <a:r>
+              <a:rPr lang="zh-CN" altLang="en-US" dirty="0">
+                <a:solidFill>
+                  <a:schemeClr val="tx1"/>
+                </a:solidFill>
+                <a:latin typeface="Times New Roman" panose="02020603050405020304" pitchFamily="18" charset="0"/>
+                <a:ea typeface="宋体" panose="02010600030101010101" pitchFamily="2" charset="-122"/>
+              </a:rPr>
+              <a:t>基站</a:t>
+            </a:r>
+          </a:p>
+        </p:txBody>
+      </p:sp>
+      <p:cxnSp>
+        <p:nvCxnSpPr>
+          <p:cNvPr id="4" name="直接箭头连接符 3">
+            <a:extLst>
+              <a:ext uri="{FF2B5EF4-FFF2-40B4-BE49-F238E27FC236}">
+                <a16:creationId xmlns:a16="http://schemas.microsoft.com/office/drawing/2014/main" id="{1913DAB9-D655-5DA2-C031-88903A3CC4CA}"/>
+              </a:ext>
+            </a:extLst>
+          </p:cNvPr>
+          <p:cNvCxnSpPr>
+            <a:stCxn id="2" idx="2"/>
+          </p:cNvCxnSpPr>
+          <p:nvPr/>
+        </p:nvCxnSpPr>
+        <p:spPr>
+          <a:xfrm flipH="1">
+            <a:off x="1090430" y="1630623"/>
+            <a:ext cx="1" cy="3600000"/>
+          </a:xfrm>
+          <a:prstGeom prst="straightConnector1">
+            <a:avLst/>
+          </a:prstGeom>
+          <a:ln w="15875">
+            <a:solidFill>
+              <a:schemeClr val="tx1"/>
+            </a:solidFill>
+            <a:tailEnd type="none"/>
+          </a:ln>
+        </p:spPr>
+        <p:style>
+          <a:lnRef idx="1">
+            <a:schemeClr val="accent1"/>
+          </a:lnRef>
+          <a:fillRef idx="0">
+            <a:schemeClr val="accent1"/>
+          </a:fillRef>
+          <a:effectRef idx="0">
+            <a:schemeClr val="accent1"/>
+          </a:effectRef>
+          <a:fontRef idx="minor">
+            <a:schemeClr val="tx1"/>
+          </a:fontRef>
+        </p:style>
+      </p:cxnSp>
+      <p:cxnSp>
+        <p:nvCxnSpPr>
+          <p:cNvPr id="5" name="直接箭头连接符 4">
+            <a:extLst>
+              <a:ext uri="{FF2B5EF4-FFF2-40B4-BE49-F238E27FC236}">
+                <a16:creationId xmlns:a16="http://schemas.microsoft.com/office/drawing/2014/main" id="{A0D5538B-DF7A-DE49-8ACE-232A1B0DB0E2}"/>
+              </a:ext>
+            </a:extLst>
+          </p:cNvPr>
+          <p:cNvCxnSpPr>
+            <a:stCxn id="3" idx="2"/>
+          </p:cNvCxnSpPr>
+          <p:nvPr/>
+        </p:nvCxnSpPr>
+        <p:spPr>
+          <a:xfrm>
+            <a:off x="4490830" y="1630623"/>
+            <a:ext cx="35490" cy="3600000"/>
+          </a:xfrm>
+          <a:prstGeom prst="straightConnector1">
+            <a:avLst/>
+          </a:prstGeom>
+          <a:ln w="15875">
+            <a:solidFill>
+              <a:schemeClr val="tx1"/>
+            </a:solidFill>
+            <a:tailEnd type="none"/>
+          </a:ln>
+        </p:spPr>
+        <p:style>
+          <a:lnRef idx="1">
+            <a:schemeClr val="accent1"/>
+          </a:lnRef>
+          <a:fillRef idx="0">
+            <a:schemeClr val="accent1"/>
+          </a:fillRef>
+          <a:effectRef idx="0">
+            <a:schemeClr val="accent1"/>
+          </a:effectRef>
+          <a:fontRef idx="minor">
+            <a:schemeClr val="tx1"/>
+          </a:fontRef>
+        </p:style>
+      </p:cxnSp>
+      <p:grpSp>
+        <p:nvGrpSpPr>
+          <p:cNvPr id="6" name="组合 5">
+            <a:extLst>
+              <a:ext uri="{FF2B5EF4-FFF2-40B4-BE49-F238E27FC236}">
+                <a16:creationId xmlns:a16="http://schemas.microsoft.com/office/drawing/2014/main" id="{E8D33E62-3DA5-7CA6-44F5-71504FFE0595}"/>
+              </a:ext>
+            </a:extLst>
+          </p:cNvPr>
+          <p:cNvGrpSpPr/>
+          <p:nvPr/>
+        </p:nvGrpSpPr>
+        <p:grpSpPr>
+          <a:xfrm>
+            <a:off x="1090429" y="2280755"/>
+            <a:ext cx="3418146" cy="822960"/>
+            <a:chOff x="7115756" y="3259756"/>
+            <a:chExt cx="3418146" cy="822960"/>
+          </a:xfrm>
+        </p:grpSpPr>
+        <p:cxnSp>
+          <p:nvCxnSpPr>
+            <p:cNvPr id="7" name="直接箭头连接符 6">
+              <a:extLst>
+                <a:ext uri="{FF2B5EF4-FFF2-40B4-BE49-F238E27FC236}">
+                  <a16:creationId xmlns:a16="http://schemas.microsoft.com/office/drawing/2014/main" id="{850D8C88-5497-0FBF-9297-B90EA25D2EEA}"/>
+                </a:ext>
+              </a:extLst>
+            </p:cNvPr>
+            <p:cNvCxnSpPr>
+              <a:cxnSpLocks/>
+            </p:cNvCxnSpPr>
+            <p:nvPr/>
+          </p:nvCxnSpPr>
+          <p:spPr>
+            <a:xfrm>
+              <a:off x="7115757" y="3259756"/>
+              <a:ext cx="3400399" cy="0"/>
+            </a:xfrm>
+            <a:prstGeom prst="straightConnector1">
+              <a:avLst/>
+            </a:prstGeom>
+            <a:ln w="15875">
+              <a:solidFill>
+                <a:schemeClr val="tx1"/>
+              </a:solidFill>
+              <a:tailEnd type="triangle"/>
+            </a:ln>
+          </p:spPr>
+          <p:style>
+            <a:lnRef idx="1">
+              <a:schemeClr val="accent1"/>
+            </a:lnRef>
+            <a:fillRef idx="0">
+              <a:schemeClr val="accent1"/>
+            </a:fillRef>
+            <a:effectRef idx="0">
+              <a:schemeClr val="accent1"/>
+            </a:effectRef>
+            <a:fontRef idx="minor">
+              <a:schemeClr val="tx1"/>
+            </a:fontRef>
+          </p:style>
+        </p:cxnSp>
+        <p:cxnSp>
+          <p:nvCxnSpPr>
+            <p:cNvPr id="8" name="直接箭头连接符 7">
+              <a:extLst>
+                <a:ext uri="{FF2B5EF4-FFF2-40B4-BE49-F238E27FC236}">
+                  <a16:creationId xmlns:a16="http://schemas.microsoft.com/office/drawing/2014/main" id="{A21DF994-39CF-E5B1-DD19-802BA4F85C96}"/>
+                </a:ext>
+              </a:extLst>
+            </p:cNvPr>
+            <p:cNvCxnSpPr>
+              <a:cxnSpLocks/>
+            </p:cNvCxnSpPr>
+            <p:nvPr/>
+          </p:nvCxnSpPr>
+          <p:spPr>
+            <a:xfrm flipH="1">
+              <a:off x="7115756" y="4082716"/>
+              <a:ext cx="3418146" cy="0"/>
+            </a:xfrm>
+            <a:prstGeom prst="straightConnector1">
+              <a:avLst/>
+            </a:prstGeom>
+            <a:ln w="15875">
+              <a:solidFill>
+                <a:schemeClr val="tx1"/>
+              </a:solidFill>
+              <a:tailEnd type="triangle"/>
+            </a:ln>
+          </p:spPr>
+          <p:style>
+            <a:lnRef idx="1">
+              <a:schemeClr val="accent1"/>
+            </a:lnRef>
+            <a:fillRef idx="0">
+              <a:schemeClr val="accent1"/>
+            </a:fillRef>
+            <a:effectRef idx="0">
+              <a:schemeClr val="accent1"/>
+            </a:effectRef>
+            <a:fontRef idx="minor">
+              <a:schemeClr val="tx1"/>
+            </a:fontRef>
+          </p:style>
+        </p:cxnSp>
+      </p:grpSp>
+      <p:sp>
+        <p:nvSpPr>
+          <p:cNvPr id="9" name="文本框 8">
+            <a:extLst>
+              <a:ext uri="{FF2B5EF4-FFF2-40B4-BE49-F238E27FC236}">
+                <a16:creationId xmlns:a16="http://schemas.microsoft.com/office/drawing/2014/main" id="{24864884-1762-5DBC-84F3-CD66F3E19D3C}"/>
+              </a:ext>
+            </a:extLst>
+          </p:cNvPr>
+          <p:cNvSpPr txBox="1"/>
+          <p:nvPr/>
+        </p:nvSpPr>
+        <p:spPr>
+          <a:xfrm>
+            <a:off x="1398182" y="1887482"/>
+            <a:ext cx="2865120" cy="369332"/>
+          </a:xfrm>
+          <a:prstGeom prst="rect">
+            <a:avLst/>
+          </a:prstGeom>
+          <a:noFill/>
+          <a:ln w="15875">
+            <a:noFill/>
+          </a:ln>
+        </p:spPr>
+        <p:txBody>
+          <a:bodyPr wrap="square" rtlCol="0" anchor="ctr" anchorCtr="1">
+            <a:spAutoFit/>
+          </a:bodyPr>
+          <a:lstStyle/>
+          <a:p>
+            <a:r>
+              <a:rPr lang="en-US" altLang="zh-CN" dirty="0" err="1">
+                <a:latin typeface="Times New Roman" panose="02020603050405020304" pitchFamily="18" charset="0"/>
+                <a:ea typeface="宋体" panose="02010600030101010101" pitchFamily="2" charset="-122"/>
+              </a:rPr>
+              <a:t>MsgA</a:t>
+            </a:r>
+            <a:r>
+              <a:rPr lang="zh-CN" altLang="en-US" dirty="0">
+                <a:latin typeface="Times New Roman" panose="02020603050405020304" pitchFamily="18" charset="0"/>
+                <a:ea typeface="宋体" panose="02010600030101010101" pitchFamily="2" charset="-122"/>
+              </a:rPr>
+              <a:t>：前导</a:t>
+            </a:r>
+            <a:r>
+              <a:rPr lang="en-US" altLang="zh-CN" dirty="0">
+                <a:latin typeface="Times New Roman" panose="02020603050405020304" pitchFamily="18" charset="0"/>
+                <a:ea typeface="宋体" panose="02010600030101010101" pitchFamily="2" charset="-122"/>
+              </a:rPr>
+              <a:t>+</a:t>
+            </a:r>
+            <a:r>
+              <a:rPr lang="zh-CN" altLang="en-US" dirty="0">
+                <a:latin typeface="Times New Roman" panose="02020603050405020304" pitchFamily="18" charset="0"/>
+                <a:ea typeface="宋体" panose="02010600030101010101" pitchFamily="2" charset="-122"/>
+              </a:rPr>
+              <a:t>短数据报文</a:t>
+            </a:r>
+          </a:p>
+        </p:txBody>
+      </p:sp>
+      <p:sp>
+        <p:nvSpPr>
+          <p:cNvPr id="10" name="文本框 9">
+            <a:extLst>
+              <a:ext uri="{FF2B5EF4-FFF2-40B4-BE49-F238E27FC236}">
+                <a16:creationId xmlns:a16="http://schemas.microsoft.com/office/drawing/2014/main" id="{27F11908-F8F2-B963-699E-303C38D49FA7}"/>
+              </a:ext>
+            </a:extLst>
+          </p:cNvPr>
+          <p:cNvSpPr txBox="1"/>
+          <p:nvPr/>
+        </p:nvSpPr>
+        <p:spPr>
+          <a:xfrm>
+            <a:off x="1386950" y="2723273"/>
+            <a:ext cx="2865120" cy="369332"/>
+          </a:xfrm>
+          <a:prstGeom prst="rect">
+            <a:avLst/>
+          </a:prstGeom>
+          <a:noFill/>
+          <a:ln w="15875">
+            <a:noFill/>
+          </a:ln>
+        </p:spPr>
+        <p:txBody>
+          <a:bodyPr wrap="square" rtlCol="0" anchor="ctr" anchorCtr="1">
+            <a:spAutoFit/>
+          </a:bodyPr>
+          <a:lstStyle/>
+          <a:p>
+            <a:r>
+              <a:rPr lang="en-US" altLang="zh-CN" dirty="0" err="1">
+                <a:latin typeface="Times New Roman" panose="02020603050405020304" pitchFamily="18" charset="0"/>
+                <a:ea typeface="宋体" panose="02010600030101010101" pitchFamily="2" charset="-122"/>
+              </a:rPr>
+              <a:t>MsgB</a:t>
+            </a:r>
+            <a:r>
+              <a:rPr lang="zh-CN" altLang="en-US" dirty="0">
+                <a:latin typeface="Times New Roman" panose="02020603050405020304" pitchFamily="18" charset="0"/>
+                <a:ea typeface="宋体" panose="02010600030101010101" pitchFamily="2" charset="-122"/>
+              </a:rPr>
+              <a:t>：竞争冲突解决</a:t>
+            </a:r>
+          </a:p>
+        </p:txBody>
+      </p:sp>
+      <p:sp>
+        <p:nvSpPr>
+          <p:cNvPr id="11" name="文本框 10">
+            <a:extLst>
+              <a:ext uri="{FF2B5EF4-FFF2-40B4-BE49-F238E27FC236}">
+                <a16:creationId xmlns:a16="http://schemas.microsoft.com/office/drawing/2014/main" id="{EE0046AE-100B-50B5-DD6B-0341B2C80BE0}"/>
+              </a:ext>
+            </a:extLst>
+          </p:cNvPr>
+          <p:cNvSpPr txBox="1"/>
+          <p:nvPr/>
+        </p:nvSpPr>
+        <p:spPr>
+          <a:xfrm>
+            <a:off x="1289874" y="5413202"/>
+            <a:ext cx="3397208" cy="369332"/>
+          </a:xfrm>
+          <a:prstGeom prst="rect">
+            <a:avLst/>
+          </a:prstGeom>
+          <a:noFill/>
+        </p:spPr>
+        <p:txBody>
+          <a:bodyPr wrap="square" rtlCol="0" anchor="ctr" anchorCtr="1">
+            <a:spAutoFit/>
+          </a:bodyPr>
+          <a:lstStyle/>
+          <a:p>
+            <a:r>
+              <a:rPr lang="zh-CN" altLang="en-US" dirty="0">
+                <a:latin typeface="Times New Roman" panose="02020603050405020304" pitchFamily="18" charset="0"/>
+                <a:ea typeface="宋体" panose="02010600030101010101" pitchFamily="2" charset="-122"/>
+              </a:rPr>
+              <a:t>两步</a:t>
+            </a:r>
+            <a:r>
+              <a:rPr lang="en-US" altLang="zh-CN" dirty="0">
+                <a:latin typeface="Times New Roman" panose="02020603050405020304" pitchFamily="18" charset="0"/>
+                <a:ea typeface="宋体" panose="02010600030101010101" pitchFamily="2" charset="-122"/>
+              </a:rPr>
+              <a:t>SDT </a:t>
+            </a:r>
+            <a:r>
+              <a:rPr lang="zh-CN" altLang="en-US" dirty="0">
+                <a:latin typeface="Times New Roman" panose="02020603050405020304" pitchFamily="18" charset="0"/>
+                <a:ea typeface="宋体" panose="02010600030101010101" pitchFamily="2" charset="-122"/>
+              </a:rPr>
+              <a:t>随机接入过程</a:t>
+            </a:r>
+          </a:p>
+        </p:txBody>
+      </p:sp>
+      <p:grpSp>
+        <p:nvGrpSpPr>
+          <p:cNvPr id="49" name="组合 48">
+            <a:extLst>
+              <a:ext uri="{FF2B5EF4-FFF2-40B4-BE49-F238E27FC236}">
+                <a16:creationId xmlns:a16="http://schemas.microsoft.com/office/drawing/2014/main" id="{8A0D1BE5-1E88-6D67-F90F-37591AA6F6B7}"/>
+              </a:ext>
+            </a:extLst>
+          </p:cNvPr>
+          <p:cNvGrpSpPr/>
+          <p:nvPr/>
+        </p:nvGrpSpPr>
+        <p:grpSpPr>
+          <a:xfrm>
+            <a:off x="6352464" y="941692"/>
+            <a:ext cx="4452586" cy="4840842"/>
+            <a:chOff x="6352464" y="941692"/>
+            <a:chExt cx="4452586" cy="4840842"/>
+          </a:xfrm>
+        </p:grpSpPr>
+        <p:sp>
+          <p:nvSpPr>
+            <p:cNvPr id="36" name="矩形 35">
+              <a:extLst>
+                <a:ext uri="{FF2B5EF4-FFF2-40B4-BE49-F238E27FC236}">
+                  <a16:creationId xmlns:a16="http://schemas.microsoft.com/office/drawing/2014/main" id="{7F5E2C5A-226B-DD28-299C-2DB1DAA22D3F}"/>
+                </a:ext>
+              </a:extLst>
+            </p:cNvPr>
+            <p:cNvSpPr/>
+            <p:nvPr/>
+          </p:nvSpPr>
+          <p:spPr>
+            <a:xfrm>
+              <a:off x="6878555" y="3029200"/>
+              <a:ext cx="3418147" cy="2198177"/>
+            </a:xfrm>
+            <a:prstGeom prst="rect">
+              <a:avLst/>
+            </a:prstGeom>
+            <a:solidFill>
+              <a:schemeClr val="accent6">
+                <a:lumMod val="20000"/>
+                <a:lumOff val="80000"/>
+              </a:schemeClr>
+            </a:solidFill>
+            <a:ln w="19050">
+              <a:noFill/>
+            </a:ln>
+          </p:spPr>
+          <p:style>
+            <a:lnRef idx="2">
+              <a:schemeClr val="accent1">
+                <a:shade val="15000"/>
+              </a:schemeClr>
+            </a:lnRef>
+            <a:fillRef idx="1">
+              <a:schemeClr val="accent1"/>
+            </a:fillRef>
+            <a:effectRef idx="0">
+              <a:schemeClr val="accent1"/>
+            </a:effectRef>
+            <a:fontRef idx="minor">
+              <a:schemeClr val="lt1"/>
+            </a:fontRef>
+          </p:style>
+          <p:txBody>
+            <a:bodyPr rtlCol="0" anchor="ctr"/>
+            <a:lstStyle/>
+            <a:p>
+              <a:pPr algn="ctr"/>
+              <a:endParaRPr lang="zh-CN" altLang="en-US" dirty="0" err="1">
+                <a:solidFill>
+                  <a:schemeClr val="accent6">
+                    <a:lumMod val="20000"/>
+                    <a:lumOff val="80000"/>
+                  </a:schemeClr>
+                </a:solidFill>
+              </a:endParaRPr>
+            </a:p>
+          </p:txBody>
+        </p:sp>
+        <p:sp>
+          <p:nvSpPr>
+            <p:cNvPr id="12" name="矩形 11">
+              <a:extLst>
+                <a:ext uri="{FF2B5EF4-FFF2-40B4-BE49-F238E27FC236}">
+                  <a16:creationId xmlns:a16="http://schemas.microsoft.com/office/drawing/2014/main" id="{176D8F29-DFA8-2FF0-34E7-11E2CC9E92B7}"/>
+                </a:ext>
+              </a:extLst>
+            </p:cNvPr>
+            <p:cNvSpPr/>
+            <p:nvPr/>
+          </p:nvSpPr>
+          <p:spPr>
+            <a:xfrm>
+              <a:off x="6352464" y="941692"/>
+              <a:ext cx="1052187" cy="688931"/>
+            </a:xfrm>
+            <a:prstGeom prst="rect">
+              <a:avLst/>
+            </a:prstGeom>
+            <a:noFill/>
+            <a:ln w="15875">
+              <a:solidFill>
+                <a:schemeClr val="tx1"/>
+              </a:solidFill>
+            </a:ln>
+          </p:spPr>
+          <p:style>
+            <a:lnRef idx="2">
+              <a:schemeClr val="accent1">
+                <a:shade val="50000"/>
+              </a:schemeClr>
+            </a:lnRef>
+            <a:fillRef idx="1">
+              <a:schemeClr val="accent1"/>
+            </a:fillRef>
+            <a:effectRef idx="0">
+              <a:schemeClr val="accent1"/>
+            </a:effectRef>
+            <a:fontRef idx="minor">
+              <a:schemeClr val="lt1"/>
+            </a:fontRef>
+          </p:style>
+          <p:txBody>
+            <a:bodyPr rtlCol="0" anchor="ctr"/>
+            <a:lstStyle/>
+            <a:p>
+              <a:pPr algn="ctr"/>
+              <a:r>
+                <a:rPr lang="zh-CN" altLang="en-US" dirty="0">
+                  <a:solidFill>
+                    <a:schemeClr val="tx1"/>
+                  </a:solidFill>
+                  <a:latin typeface="Times New Roman" panose="02020603050405020304" pitchFamily="18" charset="0"/>
+                  <a:ea typeface="宋体" panose="02010600030101010101" pitchFamily="2" charset="-122"/>
+                </a:rPr>
+                <a:t>终端</a:t>
+              </a:r>
+            </a:p>
+          </p:txBody>
+        </p:sp>
+        <p:sp>
+          <p:nvSpPr>
+            <p:cNvPr id="13" name="矩形 12">
+              <a:extLst>
+                <a:ext uri="{FF2B5EF4-FFF2-40B4-BE49-F238E27FC236}">
+                  <a16:creationId xmlns:a16="http://schemas.microsoft.com/office/drawing/2014/main" id="{A76D8C81-980A-098E-8A23-ECD8288553E9}"/>
+                </a:ext>
+              </a:extLst>
+            </p:cNvPr>
+            <p:cNvSpPr/>
+            <p:nvPr/>
+          </p:nvSpPr>
+          <p:spPr>
+            <a:xfrm>
+              <a:off x="9752863" y="941692"/>
+              <a:ext cx="1052187" cy="688931"/>
+            </a:xfrm>
+            <a:prstGeom prst="rect">
+              <a:avLst/>
+            </a:prstGeom>
+            <a:noFill/>
+            <a:ln w="15875">
+              <a:solidFill>
+                <a:schemeClr val="tx1"/>
+              </a:solidFill>
+            </a:ln>
+          </p:spPr>
+          <p:style>
+            <a:lnRef idx="2">
+              <a:schemeClr val="accent1">
+                <a:shade val="50000"/>
+              </a:schemeClr>
+            </a:lnRef>
+            <a:fillRef idx="1">
+              <a:schemeClr val="accent1"/>
+            </a:fillRef>
+            <a:effectRef idx="0">
+              <a:schemeClr val="accent1"/>
+            </a:effectRef>
+            <a:fontRef idx="minor">
+              <a:schemeClr val="lt1"/>
+            </a:fontRef>
+          </p:style>
+          <p:txBody>
+            <a:bodyPr rtlCol="0" anchor="ctr"/>
+            <a:lstStyle/>
+            <a:p>
+              <a:pPr algn="ctr"/>
+              <a:r>
+                <a:rPr lang="zh-CN" altLang="en-US" dirty="0">
+                  <a:solidFill>
+                    <a:schemeClr val="tx1"/>
+                  </a:solidFill>
+                  <a:latin typeface="Times New Roman" panose="02020603050405020304" pitchFamily="18" charset="0"/>
+                  <a:ea typeface="宋体" panose="02010600030101010101" pitchFamily="2" charset="-122"/>
+                </a:rPr>
+                <a:t>基站</a:t>
+              </a:r>
+            </a:p>
+          </p:txBody>
+        </p:sp>
+        <p:cxnSp>
+          <p:nvCxnSpPr>
+            <p:cNvPr id="14" name="直接箭头连接符 13">
+              <a:extLst>
+                <a:ext uri="{FF2B5EF4-FFF2-40B4-BE49-F238E27FC236}">
+                  <a16:creationId xmlns:a16="http://schemas.microsoft.com/office/drawing/2014/main" id="{7FB8CCE3-269B-EED1-89DE-C63E14EF9368}"/>
+                </a:ext>
+              </a:extLst>
+            </p:cNvPr>
+            <p:cNvCxnSpPr>
+              <a:stCxn id="12" idx="2"/>
+            </p:cNvCxnSpPr>
+            <p:nvPr/>
+          </p:nvCxnSpPr>
+          <p:spPr>
+            <a:xfrm flipH="1">
+              <a:off x="6878557" y="1630623"/>
+              <a:ext cx="1" cy="3600000"/>
+            </a:xfrm>
+            <a:prstGeom prst="straightConnector1">
+              <a:avLst/>
+            </a:prstGeom>
+            <a:ln w="15875">
+              <a:solidFill>
+                <a:schemeClr val="tx1"/>
+              </a:solidFill>
+              <a:tailEnd type="none"/>
+            </a:ln>
+          </p:spPr>
+          <p:style>
+            <a:lnRef idx="1">
+              <a:schemeClr val="accent1"/>
+            </a:lnRef>
+            <a:fillRef idx="0">
+              <a:schemeClr val="accent1"/>
+            </a:fillRef>
+            <a:effectRef idx="0">
+              <a:schemeClr val="accent1"/>
+            </a:effectRef>
+            <a:fontRef idx="minor">
+              <a:schemeClr val="tx1"/>
+            </a:fontRef>
+          </p:style>
+        </p:cxnSp>
+        <p:cxnSp>
+          <p:nvCxnSpPr>
+            <p:cNvPr id="15" name="直接箭头连接符 14">
+              <a:extLst>
+                <a:ext uri="{FF2B5EF4-FFF2-40B4-BE49-F238E27FC236}">
+                  <a16:creationId xmlns:a16="http://schemas.microsoft.com/office/drawing/2014/main" id="{DE2A5516-0DE3-B42F-3971-1DE955E34F5A}"/>
+                </a:ext>
+              </a:extLst>
+            </p:cNvPr>
+            <p:cNvCxnSpPr>
+              <a:stCxn id="13" idx="2"/>
+            </p:cNvCxnSpPr>
+            <p:nvPr/>
+          </p:nvCxnSpPr>
+          <p:spPr>
+            <a:xfrm>
+              <a:off x="10278957" y="1630623"/>
+              <a:ext cx="35490" cy="3600000"/>
+            </a:xfrm>
+            <a:prstGeom prst="straightConnector1">
+              <a:avLst/>
+            </a:prstGeom>
+            <a:ln w="15875">
+              <a:solidFill>
+                <a:schemeClr val="tx1"/>
+              </a:solidFill>
+              <a:tailEnd type="none"/>
+            </a:ln>
+          </p:spPr>
+          <p:style>
+            <a:lnRef idx="1">
+              <a:schemeClr val="accent1"/>
+            </a:lnRef>
+            <a:fillRef idx="0">
+              <a:schemeClr val="accent1"/>
+            </a:fillRef>
+            <a:effectRef idx="0">
+              <a:schemeClr val="accent1"/>
+            </a:effectRef>
+            <a:fontRef idx="minor">
+              <a:schemeClr val="tx1"/>
+            </a:fontRef>
+          </p:style>
+        </p:cxnSp>
+        <p:cxnSp>
+          <p:nvCxnSpPr>
+            <p:cNvPr id="17" name="直接箭头连接符 16">
+              <a:extLst>
+                <a:ext uri="{FF2B5EF4-FFF2-40B4-BE49-F238E27FC236}">
+                  <a16:creationId xmlns:a16="http://schemas.microsoft.com/office/drawing/2014/main" id="{62262542-5512-0C7D-6958-B5C9ED279449}"/>
+                </a:ext>
+              </a:extLst>
+            </p:cNvPr>
+            <p:cNvCxnSpPr>
+              <a:cxnSpLocks/>
+            </p:cNvCxnSpPr>
+            <p:nvPr/>
+          </p:nvCxnSpPr>
+          <p:spPr>
+            <a:xfrm>
+              <a:off x="6878557" y="2268644"/>
+              <a:ext cx="3400399" cy="0"/>
+            </a:xfrm>
+            <a:prstGeom prst="straightConnector1">
+              <a:avLst/>
+            </a:prstGeom>
+            <a:ln w="15875">
+              <a:solidFill>
+                <a:schemeClr val="tx1"/>
+              </a:solidFill>
+              <a:tailEnd type="triangle"/>
+            </a:ln>
+          </p:spPr>
+          <p:style>
+            <a:lnRef idx="1">
+              <a:schemeClr val="accent1"/>
+            </a:lnRef>
+            <a:fillRef idx="0">
+              <a:schemeClr val="accent1"/>
+            </a:fillRef>
+            <a:effectRef idx="0">
+              <a:schemeClr val="accent1"/>
+            </a:effectRef>
+            <a:fontRef idx="minor">
+              <a:schemeClr val="tx1"/>
+            </a:fontRef>
+          </p:style>
+        </p:cxnSp>
+        <p:sp>
+          <p:nvSpPr>
+            <p:cNvPr id="19" name="文本框 18">
+              <a:extLst>
+                <a:ext uri="{FF2B5EF4-FFF2-40B4-BE49-F238E27FC236}">
+                  <a16:creationId xmlns:a16="http://schemas.microsoft.com/office/drawing/2014/main" id="{5FB9BB3D-E613-4A56-CC64-CEAB170CC566}"/>
+                </a:ext>
+              </a:extLst>
+            </p:cNvPr>
+            <p:cNvSpPr txBox="1"/>
+            <p:nvPr/>
+          </p:nvSpPr>
+          <p:spPr>
+            <a:xfrm>
+              <a:off x="7186309" y="1954596"/>
+              <a:ext cx="2865120" cy="307777"/>
+            </a:xfrm>
+            <a:prstGeom prst="rect">
+              <a:avLst/>
+            </a:prstGeom>
+            <a:noFill/>
+            <a:ln w="15875">
+              <a:noFill/>
+            </a:ln>
+          </p:spPr>
+          <p:txBody>
+            <a:bodyPr wrap="square" rtlCol="0" anchor="ctr" anchorCtr="1">
+              <a:spAutoFit/>
+            </a:bodyPr>
+            <a:lstStyle/>
+            <a:p>
+              <a:r>
+                <a:rPr lang="en-US" altLang="zh-CN" sz="1400" dirty="0" err="1">
+                  <a:latin typeface="Times New Roman" panose="02020603050405020304" pitchFamily="18" charset="0"/>
+                  <a:ea typeface="宋体" panose="02010600030101010101" pitchFamily="2" charset="-122"/>
+                </a:rPr>
+                <a:t>MsgA</a:t>
+              </a:r>
+              <a:r>
+                <a:rPr lang="zh-CN" altLang="en-US" sz="1400" dirty="0">
+                  <a:latin typeface="Times New Roman" panose="02020603050405020304" pitchFamily="18" charset="0"/>
+                  <a:ea typeface="宋体" panose="02010600030101010101" pitchFamily="2" charset="-122"/>
+                </a:rPr>
+                <a:t>：前导</a:t>
+              </a:r>
+              <a:r>
+                <a:rPr lang="en-US" altLang="zh-CN" sz="1400" dirty="0">
+                  <a:latin typeface="Times New Roman" panose="02020603050405020304" pitchFamily="18" charset="0"/>
+                  <a:ea typeface="宋体" panose="02010600030101010101" pitchFamily="2" charset="-122"/>
+                </a:rPr>
+                <a:t>+</a:t>
+              </a:r>
+              <a:r>
+                <a:rPr lang="zh-CN" altLang="en-US" sz="1400" dirty="0">
+                  <a:latin typeface="Times New Roman" panose="02020603050405020304" pitchFamily="18" charset="0"/>
+                  <a:ea typeface="宋体" panose="02010600030101010101" pitchFamily="2" charset="-122"/>
+                </a:rPr>
+                <a:t>短数据报文</a:t>
+              </a:r>
+            </a:p>
+          </p:txBody>
+        </p:sp>
+        <p:grpSp>
+          <p:nvGrpSpPr>
+            <p:cNvPr id="22" name="组合 21">
+              <a:extLst>
+                <a:ext uri="{FF2B5EF4-FFF2-40B4-BE49-F238E27FC236}">
+                  <a16:creationId xmlns:a16="http://schemas.microsoft.com/office/drawing/2014/main" id="{25AF55C4-FDF4-B96C-5CD4-726180D93724}"/>
+                </a:ext>
+              </a:extLst>
+            </p:cNvPr>
+            <p:cNvGrpSpPr/>
+            <p:nvPr/>
+          </p:nvGrpSpPr>
+          <p:grpSpPr>
+            <a:xfrm>
+              <a:off x="6878556" y="2463380"/>
+              <a:ext cx="3418146" cy="313329"/>
+              <a:chOff x="6878556" y="2790386"/>
+              <a:chExt cx="3418146" cy="313329"/>
+            </a:xfrm>
+          </p:grpSpPr>
+          <p:cxnSp>
+            <p:nvCxnSpPr>
+              <p:cNvPr id="18" name="直接箭头连接符 17">
+                <a:extLst>
+                  <a:ext uri="{FF2B5EF4-FFF2-40B4-BE49-F238E27FC236}">
+                    <a16:creationId xmlns:a16="http://schemas.microsoft.com/office/drawing/2014/main" id="{F73CFC75-8265-D9A4-A699-DC35974921D2}"/>
+                  </a:ext>
+                </a:extLst>
+              </p:cNvPr>
+              <p:cNvCxnSpPr>
+                <a:cxnSpLocks/>
+              </p:cNvCxnSpPr>
+              <p:nvPr/>
+            </p:nvCxnSpPr>
+            <p:spPr>
+              <a:xfrm flipH="1">
+                <a:off x="6878556" y="3103715"/>
+                <a:ext cx="3418146" cy="0"/>
+              </a:xfrm>
+              <a:prstGeom prst="straightConnector1">
+                <a:avLst/>
+              </a:prstGeom>
+              <a:ln w="15875">
+                <a:solidFill>
+                  <a:schemeClr val="tx1"/>
+                </a:solidFill>
+                <a:tailEnd type="triangle"/>
+              </a:ln>
+            </p:spPr>
+            <p:style>
+              <a:lnRef idx="1">
+                <a:schemeClr val="accent1"/>
+              </a:lnRef>
+              <a:fillRef idx="0">
+                <a:schemeClr val="accent1"/>
+              </a:fillRef>
+              <a:effectRef idx="0">
+                <a:schemeClr val="accent1"/>
+              </a:effectRef>
+              <a:fontRef idx="minor">
+                <a:schemeClr val="tx1"/>
+              </a:fontRef>
+            </p:style>
+          </p:cxnSp>
+          <p:sp>
+            <p:nvSpPr>
+              <p:cNvPr id="20" name="文本框 19">
+                <a:extLst>
+                  <a:ext uri="{FF2B5EF4-FFF2-40B4-BE49-F238E27FC236}">
+                    <a16:creationId xmlns:a16="http://schemas.microsoft.com/office/drawing/2014/main" id="{34CE7869-80FF-622D-3978-DDB44692EC2E}"/>
+                  </a:ext>
+                </a:extLst>
+              </p:cNvPr>
+              <p:cNvSpPr txBox="1"/>
+              <p:nvPr/>
+            </p:nvSpPr>
+            <p:spPr>
+              <a:xfrm>
+                <a:off x="7175077" y="2790386"/>
+                <a:ext cx="2865120" cy="307777"/>
+              </a:xfrm>
+              <a:prstGeom prst="rect">
+                <a:avLst/>
+              </a:prstGeom>
+              <a:noFill/>
+              <a:ln w="15875">
+                <a:noFill/>
+              </a:ln>
+            </p:spPr>
+            <p:txBody>
+              <a:bodyPr wrap="square" rtlCol="0" anchor="ctr" anchorCtr="1">
+                <a:spAutoFit/>
+              </a:bodyPr>
+              <a:lstStyle/>
+              <a:p>
+                <a:r>
+                  <a:rPr lang="en-US" altLang="zh-CN" sz="1400" dirty="0" err="1">
+                    <a:latin typeface="Times New Roman" panose="02020603050405020304" pitchFamily="18" charset="0"/>
+                    <a:ea typeface="宋体" panose="02010600030101010101" pitchFamily="2" charset="-122"/>
+                  </a:rPr>
+                  <a:t>MsgB</a:t>
+                </a:r>
+                <a:r>
+                  <a:rPr lang="zh-CN" altLang="en-US" sz="1400" dirty="0">
+                    <a:latin typeface="Times New Roman" panose="02020603050405020304" pitchFamily="18" charset="0"/>
+                    <a:ea typeface="宋体" panose="02010600030101010101" pitchFamily="2" charset="-122"/>
+                  </a:rPr>
+                  <a:t>：竞争冲突解决</a:t>
+                </a:r>
+              </a:p>
+            </p:txBody>
+          </p:sp>
+        </p:grpSp>
+        <p:sp>
+          <p:nvSpPr>
+            <p:cNvPr id="21" name="文本框 20">
+              <a:extLst>
+                <a:ext uri="{FF2B5EF4-FFF2-40B4-BE49-F238E27FC236}">
+                  <a16:creationId xmlns:a16="http://schemas.microsoft.com/office/drawing/2014/main" id="{EBDED82C-FCED-DDDB-21E0-7D433B07420C}"/>
+                </a:ext>
+              </a:extLst>
+            </p:cNvPr>
+            <p:cNvSpPr txBox="1"/>
+            <p:nvPr/>
+          </p:nvSpPr>
+          <p:spPr>
+            <a:xfrm>
+              <a:off x="7078001" y="5413202"/>
+              <a:ext cx="3397208" cy="369332"/>
+            </a:xfrm>
+            <a:prstGeom prst="rect">
+              <a:avLst/>
+            </a:prstGeom>
+            <a:noFill/>
+          </p:spPr>
+          <p:txBody>
+            <a:bodyPr wrap="square" rtlCol="0" anchor="ctr" anchorCtr="1">
+              <a:spAutoFit/>
+            </a:bodyPr>
+            <a:lstStyle/>
+            <a:p>
+              <a:r>
+                <a:rPr lang="en-US" altLang="zh-CN" dirty="0">
+                  <a:latin typeface="Times New Roman" panose="02020603050405020304" pitchFamily="18" charset="0"/>
+                  <a:ea typeface="宋体" panose="02010600030101010101" pitchFamily="2" charset="-122"/>
+                </a:rPr>
+                <a:t>SAST </a:t>
+              </a:r>
+              <a:r>
+                <a:rPr lang="zh-CN" altLang="en-US" dirty="0">
+                  <a:latin typeface="Times New Roman" panose="02020603050405020304" pitchFamily="18" charset="0"/>
+                  <a:ea typeface="宋体" panose="02010600030101010101" pitchFamily="2" charset="-122"/>
+                </a:rPr>
+                <a:t>随机接入过程</a:t>
+              </a:r>
+            </a:p>
+          </p:txBody>
+        </p:sp>
+        <p:cxnSp>
+          <p:nvCxnSpPr>
+            <p:cNvPr id="25" name="直接箭头连接符 24">
+              <a:extLst>
+                <a:ext uri="{FF2B5EF4-FFF2-40B4-BE49-F238E27FC236}">
+                  <a16:creationId xmlns:a16="http://schemas.microsoft.com/office/drawing/2014/main" id="{1A6566DF-658E-BCD2-BBBB-BD302C37D7DB}"/>
+                </a:ext>
+              </a:extLst>
+            </p:cNvPr>
+            <p:cNvCxnSpPr>
+              <a:cxnSpLocks/>
+            </p:cNvCxnSpPr>
+            <p:nvPr/>
+          </p:nvCxnSpPr>
+          <p:spPr>
+            <a:xfrm>
+              <a:off x="6878557" y="3492747"/>
+              <a:ext cx="3400399" cy="0"/>
+            </a:xfrm>
+            <a:prstGeom prst="straightConnector1">
+              <a:avLst/>
+            </a:prstGeom>
+            <a:ln w="15875">
+              <a:solidFill>
+                <a:schemeClr val="tx1"/>
+              </a:solidFill>
+              <a:tailEnd type="triangle"/>
+            </a:ln>
+          </p:spPr>
+          <p:style>
+            <a:lnRef idx="1">
+              <a:schemeClr val="accent1"/>
+            </a:lnRef>
+            <a:fillRef idx="0">
+              <a:schemeClr val="accent1"/>
+            </a:fillRef>
+            <a:effectRef idx="0">
+              <a:schemeClr val="accent1"/>
+            </a:effectRef>
+            <a:fontRef idx="minor">
+              <a:schemeClr val="tx1"/>
+            </a:fontRef>
+          </p:style>
+        </p:cxnSp>
+        <p:sp>
+          <p:nvSpPr>
+            <p:cNvPr id="26" name="文本框 25">
+              <a:extLst>
+                <a:ext uri="{FF2B5EF4-FFF2-40B4-BE49-F238E27FC236}">
+                  <a16:creationId xmlns:a16="http://schemas.microsoft.com/office/drawing/2014/main" id="{8EB771ED-08DA-22CD-53ED-6C15B4289303}"/>
+                </a:ext>
+              </a:extLst>
+            </p:cNvPr>
+            <p:cNvSpPr txBox="1"/>
+            <p:nvPr/>
+          </p:nvSpPr>
+          <p:spPr>
+            <a:xfrm>
+              <a:off x="7155069" y="3226683"/>
+              <a:ext cx="2865120" cy="276999"/>
+            </a:xfrm>
+            <a:prstGeom prst="rect">
+              <a:avLst/>
+            </a:prstGeom>
+            <a:noFill/>
+            <a:ln w="15875">
+              <a:noFill/>
+            </a:ln>
+          </p:spPr>
+          <p:txBody>
+            <a:bodyPr wrap="square" rtlCol="0" anchor="ctr" anchorCtr="1">
+              <a:spAutoFit/>
+            </a:bodyPr>
+            <a:lstStyle/>
+            <a:p>
+              <a:r>
+                <a:rPr lang="zh-CN" altLang="en-US" sz="1200" dirty="0">
+                  <a:latin typeface="Times New Roman" panose="02020603050405020304" pitchFamily="18" charset="0"/>
+                  <a:ea typeface="宋体" panose="02010600030101010101" pitchFamily="2" charset="-122"/>
+                </a:rPr>
+                <a:t>连续短数据报文</a:t>
+              </a:r>
+            </a:p>
+          </p:txBody>
+        </p:sp>
+        <p:grpSp>
+          <p:nvGrpSpPr>
+            <p:cNvPr id="27" name="组合 26">
+              <a:extLst>
+                <a:ext uri="{FF2B5EF4-FFF2-40B4-BE49-F238E27FC236}">
+                  <a16:creationId xmlns:a16="http://schemas.microsoft.com/office/drawing/2014/main" id="{51F3020A-06C1-7A28-E199-9BD6F5FB5EFE}"/>
+                </a:ext>
+              </a:extLst>
+            </p:cNvPr>
+            <p:cNvGrpSpPr/>
+            <p:nvPr/>
+          </p:nvGrpSpPr>
+          <p:grpSpPr>
+            <a:xfrm>
+              <a:off x="6878556" y="3533314"/>
+              <a:ext cx="3418146" cy="276999"/>
+              <a:chOff x="6878556" y="2836055"/>
+              <a:chExt cx="3418146" cy="276999"/>
+            </a:xfrm>
+          </p:grpSpPr>
+          <p:cxnSp>
+            <p:nvCxnSpPr>
+              <p:cNvPr id="28" name="直接箭头连接符 27">
+                <a:extLst>
+                  <a:ext uri="{FF2B5EF4-FFF2-40B4-BE49-F238E27FC236}">
+                    <a16:creationId xmlns:a16="http://schemas.microsoft.com/office/drawing/2014/main" id="{A16318ED-F6E1-5BDB-A629-D25D846FBA32}"/>
+                  </a:ext>
+                </a:extLst>
+              </p:cNvPr>
+              <p:cNvCxnSpPr>
+                <a:cxnSpLocks/>
+              </p:cNvCxnSpPr>
+              <p:nvPr/>
+            </p:nvCxnSpPr>
+            <p:spPr>
+              <a:xfrm flipH="1">
+                <a:off x="6878556" y="3103715"/>
+                <a:ext cx="3418146" cy="0"/>
+              </a:xfrm>
+              <a:prstGeom prst="straightConnector1">
+                <a:avLst/>
+              </a:prstGeom>
+              <a:ln w="15875">
+                <a:solidFill>
+                  <a:schemeClr val="tx1"/>
+                </a:solidFill>
+                <a:tailEnd type="triangle"/>
+              </a:ln>
+            </p:spPr>
+            <p:style>
+              <a:lnRef idx="1">
+                <a:schemeClr val="accent1"/>
+              </a:lnRef>
+              <a:fillRef idx="0">
+                <a:schemeClr val="accent1"/>
+              </a:fillRef>
+              <a:effectRef idx="0">
+                <a:schemeClr val="accent1"/>
+              </a:effectRef>
+              <a:fontRef idx="minor">
+                <a:schemeClr val="tx1"/>
+              </a:fontRef>
+            </p:style>
+          </p:cxnSp>
+          <p:sp>
+            <p:nvSpPr>
+              <p:cNvPr id="29" name="文本框 28">
+                <a:extLst>
+                  <a:ext uri="{FF2B5EF4-FFF2-40B4-BE49-F238E27FC236}">
+                    <a16:creationId xmlns:a16="http://schemas.microsoft.com/office/drawing/2014/main" id="{FA06B776-C17D-FF31-C942-39FCA93BF7F4}"/>
+                  </a:ext>
+                </a:extLst>
+              </p:cNvPr>
+              <p:cNvSpPr txBox="1"/>
+              <p:nvPr/>
+            </p:nvSpPr>
+            <p:spPr>
+              <a:xfrm>
+                <a:off x="7175077" y="2836055"/>
+                <a:ext cx="2865120" cy="276999"/>
+              </a:xfrm>
+              <a:prstGeom prst="rect">
+                <a:avLst/>
+              </a:prstGeom>
+              <a:noFill/>
+              <a:ln w="15875">
+                <a:noFill/>
+              </a:ln>
+            </p:spPr>
+            <p:txBody>
+              <a:bodyPr wrap="square" rtlCol="0" anchor="ctr" anchorCtr="1">
+                <a:spAutoFit/>
+              </a:bodyPr>
+              <a:lstStyle/>
+              <a:p>
+                <a:r>
+                  <a:rPr lang="en-US" altLang="zh-CN" sz="1200" dirty="0">
+                    <a:latin typeface="Times New Roman" panose="02020603050405020304" pitchFamily="18" charset="0"/>
+                    <a:ea typeface="宋体" panose="02010600030101010101" pitchFamily="2" charset="-122"/>
+                  </a:rPr>
+                  <a:t>ACK</a:t>
+                </a:r>
+                <a:r>
+                  <a:rPr lang="zh-CN" altLang="en-US" sz="1200" dirty="0">
+                    <a:latin typeface="Times New Roman" panose="02020603050405020304" pitchFamily="18" charset="0"/>
+                    <a:ea typeface="宋体" panose="02010600030101010101" pitchFamily="2" charset="-122"/>
+                  </a:rPr>
+                  <a:t>或</a:t>
+                </a:r>
+                <a:r>
+                  <a:rPr lang="en-US" altLang="zh-CN" sz="1200" dirty="0">
+                    <a:latin typeface="Times New Roman" panose="02020603050405020304" pitchFamily="18" charset="0"/>
+                    <a:ea typeface="宋体" panose="02010600030101010101" pitchFamily="2" charset="-122"/>
+                  </a:rPr>
+                  <a:t>NACK</a:t>
+                </a:r>
+                <a:r>
+                  <a:rPr lang="zh-CN" altLang="en-US" sz="1200" dirty="0">
+                    <a:latin typeface="Times New Roman" panose="02020603050405020304" pitchFamily="18" charset="0"/>
+                    <a:ea typeface="宋体" panose="02010600030101010101" pitchFamily="2" charset="-122"/>
+                  </a:rPr>
+                  <a:t>确认报文</a:t>
+                </a:r>
+              </a:p>
+            </p:txBody>
+          </p:sp>
+        </p:grpSp>
+        <p:sp>
+          <p:nvSpPr>
+            <p:cNvPr id="37" name="文本框 36">
+              <a:extLst>
+                <a:ext uri="{FF2B5EF4-FFF2-40B4-BE49-F238E27FC236}">
+                  <a16:creationId xmlns:a16="http://schemas.microsoft.com/office/drawing/2014/main" id="{52251827-91E2-95CB-EFB0-8EADBA708DEC}"/>
+                </a:ext>
+              </a:extLst>
+            </p:cNvPr>
+            <p:cNvSpPr txBox="1"/>
+            <p:nvPr/>
+          </p:nvSpPr>
+          <p:spPr>
+            <a:xfrm>
+              <a:off x="8133295" y="3922796"/>
+              <a:ext cx="708509" cy="369332"/>
+            </a:xfrm>
+            <a:prstGeom prst="rect">
+              <a:avLst/>
+            </a:prstGeom>
+            <a:noFill/>
+          </p:spPr>
+          <p:txBody>
+            <a:bodyPr wrap="square" rtlCol="0" anchor="ctr" anchorCtr="1">
+              <a:spAutoFit/>
+            </a:bodyPr>
+            <a:lstStyle/>
+            <a:p>
+              <a:pPr algn="ctr"/>
+              <a:r>
+                <a:rPr lang="en-US" altLang="zh-CN" dirty="0">
+                  <a:latin typeface="宋体" panose="02010600030101010101" pitchFamily="2" charset="-122"/>
+                  <a:ea typeface="宋体" panose="02010600030101010101" pitchFamily="2" charset="-122"/>
+                </a:rPr>
+                <a:t>…</a:t>
+              </a:r>
+              <a:endParaRPr lang="zh-CN" altLang="en-US" dirty="0">
+                <a:latin typeface="宋体" panose="02010600030101010101" pitchFamily="2" charset="-122"/>
+                <a:ea typeface="宋体" panose="02010600030101010101" pitchFamily="2" charset="-122"/>
+              </a:endParaRPr>
+            </a:p>
+          </p:txBody>
+        </p:sp>
+        <p:cxnSp>
+          <p:nvCxnSpPr>
+            <p:cNvPr id="43" name="直接箭头连接符 42">
+              <a:extLst>
+                <a:ext uri="{FF2B5EF4-FFF2-40B4-BE49-F238E27FC236}">
+                  <a16:creationId xmlns:a16="http://schemas.microsoft.com/office/drawing/2014/main" id="{293B25B0-2E2D-2A0E-FF85-C392240B7794}"/>
+                </a:ext>
+              </a:extLst>
+            </p:cNvPr>
+            <p:cNvCxnSpPr>
+              <a:cxnSpLocks/>
+            </p:cNvCxnSpPr>
+            <p:nvPr/>
+          </p:nvCxnSpPr>
+          <p:spPr>
+            <a:xfrm>
+              <a:off x="6878557" y="4463772"/>
+              <a:ext cx="3400399" cy="0"/>
+            </a:xfrm>
+            <a:prstGeom prst="straightConnector1">
+              <a:avLst/>
+            </a:prstGeom>
+            <a:ln w="15875">
+              <a:solidFill>
+                <a:schemeClr val="tx1"/>
+              </a:solidFill>
+              <a:tailEnd type="triangle"/>
+            </a:ln>
+          </p:spPr>
+          <p:style>
+            <a:lnRef idx="1">
+              <a:schemeClr val="accent1"/>
+            </a:lnRef>
+            <a:fillRef idx="0">
+              <a:schemeClr val="accent1"/>
+            </a:fillRef>
+            <a:effectRef idx="0">
+              <a:schemeClr val="accent1"/>
+            </a:effectRef>
+            <a:fontRef idx="minor">
+              <a:schemeClr val="tx1"/>
+            </a:fontRef>
+          </p:style>
+        </p:cxnSp>
+        <p:sp>
+          <p:nvSpPr>
+            <p:cNvPr id="44" name="文本框 43">
+              <a:extLst>
+                <a:ext uri="{FF2B5EF4-FFF2-40B4-BE49-F238E27FC236}">
+                  <a16:creationId xmlns:a16="http://schemas.microsoft.com/office/drawing/2014/main" id="{0CE001CF-F569-1AF2-ED23-8541AB3D9FD5}"/>
+                </a:ext>
+              </a:extLst>
+            </p:cNvPr>
+            <p:cNvSpPr txBox="1"/>
+            <p:nvPr/>
+          </p:nvSpPr>
+          <p:spPr>
+            <a:xfrm>
+              <a:off x="7155069" y="4197708"/>
+              <a:ext cx="2865120" cy="276999"/>
+            </a:xfrm>
+            <a:prstGeom prst="rect">
+              <a:avLst/>
+            </a:prstGeom>
+            <a:noFill/>
+            <a:ln w="15875">
+              <a:noFill/>
+            </a:ln>
+          </p:spPr>
+          <p:txBody>
+            <a:bodyPr wrap="square" rtlCol="0" anchor="ctr" anchorCtr="1">
+              <a:spAutoFit/>
+            </a:bodyPr>
+            <a:lstStyle/>
+            <a:p>
+              <a:r>
+                <a:rPr lang="zh-CN" altLang="en-US" sz="1200" dirty="0">
+                  <a:latin typeface="Times New Roman" panose="02020603050405020304" pitchFamily="18" charset="0"/>
+                  <a:ea typeface="宋体" panose="02010600030101010101" pitchFamily="2" charset="-122"/>
+                </a:rPr>
+                <a:t>连续短数据报文</a:t>
+              </a:r>
+            </a:p>
+          </p:txBody>
+        </p:sp>
+        <p:grpSp>
+          <p:nvGrpSpPr>
+            <p:cNvPr id="45" name="组合 44">
+              <a:extLst>
+                <a:ext uri="{FF2B5EF4-FFF2-40B4-BE49-F238E27FC236}">
+                  <a16:creationId xmlns:a16="http://schemas.microsoft.com/office/drawing/2014/main" id="{FAEA2D51-D3E2-9CD5-EF17-CDBF0F051FAD}"/>
+                </a:ext>
+              </a:extLst>
+            </p:cNvPr>
+            <p:cNvGrpSpPr/>
+            <p:nvPr/>
+          </p:nvGrpSpPr>
+          <p:grpSpPr>
+            <a:xfrm>
+              <a:off x="6878556" y="4504339"/>
+              <a:ext cx="3418146" cy="276999"/>
+              <a:chOff x="6878556" y="2836055"/>
+              <a:chExt cx="3418146" cy="276999"/>
+            </a:xfrm>
+          </p:grpSpPr>
+          <p:cxnSp>
+            <p:nvCxnSpPr>
+              <p:cNvPr id="46" name="直接箭头连接符 45">
+                <a:extLst>
+                  <a:ext uri="{FF2B5EF4-FFF2-40B4-BE49-F238E27FC236}">
+                    <a16:creationId xmlns:a16="http://schemas.microsoft.com/office/drawing/2014/main" id="{5CDF9EDC-BEB4-8022-C3F6-7CD719D5D5CA}"/>
+                  </a:ext>
+                </a:extLst>
+              </p:cNvPr>
+              <p:cNvCxnSpPr>
+                <a:cxnSpLocks/>
+              </p:cNvCxnSpPr>
+              <p:nvPr/>
+            </p:nvCxnSpPr>
+            <p:spPr>
+              <a:xfrm flipH="1">
+                <a:off x="6878556" y="3103715"/>
+                <a:ext cx="3418146" cy="0"/>
+              </a:xfrm>
+              <a:prstGeom prst="straightConnector1">
+                <a:avLst/>
+              </a:prstGeom>
+              <a:ln w="15875">
+                <a:solidFill>
+                  <a:schemeClr val="tx1"/>
+                </a:solidFill>
+                <a:tailEnd type="triangle"/>
+              </a:ln>
+            </p:spPr>
+            <p:style>
+              <a:lnRef idx="1">
+                <a:schemeClr val="accent1"/>
+              </a:lnRef>
+              <a:fillRef idx="0">
+                <a:schemeClr val="accent1"/>
+              </a:fillRef>
+              <a:effectRef idx="0">
+                <a:schemeClr val="accent1"/>
+              </a:effectRef>
+              <a:fontRef idx="minor">
+                <a:schemeClr val="tx1"/>
+              </a:fontRef>
+            </p:style>
+          </p:cxnSp>
+          <p:sp>
+            <p:nvSpPr>
+              <p:cNvPr id="47" name="文本框 46">
+                <a:extLst>
+                  <a:ext uri="{FF2B5EF4-FFF2-40B4-BE49-F238E27FC236}">
+                    <a16:creationId xmlns:a16="http://schemas.microsoft.com/office/drawing/2014/main" id="{2297487A-18A8-80BF-4368-5DFAFA648366}"/>
+                  </a:ext>
+                </a:extLst>
+              </p:cNvPr>
+              <p:cNvSpPr txBox="1"/>
+              <p:nvPr/>
+            </p:nvSpPr>
+            <p:spPr>
+              <a:xfrm>
+                <a:off x="7175077" y="2836055"/>
+                <a:ext cx="2865120" cy="276999"/>
+              </a:xfrm>
+              <a:prstGeom prst="rect">
+                <a:avLst/>
+              </a:prstGeom>
+              <a:noFill/>
+              <a:ln w="15875">
+                <a:noFill/>
+              </a:ln>
+            </p:spPr>
+            <p:txBody>
+              <a:bodyPr wrap="square" rtlCol="0" anchor="ctr" anchorCtr="1">
+                <a:spAutoFit/>
+              </a:bodyPr>
+              <a:lstStyle/>
+              <a:p>
+                <a:r>
+                  <a:rPr lang="en-US" altLang="zh-CN" sz="1200" dirty="0">
+                    <a:latin typeface="Times New Roman" panose="02020603050405020304" pitchFamily="18" charset="0"/>
+                    <a:ea typeface="宋体" panose="02010600030101010101" pitchFamily="2" charset="-122"/>
+                  </a:rPr>
+                  <a:t>ACK</a:t>
+                </a:r>
+                <a:r>
+                  <a:rPr lang="zh-CN" altLang="en-US" sz="1200" dirty="0">
+                    <a:latin typeface="Times New Roman" panose="02020603050405020304" pitchFamily="18" charset="0"/>
+                    <a:ea typeface="宋体" panose="02010600030101010101" pitchFamily="2" charset="-122"/>
+                  </a:rPr>
+                  <a:t>或</a:t>
+                </a:r>
+                <a:r>
+                  <a:rPr lang="en-US" altLang="zh-CN" sz="1200" dirty="0">
+                    <a:latin typeface="Times New Roman" panose="02020603050405020304" pitchFamily="18" charset="0"/>
+                    <a:ea typeface="宋体" panose="02010600030101010101" pitchFamily="2" charset="-122"/>
+                  </a:rPr>
+                  <a:t>NACK</a:t>
+                </a:r>
+                <a:r>
+                  <a:rPr lang="zh-CN" altLang="en-US" sz="1200" dirty="0">
+                    <a:latin typeface="Times New Roman" panose="02020603050405020304" pitchFamily="18" charset="0"/>
+                    <a:ea typeface="宋体" panose="02010600030101010101" pitchFamily="2" charset="-122"/>
+                  </a:rPr>
+                  <a:t>确认报文</a:t>
+                </a:r>
+              </a:p>
+            </p:txBody>
+          </p:sp>
+        </p:grpSp>
+        <p:sp>
+          <p:nvSpPr>
+            <p:cNvPr id="48" name="矩形 47">
+              <a:extLst>
+                <a:ext uri="{FF2B5EF4-FFF2-40B4-BE49-F238E27FC236}">
+                  <a16:creationId xmlns:a16="http://schemas.microsoft.com/office/drawing/2014/main" id="{F2E8EF24-3E0F-C5A1-E7F8-238B9239C848}"/>
+                </a:ext>
+              </a:extLst>
+            </p:cNvPr>
+            <p:cNvSpPr/>
+            <p:nvPr/>
+          </p:nvSpPr>
+          <p:spPr>
+            <a:xfrm>
+              <a:off x="6860810" y="3038761"/>
+              <a:ext cx="1158380" cy="214316"/>
+            </a:xfrm>
+            <a:prstGeom prst="rect">
+              <a:avLst/>
+            </a:prstGeom>
+            <a:noFill/>
+            <a:ln w="19050">
+              <a:noFill/>
+            </a:ln>
+          </p:spPr>
+          <p:style>
+            <a:lnRef idx="2">
+              <a:schemeClr val="accent1">
+                <a:shade val="15000"/>
+              </a:schemeClr>
+            </a:lnRef>
+            <a:fillRef idx="1">
+              <a:schemeClr val="accent1"/>
+            </a:fillRef>
+            <a:effectRef idx="0">
+              <a:schemeClr val="accent1"/>
+            </a:effectRef>
+            <a:fontRef idx="minor">
+              <a:schemeClr val="lt1"/>
+            </a:fontRef>
+          </p:style>
+          <p:txBody>
+            <a:bodyPr rtlCol="0" anchor="ctr"/>
+            <a:lstStyle/>
+            <a:p>
+              <a:r>
+                <a:rPr lang="zh-CN" altLang="en-US" sz="1200" b="1" dirty="0">
+                  <a:solidFill>
+                    <a:schemeClr val="tx1"/>
+                  </a:solidFill>
+                  <a:latin typeface="Times New Roman" panose="02020603050405020304" pitchFamily="18" charset="0"/>
+                  <a:ea typeface="宋体" panose="02010600030101010101" pitchFamily="2" charset="-122"/>
+                </a:rPr>
+                <a:t>连续传输阶段</a:t>
+              </a:r>
+            </a:p>
+          </p:txBody>
+        </p:sp>
+      </p:grpSp>
+    </p:spTree>
+    <p:extLst>
+      <p:ext uri="{BB962C8B-B14F-4D97-AF65-F5344CB8AC3E}">
+        <p14:creationId xmlns:p14="http://schemas.microsoft.com/office/powerpoint/2010/main" val="2671676866"/>
       </p:ext>
     </p:extLst>
   </p:cSld>
@@ -28733,10 +30327,10 @@
       </p:grpSpPr>
       <p:grpSp>
         <p:nvGrpSpPr>
-          <p:cNvPr id="8" name="组合 7">
+          <p:cNvPr id="53" name="组合 52">
             <a:extLst>
               <a:ext uri="{FF2B5EF4-FFF2-40B4-BE49-F238E27FC236}">
-                <a16:creationId xmlns:a16="http://schemas.microsoft.com/office/drawing/2014/main" id="{EF176E4A-D12B-6F57-670C-9D04B3712B49}"/>
+                <a16:creationId xmlns:a16="http://schemas.microsoft.com/office/drawing/2014/main" id="{4CE5A9EA-CE06-C7A5-9A2D-CB5BC38B3E56}"/>
               </a:ext>
             </a:extLst>
           </p:cNvPr>
@@ -28746,616 +30340,17 @@
         <p:grpSpPr>
           <a:xfrm>
             <a:off x="1290015" y="941692"/>
-            <a:ext cx="9939960" cy="4840842"/>
+            <a:ext cx="4452586" cy="4288931"/>
             <a:chOff x="1102290" y="1189973"/>
-            <a:chExt cx="9939960" cy="4840842"/>
+            <a:chExt cx="4452586" cy="4288931"/>
           </a:xfrm>
         </p:grpSpPr>
-        <p:grpSp>
-          <p:nvGrpSpPr>
-            <p:cNvPr id="53" name="组合 52">
+        <p:sp>
+          <p:nvSpPr>
+            <p:cNvPr id="2" name="矩形 1">
               <a:extLst>
                 <a:ext uri="{FF2B5EF4-FFF2-40B4-BE49-F238E27FC236}">
-                  <a16:creationId xmlns:a16="http://schemas.microsoft.com/office/drawing/2014/main" id="{4CE5A9EA-CE06-C7A5-9A2D-CB5BC38B3E56}"/>
-                </a:ext>
-              </a:extLst>
-            </p:cNvPr>
-            <p:cNvGrpSpPr/>
-            <p:nvPr/>
-          </p:nvGrpSpPr>
-          <p:grpSpPr>
-            <a:xfrm>
-              <a:off x="1102290" y="1189973"/>
-              <a:ext cx="4452586" cy="4288931"/>
-              <a:chOff x="1102290" y="1189973"/>
-              <a:chExt cx="4452586" cy="4288931"/>
-            </a:xfrm>
-          </p:grpSpPr>
-          <p:sp>
-            <p:nvSpPr>
-              <p:cNvPr id="2" name="矩形 1">
-                <a:extLst>
-                  <a:ext uri="{FF2B5EF4-FFF2-40B4-BE49-F238E27FC236}">
-                    <a16:creationId xmlns:a16="http://schemas.microsoft.com/office/drawing/2014/main" id="{081984B5-1984-313B-9424-3CAF9731773A}"/>
-                  </a:ext>
-                </a:extLst>
-              </p:cNvPr>
-              <p:cNvSpPr/>
-              <p:nvPr/>
-            </p:nvSpPr>
-            <p:spPr>
-              <a:xfrm>
-                <a:off x="1102290" y="1189973"/>
-                <a:ext cx="1052187" cy="688931"/>
-              </a:xfrm>
-              <a:prstGeom prst="rect">
-                <a:avLst/>
-              </a:prstGeom>
-              <a:noFill/>
-              <a:ln w="15875">
-                <a:solidFill>
-                  <a:schemeClr val="tx1"/>
-                </a:solidFill>
-              </a:ln>
-            </p:spPr>
-            <p:style>
-              <a:lnRef idx="2">
-                <a:schemeClr val="accent1">
-                  <a:shade val="50000"/>
-                </a:schemeClr>
-              </a:lnRef>
-              <a:fillRef idx="1">
-                <a:schemeClr val="accent1"/>
-              </a:fillRef>
-              <a:effectRef idx="0">
-                <a:schemeClr val="accent1"/>
-              </a:effectRef>
-              <a:fontRef idx="minor">
-                <a:schemeClr val="lt1"/>
-              </a:fontRef>
-            </p:style>
-            <p:txBody>
-              <a:bodyPr rtlCol="0" anchor="ctr"/>
-              <a:lstStyle/>
-              <a:p>
-                <a:pPr algn="ctr"/>
-                <a:r>
-                  <a:rPr lang="zh-CN" altLang="en-US" dirty="0">
-                    <a:solidFill>
-                      <a:schemeClr val="tx1"/>
-                    </a:solidFill>
-                    <a:latin typeface="Times New Roman" panose="02020603050405020304" pitchFamily="18" charset="0"/>
-                    <a:ea typeface="宋体" panose="02010600030101010101" pitchFamily="2" charset="-122"/>
-                  </a:rPr>
-                  <a:t>终端</a:t>
-                </a:r>
-              </a:p>
-            </p:txBody>
-          </p:sp>
-          <p:sp>
-            <p:nvSpPr>
-              <p:cNvPr id="3" name="矩形 2">
-                <a:extLst>
-                  <a:ext uri="{FF2B5EF4-FFF2-40B4-BE49-F238E27FC236}">
-                    <a16:creationId xmlns:a16="http://schemas.microsoft.com/office/drawing/2014/main" id="{09D08743-8186-2B7D-A8DD-F2E852763B3A}"/>
-                  </a:ext>
-                </a:extLst>
-              </p:cNvPr>
-              <p:cNvSpPr/>
-              <p:nvPr/>
-            </p:nvSpPr>
-            <p:spPr>
-              <a:xfrm>
-                <a:off x="4502689" y="1189973"/>
-                <a:ext cx="1052187" cy="688931"/>
-              </a:xfrm>
-              <a:prstGeom prst="rect">
-                <a:avLst/>
-              </a:prstGeom>
-              <a:noFill/>
-              <a:ln w="15875">
-                <a:solidFill>
-                  <a:schemeClr val="tx1"/>
-                </a:solidFill>
-              </a:ln>
-            </p:spPr>
-            <p:style>
-              <a:lnRef idx="2">
-                <a:schemeClr val="accent1">
-                  <a:shade val="50000"/>
-                </a:schemeClr>
-              </a:lnRef>
-              <a:fillRef idx="1">
-                <a:schemeClr val="accent1"/>
-              </a:fillRef>
-              <a:effectRef idx="0">
-                <a:schemeClr val="accent1"/>
-              </a:effectRef>
-              <a:fontRef idx="minor">
-                <a:schemeClr val="lt1"/>
-              </a:fontRef>
-            </p:style>
-            <p:txBody>
-              <a:bodyPr rtlCol="0" anchor="ctr"/>
-              <a:lstStyle/>
-              <a:p>
-                <a:pPr algn="ctr"/>
-                <a:r>
-                  <a:rPr lang="zh-CN" altLang="en-US" dirty="0">
-                    <a:solidFill>
-                      <a:schemeClr val="tx1"/>
-                    </a:solidFill>
-                    <a:latin typeface="Times New Roman" panose="02020603050405020304" pitchFamily="18" charset="0"/>
-                    <a:ea typeface="宋体" panose="02010600030101010101" pitchFamily="2" charset="-122"/>
-                  </a:rPr>
-                  <a:t>基站</a:t>
-                </a:r>
-              </a:p>
-            </p:txBody>
-          </p:sp>
-          <p:cxnSp>
-            <p:nvCxnSpPr>
-              <p:cNvPr id="5" name="直接箭头连接符 4">
-                <a:extLst>
-                  <a:ext uri="{FF2B5EF4-FFF2-40B4-BE49-F238E27FC236}">
-                    <a16:creationId xmlns:a16="http://schemas.microsoft.com/office/drawing/2014/main" id="{17136C98-1C3B-1865-27D4-F67328B5A397}"/>
-                  </a:ext>
-                </a:extLst>
-              </p:cNvPr>
-              <p:cNvCxnSpPr>
-                <a:stCxn id="2" idx="2"/>
-              </p:cNvCxnSpPr>
-              <p:nvPr/>
-            </p:nvCxnSpPr>
-            <p:spPr>
-              <a:xfrm flipH="1">
-                <a:off x="1628383" y="1878904"/>
-                <a:ext cx="1" cy="3600000"/>
-              </a:xfrm>
-              <a:prstGeom prst="straightConnector1">
-                <a:avLst/>
-              </a:prstGeom>
-              <a:ln w="15875">
-                <a:solidFill>
-                  <a:schemeClr val="tx1"/>
-                </a:solidFill>
-                <a:tailEnd type="none"/>
-              </a:ln>
-            </p:spPr>
-            <p:style>
-              <a:lnRef idx="1">
-                <a:schemeClr val="accent1"/>
-              </a:lnRef>
-              <a:fillRef idx="0">
-                <a:schemeClr val="accent1"/>
-              </a:fillRef>
-              <a:effectRef idx="0">
-                <a:schemeClr val="accent1"/>
-              </a:effectRef>
-              <a:fontRef idx="minor">
-                <a:schemeClr val="tx1"/>
-              </a:fontRef>
-            </p:style>
-          </p:cxnSp>
-          <p:cxnSp>
-            <p:nvCxnSpPr>
-              <p:cNvPr id="9" name="直接箭头连接符 8">
-                <a:extLst>
-                  <a:ext uri="{FF2B5EF4-FFF2-40B4-BE49-F238E27FC236}">
-                    <a16:creationId xmlns:a16="http://schemas.microsoft.com/office/drawing/2014/main" id="{DC57C7FE-5E56-309A-8219-10C41B83C94B}"/>
-                  </a:ext>
-                </a:extLst>
-              </p:cNvPr>
-              <p:cNvCxnSpPr>
-                <a:stCxn id="3" idx="2"/>
-              </p:cNvCxnSpPr>
-              <p:nvPr/>
-            </p:nvCxnSpPr>
-            <p:spPr>
-              <a:xfrm>
-                <a:off x="5028783" y="1878904"/>
-                <a:ext cx="35490" cy="3600000"/>
-              </a:xfrm>
-              <a:prstGeom prst="straightConnector1">
-                <a:avLst/>
-              </a:prstGeom>
-              <a:ln w="15875">
-                <a:solidFill>
-                  <a:schemeClr val="tx1"/>
-                </a:solidFill>
-                <a:tailEnd type="none"/>
-              </a:ln>
-            </p:spPr>
-            <p:style>
-              <a:lnRef idx="1">
-                <a:schemeClr val="accent1"/>
-              </a:lnRef>
-              <a:fillRef idx="0">
-                <a:schemeClr val="accent1"/>
-              </a:fillRef>
-              <a:effectRef idx="0">
-                <a:schemeClr val="accent1"/>
-              </a:effectRef>
-              <a:fontRef idx="minor">
-                <a:schemeClr val="tx1"/>
-              </a:fontRef>
-            </p:style>
-          </p:cxnSp>
-          <p:cxnSp>
-            <p:nvCxnSpPr>
-              <p:cNvPr id="14" name="直接箭头连接符 13">
-                <a:extLst>
-                  <a:ext uri="{FF2B5EF4-FFF2-40B4-BE49-F238E27FC236}">
-                    <a16:creationId xmlns:a16="http://schemas.microsoft.com/office/drawing/2014/main" id="{0BC37A36-AC0D-1737-F772-D5E608986AE9}"/>
-                  </a:ext>
-                </a:extLst>
-              </p:cNvPr>
-              <p:cNvCxnSpPr>
-                <a:cxnSpLocks/>
-              </p:cNvCxnSpPr>
-              <p:nvPr/>
-            </p:nvCxnSpPr>
-            <p:spPr>
-              <a:xfrm>
-                <a:off x="1628383" y="2499360"/>
-                <a:ext cx="3400399" cy="0"/>
-              </a:xfrm>
-              <a:prstGeom prst="straightConnector1">
-                <a:avLst/>
-              </a:prstGeom>
-              <a:ln w="15875">
-                <a:solidFill>
-                  <a:schemeClr val="tx1"/>
-                </a:solidFill>
-                <a:tailEnd type="triangle"/>
-              </a:ln>
-            </p:spPr>
-            <p:style>
-              <a:lnRef idx="1">
-                <a:schemeClr val="accent1"/>
-              </a:lnRef>
-              <a:fillRef idx="0">
-                <a:schemeClr val="accent1"/>
-              </a:fillRef>
-              <a:effectRef idx="0">
-                <a:schemeClr val="accent1"/>
-              </a:effectRef>
-              <a:fontRef idx="minor">
-                <a:schemeClr val="tx1"/>
-              </a:fontRef>
-            </p:style>
-          </p:cxnSp>
-          <p:cxnSp>
-            <p:nvCxnSpPr>
-              <p:cNvPr id="15" name="直接箭头连接符 14">
-                <a:extLst>
-                  <a:ext uri="{FF2B5EF4-FFF2-40B4-BE49-F238E27FC236}">
-                    <a16:creationId xmlns:a16="http://schemas.microsoft.com/office/drawing/2014/main" id="{E22D7F04-9410-9648-A668-BBB878CA769D}"/>
-                  </a:ext>
-                </a:extLst>
-              </p:cNvPr>
-              <p:cNvCxnSpPr>
-                <a:cxnSpLocks/>
-              </p:cNvCxnSpPr>
-              <p:nvPr/>
-            </p:nvCxnSpPr>
-            <p:spPr>
-              <a:xfrm>
-                <a:off x="1628382" y="4236720"/>
-                <a:ext cx="3435891" cy="0"/>
-              </a:xfrm>
-              <a:prstGeom prst="straightConnector1">
-                <a:avLst/>
-              </a:prstGeom>
-              <a:ln w="15875">
-                <a:solidFill>
-                  <a:schemeClr val="tx1"/>
-                </a:solidFill>
-                <a:tailEnd type="triangle"/>
-              </a:ln>
-            </p:spPr>
-            <p:style>
-              <a:lnRef idx="1">
-                <a:schemeClr val="accent1"/>
-              </a:lnRef>
-              <a:fillRef idx="0">
-                <a:schemeClr val="accent1"/>
-              </a:fillRef>
-              <a:effectRef idx="0">
-                <a:schemeClr val="accent1"/>
-              </a:effectRef>
-              <a:fontRef idx="minor">
-                <a:schemeClr val="tx1"/>
-              </a:fontRef>
-            </p:style>
-          </p:cxnSp>
-          <p:cxnSp>
-            <p:nvCxnSpPr>
-              <p:cNvPr id="17" name="直接箭头连接符 16">
-                <a:extLst>
-                  <a:ext uri="{FF2B5EF4-FFF2-40B4-BE49-F238E27FC236}">
-                    <a16:creationId xmlns:a16="http://schemas.microsoft.com/office/drawing/2014/main" id="{DA21A69A-EBA6-0CDF-C318-60BC2F1FB540}"/>
-                  </a:ext>
-                </a:extLst>
-              </p:cNvPr>
-              <p:cNvCxnSpPr>
-                <a:cxnSpLocks/>
-              </p:cNvCxnSpPr>
-              <p:nvPr/>
-            </p:nvCxnSpPr>
-            <p:spPr>
-              <a:xfrm flipH="1">
-                <a:off x="1628382" y="3322320"/>
-                <a:ext cx="3418146" cy="0"/>
-              </a:xfrm>
-              <a:prstGeom prst="straightConnector1">
-                <a:avLst/>
-              </a:prstGeom>
-              <a:ln w="15875">
-                <a:solidFill>
-                  <a:schemeClr val="tx1"/>
-                </a:solidFill>
-                <a:tailEnd type="triangle"/>
-              </a:ln>
-            </p:spPr>
-            <p:style>
-              <a:lnRef idx="1">
-                <a:schemeClr val="accent1"/>
-              </a:lnRef>
-              <a:fillRef idx="0">
-                <a:schemeClr val="accent1"/>
-              </a:fillRef>
-              <a:effectRef idx="0">
-                <a:schemeClr val="accent1"/>
-              </a:effectRef>
-              <a:fontRef idx="minor">
-                <a:schemeClr val="tx1"/>
-              </a:fontRef>
-            </p:style>
-          </p:cxnSp>
-          <p:cxnSp>
-            <p:nvCxnSpPr>
-              <p:cNvPr id="18" name="直接箭头连接符 17">
-                <a:extLst>
-                  <a:ext uri="{FF2B5EF4-FFF2-40B4-BE49-F238E27FC236}">
-                    <a16:creationId xmlns:a16="http://schemas.microsoft.com/office/drawing/2014/main" id="{71154223-CD89-A27C-7652-475411DBBB72}"/>
-                  </a:ext>
-                </a:extLst>
-              </p:cNvPr>
-              <p:cNvCxnSpPr>
-                <a:cxnSpLocks/>
-              </p:cNvCxnSpPr>
-              <p:nvPr/>
-            </p:nvCxnSpPr>
-            <p:spPr>
-              <a:xfrm flipH="1">
-                <a:off x="1610635" y="5120640"/>
-                <a:ext cx="3453638" cy="0"/>
-              </a:xfrm>
-              <a:prstGeom prst="straightConnector1">
-                <a:avLst/>
-              </a:prstGeom>
-              <a:ln w="15875">
-                <a:solidFill>
-                  <a:schemeClr val="tx1"/>
-                </a:solidFill>
-                <a:tailEnd type="triangle"/>
-              </a:ln>
-            </p:spPr>
-            <p:style>
-              <a:lnRef idx="1">
-                <a:schemeClr val="accent1"/>
-              </a:lnRef>
-              <a:fillRef idx="0">
-                <a:schemeClr val="accent1"/>
-              </a:fillRef>
-              <a:effectRef idx="0">
-                <a:schemeClr val="accent1"/>
-              </a:effectRef>
-              <a:fontRef idx="minor">
-                <a:schemeClr val="tx1"/>
-              </a:fontRef>
-            </p:style>
-          </p:cxnSp>
-          <p:sp>
-            <p:nvSpPr>
-              <p:cNvPr id="19" name="文本框 18">
-                <a:extLst>
-                  <a:ext uri="{FF2B5EF4-FFF2-40B4-BE49-F238E27FC236}">
-                    <a16:creationId xmlns:a16="http://schemas.microsoft.com/office/drawing/2014/main" id="{D976A72B-6B39-A0FC-EC75-C1BD6134B09A}"/>
-                  </a:ext>
-                </a:extLst>
-              </p:cNvPr>
-              <p:cNvSpPr txBox="1"/>
-              <p:nvPr/>
-            </p:nvSpPr>
-            <p:spPr>
-              <a:xfrm>
-                <a:off x="2283148" y="2127943"/>
-                <a:ext cx="2117941" cy="369332"/>
-              </a:xfrm>
-              <a:prstGeom prst="rect">
-                <a:avLst/>
-              </a:prstGeom>
-              <a:noFill/>
-              <a:ln w="15875">
-                <a:noFill/>
-              </a:ln>
-            </p:spPr>
-            <p:txBody>
-              <a:bodyPr wrap="square" rtlCol="0" anchor="ctr" anchorCtr="1">
-                <a:spAutoFit/>
-              </a:bodyPr>
-              <a:lstStyle/>
-              <a:p>
-                <a:r>
-                  <a:rPr lang="en-US" altLang="zh-CN" dirty="0">
-                    <a:latin typeface="Times New Roman" panose="02020603050405020304" pitchFamily="18" charset="0"/>
-                    <a:ea typeface="宋体" panose="02010600030101010101" pitchFamily="2" charset="-122"/>
-                  </a:rPr>
-                  <a:t>Msg1</a:t>
-                </a:r>
-                <a:r>
-                  <a:rPr lang="zh-CN" altLang="en-US" dirty="0">
-                    <a:latin typeface="Times New Roman" panose="02020603050405020304" pitchFamily="18" charset="0"/>
-                    <a:ea typeface="宋体" panose="02010600030101010101" pitchFamily="2" charset="-122"/>
-                  </a:rPr>
-                  <a:t>：前导序列</a:t>
-                </a:r>
-              </a:p>
-            </p:txBody>
-          </p:sp>
-          <p:sp>
-            <p:nvSpPr>
-              <p:cNvPr id="21" name="文本框 20">
-                <a:extLst>
-                  <a:ext uri="{FF2B5EF4-FFF2-40B4-BE49-F238E27FC236}">
-                    <a16:creationId xmlns:a16="http://schemas.microsoft.com/office/drawing/2014/main" id="{A779A4C8-BF8F-36E5-7807-FD323DF7D762}"/>
-                  </a:ext>
-                </a:extLst>
-              </p:cNvPr>
-              <p:cNvSpPr txBox="1"/>
-              <p:nvPr/>
-            </p:nvSpPr>
-            <p:spPr>
-              <a:xfrm>
-                <a:off x="1909558" y="3003094"/>
-                <a:ext cx="2865120" cy="369332"/>
-              </a:xfrm>
-              <a:prstGeom prst="rect">
-                <a:avLst/>
-              </a:prstGeom>
-              <a:noFill/>
-              <a:ln w="15875">
-                <a:noFill/>
-              </a:ln>
-            </p:spPr>
-            <p:txBody>
-              <a:bodyPr wrap="square" rtlCol="0" anchor="ctr" anchorCtr="1">
-                <a:spAutoFit/>
-              </a:bodyPr>
-              <a:lstStyle/>
-              <a:p>
-                <a:r>
-                  <a:rPr lang="en-US" altLang="zh-CN" dirty="0">
-                    <a:latin typeface="Times New Roman" panose="02020603050405020304" pitchFamily="18" charset="0"/>
-                    <a:ea typeface="宋体" panose="02010600030101010101" pitchFamily="2" charset="-122"/>
-                  </a:rPr>
-                  <a:t>Msg2</a:t>
-                </a:r>
-                <a:r>
-                  <a:rPr lang="zh-CN" altLang="en-US" dirty="0">
-                    <a:latin typeface="Times New Roman" panose="02020603050405020304" pitchFamily="18" charset="0"/>
-                    <a:ea typeface="宋体" panose="02010600030101010101" pitchFamily="2" charset="-122"/>
-                  </a:rPr>
-                  <a:t>：随机接入响应报文</a:t>
-                </a:r>
-              </a:p>
-            </p:txBody>
-          </p:sp>
-          <p:sp>
-            <p:nvSpPr>
-              <p:cNvPr id="22" name="文本框 21">
-                <a:extLst>
-                  <a:ext uri="{FF2B5EF4-FFF2-40B4-BE49-F238E27FC236}">
-                    <a16:creationId xmlns:a16="http://schemas.microsoft.com/office/drawing/2014/main" id="{FDB78DD2-FDAB-24EE-A485-45CCA9CB0890}"/>
-                  </a:ext>
-                </a:extLst>
-              </p:cNvPr>
-              <p:cNvSpPr txBox="1"/>
-              <p:nvPr/>
-            </p:nvSpPr>
-            <p:spPr>
-              <a:xfrm>
-                <a:off x="1675843" y="3878245"/>
-                <a:ext cx="3332550" cy="369332"/>
-              </a:xfrm>
-              <a:prstGeom prst="rect">
-                <a:avLst/>
-              </a:prstGeom>
-              <a:noFill/>
-              <a:ln w="15875">
-                <a:noFill/>
-              </a:ln>
-            </p:spPr>
-            <p:txBody>
-              <a:bodyPr wrap="square" rtlCol="0" anchor="ctr" anchorCtr="1">
-                <a:spAutoFit/>
-              </a:bodyPr>
-              <a:lstStyle/>
-              <a:p>
-                <a:r>
-                  <a:rPr lang="en-US" altLang="zh-CN" dirty="0">
-                    <a:latin typeface="Times New Roman" panose="02020603050405020304" pitchFamily="18" charset="0"/>
-                    <a:ea typeface="宋体" panose="02010600030101010101" pitchFamily="2" charset="-122"/>
-                  </a:rPr>
-                  <a:t>Msg3</a:t>
-                </a:r>
-                <a:r>
-                  <a:rPr lang="zh-CN" altLang="en-US" dirty="0">
-                    <a:latin typeface="Times New Roman" panose="02020603050405020304" pitchFamily="18" charset="0"/>
-                    <a:ea typeface="宋体" panose="02010600030101010101" pitchFamily="2" charset="-122"/>
-                  </a:rPr>
-                  <a:t>：短数据报文</a:t>
-                </a:r>
-              </a:p>
-            </p:txBody>
-          </p:sp>
-          <p:sp>
-            <p:nvSpPr>
-              <p:cNvPr id="23" name="文本框 22">
-                <a:extLst>
-                  <a:ext uri="{FF2B5EF4-FFF2-40B4-BE49-F238E27FC236}">
-                    <a16:creationId xmlns:a16="http://schemas.microsoft.com/office/drawing/2014/main" id="{83960ED7-47B6-ED66-C559-176F06B5535D}"/>
-                  </a:ext>
-                </a:extLst>
-              </p:cNvPr>
-              <p:cNvSpPr txBox="1"/>
-              <p:nvPr/>
-            </p:nvSpPr>
-            <p:spPr>
-              <a:xfrm>
-                <a:off x="1962846" y="4753395"/>
-                <a:ext cx="2758544" cy="369332"/>
-              </a:xfrm>
-              <a:prstGeom prst="rect">
-                <a:avLst/>
-              </a:prstGeom>
-              <a:noFill/>
-              <a:ln w="15875">
-                <a:noFill/>
-              </a:ln>
-            </p:spPr>
-            <p:txBody>
-              <a:bodyPr wrap="square" rtlCol="0" anchor="ctr" anchorCtr="1">
-                <a:spAutoFit/>
-              </a:bodyPr>
-              <a:lstStyle/>
-              <a:p>
-                <a:r>
-                  <a:rPr lang="en-US" altLang="zh-CN" dirty="0">
-                    <a:latin typeface="Times New Roman" panose="02020603050405020304" pitchFamily="18" charset="0"/>
-                    <a:ea typeface="宋体" panose="02010600030101010101" pitchFamily="2" charset="-122"/>
-                  </a:rPr>
-                  <a:t>Msg4</a:t>
-                </a:r>
-                <a:r>
-                  <a:rPr lang="zh-CN" altLang="en-US" dirty="0">
-                    <a:latin typeface="Times New Roman" panose="02020603050405020304" pitchFamily="18" charset="0"/>
-                    <a:ea typeface="宋体" panose="02010600030101010101" pitchFamily="2" charset="-122"/>
-                  </a:rPr>
-                  <a:t>：确认答复报文</a:t>
-                </a:r>
-              </a:p>
-            </p:txBody>
-          </p:sp>
-        </p:grpSp>
-        <p:sp>
-          <p:nvSpPr>
-            <p:cNvPr id="34" name="矩形 33">
-              <a:extLst>
-                <a:ext uri="{FF2B5EF4-FFF2-40B4-BE49-F238E27FC236}">
-                  <a16:creationId xmlns:a16="http://schemas.microsoft.com/office/drawing/2014/main" id="{30406AED-C2E2-C582-C3D0-D383BF1C0C46}"/>
+                  <a16:creationId xmlns:a16="http://schemas.microsoft.com/office/drawing/2014/main" id="{081984B5-1984-313B-9424-3CAF9731773A}"/>
                 </a:ext>
               </a:extLst>
             </p:cNvPr>
@@ -29364,7 +30359,7 @@
           </p:nvSpPr>
           <p:spPr>
             <a:xfrm>
-              <a:off x="6589664" y="1189973"/>
+              <a:off x="1102290" y="1189973"/>
               <a:ext cx="1052187" cy="688931"/>
             </a:xfrm>
             <a:prstGeom prst="rect">
@@ -29413,10 +30408,10 @@
         </p:sp>
         <p:sp>
           <p:nvSpPr>
-            <p:cNvPr id="35" name="矩形 34">
+            <p:cNvPr id="3" name="矩形 2">
               <a:extLst>
                 <a:ext uri="{FF2B5EF4-FFF2-40B4-BE49-F238E27FC236}">
-                  <a16:creationId xmlns:a16="http://schemas.microsoft.com/office/drawing/2014/main" id="{D7F0F3AE-4AB1-4194-64AF-079573F6F6F8}"/>
+                  <a16:creationId xmlns:a16="http://schemas.microsoft.com/office/drawing/2014/main" id="{09D08743-8186-2B7D-A8DD-F2E852763B3A}"/>
                 </a:ext>
               </a:extLst>
             </p:cNvPr>
@@ -29425,7 +30420,7 @@
           </p:nvSpPr>
           <p:spPr>
             <a:xfrm>
-              <a:off x="9990063" y="1189973"/>
+              <a:off x="4502689" y="1189973"/>
               <a:ext cx="1052187" cy="688931"/>
             </a:xfrm>
             <a:prstGeom prst="rect">
@@ -29474,21 +30469,21 @@
         </p:sp>
         <p:cxnSp>
           <p:nvCxnSpPr>
-            <p:cNvPr id="36" name="直接箭头连接符 35">
+            <p:cNvPr id="5" name="直接箭头连接符 4">
               <a:extLst>
                 <a:ext uri="{FF2B5EF4-FFF2-40B4-BE49-F238E27FC236}">
-                  <a16:creationId xmlns:a16="http://schemas.microsoft.com/office/drawing/2014/main" id="{C526CF12-E7BF-F813-B90B-E8F59E7AB6D6}"/>
+                  <a16:creationId xmlns:a16="http://schemas.microsoft.com/office/drawing/2014/main" id="{17136C98-1C3B-1865-27D4-F67328B5A397}"/>
                 </a:ext>
               </a:extLst>
             </p:cNvPr>
             <p:cNvCxnSpPr>
-              <a:stCxn id="34" idx="2"/>
+              <a:stCxn id="2" idx="2"/>
             </p:cNvCxnSpPr>
             <p:nvPr/>
           </p:nvCxnSpPr>
           <p:spPr>
             <a:xfrm flipH="1">
-              <a:off x="7115757" y="1878904"/>
+              <a:off x="1628383" y="1878904"/>
               <a:ext cx="1" cy="3600000"/>
             </a:xfrm>
             <a:prstGeom prst="straightConnector1">
@@ -29518,21 +30513,21 @@
         </p:cxnSp>
         <p:cxnSp>
           <p:nvCxnSpPr>
-            <p:cNvPr id="37" name="直接箭头连接符 36">
+            <p:cNvPr id="9" name="直接箭头连接符 8">
               <a:extLst>
                 <a:ext uri="{FF2B5EF4-FFF2-40B4-BE49-F238E27FC236}">
-                  <a16:creationId xmlns:a16="http://schemas.microsoft.com/office/drawing/2014/main" id="{52D0BE3B-F41D-313D-9D54-CCDFB8DA3F64}"/>
+                  <a16:creationId xmlns:a16="http://schemas.microsoft.com/office/drawing/2014/main" id="{DC57C7FE-5E56-309A-8219-10C41B83C94B}"/>
                 </a:ext>
               </a:extLst>
             </p:cNvPr>
             <p:cNvCxnSpPr>
-              <a:stCxn id="35" idx="2"/>
+              <a:stCxn id="3" idx="2"/>
             </p:cNvCxnSpPr>
             <p:nvPr/>
           </p:nvCxnSpPr>
           <p:spPr>
             <a:xfrm>
-              <a:off x="10516157" y="1878904"/>
+              <a:off x="5028783" y="1878904"/>
               <a:ext cx="35490" cy="3600000"/>
             </a:xfrm>
             <a:prstGeom prst="straightConnector1">
@@ -29560,131 +30555,24 @@
             </a:fontRef>
           </p:style>
         </p:cxnSp>
-        <p:grpSp>
-          <p:nvGrpSpPr>
-            <p:cNvPr id="40" name="组合 39">
+        <p:cxnSp>
+          <p:nvCxnSpPr>
+            <p:cNvPr id="14" name="直接箭头连接符 13">
               <a:extLst>
                 <a:ext uri="{FF2B5EF4-FFF2-40B4-BE49-F238E27FC236}">
-                  <a16:creationId xmlns:a16="http://schemas.microsoft.com/office/drawing/2014/main" id="{2BB71B87-58CB-7FCC-FFE8-E4594220A992}"/>
+                  <a16:creationId xmlns:a16="http://schemas.microsoft.com/office/drawing/2014/main" id="{0BC37A36-AC0D-1737-F772-D5E608986AE9}"/>
                 </a:ext>
               </a:extLst>
             </p:cNvPr>
-            <p:cNvGrpSpPr/>
-            <p:nvPr/>
-          </p:nvGrpSpPr>
-          <p:grpSpPr>
-            <a:xfrm>
-              <a:off x="7115756" y="3322320"/>
-              <a:ext cx="3418146" cy="822960"/>
-              <a:chOff x="7115756" y="3259756"/>
-              <a:chExt cx="3418146" cy="822960"/>
-            </a:xfrm>
-          </p:grpSpPr>
-          <p:cxnSp>
-            <p:nvCxnSpPr>
-              <p:cNvPr id="38" name="直接箭头连接符 37">
-                <a:extLst>
-                  <a:ext uri="{FF2B5EF4-FFF2-40B4-BE49-F238E27FC236}">
-                    <a16:creationId xmlns:a16="http://schemas.microsoft.com/office/drawing/2014/main" id="{B8D48B1D-848D-DDEA-FF2F-47AE8B708800}"/>
-                  </a:ext>
-                </a:extLst>
-              </p:cNvPr>
-              <p:cNvCxnSpPr>
-                <a:cxnSpLocks/>
-              </p:cNvCxnSpPr>
-              <p:nvPr/>
-            </p:nvCxnSpPr>
-            <p:spPr>
-              <a:xfrm>
-                <a:off x="7115757" y="3259756"/>
-                <a:ext cx="3400399" cy="0"/>
-              </a:xfrm>
-              <a:prstGeom prst="straightConnector1">
-                <a:avLst/>
-              </a:prstGeom>
-              <a:ln w="15875">
-                <a:solidFill>
-                  <a:schemeClr val="tx1"/>
-                </a:solidFill>
-                <a:tailEnd type="triangle"/>
-              </a:ln>
-            </p:spPr>
-            <p:style>
-              <a:lnRef idx="1">
-                <a:schemeClr val="accent1"/>
-              </a:lnRef>
-              <a:fillRef idx="0">
-                <a:schemeClr val="accent1"/>
-              </a:fillRef>
-              <a:effectRef idx="0">
-                <a:schemeClr val="accent1"/>
-              </a:effectRef>
-              <a:fontRef idx="minor">
-                <a:schemeClr val="tx1"/>
-              </a:fontRef>
-            </p:style>
-          </p:cxnSp>
-          <p:cxnSp>
-            <p:nvCxnSpPr>
-              <p:cNvPr id="39" name="直接箭头连接符 38">
-                <a:extLst>
-                  <a:ext uri="{FF2B5EF4-FFF2-40B4-BE49-F238E27FC236}">
-                    <a16:creationId xmlns:a16="http://schemas.microsoft.com/office/drawing/2014/main" id="{500809F9-3854-7828-2FAF-EC79576B32CE}"/>
-                  </a:ext>
-                </a:extLst>
-              </p:cNvPr>
-              <p:cNvCxnSpPr>
-                <a:cxnSpLocks/>
-              </p:cNvCxnSpPr>
-              <p:nvPr/>
-            </p:nvCxnSpPr>
-            <p:spPr>
-              <a:xfrm flipH="1">
-                <a:off x="7115756" y="4082716"/>
-                <a:ext cx="3418146" cy="0"/>
-              </a:xfrm>
-              <a:prstGeom prst="straightConnector1">
-                <a:avLst/>
-              </a:prstGeom>
-              <a:ln w="15875">
-                <a:solidFill>
-                  <a:schemeClr val="tx1"/>
-                </a:solidFill>
-                <a:tailEnd type="triangle"/>
-              </a:ln>
-            </p:spPr>
-            <p:style>
-              <a:lnRef idx="1">
-                <a:schemeClr val="accent1"/>
-              </a:lnRef>
-              <a:fillRef idx="0">
-                <a:schemeClr val="accent1"/>
-              </a:fillRef>
-              <a:effectRef idx="0">
-                <a:schemeClr val="accent1"/>
-              </a:effectRef>
-              <a:fontRef idx="minor">
-                <a:schemeClr val="tx1"/>
-              </a:fontRef>
-            </p:style>
-          </p:cxnSp>
-        </p:grpSp>
-        <p:cxnSp>
-          <p:nvCxnSpPr>
-            <p:cNvPr id="42" name="直接箭头连接符 41">
-              <a:extLst>
-                <a:ext uri="{FF2B5EF4-FFF2-40B4-BE49-F238E27FC236}">
-                  <a16:creationId xmlns:a16="http://schemas.microsoft.com/office/drawing/2014/main" id="{676B5DFB-2CEC-15A3-470C-3FBD12ECC444}"/>
-                </a:ext>
-              </a:extLst>
-            </p:cNvPr>
-            <p:cNvCxnSpPr/>
+            <p:cNvCxnSpPr>
+              <a:cxnSpLocks/>
+            </p:cNvCxnSpPr>
             <p:nvPr/>
           </p:nvCxnSpPr>
           <p:spPr>
             <a:xfrm>
-              <a:off x="5046528" y="2497275"/>
-              <a:ext cx="2069228" cy="825045"/>
+              <a:off x="1628383" y="2499360"/>
+              <a:ext cx="3400399" cy="0"/>
             </a:xfrm>
             <a:prstGeom prst="straightConnector1">
               <a:avLst/>
@@ -29713,20 +30601,22 @@
         </p:cxnSp>
         <p:cxnSp>
           <p:nvCxnSpPr>
-            <p:cNvPr id="44" name="直接箭头连接符 43">
+            <p:cNvPr id="15" name="直接箭头连接符 14">
               <a:extLst>
                 <a:ext uri="{FF2B5EF4-FFF2-40B4-BE49-F238E27FC236}">
-                  <a16:creationId xmlns:a16="http://schemas.microsoft.com/office/drawing/2014/main" id="{3B77ADF2-4FD4-9F6B-A30C-31B7CB85DD97}"/>
+                  <a16:creationId xmlns:a16="http://schemas.microsoft.com/office/drawing/2014/main" id="{E22D7F04-9410-9648-A668-BBB878CA769D}"/>
                 </a:ext>
               </a:extLst>
             </p:cNvPr>
-            <p:cNvCxnSpPr/>
+            <p:cNvCxnSpPr>
+              <a:cxnSpLocks/>
+            </p:cNvCxnSpPr>
             <p:nvPr/>
           </p:nvCxnSpPr>
           <p:spPr>
-            <a:xfrm flipV="1">
-              <a:off x="5046528" y="3322320"/>
-              <a:ext cx="2069228" cy="925257"/>
+            <a:xfrm>
+              <a:off x="1628382" y="4236720"/>
+              <a:ext cx="3435891" cy="0"/>
             </a:xfrm>
             <a:prstGeom prst="straightConnector1">
               <a:avLst/>
@@ -29755,20 +30645,22 @@
         </p:cxnSp>
         <p:cxnSp>
           <p:nvCxnSpPr>
-            <p:cNvPr id="46" name="直接箭头连接符 45">
+            <p:cNvPr id="17" name="直接箭头连接符 16">
               <a:extLst>
                 <a:ext uri="{FF2B5EF4-FFF2-40B4-BE49-F238E27FC236}">
-                  <a16:creationId xmlns:a16="http://schemas.microsoft.com/office/drawing/2014/main" id="{918B934F-A2A7-769D-2002-AC17404034C9}"/>
+                  <a16:creationId xmlns:a16="http://schemas.microsoft.com/office/drawing/2014/main" id="{DA21A69A-EBA6-0CDF-C318-60BC2F1FB540}"/>
                 </a:ext>
               </a:extLst>
             </p:cNvPr>
-            <p:cNvCxnSpPr/>
+            <p:cNvCxnSpPr>
+              <a:cxnSpLocks/>
+            </p:cNvCxnSpPr>
             <p:nvPr/>
           </p:nvCxnSpPr>
           <p:spPr>
-            <a:xfrm>
-              <a:off x="5046528" y="3322320"/>
-              <a:ext cx="2069228" cy="822960"/>
+            <a:xfrm flipH="1">
+              <a:off x="1628382" y="3322320"/>
+              <a:ext cx="3418146" cy="0"/>
             </a:xfrm>
             <a:prstGeom prst="straightConnector1">
               <a:avLst/>
@@ -29797,20 +30689,22 @@
         </p:cxnSp>
         <p:cxnSp>
           <p:nvCxnSpPr>
-            <p:cNvPr id="48" name="直接箭头连接符 47">
+            <p:cNvPr id="18" name="直接箭头连接符 17">
               <a:extLst>
                 <a:ext uri="{FF2B5EF4-FFF2-40B4-BE49-F238E27FC236}">
-                  <a16:creationId xmlns:a16="http://schemas.microsoft.com/office/drawing/2014/main" id="{5A9FB945-9663-C504-847E-DF6163E87053}"/>
+                  <a16:creationId xmlns:a16="http://schemas.microsoft.com/office/drawing/2014/main" id="{71154223-CD89-A27C-7652-475411DBBB72}"/>
                 </a:ext>
               </a:extLst>
             </p:cNvPr>
-            <p:cNvCxnSpPr/>
+            <p:cNvCxnSpPr>
+              <a:cxnSpLocks/>
+            </p:cNvCxnSpPr>
             <p:nvPr/>
           </p:nvCxnSpPr>
           <p:spPr>
-            <a:xfrm flipV="1">
-              <a:off x="5046528" y="4145280"/>
-              <a:ext cx="2069228" cy="975360"/>
+            <a:xfrm flipH="1">
+              <a:off x="1610635" y="5120640"/>
+              <a:ext cx="3453638" cy="0"/>
             </a:xfrm>
             <a:prstGeom prst="straightConnector1">
               <a:avLst/>
@@ -29839,10 +30733,10 @@
         </p:cxnSp>
         <p:sp>
           <p:nvSpPr>
-            <p:cNvPr id="51" name="文本框 50">
+            <p:cNvPr id="19" name="文本框 18">
               <a:extLst>
                 <a:ext uri="{FF2B5EF4-FFF2-40B4-BE49-F238E27FC236}">
-                  <a16:creationId xmlns:a16="http://schemas.microsoft.com/office/drawing/2014/main" id="{DC6877E1-730E-0966-A10A-6A66ADD73C7A}"/>
+                  <a16:creationId xmlns:a16="http://schemas.microsoft.com/office/drawing/2014/main" id="{D976A72B-6B39-A0FC-EC75-C1BD6134B09A}"/>
                 </a:ext>
               </a:extLst>
             </p:cNvPr>
@@ -29851,7 +30745,55 @@
           </p:nvSpPr>
           <p:spPr>
             <a:xfrm>
-              <a:off x="7423509" y="2929047"/>
+              <a:off x="2283148" y="2127943"/>
+              <a:ext cx="2117941" cy="369332"/>
+            </a:xfrm>
+            <a:prstGeom prst="rect">
+              <a:avLst/>
+            </a:prstGeom>
+            <a:noFill/>
+            <a:ln w="15875">
+              <a:noFill/>
+            </a:ln>
+          </p:spPr>
+          <p:txBody>
+            <a:bodyPr wrap="square" rtlCol="0" anchor="ctr" anchorCtr="1">
+              <a:spAutoFit/>
+            </a:bodyPr>
+            <a:lstStyle/>
+            <a:p>
+              <a:r>
+                <a:rPr lang="en-US" altLang="zh-CN" dirty="0">
+                  <a:latin typeface="Times New Roman" panose="02020603050405020304" pitchFamily="18" charset="0"/>
+                  <a:ea typeface="宋体" panose="02010600030101010101" pitchFamily="2" charset="-122"/>
+                </a:rPr>
+                <a:t>Msg1</a:t>
+              </a:r>
+              <a:r>
+                <a:rPr lang="zh-CN" altLang="en-US" dirty="0">
+                  <a:latin typeface="Times New Roman" panose="02020603050405020304" pitchFamily="18" charset="0"/>
+                  <a:ea typeface="宋体" panose="02010600030101010101" pitchFamily="2" charset="-122"/>
+                </a:rPr>
+                <a:t>：前导序列</a:t>
+              </a:r>
+            </a:p>
+          </p:txBody>
+        </p:sp>
+        <p:sp>
+          <p:nvSpPr>
+            <p:cNvPr id="21" name="文本框 20">
+              <a:extLst>
+                <a:ext uri="{FF2B5EF4-FFF2-40B4-BE49-F238E27FC236}">
+                  <a16:creationId xmlns:a16="http://schemas.microsoft.com/office/drawing/2014/main" id="{A779A4C8-BF8F-36E5-7807-FD323DF7D762}"/>
+                </a:ext>
+              </a:extLst>
+            </p:cNvPr>
+            <p:cNvSpPr txBox="1"/>
+            <p:nvPr/>
+          </p:nvSpPr>
+          <p:spPr>
+            <a:xfrm>
+              <a:off x="1909558" y="3003094"/>
               <a:ext cx="2865120" cy="369332"/>
             </a:xfrm>
             <a:prstGeom prst="rect">
@@ -29869,42 +30811,28 @@
             <a:lstStyle/>
             <a:p>
               <a:r>
-                <a:rPr lang="en-US" altLang="zh-CN" dirty="0" err="1">
+                <a:rPr lang="en-US" altLang="zh-CN" dirty="0">
                   <a:latin typeface="Times New Roman" panose="02020603050405020304" pitchFamily="18" charset="0"/>
                   <a:ea typeface="宋体" panose="02010600030101010101" pitchFamily="2" charset="-122"/>
                 </a:rPr>
-                <a:t>MsgA</a:t>
+                <a:t>Msg2</a:t>
               </a:r>
               <a:r>
                 <a:rPr lang="zh-CN" altLang="en-US" dirty="0">
                   <a:latin typeface="Times New Roman" panose="02020603050405020304" pitchFamily="18" charset="0"/>
                   <a:ea typeface="宋体" panose="02010600030101010101" pitchFamily="2" charset="-122"/>
                 </a:rPr>
-                <a:t>：前导</a:t>
-              </a:r>
-              <a:r>
-                <a:rPr lang="en-US" altLang="zh-CN" dirty="0">
-                  <a:latin typeface="Times New Roman" panose="02020603050405020304" pitchFamily="18" charset="0"/>
-                  <a:ea typeface="宋体" panose="02010600030101010101" pitchFamily="2" charset="-122"/>
-                </a:rPr>
-                <a:t>+</a:t>
-              </a:r>
-              <a:r>
-                <a:rPr lang="zh-CN" altLang="en-US" dirty="0">
-                  <a:latin typeface="Times New Roman" panose="02020603050405020304" pitchFamily="18" charset="0"/>
-                  <a:ea typeface="宋体" panose="02010600030101010101" pitchFamily="2" charset="-122"/>
-                </a:rPr>
-                <a:t>短数据报文</a:t>
+                <a:t>：随机接入响应报文</a:t>
               </a:r>
             </a:p>
           </p:txBody>
         </p:sp>
         <p:sp>
           <p:nvSpPr>
-            <p:cNvPr id="52" name="文本框 51">
+            <p:cNvPr id="22" name="文本框 21">
               <a:extLst>
                 <a:ext uri="{FF2B5EF4-FFF2-40B4-BE49-F238E27FC236}">
-                  <a16:creationId xmlns:a16="http://schemas.microsoft.com/office/drawing/2014/main" id="{DEF0FDD2-18EA-6FFA-BD4F-8A06790EAD81}"/>
+                  <a16:creationId xmlns:a16="http://schemas.microsoft.com/office/drawing/2014/main" id="{FDB78DD2-FDAB-24EE-A485-45CCA9CB0890}"/>
                 </a:ext>
               </a:extLst>
             </p:cNvPr>
@@ -29913,8 +30841,8 @@
           </p:nvSpPr>
           <p:spPr>
             <a:xfrm>
-              <a:off x="7412277" y="3764838"/>
-              <a:ext cx="2865120" cy="369332"/>
+              <a:off x="1675843" y="3878245"/>
+              <a:ext cx="3332550" cy="369332"/>
             </a:xfrm>
             <a:prstGeom prst="rect">
               <a:avLst/>
@@ -29931,28 +30859,28 @@
             <a:lstStyle/>
             <a:p>
               <a:r>
-                <a:rPr lang="en-US" altLang="zh-CN" dirty="0" err="1">
+                <a:rPr lang="en-US" altLang="zh-CN" dirty="0">
                   <a:latin typeface="Times New Roman" panose="02020603050405020304" pitchFamily="18" charset="0"/>
                   <a:ea typeface="宋体" panose="02010600030101010101" pitchFamily="2" charset="-122"/>
                 </a:rPr>
-                <a:t>MsgB</a:t>
+                <a:t>Msg3</a:t>
               </a:r>
               <a:r>
                 <a:rPr lang="zh-CN" altLang="en-US" dirty="0">
                   <a:latin typeface="Times New Roman" panose="02020603050405020304" pitchFamily="18" charset="0"/>
                   <a:ea typeface="宋体" panose="02010600030101010101" pitchFamily="2" charset="-122"/>
                 </a:rPr>
-                <a:t>：竞争冲突解决</a:t>
+                <a:t>：短数据报文</a:t>
               </a:r>
             </a:p>
           </p:txBody>
         </p:sp>
         <p:sp>
           <p:nvSpPr>
-            <p:cNvPr id="6" name="文本框 5">
+            <p:cNvPr id="23" name="文本框 22">
               <a:extLst>
                 <a:ext uri="{FF2B5EF4-FFF2-40B4-BE49-F238E27FC236}">
-                  <a16:creationId xmlns:a16="http://schemas.microsoft.com/office/drawing/2014/main" id="{19C69D56-0317-FF97-A7C0-2B1DAA67B956}"/>
+                  <a16:creationId xmlns:a16="http://schemas.microsoft.com/office/drawing/2014/main" id="{83960ED7-47B6-ED66-C559-176F06B5535D}"/>
                 </a:ext>
               </a:extLst>
             </p:cNvPr>
@@ -29961,13 +30889,16 @@
           </p:nvSpPr>
           <p:spPr>
             <a:xfrm>
-              <a:off x="1638850" y="5661483"/>
-              <a:ext cx="3397208" cy="369332"/>
+              <a:off x="1962846" y="4753395"/>
+              <a:ext cx="2758544" cy="369332"/>
             </a:xfrm>
             <a:prstGeom prst="rect">
               <a:avLst/>
             </a:prstGeom>
             <a:noFill/>
+            <a:ln w="15875">
+              <a:noFill/>
+            </a:ln>
           </p:spPr>
           <p:txBody>
             <a:bodyPr wrap="square" rtlCol="0" anchor="ctr" anchorCtr="1">
@@ -29976,82 +30907,724 @@
             <a:lstStyle/>
             <a:p>
               <a:r>
-                <a:rPr lang="zh-CN" altLang="en-US" dirty="0">
-                  <a:latin typeface="Times New Roman" panose="02020603050405020304" pitchFamily="18" charset="0"/>
-                  <a:ea typeface="宋体" panose="02010600030101010101" pitchFamily="2" charset="-122"/>
-                </a:rPr>
-                <a:t>四步</a:t>
-              </a:r>
-              <a:r>
                 <a:rPr lang="en-US" altLang="zh-CN" dirty="0">
                   <a:latin typeface="Times New Roman" panose="02020603050405020304" pitchFamily="18" charset="0"/>
                   <a:ea typeface="宋体" panose="02010600030101010101" pitchFamily="2" charset="-122"/>
                 </a:rPr>
-                <a:t>SDT </a:t>
+                <a:t>Msg4</a:t>
               </a:r>
               <a:r>
                 <a:rPr lang="zh-CN" altLang="en-US" dirty="0">
                   <a:latin typeface="Times New Roman" panose="02020603050405020304" pitchFamily="18" charset="0"/>
                   <a:ea typeface="宋体" panose="02010600030101010101" pitchFamily="2" charset="-122"/>
                 </a:rPr>
-                <a:t>随机接入过程</a:t>
-              </a:r>
-            </a:p>
-          </p:txBody>
-        </p:sp>
-        <p:sp>
-          <p:nvSpPr>
-            <p:cNvPr id="7" name="文本框 6">
-              <a:extLst>
-                <a:ext uri="{FF2B5EF4-FFF2-40B4-BE49-F238E27FC236}">
-                  <a16:creationId xmlns:a16="http://schemas.microsoft.com/office/drawing/2014/main" id="{AF68249D-F6DA-AD52-8630-4846FDC11604}"/>
-                </a:ext>
-              </a:extLst>
-            </p:cNvPr>
-            <p:cNvSpPr txBox="1"/>
-            <p:nvPr/>
-          </p:nvSpPr>
-          <p:spPr>
-            <a:xfrm>
-              <a:off x="7315201" y="5661483"/>
-              <a:ext cx="3397208" cy="369332"/>
-            </a:xfrm>
-            <a:prstGeom prst="rect">
-              <a:avLst/>
-            </a:prstGeom>
-            <a:noFill/>
-          </p:spPr>
-          <p:txBody>
-            <a:bodyPr wrap="square" rtlCol="0" anchor="ctr" anchorCtr="1">
-              <a:spAutoFit/>
-            </a:bodyPr>
-            <a:lstStyle/>
-            <a:p>
-              <a:r>
-                <a:rPr lang="zh-CN" altLang="en-US" dirty="0">
-                  <a:latin typeface="Times New Roman" panose="02020603050405020304" pitchFamily="18" charset="0"/>
-                  <a:ea typeface="宋体" panose="02010600030101010101" pitchFamily="2" charset="-122"/>
-                </a:rPr>
-                <a:t>两步</a:t>
-              </a:r>
-              <a:r>
-                <a:rPr lang="en-US" altLang="zh-CN" dirty="0">
-                  <a:latin typeface="Times New Roman" panose="02020603050405020304" pitchFamily="18" charset="0"/>
-                  <a:ea typeface="宋体" panose="02010600030101010101" pitchFamily="2" charset="-122"/>
-                </a:rPr>
-                <a:t>SDT </a:t>
-              </a:r>
-              <a:r>
-                <a:rPr lang="zh-CN" altLang="en-US" dirty="0">
-                  <a:latin typeface="Times New Roman" panose="02020603050405020304" pitchFamily="18" charset="0"/>
-                  <a:ea typeface="宋体" panose="02010600030101010101" pitchFamily="2" charset="-122"/>
-                </a:rPr>
-                <a:t>随机接入过程</a:t>
+                <a:t>：确认答复报文</a:t>
               </a:r>
             </a:p>
           </p:txBody>
         </p:sp>
       </p:grpSp>
+      <p:sp>
+        <p:nvSpPr>
+          <p:cNvPr id="34" name="矩形 33">
+            <a:extLst>
+              <a:ext uri="{FF2B5EF4-FFF2-40B4-BE49-F238E27FC236}">
+                <a16:creationId xmlns:a16="http://schemas.microsoft.com/office/drawing/2014/main" id="{30406AED-C2E2-C582-C3D0-D383BF1C0C46}"/>
+              </a:ext>
+            </a:extLst>
+          </p:cNvPr>
+          <p:cNvSpPr/>
+          <p:nvPr/>
+        </p:nvSpPr>
+        <p:spPr>
+          <a:xfrm>
+            <a:off x="6777389" y="941692"/>
+            <a:ext cx="1052187" cy="688931"/>
+          </a:xfrm>
+          <a:prstGeom prst="rect">
+            <a:avLst/>
+          </a:prstGeom>
+          <a:noFill/>
+          <a:ln w="15875">
+            <a:solidFill>
+              <a:schemeClr val="tx1"/>
+            </a:solidFill>
+          </a:ln>
+        </p:spPr>
+        <p:style>
+          <a:lnRef idx="2">
+            <a:schemeClr val="accent1">
+              <a:shade val="50000"/>
+            </a:schemeClr>
+          </a:lnRef>
+          <a:fillRef idx="1">
+            <a:schemeClr val="accent1"/>
+          </a:fillRef>
+          <a:effectRef idx="0">
+            <a:schemeClr val="accent1"/>
+          </a:effectRef>
+          <a:fontRef idx="minor">
+            <a:schemeClr val="lt1"/>
+          </a:fontRef>
+        </p:style>
+        <p:txBody>
+          <a:bodyPr rtlCol="0" anchor="ctr"/>
+          <a:lstStyle/>
+          <a:p>
+            <a:pPr algn="ctr"/>
+            <a:r>
+              <a:rPr lang="zh-CN" altLang="en-US" dirty="0">
+                <a:solidFill>
+                  <a:schemeClr val="tx1"/>
+                </a:solidFill>
+                <a:latin typeface="Times New Roman" panose="02020603050405020304" pitchFamily="18" charset="0"/>
+                <a:ea typeface="宋体" panose="02010600030101010101" pitchFamily="2" charset="-122"/>
+              </a:rPr>
+              <a:t>终端</a:t>
+            </a:r>
+          </a:p>
+        </p:txBody>
+      </p:sp>
+      <p:sp>
+        <p:nvSpPr>
+          <p:cNvPr id="35" name="矩形 34">
+            <a:extLst>
+              <a:ext uri="{FF2B5EF4-FFF2-40B4-BE49-F238E27FC236}">
+                <a16:creationId xmlns:a16="http://schemas.microsoft.com/office/drawing/2014/main" id="{D7F0F3AE-4AB1-4194-64AF-079573F6F6F8}"/>
+              </a:ext>
+            </a:extLst>
+          </p:cNvPr>
+          <p:cNvSpPr/>
+          <p:nvPr/>
+        </p:nvSpPr>
+        <p:spPr>
+          <a:xfrm>
+            <a:off x="10177788" y="941692"/>
+            <a:ext cx="1052187" cy="688931"/>
+          </a:xfrm>
+          <a:prstGeom prst="rect">
+            <a:avLst/>
+          </a:prstGeom>
+          <a:noFill/>
+          <a:ln w="15875">
+            <a:solidFill>
+              <a:schemeClr val="tx1"/>
+            </a:solidFill>
+          </a:ln>
+        </p:spPr>
+        <p:style>
+          <a:lnRef idx="2">
+            <a:schemeClr val="accent1">
+              <a:shade val="50000"/>
+            </a:schemeClr>
+          </a:lnRef>
+          <a:fillRef idx="1">
+            <a:schemeClr val="accent1"/>
+          </a:fillRef>
+          <a:effectRef idx="0">
+            <a:schemeClr val="accent1"/>
+          </a:effectRef>
+          <a:fontRef idx="minor">
+            <a:schemeClr val="lt1"/>
+          </a:fontRef>
+        </p:style>
+        <p:txBody>
+          <a:bodyPr rtlCol="0" anchor="ctr"/>
+          <a:lstStyle/>
+          <a:p>
+            <a:pPr algn="ctr"/>
+            <a:r>
+              <a:rPr lang="zh-CN" altLang="en-US" dirty="0">
+                <a:solidFill>
+                  <a:schemeClr val="tx1"/>
+                </a:solidFill>
+                <a:latin typeface="Times New Roman" panose="02020603050405020304" pitchFamily="18" charset="0"/>
+                <a:ea typeface="宋体" panose="02010600030101010101" pitchFamily="2" charset="-122"/>
+              </a:rPr>
+              <a:t>基站</a:t>
+            </a:r>
+          </a:p>
+        </p:txBody>
+      </p:sp>
+      <p:cxnSp>
+        <p:nvCxnSpPr>
+          <p:cNvPr id="36" name="直接箭头连接符 35">
+            <a:extLst>
+              <a:ext uri="{FF2B5EF4-FFF2-40B4-BE49-F238E27FC236}">
+                <a16:creationId xmlns:a16="http://schemas.microsoft.com/office/drawing/2014/main" id="{C526CF12-E7BF-F813-B90B-E8F59E7AB6D6}"/>
+              </a:ext>
+            </a:extLst>
+          </p:cNvPr>
+          <p:cNvCxnSpPr>
+            <a:stCxn id="34" idx="2"/>
+          </p:cNvCxnSpPr>
+          <p:nvPr/>
+        </p:nvCxnSpPr>
+        <p:spPr>
+          <a:xfrm flipH="1">
+            <a:off x="7303482" y="1630623"/>
+            <a:ext cx="1" cy="3600000"/>
+          </a:xfrm>
+          <a:prstGeom prst="straightConnector1">
+            <a:avLst/>
+          </a:prstGeom>
+          <a:ln w="15875">
+            <a:solidFill>
+              <a:schemeClr val="tx1"/>
+            </a:solidFill>
+            <a:tailEnd type="none"/>
+          </a:ln>
+        </p:spPr>
+        <p:style>
+          <a:lnRef idx="1">
+            <a:schemeClr val="accent1"/>
+          </a:lnRef>
+          <a:fillRef idx="0">
+            <a:schemeClr val="accent1"/>
+          </a:fillRef>
+          <a:effectRef idx="0">
+            <a:schemeClr val="accent1"/>
+          </a:effectRef>
+          <a:fontRef idx="minor">
+            <a:schemeClr val="tx1"/>
+          </a:fontRef>
+        </p:style>
+      </p:cxnSp>
+      <p:cxnSp>
+        <p:nvCxnSpPr>
+          <p:cNvPr id="37" name="直接箭头连接符 36">
+            <a:extLst>
+              <a:ext uri="{FF2B5EF4-FFF2-40B4-BE49-F238E27FC236}">
+                <a16:creationId xmlns:a16="http://schemas.microsoft.com/office/drawing/2014/main" id="{52D0BE3B-F41D-313D-9D54-CCDFB8DA3F64}"/>
+              </a:ext>
+            </a:extLst>
+          </p:cNvPr>
+          <p:cNvCxnSpPr>
+            <a:stCxn id="35" idx="2"/>
+          </p:cNvCxnSpPr>
+          <p:nvPr/>
+        </p:nvCxnSpPr>
+        <p:spPr>
+          <a:xfrm>
+            <a:off x="10703882" y="1630623"/>
+            <a:ext cx="35490" cy="3600000"/>
+          </a:xfrm>
+          <a:prstGeom prst="straightConnector1">
+            <a:avLst/>
+          </a:prstGeom>
+          <a:ln w="15875">
+            <a:solidFill>
+              <a:schemeClr val="tx1"/>
+            </a:solidFill>
+            <a:tailEnd type="none"/>
+          </a:ln>
+        </p:spPr>
+        <p:style>
+          <a:lnRef idx="1">
+            <a:schemeClr val="accent1"/>
+          </a:lnRef>
+          <a:fillRef idx="0">
+            <a:schemeClr val="accent1"/>
+          </a:fillRef>
+          <a:effectRef idx="0">
+            <a:schemeClr val="accent1"/>
+          </a:effectRef>
+          <a:fontRef idx="minor">
+            <a:schemeClr val="tx1"/>
+          </a:fontRef>
+        </p:style>
+      </p:cxnSp>
+      <p:grpSp>
+        <p:nvGrpSpPr>
+          <p:cNvPr id="40" name="组合 39">
+            <a:extLst>
+              <a:ext uri="{FF2B5EF4-FFF2-40B4-BE49-F238E27FC236}">
+                <a16:creationId xmlns:a16="http://schemas.microsoft.com/office/drawing/2014/main" id="{2BB71B87-58CB-7FCC-FFE8-E4594220A992}"/>
+              </a:ext>
+            </a:extLst>
+          </p:cNvPr>
+          <p:cNvGrpSpPr/>
+          <p:nvPr/>
+        </p:nvGrpSpPr>
+        <p:grpSpPr>
+          <a:xfrm>
+            <a:off x="7303481" y="3074039"/>
+            <a:ext cx="3418146" cy="822960"/>
+            <a:chOff x="7115756" y="3259756"/>
+            <a:chExt cx="3418146" cy="822960"/>
+          </a:xfrm>
+        </p:grpSpPr>
+        <p:cxnSp>
+          <p:nvCxnSpPr>
+            <p:cNvPr id="38" name="直接箭头连接符 37">
+              <a:extLst>
+                <a:ext uri="{FF2B5EF4-FFF2-40B4-BE49-F238E27FC236}">
+                  <a16:creationId xmlns:a16="http://schemas.microsoft.com/office/drawing/2014/main" id="{B8D48B1D-848D-DDEA-FF2F-47AE8B708800}"/>
+                </a:ext>
+              </a:extLst>
+            </p:cNvPr>
+            <p:cNvCxnSpPr>
+              <a:cxnSpLocks/>
+            </p:cNvCxnSpPr>
+            <p:nvPr/>
+          </p:nvCxnSpPr>
+          <p:spPr>
+            <a:xfrm>
+              <a:off x="7115757" y="3259756"/>
+              <a:ext cx="3400399" cy="0"/>
+            </a:xfrm>
+            <a:prstGeom prst="straightConnector1">
+              <a:avLst/>
+            </a:prstGeom>
+            <a:ln w="15875">
+              <a:solidFill>
+                <a:schemeClr val="tx1"/>
+              </a:solidFill>
+              <a:tailEnd type="triangle"/>
+            </a:ln>
+          </p:spPr>
+          <p:style>
+            <a:lnRef idx="1">
+              <a:schemeClr val="accent1"/>
+            </a:lnRef>
+            <a:fillRef idx="0">
+              <a:schemeClr val="accent1"/>
+            </a:fillRef>
+            <a:effectRef idx="0">
+              <a:schemeClr val="accent1"/>
+            </a:effectRef>
+            <a:fontRef idx="minor">
+              <a:schemeClr val="tx1"/>
+            </a:fontRef>
+          </p:style>
+        </p:cxnSp>
+        <p:cxnSp>
+          <p:nvCxnSpPr>
+            <p:cNvPr id="39" name="直接箭头连接符 38">
+              <a:extLst>
+                <a:ext uri="{FF2B5EF4-FFF2-40B4-BE49-F238E27FC236}">
+                  <a16:creationId xmlns:a16="http://schemas.microsoft.com/office/drawing/2014/main" id="{500809F9-3854-7828-2FAF-EC79576B32CE}"/>
+                </a:ext>
+              </a:extLst>
+            </p:cNvPr>
+            <p:cNvCxnSpPr>
+              <a:cxnSpLocks/>
+            </p:cNvCxnSpPr>
+            <p:nvPr/>
+          </p:nvCxnSpPr>
+          <p:spPr>
+            <a:xfrm flipH="1">
+              <a:off x="7115756" y="4082716"/>
+              <a:ext cx="3418146" cy="0"/>
+            </a:xfrm>
+            <a:prstGeom prst="straightConnector1">
+              <a:avLst/>
+            </a:prstGeom>
+            <a:ln w="15875">
+              <a:solidFill>
+                <a:schemeClr val="tx1"/>
+              </a:solidFill>
+              <a:tailEnd type="triangle"/>
+            </a:ln>
+          </p:spPr>
+          <p:style>
+            <a:lnRef idx="1">
+              <a:schemeClr val="accent1"/>
+            </a:lnRef>
+            <a:fillRef idx="0">
+              <a:schemeClr val="accent1"/>
+            </a:fillRef>
+            <a:effectRef idx="0">
+              <a:schemeClr val="accent1"/>
+            </a:effectRef>
+            <a:fontRef idx="minor">
+              <a:schemeClr val="tx1"/>
+            </a:fontRef>
+          </p:style>
+        </p:cxnSp>
+      </p:grpSp>
+      <p:cxnSp>
+        <p:nvCxnSpPr>
+          <p:cNvPr id="42" name="直接箭头连接符 41">
+            <a:extLst>
+              <a:ext uri="{FF2B5EF4-FFF2-40B4-BE49-F238E27FC236}">
+                <a16:creationId xmlns:a16="http://schemas.microsoft.com/office/drawing/2014/main" id="{676B5DFB-2CEC-15A3-470C-3FBD12ECC444}"/>
+              </a:ext>
+            </a:extLst>
+          </p:cNvPr>
+          <p:cNvCxnSpPr/>
+          <p:nvPr/>
+        </p:nvCxnSpPr>
+        <p:spPr>
+          <a:xfrm>
+            <a:off x="5234253" y="2248994"/>
+            <a:ext cx="2069228" cy="825045"/>
+          </a:xfrm>
+          <a:prstGeom prst="straightConnector1">
+            <a:avLst/>
+          </a:prstGeom>
+          <a:ln w="15875">
+            <a:solidFill>
+              <a:schemeClr val="tx1"/>
+            </a:solidFill>
+            <a:tailEnd type="triangle"/>
+          </a:ln>
+        </p:spPr>
+        <p:style>
+          <a:lnRef idx="1">
+            <a:schemeClr val="accent1"/>
+          </a:lnRef>
+          <a:fillRef idx="0">
+            <a:schemeClr val="accent1"/>
+          </a:fillRef>
+          <a:effectRef idx="0">
+            <a:schemeClr val="accent1"/>
+          </a:effectRef>
+          <a:fontRef idx="minor">
+            <a:schemeClr val="tx1"/>
+          </a:fontRef>
+        </p:style>
+      </p:cxnSp>
+      <p:cxnSp>
+        <p:nvCxnSpPr>
+          <p:cNvPr id="44" name="直接箭头连接符 43">
+            <a:extLst>
+              <a:ext uri="{FF2B5EF4-FFF2-40B4-BE49-F238E27FC236}">
+                <a16:creationId xmlns:a16="http://schemas.microsoft.com/office/drawing/2014/main" id="{3B77ADF2-4FD4-9F6B-A30C-31B7CB85DD97}"/>
+              </a:ext>
+            </a:extLst>
+          </p:cNvPr>
+          <p:cNvCxnSpPr/>
+          <p:nvPr/>
+        </p:nvCxnSpPr>
+        <p:spPr>
+          <a:xfrm flipV="1">
+            <a:off x="5234253" y="3074039"/>
+            <a:ext cx="2069228" cy="925257"/>
+          </a:xfrm>
+          <a:prstGeom prst="straightConnector1">
+            <a:avLst/>
+          </a:prstGeom>
+          <a:ln w="15875">
+            <a:solidFill>
+              <a:schemeClr val="tx1"/>
+            </a:solidFill>
+            <a:tailEnd type="triangle"/>
+          </a:ln>
+        </p:spPr>
+        <p:style>
+          <a:lnRef idx="1">
+            <a:schemeClr val="accent1"/>
+          </a:lnRef>
+          <a:fillRef idx="0">
+            <a:schemeClr val="accent1"/>
+          </a:fillRef>
+          <a:effectRef idx="0">
+            <a:schemeClr val="accent1"/>
+          </a:effectRef>
+          <a:fontRef idx="minor">
+            <a:schemeClr val="tx1"/>
+          </a:fontRef>
+        </p:style>
+      </p:cxnSp>
+      <p:cxnSp>
+        <p:nvCxnSpPr>
+          <p:cNvPr id="46" name="直接箭头连接符 45">
+            <a:extLst>
+              <a:ext uri="{FF2B5EF4-FFF2-40B4-BE49-F238E27FC236}">
+                <a16:creationId xmlns:a16="http://schemas.microsoft.com/office/drawing/2014/main" id="{918B934F-A2A7-769D-2002-AC17404034C9}"/>
+              </a:ext>
+            </a:extLst>
+          </p:cNvPr>
+          <p:cNvCxnSpPr/>
+          <p:nvPr/>
+        </p:nvCxnSpPr>
+        <p:spPr>
+          <a:xfrm>
+            <a:off x="5234253" y="3074039"/>
+            <a:ext cx="2069228" cy="822960"/>
+          </a:xfrm>
+          <a:prstGeom prst="straightConnector1">
+            <a:avLst/>
+          </a:prstGeom>
+          <a:ln w="15875">
+            <a:solidFill>
+              <a:schemeClr val="tx1"/>
+            </a:solidFill>
+            <a:tailEnd type="triangle"/>
+          </a:ln>
+        </p:spPr>
+        <p:style>
+          <a:lnRef idx="1">
+            <a:schemeClr val="accent1"/>
+          </a:lnRef>
+          <a:fillRef idx="0">
+            <a:schemeClr val="accent1"/>
+          </a:fillRef>
+          <a:effectRef idx="0">
+            <a:schemeClr val="accent1"/>
+          </a:effectRef>
+          <a:fontRef idx="minor">
+            <a:schemeClr val="tx1"/>
+          </a:fontRef>
+        </p:style>
+      </p:cxnSp>
+      <p:cxnSp>
+        <p:nvCxnSpPr>
+          <p:cNvPr id="48" name="直接箭头连接符 47">
+            <a:extLst>
+              <a:ext uri="{FF2B5EF4-FFF2-40B4-BE49-F238E27FC236}">
+                <a16:creationId xmlns:a16="http://schemas.microsoft.com/office/drawing/2014/main" id="{5A9FB945-9663-C504-847E-DF6163E87053}"/>
+              </a:ext>
+            </a:extLst>
+          </p:cNvPr>
+          <p:cNvCxnSpPr/>
+          <p:nvPr/>
+        </p:nvCxnSpPr>
+        <p:spPr>
+          <a:xfrm flipV="1">
+            <a:off x="5234253" y="3896999"/>
+            <a:ext cx="2069228" cy="975360"/>
+          </a:xfrm>
+          <a:prstGeom prst="straightConnector1">
+            <a:avLst/>
+          </a:prstGeom>
+          <a:ln w="15875">
+            <a:solidFill>
+              <a:schemeClr val="tx1"/>
+            </a:solidFill>
+            <a:tailEnd type="triangle"/>
+          </a:ln>
+        </p:spPr>
+        <p:style>
+          <a:lnRef idx="1">
+            <a:schemeClr val="accent1"/>
+          </a:lnRef>
+          <a:fillRef idx="0">
+            <a:schemeClr val="accent1"/>
+          </a:fillRef>
+          <a:effectRef idx="0">
+            <a:schemeClr val="accent1"/>
+          </a:effectRef>
+          <a:fontRef idx="minor">
+            <a:schemeClr val="tx1"/>
+          </a:fontRef>
+        </p:style>
+      </p:cxnSp>
+      <p:sp>
+        <p:nvSpPr>
+          <p:cNvPr id="51" name="文本框 50">
+            <a:extLst>
+              <a:ext uri="{FF2B5EF4-FFF2-40B4-BE49-F238E27FC236}">
+                <a16:creationId xmlns:a16="http://schemas.microsoft.com/office/drawing/2014/main" id="{DC6877E1-730E-0966-A10A-6A66ADD73C7A}"/>
+              </a:ext>
+            </a:extLst>
+          </p:cNvPr>
+          <p:cNvSpPr txBox="1"/>
+          <p:nvPr/>
+        </p:nvSpPr>
+        <p:spPr>
+          <a:xfrm>
+            <a:off x="7611234" y="2680766"/>
+            <a:ext cx="2865120" cy="369332"/>
+          </a:xfrm>
+          <a:prstGeom prst="rect">
+            <a:avLst/>
+          </a:prstGeom>
+          <a:noFill/>
+          <a:ln w="15875">
+            <a:noFill/>
+          </a:ln>
+        </p:spPr>
+        <p:txBody>
+          <a:bodyPr wrap="square" rtlCol="0" anchor="ctr" anchorCtr="1">
+            <a:spAutoFit/>
+          </a:bodyPr>
+          <a:lstStyle/>
+          <a:p>
+            <a:r>
+              <a:rPr lang="en-US" altLang="zh-CN" dirty="0" err="1">
+                <a:latin typeface="Times New Roman" panose="02020603050405020304" pitchFamily="18" charset="0"/>
+                <a:ea typeface="宋体" panose="02010600030101010101" pitchFamily="2" charset="-122"/>
+              </a:rPr>
+              <a:t>MsgA</a:t>
+            </a:r>
+            <a:r>
+              <a:rPr lang="zh-CN" altLang="en-US" dirty="0">
+                <a:latin typeface="Times New Roman" panose="02020603050405020304" pitchFamily="18" charset="0"/>
+                <a:ea typeface="宋体" panose="02010600030101010101" pitchFamily="2" charset="-122"/>
+              </a:rPr>
+              <a:t>：前导</a:t>
+            </a:r>
+            <a:r>
+              <a:rPr lang="en-US" altLang="zh-CN" dirty="0">
+                <a:latin typeface="Times New Roman" panose="02020603050405020304" pitchFamily="18" charset="0"/>
+                <a:ea typeface="宋体" panose="02010600030101010101" pitchFamily="2" charset="-122"/>
+              </a:rPr>
+              <a:t>+</a:t>
+            </a:r>
+            <a:r>
+              <a:rPr lang="zh-CN" altLang="en-US" dirty="0">
+                <a:latin typeface="Times New Roman" panose="02020603050405020304" pitchFamily="18" charset="0"/>
+                <a:ea typeface="宋体" panose="02010600030101010101" pitchFamily="2" charset="-122"/>
+              </a:rPr>
+              <a:t>短数据报文</a:t>
+            </a:r>
+          </a:p>
+        </p:txBody>
+      </p:sp>
+      <p:sp>
+        <p:nvSpPr>
+          <p:cNvPr id="52" name="文本框 51">
+            <a:extLst>
+              <a:ext uri="{FF2B5EF4-FFF2-40B4-BE49-F238E27FC236}">
+                <a16:creationId xmlns:a16="http://schemas.microsoft.com/office/drawing/2014/main" id="{DEF0FDD2-18EA-6FFA-BD4F-8A06790EAD81}"/>
+              </a:ext>
+            </a:extLst>
+          </p:cNvPr>
+          <p:cNvSpPr txBox="1"/>
+          <p:nvPr/>
+        </p:nvSpPr>
+        <p:spPr>
+          <a:xfrm>
+            <a:off x="7600002" y="3516557"/>
+            <a:ext cx="2865120" cy="369332"/>
+          </a:xfrm>
+          <a:prstGeom prst="rect">
+            <a:avLst/>
+          </a:prstGeom>
+          <a:noFill/>
+          <a:ln w="15875">
+            <a:noFill/>
+          </a:ln>
+        </p:spPr>
+        <p:txBody>
+          <a:bodyPr wrap="square" rtlCol="0" anchor="ctr" anchorCtr="1">
+            <a:spAutoFit/>
+          </a:bodyPr>
+          <a:lstStyle/>
+          <a:p>
+            <a:r>
+              <a:rPr lang="en-US" altLang="zh-CN" dirty="0" err="1">
+                <a:latin typeface="Times New Roman" panose="02020603050405020304" pitchFamily="18" charset="0"/>
+                <a:ea typeface="宋体" panose="02010600030101010101" pitchFamily="2" charset="-122"/>
+              </a:rPr>
+              <a:t>MsgB</a:t>
+            </a:r>
+            <a:r>
+              <a:rPr lang="zh-CN" altLang="en-US" dirty="0">
+                <a:latin typeface="Times New Roman" panose="02020603050405020304" pitchFamily="18" charset="0"/>
+                <a:ea typeface="宋体" panose="02010600030101010101" pitchFamily="2" charset="-122"/>
+              </a:rPr>
+              <a:t>：竞争冲突解决</a:t>
+            </a:r>
+          </a:p>
+        </p:txBody>
+      </p:sp>
+      <p:sp>
+        <p:nvSpPr>
+          <p:cNvPr id="6" name="文本框 5">
+            <a:extLst>
+              <a:ext uri="{FF2B5EF4-FFF2-40B4-BE49-F238E27FC236}">
+                <a16:creationId xmlns:a16="http://schemas.microsoft.com/office/drawing/2014/main" id="{19C69D56-0317-FF97-A7C0-2B1DAA67B956}"/>
+              </a:ext>
+            </a:extLst>
+          </p:cNvPr>
+          <p:cNvSpPr txBox="1"/>
+          <p:nvPr/>
+        </p:nvSpPr>
+        <p:spPr>
+          <a:xfrm>
+            <a:off x="1826575" y="5413202"/>
+            <a:ext cx="3397208" cy="369332"/>
+          </a:xfrm>
+          <a:prstGeom prst="rect">
+            <a:avLst/>
+          </a:prstGeom>
+          <a:noFill/>
+        </p:spPr>
+        <p:txBody>
+          <a:bodyPr wrap="square" rtlCol="0" anchor="ctr" anchorCtr="1">
+            <a:spAutoFit/>
+          </a:bodyPr>
+          <a:lstStyle/>
+          <a:p>
+            <a:r>
+              <a:rPr lang="zh-CN" altLang="en-US" dirty="0">
+                <a:latin typeface="Times New Roman" panose="02020603050405020304" pitchFamily="18" charset="0"/>
+                <a:ea typeface="宋体" panose="02010600030101010101" pitchFamily="2" charset="-122"/>
+              </a:rPr>
+              <a:t>四步</a:t>
+            </a:r>
+            <a:r>
+              <a:rPr lang="en-US" altLang="zh-CN" dirty="0">
+                <a:latin typeface="Times New Roman" panose="02020603050405020304" pitchFamily="18" charset="0"/>
+                <a:ea typeface="宋体" panose="02010600030101010101" pitchFamily="2" charset="-122"/>
+              </a:rPr>
+              <a:t>SDT </a:t>
+            </a:r>
+            <a:r>
+              <a:rPr lang="zh-CN" altLang="en-US" dirty="0">
+                <a:latin typeface="Times New Roman" panose="02020603050405020304" pitchFamily="18" charset="0"/>
+                <a:ea typeface="宋体" panose="02010600030101010101" pitchFamily="2" charset="-122"/>
+              </a:rPr>
+              <a:t>随机接入过程</a:t>
+            </a:r>
+          </a:p>
+        </p:txBody>
+      </p:sp>
+      <p:sp>
+        <p:nvSpPr>
+          <p:cNvPr id="7" name="文本框 6">
+            <a:extLst>
+              <a:ext uri="{FF2B5EF4-FFF2-40B4-BE49-F238E27FC236}">
+                <a16:creationId xmlns:a16="http://schemas.microsoft.com/office/drawing/2014/main" id="{AF68249D-F6DA-AD52-8630-4846FDC11604}"/>
+              </a:ext>
+            </a:extLst>
+          </p:cNvPr>
+          <p:cNvSpPr txBox="1"/>
+          <p:nvPr/>
+        </p:nvSpPr>
+        <p:spPr>
+          <a:xfrm>
+            <a:off x="7502926" y="5413202"/>
+            <a:ext cx="3397208" cy="369332"/>
+          </a:xfrm>
+          <a:prstGeom prst="rect">
+            <a:avLst/>
+          </a:prstGeom>
+          <a:noFill/>
+        </p:spPr>
+        <p:txBody>
+          <a:bodyPr wrap="square" rtlCol="0" anchor="ctr" anchorCtr="1">
+            <a:spAutoFit/>
+          </a:bodyPr>
+          <a:lstStyle/>
+          <a:p>
+            <a:r>
+              <a:rPr lang="zh-CN" altLang="en-US" dirty="0">
+                <a:latin typeface="Times New Roman" panose="02020603050405020304" pitchFamily="18" charset="0"/>
+                <a:ea typeface="宋体" panose="02010600030101010101" pitchFamily="2" charset="-122"/>
+              </a:rPr>
+              <a:t>两步</a:t>
+            </a:r>
+            <a:r>
+              <a:rPr lang="en-US" altLang="zh-CN" dirty="0">
+                <a:latin typeface="Times New Roman" panose="02020603050405020304" pitchFamily="18" charset="0"/>
+                <a:ea typeface="宋体" panose="02010600030101010101" pitchFamily="2" charset="-122"/>
+              </a:rPr>
+              <a:t>SDT </a:t>
+            </a:r>
+            <a:r>
+              <a:rPr lang="zh-CN" altLang="en-US" dirty="0">
+                <a:latin typeface="Times New Roman" panose="02020603050405020304" pitchFamily="18" charset="0"/>
+                <a:ea typeface="宋体" panose="02010600030101010101" pitchFamily="2" charset="-122"/>
+              </a:rPr>
+              <a:t>随机接入过程</a:t>
+            </a:r>
+          </a:p>
+        </p:txBody>
+      </p:sp>
     </p:spTree>
     <p:extLst>
       <p:ext uri="{BB962C8B-B14F-4D97-AF65-F5344CB8AC3E}">
@@ -32012,8 +33585,8 @@
           </a:p>
         </p:txBody>
       </p:sp>
-      <mc:AlternateContent xmlns:mc="http://schemas.openxmlformats.org/markup-compatibility/2006">
-        <mc:Choice xmlns:a14="http://schemas.microsoft.com/office/drawing/2010/main" Requires="a14">
+      <mc:AlternateContent xmlns:mc="http://schemas.openxmlformats.org/markup-compatibility/2006" xmlns:a14="http://schemas.microsoft.com/office/drawing/2010/main">
+        <mc:Choice Requires="a14">
           <p:sp>
             <p:nvSpPr>
               <p:cNvPr id="3" name="文本框 2">
@@ -32157,7 +33730,7 @@
             </p:txBody>
           </p:sp>
         </mc:Choice>
-        <mc:Fallback>
+        <mc:Fallback xmlns="">
           <p:sp>
             <p:nvSpPr>
               <p:cNvPr id="3" name="文本框 2">
@@ -32308,8 +33881,8 @@
           </a:p>
         </p:txBody>
       </p:sp>
-      <mc:AlternateContent xmlns:mc="http://schemas.openxmlformats.org/markup-compatibility/2006">
-        <mc:Choice xmlns:a14="http://schemas.microsoft.com/office/drawing/2010/main" Requires="a14">
+      <mc:AlternateContent xmlns:mc="http://schemas.openxmlformats.org/markup-compatibility/2006" xmlns:a14="http://schemas.microsoft.com/office/drawing/2010/main">
+        <mc:Choice Requires="a14">
           <p:sp>
             <p:nvSpPr>
               <p:cNvPr id="10" name="文本框 9">
@@ -32367,7 +33940,7 @@
             </p:txBody>
           </p:sp>
         </mc:Choice>
-        <mc:Fallback>
+        <mc:Fallback xmlns="">
           <p:sp>
             <p:nvSpPr>
               <p:cNvPr id="10" name="文本框 9">
@@ -32711,8 +34284,8 @@
           </a:p>
         </p:txBody>
       </p:sp>
-      <mc:AlternateContent xmlns:mc="http://schemas.openxmlformats.org/markup-compatibility/2006">
-        <mc:Choice xmlns:a14="http://schemas.microsoft.com/office/drawing/2010/main" Requires="a14">
+      <mc:AlternateContent xmlns:mc="http://schemas.openxmlformats.org/markup-compatibility/2006" xmlns:a14="http://schemas.microsoft.com/office/drawing/2010/main">
+        <mc:Choice Requires="a14">
           <p:sp>
             <p:nvSpPr>
               <p:cNvPr id="83" name="文本框 82">
@@ -33005,7 +34578,7 @@
             </p:txBody>
           </p:sp>
         </mc:Choice>
-        <mc:Fallback>
+        <mc:Fallback xmlns="">
           <p:sp>
             <p:nvSpPr>
               <p:cNvPr id="83" name="文本框 82">
@@ -33233,8 +34806,8 @@
           </a:p>
         </p:txBody>
       </p:sp>
-      <mc:AlternateContent xmlns:mc="http://schemas.openxmlformats.org/markup-compatibility/2006">
-        <mc:Choice xmlns:a14="http://schemas.microsoft.com/office/drawing/2010/main" Requires="a14">
+      <mc:AlternateContent xmlns:mc="http://schemas.openxmlformats.org/markup-compatibility/2006" xmlns:a14="http://schemas.microsoft.com/office/drawing/2010/main">
+        <mc:Choice Requires="a14">
           <p:sp>
             <p:nvSpPr>
               <p:cNvPr id="137" name="文本框 136">
@@ -33293,7 +34866,7 @@
             </p:txBody>
           </p:sp>
         </mc:Choice>
-        <mc:Fallback>
+        <mc:Fallback xmlns="">
           <p:sp>
             <p:nvSpPr>
               <p:cNvPr id="137" name="文本框 136">
@@ -33472,8 +35045,8 @@
             </a:p>
           </p:txBody>
         </p:sp>
-        <mc:AlternateContent xmlns:mc="http://schemas.openxmlformats.org/markup-compatibility/2006">
-          <mc:Choice xmlns:a14="http://schemas.microsoft.com/office/drawing/2010/main" Requires="a14">
+        <mc:AlternateContent xmlns:mc="http://schemas.openxmlformats.org/markup-compatibility/2006" xmlns:a14="http://schemas.microsoft.com/office/drawing/2010/main">
+          <mc:Choice Requires="a14">
             <p:sp>
               <p:nvSpPr>
                 <p:cNvPr id="149" name="文本框 148">
@@ -33532,7 +35105,7 @@
               </p:txBody>
             </p:sp>
           </mc:Choice>
-          <mc:Fallback>
+          <mc:Fallback xmlns="">
             <p:sp>
               <p:nvSpPr>
                 <p:cNvPr id="149" name="文本框 148">
@@ -34174,8 +35747,8 @@
           </a:p>
         </p:txBody>
       </p:sp>
-      <mc:AlternateContent xmlns:mc="http://schemas.openxmlformats.org/markup-compatibility/2006">
-        <mc:Choice xmlns:a14="http://schemas.microsoft.com/office/drawing/2010/main" Requires="a14">
+      <mc:AlternateContent xmlns:mc="http://schemas.openxmlformats.org/markup-compatibility/2006" xmlns:a14="http://schemas.microsoft.com/office/drawing/2010/main">
+        <mc:Choice Requires="a14">
           <p:sp>
             <p:nvSpPr>
               <p:cNvPr id="23" name="文本框 22">
@@ -34336,7 +35909,7 @@
             </p:txBody>
           </p:sp>
         </mc:Choice>
-        <mc:Fallback>
+        <mc:Fallback xmlns="">
           <p:sp>
             <p:nvSpPr>
               <p:cNvPr id="23" name="文本框 22">

--- a/PPT画图.pptx
+++ b/PPT画图.pptx
@@ -209,7 +209,7 @@
           <a:p>
             <a:fld id="{5C1E4601-79B1-425F-B925-3F7BE382BF19}" type="datetimeFigureOut">
               <a:rPr lang="zh-CN" altLang="en-US" smtClean="0"/>
-              <a:t>2026/03/20</a:t>
+              <a:t>2026/03/31</a:t>
             </a:fld>
             <a:endParaRPr lang="zh-CN" altLang="en-US"/>
           </a:p>
@@ -899,7 +899,7 @@
           <a:p>
             <a:fld id="{5D2E9D4A-569D-49DD-9DBB-BF425DFB68D5}" type="datetimeFigureOut">
               <a:rPr lang="zh-CN" altLang="en-US" smtClean="0"/>
-              <a:t>2026/03/20</a:t>
+              <a:t>2026/03/31</a:t>
             </a:fld>
             <a:endParaRPr lang="zh-CN" altLang="en-US"/>
           </a:p>
@@ -1097,7 +1097,7 @@
           <a:p>
             <a:fld id="{5D2E9D4A-569D-49DD-9DBB-BF425DFB68D5}" type="datetimeFigureOut">
               <a:rPr lang="zh-CN" altLang="en-US" smtClean="0"/>
-              <a:t>2026/03/20</a:t>
+              <a:t>2026/03/31</a:t>
             </a:fld>
             <a:endParaRPr lang="zh-CN" altLang="en-US"/>
           </a:p>
@@ -1305,7 +1305,7 @@
           <a:p>
             <a:fld id="{5D2E9D4A-569D-49DD-9DBB-BF425DFB68D5}" type="datetimeFigureOut">
               <a:rPr lang="zh-CN" altLang="en-US" smtClean="0"/>
-              <a:t>2026/03/20</a:t>
+              <a:t>2026/03/31</a:t>
             </a:fld>
             <a:endParaRPr lang="zh-CN" altLang="en-US"/>
           </a:p>
@@ -1503,7 +1503,7 @@
           <a:p>
             <a:fld id="{5D2E9D4A-569D-49DD-9DBB-BF425DFB68D5}" type="datetimeFigureOut">
               <a:rPr lang="zh-CN" altLang="en-US" smtClean="0"/>
-              <a:t>2026/03/20</a:t>
+              <a:t>2026/03/31</a:t>
             </a:fld>
             <a:endParaRPr lang="zh-CN" altLang="en-US"/>
           </a:p>
@@ -1778,7 +1778,7 @@
           <a:p>
             <a:fld id="{5D2E9D4A-569D-49DD-9DBB-BF425DFB68D5}" type="datetimeFigureOut">
               <a:rPr lang="zh-CN" altLang="en-US" smtClean="0"/>
-              <a:t>2026/03/20</a:t>
+              <a:t>2026/03/31</a:t>
             </a:fld>
             <a:endParaRPr lang="zh-CN" altLang="en-US"/>
           </a:p>
@@ -2043,7 +2043,7 @@
           <a:p>
             <a:fld id="{5D2E9D4A-569D-49DD-9DBB-BF425DFB68D5}" type="datetimeFigureOut">
               <a:rPr lang="zh-CN" altLang="en-US" smtClean="0"/>
-              <a:t>2026/03/20</a:t>
+              <a:t>2026/03/31</a:t>
             </a:fld>
             <a:endParaRPr lang="zh-CN" altLang="en-US"/>
           </a:p>
@@ -2455,7 +2455,7 @@
           <a:p>
             <a:fld id="{5D2E9D4A-569D-49DD-9DBB-BF425DFB68D5}" type="datetimeFigureOut">
               <a:rPr lang="zh-CN" altLang="en-US" smtClean="0"/>
-              <a:t>2026/03/20</a:t>
+              <a:t>2026/03/31</a:t>
             </a:fld>
             <a:endParaRPr lang="zh-CN" altLang="en-US"/>
           </a:p>
@@ -2596,7 +2596,7 @@
           <a:p>
             <a:fld id="{5D2E9D4A-569D-49DD-9DBB-BF425DFB68D5}" type="datetimeFigureOut">
               <a:rPr lang="zh-CN" altLang="en-US" smtClean="0"/>
-              <a:t>2026/03/20</a:t>
+              <a:t>2026/03/31</a:t>
             </a:fld>
             <a:endParaRPr lang="zh-CN" altLang="en-US"/>
           </a:p>
@@ -2709,7 +2709,7 @@
           <a:p>
             <a:fld id="{5D2E9D4A-569D-49DD-9DBB-BF425DFB68D5}" type="datetimeFigureOut">
               <a:rPr lang="zh-CN" altLang="en-US" smtClean="0"/>
-              <a:t>2026/03/20</a:t>
+              <a:t>2026/03/31</a:t>
             </a:fld>
             <a:endParaRPr lang="zh-CN" altLang="en-US"/>
           </a:p>
@@ -3020,7 +3020,7 @@
           <a:p>
             <a:fld id="{5D2E9D4A-569D-49DD-9DBB-BF425DFB68D5}" type="datetimeFigureOut">
               <a:rPr lang="zh-CN" altLang="en-US" smtClean="0"/>
-              <a:t>2026/03/20</a:t>
+              <a:t>2026/03/31</a:t>
             </a:fld>
             <a:endParaRPr lang="zh-CN" altLang="en-US"/>
           </a:p>
@@ -3308,7 +3308,7 @@
           <a:p>
             <a:fld id="{5D2E9D4A-569D-49DD-9DBB-BF425DFB68D5}" type="datetimeFigureOut">
               <a:rPr lang="zh-CN" altLang="en-US" smtClean="0"/>
-              <a:t>2026/03/20</a:t>
+              <a:t>2026/03/31</a:t>
             </a:fld>
             <a:endParaRPr lang="zh-CN" altLang="en-US"/>
           </a:p>
@@ -3549,7 +3549,7 @@
           <a:p>
             <a:fld id="{5D2E9D4A-569D-49DD-9DBB-BF425DFB68D5}" type="datetimeFigureOut">
               <a:rPr lang="zh-CN" altLang="en-US" smtClean="0"/>
-              <a:t>2026/03/20</a:t>
+              <a:t>2026/03/31</a:t>
             </a:fld>
             <a:endParaRPr lang="zh-CN" altLang="en-US"/>
           </a:p>
@@ -5980,965 +5980,12 @@
           <a:chExt cx="0" cy="0"/>
         </a:xfrm>
       </p:grpSpPr>
-      <p:sp>
-        <p:nvSpPr>
-          <p:cNvPr id="4" name="矩形 3">
+      <p:grpSp>
+        <p:nvGrpSpPr>
+          <p:cNvPr id="2" name="组合 1">
             <a:extLst>
               <a:ext uri="{FF2B5EF4-FFF2-40B4-BE49-F238E27FC236}">
-                <a16:creationId xmlns:a16="http://schemas.microsoft.com/office/drawing/2014/main" id="{49466CFA-C8F0-14EF-535C-39367FC37735}"/>
-              </a:ext>
-            </a:extLst>
-          </p:cNvPr>
-          <p:cNvSpPr/>
-          <p:nvPr/>
-        </p:nvSpPr>
-        <p:spPr>
-          <a:xfrm>
-            <a:off x="3282229" y="1428761"/>
-            <a:ext cx="963930" cy="369331"/>
-          </a:xfrm>
-          <a:prstGeom prst="rect">
-            <a:avLst/>
-          </a:prstGeom>
-          <a:solidFill>
-            <a:schemeClr val="accent5">
-              <a:lumMod val="20000"/>
-              <a:lumOff val="80000"/>
-            </a:schemeClr>
-          </a:solidFill>
-          <a:ln w="19050">
-            <a:noFill/>
-          </a:ln>
-        </p:spPr>
-        <p:style>
-          <a:lnRef idx="2">
-            <a:schemeClr val="accent1">
-              <a:shade val="15000"/>
-            </a:schemeClr>
-          </a:lnRef>
-          <a:fillRef idx="1">
-            <a:schemeClr val="accent1"/>
-          </a:fillRef>
-          <a:effectRef idx="0">
-            <a:schemeClr val="accent1"/>
-          </a:effectRef>
-          <a:fontRef idx="minor">
-            <a:schemeClr val="lt1"/>
-          </a:fontRef>
-        </p:style>
-        <p:txBody>
-          <a:bodyPr rtlCol="0" anchor="ctr"/>
-          <a:lstStyle/>
-          <a:p>
-            <a:pPr algn="ctr"/>
-            <a:r>
-              <a:rPr lang="en-US" altLang="zh-CN" dirty="0">
-                <a:solidFill>
-                  <a:schemeClr val="tx1"/>
-                </a:solidFill>
-                <a:latin typeface="Times New Roman" panose="02020603050405020304" pitchFamily="18" charset="0"/>
-                <a:ea typeface="宋体" panose="02010600030101010101" pitchFamily="2" charset="-122"/>
-              </a:rPr>
-              <a:t>packet1</a:t>
-            </a:r>
-            <a:endParaRPr lang="zh-CN" altLang="en-US" dirty="0" err="1">
-              <a:solidFill>
-                <a:schemeClr val="tx1"/>
-              </a:solidFill>
-              <a:latin typeface="Times New Roman" panose="02020603050405020304" pitchFamily="18" charset="0"/>
-              <a:ea typeface="宋体" panose="02010600030101010101" pitchFamily="2" charset="-122"/>
-            </a:endParaRPr>
-          </a:p>
-        </p:txBody>
-      </p:sp>
-      <p:sp>
-        <p:nvSpPr>
-          <p:cNvPr id="8" name="矩形 7">
-            <a:extLst>
-              <a:ext uri="{FF2B5EF4-FFF2-40B4-BE49-F238E27FC236}">
-                <a16:creationId xmlns:a16="http://schemas.microsoft.com/office/drawing/2014/main" id="{812CD0FA-E786-7CF2-0277-D35B077B29DB}"/>
-              </a:ext>
-            </a:extLst>
-          </p:cNvPr>
-          <p:cNvSpPr/>
-          <p:nvPr/>
-        </p:nvSpPr>
-        <p:spPr>
-          <a:xfrm>
-            <a:off x="9050569" y="1428761"/>
-            <a:ext cx="963930" cy="369332"/>
-          </a:xfrm>
-          <a:prstGeom prst="rect">
-            <a:avLst/>
-          </a:prstGeom>
-          <a:solidFill>
-            <a:schemeClr val="accent5">
-              <a:lumMod val="20000"/>
-              <a:lumOff val="80000"/>
-            </a:schemeClr>
-          </a:solidFill>
-          <a:ln w="19050">
-            <a:noFill/>
-          </a:ln>
-        </p:spPr>
-        <p:style>
-          <a:lnRef idx="2">
-            <a:schemeClr val="accent1">
-              <a:shade val="15000"/>
-            </a:schemeClr>
-          </a:lnRef>
-          <a:fillRef idx="1">
-            <a:schemeClr val="accent1"/>
-          </a:fillRef>
-          <a:effectRef idx="0">
-            <a:schemeClr val="accent1"/>
-          </a:effectRef>
-          <a:fontRef idx="minor">
-            <a:schemeClr val="lt1"/>
-          </a:fontRef>
-        </p:style>
-        <p:txBody>
-          <a:bodyPr rtlCol="0" anchor="ctr"/>
-          <a:lstStyle/>
-          <a:p>
-            <a:pPr algn="ctr"/>
-            <a:r>
-              <a:rPr lang="en-US" altLang="zh-CN" dirty="0">
-                <a:solidFill>
-                  <a:schemeClr val="tx1"/>
-                </a:solidFill>
-                <a:latin typeface="Times New Roman" panose="02020603050405020304" pitchFamily="18" charset="0"/>
-                <a:ea typeface="宋体" panose="02010600030101010101" pitchFamily="2" charset="-122"/>
-              </a:rPr>
-              <a:t>packet3</a:t>
-            </a:r>
-            <a:endParaRPr lang="zh-CN" altLang="en-US" dirty="0">
-              <a:solidFill>
-                <a:schemeClr val="tx1"/>
-              </a:solidFill>
-              <a:latin typeface="Times New Roman" panose="02020603050405020304" pitchFamily="18" charset="0"/>
-              <a:ea typeface="宋体" panose="02010600030101010101" pitchFamily="2" charset="-122"/>
-            </a:endParaRPr>
-          </a:p>
-        </p:txBody>
-      </p:sp>
-      <p:sp>
-        <p:nvSpPr>
-          <p:cNvPr id="9" name="矩形 8">
-            <a:extLst>
-              <a:ext uri="{FF2B5EF4-FFF2-40B4-BE49-F238E27FC236}">
-                <a16:creationId xmlns:a16="http://schemas.microsoft.com/office/drawing/2014/main" id="{5A8E55AE-C4C5-61C9-D3D2-C645CE43C251}"/>
-              </a:ext>
-            </a:extLst>
-          </p:cNvPr>
-          <p:cNvSpPr/>
-          <p:nvPr/>
-        </p:nvSpPr>
-        <p:spPr>
-          <a:xfrm>
-            <a:off x="5620299" y="1428761"/>
-            <a:ext cx="963930" cy="369332"/>
-          </a:xfrm>
-          <a:prstGeom prst="rect">
-            <a:avLst/>
-          </a:prstGeom>
-          <a:solidFill>
-            <a:schemeClr val="accent5">
-              <a:lumMod val="20000"/>
-              <a:lumOff val="80000"/>
-            </a:schemeClr>
-          </a:solidFill>
-          <a:ln w="19050">
-            <a:noFill/>
-          </a:ln>
-        </p:spPr>
-        <p:style>
-          <a:lnRef idx="2">
-            <a:schemeClr val="accent1">
-              <a:shade val="15000"/>
-            </a:schemeClr>
-          </a:lnRef>
-          <a:fillRef idx="1">
-            <a:schemeClr val="accent1"/>
-          </a:fillRef>
-          <a:effectRef idx="0">
-            <a:schemeClr val="accent1"/>
-          </a:effectRef>
-          <a:fontRef idx="minor">
-            <a:schemeClr val="lt1"/>
-          </a:fontRef>
-        </p:style>
-        <p:txBody>
-          <a:bodyPr rtlCol="0" anchor="ctr"/>
-          <a:lstStyle/>
-          <a:p>
-            <a:pPr algn="ctr"/>
-            <a:r>
-              <a:rPr lang="en-US" altLang="zh-CN" dirty="0">
-                <a:solidFill>
-                  <a:schemeClr val="tx1"/>
-                </a:solidFill>
-                <a:latin typeface="Times New Roman" panose="02020603050405020304" pitchFamily="18" charset="0"/>
-                <a:ea typeface="宋体" panose="02010600030101010101" pitchFamily="2" charset="-122"/>
-              </a:rPr>
-              <a:t>packet2</a:t>
-            </a:r>
-            <a:endParaRPr lang="zh-CN" altLang="en-US" dirty="0" err="1">
-              <a:solidFill>
-                <a:schemeClr val="tx1"/>
-              </a:solidFill>
-              <a:latin typeface="Times New Roman" panose="02020603050405020304" pitchFamily="18" charset="0"/>
-              <a:ea typeface="宋体" panose="02010600030101010101" pitchFamily="2" charset="-122"/>
-            </a:endParaRPr>
-          </a:p>
-        </p:txBody>
-      </p:sp>
-      <p:sp>
-        <p:nvSpPr>
-          <p:cNvPr id="29" name="矩形 28">
-            <a:extLst>
-              <a:ext uri="{FF2B5EF4-FFF2-40B4-BE49-F238E27FC236}">
-                <a16:creationId xmlns:a16="http://schemas.microsoft.com/office/drawing/2014/main" id="{C888AF54-3DC3-C8B7-225D-48555EC6400D}"/>
-              </a:ext>
-            </a:extLst>
-          </p:cNvPr>
-          <p:cNvSpPr/>
-          <p:nvPr/>
-        </p:nvSpPr>
-        <p:spPr>
-          <a:xfrm>
-            <a:off x="3282229" y="3071497"/>
-            <a:ext cx="963930" cy="369331"/>
-          </a:xfrm>
-          <a:prstGeom prst="rect">
-            <a:avLst/>
-          </a:prstGeom>
-          <a:solidFill>
-            <a:srgbClr val="FFC6C6"/>
-          </a:solidFill>
-          <a:ln w="19050">
-            <a:noFill/>
-          </a:ln>
-        </p:spPr>
-        <p:style>
-          <a:lnRef idx="2">
-            <a:schemeClr val="accent1">
-              <a:shade val="15000"/>
-            </a:schemeClr>
-          </a:lnRef>
-          <a:fillRef idx="1">
-            <a:schemeClr val="accent1"/>
-          </a:fillRef>
-          <a:effectRef idx="0">
-            <a:schemeClr val="accent1"/>
-          </a:effectRef>
-          <a:fontRef idx="minor">
-            <a:schemeClr val="lt1"/>
-          </a:fontRef>
-        </p:style>
-        <p:txBody>
-          <a:bodyPr rtlCol="0" anchor="ctr"/>
-          <a:lstStyle/>
-          <a:p>
-            <a:pPr algn="ctr"/>
-            <a:r>
-              <a:rPr lang="en-US" altLang="zh-CN" dirty="0">
-                <a:solidFill>
-                  <a:schemeClr val="tx1"/>
-                </a:solidFill>
-                <a:latin typeface="Times New Roman" panose="02020603050405020304" pitchFamily="18" charset="0"/>
-                <a:ea typeface="宋体" panose="02010600030101010101" pitchFamily="2" charset="-122"/>
-              </a:rPr>
-              <a:t>packet1</a:t>
-            </a:r>
-            <a:endParaRPr lang="zh-CN" altLang="en-US" dirty="0" err="1">
-              <a:solidFill>
-                <a:schemeClr val="tx1"/>
-              </a:solidFill>
-              <a:latin typeface="Times New Roman" panose="02020603050405020304" pitchFamily="18" charset="0"/>
-              <a:ea typeface="宋体" panose="02010600030101010101" pitchFamily="2" charset="-122"/>
-            </a:endParaRPr>
-          </a:p>
-        </p:txBody>
-      </p:sp>
-      <p:sp>
-        <p:nvSpPr>
-          <p:cNvPr id="30" name="矩形 29">
-            <a:extLst>
-              <a:ext uri="{FF2B5EF4-FFF2-40B4-BE49-F238E27FC236}">
-                <a16:creationId xmlns:a16="http://schemas.microsoft.com/office/drawing/2014/main" id="{01678FF6-DC44-2523-C8BE-04F13D7F490E}"/>
-              </a:ext>
-            </a:extLst>
-          </p:cNvPr>
-          <p:cNvSpPr/>
-          <p:nvPr/>
-        </p:nvSpPr>
-        <p:spPr>
-          <a:xfrm>
-            <a:off x="5246388" y="3071496"/>
-            <a:ext cx="963930" cy="369332"/>
-          </a:xfrm>
-          <a:prstGeom prst="rect">
-            <a:avLst/>
-          </a:prstGeom>
-          <a:solidFill>
-            <a:srgbClr val="FFC6C6"/>
-          </a:solidFill>
-          <a:ln w="19050">
-            <a:noFill/>
-          </a:ln>
-        </p:spPr>
-        <p:style>
-          <a:lnRef idx="2">
-            <a:schemeClr val="accent1">
-              <a:shade val="15000"/>
-            </a:schemeClr>
-          </a:lnRef>
-          <a:fillRef idx="1">
-            <a:schemeClr val="accent1"/>
-          </a:fillRef>
-          <a:effectRef idx="0">
-            <a:schemeClr val="accent1"/>
-          </a:effectRef>
-          <a:fontRef idx="minor">
-            <a:schemeClr val="lt1"/>
-          </a:fontRef>
-        </p:style>
-        <p:txBody>
-          <a:bodyPr rtlCol="0" anchor="ctr"/>
-          <a:lstStyle/>
-          <a:p>
-            <a:pPr algn="ctr"/>
-            <a:r>
-              <a:rPr lang="en-US" altLang="zh-CN" dirty="0">
-                <a:solidFill>
-                  <a:schemeClr val="tx1"/>
-                </a:solidFill>
-                <a:latin typeface="Times New Roman" panose="02020603050405020304" pitchFamily="18" charset="0"/>
-                <a:ea typeface="宋体" panose="02010600030101010101" pitchFamily="2" charset="-122"/>
-              </a:rPr>
-              <a:t>packet3</a:t>
-            </a:r>
-            <a:endParaRPr lang="zh-CN" altLang="en-US" dirty="0">
-              <a:solidFill>
-                <a:schemeClr val="tx1"/>
-              </a:solidFill>
-              <a:latin typeface="Times New Roman" panose="02020603050405020304" pitchFamily="18" charset="0"/>
-              <a:ea typeface="宋体" panose="02010600030101010101" pitchFamily="2" charset="-122"/>
-            </a:endParaRPr>
-          </a:p>
-        </p:txBody>
-      </p:sp>
-      <p:sp>
-        <p:nvSpPr>
-          <p:cNvPr id="31" name="矩形 30">
-            <a:extLst>
-              <a:ext uri="{FF2B5EF4-FFF2-40B4-BE49-F238E27FC236}">
-                <a16:creationId xmlns:a16="http://schemas.microsoft.com/office/drawing/2014/main" id="{69C1602D-85E9-B769-0C8D-ACF08845CBE5}"/>
-              </a:ext>
-            </a:extLst>
-          </p:cNvPr>
-          <p:cNvSpPr/>
-          <p:nvPr/>
-        </p:nvSpPr>
-        <p:spPr>
-          <a:xfrm>
-            <a:off x="4267356" y="3071496"/>
-            <a:ext cx="963930" cy="369332"/>
-          </a:xfrm>
-          <a:prstGeom prst="rect">
-            <a:avLst/>
-          </a:prstGeom>
-          <a:solidFill>
-            <a:srgbClr val="FFC6C6"/>
-          </a:solidFill>
-          <a:ln w="19050">
-            <a:noFill/>
-          </a:ln>
-        </p:spPr>
-        <p:style>
-          <a:lnRef idx="2">
-            <a:schemeClr val="accent1">
-              <a:shade val="15000"/>
-            </a:schemeClr>
-          </a:lnRef>
-          <a:fillRef idx="1">
-            <a:schemeClr val="accent1"/>
-          </a:fillRef>
-          <a:effectRef idx="0">
-            <a:schemeClr val="accent1"/>
-          </a:effectRef>
-          <a:fontRef idx="minor">
-            <a:schemeClr val="lt1"/>
-          </a:fontRef>
-        </p:style>
-        <p:txBody>
-          <a:bodyPr rtlCol="0" anchor="ctr"/>
-          <a:lstStyle/>
-          <a:p>
-            <a:pPr algn="ctr"/>
-            <a:r>
-              <a:rPr lang="en-US" altLang="zh-CN" dirty="0">
-                <a:solidFill>
-                  <a:schemeClr val="tx1"/>
-                </a:solidFill>
-                <a:latin typeface="Times New Roman" panose="02020603050405020304" pitchFamily="18" charset="0"/>
-                <a:ea typeface="宋体" panose="02010600030101010101" pitchFamily="2" charset="-122"/>
-              </a:rPr>
-              <a:t>packet2</a:t>
-            </a:r>
-            <a:endParaRPr lang="zh-CN" altLang="en-US" dirty="0" err="1">
-              <a:solidFill>
-                <a:schemeClr val="tx1"/>
-              </a:solidFill>
-              <a:latin typeface="Times New Roman" panose="02020603050405020304" pitchFamily="18" charset="0"/>
-              <a:ea typeface="宋体" panose="02010600030101010101" pitchFamily="2" charset="-122"/>
-            </a:endParaRPr>
-          </a:p>
-        </p:txBody>
-      </p:sp>
-      <p:cxnSp>
-        <p:nvCxnSpPr>
-          <p:cNvPr id="3" name="直接箭头连接符 2">
-            <a:extLst>
-              <a:ext uri="{FF2B5EF4-FFF2-40B4-BE49-F238E27FC236}">
-                <a16:creationId xmlns:a16="http://schemas.microsoft.com/office/drawing/2014/main" id="{ED76A790-3312-AF98-E625-A11D0003B861}"/>
-              </a:ext>
-            </a:extLst>
-          </p:cNvPr>
-          <p:cNvCxnSpPr>
-            <a:cxnSpLocks/>
-          </p:cNvCxnSpPr>
-          <p:nvPr/>
-        </p:nvCxnSpPr>
-        <p:spPr>
-          <a:xfrm>
-            <a:off x="2455459" y="1798093"/>
-            <a:ext cx="8275320" cy="0"/>
-          </a:xfrm>
-          <a:prstGeom prst="straightConnector1">
-            <a:avLst/>
-          </a:prstGeom>
-          <a:ln w="19050">
-            <a:solidFill>
-              <a:schemeClr val="tx1"/>
-            </a:solidFill>
-            <a:tailEnd type="triangle"/>
-          </a:ln>
-        </p:spPr>
-        <p:style>
-          <a:lnRef idx="1">
-            <a:schemeClr val="accent1"/>
-          </a:lnRef>
-          <a:fillRef idx="0">
-            <a:schemeClr val="accent1"/>
-          </a:fillRef>
-          <a:effectRef idx="0">
-            <a:schemeClr val="accent1"/>
-          </a:effectRef>
-          <a:fontRef idx="minor">
-            <a:schemeClr val="tx1"/>
-          </a:fontRef>
-        </p:style>
-      </p:cxnSp>
-      <p:sp>
-        <p:nvSpPr>
-          <p:cNvPr id="14" name="文本框 13">
-            <a:extLst>
-              <a:ext uri="{FF2B5EF4-FFF2-40B4-BE49-F238E27FC236}">
-                <a16:creationId xmlns:a16="http://schemas.microsoft.com/office/drawing/2014/main" id="{0C2CCB4A-48C5-346A-3A25-1E4CE39F7F58}"/>
-              </a:ext>
-            </a:extLst>
-          </p:cNvPr>
-          <p:cNvSpPr txBox="1"/>
-          <p:nvPr/>
-        </p:nvSpPr>
-        <p:spPr>
-          <a:xfrm>
-            <a:off x="9930679" y="1798093"/>
-            <a:ext cx="800100" cy="369332"/>
-          </a:xfrm>
-          <a:prstGeom prst="rect">
-            <a:avLst/>
-          </a:prstGeom>
-          <a:noFill/>
-        </p:spPr>
-        <p:txBody>
-          <a:bodyPr wrap="square" rtlCol="0" anchor="ctr" anchorCtr="1">
-            <a:spAutoFit/>
-          </a:bodyPr>
-          <a:lstStyle/>
-          <a:p>
-            <a:pPr algn="ctr"/>
-            <a:r>
-              <a:rPr lang="zh-CN" altLang="en-US" dirty="0">
-                <a:latin typeface="Times New Roman" panose="02020603050405020304" pitchFamily="18" charset="0"/>
-                <a:ea typeface="宋体" panose="02010600030101010101" pitchFamily="2" charset="-122"/>
-              </a:rPr>
-              <a:t>时间</a:t>
-            </a:r>
-          </a:p>
-        </p:txBody>
-      </p:sp>
-      <p:sp>
-        <p:nvSpPr>
-          <p:cNvPr id="15" name="文本框 14">
-            <a:extLst>
-              <a:ext uri="{FF2B5EF4-FFF2-40B4-BE49-F238E27FC236}">
-                <a16:creationId xmlns:a16="http://schemas.microsoft.com/office/drawing/2014/main" id="{2C87FDF5-BC8E-E9DC-5FC1-59659EE8396E}"/>
-              </a:ext>
-            </a:extLst>
-          </p:cNvPr>
-          <p:cNvSpPr txBox="1"/>
-          <p:nvPr/>
-        </p:nvSpPr>
-        <p:spPr>
-          <a:xfrm>
-            <a:off x="481494" y="2134221"/>
-            <a:ext cx="2369820" cy="369332"/>
-          </a:xfrm>
-          <a:prstGeom prst="rect">
-            <a:avLst/>
-          </a:prstGeom>
-          <a:solidFill>
-            <a:srgbClr val="FFC6C6"/>
-          </a:solidFill>
-        </p:spPr>
-        <p:txBody>
-          <a:bodyPr wrap="square" rtlCol="0" anchor="ctr" anchorCtr="1">
-            <a:spAutoFit/>
-          </a:bodyPr>
-          <a:lstStyle/>
-          <a:p>
-            <a:pPr algn="ctr"/>
-            <a:r>
-              <a:rPr lang="zh-CN" altLang="en-US" dirty="0">
-                <a:latin typeface="Times New Roman" panose="02020603050405020304" pitchFamily="18" charset="0"/>
-                <a:ea typeface="宋体" panose="02010600030101010101" pitchFamily="2" charset="-122"/>
-              </a:rPr>
-              <a:t>应用连续传输机制后</a:t>
-            </a:r>
-          </a:p>
-        </p:txBody>
-      </p:sp>
-      <p:cxnSp>
-        <p:nvCxnSpPr>
-          <p:cNvPr id="21" name="直接箭头连接符 20">
-            <a:extLst>
-              <a:ext uri="{FF2B5EF4-FFF2-40B4-BE49-F238E27FC236}">
-                <a16:creationId xmlns:a16="http://schemas.microsoft.com/office/drawing/2014/main" id="{BA4EBEDC-B16F-2CA6-69D5-646114E78692}"/>
-              </a:ext>
-            </a:extLst>
-          </p:cNvPr>
-          <p:cNvCxnSpPr>
-            <a:cxnSpLocks/>
-          </p:cNvCxnSpPr>
-          <p:nvPr/>
-        </p:nvCxnSpPr>
-        <p:spPr>
-          <a:xfrm>
-            <a:off x="2455459" y="3442227"/>
-            <a:ext cx="8275320" cy="0"/>
-          </a:xfrm>
-          <a:prstGeom prst="straightConnector1">
-            <a:avLst/>
-          </a:prstGeom>
-          <a:ln w="19050">
-            <a:solidFill>
-              <a:schemeClr val="tx1"/>
-            </a:solidFill>
-            <a:tailEnd type="triangle"/>
-          </a:ln>
-        </p:spPr>
-        <p:style>
-          <a:lnRef idx="1">
-            <a:schemeClr val="accent1"/>
-          </a:lnRef>
-          <a:fillRef idx="0">
-            <a:schemeClr val="accent1"/>
-          </a:fillRef>
-          <a:effectRef idx="0">
-            <a:schemeClr val="accent1"/>
-          </a:effectRef>
-          <a:fontRef idx="minor">
-            <a:schemeClr val="tx1"/>
-          </a:fontRef>
-        </p:style>
-      </p:cxnSp>
-      <p:sp>
-        <p:nvSpPr>
-          <p:cNvPr id="25" name="文本框 24">
-            <a:extLst>
-              <a:ext uri="{FF2B5EF4-FFF2-40B4-BE49-F238E27FC236}">
-                <a16:creationId xmlns:a16="http://schemas.microsoft.com/office/drawing/2014/main" id="{B26EB5C3-F79F-D9FB-18DB-F0D7BC4A494B}"/>
-              </a:ext>
-            </a:extLst>
-          </p:cNvPr>
-          <p:cNvSpPr txBox="1"/>
-          <p:nvPr/>
-        </p:nvSpPr>
-        <p:spPr>
-          <a:xfrm>
-            <a:off x="9930679" y="3442227"/>
-            <a:ext cx="800100" cy="369332"/>
-          </a:xfrm>
-          <a:prstGeom prst="rect">
-            <a:avLst/>
-          </a:prstGeom>
-          <a:noFill/>
-        </p:spPr>
-        <p:txBody>
-          <a:bodyPr wrap="square" rtlCol="0" anchor="ctr" anchorCtr="1">
-            <a:spAutoFit/>
-          </a:bodyPr>
-          <a:lstStyle/>
-          <a:p>
-            <a:pPr algn="ctr"/>
-            <a:r>
-              <a:rPr lang="zh-CN" altLang="en-US" dirty="0">
-                <a:latin typeface="Times New Roman" panose="02020603050405020304" pitchFamily="18" charset="0"/>
-                <a:ea typeface="宋体" panose="02010600030101010101" pitchFamily="2" charset="-122"/>
-              </a:rPr>
-              <a:t>时间</a:t>
-            </a:r>
-          </a:p>
-        </p:txBody>
-      </p:sp>
-      <p:cxnSp>
-        <p:nvCxnSpPr>
-          <p:cNvPr id="34" name="直接箭头连接符 33">
-            <a:extLst>
-              <a:ext uri="{FF2B5EF4-FFF2-40B4-BE49-F238E27FC236}">
-                <a16:creationId xmlns:a16="http://schemas.microsoft.com/office/drawing/2014/main" id="{CE672089-5FDA-2292-DCD3-78EF11C55FEE}"/>
-              </a:ext>
-            </a:extLst>
-          </p:cNvPr>
-          <p:cNvCxnSpPr>
-            <a:cxnSpLocks/>
-            <a:stCxn id="75" idx="0"/>
-            <a:endCxn id="4" idx="0"/>
-          </p:cNvCxnSpPr>
-          <p:nvPr/>
-        </p:nvCxnSpPr>
-        <p:spPr>
-          <a:xfrm rot="16200000" flipH="1">
-            <a:off x="3167489" y="832056"/>
-            <a:ext cx="207568" cy="985842"/>
-          </a:xfrm>
-          <a:prstGeom prst="curvedConnector3">
-            <a:avLst>
-              <a:gd name="adj1" fmla="val -91778"/>
-            </a:avLst>
-          </a:prstGeom>
-          <a:ln w="19050">
-            <a:solidFill>
-              <a:schemeClr val="tx1"/>
-            </a:solidFill>
-            <a:tailEnd type="stealth" w="lg" len="lg"/>
-          </a:ln>
-        </p:spPr>
-        <p:style>
-          <a:lnRef idx="1">
-            <a:schemeClr val="accent1"/>
-          </a:lnRef>
-          <a:fillRef idx="0">
-            <a:schemeClr val="accent1"/>
-          </a:fillRef>
-          <a:effectRef idx="0">
-            <a:schemeClr val="accent1"/>
-          </a:effectRef>
-          <a:fontRef idx="minor">
-            <a:schemeClr val="tx1"/>
-          </a:fontRef>
-        </p:style>
-      </p:cxnSp>
-      <p:cxnSp>
-        <p:nvCxnSpPr>
-          <p:cNvPr id="36" name="直接箭头连接符 33">
-            <a:extLst>
-              <a:ext uri="{FF2B5EF4-FFF2-40B4-BE49-F238E27FC236}">
-                <a16:creationId xmlns:a16="http://schemas.microsoft.com/office/drawing/2014/main" id="{FB263111-7A71-DE6A-067B-F77A1F858C19}"/>
-              </a:ext>
-            </a:extLst>
-          </p:cNvPr>
-          <p:cNvCxnSpPr>
-            <a:cxnSpLocks/>
-            <a:stCxn id="72" idx="0"/>
-            <a:endCxn id="8" idx="0"/>
-          </p:cNvCxnSpPr>
-          <p:nvPr/>
-        </p:nvCxnSpPr>
-        <p:spPr>
-          <a:xfrm rot="16200000" flipH="1">
-            <a:off x="5728766" y="-2375007"/>
-            <a:ext cx="207568" cy="7399968"/>
-          </a:xfrm>
-          <a:prstGeom prst="curvedConnector3">
-            <a:avLst>
-              <a:gd name="adj1" fmla="val -260648"/>
-            </a:avLst>
-          </a:prstGeom>
-          <a:ln w="19050">
-            <a:solidFill>
-              <a:schemeClr val="tx1"/>
-            </a:solidFill>
-            <a:tailEnd type="stealth" w="lg" len="lg"/>
-          </a:ln>
-        </p:spPr>
-        <p:style>
-          <a:lnRef idx="1">
-            <a:schemeClr val="accent1"/>
-          </a:lnRef>
-          <a:fillRef idx="0">
-            <a:schemeClr val="accent1"/>
-          </a:fillRef>
-          <a:effectRef idx="0">
-            <a:schemeClr val="accent1"/>
-          </a:effectRef>
-          <a:fontRef idx="minor">
-            <a:schemeClr val="tx1"/>
-          </a:fontRef>
-        </p:style>
-      </p:cxnSp>
-      <p:cxnSp>
-        <p:nvCxnSpPr>
-          <p:cNvPr id="39" name="直接箭头连接符 38">
-            <a:extLst>
-              <a:ext uri="{FF2B5EF4-FFF2-40B4-BE49-F238E27FC236}">
-                <a16:creationId xmlns:a16="http://schemas.microsoft.com/office/drawing/2014/main" id="{7A7DAEB8-D8E9-CBB5-FF48-F3556E0A05A8}"/>
-              </a:ext>
-            </a:extLst>
-          </p:cNvPr>
-          <p:cNvCxnSpPr>
-            <a:cxnSpLocks/>
-            <a:stCxn id="74" idx="0"/>
-            <a:endCxn id="9" idx="0"/>
-          </p:cNvCxnSpPr>
-          <p:nvPr/>
-        </p:nvCxnSpPr>
-        <p:spPr>
-          <a:xfrm rot="16200000" flipH="1">
-            <a:off x="4175077" y="-498425"/>
-            <a:ext cx="207568" cy="3646805"/>
-          </a:xfrm>
-          <a:prstGeom prst="curvedConnector3">
-            <a:avLst>
-              <a:gd name="adj1" fmla="val -183556"/>
-            </a:avLst>
-          </a:prstGeom>
-          <a:ln w="19050">
-            <a:solidFill>
-              <a:schemeClr val="tx1"/>
-            </a:solidFill>
-            <a:tailEnd type="stealth" w="lg" len="lg"/>
-          </a:ln>
-        </p:spPr>
-        <p:style>
-          <a:lnRef idx="1">
-            <a:schemeClr val="accent1"/>
-          </a:lnRef>
-          <a:fillRef idx="0">
-            <a:schemeClr val="accent1"/>
-          </a:fillRef>
-          <a:effectRef idx="0">
-            <a:schemeClr val="accent1"/>
-          </a:effectRef>
-          <a:fontRef idx="minor">
-            <a:schemeClr val="tx1"/>
-          </a:fontRef>
-        </p:style>
-      </p:cxnSp>
-      <p:cxnSp>
-        <p:nvCxnSpPr>
-          <p:cNvPr id="51" name="直接箭头连接符 50">
-            <a:extLst>
-              <a:ext uri="{FF2B5EF4-FFF2-40B4-BE49-F238E27FC236}">
-                <a16:creationId xmlns:a16="http://schemas.microsoft.com/office/drawing/2014/main" id="{4BD7258C-D88C-C9B9-0964-4B58173C6A24}"/>
-              </a:ext>
-            </a:extLst>
-          </p:cNvPr>
-          <p:cNvCxnSpPr>
-            <a:cxnSpLocks/>
-            <a:stCxn id="92" idx="0"/>
-            <a:endCxn id="29" idx="0"/>
-          </p:cNvCxnSpPr>
-          <p:nvPr/>
-        </p:nvCxnSpPr>
-        <p:spPr>
-          <a:xfrm rot="16200000" flipH="1">
-            <a:off x="3178181" y="2485484"/>
-            <a:ext cx="186184" cy="985842"/>
-          </a:xfrm>
-          <a:prstGeom prst="curvedConnector3">
-            <a:avLst>
-              <a:gd name="adj1" fmla="val -114596"/>
-            </a:avLst>
-          </a:prstGeom>
-          <a:ln w="19050">
-            <a:solidFill>
-              <a:schemeClr val="tx1"/>
-            </a:solidFill>
-            <a:tailEnd type="stealth" w="lg" len="lg"/>
-          </a:ln>
-        </p:spPr>
-        <p:style>
-          <a:lnRef idx="1">
-            <a:schemeClr val="accent1"/>
-          </a:lnRef>
-          <a:fillRef idx="0">
-            <a:schemeClr val="accent1"/>
-          </a:fillRef>
-          <a:effectRef idx="0">
-            <a:schemeClr val="accent1"/>
-          </a:effectRef>
-          <a:fontRef idx="minor">
-            <a:schemeClr val="tx1"/>
-          </a:fontRef>
-        </p:style>
-      </p:cxnSp>
-      <p:cxnSp>
-        <p:nvCxnSpPr>
-          <p:cNvPr id="53" name="直接箭头连接符 52">
-            <a:extLst>
-              <a:ext uri="{FF2B5EF4-FFF2-40B4-BE49-F238E27FC236}">
-                <a16:creationId xmlns:a16="http://schemas.microsoft.com/office/drawing/2014/main" id="{89A5406E-B98A-E04B-0D00-33DDF24A9075}"/>
-              </a:ext>
-            </a:extLst>
-          </p:cNvPr>
-          <p:cNvCxnSpPr>
-            <a:cxnSpLocks/>
-            <a:stCxn id="91" idx="0"/>
-            <a:endCxn id="31" idx="0"/>
-          </p:cNvCxnSpPr>
-          <p:nvPr/>
-        </p:nvCxnSpPr>
-        <p:spPr>
-          <a:xfrm rot="16200000" flipH="1">
-            <a:off x="3509298" y="1831473"/>
-            <a:ext cx="186183" cy="2293862"/>
-          </a:xfrm>
-          <a:prstGeom prst="curvedConnector3">
-            <a:avLst>
-              <a:gd name="adj1" fmla="val -159617"/>
-            </a:avLst>
-          </a:prstGeom>
-          <a:ln w="19050">
-            <a:solidFill>
-              <a:schemeClr val="tx1"/>
-            </a:solidFill>
-            <a:tailEnd type="stealth" w="lg" len="lg"/>
-          </a:ln>
-        </p:spPr>
-        <p:style>
-          <a:lnRef idx="1">
-            <a:schemeClr val="accent1"/>
-          </a:lnRef>
-          <a:fillRef idx="0">
-            <a:schemeClr val="accent1"/>
-          </a:fillRef>
-          <a:effectRef idx="0">
-            <a:schemeClr val="accent1"/>
-          </a:effectRef>
-          <a:fontRef idx="minor">
-            <a:schemeClr val="tx1"/>
-          </a:fontRef>
-        </p:style>
-      </p:cxnSp>
-      <p:cxnSp>
-        <p:nvCxnSpPr>
-          <p:cNvPr id="55" name="直接箭头连接符 54">
-            <a:extLst>
-              <a:ext uri="{FF2B5EF4-FFF2-40B4-BE49-F238E27FC236}">
-                <a16:creationId xmlns:a16="http://schemas.microsoft.com/office/drawing/2014/main" id="{1694DDB6-DF38-74CB-9C4D-BEB0368322E7}"/>
-              </a:ext>
-            </a:extLst>
-          </p:cNvPr>
-          <p:cNvCxnSpPr>
-            <a:cxnSpLocks/>
-            <a:stCxn id="90" idx="0"/>
-            <a:endCxn id="30" idx="0"/>
-          </p:cNvCxnSpPr>
-          <p:nvPr/>
-        </p:nvCxnSpPr>
-        <p:spPr>
-          <a:xfrm rot="16200000" flipH="1">
-            <a:off x="3837367" y="1180511"/>
-            <a:ext cx="186183" cy="3595787"/>
-          </a:xfrm>
-          <a:prstGeom prst="curvedConnector3">
-            <a:avLst>
-              <a:gd name="adj1" fmla="val -196451"/>
-            </a:avLst>
-          </a:prstGeom>
-          <a:ln w="19050">
-            <a:solidFill>
-              <a:schemeClr val="tx1"/>
-            </a:solidFill>
-            <a:tailEnd type="stealth" w="lg" len="lg"/>
-          </a:ln>
-        </p:spPr>
-        <p:style>
-          <a:lnRef idx="1">
-            <a:schemeClr val="accent1"/>
-          </a:lnRef>
-          <a:fillRef idx="0">
-            <a:schemeClr val="accent1"/>
-          </a:fillRef>
-          <a:effectRef idx="0">
-            <a:schemeClr val="accent1"/>
-          </a:effectRef>
-          <a:fontRef idx="minor">
-            <a:schemeClr val="tx1"/>
-          </a:fontRef>
-        </p:style>
-      </p:cxnSp>
-      <p:sp>
-        <p:nvSpPr>
-          <p:cNvPr id="60" name="文本框 59">
-            <a:extLst>
-              <a:ext uri="{FF2B5EF4-FFF2-40B4-BE49-F238E27FC236}">
-                <a16:creationId xmlns:a16="http://schemas.microsoft.com/office/drawing/2014/main" id="{59BAAD1A-60A9-A365-52EE-2C9255BF2A01}"/>
-              </a:ext>
-            </a:extLst>
-          </p:cNvPr>
-          <p:cNvSpPr txBox="1"/>
-          <p:nvPr/>
-        </p:nvSpPr>
-        <p:spPr>
-          <a:xfrm>
-            <a:off x="481494" y="424989"/>
-            <a:ext cx="2369820" cy="369332"/>
-          </a:xfrm>
-          <a:prstGeom prst="rect">
-            <a:avLst/>
-          </a:prstGeom>
-          <a:solidFill>
-            <a:srgbClr val="DEEBF7"/>
-          </a:solidFill>
-        </p:spPr>
-        <p:txBody>
-          <a:bodyPr wrap="square" rtlCol="0" anchor="ctr" anchorCtr="1">
-            <a:spAutoFit/>
-          </a:bodyPr>
-          <a:lstStyle/>
-          <a:p>
-            <a:pPr algn="ctr"/>
-            <a:r>
-              <a:rPr lang="zh-CN" altLang="en-US" dirty="0">
-                <a:latin typeface="Times New Roman" panose="02020603050405020304" pitchFamily="18" charset="0"/>
-                <a:ea typeface="宋体" panose="02010600030101010101" pitchFamily="2" charset="-122"/>
-              </a:rPr>
-              <a:t>传统随机接入机制</a:t>
-            </a:r>
-          </a:p>
-        </p:txBody>
-      </p:sp>
-      <p:grpSp>
-        <p:nvGrpSpPr>
-          <p:cNvPr id="84" name="组合 83">
-            <a:extLst>
-              <a:ext uri="{FF2B5EF4-FFF2-40B4-BE49-F238E27FC236}">
-                <a16:creationId xmlns:a16="http://schemas.microsoft.com/office/drawing/2014/main" id="{35C8D724-4DDC-8C2D-49DA-29588656C354}"/>
+                <a16:creationId xmlns:a16="http://schemas.microsoft.com/office/drawing/2014/main" id="{8B76775E-8816-4A67-7EC9-49F01166F4F8}"/>
               </a:ext>
             </a:extLst>
           </p:cNvPr>
@@ -6947,232 +5994,667 @@
         </p:nvGrpSpPr>
         <p:grpSpPr>
           <a:xfrm>
-            <a:off x="256032" y="1144096"/>
-            <a:ext cx="2718816" cy="579120"/>
-            <a:chOff x="256032" y="4328160"/>
-            <a:chExt cx="2718816" cy="579120"/>
+            <a:off x="256032" y="424989"/>
+            <a:ext cx="10474747" cy="3386570"/>
+            <a:chOff x="256032" y="424989"/>
+            <a:chExt cx="10474747" cy="3386570"/>
           </a:xfrm>
         </p:grpSpPr>
-        <p:grpSp>
-          <p:nvGrpSpPr>
-            <p:cNvPr id="76" name="组合 75">
+        <p:sp>
+          <p:nvSpPr>
+            <p:cNvPr id="4" name="矩形 3">
               <a:extLst>
                 <a:ext uri="{FF2B5EF4-FFF2-40B4-BE49-F238E27FC236}">
-                  <a16:creationId xmlns:a16="http://schemas.microsoft.com/office/drawing/2014/main" id="{0953BE78-5B73-B76C-06F7-A9C8FDEFA1BB}"/>
+                  <a16:creationId xmlns:a16="http://schemas.microsoft.com/office/drawing/2014/main" id="{49466CFA-C8F0-14EF-535C-39367FC37735}"/>
                 </a:ext>
               </a:extLst>
             </p:cNvPr>
-            <p:cNvGrpSpPr/>
+            <p:cNvSpPr/>
             <p:nvPr/>
-          </p:nvGrpSpPr>
-          <p:grpSpPr>
+          </p:nvSpPr>
+          <p:spPr>
             <a:xfrm>
-              <a:off x="2004550" y="4405257"/>
-              <a:ext cx="901818" cy="421582"/>
-              <a:chOff x="2627376" y="4370725"/>
-              <a:chExt cx="901818" cy="421582"/>
+              <a:off x="3282229" y="1428761"/>
+              <a:ext cx="963930" cy="369331"/>
             </a:xfrm>
-          </p:grpSpPr>
-          <p:sp>
-            <p:nvSpPr>
-              <p:cNvPr id="72" name="矩形 71">
-                <a:extLst>
-                  <a:ext uri="{FF2B5EF4-FFF2-40B4-BE49-F238E27FC236}">
-                    <a16:creationId xmlns:a16="http://schemas.microsoft.com/office/drawing/2014/main" id="{6BB7F5FE-E83B-C7CA-17F3-A454C86CC732}"/>
-                  </a:ext>
-                </a:extLst>
-              </p:cNvPr>
-              <p:cNvSpPr/>
-              <p:nvPr/>
-            </p:nvSpPr>
-            <p:spPr>
-              <a:xfrm>
-                <a:off x="2627376" y="4370725"/>
-                <a:ext cx="256032" cy="421582"/>
-              </a:xfrm>
-              <a:prstGeom prst="rect">
-                <a:avLst/>
-              </a:prstGeom>
-              <a:solidFill>
-                <a:srgbClr val="DEEBF7"/>
-              </a:solidFill>
-              <a:ln w="19050">
+            <a:prstGeom prst="rect">
+              <a:avLst/>
+            </a:prstGeom>
+            <a:solidFill>
+              <a:schemeClr val="accent5">
+                <a:lumMod val="20000"/>
+                <a:lumOff val="80000"/>
+              </a:schemeClr>
+            </a:solidFill>
+            <a:ln w="19050">
+              <a:noFill/>
+            </a:ln>
+          </p:spPr>
+          <p:style>
+            <a:lnRef idx="2">
+              <a:schemeClr val="accent1">
+                <a:shade val="15000"/>
+              </a:schemeClr>
+            </a:lnRef>
+            <a:fillRef idx="1">
+              <a:schemeClr val="accent1"/>
+            </a:fillRef>
+            <a:effectRef idx="0">
+              <a:schemeClr val="accent1"/>
+            </a:effectRef>
+            <a:fontRef idx="minor">
+              <a:schemeClr val="lt1"/>
+            </a:fontRef>
+          </p:style>
+          <p:txBody>
+            <a:bodyPr rtlCol="0" anchor="ctr"/>
+            <a:lstStyle/>
+            <a:p>
+              <a:pPr algn="ctr"/>
+              <a:r>
+                <a:rPr lang="en-US" altLang="zh-CN" dirty="0">
+                  <a:solidFill>
+                    <a:schemeClr val="tx1"/>
+                  </a:solidFill>
+                  <a:latin typeface="Times New Roman" panose="02020603050405020304" pitchFamily="18" charset="0"/>
+                  <a:ea typeface="宋体" panose="02010600030101010101" pitchFamily="2" charset="-122"/>
+                </a:rPr>
+                <a:t>packet1</a:t>
+              </a:r>
+              <a:endParaRPr lang="zh-CN" altLang="en-US" dirty="0" err="1">
                 <a:solidFill>
                   <a:schemeClr val="tx1"/>
                 </a:solidFill>
-              </a:ln>
-            </p:spPr>
-            <p:style>
-              <a:lnRef idx="2">
-                <a:schemeClr val="accent1">
-                  <a:shade val="15000"/>
-                </a:schemeClr>
-              </a:lnRef>
-              <a:fillRef idx="1">
-                <a:schemeClr val="accent1"/>
-              </a:fillRef>
-              <a:effectRef idx="0">
-                <a:schemeClr val="accent1"/>
-              </a:effectRef>
-              <a:fontRef idx="minor">
-                <a:schemeClr val="lt1"/>
-              </a:fontRef>
-            </p:style>
-            <p:txBody>
-              <a:bodyPr rtlCol="0" anchor="ctr"/>
-              <a:lstStyle/>
-              <a:p>
-                <a:pPr algn="ctr"/>
-                <a:endParaRPr lang="zh-CN" altLang="en-US" dirty="0" err="1">
+                <a:latin typeface="Times New Roman" panose="02020603050405020304" pitchFamily="18" charset="0"/>
+                <a:ea typeface="宋体" panose="02010600030101010101" pitchFamily="2" charset="-122"/>
+              </a:endParaRPr>
+            </a:p>
+          </p:txBody>
+        </p:sp>
+        <p:sp>
+          <p:nvSpPr>
+            <p:cNvPr id="8" name="矩形 7">
+              <a:extLst>
+                <a:ext uri="{FF2B5EF4-FFF2-40B4-BE49-F238E27FC236}">
+                  <a16:creationId xmlns:a16="http://schemas.microsoft.com/office/drawing/2014/main" id="{812CD0FA-E786-7CF2-0277-D35B077B29DB}"/>
+                </a:ext>
+              </a:extLst>
+            </p:cNvPr>
+            <p:cNvSpPr/>
+            <p:nvPr/>
+          </p:nvSpPr>
+          <p:spPr>
+            <a:xfrm>
+              <a:off x="9050569" y="1428761"/>
+              <a:ext cx="963930" cy="369332"/>
+            </a:xfrm>
+            <a:prstGeom prst="rect">
+              <a:avLst/>
+            </a:prstGeom>
+            <a:solidFill>
+              <a:schemeClr val="accent5">
+                <a:lumMod val="20000"/>
+                <a:lumOff val="80000"/>
+              </a:schemeClr>
+            </a:solidFill>
+            <a:ln w="19050">
+              <a:noFill/>
+            </a:ln>
+          </p:spPr>
+          <p:style>
+            <a:lnRef idx="2">
+              <a:schemeClr val="accent1">
+                <a:shade val="15000"/>
+              </a:schemeClr>
+            </a:lnRef>
+            <a:fillRef idx="1">
+              <a:schemeClr val="accent1"/>
+            </a:fillRef>
+            <a:effectRef idx="0">
+              <a:schemeClr val="accent1"/>
+            </a:effectRef>
+            <a:fontRef idx="minor">
+              <a:schemeClr val="lt1"/>
+            </a:fontRef>
+          </p:style>
+          <p:txBody>
+            <a:bodyPr rtlCol="0" anchor="ctr"/>
+            <a:lstStyle/>
+            <a:p>
+              <a:pPr algn="ctr"/>
+              <a:r>
+                <a:rPr lang="en-US" altLang="zh-CN" dirty="0">
                   <a:solidFill>
                     <a:schemeClr val="tx1"/>
                   </a:solidFill>
-                </a:endParaRPr>
-              </a:p>
-            </p:txBody>
-          </p:sp>
-          <p:sp>
-            <p:nvSpPr>
-              <p:cNvPr id="74" name="矩形 73">
-                <a:extLst>
-                  <a:ext uri="{FF2B5EF4-FFF2-40B4-BE49-F238E27FC236}">
-                    <a16:creationId xmlns:a16="http://schemas.microsoft.com/office/drawing/2014/main" id="{018F82A5-958C-9CEA-EC30-845013297CBD}"/>
-                  </a:ext>
-                </a:extLst>
-              </p:cNvPr>
-              <p:cNvSpPr/>
-              <p:nvPr/>
-            </p:nvSpPr>
-            <p:spPr>
-              <a:xfrm>
-                <a:off x="2950269" y="4370725"/>
-                <a:ext cx="256032" cy="421582"/>
-              </a:xfrm>
-              <a:prstGeom prst="rect">
-                <a:avLst/>
-              </a:prstGeom>
-              <a:solidFill>
-                <a:srgbClr val="DEEBF7"/>
-              </a:solidFill>
-              <a:ln w="19050">
+                  <a:latin typeface="Times New Roman" panose="02020603050405020304" pitchFamily="18" charset="0"/>
+                  <a:ea typeface="宋体" panose="02010600030101010101" pitchFamily="2" charset="-122"/>
+                </a:rPr>
+                <a:t>packet3</a:t>
+              </a:r>
+              <a:endParaRPr lang="zh-CN" altLang="en-US" dirty="0">
                 <a:solidFill>
                   <a:schemeClr val="tx1"/>
                 </a:solidFill>
-              </a:ln>
-            </p:spPr>
-            <p:style>
-              <a:lnRef idx="2">
-                <a:schemeClr val="accent1">
-                  <a:shade val="15000"/>
-                </a:schemeClr>
-              </a:lnRef>
-              <a:fillRef idx="1">
-                <a:schemeClr val="accent1"/>
-              </a:fillRef>
-              <a:effectRef idx="0">
-                <a:schemeClr val="accent1"/>
-              </a:effectRef>
-              <a:fontRef idx="minor">
-                <a:schemeClr val="lt1"/>
-              </a:fontRef>
-            </p:style>
-            <p:txBody>
-              <a:bodyPr rtlCol="0" anchor="ctr"/>
-              <a:lstStyle/>
-              <a:p>
-                <a:pPr algn="ctr"/>
-                <a:endParaRPr lang="zh-CN" altLang="en-US" dirty="0" err="1">
+                <a:latin typeface="Times New Roman" panose="02020603050405020304" pitchFamily="18" charset="0"/>
+                <a:ea typeface="宋体" panose="02010600030101010101" pitchFamily="2" charset="-122"/>
+              </a:endParaRPr>
+            </a:p>
+          </p:txBody>
+        </p:sp>
+        <p:sp>
+          <p:nvSpPr>
+            <p:cNvPr id="9" name="矩形 8">
+              <a:extLst>
+                <a:ext uri="{FF2B5EF4-FFF2-40B4-BE49-F238E27FC236}">
+                  <a16:creationId xmlns:a16="http://schemas.microsoft.com/office/drawing/2014/main" id="{5A8E55AE-C4C5-61C9-D3D2-C645CE43C251}"/>
+                </a:ext>
+              </a:extLst>
+            </p:cNvPr>
+            <p:cNvSpPr/>
+            <p:nvPr/>
+          </p:nvSpPr>
+          <p:spPr>
+            <a:xfrm>
+              <a:off x="5620299" y="1428761"/>
+              <a:ext cx="963930" cy="369332"/>
+            </a:xfrm>
+            <a:prstGeom prst="rect">
+              <a:avLst/>
+            </a:prstGeom>
+            <a:solidFill>
+              <a:schemeClr val="accent5">
+                <a:lumMod val="20000"/>
+                <a:lumOff val="80000"/>
+              </a:schemeClr>
+            </a:solidFill>
+            <a:ln w="19050">
+              <a:noFill/>
+            </a:ln>
+          </p:spPr>
+          <p:style>
+            <a:lnRef idx="2">
+              <a:schemeClr val="accent1">
+                <a:shade val="15000"/>
+              </a:schemeClr>
+            </a:lnRef>
+            <a:fillRef idx="1">
+              <a:schemeClr val="accent1"/>
+            </a:fillRef>
+            <a:effectRef idx="0">
+              <a:schemeClr val="accent1"/>
+            </a:effectRef>
+            <a:fontRef idx="minor">
+              <a:schemeClr val="lt1"/>
+            </a:fontRef>
+          </p:style>
+          <p:txBody>
+            <a:bodyPr rtlCol="0" anchor="ctr"/>
+            <a:lstStyle/>
+            <a:p>
+              <a:pPr algn="ctr"/>
+              <a:r>
+                <a:rPr lang="en-US" altLang="zh-CN" dirty="0">
                   <a:solidFill>
                     <a:schemeClr val="tx1"/>
                   </a:solidFill>
-                </a:endParaRPr>
-              </a:p>
-            </p:txBody>
-          </p:sp>
-          <p:sp>
-            <p:nvSpPr>
-              <p:cNvPr id="75" name="矩形 74">
-                <a:extLst>
-                  <a:ext uri="{FF2B5EF4-FFF2-40B4-BE49-F238E27FC236}">
-                    <a16:creationId xmlns:a16="http://schemas.microsoft.com/office/drawing/2014/main" id="{9978708F-72D2-C894-BDC5-EB50909F0B3B}"/>
-                  </a:ext>
-                </a:extLst>
-              </p:cNvPr>
-              <p:cNvSpPr/>
-              <p:nvPr/>
-            </p:nvSpPr>
-            <p:spPr>
-              <a:xfrm>
-                <a:off x="3273162" y="4370725"/>
-                <a:ext cx="256032" cy="421582"/>
-              </a:xfrm>
-              <a:prstGeom prst="rect">
-                <a:avLst/>
-              </a:prstGeom>
-              <a:solidFill>
-                <a:srgbClr val="DEEBF7"/>
-              </a:solidFill>
-              <a:ln w="19050">
+                  <a:latin typeface="Times New Roman" panose="02020603050405020304" pitchFamily="18" charset="0"/>
+                  <a:ea typeface="宋体" panose="02010600030101010101" pitchFamily="2" charset="-122"/>
+                </a:rPr>
+                <a:t>packet2</a:t>
+              </a:r>
+              <a:endParaRPr lang="zh-CN" altLang="en-US" dirty="0" err="1">
                 <a:solidFill>
                   <a:schemeClr val="tx1"/>
                 </a:solidFill>
-              </a:ln>
-            </p:spPr>
-            <p:style>
-              <a:lnRef idx="2">
-                <a:schemeClr val="accent1">
-                  <a:shade val="15000"/>
-                </a:schemeClr>
-              </a:lnRef>
-              <a:fillRef idx="1">
-                <a:schemeClr val="accent1"/>
-              </a:fillRef>
-              <a:effectRef idx="0">
-                <a:schemeClr val="accent1"/>
-              </a:effectRef>
-              <a:fontRef idx="minor">
-                <a:schemeClr val="lt1"/>
-              </a:fontRef>
-            </p:style>
-            <p:txBody>
-              <a:bodyPr rtlCol="0" anchor="ctr"/>
-              <a:lstStyle/>
-              <a:p>
-                <a:pPr algn="ctr"/>
-                <a:endParaRPr lang="zh-CN" altLang="en-US" dirty="0" err="1">
+                <a:latin typeface="Times New Roman" panose="02020603050405020304" pitchFamily="18" charset="0"/>
+                <a:ea typeface="宋体" panose="02010600030101010101" pitchFamily="2" charset="-122"/>
+              </a:endParaRPr>
+            </a:p>
+          </p:txBody>
+        </p:sp>
+        <p:sp>
+          <p:nvSpPr>
+            <p:cNvPr id="29" name="矩形 28">
+              <a:extLst>
+                <a:ext uri="{FF2B5EF4-FFF2-40B4-BE49-F238E27FC236}">
+                  <a16:creationId xmlns:a16="http://schemas.microsoft.com/office/drawing/2014/main" id="{C888AF54-3DC3-C8B7-225D-48555EC6400D}"/>
+                </a:ext>
+              </a:extLst>
+            </p:cNvPr>
+            <p:cNvSpPr/>
+            <p:nvPr/>
+          </p:nvSpPr>
+          <p:spPr>
+            <a:xfrm>
+              <a:off x="3282229" y="3071497"/>
+              <a:ext cx="963930" cy="369331"/>
+            </a:xfrm>
+            <a:prstGeom prst="rect">
+              <a:avLst/>
+            </a:prstGeom>
+            <a:solidFill>
+              <a:srgbClr val="FFC6C6"/>
+            </a:solidFill>
+            <a:ln w="19050">
+              <a:noFill/>
+            </a:ln>
+          </p:spPr>
+          <p:style>
+            <a:lnRef idx="2">
+              <a:schemeClr val="accent1">
+                <a:shade val="15000"/>
+              </a:schemeClr>
+            </a:lnRef>
+            <a:fillRef idx="1">
+              <a:schemeClr val="accent1"/>
+            </a:fillRef>
+            <a:effectRef idx="0">
+              <a:schemeClr val="accent1"/>
+            </a:effectRef>
+            <a:fontRef idx="minor">
+              <a:schemeClr val="lt1"/>
+            </a:fontRef>
+          </p:style>
+          <p:txBody>
+            <a:bodyPr rtlCol="0" anchor="ctr"/>
+            <a:lstStyle/>
+            <a:p>
+              <a:pPr algn="ctr"/>
+              <a:r>
+                <a:rPr lang="en-US" altLang="zh-CN" dirty="0">
                   <a:solidFill>
                     <a:schemeClr val="tx1"/>
                   </a:solidFill>
-                </a:endParaRPr>
-              </a:p>
-            </p:txBody>
-          </p:sp>
-        </p:grpSp>
-        <p:cxnSp>
-          <p:nvCxnSpPr>
-            <p:cNvPr id="80" name="直接连接符 79">
+                  <a:latin typeface="Times New Roman" panose="02020603050405020304" pitchFamily="18" charset="0"/>
+                  <a:ea typeface="宋体" panose="02010600030101010101" pitchFamily="2" charset="-122"/>
+                </a:rPr>
+                <a:t>packet1</a:t>
+              </a:r>
+              <a:endParaRPr lang="zh-CN" altLang="en-US" dirty="0" err="1">
+                <a:solidFill>
+                  <a:schemeClr val="tx1"/>
+                </a:solidFill>
+                <a:latin typeface="Times New Roman" panose="02020603050405020304" pitchFamily="18" charset="0"/>
+                <a:ea typeface="宋体" panose="02010600030101010101" pitchFamily="2" charset="-122"/>
+              </a:endParaRPr>
+            </a:p>
+          </p:txBody>
+        </p:sp>
+        <p:sp>
+          <p:nvSpPr>
+            <p:cNvPr id="30" name="矩形 29">
               <a:extLst>
                 <a:ext uri="{FF2B5EF4-FFF2-40B4-BE49-F238E27FC236}">
-                  <a16:creationId xmlns:a16="http://schemas.microsoft.com/office/drawing/2014/main" id="{79A8ACC0-1C86-2AC0-A131-C177277C9C30}"/>
+                  <a16:creationId xmlns:a16="http://schemas.microsoft.com/office/drawing/2014/main" id="{01678FF6-DC44-2523-C8BE-04F13D7F490E}"/>
                 </a:ext>
               </a:extLst>
             </p:cNvPr>
-            <p:cNvCxnSpPr/>
+            <p:cNvSpPr/>
+            <p:nvPr/>
+          </p:nvSpPr>
+          <p:spPr>
+            <a:xfrm>
+              <a:off x="5246388" y="3071496"/>
+              <a:ext cx="963930" cy="369332"/>
+            </a:xfrm>
+            <a:prstGeom prst="rect">
+              <a:avLst/>
+            </a:prstGeom>
+            <a:solidFill>
+              <a:srgbClr val="FFC6C6"/>
+            </a:solidFill>
+            <a:ln w="19050">
+              <a:noFill/>
+            </a:ln>
+          </p:spPr>
+          <p:style>
+            <a:lnRef idx="2">
+              <a:schemeClr val="accent1">
+                <a:shade val="15000"/>
+              </a:schemeClr>
+            </a:lnRef>
+            <a:fillRef idx="1">
+              <a:schemeClr val="accent1"/>
+            </a:fillRef>
+            <a:effectRef idx="0">
+              <a:schemeClr val="accent1"/>
+            </a:effectRef>
+            <a:fontRef idx="minor">
+              <a:schemeClr val="lt1"/>
+            </a:fontRef>
+          </p:style>
+          <p:txBody>
+            <a:bodyPr rtlCol="0" anchor="ctr"/>
+            <a:lstStyle/>
+            <a:p>
+              <a:pPr algn="ctr"/>
+              <a:r>
+                <a:rPr lang="en-US" altLang="zh-CN" dirty="0">
+                  <a:solidFill>
+                    <a:schemeClr val="tx1"/>
+                  </a:solidFill>
+                  <a:latin typeface="Times New Roman" panose="02020603050405020304" pitchFamily="18" charset="0"/>
+                  <a:ea typeface="宋体" panose="02010600030101010101" pitchFamily="2" charset="-122"/>
+                </a:rPr>
+                <a:t>packet3</a:t>
+              </a:r>
+              <a:endParaRPr lang="zh-CN" altLang="en-US" dirty="0">
+                <a:solidFill>
+                  <a:schemeClr val="tx1"/>
+                </a:solidFill>
+                <a:latin typeface="Times New Roman" panose="02020603050405020304" pitchFamily="18" charset="0"/>
+                <a:ea typeface="宋体" panose="02010600030101010101" pitchFamily="2" charset="-122"/>
+              </a:endParaRPr>
+            </a:p>
+          </p:txBody>
+        </p:sp>
+        <p:sp>
+          <p:nvSpPr>
+            <p:cNvPr id="31" name="矩形 30">
+              <a:extLst>
+                <a:ext uri="{FF2B5EF4-FFF2-40B4-BE49-F238E27FC236}">
+                  <a16:creationId xmlns:a16="http://schemas.microsoft.com/office/drawing/2014/main" id="{69C1602D-85E9-B769-0C8D-ACF08845CBE5}"/>
+                </a:ext>
+              </a:extLst>
+            </p:cNvPr>
+            <p:cNvSpPr/>
+            <p:nvPr/>
+          </p:nvSpPr>
+          <p:spPr>
+            <a:xfrm>
+              <a:off x="4267356" y="3071496"/>
+              <a:ext cx="963930" cy="369332"/>
+            </a:xfrm>
+            <a:prstGeom prst="rect">
+              <a:avLst/>
+            </a:prstGeom>
+            <a:solidFill>
+              <a:srgbClr val="FFC6C6"/>
+            </a:solidFill>
+            <a:ln w="19050">
+              <a:noFill/>
+            </a:ln>
+          </p:spPr>
+          <p:style>
+            <a:lnRef idx="2">
+              <a:schemeClr val="accent1">
+                <a:shade val="15000"/>
+              </a:schemeClr>
+            </a:lnRef>
+            <a:fillRef idx="1">
+              <a:schemeClr val="accent1"/>
+            </a:fillRef>
+            <a:effectRef idx="0">
+              <a:schemeClr val="accent1"/>
+            </a:effectRef>
+            <a:fontRef idx="minor">
+              <a:schemeClr val="lt1"/>
+            </a:fontRef>
+          </p:style>
+          <p:txBody>
+            <a:bodyPr rtlCol="0" anchor="ctr"/>
+            <a:lstStyle/>
+            <a:p>
+              <a:pPr algn="ctr"/>
+              <a:r>
+                <a:rPr lang="en-US" altLang="zh-CN" dirty="0">
+                  <a:solidFill>
+                    <a:schemeClr val="tx1"/>
+                  </a:solidFill>
+                  <a:latin typeface="Times New Roman" panose="02020603050405020304" pitchFamily="18" charset="0"/>
+                  <a:ea typeface="宋体" panose="02010600030101010101" pitchFamily="2" charset="-122"/>
+                </a:rPr>
+                <a:t>packet2</a:t>
+              </a:r>
+              <a:endParaRPr lang="zh-CN" altLang="en-US" dirty="0" err="1">
+                <a:solidFill>
+                  <a:schemeClr val="tx1"/>
+                </a:solidFill>
+                <a:latin typeface="Times New Roman" panose="02020603050405020304" pitchFamily="18" charset="0"/>
+                <a:ea typeface="宋体" panose="02010600030101010101" pitchFamily="2" charset="-122"/>
+              </a:endParaRPr>
+            </a:p>
+          </p:txBody>
+        </p:sp>
+        <p:cxnSp>
+          <p:nvCxnSpPr>
+            <p:cNvPr id="3" name="直接箭头连接符 2">
+              <a:extLst>
+                <a:ext uri="{FF2B5EF4-FFF2-40B4-BE49-F238E27FC236}">
+                  <a16:creationId xmlns:a16="http://schemas.microsoft.com/office/drawing/2014/main" id="{ED76A790-3312-AF98-E625-A11D0003B861}"/>
+                </a:ext>
+              </a:extLst>
+            </p:cNvPr>
+            <p:cNvCxnSpPr>
+              <a:cxnSpLocks/>
+            </p:cNvCxnSpPr>
             <p:nvPr/>
           </p:nvCxnSpPr>
           <p:spPr>
             <a:xfrm>
-              <a:off x="256032" y="4328160"/>
-              <a:ext cx="2718816" cy="0"/>
+              <a:off x="2455459" y="1798093"/>
+              <a:ext cx="8275320" cy="0"/>
             </a:xfrm>
-            <a:prstGeom prst="line">
+            <a:prstGeom prst="straightConnector1">
               <a:avLst/>
             </a:prstGeom>
             <a:ln w="19050">
               <a:solidFill>
                 <a:schemeClr val="tx1"/>
               </a:solidFill>
-              <a:tailEnd type="none"/>
+              <a:tailEnd type="triangle"/>
+            </a:ln>
+          </p:spPr>
+          <p:style>
+            <a:lnRef idx="1">
+              <a:schemeClr val="accent1"/>
+            </a:lnRef>
+            <a:fillRef idx="0">
+              <a:schemeClr val="accent1"/>
+            </a:fillRef>
+            <a:effectRef idx="0">
+              <a:schemeClr val="accent1"/>
+            </a:effectRef>
+            <a:fontRef idx="minor">
+              <a:schemeClr val="tx1"/>
+            </a:fontRef>
+          </p:style>
+        </p:cxnSp>
+        <p:sp>
+          <p:nvSpPr>
+            <p:cNvPr id="14" name="文本框 13">
+              <a:extLst>
+                <a:ext uri="{FF2B5EF4-FFF2-40B4-BE49-F238E27FC236}">
+                  <a16:creationId xmlns:a16="http://schemas.microsoft.com/office/drawing/2014/main" id="{0C2CCB4A-48C5-346A-3A25-1E4CE39F7F58}"/>
+                </a:ext>
+              </a:extLst>
+            </p:cNvPr>
+            <p:cNvSpPr txBox="1"/>
+            <p:nvPr/>
+          </p:nvSpPr>
+          <p:spPr>
+            <a:xfrm>
+              <a:off x="9930679" y="1798093"/>
+              <a:ext cx="800100" cy="369332"/>
+            </a:xfrm>
+            <a:prstGeom prst="rect">
+              <a:avLst/>
+            </a:prstGeom>
+            <a:noFill/>
+          </p:spPr>
+          <p:txBody>
+            <a:bodyPr wrap="square" rtlCol="0" anchor="ctr" anchorCtr="1">
+              <a:spAutoFit/>
+            </a:bodyPr>
+            <a:lstStyle/>
+            <a:p>
+              <a:pPr algn="ctr"/>
+              <a:r>
+                <a:rPr lang="zh-CN" altLang="en-US" dirty="0">
+                  <a:latin typeface="Times New Roman" panose="02020603050405020304" pitchFamily="18" charset="0"/>
+                  <a:ea typeface="宋体" panose="02010600030101010101" pitchFamily="2" charset="-122"/>
+                </a:rPr>
+                <a:t>时间</a:t>
+              </a:r>
+            </a:p>
+          </p:txBody>
+        </p:sp>
+        <p:sp>
+          <p:nvSpPr>
+            <p:cNvPr id="15" name="文本框 14">
+              <a:extLst>
+                <a:ext uri="{FF2B5EF4-FFF2-40B4-BE49-F238E27FC236}">
+                  <a16:creationId xmlns:a16="http://schemas.microsoft.com/office/drawing/2014/main" id="{2C87FDF5-BC8E-E9DC-5FC1-59659EE8396E}"/>
+                </a:ext>
+              </a:extLst>
+            </p:cNvPr>
+            <p:cNvSpPr txBox="1"/>
+            <p:nvPr/>
+          </p:nvSpPr>
+          <p:spPr>
+            <a:xfrm>
+              <a:off x="481494" y="2134221"/>
+              <a:ext cx="2369820" cy="369332"/>
+            </a:xfrm>
+            <a:prstGeom prst="rect">
+              <a:avLst/>
+            </a:prstGeom>
+            <a:solidFill>
+              <a:srgbClr val="FFC6C6"/>
+            </a:solidFill>
+          </p:spPr>
+          <p:txBody>
+            <a:bodyPr wrap="square" rtlCol="0" anchor="ctr" anchorCtr="1">
+              <a:spAutoFit/>
+            </a:bodyPr>
+            <a:lstStyle/>
+            <a:p>
+              <a:pPr algn="ctr"/>
+              <a:r>
+                <a:rPr lang="zh-CN" altLang="en-US" dirty="0">
+                  <a:latin typeface="Times New Roman" panose="02020603050405020304" pitchFamily="18" charset="0"/>
+                  <a:ea typeface="宋体" panose="02010600030101010101" pitchFamily="2" charset="-122"/>
+                </a:rPr>
+                <a:t>应用连续传输机制后</a:t>
+              </a:r>
+            </a:p>
+          </p:txBody>
+        </p:sp>
+        <p:cxnSp>
+          <p:nvCxnSpPr>
+            <p:cNvPr id="21" name="直接箭头连接符 20">
+              <a:extLst>
+                <a:ext uri="{FF2B5EF4-FFF2-40B4-BE49-F238E27FC236}">
+                  <a16:creationId xmlns:a16="http://schemas.microsoft.com/office/drawing/2014/main" id="{BA4EBEDC-B16F-2CA6-69D5-646114E78692}"/>
+                </a:ext>
+              </a:extLst>
+            </p:cNvPr>
+            <p:cNvCxnSpPr>
+              <a:cxnSpLocks/>
+            </p:cNvCxnSpPr>
+            <p:nvPr/>
+          </p:nvCxnSpPr>
+          <p:spPr>
+            <a:xfrm>
+              <a:off x="2455459" y="3442227"/>
+              <a:ext cx="8275320" cy="0"/>
+            </a:xfrm>
+            <a:prstGeom prst="straightConnector1">
+              <a:avLst/>
+            </a:prstGeom>
+            <a:ln w="19050">
+              <a:solidFill>
+                <a:schemeClr val="tx1"/>
+              </a:solidFill>
+              <a:tailEnd type="triangle"/>
+            </a:ln>
+          </p:spPr>
+          <p:style>
+            <a:lnRef idx="1">
+              <a:schemeClr val="accent1"/>
+            </a:lnRef>
+            <a:fillRef idx="0">
+              <a:schemeClr val="accent1"/>
+            </a:fillRef>
+            <a:effectRef idx="0">
+              <a:schemeClr val="accent1"/>
+            </a:effectRef>
+            <a:fontRef idx="minor">
+              <a:schemeClr val="tx1"/>
+            </a:fontRef>
+          </p:style>
+        </p:cxnSp>
+        <p:sp>
+          <p:nvSpPr>
+            <p:cNvPr id="25" name="文本框 24">
+              <a:extLst>
+                <a:ext uri="{FF2B5EF4-FFF2-40B4-BE49-F238E27FC236}">
+                  <a16:creationId xmlns:a16="http://schemas.microsoft.com/office/drawing/2014/main" id="{B26EB5C3-F79F-D9FB-18DB-F0D7BC4A494B}"/>
+                </a:ext>
+              </a:extLst>
+            </p:cNvPr>
+            <p:cNvSpPr txBox="1"/>
+            <p:nvPr/>
+          </p:nvSpPr>
+          <p:spPr>
+            <a:xfrm>
+              <a:off x="9930679" y="3442227"/>
+              <a:ext cx="800100" cy="369332"/>
+            </a:xfrm>
+            <a:prstGeom prst="rect">
+              <a:avLst/>
+            </a:prstGeom>
+            <a:noFill/>
+          </p:spPr>
+          <p:txBody>
+            <a:bodyPr wrap="square" rtlCol="0" anchor="ctr" anchorCtr="1">
+              <a:spAutoFit/>
+            </a:bodyPr>
+            <a:lstStyle/>
+            <a:p>
+              <a:pPr algn="ctr"/>
+              <a:r>
+                <a:rPr lang="zh-CN" altLang="en-US" dirty="0">
+                  <a:latin typeface="Times New Roman" panose="02020603050405020304" pitchFamily="18" charset="0"/>
+                  <a:ea typeface="宋体" panose="02010600030101010101" pitchFamily="2" charset="-122"/>
+                </a:rPr>
+                <a:t>时间</a:t>
+              </a:r>
+            </a:p>
+          </p:txBody>
+        </p:sp>
+        <p:cxnSp>
+          <p:nvCxnSpPr>
+            <p:cNvPr id="34" name="直接箭头连接符 33">
+              <a:extLst>
+                <a:ext uri="{FF2B5EF4-FFF2-40B4-BE49-F238E27FC236}">
+                  <a16:creationId xmlns:a16="http://schemas.microsoft.com/office/drawing/2014/main" id="{CE672089-5FDA-2292-DCD3-78EF11C55FEE}"/>
+                </a:ext>
+              </a:extLst>
+            </p:cNvPr>
+            <p:cNvCxnSpPr>
+              <a:cxnSpLocks/>
+              <a:stCxn id="75" idx="0"/>
+              <a:endCxn id="4" idx="0"/>
+            </p:cNvCxnSpPr>
+            <p:nvPr/>
+          </p:nvCxnSpPr>
+          <p:spPr>
+            <a:xfrm rot="16200000" flipH="1">
+              <a:off x="3167489" y="832056"/>
+              <a:ext cx="207568" cy="985842"/>
+            </a:xfrm>
+            <a:prstGeom prst="curvedConnector3">
+              <a:avLst>
+                <a:gd name="adj1" fmla="val -91778"/>
+              </a:avLst>
+            </a:prstGeom>
+            <a:ln w="19050">
+              <a:solidFill>
+                <a:schemeClr val="tx1"/>
+              </a:solidFill>
+              <a:tailEnd type="stealth" w="lg" len="lg"/>
             </a:ln>
           </p:spPr>
           <p:style>
@@ -7192,29 +6674,227 @@
         </p:cxnSp>
         <p:cxnSp>
           <p:nvCxnSpPr>
-            <p:cNvPr id="81" name="直接连接符 80">
+            <p:cNvPr id="36" name="直接箭头连接符 33">
               <a:extLst>
                 <a:ext uri="{FF2B5EF4-FFF2-40B4-BE49-F238E27FC236}">
-                  <a16:creationId xmlns:a16="http://schemas.microsoft.com/office/drawing/2014/main" id="{7E2232ED-6E26-3BC5-E597-578AF5CD04ED}"/>
+                  <a16:creationId xmlns:a16="http://schemas.microsoft.com/office/drawing/2014/main" id="{FB263111-7A71-DE6A-067B-F77A1F858C19}"/>
                 </a:ext>
               </a:extLst>
             </p:cNvPr>
-            <p:cNvCxnSpPr/>
+            <p:cNvCxnSpPr>
+              <a:cxnSpLocks/>
+              <a:stCxn id="72" idx="0"/>
+              <a:endCxn id="8" idx="0"/>
+            </p:cNvCxnSpPr>
             <p:nvPr/>
           </p:nvCxnSpPr>
           <p:spPr>
-            <a:xfrm>
-              <a:off x="256032" y="4907280"/>
-              <a:ext cx="2718816" cy="0"/>
+            <a:xfrm rot="16200000" flipH="1">
+              <a:off x="5728766" y="-2375007"/>
+              <a:ext cx="207568" cy="7399968"/>
             </a:xfrm>
-            <a:prstGeom prst="line">
-              <a:avLst/>
+            <a:prstGeom prst="curvedConnector3">
+              <a:avLst>
+                <a:gd name="adj1" fmla="val -260648"/>
+              </a:avLst>
             </a:prstGeom>
             <a:ln w="19050">
               <a:solidFill>
                 <a:schemeClr val="tx1"/>
               </a:solidFill>
-              <a:tailEnd type="none"/>
+              <a:tailEnd type="stealth" w="lg" len="lg"/>
+            </a:ln>
+          </p:spPr>
+          <p:style>
+            <a:lnRef idx="1">
+              <a:schemeClr val="accent1"/>
+            </a:lnRef>
+            <a:fillRef idx="0">
+              <a:schemeClr val="accent1"/>
+            </a:fillRef>
+            <a:effectRef idx="0">
+              <a:schemeClr val="accent1"/>
+            </a:effectRef>
+            <a:fontRef idx="minor">
+              <a:schemeClr val="tx1"/>
+            </a:fontRef>
+          </p:style>
+        </p:cxnSp>
+        <p:cxnSp>
+          <p:nvCxnSpPr>
+            <p:cNvPr id="39" name="直接箭头连接符 38">
+              <a:extLst>
+                <a:ext uri="{FF2B5EF4-FFF2-40B4-BE49-F238E27FC236}">
+                  <a16:creationId xmlns:a16="http://schemas.microsoft.com/office/drawing/2014/main" id="{7A7DAEB8-D8E9-CBB5-FF48-F3556E0A05A8}"/>
+                </a:ext>
+              </a:extLst>
+            </p:cNvPr>
+            <p:cNvCxnSpPr>
+              <a:cxnSpLocks/>
+              <a:stCxn id="74" idx="0"/>
+              <a:endCxn id="9" idx="0"/>
+            </p:cNvCxnSpPr>
+            <p:nvPr/>
+          </p:nvCxnSpPr>
+          <p:spPr>
+            <a:xfrm rot="16200000" flipH="1">
+              <a:off x="4175077" y="-498425"/>
+              <a:ext cx="207568" cy="3646805"/>
+            </a:xfrm>
+            <a:prstGeom prst="curvedConnector3">
+              <a:avLst>
+                <a:gd name="adj1" fmla="val -183556"/>
+              </a:avLst>
+            </a:prstGeom>
+            <a:ln w="19050">
+              <a:solidFill>
+                <a:schemeClr val="tx1"/>
+              </a:solidFill>
+              <a:tailEnd type="stealth" w="lg" len="lg"/>
+            </a:ln>
+          </p:spPr>
+          <p:style>
+            <a:lnRef idx="1">
+              <a:schemeClr val="accent1"/>
+            </a:lnRef>
+            <a:fillRef idx="0">
+              <a:schemeClr val="accent1"/>
+            </a:fillRef>
+            <a:effectRef idx="0">
+              <a:schemeClr val="accent1"/>
+            </a:effectRef>
+            <a:fontRef idx="minor">
+              <a:schemeClr val="tx1"/>
+            </a:fontRef>
+          </p:style>
+        </p:cxnSp>
+        <p:cxnSp>
+          <p:nvCxnSpPr>
+            <p:cNvPr id="51" name="直接箭头连接符 50">
+              <a:extLst>
+                <a:ext uri="{FF2B5EF4-FFF2-40B4-BE49-F238E27FC236}">
+                  <a16:creationId xmlns:a16="http://schemas.microsoft.com/office/drawing/2014/main" id="{4BD7258C-D88C-C9B9-0964-4B58173C6A24}"/>
+                </a:ext>
+              </a:extLst>
+            </p:cNvPr>
+            <p:cNvCxnSpPr>
+              <a:cxnSpLocks/>
+              <a:stCxn id="92" idx="0"/>
+              <a:endCxn id="29" idx="0"/>
+            </p:cNvCxnSpPr>
+            <p:nvPr/>
+          </p:nvCxnSpPr>
+          <p:spPr>
+            <a:xfrm rot="16200000" flipH="1">
+              <a:off x="3178181" y="2485484"/>
+              <a:ext cx="186184" cy="985842"/>
+            </a:xfrm>
+            <a:prstGeom prst="curvedConnector3">
+              <a:avLst>
+                <a:gd name="adj1" fmla="val -114596"/>
+              </a:avLst>
+            </a:prstGeom>
+            <a:ln w="19050">
+              <a:solidFill>
+                <a:schemeClr val="tx1"/>
+              </a:solidFill>
+              <a:tailEnd type="stealth" w="lg" len="lg"/>
+            </a:ln>
+          </p:spPr>
+          <p:style>
+            <a:lnRef idx="1">
+              <a:schemeClr val="accent1"/>
+            </a:lnRef>
+            <a:fillRef idx="0">
+              <a:schemeClr val="accent1"/>
+            </a:fillRef>
+            <a:effectRef idx="0">
+              <a:schemeClr val="accent1"/>
+            </a:effectRef>
+            <a:fontRef idx="minor">
+              <a:schemeClr val="tx1"/>
+            </a:fontRef>
+          </p:style>
+        </p:cxnSp>
+        <p:cxnSp>
+          <p:nvCxnSpPr>
+            <p:cNvPr id="53" name="直接箭头连接符 52">
+              <a:extLst>
+                <a:ext uri="{FF2B5EF4-FFF2-40B4-BE49-F238E27FC236}">
+                  <a16:creationId xmlns:a16="http://schemas.microsoft.com/office/drawing/2014/main" id="{89A5406E-B98A-E04B-0D00-33DDF24A9075}"/>
+                </a:ext>
+              </a:extLst>
+            </p:cNvPr>
+            <p:cNvCxnSpPr>
+              <a:cxnSpLocks/>
+              <a:stCxn id="91" idx="0"/>
+              <a:endCxn id="31" idx="0"/>
+            </p:cNvCxnSpPr>
+            <p:nvPr/>
+          </p:nvCxnSpPr>
+          <p:spPr>
+            <a:xfrm rot="16200000" flipH="1">
+              <a:off x="3509298" y="1831473"/>
+              <a:ext cx="186183" cy="2293862"/>
+            </a:xfrm>
+            <a:prstGeom prst="curvedConnector3">
+              <a:avLst>
+                <a:gd name="adj1" fmla="val -159617"/>
+              </a:avLst>
+            </a:prstGeom>
+            <a:ln w="19050">
+              <a:solidFill>
+                <a:schemeClr val="tx1"/>
+              </a:solidFill>
+              <a:tailEnd type="stealth" w="lg" len="lg"/>
+            </a:ln>
+          </p:spPr>
+          <p:style>
+            <a:lnRef idx="1">
+              <a:schemeClr val="accent1"/>
+            </a:lnRef>
+            <a:fillRef idx="0">
+              <a:schemeClr val="accent1"/>
+            </a:fillRef>
+            <a:effectRef idx="0">
+              <a:schemeClr val="accent1"/>
+            </a:effectRef>
+            <a:fontRef idx="minor">
+              <a:schemeClr val="tx1"/>
+            </a:fontRef>
+          </p:style>
+        </p:cxnSp>
+        <p:cxnSp>
+          <p:nvCxnSpPr>
+            <p:cNvPr id="55" name="直接箭头连接符 54">
+              <a:extLst>
+                <a:ext uri="{FF2B5EF4-FFF2-40B4-BE49-F238E27FC236}">
+                  <a16:creationId xmlns:a16="http://schemas.microsoft.com/office/drawing/2014/main" id="{1694DDB6-DF38-74CB-9C4D-BEB0368322E7}"/>
+                </a:ext>
+              </a:extLst>
+            </p:cNvPr>
+            <p:cNvCxnSpPr>
+              <a:cxnSpLocks/>
+              <a:stCxn id="90" idx="0"/>
+              <a:endCxn id="30" idx="0"/>
+            </p:cNvCxnSpPr>
+            <p:nvPr/>
+          </p:nvCxnSpPr>
+          <p:spPr>
+            <a:xfrm rot="16200000" flipH="1">
+              <a:off x="3837367" y="1180511"/>
+              <a:ext cx="186183" cy="3595787"/>
+            </a:xfrm>
+            <a:prstGeom prst="curvedConnector3">
+              <a:avLst>
+                <a:gd name="adj1" fmla="val -196451"/>
+              </a:avLst>
+            </a:prstGeom>
+            <a:ln w="19050">
+              <a:solidFill>
+                <a:schemeClr val="tx1"/>
+              </a:solidFill>
+              <a:tailEnd type="stealth" w="lg" len="lg"/>
             </a:ln>
           </p:spPr>
           <p:style>
@@ -7234,10 +6914,10 @@
         </p:cxnSp>
         <p:sp>
           <p:nvSpPr>
-            <p:cNvPr id="83" name="文本框 82">
+            <p:cNvPr id="60" name="文本框 59">
               <a:extLst>
                 <a:ext uri="{FF2B5EF4-FFF2-40B4-BE49-F238E27FC236}">
-                  <a16:creationId xmlns:a16="http://schemas.microsoft.com/office/drawing/2014/main" id="{F28A62B2-D4F4-ED8B-BE2F-123E3DDECDEA}"/>
+                  <a16:creationId xmlns:a16="http://schemas.microsoft.com/office/drawing/2014/main" id="{59BAAD1A-60A9-A365-52EE-2C9255BF2A01}"/>
                 </a:ext>
               </a:extLst>
             </p:cNvPr>
@@ -7246,64 +6926,39 @@
           </p:nvSpPr>
           <p:spPr>
             <a:xfrm>
-              <a:off x="287838" y="4433059"/>
-              <a:ext cx="1139952" cy="369323"/>
+              <a:off x="481494" y="424989"/>
+              <a:ext cx="2369820" cy="369332"/>
             </a:xfrm>
             <a:prstGeom prst="rect">
               <a:avLst/>
             </a:prstGeom>
-            <a:noFill/>
+            <a:solidFill>
+              <a:srgbClr val="DEEBF7"/>
+            </a:solidFill>
           </p:spPr>
           <p:txBody>
-            <a:bodyPr wrap="square">
+            <a:bodyPr wrap="square" rtlCol="0" anchor="ctr" anchorCtr="1">
               <a:spAutoFit/>
             </a:bodyPr>
             <a:lstStyle/>
             <a:p>
+              <a:pPr algn="ctr"/>
               <a:r>
-                <a:rPr lang="zh-CN" altLang="en-US" b="0" cap="none" spc="0" dirty="0">
-                  <a:ln>
-                    <a:noFill/>
-                  </a:ln>
-                  <a:solidFill>
-                    <a:schemeClr val="tx1"/>
-                  </a:solidFill>
-                  <a:effectLst/>
-                  <a:latin typeface="宋体" panose="02010600030101010101" pitchFamily="2" charset="-122"/>
+                <a:rPr lang="zh-CN" altLang="en-US" dirty="0">
+                  <a:latin typeface="Times New Roman" panose="02020603050405020304" pitchFamily="18" charset="0"/>
                   <a:ea typeface="宋体" panose="02010600030101010101" pitchFamily="2" charset="-122"/>
                 </a:rPr>
-                <a:t>数据队列</a:t>
+                <a:t>传统随机接入机制</a:t>
               </a:r>
             </a:p>
           </p:txBody>
         </p:sp>
-      </p:grpSp>
-      <p:grpSp>
-        <p:nvGrpSpPr>
-          <p:cNvPr id="85" name="组合 84">
-            <a:extLst>
-              <a:ext uri="{FF2B5EF4-FFF2-40B4-BE49-F238E27FC236}">
-                <a16:creationId xmlns:a16="http://schemas.microsoft.com/office/drawing/2014/main" id="{0D2A7A03-EFFB-BE7B-B607-A0DEA7DAB629}"/>
-              </a:ext>
-            </a:extLst>
-          </p:cNvPr>
-          <p:cNvGrpSpPr/>
-          <p:nvPr/>
-        </p:nvGrpSpPr>
-        <p:grpSpPr>
-          <a:xfrm>
-            <a:off x="256032" y="2808216"/>
-            <a:ext cx="2718816" cy="579120"/>
-            <a:chOff x="256032" y="4328160"/>
-            <a:chExt cx="2718816" cy="579120"/>
-          </a:xfrm>
-        </p:grpSpPr>
         <p:grpSp>
           <p:nvGrpSpPr>
-            <p:cNvPr id="86" name="组合 85">
+            <p:cNvPr id="84" name="组合 83">
               <a:extLst>
                 <a:ext uri="{FF2B5EF4-FFF2-40B4-BE49-F238E27FC236}">
-                  <a16:creationId xmlns:a16="http://schemas.microsoft.com/office/drawing/2014/main" id="{2E62753C-D3CD-32F6-A61A-4E1DBAA87C14}"/>
+                  <a16:creationId xmlns:a16="http://schemas.microsoft.com/office/drawing/2014/main" id="{35C8D724-4DDC-8C2D-49DA-29588656C354}"/>
                 </a:ext>
               </a:extLst>
             </p:cNvPr>
@@ -7312,316 +6967,682 @@
           </p:nvGrpSpPr>
           <p:grpSpPr>
             <a:xfrm>
-              <a:off x="2004550" y="4405257"/>
-              <a:ext cx="901818" cy="421582"/>
-              <a:chOff x="2627376" y="4370725"/>
-              <a:chExt cx="901818" cy="421582"/>
+              <a:off x="256032" y="1144096"/>
+              <a:ext cx="2718816" cy="579120"/>
+              <a:chOff x="256032" y="4328160"/>
+              <a:chExt cx="2718816" cy="579120"/>
             </a:xfrm>
           </p:grpSpPr>
-          <p:sp>
-            <p:nvSpPr>
-              <p:cNvPr id="90" name="矩形 89">
+          <p:grpSp>
+            <p:nvGrpSpPr>
+              <p:cNvPr id="76" name="组合 75">
                 <a:extLst>
                   <a:ext uri="{FF2B5EF4-FFF2-40B4-BE49-F238E27FC236}">
-                    <a16:creationId xmlns:a16="http://schemas.microsoft.com/office/drawing/2014/main" id="{A9600834-8E62-BC5B-C3B9-31534167BE2D}"/>
+                    <a16:creationId xmlns:a16="http://schemas.microsoft.com/office/drawing/2014/main" id="{0953BE78-5B73-B76C-06F7-A9C8FDEFA1BB}"/>
                   </a:ext>
                 </a:extLst>
               </p:cNvPr>
-              <p:cNvSpPr/>
+              <p:cNvGrpSpPr/>
               <p:nvPr/>
-            </p:nvSpPr>
+            </p:nvGrpSpPr>
+            <p:grpSpPr>
+              <a:xfrm>
+                <a:off x="2004550" y="4405257"/>
+                <a:ext cx="901818" cy="421582"/>
+                <a:chOff x="2627376" y="4370725"/>
+                <a:chExt cx="901818" cy="421582"/>
+              </a:xfrm>
+            </p:grpSpPr>
+            <p:sp>
+              <p:nvSpPr>
+                <p:cNvPr id="72" name="矩形 71">
+                  <a:extLst>
+                    <a:ext uri="{FF2B5EF4-FFF2-40B4-BE49-F238E27FC236}">
+                      <a16:creationId xmlns:a16="http://schemas.microsoft.com/office/drawing/2014/main" id="{6BB7F5FE-E83B-C7CA-17F3-A454C86CC732}"/>
+                    </a:ext>
+                  </a:extLst>
+                </p:cNvPr>
+                <p:cNvSpPr/>
+                <p:nvPr/>
+              </p:nvSpPr>
+              <p:spPr>
+                <a:xfrm>
+                  <a:off x="2627376" y="4370725"/>
+                  <a:ext cx="256032" cy="421582"/>
+                </a:xfrm>
+                <a:prstGeom prst="rect">
+                  <a:avLst/>
+                </a:prstGeom>
+                <a:solidFill>
+                  <a:srgbClr val="DEEBF7"/>
+                </a:solidFill>
+                <a:ln w="19050">
+                  <a:solidFill>
+                    <a:schemeClr val="tx1"/>
+                  </a:solidFill>
+                </a:ln>
+              </p:spPr>
+              <p:style>
+                <a:lnRef idx="2">
+                  <a:schemeClr val="accent1">
+                    <a:shade val="15000"/>
+                  </a:schemeClr>
+                </a:lnRef>
+                <a:fillRef idx="1">
+                  <a:schemeClr val="accent1"/>
+                </a:fillRef>
+                <a:effectRef idx="0">
+                  <a:schemeClr val="accent1"/>
+                </a:effectRef>
+                <a:fontRef idx="minor">
+                  <a:schemeClr val="lt1"/>
+                </a:fontRef>
+              </p:style>
+              <p:txBody>
+                <a:bodyPr rtlCol="0" anchor="ctr"/>
+                <a:lstStyle/>
+                <a:p>
+                  <a:pPr algn="ctr"/>
+                  <a:endParaRPr lang="zh-CN" altLang="en-US" dirty="0" err="1">
+                    <a:solidFill>
+                      <a:schemeClr val="tx1"/>
+                    </a:solidFill>
+                  </a:endParaRPr>
+                </a:p>
+              </p:txBody>
+            </p:sp>
+            <p:sp>
+              <p:nvSpPr>
+                <p:cNvPr id="74" name="矩形 73">
+                  <a:extLst>
+                    <a:ext uri="{FF2B5EF4-FFF2-40B4-BE49-F238E27FC236}">
+                      <a16:creationId xmlns:a16="http://schemas.microsoft.com/office/drawing/2014/main" id="{018F82A5-958C-9CEA-EC30-845013297CBD}"/>
+                    </a:ext>
+                  </a:extLst>
+                </p:cNvPr>
+                <p:cNvSpPr/>
+                <p:nvPr/>
+              </p:nvSpPr>
+              <p:spPr>
+                <a:xfrm>
+                  <a:off x="2950269" y="4370725"/>
+                  <a:ext cx="256032" cy="421582"/>
+                </a:xfrm>
+                <a:prstGeom prst="rect">
+                  <a:avLst/>
+                </a:prstGeom>
+                <a:solidFill>
+                  <a:srgbClr val="DEEBF7"/>
+                </a:solidFill>
+                <a:ln w="19050">
+                  <a:solidFill>
+                    <a:schemeClr val="tx1"/>
+                  </a:solidFill>
+                </a:ln>
+              </p:spPr>
+              <p:style>
+                <a:lnRef idx="2">
+                  <a:schemeClr val="accent1">
+                    <a:shade val="15000"/>
+                  </a:schemeClr>
+                </a:lnRef>
+                <a:fillRef idx="1">
+                  <a:schemeClr val="accent1"/>
+                </a:fillRef>
+                <a:effectRef idx="0">
+                  <a:schemeClr val="accent1"/>
+                </a:effectRef>
+                <a:fontRef idx="minor">
+                  <a:schemeClr val="lt1"/>
+                </a:fontRef>
+              </p:style>
+              <p:txBody>
+                <a:bodyPr rtlCol="0" anchor="ctr"/>
+                <a:lstStyle/>
+                <a:p>
+                  <a:pPr algn="ctr"/>
+                  <a:endParaRPr lang="zh-CN" altLang="en-US" dirty="0" err="1">
+                    <a:solidFill>
+                      <a:schemeClr val="tx1"/>
+                    </a:solidFill>
+                  </a:endParaRPr>
+                </a:p>
+              </p:txBody>
+            </p:sp>
+            <p:sp>
+              <p:nvSpPr>
+                <p:cNvPr id="75" name="矩形 74">
+                  <a:extLst>
+                    <a:ext uri="{FF2B5EF4-FFF2-40B4-BE49-F238E27FC236}">
+                      <a16:creationId xmlns:a16="http://schemas.microsoft.com/office/drawing/2014/main" id="{9978708F-72D2-C894-BDC5-EB50909F0B3B}"/>
+                    </a:ext>
+                  </a:extLst>
+                </p:cNvPr>
+                <p:cNvSpPr/>
+                <p:nvPr/>
+              </p:nvSpPr>
+              <p:spPr>
+                <a:xfrm>
+                  <a:off x="3273162" y="4370725"/>
+                  <a:ext cx="256032" cy="421582"/>
+                </a:xfrm>
+                <a:prstGeom prst="rect">
+                  <a:avLst/>
+                </a:prstGeom>
+                <a:solidFill>
+                  <a:srgbClr val="DEEBF7"/>
+                </a:solidFill>
+                <a:ln w="19050">
+                  <a:solidFill>
+                    <a:schemeClr val="tx1"/>
+                  </a:solidFill>
+                </a:ln>
+              </p:spPr>
+              <p:style>
+                <a:lnRef idx="2">
+                  <a:schemeClr val="accent1">
+                    <a:shade val="15000"/>
+                  </a:schemeClr>
+                </a:lnRef>
+                <a:fillRef idx="1">
+                  <a:schemeClr val="accent1"/>
+                </a:fillRef>
+                <a:effectRef idx="0">
+                  <a:schemeClr val="accent1"/>
+                </a:effectRef>
+                <a:fontRef idx="minor">
+                  <a:schemeClr val="lt1"/>
+                </a:fontRef>
+              </p:style>
+              <p:txBody>
+                <a:bodyPr rtlCol="0" anchor="ctr"/>
+                <a:lstStyle/>
+                <a:p>
+                  <a:pPr algn="ctr"/>
+                  <a:endParaRPr lang="zh-CN" altLang="en-US" dirty="0" err="1">
+                    <a:solidFill>
+                      <a:schemeClr val="tx1"/>
+                    </a:solidFill>
+                  </a:endParaRPr>
+                </a:p>
+              </p:txBody>
+            </p:sp>
+          </p:grpSp>
+          <p:cxnSp>
+            <p:nvCxnSpPr>
+              <p:cNvPr id="80" name="直接连接符 79">
+                <a:extLst>
+                  <a:ext uri="{FF2B5EF4-FFF2-40B4-BE49-F238E27FC236}">
+                    <a16:creationId xmlns:a16="http://schemas.microsoft.com/office/drawing/2014/main" id="{79A8ACC0-1C86-2AC0-A131-C177277C9C30}"/>
+                  </a:ext>
+                </a:extLst>
+              </p:cNvPr>
+              <p:cNvCxnSpPr/>
+              <p:nvPr/>
+            </p:nvCxnSpPr>
             <p:spPr>
               <a:xfrm>
-                <a:off x="2627376" y="4370725"/>
-                <a:ext cx="256032" cy="421582"/>
+                <a:off x="256032" y="4328160"/>
+                <a:ext cx="2718816" cy="0"/>
               </a:xfrm>
-              <a:prstGeom prst="rect">
+              <a:prstGeom prst="line">
                 <a:avLst/>
               </a:prstGeom>
-              <a:solidFill>
-                <a:srgbClr val="FFC6C6"/>
-              </a:solidFill>
               <a:ln w="19050">
                 <a:solidFill>
                   <a:schemeClr val="tx1"/>
                 </a:solidFill>
+                <a:tailEnd type="none"/>
               </a:ln>
             </p:spPr>
             <p:style>
-              <a:lnRef idx="2">
-                <a:schemeClr val="accent1">
-                  <a:shade val="15000"/>
-                </a:schemeClr>
+              <a:lnRef idx="1">
+                <a:schemeClr val="accent1"/>
               </a:lnRef>
-              <a:fillRef idx="1">
+              <a:fillRef idx="0">
                 <a:schemeClr val="accent1"/>
               </a:fillRef>
               <a:effectRef idx="0">
                 <a:schemeClr val="accent1"/>
               </a:effectRef>
               <a:fontRef idx="minor">
-                <a:schemeClr val="lt1"/>
+                <a:schemeClr val="tx1"/>
               </a:fontRef>
             </p:style>
-            <p:txBody>
-              <a:bodyPr rtlCol="0" anchor="ctr"/>
-              <a:lstStyle/>
-              <a:p>
-                <a:pPr algn="ctr"/>
-                <a:endParaRPr lang="zh-CN" altLang="en-US" dirty="0" err="1">
-                  <a:solidFill>
-                    <a:schemeClr val="tx1"/>
-                  </a:solidFill>
-                </a:endParaRPr>
-              </a:p>
-            </p:txBody>
-          </p:sp>
-          <p:sp>
-            <p:nvSpPr>
-              <p:cNvPr id="91" name="矩形 90">
+          </p:cxnSp>
+          <p:cxnSp>
+            <p:nvCxnSpPr>
+              <p:cNvPr id="81" name="直接连接符 80">
                 <a:extLst>
                   <a:ext uri="{FF2B5EF4-FFF2-40B4-BE49-F238E27FC236}">
-                    <a16:creationId xmlns:a16="http://schemas.microsoft.com/office/drawing/2014/main" id="{FEE0903C-4565-4D44-FF86-91E07963B9F3}"/>
+                    <a16:creationId xmlns:a16="http://schemas.microsoft.com/office/drawing/2014/main" id="{7E2232ED-6E26-3BC5-E597-578AF5CD04ED}"/>
                   </a:ext>
                 </a:extLst>
               </p:cNvPr>
-              <p:cNvSpPr/>
+              <p:cNvCxnSpPr/>
               <p:nvPr/>
-            </p:nvSpPr>
+            </p:nvCxnSpPr>
             <p:spPr>
               <a:xfrm>
-                <a:off x="2950269" y="4370725"/>
-                <a:ext cx="256032" cy="421582"/>
+                <a:off x="256032" y="4907280"/>
+                <a:ext cx="2718816" cy="0"/>
               </a:xfrm>
-              <a:prstGeom prst="rect">
+              <a:prstGeom prst="line">
                 <a:avLst/>
               </a:prstGeom>
-              <a:solidFill>
-                <a:srgbClr val="FFC6C6"/>
-              </a:solidFill>
               <a:ln w="19050">
                 <a:solidFill>
                   <a:schemeClr val="tx1"/>
                 </a:solidFill>
+                <a:tailEnd type="none"/>
               </a:ln>
             </p:spPr>
             <p:style>
-              <a:lnRef idx="2">
-                <a:schemeClr val="accent1">
-                  <a:shade val="15000"/>
-                </a:schemeClr>
+              <a:lnRef idx="1">
+                <a:schemeClr val="accent1"/>
               </a:lnRef>
-              <a:fillRef idx="1">
+              <a:fillRef idx="0">
                 <a:schemeClr val="accent1"/>
               </a:fillRef>
               <a:effectRef idx="0">
                 <a:schemeClr val="accent1"/>
               </a:effectRef>
               <a:fontRef idx="minor">
-                <a:schemeClr val="lt1"/>
+                <a:schemeClr val="tx1"/>
               </a:fontRef>
             </p:style>
-            <p:txBody>
-              <a:bodyPr rtlCol="0" anchor="ctr"/>
-              <a:lstStyle/>
-              <a:p>
-                <a:pPr algn="ctr"/>
-                <a:endParaRPr lang="zh-CN" altLang="en-US" dirty="0" err="1">
-                  <a:solidFill>
-                    <a:schemeClr val="tx1"/>
-                  </a:solidFill>
-                </a:endParaRPr>
-              </a:p>
-            </p:txBody>
-          </p:sp>
+          </p:cxnSp>
           <p:sp>
             <p:nvSpPr>
-              <p:cNvPr id="92" name="矩形 91">
+              <p:cNvPr id="83" name="文本框 82">
                 <a:extLst>
                   <a:ext uri="{FF2B5EF4-FFF2-40B4-BE49-F238E27FC236}">
-                    <a16:creationId xmlns:a16="http://schemas.microsoft.com/office/drawing/2014/main" id="{2A544E07-0065-B670-88D7-F141B4256B65}"/>
+                    <a16:creationId xmlns:a16="http://schemas.microsoft.com/office/drawing/2014/main" id="{F28A62B2-D4F4-ED8B-BE2F-123E3DDECDEA}"/>
                   </a:ext>
                 </a:extLst>
               </p:cNvPr>
-              <p:cNvSpPr/>
+              <p:cNvSpPr txBox="1"/>
               <p:nvPr/>
             </p:nvSpPr>
             <p:spPr>
               <a:xfrm>
-                <a:off x="3273162" y="4370725"/>
-                <a:ext cx="256032" cy="421582"/>
+                <a:off x="287838" y="4433059"/>
+                <a:ext cx="1139952" cy="369323"/>
               </a:xfrm>
               <a:prstGeom prst="rect">
                 <a:avLst/>
               </a:prstGeom>
-              <a:solidFill>
-                <a:srgbClr val="FFC6C6"/>
-              </a:solidFill>
+              <a:noFill/>
+            </p:spPr>
+            <p:txBody>
+              <a:bodyPr wrap="square">
+                <a:spAutoFit/>
+              </a:bodyPr>
+              <a:lstStyle/>
+              <a:p>
+                <a:r>
+                  <a:rPr lang="zh-CN" altLang="en-US" b="0" cap="none" spc="0" dirty="0">
+                    <a:ln>
+                      <a:noFill/>
+                    </a:ln>
+                    <a:solidFill>
+                      <a:schemeClr val="tx1"/>
+                    </a:solidFill>
+                    <a:effectLst/>
+                    <a:latin typeface="宋体" panose="02010600030101010101" pitchFamily="2" charset="-122"/>
+                    <a:ea typeface="宋体" panose="02010600030101010101" pitchFamily="2" charset="-122"/>
+                  </a:rPr>
+                  <a:t>数据队列</a:t>
+                </a:r>
+              </a:p>
+            </p:txBody>
+          </p:sp>
+        </p:grpSp>
+        <p:grpSp>
+          <p:nvGrpSpPr>
+            <p:cNvPr id="85" name="组合 84">
+              <a:extLst>
+                <a:ext uri="{FF2B5EF4-FFF2-40B4-BE49-F238E27FC236}">
+                  <a16:creationId xmlns:a16="http://schemas.microsoft.com/office/drawing/2014/main" id="{0D2A7A03-EFFB-BE7B-B607-A0DEA7DAB629}"/>
+                </a:ext>
+              </a:extLst>
+            </p:cNvPr>
+            <p:cNvGrpSpPr/>
+            <p:nvPr/>
+          </p:nvGrpSpPr>
+          <p:grpSpPr>
+            <a:xfrm>
+              <a:off x="256032" y="2808216"/>
+              <a:ext cx="2718816" cy="579120"/>
+              <a:chOff x="256032" y="4328160"/>
+              <a:chExt cx="2718816" cy="579120"/>
+            </a:xfrm>
+          </p:grpSpPr>
+          <p:grpSp>
+            <p:nvGrpSpPr>
+              <p:cNvPr id="86" name="组合 85">
+                <a:extLst>
+                  <a:ext uri="{FF2B5EF4-FFF2-40B4-BE49-F238E27FC236}">
+                    <a16:creationId xmlns:a16="http://schemas.microsoft.com/office/drawing/2014/main" id="{2E62753C-D3CD-32F6-A61A-4E1DBAA87C14}"/>
+                  </a:ext>
+                </a:extLst>
+              </p:cNvPr>
+              <p:cNvGrpSpPr/>
+              <p:nvPr/>
+            </p:nvGrpSpPr>
+            <p:grpSpPr>
+              <a:xfrm>
+                <a:off x="2004550" y="4405257"/>
+                <a:ext cx="901818" cy="421582"/>
+                <a:chOff x="2627376" y="4370725"/>
+                <a:chExt cx="901818" cy="421582"/>
+              </a:xfrm>
+            </p:grpSpPr>
+            <p:sp>
+              <p:nvSpPr>
+                <p:cNvPr id="90" name="矩形 89">
+                  <a:extLst>
+                    <a:ext uri="{FF2B5EF4-FFF2-40B4-BE49-F238E27FC236}">
+                      <a16:creationId xmlns:a16="http://schemas.microsoft.com/office/drawing/2014/main" id="{A9600834-8E62-BC5B-C3B9-31534167BE2D}"/>
+                    </a:ext>
+                  </a:extLst>
+                </p:cNvPr>
+                <p:cNvSpPr/>
+                <p:nvPr/>
+              </p:nvSpPr>
+              <p:spPr>
+                <a:xfrm>
+                  <a:off x="2627376" y="4370725"/>
+                  <a:ext cx="256032" cy="421582"/>
+                </a:xfrm>
+                <a:prstGeom prst="rect">
+                  <a:avLst/>
+                </a:prstGeom>
+                <a:solidFill>
+                  <a:srgbClr val="FFC6C6"/>
+                </a:solidFill>
+                <a:ln w="19050">
+                  <a:solidFill>
+                    <a:schemeClr val="tx1"/>
+                  </a:solidFill>
+                </a:ln>
+              </p:spPr>
+              <p:style>
+                <a:lnRef idx="2">
+                  <a:schemeClr val="accent1">
+                    <a:shade val="15000"/>
+                  </a:schemeClr>
+                </a:lnRef>
+                <a:fillRef idx="1">
+                  <a:schemeClr val="accent1"/>
+                </a:fillRef>
+                <a:effectRef idx="0">
+                  <a:schemeClr val="accent1"/>
+                </a:effectRef>
+                <a:fontRef idx="minor">
+                  <a:schemeClr val="lt1"/>
+                </a:fontRef>
+              </p:style>
+              <p:txBody>
+                <a:bodyPr rtlCol="0" anchor="ctr"/>
+                <a:lstStyle/>
+                <a:p>
+                  <a:pPr algn="ctr"/>
+                  <a:endParaRPr lang="zh-CN" altLang="en-US" dirty="0" err="1">
+                    <a:solidFill>
+                      <a:schemeClr val="tx1"/>
+                    </a:solidFill>
+                  </a:endParaRPr>
+                </a:p>
+              </p:txBody>
+            </p:sp>
+            <p:sp>
+              <p:nvSpPr>
+                <p:cNvPr id="91" name="矩形 90">
+                  <a:extLst>
+                    <a:ext uri="{FF2B5EF4-FFF2-40B4-BE49-F238E27FC236}">
+                      <a16:creationId xmlns:a16="http://schemas.microsoft.com/office/drawing/2014/main" id="{FEE0903C-4565-4D44-FF86-91E07963B9F3}"/>
+                    </a:ext>
+                  </a:extLst>
+                </p:cNvPr>
+                <p:cNvSpPr/>
+                <p:nvPr/>
+              </p:nvSpPr>
+              <p:spPr>
+                <a:xfrm>
+                  <a:off x="2950269" y="4370725"/>
+                  <a:ext cx="256032" cy="421582"/>
+                </a:xfrm>
+                <a:prstGeom prst="rect">
+                  <a:avLst/>
+                </a:prstGeom>
+                <a:solidFill>
+                  <a:srgbClr val="FFC6C6"/>
+                </a:solidFill>
+                <a:ln w="19050">
+                  <a:solidFill>
+                    <a:schemeClr val="tx1"/>
+                  </a:solidFill>
+                </a:ln>
+              </p:spPr>
+              <p:style>
+                <a:lnRef idx="2">
+                  <a:schemeClr val="accent1">
+                    <a:shade val="15000"/>
+                  </a:schemeClr>
+                </a:lnRef>
+                <a:fillRef idx="1">
+                  <a:schemeClr val="accent1"/>
+                </a:fillRef>
+                <a:effectRef idx="0">
+                  <a:schemeClr val="accent1"/>
+                </a:effectRef>
+                <a:fontRef idx="minor">
+                  <a:schemeClr val="lt1"/>
+                </a:fontRef>
+              </p:style>
+              <p:txBody>
+                <a:bodyPr rtlCol="0" anchor="ctr"/>
+                <a:lstStyle/>
+                <a:p>
+                  <a:pPr algn="ctr"/>
+                  <a:endParaRPr lang="zh-CN" altLang="en-US" dirty="0" err="1">
+                    <a:solidFill>
+                      <a:schemeClr val="tx1"/>
+                    </a:solidFill>
+                  </a:endParaRPr>
+                </a:p>
+              </p:txBody>
+            </p:sp>
+            <p:sp>
+              <p:nvSpPr>
+                <p:cNvPr id="92" name="矩形 91">
+                  <a:extLst>
+                    <a:ext uri="{FF2B5EF4-FFF2-40B4-BE49-F238E27FC236}">
+                      <a16:creationId xmlns:a16="http://schemas.microsoft.com/office/drawing/2014/main" id="{2A544E07-0065-B670-88D7-F141B4256B65}"/>
+                    </a:ext>
+                  </a:extLst>
+                </p:cNvPr>
+                <p:cNvSpPr/>
+                <p:nvPr/>
+              </p:nvSpPr>
+              <p:spPr>
+                <a:xfrm>
+                  <a:off x="3273162" y="4370725"/>
+                  <a:ext cx="256032" cy="421582"/>
+                </a:xfrm>
+                <a:prstGeom prst="rect">
+                  <a:avLst/>
+                </a:prstGeom>
+                <a:solidFill>
+                  <a:srgbClr val="FFC6C6"/>
+                </a:solidFill>
+                <a:ln w="19050">
+                  <a:solidFill>
+                    <a:schemeClr val="tx1"/>
+                  </a:solidFill>
+                </a:ln>
+              </p:spPr>
+              <p:style>
+                <a:lnRef idx="2">
+                  <a:schemeClr val="accent1">
+                    <a:shade val="15000"/>
+                  </a:schemeClr>
+                </a:lnRef>
+                <a:fillRef idx="1">
+                  <a:schemeClr val="accent1"/>
+                </a:fillRef>
+                <a:effectRef idx="0">
+                  <a:schemeClr val="accent1"/>
+                </a:effectRef>
+                <a:fontRef idx="minor">
+                  <a:schemeClr val="lt1"/>
+                </a:fontRef>
+              </p:style>
+              <p:txBody>
+                <a:bodyPr rtlCol="0" anchor="ctr"/>
+                <a:lstStyle/>
+                <a:p>
+                  <a:pPr algn="ctr"/>
+                  <a:endParaRPr lang="zh-CN" altLang="en-US" dirty="0" err="1">
+                    <a:solidFill>
+                      <a:schemeClr val="tx1"/>
+                    </a:solidFill>
+                  </a:endParaRPr>
+                </a:p>
+              </p:txBody>
+            </p:sp>
+          </p:grpSp>
+          <p:cxnSp>
+            <p:nvCxnSpPr>
+              <p:cNvPr id="87" name="直接连接符 86">
+                <a:extLst>
+                  <a:ext uri="{FF2B5EF4-FFF2-40B4-BE49-F238E27FC236}">
+                    <a16:creationId xmlns:a16="http://schemas.microsoft.com/office/drawing/2014/main" id="{A4619430-A3D7-D8E7-2FD4-2A10536FE621}"/>
+                  </a:ext>
+                </a:extLst>
+              </p:cNvPr>
+              <p:cNvCxnSpPr/>
+              <p:nvPr/>
+            </p:nvCxnSpPr>
+            <p:spPr>
+              <a:xfrm>
+                <a:off x="256032" y="4328160"/>
+                <a:ext cx="2718816" cy="0"/>
+              </a:xfrm>
+              <a:prstGeom prst="line">
+                <a:avLst/>
+              </a:prstGeom>
               <a:ln w="19050">
                 <a:solidFill>
                   <a:schemeClr val="tx1"/>
                 </a:solidFill>
+                <a:tailEnd type="none"/>
               </a:ln>
             </p:spPr>
             <p:style>
-              <a:lnRef idx="2">
-                <a:schemeClr val="accent1">
-                  <a:shade val="15000"/>
-                </a:schemeClr>
+              <a:lnRef idx="1">
+                <a:schemeClr val="accent1"/>
               </a:lnRef>
-              <a:fillRef idx="1">
+              <a:fillRef idx="0">
                 <a:schemeClr val="accent1"/>
               </a:fillRef>
               <a:effectRef idx="0">
                 <a:schemeClr val="accent1"/>
               </a:effectRef>
               <a:fontRef idx="minor">
-                <a:schemeClr val="lt1"/>
+                <a:schemeClr val="tx1"/>
               </a:fontRef>
             </p:style>
+          </p:cxnSp>
+          <p:cxnSp>
+            <p:nvCxnSpPr>
+              <p:cNvPr id="88" name="直接连接符 87">
+                <a:extLst>
+                  <a:ext uri="{FF2B5EF4-FFF2-40B4-BE49-F238E27FC236}">
+                    <a16:creationId xmlns:a16="http://schemas.microsoft.com/office/drawing/2014/main" id="{A4264FAF-E462-BA65-A4E9-CAB6E9E22911}"/>
+                  </a:ext>
+                </a:extLst>
+              </p:cNvPr>
+              <p:cNvCxnSpPr/>
+              <p:nvPr/>
+            </p:nvCxnSpPr>
+            <p:spPr>
+              <a:xfrm>
+                <a:off x="256032" y="4907280"/>
+                <a:ext cx="2718816" cy="0"/>
+              </a:xfrm>
+              <a:prstGeom prst="line">
+                <a:avLst/>
+              </a:prstGeom>
+              <a:ln w="19050">
+                <a:solidFill>
+                  <a:schemeClr val="tx1"/>
+                </a:solidFill>
+                <a:tailEnd type="none"/>
+              </a:ln>
+            </p:spPr>
+            <p:style>
+              <a:lnRef idx="1">
+                <a:schemeClr val="accent1"/>
+              </a:lnRef>
+              <a:fillRef idx="0">
+                <a:schemeClr val="accent1"/>
+              </a:fillRef>
+              <a:effectRef idx="0">
+                <a:schemeClr val="accent1"/>
+              </a:effectRef>
+              <a:fontRef idx="minor">
+                <a:schemeClr val="tx1"/>
+              </a:fontRef>
+            </p:style>
+          </p:cxnSp>
+          <p:sp>
+            <p:nvSpPr>
+              <p:cNvPr id="89" name="文本框 88">
+                <a:extLst>
+                  <a:ext uri="{FF2B5EF4-FFF2-40B4-BE49-F238E27FC236}">
+                    <a16:creationId xmlns:a16="http://schemas.microsoft.com/office/drawing/2014/main" id="{DAE27B3B-2C18-C340-F9C5-03212E8913D9}"/>
+                  </a:ext>
+                </a:extLst>
+              </p:cNvPr>
+              <p:cNvSpPr txBox="1"/>
+              <p:nvPr/>
+            </p:nvSpPr>
+            <p:spPr>
+              <a:xfrm>
+                <a:off x="287838" y="4433059"/>
+                <a:ext cx="1139952" cy="369323"/>
+              </a:xfrm>
+              <a:prstGeom prst="rect">
+                <a:avLst/>
+              </a:prstGeom>
+              <a:noFill/>
+            </p:spPr>
             <p:txBody>
-              <a:bodyPr rtlCol="0" anchor="ctr"/>
+              <a:bodyPr wrap="square">
+                <a:spAutoFit/>
+              </a:bodyPr>
               <a:lstStyle/>
               <a:p>
-                <a:pPr algn="ctr"/>
-                <a:endParaRPr lang="zh-CN" altLang="en-US" dirty="0" err="1">
-                  <a:solidFill>
-                    <a:schemeClr val="tx1"/>
-                  </a:solidFill>
-                </a:endParaRPr>
+                <a:r>
+                  <a:rPr lang="zh-CN" altLang="en-US" b="0" cap="none" spc="0" dirty="0">
+                    <a:ln>
+                      <a:noFill/>
+                    </a:ln>
+                    <a:solidFill>
+                      <a:schemeClr val="tx1"/>
+                    </a:solidFill>
+                    <a:effectLst/>
+                    <a:latin typeface="宋体" panose="02010600030101010101" pitchFamily="2" charset="-122"/>
+                    <a:ea typeface="宋体" panose="02010600030101010101" pitchFamily="2" charset="-122"/>
+                  </a:rPr>
+                  <a:t>数据队列</a:t>
+                </a:r>
               </a:p>
             </p:txBody>
           </p:sp>
         </p:grpSp>
-        <p:cxnSp>
-          <p:nvCxnSpPr>
-            <p:cNvPr id="87" name="直接连接符 86">
-              <a:extLst>
-                <a:ext uri="{FF2B5EF4-FFF2-40B4-BE49-F238E27FC236}">
-                  <a16:creationId xmlns:a16="http://schemas.microsoft.com/office/drawing/2014/main" id="{A4619430-A3D7-D8E7-2FD4-2A10536FE621}"/>
-                </a:ext>
-              </a:extLst>
-            </p:cNvPr>
-            <p:cNvCxnSpPr/>
-            <p:nvPr/>
-          </p:nvCxnSpPr>
-          <p:spPr>
-            <a:xfrm>
-              <a:off x="256032" y="4328160"/>
-              <a:ext cx="2718816" cy="0"/>
-            </a:xfrm>
-            <a:prstGeom prst="line">
-              <a:avLst/>
-            </a:prstGeom>
-            <a:ln w="19050">
-              <a:solidFill>
-                <a:schemeClr val="tx1"/>
-              </a:solidFill>
-              <a:tailEnd type="none"/>
-            </a:ln>
-          </p:spPr>
-          <p:style>
-            <a:lnRef idx="1">
-              <a:schemeClr val="accent1"/>
-            </a:lnRef>
-            <a:fillRef idx="0">
-              <a:schemeClr val="accent1"/>
-            </a:fillRef>
-            <a:effectRef idx="0">
-              <a:schemeClr val="accent1"/>
-            </a:effectRef>
-            <a:fontRef idx="minor">
-              <a:schemeClr val="tx1"/>
-            </a:fontRef>
-          </p:style>
-        </p:cxnSp>
-        <p:cxnSp>
-          <p:nvCxnSpPr>
-            <p:cNvPr id="88" name="直接连接符 87">
-              <a:extLst>
-                <a:ext uri="{FF2B5EF4-FFF2-40B4-BE49-F238E27FC236}">
-                  <a16:creationId xmlns:a16="http://schemas.microsoft.com/office/drawing/2014/main" id="{A4264FAF-E462-BA65-A4E9-CAB6E9E22911}"/>
-                </a:ext>
-              </a:extLst>
-            </p:cNvPr>
-            <p:cNvCxnSpPr/>
-            <p:nvPr/>
-          </p:nvCxnSpPr>
-          <p:spPr>
-            <a:xfrm>
-              <a:off x="256032" y="4907280"/>
-              <a:ext cx="2718816" cy="0"/>
-            </a:xfrm>
-            <a:prstGeom prst="line">
-              <a:avLst/>
-            </a:prstGeom>
-            <a:ln w="19050">
-              <a:solidFill>
-                <a:schemeClr val="tx1"/>
-              </a:solidFill>
-              <a:tailEnd type="none"/>
-            </a:ln>
-          </p:spPr>
-          <p:style>
-            <a:lnRef idx="1">
-              <a:schemeClr val="accent1"/>
-            </a:lnRef>
-            <a:fillRef idx="0">
-              <a:schemeClr val="accent1"/>
-            </a:fillRef>
-            <a:effectRef idx="0">
-              <a:schemeClr val="accent1"/>
-            </a:effectRef>
-            <a:fontRef idx="minor">
-              <a:schemeClr val="tx1"/>
-            </a:fontRef>
-          </p:style>
-        </p:cxnSp>
-        <p:sp>
-          <p:nvSpPr>
-            <p:cNvPr id="89" name="文本框 88">
-              <a:extLst>
-                <a:ext uri="{FF2B5EF4-FFF2-40B4-BE49-F238E27FC236}">
-                  <a16:creationId xmlns:a16="http://schemas.microsoft.com/office/drawing/2014/main" id="{DAE27B3B-2C18-C340-F9C5-03212E8913D9}"/>
-                </a:ext>
-              </a:extLst>
-            </p:cNvPr>
-            <p:cNvSpPr txBox="1"/>
-            <p:nvPr/>
-          </p:nvSpPr>
-          <p:spPr>
-            <a:xfrm>
-              <a:off x="287838" y="4433059"/>
-              <a:ext cx="1139952" cy="369323"/>
-            </a:xfrm>
-            <a:prstGeom prst="rect">
-              <a:avLst/>
-            </a:prstGeom>
-            <a:noFill/>
-          </p:spPr>
-          <p:txBody>
-            <a:bodyPr wrap="square">
-              <a:spAutoFit/>
-            </a:bodyPr>
-            <a:lstStyle/>
-            <a:p>
-              <a:r>
-                <a:rPr lang="zh-CN" altLang="en-US" b="0" cap="none" spc="0" dirty="0">
-                  <a:ln>
-                    <a:noFill/>
-                  </a:ln>
-                  <a:solidFill>
-                    <a:schemeClr val="tx1"/>
-                  </a:solidFill>
-                  <a:effectLst/>
-                  <a:latin typeface="宋体" panose="02010600030101010101" pitchFamily="2" charset="-122"/>
-                  <a:ea typeface="宋体" panose="02010600030101010101" pitchFamily="2" charset="-122"/>
-                </a:rPr>
-                <a:t>数据队列</a:t>
-              </a:r>
-            </a:p>
-          </p:txBody>
-        </p:sp>
       </p:grpSp>
     </p:spTree>
     <p:extLst>
@@ -33351,1625 +33372,12 @@
           <a:chExt cx="0" cy="0"/>
         </a:xfrm>
       </p:grpSpPr>
-      <p:sp>
-        <p:nvSpPr>
-          <p:cNvPr id="107" name="流程图: 决策 106">
+      <p:grpSp>
+        <p:nvGrpSpPr>
+          <p:cNvPr id="4" name="组合 3">
             <a:extLst>
               <a:ext uri="{FF2B5EF4-FFF2-40B4-BE49-F238E27FC236}">
-                <a16:creationId xmlns:a16="http://schemas.microsoft.com/office/drawing/2014/main" id="{C1EE22BA-8A63-38B0-13F4-288805170A7C}"/>
-              </a:ext>
-            </a:extLst>
-          </p:cNvPr>
-          <p:cNvSpPr/>
-          <p:nvPr/>
-        </p:nvSpPr>
-        <p:spPr>
-          <a:xfrm>
-            <a:off x="3927520" y="450795"/>
-            <a:ext cx="3070609" cy="1088543"/>
-          </a:xfrm>
-          <a:prstGeom prst="flowChartDecision">
-            <a:avLst/>
-          </a:prstGeom>
-          <a:solidFill>
-            <a:srgbClr val="DCEBFF"/>
-          </a:solidFill>
-          <a:ln w="19050">
-            <a:solidFill>
-              <a:schemeClr val="tx1"/>
-            </a:solidFill>
-          </a:ln>
-        </p:spPr>
-        <p:style>
-          <a:lnRef idx="2">
-            <a:schemeClr val="accent1">
-              <a:shade val="15000"/>
-            </a:schemeClr>
-          </a:lnRef>
-          <a:fillRef idx="1">
-            <a:schemeClr val="accent1"/>
-          </a:fillRef>
-          <a:effectRef idx="0">
-            <a:schemeClr val="accent1"/>
-          </a:effectRef>
-          <a:fontRef idx="minor">
-            <a:schemeClr val="lt1"/>
-          </a:fontRef>
-        </p:style>
-        <p:txBody>
-          <a:bodyPr rtlCol="0" anchor="ctr"/>
-          <a:lstStyle/>
-          <a:p>
-            <a:pPr algn="ctr"/>
-            <a:endParaRPr lang="zh-CN" altLang="en-US" dirty="0" err="1">
-              <a:solidFill>
-                <a:schemeClr val="tx1"/>
-              </a:solidFill>
-            </a:endParaRPr>
-          </a:p>
-        </p:txBody>
-      </p:sp>
-      <p:sp>
-        <p:nvSpPr>
-          <p:cNvPr id="138" name="流程图: 决策 137">
-            <a:extLst>
-              <a:ext uri="{FF2B5EF4-FFF2-40B4-BE49-F238E27FC236}">
-                <a16:creationId xmlns:a16="http://schemas.microsoft.com/office/drawing/2014/main" id="{5699C3B1-C901-1ABD-1DF2-84A9FD263E4C}"/>
-              </a:ext>
-            </a:extLst>
-          </p:cNvPr>
-          <p:cNvSpPr/>
-          <p:nvPr/>
-        </p:nvSpPr>
-        <p:spPr>
-          <a:xfrm>
-            <a:off x="4394868" y="2756173"/>
-            <a:ext cx="2135912" cy="787681"/>
-          </a:xfrm>
-          <a:prstGeom prst="flowChartDecision">
-            <a:avLst/>
-          </a:prstGeom>
-          <a:solidFill>
-            <a:srgbClr val="DCEBFF"/>
-          </a:solidFill>
-          <a:ln w="19050">
-            <a:solidFill>
-              <a:schemeClr val="tx1"/>
-            </a:solidFill>
-          </a:ln>
-        </p:spPr>
-        <p:style>
-          <a:lnRef idx="2">
-            <a:schemeClr val="accent1">
-              <a:shade val="15000"/>
-            </a:schemeClr>
-          </a:lnRef>
-          <a:fillRef idx="1">
-            <a:schemeClr val="accent1"/>
-          </a:fillRef>
-          <a:effectRef idx="0">
-            <a:schemeClr val="accent1"/>
-          </a:effectRef>
-          <a:fontRef idx="minor">
-            <a:schemeClr val="lt1"/>
-          </a:fontRef>
-        </p:style>
-        <p:txBody>
-          <a:bodyPr rtlCol="0" anchor="ctr"/>
-          <a:lstStyle/>
-          <a:p>
-            <a:pPr algn="ctr"/>
-            <a:endParaRPr lang="zh-CN" altLang="en-US" dirty="0" err="1">
-              <a:solidFill>
-                <a:schemeClr val="tx1"/>
-              </a:solidFill>
-            </a:endParaRPr>
-          </a:p>
-        </p:txBody>
-      </p:sp>
-      <p:sp>
-        <p:nvSpPr>
-          <p:cNvPr id="145" name="流程图: 决策 144">
-            <a:extLst>
-              <a:ext uri="{FF2B5EF4-FFF2-40B4-BE49-F238E27FC236}">
-                <a16:creationId xmlns:a16="http://schemas.microsoft.com/office/drawing/2014/main" id="{A6E2F20E-4DA2-AF16-219F-F27A8C5A46F5}"/>
-              </a:ext>
-            </a:extLst>
-          </p:cNvPr>
-          <p:cNvSpPr/>
-          <p:nvPr/>
-        </p:nvSpPr>
-        <p:spPr>
-          <a:xfrm>
-            <a:off x="3927520" y="4584355"/>
-            <a:ext cx="3070609" cy="1015390"/>
-          </a:xfrm>
-          <a:prstGeom prst="flowChartDecision">
-            <a:avLst/>
-          </a:prstGeom>
-          <a:solidFill>
-            <a:srgbClr val="DCEBFF"/>
-          </a:solidFill>
-          <a:ln w="19050">
-            <a:solidFill>
-              <a:schemeClr val="tx1"/>
-            </a:solidFill>
-          </a:ln>
-        </p:spPr>
-        <p:style>
-          <a:lnRef idx="2">
-            <a:schemeClr val="accent1">
-              <a:shade val="15000"/>
-            </a:schemeClr>
-          </a:lnRef>
-          <a:fillRef idx="1">
-            <a:schemeClr val="accent1"/>
-          </a:fillRef>
-          <a:effectRef idx="0">
-            <a:schemeClr val="accent1"/>
-          </a:effectRef>
-          <a:fontRef idx="minor">
-            <a:schemeClr val="lt1"/>
-          </a:fontRef>
-        </p:style>
-        <p:txBody>
-          <a:bodyPr rtlCol="0" anchor="ctr"/>
-          <a:lstStyle/>
-          <a:p>
-            <a:pPr algn="ctr"/>
-            <a:endParaRPr lang="zh-CN" altLang="en-US" dirty="0" err="1">
-              <a:solidFill>
-                <a:schemeClr val="tx1"/>
-              </a:solidFill>
-            </a:endParaRPr>
-          </a:p>
-        </p:txBody>
-      </p:sp>
-      <p:sp>
-        <p:nvSpPr>
-          <p:cNvPr id="2" name="矩形 1">
-            <a:extLst>
-              <a:ext uri="{FF2B5EF4-FFF2-40B4-BE49-F238E27FC236}">
-                <a16:creationId xmlns:a16="http://schemas.microsoft.com/office/drawing/2014/main" id="{11339D1B-3C73-529F-5BEB-6C2B1EF0DAA5}"/>
-              </a:ext>
-            </a:extLst>
-          </p:cNvPr>
-          <p:cNvSpPr/>
-          <p:nvPr/>
-        </p:nvSpPr>
-        <p:spPr>
-          <a:xfrm>
-            <a:off x="527394" y="450753"/>
-            <a:ext cx="3006899" cy="1088542"/>
-          </a:xfrm>
-          <a:prstGeom prst="rect">
-            <a:avLst/>
-          </a:prstGeom>
-          <a:solidFill>
-            <a:srgbClr val="EDEDED"/>
-          </a:solidFill>
-          <a:ln w="19050">
-            <a:solidFill>
-              <a:schemeClr val="tx1"/>
-            </a:solidFill>
-          </a:ln>
-        </p:spPr>
-        <p:style>
-          <a:lnRef idx="2">
-            <a:schemeClr val="accent1">
-              <a:shade val="15000"/>
-            </a:schemeClr>
-          </a:lnRef>
-          <a:fillRef idx="1">
-            <a:schemeClr val="accent1"/>
-          </a:fillRef>
-          <a:effectRef idx="0">
-            <a:schemeClr val="accent1"/>
-          </a:effectRef>
-          <a:fontRef idx="minor">
-            <a:schemeClr val="lt1"/>
-          </a:fontRef>
-        </p:style>
-        <p:txBody>
-          <a:bodyPr rtlCol="0" anchor="ctr"/>
-          <a:lstStyle/>
-          <a:p>
-            <a:pPr algn="ctr"/>
-            <a:endParaRPr lang="zh-CN" altLang="en-US" dirty="0" err="1">
-              <a:solidFill>
-                <a:schemeClr val="tx1"/>
-              </a:solidFill>
-              <a:latin typeface="Times New Roman" panose="02020603050405020304" pitchFamily="18" charset="0"/>
-              <a:ea typeface="宋体" panose="02010600030101010101" pitchFamily="2" charset="-122"/>
-            </a:endParaRPr>
-          </a:p>
-        </p:txBody>
-      </p:sp>
-      <mc:AlternateContent xmlns:mc="http://schemas.openxmlformats.org/markup-compatibility/2006" xmlns:a14="http://schemas.microsoft.com/office/drawing/2010/main">
-        <mc:Choice Requires="a14">
-          <p:sp>
-            <p:nvSpPr>
-              <p:cNvPr id="3" name="文本框 2">
-                <a:extLst>
-                  <a:ext uri="{FF2B5EF4-FFF2-40B4-BE49-F238E27FC236}">
-                    <a16:creationId xmlns:a16="http://schemas.microsoft.com/office/drawing/2014/main" id="{3C28E2EE-28FF-44B4-7C4A-09596371771C}"/>
-                  </a:ext>
-                </a:extLst>
-              </p:cNvPr>
-              <p:cNvSpPr txBox="1"/>
-              <p:nvPr/>
-            </p:nvSpPr>
-            <p:spPr>
-              <a:xfrm>
-                <a:off x="322949" y="701747"/>
-                <a:ext cx="3320230" cy="646331"/>
-              </a:xfrm>
-              <a:prstGeom prst="rect">
-                <a:avLst/>
-              </a:prstGeom>
-              <a:noFill/>
-            </p:spPr>
-            <p:txBody>
-              <a:bodyPr wrap="square" rtlCol="0" anchor="ctr" anchorCtr="1">
-                <a:spAutoFit/>
-              </a:bodyPr>
-              <a:lstStyle/>
-              <a:p>
-                <a:pPr algn="ctr"/>
-                <a:r>
-                  <a:rPr lang="zh-CN" altLang="en-US" dirty="0">
-                    <a:latin typeface="Times New Roman" panose="02020603050405020304" pitchFamily="18" charset="0"/>
-                    <a:ea typeface="宋体" panose="02010600030101010101" pitchFamily="2" charset="-122"/>
-                  </a:rPr>
-                  <a:t>初始化竞争窗口</a:t>
-                </a:r>
-                <a14:m>
-                  <m:oMath xmlns:m="http://schemas.openxmlformats.org/officeDocument/2006/math">
-                    <m:r>
-                      <a:rPr lang="en-US" altLang="zh-CN" i="1" dirty="0" smtClean="0">
-                        <a:latin typeface="Cambria Math" panose="02040503050406030204" pitchFamily="18" charset="0"/>
-                        <a:ea typeface="宋体" panose="02010600030101010101" pitchFamily="2" charset="-122"/>
-                      </a:rPr>
-                      <m:t>𝐶𝑊</m:t>
-                    </m:r>
-                    <m:r>
-                      <a:rPr lang="en-US" altLang="zh-CN" b="0" i="1" dirty="0" smtClean="0">
-                        <a:latin typeface="Cambria Math" panose="02040503050406030204" pitchFamily="18" charset="0"/>
-                        <a:ea typeface="宋体" panose="02010600030101010101" pitchFamily="2" charset="-122"/>
-                      </a:rPr>
-                      <m:t>=</m:t>
-                    </m:r>
-                    <m:r>
-                      <a:rPr lang="en-US" altLang="zh-CN" b="0" i="1" dirty="0" smtClean="0">
-                        <a:latin typeface="Cambria Math" panose="02040503050406030204" pitchFamily="18" charset="0"/>
-                        <a:ea typeface="宋体" panose="02010600030101010101" pitchFamily="2" charset="-122"/>
-                      </a:rPr>
-                      <m:t>𝐶</m:t>
-                    </m:r>
-                    <m:sSub>
-                      <m:sSubPr>
-                        <m:ctrlPr>
-                          <a:rPr lang="en-US" altLang="zh-CN" b="0" i="1" dirty="0" smtClean="0">
-                            <a:latin typeface="Cambria Math" panose="02040503050406030204" pitchFamily="18" charset="0"/>
-                            <a:ea typeface="宋体" panose="02010600030101010101" pitchFamily="2" charset="-122"/>
-                          </a:rPr>
-                        </m:ctrlPr>
-                      </m:sSubPr>
-                      <m:e>
-                        <m:r>
-                          <a:rPr lang="en-US" altLang="zh-CN" b="0" i="1" dirty="0" smtClean="0">
-                            <a:latin typeface="Cambria Math" panose="02040503050406030204" pitchFamily="18" charset="0"/>
-                            <a:ea typeface="宋体" panose="02010600030101010101" pitchFamily="2" charset="-122"/>
-                          </a:rPr>
-                          <m:t>𝑊</m:t>
-                        </m:r>
-                      </m:e>
-                      <m:sub>
-                        <m:r>
-                          <a:rPr lang="en-US" altLang="zh-CN" b="0" i="1" dirty="0" smtClean="0">
-                            <a:latin typeface="Cambria Math" panose="02040503050406030204" pitchFamily="18" charset="0"/>
-                            <a:ea typeface="宋体" panose="02010600030101010101" pitchFamily="2" charset="-122"/>
-                          </a:rPr>
-                          <m:t>𝑚𝑖𝑛</m:t>
-                        </m:r>
-                      </m:sub>
-                    </m:sSub>
-                  </m:oMath>
-                </a14:m>
-                <a:endParaRPr lang="en-US" altLang="zh-CN" dirty="0">
-                  <a:latin typeface="Times New Roman" panose="02020603050405020304" pitchFamily="18" charset="0"/>
-                  <a:ea typeface="宋体" panose="02010600030101010101" pitchFamily="2" charset="-122"/>
-                </a:endParaRPr>
-              </a:p>
-              <a:p>
-                <a:pPr algn="ctr"/>
-                <a:r>
-                  <a:rPr lang="zh-CN" altLang="en-US" dirty="0">
-                    <a:latin typeface="Times New Roman" panose="02020603050405020304" pitchFamily="18" charset="0"/>
-                    <a:ea typeface="宋体" panose="02010600030101010101" pitchFamily="2" charset="-122"/>
-                  </a:rPr>
-                  <a:t>生成随机数 </a:t>
-                </a:r>
-                <a14:m>
-                  <m:oMath xmlns:m="http://schemas.openxmlformats.org/officeDocument/2006/math">
-                    <m:r>
-                      <a:rPr lang="en-US" altLang="zh-CN" i="1" dirty="0">
-                        <a:latin typeface="Cambria Math" panose="02040503050406030204" pitchFamily="18" charset="0"/>
-                        <a:ea typeface="宋体" panose="02010600030101010101" pitchFamily="2" charset="-122"/>
-                      </a:rPr>
-                      <m:t>𝑁</m:t>
-                    </m:r>
-                    <m:r>
-                      <a:rPr lang="en-US" altLang="zh-CN" i="1" dirty="0">
-                        <a:latin typeface="Cambria Math" panose="02040503050406030204" pitchFamily="18" charset="0"/>
-                        <a:ea typeface="宋体" panose="02010600030101010101" pitchFamily="2" charset="-122"/>
-                      </a:rPr>
-                      <m:t>∈ [0, </m:t>
-                    </m:r>
-                    <m:r>
-                      <a:rPr lang="en-US" altLang="zh-CN" i="1" dirty="0">
-                        <a:latin typeface="Cambria Math" panose="02040503050406030204" pitchFamily="18" charset="0"/>
-                        <a:ea typeface="宋体" panose="02010600030101010101" pitchFamily="2" charset="-122"/>
-                      </a:rPr>
-                      <m:t>𝐶𝑊</m:t>
-                    </m:r>
-                    <m:r>
-                      <a:rPr lang="en-US" altLang="zh-CN" i="1" dirty="0">
-                        <a:latin typeface="Cambria Math" panose="02040503050406030204" pitchFamily="18" charset="0"/>
-                        <a:ea typeface="宋体" panose="02010600030101010101" pitchFamily="2" charset="-122"/>
-                      </a:rPr>
-                      <m:t>]</m:t>
-                    </m:r>
-                  </m:oMath>
-                </a14:m>
-                <a:endParaRPr lang="en-US" altLang="zh-CN" dirty="0">
-                  <a:latin typeface="Times New Roman" panose="02020603050405020304" pitchFamily="18" charset="0"/>
-                  <a:ea typeface="宋体" panose="02010600030101010101" pitchFamily="2" charset="-122"/>
-                </a:endParaRPr>
-              </a:p>
-            </p:txBody>
-          </p:sp>
-        </mc:Choice>
-        <mc:Fallback xmlns="">
-          <p:sp>
-            <p:nvSpPr>
-              <p:cNvPr id="3" name="文本框 2">
-                <a:extLst>
-                  <a:ext uri="{FF2B5EF4-FFF2-40B4-BE49-F238E27FC236}">
-                    <a16:creationId xmlns:a16="http://schemas.microsoft.com/office/drawing/2014/main" id="{3C28E2EE-28FF-44B4-7C4A-09596371771C}"/>
-                  </a:ext>
-                </a:extLst>
-              </p:cNvPr>
-              <p:cNvSpPr txBox="1">
-                <a:spLocks noRot="1" noChangeAspect="1" noMove="1" noResize="1" noEditPoints="1" noAdjustHandles="1" noChangeArrowheads="1" noChangeShapeType="1" noTextEdit="1"/>
-              </p:cNvSpPr>
-              <p:nvPr/>
-            </p:nvSpPr>
-            <p:spPr>
-              <a:xfrm>
-                <a:off x="322949" y="701747"/>
-                <a:ext cx="3320230" cy="646331"/>
-              </a:xfrm>
-              <a:prstGeom prst="rect">
-                <a:avLst/>
-              </a:prstGeom>
-              <a:blipFill>
-                <a:blip r:embed="rId2"/>
-                <a:stretch>
-                  <a:fillRect t="-6604" b="-13208"/>
-                </a:stretch>
-              </a:blipFill>
-            </p:spPr>
-            <p:txBody>
-              <a:bodyPr/>
-              <a:lstStyle/>
-              <a:p>
-                <a:r>
-                  <a:rPr lang="zh-CN" altLang="en-US">
-                    <a:noFill/>
-                  </a:rPr>
-                  <a:t> </a:t>
-                </a:r>
-              </a:p>
-            </p:txBody>
-          </p:sp>
-        </mc:Fallback>
-      </mc:AlternateContent>
-      <p:cxnSp>
-        <p:nvCxnSpPr>
-          <p:cNvPr id="17" name="直接箭头连接符 16">
-            <a:extLst>
-              <a:ext uri="{FF2B5EF4-FFF2-40B4-BE49-F238E27FC236}">
-                <a16:creationId xmlns:a16="http://schemas.microsoft.com/office/drawing/2014/main" id="{F4BC76EE-D638-3D3C-9B19-EE30CE24575E}"/>
-              </a:ext>
-            </a:extLst>
-          </p:cNvPr>
-          <p:cNvCxnSpPr>
-            <a:cxnSpLocks/>
-            <a:stCxn id="2" idx="3"/>
-            <a:endCxn id="107" idx="1"/>
-          </p:cNvCxnSpPr>
-          <p:nvPr/>
-        </p:nvCxnSpPr>
-        <p:spPr>
-          <a:xfrm>
-            <a:off x="3534293" y="995026"/>
-            <a:ext cx="393227" cy="41"/>
-          </a:xfrm>
-          <a:prstGeom prst="straightConnector1">
-            <a:avLst/>
-          </a:prstGeom>
-          <a:ln w="19050">
-            <a:solidFill>
-              <a:schemeClr val="tx1"/>
-            </a:solidFill>
-            <a:tailEnd type="triangle"/>
-          </a:ln>
-        </p:spPr>
-        <p:style>
-          <a:lnRef idx="1">
-            <a:schemeClr val="accent1"/>
-          </a:lnRef>
-          <a:fillRef idx="0">
-            <a:schemeClr val="accent1"/>
-          </a:fillRef>
-          <a:effectRef idx="0">
-            <a:schemeClr val="accent1"/>
-          </a:effectRef>
-          <a:fontRef idx="minor">
-            <a:schemeClr val="tx1"/>
-          </a:fontRef>
-        </p:style>
-      </p:cxnSp>
-      <p:sp>
-        <p:nvSpPr>
-          <p:cNvPr id="9" name="矩形 8">
-            <a:extLst>
-              <a:ext uri="{FF2B5EF4-FFF2-40B4-BE49-F238E27FC236}">
-                <a16:creationId xmlns:a16="http://schemas.microsoft.com/office/drawing/2014/main" id="{50DF8695-7FF0-E790-0616-C1876B489F98}"/>
-              </a:ext>
-            </a:extLst>
-          </p:cNvPr>
-          <p:cNvSpPr/>
-          <p:nvPr/>
-        </p:nvSpPr>
-        <p:spPr>
-          <a:xfrm>
-            <a:off x="8365172" y="646310"/>
-            <a:ext cx="2461546" cy="690539"/>
-          </a:xfrm>
-          <a:prstGeom prst="rect">
-            <a:avLst/>
-          </a:prstGeom>
-          <a:solidFill>
-            <a:srgbClr val="ECFDF5"/>
-          </a:solidFill>
-          <a:ln w="19050">
-            <a:solidFill>
-              <a:schemeClr val="tx1"/>
-            </a:solidFill>
-          </a:ln>
-        </p:spPr>
-        <p:style>
-          <a:lnRef idx="2">
-            <a:schemeClr val="accent1">
-              <a:shade val="15000"/>
-            </a:schemeClr>
-          </a:lnRef>
-          <a:fillRef idx="1">
-            <a:schemeClr val="accent1"/>
-          </a:fillRef>
-          <a:effectRef idx="0">
-            <a:schemeClr val="accent1"/>
-          </a:effectRef>
-          <a:fontRef idx="minor">
-            <a:schemeClr val="lt1"/>
-          </a:fontRef>
-        </p:style>
-        <p:txBody>
-          <a:bodyPr rtlCol="0" anchor="ctr"/>
-          <a:lstStyle/>
-          <a:p>
-            <a:pPr algn="ctr"/>
-            <a:endParaRPr lang="zh-CN" altLang="en-US" dirty="0" err="1">
-              <a:solidFill>
-                <a:schemeClr val="tx1"/>
-              </a:solidFill>
-              <a:latin typeface="Times New Roman" panose="02020603050405020304" pitchFamily="18" charset="0"/>
-              <a:ea typeface="宋体" panose="02010600030101010101" pitchFamily="2" charset="-122"/>
-            </a:endParaRPr>
-          </a:p>
-        </p:txBody>
-      </p:sp>
-      <mc:AlternateContent xmlns:mc="http://schemas.openxmlformats.org/markup-compatibility/2006" xmlns:a14="http://schemas.microsoft.com/office/drawing/2010/main">
-        <mc:Choice Requires="a14">
-          <p:sp>
-            <p:nvSpPr>
-              <p:cNvPr id="10" name="文本框 9">
-                <a:extLst>
-                  <a:ext uri="{FF2B5EF4-FFF2-40B4-BE49-F238E27FC236}">
-                    <a16:creationId xmlns:a16="http://schemas.microsoft.com/office/drawing/2014/main" id="{6D9731EB-1D08-F1B0-5EF7-7E3983DACE05}"/>
-                  </a:ext>
-                </a:extLst>
-              </p:cNvPr>
-              <p:cNvSpPr txBox="1"/>
-              <p:nvPr/>
-            </p:nvSpPr>
-            <p:spPr>
-              <a:xfrm>
-                <a:off x="8404334" y="806912"/>
-                <a:ext cx="2391652" cy="369332"/>
-              </a:xfrm>
-              <a:prstGeom prst="rect">
-                <a:avLst/>
-              </a:prstGeom>
-              <a:noFill/>
-            </p:spPr>
-            <p:txBody>
-              <a:bodyPr wrap="square" rtlCol="0" anchor="ctr" anchorCtr="1">
-                <a:spAutoFit/>
-              </a:bodyPr>
-              <a:lstStyle/>
-              <a:p>
-                <a:pPr algn="ctr"/>
-                <a:r>
-                  <a:rPr lang="zh-CN" altLang="en-US" dirty="0">
-                    <a:ea typeface="宋体" panose="02010600030101010101" pitchFamily="2" charset="-122"/>
-                  </a:rPr>
-                  <a:t>随机数</a:t>
-                </a:r>
-                <a14:m>
-                  <m:oMath xmlns:m="http://schemas.openxmlformats.org/officeDocument/2006/math">
-                    <m:r>
-                      <a:rPr lang="en-US" altLang="zh-CN" i="1" dirty="0" smtClean="0">
-                        <a:latin typeface="Cambria Math" panose="02040503050406030204" pitchFamily="18" charset="0"/>
-                        <a:ea typeface="宋体" panose="02010600030101010101" pitchFamily="2" charset="-122"/>
-                      </a:rPr>
-                      <m:t>𝑁</m:t>
-                    </m:r>
-                  </m:oMath>
-                </a14:m>
-                <a:r>
-                  <a:rPr lang="zh-CN" altLang="en-US" dirty="0">
-                    <a:latin typeface="Times New Roman" panose="02020603050405020304" pitchFamily="18" charset="0"/>
-                    <a:ea typeface="宋体" panose="02010600030101010101" pitchFamily="2" charset="-122"/>
-                  </a:rPr>
-                  <a:t>保持</a:t>
-                </a:r>
-              </a:p>
-            </p:txBody>
-          </p:sp>
-        </mc:Choice>
-        <mc:Fallback xmlns="">
-          <p:sp>
-            <p:nvSpPr>
-              <p:cNvPr id="10" name="文本框 9">
-                <a:extLst>
-                  <a:ext uri="{FF2B5EF4-FFF2-40B4-BE49-F238E27FC236}">
-                    <a16:creationId xmlns:a16="http://schemas.microsoft.com/office/drawing/2014/main" id="{6D9731EB-1D08-F1B0-5EF7-7E3983DACE05}"/>
-                  </a:ext>
-                </a:extLst>
-              </p:cNvPr>
-              <p:cNvSpPr txBox="1">
-                <a:spLocks noRot="1" noChangeAspect="1" noMove="1" noResize="1" noEditPoints="1" noAdjustHandles="1" noChangeArrowheads="1" noChangeShapeType="1" noTextEdit="1"/>
-              </p:cNvSpPr>
-              <p:nvPr/>
-            </p:nvSpPr>
-            <p:spPr>
-              <a:xfrm>
-                <a:off x="8404334" y="806912"/>
-                <a:ext cx="2391652" cy="369332"/>
-              </a:xfrm>
-              <a:prstGeom prst="rect">
-                <a:avLst/>
-              </a:prstGeom>
-              <a:blipFill>
-                <a:blip r:embed="rId3"/>
-                <a:stretch>
-                  <a:fillRect t="-11475" b="-22951"/>
-                </a:stretch>
-              </a:blipFill>
-            </p:spPr>
-            <p:txBody>
-              <a:bodyPr/>
-              <a:lstStyle/>
-              <a:p>
-                <a:r>
-                  <a:rPr lang="zh-CN" altLang="en-US">
-                    <a:noFill/>
-                  </a:rPr>
-                  <a:t> </a:t>
-                </a:r>
-              </a:p>
-            </p:txBody>
-          </p:sp>
-        </mc:Fallback>
-      </mc:AlternateContent>
-      <p:cxnSp>
-        <p:nvCxnSpPr>
-          <p:cNvPr id="14" name="直接箭头连接符 13">
-            <a:extLst>
-              <a:ext uri="{FF2B5EF4-FFF2-40B4-BE49-F238E27FC236}">
-                <a16:creationId xmlns:a16="http://schemas.microsoft.com/office/drawing/2014/main" id="{5F139A33-A66D-9793-8D9A-115F2F295C70}"/>
-              </a:ext>
-            </a:extLst>
-          </p:cNvPr>
-          <p:cNvCxnSpPr>
-            <a:cxnSpLocks/>
-            <a:stCxn id="107" idx="2"/>
-            <a:endCxn id="148" idx="0"/>
-          </p:cNvCxnSpPr>
-          <p:nvPr/>
-        </p:nvCxnSpPr>
-        <p:spPr>
-          <a:xfrm flipH="1">
-            <a:off x="5462824" y="1539338"/>
-            <a:ext cx="1" cy="272247"/>
-          </a:xfrm>
-          <a:prstGeom prst="straightConnector1">
-            <a:avLst/>
-          </a:prstGeom>
-          <a:ln w="19050">
-            <a:solidFill>
-              <a:schemeClr val="tx1"/>
-            </a:solidFill>
-            <a:tailEnd type="triangle"/>
-          </a:ln>
-        </p:spPr>
-        <p:style>
-          <a:lnRef idx="1">
-            <a:schemeClr val="accent1"/>
-          </a:lnRef>
-          <a:fillRef idx="0">
-            <a:schemeClr val="accent1"/>
-          </a:fillRef>
-          <a:effectRef idx="0">
-            <a:schemeClr val="accent1"/>
-          </a:effectRef>
-          <a:fontRef idx="minor">
-            <a:schemeClr val="tx1"/>
-          </a:fontRef>
-        </p:style>
-      </p:cxnSp>
-      <p:cxnSp>
-        <p:nvCxnSpPr>
-          <p:cNvPr id="30" name="直接箭头连接符 29">
-            <a:extLst>
-              <a:ext uri="{FF2B5EF4-FFF2-40B4-BE49-F238E27FC236}">
-                <a16:creationId xmlns:a16="http://schemas.microsoft.com/office/drawing/2014/main" id="{668789DC-78DB-E6B5-339A-50559D807B14}"/>
-              </a:ext>
-            </a:extLst>
-          </p:cNvPr>
-          <p:cNvCxnSpPr>
-            <a:cxnSpLocks/>
-            <a:stCxn id="107" idx="3"/>
-            <a:endCxn id="9" idx="1"/>
-          </p:cNvCxnSpPr>
-          <p:nvPr/>
-        </p:nvCxnSpPr>
-        <p:spPr>
-          <a:xfrm flipV="1">
-            <a:off x="6998129" y="991580"/>
-            <a:ext cx="1367043" cy="3487"/>
-          </a:xfrm>
-          <a:prstGeom prst="straightConnector1">
-            <a:avLst/>
-          </a:prstGeom>
-          <a:ln w="22225">
-            <a:solidFill>
-              <a:schemeClr val="tx1"/>
-            </a:solidFill>
-            <a:tailEnd type="triangle"/>
-          </a:ln>
-        </p:spPr>
-        <p:style>
-          <a:lnRef idx="1">
-            <a:schemeClr val="accent1"/>
-          </a:lnRef>
-          <a:fillRef idx="0">
-            <a:schemeClr val="accent1"/>
-          </a:fillRef>
-          <a:effectRef idx="0">
-            <a:schemeClr val="accent1"/>
-          </a:effectRef>
-          <a:fontRef idx="minor">
-            <a:schemeClr val="tx1"/>
-          </a:fontRef>
-        </p:style>
-      </p:cxnSp>
-      <p:sp>
-        <p:nvSpPr>
-          <p:cNvPr id="59" name="矩形 58">
-            <a:extLst>
-              <a:ext uri="{FF2B5EF4-FFF2-40B4-BE49-F238E27FC236}">
-                <a16:creationId xmlns:a16="http://schemas.microsoft.com/office/drawing/2014/main" id="{76372893-1E17-1D23-4F3D-5C7750259369}"/>
-              </a:ext>
-            </a:extLst>
-          </p:cNvPr>
-          <p:cNvSpPr/>
-          <p:nvPr/>
-        </p:nvSpPr>
-        <p:spPr>
-          <a:xfrm>
-            <a:off x="4044489" y="3904252"/>
-            <a:ext cx="2840890" cy="492439"/>
-          </a:xfrm>
-          <a:prstGeom prst="rect">
-            <a:avLst/>
-          </a:prstGeom>
-          <a:noFill/>
-          <a:ln w="19050">
-            <a:solidFill>
-              <a:schemeClr val="tx1"/>
-            </a:solidFill>
-          </a:ln>
-        </p:spPr>
-        <p:style>
-          <a:lnRef idx="2">
-            <a:schemeClr val="accent1">
-              <a:shade val="15000"/>
-            </a:schemeClr>
-          </a:lnRef>
-          <a:fillRef idx="1">
-            <a:schemeClr val="accent1"/>
-          </a:fillRef>
-          <a:effectRef idx="0">
-            <a:schemeClr val="accent1"/>
-          </a:effectRef>
-          <a:fontRef idx="minor">
-            <a:schemeClr val="lt1"/>
-          </a:fontRef>
-        </p:style>
-        <p:txBody>
-          <a:bodyPr rtlCol="0" anchor="ctr"/>
-          <a:lstStyle/>
-          <a:p>
-            <a:pPr algn="ctr"/>
-            <a:endParaRPr lang="zh-CN" altLang="en-US" dirty="0" err="1">
-              <a:solidFill>
-                <a:schemeClr val="tx1"/>
-              </a:solidFill>
-              <a:latin typeface="Times New Roman" panose="02020603050405020304" pitchFamily="18" charset="0"/>
-              <a:ea typeface="宋体" panose="02010600030101010101" pitchFamily="2" charset="-122"/>
-            </a:endParaRPr>
-          </a:p>
-        </p:txBody>
-      </p:sp>
-      <p:sp>
-        <p:nvSpPr>
-          <p:cNvPr id="60" name="文本框 59">
-            <a:extLst>
-              <a:ext uri="{FF2B5EF4-FFF2-40B4-BE49-F238E27FC236}">
-                <a16:creationId xmlns:a16="http://schemas.microsoft.com/office/drawing/2014/main" id="{C7730E32-5870-741F-A9F2-1EA01F4FF09A}"/>
-              </a:ext>
-            </a:extLst>
-          </p:cNvPr>
-          <p:cNvSpPr txBox="1"/>
-          <p:nvPr/>
-        </p:nvSpPr>
-        <p:spPr>
-          <a:xfrm>
-            <a:off x="4040271" y="3986609"/>
-            <a:ext cx="2845105" cy="327722"/>
-          </a:xfrm>
-          <a:prstGeom prst="rect">
-            <a:avLst/>
-          </a:prstGeom>
-          <a:noFill/>
-        </p:spPr>
-        <p:txBody>
-          <a:bodyPr wrap="square" rtlCol="0" anchor="ctr" anchorCtr="1">
-            <a:spAutoFit/>
-          </a:bodyPr>
-          <a:lstStyle/>
-          <a:p>
-            <a:pPr algn="ctr"/>
-            <a:r>
-              <a:rPr lang="zh-CN" altLang="en-US" dirty="0">
-                <a:latin typeface="Times New Roman" panose="02020603050405020304" pitchFamily="18" charset="0"/>
-                <a:ea typeface="宋体" panose="02010600030101010101" pitchFamily="2" charset="-122"/>
-              </a:rPr>
-              <a:t>数据传输</a:t>
-            </a:r>
-            <a:endParaRPr lang="en-US" altLang="zh-CN" dirty="0">
-              <a:latin typeface="Times New Roman" panose="02020603050405020304" pitchFamily="18" charset="0"/>
-              <a:ea typeface="宋体" panose="02010600030101010101" pitchFamily="2" charset="-122"/>
-            </a:endParaRPr>
-          </a:p>
-        </p:txBody>
-      </p:sp>
-      <p:cxnSp>
-        <p:nvCxnSpPr>
-          <p:cNvPr id="62" name="直接箭头连接符 61">
-            <a:extLst>
-              <a:ext uri="{FF2B5EF4-FFF2-40B4-BE49-F238E27FC236}">
-                <a16:creationId xmlns:a16="http://schemas.microsoft.com/office/drawing/2014/main" id="{C2EE79CC-FD9C-0628-8A98-17D90987ACFD}"/>
-              </a:ext>
-            </a:extLst>
-          </p:cNvPr>
-          <p:cNvCxnSpPr>
-            <a:cxnSpLocks/>
-            <a:stCxn id="138" idx="2"/>
-            <a:endCxn id="59" idx="0"/>
-          </p:cNvCxnSpPr>
-          <p:nvPr/>
-        </p:nvCxnSpPr>
-        <p:spPr>
-          <a:xfrm>
-            <a:off x="5462824" y="3543854"/>
-            <a:ext cx="2110" cy="360398"/>
-          </a:xfrm>
-          <a:prstGeom prst="straightConnector1">
-            <a:avLst/>
-          </a:prstGeom>
-          <a:ln w="19050">
-            <a:solidFill>
-              <a:schemeClr val="tx1"/>
-            </a:solidFill>
-            <a:tailEnd type="triangle"/>
-          </a:ln>
-        </p:spPr>
-        <p:style>
-          <a:lnRef idx="1">
-            <a:schemeClr val="accent1"/>
-          </a:lnRef>
-          <a:fillRef idx="0">
-            <a:schemeClr val="accent1"/>
-          </a:fillRef>
-          <a:effectRef idx="0">
-            <a:schemeClr val="accent1"/>
-          </a:effectRef>
-          <a:fontRef idx="minor">
-            <a:schemeClr val="tx1"/>
-          </a:fontRef>
-        </p:style>
-      </p:cxnSp>
-      <p:sp>
-        <p:nvSpPr>
-          <p:cNvPr id="82" name="矩形 81">
-            <a:extLst>
-              <a:ext uri="{FF2B5EF4-FFF2-40B4-BE49-F238E27FC236}">
-                <a16:creationId xmlns:a16="http://schemas.microsoft.com/office/drawing/2014/main" id="{CF2727FE-FA1F-D0D3-CC3D-946F6E0803A2}"/>
-              </a:ext>
-            </a:extLst>
-          </p:cNvPr>
-          <p:cNvSpPr/>
-          <p:nvPr/>
-        </p:nvSpPr>
-        <p:spPr>
-          <a:xfrm>
-            <a:off x="7757271" y="4511126"/>
-            <a:ext cx="3685779" cy="1314365"/>
-          </a:xfrm>
-          <a:prstGeom prst="rect">
-            <a:avLst/>
-          </a:prstGeom>
-          <a:solidFill>
-            <a:srgbClr val="ECFDF5"/>
-          </a:solidFill>
-          <a:ln w="19050">
-            <a:solidFill>
-              <a:schemeClr val="tx1"/>
-            </a:solidFill>
-          </a:ln>
-        </p:spPr>
-        <p:style>
-          <a:lnRef idx="2">
-            <a:schemeClr val="accent1">
-              <a:shade val="15000"/>
-            </a:schemeClr>
-          </a:lnRef>
-          <a:fillRef idx="1">
-            <a:schemeClr val="accent1"/>
-          </a:fillRef>
-          <a:effectRef idx="0">
-            <a:schemeClr val="accent1"/>
-          </a:effectRef>
-          <a:fontRef idx="minor">
-            <a:schemeClr val="lt1"/>
-          </a:fontRef>
-        </p:style>
-        <p:txBody>
-          <a:bodyPr rtlCol="0" anchor="ctr"/>
-          <a:lstStyle/>
-          <a:p>
-            <a:pPr algn="ctr"/>
-            <a:endParaRPr lang="zh-CN" altLang="en-US" dirty="0" err="1">
-              <a:solidFill>
-                <a:schemeClr val="tx1"/>
-              </a:solidFill>
-              <a:latin typeface="Times New Roman" panose="02020603050405020304" pitchFamily="18" charset="0"/>
-              <a:ea typeface="宋体" panose="02010600030101010101" pitchFamily="2" charset="-122"/>
-            </a:endParaRPr>
-          </a:p>
-        </p:txBody>
-      </p:sp>
-      <mc:AlternateContent xmlns:mc="http://schemas.openxmlformats.org/markup-compatibility/2006" xmlns:a14="http://schemas.microsoft.com/office/drawing/2010/main">
-        <mc:Choice Requires="a14">
-          <p:sp>
-            <p:nvSpPr>
-              <p:cNvPr id="83" name="文本框 82">
-                <a:extLst>
-                  <a:ext uri="{FF2B5EF4-FFF2-40B4-BE49-F238E27FC236}">
-                    <a16:creationId xmlns:a16="http://schemas.microsoft.com/office/drawing/2014/main" id="{4EDBF2F0-6ADF-02D9-7154-244748AB621B}"/>
-                  </a:ext>
-                </a:extLst>
-              </p:cNvPr>
-              <p:cNvSpPr txBox="1"/>
-              <p:nvPr/>
-            </p:nvSpPr>
-            <p:spPr>
-              <a:xfrm>
-                <a:off x="7761553" y="4568144"/>
-                <a:ext cx="3681497" cy="1200329"/>
-              </a:xfrm>
-              <a:prstGeom prst="rect">
-                <a:avLst/>
-              </a:prstGeom>
-              <a:noFill/>
-            </p:spPr>
-            <p:txBody>
-              <a:bodyPr wrap="square" rtlCol="0" anchor="ctr" anchorCtr="1">
-                <a:spAutoFit/>
-              </a:bodyPr>
-              <a:lstStyle/>
-              <a:p>
-                <a:pPr algn="ctr"/>
-                <a:r>
-                  <a:rPr lang="zh-CN" altLang="en-US" dirty="0">
-                    <a:latin typeface="Times New Roman" panose="02020603050405020304" pitchFamily="18" charset="0"/>
-                    <a:ea typeface="宋体" panose="02010600030101010101" pitchFamily="2" charset="-122"/>
-                  </a:rPr>
-                  <a:t>调整窗口：</a:t>
-                </a:r>
-                <a:endParaRPr lang="en-US" altLang="zh-CN" dirty="0">
-                  <a:latin typeface="Times New Roman" panose="02020603050405020304" pitchFamily="18" charset="0"/>
-                  <a:ea typeface="宋体" panose="02010600030101010101" pitchFamily="2" charset="-122"/>
-                </a:endParaRPr>
-              </a:p>
-              <a:p>
-                <a:pPr algn="ctr"/>
-                <a14:m>
-                  <m:oMathPara xmlns:m="http://schemas.openxmlformats.org/officeDocument/2006/math">
-                    <m:oMathParaPr>
-                      <m:jc m:val="centerGroup"/>
-                    </m:oMathParaPr>
-                    <m:oMath xmlns:m="http://schemas.openxmlformats.org/officeDocument/2006/math">
-                      <m:r>
-                        <a:rPr lang="en-US" altLang="zh-CN" i="1" dirty="0" smtClean="0">
-                          <a:latin typeface="Cambria Math" panose="02040503050406030204" pitchFamily="18" charset="0"/>
-                          <a:ea typeface="宋体" panose="02010600030101010101" pitchFamily="2" charset="-122"/>
-                        </a:rPr>
-                        <m:t>𝐶</m:t>
-                      </m:r>
-                      <m:sSub>
-                        <m:sSubPr>
-                          <m:ctrlPr>
-                            <a:rPr lang="en-US" altLang="zh-CN" i="1" dirty="0" smtClean="0">
-                              <a:latin typeface="Cambria Math" panose="02040503050406030204" pitchFamily="18" charset="0"/>
-                              <a:ea typeface="宋体" panose="02010600030101010101" pitchFamily="2" charset="-122"/>
-                            </a:rPr>
-                          </m:ctrlPr>
-                        </m:sSubPr>
-                        <m:e>
-                          <m:r>
-                            <a:rPr lang="en-US" altLang="zh-CN" i="1" dirty="0" smtClean="0">
-                              <a:latin typeface="Cambria Math" panose="02040503050406030204" pitchFamily="18" charset="0"/>
-                              <a:ea typeface="宋体" panose="02010600030101010101" pitchFamily="2" charset="-122"/>
-                            </a:rPr>
-                            <m:t>𝑊</m:t>
-                          </m:r>
-                        </m:e>
-                        <m:sub>
-                          <m:r>
-                            <a:rPr lang="en-US" altLang="zh-CN" b="0" i="1" dirty="0" smtClean="0">
-                              <a:latin typeface="Cambria Math" panose="02040503050406030204" pitchFamily="18" charset="0"/>
-                              <a:ea typeface="宋体" panose="02010600030101010101" pitchFamily="2" charset="-122"/>
-                            </a:rPr>
-                            <m:t>𝑛𝑒𝑤</m:t>
-                          </m:r>
-                        </m:sub>
-                      </m:sSub>
-                      <m:r>
-                        <a:rPr lang="en-US" altLang="zh-CN" b="0" i="1" dirty="0" smtClean="0">
-                          <a:latin typeface="Cambria Math" panose="02040503050406030204" pitchFamily="18" charset="0"/>
-                          <a:ea typeface="宋体" panose="02010600030101010101" pitchFamily="2" charset="-122"/>
-                        </a:rPr>
-                        <m:t>=</m:t>
-                      </m:r>
-                      <m:r>
-                        <m:rPr>
-                          <m:sty m:val="p"/>
-                        </m:rPr>
-                        <a:rPr lang="en-US" altLang="zh-CN" b="0" i="0" dirty="0" smtClean="0">
-                          <a:latin typeface="Cambria Math" panose="02040503050406030204" pitchFamily="18" charset="0"/>
-                          <a:ea typeface="宋体" panose="02010600030101010101" pitchFamily="2" charset="-122"/>
-                        </a:rPr>
-                        <m:t>min</m:t>
-                      </m:r>
-                      <m:r>
-                        <a:rPr lang="en-US" altLang="zh-CN" b="0" i="1" dirty="0" smtClean="0">
-                          <a:latin typeface="Cambria Math" panose="02040503050406030204" pitchFamily="18" charset="0"/>
-                          <a:ea typeface="宋体" panose="02010600030101010101" pitchFamily="2" charset="-122"/>
-                        </a:rPr>
-                        <m:t>⁡(2</m:t>
-                      </m:r>
-                      <m:r>
-                        <a:rPr lang="en-US" altLang="zh-CN" b="0" i="1" dirty="0" smtClean="0">
-                          <a:latin typeface="Cambria Math" panose="02040503050406030204" pitchFamily="18" charset="0"/>
-                          <a:ea typeface="宋体" panose="02010600030101010101" pitchFamily="2" charset="-122"/>
-                        </a:rPr>
-                        <m:t>𝐶</m:t>
-                      </m:r>
-                      <m:sSub>
-                        <m:sSubPr>
-                          <m:ctrlPr>
-                            <a:rPr lang="en-US" altLang="zh-CN" b="0" i="1" dirty="0" smtClean="0">
-                              <a:latin typeface="Cambria Math" panose="02040503050406030204" pitchFamily="18" charset="0"/>
-                              <a:ea typeface="宋体" panose="02010600030101010101" pitchFamily="2" charset="-122"/>
-                            </a:rPr>
-                          </m:ctrlPr>
-                        </m:sSubPr>
-                        <m:e>
-                          <m:r>
-                            <a:rPr lang="en-US" altLang="zh-CN" b="0" i="1" dirty="0" smtClean="0">
-                              <a:latin typeface="Cambria Math" panose="02040503050406030204" pitchFamily="18" charset="0"/>
-                              <a:ea typeface="宋体" panose="02010600030101010101" pitchFamily="2" charset="-122"/>
-                            </a:rPr>
-                            <m:t>𝑊</m:t>
-                          </m:r>
-                        </m:e>
-                        <m:sub>
-                          <m:r>
-                            <a:rPr lang="en-US" altLang="zh-CN" i="1" dirty="0">
-                              <a:latin typeface="Cambria Math" panose="02040503050406030204" pitchFamily="18" charset="0"/>
-                              <a:ea typeface="宋体" panose="02010600030101010101" pitchFamily="2" charset="-122"/>
-                            </a:rPr>
-                            <m:t>𝑜𝑙𝑑</m:t>
-                          </m:r>
-                        </m:sub>
-                      </m:sSub>
-                      <m:r>
-                        <a:rPr lang="en-US" altLang="zh-CN" b="0" i="1" dirty="0" smtClean="0">
-                          <a:latin typeface="Cambria Math" panose="02040503050406030204" pitchFamily="18" charset="0"/>
-                          <a:ea typeface="宋体" panose="02010600030101010101" pitchFamily="2" charset="-122"/>
-                        </a:rPr>
-                        <m:t>+1,</m:t>
-                      </m:r>
-                      <m:r>
-                        <a:rPr lang="en-US" altLang="zh-CN" b="0" i="1" dirty="0" smtClean="0">
-                          <a:latin typeface="Cambria Math" panose="02040503050406030204" pitchFamily="18" charset="0"/>
-                          <a:ea typeface="宋体" panose="02010600030101010101" pitchFamily="2" charset="-122"/>
-                        </a:rPr>
-                        <m:t>𝐶</m:t>
-                      </m:r>
-                      <m:sSub>
-                        <m:sSubPr>
-                          <m:ctrlPr>
-                            <a:rPr lang="en-US" altLang="zh-CN" b="0" i="1" dirty="0" smtClean="0">
-                              <a:latin typeface="Cambria Math" panose="02040503050406030204" pitchFamily="18" charset="0"/>
-                              <a:ea typeface="宋体" panose="02010600030101010101" pitchFamily="2" charset="-122"/>
-                            </a:rPr>
-                          </m:ctrlPr>
-                        </m:sSubPr>
-                        <m:e>
-                          <m:r>
-                            <a:rPr lang="en-US" altLang="zh-CN" b="0" i="1" dirty="0" smtClean="0">
-                              <a:latin typeface="Cambria Math" panose="02040503050406030204" pitchFamily="18" charset="0"/>
-                              <a:ea typeface="宋体" panose="02010600030101010101" pitchFamily="2" charset="-122"/>
-                            </a:rPr>
-                            <m:t>𝑊</m:t>
-                          </m:r>
-                        </m:e>
-                        <m:sub>
-                          <m:r>
-                            <a:rPr lang="en-US" altLang="zh-CN" b="0" i="1" dirty="0" smtClean="0">
-                              <a:latin typeface="Cambria Math" panose="02040503050406030204" pitchFamily="18" charset="0"/>
-                              <a:ea typeface="宋体" panose="02010600030101010101" pitchFamily="2" charset="-122"/>
-                            </a:rPr>
-                            <m:t>𝑚𝑎𝑥</m:t>
-                          </m:r>
-                        </m:sub>
-                      </m:sSub>
-                      <m:r>
-                        <a:rPr lang="en-US" altLang="zh-CN" b="0" i="1" dirty="0" smtClean="0">
-                          <a:latin typeface="Cambria Math" panose="02040503050406030204" pitchFamily="18" charset="0"/>
-                          <a:ea typeface="宋体" panose="02010600030101010101" pitchFamily="2" charset="-122"/>
-                        </a:rPr>
-                        <m:t>)</m:t>
-                      </m:r>
-                    </m:oMath>
-                  </m:oMathPara>
-                </a14:m>
-                <a:endParaRPr lang="en-US" altLang="zh-CN" dirty="0">
-                  <a:latin typeface="Times New Roman" panose="02020603050405020304" pitchFamily="18" charset="0"/>
-                  <a:ea typeface="宋体" panose="02010600030101010101" pitchFamily="2" charset="-122"/>
-                </a:endParaRPr>
-              </a:p>
-              <a:p>
-                <a:pPr algn="ctr"/>
-                <a:r>
-                  <a:rPr lang="zh-CN" altLang="en-US" dirty="0">
-                    <a:latin typeface="Times New Roman" panose="02020603050405020304" pitchFamily="18" charset="0"/>
-                    <a:ea typeface="宋体" panose="02010600030101010101" pitchFamily="2" charset="-122"/>
-                  </a:rPr>
-                  <a:t>生成随机数</a:t>
-                </a:r>
-                <a:r>
-                  <a:rPr lang="en-US" altLang="zh-CN" dirty="0">
-                    <a:latin typeface="Times New Roman" panose="02020603050405020304" pitchFamily="18" charset="0"/>
-                    <a:ea typeface="宋体" panose="02010600030101010101" pitchFamily="2" charset="-122"/>
-                  </a:rPr>
-                  <a:t>N:</a:t>
-                </a:r>
-              </a:p>
-              <a:p>
-                <a:pPr algn="ctr"/>
-                <a14:m>
-                  <m:oMathPara xmlns:m="http://schemas.openxmlformats.org/officeDocument/2006/math">
-                    <m:oMathParaPr>
-                      <m:jc m:val="centerGroup"/>
-                    </m:oMathParaPr>
-                    <m:oMath xmlns:m="http://schemas.openxmlformats.org/officeDocument/2006/math">
-                      <m:r>
-                        <a:rPr lang="en-US" altLang="zh-CN" i="1" dirty="0" smtClean="0">
-                          <a:latin typeface="Cambria Math" panose="02040503050406030204" pitchFamily="18" charset="0"/>
-                          <a:ea typeface="宋体" panose="02010600030101010101" pitchFamily="2" charset="-122"/>
-                        </a:rPr>
-                        <m:t>𝑁</m:t>
-                      </m:r>
-                      <m:r>
-                        <a:rPr lang="en-US" altLang="zh-CN" i="1" dirty="0" smtClean="0">
-                          <a:latin typeface="Cambria Math" panose="02040503050406030204" pitchFamily="18" charset="0"/>
-                          <a:ea typeface="宋体" panose="02010600030101010101" pitchFamily="2" charset="-122"/>
-                        </a:rPr>
-                        <m:t>∈ [0, </m:t>
-                      </m:r>
-                      <m:r>
-                        <a:rPr lang="en-US" altLang="zh-CN" i="1" dirty="0">
-                          <a:latin typeface="Cambria Math" panose="02040503050406030204" pitchFamily="18" charset="0"/>
-                          <a:ea typeface="宋体" panose="02010600030101010101" pitchFamily="2" charset="-122"/>
-                        </a:rPr>
-                        <m:t>𝐶</m:t>
-                      </m:r>
-                      <m:sSub>
-                        <m:sSubPr>
-                          <m:ctrlPr>
-                            <a:rPr lang="en-US" altLang="zh-CN" i="1" dirty="0">
-                              <a:latin typeface="Cambria Math" panose="02040503050406030204" pitchFamily="18" charset="0"/>
-                              <a:ea typeface="宋体" panose="02010600030101010101" pitchFamily="2" charset="-122"/>
-                            </a:rPr>
-                          </m:ctrlPr>
-                        </m:sSubPr>
-                        <m:e>
-                          <m:r>
-                            <a:rPr lang="en-US" altLang="zh-CN" i="1" dirty="0">
-                              <a:latin typeface="Cambria Math" panose="02040503050406030204" pitchFamily="18" charset="0"/>
-                              <a:ea typeface="宋体" panose="02010600030101010101" pitchFamily="2" charset="-122"/>
-                            </a:rPr>
-                            <m:t>𝑊</m:t>
-                          </m:r>
-                        </m:e>
-                        <m:sub>
-                          <m:r>
-                            <a:rPr lang="en-US" altLang="zh-CN" i="1" dirty="0">
-                              <a:latin typeface="Cambria Math" panose="02040503050406030204" pitchFamily="18" charset="0"/>
-                              <a:ea typeface="宋体" panose="02010600030101010101" pitchFamily="2" charset="-122"/>
-                            </a:rPr>
-                            <m:t>𝑛𝑒𝑤</m:t>
-                          </m:r>
-                        </m:sub>
-                      </m:sSub>
-                      <m:r>
-                        <a:rPr lang="en-US" altLang="zh-CN" i="1" dirty="0" smtClean="0">
-                          <a:latin typeface="Cambria Math" panose="02040503050406030204" pitchFamily="18" charset="0"/>
-                          <a:ea typeface="宋体" panose="02010600030101010101" pitchFamily="2" charset="-122"/>
-                        </a:rPr>
-                        <m:t>]</m:t>
-                      </m:r>
-                    </m:oMath>
-                  </m:oMathPara>
-                </a14:m>
-                <a:endParaRPr lang="en-US" altLang="zh-CN" dirty="0">
-                  <a:latin typeface="Times New Roman" panose="02020603050405020304" pitchFamily="18" charset="0"/>
-                  <a:ea typeface="宋体" panose="02010600030101010101" pitchFamily="2" charset="-122"/>
-                </a:endParaRPr>
-              </a:p>
-            </p:txBody>
-          </p:sp>
-        </mc:Choice>
-        <mc:Fallback xmlns="">
-          <p:sp>
-            <p:nvSpPr>
-              <p:cNvPr id="83" name="文本框 82">
-                <a:extLst>
-                  <a:ext uri="{FF2B5EF4-FFF2-40B4-BE49-F238E27FC236}">
-                    <a16:creationId xmlns:a16="http://schemas.microsoft.com/office/drawing/2014/main" id="{4EDBF2F0-6ADF-02D9-7154-244748AB621B}"/>
-                  </a:ext>
-                </a:extLst>
-              </p:cNvPr>
-              <p:cNvSpPr txBox="1">
-                <a:spLocks noRot="1" noChangeAspect="1" noMove="1" noResize="1" noEditPoints="1" noAdjustHandles="1" noChangeArrowheads="1" noChangeShapeType="1" noTextEdit="1"/>
-              </p:cNvSpPr>
-              <p:nvPr/>
-            </p:nvSpPr>
-            <p:spPr>
-              <a:xfrm>
-                <a:off x="7761553" y="4568144"/>
-                <a:ext cx="3681497" cy="1200329"/>
-              </a:xfrm>
-              <a:prstGeom prst="rect">
-                <a:avLst/>
-              </a:prstGeom>
-              <a:blipFill>
-                <a:blip r:embed="rId4"/>
-                <a:stretch>
-                  <a:fillRect t="-3046" b="-5076"/>
-                </a:stretch>
-              </a:blipFill>
-            </p:spPr>
-            <p:txBody>
-              <a:bodyPr/>
-              <a:lstStyle/>
-              <a:p>
-                <a:r>
-                  <a:rPr lang="zh-CN" altLang="en-US">
-                    <a:noFill/>
-                  </a:rPr>
-                  <a:t> </a:t>
-                </a:r>
-              </a:p>
-            </p:txBody>
-          </p:sp>
-        </mc:Fallback>
-      </mc:AlternateContent>
-      <p:sp>
-        <p:nvSpPr>
-          <p:cNvPr id="87" name="文本框 86">
-            <a:extLst>
-              <a:ext uri="{FF2B5EF4-FFF2-40B4-BE49-F238E27FC236}">
-                <a16:creationId xmlns:a16="http://schemas.microsoft.com/office/drawing/2014/main" id="{E56AF2DA-0137-2FF5-E175-62BB2CCE2AEF}"/>
-              </a:ext>
-            </a:extLst>
-          </p:cNvPr>
-          <p:cNvSpPr txBox="1"/>
-          <p:nvPr/>
-        </p:nvSpPr>
-        <p:spPr>
-          <a:xfrm>
-            <a:off x="5462823" y="5538297"/>
-            <a:ext cx="463648" cy="327722"/>
-          </a:xfrm>
-          <a:prstGeom prst="rect">
-            <a:avLst/>
-          </a:prstGeom>
-          <a:noFill/>
-        </p:spPr>
-        <p:txBody>
-          <a:bodyPr wrap="square" rtlCol="0" anchor="ctr" anchorCtr="1">
-            <a:spAutoFit/>
-          </a:bodyPr>
-          <a:lstStyle/>
-          <a:p>
-            <a:pPr algn="ctr"/>
-            <a:r>
-              <a:rPr lang="zh-CN" altLang="en-US" dirty="0">
-                <a:latin typeface="Times New Roman" panose="02020603050405020304" pitchFamily="18" charset="0"/>
-                <a:ea typeface="宋体" panose="02010600030101010101" pitchFamily="2" charset="-122"/>
-              </a:rPr>
-              <a:t>是</a:t>
-            </a:r>
-          </a:p>
-        </p:txBody>
-      </p:sp>
-      <p:sp>
-        <p:nvSpPr>
-          <p:cNvPr id="88" name="文本框 87">
-            <a:extLst>
-              <a:ext uri="{FF2B5EF4-FFF2-40B4-BE49-F238E27FC236}">
-                <a16:creationId xmlns:a16="http://schemas.microsoft.com/office/drawing/2014/main" id="{1D975BDE-7641-ECBD-833C-55C75FA704CB}"/>
-              </a:ext>
-            </a:extLst>
-          </p:cNvPr>
-          <p:cNvSpPr txBox="1"/>
-          <p:nvPr/>
-        </p:nvSpPr>
-        <p:spPr>
-          <a:xfrm>
-            <a:off x="6881163" y="4782454"/>
-            <a:ext cx="463648" cy="327722"/>
-          </a:xfrm>
-          <a:prstGeom prst="rect">
-            <a:avLst/>
-          </a:prstGeom>
-          <a:noFill/>
-        </p:spPr>
-        <p:txBody>
-          <a:bodyPr wrap="square" rtlCol="0" anchor="ctr" anchorCtr="1">
-            <a:spAutoFit/>
-          </a:bodyPr>
-          <a:lstStyle/>
-          <a:p>
-            <a:pPr algn="ctr"/>
-            <a:r>
-              <a:rPr lang="zh-CN" altLang="en-US" dirty="0">
-                <a:latin typeface="Times New Roman" panose="02020603050405020304" pitchFamily="18" charset="0"/>
-                <a:ea typeface="宋体" panose="02010600030101010101" pitchFamily="2" charset="-122"/>
-              </a:rPr>
-              <a:t>否</a:t>
-            </a:r>
-          </a:p>
-        </p:txBody>
-      </p:sp>
-      <p:cxnSp>
-        <p:nvCxnSpPr>
-          <p:cNvPr id="90" name="直接箭头连接符 89">
-            <a:extLst>
-              <a:ext uri="{FF2B5EF4-FFF2-40B4-BE49-F238E27FC236}">
-                <a16:creationId xmlns:a16="http://schemas.microsoft.com/office/drawing/2014/main" id="{89C5B583-D8BC-B16B-99CB-DAF8D1D1CC46}"/>
-              </a:ext>
-            </a:extLst>
-          </p:cNvPr>
-          <p:cNvCxnSpPr>
-            <a:cxnSpLocks/>
-            <a:stCxn id="82" idx="3"/>
-            <a:endCxn id="107" idx="0"/>
-          </p:cNvCxnSpPr>
-          <p:nvPr/>
-        </p:nvCxnSpPr>
-        <p:spPr>
-          <a:xfrm flipH="1" flipV="1">
-            <a:off x="5462825" y="450795"/>
-            <a:ext cx="5980225" cy="4717514"/>
-          </a:xfrm>
-          <a:prstGeom prst="bentConnector4">
-            <a:avLst>
-              <a:gd name="adj1" fmla="val -7263"/>
-              <a:gd name="adj2" fmla="val 106300"/>
-            </a:avLst>
-          </a:prstGeom>
-          <a:ln w="28575">
-            <a:solidFill>
-              <a:schemeClr val="tx1"/>
-            </a:solidFill>
-            <a:tailEnd type="triangle"/>
-          </a:ln>
-        </p:spPr>
-        <p:style>
-          <a:lnRef idx="1">
-            <a:schemeClr val="accent1"/>
-          </a:lnRef>
-          <a:fillRef idx="0">
-            <a:schemeClr val="accent1"/>
-          </a:fillRef>
-          <a:effectRef idx="0">
-            <a:schemeClr val="accent1"/>
-          </a:effectRef>
-          <a:fontRef idx="minor">
-            <a:schemeClr val="tx1"/>
-          </a:fontRef>
-        </p:style>
-      </p:cxnSp>
-      <p:sp>
-        <p:nvSpPr>
-          <p:cNvPr id="12" name="文本框 11">
-            <a:extLst>
-              <a:ext uri="{FF2B5EF4-FFF2-40B4-BE49-F238E27FC236}">
-                <a16:creationId xmlns:a16="http://schemas.microsoft.com/office/drawing/2014/main" id="{291D4D9A-7140-DC53-AF53-11A38DE92E5C}"/>
-              </a:ext>
-            </a:extLst>
-          </p:cNvPr>
-          <p:cNvSpPr txBox="1"/>
-          <p:nvPr/>
-        </p:nvSpPr>
-        <p:spPr>
-          <a:xfrm>
-            <a:off x="4258565" y="671734"/>
-            <a:ext cx="2461546" cy="573514"/>
-          </a:xfrm>
-          <a:prstGeom prst="rect">
-            <a:avLst/>
-          </a:prstGeom>
-          <a:noFill/>
-        </p:spPr>
-        <p:txBody>
-          <a:bodyPr wrap="square" rtlCol="0" anchor="ctr" anchorCtr="1">
-            <a:spAutoFit/>
-          </a:bodyPr>
-          <a:lstStyle/>
-          <a:p>
-            <a:pPr algn="ctr"/>
-            <a:r>
-              <a:rPr lang="zh-CN" altLang="en-US" dirty="0">
-                <a:latin typeface="Times New Roman" panose="02020603050405020304" pitchFamily="18" charset="0"/>
-                <a:ea typeface="宋体" panose="02010600030101010101" pitchFamily="2" charset="-122"/>
-              </a:rPr>
-              <a:t>信道检测</a:t>
-            </a:r>
-            <a:r>
-              <a:rPr lang="en-US" altLang="zh-CN" dirty="0">
-                <a:latin typeface="Times New Roman" panose="02020603050405020304" pitchFamily="18" charset="0"/>
-                <a:ea typeface="宋体" panose="02010600030101010101" pitchFamily="2" charset="-122"/>
-              </a:rPr>
-              <a:t>CCA</a:t>
-            </a:r>
-          </a:p>
-          <a:p>
-            <a:pPr algn="ctr"/>
-            <a:r>
-              <a:rPr lang="zh-CN" altLang="en-US" dirty="0">
-                <a:latin typeface="Times New Roman" panose="02020603050405020304" pitchFamily="18" charset="0"/>
-                <a:ea typeface="宋体" panose="02010600030101010101" pitchFamily="2" charset="-122"/>
-              </a:rPr>
-              <a:t>信道是否空闲？</a:t>
-            </a:r>
-          </a:p>
-        </p:txBody>
-      </p:sp>
-      <mc:AlternateContent xmlns:mc="http://schemas.openxmlformats.org/markup-compatibility/2006" xmlns:a14="http://schemas.microsoft.com/office/drawing/2010/main">
-        <mc:Choice Requires="a14">
-          <p:sp>
-            <p:nvSpPr>
-              <p:cNvPr id="137" name="文本框 136">
-                <a:extLst>
-                  <a:ext uri="{FF2B5EF4-FFF2-40B4-BE49-F238E27FC236}">
-                    <a16:creationId xmlns:a16="http://schemas.microsoft.com/office/drawing/2014/main" id="{22286C28-1E9E-92F1-B3CA-484CB3D3C9A1}"/>
-                  </a:ext>
-                </a:extLst>
-              </p:cNvPr>
-              <p:cNvSpPr txBox="1"/>
-              <p:nvPr/>
-            </p:nvSpPr>
-            <p:spPr>
-              <a:xfrm>
-                <a:off x="4738553" y="2970134"/>
-                <a:ext cx="1545036" cy="369332"/>
-              </a:xfrm>
-              <a:prstGeom prst="rect">
-                <a:avLst/>
-              </a:prstGeom>
-              <a:noFill/>
-            </p:spPr>
-            <p:txBody>
-              <a:bodyPr wrap="square" rtlCol="0" anchor="ctr" anchorCtr="1">
-                <a:spAutoFit/>
-              </a:bodyPr>
-              <a:lstStyle/>
-              <a:p>
-                <a:pPr algn="ctr"/>
-                <a14:m>
-                  <m:oMath xmlns:m="http://schemas.openxmlformats.org/officeDocument/2006/math">
-                    <m:r>
-                      <a:rPr lang="en-US" altLang="zh-CN" i="1" dirty="0" smtClean="0">
-                        <a:latin typeface="Cambria Math" panose="02040503050406030204" pitchFamily="18" charset="0"/>
-                        <a:ea typeface="宋体" panose="02010600030101010101" pitchFamily="2" charset="-122"/>
-                      </a:rPr>
-                      <m:t>𝑁</m:t>
-                    </m:r>
-                    <m:r>
-                      <a:rPr lang="en-US" altLang="zh-CN" i="1" dirty="0" smtClean="0">
-                        <a:latin typeface="Cambria Math" panose="02040503050406030204" pitchFamily="18" charset="0"/>
-                        <a:ea typeface="宋体" panose="02010600030101010101" pitchFamily="2" charset="-122"/>
-                      </a:rPr>
-                      <m:t>=0</m:t>
-                    </m:r>
-                  </m:oMath>
-                </a14:m>
-                <a:r>
-                  <a:rPr lang="zh-CN" altLang="en-US" dirty="0">
-                    <a:latin typeface="Times New Roman" panose="02020603050405020304" pitchFamily="18" charset="0"/>
-                    <a:ea typeface="宋体" panose="02010600030101010101" pitchFamily="2" charset="-122"/>
-                  </a:rPr>
-                  <a:t>？</a:t>
-                </a:r>
-              </a:p>
-            </p:txBody>
-          </p:sp>
-        </mc:Choice>
-        <mc:Fallback xmlns="">
-          <p:sp>
-            <p:nvSpPr>
-              <p:cNvPr id="137" name="文本框 136">
-                <a:extLst>
-                  <a:ext uri="{FF2B5EF4-FFF2-40B4-BE49-F238E27FC236}">
-                    <a16:creationId xmlns:a16="http://schemas.microsoft.com/office/drawing/2014/main" id="{22286C28-1E9E-92F1-B3CA-484CB3D3C9A1}"/>
-                  </a:ext>
-                </a:extLst>
-              </p:cNvPr>
-              <p:cNvSpPr txBox="1">
-                <a:spLocks noRot="1" noChangeAspect="1" noMove="1" noResize="1" noEditPoints="1" noAdjustHandles="1" noChangeArrowheads="1" noChangeShapeType="1" noTextEdit="1"/>
-              </p:cNvSpPr>
-              <p:nvPr/>
-            </p:nvSpPr>
-            <p:spPr>
-              <a:xfrm>
-                <a:off x="4738553" y="2970134"/>
-                <a:ext cx="1545036" cy="369332"/>
-              </a:xfrm>
-              <a:prstGeom prst="rect">
-                <a:avLst/>
-              </a:prstGeom>
-              <a:blipFill>
-                <a:blip r:embed="rId5"/>
-                <a:stretch>
-                  <a:fillRect t="-11475" b="-22951"/>
-                </a:stretch>
-              </a:blipFill>
-            </p:spPr>
-            <p:txBody>
-              <a:bodyPr/>
-              <a:lstStyle/>
-              <a:p>
-                <a:r>
-                  <a:rPr lang="zh-CN" altLang="en-US">
-                    <a:noFill/>
-                  </a:rPr>
-                  <a:t> </a:t>
-                </a:r>
-              </a:p>
-            </p:txBody>
-          </p:sp>
-        </mc:Fallback>
-      </mc:AlternateContent>
-      <p:sp>
-        <p:nvSpPr>
-          <p:cNvPr id="144" name="文本框 143">
-            <a:extLst>
-              <a:ext uri="{FF2B5EF4-FFF2-40B4-BE49-F238E27FC236}">
-                <a16:creationId xmlns:a16="http://schemas.microsoft.com/office/drawing/2014/main" id="{7518033F-BF6B-E207-24C5-8BDCC1A12D11}"/>
-              </a:ext>
-            </a:extLst>
-          </p:cNvPr>
-          <p:cNvSpPr txBox="1"/>
-          <p:nvPr/>
-        </p:nvSpPr>
-        <p:spPr>
-          <a:xfrm>
-            <a:off x="4232051" y="4928189"/>
-            <a:ext cx="2461546" cy="327722"/>
-          </a:xfrm>
-          <a:prstGeom prst="rect">
-            <a:avLst/>
-          </a:prstGeom>
-          <a:noFill/>
-        </p:spPr>
-        <p:txBody>
-          <a:bodyPr wrap="square" rtlCol="0" anchor="ctr" anchorCtr="1">
-            <a:spAutoFit/>
-          </a:bodyPr>
-          <a:lstStyle/>
-          <a:p>
-            <a:pPr algn="ctr"/>
-            <a:r>
-              <a:rPr lang="zh-CN" altLang="en-US" dirty="0">
-                <a:latin typeface="Times New Roman" panose="02020603050405020304" pitchFamily="18" charset="0"/>
-                <a:ea typeface="宋体" panose="02010600030101010101" pitchFamily="2" charset="-122"/>
-              </a:rPr>
-              <a:t>是否接收到</a:t>
-            </a:r>
-            <a:r>
-              <a:rPr lang="en-US" altLang="zh-CN" dirty="0">
-                <a:latin typeface="Times New Roman" panose="02020603050405020304" pitchFamily="18" charset="0"/>
-                <a:ea typeface="宋体" panose="02010600030101010101" pitchFamily="2" charset="-122"/>
-              </a:rPr>
-              <a:t>ACK</a:t>
-            </a:r>
-            <a:r>
-              <a:rPr lang="zh-CN" altLang="en-US" dirty="0">
-                <a:latin typeface="Times New Roman" panose="02020603050405020304" pitchFamily="18" charset="0"/>
-                <a:ea typeface="宋体" panose="02010600030101010101" pitchFamily="2" charset="-122"/>
-              </a:rPr>
-              <a:t>？</a:t>
-            </a:r>
-          </a:p>
-        </p:txBody>
-      </p:sp>
-      <p:grpSp>
-        <p:nvGrpSpPr>
-          <p:cNvPr id="69" name="组合 68">
-            <a:extLst>
-              <a:ext uri="{FF2B5EF4-FFF2-40B4-BE49-F238E27FC236}">
-                <a16:creationId xmlns:a16="http://schemas.microsoft.com/office/drawing/2014/main" id="{90E7A618-E0BD-CD94-624A-F5A90A8428B6}"/>
+                <a16:creationId xmlns:a16="http://schemas.microsoft.com/office/drawing/2014/main" id="{43C7BE46-1C86-C582-325B-A58361824131}"/>
               </a:ext>
             </a:extLst>
           </p:cNvPr>
@@ -34978,21 +33386,18 @@
         </p:nvGrpSpPr>
         <p:grpSpPr>
           <a:xfrm>
-            <a:off x="4232051" y="1811585"/>
-            <a:ext cx="2461546" cy="690538"/>
-            <a:chOff x="4334019" y="1575364"/>
-            <a:chExt cx="2461546" cy="690538"/>
+            <a:off x="322949" y="450753"/>
+            <a:ext cx="11546103" cy="6291775"/>
+            <a:chOff x="322949" y="450753"/>
+            <a:chExt cx="11546103" cy="6291775"/>
           </a:xfrm>
-          <a:solidFill>
-            <a:srgbClr val="ECFDF5"/>
-          </a:solidFill>
         </p:grpSpPr>
         <p:sp>
           <p:nvSpPr>
-            <p:cNvPr id="148" name="矩形 147">
+            <p:cNvPr id="107" name="流程图: 决策 106">
               <a:extLst>
                 <a:ext uri="{FF2B5EF4-FFF2-40B4-BE49-F238E27FC236}">
-                  <a16:creationId xmlns:a16="http://schemas.microsoft.com/office/drawing/2014/main" id="{5C2E3FE1-814F-09F1-8D46-A3C36BB6192F}"/>
+                  <a16:creationId xmlns:a16="http://schemas.microsoft.com/office/drawing/2014/main" id="{C1EE22BA-8A63-38B0-13F4-288805170A7C}"/>
                 </a:ext>
               </a:extLst>
             </p:cNvPr>
@@ -35001,13 +33406,189 @@
           </p:nvSpPr>
           <p:spPr>
             <a:xfrm>
-              <a:off x="4334019" y="1575364"/>
-              <a:ext cx="2461546" cy="690538"/>
+              <a:off x="3927520" y="450795"/>
+              <a:ext cx="3070609" cy="1088543"/>
+            </a:xfrm>
+            <a:prstGeom prst="flowChartDecision">
+              <a:avLst/>
+            </a:prstGeom>
+            <a:solidFill>
+              <a:srgbClr val="DCEBFF"/>
+            </a:solidFill>
+            <a:ln w="19050">
+              <a:solidFill>
+                <a:schemeClr val="tx1"/>
+              </a:solidFill>
+            </a:ln>
+          </p:spPr>
+          <p:style>
+            <a:lnRef idx="2">
+              <a:schemeClr val="accent1">
+                <a:shade val="15000"/>
+              </a:schemeClr>
+            </a:lnRef>
+            <a:fillRef idx="1">
+              <a:schemeClr val="accent1"/>
+            </a:fillRef>
+            <a:effectRef idx="0">
+              <a:schemeClr val="accent1"/>
+            </a:effectRef>
+            <a:fontRef idx="minor">
+              <a:schemeClr val="lt1"/>
+            </a:fontRef>
+          </p:style>
+          <p:txBody>
+            <a:bodyPr rtlCol="0" anchor="ctr"/>
+            <a:lstStyle/>
+            <a:p>
+              <a:pPr algn="ctr"/>
+              <a:endParaRPr lang="zh-CN" altLang="en-US" dirty="0" err="1">
+                <a:solidFill>
+                  <a:schemeClr val="tx1"/>
+                </a:solidFill>
+              </a:endParaRPr>
+            </a:p>
+          </p:txBody>
+        </p:sp>
+        <p:sp>
+          <p:nvSpPr>
+            <p:cNvPr id="138" name="流程图: 决策 137">
+              <a:extLst>
+                <a:ext uri="{FF2B5EF4-FFF2-40B4-BE49-F238E27FC236}">
+                  <a16:creationId xmlns:a16="http://schemas.microsoft.com/office/drawing/2014/main" id="{5699C3B1-C901-1ABD-1DF2-84A9FD263E4C}"/>
+                </a:ext>
+              </a:extLst>
+            </p:cNvPr>
+            <p:cNvSpPr/>
+            <p:nvPr/>
+          </p:nvSpPr>
+          <p:spPr>
+            <a:xfrm>
+              <a:off x="4394868" y="2756173"/>
+              <a:ext cx="2135912" cy="787681"/>
+            </a:xfrm>
+            <a:prstGeom prst="flowChartDecision">
+              <a:avLst/>
+            </a:prstGeom>
+            <a:solidFill>
+              <a:srgbClr val="DCEBFF"/>
+            </a:solidFill>
+            <a:ln w="19050">
+              <a:solidFill>
+                <a:schemeClr val="tx1"/>
+              </a:solidFill>
+            </a:ln>
+          </p:spPr>
+          <p:style>
+            <a:lnRef idx="2">
+              <a:schemeClr val="accent1">
+                <a:shade val="15000"/>
+              </a:schemeClr>
+            </a:lnRef>
+            <a:fillRef idx="1">
+              <a:schemeClr val="accent1"/>
+            </a:fillRef>
+            <a:effectRef idx="0">
+              <a:schemeClr val="accent1"/>
+            </a:effectRef>
+            <a:fontRef idx="minor">
+              <a:schemeClr val="lt1"/>
+            </a:fontRef>
+          </p:style>
+          <p:txBody>
+            <a:bodyPr rtlCol="0" anchor="ctr"/>
+            <a:lstStyle/>
+            <a:p>
+              <a:pPr algn="ctr"/>
+              <a:endParaRPr lang="zh-CN" altLang="en-US" dirty="0" err="1">
+                <a:solidFill>
+                  <a:schemeClr val="tx1"/>
+                </a:solidFill>
+              </a:endParaRPr>
+            </a:p>
+          </p:txBody>
+        </p:sp>
+        <p:sp>
+          <p:nvSpPr>
+            <p:cNvPr id="145" name="流程图: 决策 144">
+              <a:extLst>
+                <a:ext uri="{FF2B5EF4-FFF2-40B4-BE49-F238E27FC236}">
+                  <a16:creationId xmlns:a16="http://schemas.microsoft.com/office/drawing/2014/main" id="{A6E2F20E-4DA2-AF16-219F-F27A8C5A46F5}"/>
+                </a:ext>
+              </a:extLst>
+            </p:cNvPr>
+            <p:cNvSpPr/>
+            <p:nvPr/>
+          </p:nvSpPr>
+          <p:spPr>
+            <a:xfrm>
+              <a:off x="3927520" y="4584355"/>
+              <a:ext cx="3070609" cy="1015390"/>
+            </a:xfrm>
+            <a:prstGeom prst="flowChartDecision">
+              <a:avLst/>
+            </a:prstGeom>
+            <a:solidFill>
+              <a:srgbClr val="DCEBFF"/>
+            </a:solidFill>
+            <a:ln w="19050">
+              <a:solidFill>
+                <a:schemeClr val="tx1"/>
+              </a:solidFill>
+            </a:ln>
+          </p:spPr>
+          <p:style>
+            <a:lnRef idx="2">
+              <a:schemeClr val="accent1">
+                <a:shade val="15000"/>
+              </a:schemeClr>
+            </a:lnRef>
+            <a:fillRef idx="1">
+              <a:schemeClr val="accent1"/>
+            </a:fillRef>
+            <a:effectRef idx="0">
+              <a:schemeClr val="accent1"/>
+            </a:effectRef>
+            <a:fontRef idx="minor">
+              <a:schemeClr val="lt1"/>
+            </a:fontRef>
+          </p:style>
+          <p:txBody>
+            <a:bodyPr rtlCol="0" anchor="ctr"/>
+            <a:lstStyle/>
+            <a:p>
+              <a:pPr algn="ctr"/>
+              <a:endParaRPr lang="zh-CN" altLang="en-US" dirty="0" err="1">
+                <a:solidFill>
+                  <a:schemeClr val="tx1"/>
+                </a:solidFill>
+              </a:endParaRPr>
+            </a:p>
+          </p:txBody>
+        </p:sp>
+        <p:sp>
+          <p:nvSpPr>
+            <p:cNvPr id="2" name="矩形 1">
+              <a:extLst>
+                <a:ext uri="{FF2B5EF4-FFF2-40B4-BE49-F238E27FC236}">
+                  <a16:creationId xmlns:a16="http://schemas.microsoft.com/office/drawing/2014/main" id="{11339D1B-3C73-529F-5BEB-6C2B1EF0DAA5}"/>
+                </a:ext>
+              </a:extLst>
+            </p:cNvPr>
+            <p:cNvSpPr/>
+            <p:nvPr/>
+          </p:nvSpPr>
+          <p:spPr>
+            <a:xfrm>
+              <a:off x="527394" y="450753"/>
+              <a:ext cx="3006899" cy="1088542"/>
             </a:xfrm>
             <a:prstGeom prst="rect">
               <a:avLst/>
             </a:prstGeom>
-            <a:grpFill/>
+            <a:solidFill>
+              <a:srgbClr val="EDEDED"/>
+            </a:solidFill>
             <a:ln w="19050">
               <a:solidFill>
                 <a:schemeClr val="tx1"/>
@@ -35049,10 +33630,10 @@
           <mc:Choice Requires="a14">
             <p:sp>
               <p:nvSpPr>
-                <p:cNvPr id="149" name="文本框 148">
+                <p:cNvPr id="3" name="文本框 2">
                   <a:extLst>
                     <a:ext uri="{FF2B5EF4-FFF2-40B4-BE49-F238E27FC236}">
-                      <a16:creationId xmlns:a16="http://schemas.microsoft.com/office/drawing/2014/main" id="{4CD8618B-2C2F-387F-50CC-0E38C6D7A2BF}"/>
+                      <a16:creationId xmlns:a16="http://schemas.microsoft.com/office/drawing/2014/main" id="{3C28E2EE-28FF-44B4-7C4A-09596371771C}"/>
                     </a:ext>
                   </a:extLst>
                 </p:cNvPr>
@@ -35061,13 +33642,13 @@
               </p:nvSpPr>
               <p:spPr>
                 <a:xfrm>
-                  <a:off x="4496837" y="1756771"/>
-                  <a:ext cx="2135911" cy="327722"/>
+                  <a:off x="322949" y="701747"/>
+                  <a:ext cx="3320230" cy="646331"/>
                 </a:xfrm>
                 <a:prstGeom prst="rect">
                   <a:avLst/>
                 </a:prstGeom>
-                <a:grpFill/>
+                <a:noFill/>
               </p:spPr>
               <p:txBody>
                 <a:bodyPr wrap="square" rtlCol="0" anchor="ctr" anchorCtr="1">
@@ -35076,31 +33657,116 @@
                 <a:lstStyle/>
                 <a:p>
                   <a:pPr algn="ctr"/>
+                  <a:r>
+                    <a:rPr lang="zh-CN" altLang="en-US" dirty="0">
+                      <a:latin typeface="Times New Roman" panose="02020603050405020304" pitchFamily="18" charset="0"/>
+                      <a:ea typeface="宋体" panose="02010600030101010101" pitchFamily="2" charset="-122"/>
+                    </a:rPr>
+                    <a:t>初始化竞争窗口</a:t>
+                  </a:r>
                   <a14:m>
                     <m:oMath xmlns:m="http://schemas.openxmlformats.org/officeDocument/2006/math">
-                      <m:r>
-                        <a:rPr lang="zh-CN" altLang="en-US" i="1" dirty="0">
-                          <a:latin typeface="Cambria Math" panose="02040503050406030204" pitchFamily="18" charset="0"/>
-                          <a:ea typeface="宋体" panose="02010600030101010101" pitchFamily="2" charset="-122"/>
-                        </a:rPr>
-                        <m:t>随机数</m:t>
-                      </m:r>
                       <m:r>
                         <a:rPr lang="en-US" altLang="zh-CN" i="1" dirty="0" smtClean="0">
                           <a:latin typeface="Cambria Math" panose="02040503050406030204" pitchFamily="18" charset="0"/>
                           <a:ea typeface="宋体" panose="02010600030101010101" pitchFamily="2" charset="-122"/>
                         </a:rPr>
-                        <m:t>𝑁</m:t>
+                        <m:t>𝐶𝑊</m:t>
                       </m:r>
+                      <m:r>
+                        <a:rPr lang="en-US" altLang="zh-CN" b="0" i="1" dirty="0" smtClean="0">
+                          <a:latin typeface="Cambria Math" panose="02040503050406030204" pitchFamily="18" charset="0"/>
+                          <a:ea typeface="宋体" panose="02010600030101010101" pitchFamily="2" charset="-122"/>
+                        </a:rPr>
+                        <m:t>=</m:t>
+                      </m:r>
+                      <m:r>
+                        <a:rPr lang="en-US" altLang="zh-CN" b="0" i="1" dirty="0" smtClean="0">
+                          <a:latin typeface="Cambria Math" panose="02040503050406030204" pitchFamily="18" charset="0"/>
+                          <a:ea typeface="宋体" panose="02010600030101010101" pitchFamily="2" charset="-122"/>
+                        </a:rPr>
+                        <m:t>𝐶</m:t>
+                      </m:r>
+                      <m:sSub>
+                        <m:sSubPr>
+                          <m:ctrlPr>
+                            <a:rPr lang="en-US" altLang="zh-CN" b="0" i="1" dirty="0" smtClean="0">
+                              <a:latin typeface="Cambria Math" panose="02040503050406030204" pitchFamily="18" charset="0"/>
+                              <a:ea typeface="宋体" panose="02010600030101010101" pitchFamily="2" charset="-122"/>
+                            </a:rPr>
+                          </m:ctrlPr>
+                        </m:sSubPr>
+                        <m:e>
+                          <m:r>
+                            <a:rPr lang="en-US" altLang="zh-CN" b="0" i="1" dirty="0" smtClean="0">
+                              <a:latin typeface="Cambria Math" panose="02040503050406030204" pitchFamily="18" charset="0"/>
+                              <a:ea typeface="宋体" panose="02010600030101010101" pitchFamily="2" charset="-122"/>
+                            </a:rPr>
+                            <m:t>𝑊</m:t>
+                          </m:r>
+                        </m:e>
+                        <m:sub>
+                          <m:r>
+                            <a:rPr lang="en-US" altLang="zh-CN" b="0" i="1" dirty="0" smtClean="0">
+                              <a:latin typeface="Cambria Math" panose="02040503050406030204" pitchFamily="18" charset="0"/>
+                              <a:ea typeface="宋体" panose="02010600030101010101" pitchFamily="2" charset="-122"/>
+                            </a:rPr>
+                            <m:t>𝑚𝑖𝑛</m:t>
+                          </m:r>
+                        </m:sub>
+                      </m:sSub>
                     </m:oMath>
                   </a14:m>
+                  <a:endParaRPr lang="en-US" altLang="zh-CN" dirty="0">
+                    <a:latin typeface="Times New Roman" panose="02020603050405020304" pitchFamily="18" charset="0"/>
+                    <a:ea typeface="宋体" panose="02010600030101010101" pitchFamily="2" charset="-122"/>
+                  </a:endParaRPr>
+                </a:p>
+                <a:p>
+                  <a:pPr algn="ctr"/>
                   <a:r>
                     <a:rPr lang="zh-CN" altLang="en-US" dirty="0">
                       <a:latin typeface="Times New Roman" panose="02020603050405020304" pitchFamily="18" charset="0"/>
                       <a:ea typeface="宋体" panose="02010600030101010101" pitchFamily="2" charset="-122"/>
                     </a:rPr>
-                    <a:t>减一</a:t>
+                    <a:t>生成随机数 </a:t>
                   </a:r>
+                  <a14:m>
+                    <m:oMath xmlns:m="http://schemas.openxmlformats.org/officeDocument/2006/math">
+                      <m:r>
+                        <a:rPr lang="en-US" altLang="zh-CN" i="1" dirty="0">
+                          <a:latin typeface="Cambria Math" panose="02040503050406030204" pitchFamily="18" charset="0"/>
+                          <a:ea typeface="宋体" panose="02010600030101010101" pitchFamily="2" charset="-122"/>
+                        </a:rPr>
+                        <m:t>𝑁</m:t>
+                      </m:r>
+                      <m:r>
+                        <a:rPr lang="en-US" altLang="zh-CN" i="1" dirty="0">
+                          <a:latin typeface="Cambria Math" panose="02040503050406030204" pitchFamily="18" charset="0"/>
+                          <a:ea typeface="宋体" panose="02010600030101010101" pitchFamily="2" charset="-122"/>
+                        </a:rPr>
+                        <m:t>∈ [0, </m:t>
+                      </m:r>
+                      <m:r>
+                        <a:rPr lang="en-US" altLang="zh-CN" i="1" dirty="0">
+                          <a:latin typeface="Cambria Math" panose="02040503050406030204" pitchFamily="18" charset="0"/>
+                          <a:ea typeface="宋体" panose="02010600030101010101" pitchFamily="2" charset="-122"/>
+                        </a:rPr>
+                        <m:t>𝐶𝑊</m:t>
+                      </m:r>
+                      <m:r>
+                        <a:rPr lang="en-US" altLang="zh-CN" i="1" dirty="0">
+                          <a:latin typeface="Cambria Math" panose="02040503050406030204" pitchFamily="18" charset="0"/>
+                          <a:ea typeface="宋体" panose="02010600030101010101" pitchFamily="2" charset="-122"/>
+                        </a:rPr>
+                        <m:t>]</m:t>
+                      </m:r>
+                    </m:oMath>
+                  </a14:m>
+                  <a:endParaRPr lang="en-US" altLang="zh-CN" dirty="0">
+                    <a:latin typeface="Times New Roman" panose="02020603050405020304" pitchFamily="18" charset="0"/>
+                    <a:ea typeface="宋体" panose="02010600030101010101" pitchFamily="2" charset="-122"/>
+                  </a:endParaRPr>
                 </a:p>
               </p:txBody>
             </p:sp>
@@ -35108,10 +33774,10 @@
           <mc:Fallback xmlns="">
             <p:sp>
               <p:nvSpPr>
-                <p:cNvPr id="149" name="文本框 148">
+                <p:cNvPr id="3" name="文本框 2">
                   <a:extLst>
                     <a:ext uri="{FF2B5EF4-FFF2-40B4-BE49-F238E27FC236}">
-                      <a16:creationId xmlns:a16="http://schemas.microsoft.com/office/drawing/2014/main" id="{4CD8618B-2C2F-387F-50CC-0E38C6D7A2BF}"/>
+                      <a16:creationId xmlns:a16="http://schemas.microsoft.com/office/drawing/2014/main" id="{3C28E2EE-28FF-44B4-7C4A-09596371771C}"/>
                     </a:ext>
                   </a:extLst>
                 </p:cNvPr>
@@ -35122,16 +33788,16 @@
               </p:nvSpPr>
               <p:spPr>
                 <a:xfrm>
-                  <a:off x="4496837" y="1756771"/>
-                  <a:ext cx="2135911" cy="327722"/>
+                  <a:off x="322949" y="701747"/>
+                  <a:ext cx="3320230" cy="646331"/>
                 </a:xfrm>
                 <a:prstGeom prst="rect">
                   <a:avLst/>
                 </a:prstGeom>
                 <a:blipFill>
-                  <a:blip r:embed="rId6"/>
+                  <a:blip r:embed="rId2"/>
                   <a:stretch>
-                    <a:fillRect t="-20370" b="-31481"/>
+                    <a:fillRect t="-6604" b="-13208"/>
                   </a:stretch>
                 </a:blipFill>
               </p:spPr>
@@ -35150,855 +33816,2231 @@
             </p:sp>
           </mc:Fallback>
         </mc:AlternateContent>
-      </p:grpSp>
-      <p:cxnSp>
-        <p:nvCxnSpPr>
-          <p:cNvPr id="152" name="直接箭头连接符 151">
-            <a:extLst>
-              <a:ext uri="{FF2B5EF4-FFF2-40B4-BE49-F238E27FC236}">
-                <a16:creationId xmlns:a16="http://schemas.microsoft.com/office/drawing/2014/main" id="{1DE760E3-80F4-0734-A0BC-9F6C1C1D68AA}"/>
-              </a:ext>
-            </a:extLst>
-          </p:cNvPr>
-          <p:cNvCxnSpPr>
-            <a:cxnSpLocks/>
-            <a:stCxn id="148" idx="2"/>
-            <a:endCxn id="138" idx="0"/>
-          </p:cNvCxnSpPr>
-          <p:nvPr/>
-        </p:nvCxnSpPr>
-        <p:spPr>
-          <a:xfrm>
-            <a:off x="5462824" y="2502123"/>
-            <a:ext cx="0" cy="254050"/>
-          </a:xfrm>
-          <a:prstGeom prst="straightConnector1">
-            <a:avLst/>
-          </a:prstGeom>
-          <a:ln w="19050">
-            <a:solidFill>
-              <a:schemeClr val="tx1"/>
-            </a:solidFill>
-            <a:tailEnd type="triangle"/>
-          </a:ln>
-        </p:spPr>
-        <p:style>
-          <a:lnRef idx="1">
-            <a:schemeClr val="accent1"/>
-          </a:lnRef>
-          <a:fillRef idx="0">
-            <a:schemeClr val="accent1"/>
-          </a:fillRef>
-          <a:effectRef idx="0">
-            <a:schemeClr val="accent1"/>
-          </a:effectRef>
-          <a:fontRef idx="minor">
-            <a:schemeClr val="tx1"/>
-          </a:fontRef>
-        </p:style>
-      </p:cxnSp>
-      <p:cxnSp>
-        <p:nvCxnSpPr>
-          <p:cNvPr id="172" name="直接箭头连接符 171">
-            <a:extLst>
-              <a:ext uri="{FF2B5EF4-FFF2-40B4-BE49-F238E27FC236}">
-                <a16:creationId xmlns:a16="http://schemas.microsoft.com/office/drawing/2014/main" id="{66257E67-5CF8-8B36-658C-7B2DCA817D0C}"/>
-              </a:ext>
-            </a:extLst>
-          </p:cNvPr>
-          <p:cNvCxnSpPr>
-            <a:cxnSpLocks/>
-            <a:stCxn id="145" idx="2"/>
-            <a:endCxn id="208" idx="0"/>
-          </p:cNvCxnSpPr>
-          <p:nvPr/>
-        </p:nvCxnSpPr>
-        <p:spPr>
-          <a:xfrm flipH="1">
-            <a:off x="5458579" y="5599745"/>
-            <a:ext cx="4246" cy="355102"/>
-          </a:xfrm>
-          <a:prstGeom prst="straightConnector1">
-            <a:avLst/>
-          </a:prstGeom>
-          <a:ln w="19050">
-            <a:solidFill>
-              <a:schemeClr val="tx1"/>
-            </a:solidFill>
-            <a:tailEnd type="triangle"/>
-          </a:ln>
-        </p:spPr>
-        <p:style>
-          <a:lnRef idx="1">
-            <a:schemeClr val="accent1"/>
-          </a:lnRef>
-          <a:fillRef idx="0">
-            <a:schemeClr val="accent1"/>
-          </a:fillRef>
-          <a:effectRef idx="0">
-            <a:schemeClr val="accent1"/>
-          </a:effectRef>
-          <a:fontRef idx="minor">
-            <a:schemeClr val="tx1"/>
-          </a:fontRef>
-        </p:style>
-      </p:cxnSp>
-      <p:cxnSp>
-        <p:nvCxnSpPr>
-          <p:cNvPr id="174" name="直接箭头连接符 173">
-            <a:extLst>
-              <a:ext uri="{FF2B5EF4-FFF2-40B4-BE49-F238E27FC236}">
-                <a16:creationId xmlns:a16="http://schemas.microsoft.com/office/drawing/2014/main" id="{EA425204-CD49-FAD0-8A03-5182B225D575}"/>
-              </a:ext>
-            </a:extLst>
-          </p:cNvPr>
-          <p:cNvCxnSpPr>
-            <a:cxnSpLocks/>
-            <a:stCxn id="145" idx="3"/>
-          </p:cNvCxnSpPr>
-          <p:nvPr/>
-        </p:nvCxnSpPr>
-        <p:spPr>
-          <a:xfrm flipV="1">
-            <a:off x="6998129" y="5090686"/>
-            <a:ext cx="759141" cy="1364"/>
-          </a:xfrm>
-          <a:prstGeom prst="bentConnector3">
-            <a:avLst>
-              <a:gd name="adj1" fmla="val 50000"/>
-            </a:avLst>
-          </a:prstGeom>
-          <a:ln w="19050">
-            <a:solidFill>
-              <a:schemeClr val="tx1"/>
-            </a:solidFill>
-            <a:tailEnd type="triangle"/>
-          </a:ln>
-        </p:spPr>
-        <p:style>
-          <a:lnRef idx="1">
-            <a:schemeClr val="accent1"/>
-          </a:lnRef>
-          <a:fillRef idx="0">
-            <a:schemeClr val="accent1"/>
-          </a:fillRef>
-          <a:effectRef idx="0">
-            <a:schemeClr val="accent1"/>
-          </a:effectRef>
-          <a:fontRef idx="minor">
-            <a:schemeClr val="tx1"/>
-          </a:fontRef>
-        </p:style>
-      </p:cxnSp>
-      <p:cxnSp>
-        <p:nvCxnSpPr>
-          <p:cNvPr id="184" name="直接箭头连接符 183">
-            <a:extLst>
-              <a:ext uri="{FF2B5EF4-FFF2-40B4-BE49-F238E27FC236}">
-                <a16:creationId xmlns:a16="http://schemas.microsoft.com/office/drawing/2014/main" id="{AFF29800-BAA3-2D68-74BB-2E34D3ADBCFE}"/>
-              </a:ext>
-            </a:extLst>
-          </p:cNvPr>
-          <p:cNvCxnSpPr>
-            <a:stCxn id="59" idx="2"/>
-            <a:endCxn id="145" idx="0"/>
-          </p:cNvCxnSpPr>
-          <p:nvPr/>
-        </p:nvCxnSpPr>
-        <p:spPr>
-          <a:xfrm flipH="1">
-            <a:off x="5462825" y="4396690"/>
-            <a:ext cx="2109" cy="187665"/>
-          </a:xfrm>
-          <a:prstGeom prst="straightConnector1">
-            <a:avLst/>
-          </a:prstGeom>
-          <a:ln w="19050">
-            <a:solidFill>
-              <a:schemeClr val="tx1"/>
-            </a:solidFill>
-            <a:tailEnd type="triangle"/>
-          </a:ln>
-        </p:spPr>
-        <p:style>
-          <a:lnRef idx="1">
-            <a:schemeClr val="accent1"/>
-          </a:lnRef>
-          <a:fillRef idx="0">
-            <a:schemeClr val="accent1"/>
-          </a:fillRef>
-          <a:effectRef idx="0">
-            <a:schemeClr val="accent1"/>
-          </a:effectRef>
-          <a:fontRef idx="minor">
-            <a:schemeClr val="tx1"/>
-          </a:fontRef>
-        </p:style>
-      </p:cxnSp>
-      <p:sp>
-        <p:nvSpPr>
-          <p:cNvPr id="187" name="文本框 186">
-            <a:extLst>
-              <a:ext uri="{FF2B5EF4-FFF2-40B4-BE49-F238E27FC236}">
-                <a16:creationId xmlns:a16="http://schemas.microsoft.com/office/drawing/2014/main" id="{F238CA07-EE20-B274-9CCC-2487E0A8882C}"/>
-              </a:ext>
-            </a:extLst>
-          </p:cNvPr>
-          <p:cNvSpPr txBox="1"/>
-          <p:nvPr/>
-        </p:nvSpPr>
-        <p:spPr>
-          <a:xfrm>
-            <a:off x="6881163" y="2827078"/>
-            <a:ext cx="463648" cy="327722"/>
-          </a:xfrm>
-          <a:prstGeom prst="rect">
-            <a:avLst/>
-          </a:prstGeom>
-          <a:noFill/>
-        </p:spPr>
-        <p:txBody>
-          <a:bodyPr wrap="square" rtlCol="0" anchor="ctr" anchorCtr="1">
-            <a:spAutoFit/>
-          </a:bodyPr>
-          <a:lstStyle/>
-          <a:p>
-            <a:pPr algn="ctr"/>
-            <a:r>
-              <a:rPr lang="zh-CN" altLang="en-US" dirty="0">
-                <a:latin typeface="Times New Roman" panose="02020603050405020304" pitchFamily="18" charset="0"/>
-                <a:ea typeface="宋体" panose="02010600030101010101" pitchFamily="2" charset="-122"/>
-              </a:rPr>
-              <a:t>否</a:t>
-            </a:r>
-          </a:p>
-        </p:txBody>
-      </p:sp>
-      <p:sp>
-        <p:nvSpPr>
-          <p:cNvPr id="188" name="文本框 187">
-            <a:extLst>
-              <a:ext uri="{FF2B5EF4-FFF2-40B4-BE49-F238E27FC236}">
-                <a16:creationId xmlns:a16="http://schemas.microsoft.com/office/drawing/2014/main" id="{D643235A-30B3-4A36-647B-B4932738206A}"/>
-              </a:ext>
-            </a:extLst>
-          </p:cNvPr>
-          <p:cNvSpPr txBox="1"/>
-          <p:nvPr/>
-        </p:nvSpPr>
-        <p:spPr>
-          <a:xfrm>
-            <a:off x="5462823" y="3581622"/>
-            <a:ext cx="463648" cy="327722"/>
-          </a:xfrm>
-          <a:prstGeom prst="rect">
-            <a:avLst/>
-          </a:prstGeom>
-          <a:noFill/>
-        </p:spPr>
-        <p:txBody>
-          <a:bodyPr wrap="square" rtlCol="0" anchor="ctr" anchorCtr="1">
-            <a:spAutoFit/>
-          </a:bodyPr>
-          <a:lstStyle/>
-          <a:p>
-            <a:pPr algn="ctr"/>
-            <a:r>
-              <a:rPr lang="zh-CN" altLang="en-US" dirty="0">
-                <a:latin typeface="Times New Roman" panose="02020603050405020304" pitchFamily="18" charset="0"/>
-                <a:ea typeface="宋体" panose="02010600030101010101" pitchFamily="2" charset="-122"/>
-              </a:rPr>
-              <a:t>是</a:t>
-            </a:r>
-          </a:p>
-        </p:txBody>
-      </p:sp>
-      <p:sp>
-        <p:nvSpPr>
-          <p:cNvPr id="189" name="文本框 188">
-            <a:extLst>
-              <a:ext uri="{FF2B5EF4-FFF2-40B4-BE49-F238E27FC236}">
-                <a16:creationId xmlns:a16="http://schemas.microsoft.com/office/drawing/2014/main" id="{F9D7C336-2B36-037D-A56E-BF8B32180ADB}"/>
-              </a:ext>
-            </a:extLst>
-          </p:cNvPr>
-          <p:cNvSpPr txBox="1"/>
-          <p:nvPr/>
-        </p:nvSpPr>
-        <p:spPr>
-          <a:xfrm>
-            <a:off x="5462823" y="1466589"/>
-            <a:ext cx="463648" cy="327722"/>
-          </a:xfrm>
-          <a:prstGeom prst="rect">
-            <a:avLst/>
-          </a:prstGeom>
-          <a:noFill/>
-        </p:spPr>
-        <p:txBody>
-          <a:bodyPr wrap="square" rtlCol="0" anchor="ctr" anchorCtr="1">
-            <a:spAutoFit/>
-          </a:bodyPr>
-          <a:lstStyle/>
-          <a:p>
-            <a:pPr algn="ctr"/>
-            <a:r>
-              <a:rPr lang="zh-CN" altLang="en-US" dirty="0">
-                <a:latin typeface="Times New Roman" panose="02020603050405020304" pitchFamily="18" charset="0"/>
-                <a:ea typeface="宋体" panose="02010600030101010101" pitchFamily="2" charset="-122"/>
-              </a:rPr>
-              <a:t>是</a:t>
-            </a:r>
-          </a:p>
-        </p:txBody>
-      </p:sp>
-      <p:sp>
-        <p:nvSpPr>
-          <p:cNvPr id="190" name="文本框 189">
-            <a:extLst>
-              <a:ext uri="{FF2B5EF4-FFF2-40B4-BE49-F238E27FC236}">
-                <a16:creationId xmlns:a16="http://schemas.microsoft.com/office/drawing/2014/main" id="{A55EC7A4-F28D-42CC-AB9D-E4B77238E520}"/>
-              </a:ext>
-            </a:extLst>
-          </p:cNvPr>
-          <p:cNvSpPr txBox="1"/>
-          <p:nvPr/>
-        </p:nvSpPr>
-        <p:spPr>
-          <a:xfrm>
-            <a:off x="6881163" y="663858"/>
-            <a:ext cx="463648" cy="327722"/>
-          </a:xfrm>
-          <a:prstGeom prst="rect">
-            <a:avLst/>
-          </a:prstGeom>
-          <a:noFill/>
-        </p:spPr>
-        <p:txBody>
-          <a:bodyPr wrap="square" rtlCol="0" anchor="ctr" anchorCtr="1">
-            <a:spAutoFit/>
-          </a:bodyPr>
-          <a:lstStyle/>
-          <a:p>
-            <a:pPr algn="ctr"/>
-            <a:r>
-              <a:rPr lang="zh-CN" altLang="en-US" dirty="0">
-                <a:latin typeface="Times New Roman" panose="02020603050405020304" pitchFamily="18" charset="0"/>
-                <a:ea typeface="宋体" panose="02010600030101010101" pitchFamily="2" charset="-122"/>
-              </a:rPr>
-              <a:t>否</a:t>
-            </a:r>
-          </a:p>
-        </p:txBody>
-      </p:sp>
-      <p:sp>
-        <p:nvSpPr>
-          <p:cNvPr id="208" name="流程图: 终止 207">
-            <a:extLst>
-              <a:ext uri="{FF2B5EF4-FFF2-40B4-BE49-F238E27FC236}">
-                <a16:creationId xmlns:a16="http://schemas.microsoft.com/office/drawing/2014/main" id="{54E9F143-8E2C-997A-7871-9A067D7C36FA}"/>
-              </a:ext>
-            </a:extLst>
-          </p:cNvPr>
-          <p:cNvSpPr/>
-          <p:nvPr/>
-        </p:nvSpPr>
-        <p:spPr>
-          <a:xfrm>
-            <a:off x="4268027" y="5954847"/>
-            <a:ext cx="2381104" cy="787681"/>
-          </a:xfrm>
-          <a:prstGeom prst="flowChartTerminator">
-            <a:avLst/>
-          </a:prstGeom>
-          <a:solidFill>
-            <a:schemeClr val="accent3">
-              <a:lumMod val="20000"/>
-              <a:lumOff val="80000"/>
-            </a:schemeClr>
-          </a:solidFill>
-          <a:ln w="19050">
-            <a:solidFill>
-              <a:schemeClr val="tx1"/>
-            </a:solidFill>
-          </a:ln>
-        </p:spPr>
-        <p:style>
-          <a:lnRef idx="2">
-            <a:schemeClr val="accent1">
-              <a:shade val="15000"/>
-            </a:schemeClr>
-          </a:lnRef>
-          <a:fillRef idx="1">
-            <a:schemeClr val="accent1"/>
-          </a:fillRef>
-          <a:effectRef idx="0">
-            <a:schemeClr val="accent1"/>
-          </a:effectRef>
-          <a:fontRef idx="minor">
-            <a:schemeClr val="lt1"/>
-          </a:fontRef>
-        </p:style>
-        <p:txBody>
-          <a:bodyPr rtlCol="0" anchor="ctr"/>
-          <a:lstStyle/>
-          <a:p>
-            <a:pPr algn="ctr"/>
-            <a:endParaRPr lang="zh-CN" altLang="en-US" dirty="0" err="1">
+        <p:cxnSp>
+          <p:nvCxnSpPr>
+            <p:cNvPr id="17" name="直接箭头连接符 16">
+              <a:extLst>
+                <a:ext uri="{FF2B5EF4-FFF2-40B4-BE49-F238E27FC236}">
+                  <a16:creationId xmlns:a16="http://schemas.microsoft.com/office/drawing/2014/main" id="{F4BC76EE-D638-3D3C-9B19-EE30CE24575E}"/>
+                </a:ext>
+              </a:extLst>
+            </p:cNvPr>
+            <p:cNvCxnSpPr>
+              <a:cxnSpLocks/>
+              <a:stCxn id="2" idx="3"/>
+              <a:endCxn id="107" idx="1"/>
+            </p:cNvCxnSpPr>
+            <p:nvPr/>
+          </p:nvCxnSpPr>
+          <p:spPr>
+            <a:xfrm>
+              <a:off x="3534293" y="995026"/>
+              <a:ext cx="393227" cy="41"/>
+            </a:xfrm>
+            <a:prstGeom prst="straightConnector1">
+              <a:avLst/>
+            </a:prstGeom>
+            <a:ln w="19050">
               <a:solidFill>
                 <a:schemeClr val="tx1"/>
               </a:solidFill>
-            </a:endParaRPr>
-          </a:p>
-        </p:txBody>
-      </p:sp>
-      <p:sp>
-        <p:nvSpPr>
-          <p:cNvPr id="78" name="文本框 77">
-            <a:extLst>
-              <a:ext uri="{FF2B5EF4-FFF2-40B4-BE49-F238E27FC236}">
-                <a16:creationId xmlns:a16="http://schemas.microsoft.com/office/drawing/2014/main" id="{2F3754FC-C540-2C55-E949-1F089EF2695F}"/>
-              </a:ext>
-            </a:extLst>
-          </p:cNvPr>
-          <p:cNvSpPr txBox="1"/>
-          <p:nvPr/>
-        </p:nvSpPr>
-        <p:spPr>
-          <a:xfrm>
-            <a:off x="4038134" y="6237572"/>
-            <a:ext cx="2840890" cy="222231"/>
-          </a:xfrm>
-          <a:prstGeom prst="rect">
-            <a:avLst/>
-          </a:prstGeom>
-          <a:noFill/>
-        </p:spPr>
-        <p:txBody>
-          <a:bodyPr wrap="square" rtlCol="0" anchor="ctr" anchorCtr="1">
-            <a:spAutoFit/>
-          </a:bodyPr>
-          <a:lstStyle/>
-          <a:p>
-            <a:pPr algn="ctr"/>
-            <a:r>
-              <a:rPr lang="zh-CN" altLang="en-US" dirty="0">
-                <a:latin typeface="Times New Roman" panose="02020603050405020304" pitchFamily="18" charset="0"/>
-                <a:ea typeface="宋体" panose="02010600030101010101" pitchFamily="2" charset="-122"/>
-              </a:rPr>
-              <a:t>传输结束</a:t>
-            </a:r>
-            <a:endParaRPr lang="en-US" altLang="zh-CN" dirty="0">
-              <a:latin typeface="Times New Roman" panose="02020603050405020304" pitchFamily="18" charset="0"/>
-              <a:ea typeface="宋体" panose="02010600030101010101" pitchFamily="2" charset="-122"/>
-            </a:endParaRPr>
-          </a:p>
-        </p:txBody>
-      </p:sp>
-      <p:cxnSp>
-        <p:nvCxnSpPr>
-          <p:cNvPr id="215" name="直接箭头连接符 214">
-            <a:extLst>
-              <a:ext uri="{FF2B5EF4-FFF2-40B4-BE49-F238E27FC236}">
-                <a16:creationId xmlns:a16="http://schemas.microsoft.com/office/drawing/2014/main" id="{6776D8BC-D26D-269A-D6BF-7D6030CA5693}"/>
-              </a:ext>
-            </a:extLst>
-          </p:cNvPr>
-          <p:cNvCxnSpPr>
-            <a:cxnSpLocks/>
-            <a:stCxn id="22" idx="0"/>
-            <a:endCxn id="2" idx="2"/>
-          </p:cNvCxnSpPr>
-          <p:nvPr/>
-        </p:nvCxnSpPr>
-        <p:spPr>
-          <a:xfrm flipV="1">
-            <a:off x="2030844" y="1539297"/>
-            <a:ext cx="0" cy="1418505"/>
-          </a:xfrm>
-          <a:prstGeom prst="straightConnector1">
-            <a:avLst/>
-          </a:prstGeom>
-          <a:ln w="19050">
+              <a:tailEnd type="triangle"/>
+            </a:ln>
+          </p:spPr>
+          <p:style>
+            <a:lnRef idx="1">
+              <a:schemeClr val="accent1"/>
+            </a:lnRef>
+            <a:fillRef idx="0">
+              <a:schemeClr val="accent1"/>
+            </a:fillRef>
+            <a:effectRef idx="0">
+              <a:schemeClr val="accent1"/>
+            </a:effectRef>
+            <a:fontRef idx="minor">
+              <a:schemeClr val="tx1"/>
+            </a:fontRef>
+          </p:style>
+        </p:cxnSp>
+        <p:sp>
+          <p:nvSpPr>
+            <p:cNvPr id="9" name="矩形 8">
+              <a:extLst>
+                <a:ext uri="{FF2B5EF4-FFF2-40B4-BE49-F238E27FC236}">
+                  <a16:creationId xmlns:a16="http://schemas.microsoft.com/office/drawing/2014/main" id="{50DF8695-7FF0-E790-0616-C1876B489F98}"/>
+                </a:ext>
+              </a:extLst>
+            </p:cNvPr>
+            <p:cNvSpPr/>
+            <p:nvPr/>
+          </p:nvSpPr>
+          <p:spPr>
+            <a:xfrm>
+              <a:off x="8365172" y="646310"/>
+              <a:ext cx="2461546" cy="690539"/>
+            </a:xfrm>
+            <a:prstGeom prst="rect">
+              <a:avLst/>
+            </a:prstGeom>
             <a:solidFill>
-              <a:schemeClr val="tx1"/>
+              <a:srgbClr val="ECFDF5"/>
             </a:solidFill>
-            <a:tailEnd type="triangle"/>
-          </a:ln>
-        </p:spPr>
-        <p:style>
-          <a:lnRef idx="1">
-            <a:schemeClr val="accent1"/>
-          </a:lnRef>
-          <a:fillRef idx="0">
-            <a:schemeClr val="accent1"/>
-          </a:fillRef>
-          <a:effectRef idx="0">
-            <a:schemeClr val="accent1"/>
-          </a:effectRef>
-          <a:fontRef idx="minor">
-            <a:schemeClr val="tx1"/>
-          </a:fontRef>
-        </p:style>
-      </p:cxnSp>
-      <p:cxnSp>
-        <p:nvCxnSpPr>
-          <p:cNvPr id="20" name="直接连接符 19">
-            <a:extLst>
-              <a:ext uri="{FF2B5EF4-FFF2-40B4-BE49-F238E27FC236}">
-                <a16:creationId xmlns:a16="http://schemas.microsoft.com/office/drawing/2014/main" id="{30ECA69D-1ADB-D004-83CD-0AB0821D9326}"/>
-              </a:ext>
-            </a:extLst>
-          </p:cNvPr>
-          <p:cNvCxnSpPr>
-            <a:cxnSpLocks/>
-            <a:stCxn id="9" idx="3"/>
-          </p:cNvCxnSpPr>
-          <p:nvPr/>
-        </p:nvCxnSpPr>
-        <p:spPr>
-          <a:xfrm>
-            <a:off x="10826718" y="991580"/>
-            <a:ext cx="1042334" cy="0"/>
-          </a:xfrm>
-          <a:prstGeom prst="line">
-            <a:avLst/>
-          </a:prstGeom>
-          <a:ln w="22225">
-            <a:solidFill>
-              <a:schemeClr val="tx1"/>
-            </a:solidFill>
-            <a:tailEnd type="none"/>
-          </a:ln>
-        </p:spPr>
-        <p:style>
-          <a:lnRef idx="1">
-            <a:schemeClr val="accent1"/>
-          </a:lnRef>
-          <a:fillRef idx="0">
-            <a:schemeClr val="accent1"/>
-          </a:fillRef>
-          <a:effectRef idx="0">
-            <a:schemeClr val="accent1"/>
-          </a:effectRef>
-          <a:fontRef idx="minor">
-            <a:schemeClr val="tx1"/>
-          </a:fontRef>
-        </p:style>
-      </p:cxnSp>
-      <p:sp>
-        <p:nvSpPr>
-          <p:cNvPr id="22" name="流程图: 终止 21">
-            <a:extLst>
-              <a:ext uri="{FF2B5EF4-FFF2-40B4-BE49-F238E27FC236}">
-                <a16:creationId xmlns:a16="http://schemas.microsoft.com/office/drawing/2014/main" id="{7CF13436-AD08-D1C6-167F-AF3BF9710B61}"/>
-              </a:ext>
-            </a:extLst>
-          </p:cNvPr>
-          <p:cNvSpPr/>
-          <p:nvPr/>
-        </p:nvSpPr>
-        <p:spPr>
-          <a:xfrm>
-            <a:off x="527394" y="2957802"/>
-            <a:ext cx="3006899" cy="787681"/>
-          </a:xfrm>
-          <a:prstGeom prst="flowChartTerminator">
-            <a:avLst/>
-          </a:prstGeom>
-          <a:solidFill>
-            <a:schemeClr val="accent3">
-              <a:lumMod val="20000"/>
-              <a:lumOff val="80000"/>
-            </a:schemeClr>
-          </a:solidFill>
-          <a:ln w="19050">
-            <a:solidFill>
-              <a:schemeClr val="tx1"/>
-            </a:solidFill>
-          </a:ln>
-        </p:spPr>
-        <p:style>
-          <a:lnRef idx="2">
-            <a:schemeClr val="accent1">
-              <a:shade val="15000"/>
-            </a:schemeClr>
-          </a:lnRef>
-          <a:fillRef idx="1">
-            <a:schemeClr val="accent1"/>
-          </a:fillRef>
-          <a:effectRef idx="0">
-            <a:schemeClr val="accent1"/>
-          </a:effectRef>
-          <a:fontRef idx="minor">
-            <a:schemeClr val="lt1"/>
-          </a:fontRef>
-        </p:style>
-        <p:txBody>
-          <a:bodyPr rtlCol="0" anchor="ctr"/>
-          <a:lstStyle/>
-          <a:p>
-            <a:pPr algn="ctr"/>
-            <a:endParaRPr lang="zh-CN" altLang="en-US" dirty="0" err="1">
+            <a:ln w="19050">
               <a:solidFill>
                 <a:schemeClr val="tx1"/>
               </a:solidFill>
-            </a:endParaRPr>
-          </a:p>
-        </p:txBody>
-      </p:sp>
-      <mc:AlternateContent xmlns:mc="http://schemas.openxmlformats.org/markup-compatibility/2006" xmlns:a14="http://schemas.microsoft.com/office/drawing/2010/main">
-        <mc:Choice Requires="a14">
-          <p:sp>
-            <p:nvSpPr>
-              <p:cNvPr id="23" name="文本框 22">
-                <a:extLst>
-                  <a:ext uri="{FF2B5EF4-FFF2-40B4-BE49-F238E27FC236}">
-                    <a16:creationId xmlns:a16="http://schemas.microsoft.com/office/drawing/2014/main" id="{427D1599-0021-4CCD-F79B-F21DF6CAD45F}"/>
-                  </a:ext>
-                </a:extLst>
-              </p:cNvPr>
-              <p:cNvSpPr txBox="1"/>
-              <p:nvPr/>
-            </p:nvSpPr>
-            <p:spPr>
-              <a:xfrm>
-                <a:off x="562619" y="3028477"/>
-                <a:ext cx="2840890" cy="646331"/>
-              </a:xfrm>
-              <a:prstGeom prst="rect">
-                <a:avLst/>
-              </a:prstGeom>
-              <a:noFill/>
-            </p:spPr>
-            <p:txBody>
-              <a:bodyPr wrap="square" rtlCol="0" anchor="ctr" anchorCtr="1">
-                <a:spAutoFit/>
-              </a:bodyPr>
-              <a:lstStyle/>
-              <a:p>
-                <a:pPr algn="ctr"/>
-                <a:r>
-                  <a:rPr lang="zh-CN" altLang="en-US" dirty="0">
+            </a:ln>
+          </p:spPr>
+          <p:style>
+            <a:lnRef idx="2">
+              <a:schemeClr val="accent1">
+                <a:shade val="15000"/>
+              </a:schemeClr>
+            </a:lnRef>
+            <a:fillRef idx="1">
+              <a:schemeClr val="accent1"/>
+            </a:fillRef>
+            <a:effectRef idx="0">
+              <a:schemeClr val="accent1"/>
+            </a:effectRef>
+            <a:fontRef idx="minor">
+              <a:schemeClr val="lt1"/>
+            </a:fontRef>
+          </p:style>
+          <p:txBody>
+            <a:bodyPr rtlCol="0" anchor="ctr"/>
+            <a:lstStyle/>
+            <a:p>
+              <a:pPr algn="ctr"/>
+              <a:endParaRPr lang="zh-CN" altLang="en-US" dirty="0" err="1">
+                <a:solidFill>
+                  <a:schemeClr val="tx1"/>
+                </a:solidFill>
+                <a:latin typeface="Times New Roman" panose="02020603050405020304" pitchFamily="18" charset="0"/>
+                <a:ea typeface="宋体" panose="02010600030101010101" pitchFamily="2" charset="-122"/>
+              </a:endParaRPr>
+            </a:p>
+          </p:txBody>
+        </p:sp>
+        <mc:AlternateContent xmlns:mc="http://schemas.openxmlformats.org/markup-compatibility/2006" xmlns:a14="http://schemas.microsoft.com/office/drawing/2010/main">
+          <mc:Choice Requires="a14">
+            <p:sp>
+              <p:nvSpPr>
+                <p:cNvPr id="10" name="文本框 9">
+                  <a:extLst>
+                    <a:ext uri="{FF2B5EF4-FFF2-40B4-BE49-F238E27FC236}">
+                      <a16:creationId xmlns:a16="http://schemas.microsoft.com/office/drawing/2014/main" id="{6D9731EB-1D08-F1B0-5EF7-7E3983DACE05}"/>
+                    </a:ext>
+                  </a:extLst>
+                </p:cNvPr>
+                <p:cNvSpPr txBox="1"/>
+                <p:nvPr/>
+              </p:nvSpPr>
+              <p:spPr>
+                <a:xfrm>
+                  <a:off x="8404334" y="806912"/>
+                  <a:ext cx="2391652" cy="369332"/>
+                </a:xfrm>
+                <a:prstGeom prst="rect">
+                  <a:avLst/>
+                </a:prstGeom>
+                <a:noFill/>
+              </p:spPr>
+              <p:txBody>
+                <a:bodyPr wrap="square" rtlCol="0" anchor="ctr" anchorCtr="1">
+                  <a:spAutoFit/>
+                </a:bodyPr>
+                <a:lstStyle/>
+                <a:p>
+                  <a:pPr algn="ctr"/>
+                  <a:r>
+                    <a:rPr lang="zh-CN" altLang="en-US" dirty="0">
+                      <a:ea typeface="宋体" panose="02010600030101010101" pitchFamily="2" charset="-122"/>
+                    </a:rPr>
+                    <a:t>随机数</a:t>
+                  </a:r>
+                  <a14:m>
+                    <m:oMath xmlns:m="http://schemas.openxmlformats.org/officeDocument/2006/math">
+                      <m:r>
+                        <a:rPr lang="en-US" altLang="zh-CN" i="1" dirty="0" smtClean="0">
+                          <a:latin typeface="Cambria Math" panose="02040503050406030204" pitchFamily="18" charset="0"/>
+                          <a:ea typeface="宋体" panose="02010600030101010101" pitchFamily="2" charset="-122"/>
+                        </a:rPr>
+                        <m:t>𝑁</m:t>
+                      </m:r>
+                    </m:oMath>
+                  </a14:m>
+                  <a:r>
+                    <a:rPr lang="zh-CN" altLang="en-US" dirty="0">
+                      <a:latin typeface="Times New Roman" panose="02020603050405020304" pitchFamily="18" charset="0"/>
+                      <a:ea typeface="宋体" panose="02010600030101010101" pitchFamily="2" charset="-122"/>
+                    </a:rPr>
+                    <a:t>保持</a:t>
+                  </a:r>
+                </a:p>
+              </p:txBody>
+            </p:sp>
+          </mc:Choice>
+          <mc:Fallback xmlns="">
+            <p:sp>
+              <p:nvSpPr>
+                <p:cNvPr id="10" name="文本框 9">
+                  <a:extLst>
+                    <a:ext uri="{FF2B5EF4-FFF2-40B4-BE49-F238E27FC236}">
+                      <a16:creationId xmlns:a16="http://schemas.microsoft.com/office/drawing/2014/main" id="{6D9731EB-1D08-F1B0-5EF7-7E3983DACE05}"/>
+                    </a:ext>
+                  </a:extLst>
+                </p:cNvPr>
+                <p:cNvSpPr txBox="1">
+                  <a:spLocks noRot="1" noChangeAspect="1" noMove="1" noResize="1" noEditPoints="1" noAdjustHandles="1" noChangeArrowheads="1" noChangeShapeType="1" noTextEdit="1"/>
+                </p:cNvSpPr>
+                <p:nvPr/>
+              </p:nvSpPr>
+              <p:spPr>
+                <a:xfrm>
+                  <a:off x="8404334" y="806912"/>
+                  <a:ext cx="2391652" cy="369332"/>
+                </a:xfrm>
+                <a:prstGeom prst="rect">
+                  <a:avLst/>
+                </a:prstGeom>
+                <a:blipFill>
+                  <a:blip r:embed="rId3"/>
+                  <a:stretch>
+                    <a:fillRect t="-11475" b="-22951"/>
+                  </a:stretch>
+                </a:blipFill>
+              </p:spPr>
+              <p:txBody>
+                <a:bodyPr/>
+                <a:lstStyle/>
+                <a:p>
+                  <a:r>
+                    <a:rPr lang="zh-CN" altLang="en-US">
+                      <a:noFill/>
+                    </a:rPr>
+                    <a:t> </a:t>
+                  </a:r>
+                </a:p>
+              </p:txBody>
+            </p:sp>
+          </mc:Fallback>
+        </mc:AlternateContent>
+        <p:cxnSp>
+          <p:nvCxnSpPr>
+            <p:cNvPr id="14" name="直接箭头连接符 13">
+              <a:extLst>
+                <a:ext uri="{FF2B5EF4-FFF2-40B4-BE49-F238E27FC236}">
+                  <a16:creationId xmlns:a16="http://schemas.microsoft.com/office/drawing/2014/main" id="{5F139A33-A66D-9793-8D9A-115F2F295C70}"/>
+                </a:ext>
+              </a:extLst>
+            </p:cNvPr>
+            <p:cNvCxnSpPr>
+              <a:cxnSpLocks/>
+              <a:stCxn id="107" idx="2"/>
+              <a:endCxn id="148" idx="0"/>
+            </p:cNvCxnSpPr>
+            <p:nvPr/>
+          </p:nvCxnSpPr>
+          <p:spPr>
+            <a:xfrm flipH="1">
+              <a:off x="5462824" y="1539338"/>
+              <a:ext cx="1" cy="272247"/>
+            </a:xfrm>
+            <a:prstGeom prst="straightConnector1">
+              <a:avLst/>
+            </a:prstGeom>
+            <a:ln w="19050">
+              <a:solidFill>
+                <a:schemeClr val="tx1"/>
+              </a:solidFill>
+              <a:tailEnd type="triangle"/>
+            </a:ln>
+          </p:spPr>
+          <p:style>
+            <a:lnRef idx="1">
+              <a:schemeClr val="accent1"/>
+            </a:lnRef>
+            <a:fillRef idx="0">
+              <a:schemeClr val="accent1"/>
+            </a:fillRef>
+            <a:effectRef idx="0">
+              <a:schemeClr val="accent1"/>
+            </a:effectRef>
+            <a:fontRef idx="minor">
+              <a:schemeClr val="tx1"/>
+            </a:fontRef>
+          </p:style>
+        </p:cxnSp>
+        <p:cxnSp>
+          <p:nvCxnSpPr>
+            <p:cNvPr id="30" name="直接箭头连接符 29">
+              <a:extLst>
+                <a:ext uri="{FF2B5EF4-FFF2-40B4-BE49-F238E27FC236}">
+                  <a16:creationId xmlns:a16="http://schemas.microsoft.com/office/drawing/2014/main" id="{668789DC-78DB-E6B5-339A-50559D807B14}"/>
+                </a:ext>
+              </a:extLst>
+            </p:cNvPr>
+            <p:cNvCxnSpPr>
+              <a:cxnSpLocks/>
+              <a:stCxn id="107" idx="3"/>
+              <a:endCxn id="9" idx="1"/>
+            </p:cNvCxnSpPr>
+            <p:nvPr/>
+          </p:nvCxnSpPr>
+          <p:spPr>
+            <a:xfrm flipV="1">
+              <a:off x="6998129" y="991580"/>
+              <a:ext cx="1367043" cy="3487"/>
+            </a:xfrm>
+            <a:prstGeom prst="straightConnector1">
+              <a:avLst/>
+            </a:prstGeom>
+            <a:ln w="22225">
+              <a:solidFill>
+                <a:schemeClr val="tx1"/>
+              </a:solidFill>
+              <a:tailEnd type="triangle"/>
+            </a:ln>
+          </p:spPr>
+          <p:style>
+            <a:lnRef idx="1">
+              <a:schemeClr val="accent1"/>
+            </a:lnRef>
+            <a:fillRef idx="0">
+              <a:schemeClr val="accent1"/>
+            </a:fillRef>
+            <a:effectRef idx="0">
+              <a:schemeClr val="accent1"/>
+            </a:effectRef>
+            <a:fontRef idx="minor">
+              <a:schemeClr val="tx1"/>
+            </a:fontRef>
+          </p:style>
+        </p:cxnSp>
+        <p:sp>
+          <p:nvSpPr>
+            <p:cNvPr id="59" name="矩形 58">
+              <a:extLst>
+                <a:ext uri="{FF2B5EF4-FFF2-40B4-BE49-F238E27FC236}">
+                  <a16:creationId xmlns:a16="http://schemas.microsoft.com/office/drawing/2014/main" id="{76372893-1E17-1D23-4F3D-5C7750259369}"/>
+                </a:ext>
+              </a:extLst>
+            </p:cNvPr>
+            <p:cNvSpPr/>
+            <p:nvPr/>
+          </p:nvSpPr>
+          <p:spPr>
+            <a:xfrm>
+              <a:off x="4044489" y="3904252"/>
+              <a:ext cx="2840890" cy="492439"/>
+            </a:xfrm>
+            <a:prstGeom prst="rect">
+              <a:avLst/>
+            </a:prstGeom>
+            <a:noFill/>
+            <a:ln w="19050">
+              <a:solidFill>
+                <a:schemeClr val="tx1"/>
+              </a:solidFill>
+            </a:ln>
+          </p:spPr>
+          <p:style>
+            <a:lnRef idx="2">
+              <a:schemeClr val="accent1">
+                <a:shade val="15000"/>
+              </a:schemeClr>
+            </a:lnRef>
+            <a:fillRef idx="1">
+              <a:schemeClr val="accent1"/>
+            </a:fillRef>
+            <a:effectRef idx="0">
+              <a:schemeClr val="accent1"/>
+            </a:effectRef>
+            <a:fontRef idx="minor">
+              <a:schemeClr val="lt1"/>
+            </a:fontRef>
+          </p:style>
+          <p:txBody>
+            <a:bodyPr rtlCol="0" anchor="ctr"/>
+            <a:lstStyle/>
+            <a:p>
+              <a:pPr algn="ctr"/>
+              <a:endParaRPr lang="zh-CN" altLang="en-US" dirty="0" err="1">
+                <a:solidFill>
+                  <a:schemeClr val="tx1"/>
+                </a:solidFill>
+                <a:latin typeface="Times New Roman" panose="02020603050405020304" pitchFamily="18" charset="0"/>
+                <a:ea typeface="宋体" panose="02010600030101010101" pitchFamily="2" charset="-122"/>
+              </a:endParaRPr>
+            </a:p>
+          </p:txBody>
+        </p:sp>
+        <p:sp>
+          <p:nvSpPr>
+            <p:cNvPr id="60" name="文本框 59">
+              <a:extLst>
+                <a:ext uri="{FF2B5EF4-FFF2-40B4-BE49-F238E27FC236}">
+                  <a16:creationId xmlns:a16="http://schemas.microsoft.com/office/drawing/2014/main" id="{C7730E32-5870-741F-A9F2-1EA01F4FF09A}"/>
+                </a:ext>
+              </a:extLst>
+            </p:cNvPr>
+            <p:cNvSpPr txBox="1"/>
+            <p:nvPr/>
+          </p:nvSpPr>
+          <p:spPr>
+            <a:xfrm>
+              <a:off x="4040271" y="3986609"/>
+              <a:ext cx="2845105" cy="327722"/>
+            </a:xfrm>
+            <a:prstGeom prst="rect">
+              <a:avLst/>
+            </a:prstGeom>
+            <a:noFill/>
+          </p:spPr>
+          <p:txBody>
+            <a:bodyPr wrap="square" rtlCol="0" anchor="ctr" anchorCtr="1">
+              <a:spAutoFit/>
+            </a:bodyPr>
+            <a:lstStyle/>
+            <a:p>
+              <a:pPr algn="ctr"/>
+              <a:r>
+                <a:rPr lang="zh-CN" altLang="en-US" dirty="0">
+                  <a:latin typeface="Times New Roman" panose="02020603050405020304" pitchFamily="18" charset="0"/>
+                  <a:ea typeface="宋体" panose="02010600030101010101" pitchFamily="2" charset="-122"/>
+                </a:rPr>
+                <a:t>数据传输</a:t>
+              </a:r>
+              <a:endParaRPr lang="en-US" altLang="zh-CN" dirty="0">
+                <a:latin typeface="Times New Roman" panose="02020603050405020304" pitchFamily="18" charset="0"/>
+                <a:ea typeface="宋体" panose="02010600030101010101" pitchFamily="2" charset="-122"/>
+              </a:endParaRPr>
+            </a:p>
+          </p:txBody>
+        </p:sp>
+        <p:cxnSp>
+          <p:nvCxnSpPr>
+            <p:cNvPr id="62" name="直接箭头连接符 61">
+              <a:extLst>
+                <a:ext uri="{FF2B5EF4-FFF2-40B4-BE49-F238E27FC236}">
+                  <a16:creationId xmlns:a16="http://schemas.microsoft.com/office/drawing/2014/main" id="{C2EE79CC-FD9C-0628-8A98-17D90987ACFD}"/>
+                </a:ext>
+              </a:extLst>
+            </p:cNvPr>
+            <p:cNvCxnSpPr>
+              <a:cxnSpLocks/>
+              <a:stCxn id="138" idx="2"/>
+              <a:endCxn id="59" idx="0"/>
+            </p:cNvCxnSpPr>
+            <p:nvPr/>
+          </p:nvCxnSpPr>
+          <p:spPr>
+            <a:xfrm>
+              <a:off x="5462824" y="3543854"/>
+              <a:ext cx="2110" cy="360398"/>
+            </a:xfrm>
+            <a:prstGeom prst="straightConnector1">
+              <a:avLst/>
+            </a:prstGeom>
+            <a:ln w="19050">
+              <a:solidFill>
+                <a:schemeClr val="tx1"/>
+              </a:solidFill>
+              <a:tailEnd type="triangle"/>
+            </a:ln>
+          </p:spPr>
+          <p:style>
+            <a:lnRef idx="1">
+              <a:schemeClr val="accent1"/>
+            </a:lnRef>
+            <a:fillRef idx="0">
+              <a:schemeClr val="accent1"/>
+            </a:fillRef>
+            <a:effectRef idx="0">
+              <a:schemeClr val="accent1"/>
+            </a:effectRef>
+            <a:fontRef idx="minor">
+              <a:schemeClr val="tx1"/>
+            </a:fontRef>
+          </p:style>
+        </p:cxnSp>
+        <p:sp>
+          <p:nvSpPr>
+            <p:cNvPr id="82" name="矩形 81">
+              <a:extLst>
+                <a:ext uri="{FF2B5EF4-FFF2-40B4-BE49-F238E27FC236}">
+                  <a16:creationId xmlns:a16="http://schemas.microsoft.com/office/drawing/2014/main" id="{CF2727FE-FA1F-D0D3-CC3D-946F6E0803A2}"/>
+                </a:ext>
+              </a:extLst>
+            </p:cNvPr>
+            <p:cNvSpPr/>
+            <p:nvPr/>
+          </p:nvSpPr>
+          <p:spPr>
+            <a:xfrm>
+              <a:off x="7757271" y="4511126"/>
+              <a:ext cx="3685779" cy="1314365"/>
+            </a:xfrm>
+            <a:prstGeom prst="rect">
+              <a:avLst/>
+            </a:prstGeom>
+            <a:solidFill>
+              <a:srgbClr val="ECFDF5"/>
+            </a:solidFill>
+            <a:ln w="19050">
+              <a:solidFill>
+                <a:schemeClr val="tx1"/>
+              </a:solidFill>
+            </a:ln>
+          </p:spPr>
+          <p:style>
+            <a:lnRef idx="2">
+              <a:schemeClr val="accent1">
+                <a:shade val="15000"/>
+              </a:schemeClr>
+            </a:lnRef>
+            <a:fillRef idx="1">
+              <a:schemeClr val="accent1"/>
+            </a:fillRef>
+            <a:effectRef idx="0">
+              <a:schemeClr val="accent1"/>
+            </a:effectRef>
+            <a:fontRef idx="minor">
+              <a:schemeClr val="lt1"/>
+            </a:fontRef>
+          </p:style>
+          <p:txBody>
+            <a:bodyPr rtlCol="0" anchor="ctr"/>
+            <a:lstStyle/>
+            <a:p>
+              <a:pPr algn="ctr"/>
+              <a:endParaRPr lang="zh-CN" altLang="en-US" dirty="0" err="1">
+                <a:solidFill>
+                  <a:schemeClr val="tx1"/>
+                </a:solidFill>
+                <a:latin typeface="Times New Roman" panose="02020603050405020304" pitchFamily="18" charset="0"/>
+                <a:ea typeface="宋体" panose="02010600030101010101" pitchFamily="2" charset="-122"/>
+              </a:endParaRPr>
+            </a:p>
+          </p:txBody>
+        </p:sp>
+        <mc:AlternateContent xmlns:mc="http://schemas.openxmlformats.org/markup-compatibility/2006" xmlns:a14="http://schemas.microsoft.com/office/drawing/2010/main">
+          <mc:Choice Requires="a14">
+            <p:sp>
+              <p:nvSpPr>
+                <p:cNvPr id="83" name="文本框 82">
+                  <a:extLst>
+                    <a:ext uri="{FF2B5EF4-FFF2-40B4-BE49-F238E27FC236}">
+                      <a16:creationId xmlns:a16="http://schemas.microsoft.com/office/drawing/2014/main" id="{4EDBF2F0-6ADF-02D9-7154-244748AB621B}"/>
+                    </a:ext>
+                  </a:extLst>
+                </p:cNvPr>
+                <p:cNvSpPr txBox="1"/>
+                <p:nvPr/>
+              </p:nvSpPr>
+              <p:spPr>
+                <a:xfrm>
+                  <a:off x="7761553" y="4568144"/>
+                  <a:ext cx="3681497" cy="1200329"/>
+                </a:xfrm>
+                <a:prstGeom prst="rect">
+                  <a:avLst/>
+                </a:prstGeom>
+                <a:noFill/>
+              </p:spPr>
+              <p:txBody>
+                <a:bodyPr wrap="square" rtlCol="0" anchor="ctr" anchorCtr="1">
+                  <a:spAutoFit/>
+                </a:bodyPr>
+                <a:lstStyle/>
+                <a:p>
+                  <a:pPr algn="ctr"/>
+                  <a:r>
+                    <a:rPr lang="zh-CN" altLang="en-US" dirty="0">
+                      <a:latin typeface="Times New Roman" panose="02020603050405020304" pitchFamily="18" charset="0"/>
+                      <a:ea typeface="宋体" panose="02010600030101010101" pitchFamily="2" charset="-122"/>
+                    </a:rPr>
+                    <a:t>调整窗口：</a:t>
+                  </a:r>
+                  <a:endParaRPr lang="en-US" altLang="zh-CN" dirty="0">
                     <a:latin typeface="Times New Roman" panose="02020603050405020304" pitchFamily="18" charset="0"/>
                     <a:ea typeface="宋体" panose="02010600030101010101" pitchFamily="2" charset="-122"/>
-                  </a:rPr>
-                  <a:t>确定优先级和 </a:t>
-                </a:r>
-                <a:r>
-                  <a:rPr lang="en-US" altLang="zh-CN" dirty="0">
-                    <a:latin typeface="Times New Roman" panose="02020603050405020304" pitchFamily="18" charset="0"/>
-                    <a:ea typeface="宋体" panose="02010600030101010101" pitchFamily="2" charset="-122"/>
-                  </a:rPr>
-                  <a:t>LBT </a:t>
-                </a:r>
-                <a:r>
-                  <a:rPr lang="zh-CN" altLang="en-US" dirty="0">
-                    <a:latin typeface="Times New Roman" panose="02020603050405020304" pitchFamily="18" charset="0"/>
-                    <a:ea typeface="宋体" panose="02010600030101010101" pitchFamily="2" charset="-122"/>
-                  </a:rPr>
-                  <a:t>参数</a:t>
-                </a:r>
-                <a:r>
-                  <a:rPr lang="en-US" altLang="zh-CN" dirty="0">
-                    <a:latin typeface="Times New Roman" panose="02020603050405020304" pitchFamily="18" charset="0"/>
-                    <a:ea typeface="宋体" panose="02010600030101010101" pitchFamily="2" charset="-122"/>
-                  </a:rPr>
-                  <a:t>(</a:t>
-                </a:r>
-                <a14:m>
-                  <m:oMath xmlns:m="http://schemas.openxmlformats.org/officeDocument/2006/math">
-                    <m:r>
-                      <a:rPr lang="en-US" altLang="zh-CN" i="1" dirty="0">
-                        <a:latin typeface="Cambria Math" panose="02040503050406030204" pitchFamily="18" charset="0"/>
-                        <a:ea typeface="宋体" panose="02010600030101010101" pitchFamily="2" charset="-122"/>
-                      </a:rPr>
-                      <m:t>𝐶</m:t>
-                    </m:r>
-                    <m:sSub>
-                      <m:sSubPr>
-                        <m:ctrlPr>
-                          <a:rPr lang="en-US" altLang="zh-CN" i="1" dirty="0">
+                  </a:endParaRPr>
+                </a:p>
+                <a:p>
+                  <a:pPr algn="ctr"/>
+                  <a14:m>
+                    <m:oMathPara xmlns:m="http://schemas.openxmlformats.org/officeDocument/2006/math">
+                      <m:oMathParaPr>
+                        <m:jc m:val="centerGroup"/>
+                      </m:oMathParaPr>
+                      <m:oMath xmlns:m="http://schemas.openxmlformats.org/officeDocument/2006/math">
+                        <m:r>
+                          <a:rPr lang="en-US" altLang="zh-CN" i="1" dirty="0" smtClean="0">
                             <a:latin typeface="Cambria Math" panose="02040503050406030204" pitchFamily="18" charset="0"/>
                             <a:ea typeface="宋体" panose="02010600030101010101" pitchFamily="2" charset="-122"/>
                           </a:rPr>
-                        </m:ctrlPr>
-                      </m:sSubPr>
-                      <m:e>
+                          <m:t>𝐶</m:t>
+                        </m:r>
+                        <m:sSub>
+                          <m:sSubPr>
+                            <m:ctrlPr>
+                              <a:rPr lang="en-US" altLang="zh-CN" i="1" dirty="0" smtClean="0">
+                                <a:latin typeface="Cambria Math" panose="02040503050406030204" pitchFamily="18" charset="0"/>
+                                <a:ea typeface="宋体" panose="02010600030101010101" pitchFamily="2" charset="-122"/>
+                              </a:rPr>
+                            </m:ctrlPr>
+                          </m:sSubPr>
+                          <m:e>
+                            <m:r>
+                              <a:rPr lang="en-US" altLang="zh-CN" i="1" dirty="0" smtClean="0">
+                                <a:latin typeface="Cambria Math" panose="02040503050406030204" pitchFamily="18" charset="0"/>
+                                <a:ea typeface="宋体" panose="02010600030101010101" pitchFamily="2" charset="-122"/>
+                              </a:rPr>
+                              <m:t>𝑊</m:t>
+                            </m:r>
+                          </m:e>
+                          <m:sub>
+                            <m:r>
+                              <a:rPr lang="en-US" altLang="zh-CN" b="0" i="1" dirty="0" smtClean="0">
+                                <a:latin typeface="Cambria Math" panose="02040503050406030204" pitchFamily="18" charset="0"/>
+                                <a:ea typeface="宋体" panose="02010600030101010101" pitchFamily="2" charset="-122"/>
+                              </a:rPr>
+                              <m:t>𝑛𝑒𝑤</m:t>
+                            </m:r>
+                          </m:sub>
+                        </m:sSub>
+                        <m:r>
+                          <a:rPr lang="en-US" altLang="zh-CN" b="0" i="1" dirty="0" smtClean="0">
+                            <a:latin typeface="Cambria Math" panose="02040503050406030204" pitchFamily="18" charset="0"/>
+                            <a:ea typeface="宋体" panose="02010600030101010101" pitchFamily="2" charset="-122"/>
+                          </a:rPr>
+                          <m:t>=</m:t>
+                        </m:r>
+                        <m:r>
+                          <m:rPr>
+                            <m:sty m:val="p"/>
+                          </m:rPr>
+                          <a:rPr lang="en-US" altLang="zh-CN" b="0" i="0" dirty="0" smtClean="0">
+                            <a:latin typeface="Cambria Math" panose="02040503050406030204" pitchFamily="18" charset="0"/>
+                            <a:ea typeface="宋体" panose="02010600030101010101" pitchFamily="2" charset="-122"/>
+                          </a:rPr>
+                          <m:t>min</m:t>
+                        </m:r>
+                        <m:r>
+                          <a:rPr lang="en-US" altLang="zh-CN" b="0" i="1" dirty="0" smtClean="0">
+                            <a:latin typeface="Cambria Math" panose="02040503050406030204" pitchFamily="18" charset="0"/>
+                            <a:ea typeface="宋体" panose="02010600030101010101" pitchFamily="2" charset="-122"/>
+                          </a:rPr>
+                          <m:t>⁡(2</m:t>
+                        </m:r>
+                        <m:r>
+                          <a:rPr lang="en-US" altLang="zh-CN" b="0" i="1" dirty="0" smtClean="0">
+                            <a:latin typeface="Cambria Math" panose="02040503050406030204" pitchFamily="18" charset="0"/>
+                            <a:ea typeface="宋体" panose="02010600030101010101" pitchFamily="2" charset="-122"/>
+                          </a:rPr>
+                          <m:t>𝐶</m:t>
+                        </m:r>
+                        <m:sSub>
+                          <m:sSubPr>
+                            <m:ctrlPr>
+                              <a:rPr lang="en-US" altLang="zh-CN" b="0" i="1" dirty="0" smtClean="0">
+                                <a:latin typeface="Cambria Math" panose="02040503050406030204" pitchFamily="18" charset="0"/>
+                                <a:ea typeface="宋体" panose="02010600030101010101" pitchFamily="2" charset="-122"/>
+                              </a:rPr>
+                            </m:ctrlPr>
+                          </m:sSubPr>
+                          <m:e>
+                            <m:r>
+                              <a:rPr lang="en-US" altLang="zh-CN" b="0" i="1" dirty="0" smtClean="0">
+                                <a:latin typeface="Cambria Math" panose="02040503050406030204" pitchFamily="18" charset="0"/>
+                                <a:ea typeface="宋体" panose="02010600030101010101" pitchFamily="2" charset="-122"/>
+                              </a:rPr>
+                              <m:t>𝑊</m:t>
+                            </m:r>
+                          </m:e>
+                          <m:sub>
+                            <m:r>
+                              <a:rPr lang="en-US" altLang="zh-CN" i="1" dirty="0">
+                                <a:latin typeface="Cambria Math" panose="02040503050406030204" pitchFamily="18" charset="0"/>
+                                <a:ea typeface="宋体" panose="02010600030101010101" pitchFamily="2" charset="-122"/>
+                              </a:rPr>
+                              <m:t>𝑜𝑙𝑑</m:t>
+                            </m:r>
+                          </m:sub>
+                        </m:sSub>
+                        <m:r>
+                          <a:rPr lang="en-US" altLang="zh-CN" b="0" i="1" dirty="0" smtClean="0">
+                            <a:latin typeface="Cambria Math" panose="02040503050406030204" pitchFamily="18" charset="0"/>
+                            <a:ea typeface="宋体" panose="02010600030101010101" pitchFamily="2" charset="-122"/>
+                          </a:rPr>
+                          <m:t>+1,</m:t>
+                        </m:r>
+                        <m:r>
+                          <a:rPr lang="en-US" altLang="zh-CN" b="0" i="1" dirty="0" smtClean="0">
+                            <a:latin typeface="Cambria Math" panose="02040503050406030204" pitchFamily="18" charset="0"/>
+                            <a:ea typeface="宋体" panose="02010600030101010101" pitchFamily="2" charset="-122"/>
+                          </a:rPr>
+                          <m:t>𝐶</m:t>
+                        </m:r>
+                        <m:sSub>
+                          <m:sSubPr>
+                            <m:ctrlPr>
+                              <a:rPr lang="en-US" altLang="zh-CN" b="0" i="1" dirty="0" smtClean="0">
+                                <a:latin typeface="Cambria Math" panose="02040503050406030204" pitchFamily="18" charset="0"/>
+                                <a:ea typeface="宋体" panose="02010600030101010101" pitchFamily="2" charset="-122"/>
+                              </a:rPr>
+                            </m:ctrlPr>
+                          </m:sSubPr>
+                          <m:e>
+                            <m:r>
+                              <a:rPr lang="en-US" altLang="zh-CN" b="0" i="1" dirty="0" smtClean="0">
+                                <a:latin typeface="Cambria Math" panose="02040503050406030204" pitchFamily="18" charset="0"/>
+                                <a:ea typeface="宋体" panose="02010600030101010101" pitchFamily="2" charset="-122"/>
+                              </a:rPr>
+                              <m:t>𝑊</m:t>
+                            </m:r>
+                          </m:e>
+                          <m:sub>
+                            <m:r>
+                              <a:rPr lang="en-US" altLang="zh-CN" b="0" i="1" dirty="0" smtClean="0">
+                                <a:latin typeface="Cambria Math" panose="02040503050406030204" pitchFamily="18" charset="0"/>
+                                <a:ea typeface="宋体" panose="02010600030101010101" pitchFamily="2" charset="-122"/>
+                              </a:rPr>
+                              <m:t>𝑚𝑎𝑥</m:t>
+                            </m:r>
+                          </m:sub>
+                        </m:sSub>
+                        <m:r>
+                          <a:rPr lang="en-US" altLang="zh-CN" b="0" i="1" dirty="0" smtClean="0">
+                            <a:latin typeface="Cambria Math" panose="02040503050406030204" pitchFamily="18" charset="0"/>
+                            <a:ea typeface="宋体" panose="02010600030101010101" pitchFamily="2" charset="-122"/>
+                          </a:rPr>
+                          <m:t>)</m:t>
+                        </m:r>
+                      </m:oMath>
+                    </m:oMathPara>
+                  </a14:m>
+                  <a:endParaRPr lang="en-US" altLang="zh-CN" dirty="0">
+                    <a:latin typeface="Times New Roman" panose="02020603050405020304" pitchFamily="18" charset="0"/>
+                    <a:ea typeface="宋体" panose="02010600030101010101" pitchFamily="2" charset="-122"/>
+                  </a:endParaRPr>
+                </a:p>
+                <a:p>
+                  <a:pPr algn="ctr"/>
+                  <a:r>
+                    <a:rPr lang="zh-CN" altLang="en-US" dirty="0">
+                      <a:latin typeface="Times New Roman" panose="02020603050405020304" pitchFamily="18" charset="0"/>
+                      <a:ea typeface="宋体" panose="02010600030101010101" pitchFamily="2" charset="-122"/>
+                    </a:rPr>
+                    <a:t>生成随机数</a:t>
+                  </a:r>
+                  <a:r>
+                    <a:rPr lang="en-US" altLang="zh-CN" dirty="0">
+                      <a:latin typeface="Times New Roman" panose="02020603050405020304" pitchFamily="18" charset="0"/>
+                      <a:ea typeface="宋体" panose="02010600030101010101" pitchFamily="2" charset="-122"/>
+                    </a:rPr>
+                    <a:t>N:</a:t>
+                  </a:r>
+                </a:p>
+                <a:p>
+                  <a:pPr algn="ctr"/>
+                  <a14:m>
+                    <m:oMathPara xmlns:m="http://schemas.openxmlformats.org/officeDocument/2006/math">
+                      <m:oMathParaPr>
+                        <m:jc m:val="centerGroup"/>
+                      </m:oMathParaPr>
+                      <m:oMath xmlns:m="http://schemas.openxmlformats.org/officeDocument/2006/math">
+                        <m:r>
+                          <a:rPr lang="en-US" altLang="zh-CN" i="1" dirty="0" smtClean="0">
+                            <a:latin typeface="Cambria Math" panose="02040503050406030204" pitchFamily="18" charset="0"/>
+                            <a:ea typeface="宋体" panose="02010600030101010101" pitchFamily="2" charset="-122"/>
+                          </a:rPr>
+                          <m:t>𝑁</m:t>
+                        </m:r>
+                        <m:r>
+                          <a:rPr lang="en-US" altLang="zh-CN" i="1" dirty="0" smtClean="0">
+                            <a:latin typeface="Cambria Math" panose="02040503050406030204" pitchFamily="18" charset="0"/>
+                            <a:ea typeface="宋体" panose="02010600030101010101" pitchFamily="2" charset="-122"/>
+                          </a:rPr>
+                          <m:t>∈ [0, </m:t>
+                        </m:r>
                         <m:r>
                           <a:rPr lang="en-US" altLang="zh-CN" i="1" dirty="0">
                             <a:latin typeface="Cambria Math" panose="02040503050406030204" pitchFamily="18" charset="0"/>
                             <a:ea typeface="宋体" panose="02010600030101010101" pitchFamily="2" charset="-122"/>
                           </a:rPr>
-                          <m:t>𝑊</m:t>
+                          <m:t>𝐶</m:t>
                         </m:r>
-                      </m:e>
-                      <m:sub>
+                        <m:sSub>
+                          <m:sSubPr>
+                            <m:ctrlPr>
+                              <a:rPr lang="en-US" altLang="zh-CN" i="1" dirty="0">
+                                <a:latin typeface="Cambria Math" panose="02040503050406030204" pitchFamily="18" charset="0"/>
+                                <a:ea typeface="宋体" panose="02010600030101010101" pitchFamily="2" charset="-122"/>
+                              </a:rPr>
+                            </m:ctrlPr>
+                          </m:sSubPr>
+                          <m:e>
+                            <m:r>
+                              <a:rPr lang="en-US" altLang="zh-CN" i="1" dirty="0">
+                                <a:latin typeface="Cambria Math" panose="02040503050406030204" pitchFamily="18" charset="0"/>
+                                <a:ea typeface="宋体" panose="02010600030101010101" pitchFamily="2" charset="-122"/>
+                              </a:rPr>
+                              <m:t>𝑊</m:t>
+                            </m:r>
+                          </m:e>
+                          <m:sub>
+                            <m:r>
+                              <a:rPr lang="en-US" altLang="zh-CN" i="1" dirty="0">
+                                <a:latin typeface="Cambria Math" panose="02040503050406030204" pitchFamily="18" charset="0"/>
+                                <a:ea typeface="宋体" panose="02010600030101010101" pitchFamily="2" charset="-122"/>
+                              </a:rPr>
+                              <m:t>𝑛𝑒𝑤</m:t>
+                            </m:r>
+                          </m:sub>
+                        </m:sSub>
                         <m:r>
-                          <a:rPr lang="en-US" altLang="zh-CN" i="1" dirty="0">
+                          <a:rPr lang="en-US" altLang="zh-CN" i="1" dirty="0" smtClean="0">
                             <a:latin typeface="Cambria Math" panose="02040503050406030204" pitchFamily="18" charset="0"/>
                             <a:ea typeface="宋体" panose="02010600030101010101" pitchFamily="2" charset="-122"/>
                           </a:rPr>
-                          <m:t>𝑚𝑖𝑛</m:t>
+                          <m:t>]</m:t>
                         </m:r>
-                      </m:sub>
-                    </m:sSub>
-                    <m:r>
-                      <a:rPr lang="zh-CN" altLang="en-US" i="1" dirty="0">
-                        <a:latin typeface="Cambria Math" panose="02040503050406030204" pitchFamily="18" charset="0"/>
-                        <a:ea typeface="宋体" panose="02010600030101010101" pitchFamily="2" charset="-122"/>
-                      </a:rPr>
-                      <m:t>、</m:t>
-                    </m:r>
-                    <m:r>
-                      <a:rPr lang="en-US" altLang="zh-CN" i="1" dirty="0">
-                        <a:latin typeface="Cambria Math" panose="02040503050406030204" pitchFamily="18" charset="0"/>
-                        <a:ea typeface="宋体" panose="02010600030101010101" pitchFamily="2" charset="-122"/>
-                      </a:rPr>
-                      <m:t>𝐶</m:t>
-                    </m:r>
-                    <m:sSub>
-                      <m:sSubPr>
-                        <m:ctrlPr>
-                          <a:rPr lang="en-US" altLang="zh-CN" i="1" dirty="0">
-                            <a:latin typeface="Cambria Math" panose="02040503050406030204" pitchFamily="18" charset="0"/>
-                            <a:ea typeface="宋体" panose="02010600030101010101" pitchFamily="2" charset="-122"/>
-                          </a:rPr>
-                        </m:ctrlPr>
-                      </m:sSubPr>
-                      <m:e>
-                        <m:r>
-                          <a:rPr lang="en-US" altLang="zh-CN" i="1" dirty="0">
-                            <a:latin typeface="Cambria Math" panose="02040503050406030204" pitchFamily="18" charset="0"/>
-                            <a:ea typeface="宋体" panose="02010600030101010101" pitchFamily="2" charset="-122"/>
-                          </a:rPr>
-                          <m:t>𝑊</m:t>
-                        </m:r>
-                      </m:e>
-                      <m:sub>
-                        <m:r>
-                          <a:rPr lang="en-US" altLang="zh-CN" i="1" dirty="0">
-                            <a:latin typeface="Cambria Math" panose="02040503050406030204" pitchFamily="18" charset="0"/>
-                            <a:ea typeface="宋体" panose="02010600030101010101" pitchFamily="2" charset="-122"/>
-                          </a:rPr>
-                          <m:t>𝑚𝑎𝑥</m:t>
-                        </m:r>
-                      </m:sub>
-                    </m:sSub>
-                    <m:r>
-                      <a:rPr lang="zh-CN" altLang="en-US" i="1" dirty="0">
-                        <a:latin typeface="Cambria Math" panose="02040503050406030204" pitchFamily="18" charset="0"/>
-                        <a:ea typeface="宋体" panose="02010600030101010101" pitchFamily="2" charset="-122"/>
-                      </a:rPr>
-                      <m:t>等</m:t>
-                    </m:r>
-                  </m:oMath>
-                </a14:m>
-                <a:r>
-                  <a:rPr lang="en-US" altLang="zh-CN" dirty="0">
+                      </m:oMath>
+                    </m:oMathPara>
+                  </a14:m>
+                  <a:endParaRPr lang="en-US" altLang="zh-CN" dirty="0">
                     <a:latin typeface="Times New Roman" panose="02020603050405020304" pitchFamily="18" charset="0"/>
                     <a:ea typeface="宋体" panose="02010600030101010101" pitchFamily="2" charset="-122"/>
-                  </a:rPr>
-                  <a:t>)</a:t>
-                </a:r>
-                <a:endParaRPr lang="zh-CN" altLang="en-US" dirty="0">
+                  </a:endParaRPr>
+                </a:p>
+              </p:txBody>
+            </p:sp>
+          </mc:Choice>
+          <mc:Fallback xmlns="">
+            <p:sp>
+              <p:nvSpPr>
+                <p:cNvPr id="83" name="文本框 82">
+                  <a:extLst>
+                    <a:ext uri="{FF2B5EF4-FFF2-40B4-BE49-F238E27FC236}">
+                      <a16:creationId xmlns:a16="http://schemas.microsoft.com/office/drawing/2014/main" id="{4EDBF2F0-6ADF-02D9-7154-244748AB621B}"/>
+                    </a:ext>
+                  </a:extLst>
+                </p:cNvPr>
+                <p:cNvSpPr txBox="1">
+                  <a:spLocks noRot="1" noChangeAspect="1" noMove="1" noResize="1" noEditPoints="1" noAdjustHandles="1" noChangeArrowheads="1" noChangeShapeType="1" noTextEdit="1"/>
+                </p:cNvSpPr>
+                <p:nvPr/>
+              </p:nvSpPr>
+              <p:spPr>
+                <a:xfrm>
+                  <a:off x="7761553" y="4568144"/>
+                  <a:ext cx="3681497" cy="1200329"/>
+                </a:xfrm>
+                <a:prstGeom prst="rect">
+                  <a:avLst/>
+                </a:prstGeom>
+                <a:blipFill>
+                  <a:blip r:embed="rId4"/>
+                  <a:stretch>
+                    <a:fillRect t="-3046" b="-5076"/>
+                  </a:stretch>
+                </a:blipFill>
+              </p:spPr>
+              <p:txBody>
+                <a:bodyPr/>
+                <a:lstStyle/>
+                <a:p>
+                  <a:r>
+                    <a:rPr lang="zh-CN" altLang="en-US">
+                      <a:noFill/>
+                    </a:rPr>
+                    <a:t> </a:t>
+                  </a:r>
+                </a:p>
+              </p:txBody>
+            </p:sp>
+          </mc:Fallback>
+        </mc:AlternateContent>
+        <p:sp>
+          <p:nvSpPr>
+            <p:cNvPr id="87" name="文本框 86">
+              <a:extLst>
+                <a:ext uri="{FF2B5EF4-FFF2-40B4-BE49-F238E27FC236}">
+                  <a16:creationId xmlns:a16="http://schemas.microsoft.com/office/drawing/2014/main" id="{E56AF2DA-0137-2FF5-E175-62BB2CCE2AEF}"/>
+                </a:ext>
+              </a:extLst>
+            </p:cNvPr>
+            <p:cNvSpPr txBox="1"/>
+            <p:nvPr/>
+          </p:nvSpPr>
+          <p:spPr>
+            <a:xfrm>
+              <a:off x="5462823" y="5538297"/>
+              <a:ext cx="463648" cy="327722"/>
+            </a:xfrm>
+            <a:prstGeom prst="rect">
+              <a:avLst/>
+            </a:prstGeom>
+            <a:noFill/>
+          </p:spPr>
+          <p:txBody>
+            <a:bodyPr wrap="square" rtlCol="0" anchor="ctr" anchorCtr="1">
+              <a:spAutoFit/>
+            </a:bodyPr>
+            <a:lstStyle/>
+            <a:p>
+              <a:pPr algn="ctr"/>
+              <a:r>
+                <a:rPr lang="zh-CN" altLang="en-US" dirty="0">
+                  <a:latin typeface="Times New Roman" panose="02020603050405020304" pitchFamily="18" charset="0"/>
+                  <a:ea typeface="宋体" panose="02010600030101010101" pitchFamily="2" charset="-122"/>
+                </a:rPr>
+                <a:t>是</a:t>
+              </a:r>
+            </a:p>
+          </p:txBody>
+        </p:sp>
+        <p:sp>
+          <p:nvSpPr>
+            <p:cNvPr id="88" name="文本框 87">
+              <a:extLst>
+                <a:ext uri="{FF2B5EF4-FFF2-40B4-BE49-F238E27FC236}">
+                  <a16:creationId xmlns:a16="http://schemas.microsoft.com/office/drawing/2014/main" id="{1D975BDE-7641-ECBD-833C-55C75FA704CB}"/>
+                </a:ext>
+              </a:extLst>
+            </p:cNvPr>
+            <p:cNvSpPr txBox="1"/>
+            <p:nvPr/>
+          </p:nvSpPr>
+          <p:spPr>
+            <a:xfrm>
+              <a:off x="6881163" y="4782454"/>
+              <a:ext cx="463648" cy="327722"/>
+            </a:xfrm>
+            <a:prstGeom prst="rect">
+              <a:avLst/>
+            </a:prstGeom>
+            <a:noFill/>
+          </p:spPr>
+          <p:txBody>
+            <a:bodyPr wrap="square" rtlCol="0" anchor="ctr" anchorCtr="1">
+              <a:spAutoFit/>
+            </a:bodyPr>
+            <a:lstStyle/>
+            <a:p>
+              <a:pPr algn="ctr"/>
+              <a:r>
+                <a:rPr lang="zh-CN" altLang="en-US" dirty="0">
+                  <a:latin typeface="Times New Roman" panose="02020603050405020304" pitchFamily="18" charset="0"/>
+                  <a:ea typeface="宋体" panose="02010600030101010101" pitchFamily="2" charset="-122"/>
+                </a:rPr>
+                <a:t>否</a:t>
+              </a:r>
+            </a:p>
+          </p:txBody>
+        </p:sp>
+        <p:cxnSp>
+          <p:nvCxnSpPr>
+            <p:cNvPr id="90" name="直接箭头连接符 89">
+              <a:extLst>
+                <a:ext uri="{FF2B5EF4-FFF2-40B4-BE49-F238E27FC236}">
+                  <a16:creationId xmlns:a16="http://schemas.microsoft.com/office/drawing/2014/main" id="{89C5B583-D8BC-B16B-99CB-DAF8D1D1CC46}"/>
+                </a:ext>
+              </a:extLst>
+            </p:cNvPr>
+            <p:cNvCxnSpPr>
+              <a:cxnSpLocks/>
+              <a:stCxn id="82" idx="3"/>
+              <a:endCxn id="107" idx="0"/>
+            </p:cNvCxnSpPr>
+            <p:nvPr/>
+          </p:nvCxnSpPr>
+          <p:spPr>
+            <a:xfrm flipH="1" flipV="1">
+              <a:off x="5462825" y="450795"/>
+              <a:ext cx="5980225" cy="4717514"/>
+            </a:xfrm>
+            <a:prstGeom prst="bentConnector4">
+              <a:avLst>
+                <a:gd name="adj1" fmla="val -7263"/>
+                <a:gd name="adj2" fmla="val 106300"/>
+              </a:avLst>
+            </a:prstGeom>
+            <a:ln w="28575">
+              <a:solidFill>
+                <a:schemeClr val="tx1"/>
+              </a:solidFill>
+              <a:tailEnd type="triangle"/>
+            </a:ln>
+          </p:spPr>
+          <p:style>
+            <a:lnRef idx="1">
+              <a:schemeClr val="accent1"/>
+            </a:lnRef>
+            <a:fillRef idx="0">
+              <a:schemeClr val="accent1"/>
+            </a:fillRef>
+            <a:effectRef idx="0">
+              <a:schemeClr val="accent1"/>
+            </a:effectRef>
+            <a:fontRef idx="minor">
+              <a:schemeClr val="tx1"/>
+            </a:fontRef>
+          </p:style>
+        </p:cxnSp>
+        <p:sp>
+          <p:nvSpPr>
+            <p:cNvPr id="12" name="文本框 11">
+              <a:extLst>
+                <a:ext uri="{FF2B5EF4-FFF2-40B4-BE49-F238E27FC236}">
+                  <a16:creationId xmlns:a16="http://schemas.microsoft.com/office/drawing/2014/main" id="{291D4D9A-7140-DC53-AF53-11A38DE92E5C}"/>
+                </a:ext>
+              </a:extLst>
+            </p:cNvPr>
+            <p:cNvSpPr txBox="1"/>
+            <p:nvPr/>
+          </p:nvSpPr>
+          <p:spPr>
+            <a:xfrm>
+              <a:off x="4258565" y="671734"/>
+              <a:ext cx="2461546" cy="573514"/>
+            </a:xfrm>
+            <a:prstGeom prst="rect">
+              <a:avLst/>
+            </a:prstGeom>
+            <a:noFill/>
+          </p:spPr>
+          <p:txBody>
+            <a:bodyPr wrap="square" rtlCol="0" anchor="ctr" anchorCtr="1">
+              <a:spAutoFit/>
+            </a:bodyPr>
+            <a:lstStyle/>
+            <a:p>
+              <a:pPr algn="ctr"/>
+              <a:r>
+                <a:rPr lang="zh-CN" altLang="en-US" dirty="0">
+                  <a:latin typeface="Times New Roman" panose="02020603050405020304" pitchFamily="18" charset="0"/>
+                  <a:ea typeface="宋体" panose="02010600030101010101" pitchFamily="2" charset="-122"/>
+                </a:rPr>
+                <a:t>信道检测</a:t>
+              </a:r>
+              <a:r>
+                <a:rPr lang="en-US" altLang="zh-CN" dirty="0">
+                  <a:latin typeface="Times New Roman" panose="02020603050405020304" pitchFamily="18" charset="0"/>
+                  <a:ea typeface="宋体" panose="02010600030101010101" pitchFamily="2" charset="-122"/>
+                </a:rPr>
+                <a:t>CCA</a:t>
+              </a:r>
+            </a:p>
+            <a:p>
+              <a:pPr algn="ctr"/>
+              <a:r>
+                <a:rPr lang="zh-CN" altLang="en-US" dirty="0">
+                  <a:latin typeface="Times New Roman" panose="02020603050405020304" pitchFamily="18" charset="0"/>
+                  <a:ea typeface="宋体" panose="02010600030101010101" pitchFamily="2" charset="-122"/>
+                </a:rPr>
+                <a:t>信道是否空闲？</a:t>
+              </a:r>
+            </a:p>
+          </p:txBody>
+        </p:sp>
+        <mc:AlternateContent xmlns:mc="http://schemas.openxmlformats.org/markup-compatibility/2006" xmlns:a14="http://schemas.microsoft.com/office/drawing/2010/main">
+          <mc:Choice Requires="a14">
+            <p:sp>
+              <p:nvSpPr>
+                <p:cNvPr id="137" name="文本框 136">
+                  <a:extLst>
+                    <a:ext uri="{FF2B5EF4-FFF2-40B4-BE49-F238E27FC236}">
+                      <a16:creationId xmlns:a16="http://schemas.microsoft.com/office/drawing/2014/main" id="{22286C28-1E9E-92F1-B3CA-484CB3D3C9A1}"/>
+                    </a:ext>
+                  </a:extLst>
+                </p:cNvPr>
+                <p:cNvSpPr txBox="1"/>
+                <p:nvPr/>
+              </p:nvSpPr>
+              <p:spPr>
+                <a:xfrm>
+                  <a:off x="4738553" y="2970134"/>
+                  <a:ext cx="1545036" cy="369332"/>
+                </a:xfrm>
+                <a:prstGeom prst="rect">
+                  <a:avLst/>
+                </a:prstGeom>
+                <a:noFill/>
+              </p:spPr>
+              <p:txBody>
+                <a:bodyPr wrap="square" rtlCol="0" anchor="ctr" anchorCtr="1">
+                  <a:spAutoFit/>
+                </a:bodyPr>
+                <a:lstStyle/>
+                <a:p>
+                  <a:pPr algn="ctr"/>
+                  <a14:m>
+                    <m:oMath xmlns:m="http://schemas.openxmlformats.org/officeDocument/2006/math">
+                      <m:r>
+                        <a:rPr lang="en-US" altLang="zh-CN" i="1" dirty="0" smtClean="0">
+                          <a:latin typeface="Cambria Math" panose="02040503050406030204" pitchFamily="18" charset="0"/>
+                          <a:ea typeface="宋体" panose="02010600030101010101" pitchFamily="2" charset="-122"/>
+                        </a:rPr>
+                        <m:t>𝑁</m:t>
+                      </m:r>
+                      <m:r>
+                        <a:rPr lang="en-US" altLang="zh-CN" i="1" dirty="0" smtClean="0">
+                          <a:latin typeface="Cambria Math" panose="02040503050406030204" pitchFamily="18" charset="0"/>
+                          <a:ea typeface="宋体" panose="02010600030101010101" pitchFamily="2" charset="-122"/>
+                        </a:rPr>
+                        <m:t>=0</m:t>
+                      </m:r>
+                    </m:oMath>
+                  </a14:m>
+                  <a:r>
+                    <a:rPr lang="zh-CN" altLang="en-US" dirty="0">
+                      <a:latin typeface="Times New Roman" panose="02020603050405020304" pitchFamily="18" charset="0"/>
+                      <a:ea typeface="宋体" panose="02010600030101010101" pitchFamily="2" charset="-122"/>
+                    </a:rPr>
+                    <a:t>？</a:t>
+                  </a:r>
+                </a:p>
+              </p:txBody>
+            </p:sp>
+          </mc:Choice>
+          <mc:Fallback xmlns="">
+            <p:sp>
+              <p:nvSpPr>
+                <p:cNvPr id="137" name="文本框 136">
+                  <a:extLst>
+                    <a:ext uri="{FF2B5EF4-FFF2-40B4-BE49-F238E27FC236}">
+                      <a16:creationId xmlns:a16="http://schemas.microsoft.com/office/drawing/2014/main" id="{22286C28-1E9E-92F1-B3CA-484CB3D3C9A1}"/>
+                    </a:ext>
+                  </a:extLst>
+                </p:cNvPr>
+                <p:cNvSpPr txBox="1">
+                  <a:spLocks noRot="1" noChangeAspect="1" noMove="1" noResize="1" noEditPoints="1" noAdjustHandles="1" noChangeArrowheads="1" noChangeShapeType="1" noTextEdit="1"/>
+                </p:cNvSpPr>
+                <p:nvPr/>
+              </p:nvSpPr>
+              <p:spPr>
+                <a:xfrm>
+                  <a:off x="4738553" y="2970134"/>
+                  <a:ext cx="1545036" cy="369332"/>
+                </a:xfrm>
+                <a:prstGeom prst="rect">
+                  <a:avLst/>
+                </a:prstGeom>
+                <a:blipFill>
+                  <a:blip r:embed="rId5"/>
+                  <a:stretch>
+                    <a:fillRect t="-11475" b="-22951"/>
+                  </a:stretch>
+                </a:blipFill>
+              </p:spPr>
+              <p:txBody>
+                <a:bodyPr/>
+                <a:lstStyle/>
+                <a:p>
+                  <a:r>
+                    <a:rPr lang="zh-CN" altLang="en-US">
+                      <a:noFill/>
+                    </a:rPr>
+                    <a:t> </a:t>
+                  </a:r>
+                </a:p>
+              </p:txBody>
+            </p:sp>
+          </mc:Fallback>
+        </mc:AlternateContent>
+        <p:sp>
+          <p:nvSpPr>
+            <p:cNvPr id="144" name="文本框 143">
+              <a:extLst>
+                <a:ext uri="{FF2B5EF4-FFF2-40B4-BE49-F238E27FC236}">
+                  <a16:creationId xmlns:a16="http://schemas.microsoft.com/office/drawing/2014/main" id="{7518033F-BF6B-E207-24C5-8BDCC1A12D11}"/>
+                </a:ext>
+              </a:extLst>
+            </p:cNvPr>
+            <p:cNvSpPr txBox="1"/>
+            <p:nvPr/>
+          </p:nvSpPr>
+          <p:spPr>
+            <a:xfrm>
+              <a:off x="4232051" y="4928189"/>
+              <a:ext cx="2461546" cy="327722"/>
+            </a:xfrm>
+            <a:prstGeom prst="rect">
+              <a:avLst/>
+            </a:prstGeom>
+            <a:noFill/>
+          </p:spPr>
+          <p:txBody>
+            <a:bodyPr wrap="square" rtlCol="0" anchor="ctr" anchorCtr="1">
+              <a:spAutoFit/>
+            </a:bodyPr>
+            <a:lstStyle/>
+            <a:p>
+              <a:pPr algn="ctr"/>
+              <a:r>
+                <a:rPr lang="zh-CN" altLang="en-US" dirty="0">
+                  <a:latin typeface="Times New Roman" panose="02020603050405020304" pitchFamily="18" charset="0"/>
+                  <a:ea typeface="宋体" panose="02010600030101010101" pitchFamily="2" charset="-122"/>
+                </a:rPr>
+                <a:t>是否接收到</a:t>
+              </a:r>
+              <a:r>
+                <a:rPr lang="en-US" altLang="zh-CN" dirty="0">
+                  <a:latin typeface="Times New Roman" panose="02020603050405020304" pitchFamily="18" charset="0"/>
+                  <a:ea typeface="宋体" panose="02010600030101010101" pitchFamily="2" charset="-122"/>
+                </a:rPr>
+                <a:t>ACK</a:t>
+              </a:r>
+              <a:r>
+                <a:rPr lang="zh-CN" altLang="en-US" dirty="0">
+                  <a:latin typeface="Times New Roman" panose="02020603050405020304" pitchFamily="18" charset="0"/>
+                  <a:ea typeface="宋体" panose="02010600030101010101" pitchFamily="2" charset="-122"/>
+                </a:rPr>
+                <a:t>？</a:t>
+              </a:r>
+            </a:p>
+          </p:txBody>
+        </p:sp>
+        <p:grpSp>
+          <p:nvGrpSpPr>
+            <p:cNvPr id="69" name="组合 68">
+              <a:extLst>
+                <a:ext uri="{FF2B5EF4-FFF2-40B4-BE49-F238E27FC236}">
+                  <a16:creationId xmlns:a16="http://schemas.microsoft.com/office/drawing/2014/main" id="{90E7A618-E0BD-CD94-624A-F5A90A8428B6}"/>
+                </a:ext>
+              </a:extLst>
+            </p:cNvPr>
+            <p:cNvGrpSpPr/>
+            <p:nvPr/>
+          </p:nvGrpSpPr>
+          <p:grpSpPr>
+            <a:xfrm>
+              <a:off x="4232051" y="1811585"/>
+              <a:ext cx="2461546" cy="690538"/>
+              <a:chOff x="4334019" y="1575364"/>
+              <a:chExt cx="2461546" cy="690538"/>
+            </a:xfrm>
+            <a:solidFill>
+              <a:srgbClr val="ECFDF5"/>
+            </a:solidFill>
+          </p:grpSpPr>
+          <p:sp>
+            <p:nvSpPr>
+              <p:cNvPr id="148" name="矩形 147">
+                <a:extLst>
+                  <a:ext uri="{FF2B5EF4-FFF2-40B4-BE49-F238E27FC236}">
+                    <a16:creationId xmlns:a16="http://schemas.microsoft.com/office/drawing/2014/main" id="{5C2E3FE1-814F-09F1-8D46-A3C36BB6192F}"/>
+                  </a:ext>
+                </a:extLst>
+              </p:cNvPr>
+              <p:cNvSpPr/>
+              <p:nvPr/>
+            </p:nvSpPr>
+            <p:spPr>
+              <a:xfrm>
+                <a:off x="4334019" y="1575364"/>
+                <a:ext cx="2461546" cy="690538"/>
+              </a:xfrm>
+              <a:prstGeom prst="rect">
+                <a:avLst/>
+              </a:prstGeom>
+              <a:grpFill/>
+              <a:ln w="19050">
+                <a:solidFill>
+                  <a:schemeClr val="tx1"/>
+                </a:solidFill>
+              </a:ln>
+            </p:spPr>
+            <p:style>
+              <a:lnRef idx="2">
+                <a:schemeClr val="accent1">
+                  <a:shade val="15000"/>
+                </a:schemeClr>
+              </a:lnRef>
+              <a:fillRef idx="1">
+                <a:schemeClr val="accent1"/>
+              </a:fillRef>
+              <a:effectRef idx="0">
+                <a:schemeClr val="accent1"/>
+              </a:effectRef>
+              <a:fontRef idx="minor">
+                <a:schemeClr val="lt1"/>
+              </a:fontRef>
+            </p:style>
+            <p:txBody>
+              <a:bodyPr rtlCol="0" anchor="ctr"/>
+              <a:lstStyle/>
+              <a:p>
+                <a:pPr algn="ctr"/>
+                <a:endParaRPr lang="zh-CN" altLang="en-US" dirty="0" err="1">
+                  <a:solidFill>
+                    <a:schemeClr val="tx1"/>
+                  </a:solidFill>
                   <a:latin typeface="Times New Roman" panose="02020603050405020304" pitchFamily="18" charset="0"/>
                   <a:ea typeface="宋体" panose="02010600030101010101" pitchFamily="2" charset="-122"/>
                 </a:endParaRPr>
               </a:p>
             </p:txBody>
           </p:sp>
-        </mc:Choice>
-        <mc:Fallback xmlns="">
-          <p:sp>
-            <p:nvSpPr>
-              <p:cNvPr id="23" name="文本框 22">
-                <a:extLst>
-                  <a:ext uri="{FF2B5EF4-FFF2-40B4-BE49-F238E27FC236}">
-                    <a16:creationId xmlns:a16="http://schemas.microsoft.com/office/drawing/2014/main" id="{427D1599-0021-4CCD-F79B-F21DF6CAD45F}"/>
-                  </a:ext>
-                </a:extLst>
-              </p:cNvPr>
-              <p:cNvSpPr txBox="1">
-                <a:spLocks noRot="1" noChangeAspect="1" noMove="1" noResize="1" noEditPoints="1" noAdjustHandles="1" noChangeArrowheads="1" noChangeShapeType="1" noTextEdit="1"/>
-              </p:cNvSpPr>
-              <p:nvPr/>
-            </p:nvSpPr>
-            <p:spPr>
-              <a:xfrm>
-                <a:off x="562619" y="3028477"/>
-                <a:ext cx="2840890" cy="646331"/>
-              </a:xfrm>
-              <a:prstGeom prst="rect">
-                <a:avLst/>
-              </a:prstGeom>
-              <a:blipFill>
-                <a:blip r:embed="rId7"/>
-                <a:stretch>
-                  <a:fillRect t="-6604" b="-14151"/>
-                </a:stretch>
-              </a:blipFill>
-            </p:spPr>
-            <p:txBody>
-              <a:bodyPr/>
-              <a:lstStyle/>
-              <a:p>
-                <a:r>
-                  <a:rPr lang="zh-CN" altLang="en-US">
-                    <a:noFill/>
-                  </a:rPr>
-                  <a:t> </a:t>
-                </a:r>
-              </a:p>
-            </p:txBody>
-          </p:sp>
-        </mc:Fallback>
-      </mc:AlternateContent>
-      <p:cxnSp>
-        <p:nvCxnSpPr>
-          <p:cNvPr id="63" name="直接连接符 62">
-            <a:extLst>
-              <a:ext uri="{FF2B5EF4-FFF2-40B4-BE49-F238E27FC236}">
-                <a16:creationId xmlns:a16="http://schemas.microsoft.com/office/drawing/2014/main" id="{E54FC1CE-A9F7-00EF-5631-5DBCBE356A26}"/>
-              </a:ext>
-            </a:extLst>
-          </p:cNvPr>
-          <p:cNvCxnSpPr>
-            <a:cxnSpLocks/>
-            <a:stCxn id="138" idx="3"/>
-          </p:cNvCxnSpPr>
-          <p:nvPr/>
-        </p:nvCxnSpPr>
-        <p:spPr>
-          <a:xfrm>
-            <a:off x="6530780" y="3150014"/>
-            <a:ext cx="5338272" cy="0"/>
-          </a:xfrm>
-          <a:prstGeom prst="line">
-            <a:avLst/>
-          </a:prstGeom>
-          <a:ln w="22225">
+          <mc:AlternateContent xmlns:mc="http://schemas.openxmlformats.org/markup-compatibility/2006" xmlns:a14="http://schemas.microsoft.com/office/drawing/2010/main">
+            <mc:Choice Requires="a14">
+              <p:sp>
+                <p:nvSpPr>
+                  <p:cNvPr id="149" name="文本框 148">
+                    <a:extLst>
+                      <a:ext uri="{FF2B5EF4-FFF2-40B4-BE49-F238E27FC236}">
+                        <a16:creationId xmlns:a16="http://schemas.microsoft.com/office/drawing/2014/main" id="{4CD8618B-2C2F-387F-50CC-0E38C6D7A2BF}"/>
+                      </a:ext>
+                    </a:extLst>
+                  </p:cNvPr>
+                  <p:cNvSpPr txBox="1"/>
+                  <p:nvPr/>
+                </p:nvSpPr>
+                <p:spPr>
+                  <a:xfrm>
+                    <a:off x="4496837" y="1756771"/>
+                    <a:ext cx="2135911" cy="327722"/>
+                  </a:xfrm>
+                  <a:prstGeom prst="rect">
+                    <a:avLst/>
+                  </a:prstGeom>
+                  <a:grpFill/>
+                </p:spPr>
+                <p:txBody>
+                  <a:bodyPr wrap="square" rtlCol="0" anchor="ctr" anchorCtr="1">
+                    <a:spAutoFit/>
+                  </a:bodyPr>
+                  <a:lstStyle/>
+                  <a:p>
+                    <a:pPr algn="ctr"/>
+                    <a14:m>
+                      <m:oMath xmlns:m="http://schemas.openxmlformats.org/officeDocument/2006/math">
+                        <m:r>
+                          <a:rPr lang="zh-CN" altLang="en-US" i="1" dirty="0">
+                            <a:latin typeface="Cambria Math" panose="02040503050406030204" pitchFamily="18" charset="0"/>
+                            <a:ea typeface="宋体" panose="02010600030101010101" pitchFamily="2" charset="-122"/>
+                          </a:rPr>
+                          <m:t>随机数</m:t>
+                        </m:r>
+                        <m:r>
+                          <a:rPr lang="en-US" altLang="zh-CN" i="1" dirty="0" smtClean="0">
+                            <a:latin typeface="Cambria Math" panose="02040503050406030204" pitchFamily="18" charset="0"/>
+                            <a:ea typeface="宋体" panose="02010600030101010101" pitchFamily="2" charset="-122"/>
+                          </a:rPr>
+                          <m:t>𝑁</m:t>
+                        </m:r>
+                      </m:oMath>
+                    </a14:m>
+                    <a:r>
+                      <a:rPr lang="zh-CN" altLang="en-US" dirty="0">
+                        <a:latin typeface="Times New Roman" panose="02020603050405020304" pitchFamily="18" charset="0"/>
+                        <a:ea typeface="宋体" panose="02010600030101010101" pitchFamily="2" charset="-122"/>
+                      </a:rPr>
+                      <a:t>减一</a:t>
+                    </a:r>
+                  </a:p>
+                </p:txBody>
+              </p:sp>
+            </mc:Choice>
+            <mc:Fallback xmlns="">
+              <p:sp>
+                <p:nvSpPr>
+                  <p:cNvPr id="149" name="文本框 148">
+                    <a:extLst>
+                      <a:ext uri="{FF2B5EF4-FFF2-40B4-BE49-F238E27FC236}">
+                        <a16:creationId xmlns:a16="http://schemas.microsoft.com/office/drawing/2014/main" id="{4CD8618B-2C2F-387F-50CC-0E38C6D7A2BF}"/>
+                      </a:ext>
+                    </a:extLst>
+                  </p:cNvPr>
+                  <p:cNvSpPr txBox="1">
+                    <a:spLocks noRot="1" noChangeAspect="1" noMove="1" noResize="1" noEditPoints="1" noAdjustHandles="1" noChangeArrowheads="1" noChangeShapeType="1" noTextEdit="1"/>
+                  </p:cNvSpPr>
+                  <p:nvPr/>
+                </p:nvSpPr>
+                <p:spPr>
+                  <a:xfrm>
+                    <a:off x="4496837" y="1756771"/>
+                    <a:ext cx="2135911" cy="327722"/>
+                  </a:xfrm>
+                  <a:prstGeom prst="rect">
+                    <a:avLst/>
+                  </a:prstGeom>
+                  <a:blipFill>
+                    <a:blip r:embed="rId6"/>
+                    <a:stretch>
+                      <a:fillRect t="-20370" b="-31481"/>
+                    </a:stretch>
+                  </a:blipFill>
+                </p:spPr>
+                <p:txBody>
+                  <a:bodyPr/>
+                  <a:lstStyle/>
+                  <a:p>
+                    <a:r>
+                      <a:rPr lang="zh-CN" altLang="en-US">
+                        <a:noFill/>
+                      </a:rPr>
+                      <a:t> </a:t>
+                    </a:r>
+                  </a:p>
+                </p:txBody>
+              </p:sp>
+            </mc:Fallback>
+          </mc:AlternateContent>
+        </p:grpSp>
+        <p:cxnSp>
+          <p:nvCxnSpPr>
+            <p:cNvPr id="152" name="直接箭头连接符 151">
+              <a:extLst>
+                <a:ext uri="{FF2B5EF4-FFF2-40B4-BE49-F238E27FC236}">
+                  <a16:creationId xmlns:a16="http://schemas.microsoft.com/office/drawing/2014/main" id="{1DE760E3-80F4-0734-A0BC-9F6C1C1D68AA}"/>
+                </a:ext>
+              </a:extLst>
+            </p:cNvPr>
+            <p:cNvCxnSpPr>
+              <a:cxnSpLocks/>
+              <a:stCxn id="148" idx="2"/>
+              <a:endCxn id="138" idx="0"/>
+            </p:cNvCxnSpPr>
+            <p:nvPr/>
+          </p:nvCxnSpPr>
+          <p:spPr>
+            <a:xfrm>
+              <a:off x="5462824" y="2502123"/>
+              <a:ext cx="0" cy="254050"/>
+            </a:xfrm>
+            <a:prstGeom prst="straightConnector1">
+              <a:avLst/>
+            </a:prstGeom>
+            <a:ln w="19050">
+              <a:solidFill>
+                <a:schemeClr val="tx1"/>
+              </a:solidFill>
+              <a:tailEnd type="triangle"/>
+            </a:ln>
+          </p:spPr>
+          <p:style>
+            <a:lnRef idx="1">
+              <a:schemeClr val="accent1"/>
+            </a:lnRef>
+            <a:fillRef idx="0">
+              <a:schemeClr val="accent1"/>
+            </a:fillRef>
+            <a:effectRef idx="0">
+              <a:schemeClr val="accent1"/>
+            </a:effectRef>
+            <a:fontRef idx="minor">
+              <a:schemeClr val="tx1"/>
+            </a:fontRef>
+          </p:style>
+        </p:cxnSp>
+        <p:cxnSp>
+          <p:nvCxnSpPr>
+            <p:cNvPr id="172" name="直接箭头连接符 171">
+              <a:extLst>
+                <a:ext uri="{FF2B5EF4-FFF2-40B4-BE49-F238E27FC236}">
+                  <a16:creationId xmlns:a16="http://schemas.microsoft.com/office/drawing/2014/main" id="{66257E67-5CF8-8B36-658C-7B2DCA817D0C}"/>
+                </a:ext>
+              </a:extLst>
+            </p:cNvPr>
+            <p:cNvCxnSpPr>
+              <a:cxnSpLocks/>
+              <a:stCxn id="145" idx="2"/>
+              <a:endCxn id="208" idx="0"/>
+            </p:cNvCxnSpPr>
+            <p:nvPr/>
+          </p:nvCxnSpPr>
+          <p:spPr>
+            <a:xfrm flipH="1">
+              <a:off x="5458579" y="5599745"/>
+              <a:ext cx="4246" cy="355102"/>
+            </a:xfrm>
+            <a:prstGeom prst="straightConnector1">
+              <a:avLst/>
+            </a:prstGeom>
+            <a:ln w="19050">
+              <a:solidFill>
+                <a:schemeClr val="tx1"/>
+              </a:solidFill>
+              <a:tailEnd type="triangle"/>
+            </a:ln>
+          </p:spPr>
+          <p:style>
+            <a:lnRef idx="1">
+              <a:schemeClr val="accent1"/>
+            </a:lnRef>
+            <a:fillRef idx="0">
+              <a:schemeClr val="accent1"/>
+            </a:fillRef>
+            <a:effectRef idx="0">
+              <a:schemeClr val="accent1"/>
+            </a:effectRef>
+            <a:fontRef idx="minor">
+              <a:schemeClr val="tx1"/>
+            </a:fontRef>
+          </p:style>
+        </p:cxnSp>
+        <p:cxnSp>
+          <p:nvCxnSpPr>
+            <p:cNvPr id="174" name="直接箭头连接符 173">
+              <a:extLst>
+                <a:ext uri="{FF2B5EF4-FFF2-40B4-BE49-F238E27FC236}">
+                  <a16:creationId xmlns:a16="http://schemas.microsoft.com/office/drawing/2014/main" id="{EA425204-CD49-FAD0-8A03-5182B225D575}"/>
+                </a:ext>
+              </a:extLst>
+            </p:cNvPr>
+            <p:cNvCxnSpPr>
+              <a:cxnSpLocks/>
+              <a:stCxn id="145" idx="3"/>
+            </p:cNvCxnSpPr>
+            <p:nvPr/>
+          </p:nvCxnSpPr>
+          <p:spPr>
+            <a:xfrm flipV="1">
+              <a:off x="6998129" y="5090686"/>
+              <a:ext cx="759141" cy="1364"/>
+            </a:xfrm>
+            <a:prstGeom prst="bentConnector3">
+              <a:avLst>
+                <a:gd name="adj1" fmla="val 50000"/>
+              </a:avLst>
+            </a:prstGeom>
+            <a:ln w="19050">
+              <a:solidFill>
+                <a:schemeClr val="tx1"/>
+              </a:solidFill>
+              <a:tailEnd type="triangle"/>
+            </a:ln>
+          </p:spPr>
+          <p:style>
+            <a:lnRef idx="1">
+              <a:schemeClr val="accent1"/>
+            </a:lnRef>
+            <a:fillRef idx="0">
+              <a:schemeClr val="accent1"/>
+            </a:fillRef>
+            <a:effectRef idx="0">
+              <a:schemeClr val="accent1"/>
+            </a:effectRef>
+            <a:fontRef idx="minor">
+              <a:schemeClr val="tx1"/>
+            </a:fontRef>
+          </p:style>
+        </p:cxnSp>
+        <p:cxnSp>
+          <p:nvCxnSpPr>
+            <p:cNvPr id="184" name="直接箭头连接符 183">
+              <a:extLst>
+                <a:ext uri="{FF2B5EF4-FFF2-40B4-BE49-F238E27FC236}">
+                  <a16:creationId xmlns:a16="http://schemas.microsoft.com/office/drawing/2014/main" id="{AFF29800-BAA3-2D68-74BB-2E34D3ADBCFE}"/>
+                </a:ext>
+              </a:extLst>
+            </p:cNvPr>
+            <p:cNvCxnSpPr>
+              <a:stCxn id="59" idx="2"/>
+              <a:endCxn id="145" idx="0"/>
+            </p:cNvCxnSpPr>
+            <p:nvPr/>
+          </p:nvCxnSpPr>
+          <p:spPr>
+            <a:xfrm flipH="1">
+              <a:off x="5462825" y="4396690"/>
+              <a:ext cx="2109" cy="187665"/>
+            </a:xfrm>
+            <a:prstGeom prst="straightConnector1">
+              <a:avLst/>
+            </a:prstGeom>
+            <a:ln w="19050">
+              <a:solidFill>
+                <a:schemeClr val="tx1"/>
+              </a:solidFill>
+              <a:tailEnd type="triangle"/>
+            </a:ln>
+          </p:spPr>
+          <p:style>
+            <a:lnRef idx="1">
+              <a:schemeClr val="accent1"/>
+            </a:lnRef>
+            <a:fillRef idx="0">
+              <a:schemeClr val="accent1"/>
+            </a:fillRef>
+            <a:effectRef idx="0">
+              <a:schemeClr val="accent1"/>
+            </a:effectRef>
+            <a:fontRef idx="minor">
+              <a:schemeClr val="tx1"/>
+            </a:fontRef>
+          </p:style>
+        </p:cxnSp>
+        <p:sp>
+          <p:nvSpPr>
+            <p:cNvPr id="187" name="文本框 186">
+              <a:extLst>
+                <a:ext uri="{FF2B5EF4-FFF2-40B4-BE49-F238E27FC236}">
+                  <a16:creationId xmlns:a16="http://schemas.microsoft.com/office/drawing/2014/main" id="{F238CA07-EE20-B274-9CCC-2487E0A8882C}"/>
+                </a:ext>
+              </a:extLst>
+            </p:cNvPr>
+            <p:cNvSpPr txBox="1"/>
+            <p:nvPr/>
+          </p:nvSpPr>
+          <p:spPr>
+            <a:xfrm>
+              <a:off x="6881163" y="2827078"/>
+              <a:ext cx="463648" cy="327722"/>
+            </a:xfrm>
+            <a:prstGeom prst="rect">
+              <a:avLst/>
+            </a:prstGeom>
+            <a:noFill/>
+          </p:spPr>
+          <p:txBody>
+            <a:bodyPr wrap="square" rtlCol="0" anchor="ctr" anchorCtr="1">
+              <a:spAutoFit/>
+            </a:bodyPr>
+            <a:lstStyle/>
+            <a:p>
+              <a:pPr algn="ctr"/>
+              <a:r>
+                <a:rPr lang="zh-CN" altLang="en-US" dirty="0">
+                  <a:latin typeface="Times New Roman" panose="02020603050405020304" pitchFamily="18" charset="0"/>
+                  <a:ea typeface="宋体" panose="02010600030101010101" pitchFamily="2" charset="-122"/>
+                </a:rPr>
+                <a:t>否</a:t>
+              </a:r>
+            </a:p>
+          </p:txBody>
+        </p:sp>
+        <p:sp>
+          <p:nvSpPr>
+            <p:cNvPr id="188" name="文本框 187">
+              <a:extLst>
+                <a:ext uri="{FF2B5EF4-FFF2-40B4-BE49-F238E27FC236}">
+                  <a16:creationId xmlns:a16="http://schemas.microsoft.com/office/drawing/2014/main" id="{D643235A-30B3-4A36-647B-B4932738206A}"/>
+                </a:ext>
+              </a:extLst>
+            </p:cNvPr>
+            <p:cNvSpPr txBox="1"/>
+            <p:nvPr/>
+          </p:nvSpPr>
+          <p:spPr>
+            <a:xfrm>
+              <a:off x="5462823" y="3581622"/>
+              <a:ext cx="463648" cy="327722"/>
+            </a:xfrm>
+            <a:prstGeom prst="rect">
+              <a:avLst/>
+            </a:prstGeom>
+            <a:noFill/>
+          </p:spPr>
+          <p:txBody>
+            <a:bodyPr wrap="square" rtlCol="0" anchor="ctr" anchorCtr="1">
+              <a:spAutoFit/>
+            </a:bodyPr>
+            <a:lstStyle/>
+            <a:p>
+              <a:pPr algn="ctr"/>
+              <a:r>
+                <a:rPr lang="zh-CN" altLang="en-US" dirty="0">
+                  <a:latin typeface="Times New Roman" panose="02020603050405020304" pitchFamily="18" charset="0"/>
+                  <a:ea typeface="宋体" panose="02010600030101010101" pitchFamily="2" charset="-122"/>
+                </a:rPr>
+                <a:t>是</a:t>
+              </a:r>
+            </a:p>
+          </p:txBody>
+        </p:sp>
+        <p:sp>
+          <p:nvSpPr>
+            <p:cNvPr id="189" name="文本框 188">
+              <a:extLst>
+                <a:ext uri="{FF2B5EF4-FFF2-40B4-BE49-F238E27FC236}">
+                  <a16:creationId xmlns:a16="http://schemas.microsoft.com/office/drawing/2014/main" id="{F9D7C336-2B36-037D-A56E-BF8B32180ADB}"/>
+                </a:ext>
+              </a:extLst>
+            </p:cNvPr>
+            <p:cNvSpPr txBox="1"/>
+            <p:nvPr/>
+          </p:nvSpPr>
+          <p:spPr>
+            <a:xfrm>
+              <a:off x="5462823" y="1466589"/>
+              <a:ext cx="463648" cy="327722"/>
+            </a:xfrm>
+            <a:prstGeom prst="rect">
+              <a:avLst/>
+            </a:prstGeom>
+            <a:noFill/>
+          </p:spPr>
+          <p:txBody>
+            <a:bodyPr wrap="square" rtlCol="0" anchor="ctr" anchorCtr="1">
+              <a:spAutoFit/>
+            </a:bodyPr>
+            <a:lstStyle/>
+            <a:p>
+              <a:pPr algn="ctr"/>
+              <a:r>
+                <a:rPr lang="zh-CN" altLang="en-US" dirty="0">
+                  <a:latin typeface="Times New Roman" panose="02020603050405020304" pitchFamily="18" charset="0"/>
+                  <a:ea typeface="宋体" panose="02010600030101010101" pitchFamily="2" charset="-122"/>
+                </a:rPr>
+                <a:t>是</a:t>
+              </a:r>
+            </a:p>
+          </p:txBody>
+        </p:sp>
+        <p:sp>
+          <p:nvSpPr>
+            <p:cNvPr id="190" name="文本框 189">
+              <a:extLst>
+                <a:ext uri="{FF2B5EF4-FFF2-40B4-BE49-F238E27FC236}">
+                  <a16:creationId xmlns:a16="http://schemas.microsoft.com/office/drawing/2014/main" id="{A55EC7A4-F28D-42CC-AB9D-E4B77238E520}"/>
+                </a:ext>
+              </a:extLst>
+            </p:cNvPr>
+            <p:cNvSpPr txBox="1"/>
+            <p:nvPr/>
+          </p:nvSpPr>
+          <p:spPr>
+            <a:xfrm>
+              <a:off x="6881163" y="663858"/>
+              <a:ext cx="463648" cy="327722"/>
+            </a:xfrm>
+            <a:prstGeom prst="rect">
+              <a:avLst/>
+            </a:prstGeom>
+            <a:noFill/>
+          </p:spPr>
+          <p:txBody>
+            <a:bodyPr wrap="square" rtlCol="0" anchor="ctr" anchorCtr="1">
+              <a:spAutoFit/>
+            </a:bodyPr>
+            <a:lstStyle/>
+            <a:p>
+              <a:pPr algn="ctr"/>
+              <a:r>
+                <a:rPr lang="zh-CN" altLang="en-US" dirty="0">
+                  <a:latin typeface="Times New Roman" panose="02020603050405020304" pitchFamily="18" charset="0"/>
+                  <a:ea typeface="宋体" panose="02010600030101010101" pitchFamily="2" charset="-122"/>
+                </a:rPr>
+                <a:t>否</a:t>
+              </a:r>
+            </a:p>
+          </p:txBody>
+        </p:sp>
+        <p:sp>
+          <p:nvSpPr>
+            <p:cNvPr id="208" name="流程图: 终止 207">
+              <a:extLst>
+                <a:ext uri="{FF2B5EF4-FFF2-40B4-BE49-F238E27FC236}">
+                  <a16:creationId xmlns:a16="http://schemas.microsoft.com/office/drawing/2014/main" id="{54E9F143-8E2C-997A-7871-9A067D7C36FA}"/>
+                </a:ext>
+              </a:extLst>
+            </p:cNvPr>
+            <p:cNvSpPr/>
+            <p:nvPr/>
+          </p:nvSpPr>
+          <p:spPr>
+            <a:xfrm>
+              <a:off x="4268027" y="5954847"/>
+              <a:ext cx="2381104" cy="787681"/>
+            </a:xfrm>
+            <a:prstGeom prst="flowChartTerminator">
+              <a:avLst/>
+            </a:prstGeom>
             <a:solidFill>
+              <a:schemeClr val="accent3">
+                <a:lumMod val="20000"/>
+                <a:lumOff val="80000"/>
+              </a:schemeClr>
+            </a:solidFill>
+            <a:ln w="19050">
+              <a:solidFill>
+                <a:schemeClr val="tx1"/>
+              </a:solidFill>
+            </a:ln>
+          </p:spPr>
+          <p:style>
+            <a:lnRef idx="2">
+              <a:schemeClr val="accent1">
+                <a:shade val="15000"/>
+              </a:schemeClr>
+            </a:lnRef>
+            <a:fillRef idx="1">
+              <a:schemeClr val="accent1"/>
+            </a:fillRef>
+            <a:effectRef idx="0">
+              <a:schemeClr val="accent1"/>
+            </a:effectRef>
+            <a:fontRef idx="minor">
+              <a:schemeClr val="lt1"/>
+            </a:fontRef>
+          </p:style>
+          <p:txBody>
+            <a:bodyPr rtlCol="0" anchor="ctr"/>
+            <a:lstStyle/>
+            <a:p>
+              <a:pPr algn="ctr"/>
+              <a:endParaRPr lang="zh-CN" altLang="en-US" dirty="0" err="1">
+                <a:solidFill>
+                  <a:schemeClr val="tx1"/>
+                </a:solidFill>
+              </a:endParaRPr>
+            </a:p>
+          </p:txBody>
+        </p:sp>
+        <p:sp>
+          <p:nvSpPr>
+            <p:cNvPr id="78" name="文本框 77">
+              <a:extLst>
+                <a:ext uri="{FF2B5EF4-FFF2-40B4-BE49-F238E27FC236}">
+                  <a16:creationId xmlns:a16="http://schemas.microsoft.com/office/drawing/2014/main" id="{2F3754FC-C540-2C55-E949-1F089EF2695F}"/>
+                </a:ext>
+              </a:extLst>
+            </p:cNvPr>
+            <p:cNvSpPr txBox="1"/>
+            <p:nvPr/>
+          </p:nvSpPr>
+          <p:spPr>
+            <a:xfrm>
+              <a:off x="4038134" y="6237572"/>
+              <a:ext cx="2840890" cy="222231"/>
+            </a:xfrm>
+            <a:prstGeom prst="rect">
+              <a:avLst/>
+            </a:prstGeom>
+            <a:noFill/>
+          </p:spPr>
+          <p:txBody>
+            <a:bodyPr wrap="square" rtlCol="0" anchor="ctr" anchorCtr="1">
+              <a:spAutoFit/>
+            </a:bodyPr>
+            <a:lstStyle/>
+            <a:p>
+              <a:pPr algn="ctr"/>
+              <a:r>
+                <a:rPr lang="zh-CN" altLang="en-US" dirty="0">
+                  <a:latin typeface="Times New Roman" panose="02020603050405020304" pitchFamily="18" charset="0"/>
+                  <a:ea typeface="宋体" panose="02010600030101010101" pitchFamily="2" charset="-122"/>
+                </a:rPr>
+                <a:t>传输结束</a:t>
+              </a:r>
+              <a:endParaRPr lang="en-US" altLang="zh-CN" dirty="0">
+                <a:latin typeface="Times New Roman" panose="02020603050405020304" pitchFamily="18" charset="0"/>
+                <a:ea typeface="宋体" panose="02010600030101010101" pitchFamily="2" charset="-122"/>
+              </a:endParaRPr>
+            </a:p>
+          </p:txBody>
+        </p:sp>
+        <p:cxnSp>
+          <p:nvCxnSpPr>
+            <p:cNvPr id="215" name="直接箭头连接符 214">
+              <a:extLst>
+                <a:ext uri="{FF2B5EF4-FFF2-40B4-BE49-F238E27FC236}">
+                  <a16:creationId xmlns:a16="http://schemas.microsoft.com/office/drawing/2014/main" id="{6776D8BC-D26D-269A-D6BF-7D6030CA5693}"/>
+                </a:ext>
+              </a:extLst>
+            </p:cNvPr>
+            <p:cNvCxnSpPr>
+              <a:cxnSpLocks/>
+              <a:stCxn id="22" idx="0"/>
+              <a:endCxn id="2" idx="2"/>
+            </p:cNvCxnSpPr>
+            <p:nvPr/>
+          </p:nvCxnSpPr>
+          <p:spPr>
+            <a:xfrm flipV="1">
+              <a:off x="2030844" y="1539297"/>
+              <a:ext cx="0" cy="1418505"/>
+            </a:xfrm>
+            <a:prstGeom prst="straightConnector1">
+              <a:avLst/>
+            </a:prstGeom>
+            <a:ln w="19050">
+              <a:solidFill>
+                <a:schemeClr val="tx1"/>
+              </a:solidFill>
+              <a:tailEnd type="triangle"/>
+            </a:ln>
+          </p:spPr>
+          <p:style>
+            <a:lnRef idx="1">
+              <a:schemeClr val="accent1"/>
+            </a:lnRef>
+            <a:fillRef idx="0">
+              <a:schemeClr val="accent1"/>
+            </a:fillRef>
+            <a:effectRef idx="0">
+              <a:schemeClr val="accent1"/>
+            </a:effectRef>
+            <a:fontRef idx="minor">
               <a:schemeClr val="tx1"/>
+            </a:fontRef>
+          </p:style>
+        </p:cxnSp>
+        <p:cxnSp>
+          <p:nvCxnSpPr>
+            <p:cNvPr id="20" name="直接连接符 19">
+              <a:extLst>
+                <a:ext uri="{FF2B5EF4-FFF2-40B4-BE49-F238E27FC236}">
+                  <a16:creationId xmlns:a16="http://schemas.microsoft.com/office/drawing/2014/main" id="{30ECA69D-1ADB-D004-83CD-0AB0821D9326}"/>
+                </a:ext>
+              </a:extLst>
+            </p:cNvPr>
+            <p:cNvCxnSpPr>
+              <a:cxnSpLocks/>
+              <a:stCxn id="9" idx="3"/>
+            </p:cNvCxnSpPr>
+            <p:nvPr/>
+          </p:nvCxnSpPr>
+          <p:spPr>
+            <a:xfrm>
+              <a:off x="10826718" y="991580"/>
+              <a:ext cx="1042334" cy="0"/>
+            </a:xfrm>
+            <a:prstGeom prst="line">
+              <a:avLst/>
+            </a:prstGeom>
+            <a:ln w="22225">
+              <a:solidFill>
+                <a:schemeClr val="tx1"/>
+              </a:solidFill>
+              <a:tailEnd type="none"/>
+            </a:ln>
+          </p:spPr>
+          <p:style>
+            <a:lnRef idx="1">
+              <a:schemeClr val="accent1"/>
+            </a:lnRef>
+            <a:fillRef idx="0">
+              <a:schemeClr val="accent1"/>
+            </a:fillRef>
+            <a:effectRef idx="0">
+              <a:schemeClr val="accent1"/>
+            </a:effectRef>
+            <a:fontRef idx="minor">
+              <a:schemeClr val="tx1"/>
+            </a:fontRef>
+          </p:style>
+        </p:cxnSp>
+        <p:sp>
+          <p:nvSpPr>
+            <p:cNvPr id="22" name="流程图: 终止 21">
+              <a:extLst>
+                <a:ext uri="{FF2B5EF4-FFF2-40B4-BE49-F238E27FC236}">
+                  <a16:creationId xmlns:a16="http://schemas.microsoft.com/office/drawing/2014/main" id="{7CF13436-AD08-D1C6-167F-AF3BF9710B61}"/>
+                </a:ext>
+              </a:extLst>
+            </p:cNvPr>
+            <p:cNvSpPr/>
+            <p:nvPr/>
+          </p:nvSpPr>
+          <p:spPr>
+            <a:xfrm>
+              <a:off x="527394" y="2957802"/>
+              <a:ext cx="3006899" cy="787681"/>
+            </a:xfrm>
+            <a:prstGeom prst="flowChartTerminator">
+              <a:avLst/>
+            </a:prstGeom>
+            <a:solidFill>
+              <a:schemeClr val="accent3">
+                <a:lumMod val="20000"/>
+                <a:lumOff val="80000"/>
+              </a:schemeClr>
             </a:solidFill>
-            <a:tailEnd type="none"/>
-          </a:ln>
-        </p:spPr>
-        <p:style>
-          <a:lnRef idx="1">
-            <a:schemeClr val="accent1"/>
-          </a:lnRef>
-          <a:fillRef idx="0">
-            <a:schemeClr val="accent1"/>
-          </a:fillRef>
-          <a:effectRef idx="0">
-            <a:schemeClr val="accent1"/>
-          </a:effectRef>
-          <a:fontRef idx="minor">
-            <a:schemeClr val="tx1"/>
-          </a:fontRef>
-        </p:style>
-      </p:cxnSp>
+            <a:ln w="19050">
+              <a:solidFill>
+                <a:schemeClr val="tx1"/>
+              </a:solidFill>
+            </a:ln>
+          </p:spPr>
+          <p:style>
+            <a:lnRef idx="2">
+              <a:schemeClr val="accent1">
+                <a:shade val="15000"/>
+              </a:schemeClr>
+            </a:lnRef>
+            <a:fillRef idx="1">
+              <a:schemeClr val="accent1"/>
+            </a:fillRef>
+            <a:effectRef idx="0">
+              <a:schemeClr val="accent1"/>
+            </a:effectRef>
+            <a:fontRef idx="minor">
+              <a:schemeClr val="lt1"/>
+            </a:fontRef>
+          </p:style>
+          <p:txBody>
+            <a:bodyPr rtlCol="0" anchor="ctr"/>
+            <a:lstStyle/>
+            <a:p>
+              <a:pPr algn="ctr"/>
+              <a:endParaRPr lang="zh-CN" altLang="en-US" dirty="0" err="1">
+                <a:solidFill>
+                  <a:schemeClr val="tx1"/>
+                </a:solidFill>
+              </a:endParaRPr>
+            </a:p>
+          </p:txBody>
+        </p:sp>
+        <mc:AlternateContent xmlns:mc="http://schemas.openxmlformats.org/markup-compatibility/2006" xmlns:a14="http://schemas.microsoft.com/office/drawing/2010/main">
+          <mc:Choice Requires="a14">
+            <p:sp>
+              <p:nvSpPr>
+                <p:cNvPr id="23" name="文本框 22">
+                  <a:extLst>
+                    <a:ext uri="{FF2B5EF4-FFF2-40B4-BE49-F238E27FC236}">
+                      <a16:creationId xmlns:a16="http://schemas.microsoft.com/office/drawing/2014/main" id="{427D1599-0021-4CCD-F79B-F21DF6CAD45F}"/>
+                    </a:ext>
+                  </a:extLst>
+                </p:cNvPr>
+                <p:cNvSpPr txBox="1"/>
+                <p:nvPr/>
+              </p:nvSpPr>
+              <p:spPr>
+                <a:xfrm>
+                  <a:off x="562619" y="3028477"/>
+                  <a:ext cx="2840890" cy="646331"/>
+                </a:xfrm>
+                <a:prstGeom prst="rect">
+                  <a:avLst/>
+                </a:prstGeom>
+                <a:noFill/>
+              </p:spPr>
+              <p:txBody>
+                <a:bodyPr wrap="square" rtlCol="0" anchor="ctr" anchorCtr="1">
+                  <a:spAutoFit/>
+                </a:bodyPr>
+                <a:lstStyle/>
+                <a:p>
+                  <a:pPr algn="ctr"/>
+                  <a:r>
+                    <a:rPr lang="zh-CN" altLang="en-US" dirty="0">
+                      <a:latin typeface="Times New Roman" panose="02020603050405020304" pitchFamily="18" charset="0"/>
+                      <a:ea typeface="宋体" panose="02010600030101010101" pitchFamily="2" charset="-122"/>
+                    </a:rPr>
+                    <a:t>确定优先级和 </a:t>
+                  </a:r>
+                  <a:r>
+                    <a:rPr lang="en-US" altLang="zh-CN" dirty="0">
+                      <a:latin typeface="Times New Roman" panose="02020603050405020304" pitchFamily="18" charset="0"/>
+                      <a:ea typeface="宋体" panose="02010600030101010101" pitchFamily="2" charset="-122"/>
+                    </a:rPr>
+                    <a:t>LBT </a:t>
+                  </a:r>
+                  <a:r>
+                    <a:rPr lang="zh-CN" altLang="en-US" dirty="0">
+                      <a:latin typeface="Times New Roman" panose="02020603050405020304" pitchFamily="18" charset="0"/>
+                      <a:ea typeface="宋体" panose="02010600030101010101" pitchFamily="2" charset="-122"/>
+                    </a:rPr>
+                    <a:t>参数</a:t>
+                  </a:r>
+                  <a:r>
+                    <a:rPr lang="en-US" altLang="zh-CN" dirty="0">
+                      <a:latin typeface="Times New Roman" panose="02020603050405020304" pitchFamily="18" charset="0"/>
+                      <a:ea typeface="宋体" panose="02010600030101010101" pitchFamily="2" charset="-122"/>
+                    </a:rPr>
+                    <a:t>(</a:t>
+                  </a:r>
+                  <a14:m>
+                    <m:oMath xmlns:m="http://schemas.openxmlformats.org/officeDocument/2006/math">
+                      <m:r>
+                        <a:rPr lang="en-US" altLang="zh-CN" i="1" dirty="0">
+                          <a:latin typeface="Cambria Math" panose="02040503050406030204" pitchFamily="18" charset="0"/>
+                          <a:ea typeface="宋体" panose="02010600030101010101" pitchFamily="2" charset="-122"/>
+                        </a:rPr>
+                        <m:t>𝐶</m:t>
+                      </m:r>
+                      <m:sSub>
+                        <m:sSubPr>
+                          <m:ctrlPr>
+                            <a:rPr lang="en-US" altLang="zh-CN" i="1" dirty="0">
+                              <a:latin typeface="Cambria Math" panose="02040503050406030204" pitchFamily="18" charset="0"/>
+                              <a:ea typeface="宋体" panose="02010600030101010101" pitchFamily="2" charset="-122"/>
+                            </a:rPr>
+                          </m:ctrlPr>
+                        </m:sSubPr>
+                        <m:e>
+                          <m:r>
+                            <a:rPr lang="en-US" altLang="zh-CN" i="1" dirty="0">
+                              <a:latin typeface="Cambria Math" panose="02040503050406030204" pitchFamily="18" charset="0"/>
+                              <a:ea typeface="宋体" panose="02010600030101010101" pitchFamily="2" charset="-122"/>
+                            </a:rPr>
+                            <m:t>𝑊</m:t>
+                          </m:r>
+                        </m:e>
+                        <m:sub>
+                          <m:r>
+                            <a:rPr lang="en-US" altLang="zh-CN" i="1" dirty="0">
+                              <a:latin typeface="Cambria Math" panose="02040503050406030204" pitchFamily="18" charset="0"/>
+                              <a:ea typeface="宋体" panose="02010600030101010101" pitchFamily="2" charset="-122"/>
+                            </a:rPr>
+                            <m:t>𝑚𝑖𝑛</m:t>
+                          </m:r>
+                        </m:sub>
+                      </m:sSub>
+                      <m:r>
+                        <a:rPr lang="zh-CN" altLang="en-US" i="1" dirty="0">
+                          <a:latin typeface="Cambria Math" panose="02040503050406030204" pitchFamily="18" charset="0"/>
+                          <a:ea typeface="宋体" panose="02010600030101010101" pitchFamily="2" charset="-122"/>
+                        </a:rPr>
+                        <m:t>、</m:t>
+                      </m:r>
+                      <m:r>
+                        <a:rPr lang="en-US" altLang="zh-CN" i="1" dirty="0">
+                          <a:latin typeface="Cambria Math" panose="02040503050406030204" pitchFamily="18" charset="0"/>
+                          <a:ea typeface="宋体" panose="02010600030101010101" pitchFamily="2" charset="-122"/>
+                        </a:rPr>
+                        <m:t>𝐶</m:t>
+                      </m:r>
+                      <m:sSub>
+                        <m:sSubPr>
+                          <m:ctrlPr>
+                            <a:rPr lang="en-US" altLang="zh-CN" i="1" dirty="0">
+                              <a:latin typeface="Cambria Math" panose="02040503050406030204" pitchFamily="18" charset="0"/>
+                              <a:ea typeface="宋体" panose="02010600030101010101" pitchFamily="2" charset="-122"/>
+                            </a:rPr>
+                          </m:ctrlPr>
+                        </m:sSubPr>
+                        <m:e>
+                          <m:r>
+                            <a:rPr lang="en-US" altLang="zh-CN" i="1" dirty="0">
+                              <a:latin typeface="Cambria Math" panose="02040503050406030204" pitchFamily="18" charset="0"/>
+                              <a:ea typeface="宋体" panose="02010600030101010101" pitchFamily="2" charset="-122"/>
+                            </a:rPr>
+                            <m:t>𝑊</m:t>
+                          </m:r>
+                        </m:e>
+                        <m:sub>
+                          <m:r>
+                            <a:rPr lang="en-US" altLang="zh-CN" i="1" dirty="0">
+                              <a:latin typeface="Cambria Math" panose="02040503050406030204" pitchFamily="18" charset="0"/>
+                              <a:ea typeface="宋体" panose="02010600030101010101" pitchFamily="2" charset="-122"/>
+                            </a:rPr>
+                            <m:t>𝑚𝑎𝑥</m:t>
+                          </m:r>
+                        </m:sub>
+                      </m:sSub>
+                      <m:r>
+                        <a:rPr lang="zh-CN" altLang="en-US" i="1" dirty="0">
+                          <a:latin typeface="Cambria Math" panose="02040503050406030204" pitchFamily="18" charset="0"/>
+                          <a:ea typeface="宋体" panose="02010600030101010101" pitchFamily="2" charset="-122"/>
+                        </a:rPr>
+                        <m:t>等</m:t>
+                      </m:r>
+                    </m:oMath>
+                  </a14:m>
+                  <a:r>
+                    <a:rPr lang="en-US" altLang="zh-CN" dirty="0">
+                      <a:latin typeface="Times New Roman" panose="02020603050405020304" pitchFamily="18" charset="0"/>
+                      <a:ea typeface="宋体" panose="02010600030101010101" pitchFamily="2" charset="-122"/>
+                    </a:rPr>
+                    <a:t>)</a:t>
+                  </a:r>
+                  <a:endParaRPr lang="zh-CN" altLang="en-US" dirty="0">
+                    <a:latin typeface="Times New Roman" panose="02020603050405020304" pitchFamily="18" charset="0"/>
+                    <a:ea typeface="宋体" panose="02010600030101010101" pitchFamily="2" charset="-122"/>
+                  </a:endParaRPr>
+                </a:p>
+              </p:txBody>
+            </p:sp>
+          </mc:Choice>
+          <mc:Fallback xmlns="">
+            <p:sp>
+              <p:nvSpPr>
+                <p:cNvPr id="23" name="文本框 22">
+                  <a:extLst>
+                    <a:ext uri="{FF2B5EF4-FFF2-40B4-BE49-F238E27FC236}">
+                      <a16:creationId xmlns:a16="http://schemas.microsoft.com/office/drawing/2014/main" id="{427D1599-0021-4CCD-F79B-F21DF6CAD45F}"/>
+                    </a:ext>
+                  </a:extLst>
+                </p:cNvPr>
+                <p:cNvSpPr txBox="1">
+                  <a:spLocks noRot="1" noChangeAspect="1" noMove="1" noResize="1" noEditPoints="1" noAdjustHandles="1" noChangeArrowheads="1" noChangeShapeType="1" noTextEdit="1"/>
+                </p:cNvSpPr>
+                <p:nvPr/>
+              </p:nvSpPr>
+              <p:spPr>
+                <a:xfrm>
+                  <a:off x="562619" y="3028477"/>
+                  <a:ext cx="2840890" cy="646331"/>
+                </a:xfrm>
+                <a:prstGeom prst="rect">
+                  <a:avLst/>
+                </a:prstGeom>
+                <a:blipFill>
+                  <a:blip r:embed="rId7"/>
+                  <a:stretch>
+                    <a:fillRect t="-6604" b="-14151"/>
+                  </a:stretch>
+                </a:blipFill>
+              </p:spPr>
+              <p:txBody>
+                <a:bodyPr/>
+                <a:lstStyle/>
+                <a:p>
+                  <a:r>
+                    <a:rPr lang="zh-CN" altLang="en-US">
+                      <a:noFill/>
+                    </a:rPr>
+                    <a:t> </a:t>
+                  </a:r>
+                </a:p>
+              </p:txBody>
+            </p:sp>
+          </mc:Fallback>
+        </mc:AlternateContent>
+        <p:cxnSp>
+          <p:nvCxnSpPr>
+            <p:cNvPr id="63" name="直接连接符 62">
+              <a:extLst>
+                <a:ext uri="{FF2B5EF4-FFF2-40B4-BE49-F238E27FC236}">
+                  <a16:creationId xmlns:a16="http://schemas.microsoft.com/office/drawing/2014/main" id="{E54FC1CE-A9F7-00EF-5631-5DBCBE356A26}"/>
+                </a:ext>
+              </a:extLst>
+            </p:cNvPr>
+            <p:cNvCxnSpPr>
+              <a:cxnSpLocks/>
+              <a:stCxn id="138" idx="3"/>
+            </p:cNvCxnSpPr>
+            <p:nvPr/>
+          </p:nvCxnSpPr>
+          <p:spPr>
+            <a:xfrm>
+              <a:off x="6530780" y="3150014"/>
+              <a:ext cx="5338272" cy="0"/>
+            </a:xfrm>
+            <a:prstGeom prst="line">
+              <a:avLst/>
+            </a:prstGeom>
+            <a:ln w="22225">
+              <a:solidFill>
+                <a:schemeClr val="tx1"/>
+              </a:solidFill>
+              <a:tailEnd type="none"/>
+            </a:ln>
+          </p:spPr>
+          <p:style>
+            <a:lnRef idx="1">
+              <a:schemeClr val="accent1"/>
+            </a:lnRef>
+            <a:fillRef idx="0">
+              <a:schemeClr val="accent1"/>
+            </a:fillRef>
+            <a:effectRef idx="0">
+              <a:schemeClr val="accent1"/>
+            </a:effectRef>
+            <a:fontRef idx="minor">
+              <a:schemeClr val="tx1"/>
+            </a:fontRef>
+          </p:style>
+        </p:cxnSp>
+      </p:grpSp>
     </p:spTree>
     <p:extLst>
       <p:ext uri="{BB962C8B-B14F-4D97-AF65-F5344CB8AC3E}">

--- a/PPT画图.pptx
+++ b/PPT画图.pptx
@@ -5,7 +5,7 @@
     <p:sldMasterId id="2147483648" r:id="rId1"/>
   </p:sldMasterIdLst>
   <p:notesMasterIdLst>
-    <p:notesMasterId r:id="rId15"/>
+    <p:notesMasterId r:id="rId17"/>
   </p:notesMasterIdLst>
   <p:sldIdLst>
     <p:sldId id="257" r:id="rId2"/>
@@ -21,6 +21,8 @@
     <p:sldId id="267" r:id="rId12"/>
     <p:sldId id="270" r:id="rId13"/>
     <p:sldId id="271" r:id="rId14"/>
+    <p:sldId id="272" r:id="rId15"/>
+    <p:sldId id="273" r:id="rId16"/>
   </p:sldIdLst>
   <p:sldSz cx="12192000" cy="6858000"/>
   <p:notesSz cx="6858000" cy="9144000"/>
@@ -209,7 +211,7 @@
           <a:p>
             <a:fld id="{5C1E4601-79B1-425F-B925-3F7BE382BF19}" type="datetimeFigureOut">
               <a:rPr lang="zh-CN" altLang="en-US" smtClean="0"/>
-              <a:t>2026/03/31</a:t>
+              <a:t>2026/04/02</a:t>
             </a:fld>
             <a:endParaRPr lang="zh-CN" altLang="en-US"/>
           </a:p>
@@ -899,7 +901,7 @@
           <a:p>
             <a:fld id="{5D2E9D4A-569D-49DD-9DBB-BF425DFB68D5}" type="datetimeFigureOut">
               <a:rPr lang="zh-CN" altLang="en-US" smtClean="0"/>
-              <a:t>2026/03/31</a:t>
+              <a:t>2026/04/02</a:t>
             </a:fld>
             <a:endParaRPr lang="zh-CN" altLang="en-US"/>
           </a:p>
@@ -1097,7 +1099,7 @@
           <a:p>
             <a:fld id="{5D2E9D4A-569D-49DD-9DBB-BF425DFB68D5}" type="datetimeFigureOut">
               <a:rPr lang="zh-CN" altLang="en-US" smtClean="0"/>
-              <a:t>2026/03/31</a:t>
+              <a:t>2026/04/02</a:t>
             </a:fld>
             <a:endParaRPr lang="zh-CN" altLang="en-US"/>
           </a:p>
@@ -1305,7 +1307,7 @@
           <a:p>
             <a:fld id="{5D2E9D4A-569D-49DD-9DBB-BF425DFB68D5}" type="datetimeFigureOut">
               <a:rPr lang="zh-CN" altLang="en-US" smtClean="0"/>
-              <a:t>2026/03/31</a:t>
+              <a:t>2026/04/02</a:t>
             </a:fld>
             <a:endParaRPr lang="zh-CN" altLang="en-US"/>
           </a:p>
@@ -1503,7 +1505,7 @@
           <a:p>
             <a:fld id="{5D2E9D4A-569D-49DD-9DBB-BF425DFB68D5}" type="datetimeFigureOut">
               <a:rPr lang="zh-CN" altLang="en-US" smtClean="0"/>
-              <a:t>2026/03/31</a:t>
+              <a:t>2026/04/02</a:t>
             </a:fld>
             <a:endParaRPr lang="zh-CN" altLang="en-US"/>
           </a:p>
@@ -1778,7 +1780,7 @@
           <a:p>
             <a:fld id="{5D2E9D4A-569D-49DD-9DBB-BF425DFB68D5}" type="datetimeFigureOut">
               <a:rPr lang="zh-CN" altLang="en-US" smtClean="0"/>
-              <a:t>2026/03/31</a:t>
+              <a:t>2026/04/02</a:t>
             </a:fld>
             <a:endParaRPr lang="zh-CN" altLang="en-US"/>
           </a:p>
@@ -2043,7 +2045,7 @@
           <a:p>
             <a:fld id="{5D2E9D4A-569D-49DD-9DBB-BF425DFB68D5}" type="datetimeFigureOut">
               <a:rPr lang="zh-CN" altLang="en-US" smtClean="0"/>
-              <a:t>2026/03/31</a:t>
+              <a:t>2026/04/02</a:t>
             </a:fld>
             <a:endParaRPr lang="zh-CN" altLang="en-US"/>
           </a:p>
@@ -2455,7 +2457,7 @@
           <a:p>
             <a:fld id="{5D2E9D4A-569D-49DD-9DBB-BF425DFB68D5}" type="datetimeFigureOut">
               <a:rPr lang="zh-CN" altLang="en-US" smtClean="0"/>
-              <a:t>2026/03/31</a:t>
+              <a:t>2026/04/02</a:t>
             </a:fld>
             <a:endParaRPr lang="zh-CN" altLang="en-US"/>
           </a:p>
@@ -2596,7 +2598,7 @@
           <a:p>
             <a:fld id="{5D2E9D4A-569D-49DD-9DBB-BF425DFB68D5}" type="datetimeFigureOut">
               <a:rPr lang="zh-CN" altLang="en-US" smtClean="0"/>
-              <a:t>2026/03/31</a:t>
+              <a:t>2026/04/02</a:t>
             </a:fld>
             <a:endParaRPr lang="zh-CN" altLang="en-US"/>
           </a:p>
@@ -2709,7 +2711,7 @@
           <a:p>
             <a:fld id="{5D2E9D4A-569D-49DD-9DBB-BF425DFB68D5}" type="datetimeFigureOut">
               <a:rPr lang="zh-CN" altLang="en-US" smtClean="0"/>
-              <a:t>2026/03/31</a:t>
+              <a:t>2026/04/02</a:t>
             </a:fld>
             <a:endParaRPr lang="zh-CN" altLang="en-US"/>
           </a:p>
@@ -3020,7 +3022,7 @@
           <a:p>
             <a:fld id="{5D2E9D4A-569D-49DD-9DBB-BF425DFB68D5}" type="datetimeFigureOut">
               <a:rPr lang="zh-CN" altLang="en-US" smtClean="0"/>
-              <a:t>2026/03/31</a:t>
+              <a:t>2026/04/02</a:t>
             </a:fld>
             <a:endParaRPr lang="zh-CN" altLang="en-US"/>
           </a:p>
@@ -3308,7 +3310,7 @@
           <a:p>
             <a:fld id="{5D2E9D4A-569D-49DD-9DBB-BF425DFB68D5}" type="datetimeFigureOut">
               <a:rPr lang="zh-CN" altLang="en-US" smtClean="0"/>
-              <a:t>2026/03/31</a:t>
+              <a:t>2026/04/02</a:t>
             </a:fld>
             <a:endParaRPr lang="zh-CN" altLang="en-US"/>
           </a:p>
@@ -3549,7 +3551,7 @@
           <a:p>
             <a:fld id="{5D2E9D4A-569D-49DD-9DBB-BF425DFB68D5}" type="datetimeFigureOut">
               <a:rPr lang="zh-CN" altLang="en-US" smtClean="0"/>
-              <a:t>2026/03/31</a:t>
+              <a:t>2026/04/02</a:t>
             </a:fld>
             <a:endParaRPr lang="zh-CN" altLang="en-US"/>
           </a:p>
@@ -13330,222 +13332,12 @@
           <a:chExt cx="0" cy="0"/>
         </a:xfrm>
       </p:grpSpPr>
-      <p:sp>
-        <p:nvSpPr>
-          <p:cNvPr id="2" name="矩形 1">
+      <p:grpSp>
+        <p:nvGrpSpPr>
+          <p:cNvPr id="24" name="组合 23">
             <a:extLst>
               <a:ext uri="{FF2B5EF4-FFF2-40B4-BE49-F238E27FC236}">
-                <a16:creationId xmlns:a16="http://schemas.microsoft.com/office/drawing/2014/main" id="{FAF74B55-9CAD-1606-ED15-3676731F4BE4}"/>
-              </a:ext>
-            </a:extLst>
-          </p:cNvPr>
-          <p:cNvSpPr/>
-          <p:nvPr/>
-        </p:nvSpPr>
-        <p:spPr>
-          <a:xfrm>
-            <a:off x="564337" y="941692"/>
-            <a:ext cx="1052187" cy="688931"/>
-          </a:xfrm>
-          <a:prstGeom prst="rect">
-            <a:avLst/>
-          </a:prstGeom>
-          <a:noFill/>
-          <a:ln w="15875">
-            <a:solidFill>
-              <a:schemeClr val="tx1"/>
-            </a:solidFill>
-          </a:ln>
-        </p:spPr>
-        <p:style>
-          <a:lnRef idx="2">
-            <a:schemeClr val="accent1">
-              <a:shade val="50000"/>
-            </a:schemeClr>
-          </a:lnRef>
-          <a:fillRef idx="1">
-            <a:schemeClr val="accent1"/>
-          </a:fillRef>
-          <a:effectRef idx="0">
-            <a:schemeClr val="accent1"/>
-          </a:effectRef>
-          <a:fontRef idx="minor">
-            <a:schemeClr val="lt1"/>
-          </a:fontRef>
-        </p:style>
-        <p:txBody>
-          <a:bodyPr rtlCol="0" anchor="ctr"/>
-          <a:lstStyle/>
-          <a:p>
-            <a:pPr algn="ctr"/>
-            <a:r>
-              <a:rPr lang="zh-CN" altLang="en-US" dirty="0">
-                <a:solidFill>
-                  <a:schemeClr val="tx1"/>
-                </a:solidFill>
-                <a:latin typeface="Times New Roman" panose="02020603050405020304" pitchFamily="18" charset="0"/>
-                <a:ea typeface="宋体" panose="02010600030101010101" pitchFamily="2" charset="-122"/>
-              </a:rPr>
-              <a:t>终端</a:t>
-            </a:r>
-          </a:p>
-        </p:txBody>
-      </p:sp>
-      <p:sp>
-        <p:nvSpPr>
-          <p:cNvPr id="3" name="矩形 2">
-            <a:extLst>
-              <a:ext uri="{FF2B5EF4-FFF2-40B4-BE49-F238E27FC236}">
-                <a16:creationId xmlns:a16="http://schemas.microsoft.com/office/drawing/2014/main" id="{37880E56-439D-3623-734F-166D14B9A507}"/>
-              </a:ext>
-            </a:extLst>
-          </p:cNvPr>
-          <p:cNvSpPr/>
-          <p:nvPr/>
-        </p:nvSpPr>
-        <p:spPr>
-          <a:xfrm>
-            <a:off x="3964736" y="941692"/>
-            <a:ext cx="1052187" cy="688931"/>
-          </a:xfrm>
-          <a:prstGeom prst="rect">
-            <a:avLst/>
-          </a:prstGeom>
-          <a:noFill/>
-          <a:ln w="15875">
-            <a:solidFill>
-              <a:schemeClr val="tx1"/>
-            </a:solidFill>
-          </a:ln>
-        </p:spPr>
-        <p:style>
-          <a:lnRef idx="2">
-            <a:schemeClr val="accent1">
-              <a:shade val="50000"/>
-            </a:schemeClr>
-          </a:lnRef>
-          <a:fillRef idx="1">
-            <a:schemeClr val="accent1"/>
-          </a:fillRef>
-          <a:effectRef idx="0">
-            <a:schemeClr val="accent1"/>
-          </a:effectRef>
-          <a:fontRef idx="minor">
-            <a:schemeClr val="lt1"/>
-          </a:fontRef>
-        </p:style>
-        <p:txBody>
-          <a:bodyPr rtlCol="0" anchor="ctr"/>
-          <a:lstStyle/>
-          <a:p>
-            <a:pPr algn="ctr"/>
-            <a:r>
-              <a:rPr lang="zh-CN" altLang="en-US" dirty="0">
-                <a:solidFill>
-                  <a:schemeClr val="tx1"/>
-                </a:solidFill>
-                <a:latin typeface="Times New Roman" panose="02020603050405020304" pitchFamily="18" charset="0"/>
-                <a:ea typeface="宋体" panose="02010600030101010101" pitchFamily="2" charset="-122"/>
-              </a:rPr>
-              <a:t>基站</a:t>
-            </a:r>
-          </a:p>
-        </p:txBody>
-      </p:sp>
-      <p:cxnSp>
-        <p:nvCxnSpPr>
-          <p:cNvPr id="4" name="直接箭头连接符 3">
-            <a:extLst>
-              <a:ext uri="{FF2B5EF4-FFF2-40B4-BE49-F238E27FC236}">
-                <a16:creationId xmlns:a16="http://schemas.microsoft.com/office/drawing/2014/main" id="{1913DAB9-D655-5DA2-C031-88903A3CC4CA}"/>
-              </a:ext>
-            </a:extLst>
-          </p:cNvPr>
-          <p:cNvCxnSpPr>
-            <a:stCxn id="2" idx="2"/>
-          </p:cNvCxnSpPr>
-          <p:nvPr/>
-        </p:nvCxnSpPr>
-        <p:spPr>
-          <a:xfrm flipH="1">
-            <a:off x="1090430" y="1630623"/>
-            <a:ext cx="1" cy="3600000"/>
-          </a:xfrm>
-          <a:prstGeom prst="straightConnector1">
-            <a:avLst/>
-          </a:prstGeom>
-          <a:ln w="15875">
-            <a:solidFill>
-              <a:schemeClr val="tx1"/>
-            </a:solidFill>
-            <a:tailEnd type="none"/>
-          </a:ln>
-        </p:spPr>
-        <p:style>
-          <a:lnRef idx="1">
-            <a:schemeClr val="accent1"/>
-          </a:lnRef>
-          <a:fillRef idx="0">
-            <a:schemeClr val="accent1"/>
-          </a:fillRef>
-          <a:effectRef idx="0">
-            <a:schemeClr val="accent1"/>
-          </a:effectRef>
-          <a:fontRef idx="minor">
-            <a:schemeClr val="tx1"/>
-          </a:fontRef>
-        </p:style>
-      </p:cxnSp>
-      <p:cxnSp>
-        <p:nvCxnSpPr>
-          <p:cNvPr id="5" name="直接箭头连接符 4">
-            <a:extLst>
-              <a:ext uri="{FF2B5EF4-FFF2-40B4-BE49-F238E27FC236}">
-                <a16:creationId xmlns:a16="http://schemas.microsoft.com/office/drawing/2014/main" id="{A0D5538B-DF7A-DE49-8ACE-232A1B0DB0E2}"/>
-              </a:ext>
-            </a:extLst>
-          </p:cNvPr>
-          <p:cNvCxnSpPr>
-            <a:stCxn id="3" idx="2"/>
-          </p:cNvCxnSpPr>
-          <p:nvPr/>
-        </p:nvCxnSpPr>
-        <p:spPr>
-          <a:xfrm>
-            <a:off x="4490830" y="1630623"/>
-            <a:ext cx="35490" cy="3600000"/>
-          </a:xfrm>
-          <a:prstGeom prst="straightConnector1">
-            <a:avLst/>
-          </a:prstGeom>
-          <a:ln w="15875">
-            <a:solidFill>
-              <a:schemeClr val="tx1"/>
-            </a:solidFill>
-            <a:tailEnd type="none"/>
-          </a:ln>
-        </p:spPr>
-        <p:style>
-          <a:lnRef idx="1">
-            <a:schemeClr val="accent1"/>
-          </a:lnRef>
-          <a:fillRef idx="0">
-            <a:schemeClr val="accent1"/>
-          </a:fillRef>
-          <a:effectRef idx="0">
-            <a:schemeClr val="accent1"/>
-          </a:effectRef>
-          <a:fontRef idx="minor">
-            <a:schemeClr val="tx1"/>
-          </a:fontRef>
-        </p:style>
-      </p:cxnSp>
-      <p:grpSp>
-        <p:nvGrpSpPr>
-          <p:cNvPr id="6" name="组合 5">
-            <a:extLst>
-              <a:ext uri="{FF2B5EF4-FFF2-40B4-BE49-F238E27FC236}">
-                <a16:creationId xmlns:a16="http://schemas.microsoft.com/office/drawing/2014/main" id="{E8D33E62-3DA5-7CA6-44F5-71504FFE0595}"/>
+                <a16:creationId xmlns:a16="http://schemas.microsoft.com/office/drawing/2014/main" id="{4DC058CE-4E1A-CE5C-0B29-210F7D30C267}"/>
               </a:ext>
             </a:extLst>
           </p:cNvPr>
@@ -13554,30 +13346,152 @@
         </p:nvGrpSpPr>
         <p:grpSpPr>
           <a:xfrm>
-            <a:off x="1090429" y="2280755"/>
-            <a:ext cx="3418146" cy="822960"/>
-            <a:chOff x="7115756" y="3259756"/>
-            <a:chExt cx="3418146" cy="822960"/>
+            <a:off x="564337" y="941692"/>
+            <a:ext cx="4452586" cy="4840842"/>
+            <a:chOff x="564337" y="941692"/>
+            <a:chExt cx="4452586" cy="4840842"/>
           </a:xfrm>
         </p:grpSpPr>
+        <p:sp>
+          <p:nvSpPr>
+            <p:cNvPr id="2" name="矩形 1">
+              <a:extLst>
+                <a:ext uri="{FF2B5EF4-FFF2-40B4-BE49-F238E27FC236}">
+                  <a16:creationId xmlns:a16="http://schemas.microsoft.com/office/drawing/2014/main" id="{FAF74B55-9CAD-1606-ED15-3676731F4BE4}"/>
+                </a:ext>
+              </a:extLst>
+            </p:cNvPr>
+            <p:cNvSpPr/>
+            <p:nvPr/>
+          </p:nvSpPr>
+          <p:spPr>
+            <a:xfrm>
+              <a:off x="564337" y="941692"/>
+              <a:ext cx="1052187" cy="688931"/>
+            </a:xfrm>
+            <a:prstGeom prst="rect">
+              <a:avLst/>
+            </a:prstGeom>
+            <a:noFill/>
+            <a:ln w="15875">
+              <a:solidFill>
+                <a:schemeClr val="tx1"/>
+              </a:solidFill>
+            </a:ln>
+          </p:spPr>
+          <p:style>
+            <a:lnRef idx="2">
+              <a:schemeClr val="accent1">
+                <a:shade val="50000"/>
+              </a:schemeClr>
+            </a:lnRef>
+            <a:fillRef idx="1">
+              <a:schemeClr val="accent1"/>
+            </a:fillRef>
+            <a:effectRef idx="0">
+              <a:schemeClr val="accent1"/>
+            </a:effectRef>
+            <a:fontRef idx="minor">
+              <a:schemeClr val="lt1"/>
+            </a:fontRef>
+          </p:style>
+          <p:txBody>
+            <a:bodyPr rtlCol="0" anchor="ctr"/>
+            <a:lstStyle/>
+            <a:p>
+              <a:pPr algn="ctr"/>
+              <a:r>
+                <a:rPr lang="zh-CN" altLang="en-US" dirty="0">
+                  <a:solidFill>
+                    <a:schemeClr val="tx1"/>
+                  </a:solidFill>
+                  <a:latin typeface="Times New Roman" panose="02020603050405020304" pitchFamily="18" charset="0"/>
+                  <a:ea typeface="宋体" panose="02010600030101010101" pitchFamily="2" charset="-122"/>
+                </a:rPr>
+                <a:t>终端</a:t>
+              </a:r>
+            </a:p>
+          </p:txBody>
+        </p:sp>
+        <p:sp>
+          <p:nvSpPr>
+            <p:cNvPr id="3" name="矩形 2">
+              <a:extLst>
+                <a:ext uri="{FF2B5EF4-FFF2-40B4-BE49-F238E27FC236}">
+                  <a16:creationId xmlns:a16="http://schemas.microsoft.com/office/drawing/2014/main" id="{37880E56-439D-3623-734F-166D14B9A507}"/>
+                </a:ext>
+              </a:extLst>
+            </p:cNvPr>
+            <p:cNvSpPr/>
+            <p:nvPr/>
+          </p:nvSpPr>
+          <p:spPr>
+            <a:xfrm>
+              <a:off x="3964736" y="941692"/>
+              <a:ext cx="1052187" cy="688931"/>
+            </a:xfrm>
+            <a:prstGeom prst="rect">
+              <a:avLst/>
+            </a:prstGeom>
+            <a:noFill/>
+            <a:ln w="15875">
+              <a:solidFill>
+                <a:schemeClr val="tx1"/>
+              </a:solidFill>
+            </a:ln>
+          </p:spPr>
+          <p:style>
+            <a:lnRef idx="2">
+              <a:schemeClr val="accent1">
+                <a:shade val="50000"/>
+              </a:schemeClr>
+            </a:lnRef>
+            <a:fillRef idx="1">
+              <a:schemeClr val="accent1"/>
+            </a:fillRef>
+            <a:effectRef idx="0">
+              <a:schemeClr val="accent1"/>
+            </a:effectRef>
+            <a:fontRef idx="minor">
+              <a:schemeClr val="lt1"/>
+            </a:fontRef>
+          </p:style>
+          <p:txBody>
+            <a:bodyPr rtlCol="0" anchor="ctr"/>
+            <a:lstStyle/>
+            <a:p>
+              <a:pPr algn="ctr"/>
+              <a:r>
+                <a:rPr lang="zh-CN" altLang="en-US" dirty="0">
+                  <a:solidFill>
+                    <a:schemeClr val="tx1"/>
+                  </a:solidFill>
+                  <a:latin typeface="Times New Roman" panose="02020603050405020304" pitchFamily="18" charset="0"/>
+                  <a:ea typeface="宋体" panose="02010600030101010101" pitchFamily="2" charset="-122"/>
+                </a:rPr>
+                <a:t>基站</a:t>
+              </a:r>
+            </a:p>
+          </p:txBody>
+        </p:sp>
         <p:cxnSp>
           <p:nvCxnSpPr>
-            <p:cNvPr id="7" name="直接箭头连接符 6">
+            <p:cNvPr id="4" name="直接箭头连接符 3">
               <a:extLst>
                 <a:ext uri="{FF2B5EF4-FFF2-40B4-BE49-F238E27FC236}">
-                  <a16:creationId xmlns:a16="http://schemas.microsoft.com/office/drawing/2014/main" id="{850D8C88-5497-0FBF-9297-B90EA25D2EEA}"/>
+                  <a16:creationId xmlns:a16="http://schemas.microsoft.com/office/drawing/2014/main" id="{1913DAB9-D655-5DA2-C031-88903A3CC4CA}"/>
                 </a:ext>
               </a:extLst>
             </p:cNvPr>
             <p:cNvCxnSpPr>
-              <a:cxnSpLocks/>
+              <a:stCxn id="2" idx="2"/>
             </p:cNvCxnSpPr>
             <p:nvPr/>
           </p:nvCxnSpPr>
           <p:spPr>
-            <a:xfrm>
-              <a:off x="7115757" y="3259756"/>
-              <a:ext cx="3400399" cy="0"/>
+            <a:xfrm flipH="1">
+              <a:off x="1090430" y="1630623"/>
+              <a:ext cx="1" cy="3600000"/>
             </a:xfrm>
             <a:prstGeom prst="straightConnector1">
               <a:avLst/>
@@ -13586,7 +13500,7 @@
               <a:solidFill>
                 <a:schemeClr val="tx1"/>
               </a:solidFill>
-              <a:tailEnd type="triangle"/>
+              <a:tailEnd type="none"/>
             </a:ln>
           </p:spPr>
           <p:style>
@@ -13606,22 +13520,22 @@
         </p:cxnSp>
         <p:cxnSp>
           <p:nvCxnSpPr>
-            <p:cNvPr id="8" name="直接箭头连接符 7">
+            <p:cNvPr id="5" name="直接箭头连接符 4">
               <a:extLst>
                 <a:ext uri="{FF2B5EF4-FFF2-40B4-BE49-F238E27FC236}">
-                  <a16:creationId xmlns:a16="http://schemas.microsoft.com/office/drawing/2014/main" id="{A21DF994-39CF-E5B1-DD19-802BA4F85C96}"/>
+                  <a16:creationId xmlns:a16="http://schemas.microsoft.com/office/drawing/2014/main" id="{A0D5538B-DF7A-DE49-8ACE-232A1B0DB0E2}"/>
                 </a:ext>
               </a:extLst>
             </p:cNvPr>
             <p:cNvCxnSpPr>
-              <a:cxnSpLocks/>
+              <a:stCxn id="3" idx="2"/>
             </p:cNvCxnSpPr>
             <p:nvPr/>
           </p:nvCxnSpPr>
           <p:spPr>
-            <a:xfrm flipH="1">
-              <a:off x="7115756" y="4082716"/>
-              <a:ext cx="3418146" cy="0"/>
+            <a:xfrm>
+              <a:off x="4490830" y="1630623"/>
+              <a:ext cx="35490" cy="3600000"/>
             </a:xfrm>
             <a:prstGeom prst="straightConnector1">
               <a:avLst/>
@@ -13630,7 +13544,7 @@
               <a:solidFill>
                 <a:schemeClr val="tx1"/>
               </a:solidFill>
-              <a:tailEnd type="triangle"/>
+              <a:tailEnd type="none"/>
             </a:ln>
           </p:spPr>
           <p:style>
@@ -13648,169 +13562,299 @@
             </a:fontRef>
           </p:style>
         </p:cxnSp>
+        <p:grpSp>
+          <p:nvGrpSpPr>
+            <p:cNvPr id="23" name="组合 22">
+              <a:extLst>
+                <a:ext uri="{FF2B5EF4-FFF2-40B4-BE49-F238E27FC236}">
+                  <a16:creationId xmlns:a16="http://schemas.microsoft.com/office/drawing/2014/main" id="{5466702E-2786-C399-34CD-02B6AD592CEC}"/>
+                </a:ext>
+              </a:extLst>
+            </p:cNvPr>
+            <p:cNvGrpSpPr/>
+            <p:nvPr/>
+          </p:nvGrpSpPr>
+          <p:grpSpPr>
+            <a:xfrm>
+              <a:off x="1090430" y="1887482"/>
+              <a:ext cx="3400399" cy="393273"/>
+              <a:chOff x="1090430" y="1887482"/>
+              <a:chExt cx="3400399" cy="393273"/>
+            </a:xfrm>
+          </p:grpSpPr>
+          <p:cxnSp>
+            <p:nvCxnSpPr>
+              <p:cNvPr id="7" name="直接箭头连接符 6">
+                <a:extLst>
+                  <a:ext uri="{FF2B5EF4-FFF2-40B4-BE49-F238E27FC236}">
+                    <a16:creationId xmlns:a16="http://schemas.microsoft.com/office/drawing/2014/main" id="{850D8C88-5497-0FBF-9297-B90EA25D2EEA}"/>
+                  </a:ext>
+                </a:extLst>
+              </p:cNvPr>
+              <p:cNvCxnSpPr>
+                <a:cxnSpLocks/>
+              </p:cNvCxnSpPr>
+              <p:nvPr/>
+            </p:nvCxnSpPr>
+            <p:spPr>
+              <a:xfrm>
+                <a:off x="1090430" y="2280755"/>
+                <a:ext cx="3400399" cy="0"/>
+              </a:xfrm>
+              <a:prstGeom prst="straightConnector1">
+                <a:avLst/>
+              </a:prstGeom>
+              <a:ln w="15875">
+                <a:solidFill>
+                  <a:schemeClr val="tx1"/>
+                </a:solidFill>
+                <a:tailEnd type="triangle"/>
+              </a:ln>
+            </p:spPr>
+            <p:style>
+              <a:lnRef idx="1">
+                <a:schemeClr val="accent1"/>
+              </a:lnRef>
+              <a:fillRef idx="0">
+                <a:schemeClr val="accent1"/>
+              </a:fillRef>
+              <a:effectRef idx="0">
+                <a:schemeClr val="accent1"/>
+              </a:effectRef>
+              <a:fontRef idx="minor">
+                <a:schemeClr val="tx1"/>
+              </a:fontRef>
+            </p:style>
+          </p:cxnSp>
+          <p:sp>
+            <p:nvSpPr>
+              <p:cNvPr id="9" name="文本框 8">
+                <a:extLst>
+                  <a:ext uri="{FF2B5EF4-FFF2-40B4-BE49-F238E27FC236}">
+                    <a16:creationId xmlns:a16="http://schemas.microsoft.com/office/drawing/2014/main" id="{24864884-1762-5DBC-84F3-CD66F3E19D3C}"/>
+                  </a:ext>
+                </a:extLst>
+              </p:cNvPr>
+              <p:cNvSpPr txBox="1"/>
+              <p:nvPr/>
+            </p:nvSpPr>
+            <p:spPr>
+              <a:xfrm>
+                <a:off x="1398182" y="1887482"/>
+                <a:ext cx="2865120" cy="369332"/>
+              </a:xfrm>
+              <a:prstGeom prst="rect">
+                <a:avLst/>
+              </a:prstGeom>
+              <a:noFill/>
+              <a:ln w="15875">
+                <a:noFill/>
+              </a:ln>
+            </p:spPr>
+            <p:txBody>
+              <a:bodyPr wrap="square" rtlCol="0" anchor="ctr" anchorCtr="1">
+                <a:spAutoFit/>
+              </a:bodyPr>
+              <a:lstStyle/>
+              <a:p>
+                <a:r>
+                  <a:rPr lang="en-US" altLang="zh-CN" dirty="0" err="1">
+                    <a:latin typeface="Times New Roman" panose="02020603050405020304" pitchFamily="18" charset="0"/>
+                    <a:ea typeface="宋体" panose="02010600030101010101" pitchFamily="2" charset="-122"/>
+                  </a:rPr>
+                  <a:t>MsgA</a:t>
+                </a:r>
+                <a:r>
+                  <a:rPr lang="zh-CN" altLang="en-US" dirty="0">
+                    <a:latin typeface="Times New Roman" panose="02020603050405020304" pitchFamily="18" charset="0"/>
+                    <a:ea typeface="宋体" panose="02010600030101010101" pitchFamily="2" charset="-122"/>
+                  </a:rPr>
+                  <a:t>：前导</a:t>
+                </a:r>
+                <a:r>
+                  <a:rPr lang="en-US" altLang="zh-CN" dirty="0">
+                    <a:latin typeface="Times New Roman" panose="02020603050405020304" pitchFamily="18" charset="0"/>
+                    <a:ea typeface="宋体" panose="02010600030101010101" pitchFamily="2" charset="-122"/>
+                  </a:rPr>
+                  <a:t>+</a:t>
+                </a:r>
+                <a:r>
+                  <a:rPr lang="zh-CN" altLang="en-US" dirty="0">
+                    <a:latin typeface="Times New Roman" panose="02020603050405020304" pitchFamily="18" charset="0"/>
+                    <a:ea typeface="宋体" panose="02010600030101010101" pitchFamily="2" charset="-122"/>
+                  </a:rPr>
+                  <a:t>短数据报文</a:t>
+                </a:r>
+              </a:p>
+            </p:txBody>
+          </p:sp>
+        </p:grpSp>
+        <p:grpSp>
+          <p:nvGrpSpPr>
+            <p:cNvPr id="16" name="组合 15">
+              <a:extLst>
+                <a:ext uri="{FF2B5EF4-FFF2-40B4-BE49-F238E27FC236}">
+                  <a16:creationId xmlns:a16="http://schemas.microsoft.com/office/drawing/2014/main" id="{B336BE0A-3CEB-C0BA-41EE-AEE1D853ED4F}"/>
+                </a:ext>
+              </a:extLst>
+            </p:cNvPr>
+            <p:cNvGrpSpPr/>
+            <p:nvPr/>
+          </p:nvGrpSpPr>
+          <p:grpSpPr>
+            <a:xfrm>
+              <a:off x="1090429" y="3671813"/>
+              <a:ext cx="3418146" cy="380442"/>
+              <a:chOff x="1090429" y="2723273"/>
+              <a:chExt cx="3418146" cy="380442"/>
+            </a:xfrm>
+          </p:grpSpPr>
+          <p:cxnSp>
+            <p:nvCxnSpPr>
+              <p:cNvPr id="8" name="直接箭头连接符 7">
+                <a:extLst>
+                  <a:ext uri="{FF2B5EF4-FFF2-40B4-BE49-F238E27FC236}">
+                    <a16:creationId xmlns:a16="http://schemas.microsoft.com/office/drawing/2014/main" id="{A21DF994-39CF-E5B1-DD19-802BA4F85C96}"/>
+                  </a:ext>
+                </a:extLst>
+              </p:cNvPr>
+              <p:cNvCxnSpPr>
+                <a:cxnSpLocks/>
+              </p:cNvCxnSpPr>
+              <p:nvPr/>
+            </p:nvCxnSpPr>
+            <p:spPr>
+              <a:xfrm flipH="1">
+                <a:off x="1090429" y="3103715"/>
+                <a:ext cx="3418146" cy="0"/>
+              </a:xfrm>
+              <a:prstGeom prst="straightConnector1">
+                <a:avLst/>
+              </a:prstGeom>
+              <a:ln w="15875">
+                <a:solidFill>
+                  <a:schemeClr val="tx1"/>
+                </a:solidFill>
+                <a:tailEnd type="triangle"/>
+              </a:ln>
+            </p:spPr>
+            <p:style>
+              <a:lnRef idx="1">
+                <a:schemeClr val="accent1"/>
+              </a:lnRef>
+              <a:fillRef idx="0">
+                <a:schemeClr val="accent1"/>
+              </a:fillRef>
+              <a:effectRef idx="0">
+                <a:schemeClr val="accent1"/>
+              </a:effectRef>
+              <a:fontRef idx="minor">
+                <a:schemeClr val="tx1"/>
+              </a:fontRef>
+            </p:style>
+          </p:cxnSp>
+          <p:sp>
+            <p:nvSpPr>
+              <p:cNvPr id="10" name="文本框 9">
+                <a:extLst>
+                  <a:ext uri="{FF2B5EF4-FFF2-40B4-BE49-F238E27FC236}">
+                    <a16:creationId xmlns:a16="http://schemas.microsoft.com/office/drawing/2014/main" id="{27F11908-F8F2-B963-699E-303C38D49FA7}"/>
+                  </a:ext>
+                </a:extLst>
+              </p:cNvPr>
+              <p:cNvSpPr txBox="1"/>
+              <p:nvPr/>
+            </p:nvSpPr>
+            <p:spPr>
+              <a:xfrm>
+                <a:off x="1386950" y="2723273"/>
+                <a:ext cx="2865120" cy="369332"/>
+              </a:xfrm>
+              <a:prstGeom prst="rect">
+                <a:avLst/>
+              </a:prstGeom>
+              <a:noFill/>
+              <a:ln w="15875">
+                <a:noFill/>
+              </a:ln>
+            </p:spPr>
+            <p:txBody>
+              <a:bodyPr wrap="square" rtlCol="0" anchor="ctr" anchorCtr="1">
+                <a:spAutoFit/>
+              </a:bodyPr>
+              <a:lstStyle/>
+              <a:p>
+                <a:r>
+                  <a:rPr lang="en-US" altLang="zh-CN" dirty="0" err="1">
+                    <a:latin typeface="Times New Roman" panose="02020603050405020304" pitchFamily="18" charset="0"/>
+                    <a:ea typeface="宋体" panose="02010600030101010101" pitchFamily="2" charset="-122"/>
+                  </a:rPr>
+                  <a:t>MsgB</a:t>
+                </a:r>
+                <a:r>
+                  <a:rPr lang="zh-CN" altLang="en-US" dirty="0">
+                    <a:latin typeface="Times New Roman" panose="02020603050405020304" pitchFamily="18" charset="0"/>
+                    <a:ea typeface="宋体" panose="02010600030101010101" pitchFamily="2" charset="-122"/>
+                  </a:rPr>
+                  <a:t>：竞争冲突解决</a:t>
+                </a:r>
+              </a:p>
+            </p:txBody>
+          </p:sp>
+        </p:grpSp>
+        <p:sp>
+          <p:nvSpPr>
+            <p:cNvPr id="11" name="文本框 10">
+              <a:extLst>
+                <a:ext uri="{FF2B5EF4-FFF2-40B4-BE49-F238E27FC236}">
+                  <a16:creationId xmlns:a16="http://schemas.microsoft.com/office/drawing/2014/main" id="{EE0046AE-100B-50B5-DD6B-0341B2C80BE0}"/>
+                </a:ext>
+              </a:extLst>
+            </p:cNvPr>
+            <p:cNvSpPr txBox="1"/>
+            <p:nvPr/>
+          </p:nvSpPr>
+          <p:spPr>
+            <a:xfrm>
+              <a:off x="1289874" y="5413202"/>
+              <a:ext cx="3397208" cy="369332"/>
+            </a:xfrm>
+            <a:prstGeom prst="rect">
+              <a:avLst/>
+            </a:prstGeom>
+            <a:noFill/>
+          </p:spPr>
+          <p:txBody>
+            <a:bodyPr wrap="square" rtlCol="0" anchor="ctr" anchorCtr="1">
+              <a:spAutoFit/>
+            </a:bodyPr>
+            <a:lstStyle/>
+            <a:p>
+              <a:r>
+                <a:rPr lang="zh-CN" altLang="en-US" dirty="0">
+                  <a:latin typeface="Times New Roman" panose="02020603050405020304" pitchFamily="18" charset="0"/>
+                  <a:ea typeface="宋体" panose="02010600030101010101" pitchFamily="2" charset="-122"/>
+                </a:rPr>
+                <a:t>两步</a:t>
+              </a:r>
+              <a:r>
+                <a:rPr lang="en-US" altLang="zh-CN" dirty="0">
+                  <a:latin typeface="Times New Roman" panose="02020603050405020304" pitchFamily="18" charset="0"/>
+                  <a:ea typeface="宋体" panose="02010600030101010101" pitchFamily="2" charset="-122"/>
+                </a:rPr>
+                <a:t>SDT </a:t>
+              </a:r>
+              <a:r>
+                <a:rPr lang="zh-CN" altLang="en-US" dirty="0">
+                  <a:latin typeface="Times New Roman" panose="02020603050405020304" pitchFamily="18" charset="0"/>
+                  <a:ea typeface="宋体" panose="02010600030101010101" pitchFamily="2" charset="-122"/>
+                </a:rPr>
+                <a:t>随机接入过程</a:t>
+              </a:r>
+            </a:p>
+          </p:txBody>
+        </p:sp>
       </p:grpSp>
-      <p:sp>
-        <p:nvSpPr>
-          <p:cNvPr id="9" name="文本框 8">
-            <a:extLst>
-              <a:ext uri="{FF2B5EF4-FFF2-40B4-BE49-F238E27FC236}">
-                <a16:creationId xmlns:a16="http://schemas.microsoft.com/office/drawing/2014/main" id="{24864884-1762-5DBC-84F3-CD66F3E19D3C}"/>
-              </a:ext>
-            </a:extLst>
-          </p:cNvPr>
-          <p:cNvSpPr txBox="1"/>
-          <p:nvPr/>
-        </p:nvSpPr>
-        <p:spPr>
-          <a:xfrm>
-            <a:off x="1398182" y="1887482"/>
-            <a:ext cx="2865120" cy="369332"/>
-          </a:xfrm>
-          <a:prstGeom prst="rect">
-            <a:avLst/>
-          </a:prstGeom>
-          <a:noFill/>
-          <a:ln w="15875">
-            <a:noFill/>
-          </a:ln>
-        </p:spPr>
-        <p:txBody>
-          <a:bodyPr wrap="square" rtlCol="0" anchor="ctr" anchorCtr="1">
-            <a:spAutoFit/>
-          </a:bodyPr>
-          <a:lstStyle/>
-          <a:p>
-            <a:r>
-              <a:rPr lang="en-US" altLang="zh-CN" dirty="0" err="1">
-                <a:latin typeface="Times New Roman" panose="02020603050405020304" pitchFamily="18" charset="0"/>
-                <a:ea typeface="宋体" panose="02010600030101010101" pitchFamily="2" charset="-122"/>
-              </a:rPr>
-              <a:t>MsgA</a:t>
-            </a:r>
-            <a:r>
-              <a:rPr lang="zh-CN" altLang="en-US" dirty="0">
-                <a:latin typeface="Times New Roman" panose="02020603050405020304" pitchFamily="18" charset="0"/>
-                <a:ea typeface="宋体" panose="02010600030101010101" pitchFamily="2" charset="-122"/>
-              </a:rPr>
-              <a:t>：前导</a:t>
-            </a:r>
-            <a:r>
-              <a:rPr lang="en-US" altLang="zh-CN" dirty="0">
-                <a:latin typeface="Times New Roman" panose="02020603050405020304" pitchFamily="18" charset="0"/>
-                <a:ea typeface="宋体" panose="02010600030101010101" pitchFamily="2" charset="-122"/>
-              </a:rPr>
-              <a:t>+</a:t>
-            </a:r>
-            <a:r>
-              <a:rPr lang="zh-CN" altLang="en-US" dirty="0">
-                <a:latin typeface="Times New Roman" panose="02020603050405020304" pitchFamily="18" charset="0"/>
-                <a:ea typeface="宋体" panose="02010600030101010101" pitchFamily="2" charset="-122"/>
-              </a:rPr>
-              <a:t>短数据报文</a:t>
-            </a:r>
-          </a:p>
-        </p:txBody>
-      </p:sp>
-      <p:sp>
-        <p:nvSpPr>
-          <p:cNvPr id="10" name="文本框 9">
-            <a:extLst>
-              <a:ext uri="{FF2B5EF4-FFF2-40B4-BE49-F238E27FC236}">
-                <a16:creationId xmlns:a16="http://schemas.microsoft.com/office/drawing/2014/main" id="{27F11908-F8F2-B963-699E-303C38D49FA7}"/>
-              </a:ext>
-            </a:extLst>
-          </p:cNvPr>
-          <p:cNvSpPr txBox="1"/>
-          <p:nvPr/>
-        </p:nvSpPr>
-        <p:spPr>
-          <a:xfrm>
-            <a:off x="1386950" y="2723273"/>
-            <a:ext cx="2865120" cy="369332"/>
-          </a:xfrm>
-          <a:prstGeom prst="rect">
-            <a:avLst/>
-          </a:prstGeom>
-          <a:noFill/>
-          <a:ln w="15875">
-            <a:noFill/>
-          </a:ln>
-        </p:spPr>
-        <p:txBody>
-          <a:bodyPr wrap="square" rtlCol="0" anchor="ctr" anchorCtr="1">
-            <a:spAutoFit/>
-          </a:bodyPr>
-          <a:lstStyle/>
-          <a:p>
-            <a:r>
-              <a:rPr lang="en-US" altLang="zh-CN" dirty="0" err="1">
-                <a:latin typeface="Times New Roman" panose="02020603050405020304" pitchFamily="18" charset="0"/>
-                <a:ea typeface="宋体" panose="02010600030101010101" pitchFamily="2" charset="-122"/>
-              </a:rPr>
-              <a:t>MsgB</a:t>
-            </a:r>
-            <a:r>
-              <a:rPr lang="zh-CN" altLang="en-US" dirty="0">
-                <a:latin typeface="Times New Roman" panose="02020603050405020304" pitchFamily="18" charset="0"/>
-                <a:ea typeface="宋体" panose="02010600030101010101" pitchFamily="2" charset="-122"/>
-              </a:rPr>
-              <a:t>：竞争冲突解决</a:t>
-            </a:r>
-          </a:p>
-        </p:txBody>
-      </p:sp>
-      <p:sp>
-        <p:nvSpPr>
-          <p:cNvPr id="11" name="文本框 10">
-            <a:extLst>
-              <a:ext uri="{FF2B5EF4-FFF2-40B4-BE49-F238E27FC236}">
-                <a16:creationId xmlns:a16="http://schemas.microsoft.com/office/drawing/2014/main" id="{EE0046AE-100B-50B5-DD6B-0341B2C80BE0}"/>
-              </a:ext>
-            </a:extLst>
-          </p:cNvPr>
-          <p:cNvSpPr txBox="1"/>
-          <p:nvPr/>
-        </p:nvSpPr>
-        <p:spPr>
-          <a:xfrm>
-            <a:off x="1289874" y="5413202"/>
-            <a:ext cx="3397208" cy="369332"/>
-          </a:xfrm>
-          <a:prstGeom prst="rect">
-            <a:avLst/>
-          </a:prstGeom>
-          <a:noFill/>
-        </p:spPr>
-        <p:txBody>
-          <a:bodyPr wrap="square" rtlCol="0" anchor="ctr" anchorCtr="1">
-            <a:spAutoFit/>
-          </a:bodyPr>
-          <a:lstStyle/>
-          <a:p>
-            <a:r>
-              <a:rPr lang="zh-CN" altLang="en-US" dirty="0">
-                <a:latin typeface="Times New Roman" panose="02020603050405020304" pitchFamily="18" charset="0"/>
-                <a:ea typeface="宋体" panose="02010600030101010101" pitchFamily="2" charset="-122"/>
-              </a:rPr>
-              <a:t>两步</a:t>
-            </a:r>
-            <a:r>
-              <a:rPr lang="en-US" altLang="zh-CN" dirty="0">
-                <a:latin typeface="Times New Roman" panose="02020603050405020304" pitchFamily="18" charset="0"/>
-                <a:ea typeface="宋体" panose="02010600030101010101" pitchFamily="2" charset="-122"/>
-              </a:rPr>
-              <a:t>SDT </a:t>
-            </a:r>
-            <a:r>
-              <a:rPr lang="zh-CN" altLang="en-US" dirty="0">
-                <a:latin typeface="Times New Roman" panose="02020603050405020304" pitchFamily="18" charset="0"/>
-                <a:ea typeface="宋体" panose="02010600030101010101" pitchFamily="2" charset="-122"/>
-              </a:rPr>
-              <a:t>随机接入过程</a:t>
-            </a:r>
-          </a:p>
-        </p:txBody>
-      </p:sp>
       <p:grpSp>
         <p:nvGrpSpPr>
           <p:cNvPr id="49" name="组合 48">
@@ -14897,6 +14941,2636 @@
     <p:extLst>
       <p:ext uri="{BB962C8B-B14F-4D97-AF65-F5344CB8AC3E}">
         <p14:creationId xmlns:p14="http://schemas.microsoft.com/office/powerpoint/2010/main" val="2671676866"/>
+      </p:ext>
+    </p:extLst>
+  </p:cSld>
+  <p:clrMapOvr>
+    <a:masterClrMapping/>
+  </p:clrMapOvr>
+</p:sld>
+</file>
+
+<file path=ppt/slides/slide14.xml><?xml version="1.0" encoding="utf-8"?>
+<p:sld xmlns:a="http://schemas.openxmlformats.org/drawingml/2006/main" xmlns:r="http://schemas.openxmlformats.org/officeDocument/2006/relationships" xmlns:p="http://schemas.openxmlformats.org/presentationml/2006/main">
+  <p:cSld>
+    <p:spTree>
+      <p:nvGrpSpPr>
+        <p:cNvPr id="1" name="">
+          <a:extLst>
+            <a:ext uri="{FF2B5EF4-FFF2-40B4-BE49-F238E27FC236}">
+              <a16:creationId xmlns:a16="http://schemas.microsoft.com/office/drawing/2014/main" id="{C6D45E9A-A9D4-3F3D-C0F6-66EFB3CCC395}"/>
+            </a:ext>
+          </a:extLst>
+        </p:cNvPr>
+        <p:cNvGrpSpPr/>
+        <p:nvPr/>
+      </p:nvGrpSpPr>
+      <p:grpSpPr>
+        <a:xfrm>
+          <a:off x="0" y="0"/>
+          <a:ext cx="0" cy="0"/>
+          <a:chOff x="0" y="0"/>
+          <a:chExt cx="0" cy="0"/>
+        </a:xfrm>
+      </p:grpSpPr>
+      <p:grpSp>
+        <p:nvGrpSpPr>
+          <p:cNvPr id="24" name="组合 23">
+            <a:extLst>
+              <a:ext uri="{FF2B5EF4-FFF2-40B4-BE49-F238E27FC236}">
+                <a16:creationId xmlns:a16="http://schemas.microsoft.com/office/drawing/2014/main" id="{E01C5BC3-FAAE-D7FF-A82D-EEEFAA60C2CB}"/>
+              </a:ext>
+            </a:extLst>
+          </p:cNvPr>
+          <p:cNvGrpSpPr/>
+          <p:nvPr/>
+        </p:nvGrpSpPr>
+        <p:grpSpPr>
+          <a:xfrm>
+            <a:off x="564337" y="941692"/>
+            <a:ext cx="4452586" cy="4840842"/>
+            <a:chOff x="564337" y="941692"/>
+            <a:chExt cx="4452586" cy="4840842"/>
+          </a:xfrm>
+        </p:grpSpPr>
+        <p:sp>
+          <p:nvSpPr>
+            <p:cNvPr id="2" name="矩形 1">
+              <a:extLst>
+                <a:ext uri="{FF2B5EF4-FFF2-40B4-BE49-F238E27FC236}">
+                  <a16:creationId xmlns:a16="http://schemas.microsoft.com/office/drawing/2014/main" id="{A0B204E7-288B-9401-5D4E-2F4D82006240}"/>
+                </a:ext>
+              </a:extLst>
+            </p:cNvPr>
+            <p:cNvSpPr/>
+            <p:nvPr/>
+          </p:nvSpPr>
+          <p:spPr>
+            <a:xfrm>
+              <a:off x="564337" y="941692"/>
+              <a:ext cx="1052187" cy="688931"/>
+            </a:xfrm>
+            <a:prstGeom prst="rect">
+              <a:avLst/>
+            </a:prstGeom>
+            <a:noFill/>
+            <a:ln w="15875">
+              <a:solidFill>
+                <a:schemeClr val="tx1"/>
+              </a:solidFill>
+            </a:ln>
+          </p:spPr>
+          <p:style>
+            <a:lnRef idx="2">
+              <a:schemeClr val="accent1">
+                <a:shade val="50000"/>
+              </a:schemeClr>
+            </a:lnRef>
+            <a:fillRef idx="1">
+              <a:schemeClr val="accent1"/>
+            </a:fillRef>
+            <a:effectRef idx="0">
+              <a:schemeClr val="accent1"/>
+            </a:effectRef>
+            <a:fontRef idx="minor">
+              <a:schemeClr val="lt1"/>
+            </a:fontRef>
+          </p:style>
+          <p:txBody>
+            <a:bodyPr rtlCol="0" anchor="ctr"/>
+            <a:lstStyle/>
+            <a:p>
+              <a:pPr algn="ctr"/>
+              <a:r>
+                <a:rPr lang="zh-CN" altLang="en-US" dirty="0">
+                  <a:solidFill>
+                    <a:schemeClr val="tx1"/>
+                  </a:solidFill>
+                  <a:latin typeface="Times New Roman" panose="02020603050405020304" pitchFamily="18" charset="0"/>
+                  <a:ea typeface="宋体" panose="02010600030101010101" pitchFamily="2" charset="-122"/>
+                </a:rPr>
+                <a:t>终端</a:t>
+              </a:r>
+            </a:p>
+          </p:txBody>
+        </p:sp>
+        <p:sp>
+          <p:nvSpPr>
+            <p:cNvPr id="3" name="矩形 2">
+              <a:extLst>
+                <a:ext uri="{FF2B5EF4-FFF2-40B4-BE49-F238E27FC236}">
+                  <a16:creationId xmlns:a16="http://schemas.microsoft.com/office/drawing/2014/main" id="{BA97495B-9C42-B35F-256A-72101D59E833}"/>
+                </a:ext>
+              </a:extLst>
+            </p:cNvPr>
+            <p:cNvSpPr/>
+            <p:nvPr/>
+          </p:nvSpPr>
+          <p:spPr>
+            <a:xfrm>
+              <a:off x="3964736" y="941692"/>
+              <a:ext cx="1052187" cy="688931"/>
+            </a:xfrm>
+            <a:prstGeom prst="rect">
+              <a:avLst/>
+            </a:prstGeom>
+            <a:noFill/>
+            <a:ln w="15875">
+              <a:solidFill>
+                <a:schemeClr val="tx1"/>
+              </a:solidFill>
+            </a:ln>
+          </p:spPr>
+          <p:style>
+            <a:lnRef idx="2">
+              <a:schemeClr val="accent1">
+                <a:shade val="50000"/>
+              </a:schemeClr>
+            </a:lnRef>
+            <a:fillRef idx="1">
+              <a:schemeClr val="accent1"/>
+            </a:fillRef>
+            <a:effectRef idx="0">
+              <a:schemeClr val="accent1"/>
+            </a:effectRef>
+            <a:fontRef idx="minor">
+              <a:schemeClr val="lt1"/>
+            </a:fontRef>
+          </p:style>
+          <p:txBody>
+            <a:bodyPr rtlCol="0" anchor="ctr"/>
+            <a:lstStyle/>
+            <a:p>
+              <a:pPr algn="ctr"/>
+              <a:r>
+                <a:rPr lang="zh-CN" altLang="en-US" dirty="0">
+                  <a:solidFill>
+                    <a:schemeClr val="tx1"/>
+                  </a:solidFill>
+                  <a:latin typeface="Times New Roman" panose="02020603050405020304" pitchFamily="18" charset="0"/>
+                  <a:ea typeface="宋体" panose="02010600030101010101" pitchFamily="2" charset="-122"/>
+                </a:rPr>
+                <a:t>基站</a:t>
+              </a:r>
+            </a:p>
+          </p:txBody>
+        </p:sp>
+        <p:cxnSp>
+          <p:nvCxnSpPr>
+            <p:cNvPr id="4" name="直接箭头连接符 3">
+              <a:extLst>
+                <a:ext uri="{FF2B5EF4-FFF2-40B4-BE49-F238E27FC236}">
+                  <a16:creationId xmlns:a16="http://schemas.microsoft.com/office/drawing/2014/main" id="{1A30E980-F925-9550-50B1-C1B873964855}"/>
+                </a:ext>
+              </a:extLst>
+            </p:cNvPr>
+            <p:cNvCxnSpPr>
+              <a:stCxn id="2" idx="2"/>
+            </p:cNvCxnSpPr>
+            <p:nvPr/>
+          </p:nvCxnSpPr>
+          <p:spPr>
+            <a:xfrm flipH="1">
+              <a:off x="1090430" y="1630623"/>
+              <a:ext cx="1" cy="3600000"/>
+            </a:xfrm>
+            <a:prstGeom prst="straightConnector1">
+              <a:avLst/>
+            </a:prstGeom>
+            <a:ln w="15875">
+              <a:solidFill>
+                <a:schemeClr val="tx1"/>
+              </a:solidFill>
+              <a:tailEnd type="none"/>
+            </a:ln>
+          </p:spPr>
+          <p:style>
+            <a:lnRef idx="1">
+              <a:schemeClr val="accent1"/>
+            </a:lnRef>
+            <a:fillRef idx="0">
+              <a:schemeClr val="accent1"/>
+            </a:fillRef>
+            <a:effectRef idx="0">
+              <a:schemeClr val="accent1"/>
+            </a:effectRef>
+            <a:fontRef idx="minor">
+              <a:schemeClr val="tx1"/>
+            </a:fontRef>
+          </p:style>
+        </p:cxnSp>
+        <p:cxnSp>
+          <p:nvCxnSpPr>
+            <p:cNvPr id="5" name="直接箭头连接符 4">
+              <a:extLst>
+                <a:ext uri="{FF2B5EF4-FFF2-40B4-BE49-F238E27FC236}">
+                  <a16:creationId xmlns:a16="http://schemas.microsoft.com/office/drawing/2014/main" id="{5A2C07A9-6773-B419-B8D7-5265C396458B}"/>
+                </a:ext>
+              </a:extLst>
+            </p:cNvPr>
+            <p:cNvCxnSpPr>
+              <a:stCxn id="3" idx="2"/>
+            </p:cNvCxnSpPr>
+            <p:nvPr/>
+          </p:nvCxnSpPr>
+          <p:spPr>
+            <a:xfrm>
+              <a:off x="4490830" y="1630623"/>
+              <a:ext cx="35490" cy="3600000"/>
+            </a:xfrm>
+            <a:prstGeom prst="straightConnector1">
+              <a:avLst/>
+            </a:prstGeom>
+            <a:ln w="15875">
+              <a:solidFill>
+                <a:schemeClr val="tx1"/>
+              </a:solidFill>
+              <a:tailEnd type="none"/>
+            </a:ln>
+          </p:spPr>
+          <p:style>
+            <a:lnRef idx="1">
+              <a:schemeClr val="accent1"/>
+            </a:lnRef>
+            <a:fillRef idx="0">
+              <a:schemeClr val="accent1"/>
+            </a:fillRef>
+            <a:effectRef idx="0">
+              <a:schemeClr val="accent1"/>
+            </a:effectRef>
+            <a:fontRef idx="minor">
+              <a:schemeClr val="tx1"/>
+            </a:fontRef>
+          </p:style>
+        </p:cxnSp>
+        <p:grpSp>
+          <p:nvGrpSpPr>
+            <p:cNvPr id="23" name="组合 22">
+              <a:extLst>
+                <a:ext uri="{FF2B5EF4-FFF2-40B4-BE49-F238E27FC236}">
+                  <a16:creationId xmlns:a16="http://schemas.microsoft.com/office/drawing/2014/main" id="{D9F080D7-C665-8DA8-BFCA-735EF3EC9839}"/>
+                </a:ext>
+              </a:extLst>
+            </p:cNvPr>
+            <p:cNvGrpSpPr/>
+            <p:nvPr/>
+          </p:nvGrpSpPr>
+          <p:grpSpPr>
+            <a:xfrm>
+              <a:off x="1090430" y="1887482"/>
+              <a:ext cx="3400399" cy="393273"/>
+              <a:chOff x="1090430" y="1887482"/>
+              <a:chExt cx="3400399" cy="393273"/>
+            </a:xfrm>
+          </p:grpSpPr>
+          <p:cxnSp>
+            <p:nvCxnSpPr>
+              <p:cNvPr id="7" name="直接箭头连接符 6">
+                <a:extLst>
+                  <a:ext uri="{FF2B5EF4-FFF2-40B4-BE49-F238E27FC236}">
+                    <a16:creationId xmlns:a16="http://schemas.microsoft.com/office/drawing/2014/main" id="{6B489108-003E-4CEB-C3D4-EA0A84117EB0}"/>
+                  </a:ext>
+                </a:extLst>
+              </p:cNvPr>
+              <p:cNvCxnSpPr>
+                <a:cxnSpLocks/>
+              </p:cNvCxnSpPr>
+              <p:nvPr/>
+            </p:nvCxnSpPr>
+            <p:spPr>
+              <a:xfrm>
+                <a:off x="1090430" y="2280755"/>
+                <a:ext cx="3400399" cy="0"/>
+              </a:xfrm>
+              <a:prstGeom prst="straightConnector1">
+                <a:avLst/>
+              </a:prstGeom>
+              <a:ln w="15875">
+                <a:solidFill>
+                  <a:schemeClr val="tx1"/>
+                </a:solidFill>
+                <a:tailEnd type="triangle"/>
+              </a:ln>
+            </p:spPr>
+            <p:style>
+              <a:lnRef idx="1">
+                <a:schemeClr val="accent1"/>
+              </a:lnRef>
+              <a:fillRef idx="0">
+                <a:schemeClr val="accent1"/>
+              </a:fillRef>
+              <a:effectRef idx="0">
+                <a:schemeClr val="accent1"/>
+              </a:effectRef>
+              <a:fontRef idx="minor">
+                <a:schemeClr val="tx1"/>
+              </a:fontRef>
+            </p:style>
+          </p:cxnSp>
+          <p:sp>
+            <p:nvSpPr>
+              <p:cNvPr id="9" name="文本框 8">
+                <a:extLst>
+                  <a:ext uri="{FF2B5EF4-FFF2-40B4-BE49-F238E27FC236}">
+                    <a16:creationId xmlns:a16="http://schemas.microsoft.com/office/drawing/2014/main" id="{9B47BCB6-2352-6751-6BA6-B892E98EF02A}"/>
+                  </a:ext>
+                </a:extLst>
+              </p:cNvPr>
+              <p:cNvSpPr txBox="1"/>
+              <p:nvPr/>
+            </p:nvSpPr>
+            <p:spPr>
+              <a:xfrm>
+                <a:off x="1398182" y="1887482"/>
+                <a:ext cx="2865120" cy="369332"/>
+              </a:xfrm>
+              <a:prstGeom prst="rect">
+                <a:avLst/>
+              </a:prstGeom>
+              <a:noFill/>
+              <a:ln w="15875">
+                <a:noFill/>
+              </a:ln>
+            </p:spPr>
+            <p:txBody>
+              <a:bodyPr wrap="square" rtlCol="0" anchor="ctr" anchorCtr="1">
+                <a:spAutoFit/>
+              </a:bodyPr>
+              <a:lstStyle/>
+              <a:p>
+                <a:r>
+                  <a:rPr lang="en-US" altLang="zh-CN" dirty="0" err="1">
+                    <a:latin typeface="Times New Roman" panose="02020603050405020304" pitchFamily="18" charset="0"/>
+                    <a:ea typeface="宋体" panose="02010600030101010101" pitchFamily="2" charset="-122"/>
+                  </a:rPr>
+                  <a:t>MsgA</a:t>
+                </a:r>
+                <a:r>
+                  <a:rPr lang="zh-CN" altLang="en-US" dirty="0">
+                    <a:latin typeface="Times New Roman" panose="02020603050405020304" pitchFamily="18" charset="0"/>
+                    <a:ea typeface="宋体" panose="02010600030101010101" pitchFamily="2" charset="-122"/>
+                  </a:rPr>
+                  <a:t>：前导</a:t>
+                </a:r>
+                <a:r>
+                  <a:rPr lang="en-US" altLang="zh-CN" dirty="0">
+                    <a:latin typeface="Times New Roman" panose="02020603050405020304" pitchFamily="18" charset="0"/>
+                    <a:ea typeface="宋体" panose="02010600030101010101" pitchFamily="2" charset="-122"/>
+                  </a:rPr>
+                  <a:t>+</a:t>
+                </a:r>
+                <a:r>
+                  <a:rPr lang="zh-CN" altLang="en-US" dirty="0">
+                    <a:latin typeface="Times New Roman" panose="02020603050405020304" pitchFamily="18" charset="0"/>
+                    <a:ea typeface="宋体" panose="02010600030101010101" pitchFamily="2" charset="-122"/>
+                  </a:rPr>
+                  <a:t>短数据报文</a:t>
+                </a:r>
+              </a:p>
+            </p:txBody>
+          </p:sp>
+        </p:grpSp>
+        <p:grpSp>
+          <p:nvGrpSpPr>
+            <p:cNvPr id="16" name="组合 15">
+              <a:extLst>
+                <a:ext uri="{FF2B5EF4-FFF2-40B4-BE49-F238E27FC236}">
+                  <a16:creationId xmlns:a16="http://schemas.microsoft.com/office/drawing/2014/main" id="{F088F156-0BDC-91FD-F010-BF86271A98AA}"/>
+                </a:ext>
+              </a:extLst>
+            </p:cNvPr>
+            <p:cNvGrpSpPr/>
+            <p:nvPr/>
+          </p:nvGrpSpPr>
+          <p:grpSpPr>
+            <a:xfrm>
+              <a:off x="1090429" y="3671813"/>
+              <a:ext cx="3418146" cy="380442"/>
+              <a:chOff x="1090429" y="2723273"/>
+              <a:chExt cx="3418146" cy="380442"/>
+            </a:xfrm>
+          </p:grpSpPr>
+          <p:cxnSp>
+            <p:nvCxnSpPr>
+              <p:cNvPr id="8" name="直接箭头连接符 7">
+                <a:extLst>
+                  <a:ext uri="{FF2B5EF4-FFF2-40B4-BE49-F238E27FC236}">
+                    <a16:creationId xmlns:a16="http://schemas.microsoft.com/office/drawing/2014/main" id="{81EC6F43-371C-A3FA-ED5D-87FDCED33E03}"/>
+                  </a:ext>
+                </a:extLst>
+              </p:cNvPr>
+              <p:cNvCxnSpPr>
+                <a:cxnSpLocks/>
+              </p:cNvCxnSpPr>
+              <p:nvPr/>
+            </p:nvCxnSpPr>
+            <p:spPr>
+              <a:xfrm flipH="1">
+                <a:off x="1090429" y="3103715"/>
+                <a:ext cx="3418146" cy="0"/>
+              </a:xfrm>
+              <a:prstGeom prst="straightConnector1">
+                <a:avLst/>
+              </a:prstGeom>
+              <a:ln w="15875">
+                <a:solidFill>
+                  <a:schemeClr val="tx1"/>
+                </a:solidFill>
+                <a:tailEnd type="triangle"/>
+              </a:ln>
+            </p:spPr>
+            <p:style>
+              <a:lnRef idx="1">
+                <a:schemeClr val="accent1"/>
+              </a:lnRef>
+              <a:fillRef idx="0">
+                <a:schemeClr val="accent1"/>
+              </a:fillRef>
+              <a:effectRef idx="0">
+                <a:schemeClr val="accent1"/>
+              </a:effectRef>
+              <a:fontRef idx="minor">
+                <a:schemeClr val="tx1"/>
+              </a:fontRef>
+            </p:style>
+          </p:cxnSp>
+          <p:sp>
+            <p:nvSpPr>
+              <p:cNvPr id="10" name="文本框 9">
+                <a:extLst>
+                  <a:ext uri="{FF2B5EF4-FFF2-40B4-BE49-F238E27FC236}">
+                    <a16:creationId xmlns:a16="http://schemas.microsoft.com/office/drawing/2014/main" id="{4BC7A910-6976-92E7-32ED-3890604BCB2A}"/>
+                  </a:ext>
+                </a:extLst>
+              </p:cNvPr>
+              <p:cNvSpPr txBox="1"/>
+              <p:nvPr/>
+            </p:nvSpPr>
+            <p:spPr>
+              <a:xfrm>
+                <a:off x="1386950" y="2723273"/>
+                <a:ext cx="2865120" cy="369332"/>
+              </a:xfrm>
+              <a:prstGeom prst="rect">
+                <a:avLst/>
+              </a:prstGeom>
+              <a:noFill/>
+              <a:ln w="15875">
+                <a:noFill/>
+              </a:ln>
+            </p:spPr>
+            <p:txBody>
+              <a:bodyPr wrap="square" rtlCol="0" anchor="ctr" anchorCtr="1">
+                <a:spAutoFit/>
+              </a:bodyPr>
+              <a:lstStyle/>
+              <a:p>
+                <a:r>
+                  <a:rPr lang="en-US" altLang="zh-CN" dirty="0" err="1">
+                    <a:latin typeface="Times New Roman" panose="02020603050405020304" pitchFamily="18" charset="0"/>
+                    <a:ea typeface="宋体" panose="02010600030101010101" pitchFamily="2" charset="-122"/>
+                  </a:rPr>
+                  <a:t>MsgB</a:t>
+                </a:r>
+                <a:r>
+                  <a:rPr lang="zh-CN" altLang="en-US" dirty="0">
+                    <a:latin typeface="Times New Roman" panose="02020603050405020304" pitchFamily="18" charset="0"/>
+                    <a:ea typeface="宋体" panose="02010600030101010101" pitchFamily="2" charset="-122"/>
+                  </a:rPr>
+                  <a:t>：竞争冲突解决</a:t>
+                </a:r>
+              </a:p>
+            </p:txBody>
+          </p:sp>
+        </p:grpSp>
+        <p:sp>
+          <p:nvSpPr>
+            <p:cNvPr id="11" name="文本框 10">
+              <a:extLst>
+                <a:ext uri="{FF2B5EF4-FFF2-40B4-BE49-F238E27FC236}">
+                  <a16:creationId xmlns:a16="http://schemas.microsoft.com/office/drawing/2014/main" id="{91F192CA-BB96-E124-95C6-C8F82D4993FD}"/>
+                </a:ext>
+              </a:extLst>
+            </p:cNvPr>
+            <p:cNvSpPr txBox="1"/>
+            <p:nvPr/>
+          </p:nvSpPr>
+          <p:spPr>
+            <a:xfrm>
+              <a:off x="1289874" y="5413202"/>
+              <a:ext cx="3397208" cy="369332"/>
+            </a:xfrm>
+            <a:prstGeom prst="rect">
+              <a:avLst/>
+            </a:prstGeom>
+            <a:noFill/>
+          </p:spPr>
+          <p:txBody>
+            <a:bodyPr wrap="square" rtlCol="0" anchor="ctr" anchorCtr="1">
+              <a:spAutoFit/>
+            </a:bodyPr>
+            <a:lstStyle/>
+            <a:p>
+              <a:r>
+                <a:rPr lang="zh-CN" altLang="en-US" dirty="0">
+                  <a:latin typeface="Times New Roman" panose="02020603050405020304" pitchFamily="18" charset="0"/>
+                  <a:ea typeface="宋体" panose="02010600030101010101" pitchFamily="2" charset="-122"/>
+                </a:rPr>
+                <a:t>两步</a:t>
+              </a:r>
+              <a:r>
+                <a:rPr lang="en-US" altLang="zh-CN" dirty="0">
+                  <a:latin typeface="Times New Roman" panose="02020603050405020304" pitchFamily="18" charset="0"/>
+                  <a:ea typeface="宋体" panose="02010600030101010101" pitchFamily="2" charset="-122"/>
+                </a:rPr>
+                <a:t>SDT </a:t>
+              </a:r>
+              <a:r>
+                <a:rPr lang="zh-CN" altLang="en-US" dirty="0">
+                  <a:latin typeface="Times New Roman" panose="02020603050405020304" pitchFamily="18" charset="0"/>
+                  <a:ea typeface="宋体" panose="02010600030101010101" pitchFamily="2" charset="-122"/>
+                </a:rPr>
+                <a:t>随机接入过程</a:t>
+              </a:r>
+            </a:p>
+          </p:txBody>
+        </p:sp>
+      </p:grpSp>
+    </p:spTree>
+    <p:extLst>
+      <p:ext uri="{BB962C8B-B14F-4D97-AF65-F5344CB8AC3E}">
+        <p14:creationId xmlns:p14="http://schemas.microsoft.com/office/powerpoint/2010/main" val="3444126860"/>
+      </p:ext>
+    </p:extLst>
+  </p:cSld>
+  <p:clrMapOvr>
+    <a:masterClrMapping/>
+  </p:clrMapOvr>
+</p:sld>
+</file>
+
+<file path=ppt/slides/slide15.xml><?xml version="1.0" encoding="utf-8"?>
+<p:sld xmlns:a="http://schemas.openxmlformats.org/drawingml/2006/main" xmlns:r="http://schemas.openxmlformats.org/officeDocument/2006/relationships" xmlns:p="http://schemas.openxmlformats.org/presentationml/2006/main">
+  <p:cSld>
+    <p:spTree>
+      <p:nvGrpSpPr>
+        <p:cNvPr id="1" name=""/>
+        <p:cNvGrpSpPr/>
+        <p:nvPr/>
+      </p:nvGrpSpPr>
+      <p:grpSpPr>
+        <a:xfrm>
+          <a:off x="0" y="0"/>
+          <a:ext cx="0" cy="0"/>
+          <a:chOff x="0" y="0"/>
+          <a:chExt cx="0" cy="0"/>
+        </a:xfrm>
+      </p:grpSpPr>
+      <p:grpSp>
+        <p:nvGrpSpPr>
+          <p:cNvPr id="14" name="组合 13">
+            <a:extLst>
+              <a:ext uri="{FF2B5EF4-FFF2-40B4-BE49-F238E27FC236}">
+                <a16:creationId xmlns:a16="http://schemas.microsoft.com/office/drawing/2014/main" id="{84CBB7BC-C87A-006B-D3E9-6A1CC4C67817}"/>
+              </a:ext>
+            </a:extLst>
+          </p:cNvPr>
+          <p:cNvGrpSpPr/>
+          <p:nvPr/>
+        </p:nvGrpSpPr>
+        <p:grpSpPr>
+          <a:xfrm>
+            <a:off x="295654" y="948461"/>
+            <a:ext cx="7878126" cy="4825053"/>
+            <a:chOff x="271431" y="1790193"/>
+            <a:chExt cx="7878126" cy="4825053"/>
+          </a:xfrm>
+        </p:grpSpPr>
+        <p:grpSp>
+          <p:nvGrpSpPr>
+            <p:cNvPr id="1048727" name="组合 1048726">
+              <a:extLst>
+                <a:ext uri="{FF2B5EF4-FFF2-40B4-BE49-F238E27FC236}">
+                  <a16:creationId xmlns:a16="http://schemas.microsoft.com/office/drawing/2014/main" id="{00AFEA98-E26E-253E-151A-6E1E2B4A7273}"/>
+                </a:ext>
+              </a:extLst>
+            </p:cNvPr>
+            <p:cNvGrpSpPr/>
+            <p:nvPr/>
+          </p:nvGrpSpPr>
+          <p:grpSpPr>
+            <a:xfrm>
+              <a:off x="271431" y="1790193"/>
+              <a:ext cx="3517921" cy="4825053"/>
+              <a:chOff x="271431" y="1790193"/>
+              <a:chExt cx="3517921" cy="4825053"/>
+            </a:xfrm>
+          </p:grpSpPr>
+          <p:grpSp>
+            <p:nvGrpSpPr>
+              <p:cNvPr id="1048724" name="组合 1048723">
+                <a:extLst>
+                  <a:ext uri="{FF2B5EF4-FFF2-40B4-BE49-F238E27FC236}">
+                    <a16:creationId xmlns:a16="http://schemas.microsoft.com/office/drawing/2014/main" id="{6CA1944F-44CF-A114-08FF-EF3C1D16020F}"/>
+                  </a:ext>
+                </a:extLst>
+              </p:cNvPr>
+              <p:cNvGrpSpPr/>
+              <p:nvPr/>
+            </p:nvGrpSpPr>
+            <p:grpSpPr>
+              <a:xfrm>
+                <a:off x="271431" y="1790193"/>
+                <a:ext cx="3517921" cy="4407815"/>
+                <a:chOff x="271431" y="1790193"/>
+                <a:chExt cx="3517921" cy="3823153"/>
+              </a:xfrm>
+            </p:grpSpPr>
+            <p:sp>
+              <p:nvSpPr>
+                <p:cNvPr id="3" name="矩形 2">
+                  <a:extLst>
+                    <a:ext uri="{FF2B5EF4-FFF2-40B4-BE49-F238E27FC236}">
+                      <a16:creationId xmlns:a16="http://schemas.microsoft.com/office/drawing/2014/main" id="{218243E1-E12D-1E09-900A-9CC0B320808B}"/>
+                    </a:ext>
+                  </a:extLst>
+                </p:cNvPr>
+                <p:cNvSpPr/>
+                <p:nvPr/>
+              </p:nvSpPr>
+              <p:spPr>
+                <a:xfrm>
+                  <a:off x="271431" y="1802649"/>
+                  <a:ext cx="831317" cy="404780"/>
+                </a:xfrm>
+                <a:prstGeom prst="rect">
+                  <a:avLst/>
+                </a:prstGeom>
+                <a:noFill/>
+                <a:ln w="15875" cap="flat" cmpd="sng" algn="ctr">
+                  <a:solidFill>
+                    <a:sysClr val="windowText" lastClr="000000"/>
+                  </a:solidFill>
+                  <a:prstDash val="solid"/>
+                  <a:miter lim="800000"/>
+                </a:ln>
+                <a:effectLst/>
+              </p:spPr>
+              <p:txBody>
+                <a:bodyPr rtlCol="0" anchor="ctr"/>
+                <a:lstStyle/>
+                <a:p>
+                  <a:pPr marL="0" marR="0" lvl="0" indent="0" algn="ctr" defTabSz="914400" eaLnBrk="1" fontAlgn="auto" latinLnBrk="0" hangingPunct="1">
+                    <a:lnSpc>
+                      <a:spcPct val="100000"/>
+                    </a:lnSpc>
+                    <a:spcBef>
+                      <a:spcPts val="0"/>
+                    </a:spcBef>
+                    <a:spcAft>
+                      <a:spcPts val="0"/>
+                    </a:spcAft>
+                    <a:buClrTx/>
+                    <a:buSzTx/>
+                    <a:buFontTx/>
+                    <a:buNone/>
+                    <a:tabLst/>
+                    <a:defRPr/>
+                  </a:pPr>
+                  <a:r>
+                    <a:rPr kumimoji="0" lang="zh-CN" altLang="en-US" sz="1600" i="0" u="none" strike="noStrike" kern="0" cap="none" spc="0" normalizeH="0" baseline="0" noProof="0" dirty="0">
+                      <a:ln>
+                        <a:noFill/>
+                      </a:ln>
+                      <a:solidFill>
+                        <a:prstClr val="black"/>
+                      </a:solidFill>
+                      <a:effectLst/>
+                      <a:uLnTx/>
+                      <a:uFillTx/>
+                      <a:latin typeface="Times New Roman" panose="02020603050405020304" pitchFamily="18" charset="0"/>
+                      <a:ea typeface="宋体" panose="02010600030101010101" pitchFamily="2" charset="-122"/>
+                      <a:cs typeface="+mn-cs"/>
+                    </a:rPr>
+                    <a:t>终端</a:t>
+                  </a:r>
+                </a:p>
+              </p:txBody>
+            </p:sp>
+            <p:sp>
+              <p:nvSpPr>
+                <p:cNvPr id="4" name="矩形 3">
+                  <a:extLst>
+                    <a:ext uri="{FF2B5EF4-FFF2-40B4-BE49-F238E27FC236}">
+                      <a16:creationId xmlns:a16="http://schemas.microsoft.com/office/drawing/2014/main" id="{1DEBD010-7EAB-66C9-72C3-8C39FC197F92}"/>
+                    </a:ext>
+                  </a:extLst>
+                </p:cNvPr>
+                <p:cNvSpPr/>
+                <p:nvPr/>
+              </p:nvSpPr>
+              <p:spPr>
+                <a:xfrm>
+                  <a:off x="2958035" y="1790193"/>
+                  <a:ext cx="831317" cy="417236"/>
+                </a:xfrm>
+                <a:prstGeom prst="rect">
+                  <a:avLst/>
+                </a:prstGeom>
+                <a:noFill/>
+                <a:ln w="15875" cap="flat" cmpd="sng" algn="ctr">
+                  <a:solidFill>
+                    <a:sysClr val="windowText" lastClr="000000"/>
+                  </a:solidFill>
+                  <a:prstDash val="solid"/>
+                  <a:miter lim="800000"/>
+                </a:ln>
+                <a:effectLst/>
+              </p:spPr>
+              <p:txBody>
+                <a:bodyPr rtlCol="0" anchor="ctr"/>
+                <a:lstStyle/>
+                <a:p>
+                  <a:pPr marL="0" marR="0" lvl="0" indent="0" algn="ctr" defTabSz="914400" eaLnBrk="1" fontAlgn="auto" latinLnBrk="0" hangingPunct="1">
+                    <a:lnSpc>
+                      <a:spcPct val="100000"/>
+                    </a:lnSpc>
+                    <a:spcBef>
+                      <a:spcPts val="0"/>
+                    </a:spcBef>
+                    <a:spcAft>
+                      <a:spcPts val="0"/>
+                    </a:spcAft>
+                    <a:buClrTx/>
+                    <a:buSzTx/>
+                    <a:buFontTx/>
+                    <a:buNone/>
+                    <a:tabLst/>
+                    <a:defRPr/>
+                  </a:pPr>
+                  <a:r>
+                    <a:rPr kumimoji="0" lang="zh-CN" altLang="en-US" sz="1600" i="0" u="none" strike="noStrike" kern="0" cap="none" spc="0" normalizeH="0" baseline="0" noProof="0" dirty="0">
+                      <a:ln>
+                        <a:noFill/>
+                      </a:ln>
+                      <a:solidFill>
+                        <a:prstClr val="black"/>
+                      </a:solidFill>
+                      <a:effectLst/>
+                      <a:uLnTx/>
+                      <a:uFillTx/>
+                      <a:latin typeface="Times New Roman" panose="02020603050405020304" pitchFamily="18" charset="0"/>
+                      <a:ea typeface="宋体" panose="02010600030101010101" pitchFamily="2" charset="-122"/>
+                      <a:cs typeface="+mn-cs"/>
+                    </a:rPr>
+                    <a:t>基站</a:t>
+                  </a:r>
+                </a:p>
+              </p:txBody>
+            </p:sp>
+            <p:cxnSp>
+              <p:nvCxnSpPr>
+                <p:cNvPr id="5" name="直接箭头连接符 4">
+                  <a:extLst>
+                    <a:ext uri="{FF2B5EF4-FFF2-40B4-BE49-F238E27FC236}">
+                      <a16:creationId xmlns:a16="http://schemas.microsoft.com/office/drawing/2014/main" id="{2DB7C4C2-6491-E0A1-98A3-2212D0526D81}"/>
+                    </a:ext>
+                  </a:extLst>
+                </p:cNvPr>
+                <p:cNvCxnSpPr>
+                  <a:cxnSpLocks/>
+                  <a:stCxn id="3" idx="2"/>
+                </p:cNvCxnSpPr>
+                <p:nvPr/>
+              </p:nvCxnSpPr>
+              <p:spPr>
+                <a:xfrm flipH="1">
+                  <a:off x="687089" y="2207429"/>
+                  <a:ext cx="1" cy="3405917"/>
+                </a:xfrm>
+                <a:prstGeom prst="straightConnector1">
+                  <a:avLst/>
+                </a:prstGeom>
+                <a:noFill/>
+                <a:ln w="15875" cap="flat" cmpd="sng" algn="ctr">
+                  <a:solidFill>
+                    <a:sysClr val="windowText" lastClr="000000"/>
+                  </a:solidFill>
+                  <a:prstDash val="solid"/>
+                  <a:miter lim="800000"/>
+                  <a:tailEnd type="none"/>
+                </a:ln>
+                <a:effectLst/>
+              </p:spPr>
+            </p:cxnSp>
+            <p:cxnSp>
+              <p:nvCxnSpPr>
+                <p:cNvPr id="6" name="直接箭头连接符 5">
+                  <a:extLst>
+                    <a:ext uri="{FF2B5EF4-FFF2-40B4-BE49-F238E27FC236}">
+                      <a16:creationId xmlns:a16="http://schemas.microsoft.com/office/drawing/2014/main" id="{7A5F4AEB-23CC-2811-1408-2831254C5934}"/>
+                    </a:ext>
+                  </a:extLst>
+                </p:cNvPr>
+                <p:cNvCxnSpPr>
+                  <a:cxnSpLocks/>
+                  <a:stCxn id="4" idx="2"/>
+                </p:cNvCxnSpPr>
+                <p:nvPr/>
+              </p:nvCxnSpPr>
+              <p:spPr>
+                <a:xfrm>
+                  <a:off x="3373694" y="2207428"/>
+                  <a:ext cx="28040" cy="3405918"/>
+                </a:xfrm>
+                <a:prstGeom prst="straightConnector1">
+                  <a:avLst/>
+                </a:prstGeom>
+                <a:noFill/>
+                <a:ln w="15875" cap="flat" cmpd="sng" algn="ctr">
+                  <a:solidFill>
+                    <a:sysClr val="windowText" lastClr="000000"/>
+                  </a:solidFill>
+                  <a:prstDash val="solid"/>
+                  <a:miter lim="800000"/>
+                  <a:tailEnd type="none"/>
+                </a:ln>
+                <a:effectLst/>
+              </p:spPr>
+            </p:cxnSp>
+            <p:grpSp>
+              <p:nvGrpSpPr>
+                <p:cNvPr id="7" name="组合 6">
+                  <a:extLst>
+                    <a:ext uri="{FF2B5EF4-FFF2-40B4-BE49-F238E27FC236}">
+                      <a16:creationId xmlns:a16="http://schemas.microsoft.com/office/drawing/2014/main" id="{75D44EFA-A3C7-DEB8-BB23-DA4838E2E710}"/>
+                    </a:ext>
+                  </a:extLst>
+                </p:cNvPr>
+                <p:cNvGrpSpPr/>
+                <p:nvPr/>
+              </p:nvGrpSpPr>
+              <p:grpSpPr>
+                <a:xfrm>
+                  <a:off x="687089" y="2416534"/>
+                  <a:ext cx="2686604" cy="417235"/>
+                  <a:chOff x="1090430" y="1851644"/>
+                  <a:chExt cx="3400399" cy="441011"/>
+                </a:xfrm>
+              </p:grpSpPr>
+              <p:cxnSp>
+                <p:nvCxnSpPr>
+                  <p:cNvPr id="12" name="直接箭头连接符 11">
+                    <a:extLst>
+                      <a:ext uri="{FF2B5EF4-FFF2-40B4-BE49-F238E27FC236}">
+                        <a16:creationId xmlns:a16="http://schemas.microsoft.com/office/drawing/2014/main" id="{511AD602-D636-4C2B-F133-30D11622B5EF}"/>
+                      </a:ext>
+                    </a:extLst>
+                  </p:cNvPr>
+                  <p:cNvCxnSpPr>
+                    <a:cxnSpLocks/>
+                  </p:cNvCxnSpPr>
+                  <p:nvPr/>
+                </p:nvCxnSpPr>
+                <p:spPr>
+                  <a:xfrm>
+                    <a:off x="1090430" y="2280755"/>
+                    <a:ext cx="3400399" cy="0"/>
+                  </a:xfrm>
+                  <a:prstGeom prst="straightConnector1">
+                    <a:avLst/>
+                  </a:prstGeom>
+                  <a:noFill/>
+                  <a:ln w="15875" cap="flat" cmpd="sng" algn="ctr">
+                    <a:solidFill>
+                      <a:sysClr val="windowText" lastClr="000000"/>
+                    </a:solidFill>
+                    <a:prstDash val="solid"/>
+                    <a:miter lim="800000"/>
+                    <a:tailEnd type="triangle"/>
+                  </a:ln>
+                  <a:effectLst/>
+                </p:spPr>
+              </p:cxnSp>
+              <p:sp>
+                <p:nvSpPr>
+                  <p:cNvPr id="13" name="文本框 12">
+                    <a:extLst>
+                      <a:ext uri="{FF2B5EF4-FFF2-40B4-BE49-F238E27FC236}">
+                        <a16:creationId xmlns:a16="http://schemas.microsoft.com/office/drawing/2014/main" id="{5C90ADE1-D60A-51F6-A7F3-F67204CDF186}"/>
+                      </a:ext>
+                    </a:extLst>
+                  </p:cNvPr>
+                  <p:cNvSpPr txBox="1"/>
+                  <p:nvPr/>
+                </p:nvSpPr>
+                <p:spPr>
+                  <a:xfrm>
+                    <a:off x="1098878" y="1851644"/>
+                    <a:ext cx="3267270" cy="441011"/>
+                  </a:xfrm>
+                  <a:prstGeom prst="rect">
+                    <a:avLst/>
+                  </a:prstGeom>
+                  <a:noFill/>
+                  <a:ln w="15875">
+                    <a:noFill/>
+                  </a:ln>
+                </p:spPr>
+                <p:txBody>
+                  <a:bodyPr wrap="square" rtlCol="0" anchor="ctr" anchorCtr="1">
+                    <a:spAutoFit/>
+                  </a:bodyPr>
+                  <a:lstStyle/>
+                  <a:p>
+                    <a:pPr marL="0" marR="0" lvl="0" indent="0" defTabSz="914400" eaLnBrk="1" fontAlgn="auto" latinLnBrk="0" hangingPunct="1">
+                      <a:lnSpc>
+                        <a:spcPct val="100000"/>
+                      </a:lnSpc>
+                      <a:spcBef>
+                        <a:spcPts val="0"/>
+                      </a:spcBef>
+                      <a:spcAft>
+                        <a:spcPts val="0"/>
+                      </a:spcAft>
+                      <a:buClrTx/>
+                      <a:buSzTx/>
+                      <a:buFontTx/>
+                      <a:buNone/>
+                      <a:tabLst/>
+                      <a:defRPr/>
+                    </a:pPr>
+                    <a:r>
+                      <a:rPr kumimoji="0" lang="en-US" altLang="zh-CN" sz="1600" i="0" u="none" strike="noStrike" kern="0" cap="none" spc="0" normalizeH="0" baseline="0" noProof="0" dirty="0" err="1">
+                        <a:ln>
+                          <a:noFill/>
+                        </a:ln>
+                        <a:solidFill>
+                          <a:prstClr val="black"/>
+                        </a:solidFill>
+                        <a:effectLst/>
+                        <a:uLnTx/>
+                        <a:uFillTx/>
+                        <a:latin typeface="Times New Roman" panose="02020603050405020304" pitchFamily="18" charset="0"/>
+                        <a:ea typeface="宋体" panose="02010600030101010101" pitchFamily="2" charset="-122"/>
+                      </a:rPr>
+                      <a:t>MsgA</a:t>
+                    </a:r>
+                    <a:r>
+                      <a:rPr kumimoji="0" lang="zh-CN" altLang="en-US" sz="1600" i="0" u="none" strike="noStrike" kern="0" cap="none" spc="0" normalizeH="0" baseline="0" noProof="0" dirty="0">
+                        <a:ln>
+                          <a:noFill/>
+                        </a:ln>
+                        <a:solidFill>
+                          <a:prstClr val="black"/>
+                        </a:solidFill>
+                        <a:effectLst/>
+                        <a:uLnTx/>
+                        <a:uFillTx/>
+                        <a:latin typeface="Times New Roman" panose="02020603050405020304" pitchFamily="18" charset="0"/>
+                        <a:ea typeface="宋体" panose="02010600030101010101" pitchFamily="2" charset="-122"/>
+                      </a:rPr>
+                      <a:t>：前导</a:t>
+                    </a:r>
+                    <a:r>
+                      <a:rPr kumimoji="0" lang="en-US" altLang="zh-CN" sz="1600" i="0" u="none" strike="noStrike" kern="0" cap="none" spc="0" normalizeH="0" baseline="0" noProof="0" dirty="0">
+                        <a:ln>
+                          <a:noFill/>
+                        </a:ln>
+                        <a:solidFill>
+                          <a:prstClr val="black"/>
+                        </a:solidFill>
+                        <a:effectLst/>
+                        <a:uLnTx/>
+                        <a:uFillTx/>
+                        <a:latin typeface="Times New Roman" panose="02020603050405020304" pitchFamily="18" charset="0"/>
+                        <a:ea typeface="宋体" panose="02010600030101010101" pitchFamily="2" charset="-122"/>
+                      </a:rPr>
+                      <a:t>+</a:t>
+                    </a:r>
+                    <a:r>
+                      <a:rPr kumimoji="0" lang="zh-CN" altLang="en-US" sz="1600" i="0" u="none" strike="noStrike" kern="0" cap="none" spc="0" normalizeH="0" baseline="0" noProof="0" dirty="0">
+                        <a:ln>
+                          <a:noFill/>
+                        </a:ln>
+                        <a:solidFill>
+                          <a:prstClr val="black"/>
+                        </a:solidFill>
+                        <a:effectLst/>
+                        <a:uLnTx/>
+                        <a:uFillTx/>
+                        <a:latin typeface="Times New Roman" panose="02020603050405020304" pitchFamily="18" charset="0"/>
+                        <a:ea typeface="宋体" panose="02010600030101010101" pitchFamily="2" charset="-122"/>
+                      </a:rPr>
+                      <a:t>短数据报文</a:t>
+                    </a:r>
+                  </a:p>
+                </p:txBody>
+              </p:sp>
+            </p:grpSp>
+            <p:grpSp>
+              <p:nvGrpSpPr>
+                <p:cNvPr id="8" name="组合 7">
+                  <a:extLst>
+                    <a:ext uri="{FF2B5EF4-FFF2-40B4-BE49-F238E27FC236}">
+                      <a16:creationId xmlns:a16="http://schemas.microsoft.com/office/drawing/2014/main" id="{E8647E40-2EB7-1732-7A48-C1F7602211FB}"/>
+                    </a:ext>
+                  </a:extLst>
+                </p:cNvPr>
+                <p:cNvGrpSpPr/>
+                <p:nvPr/>
+              </p:nvGrpSpPr>
+              <p:grpSpPr>
+                <a:xfrm>
+                  <a:off x="687088" y="4104669"/>
+                  <a:ext cx="2700626" cy="417236"/>
+                  <a:chOff x="1090429" y="2687435"/>
+                  <a:chExt cx="3418146" cy="441012"/>
+                </a:xfrm>
+              </p:grpSpPr>
+              <p:cxnSp>
+                <p:nvCxnSpPr>
+                  <p:cNvPr id="10" name="直接箭头连接符 9">
+                    <a:extLst>
+                      <a:ext uri="{FF2B5EF4-FFF2-40B4-BE49-F238E27FC236}">
+                        <a16:creationId xmlns:a16="http://schemas.microsoft.com/office/drawing/2014/main" id="{045FDC4D-A388-E889-F6E9-051591D226DA}"/>
+                      </a:ext>
+                    </a:extLst>
+                  </p:cNvPr>
+                  <p:cNvCxnSpPr>
+                    <a:cxnSpLocks/>
+                  </p:cNvCxnSpPr>
+                  <p:nvPr/>
+                </p:nvCxnSpPr>
+                <p:spPr>
+                  <a:xfrm flipH="1">
+                    <a:off x="1090429" y="3103715"/>
+                    <a:ext cx="3418146" cy="0"/>
+                  </a:xfrm>
+                  <a:prstGeom prst="straightConnector1">
+                    <a:avLst/>
+                  </a:prstGeom>
+                  <a:noFill/>
+                  <a:ln w="15875" cap="flat" cmpd="sng" algn="ctr">
+                    <a:solidFill>
+                      <a:sysClr val="windowText" lastClr="000000"/>
+                    </a:solidFill>
+                    <a:prstDash val="solid"/>
+                    <a:miter lim="800000"/>
+                    <a:tailEnd type="triangle"/>
+                  </a:ln>
+                  <a:effectLst/>
+                </p:spPr>
+              </p:cxnSp>
+              <p:sp>
+                <p:nvSpPr>
+                  <p:cNvPr id="11" name="文本框 10">
+                    <a:extLst>
+                      <a:ext uri="{FF2B5EF4-FFF2-40B4-BE49-F238E27FC236}">
+                        <a16:creationId xmlns:a16="http://schemas.microsoft.com/office/drawing/2014/main" id="{8F293189-EBB4-AE0E-D51F-1A71D1ABA6D5}"/>
+                      </a:ext>
+                    </a:extLst>
+                  </p:cNvPr>
+                  <p:cNvSpPr txBox="1"/>
+                  <p:nvPr/>
+                </p:nvSpPr>
+                <p:spPr>
+                  <a:xfrm>
+                    <a:off x="1386950" y="2687435"/>
+                    <a:ext cx="2865119" cy="441012"/>
+                  </a:xfrm>
+                  <a:prstGeom prst="rect">
+                    <a:avLst/>
+                  </a:prstGeom>
+                  <a:noFill/>
+                  <a:ln w="15875">
+                    <a:noFill/>
+                  </a:ln>
+                </p:spPr>
+                <p:txBody>
+                  <a:bodyPr wrap="square" rtlCol="0" anchor="ctr" anchorCtr="1">
+                    <a:spAutoFit/>
+                  </a:bodyPr>
+                  <a:lstStyle/>
+                  <a:p>
+                    <a:pPr marL="0" marR="0" lvl="0" indent="0" defTabSz="914400" eaLnBrk="1" fontAlgn="auto" latinLnBrk="0" hangingPunct="1">
+                      <a:lnSpc>
+                        <a:spcPct val="100000"/>
+                      </a:lnSpc>
+                      <a:spcBef>
+                        <a:spcPts val="0"/>
+                      </a:spcBef>
+                      <a:spcAft>
+                        <a:spcPts val="0"/>
+                      </a:spcAft>
+                      <a:buClrTx/>
+                      <a:buSzTx/>
+                      <a:buFontTx/>
+                      <a:buNone/>
+                      <a:tabLst/>
+                      <a:defRPr/>
+                    </a:pPr>
+                    <a:r>
+                      <a:rPr kumimoji="0" lang="en-US" altLang="zh-CN" sz="1600" i="0" u="none" strike="noStrike" kern="0" cap="none" spc="0" normalizeH="0" baseline="0" noProof="0" dirty="0" err="1">
+                        <a:ln>
+                          <a:noFill/>
+                        </a:ln>
+                        <a:solidFill>
+                          <a:prstClr val="black"/>
+                        </a:solidFill>
+                        <a:effectLst/>
+                        <a:uLnTx/>
+                        <a:uFillTx/>
+                        <a:latin typeface="Times New Roman" panose="02020603050405020304" pitchFamily="18" charset="0"/>
+                        <a:ea typeface="宋体" panose="02010600030101010101" pitchFamily="2" charset="-122"/>
+                      </a:rPr>
+                      <a:t>MsgB</a:t>
+                    </a:r>
+                    <a:r>
+                      <a:rPr kumimoji="0" lang="zh-CN" altLang="en-US" sz="1600" i="0" u="none" strike="noStrike" kern="0" cap="none" spc="0" normalizeH="0" baseline="0" noProof="0" dirty="0">
+                        <a:ln>
+                          <a:noFill/>
+                        </a:ln>
+                        <a:solidFill>
+                          <a:prstClr val="black"/>
+                        </a:solidFill>
+                        <a:effectLst/>
+                        <a:uLnTx/>
+                        <a:uFillTx/>
+                        <a:latin typeface="Times New Roman" panose="02020603050405020304" pitchFamily="18" charset="0"/>
+                        <a:ea typeface="宋体" panose="02010600030101010101" pitchFamily="2" charset="-122"/>
+                      </a:rPr>
+                      <a:t>：竞争冲突解决</a:t>
+                    </a:r>
+                  </a:p>
+                </p:txBody>
+              </p:sp>
+            </p:grpSp>
+          </p:grpSp>
+          <p:sp>
+            <p:nvSpPr>
+              <p:cNvPr id="9" name="文本框 8">
+                <a:extLst>
+                  <a:ext uri="{FF2B5EF4-FFF2-40B4-BE49-F238E27FC236}">
+                    <a16:creationId xmlns:a16="http://schemas.microsoft.com/office/drawing/2014/main" id="{58C6940A-C6CF-8D81-4C6F-81CB6320AE26}"/>
+                  </a:ext>
+                </a:extLst>
+              </p:cNvPr>
+              <p:cNvSpPr txBox="1"/>
+              <p:nvPr/>
+            </p:nvSpPr>
+            <p:spPr>
+              <a:xfrm>
+                <a:off x="844667" y="6198011"/>
+                <a:ext cx="2684083" cy="417235"/>
+              </a:xfrm>
+              <a:prstGeom prst="rect">
+                <a:avLst/>
+              </a:prstGeom>
+              <a:noFill/>
+            </p:spPr>
+            <p:txBody>
+              <a:bodyPr wrap="square" rtlCol="0" anchor="ctr" anchorCtr="1">
+                <a:spAutoFit/>
+              </a:bodyPr>
+              <a:lstStyle/>
+              <a:p>
+                <a:pPr marL="0" marR="0" lvl="0" indent="0" defTabSz="914400" eaLnBrk="1" fontAlgn="auto" latinLnBrk="0" hangingPunct="1">
+                  <a:lnSpc>
+                    <a:spcPct val="100000"/>
+                  </a:lnSpc>
+                  <a:spcBef>
+                    <a:spcPts val="0"/>
+                  </a:spcBef>
+                  <a:spcAft>
+                    <a:spcPts val="0"/>
+                  </a:spcAft>
+                  <a:buClrTx/>
+                  <a:buSzTx/>
+                  <a:buFontTx/>
+                  <a:buNone/>
+                  <a:tabLst/>
+                  <a:defRPr/>
+                </a:pPr>
+                <a:r>
+                  <a:rPr kumimoji="0" lang="zh-CN" altLang="en-US" sz="1600" b="0" i="0" u="none" strike="noStrike" kern="0" cap="none" spc="0" normalizeH="0" baseline="0" noProof="0" dirty="0">
+                    <a:ln>
+                      <a:noFill/>
+                    </a:ln>
+                    <a:solidFill>
+                      <a:prstClr val="black"/>
+                    </a:solidFill>
+                    <a:effectLst/>
+                    <a:uLnTx/>
+                    <a:uFillTx/>
+                    <a:latin typeface="Times New Roman" panose="02020603050405020304" pitchFamily="18" charset="0"/>
+                    <a:ea typeface="宋体" panose="02010600030101010101" pitchFamily="2" charset="-122"/>
+                  </a:rPr>
+                  <a:t>两步</a:t>
+                </a:r>
+                <a:r>
+                  <a:rPr kumimoji="0" lang="en-US" altLang="zh-CN" sz="1600" b="0" i="0" u="none" strike="noStrike" kern="0" cap="none" spc="0" normalizeH="0" baseline="0" noProof="0" dirty="0">
+                    <a:ln>
+                      <a:noFill/>
+                    </a:ln>
+                    <a:solidFill>
+                      <a:prstClr val="black"/>
+                    </a:solidFill>
+                    <a:effectLst/>
+                    <a:uLnTx/>
+                    <a:uFillTx/>
+                    <a:latin typeface="Times New Roman" panose="02020603050405020304" pitchFamily="18" charset="0"/>
+                    <a:ea typeface="宋体" panose="02010600030101010101" pitchFamily="2" charset="-122"/>
+                  </a:rPr>
+                  <a:t>SDT </a:t>
+                </a:r>
+                <a:r>
+                  <a:rPr kumimoji="0" lang="zh-CN" altLang="en-US" sz="1600" b="0" i="0" u="none" strike="noStrike" kern="0" cap="none" spc="0" normalizeH="0" baseline="0" noProof="0" dirty="0">
+                    <a:ln>
+                      <a:noFill/>
+                    </a:ln>
+                    <a:solidFill>
+                      <a:prstClr val="black"/>
+                    </a:solidFill>
+                    <a:effectLst/>
+                    <a:uLnTx/>
+                    <a:uFillTx/>
+                    <a:latin typeface="Times New Roman" panose="02020603050405020304" pitchFamily="18" charset="0"/>
+                    <a:ea typeface="宋体" panose="02010600030101010101" pitchFamily="2" charset="-122"/>
+                  </a:rPr>
+                  <a:t>随机接入过程</a:t>
+                </a:r>
+              </a:p>
+            </p:txBody>
+          </p:sp>
+        </p:grpSp>
+        <p:grpSp>
+          <p:nvGrpSpPr>
+            <p:cNvPr id="1048728" name="组合 1048727">
+              <a:extLst>
+                <a:ext uri="{FF2B5EF4-FFF2-40B4-BE49-F238E27FC236}">
+                  <a16:creationId xmlns:a16="http://schemas.microsoft.com/office/drawing/2014/main" id="{C0BE3B17-D634-90C8-77E7-F113CCEFA66A}"/>
+                </a:ext>
+              </a:extLst>
+            </p:cNvPr>
+            <p:cNvGrpSpPr/>
+            <p:nvPr/>
+          </p:nvGrpSpPr>
+          <p:grpSpPr>
+            <a:xfrm>
+              <a:off x="3971036" y="1802648"/>
+              <a:ext cx="4178521" cy="4812598"/>
+              <a:chOff x="3971036" y="1802648"/>
+              <a:chExt cx="4178521" cy="4812598"/>
+            </a:xfrm>
+          </p:grpSpPr>
+          <p:sp>
+            <p:nvSpPr>
+              <p:cNvPr id="23" name="文本框 22">
+                <a:extLst>
+                  <a:ext uri="{FF2B5EF4-FFF2-40B4-BE49-F238E27FC236}">
+                    <a16:creationId xmlns:a16="http://schemas.microsoft.com/office/drawing/2014/main" id="{4D7703C2-C0B0-0282-89B4-3B27D1FCFB6B}"/>
+                  </a:ext>
+                </a:extLst>
+              </p:cNvPr>
+              <p:cNvSpPr txBox="1"/>
+              <p:nvPr/>
+            </p:nvSpPr>
+            <p:spPr>
+              <a:xfrm>
+                <a:off x="4466244" y="6200350"/>
+                <a:ext cx="3188103" cy="414896"/>
+              </a:xfrm>
+              <a:prstGeom prst="rect">
+                <a:avLst/>
+              </a:prstGeom>
+              <a:noFill/>
+            </p:spPr>
+            <p:txBody>
+              <a:bodyPr wrap="square" rtlCol="0" anchor="ctr" anchorCtr="1">
+                <a:spAutoFit/>
+              </a:bodyPr>
+              <a:lstStyle/>
+              <a:p>
+                <a:pPr marL="0" marR="0" lvl="0" indent="0" defTabSz="914400" eaLnBrk="1" fontAlgn="auto" latinLnBrk="0" hangingPunct="1">
+                  <a:lnSpc>
+                    <a:spcPct val="100000"/>
+                  </a:lnSpc>
+                  <a:spcBef>
+                    <a:spcPts val="0"/>
+                  </a:spcBef>
+                  <a:spcAft>
+                    <a:spcPts val="0"/>
+                  </a:spcAft>
+                  <a:buClrTx/>
+                  <a:buSzTx/>
+                  <a:buFontTx/>
+                  <a:buNone/>
+                  <a:tabLst/>
+                  <a:defRPr/>
+                </a:pPr>
+                <a:r>
+                  <a:rPr kumimoji="0" lang="en-US" altLang="zh-CN" sz="1600" b="0" i="0" u="none" strike="noStrike" kern="0" cap="none" spc="0" normalizeH="0" baseline="0" noProof="0" dirty="0">
+                    <a:ln>
+                      <a:noFill/>
+                    </a:ln>
+                    <a:solidFill>
+                      <a:prstClr val="black"/>
+                    </a:solidFill>
+                    <a:effectLst/>
+                    <a:uLnTx/>
+                    <a:uFillTx/>
+                    <a:latin typeface="Times New Roman" panose="02020603050405020304" pitchFamily="18" charset="0"/>
+                    <a:ea typeface="宋体" panose="02010600030101010101" pitchFamily="2" charset="-122"/>
+                  </a:rPr>
+                  <a:t>SAST </a:t>
+                </a:r>
+                <a:r>
+                  <a:rPr kumimoji="0" lang="zh-CN" altLang="en-US" sz="1600" b="0" i="0" u="none" strike="noStrike" kern="0" cap="none" spc="0" normalizeH="0" baseline="0" noProof="0" dirty="0">
+                    <a:ln>
+                      <a:noFill/>
+                    </a:ln>
+                    <a:solidFill>
+                      <a:prstClr val="black"/>
+                    </a:solidFill>
+                    <a:effectLst/>
+                    <a:uLnTx/>
+                    <a:uFillTx/>
+                    <a:latin typeface="Times New Roman" panose="02020603050405020304" pitchFamily="18" charset="0"/>
+                    <a:ea typeface="宋体" panose="02010600030101010101" pitchFamily="2" charset="-122"/>
+                  </a:rPr>
+                  <a:t>随机接入过程</a:t>
+                </a:r>
+              </a:p>
+            </p:txBody>
+          </p:sp>
+          <p:sp>
+            <p:nvSpPr>
+              <p:cNvPr id="15" name="矩形 14">
+                <a:extLst>
+                  <a:ext uri="{FF2B5EF4-FFF2-40B4-BE49-F238E27FC236}">
+                    <a16:creationId xmlns:a16="http://schemas.microsoft.com/office/drawing/2014/main" id="{92FAD642-5C96-AD90-1F15-41EC903759C0}"/>
+                  </a:ext>
+                </a:extLst>
+              </p:cNvPr>
+              <p:cNvSpPr/>
+              <p:nvPr/>
+            </p:nvSpPr>
+            <p:spPr>
+              <a:xfrm>
+                <a:off x="4464745" y="3794450"/>
+                <a:ext cx="3207754" cy="2400012"/>
+              </a:xfrm>
+              <a:prstGeom prst="rect">
+                <a:avLst/>
+              </a:prstGeom>
+              <a:solidFill>
+                <a:srgbClr val="70AD47">
+                  <a:lumMod val="20000"/>
+                  <a:lumOff val="80000"/>
+                </a:srgbClr>
+              </a:solidFill>
+              <a:ln w="19050" cap="flat" cmpd="sng" algn="ctr">
+                <a:noFill/>
+                <a:prstDash val="solid"/>
+                <a:miter lim="800000"/>
+              </a:ln>
+              <a:effectLst/>
+            </p:spPr>
+            <p:txBody>
+              <a:bodyPr rtlCol="0" anchor="ctr"/>
+              <a:lstStyle/>
+              <a:p>
+                <a:pPr marL="0" marR="0" lvl="0" indent="0" algn="ctr" defTabSz="914400" eaLnBrk="1" fontAlgn="auto" latinLnBrk="0" hangingPunct="1">
+                  <a:lnSpc>
+                    <a:spcPct val="100000"/>
+                  </a:lnSpc>
+                  <a:spcBef>
+                    <a:spcPts val="0"/>
+                  </a:spcBef>
+                  <a:spcAft>
+                    <a:spcPts val="0"/>
+                  </a:spcAft>
+                  <a:buClrTx/>
+                  <a:buSzTx/>
+                  <a:buFontTx/>
+                  <a:buNone/>
+                  <a:tabLst/>
+                  <a:defRPr/>
+                </a:pPr>
+                <a:endParaRPr kumimoji="0" lang="zh-CN" altLang="en-US" sz="1600" i="0" u="none" strike="noStrike" kern="0" cap="none" spc="0" normalizeH="0" baseline="0" noProof="0" dirty="0" err="1">
+                  <a:ln>
+                    <a:noFill/>
+                  </a:ln>
+                  <a:solidFill>
+                    <a:srgbClr val="70AD47">
+                      <a:lumMod val="20000"/>
+                      <a:lumOff val="80000"/>
+                    </a:srgbClr>
+                  </a:solidFill>
+                  <a:effectLst/>
+                  <a:uLnTx/>
+                  <a:uFillTx/>
+                  <a:latin typeface="等线" panose="020F0502020204030204"/>
+                  <a:ea typeface="等线" panose="02010600030101010101" pitchFamily="2" charset="-122"/>
+                  <a:cs typeface="+mn-cs"/>
+                </a:endParaRPr>
+              </a:p>
+            </p:txBody>
+          </p:sp>
+          <p:sp>
+            <p:nvSpPr>
+              <p:cNvPr id="16" name="矩形 15">
+                <a:extLst>
+                  <a:ext uri="{FF2B5EF4-FFF2-40B4-BE49-F238E27FC236}">
+                    <a16:creationId xmlns:a16="http://schemas.microsoft.com/office/drawing/2014/main" id="{C5CC33F9-3FC2-EC65-B73D-E73577AEB1C5}"/>
+                  </a:ext>
+                </a:extLst>
+              </p:cNvPr>
+              <p:cNvSpPr/>
+              <p:nvPr/>
+            </p:nvSpPr>
+            <p:spPr>
+              <a:xfrm>
+                <a:off x="3971036" y="1802648"/>
+                <a:ext cx="987423" cy="464809"/>
+              </a:xfrm>
+              <a:prstGeom prst="rect">
+                <a:avLst/>
+              </a:prstGeom>
+              <a:noFill/>
+              <a:ln w="15875" cap="flat" cmpd="sng" algn="ctr">
+                <a:solidFill>
+                  <a:sysClr val="windowText" lastClr="000000"/>
+                </a:solidFill>
+                <a:prstDash val="solid"/>
+                <a:miter lim="800000"/>
+              </a:ln>
+              <a:effectLst/>
+            </p:spPr>
+            <p:txBody>
+              <a:bodyPr rtlCol="0" anchor="ctr"/>
+              <a:lstStyle/>
+              <a:p>
+                <a:pPr marL="0" marR="0" lvl="0" indent="0" algn="ctr" defTabSz="914400" eaLnBrk="1" fontAlgn="auto" latinLnBrk="0" hangingPunct="1">
+                  <a:lnSpc>
+                    <a:spcPct val="100000"/>
+                  </a:lnSpc>
+                  <a:spcBef>
+                    <a:spcPts val="0"/>
+                  </a:spcBef>
+                  <a:spcAft>
+                    <a:spcPts val="0"/>
+                  </a:spcAft>
+                  <a:buClrTx/>
+                  <a:buSzTx/>
+                  <a:buFontTx/>
+                  <a:buNone/>
+                  <a:tabLst/>
+                  <a:defRPr/>
+                </a:pPr>
+                <a:r>
+                  <a:rPr kumimoji="0" lang="zh-CN" altLang="en-US" sz="1600" i="0" u="none" strike="noStrike" kern="0" cap="none" spc="0" normalizeH="0" baseline="0" noProof="0" dirty="0">
+                    <a:ln>
+                      <a:noFill/>
+                    </a:ln>
+                    <a:solidFill>
+                      <a:prstClr val="black"/>
+                    </a:solidFill>
+                    <a:effectLst/>
+                    <a:uLnTx/>
+                    <a:uFillTx/>
+                    <a:latin typeface="Times New Roman" panose="02020603050405020304" pitchFamily="18" charset="0"/>
+                    <a:ea typeface="宋体" panose="02010600030101010101" pitchFamily="2" charset="-122"/>
+                    <a:cs typeface="+mn-cs"/>
+                  </a:rPr>
+                  <a:t>终端</a:t>
+                </a:r>
+              </a:p>
+            </p:txBody>
+          </p:sp>
+          <p:sp>
+            <p:nvSpPr>
+              <p:cNvPr id="17" name="矩形 16">
+                <a:extLst>
+                  <a:ext uri="{FF2B5EF4-FFF2-40B4-BE49-F238E27FC236}">
+                    <a16:creationId xmlns:a16="http://schemas.microsoft.com/office/drawing/2014/main" id="{1978E6BC-8278-4C0C-323D-F195742FA7C9}"/>
+                  </a:ext>
+                </a:extLst>
+              </p:cNvPr>
+              <p:cNvSpPr/>
+              <p:nvPr/>
+            </p:nvSpPr>
+            <p:spPr>
+              <a:xfrm>
+                <a:off x="7162134" y="1803714"/>
+                <a:ext cx="987423" cy="463742"/>
+              </a:xfrm>
+              <a:prstGeom prst="rect">
+                <a:avLst/>
+              </a:prstGeom>
+              <a:noFill/>
+              <a:ln w="15875" cap="flat" cmpd="sng" algn="ctr">
+                <a:solidFill>
+                  <a:sysClr val="windowText" lastClr="000000"/>
+                </a:solidFill>
+                <a:prstDash val="solid"/>
+                <a:miter lim="800000"/>
+              </a:ln>
+              <a:effectLst/>
+            </p:spPr>
+            <p:txBody>
+              <a:bodyPr rtlCol="0" anchor="ctr"/>
+              <a:lstStyle/>
+              <a:p>
+                <a:pPr marL="0" marR="0" lvl="0" indent="0" algn="ctr" defTabSz="914400" eaLnBrk="1" fontAlgn="auto" latinLnBrk="0" hangingPunct="1">
+                  <a:lnSpc>
+                    <a:spcPct val="100000"/>
+                  </a:lnSpc>
+                  <a:spcBef>
+                    <a:spcPts val="0"/>
+                  </a:spcBef>
+                  <a:spcAft>
+                    <a:spcPts val="0"/>
+                  </a:spcAft>
+                  <a:buClrTx/>
+                  <a:buSzTx/>
+                  <a:buFontTx/>
+                  <a:buNone/>
+                  <a:tabLst/>
+                  <a:defRPr/>
+                </a:pPr>
+                <a:r>
+                  <a:rPr kumimoji="0" lang="zh-CN" altLang="en-US" sz="1600" i="0" u="none" strike="noStrike" kern="0" cap="none" spc="0" normalizeH="0" baseline="0" noProof="0" dirty="0">
+                    <a:ln>
+                      <a:noFill/>
+                    </a:ln>
+                    <a:solidFill>
+                      <a:prstClr val="black"/>
+                    </a:solidFill>
+                    <a:effectLst/>
+                    <a:uLnTx/>
+                    <a:uFillTx/>
+                    <a:latin typeface="Times New Roman" panose="02020603050405020304" pitchFamily="18" charset="0"/>
+                    <a:ea typeface="宋体" panose="02010600030101010101" pitchFamily="2" charset="-122"/>
+                    <a:cs typeface="+mn-cs"/>
+                  </a:rPr>
+                  <a:t>基站</a:t>
+                </a:r>
+              </a:p>
+            </p:txBody>
+          </p:sp>
+          <p:cxnSp>
+            <p:nvCxnSpPr>
+              <p:cNvPr id="18" name="直接箭头连接符 17">
+                <a:extLst>
+                  <a:ext uri="{FF2B5EF4-FFF2-40B4-BE49-F238E27FC236}">
+                    <a16:creationId xmlns:a16="http://schemas.microsoft.com/office/drawing/2014/main" id="{5ECCFCA9-4536-8B92-1AD0-89BFAB921E09}"/>
+                  </a:ext>
+                </a:extLst>
+              </p:cNvPr>
+              <p:cNvCxnSpPr>
+                <a:cxnSpLocks/>
+                <a:stCxn id="16" idx="2"/>
+              </p:cNvCxnSpPr>
+              <p:nvPr/>
+            </p:nvCxnSpPr>
+            <p:spPr>
+              <a:xfrm flipH="1">
+                <a:off x="4464747" y="2267457"/>
+                <a:ext cx="1" cy="3930550"/>
+              </a:xfrm>
+              <a:prstGeom prst="straightConnector1">
+                <a:avLst/>
+              </a:prstGeom>
+              <a:noFill/>
+              <a:ln w="15875" cap="flat" cmpd="sng" algn="ctr">
+                <a:solidFill>
+                  <a:sysClr val="windowText" lastClr="000000"/>
+                </a:solidFill>
+                <a:prstDash val="solid"/>
+                <a:miter lim="800000"/>
+                <a:tailEnd type="none"/>
+              </a:ln>
+              <a:effectLst/>
+            </p:spPr>
+          </p:cxnSp>
+          <p:cxnSp>
+            <p:nvCxnSpPr>
+              <p:cNvPr id="19" name="直接箭头连接符 18">
+                <a:extLst>
+                  <a:ext uri="{FF2B5EF4-FFF2-40B4-BE49-F238E27FC236}">
+                    <a16:creationId xmlns:a16="http://schemas.microsoft.com/office/drawing/2014/main" id="{413264CB-B56F-4429-8864-39CA503B708C}"/>
+                  </a:ext>
+                </a:extLst>
+              </p:cNvPr>
+              <p:cNvCxnSpPr>
+                <a:cxnSpLocks/>
+                <a:stCxn id="17" idx="2"/>
+              </p:cNvCxnSpPr>
+              <p:nvPr/>
+            </p:nvCxnSpPr>
+            <p:spPr>
+              <a:xfrm>
+                <a:off x="7655846" y="2267456"/>
+                <a:ext cx="33306" cy="3930551"/>
+              </a:xfrm>
+              <a:prstGeom prst="straightConnector1">
+                <a:avLst/>
+              </a:prstGeom>
+              <a:noFill/>
+              <a:ln w="15875" cap="flat" cmpd="sng" algn="ctr">
+                <a:solidFill>
+                  <a:sysClr val="windowText" lastClr="000000"/>
+                </a:solidFill>
+                <a:prstDash val="solid"/>
+                <a:miter lim="800000"/>
+                <a:tailEnd type="none"/>
+              </a:ln>
+              <a:effectLst/>
+            </p:spPr>
+          </p:cxnSp>
+          <p:cxnSp>
+            <p:nvCxnSpPr>
+              <p:cNvPr id="20" name="直接箭头连接符 19">
+                <a:extLst>
+                  <a:ext uri="{FF2B5EF4-FFF2-40B4-BE49-F238E27FC236}">
+                    <a16:creationId xmlns:a16="http://schemas.microsoft.com/office/drawing/2014/main" id="{560EA151-7D48-6BB3-D06E-8A2846A8CC0F}"/>
+                  </a:ext>
+                </a:extLst>
+              </p:cNvPr>
+              <p:cNvCxnSpPr>
+                <a:cxnSpLocks/>
+              </p:cNvCxnSpPr>
+              <p:nvPr/>
+            </p:nvCxnSpPr>
+            <p:spPr>
+              <a:xfrm>
+                <a:off x="4464747" y="2964061"/>
+                <a:ext cx="3191098" cy="0"/>
+              </a:xfrm>
+              <a:prstGeom prst="straightConnector1">
+                <a:avLst/>
+              </a:prstGeom>
+              <a:noFill/>
+              <a:ln w="15875" cap="flat" cmpd="sng" algn="ctr">
+                <a:solidFill>
+                  <a:sysClr val="windowText" lastClr="000000"/>
+                </a:solidFill>
+                <a:prstDash val="solid"/>
+                <a:miter lim="800000"/>
+                <a:tailEnd type="triangle"/>
+              </a:ln>
+              <a:effectLst/>
+            </p:spPr>
+          </p:cxnSp>
+          <p:sp>
+            <p:nvSpPr>
+              <p:cNvPr id="21" name="文本框 20">
+                <a:extLst>
+                  <a:ext uri="{FF2B5EF4-FFF2-40B4-BE49-F238E27FC236}">
+                    <a16:creationId xmlns:a16="http://schemas.microsoft.com/office/drawing/2014/main" id="{56D91061-D58C-4920-752D-06811C8630AF}"/>
+                  </a:ext>
+                </a:extLst>
+              </p:cNvPr>
+              <p:cNvSpPr txBox="1"/>
+              <p:nvPr/>
+            </p:nvSpPr>
+            <p:spPr>
+              <a:xfrm>
+                <a:off x="4753556" y="2372316"/>
+                <a:ext cx="2688766" cy="833760"/>
+              </a:xfrm>
+              <a:prstGeom prst="rect">
+                <a:avLst/>
+              </a:prstGeom>
+              <a:noFill/>
+              <a:ln w="15875">
+                <a:noFill/>
+              </a:ln>
+            </p:spPr>
+            <p:txBody>
+              <a:bodyPr wrap="square" rtlCol="0" anchor="ctr" anchorCtr="1">
+                <a:spAutoFit/>
+              </a:bodyPr>
+              <a:lstStyle/>
+              <a:p>
+                <a:pPr marL="0" marR="0" lvl="0" indent="0" defTabSz="914400" eaLnBrk="1" fontAlgn="auto" latinLnBrk="0" hangingPunct="1">
+                  <a:lnSpc>
+                    <a:spcPct val="100000"/>
+                  </a:lnSpc>
+                  <a:spcBef>
+                    <a:spcPts val="0"/>
+                  </a:spcBef>
+                  <a:spcAft>
+                    <a:spcPts val="0"/>
+                  </a:spcAft>
+                  <a:buClrTx/>
+                  <a:buSzTx/>
+                  <a:buFontTx/>
+                  <a:buNone/>
+                  <a:tabLst/>
+                  <a:defRPr/>
+                </a:pPr>
+                <a:r>
+                  <a:rPr kumimoji="0" lang="en-US" altLang="zh-CN" sz="1600" i="0" u="none" strike="noStrike" kern="0" cap="none" spc="0" normalizeH="0" baseline="0" noProof="0" dirty="0" err="1">
+                    <a:ln>
+                      <a:noFill/>
+                    </a:ln>
+                    <a:solidFill>
+                      <a:prstClr val="black"/>
+                    </a:solidFill>
+                    <a:effectLst/>
+                    <a:uLnTx/>
+                    <a:uFillTx/>
+                    <a:latin typeface="Times New Roman" panose="02020603050405020304" pitchFamily="18" charset="0"/>
+                    <a:ea typeface="宋体" panose="02010600030101010101" pitchFamily="2" charset="-122"/>
+                  </a:rPr>
+                  <a:t>MsgA</a:t>
+                </a:r>
+                <a:r>
+                  <a:rPr kumimoji="0" lang="zh-CN" altLang="en-US" sz="1600" i="0" u="none" strike="noStrike" kern="0" cap="none" spc="0" normalizeH="0" baseline="0" noProof="0" dirty="0">
+                    <a:ln>
+                      <a:noFill/>
+                    </a:ln>
+                    <a:solidFill>
+                      <a:prstClr val="black"/>
+                    </a:solidFill>
+                    <a:effectLst/>
+                    <a:uLnTx/>
+                    <a:uFillTx/>
+                    <a:latin typeface="Times New Roman" panose="02020603050405020304" pitchFamily="18" charset="0"/>
+                    <a:ea typeface="宋体" panose="02010600030101010101" pitchFamily="2" charset="-122"/>
+                  </a:rPr>
+                  <a:t>：前导</a:t>
+                </a:r>
+                <a:r>
+                  <a:rPr kumimoji="0" lang="en-US" altLang="zh-CN" sz="1600" i="0" u="none" strike="noStrike" kern="0" cap="none" spc="0" normalizeH="0" baseline="0" noProof="0" dirty="0">
+                    <a:ln>
+                      <a:noFill/>
+                    </a:ln>
+                    <a:solidFill>
+                      <a:prstClr val="black"/>
+                    </a:solidFill>
+                    <a:effectLst/>
+                    <a:uLnTx/>
+                    <a:uFillTx/>
+                    <a:latin typeface="Times New Roman" panose="02020603050405020304" pitchFamily="18" charset="0"/>
+                    <a:ea typeface="宋体" panose="02010600030101010101" pitchFamily="2" charset="-122"/>
+                  </a:rPr>
+                  <a:t>+</a:t>
+                </a:r>
+                <a:r>
+                  <a:rPr kumimoji="0" lang="zh-CN" altLang="en-US" sz="1600" i="0" u="none" strike="noStrike" kern="0" cap="none" spc="0" normalizeH="0" baseline="0" noProof="0" dirty="0">
+                    <a:ln>
+                      <a:noFill/>
+                    </a:ln>
+                    <a:solidFill>
+                      <a:prstClr val="black"/>
+                    </a:solidFill>
+                    <a:effectLst/>
+                    <a:uLnTx/>
+                    <a:uFillTx/>
+                    <a:latin typeface="Times New Roman" panose="02020603050405020304" pitchFamily="18" charset="0"/>
+                    <a:ea typeface="宋体" panose="02010600030101010101" pitchFamily="2" charset="-122"/>
+                  </a:rPr>
+                  <a:t>短数据报文</a:t>
+                </a:r>
+              </a:p>
+            </p:txBody>
+          </p:sp>
+          <p:grpSp>
+            <p:nvGrpSpPr>
+              <p:cNvPr id="22" name="组合 21">
+                <a:extLst>
+                  <a:ext uri="{FF2B5EF4-FFF2-40B4-BE49-F238E27FC236}">
+                    <a16:creationId xmlns:a16="http://schemas.microsoft.com/office/drawing/2014/main" id="{B2CC2725-8ADA-5F44-C313-18E51F084799}"/>
+                  </a:ext>
+                </a:extLst>
+              </p:cNvPr>
+              <p:cNvGrpSpPr/>
+              <p:nvPr/>
+            </p:nvGrpSpPr>
+            <p:grpSpPr>
+              <a:xfrm>
+                <a:off x="4464746" y="3103346"/>
+                <a:ext cx="3207753" cy="482703"/>
+                <a:chOff x="6878556" y="2723222"/>
+                <a:chExt cx="3418146" cy="442109"/>
+              </a:xfrm>
+            </p:grpSpPr>
+            <p:cxnSp>
+              <p:nvCxnSpPr>
+                <p:cNvPr id="1048708" name="直接箭头连接符 1048707">
+                  <a:extLst>
+                    <a:ext uri="{FF2B5EF4-FFF2-40B4-BE49-F238E27FC236}">
+                      <a16:creationId xmlns:a16="http://schemas.microsoft.com/office/drawing/2014/main" id="{C5FC8E52-F089-06B4-5C1C-2855A7953070}"/>
+                    </a:ext>
+                  </a:extLst>
+                </p:cNvPr>
+                <p:cNvCxnSpPr>
+                  <a:cxnSpLocks/>
+                </p:cNvCxnSpPr>
+                <p:nvPr/>
+              </p:nvCxnSpPr>
+              <p:spPr>
+                <a:xfrm flipH="1">
+                  <a:off x="6878556" y="3103715"/>
+                  <a:ext cx="3418146" cy="0"/>
+                </a:xfrm>
+                <a:prstGeom prst="straightConnector1">
+                  <a:avLst/>
+                </a:prstGeom>
+                <a:noFill/>
+                <a:ln w="15875" cap="flat" cmpd="sng" algn="ctr">
+                  <a:solidFill>
+                    <a:sysClr val="windowText" lastClr="000000"/>
+                  </a:solidFill>
+                  <a:prstDash val="solid"/>
+                  <a:miter lim="800000"/>
+                  <a:tailEnd type="triangle"/>
+                </a:ln>
+                <a:effectLst/>
+              </p:spPr>
+            </p:cxnSp>
+            <p:sp>
+              <p:nvSpPr>
+                <p:cNvPr id="1048709" name="文本框 1048708">
+                  <a:extLst>
+                    <a:ext uri="{FF2B5EF4-FFF2-40B4-BE49-F238E27FC236}">
+                      <a16:creationId xmlns:a16="http://schemas.microsoft.com/office/drawing/2014/main" id="{77ADABBD-B2EA-2FDE-435C-9D112A237D0B}"/>
+                    </a:ext>
+                  </a:extLst>
+                </p:cNvPr>
+                <p:cNvSpPr txBox="1"/>
+                <p:nvPr/>
+              </p:nvSpPr>
+              <p:spPr>
+                <a:xfrm>
+                  <a:off x="7175077" y="2723222"/>
+                  <a:ext cx="2865119" cy="442109"/>
+                </a:xfrm>
+                <a:prstGeom prst="rect">
+                  <a:avLst/>
+                </a:prstGeom>
+                <a:noFill/>
+                <a:ln w="15875">
+                  <a:noFill/>
+                </a:ln>
+              </p:spPr>
+              <p:txBody>
+                <a:bodyPr wrap="square" rtlCol="0" anchor="ctr" anchorCtr="1">
+                  <a:spAutoFit/>
+                </a:bodyPr>
+                <a:lstStyle/>
+                <a:p>
+                  <a:pPr marL="0" marR="0" lvl="0" indent="0" defTabSz="914400" eaLnBrk="1" fontAlgn="auto" latinLnBrk="0" hangingPunct="1">
+                    <a:lnSpc>
+                      <a:spcPct val="100000"/>
+                    </a:lnSpc>
+                    <a:spcBef>
+                      <a:spcPts val="0"/>
+                    </a:spcBef>
+                    <a:spcAft>
+                      <a:spcPts val="0"/>
+                    </a:spcAft>
+                    <a:buClrTx/>
+                    <a:buSzTx/>
+                    <a:buFontTx/>
+                    <a:buNone/>
+                    <a:tabLst/>
+                    <a:defRPr/>
+                  </a:pPr>
+                  <a:r>
+                    <a:rPr kumimoji="0" lang="en-US" altLang="zh-CN" sz="1600" i="0" u="none" strike="noStrike" kern="0" cap="none" spc="0" normalizeH="0" baseline="0" noProof="0" dirty="0" err="1">
+                      <a:ln>
+                        <a:noFill/>
+                      </a:ln>
+                      <a:solidFill>
+                        <a:prstClr val="black"/>
+                      </a:solidFill>
+                      <a:effectLst/>
+                      <a:uLnTx/>
+                      <a:uFillTx/>
+                      <a:latin typeface="Times New Roman" panose="02020603050405020304" pitchFamily="18" charset="0"/>
+                      <a:ea typeface="宋体" panose="02010600030101010101" pitchFamily="2" charset="-122"/>
+                    </a:rPr>
+                    <a:t>MsgB</a:t>
+                  </a:r>
+                  <a:r>
+                    <a:rPr kumimoji="0" lang="zh-CN" altLang="en-US" sz="1600" i="0" u="none" strike="noStrike" kern="0" cap="none" spc="0" normalizeH="0" baseline="0" noProof="0" dirty="0">
+                      <a:ln>
+                        <a:noFill/>
+                      </a:ln>
+                      <a:solidFill>
+                        <a:prstClr val="black"/>
+                      </a:solidFill>
+                      <a:effectLst/>
+                      <a:uLnTx/>
+                      <a:uFillTx/>
+                      <a:latin typeface="Times New Roman" panose="02020603050405020304" pitchFamily="18" charset="0"/>
+                      <a:ea typeface="宋体" panose="02010600030101010101" pitchFamily="2" charset="-122"/>
+                    </a:rPr>
+                    <a:t>：竞争冲突解决</a:t>
+                  </a:r>
+                </a:p>
+              </p:txBody>
+            </p:sp>
+          </p:grpSp>
+          <p:cxnSp>
+            <p:nvCxnSpPr>
+              <p:cNvPr id="24" name="直接箭头连接符 23">
+                <a:extLst>
+                  <a:ext uri="{FF2B5EF4-FFF2-40B4-BE49-F238E27FC236}">
+                    <a16:creationId xmlns:a16="http://schemas.microsoft.com/office/drawing/2014/main" id="{1BF964D9-2BD4-69E1-05A4-F2E85428BE7D}"/>
+                  </a:ext>
+                </a:extLst>
+              </p:cNvPr>
+              <p:cNvCxnSpPr>
+                <a:cxnSpLocks/>
+              </p:cNvCxnSpPr>
+              <p:nvPr/>
+            </p:nvCxnSpPr>
+            <p:spPr>
+              <a:xfrm>
+                <a:off x="4464747" y="4501279"/>
+                <a:ext cx="3191098" cy="0"/>
+              </a:xfrm>
+              <a:prstGeom prst="straightConnector1">
+                <a:avLst/>
+              </a:prstGeom>
+              <a:noFill/>
+              <a:ln w="15875" cap="flat" cmpd="sng" algn="ctr">
+                <a:solidFill>
+                  <a:sysClr val="windowText" lastClr="000000"/>
+                </a:solidFill>
+                <a:prstDash val="solid"/>
+                <a:miter lim="800000"/>
+                <a:tailEnd type="triangle"/>
+              </a:ln>
+              <a:effectLst/>
+            </p:spPr>
+          </p:cxnSp>
+          <p:sp>
+            <p:nvSpPr>
+              <p:cNvPr id="25" name="文本框 24">
+                <a:extLst>
+                  <a:ext uri="{FF2B5EF4-FFF2-40B4-BE49-F238E27FC236}">
+                    <a16:creationId xmlns:a16="http://schemas.microsoft.com/office/drawing/2014/main" id="{E513D7BA-1B07-5C20-BA0C-44DB3974FB38}"/>
+                  </a:ext>
+                </a:extLst>
+              </p:cNvPr>
+              <p:cNvSpPr txBox="1"/>
+              <p:nvPr/>
+            </p:nvSpPr>
+            <p:spPr>
+              <a:xfrm>
+                <a:off x="4724239" y="4120650"/>
+                <a:ext cx="2688766" cy="482703"/>
+              </a:xfrm>
+              <a:prstGeom prst="rect">
+                <a:avLst/>
+              </a:prstGeom>
+              <a:noFill/>
+              <a:ln w="15875">
+                <a:noFill/>
+              </a:ln>
+            </p:spPr>
+            <p:txBody>
+              <a:bodyPr wrap="square" rtlCol="0" anchor="ctr" anchorCtr="1">
+                <a:spAutoFit/>
+              </a:bodyPr>
+              <a:lstStyle/>
+              <a:p>
+                <a:pPr marL="0" marR="0" lvl="0" indent="0" defTabSz="914400" eaLnBrk="1" fontAlgn="auto" latinLnBrk="0" hangingPunct="1">
+                  <a:lnSpc>
+                    <a:spcPct val="100000"/>
+                  </a:lnSpc>
+                  <a:spcBef>
+                    <a:spcPts val="0"/>
+                  </a:spcBef>
+                  <a:spcAft>
+                    <a:spcPts val="0"/>
+                  </a:spcAft>
+                  <a:buClrTx/>
+                  <a:buSzTx/>
+                  <a:buFontTx/>
+                  <a:buNone/>
+                  <a:tabLst/>
+                  <a:defRPr/>
+                </a:pPr>
+                <a:r>
+                  <a:rPr kumimoji="0" lang="zh-CN" altLang="en-US" sz="1600" i="0" u="none" strike="noStrike" kern="0" cap="none" spc="0" normalizeH="0" baseline="0" noProof="0" dirty="0">
+                    <a:ln>
+                      <a:noFill/>
+                    </a:ln>
+                    <a:solidFill>
+                      <a:prstClr val="black"/>
+                    </a:solidFill>
+                    <a:effectLst/>
+                    <a:uLnTx/>
+                    <a:uFillTx/>
+                    <a:latin typeface="Times New Roman" panose="02020603050405020304" pitchFamily="18" charset="0"/>
+                    <a:ea typeface="宋体" panose="02010600030101010101" pitchFamily="2" charset="-122"/>
+                  </a:rPr>
+                  <a:t>连续短数据报文</a:t>
+                </a:r>
+              </a:p>
+            </p:txBody>
+          </p:sp>
+          <p:grpSp>
+            <p:nvGrpSpPr>
+              <p:cNvPr id="26" name="组合 25">
+                <a:extLst>
+                  <a:ext uri="{FF2B5EF4-FFF2-40B4-BE49-F238E27FC236}">
+                    <a16:creationId xmlns:a16="http://schemas.microsoft.com/office/drawing/2014/main" id="{45C29258-4706-E7D3-DAA1-383ED3EEFBA9}"/>
+                  </a:ext>
+                </a:extLst>
+              </p:cNvPr>
+              <p:cNvGrpSpPr/>
+              <p:nvPr/>
+            </p:nvGrpSpPr>
+            <p:grpSpPr>
+              <a:xfrm>
+                <a:off x="4464746" y="4279905"/>
+                <a:ext cx="3207753" cy="833761"/>
+                <a:chOff x="6878556" y="2592734"/>
+                <a:chExt cx="3418146" cy="763645"/>
+              </a:xfrm>
+            </p:grpSpPr>
+            <p:cxnSp>
+              <p:nvCxnSpPr>
+                <p:cNvPr id="1048706" name="直接箭头连接符 1048705">
+                  <a:extLst>
+                    <a:ext uri="{FF2B5EF4-FFF2-40B4-BE49-F238E27FC236}">
+                      <a16:creationId xmlns:a16="http://schemas.microsoft.com/office/drawing/2014/main" id="{CB3790E5-8E07-27D0-A754-9A30EF774F39}"/>
+                    </a:ext>
+                  </a:extLst>
+                </p:cNvPr>
+                <p:cNvCxnSpPr>
+                  <a:cxnSpLocks/>
+                </p:cNvCxnSpPr>
+                <p:nvPr/>
+              </p:nvCxnSpPr>
+              <p:spPr>
+                <a:xfrm flipH="1">
+                  <a:off x="6878556" y="3103715"/>
+                  <a:ext cx="3418146" cy="0"/>
+                </a:xfrm>
+                <a:prstGeom prst="straightConnector1">
+                  <a:avLst/>
+                </a:prstGeom>
+                <a:noFill/>
+                <a:ln w="15875" cap="flat" cmpd="sng" algn="ctr">
+                  <a:solidFill>
+                    <a:sysClr val="windowText" lastClr="000000"/>
+                  </a:solidFill>
+                  <a:prstDash val="solid"/>
+                  <a:miter lim="800000"/>
+                  <a:tailEnd type="triangle"/>
+                </a:ln>
+                <a:effectLst/>
+              </p:spPr>
+            </p:cxnSp>
+            <p:sp>
+              <p:nvSpPr>
+                <p:cNvPr id="1048707" name="文本框 1048706">
+                  <a:extLst>
+                    <a:ext uri="{FF2B5EF4-FFF2-40B4-BE49-F238E27FC236}">
+                      <a16:creationId xmlns:a16="http://schemas.microsoft.com/office/drawing/2014/main" id="{576D07C3-63FB-5657-AFAF-C1A69973BD4E}"/>
+                    </a:ext>
+                  </a:extLst>
+                </p:cNvPr>
+                <p:cNvSpPr txBox="1"/>
+                <p:nvPr/>
+              </p:nvSpPr>
+              <p:spPr>
+                <a:xfrm>
+                  <a:off x="7175077" y="2592734"/>
+                  <a:ext cx="2865119" cy="763645"/>
+                </a:xfrm>
+                <a:prstGeom prst="rect">
+                  <a:avLst/>
+                </a:prstGeom>
+                <a:noFill/>
+                <a:ln w="15875">
+                  <a:noFill/>
+                </a:ln>
+              </p:spPr>
+              <p:txBody>
+                <a:bodyPr wrap="square" rtlCol="0" anchor="ctr" anchorCtr="1">
+                  <a:spAutoFit/>
+                </a:bodyPr>
+                <a:lstStyle/>
+                <a:p>
+                  <a:pPr marL="0" marR="0" lvl="0" indent="0" defTabSz="914400" eaLnBrk="1" fontAlgn="auto" latinLnBrk="0" hangingPunct="1">
+                    <a:lnSpc>
+                      <a:spcPct val="100000"/>
+                    </a:lnSpc>
+                    <a:spcBef>
+                      <a:spcPts val="0"/>
+                    </a:spcBef>
+                    <a:spcAft>
+                      <a:spcPts val="0"/>
+                    </a:spcAft>
+                    <a:buClrTx/>
+                    <a:buSzTx/>
+                    <a:buFontTx/>
+                    <a:buNone/>
+                    <a:tabLst/>
+                    <a:defRPr/>
+                  </a:pPr>
+                  <a:r>
+                    <a:rPr kumimoji="0" lang="en-US" altLang="zh-CN" sz="1600" i="0" u="none" strike="noStrike" kern="0" cap="none" spc="0" normalizeH="0" baseline="0" noProof="0" dirty="0">
+                      <a:ln>
+                        <a:noFill/>
+                      </a:ln>
+                      <a:solidFill>
+                        <a:prstClr val="black"/>
+                      </a:solidFill>
+                      <a:effectLst/>
+                      <a:uLnTx/>
+                      <a:uFillTx/>
+                      <a:latin typeface="Times New Roman" panose="02020603050405020304" pitchFamily="18" charset="0"/>
+                      <a:ea typeface="宋体" panose="02010600030101010101" pitchFamily="2" charset="-122"/>
+                    </a:rPr>
+                    <a:t>ACK</a:t>
+                  </a:r>
+                  <a:r>
+                    <a:rPr kumimoji="0" lang="zh-CN" altLang="en-US" sz="1600" i="0" u="none" strike="noStrike" kern="0" cap="none" spc="0" normalizeH="0" baseline="0" noProof="0" dirty="0">
+                      <a:ln>
+                        <a:noFill/>
+                      </a:ln>
+                      <a:solidFill>
+                        <a:prstClr val="black"/>
+                      </a:solidFill>
+                      <a:effectLst/>
+                      <a:uLnTx/>
+                      <a:uFillTx/>
+                      <a:latin typeface="Times New Roman" panose="02020603050405020304" pitchFamily="18" charset="0"/>
+                      <a:ea typeface="宋体" panose="02010600030101010101" pitchFamily="2" charset="-122"/>
+                    </a:rPr>
+                    <a:t>或</a:t>
+                  </a:r>
+                  <a:r>
+                    <a:rPr kumimoji="0" lang="en-US" altLang="zh-CN" sz="1600" i="0" u="none" strike="noStrike" kern="0" cap="none" spc="0" normalizeH="0" baseline="0" noProof="0" dirty="0">
+                      <a:ln>
+                        <a:noFill/>
+                      </a:ln>
+                      <a:solidFill>
+                        <a:prstClr val="black"/>
+                      </a:solidFill>
+                      <a:effectLst/>
+                      <a:uLnTx/>
+                      <a:uFillTx/>
+                      <a:latin typeface="Times New Roman" panose="02020603050405020304" pitchFamily="18" charset="0"/>
+                      <a:ea typeface="宋体" panose="02010600030101010101" pitchFamily="2" charset="-122"/>
+                    </a:rPr>
+                    <a:t>NACK</a:t>
+                  </a:r>
+                  <a:r>
+                    <a:rPr kumimoji="0" lang="zh-CN" altLang="en-US" sz="1600" i="0" u="none" strike="noStrike" kern="0" cap="none" spc="0" normalizeH="0" baseline="0" noProof="0" dirty="0">
+                      <a:ln>
+                        <a:noFill/>
+                      </a:ln>
+                      <a:solidFill>
+                        <a:prstClr val="black"/>
+                      </a:solidFill>
+                      <a:effectLst/>
+                      <a:uLnTx/>
+                      <a:uFillTx/>
+                      <a:latin typeface="Times New Roman" panose="02020603050405020304" pitchFamily="18" charset="0"/>
+                      <a:ea typeface="宋体" panose="02010600030101010101" pitchFamily="2" charset="-122"/>
+                    </a:rPr>
+                    <a:t>确认报文</a:t>
+                  </a:r>
+                </a:p>
+              </p:txBody>
+            </p:sp>
+          </p:grpSp>
+          <p:sp>
+            <p:nvSpPr>
+              <p:cNvPr id="27" name="文本框 26">
+                <a:extLst>
+                  <a:ext uri="{FF2B5EF4-FFF2-40B4-BE49-F238E27FC236}">
+                    <a16:creationId xmlns:a16="http://schemas.microsoft.com/office/drawing/2014/main" id="{93E11428-BB33-07C4-AD61-88A8E65F78DB}"/>
+                  </a:ext>
+                </a:extLst>
+              </p:cNvPr>
+              <p:cNvSpPr txBox="1"/>
+              <p:nvPr/>
+            </p:nvSpPr>
+            <p:spPr>
+              <a:xfrm>
+                <a:off x="5642253" y="4827479"/>
+                <a:ext cx="664899" cy="482703"/>
+              </a:xfrm>
+              <a:prstGeom prst="rect">
+                <a:avLst/>
+              </a:prstGeom>
+              <a:noFill/>
+            </p:spPr>
+            <p:txBody>
+              <a:bodyPr wrap="square" rtlCol="0" anchor="ctr" anchorCtr="1">
+                <a:spAutoFit/>
+              </a:bodyPr>
+              <a:lstStyle/>
+              <a:p>
+                <a:pPr marL="0" marR="0" lvl="0" indent="0" algn="ctr" defTabSz="914400" eaLnBrk="1" fontAlgn="auto" latinLnBrk="0" hangingPunct="1">
+                  <a:lnSpc>
+                    <a:spcPct val="100000"/>
+                  </a:lnSpc>
+                  <a:spcBef>
+                    <a:spcPts val="0"/>
+                  </a:spcBef>
+                  <a:spcAft>
+                    <a:spcPts val="0"/>
+                  </a:spcAft>
+                  <a:buClrTx/>
+                  <a:buSzTx/>
+                  <a:buFontTx/>
+                  <a:buNone/>
+                  <a:tabLst/>
+                  <a:defRPr/>
+                </a:pPr>
+                <a:r>
+                  <a:rPr kumimoji="0" lang="en-US" altLang="zh-CN" sz="1600" i="0" u="none" strike="noStrike" kern="0" cap="none" spc="0" normalizeH="0" baseline="0" noProof="0" dirty="0">
+                    <a:ln>
+                      <a:noFill/>
+                    </a:ln>
+                    <a:solidFill>
+                      <a:prstClr val="black"/>
+                    </a:solidFill>
+                    <a:effectLst/>
+                    <a:uLnTx/>
+                    <a:uFillTx/>
+                    <a:latin typeface="宋体" panose="02010600030101010101" pitchFamily="2" charset="-122"/>
+                    <a:ea typeface="宋体" panose="02010600030101010101" pitchFamily="2" charset="-122"/>
+                  </a:rPr>
+                  <a:t>…</a:t>
+                </a:r>
+                <a:endParaRPr kumimoji="0" lang="zh-CN" altLang="en-US" sz="1600" i="0" u="none" strike="noStrike" kern="0" cap="none" spc="0" normalizeH="0" baseline="0" noProof="0" dirty="0">
+                  <a:ln>
+                    <a:noFill/>
+                  </a:ln>
+                  <a:solidFill>
+                    <a:prstClr val="black"/>
+                  </a:solidFill>
+                  <a:effectLst/>
+                  <a:uLnTx/>
+                  <a:uFillTx/>
+                  <a:latin typeface="宋体" panose="02010600030101010101" pitchFamily="2" charset="-122"/>
+                  <a:ea typeface="宋体" panose="02010600030101010101" pitchFamily="2" charset="-122"/>
+                </a:endParaRPr>
+              </a:p>
+            </p:txBody>
+          </p:sp>
+          <p:cxnSp>
+            <p:nvCxnSpPr>
+              <p:cNvPr id="28" name="直接箭头连接符 27">
+                <a:extLst>
+                  <a:ext uri="{FF2B5EF4-FFF2-40B4-BE49-F238E27FC236}">
+                    <a16:creationId xmlns:a16="http://schemas.microsoft.com/office/drawing/2014/main" id="{56D01AEE-1072-C0B3-7F12-98D31D285A75}"/>
+                  </a:ext>
+                </a:extLst>
+              </p:cNvPr>
+              <p:cNvCxnSpPr>
+                <a:cxnSpLocks/>
+              </p:cNvCxnSpPr>
+              <p:nvPr/>
+            </p:nvCxnSpPr>
+            <p:spPr>
+              <a:xfrm>
+                <a:off x="4464747" y="5561463"/>
+                <a:ext cx="3191098" cy="0"/>
+              </a:xfrm>
+              <a:prstGeom prst="straightConnector1">
+                <a:avLst/>
+              </a:prstGeom>
+              <a:noFill/>
+              <a:ln w="15875" cap="flat" cmpd="sng" algn="ctr">
+                <a:solidFill>
+                  <a:sysClr val="windowText" lastClr="000000"/>
+                </a:solidFill>
+                <a:prstDash val="solid"/>
+                <a:miter lim="800000"/>
+                <a:tailEnd type="triangle"/>
+              </a:ln>
+              <a:effectLst/>
+            </p:spPr>
+          </p:cxnSp>
+          <p:sp>
+            <p:nvSpPr>
+              <p:cNvPr id="29" name="文本框 28">
+                <a:extLst>
+                  <a:ext uri="{FF2B5EF4-FFF2-40B4-BE49-F238E27FC236}">
+                    <a16:creationId xmlns:a16="http://schemas.microsoft.com/office/drawing/2014/main" id="{770DAFAA-6E4C-31C3-467D-3E09F6191852}"/>
+                  </a:ext>
+                </a:extLst>
+              </p:cNvPr>
+              <p:cNvSpPr txBox="1"/>
+              <p:nvPr/>
+            </p:nvSpPr>
+            <p:spPr>
+              <a:xfrm>
+                <a:off x="4724239" y="5180834"/>
+                <a:ext cx="2688766" cy="482703"/>
+              </a:xfrm>
+              <a:prstGeom prst="rect">
+                <a:avLst/>
+              </a:prstGeom>
+              <a:noFill/>
+              <a:ln w="15875">
+                <a:noFill/>
+              </a:ln>
+            </p:spPr>
+            <p:txBody>
+              <a:bodyPr wrap="square" rtlCol="0" anchor="ctr" anchorCtr="1">
+                <a:spAutoFit/>
+              </a:bodyPr>
+              <a:lstStyle/>
+              <a:p>
+                <a:pPr marL="0" marR="0" lvl="0" indent="0" defTabSz="914400" eaLnBrk="1" fontAlgn="auto" latinLnBrk="0" hangingPunct="1">
+                  <a:lnSpc>
+                    <a:spcPct val="100000"/>
+                  </a:lnSpc>
+                  <a:spcBef>
+                    <a:spcPts val="0"/>
+                  </a:spcBef>
+                  <a:spcAft>
+                    <a:spcPts val="0"/>
+                  </a:spcAft>
+                  <a:buClrTx/>
+                  <a:buSzTx/>
+                  <a:buFontTx/>
+                  <a:buNone/>
+                  <a:tabLst/>
+                  <a:defRPr/>
+                </a:pPr>
+                <a:r>
+                  <a:rPr kumimoji="0" lang="zh-CN" altLang="en-US" sz="1600" i="0" u="none" strike="noStrike" kern="0" cap="none" spc="0" normalizeH="0" baseline="0" noProof="0" dirty="0">
+                    <a:ln>
+                      <a:noFill/>
+                    </a:ln>
+                    <a:solidFill>
+                      <a:prstClr val="black"/>
+                    </a:solidFill>
+                    <a:effectLst/>
+                    <a:uLnTx/>
+                    <a:uFillTx/>
+                    <a:latin typeface="Times New Roman" panose="02020603050405020304" pitchFamily="18" charset="0"/>
+                    <a:ea typeface="宋体" panose="02010600030101010101" pitchFamily="2" charset="-122"/>
+                  </a:rPr>
+                  <a:t>连续短数据报文</a:t>
+                </a:r>
+              </a:p>
+            </p:txBody>
+          </p:sp>
+          <p:grpSp>
+            <p:nvGrpSpPr>
+              <p:cNvPr id="30" name="组合 29">
+                <a:extLst>
+                  <a:ext uri="{FF2B5EF4-FFF2-40B4-BE49-F238E27FC236}">
+                    <a16:creationId xmlns:a16="http://schemas.microsoft.com/office/drawing/2014/main" id="{7FF12298-4A4A-FD41-0C98-F014A279A05D}"/>
+                  </a:ext>
+                </a:extLst>
+              </p:cNvPr>
+              <p:cNvGrpSpPr/>
+              <p:nvPr/>
+            </p:nvGrpSpPr>
+            <p:grpSpPr>
+              <a:xfrm>
+                <a:off x="4464746" y="5340093"/>
+                <a:ext cx="3207753" cy="833761"/>
+                <a:chOff x="6878556" y="2592737"/>
+                <a:chExt cx="3418146" cy="763645"/>
+              </a:xfrm>
+            </p:grpSpPr>
+            <p:cxnSp>
+              <p:nvCxnSpPr>
+                <p:cNvPr id="1048704" name="直接箭头连接符 1048703">
+                  <a:extLst>
+                    <a:ext uri="{FF2B5EF4-FFF2-40B4-BE49-F238E27FC236}">
+                      <a16:creationId xmlns:a16="http://schemas.microsoft.com/office/drawing/2014/main" id="{33980C8C-F934-C8E7-8A46-8DB4860BC69A}"/>
+                    </a:ext>
+                  </a:extLst>
+                </p:cNvPr>
+                <p:cNvCxnSpPr>
+                  <a:cxnSpLocks/>
+                </p:cNvCxnSpPr>
+                <p:nvPr/>
+              </p:nvCxnSpPr>
+              <p:spPr>
+                <a:xfrm flipH="1">
+                  <a:off x="6878556" y="3103715"/>
+                  <a:ext cx="3418146" cy="0"/>
+                </a:xfrm>
+                <a:prstGeom prst="straightConnector1">
+                  <a:avLst/>
+                </a:prstGeom>
+                <a:noFill/>
+                <a:ln w="15875" cap="flat" cmpd="sng" algn="ctr">
+                  <a:solidFill>
+                    <a:sysClr val="windowText" lastClr="000000"/>
+                  </a:solidFill>
+                  <a:prstDash val="solid"/>
+                  <a:miter lim="800000"/>
+                  <a:tailEnd type="triangle"/>
+                </a:ln>
+                <a:effectLst/>
+              </p:spPr>
+            </p:cxnSp>
+            <p:sp>
+              <p:nvSpPr>
+                <p:cNvPr id="1048705" name="文本框 1048704">
+                  <a:extLst>
+                    <a:ext uri="{FF2B5EF4-FFF2-40B4-BE49-F238E27FC236}">
+                      <a16:creationId xmlns:a16="http://schemas.microsoft.com/office/drawing/2014/main" id="{35EFCCB7-D017-4C10-E46A-A3919DCB7831}"/>
+                    </a:ext>
+                  </a:extLst>
+                </p:cNvPr>
+                <p:cNvSpPr txBox="1"/>
+                <p:nvPr/>
+              </p:nvSpPr>
+              <p:spPr>
+                <a:xfrm>
+                  <a:off x="7175077" y="2592737"/>
+                  <a:ext cx="2865119" cy="763645"/>
+                </a:xfrm>
+                <a:prstGeom prst="rect">
+                  <a:avLst/>
+                </a:prstGeom>
+                <a:noFill/>
+                <a:ln w="15875">
+                  <a:noFill/>
+                </a:ln>
+              </p:spPr>
+              <p:txBody>
+                <a:bodyPr wrap="square" rtlCol="0" anchor="ctr" anchorCtr="1">
+                  <a:spAutoFit/>
+                </a:bodyPr>
+                <a:lstStyle/>
+                <a:p>
+                  <a:pPr marL="0" marR="0" lvl="0" indent="0" defTabSz="914400" eaLnBrk="1" fontAlgn="auto" latinLnBrk="0" hangingPunct="1">
+                    <a:lnSpc>
+                      <a:spcPct val="100000"/>
+                    </a:lnSpc>
+                    <a:spcBef>
+                      <a:spcPts val="0"/>
+                    </a:spcBef>
+                    <a:spcAft>
+                      <a:spcPts val="0"/>
+                    </a:spcAft>
+                    <a:buClrTx/>
+                    <a:buSzTx/>
+                    <a:buFontTx/>
+                    <a:buNone/>
+                    <a:tabLst/>
+                    <a:defRPr/>
+                  </a:pPr>
+                  <a:r>
+                    <a:rPr kumimoji="0" lang="en-US" altLang="zh-CN" sz="1600" i="0" u="none" strike="noStrike" kern="0" cap="none" spc="0" normalizeH="0" baseline="0" noProof="0" dirty="0">
+                      <a:ln>
+                        <a:noFill/>
+                      </a:ln>
+                      <a:solidFill>
+                        <a:prstClr val="black"/>
+                      </a:solidFill>
+                      <a:effectLst/>
+                      <a:uLnTx/>
+                      <a:uFillTx/>
+                      <a:latin typeface="Times New Roman" panose="02020603050405020304" pitchFamily="18" charset="0"/>
+                      <a:ea typeface="宋体" panose="02010600030101010101" pitchFamily="2" charset="-122"/>
+                    </a:rPr>
+                    <a:t>ACK</a:t>
+                  </a:r>
+                  <a:r>
+                    <a:rPr kumimoji="0" lang="zh-CN" altLang="en-US" sz="1600" i="0" u="none" strike="noStrike" kern="0" cap="none" spc="0" normalizeH="0" baseline="0" noProof="0" dirty="0">
+                      <a:ln>
+                        <a:noFill/>
+                      </a:ln>
+                      <a:solidFill>
+                        <a:prstClr val="black"/>
+                      </a:solidFill>
+                      <a:effectLst/>
+                      <a:uLnTx/>
+                      <a:uFillTx/>
+                      <a:latin typeface="Times New Roman" panose="02020603050405020304" pitchFamily="18" charset="0"/>
+                      <a:ea typeface="宋体" panose="02010600030101010101" pitchFamily="2" charset="-122"/>
+                    </a:rPr>
+                    <a:t>或</a:t>
+                  </a:r>
+                  <a:r>
+                    <a:rPr kumimoji="0" lang="en-US" altLang="zh-CN" sz="1600" i="0" u="none" strike="noStrike" kern="0" cap="none" spc="0" normalizeH="0" baseline="0" noProof="0" dirty="0">
+                      <a:ln>
+                        <a:noFill/>
+                      </a:ln>
+                      <a:solidFill>
+                        <a:prstClr val="black"/>
+                      </a:solidFill>
+                      <a:effectLst/>
+                      <a:uLnTx/>
+                      <a:uFillTx/>
+                      <a:latin typeface="Times New Roman" panose="02020603050405020304" pitchFamily="18" charset="0"/>
+                      <a:ea typeface="宋体" panose="02010600030101010101" pitchFamily="2" charset="-122"/>
+                    </a:rPr>
+                    <a:t>NACK</a:t>
+                  </a:r>
+                  <a:r>
+                    <a:rPr kumimoji="0" lang="zh-CN" altLang="en-US" sz="1600" i="0" u="none" strike="noStrike" kern="0" cap="none" spc="0" normalizeH="0" baseline="0" noProof="0" dirty="0">
+                      <a:ln>
+                        <a:noFill/>
+                      </a:ln>
+                      <a:solidFill>
+                        <a:prstClr val="black"/>
+                      </a:solidFill>
+                      <a:effectLst/>
+                      <a:uLnTx/>
+                      <a:uFillTx/>
+                      <a:latin typeface="Times New Roman" panose="02020603050405020304" pitchFamily="18" charset="0"/>
+                      <a:ea typeface="宋体" panose="02010600030101010101" pitchFamily="2" charset="-122"/>
+                    </a:rPr>
+                    <a:t>确认报文</a:t>
+                  </a:r>
+                </a:p>
+              </p:txBody>
+            </p:sp>
+          </p:grpSp>
+          <p:sp>
+            <p:nvSpPr>
+              <p:cNvPr id="31" name="矩形 30">
+                <a:extLst>
+                  <a:ext uri="{FF2B5EF4-FFF2-40B4-BE49-F238E27FC236}">
+                    <a16:creationId xmlns:a16="http://schemas.microsoft.com/office/drawing/2014/main" id="{DE08858C-7D03-2E2E-4C35-69BD44379867}"/>
+                  </a:ext>
+                </a:extLst>
+              </p:cNvPr>
+              <p:cNvSpPr/>
+              <p:nvPr/>
+            </p:nvSpPr>
+            <p:spPr>
+              <a:xfrm>
+                <a:off x="4448092" y="3804890"/>
+                <a:ext cx="1426791" cy="262530"/>
+              </a:xfrm>
+              <a:prstGeom prst="rect">
+                <a:avLst/>
+              </a:prstGeom>
+              <a:noFill/>
+              <a:ln w="19050" cap="flat" cmpd="sng" algn="ctr">
+                <a:noFill/>
+                <a:prstDash val="solid"/>
+                <a:miter lim="800000"/>
+              </a:ln>
+              <a:effectLst/>
+            </p:spPr>
+            <p:txBody>
+              <a:bodyPr rtlCol="0" anchor="ctr"/>
+              <a:lstStyle/>
+              <a:p>
+                <a:pPr marL="0" marR="0" lvl="0" indent="0" defTabSz="914400" eaLnBrk="1" fontAlgn="auto" latinLnBrk="0" hangingPunct="1">
+                  <a:lnSpc>
+                    <a:spcPct val="100000"/>
+                  </a:lnSpc>
+                  <a:spcBef>
+                    <a:spcPts val="0"/>
+                  </a:spcBef>
+                  <a:spcAft>
+                    <a:spcPts val="0"/>
+                  </a:spcAft>
+                  <a:buClrTx/>
+                  <a:buSzTx/>
+                  <a:buFontTx/>
+                  <a:buNone/>
+                  <a:tabLst/>
+                  <a:defRPr/>
+                </a:pPr>
+                <a:r>
+                  <a:rPr kumimoji="0" lang="zh-CN" altLang="en-US" sz="1600" b="1" i="0" u="none" strike="noStrike" kern="0" cap="none" spc="0" normalizeH="0" baseline="0" noProof="0" dirty="0">
+                    <a:ln>
+                      <a:noFill/>
+                    </a:ln>
+                    <a:solidFill>
+                      <a:prstClr val="black"/>
+                    </a:solidFill>
+                    <a:effectLst/>
+                    <a:uLnTx/>
+                    <a:uFillTx/>
+                    <a:latin typeface="Times New Roman" panose="02020603050405020304" pitchFamily="18" charset="0"/>
+                    <a:ea typeface="宋体" panose="02010600030101010101" pitchFamily="2" charset="-122"/>
+                    <a:cs typeface="+mn-cs"/>
+                  </a:rPr>
+                  <a:t>连续传输阶段</a:t>
+                </a:r>
+              </a:p>
+            </p:txBody>
+          </p:sp>
+        </p:grpSp>
+      </p:grpSp>
+    </p:spTree>
+    <p:extLst>
+      <p:ext uri="{BB962C8B-B14F-4D97-AF65-F5344CB8AC3E}">
+        <p14:creationId xmlns:p14="http://schemas.microsoft.com/office/powerpoint/2010/main" val="1767870900"/>
       </p:ext>
     </p:extLst>
   </p:cSld>

--- a/PPT画图.pptx
+++ b/PPT画图.pptx
@@ -211,7 +211,7 @@
           <a:p>
             <a:fld id="{5C1E4601-79B1-425F-B925-3F7BE382BF19}" type="datetimeFigureOut">
               <a:rPr lang="zh-CN" altLang="en-US" smtClean="0"/>
-              <a:t>2026/04/02</a:t>
+              <a:t>2026/04/06</a:t>
             </a:fld>
             <a:endParaRPr lang="zh-CN" altLang="en-US"/>
           </a:p>
@@ -901,7 +901,7 @@
           <a:p>
             <a:fld id="{5D2E9D4A-569D-49DD-9DBB-BF425DFB68D5}" type="datetimeFigureOut">
               <a:rPr lang="zh-CN" altLang="en-US" smtClean="0"/>
-              <a:t>2026/04/02</a:t>
+              <a:t>2026/04/06</a:t>
             </a:fld>
             <a:endParaRPr lang="zh-CN" altLang="en-US"/>
           </a:p>
@@ -1099,7 +1099,7 @@
           <a:p>
             <a:fld id="{5D2E9D4A-569D-49DD-9DBB-BF425DFB68D5}" type="datetimeFigureOut">
               <a:rPr lang="zh-CN" altLang="en-US" smtClean="0"/>
-              <a:t>2026/04/02</a:t>
+              <a:t>2026/04/06</a:t>
             </a:fld>
             <a:endParaRPr lang="zh-CN" altLang="en-US"/>
           </a:p>
@@ -1307,7 +1307,7 @@
           <a:p>
             <a:fld id="{5D2E9D4A-569D-49DD-9DBB-BF425DFB68D5}" type="datetimeFigureOut">
               <a:rPr lang="zh-CN" altLang="en-US" smtClean="0"/>
-              <a:t>2026/04/02</a:t>
+              <a:t>2026/04/06</a:t>
             </a:fld>
             <a:endParaRPr lang="zh-CN" altLang="en-US"/>
           </a:p>
@@ -1505,7 +1505,7 @@
           <a:p>
             <a:fld id="{5D2E9D4A-569D-49DD-9DBB-BF425DFB68D5}" type="datetimeFigureOut">
               <a:rPr lang="zh-CN" altLang="en-US" smtClean="0"/>
-              <a:t>2026/04/02</a:t>
+              <a:t>2026/04/06</a:t>
             </a:fld>
             <a:endParaRPr lang="zh-CN" altLang="en-US"/>
           </a:p>
@@ -1780,7 +1780,7 @@
           <a:p>
             <a:fld id="{5D2E9D4A-569D-49DD-9DBB-BF425DFB68D5}" type="datetimeFigureOut">
               <a:rPr lang="zh-CN" altLang="en-US" smtClean="0"/>
-              <a:t>2026/04/02</a:t>
+              <a:t>2026/04/06</a:t>
             </a:fld>
             <a:endParaRPr lang="zh-CN" altLang="en-US"/>
           </a:p>
@@ -2045,7 +2045,7 @@
           <a:p>
             <a:fld id="{5D2E9D4A-569D-49DD-9DBB-BF425DFB68D5}" type="datetimeFigureOut">
               <a:rPr lang="zh-CN" altLang="en-US" smtClean="0"/>
-              <a:t>2026/04/02</a:t>
+              <a:t>2026/04/06</a:t>
             </a:fld>
             <a:endParaRPr lang="zh-CN" altLang="en-US"/>
           </a:p>
@@ -2457,7 +2457,7 @@
           <a:p>
             <a:fld id="{5D2E9D4A-569D-49DD-9DBB-BF425DFB68D5}" type="datetimeFigureOut">
               <a:rPr lang="zh-CN" altLang="en-US" smtClean="0"/>
-              <a:t>2026/04/02</a:t>
+              <a:t>2026/04/06</a:t>
             </a:fld>
             <a:endParaRPr lang="zh-CN" altLang="en-US"/>
           </a:p>
@@ -2598,7 +2598,7 @@
           <a:p>
             <a:fld id="{5D2E9D4A-569D-49DD-9DBB-BF425DFB68D5}" type="datetimeFigureOut">
               <a:rPr lang="zh-CN" altLang="en-US" smtClean="0"/>
-              <a:t>2026/04/02</a:t>
+              <a:t>2026/04/06</a:t>
             </a:fld>
             <a:endParaRPr lang="zh-CN" altLang="en-US"/>
           </a:p>
@@ -2711,7 +2711,7 @@
           <a:p>
             <a:fld id="{5D2E9D4A-569D-49DD-9DBB-BF425DFB68D5}" type="datetimeFigureOut">
               <a:rPr lang="zh-CN" altLang="en-US" smtClean="0"/>
-              <a:t>2026/04/02</a:t>
+              <a:t>2026/04/06</a:t>
             </a:fld>
             <a:endParaRPr lang="zh-CN" altLang="en-US"/>
           </a:p>
@@ -3022,7 +3022,7 @@
           <a:p>
             <a:fld id="{5D2E9D4A-569D-49DD-9DBB-BF425DFB68D5}" type="datetimeFigureOut">
               <a:rPr lang="zh-CN" altLang="en-US" smtClean="0"/>
-              <a:t>2026/04/02</a:t>
+              <a:t>2026/04/06</a:t>
             </a:fld>
             <a:endParaRPr lang="zh-CN" altLang="en-US"/>
           </a:p>
@@ -3310,7 +3310,7 @@
           <a:p>
             <a:fld id="{5D2E9D4A-569D-49DD-9DBB-BF425DFB68D5}" type="datetimeFigureOut">
               <a:rPr lang="zh-CN" altLang="en-US" smtClean="0"/>
-              <a:t>2026/04/02</a:t>
+              <a:t>2026/04/06</a:t>
             </a:fld>
             <a:endParaRPr lang="zh-CN" altLang="en-US"/>
           </a:p>
@@ -3551,7 +3551,7 @@
           <a:p>
             <a:fld id="{5D2E9D4A-569D-49DD-9DBB-BF425DFB68D5}" type="datetimeFigureOut">
               <a:rPr lang="zh-CN" altLang="en-US" smtClean="0"/>
-              <a:t>2026/04/02</a:t>
+              <a:t>2026/04/06</a:t>
             </a:fld>
             <a:endParaRPr lang="zh-CN" altLang="en-US"/>
           </a:p>
@@ -17605,10 +17605,10 @@
       </p:grpSpPr>
       <p:grpSp>
         <p:nvGrpSpPr>
-          <p:cNvPr id="75" name="组合 74">
+          <p:cNvPr id="2" name="组合 1">
             <a:extLst>
               <a:ext uri="{FF2B5EF4-FFF2-40B4-BE49-F238E27FC236}">
-                <a16:creationId xmlns:a16="http://schemas.microsoft.com/office/drawing/2014/main" id="{FFB5C3E2-469D-875B-435B-DD74815EE9B6}"/>
+                <a16:creationId xmlns:a16="http://schemas.microsoft.com/office/drawing/2014/main" id="{8FA60761-1479-D88A-EC0F-92E8D62FAA22}"/>
               </a:ext>
             </a:extLst>
           </p:cNvPr>
@@ -17619,7 +17619,7 @@
           <a:xfrm>
             <a:off x="281408" y="265292"/>
             <a:ext cx="11255072" cy="2539288"/>
-            <a:chOff x="304268" y="2787512"/>
+            <a:chOff x="281408" y="265292"/>
             <a:chExt cx="11255072" cy="2539288"/>
           </a:xfrm>
         </p:grpSpPr>
@@ -17641,7 +17641,7 @@
           </p:nvCxnSpPr>
           <p:spPr>
             <a:xfrm rot="5400000">
-              <a:off x="8627976" y="2740316"/>
+              <a:off x="8605116" y="218096"/>
               <a:ext cx="674699" cy="2827039"/>
             </a:xfrm>
             <a:prstGeom prst="bentConnector2">
@@ -17669,8 +17669,8 @@
             </a:fontRef>
           </p:style>
         </p:cxnSp>
-        <mc:AlternateContent xmlns:mc="http://schemas.openxmlformats.org/markup-compatibility/2006" xmlns:a14="http://schemas.microsoft.com/office/drawing/2010/main">
-          <mc:Choice Requires="a14">
+        <mc:AlternateContent xmlns:mc="http://schemas.openxmlformats.org/markup-compatibility/2006">
+          <mc:Choice xmlns:a14="http://schemas.microsoft.com/office/drawing/2010/main" Requires="a14">
             <p:sp>
               <p:nvSpPr>
                 <p:cNvPr id="40" name="文本框 39">
@@ -17685,7 +17685,7 @@
               </p:nvSpPr>
               <p:spPr>
                 <a:xfrm>
-                  <a:off x="7646841" y="4133048"/>
+                  <a:off x="7623981" y="1610828"/>
                   <a:ext cx="1083949" cy="369332"/>
                 </a:xfrm>
                 <a:prstGeom prst="rect">
@@ -17753,7 +17753,7 @@
               </p:txBody>
             </p:sp>
           </mc:Choice>
-          <mc:Fallback xmlns="">
+          <mc:Fallback>
             <p:sp>
               <p:nvSpPr>
                 <p:cNvPr id="40" name="文本框 39">
@@ -17770,7 +17770,7 @@
               </p:nvSpPr>
               <p:spPr>
                 <a:xfrm>
-                  <a:off x="7646841" y="4133048"/>
+                  <a:off x="7623981" y="1610828"/>
                   <a:ext cx="1083949" cy="369332"/>
                 </a:xfrm>
                 <a:prstGeom prst="rect">
@@ -17812,10 +17812,10 @@
           </p:nvGrpSpPr>
           <p:grpSpPr>
             <a:xfrm>
-              <a:off x="304268" y="2787512"/>
-              <a:ext cx="11255072" cy="1305973"/>
+              <a:off x="281408" y="265292"/>
+              <a:ext cx="11255072" cy="1605624"/>
               <a:chOff x="304268" y="2787512"/>
-              <a:chExt cx="11255072" cy="1305973"/>
+              <a:chExt cx="11255072" cy="1605624"/>
             </a:xfrm>
           </p:grpSpPr>
           <mc:AlternateContent xmlns:mc="http://schemas.openxmlformats.org/markup-compatibility/2006" xmlns:a14="http://schemas.microsoft.com/office/drawing/2010/main">
@@ -18196,9 +18196,9 @@
             <p:grpSpPr>
               <a:xfrm>
                 <a:off x="304268" y="2932394"/>
-                <a:ext cx="2068616" cy="999077"/>
+                <a:ext cx="2068616" cy="1460742"/>
                 <a:chOff x="4489559" y="2221387"/>
-                <a:chExt cx="2068616" cy="999077"/>
+                <a:chExt cx="2068616" cy="1460742"/>
               </a:xfrm>
             </p:grpSpPr>
             <p:grpSp>
@@ -18431,7 +18431,7 @@
               <p:spPr>
                 <a:xfrm>
                   <a:off x="4489559" y="2851132"/>
-                  <a:ext cx="2068616" cy="369332"/>
+                  <a:ext cx="2068616" cy="830997"/>
                 </a:xfrm>
                 <a:prstGeom prst="rect">
                   <a:avLst/>
@@ -18462,6 +18462,83 @@
                     </a:rPr>
                     <a:t>统一输入向量</a:t>
                   </a:r>
+                  <a:endParaRPr lang="en-US" altLang="zh-CN" dirty="0">
+                    <a:solidFill>
+                      <a:schemeClr val="tx1"/>
+                    </a:solidFill>
+                    <a:latin typeface="Times New Roman" panose="02020603050405020304" pitchFamily="18" charset="0"/>
+                    <a:ea typeface="宋体" panose="02010600030101010101" pitchFamily="2" charset="-122"/>
+                  </a:endParaRPr>
+                </a:p>
+                <a:p>
+                  <a:pPr marL="0" marR="0" lvl="0" indent="0" algn="ctr" defTabSz="914400" rtl="0" eaLnBrk="1" fontAlgn="auto" latinLnBrk="0" hangingPunct="1">
+                    <a:lnSpc>
+                      <a:spcPct val="100000"/>
+                    </a:lnSpc>
+                    <a:spcBef>
+                      <a:spcPts val="0"/>
+                    </a:spcBef>
+                    <a:spcAft>
+                      <a:spcPts val="0"/>
+                    </a:spcAft>
+                    <a:buClrTx/>
+                    <a:buSzTx/>
+                    <a:buFontTx/>
+                    <a:buNone/>
+                    <a:tabLst/>
+                    <a:defRPr/>
+                  </a:pPr>
+                  <a:r>
+                    <a:rPr kumimoji="0" lang="en-US" altLang="zh-CN" sz="1200" b="0" i="0" u="none" strike="noStrike" kern="1200" cap="none" spc="0" normalizeH="0" baseline="0" noProof="0" dirty="0">
+                      <a:ln>
+                        <a:noFill/>
+                      </a:ln>
+                      <a:solidFill>
+                        <a:prstClr val="black"/>
+                      </a:solidFill>
+                      <a:effectLst/>
+                      <a:uLnTx/>
+                      <a:uFillTx/>
+                      <a:latin typeface="Times New Roman" panose="02020603050405020304" pitchFamily="18" charset="0"/>
+                      <a:ea typeface="宋体" panose="02010600030101010101" pitchFamily="2" charset="-122"/>
+                      <a:cs typeface="+mn-cs"/>
+                    </a:rPr>
+                    <a:t>(</a:t>
+                  </a:r>
+                  <a:r>
+                    <a:rPr kumimoji="0" lang="zh-CN" altLang="en-US" sz="1200" b="0" i="0" u="none" strike="noStrike" kern="1200" cap="none" spc="0" normalizeH="0" baseline="0" noProof="0" dirty="0">
+                      <a:ln>
+                        <a:noFill/>
+                      </a:ln>
+                      <a:solidFill>
+                        <a:prstClr val="black"/>
+                      </a:solidFill>
+                      <a:effectLst/>
+                      <a:uLnTx/>
+                      <a:uFillTx/>
+                      <a:latin typeface="Times New Roman" panose="02020603050405020304" pitchFamily="18" charset="0"/>
+                      <a:ea typeface="宋体" panose="02010600030101010101" pitchFamily="2" charset="-122"/>
+                      <a:cs typeface="+mn-cs"/>
+                    </a:rPr>
+                    <a:t>流量、规模、参数等）</a:t>
+                  </a:r>
+                  <a:endParaRPr kumimoji="0" lang="zh-CN" altLang="en-US" sz="1200" b="0" i="0" u="none" strike="noStrike" kern="1200" cap="none" spc="0" normalizeH="0" baseline="0" noProof="0" dirty="0">
+                    <a:ln>
+                      <a:noFill/>
+                    </a:ln>
+                    <a:solidFill>
+                      <a:prstClr val="black"/>
+                    </a:solidFill>
+                    <a:effectLst/>
+                    <a:uLnTx/>
+                    <a:uFillTx/>
+                    <a:latin typeface="等线" panose="020F0502020204030204"/>
+                    <a:ea typeface="等线" panose="02010600030101010101" pitchFamily="2" charset="-122"/>
+                    <a:cs typeface="+mn-cs"/>
+                  </a:endParaRPr>
+                </a:p>
+                <a:p>
+                  <a:pPr algn="ctr"/>
                   <a:endParaRPr lang="zh-CN" altLang="en-US" dirty="0"/>
                 </a:p>
               </p:txBody>
@@ -18583,8 +18660,8 @@
                     </p:nvSpPr>
                     <p:spPr>
                       <a:xfrm>
-                        <a:off x="7347221" y="3260660"/>
-                        <a:ext cx="1076468" cy="369332"/>
+                        <a:off x="7042744" y="3260660"/>
+                        <a:ext cx="1685421" cy="369332"/>
                       </a:xfrm>
                       <a:prstGeom prst="rect">
                         <a:avLst/>
@@ -18608,7 +18685,7 @@
                                 <m:rPr>
                                   <m:nor/>
                                 </m:rPr>
-                                <a:rPr lang="en-US" altLang="zh-CN" i="1" dirty="0">
+                                <a:rPr lang="en-US" altLang="zh-CN" i="1" dirty="0" smtClean="0">
                                   <a:latin typeface="Times New Roman" panose="02020603050405020304" pitchFamily="18" charset="0"/>
                                   <a:ea typeface="宋体" panose="02010600030101010101" pitchFamily="2" charset="-122"/>
                                 </a:rPr>
@@ -18617,7 +18694,7 @@
                               <m:d>
                                 <m:dPr>
                                   <m:ctrlPr>
-                                    <a:rPr lang="en-US" altLang="zh-CN" i="1">
+                                    <a:rPr lang="en-US" altLang="zh-CN" i="1" smtClean="0">
                                       <a:latin typeface="Cambria Math" panose="02040503050406030204" pitchFamily="18" charset="0"/>
                                       <a:ea typeface="Cambria Math" panose="02040503050406030204" pitchFamily="18" charset="0"/>
                                     </a:rPr>
@@ -18633,10 +18710,52 @@
                                   </m:r>
                                 </m:e>
                               </m:d>
+                              <m:r>
+                                <a:rPr lang="en-US" altLang="zh-CN" b="0" i="1" smtClean="0">
+                                  <a:latin typeface="Cambria Math" panose="02040503050406030204" pitchFamily="18" charset="0"/>
+                                  <a:ea typeface="Cambria Math" panose="02040503050406030204" pitchFamily="18" charset="0"/>
+                                </a:rPr>
+                                <m:t>/</m:t>
+                              </m:r>
+                              <m:sSub>
+                                <m:sSubPr>
+                                  <m:ctrlPr>
+                                    <a:rPr lang="en-US" altLang="zh-CN" b="0" i="1" smtClean="0">
+                                      <a:latin typeface="Cambria Math" panose="02040503050406030204" pitchFamily="18" charset="0"/>
+                                      <a:ea typeface="Cambria Math" panose="02040503050406030204" pitchFamily="18" charset="0"/>
+                                    </a:rPr>
+                                  </m:ctrlPr>
+                                </m:sSubPr>
+                                <m:e>
+                                  <m:r>
+                                    <a:rPr lang="en-US" altLang="zh-CN" b="0" i="1" smtClean="0">
+                                      <a:latin typeface="Cambria Math" panose="02040503050406030204" pitchFamily="18" charset="0"/>
+                                      <a:ea typeface="Cambria Math" panose="02040503050406030204" pitchFamily="18" charset="0"/>
+                                    </a:rPr>
+                                    <m:t>𝑓</m:t>
+                                  </m:r>
+                                </m:e>
+                                <m:sub>
+                                  <m:r>
+                                    <a:rPr lang="en-US" altLang="zh-CN" b="0" i="1" smtClean="0">
+                                      <a:latin typeface="Cambria Math" panose="02040503050406030204" pitchFamily="18" charset="0"/>
+                                      <a:ea typeface="Cambria Math" panose="02040503050406030204" pitchFamily="18" charset="0"/>
+                                    </a:rPr>
+                                    <m:t>𝛷</m:t>
+                                  </m:r>
+                                </m:sub>
+                              </m:sSub>
+                              <m:r>
+                                <a:rPr lang="en-US" altLang="zh-CN" b="0" i="1" smtClean="0">
+                                  <a:latin typeface="Cambria Math" panose="02040503050406030204" pitchFamily="18" charset="0"/>
+                                  <a:ea typeface="Cambria Math" panose="02040503050406030204" pitchFamily="18" charset="0"/>
+                                </a:rPr>
+                                <m:t>(⋅)</m:t>
+                              </m:r>
                             </m:oMath>
                           </m:oMathPara>
                         </a14:m>
-                        <a:endParaRPr lang="en-US" altLang="zh-CN" dirty="0">
+                        <a:endParaRPr lang="en-US" altLang="zh-CN" i="1" dirty="0">
                           <a:solidFill>
                             <a:schemeClr val="tx1"/>
                           </a:solidFill>
@@ -18664,8 +18783,8 @@
                     </p:nvSpPr>
                     <p:spPr>
                       <a:xfrm>
-                        <a:off x="7347221" y="3260660"/>
-                        <a:ext cx="1076468" cy="369332"/>
+                        <a:off x="7042744" y="3260660"/>
+                        <a:ext cx="1685421" cy="369332"/>
                       </a:xfrm>
                       <a:prstGeom prst="rect">
                         <a:avLst/>
@@ -18673,7 +18792,7 @@
                       <a:blipFill>
                         <a:blip r:embed="rId6"/>
                         <a:stretch>
-                          <a:fillRect/>
+                          <a:fillRect b="-14754"/>
                         </a:stretch>
                       </a:blipFill>
                     </p:spPr>
@@ -18741,7 +18860,7 @@
                       <a:latin typeface="Times New Roman" panose="02020603050405020304" pitchFamily="18" charset="0"/>
                       <a:ea typeface="宋体" panose="02010600030101010101" pitchFamily="2" charset="-122"/>
                     </a:rPr>
-                    <a:t>代理模型</a:t>
+                    <a:t>预测模型</a:t>
                   </a:r>
                   <a:endParaRPr lang="zh-CN" altLang="en-US" dirty="0"/>
                 </a:p>
@@ -19463,194 +19582,124 @@
             </p:style>
           </p:cxnSp>
         </p:grpSp>
-        <p:grpSp>
-          <p:nvGrpSpPr>
-            <p:cNvPr id="74" name="组合 73">
+        <p:sp>
+          <p:nvSpPr>
+            <p:cNvPr id="33" name="矩形 32">
               <a:extLst>
                 <a:ext uri="{FF2B5EF4-FFF2-40B4-BE49-F238E27FC236}">
-                  <a16:creationId xmlns:a16="http://schemas.microsoft.com/office/drawing/2014/main" id="{B3BE2BE5-C467-31EE-07C1-61D5A7478806}"/>
+                  <a16:creationId xmlns:a16="http://schemas.microsoft.com/office/drawing/2014/main" id="{B7ADD4A7-EF14-8945-045C-BC38ACEC7E8B}"/>
                 </a:ext>
               </a:extLst>
             </p:cNvPr>
-            <p:cNvGrpSpPr/>
+            <p:cNvSpPr/>
             <p:nvPr/>
-          </p:nvGrpSpPr>
-          <p:grpSpPr>
+          </p:nvSpPr>
+          <p:spPr>
             <a:xfrm>
-              <a:off x="4031668" y="4131185"/>
-              <a:ext cx="3800273" cy="1195615"/>
-              <a:chOff x="3821866" y="4557905"/>
-              <a:chExt cx="3800273" cy="1195615"/>
+              <a:off x="4288945" y="1608965"/>
+              <a:ext cx="3240000" cy="720000"/>
             </a:xfrm>
-          </p:grpSpPr>
-          <p:grpSp>
-            <p:nvGrpSpPr>
-              <p:cNvPr id="47" name="组合 46">
-                <a:extLst>
-                  <a:ext uri="{FF2B5EF4-FFF2-40B4-BE49-F238E27FC236}">
-                    <a16:creationId xmlns:a16="http://schemas.microsoft.com/office/drawing/2014/main" id="{A201CC16-C720-5420-96AF-3C326BF9F98E}"/>
-                  </a:ext>
-                </a:extLst>
-              </p:cNvPr>
-              <p:cNvGrpSpPr/>
-              <p:nvPr/>
-            </p:nvGrpSpPr>
-            <p:grpSpPr>
-              <a:xfrm>
-                <a:off x="4102003" y="4557905"/>
-                <a:ext cx="3240000" cy="720000"/>
-                <a:chOff x="3159266" y="5077734"/>
-                <a:chExt cx="3240000" cy="720000"/>
-              </a:xfrm>
-            </p:grpSpPr>
+            <a:prstGeom prst="rect">
+              <a:avLst/>
+            </a:prstGeom>
+            <a:solidFill>
+              <a:srgbClr val="4682B4"/>
+            </a:solidFill>
+            <a:ln w="19050">
+              <a:solidFill>
+                <a:schemeClr val="tx1"/>
+              </a:solidFill>
+            </a:ln>
+          </p:spPr>
+          <p:style>
+            <a:lnRef idx="2">
+              <a:schemeClr val="accent1">
+                <a:shade val="15000"/>
+              </a:schemeClr>
+            </a:lnRef>
+            <a:fillRef idx="1">
+              <a:schemeClr val="accent1"/>
+            </a:fillRef>
+            <a:effectRef idx="0">
+              <a:schemeClr val="accent1"/>
+            </a:effectRef>
+            <a:fontRef idx="minor">
+              <a:schemeClr val="lt1"/>
+            </a:fontRef>
+          </p:style>
+          <p:txBody>
+            <a:bodyPr rtlCol="0" anchor="ctr"/>
+            <a:lstStyle/>
+            <a:p>
+              <a:pPr algn="ctr"/>
+              <a:endParaRPr lang="zh-CN" altLang="en-US">
+                <a:solidFill>
+                  <a:schemeClr val="tx1"/>
+                </a:solidFill>
+                <a:latin typeface="Times New Roman" panose="02020603050405020304" pitchFamily="18" charset="0"/>
+                <a:ea typeface="宋体" panose="02010600030101010101" pitchFamily="2" charset="-122"/>
+              </a:endParaRPr>
+            </a:p>
+          </p:txBody>
+        </p:sp>
+        <mc:AlternateContent xmlns:mc="http://schemas.openxmlformats.org/markup-compatibility/2006">
+          <mc:Choice xmlns:a14="http://schemas.microsoft.com/office/drawing/2010/main" Requires="a14">
             <p:sp>
               <p:nvSpPr>
-                <p:cNvPr id="33" name="矩形 32">
+                <p:cNvPr id="32" name="文本框 31">
                   <a:extLst>
                     <a:ext uri="{FF2B5EF4-FFF2-40B4-BE49-F238E27FC236}">
-                      <a16:creationId xmlns:a16="http://schemas.microsoft.com/office/drawing/2014/main" id="{B7ADD4A7-EF14-8945-045C-BC38ACEC7E8B}"/>
+                      <a16:creationId xmlns:a16="http://schemas.microsoft.com/office/drawing/2014/main" id="{928435EC-927A-FF64-D3E7-230226E80369}"/>
                     </a:ext>
                   </a:extLst>
                 </p:cNvPr>
-                <p:cNvSpPr/>
+                <p:cNvSpPr txBox="1"/>
                 <p:nvPr/>
               </p:nvSpPr>
               <p:spPr>
                 <a:xfrm>
-                  <a:off x="3159266" y="5077734"/>
-                  <a:ext cx="3240000" cy="720000"/>
+                  <a:off x="4475690" y="1771860"/>
+                  <a:ext cx="2866510" cy="394210"/>
                 </a:xfrm>
                 <a:prstGeom prst="rect">
                   <a:avLst/>
                 </a:prstGeom>
-                <a:solidFill>
-                  <a:srgbClr val="4682B4"/>
-                </a:solidFill>
-                <a:ln w="19050">
-                  <a:solidFill>
-                    <a:schemeClr val="tx1"/>
-                  </a:solidFill>
-                </a:ln>
+                <a:noFill/>
               </p:spPr>
-              <p:style>
-                <a:lnRef idx="2">
-                  <a:schemeClr val="accent1">
-                    <a:shade val="15000"/>
-                  </a:schemeClr>
-                </a:lnRef>
-                <a:fillRef idx="1">
-                  <a:schemeClr val="accent1"/>
-                </a:fillRef>
-                <a:effectRef idx="0">
-                  <a:schemeClr val="accent1"/>
-                </a:effectRef>
-                <a:fontRef idx="minor">
-                  <a:schemeClr val="lt1"/>
-                </a:fontRef>
-              </p:style>
               <p:txBody>
-                <a:bodyPr rtlCol="0" anchor="ctr"/>
+                <a:bodyPr wrap="square" rtlCol="0">
+                  <a:spAutoFit/>
+                </a:bodyPr>
                 <a:lstStyle/>
                 <a:p>
                   <a:pPr algn="ctr"/>
-                  <a:endParaRPr lang="zh-CN" altLang="en-US">
-                    <a:solidFill>
-                      <a:schemeClr val="tx1"/>
-                    </a:solidFill>
-                    <a:latin typeface="Times New Roman" panose="02020603050405020304" pitchFamily="18" charset="0"/>
-                    <a:ea typeface="宋体" panose="02010600030101010101" pitchFamily="2" charset="-122"/>
-                  </a:endParaRPr>
-                </a:p>
-              </p:txBody>
-            </p:sp>
-            <mc:AlternateContent xmlns:mc="http://schemas.openxmlformats.org/markup-compatibility/2006" xmlns:a14="http://schemas.microsoft.com/office/drawing/2010/main">
-              <mc:Choice Requires="a14">
-                <p:sp>
-                  <p:nvSpPr>
-                    <p:cNvPr id="32" name="文本框 31">
-                      <a:extLst>
-                        <a:ext uri="{FF2B5EF4-FFF2-40B4-BE49-F238E27FC236}">
-                          <a16:creationId xmlns:a16="http://schemas.microsoft.com/office/drawing/2014/main" id="{928435EC-927A-FF64-D3E7-230226E80369}"/>
-                        </a:ext>
-                      </a:extLst>
-                    </p:cNvPr>
-                    <p:cNvSpPr txBox="1"/>
-                    <p:nvPr/>
-                  </p:nvSpPr>
-                  <p:spPr>
-                    <a:xfrm>
-                      <a:off x="3346011" y="5087510"/>
-                      <a:ext cx="2866510" cy="701089"/>
-                    </a:xfrm>
-                    <a:prstGeom prst="rect">
-                      <a:avLst/>
-                    </a:prstGeom>
-                    <a:noFill/>
-                  </p:spPr>
-                  <p:txBody>
-                    <a:bodyPr wrap="square" rtlCol="0">
-                      <a:spAutoFit/>
-                    </a:bodyPr>
-                    <a:lstStyle/>
-                    <a:p>
-                      <a:pPr algn="ctr"/>
-                      <a14:m>
-                        <m:oMathPara xmlns:m="http://schemas.openxmlformats.org/officeDocument/2006/math">
-                          <m:oMathParaPr>
-                            <m:jc m:val="centerGroup"/>
-                          </m:oMathParaPr>
-                          <m:oMath xmlns:m="http://schemas.openxmlformats.org/officeDocument/2006/math">
-                            <m:sSubSup>
-                              <m:sSubSupPr>
-                                <m:ctrlPr>
-                                  <a:rPr lang="en-US" altLang="zh-CN" i="1" smtClean="0">
-                                    <a:solidFill>
-                                      <a:schemeClr val="bg1"/>
-                                    </a:solidFill>
-                                    <a:latin typeface="Cambria Math" panose="02040503050406030204" pitchFamily="18" charset="0"/>
-                                  </a:rPr>
-                                </m:ctrlPr>
-                              </m:sSubSupPr>
-                              <m:e>
-                                <m:r>
-                                  <m:rPr>
-                                    <m:sty m:val="p"/>
-                                  </m:rPr>
-                                  <a:rPr lang="en-US" altLang="zh-CN" i="1">
-                                    <a:solidFill>
-                                      <a:schemeClr val="bg1"/>
-                                    </a:solidFill>
-                                    <a:latin typeface="Cambria Math" panose="02040503050406030204" pitchFamily="18" charset="0"/>
-                                  </a:rPr>
-                                  <m:t>x</m:t>
-                                </m:r>
-                              </m:e>
-                              <m:sub>
-                                <m:r>
-                                  <m:rPr>
-                                    <m:sty m:val="p"/>
-                                  </m:rPr>
-                                  <a:rPr lang="en-US" altLang="zh-CN" i="1">
-                                    <a:solidFill>
-                                      <a:schemeClr val="bg1"/>
-                                    </a:solidFill>
-                                    <a:latin typeface="Cambria Math" panose="02040503050406030204" pitchFamily="18" charset="0"/>
-                                  </a:rPr>
-                                  <m:t>proto</m:t>
-                                </m:r>
-                              </m:sub>
-                              <m:sup>
-                                <m:r>
-                                  <a:rPr lang="en-US" altLang="zh-CN" i="1">
-                                    <a:solidFill>
-                                      <a:schemeClr val="bg1"/>
-                                    </a:solidFill>
-                                    <a:latin typeface="Cambria Math" panose="02040503050406030204" pitchFamily="18" charset="0"/>
-                                  </a:rPr>
-                                  <m:t>∗</m:t>
-                                </m:r>
-                              </m:sup>
-                            </m:sSubSup>
+                  <a14:m>
+                    <m:oMathPara xmlns:m="http://schemas.openxmlformats.org/officeDocument/2006/math">
+                      <m:oMathParaPr>
+                        <m:jc m:val="centerGroup"/>
+                      </m:oMathParaPr>
+                      <m:oMath xmlns:m="http://schemas.openxmlformats.org/officeDocument/2006/math">
+                        <m:r>
+                          <a:rPr lang="en-US" altLang="zh-CN" i="1">
+                            <a:solidFill>
+                              <a:schemeClr val="bg1"/>
+                            </a:solidFill>
+                            <a:latin typeface="Cambria Math" panose="02040503050406030204" pitchFamily="18" charset="0"/>
+                          </a:rPr>
+                          <m:t>[</m:t>
+                        </m:r>
+                        <m:sSup>
+                          <m:sSupPr>
+                            <m:ctrlPr>
+                              <a:rPr lang="en-US" altLang="zh-CN" i="1">
+                                <a:solidFill>
+                                  <a:schemeClr val="bg1"/>
+                                </a:solidFill>
+                                <a:latin typeface="Cambria Math" panose="02040503050406030204" pitchFamily="18" charset="0"/>
+                              </a:rPr>
+                            </m:ctrlPr>
+                          </m:sSupPr>
+                          <m:e>
                             <m:r>
                               <a:rPr lang="en-US" altLang="zh-CN" i="1">
                                 <a:solidFill>
@@ -19658,10 +19707,164 @@
                                 </a:solidFill>
                                 <a:latin typeface="Cambria Math" panose="02040503050406030204" pitchFamily="18" charset="0"/>
                               </a:rPr>
-                              <m:t>=</m:t>
+                              <m:t>𝑎</m:t>
                             </m:r>
-                            <m:func>
-                              <m:funcPr>
+                          </m:e>
+                          <m:sup>
+                            <m:r>
+                              <a:rPr lang="en-US" altLang="zh-CN" i="1">
+                                <a:solidFill>
+                                  <a:schemeClr val="bg1"/>
+                                </a:solidFill>
+                                <a:latin typeface="Cambria Math" panose="02040503050406030204" pitchFamily="18" charset="0"/>
+                              </a:rPr>
+                              <m:t>∗</m:t>
+                            </m:r>
+                          </m:sup>
+                        </m:sSup>
+                        <m:r>
+                          <a:rPr lang="en-US" altLang="zh-CN" i="1">
+                            <a:solidFill>
+                              <a:schemeClr val="bg1"/>
+                            </a:solidFill>
+                            <a:latin typeface="Cambria Math" panose="02040503050406030204" pitchFamily="18" charset="0"/>
+                          </a:rPr>
+                          <m:t>,</m:t>
+                        </m:r>
+                        <m:sSubSup>
+                          <m:sSubSupPr>
+                            <m:ctrlPr>
+                              <a:rPr lang="en-US" altLang="zh-CN" b="1" i="1">
+                                <a:solidFill>
+                                  <a:schemeClr val="bg1"/>
+                                </a:solidFill>
+                                <a:latin typeface="Cambria Math" panose="02040503050406030204" pitchFamily="18" charset="0"/>
+                              </a:rPr>
+                            </m:ctrlPr>
+                          </m:sSubSupPr>
+                          <m:e>
+                            <m:r>
+                              <a:rPr lang="en-US" altLang="zh-CN" b="1">
+                                <a:solidFill>
+                                  <a:schemeClr val="bg1"/>
+                                </a:solidFill>
+                                <a:latin typeface="Cambria Math" panose="02040503050406030204" pitchFamily="18" charset="0"/>
+                              </a:rPr>
+                              <m:t>𝐱</m:t>
+                            </m:r>
+                          </m:e>
+                          <m:sub>
+                            <m:r>
+                              <a:rPr lang="en-US" altLang="zh-CN" b="1" i="1">
+                                <a:solidFill>
+                                  <a:schemeClr val="bg1"/>
+                                </a:solidFill>
+                                <a:latin typeface="Cambria Math" panose="02040503050406030204" pitchFamily="18" charset="0"/>
+                              </a:rPr>
+                              <m:t>𝒑</m:t>
+                            </m:r>
+                          </m:sub>
+                          <m:sup>
+                            <m:r>
+                              <a:rPr lang="en-US" altLang="zh-CN" b="1">
+                                <a:solidFill>
+                                  <a:schemeClr val="bg1"/>
+                                </a:solidFill>
+                                <a:latin typeface="Cambria Math" panose="02040503050406030204" pitchFamily="18" charset="0"/>
+                              </a:rPr>
+                              <m:t>∗</m:t>
+                            </m:r>
+                          </m:sup>
+                        </m:sSubSup>
+                        <m:r>
+                          <a:rPr lang="en-US" altLang="zh-CN" i="1">
+                            <a:solidFill>
+                              <a:schemeClr val="bg1"/>
+                            </a:solidFill>
+                            <a:latin typeface="Cambria Math" panose="02040503050406030204" pitchFamily="18" charset="0"/>
+                          </a:rPr>
+                          <m:t>]</m:t>
+                        </m:r>
+                        <m:r>
+                          <a:rPr lang="en-US" altLang="zh-CN" i="1">
+                            <a:solidFill>
+                              <a:schemeClr val="bg1"/>
+                            </a:solidFill>
+                            <a:latin typeface="Cambria Math" panose="02040503050406030204" pitchFamily="18" charset="0"/>
+                          </a:rPr>
+                          <m:t>=</m:t>
+                        </m:r>
+                        <m:func>
+                          <m:funcPr>
+                            <m:ctrlPr>
+                              <a:rPr lang="en-US" altLang="zh-CN" i="1">
+                                <a:solidFill>
+                                  <a:schemeClr val="bg1"/>
+                                </a:solidFill>
+                                <a:latin typeface="Cambria Math" panose="02040503050406030204" pitchFamily="18" charset="0"/>
+                              </a:rPr>
+                            </m:ctrlPr>
+                          </m:funcPr>
+                          <m:fName>
+                            <m:r>
+                              <m:rPr>
+                                <m:sty m:val="p"/>
+                              </m:rPr>
+                              <a:rPr lang="en-US" altLang="zh-CN" i="1">
+                                <a:solidFill>
+                                  <a:schemeClr val="bg1"/>
+                                </a:solidFill>
+                                <a:latin typeface="Cambria Math" panose="02040503050406030204" pitchFamily="18" charset="0"/>
+                              </a:rPr>
+                              <m:t>arg</m:t>
+                            </m:r>
+                            <m:r>
+                              <a:rPr lang="en-US" altLang="zh-CN" b="0" i="1" smtClean="0">
+                                <a:solidFill>
+                                  <a:schemeClr val="bg1"/>
+                                </a:solidFill>
+                                <a:latin typeface="Cambria Math" panose="02040503050406030204" pitchFamily="18" charset="0"/>
+                              </a:rPr>
+                              <m:t> </m:t>
+                            </m:r>
+                            <m:r>
+                              <m:rPr>
+                                <m:sty m:val="p"/>
+                              </m:rPr>
+                              <a:rPr lang="en-US" altLang="zh-CN" i="1">
+                                <a:solidFill>
+                                  <a:schemeClr val="bg1"/>
+                                </a:solidFill>
+                                <a:latin typeface="Cambria Math" panose="02040503050406030204" pitchFamily="18" charset="0"/>
+                              </a:rPr>
+                              <m:t>max</m:t>
+                            </m:r>
+                          </m:fName>
+                          <m:e>
+                            <m:r>
+                              <m:rPr>
+                                <m:nor/>
+                              </m:rPr>
+                              <a:rPr lang="en-US" altLang="zh-CN" i="1" dirty="0">
+                                <a:solidFill>
+                                  <a:schemeClr val="bg1"/>
+                                </a:solidFill>
+                                <a:latin typeface="Cambria Math" panose="02040503050406030204" pitchFamily="18" charset="0"/>
+                              </a:rPr>
+                              <m:t>U</m:t>
+                            </m:r>
+                            <m:r>
+                              <a:rPr lang="en-US" altLang="zh-CN" i="1">
+                                <a:solidFill>
+                                  <a:schemeClr val="bg1"/>
+                                </a:solidFill>
+                                <a:latin typeface="Cambria Math" panose="02040503050406030204" pitchFamily="18" charset="0"/>
+                              </a:rPr>
+                              <m:t>(</m:t>
+                            </m:r>
+                            <m:acc>
+                              <m:accPr>
+                                <m:chr m:val="̃"/>
                                 <m:ctrlPr>
                                   <a:rPr lang="en-US" altLang="zh-CN" i="1">
                                     <a:solidFill>
@@ -19670,55 +19873,8 @@
                                     <a:latin typeface="Cambria Math" panose="02040503050406030204" pitchFamily="18" charset="0"/>
                                   </a:rPr>
                                 </m:ctrlPr>
-                              </m:funcPr>
-                              <m:fName>
-                                <m:r>
-                                  <m:rPr>
-                                    <m:sty m:val="p"/>
-                                  </m:rPr>
-                                  <a:rPr lang="en-US" altLang="zh-CN" i="1">
-                                    <a:solidFill>
-                                      <a:schemeClr val="bg1"/>
-                                    </a:solidFill>
-                                    <a:latin typeface="Cambria Math" panose="02040503050406030204" pitchFamily="18" charset="0"/>
-                                  </a:rPr>
-                                  <m:t>arg</m:t>
-                                </m:r>
-                                <m:r>
-                                  <a:rPr lang="en-US" altLang="zh-CN" b="0" i="1" smtClean="0">
-                                    <a:solidFill>
-                                      <a:schemeClr val="bg1"/>
-                                    </a:solidFill>
-                                    <a:latin typeface="Cambria Math" panose="02040503050406030204" pitchFamily="18" charset="0"/>
-                                  </a:rPr>
-                                  <m:t> </m:t>
-                                </m:r>
-                                <m:r>
-                                  <m:rPr>
-                                    <m:sty m:val="p"/>
-                                  </m:rPr>
-                                  <a:rPr lang="en-US" altLang="zh-CN" i="1">
-                                    <a:solidFill>
-                                      <a:schemeClr val="bg1"/>
-                                    </a:solidFill>
-                                    <a:latin typeface="Cambria Math" panose="02040503050406030204" pitchFamily="18" charset="0"/>
-                                  </a:rPr>
-                                  <m:t>max</m:t>
-                                </m:r>
-                              </m:fName>
+                              </m:accPr>
                               <m:e>
-                                <m:r>
-                                  <m:rPr>
-                                    <m:nor/>
-                                  </m:rPr>
-                                  <a:rPr lang="en-US" altLang="zh-CN" i="1" dirty="0">
-                                    <a:solidFill>
-                                      <a:schemeClr val="bg1"/>
-                                    </a:solidFill>
-                                    <a:latin typeface="Cambria Math" panose="02040503050406030204" pitchFamily="18" charset="0"/>
-                                  </a:rPr>
-                                  <m:t>U</m:t>
-                                </m:r>
                                 <m:r>
                                   <a:rPr lang="en-US" altLang="zh-CN" i="1">
                                     <a:solidFill>
@@ -19726,334 +19882,136 @@
                                     </a:solidFill>
                                     <a:latin typeface="Cambria Math" panose="02040503050406030204" pitchFamily="18" charset="0"/>
                                   </a:rPr>
-                                  <m:t>(</m:t>
-                                </m:r>
-                                <m:acc>
-                                  <m:accPr>
-                                    <m:chr m:val="̃"/>
-                                    <m:ctrlPr>
-                                      <a:rPr lang="en-US" altLang="zh-CN" i="1">
-                                        <a:solidFill>
-                                          <a:schemeClr val="bg1"/>
-                                        </a:solidFill>
-                                        <a:latin typeface="Cambria Math" panose="02040503050406030204" pitchFamily="18" charset="0"/>
-                                      </a:rPr>
-                                    </m:ctrlPr>
-                                  </m:accPr>
-                                  <m:e>
-                                    <m:r>
-                                      <a:rPr lang="en-US" altLang="zh-CN" i="1">
-                                        <a:solidFill>
-                                          <a:schemeClr val="bg1"/>
-                                        </a:solidFill>
-                                        <a:latin typeface="Cambria Math" panose="02040503050406030204" pitchFamily="18" charset="0"/>
-                                      </a:rPr>
-                                      <m:t>𝐲</m:t>
-                                    </m:r>
-                                  </m:e>
-                                </m:acc>
-                                <m:r>
-                                  <a:rPr lang="en-US" altLang="zh-CN" i="1">
-                                    <a:solidFill>
-                                      <a:schemeClr val="bg1"/>
-                                    </a:solidFill>
-                                    <a:latin typeface="Cambria Math" panose="02040503050406030204" pitchFamily="18" charset="0"/>
-                                  </a:rPr>
-                                  <m:t>)</m:t>
-                                </m:r>
-                                <m:r>
-                                  <m:rPr>
-                                    <m:nor/>
-                                  </m:rPr>
-                                  <a:rPr lang="zh-CN" altLang="en-US" i="1" dirty="0">
-                                    <a:solidFill>
-                                      <a:schemeClr val="bg1"/>
-                                    </a:solidFill>
-                                    <a:latin typeface="Cambria Math" panose="02040503050406030204" pitchFamily="18" charset="0"/>
-                                  </a:rPr>
-                                  <m:t> </m:t>
+                                  <m:t>𝐲</m:t>
                                 </m:r>
                               </m:e>
-                            </m:func>
-                          </m:oMath>
-                        </m:oMathPara>
-                      </a14:m>
-                      <a:endParaRPr lang="en-US" altLang="zh-CN" i="1" dirty="0">
-                        <a:solidFill>
-                          <a:schemeClr val="bg1"/>
-                        </a:solidFill>
-                        <a:latin typeface="Cambria Math" panose="02040503050406030204" pitchFamily="18" charset="0"/>
-                      </a:endParaRPr>
-                    </a:p>
-                    <a:p>
-                      <a:pPr algn="ctr"/>
-                      <a14:m>
-                        <m:oMath xmlns:m="http://schemas.openxmlformats.org/officeDocument/2006/math">
-                          <m:sSubSup>
-                            <m:sSubSupPr>
-                              <m:ctrlPr>
-                                <a:rPr lang="en-US" altLang="zh-CN" i="1" smtClean="0">
-                                  <a:solidFill>
-                                    <a:schemeClr val="bg1"/>
-                                  </a:solidFill>
-                                  <a:latin typeface="Cambria Math" panose="02040503050406030204" pitchFamily="18" charset="0"/>
-                                </a:rPr>
-                              </m:ctrlPr>
-                            </m:sSubSupPr>
-                            <m:e>
-                              <m:r>
-                                <m:rPr>
-                                  <m:sty m:val="p"/>
-                                </m:rPr>
-                                <a:rPr lang="en-US" altLang="zh-CN" b="0" i="0" smtClean="0">
-                                  <a:solidFill>
-                                    <a:schemeClr val="bg1"/>
-                                  </a:solidFill>
-                                  <a:latin typeface="Cambria Math" panose="02040503050406030204" pitchFamily="18" charset="0"/>
-                                </a:rPr>
-                                <m:t>x</m:t>
-                              </m:r>
-                            </m:e>
-                            <m:sub>
-                              <m:r>
-                                <m:rPr>
-                                  <m:sty m:val="p"/>
-                                </m:rPr>
-                                <a:rPr lang="en-US" altLang="zh-CN" b="0" i="0" smtClean="0">
-                                  <a:solidFill>
-                                    <a:schemeClr val="bg1"/>
-                                  </a:solidFill>
-                                  <a:latin typeface="Cambria Math" panose="02040503050406030204" pitchFamily="18" charset="0"/>
-                                </a:rPr>
-                                <m:t>proto</m:t>
-                              </m:r>
-                            </m:sub>
-                            <m:sup>
-                              <m:r>
-                                <a:rPr lang="en-US" altLang="zh-CN" b="0" i="0" smtClean="0">
-                                  <a:solidFill>
-                                    <a:schemeClr val="bg1"/>
-                                  </a:solidFill>
-                                  <a:latin typeface="Cambria Math" panose="02040503050406030204" pitchFamily="18" charset="0"/>
-                                </a:rPr>
-                                <m:t>∗</m:t>
-                              </m:r>
-                            </m:sup>
-                          </m:sSubSup>
-                          <m:r>
-                            <a:rPr lang="en-US" altLang="zh-CN" b="0" i="1" smtClean="0">
-                              <a:solidFill>
-                                <a:schemeClr val="bg1"/>
-                              </a:solidFill>
-                              <a:latin typeface="Cambria Math" panose="02040503050406030204" pitchFamily="18" charset="0"/>
-                            </a:rPr>
-                            <m:t>=[</m:t>
-                          </m:r>
-                          <m:sSup>
-                            <m:sSupPr>
-                              <m:ctrlPr>
-                                <a:rPr lang="en-US" altLang="zh-CN" i="1" smtClean="0">
-                                  <a:solidFill>
-                                    <a:schemeClr val="bg1"/>
-                                  </a:solidFill>
-                                  <a:latin typeface="Cambria Math" panose="02040503050406030204" pitchFamily="18" charset="0"/>
-                                </a:rPr>
-                              </m:ctrlPr>
-                            </m:sSupPr>
-                            <m:e>
-                              <m:r>
-                                <a:rPr lang="en-US" altLang="zh-CN" b="0" i="1" smtClean="0">
-                                  <a:solidFill>
-                                    <a:schemeClr val="bg1"/>
-                                  </a:solidFill>
-                                  <a:latin typeface="Cambria Math" panose="02040503050406030204" pitchFamily="18" charset="0"/>
-                                </a:rPr>
-                                <m:t>𝑎</m:t>
-                              </m:r>
-                            </m:e>
-                            <m:sup>
-                              <m:r>
-                                <a:rPr lang="en-US" altLang="zh-CN" b="0" i="1" smtClean="0">
-                                  <a:solidFill>
-                                    <a:schemeClr val="bg1"/>
-                                  </a:solidFill>
-                                  <a:latin typeface="Cambria Math" panose="02040503050406030204" pitchFamily="18" charset="0"/>
-                                </a:rPr>
-                                <m:t>∗</m:t>
-                              </m:r>
-                            </m:sup>
-                          </m:sSup>
-                          <m:r>
-                            <a:rPr lang="en-US" altLang="zh-CN" b="0" i="1" smtClean="0">
-                              <a:solidFill>
-                                <a:schemeClr val="bg1"/>
-                              </a:solidFill>
-                              <a:latin typeface="Cambria Math" panose="02040503050406030204" pitchFamily="18" charset="0"/>
-                            </a:rPr>
-                            <m:t>,</m:t>
-                          </m:r>
-                          <m:sSubSup>
-                            <m:sSubSupPr>
-                              <m:ctrlPr>
-                                <a:rPr lang="en-US" altLang="zh-CN" b="1" i="1" smtClean="0">
-                                  <a:solidFill>
-                                    <a:schemeClr val="bg1"/>
-                                  </a:solidFill>
-                                  <a:latin typeface="Cambria Math" panose="02040503050406030204" pitchFamily="18" charset="0"/>
-                                </a:rPr>
-                              </m:ctrlPr>
-                            </m:sSubSupPr>
-                            <m:e>
-                              <m:r>
-                                <a:rPr lang="en-US" altLang="zh-CN" b="1" i="0" smtClean="0">
-                                  <a:solidFill>
-                                    <a:schemeClr val="bg1"/>
-                                  </a:solidFill>
-                                  <a:latin typeface="Cambria Math" panose="02040503050406030204" pitchFamily="18" charset="0"/>
-                                </a:rPr>
-                                <m:t>𝐱</m:t>
-                              </m:r>
-                            </m:e>
-                            <m:sub>
-                              <m:r>
-                                <a:rPr lang="en-US" altLang="zh-CN" b="1" i="1" smtClean="0">
-                                  <a:solidFill>
-                                    <a:schemeClr val="bg1"/>
-                                  </a:solidFill>
-                                  <a:latin typeface="Cambria Math" panose="02040503050406030204" pitchFamily="18" charset="0"/>
-                                </a:rPr>
-                                <m:t>𝒑</m:t>
-                              </m:r>
-                            </m:sub>
-                            <m:sup>
-                              <m:r>
-                                <a:rPr lang="en-US" altLang="zh-CN" b="1" i="0" smtClean="0">
-                                  <a:solidFill>
-                                    <a:schemeClr val="bg1"/>
-                                  </a:solidFill>
-                                  <a:latin typeface="Cambria Math" panose="02040503050406030204" pitchFamily="18" charset="0"/>
-                                </a:rPr>
-                                <m:t>∗</m:t>
-                              </m:r>
-                            </m:sup>
-                          </m:sSubSup>
-                          <m:r>
-                            <a:rPr lang="en-US" altLang="zh-CN" b="0" i="1" smtClean="0">
-                              <a:solidFill>
-                                <a:schemeClr val="bg1"/>
-                              </a:solidFill>
-                              <a:latin typeface="Cambria Math" panose="02040503050406030204" pitchFamily="18" charset="0"/>
-                            </a:rPr>
-                            <m:t>]</m:t>
-                          </m:r>
-                        </m:oMath>
-                      </a14:m>
-                      <a:r>
-                        <a:rPr lang="en-US" altLang="zh-CN" dirty="0">
-                          <a:solidFill>
-                            <a:schemeClr val="bg1"/>
-                          </a:solidFill>
-                          <a:latin typeface="Times New Roman" panose="02020603050405020304" pitchFamily="18" charset="0"/>
-                          <a:ea typeface="宋体" panose="02010600030101010101" pitchFamily="2" charset="-122"/>
-                        </a:rPr>
-                        <a:t> </a:t>
-                      </a:r>
-                    </a:p>
-                  </p:txBody>
-                </p:sp>
-              </mc:Choice>
-              <mc:Fallback xmlns="">
-                <p:sp>
-                  <p:nvSpPr>
-                    <p:cNvPr id="32" name="文本框 31">
-                      <a:extLst>
-                        <a:ext uri="{FF2B5EF4-FFF2-40B4-BE49-F238E27FC236}">
-                          <a16:creationId xmlns:a16="http://schemas.microsoft.com/office/drawing/2014/main" id="{928435EC-927A-FF64-D3E7-230226E80369}"/>
-                        </a:ext>
-                      </a:extLst>
-                    </p:cNvPr>
-                    <p:cNvSpPr txBox="1">
-                      <a:spLocks noRot="1" noChangeAspect="1" noMove="1" noResize="1" noEditPoints="1" noAdjustHandles="1" noChangeArrowheads="1" noChangeShapeType="1" noTextEdit="1"/>
-                    </p:cNvSpPr>
-                    <p:nvPr/>
-                  </p:nvSpPr>
-                  <p:spPr>
-                    <a:xfrm>
-                      <a:off x="3346011" y="5087510"/>
-                      <a:ext cx="2866510" cy="701089"/>
-                    </a:xfrm>
-                    <a:prstGeom prst="rect">
-                      <a:avLst/>
-                    </a:prstGeom>
-                    <a:blipFill>
-                      <a:blip r:embed="rId9"/>
-                      <a:stretch>
-                        <a:fillRect b="-4348"/>
-                      </a:stretch>
-                    </a:blipFill>
-                  </p:spPr>
-                  <p:txBody>
-                    <a:bodyPr/>
-                    <a:lstStyle/>
-                    <a:p>
-                      <a:r>
-                        <a:rPr lang="zh-CN" altLang="en-US">
-                          <a:noFill/>
-                        </a:rPr>
-                        <a:t> </a:t>
-                      </a:r>
-                    </a:p>
-                  </p:txBody>
-                </p:sp>
-              </mc:Fallback>
-            </mc:AlternateContent>
-          </p:grpSp>
-          <p:sp>
-            <p:nvSpPr>
-              <p:cNvPr id="72" name="文本框 71">
-                <a:extLst>
-                  <a:ext uri="{FF2B5EF4-FFF2-40B4-BE49-F238E27FC236}">
-                    <a16:creationId xmlns:a16="http://schemas.microsoft.com/office/drawing/2014/main" id="{FAAC7C90-C68E-7779-BF95-D080DDAEBFE8}"/>
-                  </a:ext>
-                </a:extLst>
-              </p:cNvPr>
-              <p:cNvSpPr txBox="1"/>
-              <p:nvPr/>
-            </p:nvSpPr>
-            <p:spPr>
-              <a:xfrm>
-                <a:off x="3821866" y="5384188"/>
-                <a:ext cx="3800273" cy="369332"/>
-              </a:xfrm>
-              <a:prstGeom prst="rect">
-                <a:avLst/>
-              </a:prstGeom>
-              <a:noFill/>
-            </p:spPr>
-            <p:txBody>
-              <a:bodyPr wrap="square">
-                <a:spAutoFit/>
-              </a:bodyPr>
-              <a:lstStyle>
-                <a:defPPr>
-                  <a:defRPr lang="zh-CN"/>
-                </a:defPPr>
-                <a:lvl1pPr algn="ctr">
-                  <a:defRPr>
-                    <a:latin typeface="Times New Roman" panose="02020603050405020304" pitchFamily="18" charset="0"/>
-                    <a:ea typeface="宋体" panose="02010600030101010101" pitchFamily="2" charset="-122"/>
-                  </a:defRPr>
-                </a:lvl1pPr>
-              </a:lstStyle>
-              <a:p>
-                <a:r>
-                  <a:rPr lang="zh-CN" altLang="en-US" dirty="0"/>
-                  <a:t>选取最优协议与最优协议参数</a:t>
-                </a:r>
-              </a:p>
-            </p:txBody>
-          </p:sp>
-        </p:grpSp>
+                            </m:acc>
+                            <m:r>
+                              <a:rPr lang="en-US" altLang="zh-CN" i="1">
+                                <a:solidFill>
+                                  <a:schemeClr val="bg1"/>
+                                </a:solidFill>
+                                <a:latin typeface="Cambria Math" panose="02040503050406030204" pitchFamily="18" charset="0"/>
+                              </a:rPr>
+                              <m:t>)</m:t>
+                            </m:r>
+                            <m:r>
+                              <m:rPr>
+                                <m:nor/>
+                              </m:rPr>
+                              <a:rPr lang="zh-CN" altLang="en-US" i="1" dirty="0">
+                                <a:solidFill>
+                                  <a:schemeClr val="bg1"/>
+                                </a:solidFill>
+                                <a:latin typeface="Cambria Math" panose="02040503050406030204" pitchFamily="18" charset="0"/>
+                              </a:rPr>
+                              <m:t> </m:t>
+                            </m:r>
+                          </m:e>
+                        </m:func>
+                      </m:oMath>
+                    </m:oMathPara>
+                  </a14:m>
+                  <a:endParaRPr lang="en-US" altLang="zh-CN" i="1" dirty="0">
+                    <a:solidFill>
+                      <a:schemeClr val="bg1"/>
+                    </a:solidFill>
+                    <a:latin typeface="Cambria Math" panose="02040503050406030204" pitchFamily="18" charset="0"/>
+                  </a:endParaRPr>
+                </a:p>
+              </p:txBody>
+            </p:sp>
+          </mc:Choice>
+          <mc:Fallback>
+            <p:sp>
+              <p:nvSpPr>
+                <p:cNvPr id="32" name="文本框 31">
+                  <a:extLst>
+                    <a:ext uri="{FF2B5EF4-FFF2-40B4-BE49-F238E27FC236}">
+                      <a16:creationId xmlns:a16="http://schemas.microsoft.com/office/drawing/2014/main" id="{928435EC-927A-FF64-D3E7-230226E80369}"/>
+                    </a:ext>
+                  </a:extLst>
+                </p:cNvPr>
+                <p:cNvSpPr txBox="1">
+                  <a:spLocks noRot="1" noChangeAspect="1" noMove="1" noResize="1" noEditPoints="1" noAdjustHandles="1" noChangeArrowheads="1" noChangeShapeType="1" noTextEdit="1"/>
+                </p:cNvSpPr>
+                <p:nvPr/>
+              </p:nvSpPr>
+              <p:spPr>
+                <a:xfrm>
+                  <a:off x="4475690" y="1771860"/>
+                  <a:ext cx="2866510" cy="394210"/>
+                </a:xfrm>
+                <a:prstGeom prst="rect">
+                  <a:avLst/>
+                </a:prstGeom>
+                <a:blipFill>
+                  <a:blip r:embed="rId9"/>
+                  <a:stretch>
+                    <a:fillRect b="-10938"/>
+                  </a:stretch>
+                </a:blipFill>
+              </p:spPr>
+              <p:txBody>
+                <a:bodyPr/>
+                <a:lstStyle/>
+                <a:p>
+                  <a:r>
+                    <a:rPr lang="zh-CN" altLang="en-US">
+                      <a:noFill/>
+                    </a:rPr>
+                    <a:t> </a:t>
+                  </a:r>
+                </a:p>
+              </p:txBody>
+            </p:sp>
+          </mc:Fallback>
+        </mc:AlternateContent>
+        <p:sp>
+          <p:nvSpPr>
+            <p:cNvPr id="72" name="文本框 71">
+              <a:extLst>
+                <a:ext uri="{FF2B5EF4-FFF2-40B4-BE49-F238E27FC236}">
+                  <a16:creationId xmlns:a16="http://schemas.microsoft.com/office/drawing/2014/main" id="{FAAC7C90-C68E-7779-BF95-D080DDAEBFE8}"/>
+                </a:ext>
+              </a:extLst>
+            </p:cNvPr>
+            <p:cNvSpPr txBox="1"/>
+            <p:nvPr/>
+          </p:nvSpPr>
+          <p:spPr>
+            <a:xfrm>
+              <a:off x="4008808" y="2435248"/>
+              <a:ext cx="3800273" cy="369332"/>
+            </a:xfrm>
+            <a:prstGeom prst="rect">
+              <a:avLst/>
+            </a:prstGeom>
+            <a:noFill/>
+          </p:spPr>
+          <p:txBody>
+            <a:bodyPr wrap="square">
+              <a:spAutoFit/>
+            </a:bodyPr>
+            <a:lstStyle>
+              <a:defPPr>
+                <a:defRPr lang="zh-CN"/>
+              </a:defPPr>
+              <a:lvl1pPr algn="ctr">
+                <a:defRPr>
+                  <a:latin typeface="Times New Roman" panose="02020603050405020304" pitchFamily="18" charset="0"/>
+                  <a:ea typeface="宋体" panose="02010600030101010101" pitchFamily="2" charset="-122"/>
+                </a:defRPr>
+              </a:lvl1pPr>
+            </a:lstStyle>
+            <a:p>
+              <a:r>
+                <a:rPr lang="zh-CN" altLang="en-US" dirty="0"/>
+                <a:t>选取最优协议与最优协议参数</a:t>
+              </a:r>
+            </a:p>
+          </p:txBody>
+        </p:sp>
       </p:grpSp>
     </p:spTree>
     <p:extLst>

--- a/PPT画图.pptx
+++ b/PPT画图.pptx
@@ -211,7 +211,7 @@
           <a:p>
             <a:fld id="{5C1E4601-79B1-425F-B925-3F7BE382BF19}" type="datetimeFigureOut">
               <a:rPr lang="zh-CN" altLang="en-US" smtClean="0"/>
-              <a:t>2026/04/06</a:t>
+              <a:t>2026/05/24</a:t>
             </a:fld>
             <a:endParaRPr lang="zh-CN" altLang="en-US"/>
           </a:p>
@@ -901,7 +901,7 @@
           <a:p>
             <a:fld id="{5D2E9D4A-569D-49DD-9DBB-BF425DFB68D5}" type="datetimeFigureOut">
               <a:rPr lang="zh-CN" altLang="en-US" smtClean="0"/>
-              <a:t>2026/04/06</a:t>
+              <a:t>2026/05/24</a:t>
             </a:fld>
             <a:endParaRPr lang="zh-CN" altLang="en-US"/>
           </a:p>
@@ -1099,7 +1099,7 @@
           <a:p>
             <a:fld id="{5D2E9D4A-569D-49DD-9DBB-BF425DFB68D5}" type="datetimeFigureOut">
               <a:rPr lang="zh-CN" altLang="en-US" smtClean="0"/>
-              <a:t>2026/04/06</a:t>
+              <a:t>2026/05/24</a:t>
             </a:fld>
             <a:endParaRPr lang="zh-CN" altLang="en-US"/>
           </a:p>
@@ -1307,7 +1307,7 @@
           <a:p>
             <a:fld id="{5D2E9D4A-569D-49DD-9DBB-BF425DFB68D5}" type="datetimeFigureOut">
               <a:rPr lang="zh-CN" altLang="en-US" smtClean="0"/>
-              <a:t>2026/04/06</a:t>
+              <a:t>2026/05/24</a:t>
             </a:fld>
             <a:endParaRPr lang="zh-CN" altLang="en-US"/>
           </a:p>
@@ -1505,7 +1505,7 @@
           <a:p>
             <a:fld id="{5D2E9D4A-569D-49DD-9DBB-BF425DFB68D5}" type="datetimeFigureOut">
               <a:rPr lang="zh-CN" altLang="en-US" smtClean="0"/>
-              <a:t>2026/04/06</a:t>
+              <a:t>2026/05/24</a:t>
             </a:fld>
             <a:endParaRPr lang="zh-CN" altLang="en-US"/>
           </a:p>
@@ -1780,7 +1780,7 @@
           <a:p>
             <a:fld id="{5D2E9D4A-569D-49DD-9DBB-BF425DFB68D5}" type="datetimeFigureOut">
               <a:rPr lang="zh-CN" altLang="en-US" smtClean="0"/>
-              <a:t>2026/04/06</a:t>
+              <a:t>2026/05/24</a:t>
             </a:fld>
             <a:endParaRPr lang="zh-CN" altLang="en-US"/>
           </a:p>
@@ -2045,7 +2045,7 @@
           <a:p>
             <a:fld id="{5D2E9D4A-569D-49DD-9DBB-BF425DFB68D5}" type="datetimeFigureOut">
               <a:rPr lang="zh-CN" altLang="en-US" smtClean="0"/>
-              <a:t>2026/04/06</a:t>
+              <a:t>2026/05/24</a:t>
             </a:fld>
             <a:endParaRPr lang="zh-CN" altLang="en-US"/>
           </a:p>
@@ -2457,7 +2457,7 @@
           <a:p>
             <a:fld id="{5D2E9D4A-569D-49DD-9DBB-BF425DFB68D5}" type="datetimeFigureOut">
               <a:rPr lang="zh-CN" altLang="en-US" smtClean="0"/>
-              <a:t>2026/04/06</a:t>
+              <a:t>2026/05/24</a:t>
             </a:fld>
             <a:endParaRPr lang="zh-CN" altLang="en-US"/>
           </a:p>
@@ -2598,7 +2598,7 @@
           <a:p>
             <a:fld id="{5D2E9D4A-569D-49DD-9DBB-BF425DFB68D5}" type="datetimeFigureOut">
               <a:rPr lang="zh-CN" altLang="en-US" smtClean="0"/>
-              <a:t>2026/04/06</a:t>
+              <a:t>2026/05/24</a:t>
             </a:fld>
             <a:endParaRPr lang="zh-CN" altLang="en-US"/>
           </a:p>
@@ -2711,7 +2711,7 @@
           <a:p>
             <a:fld id="{5D2E9D4A-569D-49DD-9DBB-BF425DFB68D5}" type="datetimeFigureOut">
               <a:rPr lang="zh-CN" altLang="en-US" smtClean="0"/>
-              <a:t>2026/04/06</a:t>
+              <a:t>2026/05/24</a:t>
             </a:fld>
             <a:endParaRPr lang="zh-CN" altLang="en-US"/>
           </a:p>
@@ -3022,7 +3022,7 @@
           <a:p>
             <a:fld id="{5D2E9D4A-569D-49DD-9DBB-BF425DFB68D5}" type="datetimeFigureOut">
               <a:rPr lang="zh-CN" altLang="en-US" smtClean="0"/>
-              <a:t>2026/04/06</a:t>
+              <a:t>2026/05/24</a:t>
             </a:fld>
             <a:endParaRPr lang="zh-CN" altLang="en-US"/>
           </a:p>
@@ -3310,7 +3310,7 @@
           <a:p>
             <a:fld id="{5D2E9D4A-569D-49DD-9DBB-BF425DFB68D5}" type="datetimeFigureOut">
               <a:rPr lang="zh-CN" altLang="en-US" smtClean="0"/>
-              <a:t>2026/04/06</a:t>
+              <a:t>2026/05/24</a:t>
             </a:fld>
             <a:endParaRPr lang="zh-CN" altLang="en-US"/>
           </a:p>
@@ -3551,7 +3551,7 @@
           <a:p>
             <a:fld id="{5D2E9D4A-569D-49DD-9DBB-BF425DFB68D5}" type="datetimeFigureOut">
               <a:rPr lang="zh-CN" altLang="en-US" smtClean="0"/>
-              <a:t>2026/04/06</a:t>
+              <a:t>2026/05/24</a:t>
             </a:fld>
             <a:endParaRPr lang="zh-CN" altLang="en-US"/>
           </a:p>
@@ -7770,10 +7770,10 @@
             <p:nvPr/>
           </p:nvPicPr>
           <p:blipFill>
-            <a:blip r:embed="rId2">
+            <a:blip>
               <a:extLst>
                 <a:ext uri="{96DAC541-7B7A-43D3-8B79-37D633B846F1}">
-                  <asvg:svgBlip xmlns:asvg="http://schemas.microsoft.com/office/drawing/2016/SVG/main" r:embed="rId3"/>
+                  <asvg:svgBlip xmlns:asvg="http://schemas.microsoft.com/office/drawing/2016/SVG/main" r:embed="rId2"/>
                 </a:ext>
               </a:extLst>
             </a:blip>
@@ -7806,10 +7806,10 @@
             <p:nvPr/>
           </p:nvPicPr>
           <p:blipFill>
-            <a:blip r:embed="rId4">
+            <a:blip>
               <a:extLst>
                 <a:ext uri="{96DAC541-7B7A-43D3-8B79-37D633B846F1}">
-                  <asvg:svgBlip xmlns:asvg="http://schemas.microsoft.com/office/drawing/2016/SVG/main" r:embed="rId5"/>
+                  <asvg:svgBlip xmlns:asvg="http://schemas.microsoft.com/office/drawing/2016/SVG/main" r:embed="rId3"/>
                 </a:ext>
               </a:extLst>
             </a:blip>
@@ -7842,10 +7842,10 @@
             <p:nvPr/>
           </p:nvPicPr>
           <p:blipFill>
-            <a:blip r:embed="rId4">
+            <a:blip>
               <a:extLst>
                 <a:ext uri="{96DAC541-7B7A-43D3-8B79-37D633B846F1}">
-                  <asvg:svgBlip xmlns:asvg="http://schemas.microsoft.com/office/drawing/2016/SVG/main" r:embed="rId5"/>
+                  <asvg:svgBlip xmlns:asvg="http://schemas.microsoft.com/office/drawing/2016/SVG/main" r:embed="rId3"/>
                 </a:ext>
               </a:extLst>
             </a:blip>
@@ -7878,10 +7878,10 @@
             <p:nvPr/>
           </p:nvPicPr>
           <p:blipFill>
-            <a:blip r:embed="rId4">
+            <a:blip>
               <a:extLst>
                 <a:ext uri="{96DAC541-7B7A-43D3-8B79-37D633B846F1}">
-                  <asvg:svgBlip xmlns:asvg="http://schemas.microsoft.com/office/drawing/2016/SVG/main" r:embed="rId5"/>
+                  <asvg:svgBlip xmlns:asvg="http://schemas.microsoft.com/office/drawing/2016/SVG/main" r:embed="rId3"/>
                 </a:ext>
               </a:extLst>
             </a:blip>
@@ -7914,10 +7914,10 @@
             <p:nvPr/>
           </p:nvPicPr>
           <p:blipFill>
-            <a:blip r:embed="rId4">
+            <a:blip>
               <a:extLst>
                 <a:ext uri="{96DAC541-7B7A-43D3-8B79-37D633B846F1}">
-                  <asvg:svgBlip xmlns:asvg="http://schemas.microsoft.com/office/drawing/2016/SVG/main" r:embed="rId5"/>
+                  <asvg:svgBlip xmlns:asvg="http://schemas.microsoft.com/office/drawing/2016/SVG/main" r:embed="rId3"/>
                 </a:ext>
               </a:extLst>
             </a:blip>
@@ -7950,10 +7950,10 @@
             <p:nvPr/>
           </p:nvPicPr>
           <p:blipFill>
-            <a:blip r:embed="rId4">
+            <a:blip>
               <a:extLst>
                 <a:ext uri="{96DAC541-7B7A-43D3-8B79-37D633B846F1}">
-                  <asvg:svgBlip xmlns:asvg="http://schemas.microsoft.com/office/drawing/2016/SVG/main" r:embed="rId5"/>
+                  <asvg:svgBlip xmlns:asvg="http://schemas.microsoft.com/office/drawing/2016/SVG/main" r:embed="rId3"/>
                 </a:ext>
               </a:extLst>
             </a:blip>
@@ -7986,10 +7986,10 @@
             <p:nvPr/>
           </p:nvPicPr>
           <p:blipFill>
-            <a:blip r:embed="rId4">
+            <a:blip>
               <a:extLst>
                 <a:ext uri="{96DAC541-7B7A-43D3-8B79-37D633B846F1}">
-                  <asvg:svgBlip xmlns:asvg="http://schemas.microsoft.com/office/drawing/2016/SVG/main" r:embed="rId5"/>
+                  <asvg:svgBlip xmlns:asvg="http://schemas.microsoft.com/office/drawing/2016/SVG/main" r:embed="rId3"/>
                 </a:ext>
               </a:extLst>
             </a:blip>
@@ -8417,10 +8417,10 @@
                 <p:nvPr/>
               </p:nvPicPr>
               <p:blipFill>
-                <a:blip r:embed="rId2">
+                <a:blip>
                   <a:extLst>
                     <a:ext uri="{96DAC541-7B7A-43D3-8B79-37D633B846F1}">
-                      <asvg:svgBlip xmlns:asvg="http://schemas.microsoft.com/office/drawing/2016/SVG/main" r:embed="rId3"/>
+                      <asvg:svgBlip xmlns:asvg="http://schemas.microsoft.com/office/drawing/2016/SVG/main" r:embed="rId2"/>
                     </a:ext>
                   </a:extLst>
                 </a:blip>
@@ -8552,10 +8552,10 @@
                 <p:nvPr/>
               </p:nvPicPr>
               <p:blipFill>
-                <a:blip r:embed="rId4">
+                <a:blip>
                   <a:extLst>
                     <a:ext uri="{96DAC541-7B7A-43D3-8B79-37D633B846F1}">
-                      <asvg:svgBlip xmlns:asvg="http://schemas.microsoft.com/office/drawing/2016/SVG/main" r:embed="rId5"/>
+                      <asvg:svgBlip xmlns:asvg="http://schemas.microsoft.com/office/drawing/2016/SVG/main" r:embed="rId3"/>
                     </a:ext>
                   </a:extLst>
                 </a:blip>
@@ -8695,10 +8695,10 @@
           <p:nvPr/>
         </p:nvPicPr>
         <p:blipFill>
-          <a:blip r:embed="rId6">
+          <a:blip>
             <a:extLst>
               <a:ext uri="{96DAC541-7B7A-43D3-8B79-37D633B846F1}">
-                <asvg:svgBlip xmlns:asvg="http://schemas.microsoft.com/office/drawing/2016/SVG/main" r:embed="rId7"/>
+                <asvg:svgBlip xmlns:asvg="http://schemas.microsoft.com/office/drawing/2016/SVG/main" r:embed="rId4"/>
               </a:ext>
             </a:extLst>
           </a:blip>
@@ -17669,8 +17669,8 @@
             </a:fontRef>
           </p:style>
         </p:cxnSp>
-        <mc:AlternateContent xmlns:mc="http://schemas.openxmlformats.org/markup-compatibility/2006">
-          <mc:Choice xmlns:a14="http://schemas.microsoft.com/office/drawing/2010/main" Requires="a14">
+        <mc:AlternateContent xmlns:mc="http://schemas.openxmlformats.org/markup-compatibility/2006" xmlns:a14="http://schemas.microsoft.com/office/drawing/2010/main">
+          <mc:Choice Requires="a14">
             <p:sp>
               <p:nvSpPr>
                 <p:cNvPr id="40" name="文本框 39">
@@ -17753,7 +17753,7 @@
               </p:txBody>
             </p:sp>
           </mc:Choice>
-          <mc:Fallback>
+          <mc:Fallback xmlns="">
             <p:sp>
               <p:nvSpPr>
                 <p:cNvPr id="40" name="文本框 39">
@@ -17818,8 +17818,8 @@
               <a:chExt cx="11255072" cy="1605624"/>
             </a:xfrm>
           </p:grpSpPr>
-          <mc:AlternateContent xmlns:mc="http://schemas.openxmlformats.org/markup-compatibility/2006" xmlns:a14="http://schemas.microsoft.com/office/drawing/2010/main">
-            <mc:Choice Requires="a14">
+          <mc:AlternateContent xmlns:mc="http://schemas.openxmlformats.org/markup-compatibility/2006">
+            <mc:Choice xmlns:a14="http://schemas.microsoft.com/office/drawing/2010/main" Requires="a14">
               <p:sp>
                 <p:nvSpPr>
                   <p:cNvPr id="13" name="文本框 12">
@@ -17874,17 +17874,14 @@
                             <m:t>=</m:t>
                           </m:r>
                           <m:r>
-                            <m:rPr>
-                              <m:nor/>
-                            </m:rPr>
-                            <a:rPr lang="en-US" altLang="zh-CN" i="1" dirty="0" smtClean="0">
+                            <a:rPr lang="el-GR" altLang="zh-CN" b="0" i="1" smtClean="0">
                               <a:solidFill>
                                 <a:schemeClr val="tx1"/>
                               </a:solidFill>
-                              <a:latin typeface="Times New Roman" panose="02020603050405020304" pitchFamily="18" charset="0"/>
-                              <a:ea typeface="宋体" panose="02010600030101010101" pitchFamily="2" charset="-122"/>
+                              <a:latin typeface="Cambria Math" panose="02040503050406030204" pitchFamily="18" charset="0"/>
+                              <a:ea typeface="Cambria Math" panose="02040503050406030204" pitchFamily="18" charset="0"/>
                             </a:rPr>
-                            <m:t>S</m:t>
+                            <m:t>ℱ</m:t>
                           </m:r>
                           <m:r>
                             <a:rPr lang="en-US" altLang="zh-CN" b="0" i="1" smtClean="0">
@@ -17955,7 +17952,7 @@
                 </p:txBody>
               </p:sp>
             </mc:Choice>
-            <mc:Fallback xmlns="">
+            <mc:Fallback>
               <p:sp>
                 <p:nvSpPr>
                   <p:cNvPr id="13" name="文本框 12">
@@ -17981,7 +17978,7 @@
                   <a:blipFill>
                     <a:blip r:embed="rId3"/>
                     <a:stretch>
-                      <a:fillRect b="-14754"/>
+                      <a:fillRect r="-1896" b="-14754"/>
                     </a:stretch>
                   </a:blipFill>
                 </p:spPr>
@@ -18644,8 +18641,8 @@
                   </a:p>
                 </p:txBody>
               </p:sp>
-              <mc:AlternateContent xmlns:mc="http://schemas.openxmlformats.org/markup-compatibility/2006" xmlns:a14="http://schemas.microsoft.com/office/drawing/2010/main">
-                <mc:Choice Requires="a14">
+              <mc:AlternateContent xmlns:mc="http://schemas.openxmlformats.org/markup-compatibility/2006">
+                <mc:Choice xmlns:a14="http://schemas.microsoft.com/office/drawing/2010/main" Requires="a14">
                   <p:sp>
                     <p:nvSpPr>
                       <p:cNvPr id="19" name="文本框 18">
@@ -18682,69 +18679,12 @@
                             </m:oMathParaPr>
                             <m:oMath xmlns:m="http://schemas.openxmlformats.org/officeDocument/2006/math">
                               <m:r>
-                                <m:rPr>
-                                  <m:nor/>
-                                </m:rPr>
-                                <a:rPr lang="en-US" altLang="zh-CN" i="1" dirty="0" smtClean="0">
-                                  <a:latin typeface="Times New Roman" panose="02020603050405020304" pitchFamily="18" charset="0"/>
-                                  <a:ea typeface="宋体" panose="02010600030101010101" pitchFamily="2" charset="-122"/>
-                                </a:rPr>
-                                <m:t>S</m:t>
-                              </m:r>
-                              <m:d>
-                                <m:dPr>
-                                  <m:ctrlPr>
-                                    <a:rPr lang="en-US" altLang="zh-CN" i="1" smtClean="0">
-                                      <a:latin typeface="Cambria Math" panose="02040503050406030204" pitchFamily="18" charset="0"/>
-                                      <a:ea typeface="Cambria Math" panose="02040503050406030204" pitchFamily="18" charset="0"/>
-                                    </a:rPr>
-                                  </m:ctrlPr>
-                                </m:dPr>
-                                <m:e>
-                                  <m:r>
-                                    <a:rPr lang="en-US" altLang="zh-CN" i="1">
-                                      <a:latin typeface="Cambria Math" panose="02040503050406030204" pitchFamily="18" charset="0"/>
-                                      <a:ea typeface="Cambria Math" panose="02040503050406030204" pitchFamily="18" charset="0"/>
-                                    </a:rPr>
-                                    <m:t>∙</m:t>
-                                  </m:r>
-                                </m:e>
-                              </m:d>
-                              <m:r>
-                                <a:rPr lang="en-US" altLang="zh-CN" b="0" i="1" smtClean="0">
+                                <a:rPr lang="el-GR" altLang="zh-CN" i="1">
                                   <a:latin typeface="Cambria Math" panose="02040503050406030204" pitchFamily="18" charset="0"/>
                                   <a:ea typeface="Cambria Math" panose="02040503050406030204" pitchFamily="18" charset="0"/>
                                 </a:rPr>
-                                <m:t>/</m:t>
+                                <m:t>ℱ</m:t>
                               </m:r>
-                              <m:sSub>
-              